--- a/Dokumentációhoz/Prezentáció/eMenza_AtkariAriella_FarkasDominik.pptx
+++ b/Dokumentációhoz/Prezentáció/eMenza_AtkariAriella_FarkasDominik.pptx
@@ -4,14 +4,30 @@
   <p:sldMasterIdLst>
     <p:sldMasterId id="2147483660" r:id="rId1"/>
   </p:sldMasterIdLst>
+  <p:notesMasterIdLst>
+    <p:notesMasterId r:id="rId22"/>
+  </p:notesMasterIdLst>
   <p:sldIdLst>
     <p:sldId id="256" r:id="rId2"/>
-    <p:sldId id="258" r:id="rId3"/>
-    <p:sldId id="259" r:id="rId4"/>
-    <p:sldId id="260" r:id="rId5"/>
-    <p:sldId id="261" r:id="rId6"/>
-    <p:sldId id="264" r:id="rId7"/>
-    <p:sldId id="263" r:id="rId8"/>
+    <p:sldId id="276" r:id="rId3"/>
+    <p:sldId id="279" r:id="rId4"/>
+    <p:sldId id="280" r:id="rId5"/>
+    <p:sldId id="259" r:id="rId6"/>
+    <p:sldId id="260" r:id="rId7"/>
+    <p:sldId id="261" r:id="rId8"/>
+    <p:sldId id="271" r:id="rId9"/>
+    <p:sldId id="268" r:id="rId10"/>
+    <p:sldId id="267" r:id="rId11"/>
+    <p:sldId id="265" r:id="rId12"/>
+    <p:sldId id="266" r:id="rId13"/>
+    <p:sldId id="269" r:id="rId14"/>
+    <p:sldId id="272" r:id="rId15"/>
+    <p:sldId id="264" r:id="rId16"/>
+    <p:sldId id="274" r:id="rId17"/>
+    <p:sldId id="273" r:id="rId18"/>
+    <p:sldId id="282" r:id="rId19"/>
+    <p:sldId id="283" r:id="rId20"/>
+    <p:sldId id="284" r:id="rId21"/>
   </p:sldIdLst>
   <p:sldSz cx="12192000" cy="6858000"/>
   <p:notesSz cx="6858000" cy="9144000"/>
@@ -110,7 +126,636 @@
       </a:defRPr>
     </a:lvl9pPr>
   </p:defaultTextStyle>
+  <p:extLst>
+    <p:ext uri="{EFAFB233-063F-42B5-8137-9DF3F51BA10A}">
+      <p15:sldGuideLst xmlns:p15="http://schemas.microsoft.com/office/powerpoint/2012/main"/>
+    </p:ext>
+  </p:extLst>
 </p:presentation>
+</file>
+
+<file path=ppt/notesMasters/notesMaster1.xml><?xml version="1.0" encoding="utf-8"?>
+<p:notesMaster xmlns:a="http://schemas.openxmlformats.org/drawingml/2006/main" xmlns:r="http://schemas.openxmlformats.org/officeDocument/2006/relationships" xmlns:p="http://schemas.openxmlformats.org/presentationml/2006/main">
+  <p:cSld>
+    <p:bg>
+      <p:bgRef idx="1001">
+        <a:schemeClr val="bg1"/>
+      </p:bgRef>
+    </p:bg>
+    <p:spTree>
+      <p:nvGrpSpPr>
+        <p:cNvPr id="1" name=""/>
+        <p:cNvGrpSpPr/>
+        <p:nvPr/>
+      </p:nvGrpSpPr>
+      <p:grpSpPr>
+        <a:xfrm>
+          <a:off x="0" y="0"/>
+          <a:ext cx="0" cy="0"/>
+          <a:chOff x="0" y="0"/>
+          <a:chExt cx="0" cy="0"/>
+        </a:xfrm>
+      </p:grpSpPr>
+      <p:sp>
+        <p:nvSpPr>
+          <p:cNvPr id="2" name="Élőfej helye 1"/>
+          <p:cNvSpPr>
+            <a:spLocks noGrp="1"/>
+          </p:cNvSpPr>
+          <p:nvPr>
+            <p:ph type="hdr" sz="quarter"/>
+          </p:nvPr>
+        </p:nvSpPr>
+        <p:spPr>
+          <a:xfrm>
+            <a:off x="0" y="0"/>
+            <a:ext cx="2971800" cy="458788"/>
+          </a:xfrm>
+          <a:prstGeom prst="rect">
+            <a:avLst/>
+          </a:prstGeom>
+        </p:spPr>
+        <p:txBody>
+          <a:bodyPr vert="horz" lIns="91440" tIns="45720" rIns="91440" bIns="45720" rtlCol="0"/>
+          <a:lstStyle>
+            <a:lvl1pPr algn="l">
+              <a:defRPr sz="1200"/>
+            </a:lvl1pPr>
+          </a:lstStyle>
+          <a:p>
+            <a:endParaRPr lang="hu-HU"/>
+          </a:p>
+        </p:txBody>
+      </p:sp>
+      <p:sp>
+        <p:nvSpPr>
+          <p:cNvPr id="3" name="Dátum helye 2"/>
+          <p:cNvSpPr>
+            <a:spLocks noGrp="1"/>
+          </p:cNvSpPr>
+          <p:nvPr>
+            <p:ph type="dt" idx="1"/>
+          </p:nvPr>
+        </p:nvSpPr>
+        <p:spPr>
+          <a:xfrm>
+            <a:off x="3884613" y="0"/>
+            <a:ext cx="2971800" cy="458788"/>
+          </a:xfrm>
+          <a:prstGeom prst="rect">
+            <a:avLst/>
+          </a:prstGeom>
+        </p:spPr>
+        <p:txBody>
+          <a:bodyPr vert="horz" lIns="91440" tIns="45720" rIns="91440" bIns="45720" rtlCol="0"/>
+          <a:lstStyle>
+            <a:lvl1pPr algn="r">
+              <a:defRPr sz="1200"/>
+            </a:lvl1pPr>
+          </a:lstStyle>
+          <a:p>
+            <a:fld id="{CBDB98DA-128E-4364-BF98-E5A8E296E4F2}" type="datetimeFigureOut">
+              <a:rPr lang="hu-HU" smtClean="0"/>
+              <a:t>2026. 03. 03.</a:t>
+            </a:fld>
+            <a:endParaRPr lang="hu-HU"/>
+          </a:p>
+        </p:txBody>
+      </p:sp>
+      <p:sp>
+        <p:nvSpPr>
+          <p:cNvPr id="4" name="Diakép helye 3"/>
+          <p:cNvSpPr>
+            <a:spLocks noGrp="1" noRot="1" noChangeAspect="1"/>
+          </p:cNvSpPr>
+          <p:nvPr>
+            <p:ph type="sldImg" idx="2"/>
+          </p:nvPr>
+        </p:nvSpPr>
+        <p:spPr>
+          <a:xfrm>
+            <a:off x="685800" y="1143000"/>
+            <a:ext cx="5486400" cy="3086100"/>
+          </a:xfrm>
+          <a:prstGeom prst="rect">
+            <a:avLst/>
+          </a:prstGeom>
+          <a:noFill/>
+          <a:ln w="12700">
+            <a:solidFill>
+              <a:prstClr val="black"/>
+            </a:solidFill>
+          </a:ln>
+        </p:spPr>
+        <p:txBody>
+          <a:bodyPr vert="horz" lIns="91440" tIns="45720" rIns="91440" bIns="45720" rtlCol="0" anchor="ctr"/>
+          <a:lstStyle/>
+          <a:p>
+            <a:endParaRPr lang="hu-HU"/>
+          </a:p>
+        </p:txBody>
+      </p:sp>
+      <p:sp>
+        <p:nvSpPr>
+          <p:cNvPr id="5" name="Jegyzetek helye 4"/>
+          <p:cNvSpPr>
+            <a:spLocks noGrp="1"/>
+          </p:cNvSpPr>
+          <p:nvPr>
+            <p:ph type="body" sz="quarter" idx="3"/>
+          </p:nvPr>
+        </p:nvSpPr>
+        <p:spPr>
+          <a:xfrm>
+            <a:off x="685800" y="4400550"/>
+            <a:ext cx="5486400" cy="3600450"/>
+          </a:xfrm>
+          <a:prstGeom prst="rect">
+            <a:avLst/>
+          </a:prstGeom>
+        </p:spPr>
+        <p:txBody>
+          <a:bodyPr vert="horz" lIns="91440" tIns="45720" rIns="91440" bIns="45720" rtlCol="0"/>
+          <a:lstStyle/>
+          <a:p>
+            <a:pPr lvl="0"/>
+            <a:r>
+              <a:rPr lang="hu-HU"/>
+              <a:t>Mintaszöveg szerkesztése</a:t>
+            </a:r>
+          </a:p>
+          <a:p>
+            <a:pPr lvl="1"/>
+            <a:r>
+              <a:rPr lang="hu-HU"/>
+              <a:t>Második szint</a:t>
+            </a:r>
+          </a:p>
+          <a:p>
+            <a:pPr lvl="2"/>
+            <a:r>
+              <a:rPr lang="hu-HU"/>
+              <a:t>Harmadik szint</a:t>
+            </a:r>
+          </a:p>
+          <a:p>
+            <a:pPr lvl="3"/>
+            <a:r>
+              <a:rPr lang="hu-HU"/>
+              <a:t>Negyedik szint</a:t>
+            </a:r>
+          </a:p>
+          <a:p>
+            <a:pPr lvl="4"/>
+            <a:r>
+              <a:rPr lang="hu-HU"/>
+              <a:t>Ötödik szint</a:t>
+            </a:r>
+          </a:p>
+        </p:txBody>
+      </p:sp>
+      <p:sp>
+        <p:nvSpPr>
+          <p:cNvPr id="6" name="Élőláb helye 5"/>
+          <p:cNvSpPr>
+            <a:spLocks noGrp="1"/>
+          </p:cNvSpPr>
+          <p:nvPr>
+            <p:ph type="ftr" sz="quarter" idx="4"/>
+          </p:nvPr>
+        </p:nvSpPr>
+        <p:spPr>
+          <a:xfrm>
+            <a:off x="0" y="8685213"/>
+            <a:ext cx="2971800" cy="458787"/>
+          </a:xfrm>
+          <a:prstGeom prst="rect">
+            <a:avLst/>
+          </a:prstGeom>
+        </p:spPr>
+        <p:txBody>
+          <a:bodyPr vert="horz" lIns="91440" tIns="45720" rIns="91440" bIns="45720" rtlCol="0" anchor="b"/>
+          <a:lstStyle>
+            <a:lvl1pPr algn="l">
+              <a:defRPr sz="1200"/>
+            </a:lvl1pPr>
+          </a:lstStyle>
+          <a:p>
+            <a:endParaRPr lang="hu-HU"/>
+          </a:p>
+        </p:txBody>
+      </p:sp>
+      <p:sp>
+        <p:nvSpPr>
+          <p:cNvPr id="7" name="Dia számának helye 6"/>
+          <p:cNvSpPr>
+            <a:spLocks noGrp="1"/>
+          </p:cNvSpPr>
+          <p:nvPr>
+            <p:ph type="sldNum" sz="quarter" idx="5"/>
+          </p:nvPr>
+        </p:nvSpPr>
+        <p:spPr>
+          <a:xfrm>
+            <a:off x="3884613" y="8685213"/>
+            <a:ext cx="2971800" cy="458787"/>
+          </a:xfrm>
+          <a:prstGeom prst="rect">
+            <a:avLst/>
+          </a:prstGeom>
+        </p:spPr>
+        <p:txBody>
+          <a:bodyPr vert="horz" lIns="91440" tIns="45720" rIns="91440" bIns="45720" rtlCol="0" anchor="b"/>
+          <a:lstStyle>
+            <a:lvl1pPr algn="r">
+              <a:defRPr sz="1200"/>
+            </a:lvl1pPr>
+          </a:lstStyle>
+          <a:p>
+            <a:fld id="{5B73375F-E6FE-4F6E-96C6-6B6BE7EEDE08}" type="slidenum">
+              <a:rPr lang="hu-HU" smtClean="0"/>
+              <a:t>‹#›</a:t>
+            </a:fld>
+            <a:endParaRPr lang="hu-HU"/>
+          </a:p>
+        </p:txBody>
+      </p:sp>
+    </p:spTree>
+    <p:extLst>
+      <p:ext uri="{BB962C8B-B14F-4D97-AF65-F5344CB8AC3E}">
+        <p14:creationId xmlns:p14="http://schemas.microsoft.com/office/powerpoint/2010/main" val="1855202130"/>
+      </p:ext>
+    </p:extLst>
+  </p:cSld>
+  <p:clrMap bg1="lt1" tx1="dk1" bg2="lt2" tx2="dk2" accent1="accent1" accent2="accent2" accent3="accent3" accent4="accent4" accent5="accent5" accent6="accent6" hlink="hlink" folHlink="folHlink"/>
+  <p:notesStyle>
+    <a:lvl1pPr marL="0" algn="l" defTabSz="914400" rtl="0" eaLnBrk="1" latinLnBrk="0" hangingPunct="1">
+      <a:defRPr sz="1200" kern="1200">
+        <a:solidFill>
+          <a:schemeClr val="tx1"/>
+        </a:solidFill>
+        <a:latin typeface="+mn-lt"/>
+        <a:ea typeface="+mn-ea"/>
+        <a:cs typeface="+mn-cs"/>
+      </a:defRPr>
+    </a:lvl1pPr>
+    <a:lvl2pPr marL="457200" algn="l" defTabSz="914400" rtl="0" eaLnBrk="1" latinLnBrk="0" hangingPunct="1">
+      <a:defRPr sz="1200" kern="1200">
+        <a:solidFill>
+          <a:schemeClr val="tx1"/>
+        </a:solidFill>
+        <a:latin typeface="+mn-lt"/>
+        <a:ea typeface="+mn-ea"/>
+        <a:cs typeface="+mn-cs"/>
+      </a:defRPr>
+    </a:lvl2pPr>
+    <a:lvl3pPr marL="914400" algn="l" defTabSz="914400" rtl="0" eaLnBrk="1" latinLnBrk="0" hangingPunct="1">
+      <a:defRPr sz="1200" kern="1200">
+        <a:solidFill>
+          <a:schemeClr val="tx1"/>
+        </a:solidFill>
+        <a:latin typeface="+mn-lt"/>
+        <a:ea typeface="+mn-ea"/>
+        <a:cs typeface="+mn-cs"/>
+      </a:defRPr>
+    </a:lvl3pPr>
+    <a:lvl4pPr marL="1371600" algn="l" defTabSz="914400" rtl="0" eaLnBrk="1" latinLnBrk="0" hangingPunct="1">
+      <a:defRPr sz="1200" kern="1200">
+        <a:solidFill>
+          <a:schemeClr val="tx1"/>
+        </a:solidFill>
+        <a:latin typeface="+mn-lt"/>
+        <a:ea typeface="+mn-ea"/>
+        <a:cs typeface="+mn-cs"/>
+      </a:defRPr>
+    </a:lvl4pPr>
+    <a:lvl5pPr marL="1828800" algn="l" defTabSz="914400" rtl="0" eaLnBrk="1" latinLnBrk="0" hangingPunct="1">
+      <a:defRPr sz="1200" kern="1200">
+        <a:solidFill>
+          <a:schemeClr val="tx1"/>
+        </a:solidFill>
+        <a:latin typeface="+mn-lt"/>
+        <a:ea typeface="+mn-ea"/>
+        <a:cs typeface="+mn-cs"/>
+      </a:defRPr>
+    </a:lvl5pPr>
+    <a:lvl6pPr marL="2286000" algn="l" defTabSz="914400" rtl="0" eaLnBrk="1" latinLnBrk="0" hangingPunct="1">
+      <a:defRPr sz="1200" kern="1200">
+        <a:solidFill>
+          <a:schemeClr val="tx1"/>
+        </a:solidFill>
+        <a:latin typeface="+mn-lt"/>
+        <a:ea typeface="+mn-ea"/>
+        <a:cs typeface="+mn-cs"/>
+      </a:defRPr>
+    </a:lvl6pPr>
+    <a:lvl7pPr marL="2743200" algn="l" defTabSz="914400" rtl="0" eaLnBrk="1" latinLnBrk="0" hangingPunct="1">
+      <a:defRPr sz="1200" kern="1200">
+        <a:solidFill>
+          <a:schemeClr val="tx1"/>
+        </a:solidFill>
+        <a:latin typeface="+mn-lt"/>
+        <a:ea typeface="+mn-ea"/>
+        <a:cs typeface="+mn-cs"/>
+      </a:defRPr>
+    </a:lvl7pPr>
+    <a:lvl8pPr marL="3200400" algn="l" defTabSz="914400" rtl="0" eaLnBrk="1" latinLnBrk="0" hangingPunct="1">
+      <a:defRPr sz="1200" kern="1200">
+        <a:solidFill>
+          <a:schemeClr val="tx1"/>
+        </a:solidFill>
+        <a:latin typeface="+mn-lt"/>
+        <a:ea typeface="+mn-ea"/>
+        <a:cs typeface="+mn-cs"/>
+      </a:defRPr>
+    </a:lvl8pPr>
+    <a:lvl9pPr marL="3657600" algn="l" defTabSz="914400" rtl="0" eaLnBrk="1" latinLnBrk="0" hangingPunct="1">
+      <a:defRPr sz="1200" kern="1200">
+        <a:solidFill>
+          <a:schemeClr val="tx1"/>
+        </a:solidFill>
+        <a:latin typeface="+mn-lt"/>
+        <a:ea typeface="+mn-ea"/>
+        <a:cs typeface="+mn-cs"/>
+      </a:defRPr>
+    </a:lvl9pPr>
+  </p:notesStyle>
+</p:notesMaster>
+</file>
+
+<file path=ppt/notesSlides/notesSlide1.xml><?xml version="1.0" encoding="utf-8"?>
+<p:notes xmlns:a="http://schemas.openxmlformats.org/drawingml/2006/main" xmlns:r="http://schemas.openxmlformats.org/officeDocument/2006/relationships" xmlns:p="http://schemas.openxmlformats.org/presentationml/2006/main">
+  <p:cSld>
+    <p:spTree>
+      <p:nvGrpSpPr>
+        <p:cNvPr id="1" name=""/>
+        <p:cNvGrpSpPr/>
+        <p:nvPr/>
+      </p:nvGrpSpPr>
+      <p:grpSpPr>
+        <a:xfrm>
+          <a:off x="0" y="0"/>
+          <a:ext cx="0" cy="0"/>
+          <a:chOff x="0" y="0"/>
+          <a:chExt cx="0" cy="0"/>
+        </a:xfrm>
+      </p:grpSpPr>
+      <p:sp>
+        <p:nvSpPr>
+          <p:cNvPr id="2" name="Diakép helye 1"/>
+          <p:cNvSpPr>
+            <a:spLocks noGrp="1" noRot="1" noChangeAspect="1"/>
+          </p:cNvSpPr>
+          <p:nvPr>
+            <p:ph type="sldImg"/>
+          </p:nvPr>
+        </p:nvSpPr>
+        <p:spPr/>
+      </p:sp>
+      <p:sp>
+        <p:nvSpPr>
+          <p:cNvPr id="3" name="Jegyzetek helye 2"/>
+          <p:cNvSpPr>
+            <a:spLocks noGrp="1"/>
+          </p:cNvSpPr>
+          <p:nvPr>
+            <p:ph type="body" idx="1"/>
+          </p:nvPr>
+        </p:nvSpPr>
+        <p:spPr/>
+        <p:txBody>
+          <a:bodyPr/>
+          <a:lstStyle/>
+          <a:p>
+            <a:r>
+              <a:rPr lang="hu-HU" dirty="0" err="1"/>
+              <a:t>Githubon</a:t>
+            </a:r>
+            <a:endParaRPr lang="hu-HU" dirty="0"/>
+          </a:p>
+          <a:p>
+            <a:r>
+              <a:rPr lang="hu-HU" dirty="0"/>
+              <a:t>Feladatok megosztása – vegyesen frontend, backend. Közös adatbázis tervezés</a:t>
+            </a:r>
+          </a:p>
+          <a:p>
+            <a:endParaRPr lang="hu-HU" dirty="0"/>
+          </a:p>
+        </p:txBody>
+      </p:sp>
+      <p:sp>
+        <p:nvSpPr>
+          <p:cNvPr id="4" name="Dia számának helye 3"/>
+          <p:cNvSpPr>
+            <a:spLocks noGrp="1"/>
+          </p:cNvSpPr>
+          <p:nvPr>
+            <p:ph type="sldNum" sz="quarter" idx="5"/>
+          </p:nvPr>
+        </p:nvSpPr>
+        <p:spPr/>
+        <p:txBody>
+          <a:bodyPr/>
+          <a:lstStyle/>
+          <a:p>
+            <a:fld id="{5B73375F-E6FE-4F6E-96C6-6B6BE7EEDE08}" type="slidenum">
+              <a:rPr lang="hu-HU" smtClean="0"/>
+              <a:t>15</a:t>
+            </a:fld>
+            <a:endParaRPr lang="hu-HU"/>
+          </a:p>
+        </p:txBody>
+      </p:sp>
+    </p:spTree>
+    <p:extLst>
+      <p:ext uri="{BB962C8B-B14F-4D97-AF65-F5344CB8AC3E}">
+        <p14:creationId xmlns:p14="http://schemas.microsoft.com/office/powerpoint/2010/main" val="2397787546"/>
+      </p:ext>
+    </p:extLst>
+  </p:cSld>
+  <p:clrMapOvr>
+    <a:masterClrMapping/>
+  </p:clrMapOvr>
+</p:notes>
+</file>
+
+<file path=ppt/notesSlides/notesSlide2.xml><?xml version="1.0" encoding="utf-8"?>
+<p:notes xmlns:a="http://schemas.openxmlformats.org/drawingml/2006/main" xmlns:r="http://schemas.openxmlformats.org/officeDocument/2006/relationships" xmlns:p="http://schemas.openxmlformats.org/presentationml/2006/main">
+  <p:cSld>
+    <p:spTree>
+      <p:nvGrpSpPr>
+        <p:cNvPr id="1" name=""/>
+        <p:cNvGrpSpPr/>
+        <p:nvPr/>
+      </p:nvGrpSpPr>
+      <p:grpSpPr>
+        <a:xfrm>
+          <a:off x="0" y="0"/>
+          <a:ext cx="0" cy="0"/>
+          <a:chOff x="0" y="0"/>
+          <a:chExt cx="0" cy="0"/>
+        </a:xfrm>
+      </p:grpSpPr>
+      <p:sp>
+        <p:nvSpPr>
+          <p:cNvPr id="2" name="Diakép helye 1"/>
+          <p:cNvSpPr>
+            <a:spLocks noGrp="1" noRot="1" noChangeAspect="1"/>
+          </p:cNvSpPr>
+          <p:nvPr>
+            <p:ph type="sldImg"/>
+          </p:nvPr>
+        </p:nvSpPr>
+        <p:spPr/>
+      </p:sp>
+      <p:sp>
+        <p:nvSpPr>
+          <p:cNvPr id="3" name="Jegyzetek helye 2"/>
+          <p:cNvSpPr>
+            <a:spLocks noGrp="1"/>
+          </p:cNvSpPr>
+          <p:nvPr>
+            <p:ph type="body" idx="1"/>
+          </p:nvPr>
+        </p:nvSpPr>
+        <p:spPr/>
+        <p:txBody>
+          <a:bodyPr/>
+          <a:lstStyle/>
+          <a:p>
+            <a:r>
+              <a:rPr lang="hu-HU" dirty="0" err="1"/>
+              <a:t>Githubon</a:t>
+            </a:r>
+            <a:endParaRPr lang="hu-HU" dirty="0"/>
+          </a:p>
+          <a:p>
+            <a:r>
+              <a:rPr lang="hu-HU" dirty="0"/>
+              <a:t>Feladatok megosztása – vegyesen frontend, backend. Közös adatbázis tervezés</a:t>
+            </a:r>
+          </a:p>
+        </p:txBody>
+      </p:sp>
+      <p:sp>
+        <p:nvSpPr>
+          <p:cNvPr id="4" name="Dia számának helye 3"/>
+          <p:cNvSpPr>
+            <a:spLocks noGrp="1"/>
+          </p:cNvSpPr>
+          <p:nvPr>
+            <p:ph type="sldNum" sz="quarter" idx="5"/>
+          </p:nvPr>
+        </p:nvSpPr>
+        <p:spPr/>
+        <p:txBody>
+          <a:bodyPr/>
+          <a:lstStyle/>
+          <a:p>
+            <a:fld id="{5B73375F-E6FE-4F6E-96C6-6B6BE7EEDE08}" type="slidenum">
+              <a:rPr lang="hu-HU" smtClean="0"/>
+              <a:t>16</a:t>
+            </a:fld>
+            <a:endParaRPr lang="hu-HU"/>
+          </a:p>
+        </p:txBody>
+      </p:sp>
+    </p:spTree>
+    <p:extLst>
+      <p:ext uri="{BB962C8B-B14F-4D97-AF65-F5344CB8AC3E}">
+        <p14:creationId xmlns:p14="http://schemas.microsoft.com/office/powerpoint/2010/main" val="3931808296"/>
+      </p:ext>
+    </p:extLst>
+  </p:cSld>
+  <p:clrMapOvr>
+    <a:masterClrMapping/>
+  </p:clrMapOvr>
+</p:notes>
+</file>
+
+<file path=ppt/notesSlides/notesSlide3.xml><?xml version="1.0" encoding="utf-8"?>
+<p:notes xmlns:a="http://schemas.openxmlformats.org/drawingml/2006/main" xmlns:r="http://schemas.openxmlformats.org/officeDocument/2006/relationships" xmlns:p="http://schemas.openxmlformats.org/presentationml/2006/main">
+  <p:cSld>
+    <p:spTree>
+      <p:nvGrpSpPr>
+        <p:cNvPr id="1" name=""/>
+        <p:cNvGrpSpPr/>
+        <p:nvPr/>
+      </p:nvGrpSpPr>
+      <p:grpSpPr>
+        <a:xfrm>
+          <a:off x="0" y="0"/>
+          <a:ext cx="0" cy="0"/>
+          <a:chOff x="0" y="0"/>
+          <a:chExt cx="0" cy="0"/>
+        </a:xfrm>
+      </p:grpSpPr>
+      <p:sp>
+        <p:nvSpPr>
+          <p:cNvPr id="2" name="Diakép helye 1"/>
+          <p:cNvSpPr>
+            <a:spLocks noGrp="1" noRot="1" noChangeAspect="1"/>
+          </p:cNvSpPr>
+          <p:nvPr>
+            <p:ph type="sldImg"/>
+          </p:nvPr>
+        </p:nvSpPr>
+        <p:spPr/>
+      </p:sp>
+      <p:sp>
+        <p:nvSpPr>
+          <p:cNvPr id="3" name="Jegyzetek helye 2"/>
+          <p:cNvSpPr>
+            <a:spLocks noGrp="1"/>
+          </p:cNvSpPr>
+          <p:nvPr>
+            <p:ph type="body" idx="1"/>
+          </p:nvPr>
+        </p:nvSpPr>
+        <p:spPr/>
+        <p:txBody>
+          <a:bodyPr/>
+          <a:lstStyle/>
+          <a:p>
+            <a:endParaRPr lang="hu-HU" dirty="0"/>
+          </a:p>
+        </p:txBody>
+      </p:sp>
+      <p:sp>
+        <p:nvSpPr>
+          <p:cNvPr id="4" name="Dia számának helye 3"/>
+          <p:cNvSpPr>
+            <a:spLocks noGrp="1"/>
+          </p:cNvSpPr>
+          <p:nvPr>
+            <p:ph type="sldNum" sz="quarter" idx="5"/>
+          </p:nvPr>
+        </p:nvSpPr>
+        <p:spPr/>
+        <p:txBody>
+          <a:bodyPr/>
+          <a:lstStyle/>
+          <a:p>
+            <a:fld id="{5B73375F-E6FE-4F6E-96C6-6B6BE7EEDE08}" type="slidenum">
+              <a:rPr lang="hu-HU" smtClean="0"/>
+              <a:t>17</a:t>
+            </a:fld>
+            <a:endParaRPr lang="hu-HU"/>
+          </a:p>
+        </p:txBody>
+      </p:sp>
+    </p:spTree>
+    <p:extLst>
+      <p:ext uri="{BB962C8B-B14F-4D97-AF65-F5344CB8AC3E}">
+        <p14:creationId xmlns:p14="http://schemas.microsoft.com/office/powerpoint/2010/main" val="2110455092"/>
+      </p:ext>
+    </p:extLst>
+  </p:cSld>
+  <p:clrMapOvr>
+    <a:masterClrMapping/>
+  </p:clrMapOvr>
+</p:notes>
 </file>
 
 <file path=ppt/slideLayouts/slideLayout1.xml><?xml version="1.0" encoding="utf-8"?>
@@ -3848,7 +4493,7 @@
           <a:p>
             <a:pPr algn="ctr"/>
             <a:r>
-              <a:rPr lang="hu-HU" sz="6000" b="1" dirty="0">
+              <a:rPr lang="hu-HU" sz="4800" b="1" dirty="0">
                 <a:solidFill>
                   <a:schemeClr val="tx1">
                     <a:lumMod val="75000"/>
@@ -3890,7 +4535,7 @@
           <a:p>
             <a:pPr algn="ctr"/>
             <a:r>
-              <a:rPr lang="hu-HU" dirty="0">
+              <a:rPr lang="hu-HU" i="1" dirty="0">
                 <a:solidFill>
                   <a:srgbClr val="BD582C"/>
                 </a:solidFill>
@@ -3928,7 +4573,7 @@
         </p:blipFill>
         <p:spPr>
           <a:xfrm>
-            <a:off x="3698694" y="574906"/>
+            <a:off x="3648359" y="1208890"/>
             <a:ext cx="4895281" cy="1613467"/>
           </a:xfrm>
           <a:prstGeom prst="rect">
@@ -4208,15 +4853,293 @@
           </a:lstStyle>
           <a:p>
             <a:r>
+              <a:rPr lang="hu-HU" sz="1800" b="1" dirty="0"/>
+              <a:t>Készítették: Atkári Ariella</a:t>
+            </a:r>
+            <a:br>
+              <a:rPr lang="hu-HU" sz="1800" b="1" dirty="0"/>
+            </a:br>
+            <a:r>
+              <a:rPr lang="hu-HU" sz="1800" b="1" dirty="0"/>
+              <a:t>	         Farkas Dominik</a:t>
+            </a:r>
+          </a:p>
+        </p:txBody>
+      </p:sp>
+      <p:sp>
+        <p:nvSpPr>
+          <p:cNvPr id="6" name="Alcím 2">
+            <a:extLst>
+              <a:ext uri="{FF2B5EF4-FFF2-40B4-BE49-F238E27FC236}">
+                <a16:creationId xmlns:a16="http://schemas.microsoft.com/office/drawing/2014/main" id="{96003F0B-BE7C-47FF-933B-026483BC2ADF}"/>
+              </a:ext>
+            </a:extLst>
+          </p:cNvPr>
+          <p:cNvSpPr txBox="1">
+            <a:spLocks/>
+          </p:cNvSpPr>
+          <p:nvPr/>
+        </p:nvSpPr>
+        <p:spPr>
+          <a:xfrm>
+            <a:off x="10588609" y="5936714"/>
+            <a:ext cx="1480604" cy="571500"/>
+          </a:xfrm>
+          <a:prstGeom prst="rect">
+            <a:avLst/>
+          </a:prstGeom>
+        </p:spPr>
+        <p:txBody>
+          <a:bodyPr vert="horz" lIns="91440" tIns="45720" rIns="91440" bIns="45720" rtlCol="0">
+            <a:normAutofit/>
+          </a:bodyPr>
+          <a:lstStyle>
+            <a:lvl1pPr marL="0" indent="0" algn="l" defTabSz="914400" rtl="0" eaLnBrk="1" latinLnBrk="0" hangingPunct="1">
+              <a:lnSpc>
+                <a:spcPct val="90000"/>
+              </a:lnSpc>
+              <a:spcBef>
+                <a:spcPts val="1200"/>
+              </a:spcBef>
+              <a:spcAft>
+                <a:spcPts val="200"/>
+              </a:spcAft>
+              <a:buClr>
+                <a:schemeClr val="accent1"/>
+              </a:buClr>
+              <a:buSzPct val="100000"/>
+              <a:buFont typeface="Calibri" panose="020F0502020204030204" pitchFamily="34" charset="0"/>
+              <a:buNone/>
+              <a:defRPr sz="2400" kern="1200" cap="all" spc="200" baseline="0">
+                <a:solidFill>
+                  <a:schemeClr val="tx2"/>
+                </a:solidFill>
+                <a:latin typeface="+mj-lt"/>
+                <a:ea typeface="+mn-ea"/>
+                <a:cs typeface="+mn-cs"/>
+              </a:defRPr>
+            </a:lvl1pPr>
+            <a:lvl2pPr marL="457200" indent="0" algn="ctr" defTabSz="914400" rtl="0" eaLnBrk="1" latinLnBrk="0" hangingPunct="1">
+              <a:lnSpc>
+                <a:spcPct val="90000"/>
+              </a:lnSpc>
+              <a:spcBef>
+                <a:spcPts val="200"/>
+              </a:spcBef>
+              <a:spcAft>
+                <a:spcPts val="400"/>
+              </a:spcAft>
+              <a:buClr>
+                <a:schemeClr val="accent1"/>
+              </a:buClr>
+              <a:buFont typeface="Calibri" pitchFamily="34" charset="0"/>
+              <a:buNone/>
+              <a:defRPr sz="2400" kern="1200">
+                <a:solidFill>
+                  <a:schemeClr val="tx1">
+                    <a:lumMod val="75000"/>
+                    <a:lumOff val="25000"/>
+                  </a:schemeClr>
+                </a:solidFill>
+                <a:latin typeface="+mn-lt"/>
+                <a:ea typeface="+mn-ea"/>
+                <a:cs typeface="+mn-cs"/>
+              </a:defRPr>
+            </a:lvl2pPr>
+            <a:lvl3pPr marL="914400" indent="0" algn="ctr" defTabSz="914400" rtl="0" eaLnBrk="1" latinLnBrk="0" hangingPunct="1">
+              <a:lnSpc>
+                <a:spcPct val="90000"/>
+              </a:lnSpc>
+              <a:spcBef>
+                <a:spcPts val="200"/>
+              </a:spcBef>
+              <a:spcAft>
+                <a:spcPts val="400"/>
+              </a:spcAft>
+              <a:buClr>
+                <a:schemeClr val="accent1"/>
+              </a:buClr>
+              <a:buFont typeface="Calibri" pitchFamily="34" charset="0"/>
+              <a:buNone/>
+              <a:defRPr sz="2400" kern="1200">
+                <a:solidFill>
+                  <a:schemeClr val="tx1">
+                    <a:lumMod val="75000"/>
+                    <a:lumOff val="25000"/>
+                  </a:schemeClr>
+                </a:solidFill>
+                <a:latin typeface="+mn-lt"/>
+                <a:ea typeface="+mn-ea"/>
+                <a:cs typeface="+mn-cs"/>
+              </a:defRPr>
+            </a:lvl3pPr>
+            <a:lvl4pPr marL="1371600" indent="0" algn="ctr" defTabSz="914400" rtl="0" eaLnBrk="1" latinLnBrk="0" hangingPunct="1">
+              <a:lnSpc>
+                <a:spcPct val="90000"/>
+              </a:lnSpc>
+              <a:spcBef>
+                <a:spcPts val="200"/>
+              </a:spcBef>
+              <a:spcAft>
+                <a:spcPts val="400"/>
+              </a:spcAft>
+              <a:buClr>
+                <a:schemeClr val="accent1"/>
+              </a:buClr>
+              <a:buFont typeface="Calibri" pitchFamily="34" charset="0"/>
+              <a:buNone/>
+              <a:defRPr sz="2000" kern="1200">
+                <a:solidFill>
+                  <a:schemeClr val="tx1">
+                    <a:lumMod val="75000"/>
+                    <a:lumOff val="25000"/>
+                  </a:schemeClr>
+                </a:solidFill>
+                <a:latin typeface="+mn-lt"/>
+                <a:ea typeface="+mn-ea"/>
+                <a:cs typeface="+mn-cs"/>
+              </a:defRPr>
+            </a:lvl4pPr>
+            <a:lvl5pPr marL="1828800" indent="0" algn="ctr" defTabSz="914400" rtl="0" eaLnBrk="1" latinLnBrk="0" hangingPunct="1">
+              <a:lnSpc>
+                <a:spcPct val="90000"/>
+              </a:lnSpc>
+              <a:spcBef>
+                <a:spcPts val="200"/>
+              </a:spcBef>
+              <a:spcAft>
+                <a:spcPts val="400"/>
+              </a:spcAft>
+              <a:buClr>
+                <a:schemeClr val="accent1"/>
+              </a:buClr>
+              <a:buFont typeface="Calibri" pitchFamily="34" charset="0"/>
+              <a:buNone/>
+              <a:defRPr sz="2000" kern="1200">
+                <a:solidFill>
+                  <a:schemeClr val="tx1">
+                    <a:lumMod val="75000"/>
+                    <a:lumOff val="25000"/>
+                  </a:schemeClr>
+                </a:solidFill>
+                <a:latin typeface="+mn-lt"/>
+                <a:ea typeface="+mn-ea"/>
+                <a:cs typeface="+mn-cs"/>
+              </a:defRPr>
+            </a:lvl5pPr>
+            <a:lvl6pPr marL="2286000" indent="0" algn="ctr" defTabSz="914400" rtl="0" eaLnBrk="1" latinLnBrk="0" hangingPunct="1">
+              <a:lnSpc>
+                <a:spcPct val="90000"/>
+              </a:lnSpc>
+              <a:spcBef>
+                <a:spcPts val="200"/>
+              </a:spcBef>
+              <a:spcAft>
+                <a:spcPts val="400"/>
+              </a:spcAft>
+              <a:buClr>
+                <a:schemeClr val="accent1"/>
+              </a:buClr>
+              <a:buFont typeface="Calibri" pitchFamily="34" charset="0"/>
+              <a:buNone/>
+              <a:defRPr sz="2000" kern="1200">
+                <a:solidFill>
+                  <a:schemeClr val="tx1">
+                    <a:lumMod val="75000"/>
+                    <a:lumOff val="25000"/>
+                  </a:schemeClr>
+                </a:solidFill>
+                <a:latin typeface="+mn-lt"/>
+                <a:ea typeface="+mn-ea"/>
+                <a:cs typeface="+mn-cs"/>
+              </a:defRPr>
+            </a:lvl6pPr>
+            <a:lvl7pPr marL="2743200" indent="0" algn="ctr" defTabSz="914400" rtl="0" eaLnBrk="1" latinLnBrk="0" hangingPunct="1">
+              <a:lnSpc>
+                <a:spcPct val="90000"/>
+              </a:lnSpc>
+              <a:spcBef>
+                <a:spcPts val="200"/>
+              </a:spcBef>
+              <a:spcAft>
+                <a:spcPts val="400"/>
+              </a:spcAft>
+              <a:buClr>
+                <a:schemeClr val="accent1"/>
+              </a:buClr>
+              <a:buFont typeface="Calibri" pitchFamily="34" charset="0"/>
+              <a:buNone/>
+              <a:defRPr sz="2000" kern="1200">
+                <a:solidFill>
+                  <a:schemeClr val="tx1">
+                    <a:lumMod val="75000"/>
+                    <a:lumOff val="25000"/>
+                  </a:schemeClr>
+                </a:solidFill>
+                <a:latin typeface="+mn-lt"/>
+                <a:ea typeface="+mn-ea"/>
+                <a:cs typeface="+mn-cs"/>
+              </a:defRPr>
+            </a:lvl7pPr>
+            <a:lvl8pPr marL="3200400" indent="0" algn="ctr" defTabSz="914400" rtl="0" eaLnBrk="1" latinLnBrk="0" hangingPunct="1">
+              <a:lnSpc>
+                <a:spcPct val="90000"/>
+              </a:lnSpc>
+              <a:spcBef>
+                <a:spcPts val="200"/>
+              </a:spcBef>
+              <a:spcAft>
+                <a:spcPts val="400"/>
+              </a:spcAft>
+              <a:buClr>
+                <a:schemeClr val="accent1"/>
+              </a:buClr>
+              <a:buFont typeface="Calibri" pitchFamily="34" charset="0"/>
+              <a:buNone/>
+              <a:defRPr sz="2000" kern="1200">
+                <a:solidFill>
+                  <a:schemeClr val="tx1">
+                    <a:lumMod val="75000"/>
+                    <a:lumOff val="25000"/>
+                  </a:schemeClr>
+                </a:solidFill>
+                <a:latin typeface="+mn-lt"/>
+                <a:ea typeface="+mn-ea"/>
+                <a:cs typeface="+mn-cs"/>
+              </a:defRPr>
+            </a:lvl8pPr>
+            <a:lvl9pPr marL="3657600" indent="0" algn="ctr" defTabSz="914400" rtl="0" eaLnBrk="1" latinLnBrk="0" hangingPunct="1">
+              <a:lnSpc>
+                <a:spcPct val="90000"/>
+              </a:lnSpc>
+              <a:spcBef>
+                <a:spcPts val="200"/>
+              </a:spcBef>
+              <a:spcAft>
+                <a:spcPts val="400"/>
+              </a:spcAft>
+              <a:buClr>
+                <a:schemeClr val="accent1"/>
+              </a:buClr>
+              <a:buFont typeface="Calibri" pitchFamily="34" charset="0"/>
+              <a:buNone/>
+              <a:defRPr sz="2000" kern="1200">
+                <a:solidFill>
+                  <a:schemeClr val="tx1">
+                    <a:lumMod val="75000"/>
+                    <a:lumOff val="25000"/>
+                  </a:schemeClr>
+                </a:solidFill>
+                <a:latin typeface="+mn-lt"/>
+                <a:ea typeface="+mn-ea"/>
+                <a:cs typeface="+mn-cs"/>
+              </a:defRPr>
+            </a:lvl9pPr>
+          </a:lstStyle>
+          <a:p>
+            <a:r>
               <a:rPr lang="hu-HU" sz="1800" dirty="0"/>
-              <a:t>Készítették: Atkári Ariella</a:t>
-            </a:r>
-            <a:br>
-              <a:rPr lang="hu-HU" sz="1800" dirty="0"/>
-            </a:br>
-            <a:r>
-              <a:rPr lang="hu-HU" sz="1800" dirty="0"/>
-              <a:t>	         Farkas Dominik</a:t>
+              <a:t>2026.03.03</a:t>
             </a:r>
           </a:p>
         </p:txBody>
@@ -4231,6 +5154,2741 @@
   <p:clrMapOvr>
     <a:masterClrMapping/>
   </p:clrMapOvr>
+</p:sld>
+</file>
+
+<file path=ppt/slides/slide10.xml><?xml version="1.0" encoding="utf-8"?>
+<p:sld xmlns:a="http://schemas.openxmlformats.org/drawingml/2006/main" xmlns:r="http://schemas.openxmlformats.org/officeDocument/2006/relationships" xmlns:p="http://schemas.openxmlformats.org/presentationml/2006/main">
+  <p:cSld>
+    <p:bg>
+      <p:bgPr>
+        <a:solidFill>
+          <a:srgbClr val="FDF7E9"/>
+        </a:solidFill>
+        <a:effectLst/>
+      </p:bgPr>
+    </p:bg>
+    <p:spTree>
+      <p:nvGrpSpPr>
+        <p:cNvPr id="1" name=""/>
+        <p:cNvGrpSpPr/>
+        <p:nvPr/>
+      </p:nvGrpSpPr>
+      <p:grpSpPr>
+        <a:xfrm>
+          <a:off x="0" y="0"/>
+          <a:ext cx="0" cy="0"/>
+          <a:chOff x="0" y="0"/>
+          <a:chExt cx="0" cy="0"/>
+        </a:xfrm>
+      </p:grpSpPr>
+      <p:sp>
+        <p:nvSpPr>
+          <p:cNvPr id="2" name="Cím 1">
+            <a:extLst>
+              <a:ext uri="{FF2B5EF4-FFF2-40B4-BE49-F238E27FC236}">
+                <a16:creationId xmlns:a16="http://schemas.microsoft.com/office/drawing/2014/main" id="{E1BC1CFA-A756-4730-9608-D06BB35C262F}"/>
+              </a:ext>
+            </a:extLst>
+          </p:cNvPr>
+          <p:cNvSpPr>
+            <a:spLocks noGrp="1"/>
+          </p:cNvSpPr>
+          <p:nvPr>
+            <p:ph type="title"/>
+          </p:nvPr>
+        </p:nvSpPr>
+        <p:spPr/>
+        <p:txBody>
+          <a:bodyPr/>
+          <a:lstStyle/>
+          <a:p>
+            <a:endParaRPr lang="hu-HU"/>
+          </a:p>
+        </p:txBody>
+      </p:sp>
+      <p:sp>
+        <p:nvSpPr>
+          <p:cNvPr id="4" name="Szöveg helye 3">
+            <a:extLst>
+              <a:ext uri="{FF2B5EF4-FFF2-40B4-BE49-F238E27FC236}">
+                <a16:creationId xmlns:a16="http://schemas.microsoft.com/office/drawing/2014/main" id="{D8C578E4-409C-45D7-8961-22483CEEC334}"/>
+              </a:ext>
+            </a:extLst>
+          </p:cNvPr>
+          <p:cNvSpPr>
+            <a:spLocks noGrp="1"/>
+          </p:cNvSpPr>
+          <p:nvPr>
+            <p:ph type="body" sz="half" idx="2"/>
+          </p:nvPr>
+        </p:nvSpPr>
+        <p:spPr/>
+        <p:txBody>
+          <a:bodyPr/>
+          <a:lstStyle/>
+          <a:p>
+            <a:endParaRPr lang="hu-HU"/>
+          </a:p>
+        </p:txBody>
+      </p:sp>
+    </p:spTree>
+    <p:extLst>
+      <p:ext uri="{BB962C8B-B14F-4D97-AF65-F5344CB8AC3E}">
+        <p14:creationId xmlns:p14="http://schemas.microsoft.com/office/powerpoint/2010/main" val="4008681048"/>
+      </p:ext>
+    </p:extLst>
+  </p:cSld>
+  <p:clrMapOvr>
+    <a:masterClrMapping/>
+  </p:clrMapOvr>
+</p:sld>
+</file>
+
+<file path=ppt/slides/slide11.xml><?xml version="1.0" encoding="utf-8"?>
+<p:sld xmlns:a="http://schemas.openxmlformats.org/drawingml/2006/main" xmlns:r="http://schemas.openxmlformats.org/officeDocument/2006/relationships" xmlns:p="http://schemas.openxmlformats.org/presentationml/2006/main">
+  <p:cSld>
+    <p:bg>
+      <p:bgPr>
+        <a:solidFill>
+          <a:srgbClr val="FDF7E9"/>
+        </a:solidFill>
+        <a:effectLst/>
+      </p:bgPr>
+    </p:bg>
+    <p:spTree>
+      <p:nvGrpSpPr>
+        <p:cNvPr id="1" name=""/>
+        <p:cNvGrpSpPr/>
+        <p:nvPr/>
+      </p:nvGrpSpPr>
+      <p:grpSpPr>
+        <a:xfrm>
+          <a:off x="0" y="0"/>
+          <a:ext cx="0" cy="0"/>
+          <a:chOff x="0" y="0"/>
+          <a:chExt cx="0" cy="0"/>
+        </a:xfrm>
+      </p:grpSpPr>
+      <p:sp>
+        <p:nvSpPr>
+          <p:cNvPr id="3" name="Tartalom helye 2">
+            <a:extLst>
+              <a:ext uri="{FF2B5EF4-FFF2-40B4-BE49-F238E27FC236}">
+                <a16:creationId xmlns:a16="http://schemas.microsoft.com/office/drawing/2014/main" id="{32758DB2-9D10-47A2-925C-F8A858558A07}"/>
+              </a:ext>
+            </a:extLst>
+          </p:cNvPr>
+          <p:cNvSpPr>
+            <a:spLocks noGrp="1"/>
+          </p:cNvSpPr>
+          <p:nvPr>
+            <p:ph idx="1"/>
+          </p:nvPr>
+        </p:nvSpPr>
+        <p:spPr/>
+        <p:txBody>
+          <a:bodyPr/>
+          <a:lstStyle/>
+          <a:p>
+            <a:endParaRPr lang="hu-HU" dirty="0"/>
+          </a:p>
+        </p:txBody>
+      </p:sp>
+      <p:sp>
+        <p:nvSpPr>
+          <p:cNvPr id="4" name="Cím 1">
+            <a:extLst>
+              <a:ext uri="{FF2B5EF4-FFF2-40B4-BE49-F238E27FC236}">
+                <a16:creationId xmlns:a16="http://schemas.microsoft.com/office/drawing/2014/main" id="{1BABF97B-7E63-454C-9CDB-F386138F1BAA}"/>
+              </a:ext>
+            </a:extLst>
+          </p:cNvPr>
+          <p:cNvSpPr>
+            <a:spLocks noGrp="1"/>
+          </p:cNvSpPr>
+          <p:nvPr>
+            <p:ph type="title"/>
+          </p:nvPr>
+        </p:nvSpPr>
+        <p:spPr>
+          <a:xfrm>
+            <a:off x="1097280" y="286603"/>
+            <a:ext cx="10058400" cy="1450757"/>
+          </a:xfrm>
+        </p:spPr>
+        <p:txBody>
+          <a:bodyPr/>
+          <a:lstStyle/>
+          <a:p>
+            <a:r>
+              <a:rPr lang="hu-HU" b="1" dirty="0">
+                <a:latin typeface="Bahnschrift SemiBold" panose="020B0502040204020203" pitchFamily="34" charset="0"/>
+              </a:rPr>
+              <a:t>Frontend</a:t>
+            </a:r>
+          </a:p>
+        </p:txBody>
+      </p:sp>
+      <p:grpSp>
+        <p:nvGrpSpPr>
+          <p:cNvPr id="7" name="Csoportba foglalás 6">
+            <a:extLst>
+              <a:ext uri="{FF2B5EF4-FFF2-40B4-BE49-F238E27FC236}">
+                <a16:creationId xmlns:a16="http://schemas.microsoft.com/office/drawing/2014/main" id="{15ADBE7A-C248-4CA3-8263-604D44A26A56}"/>
+              </a:ext>
+            </a:extLst>
+          </p:cNvPr>
+          <p:cNvGrpSpPr/>
+          <p:nvPr/>
+        </p:nvGrpSpPr>
+        <p:grpSpPr>
+          <a:xfrm>
+            <a:off x="10565538" y="349786"/>
+            <a:ext cx="1418895" cy="1258023"/>
+            <a:chOff x="10565538" y="349786"/>
+            <a:chExt cx="1418895" cy="1258023"/>
+          </a:xfrm>
+        </p:grpSpPr>
+        <p:pic>
+          <p:nvPicPr>
+            <p:cNvPr id="8" name="Kép 7">
+              <a:extLst>
+                <a:ext uri="{FF2B5EF4-FFF2-40B4-BE49-F238E27FC236}">
+                  <a16:creationId xmlns:a16="http://schemas.microsoft.com/office/drawing/2014/main" id="{B5CD5F08-FF35-4A18-A4DD-6D1908F4F607}"/>
+                </a:ext>
+              </a:extLst>
+            </p:cNvPr>
+            <p:cNvPicPr>
+              <a:picLocks noChangeAspect="1"/>
+            </p:cNvPicPr>
+            <p:nvPr/>
+          </p:nvPicPr>
+          <p:blipFill rotWithShape="1">
+            <a:blip r:embed="rId2">
+              <a:alphaModFix amt="50000"/>
+              <a:extLst>
+                <a:ext uri="{28A0092B-C50C-407E-A947-70E740481C1C}">
+                  <a14:useLocalDpi xmlns:a14="http://schemas.microsoft.com/office/drawing/2010/main" val="0"/>
+                </a:ext>
+              </a:extLst>
+            </a:blip>
+            <a:srcRect t="58555" r="67375"/>
+            <a:stretch/>
+          </p:blipFill>
+          <p:spPr>
+            <a:xfrm>
+              <a:off x="10619475" y="1036308"/>
+              <a:ext cx="1364958" cy="571501"/>
+            </a:xfrm>
+            <a:prstGeom prst="rect">
+              <a:avLst/>
+            </a:prstGeom>
+          </p:spPr>
+        </p:pic>
+        <p:pic>
+          <p:nvPicPr>
+            <p:cNvPr id="9" name="Kép 8">
+              <a:extLst>
+                <a:ext uri="{FF2B5EF4-FFF2-40B4-BE49-F238E27FC236}">
+                  <a16:creationId xmlns:a16="http://schemas.microsoft.com/office/drawing/2014/main" id="{72191454-7B04-488C-B16A-2741D54161EA}"/>
+                </a:ext>
+              </a:extLst>
+            </p:cNvPr>
+            <p:cNvPicPr>
+              <a:picLocks noChangeAspect="1"/>
+            </p:cNvPicPr>
+            <p:nvPr/>
+          </p:nvPicPr>
+          <p:blipFill rotWithShape="1">
+            <a:blip r:embed="rId2">
+              <a:alphaModFix amt="50000"/>
+              <a:extLst>
+                <a:ext uri="{28A0092B-C50C-407E-A947-70E740481C1C}">
+                  <a14:useLocalDpi xmlns:a14="http://schemas.microsoft.com/office/drawing/2010/main" val="0"/>
+                </a:ext>
+              </a:extLst>
+            </a:blip>
+            <a:srcRect l="1" r="61666" b="38896"/>
+            <a:stretch/>
+          </p:blipFill>
+          <p:spPr>
+            <a:xfrm>
+              <a:off x="10565538" y="349786"/>
+              <a:ext cx="1418895" cy="745451"/>
+            </a:xfrm>
+            <a:prstGeom prst="rect">
+              <a:avLst/>
+            </a:prstGeom>
+          </p:spPr>
+        </p:pic>
+      </p:grpSp>
+    </p:spTree>
+    <p:extLst>
+      <p:ext uri="{BB962C8B-B14F-4D97-AF65-F5344CB8AC3E}">
+        <p14:creationId xmlns:p14="http://schemas.microsoft.com/office/powerpoint/2010/main" val="3599911411"/>
+      </p:ext>
+    </p:extLst>
+  </p:cSld>
+  <p:clrMapOvr>
+    <a:masterClrMapping/>
+  </p:clrMapOvr>
+</p:sld>
+</file>
+
+<file path=ppt/slides/slide12.xml><?xml version="1.0" encoding="utf-8"?>
+<p:sld xmlns:a="http://schemas.openxmlformats.org/drawingml/2006/main" xmlns:r="http://schemas.openxmlformats.org/officeDocument/2006/relationships" xmlns:p="http://schemas.openxmlformats.org/presentationml/2006/main">
+  <p:cSld>
+    <p:bg>
+      <p:bgPr>
+        <a:solidFill>
+          <a:srgbClr val="FDF7E9"/>
+        </a:solidFill>
+        <a:effectLst/>
+      </p:bgPr>
+    </p:bg>
+    <p:spTree>
+      <p:nvGrpSpPr>
+        <p:cNvPr id="1" name=""/>
+        <p:cNvGrpSpPr/>
+        <p:nvPr/>
+      </p:nvGrpSpPr>
+      <p:grpSpPr>
+        <a:xfrm>
+          <a:off x="0" y="0"/>
+          <a:ext cx="0" cy="0"/>
+          <a:chOff x="0" y="0"/>
+          <a:chExt cx="0" cy="0"/>
+        </a:xfrm>
+      </p:grpSpPr>
+      <p:sp>
+        <p:nvSpPr>
+          <p:cNvPr id="3" name="Tartalom helye 2">
+            <a:extLst>
+              <a:ext uri="{FF2B5EF4-FFF2-40B4-BE49-F238E27FC236}">
+                <a16:creationId xmlns:a16="http://schemas.microsoft.com/office/drawing/2014/main" id="{32758DB2-9D10-47A2-925C-F8A858558A07}"/>
+              </a:ext>
+            </a:extLst>
+          </p:cNvPr>
+          <p:cNvSpPr>
+            <a:spLocks noGrp="1"/>
+          </p:cNvSpPr>
+          <p:nvPr>
+            <p:ph idx="1"/>
+          </p:nvPr>
+        </p:nvSpPr>
+        <p:spPr/>
+        <p:txBody>
+          <a:bodyPr/>
+          <a:lstStyle/>
+          <a:p>
+            <a:endParaRPr lang="hu-HU" dirty="0"/>
+          </a:p>
+        </p:txBody>
+      </p:sp>
+      <p:sp>
+        <p:nvSpPr>
+          <p:cNvPr id="4" name="Cím 1">
+            <a:extLst>
+              <a:ext uri="{FF2B5EF4-FFF2-40B4-BE49-F238E27FC236}">
+                <a16:creationId xmlns:a16="http://schemas.microsoft.com/office/drawing/2014/main" id="{1BABF97B-7E63-454C-9CDB-F386138F1BAA}"/>
+              </a:ext>
+            </a:extLst>
+          </p:cNvPr>
+          <p:cNvSpPr>
+            <a:spLocks noGrp="1"/>
+          </p:cNvSpPr>
+          <p:nvPr>
+            <p:ph type="title"/>
+          </p:nvPr>
+        </p:nvSpPr>
+        <p:spPr>
+          <a:xfrm>
+            <a:off x="1097280" y="286603"/>
+            <a:ext cx="10058400" cy="1450757"/>
+          </a:xfrm>
+        </p:spPr>
+        <p:txBody>
+          <a:bodyPr/>
+          <a:lstStyle/>
+          <a:p>
+            <a:r>
+              <a:rPr lang="hu-HU" b="1" dirty="0">
+                <a:latin typeface="Bahnschrift SemiBold" panose="020B0502040204020203" pitchFamily="34" charset="0"/>
+              </a:rPr>
+              <a:t>Adatbázis</a:t>
+            </a:r>
+          </a:p>
+        </p:txBody>
+      </p:sp>
+      <p:grpSp>
+        <p:nvGrpSpPr>
+          <p:cNvPr id="7" name="Csoportba foglalás 6">
+            <a:extLst>
+              <a:ext uri="{FF2B5EF4-FFF2-40B4-BE49-F238E27FC236}">
+                <a16:creationId xmlns:a16="http://schemas.microsoft.com/office/drawing/2014/main" id="{E802B2B8-8A4C-4A1C-A3DA-1085A7D5C7F6}"/>
+              </a:ext>
+            </a:extLst>
+          </p:cNvPr>
+          <p:cNvGrpSpPr/>
+          <p:nvPr/>
+        </p:nvGrpSpPr>
+        <p:grpSpPr>
+          <a:xfrm>
+            <a:off x="10565538" y="349786"/>
+            <a:ext cx="1418895" cy="1258023"/>
+            <a:chOff x="10565538" y="349786"/>
+            <a:chExt cx="1418895" cy="1258023"/>
+          </a:xfrm>
+        </p:grpSpPr>
+        <p:pic>
+          <p:nvPicPr>
+            <p:cNvPr id="8" name="Kép 7">
+              <a:extLst>
+                <a:ext uri="{FF2B5EF4-FFF2-40B4-BE49-F238E27FC236}">
+                  <a16:creationId xmlns:a16="http://schemas.microsoft.com/office/drawing/2014/main" id="{2F280203-E1A7-4586-A915-B522FFD90496}"/>
+                </a:ext>
+              </a:extLst>
+            </p:cNvPr>
+            <p:cNvPicPr>
+              <a:picLocks noChangeAspect="1"/>
+            </p:cNvPicPr>
+            <p:nvPr/>
+          </p:nvPicPr>
+          <p:blipFill rotWithShape="1">
+            <a:blip r:embed="rId2">
+              <a:alphaModFix amt="50000"/>
+              <a:extLst>
+                <a:ext uri="{28A0092B-C50C-407E-A947-70E740481C1C}">
+                  <a14:useLocalDpi xmlns:a14="http://schemas.microsoft.com/office/drawing/2010/main" val="0"/>
+                </a:ext>
+              </a:extLst>
+            </a:blip>
+            <a:srcRect t="58555" r="67375"/>
+            <a:stretch/>
+          </p:blipFill>
+          <p:spPr>
+            <a:xfrm>
+              <a:off x="10619475" y="1036308"/>
+              <a:ext cx="1364958" cy="571501"/>
+            </a:xfrm>
+            <a:prstGeom prst="rect">
+              <a:avLst/>
+            </a:prstGeom>
+          </p:spPr>
+        </p:pic>
+        <p:pic>
+          <p:nvPicPr>
+            <p:cNvPr id="9" name="Kép 8">
+              <a:extLst>
+                <a:ext uri="{FF2B5EF4-FFF2-40B4-BE49-F238E27FC236}">
+                  <a16:creationId xmlns:a16="http://schemas.microsoft.com/office/drawing/2014/main" id="{90937401-8474-4C4C-8353-0BC085D4C997}"/>
+                </a:ext>
+              </a:extLst>
+            </p:cNvPr>
+            <p:cNvPicPr>
+              <a:picLocks noChangeAspect="1"/>
+            </p:cNvPicPr>
+            <p:nvPr/>
+          </p:nvPicPr>
+          <p:blipFill rotWithShape="1">
+            <a:blip r:embed="rId2">
+              <a:alphaModFix amt="50000"/>
+              <a:extLst>
+                <a:ext uri="{28A0092B-C50C-407E-A947-70E740481C1C}">
+                  <a14:useLocalDpi xmlns:a14="http://schemas.microsoft.com/office/drawing/2010/main" val="0"/>
+                </a:ext>
+              </a:extLst>
+            </a:blip>
+            <a:srcRect l="1" r="61666" b="38896"/>
+            <a:stretch/>
+          </p:blipFill>
+          <p:spPr>
+            <a:xfrm>
+              <a:off x="10565538" y="349786"/>
+              <a:ext cx="1418895" cy="745451"/>
+            </a:xfrm>
+            <a:prstGeom prst="rect">
+              <a:avLst/>
+            </a:prstGeom>
+          </p:spPr>
+        </p:pic>
+      </p:grpSp>
+    </p:spTree>
+    <p:extLst>
+      <p:ext uri="{BB962C8B-B14F-4D97-AF65-F5344CB8AC3E}">
+        <p14:creationId xmlns:p14="http://schemas.microsoft.com/office/powerpoint/2010/main" val="1438799303"/>
+      </p:ext>
+    </p:extLst>
+  </p:cSld>
+  <p:clrMapOvr>
+    <a:masterClrMapping/>
+  </p:clrMapOvr>
+</p:sld>
+</file>
+
+<file path=ppt/slides/slide13.xml><?xml version="1.0" encoding="utf-8"?>
+<p:sld xmlns:a="http://schemas.openxmlformats.org/drawingml/2006/main" xmlns:r="http://schemas.openxmlformats.org/officeDocument/2006/relationships" xmlns:p="http://schemas.openxmlformats.org/presentationml/2006/main">
+  <p:cSld>
+    <p:bg>
+      <p:bgPr>
+        <a:solidFill>
+          <a:srgbClr val="FDF7E9"/>
+        </a:solidFill>
+        <a:effectLst/>
+      </p:bgPr>
+    </p:bg>
+    <p:spTree>
+      <p:nvGrpSpPr>
+        <p:cNvPr id="1" name=""/>
+        <p:cNvGrpSpPr/>
+        <p:nvPr/>
+      </p:nvGrpSpPr>
+      <p:grpSpPr>
+        <a:xfrm>
+          <a:off x="0" y="0"/>
+          <a:ext cx="0" cy="0"/>
+          <a:chOff x="0" y="0"/>
+          <a:chExt cx="0" cy="0"/>
+        </a:xfrm>
+      </p:grpSpPr>
+      <p:sp>
+        <p:nvSpPr>
+          <p:cNvPr id="2" name="Cím 1">
+            <a:extLst>
+              <a:ext uri="{FF2B5EF4-FFF2-40B4-BE49-F238E27FC236}">
+                <a16:creationId xmlns:a16="http://schemas.microsoft.com/office/drawing/2014/main" id="{755F2576-93E3-4E11-AD5A-5982C144E204}"/>
+              </a:ext>
+            </a:extLst>
+          </p:cNvPr>
+          <p:cNvSpPr>
+            <a:spLocks noGrp="1"/>
+          </p:cNvSpPr>
+          <p:nvPr>
+            <p:ph type="title"/>
+          </p:nvPr>
+        </p:nvSpPr>
+        <p:spPr>
+          <a:xfrm>
+            <a:off x="457200" y="622934"/>
+            <a:ext cx="3200400" cy="2286000"/>
+          </a:xfrm>
+        </p:spPr>
+        <p:txBody>
+          <a:bodyPr/>
+          <a:lstStyle/>
+          <a:p>
+            <a:r>
+              <a:rPr lang="hu-HU" dirty="0" err="1">
+                <a:latin typeface="Bahnschrift SemiBold" panose="020B0502040204020203" pitchFamily="34" charset="0"/>
+              </a:rPr>
+              <a:t>Reszponzivitás</a:t>
+            </a:r>
+            <a:endParaRPr lang="hu-HU" dirty="0">
+              <a:latin typeface="Bahnschrift SemiBold" panose="020B0502040204020203" pitchFamily="34" charset="0"/>
+            </a:endParaRPr>
+          </a:p>
+        </p:txBody>
+      </p:sp>
+      <p:sp>
+        <p:nvSpPr>
+          <p:cNvPr id="4" name="Szöveg helye 3">
+            <a:extLst>
+              <a:ext uri="{FF2B5EF4-FFF2-40B4-BE49-F238E27FC236}">
+                <a16:creationId xmlns:a16="http://schemas.microsoft.com/office/drawing/2014/main" id="{E1483CC7-2FF0-4B57-872B-832994FD7836}"/>
+              </a:ext>
+            </a:extLst>
+          </p:cNvPr>
+          <p:cNvSpPr>
+            <a:spLocks noGrp="1"/>
+          </p:cNvSpPr>
+          <p:nvPr>
+            <p:ph type="body" sz="half" idx="2"/>
+          </p:nvPr>
+        </p:nvSpPr>
+        <p:spPr>
+          <a:xfrm>
+            <a:off x="457200" y="3259455"/>
+            <a:ext cx="3562350" cy="3684270"/>
+          </a:xfrm>
+        </p:spPr>
+        <p:txBody>
+          <a:bodyPr>
+            <a:normAutofit/>
+          </a:bodyPr>
+          <a:lstStyle/>
+          <a:p>
+            <a:pPr marL="285750" indent="-285750">
+              <a:buClr>
+                <a:schemeClr val="bg1"/>
+              </a:buClr>
+              <a:buFont typeface="Arial" panose="020B0604020202020204" pitchFamily="34" charset="0"/>
+              <a:buChar char="•"/>
+            </a:pPr>
+            <a:r>
+              <a:rPr lang="hu-HU" sz="1800" dirty="0"/>
+              <a:t>Dinamikus igazodás a kijelzőhöz</a:t>
+            </a:r>
+          </a:p>
+          <a:p>
+            <a:pPr marL="285750" indent="-285750">
+              <a:buClr>
+                <a:schemeClr val="bg1"/>
+              </a:buClr>
+              <a:buFont typeface="Arial" panose="020B0604020202020204" pitchFamily="34" charset="0"/>
+              <a:buChar char="•"/>
+            </a:pPr>
+            <a:r>
+              <a:rPr lang="hu-HU" sz="1800" dirty="0"/>
+              <a:t>Optimalizált telefon képernyőhöz</a:t>
+            </a:r>
+          </a:p>
+          <a:p>
+            <a:pPr marL="285750" indent="-285750">
+              <a:buClr>
+                <a:schemeClr val="bg1"/>
+              </a:buClr>
+              <a:buFont typeface="Arial" panose="020B0604020202020204" pitchFamily="34" charset="0"/>
+              <a:buChar char="•"/>
+            </a:pPr>
+            <a:r>
+              <a:rPr lang="hu-HU" sz="1800" dirty="0"/>
+              <a:t>Felhasználóbarát</a:t>
+            </a:r>
+          </a:p>
+        </p:txBody>
+      </p:sp>
+      <p:grpSp>
+        <p:nvGrpSpPr>
+          <p:cNvPr id="6" name="Csoportba foglalás 5">
+            <a:extLst>
+              <a:ext uri="{FF2B5EF4-FFF2-40B4-BE49-F238E27FC236}">
+                <a16:creationId xmlns:a16="http://schemas.microsoft.com/office/drawing/2014/main" id="{3317F239-9F4A-4F2E-A3AC-DBDE360A6AFF}"/>
+              </a:ext>
+            </a:extLst>
+          </p:cNvPr>
+          <p:cNvGrpSpPr/>
+          <p:nvPr/>
+        </p:nvGrpSpPr>
+        <p:grpSpPr>
+          <a:xfrm>
+            <a:off x="10565538" y="349786"/>
+            <a:ext cx="1418895" cy="1258023"/>
+            <a:chOff x="10565538" y="349786"/>
+            <a:chExt cx="1418895" cy="1258023"/>
+          </a:xfrm>
+        </p:grpSpPr>
+        <p:pic>
+          <p:nvPicPr>
+            <p:cNvPr id="7" name="Kép 6">
+              <a:extLst>
+                <a:ext uri="{FF2B5EF4-FFF2-40B4-BE49-F238E27FC236}">
+                  <a16:creationId xmlns:a16="http://schemas.microsoft.com/office/drawing/2014/main" id="{C2CC19C8-CD10-42F5-9D72-C77B335B0586}"/>
+                </a:ext>
+              </a:extLst>
+            </p:cNvPr>
+            <p:cNvPicPr>
+              <a:picLocks noChangeAspect="1"/>
+            </p:cNvPicPr>
+            <p:nvPr/>
+          </p:nvPicPr>
+          <p:blipFill rotWithShape="1">
+            <a:blip r:embed="rId2">
+              <a:alphaModFix amt="50000"/>
+              <a:extLst>
+                <a:ext uri="{28A0092B-C50C-407E-A947-70E740481C1C}">
+                  <a14:useLocalDpi xmlns:a14="http://schemas.microsoft.com/office/drawing/2010/main" val="0"/>
+                </a:ext>
+              </a:extLst>
+            </a:blip>
+            <a:srcRect t="58555" r="67375"/>
+            <a:stretch/>
+          </p:blipFill>
+          <p:spPr>
+            <a:xfrm>
+              <a:off x="10619475" y="1036308"/>
+              <a:ext cx="1364958" cy="571501"/>
+            </a:xfrm>
+            <a:prstGeom prst="rect">
+              <a:avLst/>
+            </a:prstGeom>
+          </p:spPr>
+        </p:pic>
+        <p:pic>
+          <p:nvPicPr>
+            <p:cNvPr id="8" name="Kép 7">
+              <a:extLst>
+                <a:ext uri="{FF2B5EF4-FFF2-40B4-BE49-F238E27FC236}">
+                  <a16:creationId xmlns:a16="http://schemas.microsoft.com/office/drawing/2014/main" id="{5AF4A5EB-86E0-4324-B31A-9A09255FD8E0}"/>
+                </a:ext>
+              </a:extLst>
+            </p:cNvPr>
+            <p:cNvPicPr>
+              <a:picLocks noChangeAspect="1"/>
+            </p:cNvPicPr>
+            <p:nvPr/>
+          </p:nvPicPr>
+          <p:blipFill rotWithShape="1">
+            <a:blip r:embed="rId2">
+              <a:alphaModFix amt="50000"/>
+              <a:extLst>
+                <a:ext uri="{28A0092B-C50C-407E-A947-70E740481C1C}">
+                  <a14:useLocalDpi xmlns:a14="http://schemas.microsoft.com/office/drawing/2010/main" val="0"/>
+                </a:ext>
+              </a:extLst>
+            </a:blip>
+            <a:srcRect l="1" r="61666" b="38896"/>
+            <a:stretch/>
+          </p:blipFill>
+          <p:spPr>
+            <a:xfrm>
+              <a:off x="10565538" y="349786"/>
+              <a:ext cx="1418895" cy="745451"/>
+            </a:xfrm>
+            <a:prstGeom prst="rect">
+              <a:avLst/>
+            </a:prstGeom>
+          </p:spPr>
+        </p:pic>
+      </p:grpSp>
+    </p:spTree>
+    <p:extLst>
+      <p:ext uri="{BB962C8B-B14F-4D97-AF65-F5344CB8AC3E}">
+        <p14:creationId xmlns:p14="http://schemas.microsoft.com/office/powerpoint/2010/main" val="1470190695"/>
+      </p:ext>
+    </p:extLst>
+  </p:cSld>
+  <p:clrMapOvr>
+    <a:masterClrMapping/>
+  </p:clrMapOvr>
+</p:sld>
+</file>
+
+<file path=ppt/slides/slide14.xml><?xml version="1.0" encoding="utf-8"?>
+<p:sld xmlns:a="http://schemas.openxmlformats.org/drawingml/2006/main" xmlns:r="http://schemas.openxmlformats.org/officeDocument/2006/relationships" xmlns:p="http://schemas.openxmlformats.org/presentationml/2006/main">
+  <p:cSld>
+    <p:bg>
+      <p:bgPr>
+        <a:solidFill>
+          <a:srgbClr val="FDF7E9"/>
+        </a:solidFill>
+        <a:effectLst/>
+      </p:bgPr>
+    </p:bg>
+    <p:spTree>
+      <p:nvGrpSpPr>
+        <p:cNvPr id="1" name=""/>
+        <p:cNvGrpSpPr/>
+        <p:nvPr/>
+      </p:nvGrpSpPr>
+      <p:grpSpPr>
+        <a:xfrm>
+          <a:off x="0" y="0"/>
+          <a:ext cx="0" cy="0"/>
+          <a:chOff x="0" y="0"/>
+          <a:chExt cx="0" cy="0"/>
+        </a:xfrm>
+      </p:grpSpPr>
+      <p:sp>
+        <p:nvSpPr>
+          <p:cNvPr id="2" name="Cím 1">
+            <a:extLst>
+              <a:ext uri="{FF2B5EF4-FFF2-40B4-BE49-F238E27FC236}">
+                <a16:creationId xmlns:a16="http://schemas.microsoft.com/office/drawing/2014/main" id="{68775652-02D3-4343-B0A8-5C16A252BBD7}"/>
+              </a:ext>
+            </a:extLst>
+          </p:cNvPr>
+          <p:cNvSpPr>
+            <a:spLocks noGrp="1"/>
+          </p:cNvSpPr>
+          <p:nvPr>
+            <p:ph type="title"/>
+          </p:nvPr>
+        </p:nvSpPr>
+        <p:spPr/>
+        <p:txBody>
+          <a:bodyPr/>
+          <a:lstStyle/>
+          <a:p>
+            <a:r>
+              <a:rPr lang="hu-HU" dirty="0">
+                <a:latin typeface="Bahnschrift SemiBold" panose="020B0502040204020203" pitchFamily="34" charset="0"/>
+              </a:rPr>
+              <a:t>Tesztelés</a:t>
+            </a:r>
+          </a:p>
+        </p:txBody>
+      </p:sp>
+      <p:sp>
+        <p:nvSpPr>
+          <p:cNvPr id="3" name="Szöveg helye 2">
+            <a:extLst>
+              <a:ext uri="{FF2B5EF4-FFF2-40B4-BE49-F238E27FC236}">
+                <a16:creationId xmlns:a16="http://schemas.microsoft.com/office/drawing/2014/main" id="{632DA0C3-2B61-4113-AD5E-5C0C7B466219}"/>
+              </a:ext>
+            </a:extLst>
+          </p:cNvPr>
+          <p:cNvSpPr>
+            <a:spLocks noGrp="1"/>
+          </p:cNvSpPr>
+          <p:nvPr>
+            <p:ph type="body" idx="1"/>
+          </p:nvPr>
+        </p:nvSpPr>
+        <p:spPr/>
+        <p:txBody>
+          <a:bodyPr/>
+          <a:lstStyle/>
+          <a:p>
+            <a:r>
+              <a:rPr lang="hu-HU" dirty="0" err="1"/>
+              <a:t>BAckend</a:t>
+            </a:r>
+            <a:endParaRPr lang="hu-HU" dirty="0"/>
+          </a:p>
+        </p:txBody>
+      </p:sp>
+      <p:sp>
+        <p:nvSpPr>
+          <p:cNvPr id="4" name="Tartalom helye 3">
+            <a:extLst>
+              <a:ext uri="{FF2B5EF4-FFF2-40B4-BE49-F238E27FC236}">
+                <a16:creationId xmlns:a16="http://schemas.microsoft.com/office/drawing/2014/main" id="{9B6E21CF-8DD2-4C9D-94F2-3E42E0993C13}"/>
+              </a:ext>
+            </a:extLst>
+          </p:cNvPr>
+          <p:cNvSpPr>
+            <a:spLocks noGrp="1"/>
+          </p:cNvSpPr>
+          <p:nvPr>
+            <p:ph sz="half" idx="2"/>
+          </p:nvPr>
+        </p:nvSpPr>
+        <p:spPr/>
+        <p:txBody>
+          <a:bodyPr/>
+          <a:lstStyle/>
+          <a:p>
+            <a:pPr lvl="1">
+              <a:buFont typeface="Arial" panose="020B0604020202020204" pitchFamily="34" charset="0"/>
+              <a:buChar char="•"/>
+            </a:pPr>
+            <a:r>
+              <a:rPr lang="hu-HU" dirty="0"/>
+              <a:t>Postman</a:t>
+            </a:r>
+          </a:p>
+        </p:txBody>
+      </p:sp>
+      <p:sp>
+        <p:nvSpPr>
+          <p:cNvPr id="5" name="Szöveg helye 4">
+            <a:extLst>
+              <a:ext uri="{FF2B5EF4-FFF2-40B4-BE49-F238E27FC236}">
+                <a16:creationId xmlns:a16="http://schemas.microsoft.com/office/drawing/2014/main" id="{8CF772AA-AADB-421B-9B9F-F9CBC3774658}"/>
+              </a:ext>
+            </a:extLst>
+          </p:cNvPr>
+          <p:cNvSpPr>
+            <a:spLocks noGrp="1"/>
+          </p:cNvSpPr>
+          <p:nvPr>
+            <p:ph type="body" sz="quarter" idx="3"/>
+          </p:nvPr>
+        </p:nvSpPr>
+        <p:spPr/>
+        <p:txBody>
+          <a:bodyPr/>
+          <a:lstStyle/>
+          <a:p>
+            <a:r>
+              <a:rPr lang="hu-HU" dirty="0"/>
+              <a:t>frontend</a:t>
+            </a:r>
+          </a:p>
+        </p:txBody>
+      </p:sp>
+      <p:sp>
+        <p:nvSpPr>
+          <p:cNvPr id="6" name="Tartalom helye 5">
+            <a:extLst>
+              <a:ext uri="{FF2B5EF4-FFF2-40B4-BE49-F238E27FC236}">
+                <a16:creationId xmlns:a16="http://schemas.microsoft.com/office/drawing/2014/main" id="{9FA3B530-5977-4B61-B1B0-6F0B4C637821}"/>
+              </a:ext>
+            </a:extLst>
+          </p:cNvPr>
+          <p:cNvSpPr>
+            <a:spLocks noGrp="1"/>
+          </p:cNvSpPr>
+          <p:nvPr>
+            <p:ph sz="quarter" idx="4"/>
+          </p:nvPr>
+        </p:nvSpPr>
+        <p:spPr/>
+        <p:txBody>
+          <a:bodyPr/>
+          <a:lstStyle/>
+          <a:p>
+            <a:pPr lvl="1">
+              <a:buFont typeface="Arial" panose="020B0604020202020204" pitchFamily="34" charset="0"/>
+              <a:buChar char="•"/>
+            </a:pPr>
+            <a:r>
+              <a:rPr lang="hu-HU" dirty="0" err="1"/>
+              <a:t>Selenium</a:t>
+            </a:r>
+            <a:endParaRPr lang="hu-HU" dirty="0"/>
+          </a:p>
+        </p:txBody>
+      </p:sp>
+      <p:grpSp>
+        <p:nvGrpSpPr>
+          <p:cNvPr id="12" name="Csoportba foglalás 11">
+            <a:extLst>
+              <a:ext uri="{FF2B5EF4-FFF2-40B4-BE49-F238E27FC236}">
+                <a16:creationId xmlns:a16="http://schemas.microsoft.com/office/drawing/2014/main" id="{257008D6-FD12-4F82-9FAE-0E4266FC30CF}"/>
+              </a:ext>
+            </a:extLst>
+          </p:cNvPr>
+          <p:cNvGrpSpPr/>
+          <p:nvPr/>
+        </p:nvGrpSpPr>
+        <p:grpSpPr>
+          <a:xfrm>
+            <a:off x="10565538" y="349786"/>
+            <a:ext cx="1418895" cy="1258023"/>
+            <a:chOff x="10565538" y="349786"/>
+            <a:chExt cx="1418895" cy="1258023"/>
+          </a:xfrm>
+        </p:grpSpPr>
+        <p:pic>
+          <p:nvPicPr>
+            <p:cNvPr id="13" name="Kép 12">
+              <a:extLst>
+                <a:ext uri="{FF2B5EF4-FFF2-40B4-BE49-F238E27FC236}">
+                  <a16:creationId xmlns:a16="http://schemas.microsoft.com/office/drawing/2014/main" id="{146B191F-A718-4014-B337-0005E2B62BA9}"/>
+                </a:ext>
+              </a:extLst>
+            </p:cNvPr>
+            <p:cNvPicPr>
+              <a:picLocks noChangeAspect="1"/>
+            </p:cNvPicPr>
+            <p:nvPr/>
+          </p:nvPicPr>
+          <p:blipFill rotWithShape="1">
+            <a:blip r:embed="rId2">
+              <a:alphaModFix amt="50000"/>
+              <a:extLst>
+                <a:ext uri="{28A0092B-C50C-407E-A947-70E740481C1C}">
+                  <a14:useLocalDpi xmlns:a14="http://schemas.microsoft.com/office/drawing/2010/main" val="0"/>
+                </a:ext>
+              </a:extLst>
+            </a:blip>
+            <a:srcRect t="58555" r="67375"/>
+            <a:stretch/>
+          </p:blipFill>
+          <p:spPr>
+            <a:xfrm>
+              <a:off x="10619475" y="1036308"/>
+              <a:ext cx="1364958" cy="571501"/>
+            </a:xfrm>
+            <a:prstGeom prst="rect">
+              <a:avLst/>
+            </a:prstGeom>
+          </p:spPr>
+        </p:pic>
+        <p:pic>
+          <p:nvPicPr>
+            <p:cNvPr id="14" name="Kép 13">
+              <a:extLst>
+                <a:ext uri="{FF2B5EF4-FFF2-40B4-BE49-F238E27FC236}">
+                  <a16:creationId xmlns:a16="http://schemas.microsoft.com/office/drawing/2014/main" id="{3C0678C3-DC3F-47F5-8610-DB4180EAD206}"/>
+                </a:ext>
+              </a:extLst>
+            </p:cNvPr>
+            <p:cNvPicPr>
+              <a:picLocks noChangeAspect="1"/>
+            </p:cNvPicPr>
+            <p:nvPr/>
+          </p:nvPicPr>
+          <p:blipFill rotWithShape="1">
+            <a:blip r:embed="rId2">
+              <a:alphaModFix amt="50000"/>
+              <a:extLst>
+                <a:ext uri="{28A0092B-C50C-407E-A947-70E740481C1C}">
+                  <a14:useLocalDpi xmlns:a14="http://schemas.microsoft.com/office/drawing/2010/main" val="0"/>
+                </a:ext>
+              </a:extLst>
+            </a:blip>
+            <a:srcRect l="1" r="61666" b="38896"/>
+            <a:stretch/>
+          </p:blipFill>
+          <p:spPr>
+            <a:xfrm>
+              <a:off x="10565538" y="349786"/>
+              <a:ext cx="1418895" cy="745451"/>
+            </a:xfrm>
+            <a:prstGeom prst="rect">
+              <a:avLst/>
+            </a:prstGeom>
+          </p:spPr>
+        </p:pic>
+      </p:grpSp>
+    </p:spTree>
+    <p:extLst>
+      <p:ext uri="{BB962C8B-B14F-4D97-AF65-F5344CB8AC3E}">
+        <p14:creationId xmlns:p14="http://schemas.microsoft.com/office/powerpoint/2010/main" val="1931664778"/>
+      </p:ext>
+    </p:extLst>
+  </p:cSld>
+  <p:clrMapOvr>
+    <a:masterClrMapping/>
+  </p:clrMapOvr>
+</p:sld>
+</file>
+
+<file path=ppt/slides/slide15.xml><?xml version="1.0" encoding="utf-8"?>
+<p:sld xmlns:a="http://schemas.openxmlformats.org/drawingml/2006/main" xmlns:r="http://schemas.openxmlformats.org/officeDocument/2006/relationships" xmlns:p="http://schemas.openxmlformats.org/presentationml/2006/main">
+  <p:cSld>
+    <p:bg>
+      <p:bgPr>
+        <a:solidFill>
+          <a:srgbClr val="FDF7E9"/>
+        </a:solidFill>
+        <a:effectLst/>
+      </p:bgPr>
+    </p:bg>
+    <p:spTree>
+      <p:nvGrpSpPr>
+        <p:cNvPr id="1" name=""/>
+        <p:cNvGrpSpPr/>
+        <p:nvPr/>
+      </p:nvGrpSpPr>
+      <p:grpSpPr>
+        <a:xfrm>
+          <a:off x="0" y="0"/>
+          <a:ext cx="0" cy="0"/>
+          <a:chOff x="0" y="0"/>
+          <a:chExt cx="0" cy="0"/>
+        </a:xfrm>
+      </p:grpSpPr>
+      <p:sp>
+        <p:nvSpPr>
+          <p:cNvPr id="2" name="Cím 1">
+            <a:extLst>
+              <a:ext uri="{FF2B5EF4-FFF2-40B4-BE49-F238E27FC236}">
+                <a16:creationId xmlns:a16="http://schemas.microsoft.com/office/drawing/2014/main" id="{90DA796D-D1FA-43BA-9B00-4A955CBFFB50}"/>
+              </a:ext>
+            </a:extLst>
+          </p:cNvPr>
+          <p:cNvSpPr>
+            <a:spLocks noGrp="1"/>
+          </p:cNvSpPr>
+          <p:nvPr>
+            <p:ph type="title"/>
+          </p:nvPr>
+        </p:nvSpPr>
+        <p:spPr/>
+        <p:txBody>
+          <a:bodyPr/>
+          <a:lstStyle/>
+          <a:p>
+            <a:r>
+              <a:rPr lang="hu-HU" dirty="0">
+                <a:latin typeface="Bahnschrift SemiBold" panose="020B0502040204020203" pitchFamily="34" charset="0"/>
+              </a:rPr>
+              <a:t>Munkamegosztás</a:t>
+            </a:r>
+          </a:p>
+        </p:txBody>
+      </p:sp>
+      <p:grpSp>
+        <p:nvGrpSpPr>
+          <p:cNvPr id="13" name="Csoportba foglalás 12">
+            <a:extLst>
+              <a:ext uri="{FF2B5EF4-FFF2-40B4-BE49-F238E27FC236}">
+                <a16:creationId xmlns:a16="http://schemas.microsoft.com/office/drawing/2014/main" id="{AE9C9B5C-3647-4331-A23A-21BDACE35043}"/>
+              </a:ext>
+            </a:extLst>
+          </p:cNvPr>
+          <p:cNvGrpSpPr/>
+          <p:nvPr/>
+        </p:nvGrpSpPr>
+        <p:grpSpPr>
+          <a:xfrm>
+            <a:off x="10565538" y="349786"/>
+            <a:ext cx="1418895" cy="1258023"/>
+            <a:chOff x="10565538" y="349786"/>
+            <a:chExt cx="1418895" cy="1258023"/>
+          </a:xfrm>
+        </p:grpSpPr>
+        <p:pic>
+          <p:nvPicPr>
+            <p:cNvPr id="14" name="Kép 13">
+              <a:extLst>
+                <a:ext uri="{FF2B5EF4-FFF2-40B4-BE49-F238E27FC236}">
+                  <a16:creationId xmlns:a16="http://schemas.microsoft.com/office/drawing/2014/main" id="{7BBE353C-8DD5-4D44-BF46-275684749201}"/>
+                </a:ext>
+              </a:extLst>
+            </p:cNvPr>
+            <p:cNvPicPr>
+              <a:picLocks noChangeAspect="1"/>
+            </p:cNvPicPr>
+            <p:nvPr/>
+          </p:nvPicPr>
+          <p:blipFill rotWithShape="1">
+            <a:blip r:embed="rId3">
+              <a:alphaModFix amt="50000"/>
+              <a:extLst>
+                <a:ext uri="{28A0092B-C50C-407E-A947-70E740481C1C}">
+                  <a14:useLocalDpi xmlns:a14="http://schemas.microsoft.com/office/drawing/2010/main" val="0"/>
+                </a:ext>
+              </a:extLst>
+            </a:blip>
+            <a:srcRect t="58555" r="67375"/>
+            <a:stretch/>
+          </p:blipFill>
+          <p:spPr>
+            <a:xfrm>
+              <a:off x="10619475" y="1036308"/>
+              <a:ext cx="1364958" cy="571501"/>
+            </a:xfrm>
+            <a:prstGeom prst="rect">
+              <a:avLst/>
+            </a:prstGeom>
+          </p:spPr>
+        </p:pic>
+        <p:pic>
+          <p:nvPicPr>
+            <p:cNvPr id="15" name="Kép 14">
+              <a:extLst>
+                <a:ext uri="{FF2B5EF4-FFF2-40B4-BE49-F238E27FC236}">
+                  <a16:creationId xmlns:a16="http://schemas.microsoft.com/office/drawing/2014/main" id="{B2808543-D0AE-4FEC-9190-341AB17958C0}"/>
+                </a:ext>
+              </a:extLst>
+            </p:cNvPr>
+            <p:cNvPicPr>
+              <a:picLocks noChangeAspect="1"/>
+            </p:cNvPicPr>
+            <p:nvPr/>
+          </p:nvPicPr>
+          <p:blipFill rotWithShape="1">
+            <a:blip r:embed="rId3">
+              <a:alphaModFix amt="50000"/>
+              <a:extLst>
+                <a:ext uri="{28A0092B-C50C-407E-A947-70E740481C1C}">
+                  <a14:useLocalDpi xmlns:a14="http://schemas.microsoft.com/office/drawing/2010/main" val="0"/>
+                </a:ext>
+              </a:extLst>
+            </a:blip>
+            <a:srcRect l="1" r="61666" b="38896"/>
+            <a:stretch/>
+          </p:blipFill>
+          <p:spPr>
+            <a:xfrm>
+              <a:off x="10565538" y="349786"/>
+              <a:ext cx="1418895" cy="745451"/>
+            </a:xfrm>
+            <a:prstGeom prst="rect">
+              <a:avLst/>
+            </a:prstGeom>
+          </p:spPr>
+        </p:pic>
+      </p:grpSp>
+    </p:spTree>
+    <p:extLst>
+      <p:ext uri="{BB962C8B-B14F-4D97-AF65-F5344CB8AC3E}">
+        <p14:creationId xmlns:p14="http://schemas.microsoft.com/office/powerpoint/2010/main" val="2866602286"/>
+      </p:ext>
+    </p:extLst>
+  </p:cSld>
+  <p:clrMapOvr>
+    <a:masterClrMapping/>
+  </p:clrMapOvr>
+</p:sld>
+</file>
+
+<file path=ppt/slides/slide16.xml><?xml version="1.0" encoding="utf-8"?>
+<p:sld xmlns:a="http://schemas.openxmlformats.org/drawingml/2006/main" xmlns:r="http://schemas.openxmlformats.org/officeDocument/2006/relationships" xmlns:p="http://schemas.openxmlformats.org/presentationml/2006/main">
+  <p:cSld>
+    <p:bg>
+      <p:bgPr>
+        <a:solidFill>
+          <a:srgbClr val="FDF7E9"/>
+        </a:solidFill>
+        <a:effectLst/>
+      </p:bgPr>
+    </p:bg>
+    <p:spTree>
+      <p:nvGrpSpPr>
+        <p:cNvPr id="1" name=""/>
+        <p:cNvGrpSpPr/>
+        <p:nvPr/>
+      </p:nvGrpSpPr>
+      <p:grpSpPr>
+        <a:xfrm>
+          <a:off x="0" y="0"/>
+          <a:ext cx="0" cy="0"/>
+          <a:chOff x="0" y="0"/>
+          <a:chExt cx="0" cy="0"/>
+        </a:xfrm>
+      </p:grpSpPr>
+      <p:sp>
+        <p:nvSpPr>
+          <p:cNvPr id="2" name="Cím 1">
+            <a:extLst>
+              <a:ext uri="{FF2B5EF4-FFF2-40B4-BE49-F238E27FC236}">
+                <a16:creationId xmlns:a16="http://schemas.microsoft.com/office/drawing/2014/main" id="{68775652-02D3-4343-B0A8-5C16A252BBD7}"/>
+              </a:ext>
+            </a:extLst>
+          </p:cNvPr>
+          <p:cNvSpPr>
+            <a:spLocks noGrp="1"/>
+          </p:cNvSpPr>
+          <p:nvPr>
+            <p:ph type="title"/>
+          </p:nvPr>
+        </p:nvSpPr>
+        <p:spPr/>
+        <p:txBody>
+          <a:bodyPr/>
+          <a:lstStyle/>
+          <a:p>
+            <a:r>
+              <a:rPr lang="hu-HU" dirty="0">
+                <a:latin typeface="Bahnschrift SemiBold" panose="020B0502040204020203" pitchFamily="34" charset="0"/>
+              </a:rPr>
+              <a:t>Munkamegosztás - Backend</a:t>
+            </a:r>
+          </a:p>
+        </p:txBody>
+      </p:sp>
+      <p:sp>
+        <p:nvSpPr>
+          <p:cNvPr id="3" name="Szöveg helye 2">
+            <a:extLst>
+              <a:ext uri="{FF2B5EF4-FFF2-40B4-BE49-F238E27FC236}">
+                <a16:creationId xmlns:a16="http://schemas.microsoft.com/office/drawing/2014/main" id="{632DA0C3-2B61-4113-AD5E-5C0C7B466219}"/>
+              </a:ext>
+            </a:extLst>
+          </p:cNvPr>
+          <p:cNvSpPr>
+            <a:spLocks noGrp="1"/>
+          </p:cNvSpPr>
+          <p:nvPr>
+            <p:ph type="body" idx="1"/>
+          </p:nvPr>
+        </p:nvSpPr>
+        <p:spPr/>
+        <p:txBody>
+          <a:bodyPr/>
+          <a:lstStyle/>
+          <a:p>
+            <a:r>
+              <a:rPr lang="hu-HU" dirty="0"/>
+              <a:t>Atkári Ariella</a:t>
+            </a:r>
+          </a:p>
+        </p:txBody>
+      </p:sp>
+      <p:sp>
+        <p:nvSpPr>
+          <p:cNvPr id="4" name="Tartalom helye 3">
+            <a:extLst>
+              <a:ext uri="{FF2B5EF4-FFF2-40B4-BE49-F238E27FC236}">
+                <a16:creationId xmlns:a16="http://schemas.microsoft.com/office/drawing/2014/main" id="{9B6E21CF-8DD2-4C9D-94F2-3E42E0993C13}"/>
+              </a:ext>
+            </a:extLst>
+          </p:cNvPr>
+          <p:cNvSpPr>
+            <a:spLocks noGrp="1"/>
+          </p:cNvSpPr>
+          <p:nvPr>
+            <p:ph sz="half" idx="2"/>
+          </p:nvPr>
+        </p:nvSpPr>
+        <p:spPr/>
+        <p:txBody>
+          <a:bodyPr/>
+          <a:lstStyle/>
+          <a:p>
+            <a:endParaRPr lang="hu-HU"/>
+          </a:p>
+        </p:txBody>
+      </p:sp>
+      <p:sp>
+        <p:nvSpPr>
+          <p:cNvPr id="5" name="Szöveg helye 4">
+            <a:extLst>
+              <a:ext uri="{FF2B5EF4-FFF2-40B4-BE49-F238E27FC236}">
+                <a16:creationId xmlns:a16="http://schemas.microsoft.com/office/drawing/2014/main" id="{8CF772AA-AADB-421B-9B9F-F9CBC3774658}"/>
+              </a:ext>
+            </a:extLst>
+          </p:cNvPr>
+          <p:cNvSpPr>
+            <a:spLocks noGrp="1"/>
+          </p:cNvSpPr>
+          <p:nvPr>
+            <p:ph type="body" sz="quarter" idx="3"/>
+          </p:nvPr>
+        </p:nvSpPr>
+        <p:spPr/>
+        <p:txBody>
+          <a:bodyPr/>
+          <a:lstStyle/>
+          <a:p>
+            <a:r>
+              <a:rPr lang="hu-HU" dirty="0"/>
+              <a:t>Farkas Dominik</a:t>
+            </a:r>
+          </a:p>
+        </p:txBody>
+      </p:sp>
+      <p:sp>
+        <p:nvSpPr>
+          <p:cNvPr id="6" name="Tartalom helye 5">
+            <a:extLst>
+              <a:ext uri="{FF2B5EF4-FFF2-40B4-BE49-F238E27FC236}">
+                <a16:creationId xmlns:a16="http://schemas.microsoft.com/office/drawing/2014/main" id="{9FA3B530-5977-4B61-B1B0-6F0B4C637821}"/>
+              </a:ext>
+            </a:extLst>
+          </p:cNvPr>
+          <p:cNvSpPr>
+            <a:spLocks noGrp="1"/>
+          </p:cNvSpPr>
+          <p:nvPr>
+            <p:ph sz="quarter" idx="4"/>
+          </p:nvPr>
+        </p:nvSpPr>
+        <p:spPr/>
+        <p:txBody>
+          <a:bodyPr/>
+          <a:lstStyle/>
+          <a:p>
+            <a:endParaRPr lang="hu-HU"/>
+          </a:p>
+        </p:txBody>
+      </p:sp>
+      <p:cxnSp>
+        <p:nvCxnSpPr>
+          <p:cNvPr id="8" name="Egyenes összekötő 7">
+            <a:extLst>
+              <a:ext uri="{FF2B5EF4-FFF2-40B4-BE49-F238E27FC236}">
+                <a16:creationId xmlns:a16="http://schemas.microsoft.com/office/drawing/2014/main" id="{722FCDE3-11D2-4077-A015-66490BCC018E}"/>
+              </a:ext>
+            </a:extLst>
+          </p:cNvPr>
+          <p:cNvCxnSpPr>
+            <a:cxnSpLocks/>
+          </p:cNvCxnSpPr>
+          <p:nvPr/>
+        </p:nvCxnSpPr>
+        <p:spPr>
+          <a:xfrm>
+            <a:off x="1209600" y="1738800"/>
+            <a:ext cx="9946080" cy="0"/>
+          </a:xfrm>
+          <a:prstGeom prst="line">
+            <a:avLst/>
+          </a:prstGeom>
+          <a:ln>
+            <a:solidFill>
+              <a:schemeClr val="tx1">
+                <a:lumMod val="50000"/>
+                <a:lumOff val="50000"/>
+              </a:schemeClr>
+            </a:solidFill>
+          </a:ln>
+        </p:spPr>
+        <p:style>
+          <a:lnRef idx="1">
+            <a:schemeClr val="accent1"/>
+          </a:lnRef>
+          <a:fillRef idx="0">
+            <a:schemeClr val="accent1"/>
+          </a:fillRef>
+          <a:effectRef idx="0">
+            <a:schemeClr val="accent1"/>
+          </a:effectRef>
+          <a:fontRef idx="minor">
+            <a:schemeClr val="tx1"/>
+          </a:fontRef>
+        </p:style>
+      </p:cxnSp>
+      <p:grpSp>
+        <p:nvGrpSpPr>
+          <p:cNvPr id="9" name="Csoportba foglalás 8">
+            <a:extLst>
+              <a:ext uri="{FF2B5EF4-FFF2-40B4-BE49-F238E27FC236}">
+                <a16:creationId xmlns:a16="http://schemas.microsoft.com/office/drawing/2014/main" id="{AD93B2E8-3D33-41C2-91A8-1FB692380CE5}"/>
+              </a:ext>
+            </a:extLst>
+          </p:cNvPr>
+          <p:cNvGrpSpPr/>
+          <p:nvPr/>
+        </p:nvGrpSpPr>
+        <p:grpSpPr>
+          <a:xfrm>
+            <a:off x="10565538" y="349786"/>
+            <a:ext cx="1418895" cy="1258023"/>
+            <a:chOff x="10565538" y="349786"/>
+            <a:chExt cx="1418895" cy="1258023"/>
+          </a:xfrm>
+        </p:grpSpPr>
+        <p:pic>
+          <p:nvPicPr>
+            <p:cNvPr id="10" name="Kép 9">
+              <a:extLst>
+                <a:ext uri="{FF2B5EF4-FFF2-40B4-BE49-F238E27FC236}">
+                  <a16:creationId xmlns:a16="http://schemas.microsoft.com/office/drawing/2014/main" id="{9966BA5A-A620-488E-8615-41FB1F1AE91D}"/>
+                </a:ext>
+              </a:extLst>
+            </p:cNvPr>
+            <p:cNvPicPr>
+              <a:picLocks noChangeAspect="1"/>
+            </p:cNvPicPr>
+            <p:nvPr/>
+          </p:nvPicPr>
+          <p:blipFill rotWithShape="1">
+            <a:blip r:embed="rId3">
+              <a:alphaModFix amt="50000"/>
+              <a:extLst>
+                <a:ext uri="{28A0092B-C50C-407E-A947-70E740481C1C}">
+                  <a14:useLocalDpi xmlns:a14="http://schemas.microsoft.com/office/drawing/2010/main" val="0"/>
+                </a:ext>
+              </a:extLst>
+            </a:blip>
+            <a:srcRect t="58555" r="67375"/>
+            <a:stretch/>
+          </p:blipFill>
+          <p:spPr>
+            <a:xfrm>
+              <a:off x="10619475" y="1036308"/>
+              <a:ext cx="1364958" cy="571501"/>
+            </a:xfrm>
+            <a:prstGeom prst="rect">
+              <a:avLst/>
+            </a:prstGeom>
+          </p:spPr>
+        </p:pic>
+        <p:pic>
+          <p:nvPicPr>
+            <p:cNvPr id="11" name="Kép 10">
+              <a:extLst>
+                <a:ext uri="{FF2B5EF4-FFF2-40B4-BE49-F238E27FC236}">
+                  <a16:creationId xmlns:a16="http://schemas.microsoft.com/office/drawing/2014/main" id="{3B382D26-9076-4156-8E56-6C797943E13E}"/>
+                </a:ext>
+              </a:extLst>
+            </p:cNvPr>
+            <p:cNvPicPr>
+              <a:picLocks noChangeAspect="1"/>
+            </p:cNvPicPr>
+            <p:nvPr/>
+          </p:nvPicPr>
+          <p:blipFill rotWithShape="1">
+            <a:blip r:embed="rId3">
+              <a:alphaModFix amt="50000"/>
+              <a:extLst>
+                <a:ext uri="{28A0092B-C50C-407E-A947-70E740481C1C}">
+                  <a14:useLocalDpi xmlns:a14="http://schemas.microsoft.com/office/drawing/2010/main" val="0"/>
+                </a:ext>
+              </a:extLst>
+            </a:blip>
+            <a:srcRect l="1" r="61666" b="38896"/>
+            <a:stretch/>
+          </p:blipFill>
+          <p:spPr>
+            <a:xfrm>
+              <a:off x="10565538" y="349786"/>
+              <a:ext cx="1418895" cy="745451"/>
+            </a:xfrm>
+            <a:prstGeom prst="rect">
+              <a:avLst/>
+            </a:prstGeom>
+          </p:spPr>
+        </p:pic>
+      </p:grpSp>
+    </p:spTree>
+    <p:extLst>
+      <p:ext uri="{BB962C8B-B14F-4D97-AF65-F5344CB8AC3E}">
+        <p14:creationId xmlns:p14="http://schemas.microsoft.com/office/powerpoint/2010/main" val="1034913464"/>
+      </p:ext>
+    </p:extLst>
+  </p:cSld>
+  <p:clrMapOvr>
+    <a:masterClrMapping/>
+  </p:clrMapOvr>
+</p:sld>
+</file>
+
+<file path=ppt/slides/slide17.xml><?xml version="1.0" encoding="utf-8"?>
+<p:sld xmlns:a="http://schemas.openxmlformats.org/drawingml/2006/main" xmlns:r="http://schemas.openxmlformats.org/officeDocument/2006/relationships" xmlns:p="http://schemas.openxmlformats.org/presentationml/2006/main">
+  <p:cSld>
+    <p:bg>
+      <p:bgPr>
+        <a:solidFill>
+          <a:srgbClr val="FDF7E9"/>
+        </a:solidFill>
+        <a:effectLst/>
+      </p:bgPr>
+    </p:bg>
+    <p:spTree>
+      <p:nvGrpSpPr>
+        <p:cNvPr id="1" name=""/>
+        <p:cNvGrpSpPr/>
+        <p:nvPr/>
+      </p:nvGrpSpPr>
+      <p:grpSpPr>
+        <a:xfrm>
+          <a:off x="0" y="0"/>
+          <a:ext cx="0" cy="0"/>
+          <a:chOff x="0" y="0"/>
+          <a:chExt cx="0" cy="0"/>
+        </a:xfrm>
+      </p:grpSpPr>
+      <p:sp>
+        <p:nvSpPr>
+          <p:cNvPr id="2" name="Cím 1">
+            <a:extLst>
+              <a:ext uri="{FF2B5EF4-FFF2-40B4-BE49-F238E27FC236}">
+                <a16:creationId xmlns:a16="http://schemas.microsoft.com/office/drawing/2014/main" id="{68775652-02D3-4343-B0A8-5C16A252BBD7}"/>
+              </a:ext>
+            </a:extLst>
+          </p:cNvPr>
+          <p:cNvSpPr>
+            <a:spLocks noGrp="1"/>
+          </p:cNvSpPr>
+          <p:nvPr>
+            <p:ph type="title"/>
+          </p:nvPr>
+        </p:nvSpPr>
+        <p:spPr/>
+        <p:txBody>
+          <a:bodyPr/>
+          <a:lstStyle/>
+          <a:p>
+            <a:r>
+              <a:rPr lang="hu-HU" dirty="0">
+                <a:latin typeface="Bahnschrift SemiBold" panose="020B0502040204020203" pitchFamily="34" charset="0"/>
+              </a:rPr>
+              <a:t>Munkamegosztás - Frontend</a:t>
+            </a:r>
+          </a:p>
+        </p:txBody>
+      </p:sp>
+      <p:sp>
+        <p:nvSpPr>
+          <p:cNvPr id="3" name="Szöveg helye 2">
+            <a:extLst>
+              <a:ext uri="{FF2B5EF4-FFF2-40B4-BE49-F238E27FC236}">
+                <a16:creationId xmlns:a16="http://schemas.microsoft.com/office/drawing/2014/main" id="{632DA0C3-2B61-4113-AD5E-5C0C7B466219}"/>
+              </a:ext>
+            </a:extLst>
+          </p:cNvPr>
+          <p:cNvSpPr>
+            <a:spLocks noGrp="1"/>
+          </p:cNvSpPr>
+          <p:nvPr>
+            <p:ph type="body" idx="1"/>
+          </p:nvPr>
+        </p:nvSpPr>
+        <p:spPr/>
+        <p:txBody>
+          <a:bodyPr/>
+          <a:lstStyle/>
+          <a:p>
+            <a:r>
+              <a:rPr lang="hu-HU" dirty="0"/>
+              <a:t>Atkári Ariella</a:t>
+            </a:r>
+          </a:p>
+        </p:txBody>
+      </p:sp>
+      <p:sp>
+        <p:nvSpPr>
+          <p:cNvPr id="4" name="Tartalom helye 3">
+            <a:extLst>
+              <a:ext uri="{FF2B5EF4-FFF2-40B4-BE49-F238E27FC236}">
+                <a16:creationId xmlns:a16="http://schemas.microsoft.com/office/drawing/2014/main" id="{9B6E21CF-8DD2-4C9D-94F2-3E42E0993C13}"/>
+              </a:ext>
+            </a:extLst>
+          </p:cNvPr>
+          <p:cNvSpPr>
+            <a:spLocks noGrp="1"/>
+          </p:cNvSpPr>
+          <p:nvPr>
+            <p:ph sz="half" idx="2"/>
+          </p:nvPr>
+        </p:nvSpPr>
+        <p:spPr/>
+        <p:txBody>
+          <a:bodyPr/>
+          <a:lstStyle/>
+          <a:p>
+            <a:endParaRPr lang="hu-HU"/>
+          </a:p>
+        </p:txBody>
+      </p:sp>
+      <p:sp>
+        <p:nvSpPr>
+          <p:cNvPr id="5" name="Szöveg helye 4">
+            <a:extLst>
+              <a:ext uri="{FF2B5EF4-FFF2-40B4-BE49-F238E27FC236}">
+                <a16:creationId xmlns:a16="http://schemas.microsoft.com/office/drawing/2014/main" id="{8CF772AA-AADB-421B-9B9F-F9CBC3774658}"/>
+              </a:ext>
+            </a:extLst>
+          </p:cNvPr>
+          <p:cNvSpPr>
+            <a:spLocks noGrp="1"/>
+          </p:cNvSpPr>
+          <p:nvPr>
+            <p:ph type="body" sz="quarter" idx="3"/>
+          </p:nvPr>
+        </p:nvSpPr>
+        <p:spPr/>
+        <p:txBody>
+          <a:bodyPr/>
+          <a:lstStyle/>
+          <a:p>
+            <a:r>
+              <a:rPr lang="hu-HU" dirty="0"/>
+              <a:t>Farkas Dominik</a:t>
+            </a:r>
+          </a:p>
+        </p:txBody>
+      </p:sp>
+      <p:sp>
+        <p:nvSpPr>
+          <p:cNvPr id="6" name="Tartalom helye 5">
+            <a:extLst>
+              <a:ext uri="{FF2B5EF4-FFF2-40B4-BE49-F238E27FC236}">
+                <a16:creationId xmlns:a16="http://schemas.microsoft.com/office/drawing/2014/main" id="{9FA3B530-5977-4B61-B1B0-6F0B4C637821}"/>
+              </a:ext>
+            </a:extLst>
+          </p:cNvPr>
+          <p:cNvSpPr>
+            <a:spLocks noGrp="1"/>
+          </p:cNvSpPr>
+          <p:nvPr>
+            <p:ph sz="quarter" idx="4"/>
+          </p:nvPr>
+        </p:nvSpPr>
+        <p:spPr/>
+        <p:txBody>
+          <a:bodyPr/>
+          <a:lstStyle/>
+          <a:p>
+            <a:endParaRPr lang="hu-HU"/>
+          </a:p>
+        </p:txBody>
+      </p:sp>
+      <p:grpSp>
+        <p:nvGrpSpPr>
+          <p:cNvPr id="9" name="Csoportba foglalás 8">
+            <a:extLst>
+              <a:ext uri="{FF2B5EF4-FFF2-40B4-BE49-F238E27FC236}">
+                <a16:creationId xmlns:a16="http://schemas.microsoft.com/office/drawing/2014/main" id="{9CCB05EC-19C9-456F-9487-5479DE8B814F}"/>
+              </a:ext>
+            </a:extLst>
+          </p:cNvPr>
+          <p:cNvGrpSpPr/>
+          <p:nvPr/>
+        </p:nvGrpSpPr>
+        <p:grpSpPr>
+          <a:xfrm>
+            <a:off x="10565538" y="349786"/>
+            <a:ext cx="1418895" cy="1258023"/>
+            <a:chOff x="10565538" y="349786"/>
+            <a:chExt cx="1418895" cy="1258023"/>
+          </a:xfrm>
+        </p:grpSpPr>
+        <p:pic>
+          <p:nvPicPr>
+            <p:cNvPr id="10" name="Kép 9">
+              <a:extLst>
+                <a:ext uri="{FF2B5EF4-FFF2-40B4-BE49-F238E27FC236}">
+                  <a16:creationId xmlns:a16="http://schemas.microsoft.com/office/drawing/2014/main" id="{D42462C5-EA10-4682-9368-1798FDEF05D2}"/>
+                </a:ext>
+              </a:extLst>
+            </p:cNvPr>
+            <p:cNvPicPr>
+              <a:picLocks noChangeAspect="1"/>
+            </p:cNvPicPr>
+            <p:nvPr/>
+          </p:nvPicPr>
+          <p:blipFill rotWithShape="1">
+            <a:blip r:embed="rId3">
+              <a:alphaModFix amt="50000"/>
+              <a:extLst>
+                <a:ext uri="{28A0092B-C50C-407E-A947-70E740481C1C}">
+                  <a14:useLocalDpi xmlns:a14="http://schemas.microsoft.com/office/drawing/2010/main" val="0"/>
+                </a:ext>
+              </a:extLst>
+            </a:blip>
+            <a:srcRect t="58555" r="67375"/>
+            <a:stretch/>
+          </p:blipFill>
+          <p:spPr>
+            <a:xfrm>
+              <a:off x="10619475" y="1036308"/>
+              <a:ext cx="1364958" cy="571501"/>
+            </a:xfrm>
+            <a:prstGeom prst="rect">
+              <a:avLst/>
+            </a:prstGeom>
+          </p:spPr>
+        </p:pic>
+        <p:pic>
+          <p:nvPicPr>
+            <p:cNvPr id="11" name="Kép 10">
+              <a:extLst>
+                <a:ext uri="{FF2B5EF4-FFF2-40B4-BE49-F238E27FC236}">
+                  <a16:creationId xmlns:a16="http://schemas.microsoft.com/office/drawing/2014/main" id="{5CB6D66D-0490-469C-A967-3D189A93B8C1}"/>
+                </a:ext>
+              </a:extLst>
+            </p:cNvPr>
+            <p:cNvPicPr>
+              <a:picLocks noChangeAspect="1"/>
+            </p:cNvPicPr>
+            <p:nvPr/>
+          </p:nvPicPr>
+          <p:blipFill rotWithShape="1">
+            <a:blip r:embed="rId3">
+              <a:alphaModFix amt="50000"/>
+              <a:extLst>
+                <a:ext uri="{28A0092B-C50C-407E-A947-70E740481C1C}">
+                  <a14:useLocalDpi xmlns:a14="http://schemas.microsoft.com/office/drawing/2010/main" val="0"/>
+                </a:ext>
+              </a:extLst>
+            </a:blip>
+            <a:srcRect l="1" r="61666" b="38896"/>
+            <a:stretch/>
+          </p:blipFill>
+          <p:spPr>
+            <a:xfrm>
+              <a:off x="10565538" y="349786"/>
+              <a:ext cx="1418895" cy="745451"/>
+            </a:xfrm>
+            <a:prstGeom prst="rect">
+              <a:avLst/>
+            </a:prstGeom>
+          </p:spPr>
+        </p:pic>
+      </p:grpSp>
+    </p:spTree>
+    <p:extLst>
+      <p:ext uri="{BB962C8B-B14F-4D97-AF65-F5344CB8AC3E}">
+        <p14:creationId xmlns:p14="http://schemas.microsoft.com/office/powerpoint/2010/main" val="2386490870"/>
+      </p:ext>
+    </p:extLst>
+  </p:cSld>
+  <p:clrMapOvr>
+    <a:masterClrMapping/>
+  </p:clrMapOvr>
+</p:sld>
+</file>
+
+<file path=ppt/slides/slide18.xml><?xml version="1.0" encoding="utf-8"?>
+<p:sld xmlns:a="http://schemas.openxmlformats.org/drawingml/2006/main" xmlns:r="http://schemas.openxmlformats.org/officeDocument/2006/relationships" xmlns:p="http://schemas.openxmlformats.org/presentationml/2006/main">
+  <p:cSld>
+    <p:bg>
+      <p:bgPr>
+        <a:solidFill>
+          <a:srgbClr val="FDF7E9"/>
+        </a:solidFill>
+        <a:effectLst/>
+      </p:bgPr>
+    </p:bg>
+    <p:spTree>
+      <p:nvGrpSpPr>
+        <p:cNvPr id="1" name=""/>
+        <p:cNvGrpSpPr/>
+        <p:nvPr/>
+      </p:nvGrpSpPr>
+      <p:grpSpPr>
+        <a:xfrm>
+          <a:off x="0" y="0"/>
+          <a:ext cx="0" cy="0"/>
+          <a:chOff x="0" y="0"/>
+          <a:chExt cx="0" cy="0"/>
+        </a:xfrm>
+      </p:grpSpPr>
+      <p:cxnSp>
+        <p:nvCxnSpPr>
+          <p:cNvPr id="2" name="Egyenes összekötő 1">
+            <a:extLst>
+              <a:ext uri="{FF2B5EF4-FFF2-40B4-BE49-F238E27FC236}">
+                <a16:creationId xmlns:a16="http://schemas.microsoft.com/office/drawing/2014/main" id="{20EF3F3C-374B-461F-BAF4-6C213DE7C8BB}"/>
+              </a:ext>
+            </a:extLst>
+          </p:cNvPr>
+          <p:cNvCxnSpPr>
+            <a:cxnSpLocks/>
+          </p:cNvCxnSpPr>
+          <p:nvPr/>
+        </p:nvCxnSpPr>
+        <p:spPr>
+          <a:xfrm>
+            <a:off x="1209675" y="1737360"/>
+            <a:ext cx="9946005" cy="0"/>
+          </a:xfrm>
+          <a:prstGeom prst="line">
+            <a:avLst/>
+          </a:prstGeom>
+          <a:ln>
+            <a:solidFill>
+              <a:schemeClr val="tx1">
+                <a:lumMod val="50000"/>
+                <a:lumOff val="50000"/>
+              </a:schemeClr>
+            </a:solidFill>
+          </a:ln>
+        </p:spPr>
+        <p:style>
+          <a:lnRef idx="1">
+            <a:schemeClr val="accent1"/>
+          </a:lnRef>
+          <a:fillRef idx="0">
+            <a:schemeClr val="accent1"/>
+          </a:fillRef>
+          <a:effectRef idx="0">
+            <a:schemeClr val="accent1"/>
+          </a:effectRef>
+          <a:fontRef idx="minor">
+            <a:schemeClr val="tx1"/>
+          </a:fontRef>
+        </p:style>
+      </p:cxnSp>
+      <p:pic>
+        <p:nvPicPr>
+          <p:cNvPr id="3" name="Kép 2">
+            <a:extLst>
+              <a:ext uri="{FF2B5EF4-FFF2-40B4-BE49-F238E27FC236}">
+                <a16:creationId xmlns:a16="http://schemas.microsoft.com/office/drawing/2014/main" id="{FE91A941-BC8A-4E2A-B780-F3F3D6A9B3E3}"/>
+              </a:ext>
+            </a:extLst>
+          </p:cNvPr>
+          <p:cNvPicPr>
+            <a:picLocks noChangeAspect="1"/>
+          </p:cNvPicPr>
+          <p:nvPr/>
+        </p:nvPicPr>
+        <p:blipFill rotWithShape="1">
+          <a:blip r:embed="rId2">
+            <a:alphaModFix amt="50000"/>
+            <a:extLst>
+              <a:ext uri="{28A0092B-C50C-407E-A947-70E740481C1C}">
+                <a14:useLocalDpi xmlns:a14="http://schemas.microsoft.com/office/drawing/2010/main" val="0"/>
+              </a:ext>
+            </a:extLst>
+          </a:blip>
+          <a:srcRect t="58555" r="67375"/>
+          <a:stretch/>
+        </p:blipFill>
+        <p:spPr>
+          <a:xfrm>
+            <a:off x="10619475" y="1036308"/>
+            <a:ext cx="1364958" cy="571501"/>
+          </a:xfrm>
+          <a:prstGeom prst="rect">
+            <a:avLst/>
+          </a:prstGeom>
+        </p:spPr>
+      </p:pic>
+      <p:pic>
+        <p:nvPicPr>
+          <p:cNvPr id="4" name="Kép 3">
+            <a:extLst>
+              <a:ext uri="{FF2B5EF4-FFF2-40B4-BE49-F238E27FC236}">
+                <a16:creationId xmlns:a16="http://schemas.microsoft.com/office/drawing/2014/main" id="{78D3DB18-E771-4DF0-84FA-206E8FA41883}"/>
+              </a:ext>
+            </a:extLst>
+          </p:cNvPr>
+          <p:cNvPicPr>
+            <a:picLocks noChangeAspect="1"/>
+          </p:cNvPicPr>
+          <p:nvPr/>
+        </p:nvPicPr>
+        <p:blipFill rotWithShape="1">
+          <a:blip r:embed="rId2">
+            <a:alphaModFix amt="50000"/>
+            <a:extLst>
+              <a:ext uri="{28A0092B-C50C-407E-A947-70E740481C1C}">
+                <a14:useLocalDpi xmlns:a14="http://schemas.microsoft.com/office/drawing/2010/main" val="0"/>
+              </a:ext>
+            </a:extLst>
+          </a:blip>
+          <a:srcRect l="1" r="61666" b="38896"/>
+          <a:stretch/>
+        </p:blipFill>
+        <p:spPr>
+          <a:xfrm>
+            <a:off x="10565538" y="349786"/>
+            <a:ext cx="1418895" cy="745451"/>
+          </a:xfrm>
+          <a:prstGeom prst="rect">
+            <a:avLst/>
+          </a:prstGeom>
+        </p:spPr>
+      </p:pic>
+      <p:sp>
+        <p:nvSpPr>
+          <p:cNvPr id="5" name="Cím 1">
+            <a:extLst>
+              <a:ext uri="{FF2B5EF4-FFF2-40B4-BE49-F238E27FC236}">
+                <a16:creationId xmlns:a16="http://schemas.microsoft.com/office/drawing/2014/main" id="{175A5A3F-6F8F-4002-ADBD-CD8C93ECEEE1}"/>
+              </a:ext>
+            </a:extLst>
+          </p:cNvPr>
+          <p:cNvSpPr txBox="1">
+            <a:spLocks/>
+          </p:cNvSpPr>
+          <p:nvPr/>
+        </p:nvSpPr>
+        <p:spPr>
+          <a:xfrm>
+            <a:off x="1097280" y="286603"/>
+            <a:ext cx="10058400" cy="1450757"/>
+          </a:xfrm>
+          <a:prstGeom prst="rect">
+            <a:avLst/>
+          </a:prstGeom>
+        </p:spPr>
+        <p:txBody>
+          <a:bodyPr anchor="b"/>
+          <a:lstStyle>
+            <a:lvl1pPr algn="l" defTabSz="914400" rtl="0" eaLnBrk="1" latinLnBrk="0" hangingPunct="1">
+              <a:lnSpc>
+                <a:spcPct val="85000"/>
+              </a:lnSpc>
+              <a:spcBef>
+                <a:spcPct val="0"/>
+              </a:spcBef>
+              <a:buNone/>
+              <a:defRPr sz="4800" kern="1200" spc="-50" baseline="0">
+                <a:solidFill>
+                  <a:schemeClr val="tx1">
+                    <a:lumMod val="75000"/>
+                    <a:lumOff val="25000"/>
+                  </a:schemeClr>
+                </a:solidFill>
+                <a:latin typeface="+mj-lt"/>
+                <a:ea typeface="+mj-ea"/>
+                <a:cs typeface="+mj-cs"/>
+              </a:defRPr>
+            </a:lvl1pPr>
+          </a:lstStyle>
+          <a:p>
+            <a:r>
+              <a:rPr lang="hu-HU" b="1" dirty="0">
+                <a:latin typeface="Bahnschrift SemiBold" panose="020B0502040204020203" pitchFamily="34" charset="0"/>
+              </a:rPr>
+              <a:t>Fejlesztési lehetőségek</a:t>
+            </a:r>
+          </a:p>
+        </p:txBody>
+      </p:sp>
+      <p:sp>
+        <p:nvSpPr>
+          <p:cNvPr id="6" name="Tartalom helye 2">
+            <a:extLst>
+              <a:ext uri="{FF2B5EF4-FFF2-40B4-BE49-F238E27FC236}">
+                <a16:creationId xmlns:a16="http://schemas.microsoft.com/office/drawing/2014/main" id="{654E07C9-ACD1-4AF5-9ECE-29158423F871}"/>
+              </a:ext>
+            </a:extLst>
+          </p:cNvPr>
+          <p:cNvSpPr txBox="1">
+            <a:spLocks/>
+          </p:cNvSpPr>
+          <p:nvPr/>
+        </p:nvSpPr>
+        <p:spPr>
+          <a:xfrm>
+            <a:off x="1097280" y="1845734"/>
+            <a:ext cx="10058400" cy="4023360"/>
+          </a:xfrm>
+          <a:prstGeom prst="rect">
+            <a:avLst/>
+          </a:prstGeom>
+        </p:spPr>
+        <p:txBody>
+          <a:bodyPr/>
+          <a:lstStyle>
+            <a:lvl1pPr marL="91440" indent="-91440" algn="l" defTabSz="914400" rtl="0" eaLnBrk="1" latinLnBrk="0" hangingPunct="1">
+              <a:lnSpc>
+                <a:spcPct val="90000"/>
+              </a:lnSpc>
+              <a:spcBef>
+                <a:spcPts val="1200"/>
+              </a:spcBef>
+              <a:spcAft>
+                <a:spcPts val="200"/>
+              </a:spcAft>
+              <a:buClr>
+                <a:schemeClr val="accent1"/>
+              </a:buClr>
+              <a:buSzPct val="100000"/>
+              <a:buFont typeface="Calibri" panose="020F0502020204030204" pitchFamily="34" charset="0"/>
+              <a:buChar char=" "/>
+              <a:defRPr sz="2000" kern="1200">
+                <a:solidFill>
+                  <a:schemeClr val="tx1">
+                    <a:lumMod val="75000"/>
+                    <a:lumOff val="25000"/>
+                  </a:schemeClr>
+                </a:solidFill>
+                <a:latin typeface="+mn-lt"/>
+                <a:ea typeface="+mn-ea"/>
+                <a:cs typeface="+mn-cs"/>
+              </a:defRPr>
+            </a:lvl1pPr>
+            <a:lvl2pPr marL="384048" indent="-182880" algn="l" defTabSz="914400" rtl="0" eaLnBrk="1" latinLnBrk="0" hangingPunct="1">
+              <a:lnSpc>
+                <a:spcPct val="90000"/>
+              </a:lnSpc>
+              <a:spcBef>
+                <a:spcPts val="200"/>
+              </a:spcBef>
+              <a:spcAft>
+                <a:spcPts val="400"/>
+              </a:spcAft>
+              <a:buClr>
+                <a:schemeClr val="accent1"/>
+              </a:buClr>
+              <a:buFont typeface="Calibri" pitchFamily="34" charset="0"/>
+              <a:buChar char="◦"/>
+              <a:defRPr sz="1800" kern="1200">
+                <a:solidFill>
+                  <a:schemeClr val="tx1">
+                    <a:lumMod val="75000"/>
+                    <a:lumOff val="25000"/>
+                  </a:schemeClr>
+                </a:solidFill>
+                <a:latin typeface="+mn-lt"/>
+                <a:ea typeface="+mn-ea"/>
+                <a:cs typeface="+mn-cs"/>
+              </a:defRPr>
+            </a:lvl2pPr>
+            <a:lvl3pPr marL="566928" indent="-182880" algn="l" defTabSz="914400" rtl="0" eaLnBrk="1" latinLnBrk="0" hangingPunct="1">
+              <a:lnSpc>
+                <a:spcPct val="90000"/>
+              </a:lnSpc>
+              <a:spcBef>
+                <a:spcPts val="200"/>
+              </a:spcBef>
+              <a:spcAft>
+                <a:spcPts val="400"/>
+              </a:spcAft>
+              <a:buClr>
+                <a:schemeClr val="accent1"/>
+              </a:buClr>
+              <a:buFont typeface="Calibri" pitchFamily="34" charset="0"/>
+              <a:buChar char="◦"/>
+              <a:defRPr sz="1400" kern="1200">
+                <a:solidFill>
+                  <a:schemeClr val="tx1">
+                    <a:lumMod val="75000"/>
+                    <a:lumOff val="25000"/>
+                  </a:schemeClr>
+                </a:solidFill>
+                <a:latin typeface="+mn-lt"/>
+                <a:ea typeface="+mn-ea"/>
+                <a:cs typeface="+mn-cs"/>
+              </a:defRPr>
+            </a:lvl3pPr>
+            <a:lvl4pPr marL="749808" indent="-182880" algn="l" defTabSz="914400" rtl="0" eaLnBrk="1" latinLnBrk="0" hangingPunct="1">
+              <a:lnSpc>
+                <a:spcPct val="90000"/>
+              </a:lnSpc>
+              <a:spcBef>
+                <a:spcPts val="200"/>
+              </a:spcBef>
+              <a:spcAft>
+                <a:spcPts val="400"/>
+              </a:spcAft>
+              <a:buClr>
+                <a:schemeClr val="accent1"/>
+              </a:buClr>
+              <a:buFont typeface="Calibri" pitchFamily="34" charset="0"/>
+              <a:buChar char="◦"/>
+              <a:defRPr sz="1400" kern="1200">
+                <a:solidFill>
+                  <a:schemeClr val="tx1">
+                    <a:lumMod val="75000"/>
+                    <a:lumOff val="25000"/>
+                  </a:schemeClr>
+                </a:solidFill>
+                <a:latin typeface="+mn-lt"/>
+                <a:ea typeface="+mn-ea"/>
+                <a:cs typeface="+mn-cs"/>
+              </a:defRPr>
+            </a:lvl4pPr>
+            <a:lvl5pPr marL="932688" indent="-182880" algn="l" defTabSz="914400" rtl="0" eaLnBrk="1" latinLnBrk="0" hangingPunct="1">
+              <a:lnSpc>
+                <a:spcPct val="90000"/>
+              </a:lnSpc>
+              <a:spcBef>
+                <a:spcPts val="200"/>
+              </a:spcBef>
+              <a:spcAft>
+                <a:spcPts val="400"/>
+              </a:spcAft>
+              <a:buClr>
+                <a:schemeClr val="accent1"/>
+              </a:buClr>
+              <a:buFont typeface="Calibri" pitchFamily="34" charset="0"/>
+              <a:buChar char="◦"/>
+              <a:defRPr sz="1400" kern="1200">
+                <a:solidFill>
+                  <a:schemeClr val="tx1">
+                    <a:lumMod val="75000"/>
+                    <a:lumOff val="25000"/>
+                  </a:schemeClr>
+                </a:solidFill>
+                <a:latin typeface="+mn-lt"/>
+                <a:ea typeface="+mn-ea"/>
+                <a:cs typeface="+mn-cs"/>
+              </a:defRPr>
+            </a:lvl5pPr>
+            <a:lvl6pPr marL="1100000" indent="-228600" algn="l" defTabSz="914400" rtl="0" eaLnBrk="1" latinLnBrk="0" hangingPunct="1">
+              <a:lnSpc>
+                <a:spcPct val="90000"/>
+              </a:lnSpc>
+              <a:spcBef>
+                <a:spcPts val="200"/>
+              </a:spcBef>
+              <a:spcAft>
+                <a:spcPts val="400"/>
+              </a:spcAft>
+              <a:buClr>
+                <a:schemeClr val="accent1"/>
+              </a:buClr>
+              <a:buFont typeface="Calibri" pitchFamily="34" charset="0"/>
+              <a:buChar char="◦"/>
+              <a:defRPr sz="1400" kern="1200">
+                <a:solidFill>
+                  <a:schemeClr val="tx1">
+                    <a:lumMod val="75000"/>
+                    <a:lumOff val="25000"/>
+                  </a:schemeClr>
+                </a:solidFill>
+                <a:latin typeface="+mn-lt"/>
+                <a:ea typeface="+mn-ea"/>
+                <a:cs typeface="+mn-cs"/>
+              </a:defRPr>
+            </a:lvl6pPr>
+            <a:lvl7pPr marL="1300000" indent="-228600" algn="l" defTabSz="914400" rtl="0" eaLnBrk="1" latinLnBrk="0" hangingPunct="1">
+              <a:lnSpc>
+                <a:spcPct val="90000"/>
+              </a:lnSpc>
+              <a:spcBef>
+                <a:spcPts val="200"/>
+              </a:spcBef>
+              <a:spcAft>
+                <a:spcPts val="400"/>
+              </a:spcAft>
+              <a:buClr>
+                <a:schemeClr val="accent1"/>
+              </a:buClr>
+              <a:buFont typeface="Calibri" pitchFamily="34" charset="0"/>
+              <a:buChar char="◦"/>
+              <a:defRPr sz="1400" kern="1200">
+                <a:solidFill>
+                  <a:schemeClr val="tx1">
+                    <a:lumMod val="75000"/>
+                    <a:lumOff val="25000"/>
+                  </a:schemeClr>
+                </a:solidFill>
+                <a:latin typeface="+mn-lt"/>
+                <a:ea typeface="+mn-ea"/>
+                <a:cs typeface="+mn-cs"/>
+              </a:defRPr>
+            </a:lvl7pPr>
+            <a:lvl8pPr marL="1500000" indent="-228600" algn="l" defTabSz="914400" rtl="0" eaLnBrk="1" latinLnBrk="0" hangingPunct="1">
+              <a:lnSpc>
+                <a:spcPct val="90000"/>
+              </a:lnSpc>
+              <a:spcBef>
+                <a:spcPts val="200"/>
+              </a:spcBef>
+              <a:spcAft>
+                <a:spcPts val="400"/>
+              </a:spcAft>
+              <a:buClr>
+                <a:schemeClr val="accent1"/>
+              </a:buClr>
+              <a:buFont typeface="Calibri" pitchFamily="34" charset="0"/>
+              <a:buChar char="◦"/>
+              <a:defRPr sz="1400" kern="1200">
+                <a:solidFill>
+                  <a:schemeClr val="tx1">
+                    <a:lumMod val="75000"/>
+                    <a:lumOff val="25000"/>
+                  </a:schemeClr>
+                </a:solidFill>
+                <a:latin typeface="+mn-lt"/>
+                <a:ea typeface="+mn-ea"/>
+                <a:cs typeface="+mn-cs"/>
+              </a:defRPr>
+            </a:lvl8pPr>
+            <a:lvl9pPr marL="1700000" indent="-228600" algn="l" defTabSz="914400" rtl="0" eaLnBrk="1" latinLnBrk="0" hangingPunct="1">
+              <a:lnSpc>
+                <a:spcPct val="90000"/>
+              </a:lnSpc>
+              <a:spcBef>
+                <a:spcPts val="200"/>
+              </a:spcBef>
+              <a:spcAft>
+                <a:spcPts val="400"/>
+              </a:spcAft>
+              <a:buClr>
+                <a:schemeClr val="accent1"/>
+              </a:buClr>
+              <a:buFont typeface="Calibri" pitchFamily="34" charset="0"/>
+              <a:buChar char="◦"/>
+              <a:defRPr sz="1400" kern="1200">
+                <a:solidFill>
+                  <a:schemeClr val="tx1">
+                    <a:lumMod val="75000"/>
+                    <a:lumOff val="25000"/>
+                  </a:schemeClr>
+                </a:solidFill>
+                <a:latin typeface="+mn-lt"/>
+                <a:ea typeface="+mn-ea"/>
+                <a:cs typeface="+mn-cs"/>
+              </a:defRPr>
+            </a:lvl9pPr>
+          </a:lstStyle>
+          <a:p>
+            <a:pPr lvl="1">
+              <a:lnSpc>
+                <a:spcPct val="130000"/>
+              </a:lnSpc>
+              <a:buFont typeface="Arial" panose="020B0604020202020204" pitchFamily="34" charset="0"/>
+              <a:buChar char="•"/>
+            </a:pPr>
+            <a:r>
+              <a:rPr lang="hu-HU" sz="2000"/>
+              <a:t>Mobilalkalmazás</a:t>
+            </a:r>
+          </a:p>
+          <a:p>
+            <a:pPr lvl="1">
+              <a:lnSpc>
+                <a:spcPct val="130000"/>
+              </a:lnSpc>
+              <a:buFont typeface="Arial" panose="020B0604020202020204" pitchFamily="34" charset="0"/>
+              <a:buChar char="•"/>
+            </a:pPr>
+            <a:r>
+              <a:rPr lang="hu-HU" sz="2000"/>
+              <a:t>Értesítés küldés</a:t>
+            </a:r>
+          </a:p>
+          <a:p>
+            <a:pPr lvl="1">
+              <a:lnSpc>
+                <a:spcPct val="130000"/>
+              </a:lnSpc>
+              <a:buFont typeface="Arial" panose="020B0604020202020204" pitchFamily="34" charset="0"/>
+              <a:buChar char="•"/>
+            </a:pPr>
+            <a:r>
+              <a:rPr lang="hu-HU" sz="2000"/>
+              <a:t>Több iskolára, több szolgáltatóra bontás</a:t>
+            </a:r>
+          </a:p>
+          <a:p>
+            <a:pPr lvl="1">
+              <a:lnSpc>
+                <a:spcPct val="130000"/>
+              </a:lnSpc>
+              <a:buFont typeface="Arial" panose="020B0604020202020204" pitchFamily="34" charset="0"/>
+              <a:buChar char="•"/>
+            </a:pPr>
+            <a:r>
+              <a:rPr lang="hu-HU" sz="2000"/>
+              <a:t>Ételek értékelése</a:t>
+            </a:r>
+          </a:p>
+          <a:p>
+            <a:pPr lvl="1">
+              <a:lnSpc>
+                <a:spcPct val="130000"/>
+              </a:lnSpc>
+              <a:buFont typeface="Arial" panose="020B0604020202020204" pitchFamily="34" charset="0"/>
+              <a:buChar char="•"/>
+            </a:pPr>
+            <a:r>
+              <a:rPr lang="hu-HU" sz="2000"/>
+              <a:t>Étkeztetési rend osztályokra, csoportokra bontva</a:t>
+            </a:r>
+          </a:p>
+          <a:p>
+            <a:pPr lvl="1">
+              <a:lnSpc>
+                <a:spcPct val="130000"/>
+              </a:lnSpc>
+              <a:buFont typeface="Arial" panose="020B0604020202020204" pitchFamily="34" charset="0"/>
+              <a:buChar char="•"/>
+            </a:pPr>
+            <a:r>
+              <a:rPr lang="hu-HU" sz="2000"/>
+              <a:t>Fizetés online (SimplePay)</a:t>
+            </a:r>
+          </a:p>
+          <a:p>
+            <a:pPr lvl="1">
+              <a:lnSpc>
+                <a:spcPct val="130000"/>
+              </a:lnSpc>
+              <a:buFont typeface="Arial" panose="020B0604020202020204" pitchFamily="34" charset="0"/>
+              <a:buChar char="•"/>
+            </a:pPr>
+            <a:r>
+              <a:rPr lang="hu-HU" sz="2000"/>
+              <a:t>Egyenleg feltöltése??</a:t>
+            </a:r>
+          </a:p>
+          <a:p>
+            <a:pPr marL="201168" lvl="1" indent="0">
+              <a:buFont typeface="Calibri" pitchFamily="34" charset="0"/>
+              <a:buNone/>
+            </a:pPr>
+            <a:endParaRPr lang="hu-HU" dirty="0"/>
+          </a:p>
+        </p:txBody>
+      </p:sp>
+    </p:spTree>
+    <p:extLst>
+      <p:ext uri="{BB962C8B-B14F-4D97-AF65-F5344CB8AC3E}">
+        <p14:creationId xmlns:p14="http://schemas.microsoft.com/office/powerpoint/2010/main" val="1380079028"/>
+      </p:ext>
+    </p:extLst>
+  </p:cSld>
+  <p:clrMapOvr>
+    <a:masterClrMapping/>
+  </p:clrMapOvr>
+</p:sld>
+</file>
+
+<file path=ppt/slides/slide19.xml><?xml version="1.0" encoding="utf-8"?>
+<p:sld xmlns:a="http://schemas.openxmlformats.org/drawingml/2006/main" xmlns:r="http://schemas.openxmlformats.org/officeDocument/2006/relationships" xmlns:p="http://schemas.openxmlformats.org/presentationml/2006/main">
+  <p:cSld>
+    <p:bg>
+      <p:bgPr>
+        <a:solidFill>
+          <a:srgbClr val="FDF7E9"/>
+        </a:solidFill>
+        <a:effectLst/>
+      </p:bgPr>
+    </p:bg>
+    <p:spTree>
+      <p:nvGrpSpPr>
+        <p:cNvPr id="1" name=""/>
+        <p:cNvGrpSpPr/>
+        <p:nvPr/>
+      </p:nvGrpSpPr>
+      <p:grpSpPr>
+        <a:xfrm>
+          <a:off x="0" y="0"/>
+          <a:ext cx="0" cy="0"/>
+          <a:chOff x="0" y="0"/>
+          <a:chExt cx="0" cy="0"/>
+        </a:xfrm>
+      </p:grpSpPr>
+      <p:cxnSp>
+        <p:nvCxnSpPr>
+          <p:cNvPr id="2" name="Egyenes összekötő 1">
+            <a:extLst>
+              <a:ext uri="{FF2B5EF4-FFF2-40B4-BE49-F238E27FC236}">
+                <a16:creationId xmlns:a16="http://schemas.microsoft.com/office/drawing/2014/main" id="{20EF3F3C-374B-461F-BAF4-6C213DE7C8BB}"/>
+              </a:ext>
+            </a:extLst>
+          </p:cNvPr>
+          <p:cNvCxnSpPr>
+            <a:cxnSpLocks/>
+          </p:cNvCxnSpPr>
+          <p:nvPr/>
+        </p:nvCxnSpPr>
+        <p:spPr>
+          <a:xfrm>
+            <a:off x="3205163" y="2154342"/>
+            <a:ext cx="5781675" cy="0"/>
+          </a:xfrm>
+          <a:prstGeom prst="line">
+            <a:avLst/>
+          </a:prstGeom>
+          <a:ln>
+            <a:solidFill>
+              <a:schemeClr val="tx1">
+                <a:lumMod val="50000"/>
+                <a:lumOff val="50000"/>
+              </a:schemeClr>
+            </a:solidFill>
+          </a:ln>
+        </p:spPr>
+        <p:style>
+          <a:lnRef idx="1">
+            <a:schemeClr val="accent1"/>
+          </a:lnRef>
+          <a:fillRef idx="0">
+            <a:schemeClr val="accent1"/>
+          </a:fillRef>
+          <a:effectRef idx="0">
+            <a:schemeClr val="accent1"/>
+          </a:effectRef>
+          <a:fontRef idx="minor">
+            <a:schemeClr val="tx1"/>
+          </a:fontRef>
+        </p:style>
+      </p:cxnSp>
+      <p:pic>
+        <p:nvPicPr>
+          <p:cNvPr id="3" name="Kép 2">
+            <a:extLst>
+              <a:ext uri="{FF2B5EF4-FFF2-40B4-BE49-F238E27FC236}">
+                <a16:creationId xmlns:a16="http://schemas.microsoft.com/office/drawing/2014/main" id="{FE91A941-BC8A-4E2A-B780-F3F3D6A9B3E3}"/>
+              </a:ext>
+            </a:extLst>
+          </p:cNvPr>
+          <p:cNvPicPr>
+            <a:picLocks noChangeAspect="1"/>
+          </p:cNvPicPr>
+          <p:nvPr/>
+        </p:nvPicPr>
+        <p:blipFill rotWithShape="1">
+          <a:blip r:embed="rId2">
+            <a:alphaModFix/>
+            <a:extLst>
+              <a:ext uri="{28A0092B-C50C-407E-A947-70E740481C1C}">
+                <a14:useLocalDpi xmlns:a14="http://schemas.microsoft.com/office/drawing/2010/main" val="0"/>
+              </a:ext>
+            </a:extLst>
+          </a:blip>
+          <a:srcRect l="-1" t="58555" r="1153"/>
+          <a:stretch/>
+        </p:blipFill>
+        <p:spPr>
+          <a:xfrm>
+            <a:off x="3864953" y="1462194"/>
+            <a:ext cx="4462094" cy="616623"/>
+          </a:xfrm>
+          <a:prstGeom prst="rect">
+            <a:avLst/>
+          </a:prstGeom>
+        </p:spPr>
+      </p:pic>
+      <p:pic>
+        <p:nvPicPr>
+          <p:cNvPr id="4" name="Kép 3">
+            <a:extLst>
+              <a:ext uri="{FF2B5EF4-FFF2-40B4-BE49-F238E27FC236}">
+                <a16:creationId xmlns:a16="http://schemas.microsoft.com/office/drawing/2014/main" id="{78D3DB18-E771-4DF0-84FA-206E8FA41883}"/>
+              </a:ext>
+            </a:extLst>
+          </p:cNvPr>
+          <p:cNvPicPr>
+            <a:picLocks noChangeAspect="1"/>
+          </p:cNvPicPr>
+          <p:nvPr/>
+        </p:nvPicPr>
+        <p:blipFill rotWithShape="1">
+          <a:blip r:embed="rId2">
+            <a:alphaModFix/>
+            <a:extLst>
+              <a:ext uri="{28A0092B-C50C-407E-A947-70E740481C1C}">
+                <a14:useLocalDpi xmlns:a14="http://schemas.microsoft.com/office/drawing/2010/main" val="0"/>
+              </a:ext>
+            </a:extLst>
+          </a:blip>
+          <a:srcRect l="-1" r="-295" b="38896"/>
+          <a:stretch/>
+        </p:blipFill>
+        <p:spPr>
+          <a:xfrm>
+            <a:off x="3817995" y="581028"/>
+            <a:ext cx="4556011" cy="914838"/>
+          </a:xfrm>
+          <a:prstGeom prst="rect">
+            <a:avLst/>
+          </a:prstGeom>
+        </p:spPr>
+      </p:pic>
+      <p:sp>
+        <p:nvSpPr>
+          <p:cNvPr id="5" name="Cím 1">
+            <a:extLst>
+              <a:ext uri="{FF2B5EF4-FFF2-40B4-BE49-F238E27FC236}">
+                <a16:creationId xmlns:a16="http://schemas.microsoft.com/office/drawing/2014/main" id="{175A5A3F-6F8F-4002-ADBD-CD8C93ECEEE1}"/>
+              </a:ext>
+            </a:extLst>
+          </p:cNvPr>
+          <p:cNvSpPr txBox="1">
+            <a:spLocks/>
+          </p:cNvSpPr>
+          <p:nvPr/>
+        </p:nvSpPr>
+        <p:spPr>
+          <a:xfrm>
+            <a:off x="1066800" y="2703622"/>
+            <a:ext cx="10058400" cy="1450757"/>
+          </a:xfrm>
+          <a:prstGeom prst="rect">
+            <a:avLst/>
+          </a:prstGeom>
+        </p:spPr>
+        <p:txBody>
+          <a:bodyPr anchor="ctr"/>
+          <a:lstStyle>
+            <a:lvl1pPr algn="l" defTabSz="914400" rtl="0" eaLnBrk="1" latinLnBrk="0" hangingPunct="1">
+              <a:lnSpc>
+                <a:spcPct val="85000"/>
+              </a:lnSpc>
+              <a:spcBef>
+                <a:spcPct val="0"/>
+              </a:spcBef>
+              <a:buNone/>
+              <a:defRPr sz="4800" kern="1200" spc="-50" baseline="0">
+                <a:solidFill>
+                  <a:schemeClr val="tx1">
+                    <a:lumMod val="75000"/>
+                    <a:lumOff val="25000"/>
+                  </a:schemeClr>
+                </a:solidFill>
+                <a:latin typeface="+mj-lt"/>
+                <a:ea typeface="+mj-ea"/>
+                <a:cs typeface="+mj-cs"/>
+              </a:defRPr>
+            </a:lvl1pPr>
+          </a:lstStyle>
+          <a:p>
+            <a:pPr algn="ctr"/>
+            <a:r>
+              <a:rPr lang="hu-HU" sz="6000" b="1" dirty="0" err="1">
+                <a:latin typeface="Bahnschrift SemiBold" panose="020B0502040204020203" pitchFamily="34" charset="0"/>
+              </a:rPr>
+              <a:t>Demo</a:t>
+            </a:r>
+            <a:endParaRPr lang="hu-HU" sz="6000" b="1" dirty="0">
+              <a:latin typeface="Bahnschrift SemiBold" panose="020B0502040204020203" pitchFamily="34" charset="0"/>
+            </a:endParaRPr>
+          </a:p>
+        </p:txBody>
+      </p:sp>
+      <p:pic>
+        <p:nvPicPr>
+          <p:cNvPr id="12" name="Kép 11">
+            <a:extLst>
+              <a:ext uri="{FF2B5EF4-FFF2-40B4-BE49-F238E27FC236}">
+                <a16:creationId xmlns:a16="http://schemas.microsoft.com/office/drawing/2014/main" id="{0D5DF80E-C3F6-4A3A-98C9-825EEE99BBF4}"/>
+              </a:ext>
+            </a:extLst>
+          </p:cNvPr>
+          <p:cNvPicPr>
+            <a:picLocks noChangeAspect="1"/>
+          </p:cNvPicPr>
+          <p:nvPr/>
+        </p:nvPicPr>
+        <p:blipFill rotWithShape="1">
+          <a:blip r:embed="rId3">
+            <a:extLst>
+              <a:ext uri="{28A0092B-C50C-407E-A947-70E740481C1C}">
+                <a14:useLocalDpi xmlns:a14="http://schemas.microsoft.com/office/drawing/2010/main" val="0"/>
+              </a:ext>
+            </a:extLst>
+          </a:blip>
+          <a:srcRect l="16625" r="14640"/>
+          <a:stretch/>
+        </p:blipFill>
+        <p:spPr>
+          <a:xfrm rot="6074309">
+            <a:off x="253294" y="393819"/>
+            <a:ext cx="1804052" cy="1476375"/>
+          </a:xfrm>
+          <a:prstGeom prst="rect">
+            <a:avLst/>
+          </a:prstGeom>
+        </p:spPr>
+      </p:pic>
+      <p:pic>
+        <p:nvPicPr>
+          <p:cNvPr id="13" name="Kép 12">
+            <a:extLst>
+              <a:ext uri="{FF2B5EF4-FFF2-40B4-BE49-F238E27FC236}">
+                <a16:creationId xmlns:a16="http://schemas.microsoft.com/office/drawing/2014/main" id="{7AF0C74E-3043-40A3-8603-B30A83BB9DDF}"/>
+              </a:ext>
+            </a:extLst>
+          </p:cNvPr>
+          <p:cNvPicPr>
+            <a:picLocks noChangeAspect="1"/>
+          </p:cNvPicPr>
+          <p:nvPr/>
+        </p:nvPicPr>
+        <p:blipFill rotWithShape="1">
+          <a:blip r:embed="rId4">
+            <a:extLst>
+              <a:ext uri="{28A0092B-C50C-407E-A947-70E740481C1C}">
+                <a14:useLocalDpi xmlns:a14="http://schemas.microsoft.com/office/drawing/2010/main" val="0"/>
+              </a:ext>
+            </a:extLst>
+          </a:blip>
+          <a:srcRect l="31214" t="-711" r="26907" b="711"/>
+          <a:stretch/>
+        </p:blipFill>
+        <p:spPr>
+          <a:xfrm rot="4156304" flipH="1">
+            <a:off x="10842996" y="4624346"/>
+            <a:ext cx="1208569" cy="1623298"/>
+          </a:xfrm>
+          <a:prstGeom prst="rect">
+            <a:avLst/>
+          </a:prstGeom>
+        </p:spPr>
+      </p:pic>
+    </p:spTree>
+    <p:extLst>
+      <p:ext uri="{BB962C8B-B14F-4D97-AF65-F5344CB8AC3E}">
+        <p14:creationId xmlns:p14="http://schemas.microsoft.com/office/powerpoint/2010/main" val="1876273255"/>
+      </p:ext>
+    </p:extLst>
+  </p:cSld>
+  <p:clrMapOvr>
+    <a:masterClrMapping/>
+  </p:clrMapOvr>
+  <mc:AlternateContent xmlns:mc="http://schemas.openxmlformats.org/markup-compatibility/2006">
+    <mc:Choice xmlns:p159="http://schemas.microsoft.com/office/powerpoint/2015/09/main" Requires="p159">
+      <p:transition xmlns:p14="http://schemas.microsoft.com/office/powerpoint/2010/main" spd="slow" p14:dur="2000">
+        <p159:morph option="byObject"/>
+      </p:transition>
+    </mc:Choice>
+    <mc:Fallback>
+      <p:transition spd="slow">
+        <p:fade/>
+      </p:transition>
+    </mc:Fallback>
+  </mc:AlternateContent>
+  <p:timing>
+    <p:tnLst>
+      <p:par>
+        <p:cTn id="1" dur="indefinite" restart="never" nodeType="tmRoot">
+          <p:childTnLst>
+            <p:seq concurrent="1" nextAc="seek">
+              <p:cTn id="2" dur="indefinite" nodeType="mainSeq">
+                <p:childTnLst>
+                  <p:par>
+                    <p:cTn id="3" fill="hold">
+                      <p:stCondLst>
+                        <p:cond delay="indefinite"/>
+                        <p:cond evt="onBegin" delay="0">
+                          <p:tn val="2"/>
+                        </p:cond>
+                      </p:stCondLst>
+                      <p:childTnLst>
+                        <p:par>
+                          <p:cTn id="4" fill="hold">
+                            <p:stCondLst>
+                              <p:cond delay="0"/>
+                            </p:stCondLst>
+                            <p:childTnLst>
+                              <p:par>
+                                <p:cTn id="5" presetID="10" presetClass="entr" presetSubtype="0" fill="hold" nodeType="withEffect">
+                                  <p:stCondLst>
+                                    <p:cond delay="0"/>
+                                  </p:stCondLst>
+                                  <p:childTnLst>
+                                    <p:set>
+                                      <p:cBhvr>
+                                        <p:cTn id="6" dur="1" fill="hold">
+                                          <p:stCondLst>
+                                            <p:cond delay="0"/>
+                                          </p:stCondLst>
+                                        </p:cTn>
+                                        <p:tgtEl>
+                                          <p:spTgt spid="12"/>
+                                        </p:tgtEl>
+                                        <p:attrNameLst>
+                                          <p:attrName>style.visibility</p:attrName>
+                                        </p:attrNameLst>
+                                      </p:cBhvr>
+                                      <p:to>
+                                        <p:strVal val="visible"/>
+                                      </p:to>
+                                    </p:set>
+                                    <p:animEffect transition="in" filter="fade">
+                                      <p:cBhvr>
+                                        <p:cTn id="7" dur="500"/>
+                                        <p:tgtEl>
+                                          <p:spTgt spid="12"/>
+                                        </p:tgtEl>
+                                      </p:cBhvr>
+                                    </p:animEffect>
+                                  </p:childTnLst>
+                                </p:cTn>
+                              </p:par>
+                              <p:par>
+                                <p:cTn id="8" presetID="10" presetClass="entr" presetSubtype="0" fill="hold" nodeType="withEffect">
+                                  <p:stCondLst>
+                                    <p:cond delay="0"/>
+                                  </p:stCondLst>
+                                  <p:childTnLst>
+                                    <p:set>
+                                      <p:cBhvr>
+                                        <p:cTn id="9" dur="1" fill="hold">
+                                          <p:stCondLst>
+                                            <p:cond delay="0"/>
+                                          </p:stCondLst>
+                                        </p:cTn>
+                                        <p:tgtEl>
+                                          <p:spTgt spid="13"/>
+                                        </p:tgtEl>
+                                        <p:attrNameLst>
+                                          <p:attrName>style.visibility</p:attrName>
+                                        </p:attrNameLst>
+                                      </p:cBhvr>
+                                      <p:to>
+                                        <p:strVal val="visible"/>
+                                      </p:to>
+                                    </p:set>
+                                    <p:animEffect transition="in" filter="fade">
+                                      <p:cBhvr>
+                                        <p:cTn id="10" dur="500"/>
+                                        <p:tgtEl>
+                                          <p:spTgt spid="13"/>
+                                        </p:tgtEl>
+                                      </p:cBhvr>
+                                    </p:animEffect>
+                                  </p:childTnLst>
+                                </p:cTn>
+                              </p:par>
+                            </p:childTnLst>
+                          </p:cTn>
+                        </p:par>
+                      </p:childTnLst>
+                    </p:cTn>
+                  </p:par>
+                </p:childTnLst>
+              </p:cTn>
+              <p:prevCondLst>
+                <p:cond evt="onPrev" delay="0">
+                  <p:tgtEl>
+                    <p:sldTgt/>
+                  </p:tgtEl>
+                </p:cond>
+              </p:prevCondLst>
+              <p:nextCondLst>
+                <p:cond evt="onNext" delay="0">
+                  <p:tgtEl>
+                    <p:sldTgt/>
+                  </p:tgtEl>
+                </p:cond>
+              </p:nextCondLst>
+            </p:seq>
+          </p:childTnLst>
+        </p:cTn>
+      </p:par>
+    </p:tnLst>
+  </p:timing>
 </p:sld>
 </file>
 
@@ -4264,53 +7922,348 @@
           <p:cNvPr id="2" name="Cím 1">
             <a:extLst>
               <a:ext uri="{FF2B5EF4-FFF2-40B4-BE49-F238E27FC236}">
-                <a16:creationId xmlns:a16="http://schemas.microsoft.com/office/drawing/2014/main" id="{A2EAD2E5-4CA4-4129-A4F2-E7E2732B37F4}"/>
+                <a16:creationId xmlns:a16="http://schemas.microsoft.com/office/drawing/2014/main" id="{C18830B2-00D6-4BD2-BE11-19215C420251}"/>
               </a:ext>
             </a:extLst>
           </p:cNvPr>
-          <p:cNvSpPr>
-            <a:spLocks noGrp="1"/>
-          </p:cNvSpPr>
-          <p:nvPr>
-            <p:ph type="title"/>
-          </p:nvPr>
-        </p:nvSpPr>
-        <p:spPr/>
-        <p:txBody>
-          <a:bodyPr/>
-          <a:lstStyle/>
-          <a:p>
-            <a:r>
-              <a:rPr lang="hu-HU" b="1" dirty="0">
+          <p:cNvSpPr txBox="1">
+            <a:spLocks/>
+          </p:cNvSpPr>
+          <p:nvPr/>
+        </p:nvSpPr>
+        <p:spPr>
+          <a:xfrm>
+            <a:off x="1320753" y="2904573"/>
+            <a:ext cx="9760046" cy="2006995"/>
+          </a:xfrm>
+          <a:prstGeom prst="rect">
+            <a:avLst/>
+          </a:prstGeom>
+        </p:spPr>
+        <p:txBody>
+          <a:bodyPr>
+            <a:normAutofit/>
+          </a:bodyPr>
+          <a:lstStyle>
+            <a:lvl1pPr algn="l" defTabSz="914400" rtl="0" eaLnBrk="1" latinLnBrk="0" hangingPunct="1">
+              <a:lnSpc>
+                <a:spcPct val="85000"/>
+              </a:lnSpc>
+              <a:spcBef>
+                <a:spcPct val="0"/>
+              </a:spcBef>
+              <a:buNone/>
+              <a:defRPr sz="4800" kern="1200" spc="-50" baseline="0">
+                <a:solidFill>
+                  <a:schemeClr val="tx1">
+                    <a:lumMod val="75000"/>
+                    <a:lumOff val="25000"/>
+                  </a:schemeClr>
+                </a:solidFill>
+                <a:latin typeface="+mj-lt"/>
+                <a:ea typeface="+mj-ea"/>
+                <a:cs typeface="+mj-cs"/>
+              </a:defRPr>
+            </a:lvl1pPr>
+          </a:lstStyle>
+          <a:p>
+            <a:pPr algn="ctr"/>
+            <a:r>
+              <a:rPr lang="hu-HU" sz="5400" b="1" dirty="0">
                 <a:latin typeface="Bahnschrift SemiBold" panose="020B0502040204020203" pitchFamily="34" charset="0"/>
               </a:rPr>
-              <a:t>A projekt bemutatása</a:t>
-            </a:r>
-          </a:p>
-        </p:txBody>
-      </p:sp>
-      <p:sp>
-        <p:nvSpPr>
-          <p:cNvPr id="3" name="Tartalom helye 2">
+              <a:t>Iskolai étkezéskezelő rendszer</a:t>
+            </a:r>
+          </a:p>
+        </p:txBody>
+      </p:sp>
+      <p:sp>
+        <p:nvSpPr>
+          <p:cNvPr id="3" name="Alcím 2">
             <a:extLst>
               <a:ext uri="{FF2B5EF4-FFF2-40B4-BE49-F238E27FC236}">
-                <a16:creationId xmlns:a16="http://schemas.microsoft.com/office/drawing/2014/main" id="{32758DB2-9D10-47A2-925C-F8A858558A07}"/>
+                <a16:creationId xmlns:a16="http://schemas.microsoft.com/office/drawing/2014/main" id="{A2286F2D-71DE-4954-8C64-8E9991C98150}"/>
               </a:ext>
             </a:extLst>
           </p:cNvPr>
-          <p:cNvSpPr>
-            <a:spLocks noGrp="1"/>
-          </p:cNvSpPr>
-          <p:nvPr>
-            <p:ph idx="1"/>
-          </p:nvPr>
-        </p:nvSpPr>
-        <p:spPr/>
+          <p:cNvSpPr txBox="1">
+            <a:spLocks/>
+          </p:cNvSpPr>
+          <p:nvPr/>
+        </p:nvSpPr>
+        <p:spPr>
+          <a:xfrm>
+            <a:off x="3598026" y="3785841"/>
+            <a:ext cx="4995949" cy="571500"/>
+          </a:xfrm>
+          <a:prstGeom prst="rect">
+            <a:avLst/>
+          </a:prstGeom>
+        </p:spPr>
         <p:txBody>
           <a:bodyPr/>
-          <a:lstStyle/>
-          <a:p>
-            <a:endParaRPr lang="hu-HU" dirty="0"/>
+          <a:lstStyle>
+            <a:lvl1pPr marL="91440" indent="-91440" algn="l" defTabSz="914400" rtl="0" eaLnBrk="1" latinLnBrk="0" hangingPunct="1">
+              <a:lnSpc>
+                <a:spcPct val="90000"/>
+              </a:lnSpc>
+              <a:spcBef>
+                <a:spcPts val="1200"/>
+              </a:spcBef>
+              <a:spcAft>
+                <a:spcPts val="200"/>
+              </a:spcAft>
+              <a:buClr>
+                <a:schemeClr val="accent1"/>
+              </a:buClr>
+              <a:buSzPct val="100000"/>
+              <a:buFont typeface="Calibri" panose="020F0502020204030204" pitchFamily="34" charset="0"/>
+              <a:buChar char=" "/>
+              <a:defRPr sz="2000" kern="1200">
+                <a:solidFill>
+                  <a:schemeClr val="tx1">
+                    <a:lumMod val="75000"/>
+                    <a:lumOff val="25000"/>
+                  </a:schemeClr>
+                </a:solidFill>
+                <a:latin typeface="+mn-lt"/>
+                <a:ea typeface="+mn-ea"/>
+                <a:cs typeface="+mn-cs"/>
+              </a:defRPr>
+            </a:lvl1pPr>
+            <a:lvl2pPr marL="384048" indent="-182880" algn="l" defTabSz="914400" rtl="0" eaLnBrk="1" latinLnBrk="0" hangingPunct="1">
+              <a:lnSpc>
+                <a:spcPct val="90000"/>
+              </a:lnSpc>
+              <a:spcBef>
+                <a:spcPts val="200"/>
+              </a:spcBef>
+              <a:spcAft>
+                <a:spcPts val="400"/>
+              </a:spcAft>
+              <a:buClr>
+                <a:schemeClr val="accent1"/>
+              </a:buClr>
+              <a:buFont typeface="Calibri" pitchFamily="34" charset="0"/>
+              <a:buChar char="◦"/>
+              <a:defRPr sz="1800" kern="1200">
+                <a:solidFill>
+                  <a:schemeClr val="tx1">
+                    <a:lumMod val="75000"/>
+                    <a:lumOff val="25000"/>
+                  </a:schemeClr>
+                </a:solidFill>
+                <a:latin typeface="+mn-lt"/>
+                <a:ea typeface="+mn-ea"/>
+                <a:cs typeface="+mn-cs"/>
+              </a:defRPr>
+            </a:lvl2pPr>
+            <a:lvl3pPr marL="566928" indent="-182880" algn="l" defTabSz="914400" rtl="0" eaLnBrk="1" latinLnBrk="0" hangingPunct="1">
+              <a:lnSpc>
+                <a:spcPct val="90000"/>
+              </a:lnSpc>
+              <a:spcBef>
+                <a:spcPts val="200"/>
+              </a:spcBef>
+              <a:spcAft>
+                <a:spcPts val="400"/>
+              </a:spcAft>
+              <a:buClr>
+                <a:schemeClr val="accent1"/>
+              </a:buClr>
+              <a:buFont typeface="Calibri" pitchFamily="34" charset="0"/>
+              <a:buChar char="◦"/>
+              <a:defRPr sz="1400" kern="1200">
+                <a:solidFill>
+                  <a:schemeClr val="tx1">
+                    <a:lumMod val="75000"/>
+                    <a:lumOff val="25000"/>
+                  </a:schemeClr>
+                </a:solidFill>
+                <a:latin typeface="+mn-lt"/>
+                <a:ea typeface="+mn-ea"/>
+                <a:cs typeface="+mn-cs"/>
+              </a:defRPr>
+            </a:lvl3pPr>
+            <a:lvl4pPr marL="749808" indent="-182880" algn="l" defTabSz="914400" rtl="0" eaLnBrk="1" latinLnBrk="0" hangingPunct="1">
+              <a:lnSpc>
+                <a:spcPct val="90000"/>
+              </a:lnSpc>
+              <a:spcBef>
+                <a:spcPts val="200"/>
+              </a:spcBef>
+              <a:spcAft>
+                <a:spcPts val="400"/>
+              </a:spcAft>
+              <a:buClr>
+                <a:schemeClr val="accent1"/>
+              </a:buClr>
+              <a:buFont typeface="Calibri" pitchFamily="34" charset="0"/>
+              <a:buChar char="◦"/>
+              <a:defRPr sz="1400" kern="1200">
+                <a:solidFill>
+                  <a:schemeClr val="tx1">
+                    <a:lumMod val="75000"/>
+                    <a:lumOff val="25000"/>
+                  </a:schemeClr>
+                </a:solidFill>
+                <a:latin typeface="+mn-lt"/>
+                <a:ea typeface="+mn-ea"/>
+                <a:cs typeface="+mn-cs"/>
+              </a:defRPr>
+            </a:lvl4pPr>
+            <a:lvl5pPr marL="932688" indent="-182880" algn="l" defTabSz="914400" rtl="0" eaLnBrk="1" latinLnBrk="0" hangingPunct="1">
+              <a:lnSpc>
+                <a:spcPct val="90000"/>
+              </a:lnSpc>
+              <a:spcBef>
+                <a:spcPts val="200"/>
+              </a:spcBef>
+              <a:spcAft>
+                <a:spcPts val="400"/>
+              </a:spcAft>
+              <a:buClr>
+                <a:schemeClr val="accent1"/>
+              </a:buClr>
+              <a:buFont typeface="Calibri" pitchFamily="34" charset="0"/>
+              <a:buChar char="◦"/>
+              <a:defRPr sz="1400" kern="1200">
+                <a:solidFill>
+                  <a:schemeClr val="tx1">
+                    <a:lumMod val="75000"/>
+                    <a:lumOff val="25000"/>
+                  </a:schemeClr>
+                </a:solidFill>
+                <a:latin typeface="+mn-lt"/>
+                <a:ea typeface="+mn-ea"/>
+                <a:cs typeface="+mn-cs"/>
+              </a:defRPr>
+            </a:lvl5pPr>
+            <a:lvl6pPr marL="1100000" indent="-228600" algn="l" defTabSz="914400" rtl="0" eaLnBrk="1" latinLnBrk="0" hangingPunct="1">
+              <a:lnSpc>
+                <a:spcPct val="90000"/>
+              </a:lnSpc>
+              <a:spcBef>
+                <a:spcPts val="200"/>
+              </a:spcBef>
+              <a:spcAft>
+                <a:spcPts val="400"/>
+              </a:spcAft>
+              <a:buClr>
+                <a:schemeClr val="accent1"/>
+              </a:buClr>
+              <a:buFont typeface="Calibri" pitchFamily="34" charset="0"/>
+              <a:buChar char="◦"/>
+              <a:defRPr sz="1400" kern="1200">
+                <a:solidFill>
+                  <a:schemeClr val="tx1">
+                    <a:lumMod val="75000"/>
+                    <a:lumOff val="25000"/>
+                  </a:schemeClr>
+                </a:solidFill>
+                <a:latin typeface="+mn-lt"/>
+                <a:ea typeface="+mn-ea"/>
+                <a:cs typeface="+mn-cs"/>
+              </a:defRPr>
+            </a:lvl6pPr>
+            <a:lvl7pPr marL="1300000" indent="-228600" algn="l" defTabSz="914400" rtl="0" eaLnBrk="1" latinLnBrk="0" hangingPunct="1">
+              <a:lnSpc>
+                <a:spcPct val="90000"/>
+              </a:lnSpc>
+              <a:spcBef>
+                <a:spcPts val="200"/>
+              </a:spcBef>
+              <a:spcAft>
+                <a:spcPts val="400"/>
+              </a:spcAft>
+              <a:buClr>
+                <a:schemeClr val="accent1"/>
+              </a:buClr>
+              <a:buFont typeface="Calibri" pitchFamily="34" charset="0"/>
+              <a:buChar char="◦"/>
+              <a:defRPr sz="1400" kern="1200">
+                <a:solidFill>
+                  <a:schemeClr val="tx1">
+                    <a:lumMod val="75000"/>
+                    <a:lumOff val="25000"/>
+                  </a:schemeClr>
+                </a:solidFill>
+                <a:latin typeface="+mn-lt"/>
+                <a:ea typeface="+mn-ea"/>
+                <a:cs typeface="+mn-cs"/>
+              </a:defRPr>
+            </a:lvl7pPr>
+            <a:lvl8pPr marL="1500000" indent="-228600" algn="l" defTabSz="914400" rtl="0" eaLnBrk="1" latinLnBrk="0" hangingPunct="1">
+              <a:lnSpc>
+                <a:spcPct val="90000"/>
+              </a:lnSpc>
+              <a:spcBef>
+                <a:spcPts val="200"/>
+              </a:spcBef>
+              <a:spcAft>
+                <a:spcPts val="400"/>
+              </a:spcAft>
+              <a:buClr>
+                <a:schemeClr val="accent1"/>
+              </a:buClr>
+              <a:buFont typeface="Calibri" pitchFamily="34" charset="0"/>
+              <a:buChar char="◦"/>
+              <a:defRPr sz="1400" kern="1200">
+                <a:solidFill>
+                  <a:schemeClr val="tx1">
+                    <a:lumMod val="75000"/>
+                    <a:lumOff val="25000"/>
+                  </a:schemeClr>
+                </a:solidFill>
+                <a:latin typeface="+mn-lt"/>
+                <a:ea typeface="+mn-ea"/>
+                <a:cs typeface="+mn-cs"/>
+              </a:defRPr>
+            </a:lvl8pPr>
+            <a:lvl9pPr marL="1700000" indent="-228600" algn="l" defTabSz="914400" rtl="0" eaLnBrk="1" latinLnBrk="0" hangingPunct="1">
+              <a:lnSpc>
+                <a:spcPct val="90000"/>
+              </a:lnSpc>
+              <a:spcBef>
+                <a:spcPts val="200"/>
+              </a:spcBef>
+              <a:spcAft>
+                <a:spcPts val="400"/>
+              </a:spcAft>
+              <a:buClr>
+                <a:schemeClr val="accent1"/>
+              </a:buClr>
+              <a:buFont typeface="Calibri" pitchFamily="34" charset="0"/>
+              <a:buChar char="◦"/>
+              <a:defRPr sz="1400" kern="1200">
+                <a:solidFill>
+                  <a:schemeClr val="tx1">
+                    <a:lumMod val="75000"/>
+                    <a:lumOff val="25000"/>
+                  </a:schemeClr>
+                </a:solidFill>
+                <a:latin typeface="+mn-lt"/>
+                <a:ea typeface="+mn-ea"/>
+                <a:cs typeface="+mn-cs"/>
+              </a:defRPr>
+            </a:lvl9pPr>
+          </a:lstStyle>
+          <a:p>
+            <a:pPr algn="ctr"/>
+            <a:r>
+              <a:rPr lang="hu-HU" i="1" cap="all" spc="100" dirty="0">
+                <a:solidFill>
+                  <a:srgbClr val="BD582C"/>
+                </a:solidFill>
+                <a:uFill>
+                  <a:solidFill>
+                    <a:srgbClr val="BD582C"/>
+                  </a:solidFill>
+                </a:uFill>
+                <a:latin typeface="+mj-lt"/>
+              </a:rPr>
+              <a:t>Vizsgaremek bemutatása</a:t>
+            </a:r>
           </a:p>
         </p:txBody>
       </p:sp>
@@ -4319,7 +8272,7 @@
           <p:cNvPr id="4" name="Kép 3">
             <a:extLst>
               <a:ext uri="{FF2B5EF4-FFF2-40B4-BE49-F238E27FC236}">
-                <a16:creationId xmlns:a16="http://schemas.microsoft.com/office/drawing/2014/main" id="{7157A2FA-3642-4FB8-BD9B-8386766FDF7C}"/>
+                <a16:creationId xmlns:a16="http://schemas.microsoft.com/office/drawing/2014/main" id="{7912835F-A62C-4B0D-B733-74106EBFDA26}"/>
               </a:ext>
             </a:extLst>
           </p:cNvPr>
@@ -4330,15 +8283,965 @@
         </p:nvPicPr>
         <p:blipFill rotWithShape="1">
           <a:blip r:embed="rId2">
-            <a:alphaModFix amt="52000"/>
+            <a:extLst>
+              <a:ext uri="{28A0092B-C50C-407E-A947-70E740481C1C}">
+                <a14:useLocalDpi xmlns:a14="http://schemas.microsoft.com/office/drawing/2010/main" val="0"/>
+              </a:ext>
+            </a:extLst>
           </a:blip>
-          <a:srcRect t="20576"/>
+          <a:srcRect t="58555"/>
           <a:stretch/>
         </p:blipFill>
         <p:spPr>
           <a:xfrm>
-            <a:off x="10561520" y="286603"/>
-            <a:ext cx="1373305" cy="1064836"/>
+            <a:off x="3738704" y="1393033"/>
+            <a:ext cx="4714591" cy="644014"/>
+          </a:xfrm>
+          <a:prstGeom prst="rect">
+            <a:avLst/>
+          </a:prstGeom>
+        </p:spPr>
+      </p:pic>
+      <p:sp>
+        <p:nvSpPr>
+          <p:cNvPr id="5" name="Alcím 2">
+            <a:extLst>
+              <a:ext uri="{FF2B5EF4-FFF2-40B4-BE49-F238E27FC236}">
+                <a16:creationId xmlns:a16="http://schemas.microsoft.com/office/drawing/2014/main" id="{3E0FCC81-0923-43B1-9ACC-080EBD94427F}"/>
+              </a:ext>
+            </a:extLst>
+          </p:cNvPr>
+          <p:cNvSpPr txBox="1">
+            <a:spLocks/>
+          </p:cNvSpPr>
+          <p:nvPr/>
+        </p:nvSpPr>
+        <p:spPr>
+          <a:xfrm>
+            <a:off x="127233" y="5659169"/>
+            <a:ext cx="5968766" cy="1050389"/>
+          </a:xfrm>
+          <a:prstGeom prst="rect">
+            <a:avLst/>
+          </a:prstGeom>
+        </p:spPr>
+        <p:txBody>
+          <a:bodyPr vert="horz" lIns="91440" tIns="45720" rIns="91440" bIns="45720" rtlCol="0">
+            <a:normAutofit/>
+          </a:bodyPr>
+          <a:lstStyle>
+            <a:lvl1pPr marL="0" indent="0" algn="l" defTabSz="914400" rtl="0" eaLnBrk="1" latinLnBrk="0" hangingPunct="1">
+              <a:lnSpc>
+                <a:spcPct val="90000"/>
+              </a:lnSpc>
+              <a:spcBef>
+                <a:spcPts val="1200"/>
+              </a:spcBef>
+              <a:spcAft>
+                <a:spcPts val="200"/>
+              </a:spcAft>
+              <a:buClr>
+                <a:schemeClr val="accent1"/>
+              </a:buClr>
+              <a:buSzPct val="100000"/>
+              <a:buFont typeface="Calibri" panose="020F0502020204030204" pitchFamily="34" charset="0"/>
+              <a:buNone/>
+              <a:defRPr sz="2400" kern="1200" cap="all" spc="200" baseline="0">
+                <a:solidFill>
+                  <a:schemeClr val="tx2"/>
+                </a:solidFill>
+                <a:latin typeface="+mj-lt"/>
+                <a:ea typeface="+mn-ea"/>
+                <a:cs typeface="+mn-cs"/>
+              </a:defRPr>
+            </a:lvl1pPr>
+            <a:lvl2pPr marL="457200" indent="0" algn="ctr" defTabSz="914400" rtl="0" eaLnBrk="1" latinLnBrk="0" hangingPunct="1">
+              <a:lnSpc>
+                <a:spcPct val="90000"/>
+              </a:lnSpc>
+              <a:spcBef>
+                <a:spcPts val="200"/>
+              </a:spcBef>
+              <a:spcAft>
+                <a:spcPts val="400"/>
+              </a:spcAft>
+              <a:buClr>
+                <a:schemeClr val="accent1"/>
+              </a:buClr>
+              <a:buFont typeface="Calibri" pitchFamily="34" charset="0"/>
+              <a:buNone/>
+              <a:defRPr sz="2400" kern="1200">
+                <a:solidFill>
+                  <a:schemeClr val="tx1">
+                    <a:lumMod val="75000"/>
+                    <a:lumOff val="25000"/>
+                  </a:schemeClr>
+                </a:solidFill>
+                <a:latin typeface="+mn-lt"/>
+                <a:ea typeface="+mn-ea"/>
+                <a:cs typeface="+mn-cs"/>
+              </a:defRPr>
+            </a:lvl2pPr>
+            <a:lvl3pPr marL="914400" indent="0" algn="ctr" defTabSz="914400" rtl="0" eaLnBrk="1" latinLnBrk="0" hangingPunct="1">
+              <a:lnSpc>
+                <a:spcPct val="90000"/>
+              </a:lnSpc>
+              <a:spcBef>
+                <a:spcPts val="200"/>
+              </a:spcBef>
+              <a:spcAft>
+                <a:spcPts val="400"/>
+              </a:spcAft>
+              <a:buClr>
+                <a:schemeClr val="accent1"/>
+              </a:buClr>
+              <a:buFont typeface="Calibri" pitchFamily="34" charset="0"/>
+              <a:buNone/>
+              <a:defRPr sz="2400" kern="1200">
+                <a:solidFill>
+                  <a:schemeClr val="tx1">
+                    <a:lumMod val="75000"/>
+                    <a:lumOff val="25000"/>
+                  </a:schemeClr>
+                </a:solidFill>
+                <a:latin typeface="+mn-lt"/>
+                <a:ea typeface="+mn-ea"/>
+                <a:cs typeface="+mn-cs"/>
+              </a:defRPr>
+            </a:lvl3pPr>
+            <a:lvl4pPr marL="1371600" indent="0" algn="ctr" defTabSz="914400" rtl="0" eaLnBrk="1" latinLnBrk="0" hangingPunct="1">
+              <a:lnSpc>
+                <a:spcPct val="90000"/>
+              </a:lnSpc>
+              <a:spcBef>
+                <a:spcPts val="200"/>
+              </a:spcBef>
+              <a:spcAft>
+                <a:spcPts val="400"/>
+              </a:spcAft>
+              <a:buClr>
+                <a:schemeClr val="accent1"/>
+              </a:buClr>
+              <a:buFont typeface="Calibri" pitchFamily="34" charset="0"/>
+              <a:buNone/>
+              <a:defRPr sz="2000" kern="1200">
+                <a:solidFill>
+                  <a:schemeClr val="tx1">
+                    <a:lumMod val="75000"/>
+                    <a:lumOff val="25000"/>
+                  </a:schemeClr>
+                </a:solidFill>
+                <a:latin typeface="+mn-lt"/>
+                <a:ea typeface="+mn-ea"/>
+                <a:cs typeface="+mn-cs"/>
+              </a:defRPr>
+            </a:lvl4pPr>
+            <a:lvl5pPr marL="1828800" indent="0" algn="ctr" defTabSz="914400" rtl="0" eaLnBrk="1" latinLnBrk="0" hangingPunct="1">
+              <a:lnSpc>
+                <a:spcPct val="90000"/>
+              </a:lnSpc>
+              <a:spcBef>
+                <a:spcPts val="200"/>
+              </a:spcBef>
+              <a:spcAft>
+                <a:spcPts val="400"/>
+              </a:spcAft>
+              <a:buClr>
+                <a:schemeClr val="accent1"/>
+              </a:buClr>
+              <a:buFont typeface="Calibri" pitchFamily="34" charset="0"/>
+              <a:buNone/>
+              <a:defRPr sz="2000" kern="1200">
+                <a:solidFill>
+                  <a:schemeClr val="tx1">
+                    <a:lumMod val="75000"/>
+                    <a:lumOff val="25000"/>
+                  </a:schemeClr>
+                </a:solidFill>
+                <a:latin typeface="+mn-lt"/>
+                <a:ea typeface="+mn-ea"/>
+                <a:cs typeface="+mn-cs"/>
+              </a:defRPr>
+            </a:lvl5pPr>
+            <a:lvl6pPr marL="2286000" indent="0" algn="ctr" defTabSz="914400" rtl="0" eaLnBrk="1" latinLnBrk="0" hangingPunct="1">
+              <a:lnSpc>
+                <a:spcPct val="90000"/>
+              </a:lnSpc>
+              <a:spcBef>
+                <a:spcPts val="200"/>
+              </a:spcBef>
+              <a:spcAft>
+                <a:spcPts val="400"/>
+              </a:spcAft>
+              <a:buClr>
+                <a:schemeClr val="accent1"/>
+              </a:buClr>
+              <a:buFont typeface="Calibri" pitchFamily="34" charset="0"/>
+              <a:buNone/>
+              <a:defRPr sz="2000" kern="1200">
+                <a:solidFill>
+                  <a:schemeClr val="tx1">
+                    <a:lumMod val="75000"/>
+                    <a:lumOff val="25000"/>
+                  </a:schemeClr>
+                </a:solidFill>
+                <a:latin typeface="+mn-lt"/>
+                <a:ea typeface="+mn-ea"/>
+                <a:cs typeface="+mn-cs"/>
+              </a:defRPr>
+            </a:lvl6pPr>
+            <a:lvl7pPr marL="2743200" indent="0" algn="ctr" defTabSz="914400" rtl="0" eaLnBrk="1" latinLnBrk="0" hangingPunct="1">
+              <a:lnSpc>
+                <a:spcPct val="90000"/>
+              </a:lnSpc>
+              <a:spcBef>
+                <a:spcPts val="200"/>
+              </a:spcBef>
+              <a:spcAft>
+                <a:spcPts val="400"/>
+              </a:spcAft>
+              <a:buClr>
+                <a:schemeClr val="accent1"/>
+              </a:buClr>
+              <a:buFont typeface="Calibri" pitchFamily="34" charset="0"/>
+              <a:buNone/>
+              <a:defRPr sz="2000" kern="1200">
+                <a:solidFill>
+                  <a:schemeClr val="tx1">
+                    <a:lumMod val="75000"/>
+                    <a:lumOff val="25000"/>
+                  </a:schemeClr>
+                </a:solidFill>
+                <a:latin typeface="+mn-lt"/>
+                <a:ea typeface="+mn-ea"/>
+                <a:cs typeface="+mn-cs"/>
+              </a:defRPr>
+            </a:lvl7pPr>
+            <a:lvl8pPr marL="3200400" indent="0" algn="ctr" defTabSz="914400" rtl="0" eaLnBrk="1" latinLnBrk="0" hangingPunct="1">
+              <a:lnSpc>
+                <a:spcPct val="90000"/>
+              </a:lnSpc>
+              <a:spcBef>
+                <a:spcPts val="200"/>
+              </a:spcBef>
+              <a:spcAft>
+                <a:spcPts val="400"/>
+              </a:spcAft>
+              <a:buClr>
+                <a:schemeClr val="accent1"/>
+              </a:buClr>
+              <a:buFont typeface="Calibri" pitchFamily="34" charset="0"/>
+              <a:buNone/>
+              <a:defRPr sz="2000" kern="1200">
+                <a:solidFill>
+                  <a:schemeClr val="tx1">
+                    <a:lumMod val="75000"/>
+                    <a:lumOff val="25000"/>
+                  </a:schemeClr>
+                </a:solidFill>
+                <a:latin typeface="+mn-lt"/>
+                <a:ea typeface="+mn-ea"/>
+                <a:cs typeface="+mn-cs"/>
+              </a:defRPr>
+            </a:lvl8pPr>
+            <a:lvl9pPr marL="3657600" indent="0" algn="ctr" defTabSz="914400" rtl="0" eaLnBrk="1" latinLnBrk="0" hangingPunct="1">
+              <a:lnSpc>
+                <a:spcPct val="90000"/>
+              </a:lnSpc>
+              <a:spcBef>
+                <a:spcPts val="200"/>
+              </a:spcBef>
+              <a:spcAft>
+                <a:spcPts val="400"/>
+              </a:spcAft>
+              <a:buClr>
+                <a:schemeClr val="accent1"/>
+              </a:buClr>
+              <a:buFont typeface="Calibri" pitchFamily="34" charset="0"/>
+              <a:buNone/>
+              <a:defRPr sz="2000" kern="1200">
+                <a:solidFill>
+                  <a:schemeClr val="tx1">
+                    <a:lumMod val="75000"/>
+                    <a:lumOff val="25000"/>
+                  </a:schemeClr>
+                </a:solidFill>
+                <a:latin typeface="+mn-lt"/>
+                <a:ea typeface="+mn-ea"/>
+                <a:cs typeface="+mn-cs"/>
+              </a:defRPr>
+            </a:lvl9pPr>
+          </a:lstStyle>
+          <a:p>
+            <a:pPr>
+              <a:lnSpc>
+                <a:spcPct val="100000"/>
+              </a:lnSpc>
+            </a:pPr>
+            <a:r>
+              <a:rPr lang="hu-HU" sz="1800" cap="none" spc="0" dirty="0">
+                <a:latin typeface="Bahnschrift Light" panose="020B0502040204020203" pitchFamily="34" charset="0"/>
+              </a:rPr>
+              <a:t>Készítették: Atkári Ariella</a:t>
+            </a:r>
+            <a:br>
+              <a:rPr lang="hu-HU" sz="1800" cap="none" spc="0" dirty="0">
+                <a:latin typeface="Bahnschrift Light" panose="020B0502040204020203" pitchFamily="34" charset="0"/>
+              </a:rPr>
+            </a:br>
+            <a:r>
+              <a:rPr lang="hu-HU" sz="1800" cap="none" spc="0" dirty="0">
+                <a:latin typeface="Bahnschrift Light" panose="020B0502040204020203" pitchFamily="34" charset="0"/>
+              </a:rPr>
+              <a:t>	      Farkas Dominik</a:t>
+            </a:r>
+          </a:p>
+        </p:txBody>
+      </p:sp>
+      <p:cxnSp>
+        <p:nvCxnSpPr>
+          <p:cNvPr id="9" name="Egyenes összekötő 8">
+            <a:extLst>
+              <a:ext uri="{FF2B5EF4-FFF2-40B4-BE49-F238E27FC236}">
+                <a16:creationId xmlns:a16="http://schemas.microsoft.com/office/drawing/2014/main" id="{670AB60B-B385-4E46-A012-AD0038CF5F38}"/>
+              </a:ext>
+            </a:extLst>
+          </p:cNvPr>
+          <p:cNvCxnSpPr>
+            <a:cxnSpLocks/>
+          </p:cNvCxnSpPr>
+          <p:nvPr/>
+        </p:nvCxnSpPr>
+        <p:spPr>
+          <a:xfrm>
+            <a:off x="2119313" y="2025000"/>
+            <a:ext cx="7953375" cy="0"/>
+          </a:xfrm>
+          <a:prstGeom prst="line">
+            <a:avLst/>
+          </a:prstGeom>
+          <a:ln>
+            <a:solidFill>
+              <a:schemeClr val="tx1">
+                <a:lumMod val="50000"/>
+                <a:lumOff val="50000"/>
+              </a:schemeClr>
+            </a:solidFill>
+          </a:ln>
+        </p:spPr>
+        <p:style>
+          <a:lnRef idx="1">
+            <a:schemeClr val="accent1"/>
+          </a:lnRef>
+          <a:fillRef idx="0">
+            <a:schemeClr val="accent1"/>
+          </a:fillRef>
+          <a:effectRef idx="0">
+            <a:schemeClr val="accent1"/>
+          </a:effectRef>
+          <a:fontRef idx="minor">
+            <a:schemeClr val="tx1"/>
+          </a:fontRef>
+        </p:style>
+      </p:cxnSp>
+      <p:pic>
+        <p:nvPicPr>
+          <p:cNvPr id="10" name="Kép 9">
+            <a:extLst>
+              <a:ext uri="{FF2B5EF4-FFF2-40B4-BE49-F238E27FC236}">
+                <a16:creationId xmlns:a16="http://schemas.microsoft.com/office/drawing/2014/main" id="{CB9406C6-CF11-47E5-AEFA-0BA584F8F8D2}"/>
+              </a:ext>
+            </a:extLst>
+          </p:cNvPr>
+          <p:cNvPicPr>
+            <a:picLocks noChangeAspect="1"/>
+          </p:cNvPicPr>
+          <p:nvPr/>
+        </p:nvPicPr>
+        <p:blipFill rotWithShape="1">
+          <a:blip r:embed="rId2">
+            <a:extLst>
+              <a:ext uri="{28A0092B-C50C-407E-A947-70E740481C1C}">
+                <a14:useLocalDpi xmlns:a14="http://schemas.microsoft.com/office/drawing/2010/main" val="0"/>
+              </a:ext>
+            </a:extLst>
+          </a:blip>
+          <a:srcRect l="1" r="-2984" b="38896"/>
+          <a:stretch/>
+        </p:blipFill>
+        <p:spPr>
+          <a:xfrm>
+            <a:off x="3726755" y="431494"/>
+            <a:ext cx="4855269" cy="949493"/>
+          </a:xfrm>
+          <a:prstGeom prst="rect">
+            <a:avLst/>
+          </a:prstGeom>
+        </p:spPr>
+      </p:pic>
+      <p:sp>
+        <p:nvSpPr>
+          <p:cNvPr id="11" name="Alcím 2">
+            <a:extLst>
+              <a:ext uri="{FF2B5EF4-FFF2-40B4-BE49-F238E27FC236}">
+                <a16:creationId xmlns:a16="http://schemas.microsoft.com/office/drawing/2014/main" id="{7D26B0E8-7A60-4B80-8AF7-628A519872D6}"/>
+              </a:ext>
+            </a:extLst>
+          </p:cNvPr>
+          <p:cNvSpPr txBox="1">
+            <a:spLocks/>
+          </p:cNvSpPr>
+          <p:nvPr/>
+        </p:nvSpPr>
+        <p:spPr>
+          <a:xfrm>
+            <a:off x="10563224" y="5883809"/>
+            <a:ext cx="1628776" cy="402688"/>
+          </a:xfrm>
+          <a:prstGeom prst="rect">
+            <a:avLst/>
+          </a:prstGeom>
+        </p:spPr>
+        <p:txBody>
+          <a:bodyPr vert="horz" lIns="91440" tIns="45720" rIns="91440" bIns="45720" rtlCol="0">
+            <a:normAutofit/>
+          </a:bodyPr>
+          <a:lstStyle>
+            <a:lvl1pPr marL="0" indent="0" algn="l" defTabSz="914400" rtl="0" eaLnBrk="1" latinLnBrk="0" hangingPunct="1">
+              <a:lnSpc>
+                <a:spcPct val="90000"/>
+              </a:lnSpc>
+              <a:spcBef>
+                <a:spcPts val="1200"/>
+              </a:spcBef>
+              <a:spcAft>
+                <a:spcPts val="200"/>
+              </a:spcAft>
+              <a:buClr>
+                <a:schemeClr val="accent1"/>
+              </a:buClr>
+              <a:buSzPct val="100000"/>
+              <a:buFont typeface="Calibri" panose="020F0502020204030204" pitchFamily="34" charset="0"/>
+              <a:buNone/>
+              <a:defRPr sz="2400" kern="1200" cap="all" spc="200" baseline="0">
+                <a:solidFill>
+                  <a:schemeClr val="tx2"/>
+                </a:solidFill>
+                <a:latin typeface="+mj-lt"/>
+                <a:ea typeface="+mn-ea"/>
+                <a:cs typeface="+mn-cs"/>
+              </a:defRPr>
+            </a:lvl1pPr>
+            <a:lvl2pPr marL="457200" indent="0" algn="ctr" defTabSz="914400" rtl="0" eaLnBrk="1" latinLnBrk="0" hangingPunct="1">
+              <a:lnSpc>
+                <a:spcPct val="90000"/>
+              </a:lnSpc>
+              <a:spcBef>
+                <a:spcPts val="200"/>
+              </a:spcBef>
+              <a:spcAft>
+                <a:spcPts val="400"/>
+              </a:spcAft>
+              <a:buClr>
+                <a:schemeClr val="accent1"/>
+              </a:buClr>
+              <a:buFont typeface="Calibri" pitchFamily="34" charset="0"/>
+              <a:buNone/>
+              <a:defRPr sz="2400" kern="1200">
+                <a:solidFill>
+                  <a:schemeClr val="tx1">
+                    <a:lumMod val="75000"/>
+                    <a:lumOff val="25000"/>
+                  </a:schemeClr>
+                </a:solidFill>
+                <a:latin typeface="+mn-lt"/>
+                <a:ea typeface="+mn-ea"/>
+                <a:cs typeface="+mn-cs"/>
+              </a:defRPr>
+            </a:lvl2pPr>
+            <a:lvl3pPr marL="914400" indent="0" algn="ctr" defTabSz="914400" rtl="0" eaLnBrk="1" latinLnBrk="0" hangingPunct="1">
+              <a:lnSpc>
+                <a:spcPct val="90000"/>
+              </a:lnSpc>
+              <a:spcBef>
+                <a:spcPts val="200"/>
+              </a:spcBef>
+              <a:spcAft>
+                <a:spcPts val="400"/>
+              </a:spcAft>
+              <a:buClr>
+                <a:schemeClr val="accent1"/>
+              </a:buClr>
+              <a:buFont typeface="Calibri" pitchFamily="34" charset="0"/>
+              <a:buNone/>
+              <a:defRPr sz="2400" kern="1200">
+                <a:solidFill>
+                  <a:schemeClr val="tx1">
+                    <a:lumMod val="75000"/>
+                    <a:lumOff val="25000"/>
+                  </a:schemeClr>
+                </a:solidFill>
+                <a:latin typeface="+mn-lt"/>
+                <a:ea typeface="+mn-ea"/>
+                <a:cs typeface="+mn-cs"/>
+              </a:defRPr>
+            </a:lvl3pPr>
+            <a:lvl4pPr marL="1371600" indent="0" algn="ctr" defTabSz="914400" rtl="0" eaLnBrk="1" latinLnBrk="0" hangingPunct="1">
+              <a:lnSpc>
+                <a:spcPct val="90000"/>
+              </a:lnSpc>
+              <a:spcBef>
+                <a:spcPts val="200"/>
+              </a:spcBef>
+              <a:spcAft>
+                <a:spcPts val="400"/>
+              </a:spcAft>
+              <a:buClr>
+                <a:schemeClr val="accent1"/>
+              </a:buClr>
+              <a:buFont typeface="Calibri" pitchFamily="34" charset="0"/>
+              <a:buNone/>
+              <a:defRPr sz="2000" kern="1200">
+                <a:solidFill>
+                  <a:schemeClr val="tx1">
+                    <a:lumMod val="75000"/>
+                    <a:lumOff val="25000"/>
+                  </a:schemeClr>
+                </a:solidFill>
+                <a:latin typeface="+mn-lt"/>
+                <a:ea typeface="+mn-ea"/>
+                <a:cs typeface="+mn-cs"/>
+              </a:defRPr>
+            </a:lvl4pPr>
+            <a:lvl5pPr marL="1828800" indent="0" algn="ctr" defTabSz="914400" rtl="0" eaLnBrk="1" latinLnBrk="0" hangingPunct="1">
+              <a:lnSpc>
+                <a:spcPct val="90000"/>
+              </a:lnSpc>
+              <a:spcBef>
+                <a:spcPts val="200"/>
+              </a:spcBef>
+              <a:spcAft>
+                <a:spcPts val="400"/>
+              </a:spcAft>
+              <a:buClr>
+                <a:schemeClr val="accent1"/>
+              </a:buClr>
+              <a:buFont typeface="Calibri" pitchFamily="34" charset="0"/>
+              <a:buNone/>
+              <a:defRPr sz="2000" kern="1200">
+                <a:solidFill>
+                  <a:schemeClr val="tx1">
+                    <a:lumMod val="75000"/>
+                    <a:lumOff val="25000"/>
+                  </a:schemeClr>
+                </a:solidFill>
+                <a:latin typeface="+mn-lt"/>
+                <a:ea typeface="+mn-ea"/>
+                <a:cs typeface="+mn-cs"/>
+              </a:defRPr>
+            </a:lvl5pPr>
+            <a:lvl6pPr marL="2286000" indent="0" algn="ctr" defTabSz="914400" rtl="0" eaLnBrk="1" latinLnBrk="0" hangingPunct="1">
+              <a:lnSpc>
+                <a:spcPct val="90000"/>
+              </a:lnSpc>
+              <a:spcBef>
+                <a:spcPts val="200"/>
+              </a:spcBef>
+              <a:spcAft>
+                <a:spcPts val="400"/>
+              </a:spcAft>
+              <a:buClr>
+                <a:schemeClr val="accent1"/>
+              </a:buClr>
+              <a:buFont typeface="Calibri" pitchFamily="34" charset="0"/>
+              <a:buNone/>
+              <a:defRPr sz="2000" kern="1200">
+                <a:solidFill>
+                  <a:schemeClr val="tx1">
+                    <a:lumMod val="75000"/>
+                    <a:lumOff val="25000"/>
+                  </a:schemeClr>
+                </a:solidFill>
+                <a:latin typeface="+mn-lt"/>
+                <a:ea typeface="+mn-ea"/>
+                <a:cs typeface="+mn-cs"/>
+              </a:defRPr>
+            </a:lvl6pPr>
+            <a:lvl7pPr marL="2743200" indent="0" algn="ctr" defTabSz="914400" rtl="0" eaLnBrk="1" latinLnBrk="0" hangingPunct="1">
+              <a:lnSpc>
+                <a:spcPct val="90000"/>
+              </a:lnSpc>
+              <a:spcBef>
+                <a:spcPts val="200"/>
+              </a:spcBef>
+              <a:spcAft>
+                <a:spcPts val="400"/>
+              </a:spcAft>
+              <a:buClr>
+                <a:schemeClr val="accent1"/>
+              </a:buClr>
+              <a:buFont typeface="Calibri" pitchFamily="34" charset="0"/>
+              <a:buNone/>
+              <a:defRPr sz="2000" kern="1200">
+                <a:solidFill>
+                  <a:schemeClr val="tx1">
+                    <a:lumMod val="75000"/>
+                    <a:lumOff val="25000"/>
+                  </a:schemeClr>
+                </a:solidFill>
+                <a:latin typeface="+mn-lt"/>
+                <a:ea typeface="+mn-ea"/>
+                <a:cs typeface="+mn-cs"/>
+              </a:defRPr>
+            </a:lvl7pPr>
+            <a:lvl8pPr marL="3200400" indent="0" algn="ctr" defTabSz="914400" rtl="0" eaLnBrk="1" latinLnBrk="0" hangingPunct="1">
+              <a:lnSpc>
+                <a:spcPct val="90000"/>
+              </a:lnSpc>
+              <a:spcBef>
+                <a:spcPts val="200"/>
+              </a:spcBef>
+              <a:spcAft>
+                <a:spcPts val="400"/>
+              </a:spcAft>
+              <a:buClr>
+                <a:schemeClr val="accent1"/>
+              </a:buClr>
+              <a:buFont typeface="Calibri" pitchFamily="34" charset="0"/>
+              <a:buNone/>
+              <a:defRPr sz="2000" kern="1200">
+                <a:solidFill>
+                  <a:schemeClr val="tx1">
+                    <a:lumMod val="75000"/>
+                    <a:lumOff val="25000"/>
+                  </a:schemeClr>
+                </a:solidFill>
+                <a:latin typeface="+mn-lt"/>
+                <a:ea typeface="+mn-ea"/>
+                <a:cs typeface="+mn-cs"/>
+              </a:defRPr>
+            </a:lvl8pPr>
+            <a:lvl9pPr marL="3657600" indent="0" algn="ctr" defTabSz="914400" rtl="0" eaLnBrk="1" latinLnBrk="0" hangingPunct="1">
+              <a:lnSpc>
+                <a:spcPct val="90000"/>
+              </a:lnSpc>
+              <a:spcBef>
+                <a:spcPts val="200"/>
+              </a:spcBef>
+              <a:spcAft>
+                <a:spcPts val="400"/>
+              </a:spcAft>
+              <a:buClr>
+                <a:schemeClr val="accent1"/>
+              </a:buClr>
+              <a:buFont typeface="Calibri" pitchFamily="34" charset="0"/>
+              <a:buNone/>
+              <a:defRPr sz="2000" kern="1200">
+                <a:solidFill>
+                  <a:schemeClr val="tx1">
+                    <a:lumMod val="75000"/>
+                    <a:lumOff val="25000"/>
+                  </a:schemeClr>
+                </a:solidFill>
+                <a:latin typeface="+mn-lt"/>
+                <a:ea typeface="+mn-ea"/>
+                <a:cs typeface="+mn-cs"/>
+              </a:defRPr>
+            </a:lvl9pPr>
+          </a:lstStyle>
+          <a:p>
+            <a:pPr>
+              <a:lnSpc>
+                <a:spcPct val="100000"/>
+              </a:lnSpc>
+            </a:pPr>
+            <a:r>
+              <a:rPr lang="hu-HU" sz="1800" cap="none" spc="0" dirty="0">
+                <a:latin typeface="Bahnschrift Light" panose="020B0502040204020203" pitchFamily="34" charset="0"/>
+              </a:rPr>
+              <a:t>2026. 03. 03</a:t>
+            </a:r>
+          </a:p>
+        </p:txBody>
+      </p:sp>
+    </p:spTree>
+    <p:extLst>
+      <p:ext uri="{BB962C8B-B14F-4D97-AF65-F5344CB8AC3E}">
+        <p14:creationId xmlns:p14="http://schemas.microsoft.com/office/powerpoint/2010/main" val="3133121184"/>
+      </p:ext>
+    </p:extLst>
+  </p:cSld>
+  <p:clrMapOvr>
+    <a:masterClrMapping/>
+  </p:clrMapOvr>
+</p:sld>
+</file>
+
+<file path=ppt/slides/slide20.xml><?xml version="1.0" encoding="utf-8"?>
+<p:sld xmlns:a="http://schemas.openxmlformats.org/drawingml/2006/main" xmlns:r="http://schemas.openxmlformats.org/officeDocument/2006/relationships" xmlns:p="http://schemas.openxmlformats.org/presentationml/2006/main">
+  <p:cSld>
+    <p:bg>
+      <p:bgPr>
+        <a:solidFill>
+          <a:srgbClr val="FDF7E9"/>
+        </a:solidFill>
+        <a:effectLst/>
+      </p:bgPr>
+    </p:bg>
+    <p:spTree>
+      <p:nvGrpSpPr>
+        <p:cNvPr id="1" name=""/>
+        <p:cNvGrpSpPr/>
+        <p:nvPr/>
+      </p:nvGrpSpPr>
+      <p:grpSpPr>
+        <a:xfrm>
+          <a:off x="0" y="0"/>
+          <a:ext cx="0" cy="0"/>
+          <a:chOff x="0" y="0"/>
+          <a:chExt cx="0" cy="0"/>
+        </a:xfrm>
+      </p:grpSpPr>
+      <p:cxnSp>
+        <p:nvCxnSpPr>
+          <p:cNvPr id="2" name="Egyenes összekötő 1">
+            <a:extLst>
+              <a:ext uri="{FF2B5EF4-FFF2-40B4-BE49-F238E27FC236}">
+                <a16:creationId xmlns:a16="http://schemas.microsoft.com/office/drawing/2014/main" id="{20EF3F3C-374B-461F-BAF4-6C213DE7C8BB}"/>
+              </a:ext>
+            </a:extLst>
+          </p:cNvPr>
+          <p:cNvCxnSpPr>
+            <a:cxnSpLocks/>
+          </p:cNvCxnSpPr>
+          <p:nvPr/>
+        </p:nvCxnSpPr>
+        <p:spPr>
+          <a:xfrm>
+            <a:off x="3205163" y="2154342"/>
+            <a:ext cx="5781675" cy="0"/>
+          </a:xfrm>
+          <a:prstGeom prst="line">
+            <a:avLst/>
+          </a:prstGeom>
+          <a:ln>
+            <a:solidFill>
+              <a:schemeClr val="tx1">
+                <a:lumMod val="50000"/>
+                <a:lumOff val="50000"/>
+              </a:schemeClr>
+            </a:solidFill>
+          </a:ln>
+        </p:spPr>
+        <p:style>
+          <a:lnRef idx="1">
+            <a:schemeClr val="accent1"/>
+          </a:lnRef>
+          <a:fillRef idx="0">
+            <a:schemeClr val="accent1"/>
+          </a:fillRef>
+          <a:effectRef idx="0">
+            <a:schemeClr val="accent1"/>
+          </a:effectRef>
+          <a:fontRef idx="minor">
+            <a:schemeClr val="tx1"/>
+          </a:fontRef>
+        </p:style>
+      </p:cxnSp>
+      <p:pic>
+        <p:nvPicPr>
+          <p:cNvPr id="3" name="Kép 2">
+            <a:extLst>
+              <a:ext uri="{FF2B5EF4-FFF2-40B4-BE49-F238E27FC236}">
+                <a16:creationId xmlns:a16="http://schemas.microsoft.com/office/drawing/2014/main" id="{FE91A941-BC8A-4E2A-B780-F3F3D6A9B3E3}"/>
+              </a:ext>
+            </a:extLst>
+          </p:cNvPr>
+          <p:cNvPicPr>
+            <a:picLocks noChangeAspect="1"/>
+          </p:cNvPicPr>
+          <p:nvPr/>
+        </p:nvPicPr>
+        <p:blipFill rotWithShape="1">
+          <a:blip r:embed="rId2">
+            <a:alphaModFix/>
+            <a:extLst>
+              <a:ext uri="{28A0092B-C50C-407E-A947-70E740481C1C}">
+                <a14:useLocalDpi xmlns:a14="http://schemas.microsoft.com/office/drawing/2010/main" val="0"/>
+              </a:ext>
+            </a:extLst>
+          </a:blip>
+          <a:srcRect l="-1" t="58555" r="1153"/>
+          <a:stretch/>
+        </p:blipFill>
+        <p:spPr>
+          <a:xfrm>
+            <a:off x="3864953" y="1462194"/>
+            <a:ext cx="4462094" cy="616623"/>
+          </a:xfrm>
+          <a:prstGeom prst="rect">
+            <a:avLst/>
+          </a:prstGeom>
+        </p:spPr>
+      </p:pic>
+      <p:pic>
+        <p:nvPicPr>
+          <p:cNvPr id="4" name="Kép 3">
+            <a:extLst>
+              <a:ext uri="{FF2B5EF4-FFF2-40B4-BE49-F238E27FC236}">
+                <a16:creationId xmlns:a16="http://schemas.microsoft.com/office/drawing/2014/main" id="{78D3DB18-E771-4DF0-84FA-206E8FA41883}"/>
+              </a:ext>
+            </a:extLst>
+          </p:cNvPr>
+          <p:cNvPicPr>
+            <a:picLocks noChangeAspect="1"/>
+          </p:cNvPicPr>
+          <p:nvPr/>
+        </p:nvPicPr>
+        <p:blipFill rotWithShape="1">
+          <a:blip r:embed="rId2">
+            <a:alphaModFix/>
+            <a:extLst>
+              <a:ext uri="{28A0092B-C50C-407E-A947-70E740481C1C}">
+                <a14:useLocalDpi xmlns:a14="http://schemas.microsoft.com/office/drawing/2010/main" val="0"/>
+              </a:ext>
+            </a:extLst>
+          </a:blip>
+          <a:srcRect l="-1" r="-295" b="38896"/>
+          <a:stretch/>
+        </p:blipFill>
+        <p:spPr>
+          <a:xfrm>
+            <a:off x="3817995" y="581028"/>
+            <a:ext cx="4556011" cy="914838"/>
+          </a:xfrm>
+          <a:prstGeom prst="rect">
+            <a:avLst/>
+          </a:prstGeom>
+        </p:spPr>
+      </p:pic>
+      <p:sp>
+        <p:nvSpPr>
+          <p:cNvPr id="5" name="Cím 1">
+            <a:extLst>
+              <a:ext uri="{FF2B5EF4-FFF2-40B4-BE49-F238E27FC236}">
+                <a16:creationId xmlns:a16="http://schemas.microsoft.com/office/drawing/2014/main" id="{175A5A3F-6F8F-4002-ADBD-CD8C93ECEEE1}"/>
+              </a:ext>
+            </a:extLst>
+          </p:cNvPr>
+          <p:cNvSpPr txBox="1">
+            <a:spLocks/>
+          </p:cNvSpPr>
+          <p:nvPr/>
+        </p:nvSpPr>
+        <p:spPr>
+          <a:xfrm>
+            <a:off x="1066800" y="2703622"/>
+            <a:ext cx="10058400" cy="1450757"/>
+          </a:xfrm>
+          <a:prstGeom prst="rect">
+            <a:avLst/>
+          </a:prstGeom>
+        </p:spPr>
+        <p:txBody>
+          <a:bodyPr anchor="ctr"/>
+          <a:lstStyle>
+            <a:lvl1pPr algn="l" defTabSz="914400" rtl="0" eaLnBrk="1" latinLnBrk="0" hangingPunct="1">
+              <a:lnSpc>
+                <a:spcPct val="85000"/>
+              </a:lnSpc>
+              <a:spcBef>
+                <a:spcPct val="0"/>
+              </a:spcBef>
+              <a:buNone/>
+              <a:defRPr sz="4800" kern="1200" spc="-50" baseline="0">
+                <a:solidFill>
+                  <a:schemeClr val="tx1">
+                    <a:lumMod val="75000"/>
+                    <a:lumOff val="25000"/>
+                  </a:schemeClr>
+                </a:solidFill>
+                <a:latin typeface="+mj-lt"/>
+                <a:ea typeface="+mj-ea"/>
+                <a:cs typeface="+mj-cs"/>
+              </a:defRPr>
+            </a:lvl1pPr>
+          </a:lstStyle>
+          <a:p>
+            <a:pPr algn="ctr"/>
+            <a:r>
+              <a:rPr lang="hu-HU" sz="6000" b="1" dirty="0">
+                <a:latin typeface="Bahnschrift SemiBold" panose="020B0502040204020203" pitchFamily="34" charset="0"/>
+              </a:rPr>
+              <a:t>Köszönjük a figyelmet</a:t>
+            </a:r>
+          </a:p>
+        </p:txBody>
+      </p:sp>
+      <p:pic>
+        <p:nvPicPr>
+          <p:cNvPr id="12" name="Kép 11">
+            <a:extLst>
+              <a:ext uri="{FF2B5EF4-FFF2-40B4-BE49-F238E27FC236}">
+                <a16:creationId xmlns:a16="http://schemas.microsoft.com/office/drawing/2014/main" id="{0D5DF80E-C3F6-4A3A-98C9-825EEE99BBF4}"/>
+              </a:ext>
+            </a:extLst>
+          </p:cNvPr>
+          <p:cNvPicPr>
+            <a:picLocks noChangeAspect="1"/>
+          </p:cNvPicPr>
+          <p:nvPr/>
+        </p:nvPicPr>
+        <p:blipFill rotWithShape="1">
+          <a:blip r:embed="rId3">
+            <a:extLst>
+              <a:ext uri="{28A0092B-C50C-407E-A947-70E740481C1C}">
+                <a14:useLocalDpi xmlns:a14="http://schemas.microsoft.com/office/drawing/2010/main" val="0"/>
+              </a:ext>
+            </a:extLst>
+          </a:blip>
+          <a:srcRect l="16625" r="14640"/>
+          <a:stretch/>
+        </p:blipFill>
+        <p:spPr>
+          <a:xfrm rot="6074309">
+            <a:off x="253294" y="393819"/>
+            <a:ext cx="1804052" cy="1476375"/>
+          </a:xfrm>
+          <a:prstGeom prst="rect">
+            <a:avLst/>
+          </a:prstGeom>
+        </p:spPr>
+      </p:pic>
+      <p:pic>
+        <p:nvPicPr>
+          <p:cNvPr id="13" name="Kép 12">
+            <a:extLst>
+              <a:ext uri="{FF2B5EF4-FFF2-40B4-BE49-F238E27FC236}">
+                <a16:creationId xmlns:a16="http://schemas.microsoft.com/office/drawing/2014/main" id="{7AF0C74E-3043-40A3-8603-B30A83BB9DDF}"/>
+              </a:ext>
+            </a:extLst>
+          </p:cNvPr>
+          <p:cNvPicPr>
+            <a:picLocks noChangeAspect="1"/>
+          </p:cNvPicPr>
+          <p:nvPr/>
+        </p:nvPicPr>
+        <p:blipFill rotWithShape="1">
+          <a:blip r:embed="rId4">
+            <a:extLst>
+              <a:ext uri="{28A0092B-C50C-407E-A947-70E740481C1C}">
+                <a14:useLocalDpi xmlns:a14="http://schemas.microsoft.com/office/drawing/2010/main" val="0"/>
+              </a:ext>
+            </a:extLst>
+          </a:blip>
+          <a:srcRect l="31214" t="-711" r="26907" b="711"/>
+          <a:stretch/>
+        </p:blipFill>
+        <p:spPr>
+          <a:xfrm rot="4156304" flipH="1">
+            <a:off x="10842996" y="4624346"/>
+            <a:ext cx="1208569" cy="1623298"/>
           </a:xfrm>
           <a:prstGeom prst="rect">
             <a:avLst/>
@@ -4348,13 +9251,146 @@
     </p:spTree>
     <p:extLst>
       <p:ext uri="{BB962C8B-B14F-4D97-AF65-F5344CB8AC3E}">
-        <p14:creationId xmlns:p14="http://schemas.microsoft.com/office/powerpoint/2010/main" val="830527453"/>
+        <p14:creationId xmlns:p14="http://schemas.microsoft.com/office/powerpoint/2010/main" val="3755244303"/>
       </p:ext>
     </p:extLst>
   </p:cSld>
   <p:clrMapOvr>
     <a:masterClrMapping/>
   </p:clrMapOvr>
+  <mc:AlternateContent xmlns:mc="http://schemas.openxmlformats.org/markup-compatibility/2006">
+    <mc:Choice xmlns:p159="http://schemas.microsoft.com/office/powerpoint/2015/09/main" Requires="p159">
+      <p:transition xmlns:p14="http://schemas.microsoft.com/office/powerpoint/2010/main" spd="slow" p14:dur="2000">
+        <p159:morph option="byObject"/>
+      </p:transition>
+    </mc:Choice>
+    <mc:Fallback>
+      <p:transition spd="slow">
+        <p:fade/>
+      </p:transition>
+    </mc:Fallback>
+  </mc:AlternateContent>
+  <p:timing>
+    <p:tnLst>
+      <p:par>
+        <p:cTn id="1" dur="indefinite" restart="never" nodeType="tmRoot">
+          <p:childTnLst>
+            <p:seq concurrent="1" nextAc="seek">
+              <p:cTn id="2" dur="indefinite" nodeType="mainSeq">
+                <p:childTnLst>
+                  <p:par>
+                    <p:cTn id="3" fill="hold">
+                      <p:stCondLst>
+                        <p:cond delay="indefinite"/>
+                        <p:cond evt="onBegin" delay="0">
+                          <p:tn val="2"/>
+                        </p:cond>
+                      </p:stCondLst>
+                      <p:childTnLst>
+                        <p:par>
+                          <p:cTn id="4" fill="hold">
+                            <p:stCondLst>
+                              <p:cond delay="0"/>
+                            </p:stCondLst>
+                            <p:childTnLst>
+                              <p:par>
+                                <p:cTn id="5" presetID="10" presetClass="entr" presetSubtype="0" fill="hold" nodeType="withEffect">
+                                  <p:stCondLst>
+                                    <p:cond delay="0"/>
+                                  </p:stCondLst>
+                                  <p:childTnLst>
+                                    <p:set>
+                                      <p:cBhvr>
+                                        <p:cTn id="6" dur="1" fill="hold">
+                                          <p:stCondLst>
+                                            <p:cond delay="0"/>
+                                          </p:stCondLst>
+                                        </p:cTn>
+                                        <p:tgtEl>
+                                          <p:spTgt spid="12"/>
+                                        </p:tgtEl>
+                                        <p:attrNameLst>
+                                          <p:attrName>style.visibility</p:attrName>
+                                        </p:attrNameLst>
+                                      </p:cBhvr>
+                                      <p:to>
+                                        <p:strVal val="visible"/>
+                                      </p:to>
+                                    </p:set>
+                                    <p:animEffect transition="in" filter="fade">
+                                      <p:cBhvr>
+                                        <p:cTn id="7" dur="500"/>
+                                        <p:tgtEl>
+                                          <p:spTgt spid="12"/>
+                                        </p:tgtEl>
+                                      </p:cBhvr>
+                                    </p:animEffect>
+                                  </p:childTnLst>
+                                </p:cTn>
+                              </p:par>
+                              <p:par>
+                                <p:cTn id="8" presetID="10" presetClass="entr" presetSubtype="0" fill="hold" nodeType="withEffect">
+                                  <p:stCondLst>
+                                    <p:cond delay="0"/>
+                                  </p:stCondLst>
+                                  <p:childTnLst>
+                                    <p:set>
+                                      <p:cBhvr>
+                                        <p:cTn id="9" dur="1" fill="hold">
+                                          <p:stCondLst>
+                                            <p:cond delay="0"/>
+                                          </p:stCondLst>
+                                        </p:cTn>
+                                        <p:tgtEl>
+                                          <p:spTgt spid="13"/>
+                                        </p:tgtEl>
+                                        <p:attrNameLst>
+                                          <p:attrName>style.visibility</p:attrName>
+                                        </p:attrNameLst>
+                                      </p:cBhvr>
+                                      <p:to>
+                                        <p:strVal val="visible"/>
+                                      </p:to>
+                                    </p:set>
+                                    <p:animEffect transition="in" filter="fade">
+                                      <p:cBhvr>
+                                        <p:cTn id="10" dur="500"/>
+                                        <p:tgtEl>
+                                          <p:spTgt spid="13"/>
+                                        </p:tgtEl>
+                                      </p:cBhvr>
+                                    </p:animEffect>
+                                  </p:childTnLst>
+                                </p:cTn>
+                              </p:par>
+                            </p:childTnLst>
+                          </p:cTn>
+                        </p:par>
+                      </p:childTnLst>
+                    </p:cTn>
+                  </p:par>
+                </p:childTnLst>
+              </p:cTn>
+              <p:prevCondLst>
+                <p:cond evt="onPrev" delay="0">
+                  <p:tgtEl>
+                    <p:sldTgt/>
+                  </p:tgtEl>
+                </p:cond>
+              </p:prevCondLst>
+              <p:nextCondLst>
+                <p:cond evt="onNext" delay="0">
+                  <p:tgtEl>
+                    <p:sldTgt/>
+                  </p:tgtEl>
+                </p:cond>
+              </p:nextCondLst>
+            </p:seq>
+          </p:childTnLst>
+        </p:cTn>
+      </p:par>
+    </p:tnLst>
+  </p:timing>
 </p:sld>
 </file>
 
@@ -4385,127 +9421,69 @@
       </p:grpSpPr>
       <p:sp>
         <p:nvSpPr>
-          <p:cNvPr id="3" name="Tartalom helye 2">
+          <p:cNvPr id="2" name="Cím 1">
             <a:extLst>
               <a:ext uri="{FF2B5EF4-FFF2-40B4-BE49-F238E27FC236}">
-                <a16:creationId xmlns:a16="http://schemas.microsoft.com/office/drawing/2014/main" id="{32758DB2-9D10-47A2-925C-F8A858558A07}"/>
+                <a16:creationId xmlns:a16="http://schemas.microsoft.com/office/drawing/2014/main" id="{C18830B2-00D6-4BD2-BE11-19215C420251}"/>
               </a:ext>
             </a:extLst>
           </p:cNvPr>
-          <p:cNvSpPr>
-            <a:spLocks noGrp="1"/>
-          </p:cNvSpPr>
-          <p:nvPr>
-            <p:ph idx="1"/>
-          </p:nvPr>
-        </p:nvSpPr>
-        <p:spPr/>
-        <p:txBody>
-          <a:bodyPr/>
-          <a:lstStyle/>
-          <a:p>
-            <a:pPr>
-              <a:buFont typeface="Arial" panose="020B0604020202020204" pitchFamily="34" charset="0"/>
-              <a:buChar char="•"/>
-            </a:pPr>
-            <a:r>
-              <a:rPr lang="hu-HU" dirty="0"/>
-              <a:t> Regisztráció és bejelentkezés</a:t>
-            </a:r>
-          </a:p>
-          <a:p>
-            <a:pPr>
-              <a:buFont typeface="Arial" panose="020B0604020202020204" pitchFamily="34" charset="0"/>
-              <a:buChar char="•"/>
-            </a:pPr>
-            <a:r>
-              <a:rPr lang="hu-HU" dirty="0"/>
-              <a:t> Étlapkezelés (menü opciók, allergének)</a:t>
-            </a:r>
-          </a:p>
-          <a:p>
-            <a:pPr>
-              <a:buFont typeface="Arial" panose="020B0604020202020204" pitchFamily="34" charset="0"/>
-              <a:buChar char="•"/>
-            </a:pPr>
-            <a:r>
-              <a:rPr lang="hu-HU" dirty="0"/>
-              <a:t> Rendelési és lemondási rendszer</a:t>
-            </a:r>
-          </a:p>
-          <a:p>
-            <a:pPr>
-              <a:buFont typeface="Arial" panose="020B0604020202020204" pitchFamily="34" charset="0"/>
-              <a:buChar char="•"/>
-            </a:pPr>
-            <a:r>
-              <a:rPr lang="hu-HU" dirty="0"/>
-              <a:t> Ebédkártya leolvasás</a:t>
-            </a:r>
-          </a:p>
-          <a:p>
-            <a:pPr>
-              <a:buFont typeface="Arial" panose="020B0604020202020204" pitchFamily="34" charset="0"/>
-              <a:buChar char="•"/>
-            </a:pPr>
-            <a:r>
-              <a:rPr lang="hu-HU" dirty="0"/>
-              <a:t> Számla generálás</a:t>
-            </a:r>
-          </a:p>
-          <a:p>
-            <a:pPr>
-              <a:buFont typeface="Arial" panose="020B0604020202020204" pitchFamily="34" charset="0"/>
-              <a:buChar char="•"/>
-            </a:pPr>
-            <a:r>
-              <a:rPr lang="hu-HU" dirty="0"/>
-              <a:t> Fizetés</a:t>
-            </a:r>
-          </a:p>
-        </p:txBody>
-      </p:sp>
-      <p:sp>
-        <p:nvSpPr>
-          <p:cNvPr id="4" name="Cím 1">
-            <a:extLst>
-              <a:ext uri="{FF2B5EF4-FFF2-40B4-BE49-F238E27FC236}">
-                <a16:creationId xmlns:a16="http://schemas.microsoft.com/office/drawing/2014/main" id="{8A10CF98-B20C-498A-B49A-54F33274AB98}"/>
-              </a:ext>
-            </a:extLst>
-          </p:cNvPr>
-          <p:cNvSpPr>
-            <a:spLocks noGrp="1"/>
-          </p:cNvSpPr>
-          <p:nvPr>
-            <p:ph type="title"/>
-          </p:nvPr>
+          <p:cNvSpPr txBox="1">
+            <a:spLocks/>
+          </p:cNvSpPr>
+          <p:nvPr/>
         </p:nvSpPr>
         <p:spPr>
           <a:xfrm>
-            <a:off x="1097280" y="286603"/>
-            <a:ext cx="10058400" cy="1450757"/>
+            <a:off x="1098000" y="288000"/>
+            <a:ext cx="9760046" cy="2006995"/>
           </a:xfrm>
+          <a:prstGeom prst="rect">
+            <a:avLst/>
+          </a:prstGeom>
         </p:spPr>
         <p:txBody>
-          <a:bodyPr/>
-          <a:lstStyle/>
+          <a:bodyPr anchor="ctr">
+            <a:normAutofit/>
+          </a:bodyPr>
+          <a:lstStyle>
+            <a:lvl1pPr algn="l" defTabSz="914400" rtl="0" eaLnBrk="1" latinLnBrk="0" hangingPunct="1">
+              <a:lnSpc>
+                <a:spcPct val="85000"/>
+              </a:lnSpc>
+              <a:spcBef>
+                <a:spcPct val="0"/>
+              </a:spcBef>
+              <a:buNone/>
+              <a:defRPr sz="4800" kern="1200" spc="-50" baseline="0">
+                <a:solidFill>
+                  <a:schemeClr val="tx1">
+                    <a:lumMod val="75000"/>
+                    <a:lumOff val="25000"/>
+                  </a:schemeClr>
+                </a:solidFill>
+                <a:latin typeface="+mj-lt"/>
+                <a:ea typeface="+mj-ea"/>
+                <a:cs typeface="+mj-cs"/>
+              </a:defRPr>
+            </a:lvl1pPr>
+          </a:lstStyle>
           <a:p>
             <a:r>
               <a:rPr lang="hu-HU" b="1" dirty="0">
                 <a:latin typeface="Bahnschrift SemiBold" panose="020B0502040204020203" pitchFamily="34" charset="0"/>
               </a:rPr>
-              <a:t>Funkciók</a:t>
+              <a:t>A projekt bemutatása</a:t>
             </a:r>
           </a:p>
         </p:txBody>
       </p:sp>
       <p:pic>
         <p:nvPicPr>
-          <p:cNvPr id="9" name="Kép 8">
+          <p:cNvPr id="4" name="Kép 3">
             <a:extLst>
               <a:ext uri="{FF2B5EF4-FFF2-40B4-BE49-F238E27FC236}">
-                <a16:creationId xmlns:a16="http://schemas.microsoft.com/office/drawing/2014/main" id="{DB1DA321-C6CE-4E44-B524-823920773889}"/>
+                <a16:creationId xmlns:a16="http://schemas.microsoft.com/office/drawing/2014/main" id="{7912835F-A62C-4B0D-B733-74106EBFDA26}"/>
               </a:ext>
             </a:extLst>
           </p:cNvPr>
@@ -4516,15 +9494,102 @@
         </p:nvPicPr>
         <p:blipFill rotWithShape="1">
           <a:blip r:embed="rId2">
-            <a:alphaModFix amt="52000"/>
+            <a:alphaModFix amt="50000"/>
+            <a:extLst>
+              <a:ext uri="{28A0092B-C50C-407E-A947-70E740481C1C}">
+                <a14:useLocalDpi xmlns:a14="http://schemas.microsoft.com/office/drawing/2010/main" val="0"/>
+              </a:ext>
+            </a:extLst>
           </a:blip>
-          <a:srcRect t="20576"/>
+          <a:srcRect t="58555" r="67375"/>
           <a:stretch/>
         </p:blipFill>
         <p:spPr>
           <a:xfrm>
-            <a:off x="10561520" y="286603"/>
-            <a:ext cx="1373305" cy="1064836"/>
+            <a:off x="10619475" y="1036308"/>
+            <a:ext cx="1364958" cy="571501"/>
+          </a:xfrm>
+          <a:prstGeom prst="rect">
+            <a:avLst/>
+          </a:prstGeom>
+        </p:spPr>
+      </p:pic>
+      <p:cxnSp>
+        <p:nvCxnSpPr>
+          <p:cNvPr id="9" name="Egyenes összekötő 8">
+            <a:extLst>
+              <a:ext uri="{FF2B5EF4-FFF2-40B4-BE49-F238E27FC236}">
+                <a16:creationId xmlns:a16="http://schemas.microsoft.com/office/drawing/2014/main" id="{670AB60B-B385-4E46-A012-AD0038CF5F38}"/>
+              </a:ext>
+            </a:extLst>
+          </p:cNvPr>
+          <p:cNvCxnSpPr>
+            <a:cxnSpLocks/>
+          </p:cNvCxnSpPr>
+          <p:nvPr/>
+        </p:nvCxnSpPr>
+        <p:spPr>
+          <a:xfrm>
+            <a:off x="1209600" y="1738800"/>
+            <a:ext cx="9982275" cy="0"/>
+          </a:xfrm>
+          <a:prstGeom prst="line">
+            <a:avLst/>
+          </a:prstGeom>
+          <a:ln>
+            <a:solidFill>
+              <a:schemeClr val="tx1">
+                <a:lumMod val="50000"/>
+                <a:lumOff val="50000"/>
+              </a:schemeClr>
+            </a:solidFill>
+          </a:ln>
+        </p:spPr>
+        <p:style>
+          <a:lnRef idx="1">
+            <a:schemeClr val="accent1"/>
+          </a:lnRef>
+          <a:fillRef idx="0">
+            <a:schemeClr val="accent1"/>
+          </a:fillRef>
+          <a:effectRef idx="0">
+            <a:schemeClr val="accent1"/>
+          </a:effectRef>
+          <a:fontRef idx="minor">
+            <a:schemeClr val="tx1"/>
+          </a:fontRef>
+        </p:style>
+      </p:cxnSp>
+      <p:pic>
+        <p:nvPicPr>
+          <p:cNvPr id="10" name="Kép 9">
+            <a:extLst>
+              <a:ext uri="{FF2B5EF4-FFF2-40B4-BE49-F238E27FC236}">
+                <a16:creationId xmlns:a16="http://schemas.microsoft.com/office/drawing/2014/main" id="{CB9406C6-CF11-47E5-AEFA-0BA584F8F8D2}"/>
+              </a:ext>
+            </a:extLst>
+          </p:cNvPr>
+          <p:cNvPicPr>
+            <a:picLocks noChangeAspect="1"/>
+          </p:cNvPicPr>
+          <p:nvPr/>
+        </p:nvPicPr>
+        <p:blipFill rotWithShape="1">
+          <a:blip r:embed="rId2">
+            <a:alphaModFix amt="50000"/>
+            <a:extLst>
+              <a:ext uri="{28A0092B-C50C-407E-A947-70E740481C1C}">
+                <a14:useLocalDpi xmlns:a14="http://schemas.microsoft.com/office/drawing/2010/main" val="0"/>
+              </a:ext>
+            </a:extLst>
+          </a:blip>
+          <a:srcRect l="1" r="61666" b="38896"/>
+          <a:stretch/>
+        </p:blipFill>
+        <p:spPr>
+          <a:xfrm>
+            <a:off x="10565538" y="349786"/>
+            <a:ext cx="1418895" cy="745451"/>
           </a:xfrm>
           <a:prstGeom prst="rect">
             <a:avLst/>
@@ -4534,13 +9599,25 @@
     </p:spTree>
     <p:extLst>
       <p:ext uri="{BB962C8B-B14F-4D97-AF65-F5344CB8AC3E}">
-        <p14:creationId xmlns:p14="http://schemas.microsoft.com/office/powerpoint/2010/main" val="2996320224"/>
+        <p14:creationId xmlns:p14="http://schemas.microsoft.com/office/powerpoint/2010/main" val="1681993095"/>
       </p:ext>
     </p:extLst>
   </p:cSld>
   <p:clrMapOvr>
     <a:masterClrMapping/>
   </p:clrMapOvr>
+  <mc:AlternateContent xmlns:mc="http://schemas.openxmlformats.org/markup-compatibility/2006">
+    <mc:Choice xmlns:p159="http://schemas.microsoft.com/office/powerpoint/2015/09/main" Requires="p159">
+      <p:transition xmlns:p14="http://schemas.microsoft.com/office/powerpoint/2010/main" spd="slow" p14:dur="2000">
+        <p159:morph option="byObject"/>
+      </p:transition>
+    </mc:Choice>
+    <mc:Fallback>
+      <p:transition spd="slow">
+        <p:fade/>
+      </p:transition>
+    </mc:Fallback>
+  </mc:AlternateContent>
 </p:sld>
 </file>
 
@@ -4571,97 +9648,69 @@
       </p:grpSpPr>
       <p:sp>
         <p:nvSpPr>
-          <p:cNvPr id="3" name="Tartalom helye 2">
+          <p:cNvPr id="2" name="Cím 1">
             <a:extLst>
               <a:ext uri="{FF2B5EF4-FFF2-40B4-BE49-F238E27FC236}">
-                <a16:creationId xmlns:a16="http://schemas.microsoft.com/office/drawing/2014/main" id="{32758DB2-9D10-47A2-925C-F8A858558A07}"/>
+                <a16:creationId xmlns:a16="http://schemas.microsoft.com/office/drawing/2014/main" id="{C18830B2-00D6-4BD2-BE11-19215C420251}"/>
               </a:ext>
             </a:extLst>
           </p:cNvPr>
-          <p:cNvSpPr>
-            <a:spLocks noGrp="1"/>
-          </p:cNvSpPr>
-          <p:nvPr>
-            <p:ph idx="1"/>
-          </p:nvPr>
-        </p:nvSpPr>
-        <p:spPr/>
-        <p:txBody>
-          <a:bodyPr/>
-          <a:lstStyle/>
-          <a:p>
-            <a:pPr>
-              <a:buFont typeface="Wingdings" panose="05000000000000000000" pitchFamily="2" charset="2"/>
-              <a:buChar char="v"/>
-            </a:pPr>
-            <a:r>
-              <a:rPr lang="hu-HU" dirty="0"/>
-              <a:t> Backend</a:t>
-            </a:r>
-          </a:p>
-          <a:p>
-            <a:pPr>
-              <a:buFont typeface="Wingdings" panose="05000000000000000000" pitchFamily="2" charset="2"/>
-              <a:buChar char="v"/>
-            </a:pPr>
-            <a:r>
-              <a:rPr lang="hu-HU" dirty="0"/>
-              <a:t> Frontend</a:t>
-            </a:r>
-          </a:p>
-          <a:p>
-            <a:pPr>
-              <a:buFont typeface="Wingdings" panose="05000000000000000000" pitchFamily="2" charset="2"/>
-              <a:buChar char="v"/>
-            </a:pPr>
-            <a:r>
-              <a:rPr lang="hu-HU" dirty="0"/>
-              <a:t> Adatbázis</a:t>
-            </a:r>
-          </a:p>
-        </p:txBody>
-      </p:sp>
-      <p:sp>
-        <p:nvSpPr>
-          <p:cNvPr id="4" name="Cím 1">
-            <a:extLst>
-              <a:ext uri="{FF2B5EF4-FFF2-40B4-BE49-F238E27FC236}">
-                <a16:creationId xmlns:a16="http://schemas.microsoft.com/office/drawing/2014/main" id="{B1162F8F-91B4-45FA-8FCD-4AE20D403564}"/>
-              </a:ext>
-            </a:extLst>
-          </p:cNvPr>
-          <p:cNvSpPr>
-            <a:spLocks noGrp="1"/>
-          </p:cNvSpPr>
-          <p:nvPr>
-            <p:ph type="title"/>
-          </p:nvPr>
+          <p:cNvSpPr txBox="1">
+            <a:spLocks/>
+          </p:cNvSpPr>
+          <p:nvPr/>
         </p:nvSpPr>
         <p:spPr>
           <a:xfrm>
-            <a:off x="1097280" y="286603"/>
-            <a:ext cx="10058400" cy="1450757"/>
+            <a:off x="1098000" y="288000"/>
+            <a:ext cx="9760046" cy="2006995"/>
           </a:xfrm>
+          <a:prstGeom prst="rect">
+            <a:avLst/>
+          </a:prstGeom>
         </p:spPr>
         <p:txBody>
-          <a:bodyPr/>
-          <a:lstStyle/>
+          <a:bodyPr anchor="ctr" anchorCtr="0">
+            <a:normAutofit/>
+          </a:bodyPr>
+          <a:lstStyle>
+            <a:lvl1pPr algn="l" defTabSz="914400" rtl="0" eaLnBrk="1" latinLnBrk="0" hangingPunct="1">
+              <a:lnSpc>
+                <a:spcPct val="85000"/>
+              </a:lnSpc>
+              <a:spcBef>
+                <a:spcPct val="0"/>
+              </a:spcBef>
+              <a:buNone/>
+              <a:defRPr sz="4800" kern="1200" spc="-50" baseline="0">
+                <a:solidFill>
+                  <a:schemeClr val="tx1">
+                    <a:lumMod val="75000"/>
+                    <a:lumOff val="25000"/>
+                  </a:schemeClr>
+                </a:solidFill>
+                <a:latin typeface="+mj-lt"/>
+                <a:ea typeface="+mj-ea"/>
+                <a:cs typeface="+mj-cs"/>
+              </a:defRPr>
+            </a:lvl1pPr>
+          </a:lstStyle>
           <a:p>
             <a:r>
               <a:rPr lang="hu-HU" b="1" dirty="0">
                 <a:latin typeface="Bahnschrift SemiBold" panose="020B0502040204020203" pitchFamily="34" charset="0"/>
               </a:rPr>
-              <a:t>Felépítése </a:t>
+              <a:t>A projekt bemutatása</a:t>
             </a:r>
           </a:p>
         </p:txBody>
       </p:sp>
       <p:pic>
         <p:nvPicPr>
-          <p:cNvPr id="6" name="Kép 5">
+          <p:cNvPr id="4" name="Kép 3">
             <a:extLst>
               <a:ext uri="{FF2B5EF4-FFF2-40B4-BE49-F238E27FC236}">
-                <a16:creationId xmlns:a16="http://schemas.microsoft.com/office/drawing/2014/main" id="{78454631-B18C-4D10-AB47-F3495CAE3658}"/>
+                <a16:creationId xmlns:a16="http://schemas.microsoft.com/office/drawing/2014/main" id="{7912835F-A62C-4B0D-B733-74106EBFDA26}"/>
               </a:ext>
             </a:extLst>
           </p:cNvPr>
@@ -4672,15 +9721,522 @@
         </p:nvPicPr>
         <p:blipFill rotWithShape="1">
           <a:blip r:embed="rId2">
-            <a:alphaModFix amt="52000"/>
+            <a:alphaModFix amt="50000"/>
+            <a:extLst>
+              <a:ext uri="{28A0092B-C50C-407E-A947-70E740481C1C}">
+                <a14:useLocalDpi xmlns:a14="http://schemas.microsoft.com/office/drawing/2010/main" val="0"/>
+              </a:ext>
+            </a:extLst>
           </a:blip>
-          <a:srcRect t="20576"/>
+          <a:srcRect t="58555" r="67375"/>
           <a:stretch/>
         </p:blipFill>
         <p:spPr>
           <a:xfrm>
-            <a:off x="10561520" y="286603"/>
-            <a:ext cx="1373305" cy="1064836"/>
+            <a:off x="10619475" y="1036308"/>
+            <a:ext cx="1364958" cy="571501"/>
+          </a:xfrm>
+          <a:prstGeom prst="rect">
+            <a:avLst/>
+          </a:prstGeom>
+        </p:spPr>
+      </p:pic>
+      <p:cxnSp>
+        <p:nvCxnSpPr>
+          <p:cNvPr id="9" name="Egyenes összekötő 8">
+            <a:extLst>
+              <a:ext uri="{FF2B5EF4-FFF2-40B4-BE49-F238E27FC236}">
+                <a16:creationId xmlns:a16="http://schemas.microsoft.com/office/drawing/2014/main" id="{670AB60B-B385-4E46-A012-AD0038CF5F38}"/>
+              </a:ext>
+            </a:extLst>
+          </p:cNvPr>
+          <p:cNvCxnSpPr>
+            <a:cxnSpLocks/>
+          </p:cNvCxnSpPr>
+          <p:nvPr/>
+        </p:nvCxnSpPr>
+        <p:spPr>
+          <a:xfrm>
+            <a:off x="1209600" y="1738800"/>
+            <a:ext cx="9946080" cy="0"/>
+          </a:xfrm>
+          <a:prstGeom prst="line">
+            <a:avLst/>
+          </a:prstGeom>
+          <a:ln>
+            <a:solidFill>
+              <a:schemeClr val="tx1">
+                <a:lumMod val="50000"/>
+                <a:lumOff val="50000"/>
+              </a:schemeClr>
+            </a:solidFill>
+          </a:ln>
+        </p:spPr>
+        <p:style>
+          <a:lnRef idx="1">
+            <a:schemeClr val="accent1"/>
+          </a:lnRef>
+          <a:fillRef idx="0">
+            <a:schemeClr val="accent1"/>
+          </a:fillRef>
+          <a:effectRef idx="0">
+            <a:schemeClr val="accent1"/>
+          </a:effectRef>
+          <a:fontRef idx="minor">
+            <a:schemeClr val="tx1"/>
+          </a:fontRef>
+        </p:style>
+      </p:cxnSp>
+      <p:pic>
+        <p:nvPicPr>
+          <p:cNvPr id="10" name="Kép 9">
+            <a:extLst>
+              <a:ext uri="{FF2B5EF4-FFF2-40B4-BE49-F238E27FC236}">
+                <a16:creationId xmlns:a16="http://schemas.microsoft.com/office/drawing/2014/main" id="{CB9406C6-CF11-47E5-AEFA-0BA584F8F8D2}"/>
+              </a:ext>
+            </a:extLst>
+          </p:cNvPr>
+          <p:cNvPicPr>
+            <a:picLocks noChangeAspect="1"/>
+          </p:cNvPicPr>
+          <p:nvPr/>
+        </p:nvPicPr>
+        <p:blipFill rotWithShape="1">
+          <a:blip r:embed="rId2">
+            <a:alphaModFix amt="50000"/>
+            <a:extLst>
+              <a:ext uri="{28A0092B-C50C-407E-A947-70E740481C1C}">
+                <a14:useLocalDpi xmlns:a14="http://schemas.microsoft.com/office/drawing/2010/main" val="0"/>
+              </a:ext>
+            </a:extLst>
+          </a:blip>
+          <a:srcRect l="1" r="61666" b="38896"/>
+          <a:stretch/>
+        </p:blipFill>
+        <p:spPr>
+          <a:xfrm>
+            <a:off x="10565538" y="349786"/>
+            <a:ext cx="1418895" cy="745451"/>
+          </a:xfrm>
+          <a:prstGeom prst="rect">
+            <a:avLst/>
+          </a:prstGeom>
+        </p:spPr>
+      </p:pic>
+      <p:sp>
+        <p:nvSpPr>
+          <p:cNvPr id="6" name="Tartalom helye 2">
+            <a:extLst>
+              <a:ext uri="{FF2B5EF4-FFF2-40B4-BE49-F238E27FC236}">
+                <a16:creationId xmlns:a16="http://schemas.microsoft.com/office/drawing/2014/main" id="{B238462E-F8EB-407F-B0B6-3AE443BB552F}"/>
+              </a:ext>
+            </a:extLst>
+          </p:cNvPr>
+          <p:cNvSpPr txBox="1">
+            <a:spLocks/>
+          </p:cNvSpPr>
+          <p:nvPr/>
+        </p:nvSpPr>
+        <p:spPr>
+          <a:xfrm>
+            <a:off x="1097280" y="1874067"/>
+            <a:ext cx="10058400" cy="4330005"/>
+          </a:xfrm>
+          <a:prstGeom prst="rect">
+            <a:avLst/>
+          </a:prstGeom>
+        </p:spPr>
+        <p:txBody>
+          <a:bodyPr>
+            <a:normAutofit/>
+          </a:bodyPr>
+          <a:lstStyle>
+            <a:lvl1pPr marL="91440" indent="-91440" algn="l" defTabSz="914400" rtl="0" eaLnBrk="1" latinLnBrk="0" hangingPunct="1">
+              <a:lnSpc>
+                <a:spcPct val="90000"/>
+              </a:lnSpc>
+              <a:spcBef>
+                <a:spcPts val="1200"/>
+              </a:spcBef>
+              <a:spcAft>
+                <a:spcPts val="200"/>
+              </a:spcAft>
+              <a:buClr>
+                <a:schemeClr val="accent1"/>
+              </a:buClr>
+              <a:buSzPct val="100000"/>
+              <a:buFont typeface="Calibri" panose="020F0502020204030204" pitchFamily="34" charset="0"/>
+              <a:buChar char=" "/>
+              <a:defRPr sz="2000" kern="1200">
+                <a:solidFill>
+                  <a:schemeClr val="tx1">
+                    <a:lumMod val="75000"/>
+                    <a:lumOff val="25000"/>
+                  </a:schemeClr>
+                </a:solidFill>
+                <a:latin typeface="+mn-lt"/>
+                <a:ea typeface="+mn-ea"/>
+                <a:cs typeface="+mn-cs"/>
+              </a:defRPr>
+            </a:lvl1pPr>
+            <a:lvl2pPr marL="384048" indent="-182880" algn="l" defTabSz="914400" rtl="0" eaLnBrk="1" latinLnBrk="0" hangingPunct="1">
+              <a:lnSpc>
+                <a:spcPct val="90000"/>
+              </a:lnSpc>
+              <a:spcBef>
+                <a:spcPts val="200"/>
+              </a:spcBef>
+              <a:spcAft>
+                <a:spcPts val="400"/>
+              </a:spcAft>
+              <a:buClr>
+                <a:schemeClr val="accent1"/>
+              </a:buClr>
+              <a:buFont typeface="Calibri" pitchFamily="34" charset="0"/>
+              <a:buChar char="◦"/>
+              <a:defRPr sz="1800" kern="1200">
+                <a:solidFill>
+                  <a:schemeClr val="tx1">
+                    <a:lumMod val="75000"/>
+                    <a:lumOff val="25000"/>
+                  </a:schemeClr>
+                </a:solidFill>
+                <a:latin typeface="+mn-lt"/>
+                <a:ea typeface="+mn-ea"/>
+                <a:cs typeface="+mn-cs"/>
+              </a:defRPr>
+            </a:lvl2pPr>
+            <a:lvl3pPr marL="566928" indent="-182880" algn="l" defTabSz="914400" rtl="0" eaLnBrk="1" latinLnBrk="0" hangingPunct="1">
+              <a:lnSpc>
+                <a:spcPct val="90000"/>
+              </a:lnSpc>
+              <a:spcBef>
+                <a:spcPts val="200"/>
+              </a:spcBef>
+              <a:spcAft>
+                <a:spcPts val="400"/>
+              </a:spcAft>
+              <a:buClr>
+                <a:schemeClr val="accent1"/>
+              </a:buClr>
+              <a:buFont typeface="Calibri" pitchFamily="34" charset="0"/>
+              <a:buChar char="◦"/>
+              <a:defRPr sz="1400" kern="1200">
+                <a:solidFill>
+                  <a:schemeClr val="tx1">
+                    <a:lumMod val="75000"/>
+                    <a:lumOff val="25000"/>
+                  </a:schemeClr>
+                </a:solidFill>
+                <a:latin typeface="+mn-lt"/>
+                <a:ea typeface="+mn-ea"/>
+                <a:cs typeface="+mn-cs"/>
+              </a:defRPr>
+            </a:lvl3pPr>
+            <a:lvl4pPr marL="749808" indent="-182880" algn="l" defTabSz="914400" rtl="0" eaLnBrk="1" latinLnBrk="0" hangingPunct="1">
+              <a:lnSpc>
+                <a:spcPct val="90000"/>
+              </a:lnSpc>
+              <a:spcBef>
+                <a:spcPts val="200"/>
+              </a:spcBef>
+              <a:spcAft>
+                <a:spcPts val="400"/>
+              </a:spcAft>
+              <a:buClr>
+                <a:schemeClr val="accent1"/>
+              </a:buClr>
+              <a:buFont typeface="Calibri" pitchFamily="34" charset="0"/>
+              <a:buChar char="◦"/>
+              <a:defRPr sz="1400" kern="1200">
+                <a:solidFill>
+                  <a:schemeClr val="tx1">
+                    <a:lumMod val="75000"/>
+                    <a:lumOff val="25000"/>
+                  </a:schemeClr>
+                </a:solidFill>
+                <a:latin typeface="+mn-lt"/>
+                <a:ea typeface="+mn-ea"/>
+                <a:cs typeface="+mn-cs"/>
+              </a:defRPr>
+            </a:lvl4pPr>
+            <a:lvl5pPr marL="932688" indent="-182880" algn="l" defTabSz="914400" rtl="0" eaLnBrk="1" latinLnBrk="0" hangingPunct="1">
+              <a:lnSpc>
+                <a:spcPct val="90000"/>
+              </a:lnSpc>
+              <a:spcBef>
+                <a:spcPts val="200"/>
+              </a:spcBef>
+              <a:spcAft>
+                <a:spcPts val="400"/>
+              </a:spcAft>
+              <a:buClr>
+                <a:schemeClr val="accent1"/>
+              </a:buClr>
+              <a:buFont typeface="Calibri" pitchFamily="34" charset="0"/>
+              <a:buChar char="◦"/>
+              <a:defRPr sz="1400" kern="1200">
+                <a:solidFill>
+                  <a:schemeClr val="tx1">
+                    <a:lumMod val="75000"/>
+                    <a:lumOff val="25000"/>
+                  </a:schemeClr>
+                </a:solidFill>
+                <a:latin typeface="+mn-lt"/>
+                <a:ea typeface="+mn-ea"/>
+                <a:cs typeface="+mn-cs"/>
+              </a:defRPr>
+            </a:lvl5pPr>
+            <a:lvl6pPr marL="1100000" indent="-228600" algn="l" defTabSz="914400" rtl="0" eaLnBrk="1" latinLnBrk="0" hangingPunct="1">
+              <a:lnSpc>
+                <a:spcPct val="90000"/>
+              </a:lnSpc>
+              <a:spcBef>
+                <a:spcPts val="200"/>
+              </a:spcBef>
+              <a:spcAft>
+                <a:spcPts val="400"/>
+              </a:spcAft>
+              <a:buClr>
+                <a:schemeClr val="accent1"/>
+              </a:buClr>
+              <a:buFont typeface="Calibri" pitchFamily="34" charset="0"/>
+              <a:buChar char="◦"/>
+              <a:defRPr sz="1400" kern="1200">
+                <a:solidFill>
+                  <a:schemeClr val="tx1">
+                    <a:lumMod val="75000"/>
+                    <a:lumOff val="25000"/>
+                  </a:schemeClr>
+                </a:solidFill>
+                <a:latin typeface="+mn-lt"/>
+                <a:ea typeface="+mn-ea"/>
+                <a:cs typeface="+mn-cs"/>
+              </a:defRPr>
+            </a:lvl6pPr>
+            <a:lvl7pPr marL="1300000" indent="-228600" algn="l" defTabSz="914400" rtl="0" eaLnBrk="1" latinLnBrk="0" hangingPunct="1">
+              <a:lnSpc>
+                <a:spcPct val="90000"/>
+              </a:lnSpc>
+              <a:spcBef>
+                <a:spcPts val="200"/>
+              </a:spcBef>
+              <a:spcAft>
+                <a:spcPts val="400"/>
+              </a:spcAft>
+              <a:buClr>
+                <a:schemeClr val="accent1"/>
+              </a:buClr>
+              <a:buFont typeface="Calibri" pitchFamily="34" charset="0"/>
+              <a:buChar char="◦"/>
+              <a:defRPr sz="1400" kern="1200">
+                <a:solidFill>
+                  <a:schemeClr val="tx1">
+                    <a:lumMod val="75000"/>
+                    <a:lumOff val="25000"/>
+                  </a:schemeClr>
+                </a:solidFill>
+                <a:latin typeface="+mn-lt"/>
+                <a:ea typeface="+mn-ea"/>
+                <a:cs typeface="+mn-cs"/>
+              </a:defRPr>
+            </a:lvl7pPr>
+            <a:lvl8pPr marL="1500000" indent="-228600" algn="l" defTabSz="914400" rtl="0" eaLnBrk="1" latinLnBrk="0" hangingPunct="1">
+              <a:lnSpc>
+                <a:spcPct val="90000"/>
+              </a:lnSpc>
+              <a:spcBef>
+                <a:spcPts val="200"/>
+              </a:spcBef>
+              <a:spcAft>
+                <a:spcPts val="400"/>
+              </a:spcAft>
+              <a:buClr>
+                <a:schemeClr val="accent1"/>
+              </a:buClr>
+              <a:buFont typeface="Calibri" pitchFamily="34" charset="0"/>
+              <a:buChar char="◦"/>
+              <a:defRPr sz="1400" kern="1200">
+                <a:solidFill>
+                  <a:schemeClr val="tx1">
+                    <a:lumMod val="75000"/>
+                    <a:lumOff val="25000"/>
+                  </a:schemeClr>
+                </a:solidFill>
+                <a:latin typeface="+mn-lt"/>
+                <a:ea typeface="+mn-ea"/>
+                <a:cs typeface="+mn-cs"/>
+              </a:defRPr>
+            </a:lvl8pPr>
+            <a:lvl9pPr marL="1700000" indent="-228600" algn="l" defTabSz="914400" rtl="0" eaLnBrk="1" latinLnBrk="0" hangingPunct="1">
+              <a:lnSpc>
+                <a:spcPct val="90000"/>
+              </a:lnSpc>
+              <a:spcBef>
+                <a:spcPts val="200"/>
+              </a:spcBef>
+              <a:spcAft>
+                <a:spcPts val="400"/>
+              </a:spcAft>
+              <a:buClr>
+                <a:schemeClr val="accent1"/>
+              </a:buClr>
+              <a:buFont typeface="Calibri" pitchFamily="34" charset="0"/>
+              <a:buChar char="◦"/>
+              <a:defRPr sz="1400" kern="1200">
+                <a:solidFill>
+                  <a:schemeClr val="tx1">
+                    <a:lumMod val="75000"/>
+                    <a:lumOff val="25000"/>
+                  </a:schemeClr>
+                </a:solidFill>
+                <a:latin typeface="+mn-lt"/>
+                <a:ea typeface="+mn-ea"/>
+                <a:cs typeface="+mn-cs"/>
+              </a:defRPr>
+            </a:lvl9pPr>
+          </a:lstStyle>
+          <a:p>
+            <a:pPr>
+              <a:lnSpc>
+                <a:spcPct val="150000"/>
+              </a:lnSpc>
+            </a:pPr>
+            <a:r>
+              <a:rPr lang="hu-HU" sz="2400" dirty="0">
+                <a:solidFill>
+                  <a:srgbClr val="BD582C"/>
+                </a:solidFill>
+                <a:latin typeface="Bahnschrift Light" panose="020B0502040204020203" pitchFamily="34" charset="0"/>
+              </a:rPr>
+              <a:t>Probléma</a:t>
+            </a:r>
+          </a:p>
+          <a:p>
+            <a:pPr lvl="1">
+              <a:buFont typeface="Arial" panose="020B0604020202020204" pitchFamily="34" charset="0"/>
+              <a:buChar char="•"/>
+            </a:pPr>
+            <a:r>
+              <a:rPr lang="hu-HU" sz="2000" dirty="0">
+                <a:latin typeface="Bahnschrift Light" panose="020B0502040204020203" pitchFamily="34" charset="0"/>
+              </a:rPr>
+              <a:t> Papíron történő étkezés rendelés, számlázás</a:t>
+            </a:r>
+          </a:p>
+          <a:p>
+            <a:pPr lvl="1">
+              <a:buFont typeface="Arial" panose="020B0604020202020204" pitchFamily="34" charset="0"/>
+              <a:buChar char="•"/>
+            </a:pPr>
+            <a:r>
+              <a:rPr lang="hu-HU" sz="2000" dirty="0">
+                <a:latin typeface="Bahnschrift Light" panose="020B0502040204020203" pitchFamily="34" charset="0"/>
+              </a:rPr>
+              <a:t> Lemondási nehézségek</a:t>
+            </a:r>
+          </a:p>
+          <a:p>
+            <a:pPr lvl="1">
+              <a:buFont typeface="Arial" panose="020B0604020202020204" pitchFamily="34" charset="0"/>
+              <a:buChar char="•"/>
+            </a:pPr>
+            <a:r>
+              <a:rPr lang="hu-HU" sz="2000" dirty="0">
+                <a:latin typeface="Bahnschrift Light" panose="020B0502040204020203" pitchFamily="34" charset="0"/>
+              </a:rPr>
+              <a:t> Nincs opció választási lehetőség</a:t>
+            </a:r>
+          </a:p>
+          <a:p>
+            <a:endParaRPr lang="hu-HU" dirty="0">
+              <a:latin typeface="Bahnschrift Light" panose="020B0502040204020203" pitchFamily="34" charset="0"/>
+            </a:endParaRPr>
+          </a:p>
+          <a:p>
+            <a:pPr>
+              <a:lnSpc>
+                <a:spcPct val="150000"/>
+              </a:lnSpc>
+            </a:pPr>
+            <a:r>
+              <a:rPr lang="hu-HU" sz="2400" dirty="0">
+                <a:solidFill>
+                  <a:srgbClr val="BD582C"/>
+                </a:solidFill>
+                <a:latin typeface="Bahnschrift Light" panose="020B0502040204020203" pitchFamily="34" charset="0"/>
+              </a:rPr>
+              <a:t>Megoldás</a:t>
+            </a:r>
+          </a:p>
+          <a:p>
+            <a:pPr lvl="1">
+              <a:buFont typeface="Arial" panose="020B0604020202020204" pitchFamily="34" charset="0"/>
+              <a:buChar char="•"/>
+            </a:pPr>
+            <a:r>
+              <a:rPr lang="hu-HU" dirty="0">
+                <a:latin typeface="Bahnschrift Light" panose="020B0502040204020203" pitchFamily="34" charset="0"/>
+              </a:rPr>
+              <a:t> </a:t>
+            </a:r>
+            <a:r>
+              <a:rPr lang="hu-HU" sz="2000" dirty="0">
+                <a:latin typeface="Bahnschrift Light" panose="020B0502040204020203" pitchFamily="34" charset="0"/>
+              </a:rPr>
+              <a:t>Online felület a rendeléshez, lemondáshoz</a:t>
+            </a:r>
+          </a:p>
+          <a:p>
+            <a:pPr lvl="1">
+              <a:buFont typeface="Arial" panose="020B0604020202020204" pitchFamily="34" charset="0"/>
+              <a:buChar char="•"/>
+            </a:pPr>
+            <a:r>
+              <a:rPr lang="hu-HU" sz="2000" dirty="0">
+                <a:latin typeface="Bahnschrift Light" panose="020B0502040204020203" pitchFamily="34" charset="0"/>
+              </a:rPr>
+              <a:t> Előre kiválasztott opció</a:t>
+            </a:r>
+          </a:p>
+          <a:p>
+            <a:pPr lvl="1">
+              <a:buFont typeface="Arial" panose="020B0604020202020204" pitchFamily="34" charset="0"/>
+              <a:buChar char="•"/>
+            </a:pPr>
+            <a:r>
+              <a:rPr lang="hu-HU" sz="2000" dirty="0">
+                <a:latin typeface="Bahnschrift Light" panose="020B0502040204020203" pitchFamily="34" charset="0"/>
+              </a:rPr>
+              <a:t> Digitális számla</a:t>
+            </a:r>
+          </a:p>
+        </p:txBody>
+      </p:sp>
+      <p:pic>
+        <p:nvPicPr>
+          <p:cNvPr id="7" name="Kép 6">
+            <a:extLst>
+              <a:ext uri="{FF2B5EF4-FFF2-40B4-BE49-F238E27FC236}">
+                <a16:creationId xmlns:a16="http://schemas.microsoft.com/office/drawing/2014/main" id="{349A29CF-1647-4A99-9A6A-32ED360ABA5C}"/>
+              </a:ext>
+            </a:extLst>
+          </p:cNvPr>
+          <p:cNvPicPr>
+            <a:picLocks noChangeAspect="1"/>
+          </p:cNvPicPr>
+          <p:nvPr/>
+        </p:nvPicPr>
+        <p:blipFill>
+          <a:blip r:embed="rId3"/>
+          <a:stretch>
+            <a:fillRect/>
+          </a:stretch>
+        </p:blipFill>
+        <p:spPr>
+          <a:xfrm>
+            <a:off x="7568575" y="2498937"/>
+            <a:ext cx="3983647" cy="3169784"/>
           </a:xfrm>
           <a:prstGeom prst="rect">
             <a:avLst/>
@@ -4690,13 +10246,25 @@
     </p:spTree>
     <p:extLst>
       <p:ext uri="{BB962C8B-B14F-4D97-AF65-F5344CB8AC3E}">
-        <p14:creationId xmlns:p14="http://schemas.microsoft.com/office/powerpoint/2010/main" val="1135863487"/>
+        <p14:creationId xmlns:p14="http://schemas.microsoft.com/office/powerpoint/2010/main" val="2368998396"/>
       </p:ext>
     </p:extLst>
   </p:cSld>
   <p:clrMapOvr>
     <a:masterClrMapping/>
   </p:clrMapOvr>
+  <mc:AlternateContent xmlns:mc="http://schemas.openxmlformats.org/markup-compatibility/2006">
+    <mc:Choice xmlns:p159="http://schemas.microsoft.com/office/powerpoint/2015/09/main" Requires="p159">
+      <p:transition xmlns:p14="http://schemas.microsoft.com/office/powerpoint/2010/main" spd="slow" p14:dur="2000">
+        <p159:morph option="byObject"/>
+      </p:transition>
+    </mc:Choice>
+    <mc:Fallback>
+      <p:transition spd="slow">
+        <p:fade/>
+      </p:transition>
+    </mc:Fallback>
+  </mc:AlternateContent>
 </p:sld>
 </file>
 
@@ -4741,12 +10309,94 @@
             <p:ph idx="1"/>
           </p:nvPr>
         </p:nvSpPr>
-        <p:spPr/>
-        <p:txBody>
-          <a:bodyPr/>
+        <p:spPr>
+          <a:xfrm>
+            <a:off x="1497330" y="1979084"/>
+            <a:ext cx="10058400" cy="4023360"/>
+          </a:xfrm>
+        </p:spPr>
+        <p:txBody>
+          <a:bodyPr>
+            <a:normAutofit/>
+          </a:bodyPr>
           <a:lstStyle/>
           <a:p>
-            <a:endParaRPr lang="hu-HU" dirty="0"/>
+            <a:pPr lvl="1">
+              <a:lnSpc>
+                <a:spcPct val="130000"/>
+              </a:lnSpc>
+              <a:buFont typeface="Arial" panose="020B0604020202020204" pitchFamily="34" charset="0"/>
+              <a:buChar char="•"/>
+            </a:pPr>
+            <a:r>
+              <a:rPr lang="hu-HU" sz="2000" dirty="0"/>
+              <a:t> Regisztráció és bejelentkezés</a:t>
+            </a:r>
+          </a:p>
+          <a:p>
+            <a:pPr lvl="1">
+              <a:lnSpc>
+                <a:spcPct val="130000"/>
+              </a:lnSpc>
+              <a:buFont typeface="Arial" panose="020B0604020202020204" pitchFamily="34" charset="0"/>
+              <a:buChar char="•"/>
+            </a:pPr>
+            <a:r>
+              <a:rPr lang="hu-HU" sz="2000" dirty="0"/>
+              <a:t> Étlapkezelés (menü opciók)</a:t>
+            </a:r>
+          </a:p>
+          <a:p>
+            <a:pPr lvl="1">
+              <a:lnSpc>
+                <a:spcPct val="130000"/>
+              </a:lnSpc>
+              <a:buFont typeface="Arial" panose="020B0604020202020204" pitchFamily="34" charset="0"/>
+              <a:buChar char="•"/>
+            </a:pPr>
+            <a:r>
+              <a:rPr lang="hu-HU" sz="2000" dirty="0"/>
+              <a:t> Allergének, tápérték információk</a:t>
+            </a:r>
+          </a:p>
+          <a:p>
+            <a:pPr lvl="1">
+              <a:lnSpc>
+                <a:spcPct val="130000"/>
+              </a:lnSpc>
+              <a:buFont typeface="Arial" panose="020B0604020202020204" pitchFamily="34" charset="0"/>
+              <a:buChar char="•"/>
+            </a:pPr>
+            <a:r>
+              <a:rPr lang="hu-HU" sz="2000" dirty="0"/>
+              <a:t> Rendelési és lemondási rendszer</a:t>
+            </a:r>
+          </a:p>
+          <a:p>
+            <a:pPr lvl="1">
+              <a:lnSpc>
+                <a:spcPct val="130000"/>
+              </a:lnSpc>
+              <a:buFont typeface="Arial" panose="020B0604020202020204" pitchFamily="34" charset="0"/>
+              <a:buChar char="•"/>
+            </a:pPr>
+            <a:r>
+              <a:rPr lang="hu-HU" sz="2000" dirty="0"/>
+              <a:t> Ebédkártya leolvasás</a:t>
+            </a:r>
+          </a:p>
+          <a:p>
+            <a:pPr lvl="1">
+              <a:lnSpc>
+                <a:spcPct val="130000"/>
+              </a:lnSpc>
+              <a:buFont typeface="Arial" panose="020B0604020202020204" pitchFamily="34" charset="0"/>
+              <a:buChar char="•"/>
+            </a:pPr>
+            <a:r>
+              <a:rPr lang="hu-HU" sz="2000" dirty="0"/>
+              <a:t> Számla generálás</a:t>
+            </a:r>
           </a:p>
         </p:txBody>
       </p:sp>
@@ -4755,7 +10405,7 @@
           <p:cNvPr id="4" name="Cím 1">
             <a:extLst>
               <a:ext uri="{FF2B5EF4-FFF2-40B4-BE49-F238E27FC236}">
-                <a16:creationId xmlns:a16="http://schemas.microsoft.com/office/drawing/2014/main" id="{1BABF97B-7E63-454C-9CDB-F386138F1BAA}"/>
+                <a16:creationId xmlns:a16="http://schemas.microsoft.com/office/drawing/2014/main" id="{8A10CF98-B20C-498A-B49A-54F33274AB98}"/>
               </a:ext>
             </a:extLst>
           </p:cNvPr>
@@ -4776,47 +10426,112 @@
           <a:bodyPr/>
           <a:lstStyle/>
           <a:p>
-            <a:endParaRPr lang="hu-HU" b="1" dirty="0">
-              <a:latin typeface="Bahnschrift SemiBold" panose="020B0502040204020203" pitchFamily="34" charset="0"/>
-            </a:endParaRPr>
-          </a:p>
-        </p:txBody>
-      </p:sp>
-      <p:pic>
-        <p:nvPicPr>
-          <p:cNvPr id="6" name="Kép 5">
+            <a:r>
+              <a:rPr lang="hu-HU" b="1" dirty="0">
+                <a:latin typeface="Bahnschrift SemiBold" panose="020B0502040204020203" pitchFamily="34" charset="0"/>
+              </a:rPr>
+              <a:t>Funkciók</a:t>
+            </a:r>
+          </a:p>
+        </p:txBody>
+      </p:sp>
+      <p:grpSp>
+        <p:nvGrpSpPr>
+          <p:cNvPr id="2" name="Csoportba foglalás 1">
             <a:extLst>
               <a:ext uri="{FF2B5EF4-FFF2-40B4-BE49-F238E27FC236}">
-                <a16:creationId xmlns:a16="http://schemas.microsoft.com/office/drawing/2014/main" id="{3F694373-D505-4854-9BB6-8E6B71C212B7}"/>
+                <a16:creationId xmlns:a16="http://schemas.microsoft.com/office/drawing/2014/main" id="{C9E5FC47-ECCF-4F59-A408-5D6554FD9058}"/>
               </a:ext>
             </a:extLst>
           </p:cNvPr>
-          <p:cNvPicPr>
-            <a:picLocks noChangeAspect="1"/>
-          </p:cNvPicPr>
+          <p:cNvGrpSpPr/>
           <p:nvPr/>
-        </p:nvPicPr>
-        <p:blipFill rotWithShape="1">
-          <a:blip r:embed="rId2">
-            <a:alphaModFix amt="52000"/>
-          </a:blip>
-          <a:srcRect t="20576"/>
-          <a:stretch/>
-        </p:blipFill>
-        <p:spPr>
+        </p:nvGrpSpPr>
+        <p:grpSpPr>
           <a:xfrm>
-            <a:off x="10561520" y="286603"/>
-            <a:ext cx="1373305" cy="1064836"/>
+            <a:off x="10565538" y="349786"/>
+            <a:ext cx="1418895" cy="1258023"/>
+            <a:chOff x="10565538" y="349786"/>
+            <a:chExt cx="1418895" cy="1258023"/>
           </a:xfrm>
-          <a:prstGeom prst="rect">
-            <a:avLst/>
-          </a:prstGeom>
-        </p:spPr>
-      </p:pic>
+        </p:grpSpPr>
+        <p:pic>
+          <p:nvPicPr>
+            <p:cNvPr id="11" name="Kép 10">
+              <a:extLst>
+                <a:ext uri="{FF2B5EF4-FFF2-40B4-BE49-F238E27FC236}">
+                  <a16:creationId xmlns:a16="http://schemas.microsoft.com/office/drawing/2014/main" id="{23AAEA1F-2587-4749-9229-A2366B6B08A4}"/>
+                </a:ext>
+              </a:extLst>
+            </p:cNvPr>
+            <p:cNvPicPr>
+              <a:picLocks noChangeAspect="1"/>
+            </p:cNvPicPr>
+            <p:nvPr/>
+          </p:nvPicPr>
+          <p:blipFill rotWithShape="1">
+            <a:blip r:embed="rId2">
+              <a:alphaModFix amt="50000"/>
+              <a:extLst>
+                <a:ext uri="{28A0092B-C50C-407E-A947-70E740481C1C}">
+                  <a14:useLocalDpi xmlns:a14="http://schemas.microsoft.com/office/drawing/2010/main" val="0"/>
+                </a:ext>
+              </a:extLst>
+            </a:blip>
+            <a:srcRect t="58555" r="67375"/>
+            <a:stretch/>
+          </p:blipFill>
+          <p:spPr>
+            <a:xfrm>
+              <a:off x="10619475" y="1036308"/>
+              <a:ext cx="1364958" cy="571501"/>
+            </a:xfrm>
+            <a:prstGeom prst="rect">
+              <a:avLst/>
+            </a:prstGeom>
+          </p:spPr>
+        </p:pic>
+        <p:pic>
+          <p:nvPicPr>
+            <p:cNvPr id="12" name="Kép 11">
+              <a:extLst>
+                <a:ext uri="{FF2B5EF4-FFF2-40B4-BE49-F238E27FC236}">
+                  <a16:creationId xmlns:a16="http://schemas.microsoft.com/office/drawing/2014/main" id="{E758450C-B61C-4683-B202-BD49BB80DC0E}"/>
+                </a:ext>
+              </a:extLst>
+            </p:cNvPr>
+            <p:cNvPicPr>
+              <a:picLocks noChangeAspect="1"/>
+            </p:cNvPicPr>
+            <p:nvPr/>
+          </p:nvPicPr>
+          <p:blipFill rotWithShape="1">
+            <a:blip r:embed="rId2">
+              <a:alphaModFix amt="50000"/>
+              <a:extLst>
+                <a:ext uri="{28A0092B-C50C-407E-A947-70E740481C1C}">
+                  <a14:useLocalDpi xmlns:a14="http://schemas.microsoft.com/office/drawing/2010/main" val="0"/>
+                </a:ext>
+              </a:extLst>
+            </a:blip>
+            <a:srcRect l="1" r="61666" b="38896"/>
+            <a:stretch/>
+          </p:blipFill>
+          <p:spPr>
+            <a:xfrm>
+              <a:off x="10565538" y="349786"/>
+              <a:ext cx="1418895" cy="745451"/>
+            </a:xfrm>
+            <a:prstGeom prst="rect">
+              <a:avLst/>
+            </a:prstGeom>
+          </p:spPr>
+        </p:pic>
+      </p:grpSp>
     </p:spTree>
     <p:extLst>
       <p:ext uri="{BB962C8B-B14F-4D97-AF65-F5344CB8AC3E}">
-        <p14:creationId xmlns:p14="http://schemas.microsoft.com/office/powerpoint/2010/main" val="1446896841"/>
+        <p14:creationId xmlns:p14="http://schemas.microsoft.com/office/powerpoint/2010/main" val="2996320224"/>
       </p:ext>
     </p:extLst>
   </p:cSld>
@@ -4853,10 +10568,10 @@
       </p:grpSpPr>
       <p:sp>
         <p:nvSpPr>
-          <p:cNvPr id="2" name="Cím 1">
+          <p:cNvPr id="3" name="Tartalom helye 2">
             <a:extLst>
               <a:ext uri="{FF2B5EF4-FFF2-40B4-BE49-F238E27FC236}">
-                <a16:creationId xmlns:a16="http://schemas.microsoft.com/office/drawing/2014/main" id="{90DA796D-D1FA-43BA-9B00-4A955CBFFB50}"/>
+                <a16:creationId xmlns:a16="http://schemas.microsoft.com/office/drawing/2014/main" id="{32758DB2-9D10-47A2-925C-F8A858558A07}"/>
               </a:ext>
             </a:extLst>
           </p:cNvPr>
@@ -4864,29 +10579,139 @@
             <a:spLocks noGrp="1"/>
           </p:cNvSpPr>
           <p:nvPr>
-            <p:ph type="title"/>
+            <p:ph idx="1"/>
           </p:nvPr>
         </p:nvSpPr>
-        <p:spPr/>
+        <p:spPr>
+          <a:xfrm>
+            <a:off x="1097280" y="1845733"/>
+            <a:ext cx="10058400" cy="4546013"/>
+          </a:xfrm>
+        </p:spPr>
         <p:txBody>
           <a:bodyPr/>
           <a:lstStyle/>
           <a:p>
+            <a:pPr>
+              <a:buFont typeface="Wingdings" panose="05000000000000000000" pitchFamily="2" charset="2"/>
+              <a:buChar char="v"/>
+            </a:pPr>
+            <a:r>
+              <a:rPr lang="hu-HU" dirty="0"/>
+              <a:t> </a:t>
+            </a:r>
             <a:r>
               <a:rPr lang="hu-HU" dirty="0">
-                <a:latin typeface="Bahnschrift SemiBold" panose="020B0502040204020203" pitchFamily="34" charset="0"/>
+                <a:solidFill>
+                  <a:srgbClr val="BD582C"/>
+                </a:solidFill>
               </a:rPr>
-              <a:t>Munkamegosztás</a:t>
-            </a:r>
-          </a:p>
-        </p:txBody>
-      </p:sp>
-      <p:sp>
-        <p:nvSpPr>
-          <p:cNvPr id="3" name="Tartalom helye 2">
+              <a:t>Backend – </a:t>
+            </a:r>
+            <a:r>
+              <a:rPr lang="hu-HU" dirty="0" err="1">
+                <a:solidFill>
+                  <a:srgbClr val="BD582C"/>
+                </a:solidFill>
+              </a:rPr>
+              <a:t>Laravel</a:t>
+            </a:r>
+            <a:r>
+              <a:rPr lang="hu-HU" dirty="0">
+                <a:solidFill>
+                  <a:srgbClr val="BD582C"/>
+                </a:solidFill>
+              </a:rPr>
+              <a:t> </a:t>
+            </a:r>
+          </a:p>
+          <a:p>
+            <a:pPr lvl="1">
+              <a:buFont typeface="Arial" panose="020B0604020202020204" pitchFamily="34" charset="0"/>
+              <a:buChar char="•"/>
+            </a:pPr>
+            <a:r>
+              <a:rPr lang="hu-HU" dirty="0"/>
+              <a:t>a</a:t>
+            </a:r>
+          </a:p>
+          <a:p>
+            <a:pPr>
+              <a:buFont typeface="Wingdings" panose="05000000000000000000" pitchFamily="2" charset="2"/>
+              <a:buChar char="v"/>
+            </a:pPr>
+            <a:r>
+              <a:rPr lang="hu-HU" dirty="0"/>
+              <a:t> </a:t>
+            </a:r>
+            <a:r>
+              <a:rPr lang="hu-HU" dirty="0">
+                <a:solidFill>
+                  <a:srgbClr val="BD582C"/>
+                </a:solidFill>
+              </a:rPr>
+              <a:t>Frontend – Vue.js</a:t>
+            </a:r>
+          </a:p>
+          <a:p>
+            <a:pPr lvl="1">
+              <a:buFont typeface="Arial" panose="020B0604020202020204" pitchFamily="34" charset="0"/>
+              <a:buChar char="•"/>
+            </a:pPr>
+            <a:r>
+              <a:rPr lang="hu-HU" dirty="0"/>
+              <a:t>a</a:t>
+            </a:r>
+          </a:p>
+          <a:p>
+            <a:pPr>
+              <a:buFont typeface="Wingdings" panose="05000000000000000000" pitchFamily="2" charset="2"/>
+              <a:buChar char="v"/>
+            </a:pPr>
+            <a:r>
+              <a:rPr lang="hu-HU" dirty="0"/>
+              <a:t> </a:t>
+            </a:r>
+            <a:r>
+              <a:rPr lang="hu-HU" dirty="0">
+                <a:solidFill>
+                  <a:srgbClr val="BD582C"/>
+                </a:solidFill>
+              </a:rPr>
+              <a:t>Adatbázis – </a:t>
+            </a:r>
+            <a:r>
+              <a:rPr lang="hu-HU" dirty="0" err="1">
+                <a:solidFill>
+                  <a:srgbClr val="BD582C"/>
+                </a:solidFill>
+              </a:rPr>
+              <a:t>MySQL</a:t>
+            </a:r>
+            <a:endParaRPr lang="hu-HU" dirty="0">
+              <a:solidFill>
+                <a:srgbClr val="BD582C"/>
+              </a:solidFill>
+            </a:endParaRPr>
+          </a:p>
+          <a:p>
+            <a:pPr lvl="1">
+              <a:buFont typeface="Arial" panose="020B0604020202020204" pitchFamily="34" charset="0"/>
+              <a:buChar char="•"/>
+            </a:pPr>
+            <a:r>
+              <a:rPr lang="hu-HU" dirty="0"/>
+              <a:t>a</a:t>
+            </a:r>
+          </a:p>
+        </p:txBody>
+      </p:sp>
+      <p:sp>
+        <p:nvSpPr>
+          <p:cNvPr id="4" name="Cím 1">
             <a:extLst>
               <a:ext uri="{FF2B5EF4-FFF2-40B4-BE49-F238E27FC236}">
-                <a16:creationId xmlns:a16="http://schemas.microsoft.com/office/drawing/2014/main" id="{FAC126C2-C78D-4926-A723-4A7B4A708919}"/>
+                <a16:creationId xmlns:a16="http://schemas.microsoft.com/office/drawing/2014/main" id="{B1162F8F-91B4-45FA-8FCD-4AE20D403564}"/>
               </a:ext>
             </a:extLst>
           </p:cNvPr>
@@ -4894,106 +10719,125 @@
             <a:spLocks noGrp="1"/>
           </p:cNvSpPr>
           <p:nvPr>
-            <p:ph sz="half" idx="1"/>
+            <p:ph type="title"/>
           </p:nvPr>
         </p:nvSpPr>
-        <p:spPr/>
+        <p:spPr>
+          <a:xfrm>
+            <a:off x="1097280" y="286603"/>
+            <a:ext cx="10058400" cy="1450757"/>
+          </a:xfrm>
+        </p:spPr>
         <p:txBody>
           <a:bodyPr/>
           <a:lstStyle/>
           <a:p>
             <a:r>
-              <a:rPr lang="hu-HU" sz="2400" dirty="0"/>
-              <a:t>Atkári Ariella</a:t>
-            </a:r>
-          </a:p>
-          <a:p>
-            <a:pPr>
-              <a:buFont typeface="Arial" panose="020B0604020202020204" pitchFamily="34" charset="0"/>
-              <a:buChar char="•"/>
-            </a:pPr>
-            <a:r>
-              <a:rPr lang="hu-HU" dirty="0"/>
-              <a:t> Backend</a:t>
-            </a:r>
-          </a:p>
-        </p:txBody>
-      </p:sp>
-      <p:sp>
-        <p:nvSpPr>
-          <p:cNvPr id="4" name="Tartalom helye 3">
+              <a:rPr lang="hu-HU" b="1" dirty="0">
+                <a:latin typeface="Bahnschrift SemiBold" panose="020B0502040204020203" pitchFamily="34" charset="0"/>
+              </a:rPr>
+              <a:t>Felépítése </a:t>
+            </a:r>
+          </a:p>
+        </p:txBody>
+      </p:sp>
+      <p:grpSp>
+        <p:nvGrpSpPr>
+          <p:cNvPr id="10" name="Csoportba foglalás 9">
             <a:extLst>
               <a:ext uri="{FF2B5EF4-FFF2-40B4-BE49-F238E27FC236}">
-                <a16:creationId xmlns:a16="http://schemas.microsoft.com/office/drawing/2014/main" id="{7D630CEF-CEDB-4570-8BE4-3173C05B3BFD}"/>
+                <a16:creationId xmlns:a16="http://schemas.microsoft.com/office/drawing/2014/main" id="{C6623B84-5C27-42DA-B75B-974214315DBD}"/>
               </a:ext>
             </a:extLst>
           </p:cNvPr>
-          <p:cNvSpPr>
-            <a:spLocks noGrp="1"/>
-          </p:cNvSpPr>
-          <p:nvPr>
-            <p:ph sz="half" idx="2"/>
-          </p:nvPr>
-        </p:nvSpPr>
-        <p:spPr/>
-        <p:txBody>
-          <a:bodyPr>
-            <a:normAutofit/>
-          </a:bodyPr>
-          <a:lstStyle/>
-          <a:p>
-            <a:r>
-              <a:rPr lang="hu-HU" sz="2400" dirty="0"/>
-              <a:t>Farkas Dominik</a:t>
-            </a:r>
-          </a:p>
-          <a:p>
-            <a:pPr>
-              <a:buFont typeface="Arial" panose="020B0604020202020204" pitchFamily="34" charset="0"/>
-              <a:buChar char="•"/>
-            </a:pPr>
-            <a:r>
-              <a:rPr lang="hu-HU" sz="1800" dirty="0"/>
-              <a:t> Frontend</a:t>
-            </a:r>
-          </a:p>
-        </p:txBody>
-      </p:sp>
-      <p:pic>
-        <p:nvPicPr>
-          <p:cNvPr id="6" name="Kép 5">
-            <a:extLst>
-              <a:ext uri="{FF2B5EF4-FFF2-40B4-BE49-F238E27FC236}">
-                <a16:creationId xmlns:a16="http://schemas.microsoft.com/office/drawing/2014/main" id="{79668C0A-C653-4E00-BA23-D1C9E2707B72}"/>
-              </a:ext>
-            </a:extLst>
-          </p:cNvPr>
-          <p:cNvPicPr>
-            <a:picLocks noChangeAspect="1"/>
-          </p:cNvPicPr>
+          <p:cNvGrpSpPr/>
           <p:nvPr/>
-        </p:nvPicPr>
-        <p:blipFill rotWithShape="1">
-          <a:blip r:embed="rId2">
-            <a:alphaModFix amt="52000"/>
-          </a:blip>
-          <a:srcRect t="20576"/>
-          <a:stretch/>
-        </p:blipFill>
-        <p:spPr>
+        </p:nvGrpSpPr>
+        <p:grpSpPr>
           <a:xfrm>
-            <a:off x="10561520" y="286603"/>
-            <a:ext cx="1373305" cy="1064836"/>
+            <a:off x="10565538" y="349786"/>
+            <a:ext cx="1418895" cy="1258023"/>
+            <a:chOff x="10565538" y="349786"/>
+            <a:chExt cx="1418895" cy="1258023"/>
           </a:xfrm>
-          <a:prstGeom prst="rect">
-            <a:avLst/>
-          </a:prstGeom>
-        </p:spPr>
-      </p:pic>
+        </p:grpSpPr>
+        <p:pic>
+          <p:nvPicPr>
+            <p:cNvPr id="11" name="Kép 10">
+              <a:extLst>
+                <a:ext uri="{FF2B5EF4-FFF2-40B4-BE49-F238E27FC236}">
+                  <a16:creationId xmlns:a16="http://schemas.microsoft.com/office/drawing/2014/main" id="{DFFBB35C-87E4-4EE2-AD37-CCCBBCB69601}"/>
+                </a:ext>
+              </a:extLst>
+            </p:cNvPr>
+            <p:cNvPicPr>
+              <a:picLocks noChangeAspect="1"/>
+            </p:cNvPicPr>
+            <p:nvPr/>
+          </p:nvPicPr>
+          <p:blipFill rotWithShape="1">
+            <a:blip r:embed="rId2">
+              <a:alphaModFix amt="50000"/>
+              <a:extLst>
+                <a:ext uri="{28A0092B-C50C-407E-A947-70E740481C1C}">
+                  <a14:useLocalDpi xmlns:a14="http://schemas.microsoft.com/office/drawing/2010/main" val="0"/>
+                </a:ext>
+              </a:extLst>
+            </a:blip>
+            <a:srcRect t="58555" r="67375"/>
+            <a:stretch/>
+          </p:blipFill>
+          <p:spPr>
+            <a:xfrm>
+              <a:off x="10619475" y="1036308"/>
+              <a:ext cx="1364958" cy="571501"/>
+            </a:xfrm>
+            <a:prstGeom prst="rect">
+              <a:avLst/>
+            </a:prstGeom>
+          </p:spPr>
+        </p:pic>
+        <p:pic>
+          <p:nvPicPr>
+            <p:cNvPr id="12" name="Kép 11">
+              <a:extLst>
+                <a:ext uri="{FF2B5EF4-FFF2-40B4-BE49-F238E27FC236}">
+                  <a16:creationId xmlns:a16="http://schemas.microsoft.com/office/drawing/2014/main" id="{662AE874-06A5-4981-9568-5DE0DB5D3531}"/>
+                </a:ext>
+              </a:extLst>
+            </p:cNvPr>
+            <p:cNvPicPr>
+              <a:picLocks noChangeAspect="1"/>
+            </p:cNvPicPr>
+            <p:nvPr/>
+          </p:nvPicPr>
+          <p:blipFill rotWithShape="1">
+            <a:blip r:embed="rId2">
+              <a:alphaModFix amt="50000"/>
+              <a:extLst>
+                <a:ext uri="{28A0092B-C50C-407E-A947-70E740481C1C}">
+                  <a14:useLocalDpi xmlns:a14="http://schemas.microsoft.com/office/drawing/2010/main" val="0"/>
+                </a:ext>
+              </a:extLst>
+            </a:blip>
+            <a:srcRect l="1" r="61666" b="38896"/>
+            <a:stretch/>
+          </p:blipFill>
+          <p:spPr>
+            <a:xfrm>
+              <a:off x="10565538" y="349786"/>
+              <a:ext cx="1418895" cy="745451"/>
+            </a:xfrm>
+            <a:prstGeom prst="rect">
+              <a:avLst/>
+            </a:prstGeom>
+          </p:spPr>
+        </p:pic>
+      </p:grpSp>
     </p:spTree>
     <p:extLst>
       <p:ext uri="{BB962C8B-B14F-4D97-AF65-F5344CB8AC3E}">
-        <p14:creationId xmlns:p14="http://schemas.microsoft.com/office/powerpoint/2010/main" val="2866602286"/>
+        <p14:creationId xmlns:p14="http://schemas.microsoft.com/office/powerpoint/2010/main" val="1135863487"/>
       </p:ext>
     </p:extLst>
   </p:cSld>
@@ -5030,138 +10874,493 @@
       </p:grpSpPr>
       <p:sp>
         <p:nvSpPr>
+          <p:cNvPr id="3" name="Tartalom helye 2">
+            <a:extLst>
+              <a:ext uri="{FF2B5EF4-FFF2-40B4-BE49-F238E27FC236}">
+                <a16:creationId xmlns:a16="http://schemas.microsoft.com/office/drawing/2014/main" id="{32758DB2-9D10-47A2-925C-F8A858558A07}"/>
+              </a:ext>
+            </a:extLst>
+          </p:cNvPr>
+          <p:cNvSpPr>
+            <a:spLocks noGrp="1"/>
+          </p:cNvSpPr>
+          <p:nvPr>
+            <p:ph idx="1"/>
+          </p:nvPr>
+        </p:nvSpPr>
+        <p:spPr/>
+        <p:txBody>
+          <a:bodyPr/>
+          <a:lstStyle/>
+          <a:p>
+            <a:endParaRPr lang="hu-HU" dirty="0"/>
+          </a:p>
+        </p:txBody>
+      </p:sp>
+      <p:sp>
+        <p:nvSpPr>
+          <p:cNvPr id="4" name="Cím 1">
+            <a:extLst>
+              <a:ext uri="{FF2B5EF4-FFF2-40B4-BE49-F238E27FC236}">
+                <a16:creationId xmlns:a16="http://schemas.microsoft.com/office/drawing/2014/main" id="{1BABF97B-7E63-454C-9CDB-F386138F1BAA}"/>
+              </a:ext>
+            </a:extLst>
+          </p:cNvPr>
+          <p:cNvSpPr>
+            <a:spLocks noGrp="1"/>
+          </p:cNvSpPr>
+          <p:nvPr>
+            <p:ph type="title"/>
+          </p:nvPr>
+        </p:nvSpPr>
+        <p:spPr>
+          <a:xfrm>
+            <a:off x="1097280" y="286603"/>
+            <a:ext cx="10058400" cy="1450757"/>
+          </a:xfrm>
+        </p:spPr>
+        <p:txBody>
+          <a:bodyPr/>
+          <a:lstStyle/>
+          <a:p>
+            <a:r>
+              <a:rPr lang="hu-HU" b="1" dirty="0">
+                <a:latin typeface="Bahnschrift SemiBold" panose="020B0502040204020203" pitchFamily="34" charset="0"/>
+              </a:rPr>
+              <a:t>Backend</a:t>
+            </a:r>
+          </a:p>
+        </p:txBody>
+      </p:sp>
+      <p:grpSp>
+        <p:nvGrpSpPr>
+          <p:cNvPr id="10" name="Csoportba foglalás 9">
+            <a:extLst>
+              <a:ext uri="{FF2B5EF4-FFF2-40B4-BE49-F238E27FC236}">
+                <a16:creationId xmlns:a16="http://schemas.microsoft.com/office/drawing/2014/main" id="{776B3672-EA20-4C64-B11B-9A18CAC805C9}"/>
+              </a:ext>
+            </a:extLst>
+          </p:cNvPr>
+          <p:cNvGrpSpPr/>
+          <p:nvPr/>
+        </p:nvGrpSpPr>
+        <p:grpSpPr>
+          <a:xfrm>
+            <a:off x="10565538" y="349786"/>
+            <a:ext cx="1418895" cy="1258023"/>
+            <a:chOff x="10565538" y="349786"/>
+            <a:chExt cx="1418895" cy="1258023"/>
+          </a:xfrm>
+        </p:grpSpPr>
+        <p:pic>
+          <p:nvPicPr>
+            <p:cNvPr id="11" name="Kép 10">
+              <a:extLst>
+                <a:ext uri="{FF2B5EF4-FFF2-40B4-BE49-F238E27FC236}">
+                  <a16:creationId xmlns:a16="http://schemas.microsoft.com/office/drawing/2014/main" id="{6299F4D8-F0A2-45AE-9DD3-315E8BDF2A56}"/>
+                </a:ext>
+              </a:extLst>
+            </p:cNvPr>
+            <p:cNvPicPr>
+              <a:picLocks noChangeAspect="1"/>
+            </p:cNvPicPr>
+            <p:nvPr/>
+          </p:nvPicPr>
+          <p:blipFill rotWithShape="1">
+            <a:blip r:embed="rId2">
+              <a:alphaModFix amt="50000"/>
+              <a:extLst>
+                <a:ext uri="{28A0092B-C50C-407E-A947-70E740481C1C}">
+                  <a14:useLocalDpi xmlns:a14="http://schemas.microsoft.com/office/drawing/2010/main" val="0"/>
+                </a:ext>
+              </a:extLst>
+            </a:blip>
+            <a:srcRect t="58555" r="67375"/>
+            <a:stretch/>
+          </p:blipFill>
+          <p:spPr>
+            <a:xfrm>
+              <a:off x="10619475" y="1036308"/>
+              <a:ext cx="1364958" cy="571501"/>
+            </a:xfrm>
+            <a:prstGeom prst="rect">
+              <a:avLst/>
+            </a:prstGeom>
+          </p:spPr>
+        </p:pic>
+        <p:pic>
+          <p:nvPicPr>
+            <p:cNvPr id="12" name="Kép 11">
+              <a:extLst>
+                <a:ext uri="{FF2B5EF4-FFF2-40B4-BE49-F238E27FC236}">
+                  <a16:creationId xmlns:a16="http://schemas.microsoft.com/office/drawing/2014/main" id="{4E2168DE-8E21-4CEB-B2EC-917B24001931}"/>
+                </a:ext>
+              </a:extLst>
+            </p:cNvPr>
+            <p:cNvPicPr>
+              <a:picLocks noChangeAspect="1"/>
+            </p:cNvPicPr>
+            <p:nvPr/>
+          </p:nvPicPr>
+          <p:blipFill rotWithShape="1">
+            <a:blip r:embed="rId2">
+              <a:alphaModFix amt="50000"/>
+              <a:extLst>
+                <a:ext uri="{28A0092B-C50C-407E-A947-70E740481C1C}">
+                  <a14:useLocalDpi xmlns:a14="http://schemas.microsoft.com/office/drawing/2010/main" val="0"/>
+                </a:ext>
+              </a:extLst>
+            </a:blip>
+            <a:srcRect l="1" r="61666" b="38896"/>
+            <a:stretch/>
+          </p:blipFill>
+          <p:spPr>
+            <a:xfrm>
+              <a:off x="10565538" y="349786"/>
+              <a:ext cx="1418895" cy="745451"/>
+            </a:xfrm>
+            <a:prstGeom prst="rect">
+              <a:avLst/>
+            </a:prstGeom>
+          </p:spPr>
+        </p:pic>
+      </p:grpSp>
+    </p:spTree>
+    <p:extLst>
+      <p:ext uri="{BB962C8B-B14F-4D97-AF65-F5344CB8AC3E}">
+        <p14:creationId xmlns:p14="http://schemas.microsoft.com/office/powerpoint/2010/main" val="1446896841"/>
+      </p:ext>
+    </p:extLst>
+  </p:cSld>
+  <p:clrMapOvr>
+    <a:masterClrMapping/>
+  </p:clrMapOvr>
+</p:sld>
+</file>
+
+<file path=ppt/slides/slide8.xml><?xml version="1.0" encoding="utf-8"?>
+<p:sld xmlns:a="http://schemas.openxmlformats.org/drawingml/2006/main" xmlns:r="http://schemas.openxmlformats.org/officeDocument/2006/relationships" xmlns:p="http://schemas.openxmlformats.org/presentationml/2006/main">
+  <p:cSld>
+    <p:bg>
+      <p:bgPr>
+        <a:solidFill>
+          <a:srgbClr val="FDF7E9"/>
+        </a:solidFill>
+        <a:effectLst/>
+      </p:bgPr>
+    </p:bg>
+    <p:spTree>
+      <p:nvGrpSpPr>
+        <p:cNvPr id="1" name=""/>
+        <p:cNvGrpSpPr/>
+        <p:nvPr/>
+      </p:nvGrpSpPr>
+      <p:grpSpPr>
+        <a:xfrm>
+          <a:off x="0" y="0"/>
+          <a:ext cx="0" cy="0"/>
+          <a:chOff x="0" y="0"/>
+          <a:chExt cx="0" cy="0"/>
+        </a:xfrm>
+      </p:grpSpPr>
+      <p:sp>
+        <p:nvSpPr>
           <p:cNvPr id="2" name="Cím 1">
             <a:extLst>
               <a:ext uri="{FF2B5EF4-FFF2-40B4-BE49-F238E27FC236}">
-                <a16:creationId xmlns:a16="http://schemas.microsoft.com/office/drawing/2014/main" id="{586C38FA-8136-4AD4-AEB2-C067812DA12E}"/>
+                <a16:creationId xmlns:a16="http://schemas.microsoft.com/office/drawing/2014/main" id="{755F2576-93E3-4E11-AD5A-5982C144E204}"/>
               </a:ext>
             </a:extLst>
           </p:cNvPr>
-          <p:cNvSpPr txBox="1">
-            <a:spLocks/>
-          </p:cNvSpPr>
-          <p:nvPr/>
+          <p:cNvSpPr>
+            <a:spLocks noGrp="1"/>
+          </p:cNvSpPr>
+          <p:nvPr>
+            <p:ph type="title"/>
+          </p:nvPr>
         </p:nvSpPr>
         <p:spPr>
           <a:xfrm>
-            <a:off x="1631570" y="1422005"/>
-            <a:ext cx="9405110" cy="2006995"/>
+            <a:off x="457200" y="622934"/>
+            <a:ext cx="3200400" cy="2286000"/>
           </a:xfrm>
-          <a:prstGeom prst="rect">
-            <a:avLst/>
-          </a:prstGeom>
         </p:spPr>
         <p:txBody>
-          <a:bodyPr vert="horz" lIns="91440" tIns="45720" rIns="91440" bIns="45720" rtlCol="0" anchor="b">
-            <a:normAutofit/>
-          </a:bodyPr>
-          <a:lstStyle>
-            <a:lvl1pPr algn="l" defTabSz="914400" rtl="0" eaLnBrk="1" latinLnBrk="0" hangingPunct="1">
-              <a:lnSpc>
-                <a:spcPct val="85000"/>
-              </a:lnSpc>
-              <a:spcBef>
-                <a:spcPct val="0"/>
-              </a:spcBef>
-              <a:buNone/>
-              <a:defRPr sz="4800" kern="1200" spc="-50" baseline="0">
-                <a:solidFill>
-                  <a:schemeClr val="tx1">
-                    <a:lumMod val="75000"/>
-                    <a:lumOff val="25000"/>
-                  </a:schemeClr>
-                </a:solidFill>
-                <a:latin typeface="+mj-lt"/>
-                <a:ea typeface="+mj-ea"/>
-                <a:cs typeface="+mj-cs"/>
-              </a:defRPr>
-            </a:lvl1pPr>
-          </a:lstStyle>
-          <a:p>
-            <a:pPr algn="ctr"/>
-            <a:r>
-              <a:rPr lang="hu-HU" sz="6000" b="1" dirty="0">
+          <a:bodyPr/>
+          <a:lstStyle/>
+          <a:p>
+            <a:r>
+              <a:rPr lang="hu-HU" dirty="0">
                 <a:latin typeface="Bahnschrift SemiBold" panose="020B0502040204020203" pitchFamily="34" charset="0"/>
               </a:rPr>
-              <a:t>Köszönjük a figyelmet!</a:t>
-            </a:r>
-          </a:p>
-        </p:txBody>
-      </p:sp>
-      <p:pic>
-        <p:nvPicPr>
-          <p:cNvPr id="4" name="Kép 3">
+              <a:t>Modellek</a:t>
+            </a:r>
+          </a:p>
+        </p:txBody>
+      </p:sp>
+      <p:sp>
+        <p:nvSpPr>
+          <p:cNvPr id="4" name="Szöveg helye 3">
             <a:extLst>
               <a:ext uri="{FF2B5EF4-FFF2-40B4-BE49-F238E27FC236}">
-                <a16:creationId xmlns:a16="http://schemas.microsoft.com/office/drawing/2014/main" id="{6D7DB48F-9832-4ED6-A202-9D619B5AC63C}"/>
+                <a16:creationId xmlns:a16="http://schemas.microsoft.com/office/drawing/2014/main" id="{E1483CC7-2FF0-4B57-872B-832994FD7836}"/>
               </a:ext>
             </a:extLst>
           </p:cNvPr>
-          <p:cNvPicPr>
-            <a:picLocks noChangeAspect="1"/>
-          </p:cNvPicPr>
-          <p:nvPr/>
-        </p:nvPicPr>
-        <p:blipFill rotWithShape="1">
-          <a:blip r:embed="rId2">
-            <a:extLst>
-              <a:ext uri="{28A0092B-C50C-407E-A947-70E740481C1C}">
-                <a14:useLocalDpi xmlns:a14="http://schemas.microsoft.com/office/drawing/2010/main" val="0"/>
-              </a:ext>
-            </a:extLst>
-          </a:blip>
-          <a:srcRect l="16625" r="14640"/>
-          <a:stretch/>
-        </p:blipFill>
+          <p:cNvSpPr>
+            <a:spLocks noGrp="1"/>
+          </p:cNvSpPr>
+          <p:nvPr>
+            <p:ph type="body" sz="half" idx="2"/>
+          </p:nvPr>
+        </p:nvSpPr>
         <p:spPr>
-          <a:xfrm rot="6074309">
-            <a:off x="253294" y="393819"/>
-            <a:ext cx="1804052" cy="1476375"/>
+          <a:xfrm>
+            <a:off x="457200" y="3259455"/>
+            <a:ext cx="3562350" cy="3684270"/>
           </a:xfrm>
-          <a:prstGeom prst="rect">
-            <a:avLst/>
-          </a:prstGeom>
         </p:spPr>
-      </p:pic>
-      <p:pic>
-        <p:nvPicPr>
-          <p:cNvPr id="6" name="Kép 5">
+        <p:txBody>
+          <a:bodyPr>
+            <a:normAutofit/>
+          </a:bodyPr>
+          <a:lstStyle/>
+          <a:p>
+            <a:pPr marL="285750" indent="-285750">
+              <a:buClr>
+                <a:schemeClr val="bg1"/>
+              </a:buClr>
+              <a:buFont typeface="Arial" panose="020B0604020202020204" pitchFamily="34" charset="0"/>
+              <a:buChar char="•"/>
+            </a:pPr>
+            <a:r>
+              <a:rPr lang="hu-HU" sz="1800" dirty="0" err="1"/>
+              <a:t>User</a:t>
+            </a:r>
+            <a:endParaRPr lang="hu-HU" sz="1800" dirty="0"/>
+          </a:p>
+          <a:p>
+            <a:pPr marL="285750" indent="-285750">
+              <a:buClr>
+                <a:schemeClr val="bg1"/>
+              </a:buClr>
+              <a:buFont typeface="Arial" panose="020B0604020202020204" pitchFamily="34" charset="0"/>
+              <a:buChar char="•"/>
+            </a:pPr>
+            <a:endParaRPr lang="hu-HU" sz="1800" dirty="0"/>
+          </a:p>
+        </p:txBody>
+      </p:sp>
+      <p:grpSp>
+        <p:nvGrpSpPr>
+          <p:cNvPr id="9" name="Csoportba foglalás 8">
             <a:extLst>
               <a:ext uri="{FF2B5EF4-FFF2-40B4-BE49-F238E27FC236}">
-                <a16:creationId xmlns:a16="http://schemas.microsoft.com/office/drawing/2014/main" id="{1F33064C-B813-4C21-BF7E-3F16E425FACD}"/>
+                <a16:creationId xmlns:a16="http://schemas.microsoft.com/office/drawing/2014/main" id="{9D1513B7-E14B-483F-9E1D-2F9ED7A62155}"/>
               </a:ext>
             </a:extLst>
           </p:cNvPr>
-          <p:cNvPicPr>
-            <a:picLocks noChangeAspect="1"/>
-          </p:cNvPicPr>
+          <p:cNvGrpSpPr/>
           <p:nvPr/>
-        </p:nvPicPr>
-        <p:blipFill rotWithShape="1">
-          <a:blip r:embed="rId3">
-            <a:extLst>
-              <a:ext uri="{28A0092B-C50C-407E-A947-70E740481C1C}">
-                <a14:useLocalDpi xmlns:a14="http://schemas.microsoft.com/office/drawing/2010/main" val="0"/>
-              </a:ext>
-            </a:extLst>
-          </a:blip>
-          <a:srcRect l="31214" t="-711" r="26907" b="711"/>
-          <a:stretch/>
-        </p:blipFill>
-        <p:spPr>
-          <a:xfrm rot="4156304" flipH="1">
-            <a:off x="10842996" y="4624346"/>
-            <a:ext cx="1208569" cy="1623298"/>
+        </p:nvGrpSpPr>
+        <p:grpSpPr>
+          <a:xfrm>
+            <a:off x="10565538" y="349786"/>
+            <a:ext cx="1418895" cy="1258023"/>
+            <a:chOff x="10565538" y="349786"/>
+            <a:chExt cx="1418895" cy="1258023"/>
           </a:xfrm>
-          <a:prstGeom prst="rect">
-            <a:avLst/>
-          </a:prstGeom>
-        </p:spPr>
-      </p:pic>
+        </p:grpSpPr>
+        <p:pic>
+          <p:nvPicPr>
+            <p:cNvPr id="10" name="Kép 9">
+              <a:extLst>
+                <a:ext uri="{FF2B5EF4-FFF2-40B4-BE49-F238E27FC236}">
+                  <a16:creationId xmlns:a16="http://schemas.microsoft.com/office/drawing/2014/main" id="{AF68DAD7-58FF-4254-A264-3393E8FB079A}"/>
+                </a:ext>
+              </a:extLst>
+            </p:cNvPr>
+            <p:cNvPicPr>
+              <a:picLocks noChangeAspect="1"/>
+            </p:cNvPicPr>
+            <p:nvPr/>
+          </p:nvPicPr>
+          <p:blipFill rotWithShape="1">
+            <a:blip r:embed="rId2">
+              <a:alphaModFix amt="50000"/>
+              <a:extLst>
+                <a:ext uri="{28A0092B-C50C-407E-A947-70E740481C1C}">
+                  <a14:useLocalDpi xmlns:a14="http://schemas.microsoft.com/office/drawing/2010/main" val="0"/>
+                </a:ext>
+              </a:extLst>
+            </a:blip>
+            <a:srcRect t="58555" r="67375"/>
+            <a:stretch/>
+          </p:blipFill>
+          <p:spPr>
+            <a:xfrm>
+              <a:off x="10619475" y="1036308"/>
+              <a:ext cx="1364958" cy="571501"/>
+            </a:xfrm>
+            <a:prstGeom prst="rect">
+              <a:avLst/>
+            </a:prstGeom>
+          </p:spPr>
+        </p:pic>
+        <p:pic>
+          <p:nvPicPr>
+            <p:cNvPr id="11" name="Kép 10">
+              <a:extLst>
+                <a:ext uri="{FF2B5EF4-FFF2-40B4-BE49-F238E27FC236}">
+                  <a16:creationId xmlns:a16="http://schemas.microsoft.com/office/drawing/2014/main" id="{8F9A0D26-C9F9-4EBD-9287-1F6D4C562B73}"/>
+                </a:ext>
+              </a:extLst>
+            </p:cNvPr>
+            <p:cNvPicPr>
+              <a:picLocks noChangeAspect="1"/>
+            </p:cNvPicPr>
+            <p:nvPr/>
+          </p:nvPicPr>
+          <p:blipFill rotWithShape="1">
+            <a:blip r:embed="rId2">
+              <a:alphaModFix amt="50000"/>
+              <a:extLst>
+                <a:ext uri="{28A0092B-C50C-407E-A947-70E740481C1C}">
+                  <a14:useLocalDpi xmlns:a14="http://schemas.microsoft.com/office/drawing/2010/main" val="0"/>
+                </a:ext>
+              </a:extLst>
+            </a:blip>
+            <a:srcRect l="1" r="61666" b="38896"/>
+            <a:stretch/>
+          </p:blipFill>
+          <p:spPr>
+            <a:xfrm>
+              <a:off x="10565538" y="349786"/>
+              <a:ext cx="1418895" cy="745451"/>
+            </a:xfrm>
+            <a:prstGeom prst="rect">
+              <a:avLst/>
+            </a:prstGeom>
+          </p:spPr>
+        </p:pic>
+      </p:grpSp>
     </p:spTree>
     <p:extLst>
       <p:ext uri="{BB962C8B-B14F-4D97-AF65-F5344CB8AC3E}">
-        <p14:creationId xmlns:p14="http://schemas.microsoft.com/office/powerpoint/2010/main" val="2924576362"/>
+        <p14:creationId xmlns:p14="http://schemas.microsoft.com/office/powerpoint/2010/main" val="2600656638"/>
+      </p:ext>
+    </p:extLst>
+  </p:cSld>
+  <p:clrMapOvr>
+    <a:masterClrMapping/>
+  </p:clrMapOvr>
+</p:sld>
+</file>
+
+<file path=ppt/slides/slide9.xml><?xml version="1.0" encoding="utf-8"?>
+<p:sld xmlns:a="http://schemas.openxmlformats.org/drawingml/2006/main" xmlns:r="http://schemas.openxmlformats.org/officeDocument/2006/relationships" xmlns:p="http://schemas.openxmlformats.org/presentationml/2006/main">
+  <p:cSld>
+    <p:bg>
+      <p:bgPr>
+        <a:solidFill>
+          <a:srgbClr val="FDF7E9"/>
+        </a:solidFill>
+        <a:effectLst/>
+      </p:bgPr>
+    </p:bg>
+    <p:spTree>
+      <p:nvGrpSpPr>
+        <p:cNvPr id="1" name=""/>
+        <p:cNvGrpSpPr/>
+        <p:nvPr/>
+      </p:nvGrpSpPr>
+      <p:grpSpPr>
+        <a:xfrm>
+          <a:off x="0" y="0"/>
+          <a:ext cx="0" cy="0"/>
+          <a:chOff x="0" y="0"/>
+          <a:chExt cx="0" cy="0"/>
+        </a:xfrm>
+      </p:grpSpPr>
+      <p:sp>
+        <p:nvSpPr>
+          <p:cNvPr id="2" name="Cím 1">
+            <a:extLst>
+              <a:ext uri="{FF2B5EF4-FFF2-40B4-BE49-F238E27FC236}">
+                <a16:creationId xmlns:a16="http://schemas.microsoft.com/office/drawing/2014/main" id="{755F2576-93E3-4E11-AD5A-5982C144E204}"/>
+              </a:ext>
+            </a:extLst>
+          </p:cNvPr>
+          <p:cNvSpPr>
+            <a:spLocks noGrp="1"/>
+          </p:cNvSpPr>
+          <p:nvPr>
+            <p:ph type="title"/>
+          </p:nvPr>
+        </p:nvSpPr>
+        <p:spPr/>
+        <p:txBody>
+          <a:bodyPr/>
+          <a:lstStyle/>
+          <a:p>
+            <a:endParaRPr lang="hu-HU" dirty="0"/>
+          </a:p>
+        </p:txBody>
+      </p:sp>
+      <p:sp>
+        <p:nvSpPr>
+          <p:cNvPr id="3" name="Tartalom helye 2">
+            <a:extLst>
+              <a:ext uri="{FF2B5EF4-FFF2-40B4-BE49-F238E27FC236}">
+                <a16:creationId xmlns:a16="http://schemas.microsoft.com/office/drawing/2014/main" id="{6CF1363A-EC3E-4AAB-AB7B-2FBA7243AB40}"/>
+              </a:ext>
+            </a:extLst>
+          </p:cNvPr>
+          <p:cNvSpPr>
+            <a:spLocks noGrp="1"/>
+          </p:cNvSpPr>
+          <p:nvPr>
+            <p:ph idx="1"/>
+          </p:nvPr>
+        </p:nvSpPr>
+        <p:spPr/>
+        <p:txBody>
+          <a:bodyPr/>
+          <a:lstStyle/>
+          <a:p>
+            <a:endParaRPr lang="hu-HU" dirty="0"/>
+          </a:p>
+        </p:txBody>
+      </p:sp>
+      <p:sp>
+        <p:nvSpPr>
+          <p:cNvPr id="4" name="Szöveg helye 3">
+            <a:extLst>
+              <a:ext uri="{FF2B5EF4-FFF2-40B4-BE49-F238E27FC236}">
+                <a16:creationId xmlns:a16="http://schemas.microsoft.com/office/drawing/2014/main" id="{E1483CC7-2FF0-4B57-872B-832994FD7836}"/>
+              </a:ext>
+            </a:extLst>
+          </p:cNvPr>
+          <p:cNvSpPr>
+            <a:spLocks noGrp="1"/>
+          </p:cNvSpPr>
+          <p:nvPr>
+            <p:ph type="body" sz="half" idx="2"/>
+          </p:nvPr>
+        </p:nvSpPr>
+        <p:spPr/>
+        <p:txBody>
+          <a:bodyPr/>
+          <a:lstStyle/>
+          <a:p>
+            <a:endParaRPr lang="hu-HU"/>
+          </a:p>
+        </p:txBody>
+      </p:sp>
+    </p:spTree>
+    <p:extLst>
+      <p:ext uri="{BB962C8B-B14F-4D97-AF65-F5344CB8AC3E}">
+        <p14:creationId xmlns:p14="http://schemas.microsoft.com/office/powerpoint/2010/main" val="2480736290"/>
       </p:ext>
     </p:extLst>
   </p:cSld>
@@ -5452,4 +11651,299 @@
     </a:ext>
   </a:extLst>
 </a:theme>
+</file>
+
+<file path=ppt/theme/theme2.xml><?xml version="1.0" encoding="utf-8"?>
+<a:theme xmlns:a="http://schemas.openxmlformats.org/drawingml/2006/main" name="Office-téma">
+  <a:themeElements>
+    <a:clrScheme name="Office">
+      <a:dk1>
+        <a:sysClr val="windowText" lastClr="000000"/>
+      </a:dk1>
+      <a:lt1>
+        <a:sysClr val="window" lastClr="FFFFFF"/>
+      </a:lt1>
+      <a:dk2>
+        <a:srgbClr val="44546A"/>
+      </a:dk2>
+      <a:lt2>
+        <a:srgbClr val="E7E6E6"/>
+      </a:lt2>
+      <a:accent1>
+        <a:srgbClr val="4472C4"/>
+      </a:accent1>
+      <a:accent2>
+        <a:srgbClr val="ED7D31"/>
+      </a:accent2>
+      <a:accent3>
+        <a:srgbClr val="A5A5A5"/>
+      </a:accent3>
+      <a:accent4>
+        <a:srgbClr val="FFC000"/>
+      </a:accent4>
+      <a:accent5>
+        <a:srgbClr val="5B9BD5"/>
+      </a:accent5>
+      <a:accent6>
+        <a:srgbClr val="70AD47"/>
+      </a:accent6>
+      <a:hlink>
+        <a:srgbClr val="0563C1"/>
+      </a:hlink>
+      <a:folHlink>
+        <a:srgbClr val="954F72"/>
+      </a:folHlink>
+    </a:clrScheme>
+    <a:fontScheme name="Office">
+      <a:majorFont>
+        <a:latin typeface="Calibri Light" panose="020F0302020204030204"/>
+        <a:ea typeface=""/>
+        <a:cs typeface=""/>
+        <a:font script="Jpan" typeface="游ゴシック Light"/>
+        <a:font script="Hang" typeface="맑은 고딕"/>
+        <a:font script="Hans" typeface="等线 Light"/>
+        <a:font script="Hant" typeface="新細明體"/>
+        <a:font script="Arab" typeface="Times New Roman"/>
+        <a:font script="Hebr" typeface="Times New Roman"/>
+        <a:font script="Thai" typeface="Angsana New"/>
+        <a:font script="Ethi" typeface="Nyala"/>
+        <a:font script="Beng" typeface="Vrinda"/>
+        <a:font script="Gujr" typeface="Shruti"/>
+        <a:font script="Khmr" typeface="MoolBoran"/>
+        <a:font script="Knda" typeface="Tunga"/>
+        <a:font script="Guru" typeface="Raavi"/>
+        <a:font script="Cans" typeface="Euphemia"/>
+        <a:font script="Cher" typeface="Plantagenet Cherokee"/>
+        <a:font script="Yiii" typeface="Microsoft Yi Baiti"/>
+        <a:font script="Tibt" typeface="Microsoft Himalaya"/>
+        <a:font script="Thaa" typeface="MV Boli"/>
+        <a:font script="Deva" typeface="Mangal"/>
+        <a:font script="Telu" typeface="Gautami"/>
+        <a:font script="Taml" typeface="Latha"/>
+        <a:font script="Syrc" typeface="Estrangelo Edessa"/>
+        <a:font script="Orya" typeface="Kalinga"/>
+        <a:font script="Mlym" typeface="Kartika"/>
+        <a:font script="Laoo" typeface="DokChampa"/>
+        <a:font script="Sinh" typeface="Iskoola Pota"/>
+        <a:font script="Mong" typeface="Mongolian Baiti"/>
+        <a:font script="Viet" typeface="Times New Roman"/>
+        <a:font script="Uigh" typeface="Microsoft Uighur"/>
+        <a:font script="Geor" typeface="Sylfaen"/>
+        <a:font script="Armn" typeface="Arial"/>
+        <a:font script="Bugi" typeface="Leelawadee UI"/>
+        <a:font script="Bopo" typeface="Microsoft JhengHei"/>
+        <a:font script="Java" typeface="Javanese Text"/>
+        <a:font script="Lisu" typeface="Segoe UI"/>
+        <a:font script="Mymr" typeface="Myanmar Text"/>
+        <a:font script="Nkoo" typeface="Ebrima"/>
+        <a:font script="Olck" typeface="Nirmala UI"/>
+        <a:font script="Osma" typeface="Ebrima"/>
+        <a:font script="Phag" typeface="Phagspa"/>
+        <a:font script="Syrn" typeface="Estrangelo Edessa"/>
+        <a:font script="Syrj" typeface="Estrangelo Edessa"/>
+        <a:font script="Syre" typeface="Estrangelo Edessa"/>
+        <a:font script="Sora" typeface="Nirmala UI"/>
+        <a:font script="Tale" typeface="Microsoft Tai Le"/>
+        <a:font script="Talu" typeface="Microsoft New Tai Lue"/>
+        <a:font script="Tfng" typeface="Ebrima"/>
+      </a:majorFont>
+      <a:minorFont>
+        <a:latin typeface="Calibri" panose="020F0502020204030204"/>
+        <a:ea typeface=""/>
+        <a:cs typeface=""/>
+        <a:font script="Jpan" typeface="游ゴシック"/>
+        <a:font script="Hang" typeface="맑은 고딕"/>
+        <a:font script="Hans" typeface="等线"/>
+        <a:font script="Hant" typeface="新細明體"/>
+        <a:font script="Arab" typeface="Arial"/>
+        <a:font script="Hebr" typeface="Arial"/>
+        <a:font script="Thai" typeface="Cordia New"/>
+        <a:font script="Ethi" typeface="Nyala"/>
+        <a:font script="Beng" typeface="Vrinda"/>
+        <a:font script="Gujr" typeface="Shruti"/>
+        <a:font script="Khmr" typeface="DaunPenh"/>
+        <a:font script="Knda" typeface="Tunga"/>
+        <a:font script="Guru" typeface="Raavi"/>
+        <a:font script="Cans" typeface="Euphemia"/>
+        <a:font script="Cher" typeface="Plantagenet Cherokee"/>
+        <a:font script="Yiii" typeface="Microsoft Yi Baiti"/>
+        <a:font script="Tibt" typeface="Microsoft Himalaya"/>
+        <a:font script="Thaa" typeface="MV Boli"/>
+        <a:font script="Deva" typeface="Mangal"/>
+        <a:font script="Telu" typeface="Gautami"/>
+        <a:font script="Taml" typeface="Latha"/>
+        <a:font script="Syrc" typeface="Estrangelo Edessa"/>
+        <a:font script="Orya" typeface="Kalinga"/>
+        <a:font script="Mlym" typeface="Kartika"/>
+        <a:font script="Laoo" typeface="DokChampa"/>
+        <a:font script="Sinh" typeface="Iskoola Pota"/>
+        <a:font script="Mong" typeface="Mongolian Baiti"/>
+        <a:font script="Viet" typeface="Arial"/>
+        <a:font script="Uigh" typeface="Microsoft Uighur"/>
+        <a:font script="Geor" typeface="Sylfaen"/>
+        <a:font script="Armn" typeface="Arial"/>
+        <a:font script="Bugi" typeface="Leelawadee UI"/>
+        <a:font script="Bopo" typeface="Microsoft JhengHei"/>
+        <a:font script="Java" typeface="Javanese Text"/>
+        <a:font script="Lisu" typeface="Segoe UI"/>
+        <a:font script="Mymr" typeface="Myanmar Text"/>
+        <a:font script="Nkoo" typeface="Ebrima"/>
+        <a:font script="Olck" typeface="Nirmala UI"/>
+        <a:font script="Osma" typeface="Ebrima"/>
+        <a:font script="Phag" typeface="Phagspa"/>
+        <a:font script="Syrn" typeface="Estrangelo Edessa"/>
+        <a:font script="Syrj" typeface="Estrangelo Edessa"/>
+        <a:font script="Syre" typeface="Estrangelo Edessa"/>
+        <a:font script="Sora" typeface="Nirmala UI"/>
+        <a:font script="Tale" typeface="Microsoft Tai Le"/>
+        <a:font script="Talu" typeface="Microsoft New Tai Lue"/>
+        <a:font script="Tfng" typeface="Ebrima"/>
+      </a:minorFont>
+    </a:fontScheme>
+    <a:fmtScheme name="Office">
+      <a:fillStyleLst>
+        <a:solidFill>
+          <a:schemeClr val="phClr"/>
+        </a:solidFill>
+        <a:gradFill rotWithShape="1">
+          <a:gsLst>
+            <a:gs pos="0">
+              <a:schemeClr val="phClr">
+                <a:lumMod val="110000"/>
+                <a:satMod val="105000"/>
+                <a:tint val="67000"/>
+              </a:schemeClr>
+            </a:gs>
+            <a:gs pos="50000">
+              <a:schemeClr val="phClr">
+                <a:lumMod val="105000"/>
+                <a:satMod val="103000"/>
+                <a:tint val="73000"/>
+              </a:schemeClr>
+            </a:gs>
+            <a:gs pos="100000">
+              <a:schemeClr val="phClr">
+                <a:lumMod val="105000"/>
+                <a:satMod val="109000"/>
+                <a:tint val="81000"/>
+              </a:schemeClr>
+            </a:gs>
+          </a:gsLst>
+          <a:lin ang="5400000" scaled="0"/>
+        </a:gradFill>
+        <a:gradFill rotWithShape="1">
+          <a:gsLst>
+            <a:gs pos="0">
+              <a:schemeClr val="phClr">
+                <a:satMod val="103000"/>
+                <a:lumMod val="102000"/>
+                <a:tint val="94000"/>
+              </a:schemeClr>
+            </a:gs>
+            <a:gs pos="50000">
+              <a:schemeClr val="phClr">
+                <a:satMod val="110000"/>
+                <a:lumMod val="100000"/>
+                <a:shade val="100000"/>
+              </a:schemeClr>
+            </a:gs>
+            <a:gs pos="100000">
+              <a:schemeClr val="phClr">
+                <a:lumMod val="99000"/>
+                <a:satMod val="120000"/>
+                <a:shade val="78000"/>
+              </a:schemeClr>
+            </a:gs>
+          </a:gsLst>
+          <a:lin ang="5400000" scaled="0"/>
+        </a:gradFill>
+      </a:fillStyleLst>
+      <a:lnStyleLst>
+        <a:ln w="6350" cap="flat" cmpd="sng" algn="ctr">
+          <a:solidFill>
+            <a:schemeClr val="phClr"/>
+          </a:solidFill>
+          <a:prstDash val="solid"/>
+          <a:miter lim="800000"/>
+        </a:ln>
+        <a:ln w="12700" cap="flat" cmpd="sng" algn="ctr">
+          <a:solidFill>
+            <a:schemeClr val="phClr"/>
+          </a:solidFill>
+          <a:prstDash val="solid"/>
+          <a:miter lim="800000"/>
+        </a:ln>
+        <a:ln w="19050" cap="flat" cmpd="sng" algn="ctr">
+          <a:solidFill>
+            <a:schemeClr val="phClr"/>
+          </a:solidFill>
+          <a:prstDash val="solid"/>
+          <a:miter lim="800000"/>
+        </a:ln>
+      </a:lnStyleLst>
+      <a:effectStyleLst>
+        <a:effectStyle>
+          <a:effectLst/>
+        </a:effectStyle>
+        <a:effectStyle>
+          <a:effectLst/>
+        </a:effectStyle>
+        <a:effectStyle>
+          <a:effectLst>
+            <a:outerShdw blurRad="57150" dist="19050" dir="5400000" algn="ctr" rotWithShape="0">
+              <a:srgbClr val="000000">
+                <a:alpha val="63000"/>
+              </a:srgbClr>
+            </a:outerShdw>
+          </a:effectLst>
+        </a:effectStyle>
+      </a:effectStyleLst>
+      <a:bgFillStyleLst>
+        <a:solidFill>
+          <a:schemeClr val="phClr"/>
+        </a:solidFill>
+        <a:solidFill>
+          <a:schemeClr val="phClr">
+            <a:tint val="95000"/>
+            <a:satMod val="170000"/>
+          </a:schemeClr>
+        </a:solidFill>
+        <a:gradFill rotWithShape="1">
+          <a:gsLst>
+            <a:gs pos="0">
+              <a:schemeClr val="phClr">
+                <a:tint val="93000"/>
+                <a:satMod val="150000"/>
+                <a:shade val="98000"/>
+                <a:lumMod val="102000"/>
+              </a:schemeClr>
+            </a:gs>
+            <a:gs pos="50000">
+              <a:schemeClr val="phClr">
+                <a:tint val="98000"/>
+                <a:satMod val="130000"/>
+                <a:shade val="90000"/>
+                <a:lumMod val="103000"/>
+              </a:schemeClr>
+            </a:gs>
+            <a:gs pos="100000">
+              <a:schemeClr val="phClr">
+                <a:shade val="63000"/>
+                <a:satMod val="120000"/>
+              </a:schemeClr>
+            </a:gs>
+          </a:gsLst>
+          <a:lin ang="5400000" scaled="0"/>
+        </a:gradFill>
+      </a:bgFillStyleLst>
+    </a:fmtScheme>
+  </a:themeElements>
+  <a:objectDefaults/>
+  <a:extraClrSchemeLst/>
+  <a:extLst>
+    <a:ext uri="{05A4C25C-085E-4340-85A3-A5531E510DB2}">
+      <thm15:themeFamily xmlns:thm15="http://schemas.microsoft.com/office/thememl/2012/main" name="Office Theme" id="{62F939B6-93AF-4DB8-9C6B-D6C7DFDC589F}" vid="{4A3C46E8-61CC-4603-A589-7422A47A8E4A}"/>
+    </a:ext>
+  </a:extLst>
+</a:theme>
 </file>
--- a/Dokumentációhoz/Prezentáció/eMenza_AtkariAriella_FarkasDominik.pptx
+++ b/Dokumentációhoz/Prezentáció/eMenza_AtkariAriella_FarkasDominik.pptx
@@ -5,7 +5,7 @@
     <p:sldMasterId id="2147483660" r:id="rId1"/>
   </p:sldMasterIdLst>
   <p:notesMasterIdLst>
-    <p:notesMasterId r:id="rId22"/>
+    <p:notesMasterId r:id="rId24"/>
   </p:notesMasterIdLst>
   <p:sldIdLst>
     <p:sldId id="256" r:id="rId2"/>
@@ -16,18 +16,20 @@
     <p:sldId id="260" r:id="rId7"/>
     <p:sldId id="261" r:id="rId8"/>
     <p:sldId id="271" r:id="rId9"/>
-    <p:sldId id="268" r:id="rId10"/>
-    <p:sldId id="267" r:id="rId11"/>
-    <p:sldId id="265" r:id="rId12"/>
-    <p:sldId id="266" r:id="rId13"/>
-    <p:sldId id="269" r:id="rId14"/>
-    <p:sldId id="272" r:id="rId15"/>
-    <p:sldId id="264" r:id="rId16"/>
-    <p:sldId id="274" r:id="rId17"/>
-    <p:sldId id="273" r:id="rId18"/>
-    <p:sldId id="282" r:id="rId19"/>
-    <p:sldId id="283" r:id="rId20"/>
-    <p:sldId id="284" r:id="rId21"/>
+    <p:sldId id="285" r:id="rId10"/>
+    <p:sldId id="268" r:id="rId11"/>
+    <p:sldId id="267" r:id="rId12"/>
+    <p:sldId id="265" r:id="rId13"/>
+    <p:sldId id="266" r:id="rId14"/>
+    <p:sldId id="286" r:id="rId15"/>
+    <p:sldId id="269" r:id="rId16"/>
+    <p:sldId id="272" r:id="rId17"/>
+    <p:sldId id="264" r:id="rId18"/>
+    <p:sldId id="274" r:id="rId19"/>
+    <p:sldId id="273" r:id="rId20"/>
+    <p:sldId id="282" r:id="rId21"/>
+    <p:sldId id="283" r:id="rId22"/>
+    <p:sldId id="284" r:id="rId23"/>
   </p:sldIdLst>
   <p:sldSz cx="12192000" cy="6858000"/>
   <p:notesSz cx="6858000" cy="9144000"/>
@@ -561,7 +563,7 @@
           <a:p>
             <a:fld id="{5B73375F-E6FE-4F6E-96C6-6B6BE7EEDE08}" type="slidenum">
               <a:rPr lang="hu-HU" smtClean="0"/>
-              <a:t>15</a:t>
+              <a:t>17</a:t>
             </a:fld>
             <a:endParaRPr lang="hu-HU"/>
           </a:p>
@@ -655,7 +657,7 @@
           <a:p>
             <a:fld id="{5B73375F-E6FE-4F6E-96C6-6B6BE7EEDE08}" type="slidenum">
               <a:rPr lang="hu-HU" smtClean="0"/>
-              <a:t>16</a:t>
+              <a:t>18</a:t>
             </a:fld>
             <a:endParaRPr lang="hu-HU"/>
           </a:p>
@@ -739,7 +741,7 @@
           <a:p>
             <a:fld id="{5B73375F-E6FE-4F6E-96C6-6B6BE7EEDE08}" type="slidenum">
               <a:rPr lang="hu-HU" smtClean="0"/>
-              <a:t>17</a:t>
+              <a:t>19</a:t>
             </a:fld>
             <a:endParaRPr lang="hu-HU"/>
           </a:p>
@@ -5187,6 +5189,119 @@
           <p:cNvPr id="2" name="Cím 1">
             <a:extLst>
               <a:ext uri="{FF2B5EF4-FFF2-40B4-BE49-F238E27FC236}">
+                <a16:creationId xmlns:a16="http://schemas.microsoft.com/office/drawing/2014/main" id="{755F2576-93E3-4E11-AD5A-5982C144E204}"/>
+              </a:ext>
+            </a:extLst>
+          </p:cNvPr>
+          <p:cNvSpPr>
+            <a:spLocks noGrp="1"/>
+          </p:cNvSpPr>
+          <p:nvPr>
+            <p:ph type="title"/>
+          </p:nvPr>
+        </p:nvSpPr>
+        <p:spPr/>
+        <p:txBody>
+          <a:bodyPr/>
+          <a:lstStyle/>
+          <a:p>
+            <a:endParaRPr lang="hu-HU" dirty="0"/>
+          </a:p>
+        </p:txBody>
+      </p:sp>
+      <p:sp>
+        <p:nvSpPr>
+          <p:cNvPr id="3" name="Tartalom helye 2">
+            <a:extLst>
+              <a:ext uri="{FF2B5EF4-FFF2-40B4-BE49-F238E27FC236}">
+                <a16:creationId xmlns:a16="http://schemas.microsoft.com/office/drawing/2014/main" id="{6CF1363A-EC3E-4AAB-AB7B-2FBA7243AB40}"/>
+              </a:ext>
+            </a:extLst>
+          </p:cNvPr>
+          <p:cNvSpPr>
+            <a:spLocks noGrp="1"/>
+          </p:cNvSpPr>
+          <p:nvPr>
+            <p:ph idx="1"/>
+          </p:nvPr>
+        </p:nvSpPr>
+        <p:spPr/>
+        <p:txBody>
+          <a:bodyPr/>
+          <a:lstStyle/>
+          <a:p>
+            <a:endParaRPr lang="hu-HU" dirty="0"/>
+          </a:p>
+        </p:txBody>
+      </p:sp>
+      <p:sp>
+        <p:nvSpPr>
+          <p:cNvPr id="4" name="Szöveg helye 3">
+            <a:extLst>
+              <a:ext uri="{FF2B5EF4-FFF2-40B4-BE49-F238E27FC236}">
+                <a16:creationId xmlns:a16="http://schemas.microsoft.com/office/drawing/2014/main" id="{E1483CC7-2FF0-4B57-872B-832994FD7836}"/>
+              </a:ext>
+            </a:extLst>
+          </p:cNvPr>
+          <p:cNvSpPr>
+            <a:spLocks noGrp="1"/>
+          </p:cNvSpPr>
+          <p:nvPr>
+            <p:ph type="body" sz="half" idx="2"/>
+          </p:nvPr>
+        </p:nvSpPr>
+        <p:spPr/>
+        <p:txBody>
+          <a:bodyPr/>
+          <a:lstStyle/>
+          <a:p>
+            <a:endParaRPr lang="hu-HU"/>
+          </a:p>
+        </p:txBody>
+      </p:sp>
+    </p:spTree>
+    <p:extLst>
+      <p:ext uri="{BB962C8B-B14F-4D97-AF65-F5344CB8AC3E}">
+        <p14:creationId xmlns:p14="http://schemas.microsoft.com/office/powerpoint/2010/main" val="2480736290"/>
+      </p:ext>
+    </p:extLst>
+  </p:cSld>
+  <p:clrMapOvr>
+    <a:masterClrMapping/>
+  </p:clrMapOvr>
+</p:sld>
+</file>
+
+<file path=ppt/slides/slide11.xml><?xml version="1.0" encoding="utf-8"?>
+<p:sld xmlns:a="http://schemas.openxmlformats.org/drawingml/2006/main" xmlns:r="http://schemas.openxmlformats.org/officeDocument/2006/relationships" xmlns:p="http://schemas.openxmlformats.org/presentationml/2006/main">
+  <p:cSld>
+    <p:bg>
+      <p:bgPr>
+        <a:solidFill>
+          <a:srgbClr val="FDF7E9"/>
+        </a:solidFill>
+        <a:effectLst/>
+      </p:bgPr>
+    </p:bg>
+    <p:spTree>
+      <p:nvGrpSpPr>
+        <p:cNvPr id="1" name=""/>
+        <p:cNvGrpSpPr/>
+        <p:nvPr/>
+      </p:nvGrpSpPr>
+      <p:grpSpPr>
+        <a:xfrm>
+          <a:off x="0" y="0"/>
+          <a:ext cx="0" cy="0"/>
+          <a:chOff x="0" y="0"/>
+          <a:chExt cx="0" cy="0"/>
+        </a:xfrm>
+      </p:grpSpPr>
+      <p:sp>
+        <p:nvSpPr>
+          <p:cNvPr id="2" name="Cím 1">
+            <a:extLst>
+              <a:ext uri="{FF2B5EF4-FFF2-40B4-BE49-F238E27FC236}">
                 <a16:creationId xmlns:a16="http://schemas.microsoft.com/office/drawing/2014/main" id="{E1BC1CFA-A756-4730-9608-D06BB35C262F}"/>
               </a:ext>
             </a:extLst>
@@ -5245,7 +5360,7 @@
 </p:sld>
 </file>
 
-<file path=ppt/slides/slide11.xml><?xml version="1.0" encoding="utf-8"?>
+<file path=ppt/slides/slide12.xml><?xml version="1.0" encoding="utf-8"?>
 <p:sld xmlns:a="http://schemas.openxmlformats.org/drawingml/2006/main" xmlns:r="http://schemas.openxmlformats.org/officeDocument/2006/relationships" xmlns:p="http://schemas.openxmlformats.org/presentationml/2006/main">
   <p:cSld>
     <p:bg>
@@ -5436,7 +5551,7 @@
 </p:sld>
 </file>
 
-<file path=ppt/slides/slide12.xml><?xml version="1.0" encoding="utf-8"?>
+<file path=ppt/slides/slide13.xml><?xml version="1.0" encoding="utf-8"?>
 <p:sld xmlns:a="http://schemas.openxmlformats.org/drawingml/2006/main" xmlns:r="http://schemas.openxmlformats.org/officeDocument/2006/relationships" xmlns:p="http://schemas.openxmlformats.org/presentationml/2006/main">
   <p:cSld>
     <p:bg>
@@ -5481,6 +5596,12 @@
         <p:txBody>
           <a:bodyPr/>
           <a:lstStyle/>
+          <a:p>
+            <a:r>
+              <a:rPr lang="hu-HU" dirty="0"/>
+              <a:t>X tábla</a:t>
+            </a:r>
+          </a:p>
           <a:p>
             <a:endParaRPr lang="hu-HU" dirty="0"/>
           </a:p>
@@ -5627,7 +5748,105 @@
 </p:sld>
 </file>
 
-<file path=ppt/slides/slide13.xml><?xml version="1.0" encoding="utf-8"?>
+<file path=ppt/slides/slide14.xml><?xml version="1.0" encoding="utf-8"?>
+<p:sld xmlns:a="http://schemas.openxmlformats.org/drawingml/2006/main" xmlns:r="http://schemas.openxmlformats.org/officeDocument/2006/relationships" xmlns:p="http://schemas.openxmlformats.org/presentationml/2006/main">
+  <p:cSld>
+    <p:bg>
+      <p:bgPr>
+        <a:solidFill>
+          <a:srgbClr val="FDF7E9"/>
+        </a:solidFill>
+        <a:effectLst/>
+      </p:bgPr>
+    </p:bg>
+    <p:spTree>
+      <p:nvGrpSpPr>
+        <p:cNvPr id="1" name=""/>
+        <p:cNvGrpSpPr/>
+        <p:nvPr/>
+      </p:nvGrpSpPr>
+      <p:grpSpPr>
+        <a:xfrm>
+          <a:off x="0" y="0"/>
+          <a:ext cx="0" cy="0"/>
+          <a:chOff x="0" y="0"/>
+          <a:chExt cx="0" cy="0"/>
+        </a:xfrm>
+      </p:grpSpPr>
+      <p:sp>
+        <p:nvSpPr>
+          <p:cNvPr id="2" name="Cím 1">
+            <a:extLst>
+              <a:ext uri="{FF2B5EF4-FFF2-40B4-BE49-F238E27FC236}">
+                <a16:creationId xmlns:a16="http://schemas.microsoft.com/office/drawing/2014/main" id="{BD413FEB-F3F0-484E-ADF4-74F0433FDA8D}"/>
+              </a:ext>
+            </a:extLst>
+          </p:cNvPr>
+          <p:cNvSpPr txBox="1">
+            <a:spLocks/>
+          </p:cNvSpPr>
+          <p:nvPr/>
+        </p:nvSpPr>
+        <p:spPr>
+          <a:xfrm>
+            <a:off x="2640330" y="2267803"/>
+            <a:ext cx="10058400" cy="1450757"/>
+          </a:xfrm>
+          <a:prstGeom prst="rect">
+            <a:avLst/>
+          </a:prstGeom>
+        </p:spPr>
+        <p:txBody>
+          <a:bodyPr/>
+          <a:lstStyle>
+            <a:lvl1pPr algn="l" defTabSz="914400" rtl="0" eaLnBrk="1" latinLnBrk="0" hangingPunct="1">
+              <a:lnSpc>
+                <a:spcPct val="85000"/>
+              </a:lnSpc>
+              <a:spcBef>
+                <a:spcPct val="0"/>
+              </a:spcBef>
+              <a:buNone/>
+              <a:defRPr sz="4800" kern="1200" spc="-50" baseline="0">
+                <a:solidFill>
+                  <a:schemeClr val="tx1">
+                    <a:lumMod val="75000"/>
+                    <a:lumOff val="25000"/>
+                  </a:schemeClr>
+                </a:solidFill>
+                <a:latin typeface="+mj-lt"/>
+                <a:ea typeface="+mj-ea"/>
+                <a:cs typeface="+mj-cs"/>
+              </a:defRPr>
+            </a:lvl1pPr>
+          </a:lstStyle>
+          <a:p>
+            <a:r>
+              <a:rPr lang="hu-HU" b="1">
+                <a:latin typeface="Bahnschrift SemiBold" panose="020B0502040204020203" pitchFamily="34" charset="0"/>
+              </a:rPr>
+              <a:t>Adatbázis kép</a:t>
+            </a:r>
+            <a:endParaRPr lang="hu-HU" b="1" dirty="0">
+              <a:latin typeface="Bahnschrift SemiBold" panose="020B0502040204020203" pitchFamily="34" charset="0"/>
+            </a:endParaRPr>
+          </a:p>
+        </p:txBody>
+      </p:sp>
+    </p:spTree>
+    <p:extLst>
+      <p:ext uri="{BB962C8B-B14F-4D97-AF65-F5344CB8AC3E}">
+        <p14:creationId xmlns:p14="http://schemas.microsoft.com/office/powerpoint/2010/main" val="2699210854"/>
+      </p:ext>
+    </p:extLst>
+  </p:cSld>
+  <p:clrMapOvr>
+    <a:masterClrMapping/>
+  </p:clrMapOvr>
+</p:sld>
+</file>
+
+<file path=ppt/slides/slide15.xml><?xml version="1.0" encoding="utf-8"?>
 <p:sld xmlns:a="http://schemas.openxmlformats.org/drawingml/2006/main" xmlns:r="http://schemas.openxmlformats.org/officeDocument/2006/relationships" xmlns:p="http://schemas.openxmlformats.org/presentationml/2006/main">
   <p:cSld>
     <p:bg>
@@ -5864,7 +6083,7 @@
 </p:sld>
 </file>
 
-<file path=ppt/slides/slide14.xml><?xml version="1.0" encoding="utf-8"?>
+<file path=ppt/slides/slide16.xml><?xml version="1.0" encoding="utf-8"?>
 <p:sld xmlns:a="http://schemas.openxmlformats.org/drawingml/2006/main" xmlns:r="http://schemas.openxmlformats.org/officeDocument/2006/relationships" xmlns:p="http://schemas.openxmlformats.org/presentationml/2006/main">
   <p:cSld>
     <p:bg>
@@ -6147,7 +6366,7 @@
 </p:sld>
 </file>
 
-<file path=ppt/slides/slide15.xml><?xml version="1.0" encoding="utf-8"?>
+<file path=ppt/slides/slide17.xml><?xml version="1.0" encoding="utf-8"?>
 <p:sld xmlns:a="http://schemas.openxmlformats.org/drawingml/2006/main" xmlns:r="http://schemas.openxmlformats.org/officeDocument/2006/relationships" xmlns:p="http://schemas.openxmlformats.org/presentationml/2006/main">
   <p:cSld>
     <p:bg>
@@ -6308,7 +6527,7 @@
 </p:sld>
 </file>
 
-<file path=ppt/slides/slide16.xml><?xml version="1.0" encoding="utf-8"?>
+<file path=ppt/slides/slide18.xml><?xml version="1.0" encoding="utf-8"?>
 <p:sld xmlns:a="http://schemas.openxmlformats.org/drawingml/2006/main" xmlns:r="http://schemas.openxmlformats.org/officeDocument/2006/relationships" xmlns:p="http://schemas.openxmlformats.org/presentationml/2006/main">
   <p:cSld>
     <p:bg>
@@ -6621,7 +6840,7 @@
 </p:sld>
 </file>
 
-<file path=ppt/slides/slide17.xml><?xml version="1.0" encoding="utf-8"?>
+<file path=ppt/slides/slide19.xml><?xml version="1.0" encoding="utf-8"?>
 <p:sld xmlns:a="http://schemas.openxmlformats.org/drawingml/2006/main" xmlns:r="http://schemas.openxmlformats.org/officeDocument/2006/relationships" xmlns:p="http://schemas.openxmlformats.org/presentationml/2006/main">
   <p:cSld>
     <p:bg>
@@ -6888,7 +7107,7 @@
 </p:sld>
 </file>
 
-<file path=ppt/slides/slide18.xml><?xml version="1.0" encoding="utf-8"?>
+<file path=ppt/slides/slide2.xml><?xml version="1.0" encoding="utf-8"?>
 <p:sld xmlns:a="http://schemas.openxmlformats.org/drawingml/2006/main" xmlns:r="http://schemas.openxmlformats.org/officeDocument/2006/relationships" xmlns:p="http://schemas.openxmlformats.org/presentationml/2006/main">
   <p:cSld>
     <p:bg>
@@ -6913,149 +7132,33 @@
           <a:chExt cx="0" cy="0"/>
         </a:xfrm>
       </p:grpSpPr>
-      <p:cxnSp>
-        <p:nvCxnSpPr>
-          <p:cNvPr id="2" name="Egyenes összekötő 1">
+      <p:sp>
+        <p:nvSpPr>
+          <p:cNvPr id="2" name="Cím 1">
             <a:extLst>
               <a:ext uri="{FF2B5EF4-FFF2-40B4-BE49-F238E27FC236}">
-                <a16:creationId xmlns:a16="http://schemas.microsoft.com/office/drawing/2014/main" id="{20EF3F3C-374B-461F-BAF4-6C213DE7C8BB}"/>
+                <a16:creationId xmlns:a16="http://schemas.microsoft.com/office/drawing/2014/main" id="{C18830B2-00D6-4BD2-BE11-19215C420251}"/>
               </a:ext>
             </a:extLst>
           </p:cNvPr>
-          <p:cNvCxnSpPr>
-            <a:cxnSpLocks/>
-          </p:cNvCxnSpPr>
+          <p:cNvSpPr txBox="1">
+            <a:spLocks/>
+          </p:cNvSpPr>
           <p:nvPr/>
-        </p:nvCxnSpPr>
+        </p:nvSpPr>
         <p:spPr>
           <a:xfrm>
-            <a:off x="1209675" y="1737360"/>
-            <a:ext cx="9946005" cy="0"/>
-          </a:xfrm>
-          <a:prstGeom prst="line">
-            <a:avLst/>
-          </a:prstGeom>
-          <a:ln>
-            <a:solidFill>
-              <a:schemeClr val="tx1">
-                <a:lumMod val="50000"/>
-                <a:lumOff val="50000"/>
-              </a:schemeClr>
-            </a:solidFill>
-          </a:ln>
-        </p:spPr>
-        <p:style>
-          <a:lnRef idx="1">
-            <a:schemeClr val="accent1"/>
-          </a:lnRef>
-          <a:fillRef idx="0">
-            <a:schemeClr val="accent1"/>
-          </a:fillRef>
-          <a:effectRef idx="0">
-            <a:schemeClr val="accent1"/>
-          </a:effectRef>
-          <a:fontRef idx="minor">
-            <a:schemeClr val="tx1"/>
-          </a:fontRef>
-        </p:style>
-      </p:cxnSp>
-      <p:pic>
-        <p:nvPicPr>
-          <p:cNvPr id="3" name="Kép 2">
-            <a:extLst>
-              <a:ext uri="{FF2B5EF4-FFF2-40B4-BE49-F238E27FC236}">
-                <a16:creationId xmlns:a16="http://schemas.microsoft.com/office/drawing/2014/main" id="{FE91A941-BC8A-4E2A-B780-F3F3D6A9B3E3}"/>
-              </a:ext>
-            </a:extLst>
-          </p:cNvPr>
-          <p:cNvPicPr>
-            <a:picLocks noChangeAspect="1"/>
-          </p:cNvPicPr>
-          <p:nvPr/>
-        </p:nvPicPr>
-        <p:blipFill rotWithShape="1">
-          <a:blip r:embed="rId2">
-            <a:alphaModFix amt="50000"/>
-            <a:extLst>
-              <a:ext uri="{28A0092B-C50C-407E-A947-70E740481C1C}">
-                <a14:useLocalDpi xmlns:a14="http://schemas.microsoft.com/office/drawing/2010/main" val="0"/>
-              </a:ext>
-            </a:extLst>
-          </a:blip>
-          <a:srcRect t="58555" r="67375"/>
-          <a:stretch/>
-        </p:blipFill>
-        <p:spPr>
-          <a:xfrm>
-            <a:off x="10619475" y="1036308"/>
-            <a:ext cx="1364958" cy="571501"/>
+            <a:off x="1320753" y="2904573"/>
+            <a:ext cx="9760046" cy="2006995"/>
           </a:xfrm>
           <a:prstGeom prst="rect">
             <a:avLst/>
           </a:prstGeom>
         </p:spPr>
-      </p:pic>
-      <p:pic>
-        <p:nvPicPr>
-          <p:cNvPr id="4" name="Kép 3">
-            <a:extLst>
-              <a:ext uri="{FF2B5EF4-FFF2-40B4-BE49-F238E27FC236}">
-                <a16:creationId xmlns:a16="http://schemas.microsoft.com/office/drawing/2014/main" id="{78D3DB18-E771-4DF0-84FA-206E8FA41883}"/>
-              </a:ext>
-            </a:extLst>
-          </p:cNvPr>
-          <p:cNvPicPr>
-            <a:picLocks noChangeAspect="1"/>
-          </p:cNvPicPr>
-          <p:nvPr/>
-        </p:nvPicPr>
-        <p:blipFill rotWithShape="1">
-          <a:blip r:embed="rId2">
-            <a:alphaModFix amt="50000"/>
-            <a:extLst>
-              <a:ext uri="{28A0092B-C50C-407E-A947-70E740481C1C}">
-                <a14:useLocalDpi xmlns:a14="http://schemas.microsoft.com/office/drawing/2010/main" val="0"/>
-              </a:ext>
-            </a:extLst>
-          </a:blip>
-          <a:srcRect l="1" r="61666" b="38896"/>
-          <a:stretch/>
-        </p:blipFill>
-        <p:spPr>
-          <a:xfrm>
-            <a:off x="10565538" y="349786"/>
-            <a:ext cx="1418895" cy="745451"/>
-          </a:xfrm>
-          <a:prstGeom prst="rect">
-            <a:avLst/>
-          </a:prstGeom>
-        </p:spPr>
-      </p:pic>
-      <p:sp>
-        <p:nvSpPr>
-          <p:cNvPr id="5" name="Cím 1">
-            <a:extLst>
-              <a:ext uri="{FF2B5EF4-FFF2-40B4-BE49-F238E27FC236}">
-                <a16:creationId xmlns:a16="http://schemas.microsoft.com/office/drawing/2014/main" id="{175A5A3F-6F8F-4002-ADBD-CD8C93ECEEE1}"/>
-              </a:ext>
-            </a:extLst>
-          </p:cNvPr>
-          <p:cNvSpPr txBox="1">
-            <a:spLocks/>
-          </p:cNvSpPr>
-          <p:nvPr/>
-        </p:nvSpPr>
-        <p:spPr>
-          <a:xfrm>
-            <a:off x="1097280" y="286603"/>
-            <a:ext cx="10058400" cy="1450757"/>
-          </a:xfrm>
-          <a:prstGeom prst="rect">
-            <a:avLst/>
-          </a:prstGeom>
-        </p:spPr>
-        <p:txBody>
-          <a:bodyPr anchor="b"/>
+        <p:txBody>
+          <a:bodyPr>
+            <a:normAutofit/>
+          </a:bodyPr>
           <a:lstStyle>
             <a:lvl1pPr algn="l" defTabSz="914400" rtl="0" eaLnBrk="1" latinLnBrk="0" hangingPunct="1">
               <a:lnSpc>
@@ -7079,21 +7182,22 @@
             </a:lvl1pPr>
           </a:lstStyle>
           <a:p>
-            <a:r>
-              <a:rPr lang="hu-HU" b="1" dirty="0">
+            <a:pPr algn="ctr"/>
+            <a:r>
+              <a:rPr lang="hu-HU" sz="5400" b="1" dirty="0">
                 <a:latin typeface="Bahnschrift SemiBold" panose="020B0502040204020203" pitchFamily="34" charset="0"/>
               </a:rPr>
-              <a:t>Fejlesztési lehetőségek</a:t>
-            </a:r>
-          </a:p>
-        </p:txBody>
-      </p:sp>
-      <p:sp>
-        <p:nvSpPr>
-          <p:cNvPr id="6" name="Tartalom helye 2">
+              <a:t>Iskolai étkezéskezelő rendszer</a:t>
+            </a:r>
+          </a:p>
+        </p:txBody>
+      </p:sp>
+      <p:sp>
+        <p:nvSpPr>
+          <p:cNvPr id="3" name="Alcím 2">
             <a:extLst>
               <a:ext uri="{FF2B5EF4-FFF2-40B4-BE49-F238E27FC236}">
-                <a16:creationId xmlns:a16="http://schemas.microsoft.com/office/drawing/2014/main" id="{654E07C9-ACD1-4AF5-9ECE-29158423F871}"/>
+                <a16:creationId xmlns:a16="http://schemas.microsoft.com/office/drawing/2014/main" id="{A2286F2D-71DE-4954-8C64-8E9991C98150}"/>
               </a:ext>
             </a:extLst>
           </p:cNvPr>
@@ -7104,8 +7208,8 @@
         </p:nvSpPr>
         <p:spPr>
           <a:xfrm>
-            <a:off x="1097280" y="1845734"/>
-            <a:ext cx="10058400" cy="4023360"/>
+            <a:off x="3598026" y="3785841"/>
+            <a:ext cx="4995949" cy="571500"/>
           </a:xfrm>
           <a:prstGeom prst="rect">
             <a:avLst/>
@@ -7360,109 +7464,725 @@
             </a:lvl9pPr>
           </a:lstStyle>
           <a:p>
-            <a:pPr lvl="1">
+            <a:pPr algn="ctr"/>
+            <a:r>
+              <a:rPr lang="hu-HU" i="1" cap="all" spc="100" dirty="0">
+                <a:solidFill>
+                  <a:srgbClr val="BD582C"/>
+                </a:solidFill>
+                <a:uFill>
+                  <a:solidFill>
+                    <a:srgbClr val="BD582C"/>
+                  </a:solidFill>
+                </a:uFill>
+                <a:latin typeface="+mj-lt"/>
+              </a:rPr>
+              <a:t>Vizsgaremek bemutatása</a:t>
+            </a:r>
+          </a:p>
+        </p:txBody>
+      </p:sp>
+      <p:pic>
+        <p:nvPicPr>
+          <p:cNvPr id="4" name="Kép 3">
+            <a:extLst>
+              <a:ext uri="{FF2B5EF4-FFF2-40B4-BE49-F238E27FC236}">
+                <a16:creationId xmlns:a16="http://schemas.microsoft.com/office/drawing/2014/main" id="{7912835F-A62C-4B0D-B733-74106EBFDA26}"/>
+              </a:ext>
+            </a:extLst>
+          </p:cNvPr>
+          <p:cNvPicPr>
+            <a:picLocks noChangeAspect="1"/>
+          </p:cNvPicPr>
+          <p:nvPr/>
+        </p:nvPicPr>
+        <p:blipFill rotWithShape="1">
+          <a:blip r:embed="rId2">
+            <a:extLst>
+              <a:ext uri="{28A0092B-C50C-407E-A947-70E740481C1C}">
+                <a14:useLocalDpi xmlns:a14="http://schemas.microsoft.com/office/drawing/2010/main" val="0"/>
+              </a:ext>
+            </a:extLst>
+          </a:blip>
+          <a:srcRect t="58555"/>
+          <a:stretch/>
+        </p:blipFill>
+        <p:spPr>
+          <a:xfrm>
+            <a:off x="3738704" y="1393033"/>
+            <a:ext cx="4714591" cy="644014"/>
+          </a:xfrm>
+          <a:prstGeom prst="rect">
+            <a:avLst/>
+          </a:prstGeom>
+        </p:spPr>
+      </p:pic>
+      <p:sp>
+        <p:nvSpPr>
+          <p:cNvPr id="5" name="Alcím 2">
+            <a:extLst>
+              <a:ext uri="{FF2B5EF4-FFF2-40B4-BE49-F238E27FC236}">
+                <a16:creationId xmlns:a16="http://schemas.microsoft.com/office/drawing/2014/main" id="{3E0FCC81-0923-43B1-9ACC-080EBD94427F}"/>
+              </a:ext>
+            </a:extLst>
+          </p:cNvPr>
+          <p:cNvSpPr txBox="1">
+            <a:spLocks/>
+          </p:cNvSpPr>
+          <p:nvPr/>
+        </p:nvSpPr>
+        <p:spPr>
+          <a:xfrm>
+            <a:off x="127233" y="5659169"/>
+            <a:ext cx="5968766" cy="1050389"/>
+          </a:xfrm>
+          <a:prstGeom prst="rect">
+            <a:avLst/>
+          </a:prstGeom>
+        </p:spPr>
+        <p:txBody>
+          <a:bodyPr vert="horz" lIns="91440" tIns="45720" rIns="91440" bIns="45720" rtlCol="0">
+            <a:normAutofit/>
+          </a:bodyPr>
+          <a:lstStyle>
+            <a:lvl1pPr marL="0" indent="0" algn="l" defTabSz="914400" rtl="0" eaLnBrk="1" latinLnBrk="0" hangingPunct="1">
               <a:lnSpc>
-                <a:spcPct val="130000"/>
+                <a:spcPct val="90000"/>
               </a:lnSpc>
-              <a:buFont typeface="Arial" panose="020B0604020202020204" pitchFamily="34" charset="0"/>
-              <a:buChar char="•"/>
-            </a:pPr>
-            <a:r>
-              <a:rPr lang="hu-HU" sz="2000"/>
-              <a:t>Mobilalkalmazás</a:t>
-            </a:r>
-          </a:p>
-          <a:p>
-            <a:pPr lvl="1">
+              <a:spcBef>
+                <a:spcPts val="1200"/>
+              </a:spcBef>
+              <a:spcAft>
+                <a:spcPts val="200"/>
+              </a:spcAft>
+              <a:buClr>
+                <a:schemeClr val="accent1"/>
+              </a:buClr>
+              <a:buSzPct val="100000"/>
+              <a:buFont typeface="Calibri" panose="020F0502020204030204" pitchFamily="34" charset="0"/>
+              <a:buNone/>
+              <a:defRPr sz="2400" kern="1200" cap="all" spc="200" baseline="0">
+                <a:solidFill>
+                  <a:schemeClr val="tx2"/>
+                </a:solidFill>
+                <a:latin typeface="+mj-lt"/>
+                <a:ea typeface="+mn-ea"/>
+                <a:cs typeface="+mn-cs"/>
+              </a:defRPr>
+            </a:lvl1pPr>
+            <a:lvl2pPr marL="457200" indent="0" algn="ctr" defTabSz="914400" rtl="0" eaLnBrk="1" latinLnBrk="0" hangingPunct="1">
               <a:lnSpc>
-                <a:spcPct val="130000"/>
+                <a:spcPct val="90000"/>
               </a:lnSpc>
-              <a:buFont typeface="Arial" panose="020B0604020202020204" pitchFamily="34" charset="0"/>
-              <a:buChar char="•"/>
-            </a:pPr>
-            <a:r>
-              <a:rPr lang="hu-HU" sz="2000"/>
-              <a:t>Értesítés küldés</a:t>
-            </a:r>
-          </a:p>
-          <a:p>
-            <a:pPr lvl="1">
-              <a:lnSpc>
-                <a:spcPct val="130000"/>
-              </a:lnSpc>
-              <a:buFont typeface="Arial" panose="020B0604020202020204" pitchFamily="34" charset="0"/>
-              <a:buChar char="•"/>
-            </a:pPr>
-            <a:r>
-              <a:rPr lang="hu-HU" sz="2000"/>
-              <a:t>Több iskolára, több szolgáltatóra bontás</a:t>
-            </a:r>
-          </a:p>
-          <a:p>
-            <a:pPr lvl="1">
-              <a:lnSpc>
-                <a:spcPct val="130000"/>
-              </a:lnSpc>
-              <a:buFont typeface="Arial" panose="020B0604020202020204" pitchFamily="34" charset="0"/>
-              <a:buChar char="•"/>
-            </a:pPr>
-            <a:r>
-              <a:rPr lang="hu-HU" sz="2000"/>
-              <a:t>Ételek értékelése</a:t>
-            </a:r>
-          </a:p>
-          <a:p>
-            <a:pPr lvl="1">
-              <a:lnSpc>
-                <a:spcPct val="130000"/>
-              </a:lnSpc>
-              <a:buFont typeface="Arial" panose="020B0604020202020204" pitchFamily="34" charset="0"/>
-              <a:buChar char="•"/>
-            </a:pPr>
-            <a:r>
-              <a:rPr lang="hu-HU" sz="2000"/>
-              <a:t>Étkeztetési rend osztályokra, csoportokra bontva</a:t>
-            </a:r>
-          </a:p>
-          <a:p>
-            <a:pPr lvl="1">
-              <a:lnSpc>
-                <a:spcPct val="130000"/>
-              </a:lnSpc>
-              <a:buFont typeface="Arial" panose="020B0604020202020204" pitchFamily="34" charset="0"/>
-              <a:buChar char="•"/>
-            </a:pPr>
-            <a:r>
-              <a:rPr lang="hu-HU" sz="2000"/>
-              <a:t>Fizetés online (SimplePay)</a:t>
-            </a:r>
-          </a:p>
-          <a:p>
-            <a:pPr lvl="1">
-              <a:lnSpc>
-                <a:spcPct val="130000"/>
-              </a:lnSpc>
-              <a:buFont typeface="Arial" panose="020B0604020202020204" pitchFamily="34" charset="0"/>
-              <a:buChar char="•"/>
-            </a:pPr>
-            <a:r>
-              <a:rPr lang="hu-HU" sz="2000"/>
-              <a:t>Egyenleg feltöltése??</a:t>
-            </a:r>
-          </a:p>
-          <a:p>
-            <a:pPr marL="201168" lvl="1" indent="0">
+              <a:spcBef>
+                <a:spcPts val="200"/>
+              </a:spcBef>
+              <a:spcAft>
+                <a:spcPts val="400"/>
+              </a:spcAft>
+              <a:buClr>
+                <a:schemeClr val="accent1"/>
+              </a:buClr>
               <a:buFont typeface="Calibri" pitchFamily="34" charset="0"/>
               <a:buNone/>
+              <a:defRPr sz="2400" kern="1200">
+                <a:solidFill>
+                  <a:schemeClr val="tx1">
+                    <a:lumMod val="75000"/>
+                    <a:lumOff val="25000"/>
+                  </a:schemeClr>
+                </a:solidFill>
+                <a:latin typeface="+mn-lt"/>
+                <a:ea typeface="+mn-ea"/>
+                <a:cs typeface="+mn-cs"/>
+              </a:defRPr>
+            </a:lvl2pPr>
+            <a:lvl3pPr marL="914400" indent="0" algn="ctr" defTabSz="914400" rtl="0" eaLnBrk="1" latinLnBrk="0" hangingPunct="1">
+              <a:lnSpc>
+                <a:spcPct val="90000"/>
+              </a:lnSpc>
+              <a:spcBef>
+                <a:spcPts val="200"/>
+              </a:spcBef>
+              <a:spcAft>
+                <a:spcPts val="400"/>
+              </a:spcAft>
+              <a:buClr>
+                <a:schemeClr val="accent1"/>
+              </a:buClr>
+              <a:buFont typeface="Calibri" pitchFamily="34" charset="0"/>
+              <a:buNone/>
+              <a:defRPr sz="2400" kern="1200">
+                <a:solidFill>
+                  <a:schemeClr val="tx1">
+                    <a:lumMod val="75000"/>
+                    <a:lumOff val="25000"/>
+                  </a:schemeClr>
+                </a:solidFill>
+                <a:latin typeface="+mn-lt"/>
+                <a:ea typeface="+mn-ea"/>
+                <a:cs typeface="+mn-cs"/>
+              </a:defRPr>
+            </a:lvl3pPr>
+            <a:lvl4pPr marL="1371600" indent="0" algn="ctr" defTabSz="914400" rtl="0" eaLnBrk="1" latinLnBrk="0" hangingPunct="1">
+              <a:lnSpc>
+                <a:spcPct val="90000"/>
+              </a:lnSpc>
+              <a:spcBef>
+                <a:spcPts val="200"/>
+              </a:spcBef>
+              <a:spcAft>
+                <a:spcPts val="400"/>
+              </a:spcAft>
+              <a:buClr>
+                <a:schemeClr val="accent1"/>
+              </a:buClr>
+              <a:buFont typeface="Calibri" pitchFamily="34" charset="0"/>
+              <a:buNone/>
+              <a:defRPr sz="2000" kern="1200">
+                <a:solidFill>
+                  <a:schemeClr val="tx1">
+                    <a:lumMod val="75000"/>
+                    <a:lumOff val="25000"/>
+                  </a:schemeClr>
+                </a:solidFill>
+                <a:latin typeface="+mn-lt"/>
+                <a:ea typeface="+mn-ea"/>
+                <a:cs typeface="+mn-cs"/>
+              </a:defRPr>
+            </a:lvl4pPr>
+            <a:lvl5pPr marL="1828800" indent="0" algn="ctr" defTabSz="914400" rtl="0" eaLnBrk="1" latinLnBrk="0" hangingPunct="1">
+              <a:lnSpc>
+                <a:spcPct val="90000"/>
+              </a:lnSpc>
+              <a:spcBef>
+                <a:spcPts val="200"/>
+              </a:spcBef>
+              <a:spcAft>
+                <a:spcPts val="400"/>
+              </a:spcAft>
+              <a:buClr>
+                <a:schemeClr val="accent1"/>
+              </a:buClr>
+              <a:buFont typeface="Calibri" pitchFamily="34" charset="0"/>
+              <a:buNone/>
+              <a:defRPr sz="2000" kern="1200">
+                <a:solidFill>
+                  <a:schemeClr val="tx1">
+                    <a:lumMod val="75000"/>
+                    <a:lumOff val="25000"/>
+                  </a:schemeClr>
+                </a:solidFill>
+                <a:latin typeface="+mn-lt"/>
+                <a:ea typeface="+mn-ea"/>
+                <a:cs typeface="+mn-cs"/>
+              </a:defRPr>
+            </a:lvl5pPr>
+            <a:lvl6pPr marL="2286000" indent="0" algn="ctr" defTabSz="914400" rtl="0" eaLnBrk="1" latinLnBrk="0" hangingPunct="1">
+              <a:lnSpc>
+                <a:spcPct val="90000"/>
+              </a:lnSpc>
+              <a:spcBef>
+                <a:spcPts val="200"/>
+              </a:spcBef>
+              <a:spcAft>
+                <a:spcPts val="400"/>
+              </a:spcAft>
+              <a:buClr>
+                <a:schemeClr val="accent1"/>
+              </a:buClr>
+              <a:buFont typeface="Calibri" pitchFamily="34" charset="0"/>
+              <a:buNone/>
+              <a:defRPr sz="2000" kern="1200">
+                <a:solidFill>
+                  <a:schemeClr val="tx1">
+                    <a:lumMod val="75000"/>
+                    <a:lumOff val="25000"/>
+                  </a:schemeClr>
+                </a:solidFill>
+                <a:latin typeface="+mn-lt"/>
+                <a:ea typeface="+mn-ea"/>
+                <a:cs typeface="+mn-cs"/>
+              </a:defRPr>
+            </a:lvl6pPr>
+            <a:lvl7pPr marL="2743200" indent="0" algn="ctr" defTabSz="914400" rtl="0" eaLnBrk="1" latinLnBrk="0" hangingPunct="1">
+              <a:lnSpc>
+                <a:spcPct val="90000"/>
+              </a:lnSpc>
+              <a:spcBef>
+                <a:spcPts val="200"/>
+              </a:spcBef>
+              <a:spcAft>
+                <a:spcPts val="400"/>
+              </a:spcAft>
+              <a:buClr>
+                <a:schemeClr val="accent1"/>
+              </a:buClr>
+              <a:buFont typeface="Calibri" pitchFamily="34" charset="0"/>
+              <a:buNone/>
+              <a:defRPr sz="2000" kern="1200">
+                <a:solidFill>
+                  <a:schemeClr val="tx1">
+                    <a:lumMod val="75000"/>
+                    <a:lumOff val="25000"/>
+                  </a:schemeClr>
+                </a:solidFill>
+                <a:latin typeface="+mn-lt"/>
+                <a:ea typeface="+mn-ea"/>
+                <a:cs typeface="+mn-cs"/>
+              </a:defRPr>
+            </a:lvl7pPr>
+            <a:lvl8pPr marL="3200400" indent="0" algn="ctr" defTabSz="914400" rtl="0" eaLnBrk="1" latinLnBrk="0" hangingPunct="1">
+              <a:lnSpc>
+                <a:spcPct val="90000"/>
+              </a:lnSpc>
+              <a:spcBef>
+                <a:spcPts val="200"/>
+              </a:spcBef>
+              <a:spcAft>
+                <a:spcPts val="400"/>
+              </a:spcAft>
+              <a:buClr>
+                <a:schemeClr val="accent1"/>
+              </a:buClr>
+              <a:buFont typeface="Calibri" pitchFamily="34" charset="0"/>
+              <a:buNone/>
+              <a:defRPr sz="2000" kern="1200">
+                <a:solidFill>
+                  <a:schemeClr val="tx1">
+                    <a:lumMod val="75000"/>
+                    <a:lumOff val="25000"/>
+                  </a:schemeClr>
+                </a:solidFill>
+                <a:latin typeface="+mn-lt"/>
+                <a:ea typeface="+mn-ea"/>
+                <a:cs typeface="+mn-cs"/>
+              </a:defRPr>
+            </a:lvl8pPr>
+            <a:lvl9pPr marL="3657600" indent="0" algn="ctr" defTabSz="914400" rtl="0" eaLnBrk="1" latinLnBrk="0" hangingPunct="1">
+              <a:lnSpc>
+                <a:spcPct val="90000"/>
+              </a:lnSpc>
+              <a:spcBef>
+                <a:spcPts val="200"/>
+              </a:spcBef>
+              <a:spcAft>
+                <a:spcPts val="400"/>
+              </a:spcAft>
+              <a:buClr>
+                <a:schemeClr val="accent1"/>
+              </a:buClr>
+              <a:buFont typeface="Calibri" pitchFamily="34" charset="0"/>
+              <a:buNone/>
+              <a:defRPr sz="2000" kern="1200">
+                <a:solidFill>
+                  <a:schemeClr val="tx1">
+                    <a:lumMod val="75000"/>
+                    <a:lumOff val="25000"/>
+                  </a:schemeClr>
+                </a:solidFill>
+                <a:latin typeface="+mn-lt"/>
+                <a:ea typeface="+mn-ea"/>
+                <a:cs typeface="+mn-cs"/>
+              </a:defRPr>
+            </a:lvl9pPr>
+          </a:lstStyle>
+          <a:p>
+            <a:pPr>
+              <a:lnSpc>
+                <a:spcPct val="100000"/>
+              </a:lnSpc>
             </a:pPr>
-            <a:endParaRPr lang="hu-HU" dirty="0"/>
+            <a:r>
+              <a:rPr lang="hu-HU" sz="1800" cap="none" spc="0" dirty="0">
+                <a:latin typeface="Bahnschrift Light" panose="020B0502040204020203" pitchFamily="34" charset="0"/>
+              </a:rPr>
+              <a:t>Készítették: Atkári Ariella</a:t>
+            </a:r>
+            <a:br>
+              <a:rPr lang="hu-HU" sz="1800" cap="none" spc="0" dirty="0">
+                <a:latin typeface="Bahnschrift Light" panose="020B0502040204020203" pitchFamily="34" charset="0"/>
+              </a:rPr>
+            </a:br>
+            <a:r>
+              <a:rPr lang="hu-HU" sz="1800" cap="none" spc="0" dirty="0">
+                <a:latin typeface="Bahnschrift Light" panose="020B0502040204020203" pitchFamily="34" charset="0"/>
+              </a:rPr>
+              <a:t>	      Farkas Dominik</a:t>
+            </a:r>
+          </a:p>
+        </p:txBody>
+      </p:sp>
+      <p:cxnSp>
+        <p:nvCxnSpPr>
+          <p:cNvPr id="9" name="Egyenes összekötő 8">
+            <a:extLst>
+              <a:ext uri="{FF2B5EF4-FFF2-40B4-BE49-F238E27FC236}">
+                <a16:creationId xmlns:a16="http://schemas.microsoft.com/office/drawing/2014/main" id="{670AB60B-B385-4E46-A012-AD0038CF5F38}"/>
+              </a:ext>
+            </a:extLst>
+          </p:cNvPr>
+          <p:cNvCxnSpPr>
+            <a:cxnSpLocks/>
+          </p:cNvCxnSpPr>
+          <p:nvPr/>
+        </p:nvCxnSpPr>
+        <p:spPr>
+          <a:xfrm>
+            <a:off x="2119313" y="2025000"/>
+            <a:ext cx="7953375" cy="0"/>
+          </a:xfrm>
+          <a:prstGeom prst="line">
+            <a:avLst/>
+          </a:prstGeom>
+          <a:ln>
+            <a:solidFill>
+              <a:schemeClr val="tx1">
+                <a:lumMod val="50000"/>
+                <a:lumOff val="50000"/>
+              </a:schemeClr>
+            </a:solidFill>
+          </a:ln>
+        </p:spPr>
+        <p:style>
+          <a:lnRef idx="1">
+            <a:schemeClr val="accent1"/>
+          </a:lnRef>
+          <a:fillRef idx="0">
+            <a:schemeClr val="accent1"/>
+          </a:fillRef>
+          <a:effectRef idx="0">
+            <a:schemeClr val="accent1"/>
+          </a:effectRef>
+          <a:fontRef idx="minor">
+            <a:schemeClr val="tx1"/>
+          </a:fontRef>
+        </p:style>
+      </p:cxnSp>
+      <p:pic>
+        <p:nvPicPr>
+          <p:cNvPr id="10" name="Kép 9">
+            <a:extLst>
+              <a:ext uri="{FF2B5EF4-FFF2-40B4-BE49-F238E27FC236}">
+                <a16:creationId xmlns:a16="http://schemas.microsoft.com/office/drawing/2014/main" id="{CB9406C6-CF11-47E5-AEFA-0BA584F8F8D2}"/>
+              </a:ext>
+            </a:extLst>
+          </p:cNvPr>
+          <p:cNvPicPr>
+            <a:picLocks noChangeAspect="1"/>
+          </p:cNvPicPr>
+          <p:nvPr/>
+        </p:nvPicPr>
+        <p:blipFill rotWithShape="1">
+          <a:blip r:embed="rId2">
+            <a:extLst>
+              <a:ext uri="{28A0092B-C50C-407E-A947-70E740481C1C}">
+                <a14:useLocalDpi xmlns:a14="http://schemas.microsoft.com/office/drawing/2010/main" val="0"/>
+              </a:ext>
+            </a:extLst>
+          </a:blip>
+          <a:srcRect l="1" r="-2984" b="38896"/>
+          <a:stretch/>
+        </p:blipFill>
+        <p:spPr>
+          <a:xfrm>
+            <a:off x="3726755" y="431494"/>
+            <a:ext cx="4855269" cy="949493"/>
+          </a:xfrm>
+          <a:prstGeom prst="rect">
+            <a:avLst/>
+          </a:prstGeom>
+        </p:spPr>
+      </p:pic>
+      <p:sp>
+        <p:nvSpPr>
+          <p:cNvPr id="11" name="Alcím 2">
+            <a:extLst>
+              <a:ext uri="{FF2B5EF4-FFF2-40B4-BE49-F238E27FC236}">
+                <a16:creationId xmlns:a16="http://schemas.microsoft.com/office/drawing/2014/main" id="{7D26B0E8-7A60-4B80-8AF7-628A519872D6}"/>
+              </a:ext>
+            </a:extLst>
+          </p:cNvPr>
+          <p:cNvSpPr txBox="1">
+            <a:spLocks/>
+          </p:cNvSpPr>
+          <p:nvPr/>
+        </p:nvSpPr>
+        <p:spPr>
+          <a:xfrm>
+            <a:off x="10563224" y="5883809"/>
+            <a:ext cx="1628776" cy="402688"/>
+          </a:xfrm>
+          <a:prstGeom prst="rect">
+            <a:avLst/>
+          </a:prstGeom>
+        </p:spPr>
+        <p:txBody>
+          <a:bodyPr vert="horz" lIns="91440" tIns="45720" rIns="91440" bIns="45720" rtlCol="0">
+            <a:normAutofit/>
+          </a:bodyPr>
+          <a:lstStyle>
+            <a:lvl1pPr marL="0" indent="0" algn="l" defTabSz="914400" rtl="0" eaLnBrk="1" latinLnBrk="0" hangingPunct="1">
+              <a:lnSpc>
+                <a:spcPct val="90000"/>
+              </a:lnSpc>
+              <a:spcBef>
+                <a:spcPts val="1200"/>
+              </a:spcBef>
+              <a:spcAft>
+                <a:spcPts val="200"/>
+              </a:spcAft>
+              <a:buClr>
+                <a:schemeClr val="accent1"/>
+              </a:buClr>
+              <a:buSzPct val="100000"/>
+              <a:buFont typeface="Calibri" panose="020F0502020204030204" pitchFamily="34" charset="0"/>
+              <a:buNone/>
+              <a:defRPr sz="2400" kern="1200" cap="all" spc="200" baseline="0">
+                <a:solidFill>
+                  <a:schemeClr val="tx2"/>
+                </a:solidFill>
+                <a:latin typeface="+mj-lt"/>
+                <a:ea typeface="+mn-ea"/>
+                <a:cs typeface="+mn-cs"/>
+              </a:defRPr>
+            </a:lvl1pPr>
+            <a:lvl2pPr marL="457200" indent="0" algn="ctr" defTabSz="914400" rtl="0" eaLnBrk="1" latinLnBrk="0" hangingPunct="1">
+              <a:lnSpc>
+                <a:spcPct val="90000"/>
+              </a:lnSpc>
+              <a:spcBef>
+                <a:spcPts val="200"/>
+              </a:spcBef>
+              <a:spcAft>
+                <a:spcPts val="400"/>
+              </a:spcAft>
+              <a:buClr>
+                <a:schemeClr val="accent1"/>
+              </a:buClr>
+              <a:buFont typeface="Calibri" pitchFamily="34" charset="0"/>
+              <a:buNone/>
+              <a:defRPr sz="2400" kern="1200">
+                <a:solidFill>
+                  <a:schemeClr val="tx1">
+                    <a:lumMod val="75000"/>
+                    <a:lumOff val="25000"/>
+                  </a:schemeClr>
+                </a:solidFill>
+                <a:latin typeface="+mn-lt"/>
+                <a:ea typeface="+mn-ea"/>
+                <a:cs typeface="+mn-cs"/>
+              </a:defRPr>
+            </a:lvl2pPr>
+            <a:lvl3pPr marL="914400" indent="0" algn="ctr" defTabSz="914400" rtl="0" eaLnBrk="1" latinLnBrk="0" hangingPunct="1">
+              <a:lnSpc>
+                <a:spcPct val="90000"/>
+              </a:lnSpc>
+              <a:spcBef>
+                <a:spcPts val="200"/>
+              </a:spcBef>
+              <a:spcAft>
+                <a:spcPts val="400"/>
+              </a:spcAft>
+              <a:buClr>
+                <a:schemeClr val="accent1"/>
+              </a:buClr>
+              <a:buFont typeface="Calibri" pitchFamily="34" charset="0"/>
+              <a:buNone/>
+              <a:defRPr sz="2400" kern="1200">
+                <a:solidFill>
+                  <a:schemeClr val="tx1">
+                    <a:lumMod val="75000"/>
+                    <a:lumOff val="25000"/>
+                  </a:schemeClr>
+                </a:solidFill>
+                <a:latin typeface="+mn-lt"/>
+                <a:ea typeface="+mn-ea"/>
+                <a:cs typeface="+mn-cs"/>
+              </a:defRPr>
+            </a:lvl3pPr>
+            <a:lvl4pPr marL="1371600" indent="0" algn="ctr" defTabSz="914400" rtl="0" eaLnBrk="1" latinLnBrk="0" hangingPunct="1">
+              <a:lnSpc>
+                <a:spcPct val="90000"/>
+              </a:lnSpc>
+              <a:spcBef>
+                <a:spcPts val="200"/>
+              </a:spcBef>
+              <a:spcAft>
+                <a:spcPts val="400"/>
+              </a:spcAft>
+              <a:buClr>
+                <a:schemeClr val="accent1"/>
+              </a:buClr>
+              <a:buFont typeface="Calibri" pitchFamily="34" charset="0"/>
+              <a:buNone/>
+              <a:defRPr sz="2000" kern="1200">
+                <a:solidFill>
+                  <a:schemeClr val="tx1">
+                    <a:lumMod val="75000"/>
+                    <a:lumOff val="25000"/>
+                  </a:schemeClr>
+                </a:solidFill>
+                <a:latin typeface="+mn-lt"/>
+                <a:ea typeface="+mn-ea"/>
+                <a:cs typeface="+mn-cs"/>
+              </a:defRPr>
+            </a:lvl4pPr>
+            <a:lvl5pPr marL="1828800" indent="0" algn="ctr" defTabSz="914400" rtl="0" eaLnBrk="1" latinLnBrk="0" hangingPunct="1">
+              <a:lnSpc>
+                <a:spcPct val="90000"/>
+              </a:lnSpc>
+              <a:spcBef>
+                <a:spcPts val="200"/>
+              </a:spcBef>
+              <a:spcAft>
+                <a:spcPts val="400"/>
+              </a:spcAft>
+              <a:buClr>
+                <a:schemeClr val="accent1"/>
+              </a:buClr>
+              <a:buFont typeface="Calibri" pitchFamily="34" charset="0"/>
+              <a:buNone/>
+              <a:defRPr sz="2000" kern="1200">
+                <a:solidFill>
+                  <a:schemeClr val="tx1">
+                    <a:lumMod val="75000"/>
+                    <a:lumOff val="25000"/>
+                  </a:schemeClr>
+                </a:solidFill>
+                <a:latin typeface="+mn-lt"/>
+                <a:ea typeface="+mn-ea"/>
+                <a:cs typeface="+mn-cs"/>
+              </a:defRPr>
+            </a:lvl5pPr>
+            <a:lvl6pPr marL="2286000" indent="0" algn="ctr" defTabSz="914400" rtl="0" eaLnBrk="1" latinLnBrk="0" hangingPunct="1">
+              <a:lnSpc>
+                <a:spcPct val="90000"/>
+              </a:lnSpc>
+              <a:spcBef>
+                <a:spcPts val="200"/>
+              </a:spcBef>
+              <a:spcAft>
+                <a:spcPts val="400"/>
+              </a:spcAft>
+              <a:buClr>
+                <a:schemeClr val="accent1"/>
+              </a:buClr>
+              <a:buFont typeface="Calibri" pitchFamily="34" charset="0"/>
+              <a:buNone/>
+              <a:defRPr sz="2000" kern="1200">
+                <a:solidFill>
+                  <a:schemeClr val="tx1">
+                    <a:lumMod val="75000"/>
+                    <a:lumOff val="25000"/>
+                  </a:schemeClr>
+                </a:solidFill>
+                <a:latin typeface="+mn-lt"/>
+                <a:ea typeface="+mn-ea"/>
+                <a:cs typeface="+mn-cs"/>
+              </a:defRPr>
+            </a:lvl6pPr>
+            <a:lvl7pPr marL="2743200" indent="0" algn="ctr" defTabSz="914400" rtl="0" eaLnBrk="1" latinLnBrk="0" hangingPunct="1">
+              <a:lnSpc>
+                <a:spcPct val="90000"/>
+              </a:lnSpc>
+              <a:spcBef>
+                <a:spcPts val="200"/>
+              </a:spcBef>
+              <a:spcAft>
+                <a:spcPts val="400"/>
+              </a:spcAft>
+              <a:buClr>
+                <a:schemeClr val="accent1"/>
+              </a:buClr>
+              <a:buFont typeface="Calibri" pitchFamily="34" charset="0"/>
+              <a:buNone/>
+              <a:defRPr sz="2000" kern="1200">
+                <a:solidFill>
+                  <a:schemeClr val="tx1">
+                    <a:lumMod val="75000"/>
+                    <a:lumOff val="25000"/>
+                  </a:schemeClr>
+                </a:solidFill>
+                <a:latin typeface="+mn-lt"/>
+                <a:ea typeface="+mn-ea"/>
+                <a:cs typeface="+mn-cs"/>
+              </a:defRPr>
+            </a:lvl7pPr>
+            <a:lvl8pPr marL="3200400" indent="0" algn="ctr" defTabSz="914400" rtl="0" eaLnBrk="1" latinLnBrk="0" hangingPunct="1">
+              <a:lnSpc>
+                <a:spcPct val="90000"/>
+              </a:lnSpc>
+              <a:spcBef>
+                <a:spcPts val="200"/>
+              </a:spcBef>
+              <a:spcAft>
+                <a:spcPts val="400"/>
+              </a:spcAft>
+              <a:buClr>
+                <a:schemeClr val="accent1"/>
+              </a:buClr>
+              <a:buFont typeface="Calibri" pitchFamily="34" charset="0"/>
+              <a:buNone/>
+              <a:defRPr sz="2000" kern="1200">
+                <a:solidFill>
+                  <a:schemeClr val="tx1">
+                    <a:lumMod val="75000"/>
+                    <a:lumOff val="25000"/>
+                  </a:schemeClr>
+                </a:solidFill>
+                <a:latin typeface="+mn-lt"/>
+                <a:ea typeface="+mn-ea"/>
+                <a:cs typeface="+mn-cs"/>
+              </a:defRPr>
+            </a:lvl8pPr>
+            <a:lvl9pPr marL="3657600" indent="0" algn="ctr" defTabSz="914400" rtl="0" eaLnBrk="1" latinLnBrk="0" hangingPunct="1">
+              <a:lnSpc>
+                <a:spcPct val="90000"/>
+              </a:lnSpc>
+              <a:spcBef>
+                <a:spcPts val="200"/>
+              </a:spcBef>
+              <a:spcAft>
+                <a:spcPts val="400"/>
+              </a:spcAft>
+              <a:buClr>
+                <a:schemeClr val="accent1"/>
+              </a:buClr>
+              <a:buFont typeface="Calibri" pitchFamily="34" charset="0"/>
+              <a:buNone/>
+              <a:defRPr sz="2000" kern="1200">
+                <a:solidFill>
+                  <a:schemeClr val="tx1">
+                    <a:lumMod val="75000"/>
+                    <a:lumOff val="25000"/>
+                  </a:schemeClr>
+                </a:solidFill>
+                <a:latin typeface="+mn-lt"/>
+                <a:ea typeface="+mn-ea"/>
+                <a:cs typeface="+mn-cs"/>
+              </a:defRPr>
+            </a:lvl9pPr>
+          </a:lstStyle>
+          <a:p>
+            <a:pPr>
+              <a:lnSpc>
+                <a:spcPct val="100000"/>
+              </a:lnSpc>
+            </a:pPr>
+            <a:r>
+              <a:rPr lang="hu-HU" sz="1800" cap="none" spc="0" dirty="0">
+                <a:latin typeface="Bahnschrift Light" panose="020B0502040204020203" pitchFamily="34" charset="0"/>
+              </a:rPr>
+              <a:t>2026. 03. 03</a:t>
+            </a:r>
           </a:p>
         </p:txBody>
       </p:sp>
     </p:spTree>
     <p:extLst>
       <p:ext uri="{BB962C8B-B14F-4D97-AF65-F5344CB8AC3E}">
-        <p14:creationId xmlns:p14="http://schemas.microsoft.com/office/powerpoint/2010/main" val="1380079028"/>
+        <p14:creationId xmlns:p14="http://schemas.microsoft.com/office/powerpoint/2010/main" val="3133121184"/>
       </p:ext>
     </p:extLst>
   </p:cSld>
@@ -7472,7 +8192,7 @@
 </p:sld>
 </file>
 
-<file path=ppt/slides/slide19.xml><?xml version="1.0" encoding="utf-8"?>
+<file path=ppt/slides/slide20.xml><?xml version="1.0" encoding="utf-8"?>
 <p:sld xmlns:a="http://schemas.openxmlformats.org/drawingml/2006/main" xmlns:r="http://schemas.openxmlformats.org/officeDocument/2006/relationships" xmlns:p="http://schemas.openxmlformats.org/presentationml/2006/main">
   <p:cSld>
     <p:bg>
@@ -7513,8 +8233,8 @@
         </p:nvCxnSpPr>
         <p:spPr>
           <a:xfrm>
-            <a:off x="3205163" y="2154342"/>
-            <a:ext cx="5781675" cy="0"/>
+            <a:off x="1209675" y="1737360"/>
+            <a:ext cx="9946005" cy="0"/>
           </a:xfrm>
           <a:prstGeom prst="line">
             <a:avLst/>
@@ -7559,20 +8279,20 @@
         </p:nvPicPr>
         <p:blipFill rotWithShape="1">
           <a:blip r:embed="rId2">
-            <a:alphaModFix/>
+            <a:alphaModFix amt="50000"/>
             <a:extLst>
               <a:ext uri="{28A0092B-C50C-407E-A947-70E740481C1C}">
                 <a14:useLocalDpi xmlns:a14="http://schemas.microsoft.com/office/drawing/2010/main" val="0"/>
               </a:ext>
             </a:extLst>
           </a:blip>
-          <a:srcRect l="-1" t="58555" r="1153"/>
+          <a:srcRect t="58555" r="67375"/>
           <a:stretch/>
         </p:blipFill>
         <p:spPr>
           <a:xfrm>
-            <a:off x="3864953" y="1462194"/>
-            <a:ext cx="4462094" cy="616623"/>
+            <a:off x="10619475" y="1036308"/>
+            <a:ext cx="1364958" cy="571501"/>
           </a:xfrm>
           <a:prstGeom prst="rect">
             <a:avLst/>
@@ -7595,20 +8315,20 @@
         </p:nvPicPr>
         <p:blipFill rotWithShape="1">
           <a:blip r:embed="rId2">
-            <a:alphaModFix/>
+            <a:alphaModFix amt="50000"/>
             <a:extLst>
               <a:ext uri="{28A0092B-C50C-407E-A947-70E740481C1C}">
                 <a14:useLocalDpi xmlns:a14="http://schemas.microsoft.com/office/drawing/2010/main" val="0"/>
               </a:ext>
             </a:extLst>
           </a:blip>
-          <a:srcRect l="-1" r="-295" b="38896"/>
+          <a:srcRect l="1" r="61666" b="38896"/>
           <a:stretch/>
         </p:blipFill>
         <p:spPr>
           <a:xfrm>
-            <a:off x="3817995" y="581028"/>
-            <a:ext cx="4556011" cy="914838"/>
+            <a:off x="10565538" y="349786"/>
+            <a:ext cx="1418895" cy="745451"/>
           </a:xfrm>
           <a:prstGeom prst="rect">
             <a:avLst/>
@@ -7631,7 +8351,7 @@
         </p:nvSpPr>
         <p:spPr>
           <a:xfrm>
-            <a:off x="1066800" y="2703622"/>
+            <a:off x="1097280" y="286603"/>
             <a:ext cx="10058400" cy="1450757"/>
           </a:xfrm>
           <a:prstGeom prst="rect">
@@ -7639,7 +8359,7 @@
           </a:prstGeom>
         </p:spPr>
         <p:txBody>
-          <a:bodyPr anchor="ctr"/>
+          <a:bodyPr anchor="b"/>
           <a:lstStyle>
             <a:lvl1pPr algn="l" defTabSz="914400" rtl="0" eaLnBrk="1" latinLnBrk="0" hangingPunct="1">
               <a:lnSpc>
@@ -7663,266 +8383,21 @@
             </a:lvl1pPr>
           </a:lstStyle>
           <a:p>
-            <a:pPr algn="ctr"/>
-            <a:r>
-              <a:rPr lang="hu-HU" sz="6000" b="1" dirty="0" err="1">
+            <a:r>
+              <a:rPr lang="hu-HU" b="1" dirty="0">
                 <a:latin typeface="Bahnschrift SemiBold" panose="020B0502040204020203" pitchFamily="34" charset="0"/>
               </a:rPr>
-              <a:t>Demo</a:t>
-            </a:r>
-            <a:endParaRPr lang="hu-HU" sz="6000" b="1" dirty="0">
-              <a:latin typeface="Bahnschrift SemiBold" panose="020B0502040204020203" pitchFamily="34" charset="0"/>
-            </a:endParaRPr>
-          </a:p>
-        </p:txBody>
-      </p:sp>
-      <p:pic>
-        <p:nvPicPr>
-          <p:cNvPr id="12" name="Kép 11">
+              <a:t>Fejlesztési lehetőségek</a:t>
+            </a:r>
+          </a:p>
+        </p:txBody>
+      </p:sp>
+      <p:sp>
+        <p:nvSpPr>
+          <p:cNvPr id="6" name="Tartalom helye 2">
             <a:extLst>
               <a:ext uri="{FF2B5EF4-FFF2-40B4-BE49-F238E27FC236}">
-                <a16:creationId xmlns:a16="http://schemas.microsoft.com/office/drawing/2014/main" id="{0D5DF80E-C3F6-4A3A-98C9-825EEE99BBF4}"/>
-              </a:ext>
-            </a:extLst>
-          </p:cNvPr>
-          <p:cNvPicPr>
-            <a:picLocks noChangeAspect="1"/>
-          </p:cNvPicPr>
-          <p:nvPr/>
-        </p:nvPicPr>
-        <p:blipFill rotWithShape="1">
-          <a:blip r:embed="rId3">
-            <a:extLst>
-              <a:ext uri="{28A0092B-C50C-407E-A947-70E740481C1C}">
-                <a14:useLocalDpi xmlns:a14="http://schemas.microsoft.com/office/drawing/2010/main" val="0"/>
-              </a:ext>
-            </a:extLst>
-          </a:blip>
-          <a:srcRect l="16625" r="14640"/>
-          <a:stretch/>
-        </p:blipFill>
-        <p:spPr>
-          <a:xfrm rot="6074309">
-            <a:off x="253294" y="393819"/>
-            <a:ext cx="1804052" cy="1476375"/>
-          </a:xfrm>
-          <a:prstGeom prst="rect">
-            <a:avLst/>
-          </a:prstGeom>
-        </p:spPr>
-      </p:pic>
-      <p:pic>
-        <p:nvPicPr>
-          <p:cNvPr id="13" name="Kép 12">
-            <a:extLst>
-              <a:ext uri="{FF2B5EF4-FFF2-40B4-BE49-F238E27FC236}">
-                <a16:creationId xmlns:a16="http://schemas.microsoft.com/office/drawing/2014/main" id="{7AF0C74E-3043-40A3-8603-B30A83BB9DDF}"/>
-              </a:ext>
-            </a:extLst>
-          </p:cNvPr>
-          <p:cNvPicPr>
-            <a:picLocks noChangeAspect="1"/>
-          </p:cNvPicPr>
-          <p:nvPr/>
-        </p:nvPicPr>
-        <p:blipFill rotWithShape="1">
-          <a:blip r:embed="rId4">
-            <a:extLst>
-              <a:ext uri="{28A0092B-C50C-407E-A947-70E740481C1C}">
-                <a14:useLocalDpi xmlns:a14="http://schemas.microsoft.com/office/drawing/2010/main" val="0"/>
-              </a:ext>
-            </a:extLst>
-          </a:blip>
-          <a:srcRect l="31214" t="-711" r="26907" b="711"/>
-          <a:stretch/>
-        </p:blipFill>
-        <p:spPr>
-          <a:xfrm rot="4156304" flipH="1">
-            <a:off x="10842996" y="4624346"/>
-            <a:ext cx="1208569" cy="1623298"/>
-          </a:xfrm>
-          <a:prstGeom prst="rect">
-            <a:avLst/>
-          </a:prstGeom>
-        </p:spPr>
-      </p:pic>
-    </p:spTree>
-    <p:extLst>
-      <p:ext uri="{BB962C8B-B14F-4D97-AF65-F5344CB8AC3E}">
-        <p14:creationId xmlns:p14="http://schemas.microsoft.com/office/powerpoint/2010/main" val="1876273255"/>
-      </p:ext>
-    </p:extLst>
-  </p:cSld>
-  <p:clrMapOvr>
-    <a:masterClrMapping/>
-  </p:clrMapOvr>
-  <mc:AlternateContent xmlns:mc="http://schemas.openxmlformats.org/markup-compatibility/2006">
-    <mc:Choice xmlns:p159="http://schemas.microsoft.com/office/powerpoint/2015/09/main" Requires="p159">
-      <p:transition xmlns:p14="http://schemas.microsoft.com/office/powerpoint/2010/main" spd="slow" p14:dur="2000">
-        <p159:morph option="byObject"/>
-      </p:transition>
-    </mc:Choice>
-    <mc:Fallback>
-      <p:transition spd="slow">
-        <p:fade/>
-      </p:transition>
-    </mc:Fallback>
-  </mc:AlternateContent>
-  <p:timing>
-    <p:tnLst>
-      <p:par>
-        <p:cTn id="1" dur="indefinite" restart="never" nodeType="tmRoot">
-          <p:childTnLst>
-            <p:seq concurrent="1" nextAc="seek">
-              <p:cTn id="2" dur="indefinite" nodeType="mainSeq">
-                <p:childTnLst>
-                  <p:par>
-                    <p:cTn id="3" fill="hold">
-                      <p:stCondLst>
-                        <p:cond delay="indefinite"/>
-                        <p:cond evt="onBegin" delay="0">
-                          <p:tn val="2"/>
-                        </p:cond>
-                      </p:stCondLst>
-                      <p:childTnLst>
-                        <p:par>
-                          <p:cTn id="4" fill="hold">
-                            <p:stCondLst>
-                              <p:cond delay="0"/>
-                            </p:stCondLst>
-                            <p:childTnLst>
-                              <p:par>
-                                <p:cTn id="5" presetID="10" presetClass="entr" presetSubtype="0" fill="hold" nodeType="withEffect">
-                                  <p:stCondLst>
-                                    <p:cond delay="0"/>
-                                  </p:stCondLst>
-                                  <p:childTnLst>
-                                    <p:set>
-                                      <p:cBhvr>
-                                        <p:cTn id="6" dur="1" fill="hold">
-                                          <p:stCondLst>
-                                            <p:cond delay="0"/>
-                                          </p:stCondLst>
-                                        </p:cTn>
-                                        <p:tgtEl>
-                                          <p:spTgt spid="12"/>
-                                        </p:tgtEl>
-                                        <p:attrNameLst>
-                                          <p:attrName>style.visibility</p:attrName>
-                                        </p:attrNameLst>
-                                      </p:cBhvr>
-                                      <p:to>
-                                        <p:strVal val="visible"/>
-                                      </p:to>
-                                    </p:set>
-                                    <p:animEffect transition="in" filter="fade">
-                                      <p:cBhvr>
-                                        <p:cTn id="7" dur="500"/>
-                                        <p:tgtEl>
-                                          <p:spTgt spid="12"/>
-                                        </p:tgtEl>
-                                      </p:cBhvr>
-                                    </p:animEffect>
-                                  </p:childTnLst>
-                                </p:cTn>
-                              </p:par>
-                              <p:par>
-                                <p:cTn id="8" presetID="10" presetClass="entr" presetSubtype="0" fill="hold" nodeType="withEffect">
-                                  <p:stCondLst>
-                                    <p:cond delay="0"/>
-                                  </p:stCondLst>
-                                  <p:childTnLst>
-                                    <p:set>
-                                      <p:cBhvr>
-                                        <p:cTn id="9" dur="1" fill="hold">
-                                          <p:stCondLst>
-                                            <p:cond delay="0"/>
-                                          </p:stCondLst>
-                                        </p:cTn>
-                                        <p:tgtEl>
-                                          <p:spTgt spid="13"/>
-                                        </p:tgtEl>
-                                        <p:attrNameLst>
-                                          <p:attrName>style.visibility</p:attrName>
-                                        </p:attrNameLst>
-                                      </p:cBhvr>
-                                      <p:to>
-                                        <p:strVal val="visible"/>
-                                      </p:to>
-                                    </p:set>
-                                    <p:animEffect transition="in" filter="fade">
-                                      <p:cBhvr>
-                                        <p:cTn id="10" dur="500"/>
-                                        <p:tgtEl>
-                                          <p:spTgt spid="13"/>
-                                        </p:tgtEl>
-                                      </p:cBhvr>
-                                    </p:animEffect>
-                                  </p:childTnLst>
-                                </p:cTn>
-                              </p:par>
-                            </p:childTnLst>
-                          </p:cTn>
-                        </p:par>
-                      </p:childTnLst>
-                    </p:cTn>
-                  </p:par>
-                </p:childTnLst>
-              </p:cTn>
-              <p:prevCondLst>
-                <p:cond evt="onPrev" delay="0">
-                  <p:tgtEl>
-                    <p:sldTgt/>
-                  </p:tgtEl>
-                </p:cond>
-              </p:prevCondLst>
-              <p:nextCondLst>
-                <p:cond evt="onNext" delay="0">
-                  <p:tgtEl>
-                    <p:sldTgt/>
-                  </p:tgtEl>
-                </p:cond>
-              </p:nextCondLst>
-            </p:seq>
-          </p:childTnLst>
-        </p:cTn>
-      </p:par>
-    </p:tnLst>
-  </p:timing>
-</p:sld>
-</file>
-
-<file path=ppt/slides/slide2.xml><?xml version="1.0" encoding="utf-8"?>
-<p:sld xmlns:a="http://schemas.openxmlformats.org/drawingml/2006/main" xmlns:r="http://schemas.openxmlformats.org/officeDocument/2006/relationships" xmlns:p="http://schemas.openxmlformats.org/presentationml/2006/main">
-  <p:cSld>
-    <p:bg>
-      <p:bgPr>
-        <a:solidFill>
-          <a:srgbClr val="FDF7E9"/>
-        </a:solidFill>
-        <a:effectLst/>
-      </p:bgPr>
-    </p:bg>
-    <p:spTree>
-      <p:nvGrpSpPr>
-        <p:cNvPr id="1" name=""/>
-        <p:cNvGrpSpPr/>
-        <p:nvPr/>
-      </p:nvGrpSpPr>
-      <p:grpSpPr>
-        <a:xfrm>
-          <a:off x="0" y="0"/>
-          <a:ext cx="0" cy="0"/>
-          <a:chOff x="0" y="0"/>
-          <a:chExt cx="0" cy="0"/>
-        </a:xfrm>
-      </p:grpSpPr>
-      <p:sp>
-        <p:nvSpPr>
-          <p:cNvPr id="2" name="Cím 1">
-            <a:extLst>
-              <a:ext uri="{FF2B5EF4-FFF2-40B4-BE49-F238E27FC236}">
-                <a16:creationId xmlns:a16="http://schemas.microsoft.com/office/drawing/2014/main" id="{C18830B2-00D6-4BD2-BE11-19215C420251}"/>
+                <a16:creationId xmlns:a16="http://schemas.microsoft.com/office/drawing/2014/main" id="{654E07C9-ACD1-4AF5-9ECE-29158423F871}"/>
               </a:ext>
             </a:extLst>
           </p:cNvPr>
@@ -7933,68 +8408,8 @@
         </p:nvSpPr>
         <p:spPr>
           <a:xfrm>
-            <a:off x="1320753" y="2904573"/>
-            <a:ext cx="9760046" cy="2006995"/>
-          </a:xfrm>
-          <a:prstGeom prst="rect">
-            <a:avLst/>
-          </a:prstGeom>
-        </p:spPr>
-        <p:txBody>
-          <a:bodyPr>
-            <a:normAutofit/>
-          </a:bodyPr>
-          <a:lstStyle>
-            <a:lvl1pPr algn="l" defTabSz="914400" rtl="0" eaLnBrk="1" latinLnBrk="0" hangingPunct="1">
-              <a:lnSpc>
-                <a:spcPct val="85000"/>
-              </a:lnSpc>
-              <a:spcBef>
-                <a:spcPct val="0"/>
-              </a:spcBef>
-              <a:buNone/>
-              <a:defRPr sz="4800" kern="1200" spc="-50" baseline="0">
-                <a:solidFill>
-                  <a:schemeClr val="tx1">
-                    <a:lumMod val="75000"/>
-                    <a:lumOff val="25000"/>
-                  </a:schemeClr>
-                </a:solidFill>
-                <a:latin typeface="+mj-lt"/>
-                <a:ea typeface="+mj-ea"/>
-                <a:cs typeface="+mj-cs"/>
-              </a:defRPr>
-            </a:lvl1pPr>
-          </a:lstStyle>
-          <a:p>
-            <a:pPr algn="ctr"/>
-            <a:r>
-              <a:rPr lang="hu-HU" sz="5400" b="1" dirty="0">
-                <a:latin typeface="Bahnschrift SemiBold" panose="020B0502040204020203" pitchFamily="34" charset="0"/>
-              </a:rPr>
-              <a:t>Iskolai étkezéskezelő rendszer</a:t>
-            </a:r>
-          </a:p>
-        </p:txBody>
-      </p:sp>
-      <p:sp>
-        <p:nvSpPr>
-          <p:cNvPr id="3" name="Alcím 2">
-            <a:extLst>
-              <a:ext uri="{FF2B5EF4-FFF2-40B4-BE49-F238E27FC236}">
-                <a16:creationId xmlns:a16="http://schemas.microsoft.com/office/drawing/2014/main" id="{A2286F2D-71DE-4954-8C64-8E9991C98150}"/>
-              </a:ext>
-            </a:extLst>
-          </p:cNvPr>
-          <p:cNvSpPr txBox="1">
-            <a:spLocks/>
-          </p:cNvSpPr>
-          <p:nvPr/>
-        </p:nvSpPr>
-        <p:spPr>
-          <a:xfrm>
-            <a:off x="3598026" y="3785841"/>
-            <a:ext cx="4995949" cy="571500"/>
+            <a:off x="1097280" y="1845734"/>
+            <a:ext cx="10058400" cy="4023360"/>
           </a:xfrm>
           <a:prstGeom prst="rect">
             <a:avLst/>
@@ -8249,725 +8664,109 @@
             </a:lvl9pPr>
           </a:lstStyle>
           <a:p>
-            <a:pPr algn="ctr"/>
-            <a:r>
-              <a:rPr lang="hu-HU" i="1" cap="all" spc="100" dirty="0">
-                <a:solidFill>
-                  <a:srgbClr val="BD582C"/>
-                </a:solidFill>
-                <a:uFill>
-                  <a:solidFill>
-                    <a:srgbClr val="BD582C"/>
-                  </a:solidFill>
-                </a:uFill>
-                <a:latin typeface="+mj-lt"/>
-              </a:rPr>
-              <a:t>Vizsgaremek bemutatása</a:t>
-            </a:r>
-          </a:p>
-        </p:txBody>
-      </p:sp>
-      <p:pic>
-        <p:nvPicPr>
-          <p:cNvPr id="4" name="Kép 3">
-            <a:extLst>
-              <a:ext uri="{FF2B5EF4-FFF2-40B4-BE49-F238E27FC236}">
-                <a16:creationId xmlns:a16="http://schemas.microsoft.com/office/drawing/2014/main" id="{7912835F-A62C-4B0D-B733-74106EBFDA26}"/>
-              </a:ext>
-            </a:extLst>
-          </p:cNvPr>
-          <p:cNvPicPr>
-            <a:picLocks noChangeAspect="1"/>
-          </p:cNvPicPr>
-          <p:nvPr/>
-        </p:nvPicPr>
-        <p:blipFill rotWithShape="1">
-          <a:blip r:embed="rId2">
-            <a:extLst>
-              <a:ext uri="{28A0092B-C50C-407E-A947-70E740481C1C}">
-                <a14:useLocalDpi xmlns:a14="http://schemas.microsoft.com/office/drawing/2010/main" val="0"/>
-              </a:ext>
-            </a:extLst>
-          </a:blip>
-          <a:srcRect t="58555"/>
-          <a:stretch/>
-        </p:blipFill>
-        <p:spPr>
-          <a:xfrm>
-            <a:off x="3738704" y="1393033"/>
-            <a:ext cx="4714591" cy="644014"/>
-          </a:xfrm>
-          <a:prstGeom prst="rect">
-            <a:avLst/>
-          </a:prstGeom>
-        </p:spPr>
-      </p:pic>
-      <p:sp>
-        <p:nvSpPr>
-          <p:cNvPr id="5" name="Alcím 2">
-            <a:extLst>
-              <a:ext uri="{FF2B5EF4-FFF2-40B4-BE49-F238E27FC236}">
-                <a16:creationId xmlns:a16="http://schemas.microsoft.com/office/drawing/2014/main" id="{3E0FCC81-0923-43B1-9ACC-080EBD94427F}"/>
-              </a:ext>
-            </a:extLst>
-          </p:cNvPr>
-          <p:cNvSpPr txBox="1">
-            <a:spLocks/>
-          </p:cNvSpPr>
-          <p:nvPr/>
-        </p:nvSpPr>
-        <p:spPr>
-          <a:xfrm>
-            <a:off x="127233" y="5659169"/>
-            <a:ext cx="5968766" cy="1050389"/>
-          </a:xfrm>
-          <a:prstGeom prst="rect">
-            <a:avLst/>
-          </a:prstGeom>
-        </p:spPr>
-        <p:txBody>
-          <a:bodyPr vert="horz" lIns="91440" tIns="45720" rIns="91440" bIns="45720" rtlCol="0">
-            <a:normAutofit/>
-          </a:bodyPr>
-          <a:lstStyle>
-            <a:lvl1pPr marL="0" indent="0" algn="l" defTabSz="914400" rtl="0" eaLnBrk="1" latinLnBrk="0" hangingPunct="1">
+            <a:pPr lvl="1">
               <a:lnSpc>
-                <a:spcPct val="90000"/>
+                <a:spcPct val="130000"/>
               </a:lnSpc>
-              <a:spcBef>
-                <a:spcPts val="1200"/>
-              </a:spcBef>
-              <a:spcAft>
-                <a:spcPts val="200"/>
-              </a:spcAft>
-              <a:buClr>
-                <a:schemeClr val="accent1"/>
-              </a:buClr>
-              <a:buSzPct val="100000"/>
-              <a:buFont typeface="Calibri" panose="020F0502020204030204" pitchFamily="34" charset="0"/>
-              <a:buNone/>
-              <a:defRPr sz="2400" kern="1200" cap="all" spc="200" baseline="0">
-                <a:solidFill>
-                  <a:schemeClr val="tx2"/>
-                </a:solidFill>
-                <a:latin typeface="+mj-lt"/>
-                <a:ea typeface="+mn-ea"/>
-                <a:cs typeface="+mn-cs"/>
-              </a:defRPr>
-            </a:lvl1pPr>
-            <a:lvl2pPr marL="457200" indent="0" algn="ctr" defTabSz="914400" rtl="0" eaLnBrk="1" latinLnBrk="0" hangingPunct="1">
+              <a:buFont typeface="Arial" panose="020B0604020202020204" pitchFamily="34" charset="0"/>
+              <a:buChar char="•"/>
+            </a:pPr>
+            <a:r>
+              <a:rPr lang="hu-HU" sz="2000"/>
+              <a:t>Mobilalkalmazás</a:t>
+            </a:r>
+          </a:p>
+          <a:p>
+            <a:pPr lvl="1">
               <a:lnSpc>
-                <a:spcPct val="90000"/>
+                <a:spcPct val="130000"/>
               </a:lnSpc>
-              <a:spcBef>
-                <a:spcPts val="200"/>
-              </a:spcBef>
-              <a:spcAft>
-                <a:spcPts val="400"/>
-              </a:spcAft>
-              <a:buClr>
-                <a:schemeClr val="accent1"/>
-              </a:buClr>
+              <a:buFont typeface="Arial" panose="020B0604020202020204" pitchFamily="34" charset="0"/>
+              <a:buChar char="•"/>
+            </a:pPr>
+            <a:r>
+              <a:rPr lang="hu-HU" sz="2000"/>
+              <a:t>Értesítés küldés</a:t>
+            </a:r>
+          </a:p>
+          <a:p>
+            <a:pPr lvl="1">
+              <a:lnSpc>
+                <a:spcPct val="130000"/>
+              </a:lnSpc>
+              <a:buFont typeface="Arial" panose="020B0604020202020204" pitchFamily="34" charset="0"/>
+              <a:buChar char="•"/>
+            </a:pPr>
+            <a:r>
+              <a:rPr lang="hu-HU" sz="2000"/>
+              <a:t>Több iskolára, több szolgáltatóra bontás</a:t>
+            </a:r>
+          </a:p>
+          <a:p>
+            <a:pPr lvl="1">
+              <a:lnSpc>
+                <a:spcPct val="130000"/>
+              </a:lnSpc>
+              <a:buFont typeface="Arial" panose="020B0604020202020204" pitchFamily="34" charset="0"/>
+              <a:buChar char="•"/>
+            </a:pPr>
+            <a:r>
+              <a:rPr lang="hu-HU" sz="2000"/>
+              <a:t>Ételek értékelése</a:t>
+            </a:r>
+          </a:p>
+          <a:p>
+            <a:pPr lvl="1">
+              <a:lnSpc>
+                <a:spcPct val="130000"/>
+              </a:lnSpc>
+              <a:buFont typeface="Arial" panose="020B0604020202020204" pitchFamily="34" charset="0"/>
+              <a:buChar char="•"/>
+            </a:pPr>
+            <a:r>
+              <a:rPr lang="hu-HU" sz="2000"/>
+              <a:t>Étkeztetési rend osztályokra, csoportokra bontva</a:t>
+            </a:r>
+          </a:p>
+          <a:p>
+            <a:pPr lvl="1">
+              <a:lnSpc>
+                <a:spcPct val="130000"/>
+              </a:lnSpc>
+              <a:buFont typeface="Arial" panose="020B0604020202020204" pitchFamily="34" charset="0"/>
+              <a:buChar char="•"/>
+            </a:pPr>
+            <a:r>
+              <a:rPr lang="hu-HU" sz="2000"/>
+              <a:t>Fizetés online (SimplePay)</a:t>
+            </a:r>
+          </a:p>
+          <a:p>
+            <a:pPr lvl="1">
+              <a:lnSpc>
+                <a:spcPct val="130000"/>
+              </a:lnSpc>
+              <a:buFont typeface="Arial" panose="020B0604020202020204" pitchFamily="34" charset="0"/>
+              <a:buChar char="•"/>
+            </a:pPr>
+            <a:r>
+              <a:rPr lang="hu-HU" sz="2000"/>
+              <a:t>Egyenleg feltöltése??</a:t>
+            </a:r>
+          </a:p>
+          <a:p>
+            <a:pPr marL="201168" lvl="1" indent="0">
               <a:buFont typeface="Calibri" pitchFamily="34" charset="0"/>
               <a:buNone/>
-              <a:defRPr sz="2400" kern="1200">
-                <a:solidFill>
-                  <a:schemeClr val="tx1">
-                    <a:lumMod val="75000"/>
-                    <a:lumOff val="25000"/>
-                  </a:schemeClr>
-                </a:solidFill>
-                <a:latin typeface="+mn-lt"/>
-                <a:ea typeface="+mn-ea"/>
-                <a:cs typeface="+mn-cs"/>
-              </a:defRPr>
-            </a:lvl2pPr>
-            <a:lvl3pPr marL="914400" indent="0" algn="ctr" defTabSz="914400" rtl="0" eaLnBrk="1" latinLnBrk="0" hangingPunct="1">
-              <a:lnSpc>
-                <a:spcPct val="90000"/>
-              </a:lnSpc>
-              <a:spcBef>
-                <a:spcPts val="200"/>
-              </a:spcBef>
-              <a:spcAft>
-                <a:spcPts val="400"/>
-              </a:spcAft>
-              <a:buClr>
-                <a:schemeClr val="accent1"/>
-              </a:buClr>
-              <a:buFont typeface="Calibri" pitchFamily="34" charset="0"/>
-              <a:buNone/>
-              <a:defRPr sz="2400" kern="1200">
-                <a:solidFill>
-                  <a:schemeClr val="tx1">
-                    <a:lumMod val="75000"/>
-                    <a:lumOff val="25000"/>
-                  </a:schemeClr>
-                </a:solidFill>
-                <a:latin typeface="+mn-lt"/>
-                <a:ea typeface="+mn-ea"/>
-                <a:cs typeface="+mn-cs"/>
-              </a:defRPr>
-            </a:lvl3pPr>
-            <a:lvl4pPr marL="1371600" indent="0" algn="ctr" defTabSz="914400" rtl="0" eaLnBrk="1" latinLnBrk="0" hangingPunct="1">
-              <a:lnSpc>
-                <a:spcPct val="90000"/>
-              </a:lnSpc>
-              <a:spcBef>
-                <a:spcPts val="200"/>
-              </a:spcBef>
-              <a:spcAft>
-                <a:spcPts val="400"/>
-              </a:spcAft>
-              <a:buClr>
-                <a:schemeClr val="accent1"/>
-              </a:buClr>
-              <a:buFont typeface="Calibri" pitchFamily="34" charset="0"/>
-              <a:buNone/>
-              <a:defRPr sz="2000" kern="1200">
-                <a:solidFill>
-                  <a:schemeClr val="tx1">
-                    <a:lumMod val="75000"/>
-                    <a:lumOff val="25000"/>
-                  </a:schemeClr>
-                </a:solidFill>
-                <a:latin typeface="+mn-lt"/>
-                <a:ea typeface="+mn-ea"/>
-                <a:cs typeface="+mn-cs"/>
-              </a:defRPr>
-            </a:lvl4pPr>
-            <a:lvl5pPr marL="1828800" indent="0" algn="ctr" defTabSz="914400" rtl="0" eaLnBrk="1" latinLnBrk="0" hangingPunct="1">
-              <a:lnSpc>
-                <a:spcPct val="90000"/>
-              </a:lnSpc>
-              <a:spcBef>
-                <a:spcPts val="200"/>
-              </a:spcBef>
-              <a:spcAft>
-                <a:spcPts val="400"/>
-              </a:spcAft>
-              <a:buClr>
-                <a:schemeClr val="accent1"/>
-              </a:buClr>
-              <a:buFont typeface="Calibri" pitchFamily="34" charset="0"/>
-              <a:buNone/>
-              <a:defRPr sz="2000" kern="1200">
-                <a:solidFill>
-                  <a:schemeClr val="tx1">
-                    <a:lumMod val="75000"/>
-                    <a:lumOff val="25000"/>
-                  </a:schemeClr>
-                </a:solidFill>
-                <a:latin typeface="+mn-lt"/>
-                <a:ea typeface="+mn-ea"/>
-                <a:cs typeface="+mn-cs"/>
-              </a:defRPr>
-            </a:lvl5pPr>
-            <a:lvl6pPr marL="2286000" indent="0" algn="ctr" defTabSz="914400" rtl="0" eaLnBrk="1" latinLnBrk="0" hangingPunct="1">
-              <a:lnSpc>
-                <a:spcPct val="90000"/>
-              </a:lnSpc>
-              <a:spcBef>
-                <a:spcPts val="200"/>
-              </a:spcBef>
-              <a:spcAft>
-                <a:spcPts val="400"/>
-              </a:spcAft>
-              <a:buClr>
-                <a:schemeClr val="accent1"/>
-              </a:buClr>
-              <a:buFont typeface="Calibri" pitchFamily="34" charset="0"/>
-              <a:buNone/>
-              <a:defRPr sz="2000" kern="1200">
-                <a:solidFill>
-                  <a:schemeClr val="tx1">
-                    <a:lumMod val="75000"/>
-                    <a:lumOff val="25000"/>
-                  </a:schemeClr>
-                </a:solidFill>
-                <a:latin typeface="+mn-lt"/>
-                <a:ea typeface="+mn-ea"/>
-                <a:cs typeface="+mn-cs"/>
-              </a:defRPr>
-            </a:lvl6pPr>
-            <a:lvl7pPr marL="2743200" indent="0" algn="ctr" defTabSz="914400" rtl="0" eaLnBrk="1" latinLnBrk="0" hangingPunct="1">
-              <a:lnSpc>
-                <a:spcPct val="90000"/>
-              </a:lnSpc>
-              <a:spcBef>
-                <a:spcPts val="200"/>
-              </a:spcBef>
-              <a:spcAft>
-                <a:spcPts val="400"/>
-              </a:spcAft>
-              <a:buClr>
-                <a:schemeClr val="accent1"/>
-              </a:buClr>
-              <a:buFont typeface="Calibri" pitchFamily="34" charset="0"/>
-              <a:buNone/>
-              <a:defRPr sz="2000" kern="1200">
-                <a:solidFill>
-                  <a:schemeClr val="tx1">
-                    <a:lumMod val="75000"/>
-                    <a:lumOff val="25000"/>
-                  </a:schemeClr>
-                </a:solidFill>
-                <a:latin typeface="+mn-lt"/>
-                <a:ea typeface="+mn-ea"/>
-                <a:cs typeface="+mn-cs"/>
-              </a:defRPr>
-            </a:lvl7pPr>
-            <a:lvl8pPr marL="3200400" indent="0" algn="ctr" defTabSz="914400" rtl="0" eaLnBrk="1" latinLnBrk="0" hangingPunct="1">
-              <a:lnSpc>
-                <a:spcPct val="90000"/>
-              </a:lnSpc>
-              <a:spcBef>
-                <a:spcPts val="200"/>
-              </a:spcBef>
-              <a:spcAft>
-                <a:spcPts val="400"/>
-              </a:spcAft>
-              <a:buClr>
-                <a:schemeClr val="accent1"/>
-              </a:buClr>
-              <a:buFont typeface="Calibri" pitchFamily="34" charset="0"/>
-              <a:buNone/>
-              <a:defRPr sz="2000" kern="1200">
-                <a:solidFill>
-                  <a:schemeClr val="tx1">
-                    <a:lumMod val="75000"/>
-                    <a:lumOff val="25000"/>
-                  </a:schemeClr>
-                </a:solidFill>
-                <a:latin typeface="+mn-lt"/>
-                <a:ea typeface="+mn-ea"/>
-                <a:cs typeface="+mn-cs"/>
-              </a:defRPr>
-            </a:lvl8pPr>
-            <a:lvl9pPr marL="3657600" indent="0" algn="ctr" defTabSz="914400" rtl="0" eaLnBrk="1" latinLnBrk="0" hangingPunct="1">
-              <a:lnSpc>
-                <a:spcPct val="90000"/>
-              </a:lnSpc>
-              <a:spcBef>
-                <a:spcPts val="200"/>
-              </a:spcBef>
-              <a:spcAft>
-                <a:spcPts val="400"/>
-              </a:spcAft>
-              <a:buClr>
-                <a:schemeClr val="accent1"/>
-              </a:buClr>
-              <a:buFont typeface="Calibri" pitchFamily="34" charset="0"/>
-              <a:buNone/>
-              <a:defRPr sz="2000" kern="1200">
-                <a:solidFill>
-                  <a:schemeClr val="tx1">
-                    <a:lumMod val="75000"/>
-                    <a:lumOff val="25000"/>
-                  </a:schemeClr>
-                </a:solidFill>
-                <a:latin typeface="+mn-lt"/>
-                <a:ea typeface="+mn-ea"/>
-                <a:cs typeface="+mn-cs"/>
-              </a:defRPr>
-            </a:lvl9pPr>
-          </a:lstStyle>
-          <a:p>
-            <a:pPr>
-              <a:lnSpc>
-                <a:spcPct val="100000"/>
-              </a:lnSpc>
             </a:pPr>
-            <a:r>
-              <a:rPr lang="hu-HU" sz="1800" cap="none" spc="0" dirty="0">
-                <a:latin typeface="Bahnschrift Light" panose="020B0502040204020203" pitchFamily="34" charset="0"/>
-              </a:rPr>
-              <a:t>Készítették: Atkári Ariella</a:t>
-            </a:r>
-            <a:br>
-              <a:rPr lang="hu-HU" sz="1800" cap="none" spc="0" dirty="0">
-                <a:latin typeface="Bahnschrift Light" panose="020B0502040204020203" pitchFamily="34" charset="0"/>
-              </a:rPr>
-            </a:br>
-            <a:r>
-              <a:rPr lang="hu-HU" sz="1800" cap="none" spc="0" dirty="0">
-                <a:latin typeface="Bahnschrift Light" panose="020B0502040204020203" pitchFamily="34" charset="0"/>
-              </a:rPr>
-              <a:t>	      Farkas Dominik</a:t>
-            </a:r>
-          </a:p>
-        </p:txBody>
-      </p:sp>
-      <p:cxnSp>
-        <p:nvCxnSpPr>
-          <p:cNvPr id="9" name="Egyenes összekötő 8">
-            <a:extLst>
-              <a:ext uri="{FF2B5EF4-FFF2-40B4-BE49-F238E27FC236}">
-                <a16:creationId xmlns:a16="http://schemas.microsoft.com/office/drawing/2014/main" id="{670AB60B-B385-4E46-A012-AD0038CF5F38}"/>
-              </a:ext>
-            </a:extLst>
-          </p:cNvPr>
-          <p:cNvCxnSpPr>
-            <a:cxnSpLocks/>
-          </p:cNvCxnSpPr>
-          <p:nvPr/>
-        </p:nvCxnSpPr>
-        <p:spPr>
-          <a:xfrm>
-            <a:off x="2119313" y="2025000"/>
-            <a:ext cx="7953375" cy="0"/>
-          </a:xfrm>
-          <a:prstGeom prst="line">
-            <a:avLst/>
-          </a:prstGeom>
-          <a:ln>
-            <a:solidFill>
-              <a:schemeClr val="tx1">
-                <a:lumMod val="50000"/>
-                <a:lumOff val="50000"/>
-              </a:schemeClr>
-            </a:solidFill>
-          </a:ln>
-        </p:spPr>
-        <p:style>
-          <a:lnRef idx="1">
-            <a:schemeClr val="accent1"/>
-          </a:lnRef>
-          <a:fillRef idx="0">
-            <a:schemeClr val="accent1"/>
-          </a:fillRef>
-          <a:effectRef idx="0">
-            <a:schemeClr val="accent1"/>
-          </a:effectRef>
-          <a:fontRef idx="minor">
-            <a:schemeClr val="tx1"/>
-          </a:fontRef>
-        </p:style>
-      </p:cxnSp>
-      <p:pic>
-        <p:nvPicPr>
-          <p:cNvPr id="10" name="Kép 9">
-            <a:extLst>
-              <a:ext uri="{FF2B5EF4-FFF2-40B4-BE49-F238E27FC236}">
-                <a16:creationId xmlns:a16="http://schemas.microsoft.com/office/drawing/2014/main" id="{CB9406C6-CF11-47E5-AEFA-0BA584F8F8D2}"/>
-              </a:ext>
-            </a:extLst>
-          </p:cNvPr>
-          <p:cNvPicPr>
-            <a:picLocks noChangeAspect="1"/>
-          </p:cNvPicPr>
-          <p:nvPr/>
-        </p:nvPicPr>
-        <p:blipFill rotWithShape="1">
-          <a:blip r:embed="rId2">
-            <a:extLst>
-              <a:ext uri="{28A0092B-C50C-407E-A947-70E740481C1C}">
-                <a14:useLocalDpi xmlns:a14="http://schemas.microsoft.com/office/drawing/2010/main" val="0"/>
-              </a:ext>
-            </a:extLst>
-          </a:blip>
-          <a:srcRect l="1" r="-2984" b="38896"/>
-          <a:stretch/>
-        </p:blipFill>
-        <p:spPr>
-          <a:xfrm>
-            <a:off x="3726755" y="431494"/>
-            <a:ext cx="4855269" cy="949493"/>
-          </a:xfrm>
-          <a:prstGeom prst="rect">
-            <a:avLst/>
-          </a:prstGeom>
-        </p:spPr>
-      </p:pic>
-      <p:sp>
-        <p:nvSpPr>
-          <p:cNvPr id="11" name="Alcím 2">
-            <a:extLst>
-              <a:ext uri="{FF2B5EF4-FFF2-40B4-BE49-F238E27FC236}">
-                <a16:creationId xmlns:a16="http://schemas.microsoft.com/office/drawing/2014/main" id="{7D26B0E8-7A60-4B80-8AF7-628A519872D6}"/>
-              </a:ext>
-            </a:extLst>
-          </p:cNvPr>
-          <p:cNvSpPr txBox="1">
-            <a:spLocks/>
-          </p:cNvSpPr>
-          <p:nvPr/>
-        </p:nvSpPr>
-        <p:spPr>
-          <a:xfrm>
-            <a:off x="10563224" y="5883809"/>
-            <a:ext cx="1628776" cy="402688"/>
-          </a:xfrm>
-          <a:prstGeom prst="rect">
-            <a:avLst/>
-          </a:prstGeom>
-        </p:spPr>
-        <p:txBody>
-          <a:bodyPr vert="horz" lIns="91440" tIns="45720" rIns="91440" bIns="45720" rtlCol="0">
-            <a:normAutofit/>
-          </a:bodyPr>
-          <a:lstStyle>
-            <a:lvl1pPr marL="0" indent="0" algn="l" defTabSz="914400" rtl="0" eaLnBrk="1" latinLnBrk="0" hangingPunct="1">
-              <a:lnSpc>
-                <a:spcPct val="90000"/>
-              </a:lnSpc>
-              <a:spcBef>
-                <a:spcPts val="1200"/>
-              </a:spcBef>
-              <a:spcAft>
-                <a:spcPts val="200"/>
-              </a:spcAft>
-              <a:buClr>
-                <a:schemeClr val="accent1"/>
-              </a:buClr>
-              <a:buSzPct val="100000"/>
-              <a:buFont typeface="Calibri" panose="020F0502020204030204" pitchFamily="34" charset="0"/>
-              <a:buNone/>
-              <a:defRPr sz="2400" kern="1200" cap="all" spc="200" baseline="0">
-                <a:solidFill>
-                  <a:schemeClr val="tx2"/>
-                </a:solidFill>
-                <a:latin typeface="+mj-lt"/>
-                <a:ea typeface="+mn-ea"/>
-                <a:cs typeface="+mn-cs"/>
-              </a:defRPr>
-            </a:lvl1pPr>
-            <a:lvl2pPr marL="457200" indent="0" algn="ctr" defTabSz="914400" rtl="0" eaLnBrk="1" latinLnBrk="0" hangingPunct="1">
-              <a:lnSpc>
-                <a:spcPct val="90000"/>
-              </a:lnSpc>
-              <a:spcBef>
-                <a:spcPts val="200"/>
-              </a:spcBef>
-              <a:spcAft>
-                <a:spcPts val="400"/>
-              </a:spcAft>
-              <a:buClr>
-                <a:schemeClr val="accent1"/>
-              </a:buClr>
-              <a:buFont typeface="Calibri" pitchFamily="34" charset="0"/>
-              <a:buNone/>
-              <a:defRPr sz="2400" kern="1200">
-                <a:solidFill>
-                  <a:schemeClr val="tx1">
-                    <a:lumMod val="75000"/>
-                    <a:lumOff val="25000"/>
-                  </a:schemeClr>
-                </a:solidFill>
-                <a:latin typeface="+mn-lt"/>
-                <a:ea typeface="+mn-ea"/>
-                <a:cs typeface="+mn-cs"/>
-              </a:defRPr>
-            </a:lvl2pPr>
-            <a:lvl3pPr marL="914400" indent="0" algn="ctr" defTabSz="914400" rtl="0" eaLnBrk="1" latinLnBrk="0" hangingPunct="1">
-              <a:lnSpc>
-                <a:spcPct val="90000"/>
-              </a:lnSpc>
-              <a:spcBef>
-                <a:spcPts val="200"/>
-              </a:spcBef>
-              <a:spcAft>
-                <a:spcPts val="400"/>
-              </a:spcAft>
-              <a:buClr>
-                <a:schemeClr val="accent1"/>
-              </a:buClr>
-              <a:buFont typeface="Calibri" pitchFamily="34" charset="0"/>
-              <a:buNone/>
-              <a:defRPr sz="2400" kern="1200">
-                <a:solidFill>
-                  <a:schemeClr val="tx1">
-                    <a:lumMod val="75000"/>
-                    <a:lumOff val="25000"/>
-                  </a:schemeClr>
-                </a:solidFill>
-                <a:latin typeface="+mn-lt"/>
-                <a:ea typeface="+mn-ea"/>
-                <a:cs typeface="+mn-cs"/>
-              </a:defRPr>
-            </a:lvl3pPr>
-            <a:lvl4pPr marL="1371600" indent="0" algn="ctr" defTabSz="914400" rtl="0" eaLnBrk="1" latinLnBrk="0" hangingPunct="1">
-              <a:lnSpc>
-                <a:spcPct val="90000"/>
-              </a:lnSpc>
-              <a:spcBef>
-                <a:spcPts val="200"/>
-              </a:spcBef>
-              <a:spcAft>
-                <a:spcPts val="400"/>
-              </a:spcAft>
-              <a:buClr>
-                <a:schemeClr val="accent1"/>
-              </a:buClr>
-              <a:buFont typeface="Calibri" pitchFamily="34" charset="0"/>
-              <a:buNone/>
-              <a:defRPr sz="2000" kern="1200">
-                <a:solidFill>
-                  <a:schemeClr val="tx1">
-                    <a:lumMod val="75000"/>
-                    <a:lumOff val="25000"/>
-                  </a:schemeClr>
-                </a:solidFill>
-                <a:latin typeface="+mn-lt"/>
-                <a:ea typeface="+mn-ea"/>
-                <a:cs typeface="+mn-cs"/>
-              </a:defRPr>
-            </a:lvl4pPr>
-            <a:lvl5pPr marL="1828800" indent="0" algn="ctr" defTabSz="914400" rtl="0" eaLnBrk="1" latinLnBrk="0" hangingPunct="1">
-              <a:lnSpc>
-                <a:spcPct val="90000"/>
-              </a:lnSpc>
-              <a:spcBef>
-                <a:spcPts val="200"/>
-              </a:spcBef>
-              <a:spcAft>
-                <a:spcPts val="400"/>
-              </a:spcAft>
-              <a:buClr>
-                <a:schemeClr val="accent1"/>
-              </a:buClr>
-              <a:buFont typeface="Calibri" pitchFamily="34" charset="0"/>
-              <a:buNone/>
-              <a:defRPr sz="2000" kern="1200">
-                <a:solidFill>
-                  <a:schemeClr val="tx1">
-                    <a:lumMod val="75000"/>
-                    <a:lumOff val="25000"/>
-                  </a:schemeClr>
-                </a:solidFill>
-                <a:latin typeface="+mn-lt"/>
-                <a:ea typeface="+mn-ea"/>
-                <a:cs typeface="+mn-cs"/>
-              </a:defRPr>
-            </a:lvl5pPr>
-            <a:lvl6pPr marL="2286000" indent="0" algn="ctr" defTabSz="914400" rtl="0" eaLnBrk="1" latinLnBrk="0" hangingPunct="1">
-              <a:lnSpc>
-                <a:spcPct val="90000"/>
-              </a:lnSpc>
-              <a:spcBef>
-                <a:spcPts val="200"/>
-              </a:spcBef>
-              <a:spcAft>
-                <a:spcPts val="400"/>
-              </a:spcAft>
-              <a:buClr>
-                <a:schemeClr val="accent1"/>
-              </a:buClr>
-              <a:buFont typeface="Calibri" pitchFamily="34" charset="0"/>
-              <a:buNone/>
-              <a:defRPr sz="2000" kern="1200">
-                <a:solidFill>
-                  <a:schemeClr val="tx1">
-                    <a:lumMod val="75000"/>
-                    <a:lumOff val="25000"/>
-                  </a:schemeClr>
-                </a:solidFill>
-                <a:latin typeface="+mn-lt"/>
-                <a:ea typeface="+mn-ea"/>
-                <a:cs typeface="+mn-cs"/>
-              </a:defRPr>
-            </a:lvl6pPr>
-            <a:lvl7pPr marL="2743200" indent="0" algn="ctr" defTabSz="914400" rtl="0" eaLnBrk="1" latinLnBrk="0" hangingPunct="1">
-              <a:lnSpc>
-                <a:spcPct val="90000"/>
-              </a:lnSpc>
-              <a:spcBef>
-                <a:spcPts val="200"/>
-              </a:spcBef>
-              <a:spcAft>
-                <a:spcPts val="400"/>
-              </a:spcAft>
-              <a:buClr>
-                <a:schemeClr val="accent1"/>
-              </a:buClr>
-              <a:buFont typeface="Calibri" pitchFamily="34" charset="0"/>
-              <a:buNone/>
-              <a:defRPr sz="2000" kern="1200">
-                <a:solidFill>
-                  <a:schemeClr val="tx1">
-                    <a:lumMod val="75000"/>
-                    <a:lumOff val="25000"/>
-                  </a:schemeClr>
-                </a:solidFill>
-                <a:latin typeface="+mn-lt"/>
-                <a:ea typeface="+mn-ea"/>
-                <a:cs typeface="+mn-cs"/>
-              </a:defRPr>
-            </a:lvl7pPr>
-            <a:lvl8pPr marL="3200400" indent="0" algn="ctr" defTabSz="914400" rtl="0" eaLnBrk="1" latinLnBrk="0" hangingPunct="1">
-              <a:lnSpc>
-                <a:spcPct val="90000"/>
-              </a:lnSpc>
-              <a:spcBef>
-                <a:spcPts val="200"/>
-              </a:spcBef>
-              <a:spcAft>
-                <a:spcPts val="400"/>
-              </a:spcAft>
-              <a:buClr>
-                <a:schemeClr val="accent1"/>
-              </a:buClr>
-              <a:buFont typeface="Calibri" pitchFamily="34" charset="0"/>
-              <a:buNone/>
-              <a:defRPr sz="2000" kern="1200">
-                <a:solidFill>
-                  <a:schemeClr val="tx1">
-                    <a:lumMod val="75000"/>
-                    <a:lumOff val="25000"/>
-                  </a:schemeClr>
-                </a:solidFill>
-                <a:latin typeface="+mn-lt"/>
-                <a:ea typeface="+mn-ea"/>
-                <a:cs typeface="+mn-cs"/>
-              </a:defRPr>
-            </a:lvl8pPr>
-            <a:lvl9pPr marL="3657600" indent="0" algn="ctr" defTabSz="914400" rtl="0" eaLnBrk="1" latinLnBrk="0" hangingPunct="1">
-              <a:lnSpc>
-                <a:spcPct val="90000"/>
-              </a:lnSpc>
-              <a:spcBef>
-                <a:spcPts val="200"/>
-              </a:spcBef>
-              <a:spcAft>
-                <a:spcPts val="400"/>
-              </a:spcAft>
-              <a:buClr>
-                <a:schemeClr val="accent1"/>
-              </a:buClr>
-              <a:buFont typeface="Calibri" pitchFamily="34" charset="0"/>
-              <a:buNone/>
-              <a:defRPr sz="2000" kern="1200">
-                <a:solidFill>
-                  <a:schemeClr val="tx1">
-                    <a:lumMod val="75000"/>
-                    <a:lumOff val="25000"/>
-                  </a:schemeClr>
-                </a:solidFill>
-                <a:latin typeface="+mn-lt"/>
-                <a:ea typeface="+mn-ea"/>
-                <a:cs typeface="+mn-cs"/>
-              </a:defRPr>
-            </a:lvl9pPr>
-          </a:lstStyle>
-          <a:p>
-            <a:pPr>
-              <a:lnSpc>
-                <a:spcPct val="100000"/>
-              </a:lnSpc>
-            </a:pPr>
-            <a:r>
-              <a:rPr lang="hu-HU" sz="1800" cap="none" spc="0" dirty="0">
-                <a:latin typeface="Bahnschrift Light" panose="020B0502040204020203" pitchFamily="34" charset="0"/>
-              </a:rPr>
-              <a:t>2026. 03. 03</a:t>
-            </a:r>
+            <a:endParaRPr lang="hu-HU" dirty="0"/>
           </a:p>
         </p:txBody>
       </p:sp>
     </p:spTree>
     <p:extLst>
       <p:ext uri="{BB962C8B-B14F-4D97-AF65-F5344CB8AC3E}">
-        <p14:creationId xmlns:p14="http://schemas.microsoft.com/office/powerpoint/2010/main" val="3133121184"/>
+        <p14:creationId xmlns:p14="http://schemas.microsoft.com/office/powerpoint/2010/main" val="1380079028"/>
       </p:ext>
     </p:extLst>
   </p:cSld>
@@ -8977,7 +8776,7 @@
 </p:sld>
 </file>
 
-<file path=ppt/slides/slide20.xml><?xml version="1.0" encoding="utf-8"?>
+<file path=ppt/slides/slide21.xml><?xml version="1.0" encoding="utf-8"?>
 <p:sld xmlns:a="http://schemas.openxmlformats.org/drawingml/2006/main" xmlns:r="http://schemas.openxmlformats.org/officeDocument/2006/relationships" xmlns:p="http://schemas.openxmlformats.org/presentationml/2006/main">
   <p:cSld>
     <p:bg>
@@ -9170,6 +8969,426 @@
           <a:p>
             <a:pPr algn="ctr"/>
             <a:r>
+              <a:rPr lang="hu-HU" sz="6000" b="1" dirty="0" err="1">
+                <a:latin typeface="Bahnschrift SemiBold" panose="020B0502040204020203" pitchFamily="34" charset="0"/>
+              </a:rPr>
+              <a:t>Demo</a:t>
+            </a:r>
+            <a:endParaRPr lang="hu-HU" sz="6000" b="1" dirty="0">
+              <a:latin typeface="Bahnschrift SemiBold" panose="020B0502040204020203" pitchFamily="34" charset="0"/>
+            </a:endParaRPr>
+          </a:p>
+        </p:txBody>
+      </p:sp>
+      <p:pic>
+        <p:nvPicPr>
+          <p:cNvPr id="12" name="Kép 11">
+            <a:extLst>
+              <a:ext uri="{FF2B5EF4-FFF2-40B4-BE49-F238E27FC236}">
+                <a16:creationId xmlns:a16="http://schemas.microsoft.com/office/drawing/2014/main" id="{0D5DF80E-C3F6-4A3A-98C9-825EEE99BBF4}"/>
+              </a:ext>
+            </a:extLst>
+          </p:cNvPr>
+          <p:cNvPicPr>
+            <a:picLocks noChangeAspect="1"/>
+          </p:cNvPicPr>
+          <p:nvPr/>
+        </p:nvPicPr>
+        <p:blipFill rotWithShape="1">
+          <a:blip r:embed="rId3">
+            <a:extLst>
+              <a:ext uri="{28A0092B-C50C-407E-A947-70E740481C1C}">
+                <a14:useLocalDpi xmlns:a14="http://schemas.microsoft.com/office/drawing/2010/main" val="0"/>
+              </a:ext>
+            </a:extLst>
+          </a:blip>
+          <a:srcRect l="16625" r="14640"/>
+          <a:stretch/>
+        </p:blipFill>
+        <p:spPr>
+          <a:xfrm rot="6074309">
+            <a:off x="253294" y="393819"/>
+            <a:ext cx="1804052" cy="1476375"/>
+          </a:xfrm>
+          <a:prstGeom prst="rect">
+            <a:avLst/>
+          </a:prstGeom>
+        </p:spPr>
+      </p:pic>
+      <p:pic>
+        <p:nvPicPr>
+          <p:cNvPr id="13" name="Kép 12">
+            <a:extLst>
+              <a:ext uri="{FF2B5EF4-FFF2-40B4-BE49-F238E27FC236}">
+                <a16:creationId xmlns:a16="http://schemas.microsoft.com/office/drawing/2014/main" id="{7AF0C74E-3043-40A3-8603-B30A83BB9DDF}"/>
+              </a:ext>
+            </a:extLst>
+          </p:cNvPr>
+          <p:cNvPicPr>
+            <a:picLocks noChangeAspect="1"/>
+          </p:cNvPicPr>
+          <p:nvPr/>
+        </p:nvPicPr>
+        <p:blipFill rotWithShape="1">
+          <a:blip r:embed="rId4">
+            <a:extLst>
+              <a:ext uri="{28A0092B-C50C-407E-A947-70E740481C1C}">
+                <a14:useLocalDpi xmlns:a14="http://schemas.microsoft.com/office/drawing/2010/main" val="0"/>
+              </a:ext>
+            </a:extLst>
+          </a:blip>
+          <a:srcRect l="31214" t="-711" r="26907" b="711"/>
+          <a:stretch/>
+        </p:blipFill>
+        <p:spPr>
+          <a:xfrm rot="4156304" flipH="1">
+            <a:off x="10842996" y="4624346"/>
+            <a:ext cx="1208569" cy="1623298"/>
+          </a:xfrm>
+          <a:prstGeom prst="rect">
+            <a:avLst/>
+          </a:prstGeom>
+        </p:spPr>
+      </p:pic>
+    </p:spTree>
+    <p:extLst>
+      <p:ext uri="{BB962C8B-B14F-4D97-AF65-F5344CB8AC3E}">
+        <p14:creationId xmlns:p14="http://schemas.microsoft.com/office/powerpoint/2010/main" val="1876273255"/>
+      </p:ext>
+    </p:extLst>
+  </p:cSld>
+  <p:clrMapOvr>
+    <a:masterClrMapping/>
+  </p:clrMapOvr>
+  <mc:AlternateContent xmlns:mc="http://schemas.openxmlformats.org/markup-compatibility/2006" xmlns:p159="http://schemas.microsoft.com/office/powerpoint/2015/09/main">
+    <mc:Choice Requires="p159">
+      <p:transition xmlns:p14="http://schemas.microsoft.com/office/powerpoint/2010/main" spd="slow" p14:dur="2000">
+        <p159:morph option="byObject"/>
+      </p:transition>
+    </mc:Choice>
+    <mc:Fallback xmlns="">
+      <p:transition spd="slow">
+        <p:fade/>
+      </p:transition>
+    </mc:Fallback>
+  </mc:AlternateContent>
+  <p:timing>
+    <p:tnLst>
+      <p:par>
+        <p:cTn id="1" dur="indefinite" restart="never" nodeType="tmRoot">
+          <p:childTnLst>
+            <p:seq concurrent="1" nextAc="seek">
+              <p:cTn id="2" dur="indefinite" nodeType="mainSeq">
+                <p:childTnLst>
+                  <p:par>
+                    <p:cTn id="3" fill="hold">
+                      <p:stCondLst>
+                        <p:cond delay="indefinite"/>
+                        <p:cond evt="onBegin" delay="0">
+                          <p:tn val="2"/>
+                        </p:cond>
+                      </p:stCondLst>
+                      <p:childTnLst>
+                        <p:par>
+                          <p:cTn id="4" fill="hold">
+                            <p:stCondLst>
+                              <p:cond delay="0"/>
+                            </p:stCondLst>
+                            <p:childTnLst>
+                              <p:par>
+                                <p:cTn id="5" presetID="10" presetClass="entr" presetSubtype="0" fill="hold" nodeType="withEffect">
+                                  <p:stCondLst>
+                                    <p:cond delay="0"/>
+                                  </p:stCondLst>
+                                  <p:childTnLst>
+                                    <p:set>
+                                      <p:cBhvr>
+                                        <p:cTn id="6" dur="1" fill="hold">
+                                          <p:stCondLst>
+                                            <p:cond delay="0"/>
+                                          </p:stCondLst>
+                                        </p:cTn>
+                                        <p:tgtEl>
+                                          <p:spTgt spid="12"/>
+                                        </p:tgtEl>
+                                        <p:attrNameLst>
+                                          <p:attrName>style.visibility</p:attrName>
+                                        </p:attrNameLst>
+                                      </p:cBhvr>
+                                      <p:to>
+                                        <p:strVal val="visible"/>
+                                      </p:to>
+                                    </p:set>
+                                    <p:animEffect transition="in" filter="fade">
+                                      <p:cBhvr>
+                                        <p:cTn id="7" dur="500"/>
+                                        <p:tgtEl>
+                                          <p:spTgt spid="12"/>
+                                        </p:tgtEl>
+                                      </p:cBhvr>
+                                    </p:animEffect>
+                                  </p:childTnLst>
+                                </p:cTn>
+                              </p:par>
+                              <p:par>
+                                <p:cTn id="8" presetID="10" presetClass="entr" presetSubtype="0" fill="hold" nodeType="withEffect">
+                                  <p:stCondLst>
+                                    <p:cond delay="0"/>
+                                  </p:stCondLst>
+                                  <p:childTnLst>
+                                    <p:set>
+                                      <p:cBhvr>
+                                        <p:cTn id="9" dur="1" fill="hold">
+                                          <p:stCondLst>
+                                            <p:cond delay="0"/>
+                                          </p:stCondLst>
+                                        </p:cTn>
+                                        <p:tgtEl>
+                                          <p:spTgt spid="13"/>
+                                        </p:tgtEl>
+                                        <p:attrNameLst>
+                                          <p:attrName>style.visibility</p:attrName>
+                                        </p:attrNameLst>
+                                      </p:cBhvr>
+                                      <p:to>
+                                        <p:strVal val="visible"/>
+                                      </p:to>
+                                    </p:set>
+                                    <p:animEffect transition="in" filter="fade">
+                                      <p:cBhvr>
+                                        <p:cTn id="10" dur="500"/>
+                                        <p:tgtEl>
+                                          <p:spTgt spid="13"/>
+                                        </p:tgtEl>
+                                      </p:cBhvr>
+                                    </p:animEffect>
+                                  </p:childTnLst>
+                                </p:cTn>
+                              </p:par>
+                            </p:childTnLst>
+                          </p:cTn>
+                        </p:par>
+                      </p:childTnLst>
+                    </p:cTn>
+                  </p:par>
+                </p:childTnLst>
+              </p:cTn>
+              <p:prevCondLst>
+                <p:cond evt="onPrev" delay="0">
+                  <p:tgtEl>
+                    <p:sldTgt/>
+                  </p:tgtEl>
+                </p:cond>
+              </p:prevCondLst>
+              <p:nextCondLst>
+                <p:cond evt="onNext" delay="0">
+                  <p:tgtEl>
+                    <p:sldTgt/>
+                  </p:tgtEl>
+                </p:cond>
+              </p:nextCondLst>
+            </p:seq>
+          </p:childTnLst>
+        </p:cTn>
+      </p:par>
+    </p:tnLst>
+  </p:timing>
+</p:sld>
+</file>
+
+<file path=ppt/slides/slide22.xml><?xml version="1.0" encoding="utf-8"?>
+<p:sld xmlns:a="http://schemas.openxmlformats.org/drawingml/2006/main" xmlns:r="http://schemas.openxmlformats.org/officeDocument/2006/relationships" xmlns:p="http://schemas.openxmlformats.org/presentationml/2006/main">
+  <p:cSld>
+    <p:bg>
+      <p:bgPr>
+        <a:solidFill>
+          <a:srgbClr val="FDF7E9"/>
+        </a:solidFill>
+        <a:effectLst/>
+      </p:bgPr>
+    </p:bg>
+    <p:spTree>
+      <p:nvGrpSpPr>
+        <p:cNvPr id="1" name=""/>
+        <p:cNvGrpSpPr/>
+        <p:nvPr/>
+      </p:nvGrpSpPr>
+      <p:grpSpPr>
+        <a:xfrm>
+          <a:off x="0" y="0"/>
+          <a:ext cx="0" cy="0"/>
+          <a:chOff x="0" y="0"/>
+          <a:chExt cx="0" cy="0"/>
+        </a:xfrm>
+      </p:grpSpPr>
+      <p:cxnSp>
+        <p:nvCxnSpPr>
+          <p:cNvPr id="2" name="Egyenes összekötő 1">
+            <a:extLst>
+              <a:ext uri="{FF2B5EF4-FFF2-40B4-BE49-F238E27FC236}">
+                <a16:creationId xmlns:a16="http://schemas.microsoft.com/office/drawing/2014/main" id="{20EF3F3C-374B-461F-BAF4-6C213DE7C8BB}"/>
+              </a:ext>
+            </a:extLst>
+          </p:cNvPr>
+          <p:cNvCxnSpPr>
+            <a:cxnSpLocks/>
+          </p:cNvCxnSpPr>
+          <p:nvPr/>
+        </p:nvCxnSpPr>
+        <p:spPr>
+          <a:xfrm>
+            <a:off x="3205163" y="2154342"/>
+            <a:ext cx="5781675" cy="0"/>
+          </a:xfrm>
+          <a:prstGeom prst="line">
+            <a:avLst/>
+          </a:prstGeom>
+          <a:ln>
+            <a:solidFill>
+              <a:schemeClr val="tx1">
+                <a:lumMod val="50000"/>
+                <a:lumOff val="50000"/>
+              </a:schemeClr>
+            </a:solidFill>
+          </a:ln>
+        </p:spPr>
+        <p:style>
+          <a:lnRef idx="1">
+            <a:schemeClr val="accent1"/>
+          </a:lnRef>
+          <a:fillRef idx="0">
+            <a:schemeClr val="accent1"/>
+          </a:fillRef>
+          <a:effectRef idx="0">
+            <a:schemeClr val="accent1"/>
+          </a:effectRef>
+          <a:fontRef idx="minor">
+            <a:schemeClr val="tx1"/>
+          </a:fontRef>
+        </p:style>
+      </p:cxnSp>
+      <p:pic>
+        <p:nvPicPr>
+          <p:cNvPr id="3" name="Kép 2">
+            <a:extLst>
+              <a:ext uri="{FF2B5EF4-FFF2-40B4-BE49-F238E27FC236}">
+                <a16:creationId xmlns:a16="http://schemas.microsoft.com/office/drawing/2014/main" id="{FE91A941-BC8A-4E2A-B780-F3F3D6A9B3E3}"/>
+              </a:ext>
+            </a:extLst>
+          </p:cNvPr>
+          <p:cNvPicPr>
+            <a:picLocks noChangeAspect="1"/>
+          </p:cNvPicPr>
+          <p:nvPr/>
+        </p:nvPicPr>
+        <p:blipFill rotWithShape="1">
+          <a:blip r:embed="rId2">
+            <a:alphaModFix/>
+            <a:extLst>
+              <a:ext uri="{28A0092B-C50C-407E-A947-70E740481C1C}">
+                <a14:useLocalDpi xmlns:a14="http://schemas.microsoft.com/office/drawing/2010/main" val="0"/>
+              </a:ext>
+            </a:extLst>
+          </a:blip>
+          <a:srcRect l="-1" t="58555" r="1153"/>
+          <a:stretch/>
+        </p:blipFill>
+        <p:spPr>
+          <a:xfrm>
+            <a:off x="3864953" y="1462194"/>
+            <a:ext cx="4462094" cy="616623"/>
+          </a:xfrm>
+          <a:prstGeom prst="rect">
+            <a:avLst/>
+          </a:prstGeom>
+        </p:spPr>
+      </p:pic>
+      <p:pic>
+        <p:nvPicPr>
+          <p:cNvPr id="4" name="Kép 3">
+            <a:extLst>
+              <a:ext uri="{FF2B5EF4-FFF2-40B4-BE49-F238E27FC236}">
+                <a16:creationId xmlns:a16="http://schemas.microsoft.com/office/drawing/2014/main" id="{78D3DB18-E771-4DF0-84FA-206E8FA41883}"/>
+              </a:ext>
+            </a:extLst>
+          </p:cNvPr>
+          <p:cNvPicPr>
+            <a:picLocks noChangeAspect="1"/>
+          </p:cNvPicPr>
+          <p:nvPr/>
+        </p:nvPicPr>
+        <p:blipFill rotWithShape="1">
+          <a:blip r:embed="rId2">
+            <a:alphaModFix/>
+            <a:extLst>
+              <a:ext uri="{28A0092B-C50C-407E-A947-70E740481C1C}">
+                <a14:useLocalDpi xmlns:a14="http://schemas.microsoft.com/office/drawing/2010/main" val="0"/>
+              </a:ext>
+            </a:extLst>
+          </a:blip>
+          <a:srcRect l="-1" r="-295" b="38896"/>
+          <a:stretch/>
+        </p:blipFill>
+        <p:spPr>
+          <a:xfrm>
+            <a:off x="3817995" y="581028"/>
+            <a:ext cx="4556011" cy="914838"/>
+          </a:xfrm>
+          <a:prstGeom prst="rect">
+            <a:avLst/>
+          </a:prstGeom>
+        </p:spPr>
+      </p:pic>
+      <p:sp>
+        <p:nvSpPr>
+          <p:cNvPr id="5" name="Cím 1">
+            <a:extLst>
+              <a:ext uri="{FF2B5EF4-FFF2-40B4-BE49-F238E27FC236}">
+                <a16:creationId xmlns:a16="http://schemas.microsoft.com/office/drawing/2014/main" id="{175A5A3F-6F8F-4002-ADBD-CD8C93ECEEE1}"/>
+              </a:ext>
+            </a:extLst>
+          </p:cNvPr>
+          <p:cNvSpPr txBox="1">
+            <a:spLocks/>
+          </p:cNvSpPr>
+          <p:nvPr/>
+        </p:nvSpPr>
+        <p:spPr>
+          <a:xfrm>
+            <a:off x="1066800" y="2703622"/>
+            <a:ext cx="10058400" cy="1450757"/>
+          </a:xfrm>
+          <a:prstGeom prst="rect">
+            <a:avLst/>
+          </a:prstGeom>
+        </p:spPr>
+        <p:txBody>
+          <a:bodyPr anchor="ctr"/>
+          <a:lstStyle>
+            <a:lvl1pPr algn="l" defTabSz="914400" rtl="0" eaLnBrk="1" latinLnBrk="0" hangingPunct="1">
+              <a:lnSpc>
+                <a:spcPct val="85000"/>
+              </a:lnSpc>
+              <a:spcBef>
+                <a:spcPct val="0"/>
+              </a:spcBef>
+              <a:buNone/>
+              <a:defRPr sz="4800" kern="1200" spc="-50" baseline="0">
+                <a:solidFill>
+                  <a:schemeClr val="tx1">
+                    <a:lumMod val="75000"/>
+                    <a:lumOff val="25000"/>
+                  </a:schemeClr>
+                </a:solidFill>
+                <a:latin typeface="+mj-lt"/>
+                <a:ea typeface="+mj-ea"/>
+                <a:cs typeface="+mj-cs"/>
+              </a:defRPr>
+            </a:lvl1pPr>
+          </a:lstStyle>
+          <a:p>
+            <a:pPr algn="ctr"/>
+            <a:r>
               <a:rPr lang="hu-HU" sz="6000" b="1" dirty="0">
                 <a:latin typeface="Bahnschrift SemiBold" panose="020B0502040204020203" pitchFamily="34" charset="0"/>
               </a:rPr>
@@ -9258,13 +9477,13 @@
   <p:clrMapOvr>
     <a:masterClrMapping/>
   </p:clrMapOvr>
-  <mc:AlternateContent xmlns:mc="http://schemas.openxmlformats.org/markup-compatibility/2006">
-    <mc:Choice xmlns:p159="http://schemas.microsoft.com/office/powerpoint/2015/09/main" Requires="p159">
+  <mc:AlternateContent xmlns:mc="http://schemas.openxmlformats.org/markup-compatibility/2006" xmlns:p159="http://schemas.microsoft.com/office/powerpoint/2015/09/main">
+    <mc:Choice Requires="p159">
       <p:transition xmlns:p14="http://schemas.microsoft.com/office/powerpoint/2010/main" spd="slow" p14:dur="2000">
         <p159:morph option="byObject"/>
       </p:transition>
     </mc:Choice>
-    <mc:Fallback>
+    <mc:Fallback xmlns="">
       <p:transition spd="slow">
         <p:fade/>
       </p:transition>
@@ -9606,13 +9825,13 @@
   <p:clrMapOvr>
     <a:masterClrMapping/>
   </p:clrMapOvr>
-  <mc:AlternateContent xmlns:mc="http://schemas.openxmlformats.org/markup-compatibility/2006">
-    <mc:Choice xmlns:p159="http://schemas.microsoft.com/office/powerpoint/2015/09/main" Requires="p159">
+  <mc:AlternateContent xmlns:mc="http://schemas.openxmlformats.org/markup-compatibility/2006" xmlns:p159="http://schemas.microsoft.com/office/powerpoint/2015/09/main">
+    <mc:Choice Requires="p159">
       <p:transition xmlns:p14="http://schemas.microsoft.com/office/powerpoint/2010/main" spd="slow" p14:dur="2000">
         <p159:morph option="byObject"/>
       </p:transition>
     </mc:Choice>
-    <mc:Fallback>
+    <mc:Fallback xmlns="">
       <p:transition spd="slow">
         <p:fade/>
       </p:transition>
@@ -10253,13 +10472,13 @@
   <p:clrMapOvr>
     <a:masterClrMapping/>
   </p:clrMapOvr>
-  <mc:AlternateContent xmlns:mc="http://schemas.openxmlformats.org/markup-compatibility/2006">
-    <mc:Choice xmlns:p159="http://schemas.microsoft.com/office/powerpoint/2015/09/main" Requires="p159">
+  <mc:AlternateContent xmlns:mc="http://schemas.openxmlformats.org/markup-compatibility/2006" xmlns:p159="http://schemas.microsoft.com/office/powerpoint/2015/09/main">
+    <mc:Choice Requires="p159">
       <p:transition xmlns:p14="http://schemas.microsoft.com/office/powerpoint/2010/main" spd="slow" p14:dur="2000">
         <p159:morph option="byObject"/>
       </p:transition>
     </mc:Choice>
-    <mc:Fallback>
+    <mc:Fallback xmlns="">
       <p:transition spd="slow">
         <p:fade/>
       </p:transition>
@@ -10631,8 +10850,27 @@
               <a:buChar char="•"/>
             </a:pPr>
             <a:r>
+              <a:rPr lang="hu-HU" dirty="0" err="1"/>
+              <a:t>Sanctum</a:t>
+            </a:r>
+            <a:r>
               <a:rPr lang="hu-HU" dirty="0"/>
-              <a:t>a</a:t>
+              <a:t> - </a:t>
+            </a:r>
+            <a:r>
+              <a:rPr lang="hu-HU" dirty="0" err="1"/>
+              <a:t>Autentikáció</a:t>
+            </a:r>
+            <a:endParaRPr lang="hu-HU" dirty="0"/>
+          </a:p>
+          <a:p>
+            <a:pPr lvl="1">
+              <a:buFont typeface="Arial" panose="020B0604020202020204" pitchFamily="34" charset="0"/>
+              <a:buChar char="•"/>
+            </a:pPr>
+            <a:r>
+              <a:rPr lang="hu-HU" dirty="0"/>
+              <a:t>Adatbázis migrációk</a:t>
             </a:r>
           </a:p>
           <a:p>
@@ -10650,7 +10888,7 @@
                   <a:srgbClr val="BD582C"/>
                 </a:solidFill>
               </a:rPr>
-              <a:t>Frontend – Vue.js</a:t>
+              <a:t>Frontend – Vue.js </a:t>
             </a:r>
           </a:p>
           <a:p>
@@ -10659,9 +10897,17 @@
               <a:buChar char="•"/>
             </a:pPr>
             <a:r>
-              <a:rPr lang="hu-HU" dirty="0"/>
-              <a:t>a</a:t>
-            </a:r>
+              <a:rPr lang="hu-HU" dirty="0" err="1"/>
+              <a:t>Bootstrap</a:t>
+            </a:r>
+            <a:endParaRPr lang="hu-HU" dirty="0"/>
+          </a:p>
+          <a:p>
+            <a:pPr lvl="1">
+              <a:buFont typeface="Arial" panose="020B0604020202020204" pitchFamily="34" charset="0"/>
+              <a:buChar char="•"/>
+            </a:pPr>
+            <a:endParaRPr lang="hu-HU" dirty="0"/>
           </a:p>
           <a:p>
             <a:pPr>
@@ -10700,9 +10946,21 @@
               <a:buChar char="•"/>
             </a:pPr>
             <a:r>
-              <a:rPr lang="hu-HU" dirty="0"/>
-              <a:t>a</a:t>
-            </a:r>
+              <a:rPr lang="hu-HU" dirty="0" err="1"/>
+              <a:t>Ampps</a:t>
+            </a:r>
+            <a:endParaRPr lang="hu-HU" dirty="0"/>
+          </a:p>
+          <a:p>
+            <a:pPr lvl="1">
+              <a:buFont typeface="Arial" panose="020B0604020202020204" pitchFamily="34" charset="0"/>
+              <a:buChar char="•"/>
+            </a:pPr>
+            <a:r>
+              <a:rPr lang="hu-HU" dirty="0" err="1"/>
+              <a:t>phpMyAdmin</a:t>
+            </a:r>
+            <a:endParaRPr lang="hu-HU" dirty="0"/>
           </a:p>
         </p:txBody>
       </p:sp>
@@ -10893,7 +11151,32 @@
           <a:bodyPr/>
           <a:lstStyle/>
           <a:p>
+            <a:r>
+              <a:rPr lang="hu-HU" dirty="0" err="1"/>
+              <a:t>Autentikáció</a:t>
+            </a:r>
             <a:endParaRPr lang="hu-HU" dirty="0"/>
+          </a:p>
+          <a:p>
+            <a:pPr lvl="1">
+              <a:buFont typeface="Arial" panose="020B0604020202020204" pitchFamily="34" charset="0"/>
+              <a:buChar char="•"/>
+            </a:pPr>
+            <a:r>
+              <a:rPr lang="hu-HU" dirty="0" err="1"/>
+              <a:t>Token</a:t>
+            </a:r>
+            <a:endParaRPr lang="hu-HU" dirty="0"/>
+          </a:p>
+          <a:p>
+            <a:pPr lvl="1">
+              <a:buFont typeface="Arial" panose="020B0604020202020204" pitchFamily="34" charset="0"/>
+              <a:buChar char="•"/>
+            </a:pPr>
+            <a:r>
+              <a:rPr lang="hu-HU" dirty="0"/>
+              <a:t>Szerepkörök</a:t>
+            </a:r>
           </a:p>
         </p:txBody>
       </p:sp>
@@ -11260,14 +11543,6 @@
 <file path=ppt/slides/slide9.xml><?xml version="1.0" encoding="utf-8"?>
 <p:sld xmlns:a="http://schemas.openxmlformats.org/drawingml/2006/main" xmlns:r="http://schemas.openxmlformats.org/officeDocument/2006/relationships" xmlns:p="http://schemas.openxmlformats.org/presentationml/2006/main">
   <p:cSld>
-    <p:bg>
-      <p:bgPr>
-        <a:solidFill>
-          <a:srgbClr val="FDF7E9"/>
-        </a:solidFill>
-        <a:effectLst/>
-      </p:bgPr>
-    </p:bg>
     <p:spTree>
       <p:nvGrpSpPr>
         <p:cNvPr id="1" name=""/>
@@ -11298,37 +11573,25 @@
             <p:ph type="title"/>
           </p:nvPr>
         </p:nvSpPr>
-        <p:spPr/>
+        <p:spPr>
+          <a:xfrm>
+            <a:off x="457200" y="622934"/>
+            <a:ext cx="3200400" cy="2286000"/>
+          </a:xfrm>
+        </p:spPr>
         <p:txBody>
           <a:bodyPr/>
           <a:lstStyle/>
           <a:p>
-            <a:endParaRPr lang="hu-HU" dirty="0"/>
-          </a:p>
-        </p:txBody>
-      </p:sp>
-      <p:sp>
-        <p:nvSpPr>
-          <p:cNvPr id="3" name="Tartalom helye 2">
-            <a:extLst>
-              <a:ext uri="{FF2B5EF4-FFF2-40B4-BE49-F238E27FC236}">
-                <a16:creationId xmlns:a16="http://schemas.microsoft.com/office/drawing/2014/main" id="{6CF1363A-EC3E-4AAB-AB7B-2FBA7243AB40}"/>
-              </a:ext>
-            </a:extLst>
-          </p:cNvPr>
-          <p:cNvSpPr>
-            <a:spLocks noGrp="1"/>
-          </p:cNvSpPr>
-          <p:nvPr>
-            <p:ph idx="1"/>
-          </p:nvPr>
-        </p:nvSpPr>
-        <p:spPr/>
-        <p:txBody>
-          <a:bodyPr/>
-          <a:lstStyle/>
-          <a:p>
-            <a:endParaRPr lang="hu-HU" dirty="0"/>
+            <a:r>
+              <a:rPr lang="hu-HU" dirty="0" err="1">
+                <a:latin typeface="Bahnschrift SemiBold" panose="020B0502040204020203" pitchFamily="34" charset="0"/>
+              </a:rPr>
+              <a:t>Controllerek</a:t>
+            </a:r>
+            <a:endParaRPr lang="hu-HU" dirty="0">
+              <a:latin typeface="Bahnschrift SemiBold" panose="020B0502040204020203" pitchFamily="34" charset="0"/>
+            </a:endParaRPr>
           </a:p>
         </p:txBody>
       </p:sp>
@@ -11348,19 +11611,140 @@
             <p:ph type="body" sz="half" idx="2"/>
           </p:nvPr>
         </p:nvSpPr>
-        <p:spPr/>
-        <p:txBody>
-          <a:bodyPr/>
+        <p:spPr>
+          <a:xfrm>
+            <a:off x="457200" y="3259455"/>
+            <a:ext cx="3562350" cy="3684270"/>
+          </a:xfrm>
+        </p:spPr>
+        <p:txBody>
+          <a:bodyPr>
+            <a:normAutofit/>
+          </a:bodyPr>
           <a:lstStyle/>
           <a:p>
-            <a:endParaRPr lang="hu-HU"/>
-          </a:p>
-        </p:txBody>
-      </p:sp>
+            <a:pPr marL="285750" indent="-285750">
+              <a:buClr>
+                <a:schemeClr val="bg1"/>
+              </a:buClr>
+              <a:buFont typeface="Arial" panose="020B0604020202020204" pitchFamily="34" charset="0"/>
+              <a:buChar char="•"/>
+            </a:pPr>
+            <a:r>
+              <a:rPr lang="hu-HU" sz="1800" dirty="0" err="1"/>
+              <a:t>User</a:t>
+            </a:r>
+            <a:endParaRPr lang="hu-HU" sz="1800" dirty="0"/>
+          </a:p>
+          <a:p>
+            <a:pPr marL="285750" indent="-285750">
+              <a:buClr>
+                <a:schemeClr val="bg1"/>
+              </a:buClr>
+              <a:buFont typeface="Arial" panose="020B0604020202020204" pitchFamily="34" charset="0"/>
+              <a:buChar char="•"/>
+            </a:pPr>
+            <a:endParaRPr lang="hu-HU" sz="1800" dirty="0"/>
+          </a:p>
+        </p:txBody>
+      </p:sp>
+      <p:grpSp>
+        <p:nvGrpSpPr>
+          <p:cNvPr id="9" name="Csoportba foglalás 8">
+            <a:extLst>
+              <a:ext uri="{FF2B5EF4-FFF2-40B4-BE49-F238E27FC236}">
+                <a16:creationId xmlns:a16="http://schemas.microsoft.com/office/drawing/2014/main" id="{9D1513B7-E14B-483F-9E1D-2F9ED7A62155}"/>
+              </a:ext>
+            </a:extLst>
+          </p:cNvPr>
+          <p:cNvGrpSpPr/>
+          <p:nvPr/>
+        </p:nvGrpSpPr>
+        <p:grpSpPr>
+          <a:xfrm>
+            <a:off x="10565538" y="349786"/>
+            <a:ext cx="1418895" cy="1258023"/>
+            <a:chOff x="10565538" y="349786"/>
+            <a:chExt cx="1418895" cy="1258023"/>
+          </a:xfrm>
+        </p:grpSpPr>
+        <p:pic>
+          <p:nvPicPr>
+            <p:cNvPr id="10" name="Kép 9">
+              <a:extLst>
+                <a:ext uri="{FF2B5EF4-FFF2-40B4-BE49-F238E27FC236}">
+                  <a16:creationId xmlns:a16="http://schemas.microsoft.com/office/drawing/2014/main" id="{AF68DAD7-58FF-4254-A264-3393E8FB079A}"/>
+                </a:ext>
+              </a:extLst>
+            </p:cNvPr>
+            <p:cNvPicPr>
+              <a:picLocks noChangeAspect="1"/>
+            </p:cNvPicPr>
+            <p:nvPr/>
+          </p:nvPicPr>
+          <p:blipFill rotWithShape="1">
+            <a:blip r:embed="rId2">
+              <a:alphaModFix amt="50000"/>
+              <a:extLst>
+                <a:ext uri="{28A0092B-C50C-407E-A947-70E740481C1C}">
+                  <a14:useLocalDpi xmlns:a14="http://schemas.microsoft.com/office/drawing/2010/main" val="0"/>
+                </a:ext>
+              </a:extLst>
+            </a:blip>
+            <a:srcRect t="58555" r="67375"/>
+            <a:stretch/>
+          </p:blipFill>
+          <p:spPr>
+            <a:xfrm>
+              <a:off x="10619475" y="1036308"/>
+              <a:ext cx="1364958" cy="571501"/>
+            </a:xfrm>
+            <a:prstGeom prst="rect">
+              <a:avLst/>
+            </a:prstGeom>
+          </p:spPr>
+        </p:pic>
+        <p:pic>
+          <p:nvPicPr>
+            <p:cNvPr id="11" name="Kép 10">
+              <a:extLst>
+                <a:ext uri="{FF2B5EF4-FFF2-40B4-BE49-F238E27FC236}">
+                  <a16:creationId xmlns:a16="http://schemas.microsoft.com/office/drawing/2014/main" id="{8F9A0D26-C9F9-4EBD-9287-1F6D4C562B73}"/>
+                </a:ext>
+              </a:extLst>
+            </p:cNvPr>
+            <p:cNvPicPr>
+              <a:picLocks noChangeAspect="1"/>
+            </p:cNvPicPr>
+            <p:nvPr/>
+          </p:nvPicPr>
+          <p:blipFill rotWithShape="1">
+            <a:blip r:embed="rId2">
+              <a:alphaModFix amt="50000"/>
+              <a:extLst>
+                <a:ext uri="{28A0092B-C50C-407E-A947-70E740481C1C}">
+                  <a14:useLocalDpi xmlns:a14="http://schemas.microsoft.com/office/drawing/2010/main" val="0"/>
+                </a:ext>
+              </a:extLst>
+            </a:blip>
+            <a:srcRect l="1" r="61666" b="38896"/>
+            <a:stretch/>
+          </p:blipFill>
+          <p:spPr>
+            <a:xfrm>
+              <a:off x="10565538" y="349786"/>
+              <a:ext cx="1418895" cy="745451"/>
+            </a:xfrm>
+            <a:prstGeom prst="rect">
+              <a:avLst/>
+            </a:prstGeom>
+          </p:spPr>
+        </p:pic>
+      </p:grpSp>
     </p:spTree>
     <p:extLst>
       <p:ext uri="{BB962C8B-B14F-4D97-AF65-F5344CB8AC3E}">
-        <p14:creationId xmlns:p14="http://schemas.microsoft.com/office/powerpoint/2010/main" val="2480736290"/>
+        <p14:creationId xmlns:p14="http://schemas.microsoft.com/office/powerpoint/2010/main" val="1709693890"/>
       </p:ext>
     </p:extLst>
   </p:cSld>

--- a/Dokumentációhoz/Prezentáció/eMenza_AtkariAriella_FarkasDominik.pptx
+++ b/Dokumentációhoz/Prezentáció/eMenza_AtkariAriella_FarkasDominik.pptx
@@ -218,7 +218,7 @@
           <a:p>
             <a:fld id="{CBDB98DA-128E-4364-BF98-E5A8E296E4F2}" type="datetimeFigureOut">
               <a:rPr lang="hu-HU" smtClean="0"/>
-              <a:t>2026. 03. 03.</a:t>
+              <a:t>2026. 03. 04.</a:t>
             </a:fld>
             <a:endParaRPr lang="hu-HU"/>
           </a:p>
@@ -530,18 +530,13 @@
           <a:lstStyle/>
           <a:p>
             <a:r>
-              <a:rPr lang="hu-HU" dirty="0" err="1"/>
-              <a:t>Githubon</a:t>
-            </a:r>
-            <a:endParaRPr lang="hu-HU" dirty="0"/>
-          </a:p>
-          <a:p>
-            <a:r>
               <a:rPr lang="hu-HU" dirty="0"/>
-              <a:t>Feladatok megosztása – vegyesen frontend, backend. Közös adatbázis tervezés</a:t>
-            </a:r>
-          </a:p>
-          <a:p>
+              <a:t>Vannak relációk, elsődleges kulcsok, </a:t>
+            </a:r>
+            <a:r>
+              <a:rPr lang="hu-HU"/>
+              <a:t>idegen kulcsok</a:t>
+            </a:r>
             <a:endParaRPr lang="hu-HU" dirty="0"/>
           </a:p>
         </p:txBody>
@@ -563,7 +558,7 @@
           <a:p>
             <a:fld id="{5B73375F-E6FE-4F6E-96C6-6B6BE7EEDE08}" type="slidenum">
               <a:rPr lang="hu-HU" smtClean="0"/>
-              <a:t>17</a:t>
+              <a:t>14</a:t>
             </a:fld>
             <a:endParaRPr lang="hu-HU"/>
           </a:p>
@@ -572,7 +567,7 @@
     </p:spTree>
     <p:extLst>
       <p:ext uri="{BB962C8B-B14F-4D97-AF65-F5344CB8AC3E}">
-        <p14:creationId xmlns:p14="http://schemas.microsoft.com/office/powerpoint/2010/main" val="2397787546"/>
+        <p14:creationId xmlns:p14="http://schemas.microsoft.com/office/powerpoint/2010/main" val="2066711938"/>
       </p:ext>
     </p:extLst>
   </p:cSld>
@@ -638,6 +633,103 @@
               <a:t>Feladatok megosztása – vegyesen frontend, backend. Közös adatbázis tervezés</a:t>
             </a:r>
           </a:p>
+          <a:p>
+            <a:endParaRPr lang="hu-HU" dirty="0"/>
+          </a:p>
+        </p:txBody>
+      </p:sp>
+      <p:sp>
+        <p:nvSpPr>
+          <p:cNvPr id="4" name="Dia számának helye 3"/>
+          <p:cNvSpPr>
+            <a:spLocks noGrp="1"/>
+          </p:cNvSpPr>
+          <p:nvPr>
+            <p:ph type="sldNum" sz="quarter" idx="5"/>
+          </p:nvPr>
+        </p:nvSpPr>
+        <p:spPr/>
+        <p:txBody>
+          <a:bodyPr/>
+          <a:lstStyle/>
+          <a:p>
+            <a:fld id="{5B73375F-E6FE-4F6E-96C6-6B6BE7EEDE08}" type="slidenum">
+              <a:rPr lang="hu-HU" smtClean="0"/>
+              <a:t>17</a:t>
+            </a:fld>
+            <a:endParaRPr lang="hu-HU"/>
+          </a:p>
+        </p:txBody>
+      </p:sp>
+    </p:spTree>
+    <p:extLst>
+      <p:ext uri="{BB962C8B-B14F-4D97-AF65-F5344CB8AC3E}">
+        <p14:creationId xmlns:p14="http://schemas.microsoft.com/office/powerpoint/2010/main" val="2397787546"/>
+      </p:ext>
+    </p:extLst>
+  </p:cSld>
+  <p:clrMapOvr>
+    <a:masterClrMapping/>
+  </p:clrMapOvr>
+</p:notes>
+</file>
+
+<file path=ppt/notesSlides/notesSlide3.xml><?xml version="1.0" encoding="utf-8"?>
+<p:notes xmlns:a="http://schemas.openxmlformats.org/drawingml/2006/main" xmlns:r="http://schemas.openxmlformats.org/officeDocument/2006/relationships" xmlns:p="http://schemas.openxmlformats.org/presentationml/2006/main">
+  <p:cSld>
+    <p:spTree>
+      <p:nvGrpSpPr>
+        <p:cNvPr id="1" name=""/>
+        <p:cNvGrpSpPr/>
+        <p:nvPr/>
+      </p:nvGrpSpPr>
+      <p:grpSpPr>
+        <a:xfrm>
+          <a:off x="0" y="0"/>
+          <a:ext cx="0" cy="0"/>
+          <a:chOff x="0" y="0"/>
+          <a:chExt cx="0" cy="0"/>
+        </a:xfrm>
+      </p:grpSpPr>
+      <p:sp>
+        <p:nvSpPr>
+          <p:cNvPr id="2" name="Diakép helye 1"/>
+          <p:cNvSpPr>
+            <a:spLocks noGrp="1" noRot="1" noChangeAspect="1"/>
+          </p:cNvSpPr>
+          <p:nvPr>
+            <p:ph type="sldImg"/>
+          </p:nvPr>
+        </p:nvSpPr>
+        <p:spPr/>
+      </p:sp>
+      <p:sp>
+        <p:nvSpPr>
+          <p:cNvPr id="3" name="Jegyzetek helye 2"/>
+          <p:cNvSpPr>
+            <a:spLocks noGrp="1"/>
+          </p:cNvSpPr>
+          <p:nvPr>
+            <p:ph type="body" idx="1"/>
+          </p:nvPr>
+        </p:nvSpPr>
+        <p:spPr/>
+        <p:txBody>
+          <a:bodyPr/>
+          <a:lstStyle/>
+          <a:p>
+            <a:r>
+              <a:rPr lang="hu-HU" dirty="0" err="1"/>
+              <a:t>Githubon</a:t>
+            </a:r>
+            <a:endParaRPr lang="hu-HU" dirty="0"/>
+          </a:p>
+          <a:p>
+            <a:r>
+              <a:rPr lang="hu-HU" dirty="0"/>
+              <a:t>Feladatok megosztása – vegyesen frontend, backend. Közös adatbázis tervezés</a:t>
+            </a:r>
+          </a:p>
         </p:txBody>
       </p:sp>
       <p:sp>
@@ -676,7 +768,7 @@
 </p:notes>
 </file>
 
-<file path=ppt/notesSlides/notesSlide3.xml><?xml version="1.0" encoding="utf-8"?>
+<file path=ppt/notesSlides/notesSlide4.xml><?xml version="1.0" encoding="utf-8"?>
 <p:notes xmlns:a="http://schemas.openxmlformats.org/drawingml/2006/main" xmlns:r="http://schemas.openxmlformats.org/officeDocument/2006/relationships" xmlns:p="http://schemas.openxmlformats.org/presentationml/2006/main">
   <p:cSld>
     <p:spTree>
@@ -986,7 +1078,7 @@
           <a:p>
             <a:fld id="{B9C1AE7B-DA1F-453C-8148-553EEBF678EC}" type="datetimeFigureOut">
               <a:rPr lang="hu-HU" smtClean="0"/>
-              <a:t>2026. 03. 03.</a:t>
+              <a:t>2026. 03. 04.</a:t>
             </a:fld>
             <a:endParaRPr lang="hu-HU"/>
           </a:p>
@@ -1194,7 +1286,7 @@
           <a:p>
             <a:fld id="{B9C1AE7B-DA1F-453C-8148-553EEBF678EC}" type="datetimeFigureOut">
               <a:rPr lang="hu-HU" smtClean="0"/>
-              <a:t>2026. 03. 03.</a:t>
+              <a:t>2026. 03. 04.</a:t>
             </a:fld>
             <a:endParaRPr lang="hu-HU"/>
           </a:p>
@@ -1450,7 +1542,7 @@
           <a:p>
             <a:fld id="{B9C1AE7B-DA1F-453C-8148-553EEBF678EC}" type="datetimeFigureOut">
               <a:rPr lang="hu-HU" smtClean="0"/>
-              <a:t>2026. 03. 03.</a:t>
+              <a:t>2026. 03. 04.</a:t>
             </a:fld>
             <a:endParaRPr lang="hu-HU"/>
           </a:p>
@@ -1624,7 +1716,7 @@
           <a:p>
             <a:fld id="{B9C1AE7B-DA1F-453C-8148-553EEBF678EC}" type="datetimeFigureOut">
               <a:rPr lang="hu-HU" smtClean="0"/>
-              <a:t>2026. 03. 03.</a:t>
+              <a:t>2026. 03. 04.</a:t>
             </a:fld>
             <a:endParaRPr lang="hu-HU"/>
           </a:p>
@@ -1967,7 +2059,7 @@
           <a:p>
             <a:fld id="{B9C1AE7B-DA1F-453C-8148-553EEBF678EC}" type="datetimeFigureOut">
               <a:rPr lang="hu-HU" smtClean="0"/>
-              <a:t>2026. 03. 03.</a:t>
+              <a:t>2026. 03. 04.</a:t>
             </a:fld>
             <a:endParaRPr lang="hu-HU"/>
           </a:p>
@@ -2242,7 +2334,7 @@
           <a:p>
             <a:fld id="{B9C1AE7B-DA1F-453C-8148-553EEBF678EC}" type="datetimeFigureOut">
               <a:rPr lang="hu-HU" smtClean="0"/>
-              <a:t>2026. 03. 03.</a:t>
+              <a:t>2026. 03. 04.</a:t>
             </a:fld>
             <a:endParaRPr lang="hu-HU"/>
           </a:p>
@@ -2621,7 +2713,7 @@
           <a:p>
             <a:fld id="{B9C1AE7B-DA1F-453C-8148-553EEBF678EC}" type="datetimeFigureOut">
               <a:rPr lang="hu-HU" smtClean="0"/>
-              <a:t>2026. 03. 03.</a:t>
+              <a:t>2026. 03. 04.</a:t>
             </a:fld>
             <a:endParaRPr lang="hu-HU"/>
           </a:p>
@@ -2739,7 +2831,7 @@
           <a:p>
             <a:fld id="{B9C1AE7B-DA1F-453C-8148-553EEBF678EC}" type="datetimeFigureOut">
               <a:rPr lang="hu-HU" smtClean="0"/>
-              <a:t>2026. 03. 03.</a:t>
+              <a:t>2026. 03. 04.</a:t>
             </a:fld>
             <a:endParaRPr lang="hu-HU"/>
           </a:p>
@@ -2910,7 +3002,7 @@
           <a:p>
             <a:fld id="{B9C1AE7B-DA1F-453C-8148-553EEBF678EC}" type="datetimeFigureOut">
               <a:rPr lang="hu-HU" smtClean="0"/>
-              <a:t>2026. 03. 03.</a:t>
+              <a:t>2026. 03. 04.</a:t>
             </a:fld>
             <a:endParaRPr lang="hu-HU"/>
           </a:p>
@@ -3264,7 +3356,7 @@
           <a:p>
             <a:fld id="{B9C1AE7B-DA1F-453C-8148-553EEBF678EC}" type="datetimeFigureOut">
               <a:rPr lang="hu-HU" smtClean="0"/>
-              <a:t>2026. 03. 03.</a:t>
+              <a:t>2026. 03. 04.</a:t>
             </a:fld>
             <a:endParaRPr lang="hu-HU"/>
           </a:p>
@@ -3646,7 +3738,7 @@
           <a:p>
             <a:fld id="{B9C1AE7B-DA1F-453C-8148-553EEBF678EC}" type="datetimeFigureOut">
               <a:rPr lang="hu-HU" smtClean="0"/>
-              <a:t>2026. 03. 03.</a:t>
+              <a:t>2026. 03. 04.</a:t>
             </a:fld>
             <a:endParaRPr lang="hu-HU"/>
           </a:p>
@@ -3933,7 +4025,7 @@
           <a:p>
             <a:fld id="{B9C1AE7B-DA1F-453C-8148-553EEBF678EC}" type="datetimeFigureOut">
               <a:rPr lang="hu-HU" smtClean="0"/>
-              <a:t>2026. 03. 03.</a:t>
+              <a:t>2026. 03. 04.</a:t>
             </a:fld>
             <a:endParaRPr lang="hu-HU"/>
           </a:p>
@@ -5822,14 +5914,11 @@
           </a:lstStyle>
           <a:p>
             <a:r>
-              <a:rPr lang="hu-HU" b="1">
+              <a:rPr lang="hu-HU" b="1" dirty="0">
                 <a:latin typeface="Bahnschrift SemiBold" panose="020B0502040204020203" pitchFamily="34" charset="0"/>
               </a:rPr>
-              <a:t>Adatbázis kép</a:t>
-            </a:r>
-            <a:endParaRPr lang="hu-HU" b="1" dirty="0">
-              <a:latin typeface="Bahnschrift SemiBold" panose="020B0502040204020203" pitchFamily="34" charset="0"/>
-            </a:endParaRPr>
+              <a:t>Adatbázis kép (egy részlete)</a:t>
+            </a:r>
           </a:p>
         </p:txBody>
       </p:sp>
@@ -7509,7 +7598,7 @@
         </p:blipFill>
         <p:spPr>
           <a:xfrm>
-            <a:off x="3738704" y="1393033"/>
+            <a:off x="3750655" y="1673209"/>
             <a:ext cx="4714591" cy="644014"/>
           </a:xfrm>
           <a:prstGeom prst="rect">
@@ -7829,7 +7918,7 @@
         </p:nvCxnSpPr>
         <p:spPr>
           <a:xfrm>
-            <a:off x="2119313" y="2025000"/>
+            <a:off x="2131264" y="2305176"/>
             <a:ext cx="7953375" cy="0"/>
           </a:xfrm>
           <a:prstGeom prst="line">
@@ -7886,7 +7975,7 @@
         </p:blipFill>
         <p:spPr>
           <a:xfrm>
-            <a:off x="3726755" y="431494"/>
+            <a:off x="3738706" y="711670"/>
             <a:ext cx="4855269" cy="949493"/>
           </a:xfrm>
           <a:prstGeom prst="rect">
@@ -11543,6 +11632,14 @@
 <file path=ppt/slides/slide9.xml><?xml version="1.0" encoding="utf-8"?>
 <p:sld xmlns:a="http://schemas.openxmlformats.org/drawingml/2006/main" xmlns:r="http://schemas.openxmlformats.org/officeDocument/2006/relationships" xmlns:p="http://schemas.openxmlformats.org/presentationml/2006/main">
   <p:cSld>
+    <p:bg>
+      <p:bgPr>
+        <a:solidFill>
+          <a:srgbClr val="FDF7E9"/>
+        </a:solidFill>
+        <a:effectLst/>
+      </p:bgPr>
+    </p:bg>
     <p:spTree>
       <p:nvGrpSpPr>
         <p:cNvPr id="1" name=""/>

--- a/Dokumentációhoz/Prezentáció/eMenza_AtkariAriella_FarkasDominik.pptx
+++ b/Dokumentációhoz/Prezentáció/eMenza_AtkariAriella_FarkasDominik.pptx
@@ -5,7 +5,7 @@
     <p:sldMasterId id="2147483660" r:id="rId1"/>
   </p:sldMasterIdLst>
   <p:notesMasterIdLst>
-    <p:notesMasterId r:id="rId24"/>
+    <p:notesMasterId r:id="rId21"/>
   </p:notesMasterIdLst>
   <p:sldIdLst>
     <p:sldId id="256" r:id="rId2"/>
@@ -14,22 +14,19 @@
     <p:sldId id="280" r:id="rId5"/>
     <p:sldId id="259" r:id="rId6"/>
     <p:sldId id="260" r:id="rId7"/>
-    <p:sldId id="261" r:id="rId8"/>
-    <p:sldId id="271" r:id="rId9"/>
+    <p:sldId id="274" r:id="rId8"/>
+    <p:sldId id="261" r:id="rId9"/>
     <p:sldId id="285" r:id="rId10"/>
     <p:sldId id="268" r:id="rId11"/>
     <p:sldId id="267" r:id="rId12"/>
     <p:sldId id="265" r:id="rId13"/>
     <p:sldId id="266" r:id="rId14"/>
-    <p:sldId id="286" r:id="rId15"/>
-    <p:sldId id="269" r:id="rId16"/>
-    <p:sldId id="272" r:id="rId17"/>
-    <p:sldId id="264" r:id="rId18"/>
-    <p:sldId id="274" r:id="rId19"/>
-    <p:sldId id="273" r:id="rId20"/>
-    <p:sldId id="282" r:id="rId21"/>
-    <p:sldId id="283" r:id="rId22"/>
-    <p:sldId id="284" r:id="rId23"/>
+    <p:sldId id="269" r:id="rId15"/>
+    <p:sldId id="272" r:id="rId16"/>
+    <p:sldId id="282" r:id="rId17"/>
+    <p:sldId id="283" r:id="rId18"/>
+    <p:sldId id="287" r:id="rId19"/>
+    <p:sldId id="284" r:id="rId20"/>
   </p:sldIdLst>
   <p:sldSz cx="12192000" cy="6858000"/>
   <p:notesSz cx="6858000" cy="9144000"/>
@@ -218,7 +215,7 @@
           <a:p>
             <a:fld id="{CBDB98DA-128E-4364-BF98-E5A8E296E4F2}" type="datetimeFigureOut">
               <a:rPr lang="hu-HU" smtClean="0"/>
-              <a:t>2026. 03. 04.</a:t>
+              <a:t>2026. 03. 10.</a:t>
             </a:fld>
             <a:endParaRPr lang="hu-HU"/>
           </a:p>
@@ -530,14 +527,16 @@
           <a:lstStyle/>
           <a:p>
             <a:r>
+              <a:rPr lang="hu-HU" dirty="0" err="1"/>
+              <a:t>Githubon</a:t>
+            </a:r>
+            <a:endParaRPr lang="hu-HU" dirty="0"/>
+          </a:p>
+          <a:p>
+            <a:r>
               <a:rPr lang="hu-HU" dirty="0"/>
-              <a:t>Vannak relációk, elsődleges kulcsok, </a:t>
-            </a:r>
-            <a:r>
-              <a:rPr lang="hu-HU"/>
-              <a:t>idegen kulcsok</a:t>
-            </a:r>
-            <a:endParaRPr lang="hu-HU" dirty="0"/>
+              <a:t>Feladatok megosztása – vegyesen frontend, backend. Közös adatbázis tervezés</a:t>
+            </a:r>
           </a:p>
         </p:txBody>
       </p:sp>
@@ -558,7 +557,7 @@
           <a:p>
             <a:fld id="{5B73375F-E6FE-4F6E-96C6-6B6BE7EEDE08}" type="slidenum">
               <a:rPr lang="hu-HU" smtClean="0"/>
-              <a:t>14</a:t>
+              <a:t>7</a:t>
             </a:fld>
             <a:endParaRPr lang="hu-HU"/>
           </a:p>
@@ -567,7 +566,7 @@
     </p:spTree>
     <p:extLst>
       <p:ext uri="{BB962C8B-B14F-4D97-AF65-F5344CB8AC3E}">
-        <p14:creationId xmlns:p14="http://schemas.microsoft.com/office/powerpoint/2010/main" val="2066711938"/>
+        <p14:creationId xmlns:p14="http://schemas.microsoft.com/office/powerpoint/2010/main" val="3931808296"/>
       </p:ext>
     </p:extLst>
   </p:cSld>
@@ -621,19 +620,6 @@
           <a:bodyPr/>
           <a:lstStyle/>
           <a:p>
-            <a:r>
-              <a:rPr lang="hu-HU" dirty="0" err="1"/>
-              <a:t>Githubon</a:t>
-            </a:r>
-            <a:endParaRPr lang="hu-HU" dirty="0"/>
-          </a:p>
-          <a:p>
-            <a:r>
-              <a:rPr lang="hu-HU" dirty="0"/>
-              <a:t>Feladatok megosztása – vegyesen frontend, backend. Közös adatbázis tervezés</a:t>
-            </a:r>
-          </a:p>
-          <a:p>
             <a:endParaRPr lang="hu-HU" dirty="0"/>
           </a:p>
         </p:txBody>
@@ -655,7 +641,7 @@
           <a:p>
             <a:fld id="{5B73375F-E6FE-4F6E-96C6-6B6BE7EEDE08}" type="slidenum">
               <a:rPr lang="hu-HU" smtClean="0"/>
-              <a:t>17</a:t>
+              <a:t>10</a:t>
             </a:fld>
             <a:endParaRPr lang="hu-HU"/>
           </a:p>
@@ -664,7 +650,7 @@
     </p:spTree>
     <p:extLst>
       <p:ext uri="{BB962C8B-B14F-4D97-AF65-F5344CB8AC3E}">
-        <p14:creationId xmlns:p14="http://schemas.microsoft.com/office/powerpoint/2010/main" val="2397787546"/>
+        <p14:creationId xmlns:p14="http://schemas.microsoft.com/office/powerpoint/2010/main" val="549964169"/>
       </p:ext>
     </p:extLst>
   </p:cSld>
@@ -718,17 +704,7 @@
           <a:bodyPr/>
           <a:lstStyle/>
           <a:p>
-            <a:r>
-              <a:rPr lang="hu-HU" dirty="0" err="1"/>
-              <a:t>Githubon</a:t>
-            </a:r>
             <a:endParaRPr lang="hu-HU" dirty="0"/>
-          </a:p>
-          <a:p>
-            <a:r>
-              <a:rPr lang="hu-HU" dirty="0"/>
-              <a:t>Feladatok megosztása – vegyesen frontend, backend. Közös adatbázis tervezés</a:t>
-            </a:r>
           </a:p>
         </p:txBody>
       </p:sp>
@@ -749,7 +725,7 @@
           <a:p>
             <a:fld id="{5B73375F-E6FE-4F6E-96C6-6B6BE7EEDE08}" type="slidenum">
               <a:rPr lang="hu-HU" smtClean="0"/>
-              <a:t>18</a:t>
+              <a:t>14</a:t>
             </a:fld>
             <a:endParaRPr lang="hu-HU"/>
           </a:p>
@@ -758,91 +734,7 @@
     </p:spTree>
     <p:extLst>
       <p:ext uri="{BB962C8B-B14F-4D97-AF65-F5344CB8AC3E}">
-        <p14:creationId xmlns:p14="http://schemas.microsoft.com/office/powerpoint/2010/main" val="3931808296"/>
-      </p:ext>
-    </p:extLst>
-  </p:cSld>
-  <p:clrMapOvr>
-    <a:masterClrMapping/>
-  </p:clrMapOvr>
-</p:notes>
-</file>
-
-<file path=ppt/notesSlides/notesSlide4.xml><?xml version="1.0" encoding="utf-8"?>
-<p:notes xmlns:a="http://schemas.openxmlformats.org/drawingml/2006/main" xmlns:r="http://schemas.openxmlformats.org/officeDocument/2006/relationships" xmlns:p="http://schemas.openxmlformats.org/presentationml/2006/main">
-  <p:cSld>
-    <p:spTree>
-      <p:nvGrpSpPr>
-        <p:cNvPr id="1" name=""/>
-        <p:cNvGrpSpPr/>
-        <p:nvPr/>
-      </p:nvGrpSpPr>
-      <p:grpSpPr>
-        <a:xfrm>
-          <a:off x="0" y="0"/>
-          <a:ext cx="0" cy="0"/>
-          <a:chOff x="0" y="0"/>
-          <a:chExt cx="0" cy="0"/>
-        </a:xfrm>
-      </p:grpSpPr>
-      <p:sp>
-        <p:nvSpPr>
-          <p:cNvPr id="2" name="Diakép helye 1"/>
-          <p:cNvSpPr>
-            <a:spLocks noGrp="1" noRot="1" noChangeAspect="1"/>
-          </p:cNvSpPr>
-          <p:nvPr>
-            <p:ph type="sldImg"/>
-          </p:nvPr>
-        </p:nvSpPr>
-        <p:spPr/>
-      </p:sp>
-      <p:sp>
-        <p:nvSpPr>
-          <p:cNvPr id="3" name="Jegyzetek helye 2"/>
-          <p:cNvSpPr>
-            <a:spLocks noGrp="1"/>
-          </p:cNvSpPr>
-          <p:nvPr>
-            <p:ph type="body" idx="1"/>
-          </p:nvPr>
-        </p:nvSpPr>
-        <p:spPr/>
-        <p:txBody>
-          <a:bodyPr/>
-          <a:lstStyle/>
-          <a:p>
-            <a:endParaRPr lang="hu-HU" dirty="0"/>
-          </a:p>
-        </p:txBody>
-      </p:sp>
-      <p:sp>
-        <p:nvSpPr>
-          <p:cNvPr id="4" name="Dia számának helye 3"/>
-          <p:cNvSpPr>
-            <a:spLocks noGrp="1"/>
-          </p:cNvSpPr>
-          <p:nvPr>
-            <p:ph type="sldNum" sz="quarter" idx="5"/>
-          </p:nvPr>
-        </p:nvSpPr>
-        <p:spPr/>
-        <p:txBody>
-          <a:bodyPr/>
-          <a:lstStyle/>
-          <a:p>
-            <a:fld id="{5B73375F-E6FE-4F6E-96C6-6B6BE7EEDE08}" type="slidenum">
-              <a:rPr lang="hu-HU" smtClean="0"/>
-              <a:t>19</a:t>
-            </a:fld>
-            <a:endParaRPr lang="hu-HU"/>
-          </a:p>
-        </p:txBody>
-      </p:sp>
-    </p:spTree>
-    <p:extLst>
-      <p:ext uri="{BB962C8B-B14F-4D97-AF65-F5344CB8AC3E}">
-        <p14:creationId xmlns:p14="http://schemas.microsoft.com/office/powerpoint/2010/main" val="2110455092"/>
+        <p14:creationId xmlns:p14="http://schemas.microsoft.com/office/powerpoint/2010/main" val="334570292"/>
       </p:ext>
     </p:extLst>
   </p:cSld>
@@ -1078,7 +970,7 @@
           <a:p>
             <a:fld id="{B9C1AE7B-DA1F-453C-8148-553EEBF678EC}" type="datetimeFigureOut">
               <a:rPr lang="hu-HU" smtClean="0"/>
-              <a:t>2026. 03. 04.</a:t>
+              <a:t>2026. 03. 10.</a:t>
             </a:fld>
             <a:endParaRPr lang="hu-HU"/>
           </a:p>
@@ -1286,7 +1178,7 @@
           <a:p>
             <a:fld id="{B9C1AE7B-DA1F-453C-8148-553EEBF678EC}" type="datetimeFigureOut">
               <a:rPr lang="hu-HU" smtClean="0"/>
-              <a:t>2026. 03. 04.</a:t>
+              <a:t>2026. 03. 10.</a:t>
             </a:fld>
             <a:endParaRPr lang="hu-HU"/>
           </a:p>
@@ -1542,7 +1434,7 @@
           <a:p>
             <a:fld id="{B9C1AE7B-DA1F-453C-8148-553EEBF678EC}" type="datetimeFigureOut">
               <a:rPr lang="hu-HU" smtClean="0"/>
-              <a:t>2026. 03. 04.</a:t>
+              <a:t>2026. 03. 10.</a:t>
             </a:fld>
             <a:endParaRPr lang="hu-HU"/>
           </a:p>
@@ -1716,7 +1608,7 @@
           <a:p>
             <a:fld id="{B9C1AE7B-DA1F-453C-8148-553EEBF678EC}" type="datetimeFigureOut">
               <a:rPr lang="hu-HU" smtClean="0"/>
-              <a:t>2026. 03. 04.</a:t>
+              <a:t>2026. 03. 10.</a:t>
             </a:fld>
             <a:endParaRPr lang="hu-HU"/>
           </a:p>
@@ -2059,7 +1951,7 @@
           <a:p>
             <a:fld id="{B9C1AE7B-DA1F-453C-8148-553EEBF678EC}" type="datetimeFigureOut">
               <a:rPr lang="hu-HU" smtClean="0"/>
-              <a:t>2026. 03. 04.</a:t>
+              <a:t>2026. 03. 10.</a:t>
             </a:fld>
             <a:endParaRPr lang="hu-HU"/>
           </a:p>
@@ -2334,7 +2226,7 @@
           <a:p>
             <a:fld id="{B9C1AE7B-DA1F-453C-8148-553EEBF678EC}" type="datetimeFigureOut">
               <a:rPr lang="hu-HU" smtClean="0"/>
-              <a:t>2026. 03. 04.</a:t>
+              <a:t>2026. 03. 10.</a:t>
             </a:fld>
             <a:endParaRPr lang="hu-HU"/>
           </a:p>
@@ -2713,7 +2605,7 @@
           <a:p>
             <a:fld id="{B9C1AE7B-DA1F-453C-8148-553EEBF678EC}" type="datetimeFigureOut">
               <a:rPr lang="hu-HU" smtClean="0"/>
-              <a:t>2026. 03. 04.</a:t>
+              <a:t>2026. 03. 10.</a:t>
             </a:fld>
             <a:endParaRPr lang="hu-HU"/>
           </a:p>
@@ -2831,7 +2723,7 @@
           <a:p>
             <a:fld id="{B9C1AE7B-DA1F-453C-8148-553EEBF678EC}" type="datetimeFigureOut">
               <a:rPr lang="hu-HU" smtClean="0"/>
-              <a:t>2026. 03. 04.</a:t>
+              <a:t>2026. 03. 10.</a:t>
             </a:fld>
             <a:endParaRPr lang="hu-HU"/>
           </a:p>
@@ -3002,7 +2894,7 @@
           <a:p>
             <a:fld id="{B9C1AE7B-DA1F-453C-8148-553EEBF678EC}" type="datetimeFigureOut">
               <a:rPr lang="hu-HU" smtClean="0"/>
-              <a:t>2026. 03. 04.</a:t>
+              <a:t>2026. 03. 10.</a:t>
             </a:fld>
             <a:endParaRPr lang="hu-HU"/>
           </a:p>
@@ -3356,7 +3248,7 @@
           <a:p>
             <a:fld id="{B9C1AE7B-DA1F-453C-8148-553EEBF678EC}" type="datetimeFigureOut">
               <a:rPr lang="hu-HU" smtClean="0"/>
-              <a:t>2026. 03. 04.</a:t>
+              <a:t>2026. 03. 10.</a:t>
             </a:fld>
             <a:endParaRPr lang="hu-HU"/>
           </a:p>
@@ -3738,7 +3630,7 @@
           <a:p>
             <a:fld id="{B9C1AE7B-DA1F-453C-8148-553EEBF678EC}" type="datetimeFigureOut">
               <a:rPr lang="hu-HU" smtClean="0"/>
-              <a:t>2026. 03. 04.</a:t>
+              <a:t>2026. 03. 10.</a:t>
             </a:fld>
             <a:endParaRPr lang="hu-HU"/>
           </a:p>
@@ -4025,7 +3917,7 @@
           <a:p>
             <a:fld id="{B9C1AE7B-DA1F-453C-8148-553EEBF678EC}" type="datetimeFigureOut">
               <a:rPr lang="hu-HU" smtClean="0"/>
-              <a:t>2026. 03. 04.</a:t>
+              <a:t>2026. 03. 10.</a:t>
             </a:fld>
             <a:endParaRPr lang="hu-HU"/>
           </a:p>
@@ -5278,10 +5170,135 @@
       </p:grpSpPr>
       <p:sp>
         <p:nvSpPr>
-          <p:cNvPr id="2" name="Cím 1">
+          <p:cNvPr id="5" name="Szöveg helye 3">
             <a:extLst>
               <a:ext uri="{FF2B5EF4-FFF2-40B4-BE49-F238E27FC236}">
-                <a16:creationId xmlns:a16="http://schemas.microsoft.com/office/drawing/2014/main" id="{755F2576-93E3-4E11-AD5A-5982C144E204}"/>
+                <a16:creationId xmlns:a16="http://schemas.microsoft.com/office/drawing/2014/main" id="{5A03AB81-7D99-4C1A-BBE2-727445750850}"/>
+              </a:ext>
+            </a:extLst>
+          </p:cNvPr>
+          <p:cNvSpPr>
+            <a:spLocks noGrp="1"/>
+          </p:cNvSpPr>
+          <p:nvPr>
+            <p:ph type="body" sz="half" idx="2"/>
+          </p:nvPr>
+        </p:nvSpPr>
+        <p:spPr>
+          <a:xfrm>
+            <a:off x="457200" y="3259455"/>
+            <a:ext cx="3562350" cy="3684270"/>
+          </a:xfrm>
+        </p:spPr>
+        <p:txBody>
+          <a:bodyPr>
+            <a:normAutofit/>
+          </a:bodyPr>
+          <a:lstStyle/>
+          <a:p>
+            <a:pPr marL="285750" indent="-285750">
+              <a:buClr>
+                <a:schemeClr val="bg1"/>
+              </a:buClr>
+              <a:buFont typeface="Arial" panose="020B0604020202020204" pitchFamily="34" charset="0"/>
+              <a:buChar char="•"/>
+            </a:pPr>
+            <a:r>
+              <a:rPr lang="hu-HU" sz="1800" dirty="0"/>
+              <a:t>Vue.js 3</a:t>
+            </a:r>
+          </a:p>
+          <a:p>
+            <a:pPr marL="285750" indent="-285750">
+              <a:buClr>
+                <a:schemeClr val="bg1"/>
+              </a:buClr>
+              <a:buFont typeface="Arial" panose="020B0604020202020204" pitchFamily="34" charset="0"/>
+              <a:buChar char="•"/>
+            </a:pPr>
+            <a:r>
+              <a:rPr lang="hu-HU" sz="1800" dirty="0" err="1"/>
+              <a:t>Axios</a:t>
+            </a:r>
+            <a:endParaRPr lang="hu-HU" sz="1800" dirty="0"/>
+          </a:p>
+          <a:p>
+            <a:pPr marL="285750" indent="-285750">
+              <a:buClr>
+                <a:schemeClr val="bg1"/>
+              </a:buClr>
+              <a:buFont typeface="Arial" panose="020B0604020202020204" pitchFamily="34" charset="0"/>
+              <a:buChar char="•"/>
+            </a:pPr>
+            <a:r>
+              <a:rPr lang="hu-HU" sz="1800" dirty="0" err="1"/>
+              <a:t>Bootstrap</a:t>
+            </a:r>
+            <a:endParaRPr lang="hu-HU" sz="1800" dirty="0"/>
+          </a:p>
+          <a:p>
+            <a:pPr marL="285750" indent="-285750">
+              <a:buClr>
+                <a:schemeClr val="bg1"/>
+              </a:buClr>
+              <a:buFont typeface="Arial" panose="020B0604020202020204" pitchFamily="34" charset="0"/>
+              <a:buChar char="•"/>
+            </a:pPr>
+            <a:r>
+              <a:rPr lang="hu-HU" sz="1800" dirty="0" err="1"/>
+              <a:t>Kepek</a:t>
+            </a:r>
+            <a:r>
+              <a:rPr lang="hu-HU" sz="1800" dirty="0"/>
+              <a:t>: </a:t>
+            </a:r>
+            <a:r>
+              <a:rPr lang="hu-HU" sz="1800" dirty="0" err="1"/>
+              <a:t>vue</a:t>
+            </a:r>
+            <a:r>
+              <a:rPr lang="hu-HU" sz="1800" dirty="0"/>
+              <a:t> oldalak</a:t>
+            </a:r>
+          </a:p>
+          <a:p>
+            <a:pPr marL="285750" indent="-285750">
+              <a:buClr>
+                <a:schemeClr val="bg1"/>
+              </a:buClr>
+              <a:buFont typeface="Arial" panose="020B0604020202020204" pitchFamily="34" charset="0"/>
+              <a:buChar char="•"/>
+            </a:pPr>
+            <a:endParaRPr lang="hu-HU" sz="1800" dirty="0"/>
+          </a:p>
+          <a:p>
+            <a:pPr marL="285750" indent="-285750">
+              <a:buClr>
+                <a:schemeClr val="bg1"/>
+              </a:buClr>
+              <a:buFont typeface="Arial" panose="020B0604020202020204" pitchFamily="34" charset="0"/>
+              <a:buChar char="•"/>
+            </a:pPr>
+            <a:endParaRPr lang="hu-HU" sz="1800" dirty="0"/>
+          </a:p>
+          <a:p>
+            <a:pPr marL="285750" indent="-285750">
+              <a:buClr>
+                <a:schemeClr val="bg1"/>
+              </a:buClr>
+              <a:buFont typeface="Arial" panose="020B0604020202020204" pitchFamily="34" charset="0"/>
+              <a:buChar char="•"/>
+            </a:pPr>
+            <a:endParaRPr lang="hu-HU" sz="1800" dirty="0"/>
+          </a:p>
+        </p:txBody>
+      </p:sp>
+      <p:sp>
+        <p:nvSpPr>
+          <p:cNvPr id="6" name="Cím 1">
+            <a:extLst>
+              <a:ext uri="{FF2B5EF4-FFF2-40B4-BE49-F238E27FC236}">
+                <a16:creationId xmlns:a16="http://schemas.microsoft.com/office/drawing/2014/main" id="{56BAE57D-1584-4B02-A4E9-FF150F42817A}"/>
               </a:ext>
             </a:extLst>
           </p:cNvPr>
@@ -5292,62 +5309,22 @@
             <p:ph type="title"/>
           </p:nvPr>
         </p:nvSpPr>
-        <p:spPr/>
+        <p:spPr>
+          <a:xfrm>
+            <a:off x="457200" y="622934"/>
+            <a:ext cx="3200400" cy="2286000"/>
+          </a:xfrm>
+        </p:spPr>
         <p:txBody>
           <a:bodyPr/>
           <a:lstStyle/>
           <a:p>
-            <a:endParaRPr lang="hu-HU" dirty="0"/>
-          </a:p>
-        </p:txBody>
-      </p:sp>
-      <p:sp>
-        <p:nvSpPr>
-          <p:cNvPr id="3" name="Tartalom helye 2">
-            <a:extLst>
-              <a:ext uri="{FF2B5EF4-FFF2-40B4-BE49-F238E27FC236}">
-                <a16:creationId xmlns:a16="http://schemas.microsoft.com/office/drawing/2014/main" id="{6CF1363A-EC3E-4AAB-AB7B-2FBA7243AB40}"/>
-              </a:ext>
-            </a:extLst>
-          </p:cNvPr>
-          <p:cNvSpPr>
-            <a:spLocks noGrp="1"/>
-          </p:cNvSpPr>
-          <p:nvPr>
-            <p:ph idx="1"/>
-          </p:nvPr>
-        </p:nvSpPr>
-        <p:spPr/>
-        <p:txBody>
-          <a:bodyPr/>
-          <a:lstStyle/>
-          <a:p>
-            <a:endParaRPr lang="hu-HU" dirty="0"/>
-          </a:p>
-        </p:txBody>
-      </p:sp>
-      <p:sp>
-        <p:nvSpPr>
-          <p:cNvPr id="4" name="Szöveg helye 3">
-            <a:extLst>
-              <a:ext uri="{FF2B5EF4-FFF2-40B4-BE49-F238E27FC236}">
-                <a16:creationId xmlns:a16="http://schemas.microsoft.com/office/drawing/2014/main" id="{E1483CC7-2FF0-4B57-872B-832994FD7836}"/>
-              </a:ext>
-            </a:extLst>
-          </p:cNvPr>
-          <p:cNvSpPr>
-            <a:spLocks noGrp="1"/>
-          </p:cNvSpPr>
-          <p:nvPr>
-            <p:ph type="body" sz="half" idx="2"/>
-          </p:nvPr>
-        </p:nvSpPr>
-        <p:spPr/>
-        <p:txBody>
-          <a:bodyPr/>
-          <a:lstStyle/>
-          <a:p>
-            <a:endParaRPr lang="hu-HU"/>
+            <a:r>
+              <a:rPr lang="hu-HU" dirty="0">
+                <a:latin typeface="Bahnschrift SemiBold" panose="020B0502040204020203" pitchFamily="34" charset="0"/>
+              </a:rPr>
+              <a:t>Frontend</a:t>
+            </a:r>
           </a:p>
         </p:txBody>
       </p:sp>
@@ -5498,7 +5475,27 @@
           <a:bodyPr/>
           <a:lstStyle/>
           <a:p>
+            <a:r>
+              <a:rPr lang="hu-HU" dirty="0" err="1"/>
+              <a:t>Vuejs</a:t>
+            </a:r>
+            <a:r>
+              <a:rPr lang="hu-HU" dirty="0"/>
+              <a:t> 3</a:t>
+            </a:r>
+          </a:p>
+          <a:p>
+            <a:r>
+              <a:rPr lang="hu-HU" dirty="0" err="1"/>
+              <a:t>Axios</a:t>
+            </a:r>
             <a:endParaRPr lang="hu-HU" dirty="0"/>
+          </a:p>
+          <a:p>
+            <a:r>
+              <a:rPr lang="hu-HU" dirty="0"/>
+              <a:t>bővítmények</a:t>
+            </a:r>
           </a:p>
         </p:txBody>
       </p:sp>
@@ -5695,6 +5692,26 @@
             </a:r>
           </a:p>
           <a:p>
+            <a:r>
+              <a:rPr lang="hu-HU" dirty="0"/>
+              <a:t>Mintaadatok (</a:t>
+            </a:r>
+            <a:r>
+              <a:rPr lang="hu-HU" dirty="0" err="1"/>
+              <a:t>seeder</a:t>
+            </a:r>
+            <a:r>
+              <a:rPr lang="hu-HU" dirty="0"/>
+              <a:t>): </a:t>
+            </a:r>
+          </a:p>
+          <a:p>
+            <a:r>
+              <a:rPr lang="hu-HU" dirty="0"/>
+              <a:t>Adatbázis kép részlet</a:t>
+            </a:r>
+          </a:p>
+          <a:p>
             <a:endParaRPr lang="hu-HU" dirty="0"/>
           </a:p>
         </p:txBody>
@@ -5870,101 +5887,6 @@
           <p:cNvPr id="2" name="Cím 1">
             <a:extLst>
               <a:ext uri="{FF2B5EF4-FFF2-40B4-BE49-F238E27FC236}">
-                <a16:creationId xmlns:a16="http://schemas.microsoft.com/office/drawing/2014/main" id="{BD413FEB-F3F0-484E-ADF4-74F0433FDA8D}"/>
-              </a:ext>
-            </a:extLst>
-          </p:cNvPr>
-          <p:cNvSpPr txBox="1">
-            <a:spLocks/>
-          </p:cNvSpPr>
-          <p:nvPr/>
-        </p:nvSpPr>
-        <p:spPr>
-          <a:xfrm>
-            <a:off x="2640330" y="2267803"/>
-            <a:ext cx="10058400" cy="1450757"/>
-          </a:xfrm>
-          <a:prstGeom prst="rect">
-            <a:avLst/>
-          </a:prstGeom>
-        </p:spPr>
-        <p:txBody>
-          <a:bodyPr/>
-          <a:lstStyle>
-            <a:lvl1pPr algn="l" defTabSz="914400" rtl="0" eaLnBrk="1" latinLnBrk="0" hangingPunct="1">
-              <a:lnSpc>
-                <a:spcPct val="85000"/>
-              </a:lnSpc>
-              <a:spcBef>
-                <a:spcPct val="0"/>
-              </a:spcBef>
-              <a:buNone/>
-              <a:defRPr sz="4800" kern="1200" spc="-50" baseline="0">
-                <a:solidFill>
-                  <a:schemeClr val="tx1">
-                    <a:lumMod val="75000"/>
-                    <a:lumOff val="25000"/>
-                  </a:schemeClr>
-                </a:solidFill>
-                <a:latin typeface="+mj-lt"/>
-                <a:ea typeface="+mj-ea"/>
-                <a:cs typeface="+mj-cs"/>
-              </a:defRPr>
-            </a:lvl1pPr>
-          </a:lstStyle>
-          <a:p>
-            <a:r>
-              <a:rPr lang="hu-HU" b="1" dirty="0">
-                <a:latin typeface="Bahnschrift SemiBold" panose="020B0502040204020203" pitchFamily="34" charset="0"/>
-              </a:rPr>
-              <a:t>Adatbázis kép (egy részlete)</a:t>
-            </a:r>
-          </a:p>
-        </p:txBody>
-      </p:sp>
-    </p:spTree>
-    <p:extLst>
-      <p:ext uri="{BB962C8B-B14F-4D97-AF65-F5344CB8AC3E}">
-        <p14:creationId xmlns:p14="http://schemas.microsoft.com/office/powerpoint/2010/main" val="2699210854"/>
-      </p:ext>
-    </p:extLst>
-  </p:cSld>
-  <p:clrMapOvr>
-    <a:masterClrMapping/>
-  </p:clrMapOvr>
-</p:sld>
-</file>
-
-<file path=ppt/slides/slide15.xml><?xml version="1.0" encoding="utf-8"?>
-<p:sld xmlns:a="http://schemas.openxmlformats.org/drawingml/2006/main" xmlns:r="http://schemas.openxmlformats.org/officeDocument/2006/relationships" xmlns:p="http://schemas.openxmlformats.org/presentationml/2006/main">
-  <p:cSld>
-    <p:bg>
-      <p:bgPr>
-        <a:solidFill>
-          <a:srgbClr val="FDF7E9"/>
-        </a:solidFill>
-        <a:effectLst/>
-      </p:bgPr>
-    </p:bg>
-    <p:spTree>
-      <p:nvGrpSpPr>
-        <p:cNvPr id="1" name=""/>
-        <p:cNvGrpSpPr/>
-        <p:nvPr/>
-      </p:nvGrpSpPr>
-      <p:grpSpPr>
-        <a:xfrm>
-          <a:off x="0" y="0"/>
-          <a:ext cx="0" cy="0"/>
-          <a:chOff x="0" y="0"/>
-          <a:chExt cx="0" cy="0"/>
-        </a:xfrm>
-      </p:grpSpPr>
-      <p:sp>
-        <p:nvSpPr>
-          <p:cNvPr id="2" name="Cím 1">
-            <a:extLst>
-              <a:ext uri="{FF2B5EF4-FFF2-40B4-BE49-F238E27FC236}">
                 <a16:creationId xmlns:a16="http://schemas.microsoft.com/office/drawing/2014/main" id="{755F2576-93E3-4E11-AD5A-5982C144E204}"/>
               </a:ext>
             </a:extLst>
@@ -6034,9 +5956,10 @@
               <a:buChar char="•"/>
             </a:pPr>
             <a:r>
-              <a:rPr lang="hu-HU" sz="1800" dirty="0"/>
-              <a:t>Dinamikus igazodás a kijelzőhöz</a:t>
-            </a:r>
+              <a:rPr lang="hu-HU" sz="1800" dirty="0" err="1"/>
+              <a:t>Bootstrap</a:t>
+            </a:r>
+            <a:endParaRPr lang="hu-HU" sz="1800" dirty="0"/>
           </a:p>
           <a:p>
             <a:pPr marL="285750" indent="-285750">
@@ -6048,7 +5971,7 @@
             </a:pPr>
             <a:r>
               <a:rPr lang="hu-HU" sz="1800" dirty="0"/>
-              <a:t>Optimalizált telefon képernyőhöz</a:t>
+              <a:t>Dinamikus igazodás a kijelzőhöz</a:t>
             </a:r>
           </a:p>
           <a:p>
@@ -6061,7 +5984,7 @@
             </a:pPr>
             <a:r>
               <a:rPr lang="hu-HU" sz="1800" dirty="0"/>
-              <a:t>Felhasználóbarát</a:t>
+              <a:t>Optimalizált telefon képernyőhöz</a:t>
             </a:r>
           </a:p>
         </p:txBody>
@@ -6101,7 +6024,7 @@
             <p:nvPr/>
           </p:nvPicPr>
           <p:blipFill rotWithShape="1">
-            <a:blip r:embed="rId2">
+            <a:blip r:embed="rId3">
               <a:alphaModFix amt="50000"/>
               <a:extLst>
                 <a:ext uri="{28A0092B-C50C-407E-A947-70E740481C1C}">
@@ -6137,7 +6060,7 @@
             <p:nvPr/>
           </p:nvPicPr>
           <p:blipFill rotWithShape="1">
-            <a:blip r:embed="rId2">
+            <a:blip r:embed="rId3">
               <a:alphaModFix amt="50000"/>
               <a:extLst>
                 <a:ext uri="{28A0092B-C50C-407E-A947-70E740481C1C}">
@@ -6172,7 +6095,7 @@
 </p:sld>
 </file>
 
-<file path=ppt/slides/slide16.xml><?xml version="1.0" encoding="utf-8"?>
+<file path=ppt/slides/slide15.xml><?xml version="1.0" encoding="utf-8"?>
 <p:sld xmlns:a="http://schemas.openxmlformats.org/drawingml/2006/main" xmlns:r="http://schemas.openxmlformats.org/officeDocument/2006/relationships" xmlns:p="http://schemas.openxmlformats.org/presentationml/2006/main">
   <p:cSld>
     <p:bg>
@@ -6248,6 +6171,7 @@
           <a:bodyPr/>
           <a:lstStyle/>
           <a:p>
+            <a:pPr algn="ctr"/>
             <a:r>
               <a:rPr lang="hu-HU" dirty="0" err="1"/>
               <a:t>BAckend</a:t>
@@ -6309,6 +6233,7 @@
           <a:bodyPr/>
           <a:lstStyle/>
           <a:p>
+            <a:pPr algn="ctr"/>
             <a:r>
               <a:rPr lang="hu-HU" dirty="0"/>
               <a:t>frontend</a:t>
@@ -6344,6 +6269,33 @@
             <a:r>
               <a:rPr lang="hu-HU" dirty="0" err="1"/>
               <a:t>Selenium</a:t>
+            </a:r>
+            <a:r>
+              <a:rPr lang="hu-HU" dirty="0"/>
+              <a:t> </a:t>
+            </a:r>
+            <a:r>
+              <a:rPr lang="hu-HU" dirty="0" err="1"/>
+              <a:t>Library</a:t>
+            </a:r>
+            <a:r>
+              <a:rPr lang="hu-HU" dirty="0"/>
+              <a:t> – </a:t>
+            </a:r>
+            <a:r>
+              <a:rPr lang="hu-HU" dirty="0" err="1"/>
+              <a:t>Robotframework</a:t>
+            </a:r>
+            <a:endParaRPr lang="hu-HU" dirty="0"/>
+          </a:p>
+          <a:p>
+            <a:pPr lvl="1">
+              <a:buFont typeface="Arial" panose="020B0604020202020204" pitchFamily="34" charset="0"/>
+              <a:buChar char="•"/>
+            </a:pPr>
+            <a:r>
+              <a:rPr lang="hu-HU" dirty="0" err="1"/>
+              <a:t>kepek</a:t>
             </a:r>
             <a:endParaRPr lang="hu-HU" dirty="0"/>
           </a:p>
@@ -6455,6 +6407,590 @@
 </p:sld>
 </file>
 
+<file path=ppt/slides/slide16.xml><?xml version="1.0" encoding="utf-8"?>
+<p:sld xmlns:a="http://schemas.openxmlformats.org/drawingml/2006/main" xmlns:r="http://schemas.openxmlformats.org/officeDocument/2006/relationships" xmlns:p="http://schemas.openxmlformats.org/presentationml/2006/main">
+  <p:cSld>
+    <p:bg>
+      <p:bgPr>
+        <a:solidFill>
+          <a:srgbClr val="FDF7E9"/>
+        </a:solidFill>
+        <a:effectLst/>
+      </p:bgPr>
+    </p:bg>
+    <p:spTree>
+      <p:nvGrpSpPr>
+        <p:cNvPr id="1" name=""/>
+        <p:cNvGrpSpPr/>
+        <p:nvPr/>
+      </p:nvGrpSpPr>
+      <p:grpSpPr>
+        <a:xfrm>
+          <a:off x="0" y="0"/>
+          <a:ext cx="0" cy="0"/>
+          <a:chOff x="0" y="0"/>
+          <a:chExt cx="0" cy="0"/>
+        </a:xfrm>
+      </p:grpSpPr>
+      <p:cxnSp>
+        <p:nvCxnSpPr>
+          <p:cNvPr id="2" name="Egyenes összekötő 1">
+            <a:extLst>
+              <a:ext uri="{FF2B5EF4-FFF2-40B4-BE49-F238E27FC236}">
+                <a16:creationId xmlns:a16="http://schemas.microsoft.com/office/drawing/2014/main" id="{20EF3F3C-374B-461F-BAF4-6C213DE7C8BB}"/>
+              </a:ext>
+            </a:extLst>
+          </p:cNvPr>
+          <p:cNvCxnSpPr>
+            <a:cxnSpLocks/>
+          </p:cNvCxnSpPr>
+          <p:nvPr/>
+        </p:nvCxnSpPr>
+        <p:spPr>
+          <a:xfrm>
+            <a:off x="1209675" y="1737360"/>
+            <a:ext cx="9946005" cy="0"/>
+          </a:xfrm>
+          <a:prstGeom prst="line">
+            <a:avLst/>
+          </a:prstGeom>
+          <a:ln>
+            <a:solidFill>
+              <a:schemeClr val="tx1">
+                <a:lumMod val="50000"/>
+                <a:lumOff val="50000"/>
+              </a:schemeClr>
+            </a:solidFill>
+          </a:ln>
+        </p:spPr>
+        <p:style>
+          <a:lnRef idx="1">
+            <a:schemeClr val="accent1"/>
+          </a:lnRef>
+          <a:fillRef idx="0">
+            <a:schemeClr val="accent1"/>
+          </a:fillRef>
+          <a:effectRef idx="0">
+            <a:schemeClr val="accent1"/>
+          </a:effectRef>
+          <a:fontRef idx="minor">
+            <a:schemeClr val="tx1"/>
+          </a:fontRef>
+        </p:style>
+      </p:cxnSp>
+      <p:pic>
+        <p:nvPicPr>
+          <p:cNvPr id="3" name="Kép 2">
+            <a:extLst>
+              <a:ext uri="{FF2B5EF4-FFF2-40B4-BE49-F238E27FC236}">
+                <a16:creationId xmlns:a16="http://schemas.microsoft.com/office/drawing/2014/main" id="{FE91A941-BC8A-4E2A-B780-F3F3D6A9B3E3}"/>
+              </a:ext>
+            </a:extLst>
+          </p:cNvPr>
+          <p:cNvPicPr>
+            <a:picLocks noChangeAspect="1"/>
+          </p:cNvPicPr>
+          <p:nvPr/>
+        </p:nvPicPr>
+        <p:blipFill rotWithShape="1">
+          <a:blip r:embed="rId2">
+            <a:alphaModFix amt="50000"/>
+            <a:extLst>
+              <a:ext uri="{28A0092B-C50C-407E-A947-70E740481C1C}">
+                <a14:useLocalDpi xmlns:a14="http://schemas.microsoft.com/office/drawing/2010/main" val="0"/>
+              </a:ext>
+            </a:extLst>
+          </a:blip>
+          <a:srcRect t="58555" r="67375"/>
+          <a:stretch/>
+        </p:blipFill>
+        <p:spPr>
+          <a:xfrm>
+            <a:off x="10619475" y="1036308"/>
+            <a:ext cx="1364958" cy="571501"/>
+          </a:xfrm>
+          <a:prstGeom prst="rect">
+            <a:avLst/>
+          </a:prstGeom>
+        </p:spPr>
+      </p:pic>
+      <p:pic>
+        <p:nvPicPr>
+          <p:cNvPr id="4" name="Kép 3">
+            <a:extLst>
+              <a:ext uri="{FF2B5EF4-FFF2-40B4-BE49-F238E27FC236}">
+                <a16:creationId xmlns:a16="http://schemas.microsoft.com/office/drawing/2014/main" id="{78D3DB18-E771-4DF0-84FA-206E8FA41883}"/>
+              </a:ext>
+            </a:extLst>
+          </p:cNvPr>
+          <p:cNvPicPr>
+            <a:picLocks noChangeAspect="1"/>
+          </p:cNvPicPr>
+          <p:nvPr/>
+        </p:nvPicPr>
+        <p:blipFill rotWithShape="1">
+          <a:blip r:embed="rId2">
+            <a:alphaModFix amt="50000"/>
+            <a:extLst>
+              <a:ext uri="{28A0092B-C50C-407E-A947-70E740481C1C}">
+                <a14:useLocalDpi xmlns:a14="http://schemas.microsoft.com/office/drawing/2010/main" val="0"/>
+              </a:ext>
+            </a:extLst>
+          </a:blip>
+          <a:srcRect l="1" r="61666" b="38896"/>
+          <a:stretch/>
+        </p:blipFill>
+        <p:spPr>
+          <a:xfrm>
+            <a:off x="10565538" y="349786"/>
+            <a:ext cx="1418895" cy="745451"/>
+          </a:xfrm>
+          <a:prstGeom prst="rect">
+            <a:avLst/>
+          </a:prstGeom>
+        </p:spPr>
+      </p:pic>
+      <p:sp>
+        <p:nvSpPr>
+          <p:cNvPr id="5" name="Cím 1">
+            <a:extLst>
+              <a:ext uri="{FF2B5EF4-FFF2-40B4-BE49-F238E27FC236}">
+                <a16:creationId xmlns:a16="http://schemas.microsoft.com/office/drawing/2014/main" id="{175A5A3F-6F8F-4002-ADBD-CD8C93ECEEE1}"/>
+              </a:ext>
+            </a:extLst>
+          </p:cNvPr>
+          <p:cNvSpPr txBox="1">
+            <a:spLocks/>
+          </p:cNvSpPr>
+          <p:nvPr/>
+        </p:nvSpPr>
+        <p:spPr>
+          <a:xfrm>
+            <a:off x="1097280" y="286603"/>
+            <a:ext cx="10058400" cy="1450757"/>
+          </a:xfrm>
+          <a:prstGeom prst="rect">
+            <a:avLst/>
+          </a:prstGeom>
+        </p:spPr>
+        <p:txBody>
+          <a:bodyPr anchor="b"/>
+          <a:lstStyle>
+            <a:lvl1pPr algn="l" defTabSz="914400" rtl="0" eaLnBrk="1" latinLnBrk="0" hangingPunct="1">
+              <a:lnSpc>
+                <a:spcPct val="85000"/>
+              </a:lnSpc>
+              <a:spcBef>
+                <a:spcPct val="0"/>
+              </a:spcBef>
+              <a:buNone/>
+              <a:defRPr sz="4800" kern="1200" spc="-50" baseline="0">
+                <a:solidFill>
+                  <a:schemeClr val="tx1">
+                    <a:lumMod val="75000"/>
+                    <a:lumOff val="25000"/>
+                  </a:schemeClr>
+                </a:solidFill>
+                <a:latin typeface="+mj-lt"/>
+                <a:ea typeface="+mj-ea"/>
+                <a:cs typeface="+mj-cs"/>
+              </a:defRPr>
+            </a:lvl1pPr>
+          </a:lstStyle>
+          <a:p>
+            <a:r>
+              <a:rPr lang="hu-HU" b="1" dirty="0">
+                <a:latin typeface="Bahnschrift SemiBold" panose="020B0502040204020203" pitchFamily="34" charset="0"/>
+              </a:rPr>
+              <a:t>Fejlesztési lehetőségek</a:t>
+            </a:r>
+          </a:p>
+        </p:txBody>
+      </p:sp>
+      <p:sp>
+        <p:nvSpPr>
+          <p:cNvPr id="6" name="Tartalom helye 2">
+            <a:extLst>
+              <a:ext uri="{FF2B5EF4-FFF2-40B4-BE49-F238E27FC236}">
+                <a16:creationId xmlns:a16="http://schemas.microsoft.com/office/drawing/2014/main" id="{654E07C9-ACD1-4AF5-9ECE-29158423F871}"/>
+              </a:ext>
+            </a:extLst>
+          </p:cNvPr>
+          <p:cNvSpPr txBox="1">
+            <a:spLocks/>
+          </p:cNvSpPr>
+          <p:nvPr/>
+        </p:nvSpPr>
+        <p:spPr>
+          <a:xfrm>
+            <a:off x="1097280" y="1845734"/>
+            <a:ext cx="10058400" cy="4023360"/>
+          </a:xfrm>
+          <a:prstGeom prst="rect">
+            <a:avLst/>
+          </a:prstGeom>
+        </p:spPr>
+        <p:txBody>
+          <a:bodyPr/>
+          <a:lstStyle>
+            <a:lvl1pPr marL="91440" indent="-91440" algn="l" defTabSz="914400" rtl="0" eaLnBrk="1" latinLnBrk="0" hangingPunct="1">
+              <a:lnSpc>
+                <a:spcPct val="90000"/>
+              </a:lnSpc>
+              <a:spcBef>
+                <a:spcPts val="1200"/>
+              </a:spcBef>
+              <a:spcAft>
+                <a:spcPts val="200"/>
+              </a:spcAft>
+              <a:buClr>
+                <a:schemeClr val="accent1"/>
+              </a:buClr>
+              <a:buSzPct val="100000"/>
+              <a:buFont typeface="Calibri" panose="020F0502020204030204" pitchFamily="34" charset="0"/>
+              <a:buChar char=" "/>
+              <a:defRPr sz="2000" kern="1200">
+                <a:solidFill>
+                  <a:schemeClr val="tx1">
+                    <a:lumMod val="75000"/>
+                    <a:lumOff val="25000"/>
+                  </a:schemeClr>
+                </a:solidFill>
+                <a:latin typeface="+mn-lt"/>
+                <a:ea typeface="+mn-ea"/>
+                <a:cs typeface="+mn-cs"/>
+              </a:defRPr>
+            </a:lvl1pPr>
+            <a:lvl2pPr marL="384048" indent="-182880" algn="l" defTabSz="914400" rtl="0" eaLnBrk="1" latinLnBrk="0" hangingPunct="1">
+              <a:lnSpc>
+                <a:spcPct val="90000"/>
+              </a:lnSpc>
+              <a:spcBef>
+                <a:spcPts val="200"/>
+              </a:spcBef>
+              <a:spcAft>
+                <a:spcPts val="400"/>
+              </a:spcAft>
+              <a:buClr>
+                <a:schemeClr val="accent1"/>
+              </a:buClr>
+              <a:buFont typeface="Calibri" pitchFamily="34" charset="0"/>
+              <a:buChar char="◦"/>
+              <a:defRPr sz="1800" kern="1200">
+                <a:solidFill>
+                  <a:schemeClr val="tx1">
+                    <a:lumMod val="75000"/>
+                    <a:lumOff val="25000"/>
+                  </a:schemeClr>
+                </a:solidFill>
+                <a:latin typeface="+mn-lt"/>
+                <a:ea typeface="+mn-ea"/>
+                <a:cs typeface="+mn-cs"/>
+              </a:defRPr>
+            </a:lvl2pPr>
+            <a:lvl3pPr marL="566928" indent="-182880" algn="l" defTabSz="914400" rtl="0" eaLnBrk="1" latinLnBrk="0" hangingPunct="1">
+              <a:lnSpc>
+                <a:spcPct val="90000"/>
+              </a:lnSpc>
+              <a:spcBef>
+                <a:spcPts val="200"/>
+              </a:spcBef>
+              <a:spcAft>
+                <a:spcPts val="400"/>
+              </a:spcAft>
+              <a:buClr>
+                <a:schemeClr val="accent1"/>
+              </a:buClr>
+              <a:buFont typeface="Calibri" pitchFamily="34" charset="0"/>
+              <a:buChar char="◦"/>
+              <a:defRPr sz="1400" kern="1200">
+                <a:solidFill>
+                  <a:schemeClr val="tx1">
+                    <a:lumMod val="75000"/>
+                    <a:lumOff val="25000"/>
+                  </a:schemeClr>
+                </a:solidFill>
+                <a:latin typeface="+mn-lt"/>
+                <a:ea typeface="+mn-ea"/>
+                <a:cs typeface="+mn-cs"/>
+              </a:defRPr>
+            </a:lvl3pPr>
+            <a:lvl4pPr marL="749808" indent="-182880" algn="l" defTabSz="914400" rtl="0" eaLnBrk="1" latinLnBrk="0" hangingPunct="1">
+              <a:lnSpc>
+                <a:spcPct val="90000"/>
+              </a:lnSpc>
+              <a:spcBef>
+                <a:spcPts val="200"/>
+              </a:spcBef>
+              <a:spcAft>
+                <a:spcPts val="400"/>
+              </a:spcAft>
+              <a:buClr>
+                <a:schemeClr val="accent1"/>
+              </a:buClr>
+              <a:buFont typeface="Calibri" pitchFamily="34" charset="0"/>
+              <a:buChar char="◦"/>
+              <a:defRPr sz="1400" kern="1200">
+                <a:solidFill>
+                  <a:schemeClr val="tx1">
+                    <a:lumMod val="75000"/>
+                    <a:lumOff val="25000"/>
+                  </a:schemeClr>
+                </a:solidFill>
+                <a:latin typeface="+mn-lt"/>
+                <a:ea typeface="+mn-ea"/>
+                <a:cs typeface="+mn-cs"/>
+              </a:defRPr>
+            </a:lvl4pPr>
+            <a:lvl5pPr marL="932688" indent="-182880" algn="l" defTabSz="914400" rtl="0" eaLnBrk="1" latinLnBrk="0" hangingPunct="1">
+              <a:lnSpc>
+                <a:spcPct val="90000"/>
+              </a:lnSpc>
+              <a:spcBef>
+                <a:spcPts val="200"/>
+              </a:spcBef>
+              <a:spcAft>
+                <a:spcPts val="400"/>
+              </a:spcAft>
+              <a:buClr>
+                <a:schemeClr val="accent1"/>
+              </a:buClr>
+              <a:buFont typeface="Calibri" pitchFamily="34" charset="0"/>
+              <a:buChar char="◦"/>
+              <a:defRPr sz="1400" kern="1200">
+                <a:solidFill>
+                  <a:schemeClr val="tx1">
+                    <a:lumMod val="75000"/>
+                    <a:lumOff val="25000"/>
+                  </a:schemeClr>
+                </a:solidFill>
+                <a:latin typeface="+mn-lt"/>
+                <a:ea typeface="+mn-ea"/>
+                <a:cs typeface="+mn-cs"/>
+              </a:defRPr>
+            </a:lvl5pPr>
+            <a:lvl6pPr marL="1100000" indent="-228600" algn="l" defTabSz="914400" rtl="0" eaLnBrk="1" latinLnBrk="0" hangingPunct="1">
+              <a:lnSpc>
+                <a:spcPct val="90000"/>
+              </a:lnSpc>
+              <a:spcBef>
+                <a:spcPts val="200"/>
+              </a:spcBef>
+              <a:spcAft>
+                <a:spcPts val="400"/>
+              </a:spcAft>
+              <a:buClr>
+                <a:schemeClr val="accent1"/>
+              </a:buClr>
+              <a:buFont typeface="Calibri" pitchFamily="34" charset="0"/>
+              <a:buChar char="◦"/>
+              <a:defRPr sz="1400" kern="1200">
+                <a:solidFill>
+                  <a:schemeClr val="tx1">
+                    <a:lumMod val="75000"/>
+                    <a:lumOff val="25000"/>
+                  </a:schemeClr>
+                </a:solidFill>
+                <a:latin typeface="+mn-lt"/>
+                <a:ea typeface="+mn-ea"/>
+                <a:cs typeface="+mn-cs"/>
+              </a:defRPr>
+            </a:lvl6pPr>
+            <a:lvl7pPr marL="1300000" indent="-228600" algn="l" defTabSz="914400" rtl="0" eaLnBrk="1" latinLnBrk="0" hangingPunct="1">
+              <a:lnSpc>
+                <a:spcPct val="90000"/>
+              </a:lnSpc>
+              <a:spcBef>
+                <a:spcPts val="200"/>
+              </a:spcBef>
+              <a:spcAft>
+                <a:spcPts val="400"/>
+              </a:spcAft>
+              <a:buClr>
+                <a:schemeClr val="accent1"/>
+              </a:buClr>
+              <a:buFont typeface="Calibri" pitchFamily="34" charset="0"/>
+              <a:buChar char="◦"/>
+              <a:defRPr sz="1400" kern="1200">
+                <a:solidFill>
+                  <a:schemeClr val="tx1">
+                    <a:lumMod val="75000"/>
+                    <a:lumOff val="25000"/>
+                  </a:schemeClr>
+                </a:solidFill>
+                <a:latin typeface="+mn-lt"/>
+                <a:ea typeface="+mn-ea"/>
+                <a:cs typeface="+mn-cs"/>
+              </a:defRPr>
+            </a:lvl7pPr>
+            <a:lvl8pPr marL="1500000" indent="-228600" algn="l" defTabSz="914400" rtl="0" eaLnBrk="1" latinLnBrk="0" hangingPunct="1">
+              <a:lnSpc>
+                <a:spcPct val="90000"/>
+              </a:lnSpc>
+              <a:spcBef>
+                <a:spcPts val="200"/>
+              </a:spcBef>
+              <a:spcAft>
+                <a:spcPts val="400"/>
+              </a:spcAft>
+              <a:buClr>
+                <a:schemeClr val="accent1"/>
+              </a:buClr>
+              <a:buFont typeface="Calibri" pitchFamily="34" charset="0"/>
+              <a:buChar char="◦"/>
+              <a:defRPr sz="1400" kern="1200">
+                <a:solidFill>
+                  <a:schemeClr val="tx1">
+                    <a:lumMod val="75000"/>
+                    <a:lumOff val="25000"/>
+                  </a:schemeClr>
+                </a:solidFill>
+                <a:latin typeface="+mn-lt"/>
+                <a:ea typeface="+mn-ea"/>
+                <a:cs typeface="+mn-cs"/>
+              </a:defRPr>
+            </a:lvl8pPr>
+            <a:lvl9pPr marL="1700000" indent="-228600" algn="l" defTabSz="914400" rtl="0" eaLnBrk="1" latinLnBrk="0" hangingPunct="1">
+              <a:lnSpc>
+                <a:spcPct val="90000"/>
+              </a:lnSpc>
+              <a:spcBef>
+                <a:spcPts val="200"/>
+              </a:spcBef>
+              <a:spcAft>
+                <a:spcPts val="400"/>
+              </a:spcAft>
+              <a:buClr>
+                <a:schemeClr val="accent1"/>
+              </a:buClr>
+              <a:buFont typeface="Calibri" pitchFamily="34" charset="0"/>
+              <a:buChar char="◦"/>
+              <a:defRPr sz="1400" kern="1200">
+                <a:solidFill>
+                  <a:schemeClr val="tx1">
+                    <a:lumMod val="75000"/>
+                    <a:lumOff val="25000"/>
+                  </a:schemeClr>
+                </a:solidFill>
+                <a:latin typeface="+mn-lt"/>
+                <a:ea typeface="+mn-ea"/>
+                <a:cs typeface="+mn-cs"/>
+              </a:defRPr>
+            </a:lvl9pPr>
+          </a:lstStyle>
+          <a:p>
+            <a:pPr lvl="1">
+              <a:lnSpc>
+                <a:spcPct val="130000"/>
+              </a:lnSpc>
+              <a:buFont typeface="Arial" panose="020B0604020202020204" pitchFamily="34" charset="0"/>
+              <a:buChar char="•"/>
+            </a:pPr>
+            <a:r>
+              <a:rPr lang="hu-HU" sz="2000"/>
+              <a:t>Mobilalkalmazás</a:t>
+            </a:r>
+          </a:p>
+          <a:p>
+            <a:pPr lvl="1">
+              <a:lnSpc>
+                <a:spcPct val="130000"/>
+              </a:lnSpc>
+              <a:buFont typeface="Arial" panose="020B0604020202020204" pitchFamily="34" charset="0"/>
+              <a:buChar char="•"/>
+            </a:pPr>
+            <a:r>
+              <a:rPr lang="hu-HU" sz="2000"/>
+              <a:t>Értesítés küldés</a:t>
+            </a:r>
+          </a:p>
+          <a:p>
+            <a:pPr lvl="1">
+              <a:lnSpc>
+                <a:spcPct val="130000"/>
+              </a:lnSpc>
+              <a:buFont typeface="Arial" panose="020B0604020202020204" pitchFamily="34" charset="0"/>
+              <a:buChar char="•"/>
+            </a:pPr>
+            <a:r>
+              <a:rPr lang="hu-HU" sz="2000"/>
+              <a:t>Több iskolára, több szolgáltatóra bontás</a:t>
+            </a:r>
+          </a:p>
+          <a:p>
+            <a:pPr lvl="1">
+              <a:lnSpc>
+                <a:spcPct val="130000"/>
+              </a:lnSpc>
+              <a:buFont typeface="Arial" panose="020B0604020202020204" pitchFamily="34" charset="0"/>
+              <a:buChar char="•"/>
+            </a:pPr>
+            <a:r>
+              <a:rPr lang="hu-HU" sz="2000"/>
+              <a:t>Ételek értékelése</a:t>
+            </a:r>
+          </a:p>
+          <a:p>
+            <a:pPr lvl="1">
+              <a:lnSpc>
+                <a:spcPct val="130000"/>
+              </a:lnSpc>
+              <a:buFont typeface="Arial" panose="020B0604020202020204" pitchFamily="34" charset="0"/>
+              <a:buChar char="•"/>
+            </a:pPr>
+            <a:r>
+              <a:rPr lang="hu-HU" sz="2000"/>
+              <a:t>Étkeztetési rend osztályokra, csoportokra bontva</a:t>
+            </a:r>
+          </a:p>
+          <a:p>
+            <a:pPr lvl="1">
+              <a:lnSpc>
+                <a:spcPct val="130000"/>
+              </a:lnSpc>
+              <a:buFont typeface="Arial" panose="020B0604020202020204" pitchFamily="34" charset="0"/>
+              <a:buChar char="•"/>
+            </a:pPr>
+            <a:r>
+              <a:rPr lang="hu-HU" sz="2000"/>
+              <a:t>Fizetés online (SimplePay)</a:t>
+            </a:r>
+          </a:p>
+          <a:p>
+            <a:pPr lvl="1">
+              <a:lnSpc>
+                <a:spcPct val="130000"/>
+              </a:lnSpc>
+              <a:buFont typeface="Arial" panose="020B0604020202020204" pitchFamily="34" charset="0"/>
+              <a:buChar char="•"/>
+            </a:pPr>
+            <a:r>
+              <a:rPr lang="hu-HU" sz="2000"/>
+              <a:t>Egyenleg feltöltése??</a:t>
+            </a:r>
+          </a:p>
+          <a:p>
+            <a:pPr marL="201168" lvl="1" indent="0">
+              <a:buFont typeface="Calibri" pitchFamily="34" charset="0"/>
+              <a:buNone/>
+            </a:pPr>
+            <a:endParaRPr lang="hu-HU" dirty="0"/>
+          </a:p>
+        </p:txBody>
+      </p:sp>
+    </p:spTree>
+    <p:extLst>
+      <p:ext uri="{BB962C8B-B14F-4D97-AF65-F5344CB8AC3E}">
+        <p14:creationId xmlns:p14="http://schemas.microsoft.com/office/powerpoint/2010/main" val="1380079028"/>
+      </p:ext>
+    </p:extLst>
+  </p:cSld>
+  <p:clrMapOvr>
+    <a:masterClrMapping/>
+  </p:clrMapOvr>
+</p:sld>
+</file>
+
 <file path=ppt/slides/slide17.xml><?xml version="1.0" encoding="utf-8"?>
 <p:sld xmlns:a="http://schemas.openxmlformats.org/drawingml/2006/main" xmlns:r="http://schemas.openxmlformats.org/officeDocument/2006/relationships" xmlns:p="http://schemas.openxmlformats.org/presentationml/2006/main">
   <p:cSld>
@@ -6480,139 +7016,398 @@
           <a:chExt cx="0" cy="0"/>
         </a:xfrm>
       </p:grpSpPr>
-      <p:sp>
-        <p:nvSpPr>
-          <p:cNvPr id="2" name="Cím 1">
+      <p:cxnSp>
+        <p:nvCxnSpPr>
+          <p:cNvPr id="2" name="Egyenes összekötő 1">
             <a:extLst>
               <a:ext uri="{FF2B5EF4-FFF2-40B4-BE49-F238E27FC236}">
-                <a16:creationId xmlns:a16="http://schemas.microsoft.com/office/drawing/2014/main" id="{90DA796D-D1FA-43BA-9B00-4A955CBFFB50}"/>
+                <a16:creationId xmlns:a16="http://schemas.microsoft.com/office/drawing/2014/main" id="{20EF3F3C-374B-461F-BAF4-6C213DE7C8BB}"/>
               </a:ext>
             </a:extLst>
           </p:cNvPr>
-          <p:cNvSpPr>
-            <a:spLocks noGrp="1"/>
-          </p:cNvSpPr>
-          <p:nvPr>
-            <p:ph type="title"/>
-          </p:nvPr>
-        </p:nvSpPr>
-        <p:spPr/>
-        <p:txBody>
-          <a:bodyPr/>
-          <a:lstStyle/>
-          <a:p>
-            <a:r>
-              <a:rPr lang="hu-HU" dirty="0">
-                <a:latin typeface="Bahnschrift SemiBold" panose="020B0502040204020203" pitchFamily="34" charset="0"/>
-              </a:rPr>
-              <a:t>Munkamegosztás</a:t>
-            </a:r>
-          </a:p>
-        </p:txBody>
-      </p:sp>
-      <p:grpSp>
-        <p:nvGrpSpPr>
-          <p:cNvPr id="13" name="Csoportba foglalás 12">
+          <p:cNvCxnSpPr>
+            <a:cxnSpLocks/>
+          </p:cNvCxnSpPr>
+          <p:nvPr/>
+        </p:nvCxnSpPr>
+        <p:spPr>
+          <a:xfrm>
+            <a:off x="3205163" y="2154342"/>
+            <a:ext cx="5781675" cy="0"/>
+          </a:xfrm>
+          <a:prstGeom prst="line">
+            <a:avLst/>
+          </a:prstGeom>
+          <a:ln>
+            <a:solidFill>
+              <a:schemeClr val="tx1">
+                <a:lumMod val="50000"/>
+                <a:lumOff val="50000"/>
+              </a:schemeClr>
+            </a:solidFill>
+          </a:ln>
+        </p:spPr>
+        <p:style>
+          <a:lnRef idx="1">
+            <a:schemeClr val="accent1"/>
+          </a:lnRef>
+          <a:fillRef idx="0">
+            <a:schemeClr val="accent1"/>
+          </a:fillRef>
+          <a:effectRef idx="0">
+            <a:schemeClr val="accent1"/>
+          </a:effectRef>
+          <a:fontRef idx="minor">
+            <a:schemeClr val="tx1"/>
+          </a:fontRef>
+        </p:style>
+      </p:cxnSp>
+      <p:pic>
+        <p:nvPicPr>
+          <p:cNvPr id="3" name="Kép 2">
             <a:extLst>
               <a:ext uri="{FF2B5EF4-FFF2-40B4-BE49-F238E27FC236}">
-                <a16:creationId xmlns:a16="http://schemas.microsoft.com/office/drawing/2014/main" id="{AE9C9B5C-3647-4331-A23A-21BDACE35043}"/>
+                <a16:creationId xmlns:a16="http://schemas.microsoft.com/office/drawing/2014/main" id="{FE91A941-BC8A-4E2A-B780-F3F3D6A9B3E3}"/>
               </a:ext>
             </a:extLst>
           </p:cNvPr>
-          <p:cNvGrpSpPr/>
+          <p:cNvPicPr>
+            <a:picLocks noChangeAspect="1"/>
+          </p:cNvPicPr>
           <p:nvPr/>
-        </p:nvGrpSpPr>
-        <p:grpSpPr>
+        </p:nvPicPr>
+        <p:blipFill rotWithShape="1">
+          <a:blip r:embed="rId2">
+            <a:alphaModFix/>
+            <a:extLst>
+              <a:ext uri="{28A0092B-C50C-407E-A947-70E740481C1C}">
+                <a14:useLocalDpi xmlns:a14="http://schemas.microsoft.com/office/drawing/2010/main" val="0"/>
+              </a:ext>
+            </a:extLst>
+          </a:blip>
+          <a:srcRect l="-1" t="58555" r="1153"/>
+          <a:stretch/>
+        </p:blipFill>
+        <p:spPr>
           <a:xfrm>
-            <a:off x="10565538" y="349786"/>
-            <a:ext cx="1418895" cy="1258023"/>
-            <a:chOff x="10565538" y="349786"/>
-            <a:chExt cx="1418895" cy="1258023"/>
+            <a:off x="3864953" y="1462194"/>
+            <a:ext cx="4462094" cy="616623"/>
           </a:xfrm>
-        </p:grpSpPr>
-        <p:pic>
-          <p:nvPicPr>
-            <p:cNvPr id="14" name="Kép 13">
-              <a:extLst>
-                <a:ext uri="{FF2B5EF4-FFF2-40B4-BE49-F238E27FC236}">
-                  <a16:creationId xmlns:a16="http://schemas.microsoft.com/office/drawing/2014/main" id="{7BBE353C-8DD5-4D44-BF46-275684749201}"/>
-                </a:ext>
-              </a:extLst>
-            </p:cNvPr>
-            <p:cNvPicPr>
-              <a:picLocks noChangeAspect="1"/>
-            </p:cNvPicPr>
-            <p:nvPr/>
-          </p:nvPicPr>
-          <p:blipFill rotWithShape="1">
-            <a:blip r:embed="rId3">
-              <a:alphaModFix amt="50000"/>
-              <a:extLst>
-                <a:ext uri="{28A0092B-C50C-407E-A947-70E740481C1C}">
-                  <a14:useLocalDpi xmlns:a14="http://schemas.microsoft.com/office/drawing/2010/main" val="0"/>
-                </a:ext>
-              </a:extLst>
-            </a:blip>
-            <a:srcRect t="58555" r="67375"/>
-            <a:stretch/>
-          </p:blipFill>
-          <p:spPr>
-            <a:xfrm>
-              <a:off x="10619475" y="1036308"/>
-              <a:ext cx="1364958" cy="571501"/>
-            </a:xfrm>
-            <a:prstGeom prst="rect">
-              <a:avLst/>
-            </a:prstGeom>
-          </p:spPr>
-        </p:pic>
-        <p:pic>
-          <p:nvPicPr>
-            <p:cNvPr id="15" name="Kép 14">
-              <a:extLst>
-                <a:ext uri="{FF2B5EF4-FFF2-40B4-BE49-F238E27FC236}">
-                  <a16:creationId xmlns:a16="http://schemas.microsoft.com/office/drawing/2014/main" id="{B2808543-D0AE-4FEC-9190-341AB17958C0}"/>
-                </a:ext>
-              </a:extLst>
-            </p:cNvPr>
-            <p:cNvPicPr>
-              <a:picLocks noChangeAspect="1"/>
-            </p:cNvPicPr>
-            <p:nvPr/>
-          </p:nvPicPr>
-          <p:blipFill rotWithShape="1">
-            <a:blip r:embed="rId3">
-              <a:alphaModFix amt="50000"/>
-              <a:extLst>
-                <a:ext uri="{28A0092B-C50C-407E-A947-70E740481C1C}">
-                  <a14:useLocalDpi xmlns:a14="http://schemas.microsoft.com/office/drawing/2010/main" val="0"/>
-                </a:ext>
-              </a:extLst>
-            </a:blip>
-            <a:srcRect l="1" r="61666" b="38896"/>
-            <a:stretch/>
-          </p:blipFill>
-          <p:spPr>
-            <a:xfrm>
-              <a:off x="10565538" y="349786"/>
-              <a:ext cx="1418895" cy="745451"/>
-            </a:xfrm>
-            <a:prstGeom prst="rect">
-              <a:avLst/>
-            </a:prstGeom>
-          </p:spPr>
-        </p:pic>
-      </p:grpSp>
+          <a:prstGeom prst="rect">
+            <a:avLst/>
+          </a:prstGeom>
+        </p:spPr>
+      </p:pic>
+      <p:pic>
+        <p:nvPicPr>
+          <p:cNvPr id="4" name="Kép 3">
+            <a:extLst>
+              <a:ext uri="{FF2B5EF4-FFF2-40B4-BE49-F238E27FC236}">
+                <a16:creationId xmlns:a16="http://schemas.microsoft.com/office/drawing/2014/main" id="{78D3DB18-E771-4DF0-84FA-206E8FA41883}"/>
+              </a:ext>
+            </a:extLst>
+          </p:cNvPr>
+          <p:cNvPicPr>
+            <a:picLocks noChangeAspect="1"/>
+          </p:cNvPicPr>
+          <p:nvPr/>
+        </p:nvPicPr>
+        <p:blipFill rotWithShape="1">
+          <a:blip r:embed="rId2">
+            <a:alphaModFix/>
+            <a:extLst>
+              <a:ext uri="{28A0092B-C50C-407E-A947-70E740481C1C}">
+                <a14:useLocalDpi xmlns:a14="http://schemas.microsoft.com/office/drawing/2010/main" val="0"/>
+              </a:ext>
+            </a:extLst>
+          </a:blip>
+          <a:srcRect l="-1" r="-295" b="38896"/>
+          <a:stretch/>
+        </p:blipFill>
+        <p:spPr>
+          <a:xfrm>
+            <a:off x="3817995" y="581028"/>
+            <a:ext cx="4556011" cy="914838"/>
+          </a:xfrm>
+          <a:prstGeom prst="rect">
+            <a:avLst/>
+          </a:prstGeom>
+        </p:spPr>
+      </p:pic>
+      <p:sp>
+        <p:nvSpPr>
+          <p:cNvPr id="5" name="Cím 1">
+            <a:extLst>
+              <a:ext uri="{FF2B5EF4-FFF2-40B4-BE49-F238E27FC236}">
+                <a16:creationId xmlns:a16="http://schemas.microsoft.com/office/drawing/2014/main" id="{175A5A3F-6F8F-4002-ADBD-CD8C93ECEEE1}"/>
+              </a:ext>
+            </a:extLst>
+          </p:cNvPr>
+          <p:cNvSpPr txBox="1">
+            <a:spLocks/>
+          </p:cNvSpPr>
+          <p:nvPr/>
+        </p:nvSpPr>
+        <p:spPr>
+          <a:xfrm>
+            <a:off x="1066800" y="2703622"/>
+            <a:ext cx="10058400" cy="1450757"/>
+          </a:xfrm>
+          <a:prstGeom prst="rect">
+            <a:avLst/>
+          </a:prstGeom>
+        </p:spPr>
+        <p:txBody>
+          <a:bodyPr anchor="ctr"/>
+          <a:lstStyle>
+            <a:lvl1pPr algn="l" defTabSz="914400" rtl="0" eaLnBrk="1" latinLnBrk="0" hangingPunct="1">
+              <a:lnSpc>
+                <a:spcPct val="85000"/>
+              </a:lnSpc>
+              <a:spcBef>
+                <a:spcPct val="0"/>
+              </a:spcBef>
+              <a:buNone/>
+              <a:defRPr sz="4800" kern="1200" spc="-50" baseline="0">
+                <a:solidFill>
+                  <a:schemeClr val="tx1">
+                    <a:lumMod val="75000"/>
+                    <a:lumOff val="25000"/>
+                  </a:schemeClr>
+                </a:solidFill>
+                <a:latin typeface="+mj-lt"/>
+                <a:ea typeface="+mj-ea"/>
+                <a:cs typeface="+mj-cs"/>
+              </a:defRPr>
+            </a:lvl1pPr>
+          </a:lstStyle>
+          <a:p>
+            <a:pPr algn="ctr"/>
+            <a:r>
+              <a:rPr lang="hu-HU" sz="6000" b="1" dirty="0" err="1">
+                <a:latin typeface="Bahnschrift SemiBold" panose="020B0502040204020203" pitchFamily="34" charset="0"/>
+              </a:rPr>
+              <a:t>Demo</a:t>
+            </a:r>
+            <a:endParaRPr lang="hu-HU" sz="6000" b="1" dirty="0">
+              <a:latin typeface="Bahnschrift SemiBold" panose="020B0502040204020203" pitchFamily="34" charset="0"/>
+            </a:endParaRPr>
+          </a:p>
+        </p:txBody>
+      </p:sp>
+      <p:pic>
+        <p:nvPicPr>
+          <p:cNvPr id="12" name="Kép 11">
+            <a:extLst>
+              <a:ext uri="{FF2B5EF4-FFF2-40B4-BE49-F238E27FC236}">
+                <a16:creationId xmlns:a16="http://schemas.microsoft.com/office/drawing/2014/main" id="{0D5DF80E-C3F6-4A3A-98C9-825EEE99BBF4}"/>
+              </a:ext>
+            </a:extLst>
+          </p:cNvPr>
+          <p:cNvPicPr>
+            <a:picLocks noChangeAspect="1"/>
+          </p:cNvPicPr>
+          <p:nvPr/>
+        </p:nvPicPr>
+        <p:blipFill rotWithShape="1">
+          <a:blip r:embed="rId3">
+            <a:extLst>
+              <a:ext uri="{28A0092B-C50C-407E-A947-70E740481C1C}">
+                <a14:useLocalDpi xmlns:a14="http://schemas.microsoft.com/office/drawing/2010/main" val="0"/>
+              </a:ext>
+            </a:extLst>
+          </a:blip>
+          <a:srcRect l="16625" r="14640"/>
+          <a:stretch/>
+        </p:blipFill>
+        <p:spPr>
+          <a:xfrm rot="6074309">
+            <a:off x="253294" y="393819"/>
+            <a:ext cx="1804052" cy="1476375"/>
+          </a:xfrm>
+          <a:prstGeom prst="rect">
+            <a:avLst/>
+          </a:prstGeom>
+        </p:spPr>
+      </p:pic>
+      <p:pic>
+        <p:nvPicPr>
+          <p:cNvPr id="13" name="Kép 12">
+            <a:extLst>
+              <a:ext uri="{FF2B5EF4-FFF2-40B4-BE49-F238E27FC236}">
+                <a16:creationId xmlns:a16="http://schemas.microsoft.com/office/drawing/2014/main" id="{7AF0C74E-3043-40A3-8603-B30A83BB9DDF}"/>
+              </a:ext>
+            </a:extLst>
+          </p:cNvPr>
+          <p:cNvPicPr>
+            <a:picLocks noChangeAspect="1"/>
+          </p:cNvPicPr>
+          <p:nvPr/>
+        </p:nvPicPr>
+        <p:blipFill rotWithShape="1">
+          <a:blip r:embed="rId4">
+            <a:extLst>
+              <a:ext uri="{28A0092B-C50C-407E-A947-70E740481C1C}">
+                <a14:useLocalDpi xmlns:a14="http://schemas.microsoft.com/office/drawing/2010/main" val="0"/>
+              </a:ext>
+            </a:extLst>
+          </a:blip>
+          <a:srcRect l="31214" t="-711" r="26907" b="711"/>
+          <a:stretch/>
+        </p:blipFill>
+        <p:spPr>
+          <a:xfrm rot="4156304" flipH="1">
+            <a:off x="10842996" y="4624346"/>
+            <a:ext cx="1208569" cy="1623298"/>
+          </a:xfrm>
+          <a:prstGeom prst="rect">
+            <a:avLst/>
+          </a:prstGeom>
+        </p:spPr>
+      </p:pic>
     </p:spTree>
     <p:extLst>
       <p:ext uri="{BB962C8B-B14F-4D97-AF65-F5344CB8AC3E}">
-        <p14:creationId xmlns:p14="http://schemas.microsoft.com/office/powerpoint/2010/main" val="2866602286"/>
+        <p14:creationId xmlns:p14="http://schemas.microsoft.com/office/powerpoint/2010/main" val="1876273255"/>
       </p:ext>
     </p:extLst>
   </p:cSld>
   <p:clrMapOvr>
     <a:masterClrMapping/>
   </p:clrMapOvr>
+  <mc:AlternateContent xmlns:mc="http://schemas.openxmlformats.org/markup-compatibility/2006" xmlns:p159="http://schemas.microsoft.com/office/powerpoint/2015/09/main">
+    <mc:Choice Requires="p159">
+      <p:transition xmlns:p14="http://schemas.microsoft.com/office/powerpoint/2010/main" spd="slow" p14:dur="2000">
+        <p159:morph option="byObject"/>
+      </p:transition>
+    </mc:Choice>
+    <mc:Fallback xmlns="">
+      <p:transition spd="slow">
+        <p:fade/>
+      </p:transition>
+    </mc:Fallback>
+  </mc:AlternateContent>
+  <p:timing>
+    <p:tnLst>
+      <p:par>
+        <p:cTn id="1" dur="indefinite" restart="never" nodeType="tmRoot">
+          <p:childTnLst>
+            <p:seq concurrent="1" nextAc="seek">
+              <p:cTn id="2" dur="indefinite" nodeType="mainSeq">
+                <p:childTnLst>
+                  <p:par>
+                    <p:cTn id="3" fill="hold">
+                      <p:stCondLst>
+                        <p:cond delay="indefinite"/>
+                        <p:cond evt="onBegin" delay="0">
+                          <p:tn val="2"/>
+                        </p:cond>
+                      </p:stCondLst>
+                      <p:childTnLst>
+                        <p:par>
+                          <p:cTn id="4" fill="hold">
+                            <p:stCondLst>
+                              <p:cond delay="0"/>
+                            </p:stCondLst>
+                            <p:childTnLst>
+                              <p:par>
+                                <p:cTn id="5" presetID="10" presetClass="entr" presetSubtype="0" fill="hold" nodeType="withEffect">
+                                  <p:stCondLst>
+                                    <p:cond delay="0"/>
+                                  </p:stCondLst>
+                                  <p:childTnLst>
+                                    <p:set>
+                                      <p:cBhvr>
+                                        <p:cTn id="6" dur="1" fill="hold">
+                                          <p:stCondLst>
+                                            <p:cond delay="0"/>
+                                          </p:stCondLst>
+                                        </p:cTn>
+                                        <p:tgtEl>
+                                          <p:spTgt spid="12"/>
+                                        </p:tgtEl>
+                                        <p:attrNameLst>
+                                          <p:attrName>style.visibility</p:attrName>
+                                        </p:attrNameLst>
+                                      </p:cBhvr>
+                                      <p:to>
+                                        <p:strVal val="visible"/>
+                                      </p:to>
+                                    </p:set>
+                                    <p:animEffect transition="in" filter="fade">
+                                      <p:cBhvr>
+                                        <p:cTn id="7" dur="500"/>
+                                        <p:tgtEl>
+                                          <p:spTgt spid="12"/>
+                                        </p:tgtEl>
+                                      </p:cBhvr>
+                                    </p:animEffect>
+                                  </p:childTnLst>
+                                </p:cTn>
+                              </p:par>
+                              <p:par>
+                                <p:cTn id="8" presetID="10" presetClass="entr" presetSubtype="0" fill="hold" nodeType="withEffect">
+                                  <p:stCondLst>
+                                    <p:cond delay="0"/>
+                                  </p:stCondLst>
+                                  <p:childTnLst>
+                                    <p:set>
+                                      <p:cBhvr>
+                                        <p:cTn id="9" dur="1" fill="hold">
+                                          <p:stCondLst>
+                                            <p:cond delay="0"/>
+                                          </p:stCondLst>
+                                        </p:cTn>
+                                        <p:tgtEl>
+                                          <p:spTgt spid="13"/>
+                                        </p:tgtEl>
+                                        <p:attrNameLst>
+                                          <p:attrName>style.visibility</p:attrName>
+                                        </p:attrNameLst>
+                                      </p:cBhvr>
+                                      <p:to>
+                                        <p:strVal val="visible"/>
+                                      </p:to>
+                                    </p:set>
+                                    <p:animEffect transition="in" filter="fade">
+                                      <p:cBhvr>
+                                        <p:cTn id="10" dur="500"/>
+                                        <p:tgtEl>
+                                          <p:spTgt spid="13"/>
+                                        </p:tgtEl>
+                                      </p:cBhvr>
+                                    </p:animEffect>
+                                  </p:childTnLst>
+                                </p:cTn>
+                              </p:par>
+                            </p:childTnLst>
+                          </p:cTn>
+                        </p:par>
+                      </p:childTnLst>
+                    </p:cTn>
+                  </p:par>
+                </p:childTnLst>
+              </p:cTn>
+              <p:prevCondLst>
+                <p:cond evt="onPrev" delay="0">
+                  <p:tgtEl>
+                    <p:sldTgt/>
+                  </p:tgtEl>
+                </p:cond>
+              </p:prevCondLst>
+              <p:nextCondLst>
+                <p:cond evt="onNext" delay="0">
+                  <p:tgtEl>
+                    <p:sldTgt/>
+                  </p:tgtEl>
+                </p:cond>
+              </p:nextCondLst>
+            </p:seq>
+          </p:childTnLst>
+        </p:cTn>
+      </p:par>
+    </p:tnLst>
+  </p:timing>
 </p:sld>
 </file>
 
@@ -6641,148 +7436,12 @@
           <a:chExt cx="0" cy="0"/>
         </a:xfrm>
       </p:grpSpPr>
-      <p:sp>
-        <p:nvSpPr>
-          <p:cNvPr id="2" name="Cím 1">
+      <p:cxnSp>
+        <p:nvCxnSpPr>
+          <p:cNvPr id="2" name="Egyenes összekötő 1">
             <a:extLst>
               <a:ext uri="{FF2B5EF4-FFF2-40B4-BE49-F238E27FC236}">
-                <a16:creationId xmlns:a16="http://schemas.microsoft.com/office/drawing/2014/main" id="{68775652-02D3-4343-B0A8-5C16A252BBD7}"/>
-              </a:ext>
-            </a:extLst>
-          </p:cNvPr>
-          <p:cNvSpPr>
-            <a:spLocks noGrp="1"/>
-          </p:cNvSpPr>
-          <p:nvPr>
-            <p:ph type="title"/>
-          </p:nvPr>
-        </p:nvSpPr>
-        <p:spPr/>
-        <p:txBody>
-          <a:bodyPr/>
-          <a:lstStyle/>
-          <a:p>
-            <a:r>
-              <a:rPr lang="hu-HU" dirty="0">
-                <a:latin typeface="Bahnschrift SemiBold" panose="020B0502040204020203" pitchFamily="34" charset="0"/>
-              </a:rPr>
-              <a:t>Munkamegosztás - Backend</a:t>
-            </a:r>
-          </a:p>
-        </p:txBody>
-      </p:sp>
-      <p:sp>
-        <p:nvSpPr>
-          <p:cNvPr id="3" name="Szöveg helye 2">
-            <a:extLst>
-              <a:ext uri="{FF2B5EF4-FFF2-40B4-BE49-F238E27FC236}">
-                <a16:creationId xmlns:a16="http://schemas.microsoft.com/office/drawing/2014/main" id="{632DA0C3-2B61-4113-AD5E-5C0C7B466219}"/>
-              </a:ext>
-            </a:extLst>
-          </p:cNvPr>
-          <p:cNvSpPr>
-            <a:spLocks noGrp="1"/>
-          </p:cNvSpPr>
-          <p:nvPr>
-            <p:ph type="body" idx="1"/>
-          </p:nvPr>
-        </p:nvSpPr>
-        <p:spPr/>
-        <p:txBody>
-          <a:bodyPr/>
-          <a:lstStyle/>
-          <a:p>
-            <a:r>
-              <a:rPr lang="hu-HU" dirty="0"/>
-              <a:t>Atkári Ariella</a:t>
-            </a:r>
-          </a:p>
-        </p:txBody>
-      </p:sp>
-      <p:sp>
-        <p:nvSpPr>
-          <p:cNvPr id="4" name="Tartalom helye 3">
-            <a:extLst>
-              <a:ext uri="{FF2B5EF4-FFF2-40B4-BE49-F238E27FC236}">
-                <a16:creationId xmlns:a16="http://schemas.microsoft.com/office/drawing/2014/main" id="{9B6E21CF-8DD2-4C9D-94F2-3E42E0993C13}"/>
-              </a:ext>
-            </a:extLst>
-          </p:cNvPr>
-          <p:cNvSpPr>
-            <a:spLocks noGrp="1"/>
-          </p:cNvSpPr>
-          <p:nvPr>
-            <p:ph sz="half" idx="2"/>
-          </p:nvPr>
-        </p:nvSpPr>
-        <p:spPr/>
-        <p:txBody>
-          <a:bodyPr/>
-          <a:lstStyle/>
-          <a:p>
-            <a:endParaRPr lang="hu-HU"/>
-          </a:p>
-        </p:txBody>
-      </p:sp>
-      <p:sp>
-        <p:nvSpPr>
-          <p:cNvPr id="5" name="Szöveg helye 4">
-            <a:extLst>
-              <a:ext uri="{FF2B5EF4-FFF2-40B4-BE49-F238E27FC236}">
-                <a16:creationId xmlns:a16="http://schemas.microsoft.com/office/drawing/2014/main" id="{8CF772AA-AADB-421B-9B9F-F9CBC3774658}"/>
-              </a:ext>
-            </a:extLst>
-          </p:cNvPr>
-          <p:cNvSpPr>
-            <a:spLocks noGrp="1"/>
-          </p:cNvSpPr>
-          <p:nvPr>
-            <p:ph type="body" sz="quarter" idx="3"/>
-          </p:nvPr>
-        </p:nvSpPr>
-        <p:spPr/>
-        <p:txBody>
-          <a:bodyPr/>
-          <a:lstStyle/>
-          <a:p>
-            <a:r>
-              <a:rPr lang="hu-HU" dirty="0"/>
-              <a:t>Farkas Dominik</a:t>
-            </a:r>
-          </a:p>
-        </p:txBody>
-      </p:sp>
-      <p:sp>
-        <p:nvSpPr>
-          <p:cNvPr id="6" name="Tartalom helye 5">
-            <a:extLst>
-              <a:ext uri="{FF2B5EF4-FFF2-40B4-BE49-F238E27FC236}">
-                <a16:creationId xmlns:a16="http://schemas.microsoft.com/office/drawing/2014/main" id="{9FA3B530-5977-4B61-B1B0-6F0B4C637821}"/>
-              </a:ext>
-            </a:extLst>
-          </p:cNvPr>
-          <p:cNvSpPr>
-            <a:spLocks noGrp="1"/>
-          </p:cNvSpPr>
-          <p:nvPr>
-            <p:ph sz="quarter" idx="4"/>
-          </p:nvPr>
-        </p:nvSpPr>
-        <p:spPr/>
-        <p:txBody>
-          <a:bodyPr/>
-          <a:lstStyle/>
-          <a:p>
-            <a:endParaRPr lang="hu-HU"/>
-          </a:p>
-        </p:txBody>
-      </p:sp>
-      <p:cxnSp>
-        <p:nvCxnSpPr>
-          <p:cNvPr id="8" name="Egyenes összekötő 7">
-            <a:extLst>
-              <a:ext uri="{FF2B5EF4-FFF2-40B4-BE49-F238E27FC236}">
-                <a16:creationId xmlns:a16="http://schemas.microsoft.com/office/drawing/2014/main" id="{722FCDE3-11D2-4077-A015-66490BCC018E}"/>
+                <a16:creationId xmlns:a16="http://schemas.microsoft.com/office/drawing/2014/main" id="{20EF3F3C-374B-461F-BAF4-6C213DE7C8BB}"/>
               </a:ext>
             </a:extLst>
           </p:cNvPr>
@@ -6793,8 +7452,8 @@
         </p:nvCxnSpPr>
         <p:spPr>
           <a:xfrm>
-            <a:off x="1209600" y="1738800"/>
-            <a:ext cx="9946080" cy="0"/>
+            <a:off x="3205163" y="2154342"/>
+            <a:ext cx="5781675" cy="0"/>
           </a:xfrm>
           <a:prstGeom prst="line">
             <a:avLst/>
@@ -6823,109 +7482,349 @@
           </a:fontRef>
         </p:style>
       </p:cxnSp>
-      <p:grpSp>
-        <p:nvGrpSpPr>
-          <p:cNvPr id="9" name="Csoportba foglalás 8">
+      <p:pic>
+        <p:nvPicPr>
+          <p:cNvPr id="3" name="Kép 2">
             <a:extLst>
               <a:ext uri="{FF2B5EF4-FFF2-40B4-BE49-F238E27FC236}">
-                <a16:creationId xmlns:a16="http://schemas.microsoft.com/office/drawing/2014/main" id="{AD93B2E8-3D33-41C2-91A8-1FB692380CE5}"/>
+                <a16:creationId xmlns:a16="http://schemas.microsoft.com/office/drawing/2014/main" id="{FE91A941-BC8A-4E2A-B780-F3F3D6A9B3E3}"/>
               </a:ext>
             </a:extLst>
           </p:cNvPr>
-          <p:cNvGrpSpPr/>
+          <p:cNvPicPr>
+            <a:picLocks noChangeAspect="1"/>
+          </p:cNvPicPr>
           <p:nvPr/>
-        </p:nvGrpSpPr>
-        <p:grpSpPr>
+        </p:nvPicPr>
+        <p:blipFill rotWithShape="1">
+          <a:blip r:embed="rId2">
+            <a:alphaModFix/>
+            <a:extLst>
+              <a:ext uri="{28A0092B-C50C-407E-A947-70E740481C1C}">
+                <a14:useLocalDpi xmlns:a14="http://schemas.microsoft.com/office/drawing/2010/main" val="0"/>
+              </a:ext>
+            </a:extLst>
+          </a:blip>
+          <a:srcRect l="-1" t="58555" r="1153"/>
+          <a:stretch/>
+        </p:blipFill>
+        <p:spPr>
           <a:xfrm>
-            <a:off x="10565538" y="349786"/>
-            <a:ext cx="1418895" cy="1258023"/>
-            <a:chOff x="10565538" y="349786"/>
-            <a:chExt cx="1418895" cy="1258023"/>
+            <a:off x="3864953" y="1462194"/>
+            <a:ext cx="4462094" cy="616623"/>
           </a:xfrm>
-        </p:grpSpPr>
-        <p:pic>
-          <p:nvPicPr>
-            <p:cNvPr id="10" name="Kép 9">
-              <a:extLst>
-                <a:ext uri="{FF2B5EF4-FFF2-40B4-BE49-F238E27FC236}">
-                  <a16:creationId xmlns:a16="http://schemas.microsoft.com/office/drawing/2014/main" id="{9966BA5A-A620-488E-8615-41FB1F1AE91D}"/>
-                </a:ext>
-              </a:extLst>
-            </p:cNvPr>
-            <p:cNvPicPr>
-              <a:picLocks noChangeAspect="1"/>
-            </p:cNvPicPr>
-            <p:nvPr/>
-          </p:nvPicPr>
-          <p:blipFill rotWithShape="1">
-            <a:blip r:embed="rId3">
-              <a:alphaModFix amt="50000"/>
-              <a:extLst>
-                <a:ext uri="{28A0092B-C50C-407E-A947-70E740481C1C}">
-                  <a14:useLocalDpi xmlns:a14="http://schemas.microsoft.com/office/drawing/2010/main" val="0"/>
-                </a:ext>
-              </a:extLst>
-            </a:blip>
-            <a:srcRect t="58555" r="67375"/>
-            <a:stretch/>
-          </p:blipFill>
-          <p:spPr>
-            <a:xfrm>
-              <a:off x="10619475" y="1036308"/>
-              <a:ext cx="1364958" cy="571501"/>
-            </a:xfrm>
-            <a:prstGeom prst="rect">
-              <a:avLst/>
-            </a:prstGeom>
-          </p:spPr>
-        </p:pic>
-        <p:pic>
-          <p:nvPicPr>
-            <p:cNvPr id="11" name="Kép 10">
-              <a:extLst>
-                <a:ext uri="{FF2B5EF4-FFF2-40B4-BE49-F238E27FC236}">
-                  <a16:creationId xmlns:a16="http://schemas.microsoft.com/office/drawing/2014/main" id="{3B382D26-9076-4156-8E56-6C797943E13E}"/>
-                </a:ext>
-              </a:extLst>
-            </p:cNvPr>
-            <p:cNvPicPr>
-              <a:picLocks noChangeAspect="1"/>
-            </p:cNvPicPr>
-            <p:nvPr/>
-          </p:nvPicPr>
-          <p:blipFill rotWithShape="1">
-            <a:blip r:embed="rId3">
-              <a:alphaModFix amt="50000"/>
-              <a:extLst>
-                <a:ext uri="{28A0092B-C50C-407E-A947-70E740481C1C}">
-                  <a14:useLocalDpi xmlns:a14="http://schemas.microsoft.com/office/drawing/2010/main" val="0"/>
-                </a:ext>
-              </a:extLst>
-            </a:blip>
-            <a:srcRect l="1" r="61666" b="38896"/>
-            <a:stretch/>
-          </p:blipFill>
-          <p:spPr>
-            <a:xfrm>
-              <a:off x="10565538" y="349786"/>
-              <a:ext cx="1418895" cy="745451"/>
-            </a:xfrm>
-            <a:prstGeom prst="rect">
-              <a:avLst/>
-            </a:prstGeom>
-          </p:spPr>
-        </p:pic>
-      </p:grpSp>
+          <a:prstGeom prst="rect">
+            <a:avLst/>
+          </a:prstGeom>
+        </p:spPr>
+      </p:pic>
+      <p:pic>
+        <p:nvPicPr>
+          <p:cNvPr id="4" name="Kép 3">
+            <a:extLst>
+              <a:ext uri="{FF2B5EF4-FFF2-40B4-BE49-F238E27FC236}">
+                <a16:creationId xmlns:a16="http://schemas.microsoft.com/office/drawing/2014/main" id="{78D3DB18-E771-4DF0-84FA-206E8FA41883}"/>
+              </a:ext>
+            </a:extLst>
+          </p:cNvPr>
+          <p:cNvPicPr>
+            <a:picLocks noChangeAspect="1"/>
+          </p:cNvPicPr>
+          <p:nvPr/>
+        </p:nvPicPr>
+        <p:blipFill rotWithShape="1">
+          <a:blip r:embed="rId2">
+            <a:alphaModFix/>
+            <a:extLst>
+              <a:ext uri="{28A0092B-C50C-407E-A947-70E740481C1C}">
+                <a14:useLocalDpi xmlns:a14="http://schemas.microsoft.com/office/drawing/2010/main" val="0"/>
+              </a:ext>
+            </a:extLst>
+          </a:blip>
+          <a:srcRect l="-1" r="-295" b="38896"/>
+          <a:stretch/>
+        </p:blipFill>
+        <p:spPr>
+          <a:xfrm>
+            <a:off x="3817995" y="581028"/>
+            <a:ext cx="4556011" cy="914838"/>
+          </a:xfrm>
+          <a:prstGeom prst="rect">
+            <a:avLst/>
+          </a:prstGeom>
+        </p:spPr>
+      </p:pic>
+      <p:sp>
+        <p:nvSpPr>
+          <p:cNvPr id="5" name="Cím 1">
+            <a:extLst>
+              <a:ext uri="{FF2B5EF4-FFF2-40B4-BE49-F238E27FC236}">
+                <a16:creationId xmlns:a16="http://schemas.microsoft.com/office/drawing/2014/main" id="{175A5A3F-6F8F-4002-ADBD-CD8C93ECEEE1}"/>
+              </a:ext>
+            </a:extLst>
+          </p:cNvPr>
+          <p:cNvSpPr txBox="1">
+            <a:spLocks/>
+          </p:cNvSpPr>
+          <p:nvPr/>
+        </p:nvSpPr>
+        <p:spPr>
+          <a:xfrm>
+            <a:off x="1066800" y="2703622"/>
+            <a:ext cx="10058400" cy="1450757"/>
+          </a:xfrm>
+          <a:prstGeom prst="rect">
+            <a:avLst/>
+          </a:prstGeom>
+        </p:spPr>
+        <p:txBody>
+          <a:bodyPr anchor="ctr"/>
+          <a:lstStyle>
+            <a:lvl1pPr algn="l" defTabSz="914400" rtl="0" eaLnBrk="1" latinLnBrk="0" hangingPunct="1">
+              <a:lnSpc>
+                <a:spcPct val="85000"/>
+              </a:lnSpc>
+              <a:spcBef>
+                <a:spcPct val="0"/>
+              </a:spcBef>
+              <a:buNone/>
+              <a:defRPr sz="4800" kern="1200" spc="-50" baseline="0">
+                <a:solidFill>
+                  <a:schemeClr val="tx1">
+                    <a:lumMod val="75000"/>
+                    <a:lumOff val="25000"/>
+                  </a:schemeClr>
+                </a:solidFill>
+                <a:latin typeface="+mj-lt"/>
+                <a:ea typeface="+mj-ea"/>
+                <a:cs typeface="+mj-cs"/>
+              </a:defRPr>
+            </a:lvl1pPr>
+          </a:lstStyle>
+          <a:p>
+            <a:pPr algn="ctr"/>
+            <a:r>
+              <a:rPr lang="hu-HU" sz="6000" b="1" dirty="0">
+                <a:latin typeface="Bahnschrift SemiBold" panose="020B0502040204020203" pitchFamily="34" charset="0"/>
+              </a:rPr>
+              <a:t>Kérdések</a:t>
+            </a:r>
+          </a:p>
+        </p:txBody>
+      </p:sp>
+      <p:pic>
+        <p:nvPicPr>
+          <p:cNvPr id="12" name="Kép 11">
+            <a:extLst>
+              <a:ext uri="{FF2B5EF4-FFF2-40B4-BE49-F238E27FC236}">
+                <a16:creationId xmlns:a16="http://schemas.microsoft.com/office/drawing/2014/main" id="{0D5DF80E-C3F6-4A3A-98C9-825EEE99BBF4}"/>
+              </a:ext>
+            </a:extLst>
+          </p:cNvPr>
+          <p:cNvPicPr>
+            <a:picLocks noChangeAspect="1"/>
+          </p:cNvPicPr>
+          <p:nvPr/>
+        </p:nvPicPr>
+        <p:blipFill rotWithShape="1">
+          <a:blip r:embed="rId3">
+            <a:extLst>
+              <a:ext uri="{28A0092B-C50C-407E-A947-70E740481C1C}">
+                <a14:useLocalDpi xmlns:a14="http://schemas.microsoft.com/office/drawing/2010/main" val="0"/>
+              </a:ext>
+            </a:extLst>
+          </a:blip>
+          <a:srcRect l="16625" r="14640"/>
+          <a:stretch/>
+        </p:blipFill>
+        <p:spPr>
+          <a:xfrm rot="6074309">
+            <a:off x="253294" y="393819"/>
+            <a:ext cx="1804052" cy="1476375"/>
+          </a:xfrm>
+          <a:prstGeom prst="rect">
+            <a:avLst/>
+          </a:prstGeom>
+        </p:spPr>
+      </p:pic>
+      <p:pic>
+        <p:nvPicPr>
+          <p:cNvPr id="13" name="Kép 12">
+            <a:extLst>
+              <a:ext uri="{FF2B5EF4-FFF2-40B4-BE49-F238E27FC236}">
+                <a16:creationId xmlns:a16="http://schemas.microsoft.com/office/drawing/2014/main" id="{7AF0C74E-3043-40A3-8603-B30A83BB9DDF}"/>
+              </a:ext>
+            </a:extLst>
+          </p:cNvPr>
+          <p:cNvPicPr>
+            <a:picLocks noChangeAspect="1"/>
+          </p:cNvPicPr>
+          <p:nvPr/>
+        </p:nvPicPr>
+        <p:blipFill rotWithShape="1">
+          <a:blip r:embed="rId4">
+            <a:extLst>
+              <a:ext uri="{28A0092B-C50C-407E-A947-70E740481C1C}">
+                <a14:useLocalDpi xmlns:a14="http://schemas.microsoft.com/office/drawing/2010/main" val="0"/>
+              </a:ext>
+            </a:extLst>
+          </a:blip>
+          <a:srcRect l="31214" t="-711" r="26907" b="711"/>
+          <a:stretch/>
+        </p:blipFill>
+        <p:spPr>
+          <a:xfrm rot="4156304" flipH="1">
+            <a:off x="10842996" y="4624346"/>
+            <a:ext cx="1208569" cy="1623298"/>
+          </a:xfrm>
+          <a:prstGeom prst="rect">
+            <a:avLst/>
+          </a:prstGeom>
+        </p:spPr>
+      </p:pic>
     </p:spTree>
     <p:extLst>
       <p:ext uri="{BB962C8B-B14F-4D97-AF65-F5344CB8AC3E}">
-        <p14:creationId xmlns:p14="http://schemas.microsoft.com/office/powerpoint/2010/main" val="1034913464"/>
+        <p14:creationId xmlns:p14="http://schemas.microsoft.com/office/powerpoint/2010/main" val="181564950"/>
       </p:ext>
     </p:extLst>
   </p:cSld>
   <p:clrMapOvr>
     <a:masterClrMapping/>
   </p:clrMapOvr>
+  <mc:AlternateContent xmlns:mc="http://schemas.openxmlformats.org/markup-compatibility/2006" xmlns:p159="http://schemas.microsoft.com/office/powerpoint/2015/09/main">
+    <mc:Choice Requires="p159">
+      <p:transition xmlns:p14="http://schemas.microsoft.com/office/powerpoint/2010/main" spd="slow" p14:dur="2000">
+        <p159:morph option="byObject"/>
+      </p:transition>
+    </mc:Choice>
+    <mc:Fallback xmlns="">
+      <p:transition spd="slow">
+        <p:fade/>
+      </p:transition>
+    </mc:Fallback>
+  </mc:AlternateContent>
+  <p:timing>
+    <p:tnLst>
+      <p:par>
+        <p:cTn id="1" dur="indefinite" restart="never" nodeType="tmRoot">
+          <p:childTnLst>
+            <p:seq concurrent="1" nextAc="seek">
+              <p:cTn id="2" dur="indefinite" nodeType="mainSeq">
+                <p:childTnLst>
+                  <p:par>
+                    <p:cTn id="3" fill="hold">
+                      <p:stCondLst>
+                        <p:cond delay="indefinite"/>
+                        <p:cond evt="onBegin" delay="0">
+                          <p:tn val="2"/>
+                        </p:cond>
+                      </p:stCondLst>
+                      <p:childTnLst>
+                        <p:par>
+                          <p:cTn id="4" fill="hold">
+                            <p:stCondLst>
+                              <p:cond delay="0"/>
+                            </p:stCondLst>
+                            <p:childTnLst>
+                              <p:par>
+                                <p:cTn id="5" presetID="10" presetClass="entr" presetSubtype="0" fill="hold" nodeType="withEffect">
+                                  <p:stCondLst>
+                                    <p:cond delay="0"/>
+                                  </p:stCondLst>
+                                  <p:childTnLst>
+                                    <p:set>
+                                      <p:cBhvr>
+                                        <p:cTn id="6" dur="1" fill="hold">
+                                          <p:stCondLst>
+                                            <p:cond delay="0"/>
+                                          </p:stCondLst>
+                                        </p:cTn>
+                                        <p:tgtEl>
+                                          <p:spTgt spid="12"/>
+                                        </p:tgtEl>
+                                        <p:attrNameLst>
+                                          <p:attrName>style.visibility</p:attrName>
+                                        </p:attrNameLst>
+                                      </p:cBhvr>
+                                      <p:to>
+                                        <p:strVal val="visible"/>
+                                      </p:to>
+                                    </p:set>
+                                    <p:animEffect transition="in" filter="fade">
+                                      <p:cBhvr>
+                                        <p:cTn id="7" dur="500"/>
+                                        <p:tgtEl>
+                                          <p:spTgt spid="12"/>
+                                        </p:tgtEl>
+                                      </p:cBhvr>
+                                    </p:animEffect>
+                                  </p:childTnLst>
+                                </p:cTn>
+                              </p:par>
+                              <p:par>
+                                <p:cTn id="8" presetID="10" presetClass="entr" presetSubtype="0" fill="hold" nodeType="withEffect">
+                                  <p:stCondLst>
+                                    <p:cond delay="0"/>
+                                  </p:stCondLst>
+                                  <p:childTnLst>
+                                    <p:set>
+                                      <p:cBhvr>
+                                        <p:cTn id="9" dur="1" fill="hold">
+                                          <p:stCondLst>
+                                            <p:cond delay="0"/>
+                                          </p:stCondLst>
+                                        </p:cTn>
+                                        <p:tgtEl>
+                                          <p:spTgt spid="13"/>
+                                        </p:tgtEl>
+                                        <p:attrNameLst>
+                                          <p:attrName>style.visibility</p:attrName>
+                                        </p:attrNameLst>
+                                      </p:cBhvr>
+                                      <p:to>
+                                        <p:strVal val="visible"/>
+                                      </p:to>
+                                    </p:set>
+                                    <p:animEffect transition="in" filter="fade">
+                                      <p:cBhvr>
+                                        <p:cTn id="10" dur="500"/>
+                                        <p:tgtEl>
+                                          <p:spTgt spid="13"/>
+                                        </p:tgtEl>
+                                      </p:cBhvr>
+                                    </p:animEffect>
+                                  </p:childTnLst>
+                                </p:cTn>
+                              </p:par>
+                            </p:childTnLst>
+                          </p:cTn>
+                        </p:par>
+                      </p:childTnLst>
+                    </p:cTn>
+                  </p:par>
+                </p:childTnLst>
+              </p:cTn>
+              <p:prevCondLst>
+                <p:cond evt="onPrev" delay="0">
+                  <p:tgtEl>
+                    <p:sldTgt/>
+                  </p:tgtEl>
+                </p:cond>
+              </p:prevCondLst>
+              <p:nextCondLst>
+                <p:cond evt="onNext" delay="0">
+                  <p:tgtEl>
+                    <p:sldTgt/>
+                  </p:tgtEl>
+                </p:cond>
+              </p:nextCondLst>
+            </p:seq>
+          </p:childTnLst>
+        </p:cTn>
+      </p:par>
+    </p:tnLst>
+  </p:timing>
 </p:sld>
 </file>
 
@@ -6954,245 +7853,395 @@
           <a:chExt cx="0" cy="0"/>
         </a:xfrm>
       </p:grpSpPr>
-      <p:sp>
-        <p:nvSpPr>
-          <p:cNvPr id="2" name="Cím 1">
+      <p:cxnSp>
+        <p:nvCxnSpPr>
+          <p:cNvPr id="2" name="Egyenes összekötő 1">
             <a:extLst>
               <a:ext uri="{FF2B5EF4-FFF2-40B4-BE49-F238E27FC236}">
-                <a16:creationId xmlns:a16="http://schemas.microsoft.com/office/drawing/2014/main" id="{68775652-02D3-4343-B0A8-5C16A252BBD7}"/>
+                <a16:creationId xmlns:a16="http://schemas.microsoft.com/office/drawing/2014/main" id="{20EF3F3C-374B-461F-BAF4-6C213DE7C8BB}"/>
               </a:ext>
             </a:extLst>
           </p:cNvPr>
-          <p:cNvSpPr>
-            <a:spLocks noGrp="1"/>
-          </p:cNvSpPr>
-          <p:nvPr>
-            <p:ph type="title"/>
-          </p:nvPr>
-        </p:nvSpPr>
-        <p:spPr/>
-        <p:txBody>
-          <a:bodyPr/>
-          <a:lstStyle/>
-          <a:p>
-            <a:r>
-              <a:rPr lang="hu-HU" dirty="0">
-                <a:latin typeface="Bahnschrift SemiBold" panose="020B0502040204020203" pitchFamily="34" charset="0"/>
-              </a:rPr>
-              <a:t>Munkamegosztás - Frontend</a:t>
-            </a:r>
-          </a:p>
-        </p:txBody>
-      </p:sp>
-      <p:sp>
-        <p:nvSpPr>
-          <p:cNvPr id="3" name="Szöveg helye 2">
+          <p:cNvCxnSpPr>
+            <a:cxnSpLocks/>
+          </p:cNvCxnSpPr>
+          <p:nvPr/>
+        </p:nvCxnSpPr>
+        <p:spPr>
+          <a:xfrm>
+            <a:off x="3205163" y="2154342"/>
+            <a:ext cx="5781675" cy="0"/>
+          </a:xfrm>
+          <a:prstGeom prst="line">
+            <a:avLst/>
+          </a:prstGeom>
+          <a:ln>
+            <a:solidFill>
+              <a:schemeClr val="tx1">
+                <a:lumMod val="50000"/>
+                <a:lumOff val="50000"/>
+              </a:schemeClr>
+            </a:solidFill>
+          </a:ln>
+        </p:spPr>
+        <p:style>
+          <a:lnRef idx="1">
+            <a:schemeClr val="accent1"/>
+          </a:lnRef>
+          <a:fillRef idx="0">
+            <a:schemeClr val="accent1"/>
+          </a:fillRef>
+          <a:effectRef idx="0">
+            <a:schemeClr val="accent1"/>
+          </a:effectRef>
+          <a:fontRef idx="minor">
+            <a:schemeClr val="tx1"/>
+          </a:fontRef>
+        </p:style>
+      </p:cxnSp>
+      <p:pic>
+        <p:nvPicPr>
+          <p:cNvPr id="3" name="Kép 2">
             <a:extLst>
               <a:ext uri="{FF2B5EF4-FFF2-40B4-BE49-F238E27FC236}">
-                <a16:creationId xmlns:a16="http://schemas.microsoft.com/office/drawing/2014/main" id="{632DA0C3-2B61-4113-AD5E-5C0C7B466219}"/>
+                <a16:creationId xmlns:a16="http://schemas.microsoft.com/office/drawing/2014/main" id="{FE91A941-BC8A-4E2A-B780-F3F3D6A9B3E3}"/>
               </a:ext>
             </a:extLst>
           </p:cNvPr>
-          <p:cNvSpPr>
-            <a:spLocks noGrp="1"/>
-          </p:cNvSpPr>
-          <p:nvPr>
-            <p:ph type="body" idx="1"/>
-          </p:nvPr>
-        </p:nvSpPr>
-        <p:spPr/>
-        <p:txBody>
-          <a:bodyPr/>
-          <a:lstStyle/>
-          <a:p>
-            <a:r>
-              <a:rPr lang="hu-HU" dirty="0"/>
-              <a:t>Atkári Ariella</a:t>
-            </a:r>
-          </a:p>
-        </p:txBody>
-      </p:sp>
-      <p:sp>
-        <p:nvSpPr>
-          <p:cNvPr id="4" name="Tartalom helye 3">
+          <p:cNvPicPr>
+            <a:picLocks noChangeAspect="1"/>
+          </p:cNvPicPr>
+          <p:nvPr/>
+        </p:nvPicPr>
+        <p:blipFill rotWithShape="1">
+          <a:blip r:embed="rId2">
+            <a:alphaModFix/>
+            <a:extLst>
+              <a:ext uri="{28A0092B-C50C-407E-A947-70E740481C1C}">
+                <a14:useLocalDpi xmlns:a14="http://schemas.microsoft.com/office/drawing/2010/main" val="0"/>
+              </a:ext>
+            </a:extLst>
+          </a:blip>
+          <a:srcRect l="-1" t="58555" r="1153"/>
+          <a:stretch/>
+        </p:blipFill>
+        <p:spPr>
+          <a:xfrm>
+            <a:off x="3864953" y="1462194"/>
+            <a:ext cx="4462094" cy="616623"/>
+          </a:xfrm>
+          <a:prstGeom prst="rect">
+            <a:avLst/>
+          </a:prstGeom>
+        </p:spPr>
+      </p:pic>
+      <p:pic>
+        <p:nvPicPr>
+          <p:cNvPr id="4" name="Kép 3">
             <a:extLst>
               <a:ext uri="{FF2B5EF4-FFF2-40B4-BE49-F238E27FC236}">
-                <a16:creationId xmlns:a16="http://schemas.microsoft.com/office/drawing/2014/main" id="{9B6E21CF-8DD2-4C9D-94F2-3E42E0993C13}"/>
+                <a16:creationId xmlns:a16="http://schemas.microsoft.com/office/drawing/2014/main" id="{78D3DB18-E771-4DF0-84FA-206E8FA41883}"/>
               </a:ext>
             </a:extLst>
           </p:cNvPr>
-          <p:cNvSpPr>
-            <a:spLocks noGrp="1"/>
-          </p:cNvSpPr>
-          <p:nvPr>
-            <p:ph sz="half" idx="2"/>
-          </p:nvPr>
-        </p:nvSpPr>
-        <p:spPr/>
-        <p:txBody>
-          <a:bodyPr/>
-          <a:lstStyle/>
-          <a:p>
-            <a:endParaRPr lang="hu-HU"/>
-          </a:p>
-        </p:txBody>
-      </p:sp>
-      <p:sp>
-        <p:nvSpPr>
-          <p:cNvPr id="5" name="Szöveg helye 4">
+          <p:cNvPicPr>
+            <a:picLocks noChangeAspect="1"/>
+          </p:cNvPicPr>
+          <p:nvPr/>
+        </p:nvPicPr>
+        <p:blipFill rotWithShape="1">
+          <a:blip r:embed="rId2">
+            <a:alphaModFix/>
+            <a:extLst>
+              <a:ext uri="{28A0092B-C50C-407E-A947-70E740481C1C}">
+                <a14:useLocalDpi xmlns:a14="http://schemas.microsoft.com/office/drawing/2010/main" val="0"/>
+              </a:ext>
+            </a:extLst>
+          </a:blip>
+          <a:srcRect l="-1" r="-295" b="38896"/>
+          <a:stretch/>
+        </p:blipFill>
+        <p:spPr>
+          <a:xfrm>
+            <a:off x="3817995" y="581028"/>
+            <a:ext cx="4556011" cy="914838"/>
+          </a:xfrm>
+          <a:prstGeom prst="rect">
+            <a:avLst/>
+          </a:prstGeom>
+        </p:spPr>
+      </p:pic>
+      <p:sp>
+        <p:nvSpPr>
+          <p:cNvPr id="5" name="Cím 1">
             <a:extLst>
               <a:ext uri="{FF2B5EF4-FFF2-40B4-BE49-F238E27FC236}">
-                <a16:creationId xmlns:a16="http://schemas.microsoft.com/office/drawing/2014/main" id="{8CF772AA-AADB-421B-9B9F-F9CBC3774658}"/>
+                <a16:creationId xmlns:a16="http://schemas.microsoft.com/office/drawing/2014/main" id="{175A5A3F-6F8F-4002-ADBD-CD8C93ECEEE1}"/>
               </a:ext>
             </a:extLst>
           </p:cNvPr>
-          <p:cNvSpPr>
-            <a:spLocks noGrp="1"/>
+          <p:cNvSpPr txBox="1">
+            <a:spLocks/>
           </p:cNvSpPr>
-          <p:nvPr>
-            <p:ph type="body" sz="quarter" idx="3"/>
-          </p:nvPr>
-        </p:nvSpPr>
-        <p:spPr/>
+          <p:nvPr/>
+        </p:nvSpPr>
+        <p:spPr>
+          <a:xfrm>
+            <a:off x="1066800" y="2703622"/>
+            <a:ext cx="10058400" cy="1450757"/>
+          </a:xfrm>
+          <a:prstGeom prst="rect">
+            <a:avLst/>
+          </a:prstGeom>
+        </p:spPr>
         <p:txBody>
-          <a:bodyPr/>
-          <a:lstStyle/>
-          <a:p>
-            <a:r>
-              <a:rPr lang="hu-HU" dirty="0"/>
-              <a:t>Farkas Dominik</a:t>
+          <a:bodyPr anchor="ctr"/>
+          <a:lstStyle>
+            <a:lvl1pPr algn="l" defTabSz="914400" rtl="0" eaLnBrk="1" latinLnBrk="0" hangingPunct="1">
+              <a:lnSpc>
+                <a:spcPct val="85000"/>
+              </a:lnSpc>
+              <a:spcBef>
+                <a:spcPct val="0"/>
+              </a:spcBef>
+              <a:buNone/>
+              <a:defRPr sz="4800" kern="1200" spc="-50" baseline="0">
+                <a:solidFill>
+                  <a:schemeClr val="tx1">
+                    <a:lumMod val="75000"/>
+                    <a:lumOff val="25000"/>
+                  </a:schemeClr>
+                </a:solidFill>
+                <a:latin typeface="+mj-lt"/>
+                <a:ea typeface="+mj-ea"/>
+                <a:cs typeface="+mj-cs"/>
+              </a:defRPr>
+            </a:lvl1pPr>
+          </a:lstStyle>
+          <a:p>
+            <a:pPr algn="ctr"/>
+            <a:r>
+              <a:rPr lang="hu-HU" sz="6000" b="1" dirty="0">
+                <a:latin typeface="Bahnschrift SemiBold" panose="020B0502040204020203" pitchFamily="34" charset="0"/>
+              </a:rPr>
+              <a:t>Köszönjük a figyelmet</a:t>
             </a:r>
           </a:p>
         </p:txBody>
       </p:sp>
-      <p:sp>
-        <p:nvSpPr>
-          <p:cNvPr id="6" name="Tartalom helye 5">
+      <p:pic>
+        <p:nvPicPr>
+          <p:cNvPr id="12" name="Kép 11">
             <a:extLst>
               <a:ext uri="{FF2B5EF4-FFF2-40B4-BE49-F238E27FC236}">
-                <a16:creationId xmlns:a16="http://schemas.microsoft.com/office/drawing/2014/main" id="{9FA3B530-5977-4B61-B1B0-6F0B4C637821}"/>
+                <a16:creationId xmlns:a16="http://schemas.microsoft.com/office/drawing/2014/main" id="{0D5DF80E-C3F6-4A3A-98C9-825EEE99BBF4}"/>
               </a:ext>
             </a:extLst>
           </p:cNvPr>
-          <p:cNvSpPr>
-            <a:spLocks noGrp="1"/>
-          </p:cNvSpPr>
-          <p:nvPr>
-            <p:ph sz="quarter" idx="4"/>
-          </p:nvPr>
-        </p:nvSpPr>
-        <p:spPr/>
-        <p:txBody>
-          <a:bodyPr/>
-          <a:lstStyle/>
-          <a:p>
-            <a:endParaRPr lang="hu-HU"/>
-          </a:p>
-        </p:txBody>
-      </p:sp>
-      <p:grpSp>
-        <p:nvGrpSpPr>
-          <p:cNvPr id="9" name="Csoportba foglalás 8">
+          <p:cNvPicPr>
+            <a:picLocks noChangeAspect="1"/>
+          </p:cNvPicPr>
+          <p:nvPr/>
+        </p:nvPicPr>
+        <p:blipFill rotWithShape="1">
+          <a:blip r:embed="rId3">
+            <a:extLst>
+              <a:ext uri="{28A0092B-C50C-407E-A947-70E740481C1C}">
+                <a14:useLocalDpi xmlns:a14="http://schemas.microsoft.com/office/drawing/2010/main" val="0"/>
+              </a:ext>
+            </a:extLst>
+          </a:blip>
+          <a:srcRect l="16625" r="14640"/>
+          <a:stretch/>
+        </p:blipFill>
+        <p:spPr>
+          <a:xfrm rot="6074309">
+            <a:off x="253294" y="393819"/>
+            <a:ext cx="1804052" cy="1476375"/>
+          </a:xfrm>
+          <a:prstGeom prst="rect">
+            <a:avLst/>
+          </a:prstGeom>
+        </p:spPr>
+      </p:pic>
+      <p:pic>
+        <p:nvPicPr>
+          <p:cNvPr id="13" name="Kép 12">
             <a:extLst>
               <a:ext uri="{FF2B5EF4-FFF2-40B4-BE49-F238E27FC236}">
-                <a16:creationId xmlns:a16="http://schemas.microsoft.com/office/drawing/2014/main" id="{9CCB05EC-19C9-456F-9487-5479DE8B814F}"/>
+                <a16:creationId xmlns:a16="http://schemas.microsoft.com/office/drawing/2014/main" id="{7AF0C74E-3043-40A3-8603-B30A83BB9DDF}"/>
               </a:ext>
             </a:extLst>
           </p:cNvPr>
-          <p:cNvGrpSpPr/>
+          <p:cNvPicPr>
+            <a:picLocks noChangeAspect="1"/>
+          </p:cNvPicPr>
           <p:nvPr/>
-        </p:nvGrpSpPr>
-        <p:grpSpPr>
-          <a:xfrm>
-            <a:off x="10565538" y="349786"/>
-            <a:ext cx="1418895" cy="1258023"/>
-            <a:chOff x="10565538" y="349786"/>
-            <a:chExt cx="1418895" cy="1258023"/>
+        </p:nvPicPr>
+        <p:blipFill rotWithShape="1">
+          <a:blip r:embed="rId4">
+            <a:extLst>
+              <a:ext uri="{28A0092B-C50C-407E-A947-70E740481C1C}">
+                <a14:useLocalDpi xmlns:a14="http://schemas.microsoft.com/office/drawing/2010/main" val="0"/>
+              </a:ext>
+            </a:extLst>
+          </a:blip>
+          <a:srcRect l="31214" t="-711" r="26907" b="711"/>
+          <a:stretch/>
+        </p:blipFill>
+        <p:spPr>
+          <a:xfrm rot="4156304" flipH="1">
+            <a:off x="10842996" y="4624346"/>
+            <a:ext cx="1208569" cy="1623298"/>
           </a:xfrm>
-        </p:grpSpPr>
-        <p:pic>
-          <p:nvPicPr>
-            <p:cNvPr id="10" name="Kép 9">
-              <a:extLst>
-                <a:ext uri="{FF2B5EF4-FFF2-40B4-BE49-F238E27FC236}">
-                  <a16:creationId xmlns:a16="http://schemas.microsoft.com/office/drawing/2014/main" id="{D42462C5-EA10-4682-9368-1798FDEF05D2}"/>
-                </a:ext>
-              </a:extLst>
-            </p:cNvPr>
-            <p:cNvPicPr>
-              <a:picLocks noChangeAspect="1"/>
-            </p:cNvPicPr>
-            <p:nvPr/>
-          </p:nvPicPr>
-          <p:blipFill rotWithShape="1">
-            <a:blip r:embed="rId3">
-              <a:alphaModFix amt="50000"/>
-              <a:extLst>
-                <a:ext uri="{28A0092B-C50C-407E-A947-70E740481C1C}">
-                  <a14:useLocalDpi xmlns:a14="http://schemas.microsoft.com/office/drawing/2010/main" val="0"/>
-                </a:ext>
-              </a:extLst>
-            </a:blip>
-            <a:srcRect t="58555" r="67375"/>
-            <a:stretch/>
-          </p:blipFill>
-          <p:spPr>
-            <a:xfrm>
-              <a:off x="10619475" y="1036308"/>
-              <a:ext cx="1364958" cy="571501"/>
-            </a:xfrm>
-            <a:prstGeom prst="rect">
-              <a:avLst/>
-            </a:prstGeom>
-          </p:spPr>
-        </p:pic>
-        <p:pic>
-          <p:nvPicPr>
-            <p:cNvPr id="11" name="Kép 10">
-              <a:extLst>
-                <a:ext uri="{FF2B5EF4-FFF2-40B4-BE49-F238E27FC236}">
-                  <a16:creationId xmlns:a16="http://schemas.microsoft.com/office/drawing/2014/main" id="{5CB6D66D-0490-469C-A967-3D189A93B8C1}"/>
-                </a:ext>
-              </a:extLst>
-            </p:cNvPr>
-            <p:cNvPicPr>
-              <a:picLocks noChangeAspect="1"/>
-            </p:cNvPicPr>
-            <p:nvPr/>
-          </p:nvPicPr>
-          <p:blipFill rotWithShape="1">
-            <a:blip r:embed="rId3">
-              <a:alphaModFix amt="50000"/>
-              <a:extLst>
-                <a:ext uri="{28A0092B-C50C-407E-A947-70E740481C1C}">
-                  <a14:useLocalDpi xmlns:a14="http://schemas.microsoft.com/office/drawing/2010/main" val="0"/>
-                </a:ext>
-              </a:extLst>
-            </a:blip>
-            <a:srcRect l="1" r="61666" b="38896"/>
-            <a:stretch/>
-          </p:blipFill>
-          <p:spPr>
-            <a:xfrm>
-              <a:off x="10565538" y="349786"/>
-              <a:ext cx="1418895" cy="745451"/>
-            </a:xfrm>
-            <a:prstGeom prst="rect">
-              <a:avLst/>
-            </a:prstGeom>
-          </p:spPr>
-        </p:pic>
-      </p:grpSp>
+          <a:prstGeom prst="rect">
+            <a:avLst/>
+          </a:prstGeom>
+        </p:spPr>
+      </p:pic>
     </p:spTree>
     <p:extLst>
       <p:ext uri="{BB962C8B-B14F-4D97-AF65-F5344CB8AC3E}">
-        <p14:creationId xmlns:p14="http://schemas.microsoft.com/office/powerpoint/2010/main" val="2386490870"/>
+        <p14:creationId xmlns:p14="http://schemas.microsoft.com/office/powerpoint/2010/main" val="3755244303"/>
       </p:ext>
     </p:extLst>
   </p:cSld>
   <p:clrMapOvr>
     <a:masterClrMapping/>
   </p:clrMapOvr>
+  <mc:AlternateContent xmlns:mc="http://schemas.openxmlformats.org/markup-compatibility/2006" xmlns:p159="http://schemas.microsoft.com/office/powerpoint/2015/09/main">
+    <mc:Choice Requires="p159">
+      <p:transition xmlns:p14="http://schemas.microsoft.com/office/powerpoint/2010/main" spd="slow" p14:dur="2000">
+        <p159:morph option="byObject"/>
+      </p:transition>
+    </mc:Choice>
+    <mc:Fallback xmlns="">
+      <p:transition spd="slow">
+        <p:fade/>
+      </p:transition>
+    </mc:Fallback>
+  </mc:AlternateContent>
+  <p:timing>
+    <p:tnLst>
+      <p:par>
+        <p:cTn id="1" dur="indefinite" restart="never" nodeType="tmRoot">
+          <p:childTnLst>
+            <p:seq concurrent="1" nextAc="seek">
+              <p:cTn id="2" dur="indefinite" nodeType="mainSeq">
+                <p:childTnLst>
+                  <p:par>
+                    <p:cTn id="3" fill="hold">
+                      <p:stCondLst>
+                        <p:cond delay="indefinite"/>
+                        <p:cond evt="onBegin" delay="0">
+                          <p:tn val="2"/>
+                        </p:cond>
+                      </p:stCondLst>
+                      <p:childTnLst>
+                        <p:par>
+                          <p:cTn id="4" fill="hold">
+                            <p:stCondLst>
+                              <p:cond delay="0"/>
+                            </p:stCondLst>
+                            <p:childTnLst>
+                              <p:par>
+                                <p:cTn id="5" presetID="10" presetClass="entr" presetSubtype="0" fill="hold" nodeType="withEffect">
+                                  <p:stCondLst>
+                                    <p:cond delay="0"/>
+                                  </p:stCondLst>
+                                  <p:childTnLst>
+                                    <p:set>
+                                      <p:cBhvr>
+                                        <p:cTn id="6" dur="1" fill="hold">
+                                          <p:stCondLst>
+                                            <p:cond delay="0"/>
+                                          </p:stCondLst>
+                                        </p:cTn>
+                                        <p:tgtEl>
+                                          <p:spTgt spid="12"/>
+                                        </p:tgtEl>
+                                        <p:attrNameLst>
+                                          <p:attrName>style.visibility</p:attrName>
+                                        </p:attrNameLst>
+                                      </p:cBhvr>
+                                      <p:to>
+                                        <p:strVal val="visible"/>
+                                      </p:to>
+                                    </p:set>
+                                    <p:animEffect transition="in" filter="fade">
+                                      <p:cBhvr>
+                                        <p:cTn id="7" dur="500"/>
+                                        <p:tgtEl>
+                                          <p:spTgt spid="12"/>
+                                        </p:tgtEl>
+                                      </p:cBhvr>
+                                    </p:animEffect>
+                                  </p:childTnLst>
+                                </p:cTn>
+                              </p:par>
+                              <p:par>
+                                <p:cTn id="8" presetID="10" presetClass="entr" presetSubtype="0" fill="hold" nodeType="withEffect">
+                                  <p:stCondLst>
+                                    <p:cond delay="0"/>
+                                  </p:stCondLst>
+                                  <p:childTnLst>
+                                    <p:set>
+                                      <p:cBhvr>
+                                        <p:cTn id="9" dur="1" fill="hold">
+                                          <p:stCondLst>
+                                            <p:cond delay="0"/>
+                                          </p:stCondLst>
+                                        </p:cTn>
+                                        <p:tgtEl>
+                                          <p:spTgt spid="13"/>
+                                        </p:tgtEl>
+                                        <p:attrNameLst>
+                                          <p:attrName>style.visibility</p:attrName>
+                                        </p:attrNameLst>
+                                      </p:cBhvr>
+                                      <p:to>
+                                        <p:strVal val="visible"/>
+                                      </p:to>
+                                    </p:set>
+                                    <p:animEffect transition="in" filter="fade">
+                                      <p:cBhvr>
+                                        <p:cTn id="10" dur="500"/>
+                                        <p:tgtEl>
+                                          <p:spTgt spid="13"/>
+                                        </p:tgtEl>
+                                      </p:cBhvr>
+                                    </p:animEffect>
+                                  </p:childTnLst>
+                                </p:cTn>
+                              </p:par>
+                            </p:childTnLst>
+                          </p:cTn>
+                        </p:par>
+                      </p:childTnLst>
+                    </p:cTn>
+                  </p:par>
+                </p:childTnLst>
+              </p:cTn>
+              <p:prevCondLst>
+                <p:cond evt="onPrev" delay="0">
+                  <p:tgtEl>
+                    <p:sldTgt/>
+                  </p:tgtEl>
+                </p:cond>
+              </p:prevCondLst>
+              <p:nextCondLst>
+                <p:cond evt="onNext" delay="0">
+                  <p:tgtEl>
+                    <p:sldTgt/>
+                  </p:tgtEl>
+                </p:cond>
+              </p:nextCondLst>
+            </p:seq>
+          </p:childTnLst>
+        </p:cTn>
+      </p:par>
+    </p:tnLst>
+  </p:timing>
 </p:sld>
 </file>
 
@@ -8278,1427 +9327,6 @@
   <p:clrMapOvr>
     <a:masterClrMapping/>
   </p:clrMapOvr>
-</p:sld>
-</file>
-
-<file path=ppt/slides/slide20.xml><?xml version="1.0" encoding="utf-8"?>
-<p:sld xmlns:a="http://schemas.openxmlformats.org/drawingml/2006/main" xmlns:r="http://schemas.openxmlformats.org/officeDocument/2006/relationships" xmlns:p="http://schemas.openxmlformats.org/presentationml/2006/main">
-  <p:cSld>
-    <p:bg>
-      <p:bgPr>
-        <a:solidFill>
-          <a:srgbClr val="FDF7E9"/>
-        </a:solidFill>
-        <a:effectLst/>
-      </p:bgPr>
-    </p:bg>
-    <p:spTree>
-      <p:nvGrpSpPr>
-        <p:cNvPr id="1" name=""/>
-        <p:cNvGrpSpPr/>
-        <p:nvPr/>
-      </p:nvGrpSpPr>
-      <p:grpSpPr>
-        <a:xfrm>
-          <a:off x="0" y="0"/>
-          <a:ext cx="0" cy="0"/>
-          <a:chOff x="0" y="0"/>
-          <a:chExt cx="0" cy="0"/>
-        </a:xfrm>
-      </p:grpSpPr>
-      <p:cxnSp>
-        <p:nvCxnSpPr>
-          <p:cNvPr id="2" name="Egyenes összekötő 1">
-            <a:extLst>
-              <a:ext uri="{FF2B5EF4-FFF2-40B4-BE49-F238E27FC236}">
-                <a16:creationId xmlns:a16="http://schemas.microsoft.com/office/drawing/2014/main" id="{20EF3F3C-374B-461F-BAF4-6C213DE7C8BB}"/>
-              </a:ext>
-            </a:extLst>
-          </p:cNvPr>
-          <p:cNvCxnSpPr>
-            <a:cxnSpLocks/>
-          </p:cNvCxnSpPr>
-          <p:nvPr/>
-        </p:nvCxnSpPr>
-        <p:spPr>
-          <a:xfrm>
-            <a:off x="1209675" y="1737360"/>
-            <a:ext cx="9946005" cy="0"/>
-          </a:xfrm>
-          <a:prstGeom prst="line">
-            <a:avLst/>
-          </a:prstGeom>
-          <a:ln>
-            <a:solidFill>
-              <a:schemeClr val="tx1">
-                <a:lumMod val="50000"/>
-                <a:lumOff val="50000"/>
-              </a:schemeClr>
-            </a:solidFill>
-          </a:ln>
-        </p:spPr>
-        <p:style>
-          <a:lnRef idx="1">
-            <a:schemeClr val="accent1"/>
-          </a:lnRef>
-          <a:fillRef idx="0">
-            <a:schemeClr val="accent1"/>
-          </a:fillRef>
-          <a:effectRef idx="0">
-            <a:schemeClr val="accent1"/>
-          </a:effectRef>
-          <a:fontRef idx="minor">
-            <a:schemeClr val="tx1"/>
-          </a:fontRef>
-        </p:style>
-      </p:cxnSp>
-      <p:pic>
-        <p:nvPicPr>
-          <p:cNvPr id="3" name="Kép 2">
-            <a:extLst>
-              <a:ext uri="{FF2B5EF4-FFF2-40B4-BE49-F238E27FC236}">
-                <a16:creationId xmlns:a16="http://schemas.microsoft.com/office/drawing/2014/main" id="{FE91A941-BC8A-4E2A-B780-F3F3D6A9B3E3}"/>
-              </a:ext>
-            </a:extLst>
-          </p:cNvPr>
-          <p:cNvPicPr>
-            <a:picLocks noChangeAspect="1"/>
-          </p:cNvPicPr>
-          <p:nvPr/>
-        </p:nvPicPr>
-        <p:blipFill rotWithShape="1">
-          <a:blip r:embed="rId2">
-            <a:alphaModFix amt="50000"/>
-            <a:extLst>
-              <a:ext uri="{28A0092B-C50C-407E-A947-70E740481C1C}">
-                <a14:useLocalDpi xmlns:a14="http://schemas.microsoft.com/office/drawing/2010/main" val="0"/>
-              </a:ext>
-            </a:extLst>
-          </a:blip>
-          <a:srcRect t="58555" r="67375"/>
-          <a:stretch/>
-        </p:blipFill>
-        <p:spPr>
-          <a:xfrm>
-            <a:off x="10619475" y="1036308"/>
-            <a:ext cx="1364958" cy="571501"/>
-          </a:xfrm>
-          <a:prstGeom prst="rect">
-            <a:avLst/>
-          </a:prstGeom>
-        </p:spPr>
-      </p:pic>
-      <p:pic>
-        <p:nvPicPr>
-          <p:cNvPr id="4" name="Kép 3">
-            <a:extLst>
-              <a:ext uri="{FF2B5EF4-FFF2-40B4-BE49-F238E27FC236}">
-                <a16:creationId xmlns:a16="http://schemas.microsoft.com/office/drawing/2014/main" id="{78D3DB18-E771-4DF0-84FA-206E8FA41883}"/>
-              </a:ext>
-            </a:extLst>
-          </p:cNvPr>
-          <p:cNvPicPr>
-            <a:picLocks noChangeAspect="1"/>
-          </p:cNvPicPr>
-          <p:nvPr/>
-        </p:nvPicPr>
-        <p:blipFill rotWithShape="1">
-          <a:blip r:embed="rId2">
-            <a:alphaModFix amt="50000"/>
-            <a:extLst>
-              <a:ext uri="{28A0092B-C50C-407E-A947-70E740481C1C}">
-                <a14:useLocalDpi xmlns:a14="http://schemas.microsoft.com/office/drawing/2010/main" val="0"/>
-              </a:ext>
-            </a:extLst>
-          </a:blip>
-          <a:srcRect l="1" r="61666" b="38896"/>
-          <a:stretch/>
-        </p:blipFill>
-        <p:spPr>
-          <a:xfrm>
-            <a:off x="10565538" y="349786"/>
-            <a:ext cx="1418895" cy="745451"/>
-          </a:xfrm>
-          <a:prstGeom prst="rect">
-            <a:avLst/>
-          </a:prstGeom>
-        </p:spPr>
-      </p:pic>
-      <p:sp>
-        <p:nvSpPr>
-          <p:cNvPr id="5" name="Cím 1">
-            <a:extLst>
-              <a:ext uri="{FF2B5EF4-FFF2-40B4-BE49-F238E27FC236}">
-                <a16:creationId xmlns:a16="http://schemas.microsoft.com/office/drawing/2014/main" id="{175A5A3F-6F8F-4002-ADBD-CD8C93ECEEE1}"/>
-              </a:ext>
-            </a:extLst>
-          </p:cNvPr>
-          <p:cNvSpPr txBox="1">
-            <a:spLocks/>
-          </p:cNvSpPr>
-          <p:nvPr/>
-        </p:nvSpPr>
-        <p:spPr>
-          <a:xfrm>
-            <a:off x="1097280" y="286603"/>
-            <a:ext cx="10058400" cy="1450757"/>
-          </a:xfrm>
-          <a:prstGeom prst="rect">
-            <a:avLst/>
-          </a:prstGeom>
-        </p:spPr>
-        <p:txBody>
-          <a:bodyPr anchor="b"/>
-          <a:lstStyle>
-            <a:lvl1pPr algn="l" defTabSz="914400" rtl="0" eaLnBrk="1" latinLnBrk="0" hangingPunct="1">
-              <a:lnSpc>
-                <a:spcPct val="85000"/>
-              </a:lnSpc>
-              <a:spcBef>
-                <a:spcPct val="0"/>
-              </a:spcBef>
-              <a:buNone/>
-              <a:defRPr sz="4800" kern="1200" spc="-50" baseline="0">
-                <a:solidFill>
-                  <a:schemeClr val="tx1">
-                    <a:lumMod val="75000"/>
-                    <a:lumOff val="25000"/>
-                  </a:schemeClr>
-                </a:solidFill>
-                <a:latin typeface="+mj-lt"/>
-                <a:ea typeface="+mj-ea"/>
-                <a:cs typeface="+mj-cs"/>
-              </a:defRPr>
-            </a:lvl1pPr>
-          </a:lstStyle>
-          <a:p>
-            <a:r>
-              <a:rPr lang="hu-HU" b="1" dirty="0">
-                <a:latin typeface="Bahnschrift SemiBold" panose="020B0502040204020203" pitchFamily="34" charset="0"/>
-              </a:rPr>
-              <a:t>Fejlesztési lehetőségek</a:t>
-            </a:r>
-          </a:p>
-        </p:txBody>
-      </p:sp>
-      <p:sp>
-        <p:nvSpPr>
-          <p:cNvPr id="6" name="Tartalom helye 2">
-            <a:extLst>
-              <a:ext uri="{FF2B5EF4-FFF2-40B4-BE49-F238E27FC236}">
-                <a16:creationId xmlns:a16="http://schemas.microsoft.com/office/drawing/2014/main" id="{654E07C9-ACD1-4AF5-9ECE-29158423F871}"/>
-              </a:ext>
-            </a:extLst>
-          </p:cNvPr>
-          <p:cNvSpPr txBox="1">
-            <a:spLocks/>
-          </p:cNvSpPr>
-          <p:nvPr/>
-        </p:nvSpPr>
-        <p:spPr>
-          <a:xfrm>
-            <a:off x="1097280" y="1845734"/>
-            <a:ext cx="10058400" cy="4023360"/>
-          </a:xfrm>
-          <a:prstGeom prst="rect">
-            <a:avLst/>
-          </a:prstGeom>
-        </p:spPr>
-        <p:txBody>
-          <a:bodyPr/>
-          <a:lstStyle>
-            <a:lvl1pPr marL="91440" indent="-91440" algn="l" defTabSz="914400" rtl="0" eaLnBrk="1" latinLnBrk="0" hangingPunct="1">
-              <a:lnSpc>
-                <a:spcPct val="90000"/>
-              </a:lnSpc>
-              <a:spcBef>
-                <a:spcPts val="1200"/>
-              </a:spcBef>
-              <a:spcAft>
-                <a:spcPts val="200"/>
-              </a:spcAft>
-              <a:buClr>
-                <a:schemeClr val="accent1"/>
-              </a:buClr>
-              <a:buSzPct val="100000"/>
-              <a:buFont typeface="Calibri" panose="020F0502020204030204" pitchFamily="34" charset="0"/>
-              <a:buChar char=" "/>
-              <a:defRPr sz="2000" kern="1200">
-                <a:solidFill>
-                  <a:schemeClr val="tx1">
-                    <a:lumMod val="75000"/>
-                    <a:lumOff val="25000"/>
-                  </a:schemeClr>
-                </a:solidFill>
-                <a:latin typeface="+mn-lt"/>
-                <a:ea typeface="+mn-ea"/>
-                <a:cs typeface="+mn-cs"/>
-              </a:defRPr>
-            </a:lvl1pPr>
-            <a:lvl2pPr marL="384048" indent="-182880" algn="l" defTabSz="914400" rtl="0" eaLnBrk="1" latinLnBrk="0" hangingPunct="1">
-              <a:lnSpc>
-                <a:spcPct val="90000"/>
-              </a:lnSpc>
-              <a:spcBef>
-                <a:spcPts val="200"/>
-              </a:spcBef>
-              <a:spcAft>
-                <a:spcPts val="400"/>
-              </a:spcAft>
-              <a:buClr>
-                <a:schemeClr val="accent1"/>
-              </a:buClr>
-              <a:buFont typeface="Calibri" pitchFamily="34" charset="0"/>
-              <a:buChar char="◦"/>
-              <a:defRPr sz="1800" kern="1200">
-                <a:solidFill>
-                  <a:schemeClr val="tx1">
-                    <a:lumMod val="75000"/>
-                    <a:lumOff val="25000"/>
-                  </a:schemeClr>
-                </a:solidFill>
-                <a:latin typeface="+mn-lt"/>
-                <a:ea typeface="+mn-ea"/>
-                <a:cs typeface="+mn-cs"/>
-              </a:defRPr>
-            </a:lvl2pPr>
-            <a:lvl3pPr marL="566928" indent="-182880" algn="l" defTabSz="914400" rtl="0" eaLnBrk="1" latinLnBrk="0" hangingPunct="1">
-              <a:lnSpc>
-                <a:spcPct val="90000"/>
-              </a:lnSpc>
-              <a:spcBef>
-                <a:spcPts val="200"/>
-              </a:spcBef>
-              <a:spcAft>
-                <a:spcPts val="400"/>
-              </a:spcAft>
-              <a:buClr>
-                <a:schemeClr val="accent1"/>
-              </a:buClr>
-              <a:buFont typeface="Calibri" pitchFamily="34" charset="0"/>
-              <a:buChar char="◦"/>
-              <a:defRPr sz="1400" kern="1200">
-                <a:solidFill>
-                  <a:schemeClr val="tx1">
-                    <a:lumMod val="75000"/>
-                    <a:lumOff val="25000"/>
-                  </a:schemeClr>
-                </a:solidFill>
-                <a:latin typeface="+mn-lt"/>
-                <a:ea typeface="+mn-ea"/>
-                <a:cs typeface="+mn-cs"/>
-              </a:defRPr>
-            </a:lvl3pPr>
-            <a:lvl4pPr marL="749808" indent="-182880" algn="l" defTabSz="914400" rtl="0" eaLnBrk="1" latinLnBrk="0" hangingPunct="1">
-              <a:lnSpc>
-                <a:spcPct val="90000"/>
-              </a:lnSpc>
-              <a:spcBef>
-                <a:spcPts val="200"/>
-              </a:spcBef>
-              <a:spcAft>
-                <a:spcPts val="400"/>
-              </a:spcAft>
-              <a:buClr>
-                <a:schemeClr val="accent1"/>
-              </a:buClr>
-              <a:buFont typeface="Calibri" pitchFamily="34" charset="0"/>
-              <a:buChar char="◦"/>
-              <a:defRPr sz="1400" kern="1200">
-                <a:solidFill>
-                  <a:schemeClr val="tx1">
-                    <a:lumMod val="75000"/>
-                    <a:lumOff val="25000"/>
-                  </a:schemeClr>
-                </a:solidFill>
-                <a:latin typeface="+mn-lt"/>
-                <a:ea typeface="+mn-ea"/>
-                <a:cs typeface="+mn-cs"/>
-              </a:defRPr>
-            </a:lvl4pPr>
-            <a:lvl5pPr marL="932688" indent="-182880" algn="l" defTabSz="914400" rtl="0" eaLnBrk="1" latinLnBrk="0" hangingPunct="1">
-              <a:lnSpc>
-                <a:spcPct val="90000"/>
-              </a:lnSpc>
-              <a:spcBef>
-                <a:spcPts val="200"/>
-              </a:spcBef>
-              <a:spcAft>
-                <a:spcPts val="400"/>
-              </a:spcAft>
-              <a:buClr>
-                <a:schemeClr val="accent1"/>
-              </a:buClr>
-              <a:buFont typeface="Calibri" pitchFamily="34" charset="0"/>
-              <a:buChar char="◦"/>
-              <a:defRPr sz="1400" kern="1200">
-                <a:solidFill>
-                  <a:schemeClr val="tx1">
-                    <a:lumMod val="75000"/>
-                    <a:lumOff val="25000"/>
-                  </a:schemeClr>
-                </a:solidFill>
-                <a:latin typeface="+mn-lt"/>
-                <a:ea typeface="+mn-ea"/>
-                <a:cs typeface="+mn-cs"/>
-              </a:defRPr>
-            </a:lvl5pPr>
-            <a:lvl6pPr marL="1100000" indent="-228600" algn="l" defTabSz="914400" rtl="0" eaLnBrk="1" latinLnBrk="0" hangingPunct="1">
-              <a:lnSpc>
-                <a:spcPct val="90000"/>
-              </a:lnSpc>
-              <a:spcBef>
-                <a:spcPts val="200"/>
-              </a:spcBef>
-              <a:spcAft>
-                <a:spcPts val="400"/>
-              </a:spcAft>
-              <a:buClr>
-                <a:schemeClr val="accent1"/>
-              </a:buClr>
-              <a:buFont typeface="Calibri" pitchFamily="34" charset="0"/>
-              <a:buChar char="◦"/>
-              <a:defRPr sz="1400" kern="1200">
-                <a:solidFill>
-                  <a:schemeClr val="tx1">
-                    <a:lumMod val="75000"/>
-                    <a:lumOff val="25000"/>
-                  </a:schemeClr>
-                </a:solidFill>
-                <a:latin typeface="+mn-lt"/>
-                <a:ea typeface="+mn-ea"/>
-                <a:cs typeface="+mn-cs"/>
-              </a:defRPr>
-            </a:lvl6pPr>
-            <a:lvl7pPr marL="1300000" indent="-228600" algn="l" defTabSz="914400" rtl="0" eaLnBrk="1" latinLnBrk="0" hangingPunct="1">
-              <a:lnSpc>
-                <a:spcPct val="90000"/>
-              </a:lnSpc>
-              <a:spcBef>
-                <a:spcPts val="200"/>
-              </a:spcBef>
-              <a:spcAft>
-                <a:spcPts val="400"/>
-              </a:spcAft>
-              <a:buClr>
-                <a:schemeClr val="accent1"/>
-              </a:buClr>
-              <a:buFont typeface="Calibri" pitchFamily="34" charset="0"/>
-              <a:buChar char="◦"/>
-              <a:defRPr sz="1400" kern="1200">
-                <a:solidFill>
-                  <a:schemeClr val="tx1">
-                    <a:lumMod val="75000"/>
-                    <a:lumOff val="25000"/>
-                  </a:schemeClr>
-                </a:solidFill>
-                <a:latin typeface="+mn-lt"/>
-                <a:ea typeface="+mn-ea"/>
-                <a:cs typeface="+mn-cs"/>
-              </a:defRPr>
-            </a:lvl7pPr>
-            <a:lvl8pPr marL="1500000" indent="-228600" algn="l" defTabSz="914400" rtl="0" eaLnBrk="1" latinLnBrk="0" hangingPunct="1">
-              <a:lnSpc>
-                <a:spcPct val="90000"/>
-              </a:lnSpc>
-              <a:spcBef>
-                <a:spcPts val="200"/>
-              </a:spcBef>
-              <a:spcAft>
-                <a:spcPts val="400"/>
-              </a:spcAft>
-              <a:buClr>
-                <a:schemeClr val="accent1"/>
-              </a:buClr>
-              <a:buFont typeface="Calibri" pitchFamily="34" charset="0"/>
-              <a:buChar char="◦"/>
-              <a:defRPr sz="1400" kern="1200">
-                <a:solidFill>
-                  <a:schemeClr val="tx1">
-                    <a:lumMod val="75000"/>
-                    <a:lumOff val="25000"/>
-                  </a:schemeClr>
-                </a:solidFill>
-                <a:latin typeface="+mn-lt"/>
-                <a:ea typeface="+mn-ea"/>
-                <a:cs typeface="+mn-cs"/>
-              </a:defRPr>
-            </a:lvl8pPr>
-            <a:lvl9pPr marL="1700000" indent="-228600" algn="l" defTabSz="914400" rtl="0" eaLnBrk="1" latinLnBrk="0" hangingPunct="1">
-              <a:lnSpc>
-                <a:spcPct val="90000"/>
-              </a:lnSpc>
-              <a:spcBef>
-                <a:spcPts val="200"/>
-              </a:spcBef>
-              <a:spcAft>
-                <a:spcPts val="400"/>
-              </a:spcAft>
-              <a:buClr>
-                <a:schemeClr val="accent1"/>
-              </a:buClr>
-              <a:buFont typeface="Calibri" pitchFamily="34" charset="0"/>
-              <a:buChar char="◦"/>
-              <a:defRPr sz="1400" kern="1200">
-                <a:solidFill>
-                  <a:schemeClr val="tx1">
-                    <a:lumMod val="75000"/>
-                    <a:lumOff val="25000"/>
-                  </a:schemeClr>
-                </a:solidFill>
-                <a:latin typeface="+mn-lt"/>
-                <a:ea typeface="+mn-ea"/>
-                <a:cs typeface="+mn-cs"/>
-              </a:defRPr>
-            </a:lvl9pPr>
-          </a:lstStyle>
-          <a:p>
-            <a:pPr lvl="1">
-              <a:lnSpc>
-                <a:spcPct val="130000"/>
-              </a:lnSpc>
-              <a:buFont typeface="Arial" panose="020B0604020202020204" pitchFamily="34" charset="0"/>
-              <a:buChar char="•"/>
-            </a:pPr>
-            <a:r>
-              <a:rPr lang="hu-HU" sz="2000"/>
-              <a:t>Mobilalkalmazás</a:t>
-            </a:r>
-          </a:p>
-          <a:p>
-            <a:pPr lvl="1">
-              <a:lnSpc>
-                <a:spcPct val="130000"/>
-              </a:lnSpc>
-              <a:buFont typeface="Arial" panose="020B0604020202020204" pitchFamily="34" charset="0"/>
-              <a:buChar char="•"/>
-            </a:pPr>
-            <a:r>
-              <a:rPr lang="hu-HU" sz="2000"/>
-              <a:t>Értesítés küldés</a:t>
-            </a:r>
-          </a:p>
-          <a:p>
-            <a:pPr lvl="1">
-              <a:lnSpc>
-                <a:spcPct val="130000"/>
-              </a:lnSpc>
-              <a:buFont typeface="Arial" panose="020B0604020202020204" pitchFamily="34" charset="0"/>
-              <a:buChar char="•"/>
-            </a:pPr>
-            <a:r>
-              <a:rPr lang="hu-HU" sz="2000"/>
-              <a:t>Több iskolára, több szolgáltatóra bontás</a:t>
-            </a:r>
-          </a:p>
-          <a:p>
-            <a:pPr lvl="1">
-              <a:lnSpc>
-                <a:spcPct val="130000"/>
-              </a:lnSpc>
-              <a:buFont typeface="Arial" panose="020B0604020202020204" pitchFamily="34" charset="0"/>
-              <a:buChar char="•"/>
-            </a:pPr>
-            <a:r>
-              <a:rPr lang="hu-HU" sz="2000"/>
-              <a:t>Ételek értékelése</a:t>
-            </a:r>
-          </a:p>
-          <a:p>
-            <a:pPr lvl="1">
-              <a:lnSpc>
-                <a:spcPct val="130000"/>
-              </a:lnSpc>
-              <a:buFont typeface="Arial" panose="020B0604020202020204" pitchFamily="34" charset="0"/>
-              <a:buChar char="•"/>
-            </a:pPr>
-            <a:r>
-              <a:rPr lang="hu-HU" sz="2000"/>
-              <a:t>Étkeztetési rend osztályokra, csoportokra bontva</a:t>
-            </a:r>
-          </a:p>
-          <a:p>
-            <a:pPr lvl="1">
-              <a:lnSpc>
-                <a:spcPct val="130000"/>
-              </a:lnSpc>
-              <a:buFont typeface="Arial" panose="020B0604020202020204" pitchFamily="34" charset="0"/>
-              <a:buChar char="•"/>
-            </a:pPr>
-            <a:r>
-              <a:rPr lang="hu-HU" sz="2000"/>
-              <a:t>Fizetés online (SimplePay)</a:t>
-            </a:r>
-          </a:p>
-          <a:p>
-            <a:pPr lvl="1">
-              <a:lnSpc>
-                <a:spcPct val="130000"/>
-              </a:lnSpc>
-              <a:buFont typeface="Arial" panose="020B0604020202020204" pitchFamily="34" charset="0"/>
-              <a:buChar char="•"/>
-            </a:pPr>
-            <a:r>
-              <a:rPr lang="hu-HU" sz="2000"/>
-              <a:t>Egyenleg feltöltése??</a:t>
-            </a:r>
-          </a:p>
-          <a:p>
-            <a:pPr marL="201168" lvl="1" indent="0">
-              <a:buFont typeface="Calibri" pitchFamily="34" charset="0"/>
-              <a:buNone/>
-            </a:pPr>
-            <a:endParaRPr lang="hu-HU" dirty="0"/>
-          </a:p>
-        </p:txBody>
-      </p:sp>
-    </p:spTree>
-    <p:extLst>
-      <p:ext uri="{BB962C8B-B14F-4D97-AF65-F5344CB8AC3E}">
-        <p14:creationId xmlns:p14="http://schemas.microsoft.com/office/powerpoint/2010/main" val="1380079028"/>
-      </p:ext>
-    </p:extLst>
-  </p:cSld>
-  <p:clrMapOvr>
-    <a:masterClrMapping/>
-  </p:clrMapOvr>
-</p:sld>
-</file>
-
-<file path=ppt/slides/slide21.xml><?xml version="1.0" encoding="utf-8"?>
-<p:sld xmlns:a="http://schemas.openxmlformats.org/drawingml/2006/main" xmlns:r="http://schemas.openxmlformats.org/officeDocument/2006/relationships" xmlns:p="http://schemas.openxmlformats.org/presentationml/2006/main">
-  <p:cSld>
-    <p:bg>
-      <p:bgPr>
-        <a:solidFill>
-          <a:srgbClr val="FDF7E9"/>
-        </a:solidFill>
-        <a:effectLst/>
-      </p:bgPr>
-    </p:bg>
-    <p:spTree>
-      <p:nvGrpSpPr>
-        <p:cNvPr id="1" name=""/>
-        <p:cNvGrpSpPr/>
-        <p:nvPr/>
-      </p:nvGrpSpPr>
-      <p:grpSpPr>
-        <a:xfrm>
-          <a:off x="0" y="0"/>
-          <a:ext cx="0" cy="0"/>
-          <a:chOff x="0" y="0"/>
-          <a:chExt cx="0" cy="0"/>
-        </a:xfrm>
-      </p:grpSpPr>
-      <p:cxnSp>
-        <p:nvCxnSpPr>
-          <p:cNvPr id="2" name="Egyenes összekötő 1">
-            <a:extLst>
-              <a:ext uri="{FF2B5EF4-FFF2-40B4-BE49-F238E27FC236}">
-                <a16:creationId xmlns:a16="http://schemas.microsoft.com/office/drawing/2014/main" id="{20EF3F3C-374B-461F-BAF4-6C213DE7C8BB}"/>
-              </a:ext>
-            </a:extLst>
-          </p:cNvPr>
-          <p:cNvCxnSpPr>
-            <a:cxnSpLocks/>
-          </p:cNvCxnSpPr>
-          <p:nvPr/>
-        </p:nvCxnSpPr>
-        <p:spPr>
-          <a:xfrm>
-            <a:off x="3205163" y="2154342"/>
-            <a:ext cx="5781675" cy="0"/>
-          </a:xfrm>
-          <a:prstGeom prst="line">
-            <a:avLst/>
-          </a:prstGeom>
-          <a:ln>
-            <a:solidFill>
-              <a:schemeClr val="tx1">
-                <a:lumMod val="50000"/>
-                <a:lumOff val="50000"/>
-              </a:schemeClr>
-            </a:solidFill>
-          </a:ln>
-        </p:spPr>
-        <p:style>
-          <a:lnRef idx="1">
-            <a:schemeClr val="accent1"/>
-          </a:lnRef>
-          <a:fillRef idx="0">
-            <a:schemeClr val="accent1"/>
-          </a:fillRef>
-          <a:effectRef idx="0">
-            <a:schemeClr val="accent1"/>
-          </a:effectRef>
-          <a:fontRef idx="minor">
-            <a:schemeClr val="tx1"/>
-          </a:fontRef>
-        </p:style>
-      </p:cxnSp>
-      <p:pic>
-        <p:nvPicPr>
-          <p:cNvPr id="3" name="Kép 2">
-            <a:extLst>
-              <a:ext uri="{FF2B5EF4-FFF2-40B4-BE49-F238E27FC236}">
-                <a16:creationId xmlns:a16="http://schemas.microsoft.com/office/drawing/2014/main" id="{FE91A941-BC8A-4E2A-B780-F3F3D6A9B3E3}"/>
-              </a:ext>
-            </a:extLst>
-          </p:cNvPr>
-          <p:cNvPicPr>
-            <a:picLocks noChangeAspect="1"/>
-          </p:cNvPicPr>
-          <p:nvPr/>
-        </p:nvPicPr>
-        <p:blipFill rotWithShape="1">
-          <a:blip r:embed="rId2">
-            <a:alphaModFix/>
-            <a:extLst>
-              <a:ext uri="{28A0092B-C50C-407E-A947-70E740481C1C}">
-                <a14:useLocalDpi xmlns:a14="http://schemas.microsoft.com/office/drawing/2010/main" val="0"/>
-              </a:ext>
-            </a:extLst>
-          </a:blip>
-          <a:srcRect l="-1" t="58555" r="1153"/>
-          <a:stretch/>
-        </p:blipFill>
-        <p:spPr>
-          <a:xfrm>
-            <a:off x="3864953" y="1462194"/>
-            <a:ext cx="4462094" cy="616623"/>
-          </a:xfrm>
-          <a:prstGeom prst="rect">
-            <a:avLst/>
-          </a:prstGeom>
-        </p:spPr>
-      </p:pic>
-      <p:pic>
-        <p:nvPicPr>
-          <p:cNvPr id="4" name="Kép 3">
-            <a:extLst>
-              <a:ext uri="{FF2B5EF4-FFF2-40B4-BE49-F238E27FC236}">
-                <a16:creationId xmlns:a16="http://schemas.microsoft.com/office/drawing/2014/main" id="{78D3DB18-E771-4DF0-84FA-206E8FA41883}"/>
-              </a:ext>
-            </a:extLst>
-          </p:cNvPr>
-          <p:cNvPicPr>
-            <a:picLocks noChangeAspect="1"/>
-          </p:cNvPicPr>
-          <p:nvPr/>
-        </p:nvPicPr>
-        <p:blipFill rotWithShape="1">
-          <a:blip r:embed="rId2">
-            <a:alphaModFix/>
-            <a:extLst>
-              <a:ext uri="{28A0092B-C50C-407E-A947-70E740481C1C}">
-                <a14:useLocalDpi xmlns:a14="http://schemas.microsoft.com/office/drawing/2010/main" val="0"/>
-              </a:ext>
-            </a:extLst>
-          </a:blip>
-          <a:srcRect l="-1" r="-295" b="38896"/>
-          <a:stretch/>
-        </p:blipFill>
-        <p:spPr>
-          <a:xfrm>
-            <a:off x="3817995" y="581028"/>
-            <a:ext cx="4556011" cy="914838"/>
-          </a:xfrm>
-          <a:prstGeom prst="rect">
-            <a:avLst/>
-          </a:prstGeom>
-        </p:spPr>
-      </p:pic>
-      <p:sp>
-        <p:nvSpPr>
-          <p:cNvPr id="5" name="Cím 1">
-            <a:extLst>
-              <a:ext uri="{FF2B5EF4-FFF2-40B4-BE49-F238E27FC236}">
-                <a16:creationId xmlns:a16="http://schemas.microsoft.com/office/drawing/2014/main" id="{175A5A3F-6F8F-4002-ADBD-CD8C93ECEEE1}"/>
-              </a:ext>
-            </a:extLst>
-          </p:cNvPr>
-          <p:cNvSpPr txBox="1">
-            <a:spLocks/>
-          </p:cNvSpPr>
-          <p:nvPr/>
-        </p:nvSpPr>
-        <p:spPr>
-          <a:xfrm>
-            <a:off x="1066800" y="2703622"/>
-            <a:ext cx="10058400" cy="1450757"/>
-          </a:xfrm>
-          <a:prstGeom prst="rect">
-            <a:avLst/>
-          </a:prstGeom>
-        </p:spPr>
-        <p:txBody>
-          <a:bodyPr anchor="ctr"/>
-          <a:lstStyle>
-            <a:lvl1pPr algn="l" defTabSz="914400" rtl="0" eaLnBrk="1" latinLnBrk="0" hangingPunct="1">
-              <a:lnSpc>
-                <a:spcPct val="85000"/>
-              </a:lnSpc>
-              <a:spcBef>
-                <a:spcPct val="0"/>
-              </a:spcBef>
-              <a:buNone/>
-              <a:defRPr sz="4800" kern="1200" spc="-50" baseline="0">
-                <a:solidFill>
-                  <a:schemeClr val="tx1">
-                    <a:lumMod val="75000"/>
-                    <a:lumOff val="25000"/>
-                  </a:schemeClr>
-                </a:solidFill>
-                <a:latin typeface="+mj-lt"/>
-                <a:ea typeface="+mj-ea"/>
-                <a:cs typeface="+mj-cs"/>
-              </a:defRPr>
-            </a:lvl1pPr>
-          </a:lstStyle>
-          <a:p>
-            <a:pPr algn="ctr"/>
-            <a:r>
-              <a:rPr lang="hu-HU" sz="6000" b="1" dirty="0" err="1">
-                <a:latin typeface="Bahnschrift SemiBold" panose="020B0502040204020203" pitchFamily="34" charset="0"/>
-              </a:rPr>
-              <a:t>Demo</a:t>
-            </a:r>
-            <a:endParaRPr lang="hu-HU" sz="6000" b="1" dirty="0">
-              <a:latin typeface="Bahnschrift SemiBold" panose="020B0502040204020203" pitchFamily="34" charset="0"/>
-            </a:endParaRPr>
-          </a:p>
-        </p:txBody>
-      </p:sp>
-      <p:pic>
-        <p:nvPicPr>
-          <p:cNvPr id="12" name="Kép 11">
-            <a:extLst>
-              <a:ext uri="{FF2B5EF4-FFF2-40B4-BE49-F238E27FC236}">
-                <a16:creationId xmlns:a16="http://schemas.microsoft.com/office/drawing/2014/main" id="{0D5DF80E-C3F6-4A3A-98C9-825EEE99BBF4}"/>
-              </a:ext>
-            </a:extLst>
-          </p:cNvPr>
-          <p:cNvPicPr>
-            <a:picLocks noChangeAspect="1"/>
-          </p:cNvPicPr>
-          <p:nvPr/>
-        </p:nvPicPr>
-        <p:blipFill rotWithShape="1">
-          <a:blip r:embed="rId3">
-            <a:extLst>
-              <a:ext uri="{28A0092B-C50C-407E-A947-70E740481C1C}">
-                <a14:useLocalDpi xmlns:a14="http://schemas.microsoft.com/office/drawing/2010/main" val="0"/>
-              </a:ext>
-            </a:extLst>
-          </a:blip>
-          <a:srcRect l="16625" r="14640"/>
-          <a:stretch/>
-        </p:blipFill>
-        <p:spPr>
-          <a:xfrm rot="6074309">
-            <a:off x="253294" y="393819"/>
-            <a:ext cx="1804052" cy="1476375"/>
-          </a:xfrm>
-          <a:prstGeom prst="rect">
-            <a:avLst/>
-          </a:prstGeom>
-        </p:spPr>
-      </p:pic>
-      <p:pic>
-        <p:nvPicPr>
-          <p:cNvPr id="13" name="Kép 12">
-            <a:extLst>
-              <a:ext uri="{FF2B5EF4-FFF2-40B4-BE49-F238E27FC236}">
-                <a16:creationId xmlns:a16="http://schemas.microsoft.com/office/drawing/2014/main" id="{7AF0C74E-3043-40A3-8603-B30A83BB9DDF}"/>
-              </a:ext>
-            </a:extLst>
-          </p:cNvPr>
-          <p:cNvPicPr>
-            <a:picLocks noChangeAspect="1"/>
-          </p:cNvPicPr>
-          <p:nvPr/>
-        </p:nvPicPr>
-        <p:blipFill rotWithShape="1">
-          <a:blip r:embed="rId4">
-            <a:extLst>
-              <a:ext uri="{28A0092B-C50C-407E-A947-70E740481C1C}">
-                <a14:useLocalDpi xmlns:a14="http://schemas.microsoft.com/office/drawing/2010/main" val="0"/>
-              </a:ext>
-            </a:extLst>
-          </a:blip>
-          <a:srcRect l="31214" t="-711" r="26907" b="711"/>
-          <a:stretch/>
-        </p:blipFill>
-        <p:spPr>
-          <a:xfrm rot="4156304" flipH="1">
-            <a:off x="10842996" y="4624346"/>
-            <a:ext cx="1208569" cy="1623298"/>
-          </a:xfrm>
-          <a:prstGeom prst="rect">
-            <a:avLst/>
-          </a:prstGeom>
-        </p:spPr>
-      </p:pic>
-    </p:spTree>
-    <p:extLst>
-      <p:ext uri="{BB962C8B-B14F-4D97-AF65-F5344CB8AC3E}">
-        <p14:creationId xmlns:p14="http://schemas.microsoft.com/office/powerpoint/2010/main" val="1876273255"/>
-      </p:ext>
-    </p:extLst>
-  </p:cSld>
-  <p:clrMapOvr>
-    <a:masterClrMapping/>
-  </p:clrMapOvr>
-  <mc:AlternateContent xmlns:mc="http://schemas.openxmlformats.org/markup-compatibility/2006" xmlns:p159="http://schemas.microsoft.com/office/powerpoint/2015/09/main">
-    <mc:Choice Requires="p159">
-      <p:transition xmlns:p14="http://schemas.microsoft.com/office/powerpoint/2010/main" spd="slow" p14:dur="2000">
-        <p159:morph option="byObject"/>
-      </p:transition>
-    </mc:Choice>
-    <mc:Fallback xmlns="">
-      <p:transition spd="slow">
-        <p:fade/>
-      </p:transition>
-    </mc:Fallback>
-  </mc:AlternateContent>
-  <p:timing>
-    <p:tnLst>
-      <p:par>
-        <p:cTn id="1" dur="indefinite" restart="never" nodeType="tmRoot">
-          <p:childTnLst>
-            <p:seq concurrent="1" nextAc="seek">
-              <p:cTn id="2" dur="indefinite" nodeType="mainSeq">
-                <p:childTnLst>
-                  <p:par>
-                    <p:cTn id="3" fill="hold">
-                      <p:stCondLst>
-                        <p:cond delay="indefinite"/>
-                        <p:cond evt="onBegin" delay="0">
-                          <p:tn val="2"/>
-                        </p:cond>
-                      </p:stCondLst>
-                      <p:childTnLst>
-                        <p:par>
-                          <p:cTn id="4" fill="hold">
-                            <p:stCondLst>
-                              <p:cond delay="0"/>
-                            </p:stCondLst>
-                            <p:childTnLst>
-                              <p:par>
-                                <p:cTn id="5" presetID="10" presetClass="entr" presetSubtype="0" fill="hold" nodeType="withEffect">
-                                  <p:stCondLst>
-                                    <p:cond delay="0"/>
-                                  </p:stCondLst>
-                                  <p:childTnLst>
-                                    <p:set>
-                                      <p:cBhvr>
-                                        <p:cTn id="6" dur="1" fill="hold">
-                                          <p:stCondLst>
-                                            <p:cond delay="0"/>
-                                          </p:stCondLst>
-                                        </p:cTn>
-                                        <p:tgtEl>
-                                          <p:spTgt spid="12"/>
-                                        </p:tgtEl>
-                                        <p:attrNameLst>
-                                          <p:attrName>style.visibility</p:attrName>
-                                        </p:attrNameLst>
-                                      </p:cBhvr>
-                                      <p:to>
-                                        <p:strVal val="visible"/>
-                                      </p:to>
-                                    </p:set>
-                                    <p:animEffect transition="in" filter="fade">
-                                      <p:cBhvr>
-                                        <p:cTn id="7" dur="500"/>
-                                        <p:tgtEl>
-                                          <p:spTgt spid="12"/>
-                                        </p:tgtEl>
-                                      </p:cBhvr>
-                                    </p:animEffect>
-                                  </p:childTnLst>
-                                </p:cTn>
-                              </p:par>
-                              <p:par>
-                                <p:cTn id="8" presetID="10" presetClass="entr" presetSubtype="0" fill="hold" nodeType="withEffect">
-                                  <p:stCondLst>
-                                    <p:cond delay="0"/>
-                                  </p:stCondLst>
-                                  <p:childTnLst>
-                                    <p:set>
-                                      <p:cBhvr>
-                                        <p:cTn id="9" dur="1" fill="hold">
-                                          <p:stCondLst>
-                                            <p:cond delay="0"/>
-                                          </p:stCondLst>
-                                        </p:cTn>
-                                        <p:tgtEl>
-                                          <p:spTgt spid="13"/>
-                                        </p:tgtEl>
-                                        <p:attrNameLst>
-                                          <p:attrName>style.visibility</p:attrName>
-                                        </p:attrNameLst>
-                                      </p:cBhvr>
-                                      <p:to>
-                                        <p:strVal val="visible"/>
-                                      </p:to>
-                                    </p:set>
-                                    <p:animEffect transition="in" filter="fade">
-                                      <p:cBhvr>
-                                        <p:cTn id="10" dur="500"/>
-                                        <p:tgtEl>
-                                          <p:spTgt spid="13"/>
-                                        </p:tgtEl>
-                                      </p:cBhvr>
-                                    </p:animEffect>
-                                  </p:childTnLst>
-                                </p:cTn>
-                              </p:par>
-                            </p:childTnLst>
-                          </p:cTn>
-                        </p:par>
-                      </p:childTnLst>
-                    </p:cTn>
-                  </p:par>
-                </p:childTnLst>
-              </p:cTn>
-              <p:prevCondLst>
-                <p:cond evt="onPrev" delay="0">
-                  <p:tgtEl>
-                    <p:sldTgt/>
-                  </p:tgtEl>
-                </p:cond>
-              </p:prevCondLst>
-              <p:nextCondLst>
-                <p:cond evt="onNext" delay="0">
-                  <p:tgtEl>
-                    <p:sldTgt/>
-                  </p:tgtEl>
-                </p:cond>
-              </p:nextCondLst>
-            </p:seq>
-          </p:childTnLst>
-        </p:cTn>
-      </p:par>
-    </p:tnLst>
-  </p:timing>
-</p:sld>
-</file>
-
-<file path=ppt/slides/slide22.xml><?xml version="1.0" encoding="utf-8"?>
-<p:sld xmlns:a="http://schemas.openxmlformats.org/drawingml/2006/main" xmlns:r="http://schemas.openxmlformats.org/officeDocument/2006/relationships" xmlns:p="http://schemas.openxmlformats.org/presentationml/2006/main">
-  <p:cSld>
-    <p:bg>
-      <p:bgPr>
-        <a:solidFill>
-          <a:srgbClr val="FDF7E9"/>
-        </a:solidFill>
-        <a:effectLst/>
-      </p:bgPr>
-    </p:bg>
-    <p:spTree>
-      <p:nvGrpSpPr>
-        <p:cNvPr id="1" name=""/>
-        <p:cNvGrpSpPr/>
-        <p:nvPr/>
-      </p:nvGrpSpPr>
-      <p:grpSpPr>
-        <a:xfrm>
-          <a:off x="0" y="0"/>
-          <a:ext cx="0" cy="0"/>
-          <a:chOff x="0" y="0"/>
-          <a:chExt cx="0" cy="0"/>
-        </a:xfrm>
-      </p:grpSpPr>
-      <p:cxnSp>
-        <p:nvCxnSpPr>
-          <p:cNvPr id="2" name="Egyenes összekötő 1">
-            <a:extLst>
-              <a:ext uri="{FF2B5EF4-FFF2-40B4-BE49-F238E27FC236}">
-                <a16:creationId xmlns:a16="http://schemas.microsoft.com/office/drawing/2014/main" id="{20EF3F3C-374B-461F-BAF4-6C213DE7C8BB}"/>
-              </a:ext>
-            </a:extLst>
-          </p:cNvPr>
-          <p:cNvCxnSpPr>
-            <a:cxnSpLocks/>
-          </p:cNvCxnSpPr>
-          <p:nvPr/>
-        </p:nvCxnSpPr>
-        <p:spPr>
-          <a:xfrm>
-            <a:off x="3205163" y="2154342"/>
-            <a:ext cx="5781675" cy="0"/>
-          </a:xfrm>
-          <a:prstGeom prst="line">
-            <a:avLst/>
-          </a:prstGeom>
-          <a:ln>
-            <a:solidFill>
-              <a:schemeClr val="tx1">
-                <a:lumMod val="50000"/>
-                <a:lumOff val="50000"/>
-              </a:schemeClr>
-            </a:solidFill>
-          </a:ln>
-        </p:spPr>
-        <p:style>
-          <a:lnRef idx="1">
-            <a:schemeClr val="accent1"/>
-          </a:lnRef>
-          <a:fillRef idx="0">
-            <a:schemeClr val="accent1"/>
-          </a:fillRef>
-          <a:effectRef idx="0">
-            <a:schemeClr val="accent1"/>
-          </a:effectRef>
-          <a:fontRef idx="minor">
-            <a:schemeClr val="tx1"/>
-          </a:fontRef>
-        </p:style>
-      </p:cxnSp>
-      <p:pic>
-        <p:nvPicPr>
-          <p:cNvPr id="3" name="Kép 2">
-            <a:extLst>
-              <a:ext uri="{FF2B5EF4-FFF2-40B4-BE49-F238E27FC236}">
-                <a16:creationId xmlns:a16="http://schemas.microsoft.com/office/drawing/2014/main" id="{FE91A941-BC8A-4E2A-B780-F3F3D6A9B3E3}"/>
-              </a:ext>
-            </a:extLst>
-          </p:cNvPr>
-          <p:cNvPicPr>
-            <a:picLocks noChangeAspect="1"/>
-          </p:cNvPicPr>
-          <p:nvPr/>
-        </p:nvPicPr>
-        <p:blipFill rotWithShape="1">
-          <a:blip r:embed="rId2">
-            <a:alphaModFix/>
-            <a:extLst>
-              <a:ext uri="{28A0092B-C50C-407E-A947-70E740481C1C}">
-                <a14:useLocalDpi xmlns:a14="http://schemas.microsoft.com/office/drawing/2010/main" val="0"/>
-              </a:ext>
-            </a:extLst>
-          </a:blip>
-          <a:srcRect l="-1" t="58555" r="1153"/>
-          <a:stretch/>
-        </p:blipFill>
-        <p:spPr>
-          <a:xfrm>
-            <a:off x="3864953" y="1462194"/>
-            <a:ext cx="4462094" cy="616623"/>
-          </a:xfrm>
-          <a:prstGeom prst="rect">
-            <a:avLst/>
-          </a:prstGeom>
-        </p:spPr>
-      </p:pic>
-      <p:pic>
-        <p:nvPicPr>
-          <p:cNvPr id="4" name="Kép 3">
-            <a:extLst>
-              <a:ext uri="{FF2B5EF4-FFF2-40B4-BE49-F238E27FC236}">
-                <a16:creationId xmlns:a16="http://schemas.microsoft.com/office/drawing/2014/main" id="{78D3DB18-E771-4DF0-84FA-206E8FA41883}"/>
-              </a:ext>
-            </a:extLst>
-          </p:cNvPr>
-          <p:cNvPicPr>
-            <a:picLocks noChangeAspect="1"/>
-          </p:cNvPicPr>
-          <p:nvPr/>
-        </p:nvPicPr>
-        <p:blipFill rotWithShape="1">
-          <a:blip r:embed="rId2">
-            <a:alphaModFix/>
-            <a:extLst>
-              <a:ext uri="{28A0092B-C50C-407E-A947-70E740481C1C}">
-                <a14:useLocalDpi xmlns:a14="http://schemas.microsoft.com/office/drawing/2010/main" val="0"/>
-              </a:ext>
-            </a:extLst>
-          </a:blip>
-          <a:srcRect l="-1" r="-295" b="38896"/>
-          <a:stretch/>
-        </p:blipFill>
-        <p:spPr>
-          <a:xfrm>
-            <a:off x="3817995" y="581028"/>
-            <a:ext cx="4556011" cy="914838"/>
-          </a:xfrm>
-          <a:prstGeom prst="rect">
-            <a:avLst/>
-          </a:prstGeom>
-        </p:spPr>
-      </p:pic>
-      <p:sp>
-        <p:nvSpPr>
-          <p:cNvPr id="5" name="Cím 1">
-            <a:extLst>
-              <a:ext uri="{FF2B5EF4-FFF2-40B4-BE49-F238E27FC236}">
-                <a16:creationId xmlns:a16="http://schemas.microsoft.com/office/drawing/2014/main" id="{175A5A3F-6F8F-4002-ADBD-CD8C93ECEEE1}"/>
-              </a:ext>
-            </a:extLst>
-          </p:cNvPr>
-          <p:cNvSpPr txBox="1">
-            <a:spLocks/>
-          </p:cNvSpPr>
-          <p:nvPr/>
-        </p:nvSpPr>
-        <p:spPr>
-          <a:xfrm>
-            <a:off x="1066800" y="2703622"/>
-            <a:ext cx="10058400" cy="1450757"/>
-          </a:xfrm>
-          <a:prstGeom prst="rect">
-            <a:avLst/>
-          </a:prstGeom>
-        </p:spPr>
-        <p:txBody>
-          <a:bodyPr anchor="ctr"/>
-          <a:lstStyle>
-            <a:lvl1pPr algn="l" defTabSz="914400" rtl="0" eaLnBrk="1" latinLnBrk="0" hangingPunct="1">
-              <a:lnSpc>
-                <a:spcPct val="85000"/>
-              </a:lnSpc>
-              <a:spcBef>
-                <a:spcPct val="0"/>
-              </a:spcBef>
-              <a:buNone/>
-              <a:defRPr sz="4800" kern="1200" spc="-50" baseline="0">
-                <a:solidFill>
-                  <a:schemeClr val="tx1">
-                    <a:lumMod val="75000"/>
-                    <a:lumOff val="25000"/>
-                  </a:schemeClr>
-                </a:solidFill>
-                <a:latin typeface="+mj-lt"/>
-                <a:ea typeface="+mj-ea"/>
-                <a:cs typeface="+mj-cs"/>
-              </a:defRPr>
-            </a:lvl1pPr>
-          </a:lstStyle>
-          <a:p>
-            <a:pPr algn="ctr"/>
-            <a:r>
-              <a:rPr lang="hu-HU" sz="6000" b="1" dirty="0">
-                <a:latin typeface="Bahnschrift SemiBold" panose="020B0502040204020203" pitchFamily="34" charset="0"/>
-              </a:rPr>
-              <a:t>Köszönjük a figyelmet</a:t>
-            </a:r>
-          </a:p>
-        </p:txBody>
-      </p:sp>
-      <p:pic>
-        <p:nvPicPr>
-          <p:cNvPr id="12" name="Kép 11">
-            <a:extLst>
-              <a:ext uri="{FF2B5EF4-FFF2-40B4-BE49-F238E27FC236}">
-                <a16:creationId xmlns:a16="http://schemas.microsoft.com/office/drawing/2014/main" id="{0D5DF80E-C3F6-4A3A-98C9-825EEE99BBF4}"/>
-              </a:ext>
-            </a:extLst>
-          </p:cNvPr>
-          <p:cNvPicPr>
-            <a:picLocks noChangeAspect="1"/>
-          </p:cNvPicPr>
-          <p:nvPr/>
-        </p:nvPicPr>
-        <p:blipFill rotWithShape="1">
-          <a:blip r:embed="rId3">
-            <a:extLst>
-              <a:ext uri="{28A0092B-C50C-407E-A947-70E740481C1C}">
-                <a14:useLocalDpi xmlns:a14="http://schemas.microsoft.com/office/drawing/2010/main" val="0"/>
-              </a:ext>
-            </a:extLst>
-          </a:blip>
-          <a:srcRect l="16625" r="14640"/>
-          <a:stretch/>
-        </p:blipFill>
-        <p:spPr>
-          <a:xfrm rot="6074309">
-            <a:off x="253294" y="393819"/>
-            <a:ext cx="1804052" cy="1476375"/>
-          </a:xfrm>
-          <a:prstGeom prst="rect">
-            <a:avLst/>
-          </a:prstGeom>
-        </p:spPr>
-      </p:pic>
-      <p:pic>
-        <p:nvPicPr>
-          <p:cNvPr id="13" name="Kép 12">
-            <a:extLst>
-              <a:ext uri="{FF2B5EF4-FFF2-40B4-BE49-F238E27FC236}">
-                <a16:creationId xmlns:a16="http://schemas.microsoft.com/office/drawing/2014/main" id="{7AF0C74E-3043-40A3-8603-B30A83BB9DDF}"/>
-              </a:ext>
-            </a:extLst>
-          </p:cNvPr>
-          <p:cNvPicPr>
-            <a:picLocks noChangeAspect="1"/>
-          </p:cNvPicPr>
-          <p:nvPr/>
-        </p:nvPicPr>
-        <p:blipFill rotWithShape="1">
-          <a:blip r:embed="rId4">
-            <a:extLst>
-              <a:ext uri="{28A0092B-C50C-407E-A947-70E740481C1C}">
-                <a14:useLocalDpi xmlns:a14="http://schemas.microsoft.com/office/drawing/2010/main" val="0"/>
-              </a:ext>
-            </a:extLst>
-          </a:blip>
-          <a:srcRect l="31214" t="-711" r="26907" b="711"/>
-          <a:stretch/>
-        </p:blipFill>
-        <p:spPr>
-          <a:xfrm rot="4156304" flipH="1">
-            <a:off x="10842996" y="4624346"/>
-            <a:ext cx="1208569" cy="1623298"/>
-          </a:xfrm>
-          <a:prstGeom prst="rect">
-            <a:avLst/>
-          </a:prstGeom>
-        </p:spPr>
-      </p:pic>
-    </p:spTree>
-    <p:extLst>
-      <p:ext uri="{BB962C8B-B14F-4D97-AF65-F5344CB8AC3E}">
-        <p14:creationId xmlns:p14="http://schemas.microsoft.com/office/powerpoint/2010/main" val="3755244303"/>
-      </p:ext>
-    </p:extLst>
-  </p:cSld>
-  <p:clrMapOvr>
-    <a:masterClrMapping/>
-  </p:clrMapOvr>
-  <mc:AlternateContent xmlns:mc="http://schemas.openxmlformats.org/markup-compatibility/2006" xmlns:p159="http://schemas.microsoft.com/office/powerpoint/2015/09/main">
-    <mc:Choice Requires="p159">
-      <p:transition xmlns:p14="http://schemas.microsoft.com/office/powerpoint/2010/main" spd="slow" p14:dur="2000">
-        <p159:morph option="byObject"/>
-      </p:transition>
-    </mc:Choice>
-    <mc:Fallback xmlns="">
-      <p:transition spd="slow">
-        <p:fade/>
-      </p:transition>
-    </mc:Fallback>
-  </mc:AlternateContent>
-  <p:timing>
-    <p:tnLst>
-      <p:par>
-        <p:cTn id="1" dur="indefinite" restart="never" nodeType="tmRoot">
-          <p:childTnLst>
-            <p:seq concurrent="1" nextAc="seek">
-              <p:cTn id="2" dur="indefinite" nodeType="mainSeq">
-                <p:childTnLst>
-                  <p:par>
-                    <p:cTn id="3" fill="hold">
-                      <p:stCondLst>
-                        <p:cond delay="indefinite"/>
-                        <p:cond evt="onBegin" delay="0">
-                          <p:tn val="2"/>
-                        </p:cond>
-                      </p:stCondLst>
-                      <p:childTnLst>
-                        <p:par>
-                          <p:cTn id="4" fill="hold">
-                            <p:stCondLst>
-                              <p:cond delay="0"/>
-                            </p:stCondLst>
-                            <p:childTnLst>
-                              <p:par>
-                                <p:cTn id="5" presetID="10" presetClass="entr" presetSubtype="0" fill="hold" nodeType="withEffect">
-                                  <p:stCondLst>
-                                    <p:cond delay="0"/>
-                                  </p:stCondLst>
-                                  <p:childTnLst>
-                                    <p:set>
-                                      <p:cBhvr>
-                                        <p:cTn id="6" dur="1" fill="hold">
-                                          <p:stCondLst>
-                                            <p:cond delay="0"/>
-                                          </p:stCondLst>
-                                        </p:cTn>
-                                        <p:tgtEl>
-                                          <p:spTgt spid="12"/>
-                                        </p:tgtEl>
-                                        <p:attrNameLst>
-                                          <p:attrName>style.visibility</p:attrName>
-                                        </p:attrNameLst>
-                                      </p:cBhvr>
-                                      <p:to>
-                                        <p:strVal val="visible"/>
-                                      </p:to>
-                                    </p:set>
-                                    <p:animEffect transition="in" filter="fade">
-                                      <p:cBhvr>
-                                        <p:cTn id="7" dur="500"/>
-                                        <p:tgtEl>
-                                          <p:spTgt spid="12"/>
-                                        </p:tgtEl>
-                                      </p:cBhvr>
-                                    </p:animEffect>
-                                  </p:childTnLst>
-                                </p:cTn>
-                              </p:par>
-                              <p:par>
-                                <p:cTn id="8" presetID="10" presetClass="entr" presetSubtype="0" fill="hold" nodeType="withEffect">
-                                  <p:stCondLst>
-                                    <p:cond delay="0"/>
-                                  </p:stCondLst>
-                                  <p:childTnLst>
-                                    <p:set>
-                                      <p:cBhvr>
-                                        <p:cTn id="9" dur="1" fill="hold">
-                                          <p:stCondLst>
-                                            <p:cond delay="0"/>
-                                          </p:stCondLst>
-                                        </p:cTn>
-                                        <p:tgtEl>
-                                          <p:spTgt spid="13"/>
-                                        </p:tgtEl>
-                                        <p:attrNameLst>
-                                          <p:attrName>style.visibility</p:attrName>
-                                        </p:attrNameLst>
-                                      </p:cBhvr>
-                                      <p:to>
-                                        <p:strVal val="visible"/>
-                                      </p:to>
-                                    </p:set>
-                                    <p:animEffect transition="in" filter="fade">
-                                      <p:cBhvr>
-                                        <p:cTn id="10" dur="500"/>
-                                        <p:tgtEl>
-                                          <p:spTgt spid="13"/>
-                                        </p:tgtEl>
-                                      </p:cBhvr>
-                                    </p:animEffect>
-                                  </p:childTnLst>
-                                </p:cTn>
-                              </p:par>
-                            </p:childTnLst>
-                          </p:cTn>
-                        </p:par>
-                      </p:childTnLst>
-                    </p:cTn>
-                  </p:par>
-                </p:childTnLst>
-              </p:cTn>
-              <p:prevCondLst>
-                <p:cond evt="onPrev" delay="0">
-                  <p:tgtEl>
-                    <p:sldTgt/>
-                  </p:tgtEl>
-                </p:cond>
-              </p:prevCondLst>
-              <p:nextCondLst>
-                <p:cond evt="onNext" delay="0">
-                  <p:tgtEl>
-                    <p:sldTgt/>
-                  </p:tgtEl>
-                </p:cond>
-              </p:nextCondLst>
-            </p:seq>
-          </p:childTnLst>
-        </p:cTn>
-      </p:par>
-    </p:tnLst>
-  </p:timing>
 </p:sld>
 </file>
 
@@ -10453,7 +10081,7 @@
               <a:rPr lang="hu-HU" sz="2000" dirty="0">
                 <a:latin typeface="Bahnschrift Light" panose="020B0502040204020203" pitchFamily="34" charset="0"/>
               </a:rPr>
-              <a:t> Nincs opció választási lehetőség</a:t>
+              <a:t> Nincs ételopció választási lehetőség</a:t>
             </a:r>
           </a:p>
           <a:p>
@@ -10637,7 +10265,7 @@
               <a:buChar char="•"/>
             </a:pPr>
             <a:r>
-              <a:rPr lang="hu-HU" sz="2000" dirty="0"/>
+              <a:rPr lang="hu-HU" sz="2200" dirty="0"/>
               <a:t> Regisztráció és bejelentkezés</a:t>
             </a:r>
           </a:p>
@@ -10650,7 +10278,7 @@
               <a:buChar char="•"/>
             </a:pPr>
             <a:r>
-              <a:rPr lang="hu-HU" sz="2000" dirty="0"/>
+              <a:rPr lang="hu-HU" sz="2200" dirty="0"/>
               <a:t> Étlapkezelés (menü opciók)</a:t>
             </a:r>
           </a:p>
@@ -10663,7 +10291,7 @@
               <a:buChar char="•"/>
             </a:pPr>
             <a:r>
-              <a:rPr lang="hu-HU" sz="2000" dirty="0"/>
+              <a:rPr lang="hu-HU" sz="2200" dirty="0"/>
               <a:t> Allergének, tápérték információk</a:t>
             </a:r>
           </a:p>
@@ -10676,7 +10304,7 @@
               <a:buChar char="•"/>
             </a:pPr>
             <a:r>
-              <a:rPr lang="hu-HU" sz="2000" dirty="0"/>
+              <a:rPr lang="hu-HU" sz="2200" dirty="0"/>
               <a:t> Rendelési és lemondási rendszer</a:t>
             </a:r>
           </a:p>
@@ -10689,7 +10317,7 @@
               <a:buChar char="•"/>
             </a:pPr>
             <a:r>
-              <a:rPr lang="hu-HU" sz="2000" dirty="0"/>
+              <a:rPr lang="hu-HU" sz="2200" dirty="0"/>
               <a:t> Ebédkártya leolvasás</a:t>
             </a:r>
           </a:p>
@@ -10702,7 +10330,7 @@
               <a:buChar char="•"/>
             </a:pPr>
             <a:r>
-              <a:rPr lang="hu-HU" sz="2000" dirty="0"/>
+              <a:rPr lang="hu-HU" sz="2200" dirty="0"/>
               <a:t> Számla generálás</a:t>
             </a:r>
           </a:p>
@@ -10892,45 +10520,97 @@
         </p:nvSpPr>
         <p:spPr>
           <a:xfrm>
-            <a:off x="1097280" y="1845733"/>
+            <a:off x="1785344" y="1889582"/>
             <a:ext cx="10058400" cy="4546013"/>
           </a:xfrm>
         </p:spPr>
         <p:txBody>
-          <a:bodyPr/>
+          <a:bodyPr>
+            <a:normAutofit/>
+          </a:bodyPr>
           <a:lstStyle/>
           <a:p>
             <a:pPr>
+              <a:lnSpc>
+                <a:spcPct val="150000"/>
+              </a:lnSpc>
               <a:buFont typeface="Wingdings" panose="05000000000000000000" pitchFamily="2" charset="2"/>
               <a:buChar char="v"/>
             </a:pPr>
             <a:r>
-              <a:rPr lang="hu-HU" dirty="0"/>
+              <a:rPr lang="hu-HU" sz="2200" dirty="0"/>
               <a:t> </a:t>
             </a:r>
             <a:r>
-              <a:rPr lang="hu-HU" dirty="0">
+              <a:rPr lang="hu-HU" sz="2200" dirty="0">
                 <a:solidFill>
                   <a:srgbClr val="BD582C"/>
                 </a:solidFill>
               </a:rPr>
-              <a:t>Backend – </a:t>
-            </a:r>
-            <a:r>
-              <a:rPr lang="hu-HU" dirty="0" err="1">
+              <a:t>Backend </a:t>
+            </a:r>
+          </a:p>
+          <a:p>
+            <a:pPr lvl="1">
+              <a:buFont typeface="Arial" panose="020B0604020202020204" pitchFamily="34" charset="0"/>
+              <a:buChar char="•"/>
+            </a:pPr>
+            <a:r>
+              <a:rPr lang="hu-HU" sz="2000" dirty="0" err="1"/>
+              <a:t>Laravel</a:t>
+            </a:r>
+            <a:endParaRPr lang="hu-HU" sz="2000" dirty="0"/>
+          </a:p>
+          <a:p>
+            <a:pPr>
+              <a:lnSpc>
+                <a:spcPct val="150000"/>
+              </a:lnSpc>
+              <a:buFont typeface="Wingdings" panose="05000000000000000000" pitchFamily="2" charset="2"/>
+              <a:buChar char="v"/>
+            </a:pPr>
+            <a:r>
+              <a:rPr lang="hu-HU" sz="2200" dirty="0"/>
+              <a:t> </a:t>
+            </a:r>
+            <a:r>
+              <a:rPr lang="hu-HU" sz="2200" dirty="0">
                 <a:solidFill>
                   <a:srgbClr val="BD582C"/>
                 </a:solidFill>
               </a:rPr>
-              <a:t>Laravel</a:t>
-            </a:r>
-            <a:r>
-              <a:rPr lang="hu-HU" dirty="0">
+              <a:t>Frontend </a:t>
+            </a:r>
+          </a:p>
+          <a:p>
+            <a:pPr lvl="1">
+              <a:buFont typeface="Arial" panose="020B0604020202020204" pitchFamily="34" charset="0"/>
+              <a:buChar char="•"/>
+            </a:pPr>
+            <a:r>
+              <a:rPr lang="hu-HU" sz="2000" dirty="0"/>
+              <a:t>Vue.js</a:t>
+            </a:r>
+          </a:p>
+          <a:p>
+            <a:pPr>
+              <a:lnSpc>
+                <a:spcPct val="150000"/>
+              </a:lnSpc>
+              <a:buFont typeface="Wingdings" panose="05000000000000000000" pitchFamily="2" charset="2"/>
+              <a:buChar char="v"/>
+            </a:pPr>
+            <a:r>
+              <a:rPr lang="hu-HU" sz="2200" dirty="0"/>
+              <a:t> </a:t>
+            </a:r>
+            <a:r>
+              <a:rPr lang="hu-HU" sz="2200" dirty="0">
                 <a:solidFill>
                   <a:srgbClr val="BD582C"/>
                 </a:solidFill>
               </a:rPr>
-              <a:t> </a:t>
+              <a:t>Adatbázis</a:t>
             </a:r>
           </a:p>
           <a:p>
@@ -10939,117 +10619,9 @@
               <a:buChar char="•"/>
             </a:pPr>
             <a:r>
-              <a:rPr lang="hu-HU" dirty="0" err="1"/>
-              <a:t>Sanctum</a:t>
-            </a:r>
-            <a:r>
-              <a:rPr lang="hu-HU" dirty="0"/>
-              <a:t> - </a:t>
-            </a:r>
-            <a:r>
-              <a:rPr lang="hu-HU" dirty="0" err="1"/>
-              <a:t>Autentikáció</a:t>
-            </a:r>
-            <a:endParaRPr lang="hu-HU" dirty="0"/>
-          </a:p>
-          <a:p>
-            <a:pPr lvl="1">
-              <a:buFont typeface="Arial" panose="020B0604020202020204" pitchFamily="34" charset="0"/>
-              <a:buChar char="•"/>
-            </a:pPr>
-            <a:r>
-              <a:rPr lang="hu-HU" dirty="0"/>
-              <a:t>Adatbázis migrációk</a:t>
-            </a:r>
-          </a:p>
-          <a:p>
-            <a:pPr>
-              <a:buFont typeface="Wingdings" panose="05000000000000000000" pitchFamily="2" charset="2"/>
-              <a:buChar char="v"/>
-            </a:pPr>
-            <a:r>
-              <a:rPr lang="hu-HU" dirty="0"/>
-              <a:t> </a:t>
-            </a:r>
-            <a:r>
-              <a:rPr lang="hu-HU" dirty="0">
-                <a:solidFill>
-                  <a:srgbClr val="BD582C"/>
-                </a:solidFill>
-              </a:rPr>
-              <a:t>Frontend – Vue.js </a:t>
-            </a:r>
-          </a:p>
-          <a:p>
-            <a:pPr lvl="1">
-              <a:buFont typeface="Arial" panose="020B0604020202020204" pitchFamily="34" charset="0"/>
-              <a:buChar char="•"/>
-            </a:pPr>
-            <a:r>
-              <a:rPr lang="hu-HU" dirty="0" err="1"/>
-              <a:t>Bootstrap</a:t>
-            </a:r>
-            <a:endParaRPr lang="hu-HU" dirty="0"/>
-          </a:p>
-          <a:p>
-            <a:pPr lvl="1">
-              <a:buFont typeface="Arial" panose="020B0604020202020204" pitchFamily="34" charset="0"/>
-              <a:buChar char="•"/>
-            </a:pPr>
-            <a:endParaRPr lang="hu-HU" dirty="0"/>
-          </a:p>
-          <a:p>
-            <a:pPr>
-              <a:buFont typeface="Wingdings" panose="05000000000000000000" pitchFamily="2" charset="2"/>
-              <a:buChar char="v"/>
-            </a:pPr>
-            <a:r>
-              <a:rPr lang="hu-HU" dirty="0"/>
-              <a:t> </a:t>
-            </a:r>
-            <a:r>
-              <a:rPr lang="hu-HU" dirty="0">
-                <a:solidFill>
-                  <a:srgbClr val="BD582C"/>
-                </a:solidFill>
-              </a:rPr>
-              <a:t>Adatbázis – </a:t>
-            </a:r>
-            <a:r>
-              <a:rPr lang="hu-HU" dirty="0" err="1">
-                <a:solidFill>
-                  <a:srgbClr val="BD582C"/>
-                </a:solidFill>
-              </a:rPr>
-              <a:t>MySQL</a:t>
-            </a:r>
-            <a:endParaRPr lang="hu-HU" dirty="0">
-              <a:solidFill>
-                <a:srgbClr val="BD582C"/>
-              </a:solidFill>
-            </a:endParaRPr>
-          </a:p>
-          <a:p>
-            <a:pPr lvl="1">
-              <a:buFont typeface="Arial" panose="020B0604020202020204" pitchFamily="34" charset="0"/>
-              <a:buChar char="•"/>
-            </a:pPr>
-            <a:r>
-              <a:rPr lang="hu-HU" dirty="0" err="1"/>
-              <a:t>Ampps</a:t>
-            </a:r>
-            <a:endParaRPr lang="hu-HU" dirty="0"/>
-          </a:p>
-          <a:p>
-            <a:pPr lvl="1">
-              <a:buFont typeface="Arial" panose="020B0604020202020204" pitchFamily="34" charset="0"/>
-              <a:buChar char="•"/>
-            </a:pPr>
-            <a:r>
-              <a:rPr lang="hu-HU" dirty="0" err="1"/>
-              <a:t>phpMyAdmin</a:t>
-            </a:r>
-            <a:endParaRPr lang="hu-HU" dirty="0"/>
+              <a:rPr lang="hu-HU" sz="2000" dirty="0"/>
+              <a:t>Relációs adatbázis</a:t>
+            </a:r>
           </a:p>
         </p:txBody>
       </p:sp>
@@ -11221,6 +10793,358 @@
       </p:grpSpPr>
       <p:sp>
         <p:nvSpPr>
+          <p:cNvPr id="2" name="Cím 1">
+            <a:extLst>
+              <a:ext uri="{FF2B5EF4-FFF2-40B4-BE49-F238E27FC236}">
+                <a16:creationId xmlns:a16="http://schemas.microsoft.com/office/drawing/2014/main" id="{68775652-02D3-4343-B0A8-5C16A252BBD7}"/>
+              </a:ext>
+            </a:extLst>
+          </p:cNvPr>
+          <p:cNvSpPr>
+            <a:spLocks noGrp="1"/>
+          </p:cNvSpPr>
+          <p:nvPr>
+            <p:ph type="title"/>
+          </p:nvPr>
+        </p:nvSpPr>
+        <p:spPr/>
+        <p:txBody>
+          <a:bodyPr/>
+          <a:lstStyle/>
+          <a:p>
+            <a:r>
+              <a:rPr lang="hu-HU" dirty="0">
+                <a:latin typeface="Bahnschrift SemiBold" panose="020B0502040204020203" pitchFamily="34" charset="0"/>
+              </a:rPr>
+              <a:t>Munkamegosztás</a:t>
+            </a:r>
+          </a:p>
+        </p:txBody>
+      </p:sp>
+      <p:sp>
+        <p:nvSpPr>
+          <p:cNvPr id="3" name="Szöveg helye 2">
+            <a:extLst>
+              <a:ext uri="{FF2B5EF4-FFF2-40B4-BE49-F238E27FC236}">
+                <a16:creationId xmlns:a16="http://schemas.microsoft.com/office/drawing/2014/main" id="{632DA0C3-2B61-4113-AD5E-5C0C7B466219}"/>
+              </a:ext>
+            </a:extLst>
+          </p:cNvPr>
+          <p:cNvSpPr>
+            <a:spLocks noGrp="1"/>
+          </p:cNvSpPr>
+          <p:nvPr>
+            <p:ph type="body" idx="1"/>
+          </p:nvPr>
+        </p:nvSpPr>
+        <p:spPr/>
+        <p:txBody>
+          <a:bodyPr/>
+          <a:lstStyle/>
+          <a:p>
+            <a:pPr algn="ctr"/>
+            <a:r>
+              <a:rPr lang="hu-HU" dirty="0"/>
+              <a:t>Atkári Ariella</a:t>
+            </a:r>
+          </a:p>
+        </p:txBody>
+      </p:sp>
+      <p:sp>
+        <p:nvSpPr>
+          <p:cNvPr id="4" name="Tartalom helye 3">
+            <a:extLst>
+              <a:ext uri="{FF2B5EF4-FFF2-40B4-BE49-F238E27FC236}">
+                <a16:creationId xmlns:a16="http://schemas.microsoft.com/office/drawing/2014/main" id="{9B6E21CF-8DD2-4C9D-94F2-3E42E0993C13}"/>
+              </a:ext>
+            </a:extLst>
+          </p:cNvPr>
+          <p:cNvSpPr>
+            <a:spLocks noGrp="1"/>
+          </p:cNvSpPr>
+          <p:nvPr>
+            <p:ph sz="half" idx="2"/>
+          </p:nvPr>
+        </p:nvSpPr>
+        <p:spPr/>
+        <p:txBody>
+          <a:bodyPr/>
+          <a:lstStyle/>
+          <a:p>
+            <a:pPr>
+              <a:buFont typeface="Wingdings" panose="05000000000000000000" pitchFamily="2" charset="2"/>
+              <a:buChar char="v"/>
+            </a:pPr>
+            <a:r>
+              <a:rPr lang="hu-HU" dirty="0"/>
+              <a:t> Backend</a:t>
+            </a:r>
+          </a:p>
+          <a:p>
+            <a:pPr>
+              <a:buFont typeface="Wingdings" panose="05000000000000000000" pitchFamily="2" charset="2"/>
+              <a:buChar char="v"/>
+            </a:pPr>
+            <a:r>
+              <a:rPr lang="hu-HU" dirty="0"/>
+              <a:t> Frontend</a:t>
+            </a:r>
+          </a:p>
+        </p:txBody>
+      </p:sp>
+      <p:sp>
+        <p:nvSpPr>
+          <p:cNvPr id="5" name="Szöveg helye 4">
+            <a:extLst>
+              <a:ext uri="{FF2B5EF4-FFF2-40B4-BE49-F238E27FC236}">
+                <a16:creationId xmlns:a16="http://schemas.microsoft.com/office/drawing/2014/main" id="{8CF772AA-AADB-421B-9B9F-F9CBC3774658}"/>
+              </a:ext>
+            </a:extLst>
+          </p:cNvPr>
+          <p:cNvSpPr>
+            <a:spLocks noGrp="1"/>
+          </p:cNvSpPr>
+          <p:nvPr>
+            <p:ph type="body" sz="quarter" idx="3"/>
+          </p:nvPr>
+        </p:nvSpPr>
+        <p:spPr/>
+        <p:txBody>
+          <a:bodyPr/>
+          <a:lstStyle/>
+          <a:p>
+            <a:pPr algn="ctr"/>
+            <a:r>
+              <a:rPr lang="hu-HU" dirty="0"/>
+              <a:t>Farkas Dominik</a:t>
+            </a:r>
+          </a:p>
+        </p:txBody>
+      </p:sp>
+      <p:sp>
+        <p:nvSpPr>
+          <p:cNvPr id="6" name="Tartalom helye 5">
+            <a:extLst>
+              <a:ext uri="{FF2B5EF4-FFF2-40B4-BE49-F238E27FC236}">
+                <a16:creationId xmlns:a16="http://schemas.microsoft.com/office/drawing/2014/main" id="{9FA3B530-5977-4B61-B1B0-6F0B4C637821}"/>
+              </a:ext>
+            </a:extLst>
+          </p:cNvPr>
+          <p:cNvSpPr>
+            <a:spLocks noGrp="1"/>
+          </p:cNvSpPr>
+          <p:nvPr>
+            <p:ph sz="quarter" idx="4"/>
+          </p:nvPr>
+        </p:nvSpPr>
+        <p:spPr/>
+        <p:txBody>
+          <a:bodyPr/>
+          <a:lstStyle/>
+          <a:p>
+            <a:pPr>
+              <a:buFont typeface="Wingdings" panose="05000000000000000000" pitchFamily="2" charset="2"/>
+              <a:buChar char="v"/>
+            </a:pPr>
+            <a:r>
+              <a:rPr lang="hu-HU" dirty="0"/>
+              <a:t> Backend</a:t>
+            </a:r>
+          </a:p>
+          <a:p>
+            <a:pPr>
+              <a:buFont typeface="Wingdings" panose="05000000000000000000" pitchFamily="2" charset="2"/>
+              <a:buChar char="v"/>
+            </a:pPr>
+            <a:r>
+              <a:rPr lang="hu-HU" dirty="0"/>
+              <a:t> Frontend</a:t>
+            </a:r>
+          </a:p>
+          <a:p>
+            <a:endParaRPr lang="hu-HU" dirty="0"/>
+          </a:p>
+        </p:txBody>
+      </p:sp>
+      <p:cxnSp>
+        <p:nvCxnSpPr>
+          <p:cNvPr id="8" name="Egyenes összekötő 7">
+            <a:extLst>
+              <a:ext uri="{FF2B5EF4-FFF2-40B4-BE49-F238E27FC236}">
+                <a16:creationId xmlns:a16="http://schemas.microsoft.com/office/drawing/2014/main" id="{722FCDE3-11D2-4077-A015-66490BCC018E}"/>
+              </a:ext>
+            </a:extLst>
+          </p:cNvPr>
+          <p:cNvCxnSpPr>
+            <a:cxnSpLocks/>
+          </p:cNvCxnSpPr>
+          <p:nvPr/>
+        </p:nvCxnSpPr>
+        <p:spPr>
+          <a:xfrm>
+            <a:off x="1209600" y="1738800"/>
+            <a:ext cx="9946080" cy="0"/>
+          </a:xfrm>
+          <a:prstGeom prst="line">
+            <a:avLst/>
+          </a:prstGeom>
+          <a:ln>
+            <a:solidFill>
+              <a:schemeClr val="tx1">
+                <a:lumMod val="50000"/>
+                <a:lumOff val="50000"/>
+              </a:schemeClr>
+            </a:solidFill>
+          </a:ln>
+        </p:spPr>
+        <p:style>
+          <a:lnRef idx="1">
+            <a:schemeClr val="accent1"/>
+          </a:lnRef>
+          <a:fillRef idx="0">
+            <a:schemeClr val="accent1"/>
+          </a:fillRef>
+          <a:effectRef idx="0">
+            <a:schemeClr val="accent1"/>
+          </a:effectRef>
+          <a:fontRef idx="minor">
+            <a:schemeClr val="tx1"/>
+          </a:fontRef>
+        </p:style>
+      </p:cxnSp>
+      <p:grpSp>
+        <p:nvGrpSpPr>
+          <p:cNvPr id="9" name="Csoportba foglalás 8">
+            <a:extLst>
+              <a:ext uri="{FF2B5EF4-FFF2-40B4-BE49-F238E27FC236}">
+                <a16:creationId xmlns:a16="http://schemas.microsoft.com/office/drawing/2014/main" id="{AD93B2E8-3D33-41C2-91A8-1FB692380CE5}"/>
+              </a:ext>
+            </a:extLst>
+          </p:cNvPr>
+          <p:cNvGrpSpPr/>
+          <p:nvPr/>
+        </p:nvGrpSpPr>
+        <p:grpSpPr>
+          <a:xfrm>
+            <a:off x="10565538" y="349786"/>
+            <a:ext cx="1418895" cy="1258023"/>
+            <a:chOff x="10565538" y="349786"/>
+            <a:chExt cx="1418895" cy="1258023"/>
+          </a:xfrm>
+        </p:grpSpPr>
+        <p:pic>
+          <p:nvPicPr>
+            <p:cNvPr id="10" name="Kép 9">
+              <a:extLst>
+                <a:ext uri="{FF2B5EF4-FFF2-40B4-BE49-F238E27FC236}">
+                  <a16:creationId xmlns:a16="http://schemas.microsoft.com/office/drawing/2014/main" id="{9966BA5A-A620-488E-8615-41FB1F1AE91D}"/>
+                </a:ext>
+              </a:extLst>
+            </p:cNvPr>
+            <p:cNvPicPr>
+              <a:picLocks noChangeAspect="1"/>
+            </p:cNvPicPr>
+            <p:nvPr/>
+          </p:nvPicPr>
+          <p:blipFill rotWithShape="1">
+            <a:blip r:embed="rId3">
+              <a:alphaModFix amt="50000"/>
+              <a:extLst>
+                <a:ext uri="{28A0092B-C50C-407E-A947-70E740481C1C}">
+                  <a14:useLocalDpi xmlns:a14="http://schemas.microsoft.com/office/drawing/2010/main" val="0"/>
+                </a:ext>
+              </a:extLst>
+            </a:blip>
+            <a:srcRect t="58555" r="67375"/>
+            <a:stretch/>
+          </p:blipFill>
+          <p:spPr>
+            <a:xfrm>
+              <a:off x="10619475" y="1036308"/>
+              <a:ext cx="1364958" cy="571501"/>
+            </a:xfrm>
+            <a:prstGeom prst="rect">
+              <a:avLst/>
+            </a:prstGeom>
+          </p:spPr>
+        </p:pic>
+        <p:pic>
+          <p:nvPicPr>
+            <p:cNvPr id="11" name="Kép 10">
+              <a:extLst>
+                <a:ext uri="{FF2B5EF4-FFF2-40B4-BE49-F238E27FC236}">
+                  <a16:creationId xmlns:a16="http://schemas.microsoft.com/office/drawing/2014/main" id="{3B382D26-9076-4156-8E56-6C797943E13E}"/>
+                </a:ext>
+              </a:extLst>
+            </p:cNvPr>
+            <p:cNvPicPr>
+              <a:picLocks noChangeAspect="1"/>
+            </p:cNvPicPr>
+            <p:nvPr/>
+          </p:nvPicPr>
+          <p:blipFill rotWithShape="1">
+            <a:blip r:embed="rId3">
+              <a:alphaModFix amt="50000"/>
+              <a:extLst>
+                <a:ext uri="{28A0092B-C50C-407E-A947-70E740481C1C}">
+                  <a14:useLocalDpi xmlns:a14="http://schemas.microsoft.com/office/drawing/2010/main" val="0"/>
+                </a:ext>
+              </a:extLst>
+            </a:blip>
+            <a:srcRect l="1" r="61666" b="38896"/>
+            <a:stretch/>
+          </p:blipFill>
+          <p:spPr>
+            <a:xfrm>
+              <a:off x="10565538" y="349786"/>
+              <a:ext cx="1418895" cy="745451"/>
+            </a:xfrm>
+            <a:prstGeom prst="rect">
+              <a:avLst/>
+            </a:prstGeom>
+          </p:spPr>
+        </p:pic>
+      </p:grpSp>
+    </p:spTree>
+    <p:extLst>
+      <p:ext uri="{BB962C8B-B14F-4D97-AF65-F5344CB8AC3E}">
+        <p14:creationId xmlns:p14="http://schemas.microsoft.com/office/powerpoint/2010/main" val="1034913464"/>
+      </p:ext>
+    </p:extLst>
+  </p:cSld>
+  <p:clrMapOvr>
+    <a:masterClrMapping/>
+  </p:clrMapOvr>
+</p:sld>
+</file>
+
+<file path=ppt/slides/slide8.xml><?xml version="1.0" encoding="utf-8"?>
+<p:sld xmlns:a="http://schemas.openxmlformats.org/drawingml/2006/main" xmlns:r="http://schemas.openxmlformats.org/officeDocument/2006/relationships" xmlns:p="http://schemas.openxmlformats.org/presentationml/2006/main">
+  <p:cSld>
+    <p:bg>
+      <p:bgPr>
+        <a:solidFill>
+          <a:srgbClr val="FDF7E9"/>
+        </a:solidFill>
+        <a:effectLst/>
+      </p:bgPr>
+    </p:bg>
+    <p:spTree>
+      <p:nvGrpSpPr>
+        <p:cNvPr id="1" name=""/>
+        <p:cNvGrpSpPr/>
+        <p:nvPr/>
+      </p:nvGrpSpPr>
+      <p:grpSpPr>
+        <a:xfrm>
+          <a:off x="0" y="0"/>
+          <a:ext cx="0" cy="0"/>
+          <a:chOff x="0" y="0"/>
+          <a:chExt cx="0" cy="0"/>
+        </a:xfrm>
+      </p:grpSpPr>
+      <p:sp>
+        <p:nvSpPr>
           <p:cNvPr id="3" name="Tartalom helye 2">
             <a:extLst>
               <a:ext uri="{FF2B5EF4-FFF2-40B4-BE49-F238E27FC236}">
@@ -11237,35 +11161,95 @@
         </p:nvSpPr>
         <p:spPr/>
         <p:txBody>
-          <a:bodyPr/>
+          <a:bodyPr>
+            <a:normAutofit/>
+          </a:bodyPr>
           <a:lstStyle/>
           <a:p>
-            <a:r>
-              <a:rPr lang="hu-HU" dirty="0" err="1"/>
-              <a:t>Autentikáció</a:t>
-            </a:r>
-            <a:endParaRPr lang="hu-HU" dirty="0"/>
-          </a:p>
-          <a:p>
             <a:pPr lvl="1">
+              <a:lnSpc>
+                <a:spcPct val="150000"/>
+              </a:lnSpc>
               <a:buFont typeface="Arial" panose="020B0604020202020204" pitchFamily="34" charset="0"/>
               <a:buChar char="•"/>
             </a:pPr>
             <a:r>
               <a:rPr lang="hu-HU" dirty="0" err="1"/>
-              <a:t>Token</a:t>
-            </a:r>
-            <a:endParaRPr lang="hu-HU" dirty="0"/>
+              <a:t>Laravel</a:t>
+            </a:r>
+            <a:r>
+              <a:rPr lang="hu-HU" dirty="0"/>
+              <a:t> 12</a:t>
+            </a:r>
           </a:p>
           <a:p>
             <a:pPr lvl="1">
+              <a:lnSpc>
+                <a:spcPct val="150000"/>
+              </a:lnSpc>
               <a:buFont typeface="Arial" panose="020B0604020202020204" pitchFamily="34" charset="0"/>
               <a:buChar char="•"/>
             </a:pPr>
             <a:r>
               <a:rPr lang="hu-HU" dirty="0"/>
-              <a:t>Szerepkörök</a:t>
-            </a:r>
+              <a:t>Migrációk</a:t>
+            </a:r>
+          </a:p>
+          <a:p>
+            <a:pPr lvl="1">
+              <a:lnSpc>
+                <a:spcPct val="150000"/>
+              </a:lnSpc>
+              <a:buFont typeface="Arial" panose="020B0604020202020204" pitchFamily="34" charset="0"/>
+              <a:buChar char="•"/>
+            </a:pPr>
+            <a:r>
+              <a:rPr lang="hu-HU" dirty="0"/>
+              <a:t>Modellek</a:t>
+            </a:r>
+          </a:p>
+          <a:p>
+            <a:pPr lvl="1">
+              <a:lnSpc>
+                <a:spcPct val="150000"/>
+              </a:lnSpc>
+              <a:buFont typeface="Arial" panose="020B0604020202020204" pitchFamily="34" charset="0"/>
+              <a:buChar char="•"/>
+            </a:pPr>
+            <a:r>
+              <a:rPr lang="hu-HU" dirty="0"/>
+              <a:t>Kontrollerek</a:t>
+            </a:r>
+          </a:p>
+          <a:p>
+            <a:pPr lvl="1">
+              <a:lnSpc>
+                <a:spcPct val="150000"/>
+              </a:lnSpc>
+              <a:buFont typeface="Arial" panose="020B0604020202020204" pitchFamily="34" charset="0"/>
+              <a:buChar char="•"/>
+            </a:pPr>
+            <a:r>
+              <a:rPr lang="hu-HU" dirty="0" err="1"/>
+              <a:t>Kepek</a:t>
+            </a:r>
+            <a:r>
+              <a:rPr lang="hu-HU" dirty="0"/>
+              <a:t> (</a:t>
+            </a:r>
+            <a:r>
+              <a:rPr lang="hu-HU" dirty="0" err="1"/>
+              <a:t>model</a:t>
+            </a:r>
+            <a:r>
+              <a:rPr lang="hu-HU" dirty="0"/>
+              <a:t>, </a:t>
+            </a:r>
+            <a:r>
+              <a:rPr lang="hu-HU" dirty="0" err="1"/>
+              <a:t>controllel</a:t>
+            </a:r>
+            <a:endParaRPr lang="hu-HU" dirty="0"/>
           </a:p>
         </p:txBody>
       </p:sp>
@@ -11410,7 +11394,7 @@
 </p:sld>
 </file>
 
-<file path=ppt/slides/slide8.xml><?xml version="1.0" encoding="utf-8"?>
+<file path=ppt/slides/slide9.xml><?xml version="1.0" encoding="utf-8"?>
 <p:sld xmlns:a="http://schemas.openxmlformats.org/drawingml/2006/main" xmlns:r="http://schemas.openxmlformats.org/officeDocument/2006/relationships" xmlns:p="http://schemas.openxmlformats.org/presentationml/2006/main">
   <p:cSld>
     <p:bg>
@@ -11465,7 +11449,7 @@
               <a:rPr lang="hu-HU" dirty="0">
                 <a:latin typeface="Bahnschrift SemiBold" panose="020B0502040204020203" pitchFamily="34" charset="0"/>
               </a:rPr>
-              <a:t>Modellek</a:t>
+              <a:t>Backend</a:t>
             </a:r>
           </a:p>
         </p:txBody>
@@ -11507,8 +11491,60 @@
             </a:pPr>
             <a:r>
               <a:rPr lang="hu-HU" sz="1800" dirty="0" err="1"/>
-              <a:t>User</a:t>
-            </a:r>
+              <a:t>Laravel</a:t>
+            </a:r>
+            <a:r>
+              <a:rPr lang="hu-HU" sz="1800" dirty="0"/>
+              <a:t> 12</a:t>
+            </a:r>
+          </a:p>
+          <a:p>
+            <a:pPr marL="285750" indent="-285750">
+              <a:buClr>
+                <a:schemeClr val="bg1"/>
+              </a:buClr>
+              <a:buFont typeface="Arial" panose="020B0604020202020204" pitchFamily="34" charset="0"/>
+              <a:buChar char="•"/>
+            </a:pPr>
+            <a:r>
+              <a:rPr lang="hu-HU" sz="1800" dirty="0"/>
+              <a:t>Migrációk</a:t>
+            </a:r>
+          </a:p>
+          <a:p>
+            <a:pPr marL="285750" indent="-285750">
+              <a:buClr>
+                <a:schemeClr val="bg1"/>
+              </a:buClr>
+              <a:buFont typeface="Arial" panose="020B0604020202020204" pitchFamily="34" charset="0"/>
+              <a:buChar char="•"/>
+            </a:pPr>
+            <a:r>
+              <a:rPr lang="hu-HU" sz="1800" dirty="0"/>
+              <a:t>Modellek</a:t>
+            </a:r>
+          </a:p>
+          <a:p>
+            <a:pPr marL="285750" indent="-285750">
+              <a:buClr>
+                <a:schemeClr val="bg1"/>
+              </a:buClr>
+              <a:buFont typeface="Arial" panose="020B0604020202020204" pitchFamily="34" charset="0"/>
+              <a:buChar char="•"/>
+            </a:pPr>
+            <a:r>
+              <a:rPr lang="hu-HU" sz="1800" dirty="0"/>
+              <a:t>Kontrollerek</a:t>
+            </a:r>
+          </a:p>
+          <a:p>
+            <a:pPr marL="285750" indent="-285750">
+              <a:buClr>
+                <a:schemeClr val="bg1"/>
+              </a:buClr>
+              <a:buFont typeface="Arial" panose="020B0604020202020204" pitchFamily="34" charset="0"/>
+              <a:buChar char="•"/>
+            </a:pPr>
             <a:endParaRPr lang="hu-HU" sz="1800" dirty="0"/>
           </a:p>
           <a:p>
@@ -11616,109 +11652,276 @@
           </p:spPr>
         </p:pic>
       </p:grpSp>
-    </p:spTree>
-    <p:extLst>
-      <p:ext uri="{BB962C8B-B14F-4D97-AF65-F5344CB8AC3E}">
-        <p14:creationId xmlns:p14="http://schemas.microsoft.com/office/powerpoint/2010/main" val="2600656638"/>
-      </p:ext>
-    </p:extLst>
-  </p:cSld>
-  <p:clrMapOvr>
-    <a:masterClrMapping/>
-  </p:clrMapOvr>
-</p:sld>
-</file>
-
-<file path=ppt/slides/slide9.xml><?xml version="1.0" encoding="utf-8"?>
-<p:sld xmlns:a="http://schemas.openxmlformats.org/drawingml/2006/main" xmlns:r="http://schemas.openxmlformats.org/officeDocument/2006/relationships" xmlns:p="http://schemas.openxmlformats.org/presentationml/2006/main">
-  <p:cSld>
-    <p:bg>
-      <p:bgPr>
-        <a:solidFill>
-          <a:srgbClr val="FDF7E9"/>
-        </a:solidFill>
-        <a:effectLst/>
-      </p:bgPr>
-    </p:bg>
-    <p:spTree>
-      <p:nvGrpSpPr>
-        <p:cNvPr id="1" name=""/>
-        <p:cNvGrpSpPr/>
-        <p:nvPr/>
-      </p:nvGrpSpPr>
-      <p:grpSpPr>
-        <a:xfrm>
-          <a:off x="0" y="0"/>
-          <a:ext cx="0" cy="0"/>
-          <a:chOff x="0" y="0"/>
-          <a:chExt cx="0" cy="0"/>
-        </a:xfrm>
-      </p:grpSpPr>
-      <p:sp>
-        <p:nvSpPr>
-          <p:cNvPr id="2" name="Cím 1">
+      <p:sp>
+        <p:nvSpPr>
+          <p:cNvPr id="7" name="Szöveg helye 3">
             <a:extLst>
               <a:ext uri="{FF2B5EF4-FFF2-40B4-BE49-F238E27FC236}">
-                <a16:creationId xmlns:a16="http://schemas.microsoft.com/office/drawing/2014/main" id="{755F2576-93E3-4E11-AD5A-5982C144E204}"/>
+                <a16:creationId xmlns:a16="http://schemas.microsoft.com/office/drawing/2014/main" id="{61BBB51D-A651-4F71-AC1C-5BFA779D5C9B}"/>
               </a:ext>
             </a:extLst>
           </p:cNvPr>
-          <p:cNvSpPr>
-            <a:spLocks noGrp="1"/>
+          <p:cNvSpPr txBox="1">
+            <a:spLocks/>
           </p:cNvSpPr>
-          <p:nvPr>
-            <p:ph type="title"/>
-          </p:nvPr>
+          <p:nvPr/>
         </p:nvSpPr>
         <p:spPr>
           <a:xfrm>
-            <a:off x="457200" y="622934"/>
-            <a:ext cx="3200400" cy="2286000"/>
+            <a:off x="4185719" y="2669471"/>
+            <a:ext cx="3562350" cy="3684270"/>
           </a:xfrm>
+          <a:prstGeom prst="rect">
+            <a:avLst/>
+          </a:prstGeom>
         </p:spPr>
         <p:txBody>
-          <a:bodyPr/>
-          <a:lstStyle/>
-          <a:p>
-            <a:r>
-              <a:rPr lang="hu-HU" dirty="0" err="1">
-                <a:latin typeface="Bahnschrift SemiBold" panose="020B0502040204020203" pitchFamily="34" charset="0"/>
-              </a:rPr>
-              <a:t>Controllerek</a:t>
-            </a:r>
-            <a:endParaRPr lang="hu-HU" dirty="0">
-              <a:latin typeface="Bahnschrift SemiBold" panose="020B0502040204020203" pitchFamily="34" charset="0"/>
-            </a:endParaRPr>
-          </a:p>
-        </p:txBody>
-      </p:sp>
-      <p:sp>
-        <p:nvSpPr>
-          <p:cNvPr id="4" name="Szöveg helye 3">
-            <a:extLst>
-              <a:ext uri="{FF2B5EF4-FFF2-40B4-BE49-F238E27FC236}">
-                <a16:creationId xmlns:a16="http://schemas.microsoft.com/office/drawing/2014/main" id="{E1483CC7-2FF0-4B57-872B-832994FD7836}"/>
-              </a:ext>
-            </a:extLst>
-          </p:cNvPr>
-          <p:cNvSpPr>
-            <a:spLocks noGrp="1"/>
-          </p:cNvSpPr>
-          <p:nvPr>
-            <p:ph type="body" sz="half" idx="2"/>
-          </p:nvPr>
-        </p:nvSpPr>
-        <p:spPr>
-          <a:xfrm>
-            <a:off x="457200" y="3259455"/>
-            <a:ext cx="3562350" cy="3684270"/>
-          </a:xfrm>
-        </p:spPr>
-        <p:txBody>
-          <a:bodyPr>
+          <a:bodyPr vert="horz" lIns="91440" tIns="45720" rIns="91440" bIns="45720" rtlCol="0">
             <a:normAutofit/>
           </a:bodyPr>
-          <a:lstStyle/>
+          <a:lstStyle>
+            <a:lvl1pPr marL="0" indent="0" algn="l" defTabSz="914400" rtl="0" eaLnBrk="1" latinLnBrk="0" hangingPunct="1">
+              <a:lnSpc>
+                <a:spcPct val="90000"/>
+              </a:lnSpc>
+              <a:spcBef>
+                <a:spcPts val="1200"/>
+              </a:spcBef>
+              <a:spcAft>
+                <a:spcPts val="200"/>
+              </a:spcAft>
+              <a:buClr>
+                <a:schemeClr val="accent1"/>
+              </a:buClr>
+              <a:buSzPct val="100000"/>
+              <a:buFont typeface="Calibri" panose="020F0502020204030204" pitchFamily="34" charset="0"/>
+              <a:buNone/>
+              <a:defRPr sz="1500" kern="1200">
+                <a:solidFill>
+                  <a:srgbClr val="FFFFFF"/>
+                </a:solidFill>
+                <a:latin typeface="+mn-lt"/>
+                <a:ea typeface="+mn-ea"/>
+                <a:cs typeface="+mn-cs"/>
+              </a:defRPr>
+            </a:lvl1pPr>
+            <a:lvl2pPr marL="457200" indent="0" algn="l" defTabSz="914400" rtl="0" eaLnBrk="1" latinLnBrk="0" hangingPunct="1">
+              <a:lnSpc>
+                <a:spcPct val="90000"/>
+              </a:lnSpc>
+              <a:spcBef>
+                <a:spcPts val="200"/>
+              </a:spcBef>
+              <a:spcAft>
+                <a:spcPts val="400"/>
+              </a:spcAft>
+              <a:buClr>
+                <a:schemeClr val="accent1"/>
+              </a:buClr>
+              <a:buFont typeface="Calibri" pitchFamily="34" charset="0"/>
+              <a:buNone/>
+              <a:defRPr sz="1200" kern="1200">
+                <a:solidFill>
+                  <a:schemeClr val="tx1">
+                    <a:lumMod val="75000"/>
+                    <a:lumOff val="25000"/>
+                  </a:schemeClr>
+                </a:solidFill>
+                <a:latin typeface="+mn-lt"/>
+                <a:ea typeface="+mn-ea"/>
+                <a:cs typeface="+mn-cs"/>
+              </a:defRPr>
+            </a:lvl2pPr>
+            <a:lvl3pPr marL="914400" indent="0" algn="l" defTabSz="914400" rtl="0" eaLnBrk="1" latinLnBrk="0" hangingPunct="1">
+              <a:lnSpc>
+                <a:spcPct val="90000"/>
+              </a:lnSpc>
+              <a:spcBef>
+                <a:spcPts val="200"/>
+              </a:spcBef>
+              <a:spcAft>
+                <a:spcPts val="400"/>
+              </a:spcAft>
+              <a:buClr>
+                <a:schemeClr val="accent1"/>
+              </a:buClr>
+              <a:buFont typeface="Calibri" pitchFamily="34" charset="0"/>
+              <a:buNone/>
+              <a:defRPr sz="1000" kern="1200">
+                <a:solidFill>
+                  <a:schemeClr val="tx1">
+                    <a:lumMod val="75000"/>
+                    <a:lumOff val="25000"/>
+                  </a:schemeClr>
+                </a:solidFill>
+                <a:latin typeface="+mn-lt"/>
+                <a:ea typeface="+mn-ea"/>
+                <a:cs typeface="+mn-cs"/>
+              </a:defRPr>
+            </a:lvl3pPr>
+            <a:lvl4pPr marL="1371600" indent="0" algn="l" defTabSz="914400" rtl="0" eaLnBrk="1" latinLnBrk="0" hangingPunct="1">
+              <a:lnSpc>
+                <a:spcPct val="90000"/>
+              </a:lnSpc>
+              <a:spcBef>
+                <a:spcPts val="200"/>
+              </a:spcBef>
+              <a:spcAft>
+                <a:spcPts val="400"/>
+              </a:spcAft>
+              <a:buClr>
+                <a:schemeClr val="accent1"/>
+              </a:buClr>
+              <a:buFont typeface="Calibri" pitchFamily="34" charset="0"/>
+              <a:buNone/>
+              <a:defRPr sz="900" kern="1200">
+                <a:solidFill>
+                  <a:schemeClr val="tx1">
+                    <a:lumMod val="75000"/>
+                    <a:lumOff val="25000"/>
+                  </a:schemeClr>
+                </a:solidFill>
+                <a:latin typeface="+mn-lt"/>
+                <a:ea typeface="+mn-ea"/>
+                <a:cs typeface="+mn-cs"/>
+              </a:defRPr>
+            </a:lvl4pPr>
+            <a:lvl5pPr marL="1828800" indent="0" algn="l" defTabSz="914400" rtl="0" eaLnBrk="1" latinLnBrk="0" hangingPunct="1">
+              <a:lnSpc>
+                <a:spcPct val="90000"/>
+              </a:lnSpc>
+              <a:spcBef>
+                <a:spcPts val="200"/>
+              </a:spcBef>
+              <a:spcAft>
+                <a:spcPts val="400"/>
+              </a:spcAft>
+              <a:buClr>
+                <a:schemeClr val="accent1"/>
+              </a:buClr>
+              <a:buFont typeface="Calibri" pitchFamily="34" charset="0"/>
+              <a:buNone/>
+              <a:defRPr sz="900" kern="1200">
+                <a:solidFill>
+                  <a:schemeClr val="tx1">
+                    <a:lumMod val="75000"/>
+                    <a:lumOff val="25000"/>
+                  </a:schemeClr>
+                </a:solidFill>
+                <a:latin typeface="+mn-lt"/>
+                <a:ea typeface="+mn-ea"/>
+                <a:cs typeface="+mn-cs"/>
+              </a:defRPr>
+            </a:lvl5pPr>
+            <a:lvl6pPr marL="2286000" indent="0" algn="l" defTabSz="914400" rtl="0" eaLnBrk="1" latinLnBrk="0" hangingPunct="1">
+              <a:lnSpc>
+                <a:spcPct val="90000"/>
+              </a:lnSpc>
+              <a:spcBef>
+                <a:spcPts val="200"/>
+              </a:spcBef>
+              <a:spcAft>
+                <a:spcPts val="400"/>
+              </a:spcAft>
+              <a:buClr>
+                <a:schemeClr val="accent1"/>
+              </a:buClr>
+              <a:buFont typeface="Calibri" pitchFamily="34" charset="0"/>
+              <a:buNone/>
+              <a:defRPr sz="900" kern="1200">
+                <a:solidFill>
+                  <a:schemeClr val="tx1">
+                    <a:lumMod val="75000"/>
+                    <a:lumOff val="25000"/>
+                  </a:schemeClr>
+                </a:solidFill>
+                <a:latin typeface="+mn-lt"/>
+                <a:ea typeface="+mn-ea"/>
+                <a:cs typeface="+mn-cs"/>
+              </a:defRPr>
+            </a:lvl6pPr>
+            <a:lvl7pPr marL="2743200" indent="0" algn="l" defTabSz="914400" rtl="0" eaLnBrk="1" latinLnBrk="0" hangingPunct="1">
+              <a:lnSpc>
+                <a:spcPct val="90000"/>
+              </a:lnSpc>
+              <a:spcBef>
+                <a:spcPts val="200"/>
+              </a:spcBef>
+              <a:spcAft>
+                <a:spcPts val="400"/>
+              </a:spcAft>
+              <a:buClr>
+                <a:schemeClr val="accent1"/>
+              </a:buClr>
+              <a:buFont typeface="Calibri" pitchFamily="34" charset="0"/>
+              <a:buNone/>
+              <a:defRPr sz="900" kern="1200">
+                <a:solidFill>
+                  <a:schemeClr val="tx1">
+                    <a:lumMod val="75000"/>
+                    <a:lumOff val="25000"/>
+                  </a:schemeClr>
+                </a:solidFill>
+                <a:latin typeface="+mn-lt"/>
+                <a:ea typeface="+mn-ea"/>
+                <a:cs typeface="+mn-cs"/>
+              </a:defRPr>
+            </a:lvl7pPr>
+            <a:lvl8pPr marL="3200400" indent="0" algn="l" defTabSz="914400" rtl="0" eaLnBrk="1" latinLnBrk="0" hangingPunct="1">
+              <a:lnSpc>
+                <a:spcPct val="90000"/>
+              </a:lnSpc>
+              <a:spcBef>
+                <a:spcPts val="200"/>
+              </a:spcBef>
+              <a:spcAft>
+                <a:spcPts val="400"/>
+              </a:spcAft>
+              <a:buClr>
+                <a:schemeClr val="accent1"/>
+              </a:buClr>
+              <a:buFont typeface="Calibri" pitchFamily="34" charset="0"/>
+              <a:buNone/>
+              <a:defRPr sz="900" kern="1200">
+                <a:solidFill>
+                  <a:schemeClr val="tx1">
+                    <a:lumMod val="75000"/>
+                    <a:lumOff val="25000"/>
+                  </a:schemeClr>
+                </a:solidFill>
+                <a:latin typeface="+mn-lt"/>
+                <a:ea typeface="+mn-ea"/>
+                <a:cs typeface="+mn-cs"/>
+              </a:defRPr>
+            </a:lvl8pPr>
+            <a:lvl9pPr marL="3657600" indent="0" algn="l" defTabSz="914400" rtl="0" eaLnBrk="1" latinLnBrk="0" hangingPunct="1">
+              <a:lnSpc>
+                <a:spcPct val="90000"/>
+              </a:lnSpc>
+              <a:spcBef>
+                <a:spcPts val="200"/>
+              </a:spcBef>
+              <a:spcAft>
+                <a:spcPts val="400"/>
+              </a:spcAft>
+              <a:buClr>
+                <a:schemeClr val="accent1"/>
+              </a:buClr>
+              <a:buFont typeface="Calibri" pitchFamily="34" charset="0"/>
+              <a:buNone/>
+              <a:defRPr sz="900" kern="1200">
+                <a:solidFill>
+                  <a:schemeClr val="tx1">
+                    <a:lumMod val="75000"/>
+                    <a:lumOff val="25000"/>
+                  </a:schemeClr>
+                </a:solidFill>
+                <a:latin typeface="+mn-lt"/>
+                <a:ea typeface="+mn-ea"/>
+                <a:cs typeface="+mn-cs"/>
+              </a:defRPr>
+            </a:lvl9pPr>
+          </a:lstStyle>
           <a:p>
             <a:pPr marL="285750" indent="-285750">
               <a:buClr>
@@ -11728,10 +11931,9 @@
               <a:buChar char="•"/>
             </a:pPr>
             <a:r>
-              <a:rPr lang="hu-HU" sz="1800" dirty="0" err="1"/>
+              <a:rPr lang="hu-HU" sz="1800"/>
               <a:t>User</a:t>
             </a:r>
-            <a:endParaRPr lang="hu-HU" sz="1800" dirty="0"/>
           </a:p>
           <a:p>
             <a:pPr marL="285750" indent="-285750">
@@ -11745,99 +11947,6 @@
           </a:p>
         </p:txBody>
       </p:sp>
-      <p:grpSp>
-        <p:nvGrpSpPr>
-          <p:cNvPr id="9" name="Csoportba foglalás 8">
-            <a:extLst>
-              <a:ext uri="{FF2B5EF4-FFF2-40B4-BE49-F238E27FC236}">
-                <a16:creationId xmlns:a16="http://schemas.microsoft.com/office/drawing/2014/main" id="{9D1513B7-E14B-483F-9E1D-2F9ED7A62155}"/>
-              </a:ext>
-            </a:extLst>
-          </p:cNvPr>
-          <p:cNvGrpSpPr/>
-          <p:nvPr/>
-        </p:nvGrpSpPr>
-        <p:grpSpPr>
-          <a:xfrm>
-            <a:off x="10565538" y="349786"/>
-            <a:ext cx="1418895" cy="1258023"/>
-            <a:chOff x="10565538" y="349786"/>
-            <a:chExt cx="1418895" cy="1258023"/>
-          </a:xfrm>
-        </p:grpSpPr>
-        <p:pic>
-          <p:nvPicPr>
-            <p:cNvPr id="10" name="Kép 9">
-              <a:extLst>
-                <a:ext uri="{FF2B5EF4-FFF2-40B4-BE49-F238E27FC236}">
-                  <a16:creationId xmlns:a16="http://schemas.microsoft.com/office/drawing/2014/main" id="{AF68DAD7-58FF-4254-A264-3393E8FB079A}"/>
-                </a:ext>
-              </a:extLst>
-            </p:cNvPr>
-            <p:cNvPicPr>
-              <a:picLocks noChangeAspect="1"/>
-            </p:cNvPicPr>
-            <p:nvPr/>
-          </p:nvPicPr>
-          <p:blipFill rotWithShape="1">
-            <a:blip r:embed="rId2">
-              <a:alphaModFix amt="50000"/>
-              <a:extLst>
-                <a:ext uri="{28A0092B-C50C-407E-A947-70E740481C1C}">
-                  <a14:useLocalDpi xmlns:a14="http://schemas.microsoft.com/office/drawing/2010/main" val="0"/>
-                </a:ext>
-              </a:extLst>
-            </a:blip>
-            <a:srcRect t="58555" r="67375"/>
-            <a:stretch/>
-          </p:blipFill>
-          <p:spPr>
-            <a:xfrm>
-              <a:off x="10619475" y="1036308"/>
-              <a:ext cx="1364958" cy="571501"/>
-            </a:xfrm>
-            <a:prstGeom prst="rect">
-              <a:avLst/>
-            </a:prstGeom>
-          </p:spPr>
-        </p:pic>
-        <p:pic>
-          <p:nvPicPr>
-            <p:cNvPr id="11" name="Kép 10">
-              <a:extLst>
-                <a:ext uri="{FF2B5EF4-FFF2-40B4-BE49-F238E27FC236}">
-                  <a16:creationId xmlns:a16="http://schemas.microsoft.com/office/drawing/2014/main" id="{8F9A0D26-C9F9-4EBD-9287-1F6D4C562B73}"/>
-                </a:ext>
-              </a:extLst>
-            </p:cNvPr>
-            <p:cNvPicPr>
-              <a:picLocks noChangeAspect="1"/>
-            </p:cNvPicPr>
-            <p:nvPr/>
-          </p:nvPicPr>
-          <p:blipFill rotWithShape="1">
-            <a:blip r:embed="rId2">
-              <a:alphaModFix amt="50000"/>
-              <a:extLst>
-                <a:ext uri="{28A0092B-C50C-407E-A947-70E740481C1C}">
-                  <a14:useLocalDpi xmlns:a14="http://schemas.microsoft.com/office/drawing/2010/main" val="0"/>
-                </a:ext>
-              </a:extLst>
-            </a:blip>
-            <a:srcRect l="1" r="61666" b="38896"/>
-            <a:stretch/>
-          </p:blipFill>
-          <p:spPr>
-            <a:xfrm>
-              <a:off x="10565538" y="349786"/>
-              <a:ext cx="1418895" cy="745451"/>
-            </a:xfrm>
-            <a:prstGeom prst="rect">
-              <a:avLst/>
-            </a:prstGeom>
-          </p:spPr>
-        </p:pic>
-      </p:grpSp>
     </p:spTree>
     <p:extLst>
       <p:ext uri="{BB962C8B-B14F-4D97-AF65-F5344CB8AC3E}">

--- a/Dokumentációhoz/Prezentáció/eMenza_AtkariAriella_FarkasDominik.pptx
+++ b/Dokumentációhoz/Prezentáció/eMenza_AtkariAriella_FarkasDominik.pptx
@@ -5,28 +5,23 @@
     <p:sldMasterId id="2147483660" r:id="rId1"/>
   </p:sldMasterIdLst>
   <p:notesMasterIdLst>
-    <p:notesMasterId r:id="rId21"/>
+    <p:notesMasterId r:id="rId16"/>
   </p:notesMasterIdLst>
   <p:sldIdLst>
-    <p:sldId id="256" r:id="rId2"/>
-    <p:sldId id="276" r:id="rId3"/>
-    <p:sldId id="279" r:id="rId4"/>
-    <p:sldId id="280" r:id="rId5"/>
-    <p:sldId id="259" r:id="rId6"/>
-    <p:sldId id="260" r:id="rId7"/>
-    <p:sldId id="274" r:id="rId8"/>
-    <p:sldId id="261" r:id="rId9"/>
-    <p:sldId id="285" r:id="rId10"/>
-    <p:sldId id="268" r:id="rId11"/>
-    <p:sldId id="267" r:id="rId12"/>
-    <p:sldId id="265" r:id="rId13"/>
-    <p:sldId id="266" r:id="rId14"/>
-    <p:sldId id="269" r:id="rId15"/>
-    <p:sldId id="272" r:id="rId16"/>
-    <p:sldId id="282" r:id="rId17"/>
-    <p:sldId id="283" r:id="rId18"/>
-    <p:sldId id="287" r:id="rId19"/>
-    <p:sldId id="284" r:id="rId20"/>
+    <p:sldId id="276" r:id="rId2"/>
+    <p:sldId id="279" r:id="rId3"/>
+    <p:sldId id="259" r:id="rId4"/>
+    <p:sldId id="260" r:id="rId5"/>
+    <p:sldId id="274" r:id="rId6"/>
+    <p:sldId id="285" r:id="rId7"/>
+    <p:sldId id="268" r:id="rId8"/>
+    <p:sldId id="266" r:id="rId9"/>
+    <p:sldId id="269" r:id="rId10"/>
+    <p:sldId id="272" r:id="rId11"/>
+    <p:sldId id="282" r:id="rId12"/>
+    <p:sldId id="283" r:id="rId13"/>
+    <p:sldId id="287" r:id="rId14"/>
+    <p:sldId id="284" r:id="rId15"/>
   </p:sldIdLst>
   <p:sldSz cx="12192000" cy="6858000"/>
   <p:notesSz cx="6858000" cy="9144000"/>
@@ -557,7 +552,7 @@
           <a:p>
             <a:fld id="{5B73375F-E6FE-4F6E-96C6-6B6BE7EEDE08}" type="slidenum">
               <a:rPr lang="hu-HU" smtClean="0"/>
-              <a:t>7</a:t>
+              <a:t>5</a:t>
             </a:fld>
             <a:endParaRPr lang="hu-HU"/>
           </a:p>
@@ -641,7 +636,7 @@
           <a:p>
             <a:fld id="{5B73375F-E6FE-4F6E-96C6-6B6BE7EEDE08}" type="slidenum">
               <a:rPr lang="hu-HU" smtClean="0"/>
-              <a:t>10</a:t>
+              <a:t>7</a:t>
             </a:fld>
             <a:endParaRPr lang="hu-HU"/>
           </a:p>
@@ -704,6 +699,32 @@
           <a:bodyPr/>
           <a:lstStyle/>
           <a:p>
+            <a:pPr marL="285750" indent="-285750">
+              <a:buClr>
+                <a:schemeClr val="bg1"/>
+              </a:buClr>
+              <a:buFont typeface="Arial" panose="020B0604020202020204" pitchFamily="34" charset="0"/>
+              <a:buChar char="•"/>
+            </a:pPr>
+            <a:r>
+              <a:rPr lang="hu-HU" sz="1200" dirty="0"/>
+              <a:t>Dinamikus igazodás a kijelzőhöz</a:t>
+            </a:r>
+          </a:p>
+          <a:p>
+            <a:pPr marL="285750" indent="-285750">
+              <a:buClr>
+                <a:schemeClr val="bg1"/>
+              </a:buClr>
+              <a:buFont typeface="Arial" panose="020B0604020202020204" pitchFamily="34" charset="0"/>
+              <a:buChar char="•"/>
+            </a:pPr>
+            <a:r>
+              <a:rPr lang="hu-HU" sz="1200" dirty="0"/>
+              <a:t>Optimalizált telefon képernyőhöz</a:t>
+            </a:r>
+          </a:p>
+          <a:p>
             <a:endParaRPr lang="hu-HU" dirty="0"/>
           </a:p>
         </p:txBody>
@@ -725,7 +746,7 @@
           <a:p>
             <a:fld id="{5B73375F-E6FE-4F6E-96C6-6B6BE7EEDE08}" type="slidenum">
               <a:rPr lang="hu-HU" smtClean="0"/>
-              <a:t>14</a:t>
+              <a:t>9</a:t>
             </a:fld>
             <a:endParaRPr lang="hu-HU"/>
           </a:p>
@@ -3815,7 +3836,7 @@
           <a:lstStyle/>
           <a:p>
             <a:r>
-              <a:rPr lang="hu-HU"/>
+              <a:rPr lang="hu-HU" dirty="0"/>
               <a:t>Mintacím szerkesztése</a:t>
             </a:r>
             <a:endParaRPr lang="en-US" dirty="0"/>
@@ -3849,35 +3870,35 @@
           <a:p>
             <a:pPr lvl="0"/>
             <a:r>
-              <a:rPr lang="hu-HU"/>
+              <a:rPr lang="hu-HU" dirty="0"/>
               <a:t>Mintaszöveg szerkesztése</a:t>
             </a:r>
           </a:p>
           <a:p>
             <a:pPr lvl="1"/>
             <a:r>
-              <a:rPr lang="hu-HU"/>
+              <a:rPr lang="hu-HU" dirty="0"/>
               <a:t>Második szint</a:t>
             </a:r>
           </a:p>
           <a:p>
             <a:pPr lvl="2"/>
             <a:r>
-              <a:rPr lang="hu-HU"/>
+              <a:rPr lang="hu-HU" dirty="0"/>
               <a:t>Harmadik szint</a:t>
             </a:r>
           </a:p>
           <a:p>
             <a:pPr lvl="3"/>
             <a:r>
-              <a:rPr lang="hu-HU"/>
+              <a:rPr lang="hu-HU" dirty="0"/>
               <a:t>Negyedik szint</a:t>
             </a:r>
           </a:p>
           <a:p>
             <a:pPr lvl="4"/>
             <a:r>
-              <a:rPr lang="hu-HU"/>
+              <a:rPr lang="hu-HU" dirty="0"/>
               <a:t>Ötödik szint</a:t>
             </a:r>
             <a:endParaRPr lang="en-US" dirty="0"/>
@@ -4073,7 +4094,7 @@
               <a:lumOff val="25000"/>
             </a:schemeClr>
           </a:solidFill>
-          <a:latin typeface="+mj-lt"/>
+          <a:latin typeface="Bahnschrift SemiBold" panose="020B0502040204020203" pitchFamily="34" charset="0"/>
           <a:ea typeface="+mj-ea"/>
           <a:cs typeface="+mj-cs"/>
         </a:defRPr>
@@ -4103,7 +4124,7 @@
               <a:lumOff val="25000"/>
             </a:schemeClr>
           </a:solidFill>
-          <a:latin typeface="+mn-lt"/>
+          <a:latin typeface="Bahnschrift Light" panose="020B0502040204020203" pitchFamily="34" charset="0"/>
           <a:ea typeface="+mn-ea"/>
           <a:cs typeface="+mn-cs"/>
         </a:defRPr>
@@ -4130,7 +4151,7 @@
               <a:lumOff val="25000"/>
             </a:schemeClr>
           </a:solidFill>
-          <a:latin typeface="+mn-lt"/>
+          <a:latin typeface="Bahnschrift Light" panose="020B0502040204020203" pitchFamily="34" charset="0"/>
           <a:ea typeface="+mn-ea"/>
           <a:cs typeface="+mn-cs"/>
         </a:defRPr>
@@ -4157,7 +4178,7 @@
               <a:lumOff val="25000"/>
             </a:schemeClr>
           </a:solidFill>
-          <a:latin typeface="+mn-lt"/>
+          <a:latin typeface="Bahnschrift Light" panose="020B0502040204020203" pitchFamily="34" charset="0"/>
           <a:ea typeface="+mn-ea"/>
           <a:cs typeface="+mn-cs"/>
         </a:defRPr>
@@ -4184,7 +4205,7 @@
               <a:lumOff val="25000"/>
             </a:schemeClr>
           </a:solidFill>
-          <a:latin typeface="+mn-lt"/>
+          <a:latin typeface="Bahnschrift Light" panose="020B0502040204020203" pitchFamily="34" charset="0"/>
           <a:ea typeface="+mn-ea"/>
           <a:cs typeface="+mn-cs"/>
         </a:defRPr>
@@ -4211,7 +4232,7 @@
               <a:lumOff val="25000"/>
             </a:schemeClr>
           </a:solidFill>
-          <a:latin typeface="+mn-lt"/>
+          <a:latin typeface="Bahnschrift Light" panose="020B0502040204020203" pitchFamily="34" charset="0"/>
           <a:ea typeface="+mn-ea"/>
           <a:cs typeface="+mn-cs"/>
         </a:defRPr>
@@ -4454,2127 +4475,28 @@
           <p:cNvPr id="2" name="Cím 1">
             <a:extLst>
               <a:ext uri="{FF2B5EF4-FFF2-40B4-BE49-F238E27FC236}">
-                <a16:creationId xmlns:a16="http://schemas.microsoft.com/office/drawing/2014/main" id="{DCFC31C5-22A4-4AE3-B1CF-E8D47EC9E0F7}"/>
+                <a16:creationId xmlns:a16="http://schemas.microsoft.com/office/drawing/2014/main" id="{C18830B2-00D6-4BD2-BE11-19215C420251}"/>
               </a:ext>
             </a:extLst>
           </p:cNvPr>
-          <p:cNvSpPr>
-            <a:spLocks noGrp="1"/>
-          </p:cNvSpPr>
-          <p:nvPr>
-            <p:ph type="ctrTitle"/>
-          </p:nvPr>
+          <p:cNvSpPr txBox="1">
+            <a:spLocks/>
+          </p:cNvSpPr>
+          <p:nvPr/>
         </p:nvSpPr>
         <p:spPr>
           <a:xfrm>
-            <a:off x="1393445" y="2188373"/>
-            <a:ext cx="9405110" cy="2006995"/>
-          </a:xfrm>
+            <a:off x="1320753" y="2904573"/>
+            <a:ext cx="9760046" cy="2006995"/>
+          </a:xfrm>
+          <a:prstGeom prst="rect">
+            <a:avLst/>
+          </a:prstGeom>
         </p:spPr>
         <p:txBody>
           <a:bodyPr>
             <a:normAutofit/>
           </a:bodyPr>
-          <a:lstStyle/>
-          <a:p>
-            <a:pPr algn="ctr"/>
-            <a:r>
-              <a:rPr lang="hu-HU" sz="4800" b="1" dirty="0">
-                <a:solidFill>
-                  <a:schemeClr val="tx1">
-                    <a:lumMod val="75000"/>
-                    <a:lumOff val="25000"/>
-                  </a:schemeClr>
-                </a:solidFill>
-                <a:latin typeface="Bahnschrift SemiBold" panose="020B0502040204020203" pitchFamily="34" charset="0"/>
-              </a:rPr>
-              <a:t>Iskolai étkezéskezelő rendszer</a:t>
-            </a:r>
-          </a:p>
-        </p:txBody>
-      </p:sp>
-      <p:sp>
-        <p:nvSpPr>
-          <p:cNvPr id="3" name="Alcím 2">
-            <a:extLst>
-              <a:ext uri="{FF2B5EF4-FFF2-40B4-BE49-F238E27FC236}">
-                <a16:creationId xmlns:a16="http://schemas.microsoft.com/office/drawing/2014/main" id="{866EABAC-7B22-4B25-BA11-44565DB22B86}"/>
-              </a:ext>
-            </a:extLst>
-          </p:cNvPr>
-          <p:cNvSpPr>
-            <a:spLocks noGrp="1"/>
-          </p:cNvSpPr>
-          <p:nvPr>
-            <p:ph type="subTitle" idx="1"/>
-          </p:nvPr>
-        </p:nvSpPr>
-        <p:spPr>
-          <a:xfrm>
-            <a:off x="3598026" y="4540867"/>
-            <a:ext cx="4995949" cy="571500"/>
-          </a:xfrm>
-        </p:spPr>
-        <p:txBody>
-          <a:bodyPr/>
-          <a:lstStyle/>
-          <a:p>
-            <a:pPr algn="ctr"/>
-            <a:r>
-              <a:rPr lang="hu-HU" i="1" dirty="0">
-                <a:solidFill>
-                  <a:srgbClr val="BD582C"/>
-                </a:solidFill>
-              </a:rPr>
-              <a:t>Vizsgaremek bemutatása</a:t>
-            </a:r>
-          </a:p>
-        </p:txBody>
-      </p:sp>
-      <p:pic>
-        <p:nvPicPr>
-          <p:cNvPr id="15" name="Kép 14">
-            <a:extLst>
-              <a:ext uri="{FF2B5EF4-FFF2-40B4-BE49-F238E27FC236}">
-                <a16:creationId xmlns:a16="http://schemas.microsoft.com/office/drawing/2014/main" id="{2BE6240C-4E50-4306-A1E5-2B741DF50BE5}"/>
-              </a:ext>
-            </a:extLst>
-          </p:cNvPr>
-          <p:cNvPicPr>
-            <a:picLocks noChangeAspect="1"/>
-          </p:cNvPicPr>
-          <p:nvPr/>
-        </p:nvPicPr>
-        <p:blipFill>
-          <a:blip r:embed="rId2">
-            <a:extLst>
-              <a:ext uri="{28A0092B-C50C-407E-A947-70E740481C1C}">
-                <a14:useLocalDpi xmlns:a14="http://schemas.microsoft.com/office/drawing/2010/main" val="0"/>
-              </a:ext>
-            </a:extLst>
-          </a:blip>
-          <a:stretch>
-            <a:fillRect/>
-          </a:stretch>
-        </p:blipFill>
-        <p:spPr>
-          <a:xfrm>
-            <a:off x="3648359" y="1208890"/>
-            <a:ext cx="4895281" cy="1613467"/>
-          </a:xfrm>
-          <a:prstGeom prst="rect">
-            <a:avLst/>
-          </a:prstGeom>
-        </p:spPr>
-      </p:pic>
-      <p:sp>
-        <p:nvSpPr>
-          <p:cNvPr id="16" name="Alcím 2">
-            <a:extLst>
-              <a:ext uri="{FF2B5EF4-FFF2-40B4-BE49-F238E27FC236}">
-                <a16:creationId xmlns:a16="http://schemas.microsoft.com/office/drawing/2014/main" id="{3E69796C-B4B2-4B1E-8202-6CEDA3AAC5F9}"/>
-              </a:ext>
-            </a:extLst>
-          </p:cNvPr>
-          <p:cNvSpPr txBox="1">
-            <a:spLocks/>
-          </p:cNvSpPr>
-          <p:nvPr/>
-        </p:nvSpPr>
-        <p:spPr>
-          <a:xfrm>
-            <a:off x="232010" y="5803364"/>
-            <a:ext cx="5968766" cy="571500"/>
-          </a:xfrm>
-          <a:prstGeom prst="rect">
-            <a:avLst/>
-          </a:prstGeom>
-        </p:spPr>
-        <p:txBody>
-          <a:bodyPr vert="horz" lIns="91440" tIns="45720" rIns="91440" bIns="45720" rtlCol="0">
-            <a:normAutofit lnSpcReduction="10000"/>
-          </a:bodyPr>
-          <a:lstStyle>
-            <a:lvl1pPr marL="0" indent="0" algn="l" defTabSz="914400" rtl="0" eaLnBrk="1" latinLnBrk="0" hangingPunct="1">
-              <a:lnSpc>
-                <a:spcPct val="90000"/>
-              </a:lnSpc>
-              <a:spcBef>
-                <a:spcPts val="1200"/>
-              </a:spcBef>
-              <a:spcAft>
-                <a:spcPts val="200"/>
-              </a:spcAft>
-              <a:buClr>
-                <a:schemeClr val="accent1"/>
-              </a:buClr>
-              <a:buSzPct val="100000"/>
-              <a:buFont typeface="Calibri" panose="020F0502020204030204" pitchFamily="34" charset="0"/>
-              <a:buNone/>
-              <a:defRPr sz="2400" kern="1200" cap="all" spc="200" baseline="0">
-                <a:solidFill>
-                  <a:schemeClr val="tx2"/>
-                </a:solidFill>
-                <a:latin typeface="+mj-lt"/>
-                <a:ea typeface="+mn-ea"/>
-                <a:cs typeface="+mn-cs"/>
-              </a:defRPr>
-            </a:lvl1pPr>
-            <a:lvl2pPr marL="457200" indent="0" algn="ctr" defTabSz="914400" rtl="0" eaLnBrk="1" latinLnBrk="0" hangingPunct="1">
-              <a:lnSpc>
-                <a:spcPct val="90000"/>
-              </a:lnSpc>
-              <a:spcBef>
-                <a:spcPts val="200"/>
-              </a:spcBef>
-              <a:spcAft>
-                <a:spcPts val="400"/>
-              </a:spcAft>
-              <a:buClr>
-                <a:schemeClr val="accent1"/>
-              </a:buClr>
-              <a:buFont typeface="Calibri" pitchFamily="34" charset="0"/>
-              <a:buNone/>
-              <a:defRPr sz="2400" kern="1200">
-                <a:solidFill>
-                  <a:schemeClr val="tx1">
-                    <a:lumMod val="75000"/>
-                    <a:lumOff val="25000"/>
-                  </a:schemeClr>
-                </a:solidFill>
-                <a:latin typeface="+mn-lt"/>
-                <a:ea typeface="+mn-ea"/>
-                <a:cs typeface="+mn-cs"/>
-              </a:defRPr>
-            </a:lvl2pPr>
-            <a:lvl3pPr marL="914400" indent="0" algn="ctr" defTabSz="914400" rtl="0" eaLnBrk="1" latinLnBrk="0" hangingPunct="1">
-              <a:lnSpc>
-                <a:spcPct val="90000"/>
-              </a:lnSpc>
-              <a:spcBef>
-                <a:spcPts val="200"/>
-              </a:spcBef>
-              <a:spcAft>
-                <a:spcPts val="400"/>
-              </a:spcAft>
-              <a:buClr>
-                <a:schemeClr val="accent1"/>
-              </a:buClr>
-              <a:buFont typeface="Calibri" pitchFamily="34" charset="0"/>
-              <a:buNone/>
-              <a:defRPr sz="2400" kern="1200">
-                <a:solidFill>
-                  <a:schemeClr val="tx1">
-                    <a:lumMod val="75000"/>
-                    <a:lumOff val="25000"/>
-                  </a:schemeClr>
-                </a:solidFill>
-                <a:latin typeface="+mn-lt"/>
-                <a:ea typeface="+mn-ea"/>
-                <a:cs typeface="+mn-cs"/>
-              </a:defRPr>
-            </a:lvl3pPr>
-            <a:lvl4pPr marL="1371600" indent="0" algn="ctr" defTabSz="914400" rtl="0" eaLnBrk="1" latinLnBrk="0" hangingPunct="1">
-              <a:lnSpc>
-                <a:spcPct val="90000"/>
-              </a:lnSpc>
-              <a:spcBef>
-                <a:spcPts val="200"/>
-              </a:spcBef>
-              <a:spcAft>
-                <a:spcPts val="400"/>
-              </a:spcAft>
-              <a:buClr>
-                <a:schemeClr val="accent1"/>
-              </a:buClr>
-              <a:buFont typeface="Calibri" pitchFamily="34" charset="0"/>
-              <a:buNone/>
-              <a:defRPr sz="2000" kern="1200">
-                <a:solidFill>
-                  <a:schemeClr val="tx1">
-                    <a:lumMod val="75000"/>
-                    <a:lumOff val="25000"/>
-                  </a:schemeClr>
-                </a:solidFill>
-                <a:latin typeface="+mn-lt"/>
-                <a:ea typeface="+mn-ea"/>
-                <a:cs typeface="+mn-cs"/>
-              </a:defRPr>
-            </a:lvl4pPr>
-            <a:lvl5pPr marL="1828800" indent="0" algn="ctr" defTabSz="914400" rtl="0" eaLnBrk="1" latinLnBrk="0" hangingPunct="1">
-              <a:lnSpc>
-                <a:spcPct val="90000"/>
-              </a:lnSpc>
-              <a:spcBef>
-                <a:spcPts val="200"/>
-              </a:spcBef>
-              <a:spcAft>
-                <a:spcPts val="400"/>
-              </a:spcAft>
-              <a:buClr>
-                <a:schemeClr val="accent1"/>
-              </a:buClr>
-              <a:buFont typeface="Calibri" pitchFamily="34" charset="0"/>
-              <a:buNone/>
-              <a:defRPr sz="2000" kern="1200">
-                <a:solidFill>
-                  <a:schemeClr val="tx1">
-                    <a:lumMod val="75000"/>
-                    <a:lumOff val="25000"/>
-                  </a:schemeClr>
-                </a:solidFill>
-                <a:latin typeface="+mn-lt"/>
-                <a:ea typeface="+mn-ea"/>
-                <a:cs typeface="+mn-cs"/>
-              </a:defRPr>
-            </a:lvl5pPr>
-            <a:lvl6pPr marL="2286000" indent="0" algn="ctr" defTabSz="914400" rtl="0" eaLnBrk="1" latinLnBrk="0" hangingPunct="1">
-              <a:lnSpc>
-                <a:spcPct val="90000"/>
-              </a:lnSpc>
-              <a:spcBef>
-                <a:spcPts val="200"/>
-              </a:spcBef>
-              <a:spcAft>
-                <a:spcPts val="400"/>
-              </a:spcAft>
-              <a:buClr>
-                <a:schemeClr val="accent1"/>
-              </a:buClr>
-              <a:buFont typeface="Calibri" pitchFamily="34" charset="0"/>
-              <a:buNone/>
-              <a:defRPr sz="2000" kern="1200">
-                <a:solidFill>
-                  <a:schemeClr val="tx1">
-                    <a:lumMod val="75000"/>
-                    <a:lumOff val="25000"/>
-                  </a:schemeClr>
-                </a:solidFill>
-                <a:latin typeface="+mn-lt"/>
-                <a:ea typeface="+mn-ea"/>
-                <a:cs typeface="+mn-cs"/>
-              </a:defRPr>
-            </a:lvl6pPr>
-            <a:lvl7pPr marL="2743200" indent="0" algn="ctr" defTabSz="914400" rtl="0" eaLnBrk="1" latinLnBrk="0" hangingPunct="1">
-              <a:lnSpc>
-                <a:spcPct val="90000"/>
-              </a:lnSpc>
-              <a:spcBef>
-                <a:spcPts val="200"/>
-              </a:spcBef>
-              <a:spcAft>
-                <a:spcPts val="400"/>
-              </a:spcAft>
-              <a:buClr>
-                <a:schemeClr val="accent1"/>
-              </a:buClr>
-              <a:buFont typeface="Calibri" pitchFamily="34" charset="0"/>
-              <a:buNone/>
-              <a:defRPr sz="2000" kern="1200">
-                <a:solidFill>
-                  <a:schemeClr val="tx1">
-                    <a:lumMod val="75000"/>
-                    <a:lumOff val="25000"/>
-                  </a:schemeClr>
-                </a:solidFill>
-                <a:latin typeface="+mn-lt"/>
-                <a:ea typeface="+mn-ea"/>
-                <a:cs typeface="+mn-cs"/>
-              </a:defRPr>
-            </a:lvl7pPr>
-            <a:lvl8pPr marL="3200400" indent="0" algn="ctr" defTabSz="914400" rtl="0" eaLnBrk="1" latinLnBrk="0" hangingPunct="1">
-              <a:lnSpc>
-                <a:spcPct val="90000"/>
-              </a:lnSpc>
-              <a:spcBef>
-                <a:spcPts val="200"/>
-              </a:spcBef>
-              <a:spcAft>
-                <a:spcPts val="400"/>
-              </a:spcAft>
-              <a:buClr>
-                <a:schemeClr val="accent1"/>
-              </a:buClr>
-              <a:buFont typeface="Calibri" pitchFamily="34" charset="0"/>
-              <a:buNone/>
-              <a:defRPr sz="2000" kern="1200">
-                <a:solidFill>
-                  <a:schemeClr val="tx1">
-                    <a:lumMod val="75000"/>
-                    <a:lumOff val="25000"/>
-                  </a:schemeClr>
-                </a:solidFill>
-                <a:latin typeface="+mn-lt"/>
-                <a:ea typeface="+mn-ea"/>
-                <a:cs typeface="+mn-cs"/>
-              </a:defRPr>
-            </a:lvl8pPr>
-            <a:lvl9pPr marL="3657600" indent="0" algn="ctr" defTabSz="914400" rtl="0" eaLnBrk="1" latinLnBrk="0" hangingPunct="1">
-              <a:lnSpc>
-                <a:spcPct val="90000"/>
-              </a:lnSpc>
-              <a:spcBef>
-                <a:spcPts val="200"/>
-              </a:spcBef>
-              <a:spcAft>
-                <a:spcPts val="400"/>
-              </a:spcAft>
-              <a:buClr>
-                <a:schemeClr val="accent1"/>
-              </a:buClr>
-              <a:buFont typeface="Calibri" pitchFamily="34" charset="0"/>
-              <a:buNone/>
-              <a:defRPr sz="2000" kern="1200">
-                <a:solidFill>
-                  <a:schemeClr val="tx1">
-                    <a:lumMod val="75000"/>
-                    <a:lumOff val="25000"/>
-                  </a:schemeClr>
-                </a:solidFill>
-                <a:latin typeface="+mn-lt"/>
-                <a:ea typeface="+mn-ea"/>
-                <a:cs typeface="+mn-cs"/>
-              </a:defRPr>
-            </a:lvl9pPr>
-          </a:lstStyle>
-          <a:p>
-            <a:r>
-              <a:rPr lang="hu-HU" sz="1800" b="1" dirty="0"/>
-              <a:t>Készítették: Atkári Ariella</a:t>
-            </a:r>
-            <a:br>
-              <a:rPr lang="hu-HU" sz="1800" b="1" dirty="0"/>
-            </a:br>
-            <a:r>
-              <a:rPr lang="hu-HU" sz="1800" b="1" dirty="0"/>
-              <a:t>	         Farkas Dominik</a:t>
-            </a:r>
-          </a:p>
-        </p:txBody>
-      </p:sp>
-      <p:sp>
-        <p:nvSpPr>
-          <p:cNvPr id="6" name="Alcím 2">
-            <a:extLst>
-              <a:ext uri="{FF2B5EF4-FFF2-40B4-BE49-F238E27FC236}">
-                <a16:creationId xmlns:a16="http://schemas.microsoft.com/office/drawing/2014/main" id="{96003F0B-BE7C-47FF-933B-026483BC2ADF}"/>
-              </a:ext>
-            </a:extLst>
-          </p:cNvPr>
-          <p:cNvSpPr txBox="1">
-            <a:spLocks/>
-          </p:cNvSpPr>
-          <p:nvPr/>
-        </p:nvSpPr>
-        <p:spPr>
-          <a:xfrm>
-            <a:off x="10588609" y="5936714"/>
-            <a:ext cx="1480604" cy="571500"/>
-          </a:xfrm>
-          <a:prstGeom prst="rect">
-            <a:avLst/>
-          </a:prstGeom>
-        </p:spPr>
-        <p:txBody>
-          <a:bodyPr vert="horz" lIns="91440" tIns="45720" rIns="91440" bIns="45720" rtlCol="0">
-            <a:normAutofit/>
-          </a:bodyPr>
-          <a:lstStyle>
-            <a:lvl1pPr marL="0" indent="0" algn="l" defTabSz="914400" rtl="0" eaLnBrk="1" latinLnBrk="0" hangingPunct="1">
-              <a:lnSpc>
-                <a:spcPct val="90000"/>
-              </a:lnSpc>
-              <a:spcBef>
-                <a:spcPts val="1200"/>
-              </a:spcBef>
-              <a:spcAft>
-                <a:spcPts val="200"/>
-              </a:spcAft>
-              <a:buClr>
-                <a:schemeClr val="accent1"/>
-              </a:buClr>
-              <a:buSzPct val="100000"/>
-              <a:buFont typeface="Calibri" panose="020F0502020204030204" pitchFamily="34" charset="0"/>
-              <a:buNone/>
-              <a:defRPr sz="2400" kern="1200" cap="all" spc="200" baseline="0">
-                <a:solidFill>
-                  <a:schemeClr val="tx2"/>
-                </a:solidFill>
-                <a:latin typeface="+mj-lt"/>
-                <a:ea typeface="+mn-ea"/>
-                <a:cs typeface="+mn-cs"/>
-              </a:defRPr>
-            </a:lvl1pPr>
-            <a:lvl2pPr marL="457200" indent="0" algn="ctr" defTabSz="914400" rtl="0" eaLnBrk="1" latinLnBrk="0" hangingPunct="1">
-              <a:lnSpc>
-                <a:spcPct val="90000"/>
-              </a:lnSpc>
-              <a:spcBef>
-                <a:spcPts val="200"/>
-              </a:spcBef>
-              <a:spcAft>
-                <a:spcPts val="400"/>
-              </a:spcAft>
-              <a:buClr>
-                <a:schemeClr val="accent1"/>
-              </a:buClr>
-              <a:buFont typeface="Calibri" pitchFamily="34" charset="0"/>
-              <a:buNone/>
-              <a:defRPr sz="2400" kern="1200">
-                <a:solidFill>
-                  <a:schemeClr val="tx1">
-                    <a:lumMod val="75000"/>
-                    <a:lumOff val="25000"/>
-                  </a:schemeClr>
-                </a:solidFill>
-                <a:latin typeface="+mn-lt"/>
-                <a:ea typeface="+mn-ea"/>
-                <a:cs typeface="+mn-cs"/>
-              </a:defRPr>
-            </a:lvl2pPr>
-            <a:lvl3pPr marL="914400" indent="0" algn="ctr" defTabSz="914400" rtl="0" eaLnBrk="1" latinLnBrk="0" hangingPunct="1">
-              <a:lnSpc>
-                <a:spcPct val="90000"/>
-              </a:lnSpc>
-              <a:spcBef>
-                <a:spcPts val="200"/>
-              </a:spcBef>
-              <a:spcAft>
-                <a:spcPts val="400"/>
-              </a:spcAft>
-              <a:buClr>
-                <a:schemeClr val="accent1"/>
-              </a:buClr>
-              <a:buFont typeface="Calibri" pitchFamily="34" charset="0"/>
-              <a:buNone/>
-              <a:defRPr sz="2400" kern="1200">
-                <a:solidFill>
-                  <a:schemeClr val="tx1">
-                    <a:lumMod val="75000"/>
-                    <a:lumOff val="25000"/>
-                  </a:schemeClr>
-                </a:solidFill>
-                <a:latin typeface="+mn-lt"/>
-                <a:ea typeface="+mn-ea"/>
-                <a:cs typeface="+mn-cs"/>
-              </a:defRPr>
-            </a:lvl3pPr>
-            <a:lvl4pPr marL="1371600" indent="0" algn="ctr" defTabSz="914400" rtl="0" eaLnBrk="1" latinLnBrk="0" hangingPunct="1">
-              <a:lnSpc>
-                <a:spcPct val="90000"/>
-              </a:lnSpc>
-              <a:spcBef>
-                <a:spcPts val="200"/>
-              </a:spcBef>
-              <a:spcAft>
-                <a:spcPts val="400"/>
-              </a:spcAft>
-              <a:buClr>
-                <a:schemeClr val="accent1"/>
-              </a:buClr>
-              <a:buFont typeface="Calibri" pitchFamily="34" charset="0"/>
-              <a:buNone/>
-              <a:defRPr sz="2000" kern="1200">
-                <a:solidFill>
-                  <a:schemeClr val="tx1">
-                    <a:lumMod val="75000"/>
-                    <a:lumOff val="25000"/>
-                  </a:schemeClr>
-                </a:solidFill>
-                <a:latin typeface="+mn-lt"/>
-                <a:ea typeface="+mn-ea"/>
-                <a:cs typeface="+mn-cs"/>
-              </a:defRPr>
-            </a:lvl4pPr>
-            <a:lvl5pPr marL="1828800" indent="0" algn="ctr" defTabSz="914400" rtl="0" eaLnBrk="1" latinLnBrk="0" hangingPunct="1">
-              <a:lnSpc>
-                <a:spcPct val="90000"/>
-              </a:lnSpc>
-              <a:spcBef>
-                <a:spcPts val="200"/>
-              </a:spcBef>
-              <a:spcAft>
-                <a:spcPts val="400"/>
-              </a:spcAft>
-              <a:buClr>
-                <a:schemeClr val="accent1"/>
-              </a:buClr>
-              <a:buFont typeface="Calibri" pitchFamily="34" charset="0"/>
-              <a:buNone/>
-              <a:defRPr sz="2000" kern="1200">
-                <a:solidFill>
-                  <a:schemeClr val="tx1">
-                    <a:lumMod val="75000"/>
-                    <a:lumOff val="25000"/>
-                  </a:schemeClr>
-                </a:solidFill>
-                <a:latin typeface="+mn-lt"/>
-                <a:ea typeface="+mn-ea"/>
-                <a:cs typeface="+mn-cs"/>
-              </a:defRPr>
-            </a:lvl5pPr>
-            <a:lvl6pPr marL="2286000" indent="0" algn="ctr" defTabSz="914400" rtl="0" eaLnBrk="1" latinLnBrk="0" hangingPunct="1">
-              <a:lnSpc>
-                <a:spcPct val="90000"/>
-              </a:lnSpc>
-              <a:spcBef>
-                <a:spcPts val="200"/>
-              </a:spcBef>
-              <a:spcAft>
-                <a:spcPts val="400"/>
-              </a:spcAft>
-              <a:buClr>
-                <a:schemeClr val="accent1"/>
-              </a:buClr>
-              <a:buFont typeface="Calibri" pitchFamily="34" charset="0"/>
-              <a:buNone/>
-              <a:defRPr sz="2000" kern="1200">
-                <a:solidFill>
-                  <a:schemeClr val="tx1">
-                    <a:lumMod val="75000"/>
-                    <a:lumOff val="25000"/>
-                  </a:schemeClr>
-                </a:solidFill>
-                <a:latin typeface="+mn-lt"/>
-                <a:ea typeface="+mn-ea"/>
-                <a:cs typeface="+mn-cs"/>
-              </a:defRPr>
-            </a:lvl6pPr>
-            <a:lvl7pPr marL="2743200" indent="0" algn="ctr" defTabSz="914400" rtl="0" eaLnBrk="1" latinLnBrk="0" hangingPunct="1">
-              <a:lnSpc>
-                <a:spcPct val="90000"/>
-              </a:lnSpc>
-              <a:spcBef>
-                <a:spcPts val="200"/>
-              </a:spcBef>
-              <a:spcAft>
-                <a:spcPts val="400"/>
-              </a:spcAft>
-              <a:buClr>
-                <a:schemeClr val="accent1"/>
-              </a:buClr>
-              <a:buFont typeface="Calibri" pitchFamily="34" charset="0"/>
-              <a:buNone/>
-              <a:defRPr sz="2000" kern="1200">
-                <a:solidFill>
-                  <a:schemeClr val="tx1">
-                    <a:lumMod val="75000"/>
-                    <a:lumOff val="25000"/>
-                  </a:schemeClr>
-                </a:solidFill>
-                <a:latin typeface="+mn-lt"/>
-                <a:ea typeface="+mn-ea"/>
-                <a:cs typeface="+mn-cs"/>
-              </a:defRPr>
-            </a:lvl7pPr>
-            <a:lvl8pPr marL="3200400" indent="0" algn="ctr" defTabSz="914400" rtl="0" eaLnBrk="1" latinLnBrk="0" hangingPunct="1">
-              <a:lnSpc>
-                <a:spcPct val="90000"/>
-              </a:lnSpc>
-              <a:spcBef>
-                <a:spcPts val="200"/>
-              </a:spcBef>
-              <a:spcAft>
-                <a:spcPts val="400"/>
-              </a:spcAft>
-              <a:buClr>
-                <a:schemeClr val="accent1"/>
-              </a:buClr>
-              <a:buFont typeface="Calibri" pitchFamily="34" charset="0"/>
-              <a:buNone/>
-              <a:defRPr sz="2000" kern="1200">
-                <a:solidFill>
-                  <a:schemeClr val="tx1">
-                    <a:lumMod val="75000"/>
-                    <a:lumOff val="25000"/>
-                  </a:schemeClr>
-                </a:solidFill>
-                <a:latin typeface="+mn-lt"/>
-                <a:ea typeface="+mn-ea"/>
-                <a:cs typeface="+mn-cs"/>
-              </a:defRPr>
-            </a:lvl8pPr>
-            <a:lvl9pPr marL="3657600" indent="0" algn="ctr" defTabSz="914400" rtl="0" eaLnBrk="1" latinLnBrk="0" hangingPunct="1">
-              <a:lnSpc>
-                <a:spcPct val="90000"/>
-              </a:lnSpc>
-              <a:spcBef>
-                <a:spcPts val="200"/>
-              </a:spcBef>
-              <a:spcAft>
-                <a:spcPts val="400"/>
-              </a:spcAft>
-              <a:buClr>
-                <a:schemeClr val="accent1"/>
-              </a:buClr>
-              <a:buFont typeface="Calibri" pitchFamily="34" charset="0"/>
-              <a:buNone/>
-              <a:defRPr sz="2000" kern="1200">
-                <a:solidFill>
-                  <a:schemeClr val="tx1">
-                    <a:lumMod val="75000"/>
-                    <a:lumOff val="25000"/>
-                  </a:schemeClr>
-                </a:solidFill>
-                <a:latin typeface="+mn-lt"/>
-                <a:ea typeface="+mn-ea"/>
-                <a:cs typeface="+mn-cs"/>
-              </a:defRPr>
-            </a:lvl9pPr>
-          </a:lstStyle>
-          <a:p>
-            <a:r>
-              <a:rPr lang="hu-HU" sz="1800" dirty="0"/>
-              <a:t>2026.03.03</a:t>
-            </a:r>
-          </a:p>
-        </p:txBody>
-      </p:sp>
-    </p:spTree>
-    <p:extLst>
-      <p:ext uri="{BB962C8B-B14F-4D97-AF65-F5344CB8AC3E}">
-        <p14:creationId xmlns:p14="http://schemas.microsoft.com/office/powerpoint/2010/main" val="2578279295"/>
-      </p:ext>
-    </p:extLst>
-  </p:cSld>
-  <p:clrMapOvr>
-    <a:masterClrMapping/>
-  </p:clrMapOvr>
-</p:sld>
-</file>
-
-<file path=ppt/slides/slide10.xml><?xml version="1.0" encoding="utf-8"?>
-<p:sld xmlns:a="http://schemas.openxmlformats.org/drawingml/2006/main" xmlns:r="http://schemas.openxmlformats.org/officeDocument/2006/relationships" xmlns:p="http://schemas.openxmlformats.org/presentationml/2006/main">
-  <p:cSld>
-    <p:bg>
-      <p:bgPr>
-        <a:solidFill>
-          <a:srgbClr val="FDF7E9"/>
-        </a:solidFill>
-        <a:effectLst/>
-      </p:bgPr>
-    </p:bg>
-    <p:spTree>
-      <p:nvGrpSpPr>
-        <p:cNvPr id="1" name=""/>
-        <p:cNvGrpSpPr/>
-        <p:nvPr/>
-      </p:nvGrpSpPr>
-      <p:grpSpPr>
-        <a:xfrm>
-          <a:off x="0" y="0"/>
-          <a:ext cx="0" cy="0"/>
-          <a:chOff x="0" y="0"/>
-          <a:chExt cx="0" cy="0"/>
-        </a:xfrm>
-      </p:grpSpPr>
-      <p:sp>
-        <p:nvSpPr>
-          <p:cNvPr id="5" name="Szöveg helye 3">
-            <a:extLst>
-              <a:ext uri="{FF2B5EF4-FFF2-40B4-BE49-F238E27FC236}">
-                <a16:creationId xmlns:a16="http://schemas.microsoft.com/office/drawing/2014/main" id="{5A03AB81-7D99-4C1A-BBE2-727445750850}"/>
-              </a:ext>
-            </a:extLst>
-          </p:cNvPr>
-          <p:cNvSpPr>
-            <a:spLocks noGrp="1"/>
-          </p:cNvSpPr>
-          <p:nvPr>
-            <p:ph type="body" sz="half" idx="2"/>
-          </p:nvPr>
-        </p:nvSpPr>
-        <p:spPr>
-          <a:xfrm>
-            <a:off x="457200" y="3259455"/>
-            <a:ext cx="3562350" cy="3684270"/>
-          </a:xfrm>
-        </p:spPr>
-        <p:txBody>
-          <a:bodyPr>
-            <a:normAutofit/>
-          </a:bodyPr>
-          <a:lstStyle/>
-          <a:p>
-            <a:pPr marL="285750" indent="-285750">
-              <a:buClr>
-                <a:schemeClr val="bg1"/>
-              </a:buClr>
-              <a:buFont typeface="Arial" panose="020B0604020202020204" pitchFamily="34" charset="0"/>
-              <a:buChar char="•"/>
-            </a:pPr>
-            <a:r>
-              <a:rPr lang="hu-HU" sz="1800" dirty="0"/>
-              <a:t>Vue.js 3</a:t>
-            </a:r>
-          </a:p>
-          <a:p>
-            <a:pPr marL="285750" indent="-285750">
-              <a:buClr>
-                <a:schemeClr val="bg1"/>
-              </a:buClr>
-              <a:buFont typeface="Arial" panose="020B0604020202020204" pitchFamily="34" charset="0"/>
-              <a:buChar char="•"/>
-            </a:pPr>
-            <a:r>
-              <a:rPr lang="hu-HU" sz="1800" dirty="0" err="1"/>
-              <a:t>Axios</a:t>
-            </a:r>
-            <a:endParaRPr lang="hu-HU" sz="1800" dirty="0"/>
-          </a:p>
-          <a:p>
-            <a:pPr marL="285750" indent="-285750">
-              <a:buClr>
-                <a:schemeClr val="bg1"/>
-              </a:buClr>
-              <a:buFont typeface="Arial" panose="020B0604020202020204" pitchFamily="34" charset="0"/>
-              <a:buChar char="•"/>
-            </a:pPr>
-            <a:r>
-              <a:rPr lang="hu-HU" sz="1800" dirty="0" err="1"/>
-              <a:t>Bootstrap</a:t>
-            </a:r>
-            <a:endParaRPr lang="hu-HU" sz="1800" dirty="0"/>
-          </a:p>
-          <a:p>
-            <a:pPr marL="285750" indent="-285750">
-              <a:buClr>
-                <a:schemeClr val="bg1"/>
-              </a:buClr>
-              <a:buFont typeface="Arial" panose="020B0604020202020204" pitchFamily="34" charset="0"/>
-              <a:buChar char="•"/>
-            </a:pPr>
-            <a:r>
-              <a:rPr lang="hu-HU" sz="1800" dirty="0" err="1"/>
-              <a:t>Kepek</a:t>
-            </a:r>
-            <a:r>
-              <a:rPr lang="hu-HU" sz="1800" dirty="0"/>
-              <a:t>: </a:t>
-            </a:r>
-            <a:r>
-              <a:rPr lang="hu-HU" sz="1800" dirty="0" err="1"/>
-              <a:t>vue</a:t>
-            </a:r>
-            <a:r>
-              <a:rPr lang="hu-HU" sz="1800" dirty="0"/>
-              <a:t> oldalak</a:t>
-            </a:r>
-          </a:p>
-          <a:p>
-            <a:pPr marL="285750" indent="-285750">
-              <a:buClr>
-                <a:schemeClr val="bg1"/>
-              </a:buClr>
-              <a:buFont typeface="Arial" panose="020B0604020202020204" pitchFamily="34" charset="0"/>
-              <a:buChar char="•"/>
-            </a:pPr>
-            <a:endParaRPr lang="hu-HU" sz="1800" dirty="0"/>
-          </a:p>
-          <a:p>
-            <a:pPr marL="285750" indent="-285750">
-              <a:buClr>
-                <a:schemeClr val="bg1"/>
-              </a:buClr>
-              <a:buFont typeface="Arial" panose="020B0604020202020204" pitchFamily="34" charset="0"/>
-              <a:buChar char="•"/>
-            </a:pPr>
-            <a:endParaRPr lang="hu-HU" sz="1800" dirty="0"/>
-          </a:p>
-          <a:p>
-            <a:pPr marL="285750" indent="-285750">
-              <a:buClr>
-                <a:schemeClr val="bg1"/>
-              </a:buClr>
-              <a:buFont typeface="Arial" panose="020B0604020202020204" pitchFamily="34" charset="0"/>
-              <a:buChar char="•"/>
-            </a:pPr>
-            <a:endParaRPr lang="hu-HU" sz="1800" dirty="0"/>
-          </a:p>
-        </p:txBody>
-      </p:sp>
-      <p:sp>
-        <p:nvSpPr>
-          <p:cNvPr id="6" name="Cím 1">
-            <a:extLst>
-              <a:ext uri="{FF2B5EF4-FFF2-40B4-BE49-F238E27FC236}">
-                <a16:creationId xmlns:a16="http://schemas.microsoft.com/office/drawing/2014/main" id="{56BAE57D-1584-4B02-A4E9-FF150F42817A}"/>
-              </a:ext>
-            </a:extLst>
-          </p:cNvPr>
-          <p:cNvSpPr>
-            <a:spLocks noGrp="1"/>
-          </p:cNvSpPr>
-          <p:nvPr>
-            <p:ph type="title"/>
-          </p:nvPr>
-        </p:nvSpPr>
-        <p:spPr>
-          <a:xfrm>
-            <a:off x="457200" y="622934"/>
-            <a:ext cx="3200400" cy="2286000"/>
-          </a:xfrm>
-        </p:spPr>
-        <p:txBody>
-          <a:bodyPr/>
-          <a:lstStyle/>
-          <a:p>
-            <a:r>
-              <a:rPr lang="hu-HU" dirty="0">
-                <a:latin typeface="Bahnschrift SemiBold" panose="020B0502040204020203" pitchFamily="34" charset="0"/>
-              </a:rPr>
-              <a:t>Frontend</a:t>
-            </a:r>
-          </a:p>
-        </p:txBody>
-      </p:sp>
-    </p:spTree>
-    <p:extLst>
-      <p:ext uri="{BB962C8B-B14F-4D97-AF65-F5344CB8AC3E}">
-        <p14:creationId xmlns:p14="http://schemas.microsoft.com/office/powerpoint/2010/main" val="2480736290"/>
-      </p:ext>
-    </p:extLst>
-  </p:cSld>
-  <p:clrMapOvr>
-    <a:masterClrMapping/>
-  </p:clrMapOvr>
-</p:sld>
-</file>
-
-<file path=ppt/slides/slide11.xml><?xml version="1.0" encoding="utf-8"?>
-<p:sld xmlns:a="http://schemas.openxmlformats.org/drawingml/2006/main" xmlns:r="http://schemas.openxmlformats.org/officeDocument/2006/relationships" xmlns:p="http://schemas.openxmlformats.org/presentationml/2006/main">
-  <p:cSld>
-    <p:bg>
-      <p:bgPr>
-        <a:solidFill>
-          <a:srgbClr val="FDF7E9"/>
-        </a:solidFill>
-        <a:effectLst/>
-      </p:bgPr>
-    </p:bg>
-    <p:spTree>
-      <p:nvGrpSpPr>
-        <p:cNvPr id="1" name=""/>
-        <p:cNvGrpSpPr/>
-        <p:nvPr/>
-      </p:nvGrpSpPr>
-      <p:grpSpPr>
-        <a:xfrm>
-          <a:off x="0" y="0"/>
-          <a:ext cx="0" cy="0"/>
-          <a:chOff x="0" y="0"/>
-          <a:chExt cx="0" cy="0"/>
-        </a:xfrm>
-      </p:grpSpPr>
-      <p:sp>
-        <p:nvSpPr>
-          <p:cNvPr id="2" name="Cím 1">
-            <a:extLst>
-              <a:ext uri="{FF2B5EF4-FFF2-40B4-BE49-F238E27FC236}">
-                <a16:creationId xmlns:a16="http://schemas.microsoft.com/office/drawing/2014/main" id="{E1BC1CFA-A756-4730-9608-D06BB35C262F}"/>
-              </a:ext>
-            </a:extLst>
-          </p:cNvPr>
-          <p:cNvSpPr>
-            <a:spLocks noGrp="1"/>
-          </p:cNvSpPr>
-          <p:nvPr>
-            <p:ph type="title"/>
-          </p:nvPr>
-        </p:nvSpPr>
-        <p:spPr/>
-        <p:txBody>
-          <a:bodyPr/>
-          <a:lstStyle/>
-          <a:p>
-            <a:endParaRPr lang="hu-HU"/>
-          </a:p>
-        </p:txBody>
-      </p:sp>
-      <p:sp>
-        <p:nvSpPr>
-          <p:cNvPr id="4" name="Szöveg helye 3">
-            <a:extLst>
-              <a:ext uri="{FF2B5EF4-FFF2-40B4-BE49-F238E27FC236}">
-                <a16:creationId xmlns:a16="http://schemas.microsoft.com/office/drawing/2014/main" id="{D8C578E4-409C-45D7-8961-22483CEEC334}"/>
-              </a:ext>
-            </a:extLst>
-          </p:cNvPr>
-          <p:cNvSpPr>
-            <a:spLocks noGrp="1"/>
-          </p:cNvSpPr>
-          <p:nvPr>
-            <p:ph type="body" sz="half" idx="2"/>
-          </p:nvPr>
-        </p:nvSpPr>
-        <p:spPr/>
-        <p:txBody>
-          <a:bodyPr/>
-          <a:lstStyle/>
-          <a:p>
-            <a:endParaRPr lang="hu-HU"/>
-          </a:p>
-        </p:txBody>
-      </p:sp>
-    </p:spTree>
-    <p:extLst>
-      <p:ext uri="{BB962C8B-B14F-4D97-AF65-F5344CB8AC3E}">
-        <p14:creationId xmlns:p14="http://schemas.microsoft.com/office/powerpoint/2010/main" val="4008681048"/>
-      </p:ext>
-    </p:extLst>
-  </p:cSld>
-  <p:clrMapOvr>
-    <a:masterClrMapping/>
-  </p:clrMapOvr>
-</p:sld>
-</file>
-
-<file path=ppt/slides/slide12.xml><?xml version="1.0" encoding="utf-8"?>
-<p:sld xmlns:a="http://schemas.openxmlformats.org/drawingml/2006/main" xmlns:r="http://schemas.openxmlformats.org/officeDocument/2006/relationships" xmlns:p="http://schemas.openxmlformats.org/presentationml/2006/main">
-  <p:cSld>
-    <p:bg>
-      <p:bgPr>
-        <a:solidFill>
-          <a:srgbClr val="FDF7E9"/>
-        </a:solidFill>
-        <a:effectLst/>
-      </p:bgPr>
-    </p:bg>
-    <p:spTree>
-      <p:nvGrpSpPr>
-        <p:cNvPr id="1" name=""/>
-        <p:cNvGrpSpPr/>
-        <p:nvPr/>
-      </p:nvGrpSpPr>
-      <p:grpSpPr>
-        <a:xfrm>
-          <a:off x="0" y="0"/>
-          <a:ext cx="0" cy="0"/>
-          <a:chOff x="0" y="0"/>
-          <a:chExt cx="0" cy="0"/>
-        </a:xfrm>
-      </p:grpSpPr>
-      <p:sp>
-        <p:nvSpPr>
-          <p:cNvPr id="3" name="Tartalom helye 2">
-            <a:extLst>
-              <a:ext uri="{FF2B5EF4-FFF2-40B4-BE49-F238E27FC236}">
-                <a16:creationId xmlns:a16="http://schemas.microsoft.com/office/drawing/2014/main" id="{32758DB2-9D10-47A2-925C-F8A858558A07}"/>
-              </a:ext>
-            </a:extLst>
-          </p:cNvPr>
-          <p:cNvSpPr>
-            <a:spLocks noGrp="1"/>
-          </p:cNvSpPr>
-          <p:nvPr>
-            <p:ph idx="1"/>
-          </p:nvPr>
-        </p:nvSpPr>
-        <p:spPr/>
-        <p:txBody>
-          <a:bodyPr/>
-          <a:lstStyle/>
-          <a:p>
-            <a:r>
-              <a:rPr lang="hu-HU" dirty="0" err="1"/>
-              <a:t>Vuejs</a:t>
-            </a:r>
-            <a:r>
-              <a:rPr lang="hu-HU" dirty="0"/>
-              <a:t> 3</a:t>
-            </a:r>
-          </a:p>
-          <a:p>
-            <a:r>
-              <a:rPr lang="hu-HU" dirty="0" err="1"/>
-              <a:t>Axios</a:t>
-            </a:r>
-            <a:endParaRPr lang="hu-HU" dirty="0"/>
-          </a:p>
-          <a:p>
-            <a:r>
-              <a:rPr lang="hu-HU" dirty="0"/>
-              <a:t>bővítmények</a:t>
-            </a:r>
-          </a:p>
-        </p:txBody>
-      </p:sp>
-      <p:sp>
-        <p:nvSpPr>
-          <p:cNvPr id="4" name="Cím 1">
-            <a:extLst>
-              <a:ext uri="{FF2B5EF4-FFF2-40B4-BE49-F238E27FC236}">
-                <a16:creationId xmlns:a16="http://schemas.microsoft.com/office/drawing/2014/main" id="{1BABF97B-7E63-454C-9CDB-F386138F1BAA}"/>
-              </a:ext>
-            </a:extLst>
-          </p:cNvPr>
-          <p:cNvSpPr>
-            <a:spLocks noGrp="1"/>
-          </p:cNvSpPr>
-          <p:nvPr>
-            <p:ph type="title"/>
-          </p:nvPr>
-        </p:nvSpPr>
-        <p:spPr>
-          <a:xfrm>
-            <a:off x="1097280" y="286603"/>
-            <a:ext cx="10058400" cy="1450757"/>
-          </a:xfrm>
-        </p:spPr>
-        <p:txBody>
-          <a:bodyPr/>
-          <a:lstStyle/>
-          <a:p>
-            <a:r>
-              <a:rPr lang="hu-HU" b="1" dirty="0">
-                <a:latin typeface="Bahnschrift SemiBold" panose="020B0502040204020203" pitchFamily="34" charset="0"/>
-              </a:rPr>
-              <a:t>Frontend</a:t>
-            </a:r>
-          </a:p>
-        </p:txBody>
-      </p:sp>
-      <p:grpSp>
-        <p:nvGrpSpPr>
-          <p:cNvPr id="7" name="Csoportba foglalás 6">
-            <a:extLst>
-              <a:ext uri="{FF2B5EF4-FFF2-40B4-BE49-F238E27FC236}">
-                <a16:creationId xmlns:a16="http://schemas.microsoft.com/office/drawing/2014/main" id="{15ADBE7A-C248-4CA3-8263-604D44A26A56}"/>
-              </a:ext>
-            </a:extLst>
-          </p:cNvPr>
-          <p:cNvGrpSpPr/>
-          <p:nvPr/>
-        </p:nvGrpSpPr>
-        <p:grpSpPr>
-          <a:xfrm>
-            <a:off x="10565538" y="349786"/>
-            <a:ext cx="1418895" cy="1258023"/>
-            <a:chOff x="10565538" y="349786"/>
-            <a:chExt cx="1418895" cy="1258023"/>
-          </a:xfrm>
-        </p:grpSpPr>
-        <p:pic>
-          <p:nvPicPr>
-            <p:cNvPr id="8" name="Kép 7">
-              <a:extLst>
-                <a:ext uri="{FF2B5EF4-FFF2-40B4-BE49-F238E27FC236}">
-                  <a16:creationId xmlns:a16="http://schemas.microsoft.com/office/drawing/2014/main" id="{B5CD5F08-FF35-4A18-A4DD-6D1908F4F607}"/>
-                </a:ext>
-              </a:extLst>
-            </p:cNvPr>
-            <p:cNvPicPr>
-              <a:picLocks noChangeAspect="1"/>
-            </p:cNvPicPr>
-            <p:nvPr/>
-          </p:nvPicPr>
-          <p:blipFill rotWithShape="1">
-            <a:blip r:embed="rId2">
-              <a:alphaModFix amt="50000"/>
-              <a:extLst>
-                <a:ext uri="{28A0092B-C50C-407E-A947-70E740481C1C}">
-                  <a14:useLocalDpi xmlns:a14="http://schemas.microsoft.com/office/drawing/2010/main" val="0"/>
-                </a:ext>
-              </a:extLst>
-            </a:blip>
-            <a:srcRect t="58555" r="67375"/>
-            <a:stretch/>
-          </p:blipFill>
-          <p:spPr>
-            <a:xfrm>
-              <a:off x="10619475" y="1036308"/>
-              <a:ext cx="1364958" cy="571501"/>
-            </a:xfrm>
-            <a:prstGeom prst="rect">
-              <a:avLst/>
-            </a:prstGeom>
-          </p:spPr>
-        </p:pic>
-        <p:pic>
-          <p:nvPicPr>
-            <p:cNvPr id="9" name="Kép 8">
-              <a:extLst>
-                <a:ext uri="{FF2B5EF4-FFF2-40B4-BE49-F238E27FC236}">
-                  <a16:creationId xmlns:a16="http://schemas.microsoft.com/office/drawing/2014/main" id="{72191454-7B04-488C-B16A-2741D54161EA}"/>
-                </a:ext>
-              </a:extLst>
-            </p:cNvPr>
-            <p:cNvPicPr>
-              <a:picLocks noChangeAspect="1"/>
-            </p:cNvPicPr>
-            <p:nvPr/>
-          </p:nvPicPr>
-          <p:blipFill rotWithShape="1">
-            <a:blip r:embed="rId2">
-              <a:alphaModFix amt="50000"/>
-              <a:extLst>
-                <a:ext uri="{28A0092B-C50C-407E-A947-70E740481C1C}">
-                  <a14:useLocalDpi xmlns:a14="http://schemas.microsoft.com/office/drawing/2010/main" val="0"/>
-                </a:ext>
-              </a:extLst>
-            </a:blip>
-            <a:srcRect l="1" r="61666" b="38896"/>
-            <a:stretch/>
-          </p:blipFill>
-          <p:spPr>
-            <a:xfrm>
-              <a:off x="10565538" y="349786"/>
-              <a:ext cx="1418895" cy="745451"/>
-            </a:xfrm>
-            <a:prstGeom prst="rect">
-              <a:avLst/>
-            </a:prstGeom>
-          </p:spPr>
-        </p:pic>
-      </p:grpSp>
-    </p:spTree>
-    <p:extLst>
-      <p:ext uri="{BB962C8B-B14F-4D97-AF65-F5344CB8AC3E}">
-        <p14:creationId xmlns:p14="http://schemas.microsoft.com/office/powerpoint/2010/main" val="3599911411"/>
-      </p:ext>
-    </p:extLst>
-  </p:cSld>
-  <p:clrMapOvr>
-    <a:masterClrMapping/>
-  </p:clrMapOvr>
-</p:sld>
-</file>
-
-<file path=ppt/slides/slide13.xml><?xml version="1.0" encoding="utf-8"?>
-<p:sld xmlns:a="http://schemas.openxmlformats.org/drawingml/2006/main" xmlns:r="http://schemas.openxmlformats.org/officeDocument/2006/relationships" xmlns:p="http://schemas.openxmlformats.org/presentationml/2006/main">
-  <p:cSld>
-    <p:bg>
-      <p:bgPr>
-        <a:solidFill>
-          <a:srgbClr val="FDF7E9"/>
-        </a:solidFill>
-        <a:effectLst/>
-      </p:bgPr>
-    </p:bg>
-    <p:spTree>
-      <p:nvGrpSpPr>
-        <p:cNvPr id="1" name=""/>
-        <p:cNvGrpSpPr/>
-        <p:nvPr/>
-      </p:nvGrpSpPr>
-      <p:grpSpPr>
-        <a:xfrm>
-          <a:off x="0" y="0"/>
-          <a:ext cx="0" cy="0"/>
-          <a:chOff x="0" y="0"/>
-          <a:chExt cx="0" cy="0"/>
-        </a:xfrm>
-      </p:grpSpPr>
-      <p:sp>
-        <p:nvSpPr>
-          <p:cNvPr id="3" name="Tartalom helye 2">
-            <a:extLst>
-              <a:ext uri="{FF2B5EF4-FFF2-40B4-BE49-F238E27FC236}">
-                <a16:creationId xmlns:a16="http://schemas.microsoft.com/office/drawing/2014/main" id="{32758DB2-9D10-47A2-925C-F8A858558A07}"/>
-              </a:ext>
-            </a:extLst>
-          </p:cNvPr>
-          <p:cNvSpPr>
-            <a:spLocks noGrp="1"/>
-          </p:cNvSpPr>
-          <p:nvPr>
-            <p:ph idx="1"/>
-          </p:nvPr>
-        </p:nvSpPr>
-        <p:spPr/>
-        <p:txBody>
-          <a:bodyPr/>
-          <a:lstStyle/>
-          <a:p>
-            <a:r>
-              <a:rPr lang="hu-HU" dirty="0"/>
-              <a:t>X tábla</a:t>
-            </a:r>
-          </a:p>
-          <a:p>
-            <a:r>
-              <a:rPr lang="hu-HU" dirty="0"/>
-              <a:t>Mintaadatok (</a:t>
-            </a:r>
-            <a:r>
-              <a:rPr lang="hu-HU" dirty="0" err="1"/>
-              <a:t>seeder</a:t>
-            </a:r>
-            <a:r>
-              <a:rPr lang="hu-HU" dirty="0"/>
-              <a:t>): </a:t>
-            </a:r>
-          </a:p>
-          <a:p>
-            <a:r>
-              <a:rPr lang="hu-HU" dirty="0"/>
-              <a:t>Adatbázis kép részlet</a:t>
-            </a:r>
-          </a:p>
-          <a:p>
-            <a:endParaRPr lang="hu-HU" dirty="0"/>
-          </a:p>
-        </p:txBody>
-      </p:sp>
-      <p:sp>
-        <p:nvSpPr>
-          <p:cNvPr id="4" name="Cím 1">
-            <a:extLst>
-              <a:ext uri="{FF2B5EF4-FFF2-40B4-BE49-F238E27FC236}">
-                <a16:creationId xmlns:a16="http://schemas.microsoft.com/office/drawing/2014/main" id="{1BABF97B-7E63-454C-9CDB-F386138F1BAA}"/>
-              </a:ext>
-            </a:extLst>
-          </p:cNvPr>
-          <p:cNvSpPr>
-            <a:spLocks noGrp="1"/>
-          </p:cNvSpPr>
-          <p:nvPr>
-            <p:ph type="title"/>
-          </p:nvPr>
-        </p:nvSpPr>
-        <p:spPr>
-          <a:xfrm>
-            <a:off x="1097280" y="286603"/>
-            <a:ext cx="10058400" cy="1450757"/>
-          </a:xfrm>
-        </p:spPr>
-        <p:txBody>
-          <a:bodyPr/>
-          <a:lstStyle/>
-          <a:p>
-            <a:r>
-              <a:rPr lang="hu-HU" b="1" dirty="0">
-                <a:latin typeface="Bahnschrift SemiBold" panose="020B0502040204020203" pitchFamily="34" charset="0"/>
-              </a:rPr>
-              <a:t>Adatbázis</a:t>
-            </a:r>
-          </a:p>
-        </p:txBody>
-      </p:sp>
-      <p:grpSp>
-        <p:nvGrpSpPr>
-          <p:cNvPr id="7" name="Csoportba foglalás 6">
-            <a:extLst>
-              <a:ext uri="{FF2B5EF4-FFF2-40B4-BE49-F238E27FC236}">
-                <a16:creationId xmlns:a16="http://schemas.microsoft.com/office/drawing/2014/main" id="{E802B2B8-8A4C-4A1C-A3DA-1085A7D5C7F6}"/>
-              </a:ext>
-            </a:extLst>
-          </p:cNvPr>
-          <p:cNvGrpSpPr/>
-          <p:nvPr/>
-        </p:nvGrpSpPr>
-        <p:grpSpPr>
-          <a:xfrm>
-            <a:off x="10565538" y="349786"/>
-            <a:ext cx="1418895" cy="1258023"/>
-            <a:chOff x="10565538" y="349786"/>
-            <a:chExt cx="1418895" cy="1258023"/>
-          </a:xfrm>
-        </p:grpSpPr>
-        <p:pic>
-          <p:nvPicPr>
-            <p:cNvPr id="8" name="Kép 7">
-              <a:extLst>
-                <a:ext uri="{FF2B5EF4-FFF2-40B4-BE49-F238E27FC236}">
-                  <a16:creationId xmlns:a16="http://schemas.microsoft.com/office/drawing/2014/main" id="{2F280203-E1A7-4586-A915-B522FFD90496}"/>
-                </a:ext>
-              </a:extLst>
-            </p:cNvPr>
-            <p:cNvPicPr>
-              <a:picLocks noChangeAspect="1"/>
-            </p:cNvPicPr>
-            <p:nvPr/>
-          </p:nvPicPr>
-          <p:blipFill rotWithShape="1">
-            <a:blip r:embed="rId2">
-              <a:alphaModFix amt="50000"/>
-              <a:extLst>
-                <a:ext uri="{28A0092B-C50C-407E-A947-70E740481C1C}">
-                  <a14:useLocalDpi xmlns:a14="http://schemas.microsoft.com/office/drawing/2010/main" val="0"/>
-                </a:ext>
-              </a:extLst>
-            </a:blip>
-            <a:srcRect t="58555" r="67375"/>
-            <a:stretch/>
-          </p:blipFill>
-          <p:spPr>
-            <a:xfrm>
-              <a:off x="10619475" y="1036308"/>
-              <a:ext cx="1364958" cy="571501"/>
-            </a:xfrm>
-            <a:prstGeom prst="rect">
-              <a:avLst/>
-            </a:prstGeom>
-          </p:spPr>
-        </p:pic>
-        <p:pic>
-          <p:nvPicPr>
-            <p:cNvPr id="9" name="Kép 8">
-              <a:extLst>
-                <a:ext uri="{FF2B5EF4-FFF2-40B4-BE49-F238E27FC236}">
-                  <a16:creationId xmlns:a16="http://schemas.microsoft.com/office/drawing/2014/main" id="{90937401-8474-4C4C-8353-0BC085D4C997}"/>
-                </a:ext>
-              </a:extLst>
-            </p:cNvPr>
-            <p:cNvPicPr>
-              <a:picLocks noChangeAspect="1"/>
-            </p:cNvPicPr>
-            <p:nvPr/>
-          </p:nvPicPr>
-          <p:blipFill rotWithShape="1">
-            <a:blip r:embed="rId2">
-              <a:alphaModFix amt="50000"/>
-              <a:extLst>
-                <a:ext uri="{28A0092B-C50C-407E-A947-70E740481C1C}">
-                  <a14:useLocalDpi xmlns:a14="http://schemas.microsoft.com/office/drawing/2010/main" val="0"/>
-                </a:ext>
-              </a:extLst>
-            </a:blip>
-            <a:srcRect l="1" r="61666" b="38896"/>
-            <a:stretch/>
-          </p:blipFill>
-          <p:spPr>
-            <a:xfrm>
-              <a:off x="10565538" y="349786"/>
-              <a:ext cx="1418895" cy="745451"/>
-            </a:xfrm>
-            <a:prstGeom prst="rect">
-              <a:avLst/>
-            </a:prstGeom>
-          </p:spPr>
-        </p:pic>
-      </p:grpSp>
-    </p:spTree>
-    <p:extLst>
-      <p:ext uri="{BB962C8B-B14F-4D97-AF65-F5344CB8AC3E}">
-        <p14:creationId xmlns:p14="http://schemas.microsoft.com/office/powerpoint/2010/main" val="1438799303"/>
-      </p:ext>
-    </p:extLst>
-  </p:cSld>
-  <p:clrMapOvr>
-    <a:masterClrMapping/>
-  </p:clrMapOvr>
-</p:sld>
-</file>
-
-<file path=ppt/slides/slide14.xml><?xml version="1.0" encoding="utf-8"?>
-<p:sld xmlns:a="http://schemas.openxmlformats.org/drawingml/2006/main" xmlns:r="http://schemas.openxmlformats.org/officeDocument/2006/relationships" xmlns:p="http://schemas.openxmlformats.org/presentationml/2006/main">
-  <p:cSld>
-    <p:bg>
-      <p:bgPr>
-        <a:solidFill>
-          <a:srgbClr val="FDF7E9"/>
-        </a:solidFill>
-        <a:effectLst/>
-      </p:bgPr>
-    </p:bg>
-    <p:spTree>
-      <p:nvGrpSpPr>
-        <p:cNvPr id="1" name=""/>
-        <p:cNvGrpSpPr/>
-        <p:nvPr/>
-      </p:nvGrpSpPr>
-      <p:grpSpPr>
-        <a:xfrm>
-          <a:off x="0" y="0"/>
-          <a:ext cx="0" cy="0"/>
-          <a:chOff x="0" y="0"/>
-          <a:chExt cx="0" cy="0"/>
-        </a:xfrm>
-      </p:grpSpPr>
-      <p:sp>
-        <p:nvSpPr>
-          <p:cNvPr id="2" name="Cím 1">
-            <a:extLst>
-              <a:ext uri="{FF2B5EF4-FFF2-40B4-BE49-F238E27FC236}">
-                <a16:creationId xmlns:a16="http://schemas.microsoft.com/office/drawing/2014/main" id="{755F2576-93E3-4E11-AD5A-5982C144E204}"/>
-              </a:ext>
-            </a:extLst>
-          </p:cNvPr>
-          <p:cNvSpPr>
-            <a:spLocks noGrp="1"/>
-          </p:cNvSpPr>
-          <p:nvPr>
-            <p:ph type="title"/>
-          </p:nvPr>
-        </p:nvSpPr>
-        <p:spPr>
-          <a:xfrm>
-            <a:off x="457200" y="622934"/>
-            <a:ext cx="3200400" cy="2286000"/>
-          </a:xfrm>
-        </p:spPr>
-        <p:txBody>
-          <a:bodyPr/>
-          <a:lstStyle/>
-          <a:p>
-            <a:r>
-              <a:rPr lang="hu-HU" dirty="0" err="1">
-                <a:latin typeface="Bahnschrift SemiBold" panose="020B0502040204020203" pitchFamily="34" charset="0"/>
-              </a:rPr>
-              <a:t>Reszponzivitás</a:t>
-            </a:r>
-            <a:endParaRPr lang="hu-HU" dirty="0">
-              <a:latin typeface="Bahnschrift SemiBold" panose="020B0502040204020203" pitchFamily="34" charset="0"/>
-            </a:endParaRPr>
-          </a:p>
-        </p:txBody>
-      </p:sp>
-      <p:sp>
-        <p:nvSpPr>
-          <p:cNvPr id="4" name="Szöveg helye 3">
-            <a:extLst>
-              <a:ext uri="{FF2B5EF4-FFF2-40B4-BE49-F238E27FC236}">
-                <a16:creationId xmlns:a16="http://schemas.microsoft.com/office/drawing/2014/main" id="{E1483CC7-2FF0-4B57-872B-832994FD7836}"/>
-              </a:ext>
-            </a:extLst>
-          </p:cNvPr>
-          <p:cNvSpPr>
-            <a:spLocks noGrp="1"/>
-          </p:cNvSpPr>
-          <p:nvPr>
-            <p:ph type="body" sz="half" idx="2"/>
-          </p:nvPr>
-        </p:nvSpPr>
-        <p:spPr>
-          <a:xfrm>
-            <a:off x="457200" y="3259455"/>
-            <a:ext cx="3562350" cy="3684270"/>
-          </a:xfrm>
-        </p:spPr>
-        <p:txBody>
-          <a:bodyPr>
-            <a:normAutofit/>
-          </a:bodyPr>
-          <a:lstStyle/>
-          <a:p>
-            <a:pPr marL="285750" indent="-285750">
-              <a:buClr>
-                <a:schemeClr val="bg1"/>
-              </a:buClr>
-              <a:buFont typeface="Arial" panose="020B0604020202020204" pitchFamily="34" charset="0"/>
-              <a:buChar char="•"/>
-            </a:pPr>
-            <a:r>
-              <a:rPr lang="hu-HU" sz="1800" dirty="0" err="1"/>
-              <a:t>Bootstrap</a:t>
-            </a:r>
-            <a:endParaRPr lang="hu-HU" sz="1800" dirty="0"/>
-          </a:p>
-          <a:p>
-            <a:pPr marL="285750" indent="-285750">
-              <a:buClr>
-                <a:schemeClr val="bg1"/>
-              </a:buClr>
-              <a:buFont typeface="Arial" panose="020B0604020202020204" pitchFamily="34" charset="0"/>
-              <a:buChar char="•"/>
-            </a:pPr>
-            <a:r>
-              <a:rPr lang="hu-HU" sz="1800" dirty="0"/>
-              <a:t>Dinamikus igazodás a kijelzőhöz</a:t>
-            </a:r>
-          </a:p>
-          <a:p>
-            <a:pPr marL="285750" indent="-285750">
-              <a:buClr>
-                <a:schemeClr val="bg1"/>
-              </a:buClr>
-              <a:buFont typeface="Arial" panose="020B0604020202020204" pitchFamily="34" charset="0"/>
-              <a:buChar char="•"/>
-            </a:pPr>
-            <a:r>
-              <a:rPr lang="hu-HU" sz="1800" dirty="0"/>
-              <a:t>Optimalizált telefon képernyőhöz</a:t>
-            </a:r>
-          </a:p>
-        </p:txBody>
-      </p:sp>
-      <p:grpSp>
-        <p:nvGrpSpPr>
-          <p:cNvPr id="6" name="Csoportba foglalás 5">
-            <a:extLst>
-              <a:ext uri="{FF2B5EF4-FFF2-40B4-BE49-F238E27FC236}">
-                <a16:creationId xmlns:a16="http://schemas.microsoft.com/office/drawing/2014/main" id="{3317F239-9F4A-4F2E-A3AC-DBDE360A6AFF}"/>
-              </a:ext>
-            </a:extLst>
-          </p:cNvPr>
-          <p:cNvGrpSpPr/>
-          <p:nvPr/>
-        </p:nvGrpSpPr>
-        <p:grpSpPr>
-          <a:xfrm>
-            <a:off x="10565538" y="349786"/>
-            <a:ext cx="1418895" cy="1258023"/>
-            <a:chOff x="10565538" y="349786"/>
-            <a:chExt cx="1418895" cy="1258023"/>
-          </a:xfrm>
-        </p:grpSpPr>
-        <p:pic>
-          <p:nvPicPr>
-            <p:cNvPr id="7" name="Kép 6">
-              <a:extLst>
-                <a:ext uri="{FF2B5EF4-FFF2-40B4-BE49-F238E27FC236}">
-                  <a16:creationId xmlns:a16="http://schemas.microsoft.com/office/drawing/2014/main" id="{C2CC19C8-CD10-42F5-9D72-C77B335B0586}"/>
-                </a:ext>
-              </a:extLst>
-            </p:cNvPr>
-            <p:cNvPicPr>
-              <a:picLocks noChangeAspect="1"/>
-            </p:cNvPicPr>
-            <p:nvPr/>
-          </p:nvPicPr>
-          <p:blipFill rotWithShape="1">
-            <a:blip r:embed="rId3">
-              <a:alphaModFix amt="50000"/>
-              <a:extLst>
-                <a:ext uri="{28A0092B-C50C-407E-A947-70E740481C1C}">
-                  <a14:useLocalDpi xmlns:a14="http://schemas.microsoft.com/office/drawing/2010/main" val="0"/>
-                </a:ext>
-              </a:extLst>
-            </a:blip>
-            <a:srcRect t="58555" r="67375"/>
-            <a:stretch/>
-          </p:blipFill>
-          <p:spPr>
-            <a:xfrm>
-              <a:off x="10619475" y="1036308"/>
-              <a:ext cx="1364958" cy="571501"/>
-            </a:xfrm>
-            <a:prstGeom prst="rect">
-              <a:avLst/>
-            </a:prstGeom>
-          </p:spPr>
-        </p:pic>
-        <p:pic>
-          <p:nvPicPr>
-            <p:cNvPr id="8" name="Kép 7">
-              <a:extLst>
-                <a:ext uri="{FF2B5EF4-FFF2-40B4-BE49-F238E27FC236}">
-                  <a16:creationId xmlns:a16="http://schemas.microsoft.com/office/drawing/2014/main" id="{5AF4A5EB-86E0-4324-B31A-9A09255FD8E0}"/>
-                </a:ext>
-              </a:extLst>
-            </p:cNvPr>
-            <p:cNvPicPr>
-              <a:picLocks noChangeAspect="1"/>
-            </p:cNvPicPr>
-            <p:nvPr/>
-          </p:nvPicPr>
-          <p:blipFill rotWithShape="1">
-            <a:blip r:embed="rId3">
-              <a:alphaModFix amt="50000"/>
-              <a:extLst>
-                <a:ext uri="{28A0092B-C50C-407E-A947-70E740481C1C}">
-                  <a14:useLocalDpi xmlns:a14="http://schemas.microsoft.com/office/drawing/2010/main" val="0"/>
-                </a:ext>
-              </a:extLst>
-            </a:blip>
-            <a:srcRect l="1" r="61666" b="38896"/>
-            <a:stretch/>
-          </p:blipFill>
-          <p:spPr>
-            <a:xfrm>
-              <a:off x="10565538" y="349786"/>
-              <a:ext cx="1418895" cy="745451"/>
-            </a:xfrm>
-            <a:prstGeom prst="rect">
-              <a:avLst/>
-            </a:prstGeom>
-          </p:spPr>
-        </p:pic>
-      </p:grpSp>
-    </p:spTree>
-    <p:extLst>
-      <p:ext uri="{BB962C8B-B14F-4D97-AF65-F5344CB8AC3E}">
-        <p14:creationId xmlns:p14="http://schemas.microsoft.com/office/powerpoint/2010/main" val="1470190695"/>
-      </p:ext>
-    </p:extLst>
-  </p:cSld>
-  <p:clrMapOvr>
-    <a:masterClrMapping/>
-  </p:clrMapOvr>
-</p:sld>
-</file>
-
-<file path=ppt/slides/slide15.xml><?xml version="1.0" encoding="utf-8"?>
-<p:sld xmlns:a="http://schemas.openxmlformats.org/drawingml/2006/main" xmlns:r="http://schemas.openxmlformats.org/officeDocument/2006/relationships" xmlns:p="http://schemas.openxmlformats.org/presentationml/2006/main">
-  <p:cSld>
-    <p:bg>
-      <p:bgPr>
-        <a:solidFill>
-          <a:srgbClr val="FDF7E9"/>
-        </a:solidFill>
-        <a:effectLst/>
-      </p:bgPr>
-    </p:bg>
-    <p:spTree>
-      <p:nvGrpSpPr>
-        <p:cNvPr id="1" name=""/>
-        <p:cNvGrpSpPr/>
-        <p:nvPr/>
-      </p:nvGrpSpPr>
-      <p:grpSpPr>
-        <a:xfrm>
-          <a:off x="0" y="0"/>
-          <a:ext cx="0" cy="0"/>
-          <a:chOff x="0" y="0"/>
-          <a:chExt cx="0" cy="0"/>
-        </a:xfrm>
-      </p:grpSpPr>
-      <p:sp>
-        <p:nvSpPr>
-          <p:cNvPr id="2" name="Cím 1">
-            <a:extLst>
-              <a:ext uri="{FF2B5EF4-FFF2-40B4-BE49-F238E27FC236}">
-                <a16:creationId xmlns:a16="http://schemas.microsoft.com/office/drawing/2014/main" id="{68775652-02D3-4343-B0A8-5C16A252BBD7}"/>
-              </a:ext>
-            </a:extLst>
-          </p:cNvPr>
-          <p:cNvSpPr>
-            <a:spLocks noGrp="1"/>
-          </p:cNvSpPr>
-          <p:nvPr>
-            <p:ph type="title"/>
-          </p:nvPr>
-        </p:nvSpPr>
-        <p:spPr/>
-        <p:txBody>
-          <a:bodyPr/>
-          <a:lstStyle/>
-          <a:p>
-            <a:r>
-              <a:rPr lang="hu-HU" dirty="0">
-                <a:latin typeface="Bahnschrift SemiBold" panose="020B0502040204020203" pitchFamily="34" charset="0"/>
-              </a:rPr>
-              <a:t>Tesztelés</a:t>
-            </a:r>
-          </a:p>
-        </p:txBody>
-      </p:sp>
-      <p:sp>
-        <p:nvSpPr>
-          <p:cNvPr id="3" name="Szöveg helye 2">
-            <a:extLst>
-              <a:ext uri="{FF2B5EF4-FFF2-40B4-BE49-F238E27FC236}">
-                <a16:creationId xmlns:a16="http://schemas.microsoft.com/office/drawing/2014/main" id="{632DA0C3-2B61-4113-AD5E-5C0C7B466219}"/>
-              </a:ext>
-            </a:extLst>
-          </p:cNvPr>
-          <p:cNvSpPr>
-            <a:spLocks noGrp="1"/>
-          </p:cNvSpPr>
-          <p:nvPr>
-            <p:ph type="body" idx="1"/>
-          </p:nvPr>
-        </p:nvSpPr>
-        <p:spPr/>
-        <p:txBody>
-          <a:bodyPr/>
-          <a:lstStyle/>
-          <a:p>
-            <a:pPr algn="ctr"/>
-            <a:r>
-              <a:rPr lang="hu-HU" dirty="0" err="1"/>
-              <a:t>BAckend</a:t>
-            </a:r>
-            <a:endParaRPr lang="hu-HU" dirty="0"/>
-          </a:p>
-        </p:txBody>
-      </p:sp>
-      <p:sp>
-        <p:nvSpPr>
-          <p:cNvPr id="4" name="Tartalom helye 3">
-            <a:extLst>
-              <a:ext uri="{FF2B5EF4-FFF2-40B4-BE49-F238E27FC236}">
-                <a16:creationId xmlns:a16="http://schemas.microsoft.com/office/drawing/2014/main" id="{9B6E21CF-8DD2-4C9D-94F2-3E42E0993C13}"/>
-              </a:ext>
-            </a:extLst>
-          </p:cNvPr>
-          <p:cNvSpPr>
-            <a:spLocks noGrp="1"/>
-          </p:cNvSpPr>
-          <p:nvPr>
-            <p:ph sz="half" idx="2"/>
-          </p:nvPr>
-        </p:nvSpPr>
-        <p:spPr/>
-        <p:txBody>
-          <a:bodyPr/>
-          <a:lstStyle/>
-          <a:p>
-            <a:pPr lvl="1">
-              <a:buFont typeface="Arial" panose="020B0604020202020204" pitchFamily="34" charset="0"/>
-              <a:buChar char="•"/>
-            </a:pPr>
-            <a:r>
-              <a:rPr lang="hu-HU" dirty="0"/>
-              <a:t>Postman</a:t>
-            </a:r>
-          </a:p>
-        </p:txBody>
-      </p:sp>
-      <p:sp>
-        <p:nvSpPr>
-          <p:cNvPr id="5" name="Szöveg helye 4">
-            <a:extLst>
-              <a:ext uri="{FF2B5EF4-FFF2-40B4-BE49-F238E27FC236}">
-                <a16:creationId xmlns:a16="http://schemas.microsoft.com/office/drawing/2014/main" id="{8CF772AA-AADB-421B-9B9F-F9CBC3774658}"/>
-              </a:ext>
-            </a:extLst>
-          </p:cNvPr>
-          <p:cNvSpPr>
-            <a:spLocks noGrp="1"/>
-          </p:cNvSpPr>
-          <p:nvPr>
-            <p:ph type="body" sz="quarter" idx="3"/>
-          </p:nvPr>
-        </p:nvSpPr>
-        <p:spPr/>
-        <p:txBody>
-          <a:bodyPr/>
-          <a:lstStyle/>
-          <a:p>
-            <a:pPr algn="ctr"/>
-            <a:r>
-              <a:rPr lang="hu-HU" dirty="0"/>
-              <a:t>frontend</a:t>
-            </a:r>
-          </a:p>
-        </p:txBody>
-      </p:sp>
-      <p:sp>
-        <p:nvSpPr>
-          <p:cNvPr id="6" name="Tartalom helye 5">
-            <a:extLst>
-              <a:ext uri="{FF2B5EF4-FFF2-40B4-BE49-F238E27FC236}">
-                <a16:creationId xmlns:a16="http://schemas.microsoft.com/office/drawing/2014/main" id="{9FA3B530-5977-4B61-B1B0-6F0B4C637821}"/>
-              </a:ext>
-            </a:extLst>
-          </p:cNvPr>
-          <p:cNvSpPr>
-            <a:spLocks noGrp="1"/>
-          </p:cNvSpPr>
-          <p:nvPr>
-            <p:ph sz="quarter" idx="4"/>
-          </p:nvPr>
-        </p:nvSpPr>
-        <p:spPr/>
-        <p:txBody>
-          <a:bodyPr/>
-          <a:lstStyle/>
-          <a:p>
-            <a:pPr lvl="1">
-              <a:buFont typeface="Arial" panose="020B0604020202020204" pitchFamily="34" charset="0"/>
-              <a:buChar char="•"/>
-            </a:pPr>
-            <a:r>
-              <a:rPr lang="hu-HU" dirty="0" err="1"/>
-              <a:t>Selenium</a:t>
-            </a:r>
-            <a:r>
-              <a:rPr lang="hu-HU" dirty="0"/>
-              <a:t> </a:t>
-            </a:r>
-            <a:r>
-              <a:rPr lang="hu-HU" dirty="0" err="1"/>
-              <a:t>Library</a:t>
-            </a:r>
-            <a:r>
-              <a:rPr lang="hu-HU" dirty="0"/>
-              <a:t> – </a:t>
-            </a:r>
-            <a:r>
-              <a:rPr lang="hu-HU" dirty="0" err="1"/>
-              <a:t>Robotframework</a:t>
-            </a:r>
-            <a:endParaRPr lang="hu-HU" dirty="0"/>
-          </a:p>
-          <a:p>
-            <a:pPr lvl="1">
-              <a:buFont typeface="Arial" panose="020B0604020202020204" pitchFamily="34" charset="0"/>
-              <a:buChar char="•"/>
-            </a:pPr>
-            <a:r>
-              <a:rPr lang="hu-HU" dirty="0" err="1"/>
-              <a:t>kepek</a:t>
-            </a:r>
-            <a:endParaRPr lang="hu-HU" dirty="0"/>
-          </a:p>
-        </p:txBody>
-      </p:sp>
-      <p:grpSp>
-        <p:nvGrpSpPr>
-          <p:cNvPr id="12" name="Csoportba foglalás 11">
-            <a:extLst>
-              <a:ext uri="{FF2B5EF4-FFF2-40B4-BE49-F238E27FC236}">
-                <a16:creationId xmlns:a16="http://schemas.microsoft.com/office/drawing/2014/main" id="{257008D6-FD12-4F82-9FAE-0E4266FC30CF}"/>
-              </a:ext>
-            </a:extLst>
-          </p:cNvPr>
-          <p:cNvGrpSpPr/>
-          <p:nvPr/>
-        </p:nvGrpSpPr>
-        <p:grpSpPr>
-          <a:xfrm>
-            <a:off x="10565538" y="349786"/>
-            <a:ext cx="1418895" cy="1258023"/>
-            <a:chOff x="10565538" y="349786"/>
-            <a:chExt cx="1418895" cy="1258023"/>
-          </a:xfrm>
-        </p:grpSpPr>
-        <p:pic>
-          <p:nvPicPr>
-            <p:cNvPr id="13" name="Kép 12">
-              <a:extLst>
-                <a:ext uri="{FF2B5EF4-FFF2-40B4-BE49-F238E27FC236}">
-                  <a16:creationId xmlns:a16="http://schemas.microsoft.com/office/drawing/2014/main" id="{146B191F-A718-4014-B337-0005E2B62BA9}"/>
-                </a:ext>
-              </a:extLst>
-            </p:cNvPr>
-            <p:cNvPicPr>
-              <a:picLocks noChangeAspect="1"/>
-            </p:cNvPicPr>
-            <p:nvPr/>
-          </p:nvPicPr>
-          <p:blipFill rotWithShape="1">
-            <a:blip r:embed="rId2">
-              <a:alphaModFix amt="50000"/>
-              <a:extLst>
-                <a:ext uri="{28A0092B-C50C-407E-A947-70E740481C1C}">
-                  <a14:useLocalDpi xmlns:a14="http://schemas.microsoft.com/office/drawing/2010/main" val="0"/>
-                </a:ext>
-              </a:extLst>
-            </a:blip>
-            <a:srcRect t="58555" r="67375"/>
-            <a:stretch/>
-          </p:blipFill>
-          <p:spPr>
-            <a:xfrm>
-              <a:off x="10619475" y="1036308"/>
-              <a:ext cx="1364958" cy="571501"/>
-            </a:xfrm>
-            <a:prstGeom prst="rect">
-              <a:avLst/>
-            </a:prstGeom>
-          </p:spPr>
-        </p:pic>
-        <p:pic>
-          <p:nvPicPr>
-            <p:cNvPr id="14" name="Kép 13">
-              <a:extLst>
-                <a:ext uri="{FF2B5EF4-FFF2-40B4-BE49-F238E27FC236}">
-                  <a16:creationId xmlns:a16="http://schemas.microsoft.com/office/drawing/2014/main" id="{3C0678C3-DC3F-47F5-8610-DB4180EAD206}"/>
-                </a:ext>
-              </a:extLst>
-            </p:cNvPr>
-            <p:cNvPicPr>
-              <a:picLocks noChangeAspect="1"/>
-            </p:cNvPicPr>
-            <p:nvPr/>
-          </p:nvPicPr>
-          <p:blipFill rotWithShape="1">
-            <a:blip r:embed="rId2">
-              <a:alphaModFix amt="50000"/>
-              <a:extLst>
-                <a:ext uri="{28A0092B-C50C-407E-A947-70E740481C1C}">
-                  <a14:useLocalDpi xmlns:a14="http://schemas.microsoft.com/office/drawing/2010/main" val="0"/>
-                </a:ext>
-              </a:extLst>
-            </a:blip>
-            <a:srcRect l="1" r="61666" b="38896"/>
-            <a:stretch/>
-          </p:blipFill>
-          <p:spPr>
-            <a:xfrm>
-              <a:off x="10565538" y="349786"/>
-              <a:ext cx="1418895" cy="745451"/>
-            </a:xfrm>
-            <a:prstGeom prst="rect">
-              <a:avLst/>
-            </a:prstGeom>
-          </p:spPr>
-        </p:pic>
-      </p:grpSp>
-    </p:spTree>
-    <p:extLst>
-      <p:ext uri="{BB962C8B-B14F-4D97-AF65-F5344CB8AC3E}">
-        <p14:creationId xmlns:p14="http://schemas.microsoft.com/office/powerpoint/2010/main" val="1931664778"/>
-      </p:ext>
-    </p:extLst>
-  </p:cSld>
-  <p:clrMapOvr>
-    <a:masterClrMapping/>
-  </p:clrMapOvr>
-</p:sld>
-</file>
-
-<file path=ppt/slides/slide16.xml><?xml version="1.0" encoding="utf-8"?>
-<p:sld xmlns:a="http://schemas.openxmlformats.org/drawingml/2006/main" xmlns:r="http://schemas.openxmlformats.org/officeDocument/2006/relationships" xmlns:p="http://schemas.openxmlformats.org/presentationml/2006/main">
-  <p:cSld>
-    <p:bg>
-      <p:bgPr>
-        <a:solidFill>
-          <a:srgbClr val="FDF7E9"/>
-        </a:solidFill>
-        <a:effectLst/>
-      </p:bgPr>
-    </p:bg>
-    <p:spTree>
-      <p:nvGrpSpPr>
-        <p:cNvPr id="1" name=""/>
-        <p:cNvGrpSpPr/>
-        <p:nvPr/>
-      </p:nvGrpSpPr>
-      <p:grpSpPr>
-        <a:xfrm>
-          <a:off x="0" y="0"/>
-          <a:ext cx="0" cy="0"/>
-          <a:chOff x="0" y="0"/>
-          <a:chExt cx="0" cy="0"/>
-        </a:xfrm>
-      </p:grpSpPr>
-      <p:cxnSp>
-        <p:nvCxnSpPr>
-          <p:cNvPr id="2" name="Egyenes összekötő 1">
-            <a:extLst>
-              <a:ext uri="{FF2B5EF4-FFF2-40B4-BE49-F238E27FC236}">
-                <a16:creationId xmlns:a16="http://schemas.microsoft.com/office/drawing/2014/main" id="{20EF3F3C-374B-461F-BAF4-6C213DE7C8BB}"/>
-              </a:ext>
-            </a:extLst>
-          </p:cNvPr>
-          <p:cNvCxnSpPr>
-            <a:cxnSpLocks/>
-          </p:cNvCxnSpPr>
-          <p:nvPr/>
-        </p:nvCxnSpPr>
-        <p:spPr>
-          <a:xfrm>
-            <a:off x="1209675" y="1737360"/>
-            <a:ext cx="9946005" cy="0"/>
-          </a:xfrm>
-          <a:prstGeom prst="line">
-            <a:avLst/>
-          </a:prstGeom>
-          <a:ln>
-            <a:solidFill>
-              <a:schemeClr val="tx1">
-                <a:lumMod val="50000"/>
-                <a:lumOff val="50000"/>
-              </a:schemeClr>
-            </a:solidFill>
-          </a:ln>
-        </p:spPr>
-        <p:style>
-          <a:lnRef idx="1">
-            <a:schemeClr val="accent1"/>
-          </a:lnRef>
-          <a:fillRef idx="0">
-            <a:schemeClr val="accent1"/>
-          </a:fillRef>
-          <a:effectRef idx="0">
-            <a:schemeClr val="accent1"/>
-          </a:effectRef>
-          <a:fontRef idx="minor">
-            <a:schemeClr val="tx1"/>
-          </a:fontRef>
-        </p:style>
-      </p:cxnSp>
-      <p:pic>
-        <p:nvPicPr>
-          <p:cNvPr id="3" name="Kép 2">
-            <a:extLst>
-              <a:ext uri="{FF2B5EF4-FFF2-40B4-BE49-F238E27FC236}">
-                <a16:creationId xmlns:a16="http://schemas.microsoft.com/office/drawing/2014/main" id="{FE91A941-BC8A-4E2A-B780-F3F3D6A9B3E3}"/>
-              </a:ext>
-            </a:extLst>
-          </p:cNvPr>
-          <p:cNvPicPr>
-            <a:picLocks noChangeAspect="1"/>
-          </p:cNvPicPr>
-          <p:nvPr/>
-        </p:nvPicPr>
-        <p:blipFill rotWithShape="1">
-          <a:blip r:embed="rId2">
-            <a:alphaModFix amt="50000"/>
-            <a:extLst>
-              <a:ext uri="{28A0092B-C50C-407E-A947-70E740481C1C}">
-                <a14:useLocalDpi xmlns:a14="http://schemas.microsoft.com/office/drawing/2010/main" val="0"/>
-              </a:ext>
-            </a:extLst>
-          </a:blip>
-          <a:srcRect t="58555" r="67375"/>
-          <a:stretch/>
-        </p:blipFill>
-        <p:spPr>
-          <a:xfrm>
-            <a:off x="10619475" y="1036308"/>
-            <a:ext cx="1364958" cy="571501"/>
-          </a:xfrm>
-          <a:prstGeom prst="rect">
-            <a:avLst/>
-          </a:prstGeom>
-        </p:spPr>
-      </p:pic>
-      <p:pic>
-        <p:nvPicPr>
-          <p:cNvPr id="4" name="Kép 3">
-            <a:extLst>
-              <a:ext uri="{FF2B5EF4-FFF2-40B4-BE49-F238E27FC236}">
-                <a16:creationId xmlns:a16="http://schemas.microsoft.com/office/drawing/2014/main" id="{78D3DB18-E771-4DF0-84FA-206E8FA41883}"/>
-              </a:ext>
-            </a:extLst>
-          </p:cNvPr>
-          <p:cNvPicPr>
-            <a:picLocks noChangeAspect="1"/>
-          </p:cNvPicPr>
-          <p:nvPr/>
-        </p:nvPicPr>
-        <p:blipFill rotWithShape="1">
-          <a:blip r:embed="rId2">
-            <a:alphaModFix amt="50000"/>
-            <a:extLst>
-              <a:ext uri="{28A0092B-C50C-407E-A947-70E740481C1C}">
-                <a14:useLocalDpi xmlns:a14="http://schemas.microsoft.com/office/drawing/2010/main" val="0"/>
-              </a:ext>
-            </a:extLst>
-          </a:blip>
-          <a:srcRect l="1" r="61666" b="38896"/>
-          <a:stretch/>
-        </p:blipFill>
-        <p:spPr>
-          <a:xfrm>
-            <a:off x="10565538" y="349786"/>
-            <a:ext cx="1418895" cy="745451"/>
-          </a:xfrm>
-          <a:prstGeom prst="rect">
-            <a:avLst/>
-          </a:prstGeom>
-        </p:spPr>
-      </p:pic>
-      <p:sp>
-        <p:nvSpPr>
-          <p:cNvPr id="5" name="Cím 1">
-            <a:extLst>
-              <a:ext uri="{FF2B5EF4-FFF2-40B4-BE49-F238E27FC236}">
-                <a16:creationId xmlns:a16="http://schemas.microsoft.com/office/drawing/2014/main" id="{175A5A3F-6F8F-4002-ADBD-CD8C93ECEEE1}"/>
-              </a:ext>
-            </a:extLst>
-          </p:cNvPr>
-          <p:cNvSpPr txBox="1">
-            <a:spLocks/>
-          </p:cNvSpPr>
-          <p:nvPr/>
-        </p:nvSpPr>
-        <p:spPr>
-          <a:xfrm>
-            <a:off x="1097280" y="286603"/>
-            <a:ext cx="10058400" cy="1450757"/>
-          </a:xfrm>
-          <a:prstGeom prst="rect">
-            <a:avLst/>
-          </a:prstGeom>
-        </p:spPr>
-        <p:txBody>
-          <a:bodyPr anchor="b"/>
           <a:lstStyle>
             <a:lvl1pPr algn="l" defTabSz="914400" rtl="0" eaLnBrk="1" latinLnBrk="0" hangingPunct="1">
               <a:lnSpc>
@@ -6598,21 +4520,22 @@
             </a:lvl1pPr>
           </a:lstStyle>
           <a:p>
-            <a:r>
-              <a:rPr lang="hu-HU" b="1" dirty="0">
+            <a:pPr algn="ctr"/>
+            <a:r>
+              <a:rPr lang="hu-HU" sz="5400" b="1" dirty="0">
                 <a:latin typeface="Bahnschrift SemiBold" panose="020B0502040204020203" pitchFamily="34" charset="0"/>
               </a:rPr>
-              <a:t>Fejlesztési lehetőségek</a:t>
+              <a:t>Iskolai étkezéskezelő rendszer</a:t>
             </a:r>
           </a:p>
         </p:txBody>
       </p:sp>
       <p:sp>
         <p:nvSpPr>
-          <p:cNvPr id="6" name="Tartalom helye 2">
+          <p:cNvPr id="3" name="Alcím 2">
             <a:extLst>
               <a:ext uri="{FF2B5EF4-FFF2-40B4-BE49-F238E27FC236}">
-                <a16:creationId xmlns:a16="http://schemas.microsoft.com/office/drawing/2014/main" id="{654E07C9-ACD1-4AF5-9ECE-29158423F871}"/>
+                <a16:creationId xmlns:a16="http://schemas.microsoft.com/office/drawing/2014/main" id="{A2286F2D-71DE-4954-8C64-8E9991C98150}"/>
               </a:ext>
             </a:extLst>
           </p:cNvPr>
@@ -6623,8 +4546,8 @@
         </p:nvSpPr>
         <p:spPr>
           <a:xfrm>
-            <a:off x="1097280" y="1845734"/>
-            <a:ext cx="10058400" cy="4023360"/>
+            <a:off x="3598026" y="3785841"/>
+            <a:ext cx="4995949" cy="571500"/>
           </a:xfrm>
           <a:prstGeom prst="rect">
             <a:avLst/>
@@ -6879,109 +4802,725 @@
             </a:lvl9pPr>
           </a:lstStyle>
           <a:p>
-            <a:pPr lvl="1">
+            <a:pPr algn="ctr"/>
+            <a:r>
+              <a:rPr lang="hu-HU" i="1" cap="all" spc="100" dirty="0">
+                <a:solidFill>
+                  <a:srgbClr val="BD582C"/>
+                </a:solidFill>
+                <a:uFill>
+                  <a:solidFill>
+                    <a:srgbClr val="BD582C"/>
+                  </a:solidFill>
+                </a:uFill>
+                <a:latin typeface="+mj-lt"/>
+              </a:rPr>
+              <a:t>Vizsgaremek bemutatása</a:t>
+            </a:r>
+          </a:p>
+        </p:txBody>
+      </p:sp>
+      <p:pic>
+        <p:nvPicPr>
+          <p:cNvPr id="4" name="Kép 3">
+            <a:extLst>
+              <a:ext uri="{FF2B5EF4-FFF2-40B4-BE49-F238E27FC236}">
+                <a16:creationId xmlns:a16="http://schemas.microsoft.com/office/drawing/2014/main" id="{7912835F-A62C-4B0D-B733-74106EBFDA26}"/>
+              </a:ext>
+            </a:extLst>
+          </p:cNvPr>
+          <p:cNvPicPr>
+            <a:picLocks noChangeAspect="1"/>
+          </p:cNvPicPr>
+          <p:nvPr/>
+        </p:nvPicPr>
+        <p:blipFill rotWithShape="1">
+          <a:blip r:embed="rId2">
+            <a:extLst>
+              <a:ext uri="{28A0092B-C50C-407E-A947-70E740481C1C}">
+                <a14:useLocalDpi xmlns:a14="http://schemas.microsoft.com/office/drawing/2010/main" val="0"/>
+              </a:ext>
+            </a:extLst>
+          </a:blip>
+          <a:srcRect t="58555"/>
+          <a:stretch/>
+        </p:blipFill>
+        <p:spPr>
+          <a:xfrm>
+            <a:off x="3750655" y="1673209"/>
+            <a:ext cx="4714591" cy="644014"/>
+          </a:xfrm>
+          <a:prstGeom prst="rect">
+            <a:avLst/>
+          </a:prstGeom>
+        </p:spPr>
+      </p:pic>
+      <p:sp>
+        <p:nvSpPr>
+          <p:cNvPr id="5" name="Alcím 2">
+            <a:extLst>
+              <a:ext uri="{FF2B5EF4-FFF2-40B4-BE49-F238E27FC236}">
+                <a16:creationId xmlns:a16="http://schemas.microsoft.com/office/drawing/2014/main" id="{3E0FCC81-0923-43B1-9ACC-080EBD94427F}"/>
+              </a:ext>
+            </a:extLst>
+          </p:cNvPr>
+          <p:cNvSpPr txBox="1">
+            <a:spLocks/>
+          </p:cNvSpPr>
+          <p:nvPr/>
+        </p:nvSpPr>
+        <p:spPr>
+          <a:xfrm>
+            <a:off x="127233" y="5659169"/>
+            <a:ext cx="5968766" cy="1050389"/>
+          </a:xfrm>
+          <a:prstGeom prst="rect">
+            <a:avLst/>
+          </a:prstGeom>
+        </p:spPr>
+        <p:txBody>
+          <a:bodyPr vert="horz" lIns="91440" tIns="45720" rIns="91440" bIns="45720" rtlCol="0">
+            <a:normAutofit/>
+          </a:bodyPr>
+          <a:lstStyle>
+            <a:lvl1pPr marL="0" indent="0" algn="l" defTabSz="914400" rtl="0" eaLnBrk="1" latinLnBrk="0" hangingPunct="1">
               <a:lnSpc>
-                <a:spcPct val="130000"/>
+                <a:spcPct val="90000"/>
               </a:lnSpc>
-              <a:buFont typeface="Arial" panose="020B0604020202020204" pitchFamily="34" charset="0"/>
-              <a:buChar char="•"/>
-            </a:pPr>
-            <a:r>
-              <a:rPr lang="hu-HU" sz="2000"/>
-              <a:t>Mobilalkalmazás</a:t>
-            </a:r>
-          </a:p>
-          <a:p>
-            <a:pPr lvl="1">
+              <a:spcBef>
+                <a:spcPts val="1200"/>
+              </a:spcBef>
+              <a:spcAft>
+                <a:spcPts val="200"/>
+              </a:spcAft>
+              <a:buClr>
+                <a:schemeClr val="accent1"/>
+              </a:buClr>
+              <a:buSzPct val="100000"/>
+              <a:buFont typeface="Calibri" panose="020F0502020204030204" pitchFamily="34" charset="0"/>
+              <a:buNone/>
+              <a:defRPr sz="2400" kern="1200" cap="all" spc="200" baseline="0">
+                <a:solidFill>
+                  <a:schemeClr val="tx2"/>
+                </a:solidFill>
+                <a:latin typeface="+mj-lt"/>
+                <a:ea typeface="+mn-ea"/>
+                <a:cs typeface="+mn-cs"/>
+              </a:defRPr>
+            </a:lvl1pPr>
+            <a:lvl2pPr marL="457200" indent="0" algn="ctr" defTabSz="914400" rtl="0" eaLnBrk="1" latinLnBrk="0" hangingPunct="1">
               <a:lnSpc>
-                <a:spcPct val="130000"/>
+                <a:spcPct val="90000"/>
               </a:lnSpc>
-              <a:buFont typeface="Arial" panose="020B0604020202020204" pitchFamily="34" charset="0"/>
-              <a:buChar char="•"/>
-            </a:pPr>
-            <a:r>
-              <a:rPr lang="hu-HU" sz="2000"/>
-              <a:t>Értesítés küldés</a:t>
-            </a:r>
-          </a:p>
-          <a:p>
-            <a:pPr lvl="1">
-              <a:lnSpc>
-                <a:spcPct val="130000"/>
-              </a:lnSpc>
-              <a:buFont typeface="Arial" panose="020B0604020202020204" pitchFamily="34" charset="0"/>
-              <a:buChar char="•"/>
-            </a:pPr>
-            <a:r>
-              <a:rPr lang="hu-HU" sz="2000"/>
-              <a:t>Több iskolára, több szolgáltatóra bontás</a:t>
-            </a:r>
-          </a:p>
-          <a:p>
-            <a:pPr lvl="1">
-              <a:lnSpc>
-                <a:spcPct val="130000"/>
-              </a:lnSpc>
-              <a:buFont typeface="Arial" panose="020B0604020202020204" pitchFamily="34" charset="0"/>
-              <a:buChar char="•"/>
-            </a:pPr>
-            <a:r>
-              <a:rPr lang="hu-HU" sz="2000"/>
-              <a:t>Ételek értékelése</a:t>
-            </a:r>
-          </a:p>
-          <a:p>
-            <a:pPr lvl="1">
-              <a:lnSpc>
-                <a:spcPct val="130000"/>
-              </a:lnSpc>
-              <a:buFont typeface="Arial" panose="020B0604020202020204" pitchFamily="34" charset="0"/>
-              <a:buChar char="•"/>
-            </a:pPr>
-            <a:r>
-              <a:rPr lang="hu-HU" sz="2000"/>
-              <a:t>Étkeztetési rend osztályokra, csoportokra bontva</a:t>
-            </a:r>
-          </a:p>
-          <a:p>
-            <a:pPr lvl="1">
-              <a:lnSpc>
-                <a:spcPct val="130000"/>
-              </a:lnSpc>
-              <a:buFont typeface="Arial" panose="020B0604020202020204" pitchFamily="34" charset="0"/>
-              <a:buChar char="•"/>
-            </a:pPr>
-            <a:r>
-              <a:rPr lang="hu-HU" sz="2000"/>
-              <a:t>Fizetés online (SimplePay)</a:t>
-            </a:r>
-          </a:p>
-          <a:p>
-            <a:pPr lvl="1">
-              <a:lnSpc>
-                <a:spcPct val="130000"/>
-              </a:lnSpc>
-              <a:buFont typeface="Arial" panose="020B0604020202020204" pitchFamily="34" charset="0"/>
-              <a:buChar char="•"/>
-            </a:pPr>
-            <a:r>
-              <a:rPr lang="hu-HU" sz="2000"/>
-              <a:t>Egyenleg feltöltése??</a:t>
-            </a:r>
-          </a:p>
-          <a:p>
-            <a:pPr marL="201168" lvl="1" indent="0">
+              <a:spcBef>
+                <a:spcPts val="200"/>
+              </a:spcBef>
+              <a:spcAft>
+                <a:spcPts val="400"/>
+              </a:spcAft>
+              <a:buClr>
+                <a:schemeClr val="accent1"/>
+              </a:buClr>
               <a:buFont typeface="Calibri" pitchFamily="34" charset="0"/>
               <a:buNone/>
+              <a:defRPr sz="2400" kern="1200">
+                <a:solidFill>
+                  <a:schemeClr val="tx1">
+                    <a:lumMod val="75000"/>
+                    <a:lumOff val="25000"/>
+                  </a:schemeClr>
+                </a:solidFill>
+                <a:latin typeface="+mn-lt"/>
+                <a:ea typeface="+mn-ea"/>
+                <a:cs typeface="+mn-cs"/>
+              </a:defRPr>
+            </a:lvl2pPr>
+            <a:lvl3pPr marL="914400" indent="0" algn="ctr" defTabSz="914400" rtl="0" eaLnBrk="1" latinLnBrk="0" hangingPunct="1">
+              <a:lnSpc>
+                <a:spcPct val="90000"/>
+              </a:lnSpc>
+              <a:spcBef>
+                <a:spcPts val="200"/>
+              </a:spcBef>
+              <a:spcAft>
+                <a:spcPts val="400"/>
+              </a:spcAft>
+              <a:buClr>
+                <a:schemeClr val="accent1"/>
+              </a:buClr>
+              <a:buFont typeface="Calibri" pitchFamily="34" charset="0"/>
+              <a:buNone/>
+              <a:defRPr sz="2400" kern="1200">
+                <a:solidFill>
+                  <a:schemeClr val="tx1">
+                    <a:lumMod val="75000"/>
+                    <a:lumOff val="25000"/>
+                  </a:schemeClr>
+                </a:solidFill>
+                <a:latin typeface="+mn-lt"/>
+                <a:ea typeface="+mn-ea"/>
+                <a:cs typeface="+mn-cs"/>
+              </a:defRPr>
+            </a:lvl3pPr>
+            <a:lvl4pPr marL="1371600" indent="0" algn="ctr" defTabSz="914400" rtl="0" eaLnBrk="1" latinLnBrk="0" hangingPunct="1">
+              <a:lnSpc>
+                <a:spcPct val="90000"/>
+              </a:lnSpc>
+              <a:spcBef>
+                <a:spcPts val="200"/>
+              </a:spcBef>
+              <a:spcAft>
+                <a:spcPts val="400"/>
+              </a:spcAft>
+              <a:buClr>
+                <a:schemeClr val="accent1"/>
+              </a:buClr>
+              <a:buFont typeface="Calibri" pitchFamily="34" charset="0"/>
+              <a:buNone/>
+              <a:defRPr sz="2000" kern="1200">
+                <a:solidFill>
+                  <a:schemeClr val="tx1">
+                    <a:lumMod val="75000"/>
+                    <a:lumOff val="25000"/>
+                  </a:schemeClr>
+                </a:solidFill>
+                <a:latin typeface="+mn-lt"/>
+                <a:ea typeface="+mn-ea"/>
+                <a:cs typeface="+mn-cs"/>
+              </a:defRPr>
+            </a:lvl4pPr>
+            <a:lvl5pPr marL="1828800" indent="0" algn="ctr" defTabSz="914400" rtl="0" eaLnBrk="1" latinLnBrk="0" hangingPunct="1">
+              <a:lnSpc>
+                <a:spcPct val="90000"/>
+              </a:lnSpc>
+              <a:spcBef>
+                <a:spcPts val="200"/>
+              </a:spcBef>
+              <a:spcAft>
+                <a:spcPts val="400"/>
+              </a:spcAft>
+              <a:buClr>
+                <a:schemeClr val="accent1"/>
+              </a:buClr>
+              <a:buFont typeface="Calibri" pitchFamily="34" charset="0"/>
+              <a:buNone/>
+              <a:defRPr sz="2000" kern="1200">
+                <a:solidFill>
+                  <a:schemeClr val="tx1">
+                    <a:lumMod val="75000"/>
+                    <a:lumOff val="25000"/>
+                  </a:schemeClr>
+                </a:solidFill>
+                <a:latin typeface="+mn-lt"/>
+                <a:ea typeface="+mn-ea"/>
+                <a:cs typeface="+mn-cs"/>
+              </a:defRPr>
+            </a:lvl5pPr>
+            <a:lvl6pPr marL="2286000" indent="0" algn="ctr" defTabSz="914400" rtl="0" eaLnBrk="1" latinLnBrk="0" hangingPunct="1">
+              <a:lnSpc>
+                <a:spcPct val="90000"/>
+              </a:lnSpc>
+              <a:spcBef>
+                <a:spcPts val="200"/>
+              </a:spcBef>
+              <a:spcAft>
+                <a:spcPts val="400"/>
+              </a:spcAft>
+              <a:buClr>
+                <a:schemeClr val="accent1"/>
+              </a:buClr>
+              <a:buFont typeface="Calibri" pitchFamily="34" charset="0"/>
+              <a:buNone/>
+              <a:defRPr sz="2000" kern="1200">
+                <a:solidFill>
+                  <a:schemeClr val="tx1">
+                    <a:lumMod val="75000"/>
+                    <a:lumOff val="25000"/>
+                  </a:schemeClr>
+                </a:solidFill>
+                <a:latin typeface="+mn-lt"/>
+                <a:ea typeface="+mn-ea"/>
+                <a:cs typeface="+mn-cs"/>
+              </a:defRPr>
+            </a:lvl6pPr>
+            <a:lvl7pPr marL="2743200" indent="0" algn="ctr" defTabSz="914400" rtl="0" eaLnBrk="1" latinLnBrk="0" hangingPunct="1">
+              <a:lnSpc>
+                <a:spcPct val="90000"/>
+              </a:lnSpc>
+              <a:spcBef>
+                <a:spcPts val="200"/>
+              </a:spcBef>
+              <a:spcAft>
+                <a:spcPts val="400"/>
+              </a:spcAft>
+              <a:buClr>
+                <a:schemeClr val="accent1"/>
+              </a:buClr>
+              <a:buFont typeface="Calibri" pitchFamily="34" charset="0"/>
+              <a:buNone/>
+              <a:defRPr sz="2000" kern="1200">
+                <a:solidFill>
+                  <a:schemeClr val="tx1">
+                    <a:lumMod val="75000"/>
+                    <a:lumOff val="25000"/>
+                  </a:schemeClr>
+                </a:solidFill>
+                <a:latin typeface="+mn-lt"/>
+                <a:ea typeface="+mn-ea"/>
+                <a:cs typeface="+mn-cs"/>
+              </a:defRPr>
+            </a:lvl7pPr>
+            <a:lvl8pPr marL="3200400" indent="0" algn="ctr" defTabSz="914400" rtl="0" eaLnBrk="1" latinLnBrk="0" hangingPunct="1">
+              <a:lnSpc>
+                <a:spcPct val="90000"/>
+              </a:lnSpc>
+              <a:spcBef>
+                <a:spcPts val="200"/>
+              </a:spcBef>
+              <a:spcAft>
+                <a:spcPts val="400"/>
+              </a:spcAft>
+              <a:buClr>
+                <a:schemeClr val="accent1"/>
+              </a:buClr>
+              <a:buFont typeface="Calibri" pitchFamily="34" charset="0"/>
+              <a:buNone/>
+              <a:defRPr sz="2000" kern="1200">
+                <a:solidFill>
+                  <a:schemeClr val="tx1">
+                    <a:lumMod val="75000"/>
+                    <a:lumOff val="25000"/>
+                  </a:schemeClr>
+                </a:solidFill>
+                <a:latin typeface="+mn-lt"/>
+                <a:ea typeface="+mn-ea"/>
+                <a:cs typeface="+mn-cs"/>
+              </a:defRPr>
+            </a:lvl8pPr>
+            <a:lvl9pPr marL="3657600" indent="0" algn="ctr" defTabSz="914400" rtl="0" eaLnBrk="1" latinLnBrk="0" hangingPunct="1">
+              <a:lnSpc>
+                <a:spcPct val="90000"/>
+              </a:lnSpc>
+              <a:spcBef>
+                <a:spcPts val="200"/>
+              </a:spcBef>
+              <a:spcAft>
+                <a:spcPts val="400"/>
+              </a:spcAft>
+              <a:buClr>
+                <a:schemeClr val="accent1"/>
+              </a:buClr>
+              <a:buFont typeface="Calibri" pitchFamily="34" charset="0"/>
+              <a:buNone/>
+              <a:defRPr sz="2000" kern="1200">
+                <a:solidFill>
+                  <a:schemeClr val="tx1">
+                    <a:lumMod val="75000"/>
+                    <a:lumOff val="25000"/>
+                  </a:schemeClr>
+                </a:solidFill>
+                <a:latin typeface="+mn-lt"/>
+                <a:ea typeface="+mn-ea"/>
+                <a:cs typeface="+mn-cs"/>
+              </a:defRPr>
+            </a:lvl9pPr>
+          </a:lstStyle>
+          <a:p>
+            <a:pPr>
+              <a:lnSpc>
+                <a:spcPct val="100000"/>
+              </a:lnSpc>
             </a:pPr>
-            <a:endParaRPr lang="hu-HU" dirty="0"/>
+            <a:r>
+              <a:rPr lang="hu-HU" sz="1800" cap="none" spc="0" dirty="0">
+                <a:latin typeface="Bahnschrift Light" panose="020B0502040204020203" pitchFamily="34" charset="0"/>
+              </a:rPr>
+              <a:t>Készítették: Atkári Ariella</a:t>
+            </a:r>
+            <a:br>
+              <a:rPr lang="hu-HU" sz="1800" cap="none" spc="0" dirty="0">
+                <a:latin typeface="Bahnschrift Light" panose="020B0502040204020203" pitchFamily="34" charset="0"/>
+              </a:rPr>
+            </a:br>
+            <a:r>
+              <a:rPr lang="hu-HU" sz="1800" cap="none" spc="0" dirty="0">
+                <a:latin typeface="Bahnschrift Light" panose="020B0502040204020203" pitchFamily="34" charset="0"/>
+              </a:rPr>
+              <a:t>	      Farkas Dominik</a:t>
+            </a:r>
+          </a:p>
+        </p:txBody>
+      </p:sp>
+      <p:cxnSp>
+        <p:nvCxnSpPr>
+          <p:cNvPr id="9" name="Egyenes összekötő 8">
+            <a:extLst>
+              <a:ext uri="{FF2B5EF4-FFF2-40B4-BE49-F238E27FC236}">
+                <a16:creationId xmlns:a16="http://schemas.microsoft.com/office/drawing/2014/main" id="{670AB60B-B385-4E46-A012-AD0038CF5F38}"/>
+              </a:ext>
+            </a:extLst>
+          </p:cNvPr>
+          <p:cNvCxnSpPr>
+            <a:cxnSpLocks/>
+          </p:cNvCxnSpPr>
+          <p:nvPr/>
+        </p:nvCxnSpPr>
+        <p:spPr>
+          <a:xfrm>
+            <a:off x="2131264" y="2305176"/>
+            <a:ext cx="7953375" cy="0"/>
+          </a:xfrm>
+          <a:prstGeom prst="line">
+            <a:avLst/>
+          </a:prstGeom>
+          <a:ln>
+            <a:solidFill>
+              <a:schemeClr val="tx1">
+                <a:lumMod val="50000"/>
+                <a:lumOff val="50000"/>
+              </a:schemeClr>
+            </a:solidFill>
+          </a:ln>
+        </p:spPr>
+        <p:style>
+          <a:lnRef idx="1">
+            <a:schemeClr val="accent1"/>
+          </a:lnRef>
+          <a:fillRef idx="0">
+            <a:schemeClr val="accent1"/>
+          </a:fillRef>
+          <a:effectRef idx="0">
+            <a:schemeClr val="accent1"/>
+          </a:effectRef>
+          <a:fontRef idx="minor">
+            <a:schemeClr val="tx1"/>
+          </a:fontRef>
+        </p:style>
+      </p:cxnSp>
+      <p:pic>
+        <p:nvPicPr>
+          <p:cNvPr id="10" name="Kép 9">
+            <a:extLst>
+              <a:ext uri="{FF2B5EF4-FFF2-40B4-BE49-F238E27FC236}">
+                <a16:creationId xmlns:a16="http://schemas.microsoft.com/office/drawing/2014/main" id="{CB9406C6-CF11-47E5-AEFA-0BA584F8F8D2}"/>
+              </a:ext>
+            </a:extLst>
+          </p:cNvPr>
+          <p:cNvPicPr>
+            <a:picLocks noChangeAspect="1"/>
+          </p:cNvPicPr>
+          <p:nvPr/>
+        </p:nvPicPr>
+        <p:blipFill rotWithShape="1">
+          <a:blip r:embed="rId2">
+            <a:extLst>
+              <a:ext uri="{28A0092B-C50C-407E-A947-70E740481C1C}">
+                <a14:useLocalDpi xmlns:a14="http://schemas.microsoft.com/office/drawing/2010/main" val="0"/>
+              </a:ext>
+            </a:extLst>
+          </a:blip>
+          <a:srcRect l="1" r="-2984" b="38896"/>
+          <a:stretch/>
+        </p:blipFill>
+        <p:spPr>
+          <a:xfrm>
+            <a:off x="3738706" y="711670"/>
+            <a:ext cx="4855269" cy="949493"/>
+          </a:xfrm>
+          <a:prstGeom prst="rect">
+            <a:avLst/>
+          </a:prstGeom>
+        </p:spPr>
+      </p:pic>
+      <p:sp>
+        <p:nvSpPr>
+          <p:cNvPr id="11" name="Alcím 2">
+            <a:extLst>
+              <a:ext uri="{FF2B5EF4-FFF2-40B4-BE49-F238E27FC236}">
+                <a16:creationId xmlns:a16="http://schemas.microsoft.com/office/drawing/2014/main" id="{7D26B0E8-7A60-4B80-8AF7-628A519872D6}"/>
+              </a:ext>
+            </a:extLst>
+          </p:cNvPr>
+          <p:cNvSpPr txBox="1">
+            <a:spLocks/>
+          </p:cNvSpPr>
+          <p:nvPr/>
+        </p:nvSpPr>
+        <p:spPr>
+          <a:xfrm>
+            <a:off x="10563224" y="5883809"/>
+            <a:ext cx="1628776" cy="402688"/>
+          </a:xfrm>
+          <a:prstGeom prst="rect">
+            <a:avLst/>
+          </a:prstGeom>
+        </p:spPr>
+        <p:txBody>
+          <a:bodyPr vert="horz" lIns="91440" tIns="45720" rIns="91440" bIns="45720" rtlCol="0">
+            <a:normAutofit/>
+          </a:bodyPr>
+          <a:lstStyle>
+            <a:lvl1pPr marL="0" indent="0" algn="l" defTabSz="914400" rtl="0" eaLnBrk="1" latinLnBrk="0" hangingPunct="1">
+              <a:lnSpc>
+                <a:spcPct val="90000"/>
+              </a:lnSpc>
+              <a:spcBef>
+                <a:spcPts val="1200"/>
+              </a:spcBef>
+              <a:spcAft>
+                <a:spcPts val="200"/>
+              </a:spcAft>
+              <a:buClr>
+                <a:schemeClr val="accent1"/>
+              </a:buClr>
+              <a:buSzPct val="100000"/>
+              <a:buFont typeface="Calibri" panose="020F0502020204030204" pitchFamily="34" charset="0"/>
+              <a:buNone/>
+              <a:defRPr sz="2400" kern="1200" cap="all" spc="200" baseline="0">
+                <a:solidFill>
+                  <a:schemeClr val="tx2"/>
+                </a:solidFill>
+                <a:latin typeface="+mj-lt"/>
+                <a:ea typeface="+mn-ea"/>
+                <a:cs typeface="+mn-cs"/>
+              </a:defRPr>
+            </a:lvl1pPr>
+            <a:lvl2pPr marL="457200" indent="0" algn="ctr" defTabSz="914400" rtl="0" eaLnBrk="1" latinLnBrk="0" hangingPunct="1">
+              <a:lnSpc>
+                <a:spcPct val="90000"/>
+              </a:lnSpc>
+              <a:spcBef>
+                <a:spcPts val="200"/>
+              </a:spcBef>
+              <a:spcAft>
+                <a:spcPts val="400"/>
+              </a:spcAft>
+              <a:buClr>
+                <a:schemeClr val="accent1"/>
+              </a:buClr>
+              <a:buFont typeface="Calibri" pitchFamily="34" charset="0"/>
+              <a:buNone/>
+              <a:defRPr sz="2400" kern="1200">
+                <a:solidFill>
+                  <a:schemeClr val="tx1">
+                    <a:lumMod val="75000"/>
+                    <a:lumOff val="25000"/>
+                  </a:schemeClr>
+                </a:solidFill>
+                <a:latin typeface="+mn-lt"/>
+                <a:ea typeface="+mn-ea"/>
+                <a:cs typeface="+mn-cs"/>
+              </a:defRPr>
+            </a:lvl2pPr>
+            <a:lvl3pPr marL="914400" indent="0" algn="ctr" defTabSz="914400" rtl="0" eaLnBrk="1" latinLnBrk="0" hangingPunct="1">
+              <a:lnSpc>
+                <a:spcPct val="90000"/>
+              </a:lnSpc>
+              <a:spcBef>
+                <a:spcPts val="200"/>
+              </a:spcBef>
+              <a:spcAft>
+                <a:spcPts val="400"/>
+              </a:spcAft>
+              <a:buClr>
+                <a:schemeClr val="accent1"/>
+              </a:buClr>
+              <a:buFont typeface="Calibri" pitchFamily="34" charset="0"/>
+              <a:buNone/>
+              <a:defRPr sz="2400" kern="1200">
+                <a:solidFill>
+                  <a:schemeClr val="tx1">
+                    <a:lumMod val="75000"/>
+                    <a:lumOff val="25000"/>
+                  </a:schemeClr>
+                </a:solidFill>
+                <a:latin typeface="+mn-lt"/>
+                <a:ea typeface="+mn-ea"/>
+                <a:cs typeface="+mn-cs"/>
+              </a:defRPr>
+            </a:lvl3pPr>
+            <a:lvl4pPr marL="1371600" indent="0" algn="ctr" defTabSz="914400" rtl="0" eaLnBrk="1" latinLnBrk="0" hangingPunct="1">
+              <a:lnSpc>
+                <a:spcPct val="90000"/>
+              </a:lnSpc>
+              <a:spcBef>
+                <a:spcPts val="200"/>
+              </a:spcBef>
+              <a:spcAft>
+                <a:spcPts val="400"/>
+              </a:spcAft>
+              <a:buClr>
+                <a:schemeClr val="accent1"/>
+              </a:buClr>
+              <a:buFont typeface="Calibri" pitchFamily="34" charset="0"/>
+              <a:buNone/>
+              <a:defRPr sz="2000" kern="1200">
+                <a:solidFill>
+                  <a:schemeClr val="tx1">
+                    <a:lumMod val="75000"/>
+                    <a:lumOff val="25000"/>
+                  </a:schemeClr>
+                </a:solidFill>
+                <a:latin typeface="+mn-lt"/>
+                <a:ea typeface="+mn-ea"/>
+                <a:cs typeface="+mn-cs"/>
+              </a:defRPr>
+            </a:lvl4pPr>
+            <a:lvl5pPr marL="1828800" indent="0" algn="ctr" defTabSz="914400" rtl="0" eaLnBrk="1" latinLnBrk="0" hangingPunct="1">
+              <a:lnSpc>
+                <a:spcPct val="90000"/>
+              </a:lnSpc>
+              <a:spcBef>
+                <a:spcPts val="200"/>
+              </a:spcBef>
+              <a:spcAft>
+                <a:spcPts val="400"/>
+              </a:spcAft>
+              <a:buClr>
+                <a:schemeClr val="accent1"/>
+              </a:buClr>
+              <a:buFont typeface="Calibri" pitchFamily="34" charset="0"/>
+              <a:buNone/>
+              <a:defRPr sz="2000" kern="1200">
+                <a:solidFill>
+                  <a:schemeClr val="tx1">
+                    <a:lumMod val="75000"/>
+                    <a:lumOff val="25000"/>
+                  </a:schemeClr>
+                </a:solidFill>
+                <a:latin typeface="+mn-lt"/>
+                <a:ea typeface="+mn-ea"/>
+                <a:cs typeface="+mn-cs"/>
+              </a:defRPr>
+            </a:lvl5pPr>
+            <a:lvl6pPr marL="2286000" indent="0" algn="ctr" defTabSz="914400" rtl="0" eaLnBrk="1" latinLnBrk="0" hangingPunct="1">
+              <a:lnSpc>
+                <a:spcPct val="90000"/>
+              </a:lnSpc>
+              <a:spcBef>
+                <a:spcPts val="200"/>
+              </a:spcBef>
+              <a:spcAft>
+                <a:spcPts val="400"/>
+              </a:spcAft>
+              <a:buClr>
+                <a:schemeClr val="accent1"/>
+              </a:buClr>
+              <a:buFont typeface="Calibri" pitchFamily="34" charset="0"/>
+              <a:buNone/>
+              <a:defRPr sz="2000" kern="1200">
+                <a:solidFill>
+                  <a:schemeClr val="tx1">
+                    <a:lumMod val="75000"/>
+                    <a:lumOff val="25000"/>
+                  </a:schemeClr>
+                </a:solidFill>
+                <a:latin typeface="+mn-lt"/>
+                <a:ea typeface="+mn-ea"/>
+                <a:cs typeface="+mn-cs"/>
+              </a:defRPr>
+            </a:lvl6pPr>
+            <a:lvl7pPr marL="2743200" indent="0" algn="ctr" defTabSz="914400" rtl="0" eaLnBrk="1" latinLnBrk="0" hangingPunct="1">
+              <a:lnSpc>
+                <a:spcPct val="90000"/>
+              </a:lnSpc>
+              <a:spcBef>
+                <a:spcPts val="200"/>
+              </a:spcBef>
+              <a:spcAft>
+                <a:spcPts val="400"/>
+              </a:spcAft>
+              <a:buClr>
+                <a:schemeClr val="accent1"/>
+              </a:buClr>
+              <a:buFont typeface="Calibri" pitchFamily="34" charset="0"/>
+              <a:buNone/>
+              <a:defRPr sz="2000" kern="1200">
+                <a:solidFill>
+                  <a:schemeClr val="tx1">
+                    <a:lumMod val="75000"/>
+                    <a:lumOff val="25000"/>
+                  </a:schemeClr>
+                </a:solidFill>
+                <a:latin typeface="+mn-lt"/>
+                <a:ea typeface="+mn-ea"/>
+                <a:cs typeface="+mn-cs"/>
+              </a:defRPr>
+            </a:lvl7pPr>
+            <a:lvl8pPr marL="3200400" indent="0" algn="ctr" defTabSz="914400" rtl="0" eaLnBrk="1" latinLnBrk="0" hangingPunct="1">
+              <a:lnSpc>
+                <a:spcPct val="90000"/>
+              </a:lnSpc>
+              <a:spcBef>
+                <a:spcPts val="200"/>
+              </a:spcBef>
+              <a:spcAft>
+                <a:spcPts val="400"/>
+              </a:spcAft>
+              <a:buClr>
+                <a:schemeClr val="accent1"/>
+              </a:buClr>
+              <a:buFont typeface="Calibri" pitchFamily="34" charset="0"/>
+              <a:buNone/>
+              <a:defRPr sz="2000" kern="1200">
+                <a:solidFill>
+                  <a:schemeClr val="tx1">
+                    <a:lumMod val="75000"/>
+                    <a:lumOff val="25000"/>
+                  </a:schemeClr>
+                </a:solidFill>
+                <a:latin typeface="+mn-lt"/>
+                <a:ea typeface="+mn-ea"/>
+                <a:cs typeface="+mn-cs"/>
+              </a:defRPr>
+            </a:lvl8pPr>
+            <a:lvl9pPr marL="3657600" indent="0" algn="ctr" defTabSz="914400" rtl="0" eaLnBrk="1" latinLnBrk="0" hangingPunct="1">
+              <a:lnSpc>
+                <a:spcPct val="90000"/>
+              </a:lnSpc>
+              <a:spcBef>
+                <a:spcPts val="200"/>
+              </a:spcBef>
+              <a:spcAft>
+                <a:spcPts val="400"/>
+              </a:spcAft>
+              <a:buClr>
+                <a:schemeClr val="accent1"/>
+              </a:buClr>
+              <a:buFont typeface="Calibri" pitchFamily="34" charset="0"/>
+              <a:buNone/>
+              <a:defRPr sz="2000" kern="1200">
+                <a:solidFill>
+                  <a:schemeClr val="tx1">
+                    <a:lumMod val="75000"/>
+                    <a:lumOff val="25000"/>
+                  </a:schemeClr>
+                </a:solidFill>
+                <a:latin typeface="+mn-lt"/>
+                <a:ea typeface="+mn-ea"/>
+                <a:cs typeface="+mn-cs"/>
+              </a:defRPr>
+            </a:lvl9pPr>
+          </a:lstStyle>
+          <a:p>
+            <a:pPr>
+              <a:lnSpc>
+                <a:spcPct val="100000"/>
+              </a:lnSpc>
+            </a:pPr>
+            <a:r>
+              <a:rPr lang="hu-HU" sz="1800" cap="none" spc="0" dirty="0">
+                <a:latin typeface="Bahnschrift Light" panose="020B0502040204020203" pitchFamily="34" charset="0"/>
+              </a:rPr>
+              <a:t>2026. 03. 03</a:t>
+            </a:r>
           </a:p>
         </p:txBody>
       </p:sp>
     </p:spTree>
     <p:extLst>
       <p:ext uri="{BB962C8B-B14F-4D97-AF65-F5344CB8AC3E}">
-        <p14:creationId xmlns:p14="http://schemas.microsoft.com/office/powerpoint/2010/main" val="1380079028"/>
+        <p14:creationId xmlns:p14="http://schemas.microsoft.com/office/powerpoint/2010/main" val="3133121184"/>
       </p:ext>
     </p:extLst>
   </p:cSld>
@@ -6991,7 +5530,403 @@
 </p:sld>
 </file>
 
-<file path=ppt/slides/slide17.xml><?xml version="1.0" encoding="utf-8"?>
+<file path=ppt/slides/slide10.xml><?xml version="1.0" encoding="utf-8"?>
+<p:sld xmlns:a="http://schemas.openxmlformats.org/drawingml/2006/main" xmlns:r="http://schemas.openxmlformats.org/officeDocument/2006/relationships" xmlns:p="http://schemas.openxmlformats.org/presentationml/2006/main">
+  <p:cSld>
+    <p:bg>
+      <p:bgPr>
+        <a:solidFill>
+          <a:srgbClr val="FDF7E9"/>
+        </a:solidFill>
+        <a:effectLst/>
+      </p:bgPr>
+    </p:bg>
+    <p:spTree>
+      <p:nvGrpSpPr>
+        <p:cNvPr id="1" name=""/>
+        <p:cNvGrpSpPr/>
+        <p:nvPr/>
+      </p:nvGrpSpPr>
+      <p:grpSpPr>
+        <a:xfrm>
+          <a:off x="0" y="0"/>
+          <a:ext cx="0" cy="0"/>
+          <a:chOff x="0" y="0"/>
+          <a:chExt cx="0" cy="0"/>
+        </a:xfrm>
+      </p:grpSpPr>
+      <p:sp>
+        <p:nvSpPr>
+          <p:cNvPr id="2" name="Cím 1">
+            <a:extLst>
+              <a:ext uri="{FF2B5EF4-FFF2-40B4-BE49-F238E27FC236}">
+                <a16:creationId xmlns:a16="http://schemas.microsoft.com/office/drawing/2014/main" id="{68775652-02D3-4343-B0A8-5C16A252BBD7}"/>
+              </a:ext>
+            </a:extLst>
+          </p:cNvPr>
+          <p:cNvSpPr>
+            <a:spLocks noGrp="1"/>
+          </p:cNvSpPr>
+          <p:nvPr>
+            <p:ph type="title"/>
+          </p:nvPr>
+        </p:nvSpPr>
+        <p:spPr/>
+        <p:txBody>
+          <a:bodyPr/>
+          <a:lstStyle/>
+          <a:p>
+            <a:r>
+              <a:rPr lang="hu-HU" dirty="0">
+                <a:latin typeface="Bahnschrift SemiBold" panose="020B0502040204020203" pitchFamily="34" charset="0"/>
+              </a:rPr>
+              <a:t>Tesztelés</a:t>
+            </a:r>
+          </a:p>
+        </p:txBody>
+      </p:sp>
+      <p:sp>
+        <p:nvSpPr>
+          <p:cNvPr id="3" name="Szöveg helye 2">
+            <a:extLst>
+              <a:ext uri="{FF2B5EF4-FFF2-40B4-BE49-F238E27FC236}">
+                <a16:creationId xmlns:a16="http://schemas.microsoft.com/office/drawing/2014/main" id="{632DA0C3-2B61-4113-AD5E-5C0C7B466219}"/>
+              </a:ext>
+            </a:extLst>
+          </p:cNvPr>
+          <p:cNvSpPr>
+            <a:spLocks noGrp="1"/>
+          </p:cNvSpPr>
+          <p:nvPr>
+            <p:ph type="body" idx="1"/>
+          </p:nvPr>
+        </p:nvSpPr>
+        <p:spPr/>
+        <p:txBody>
+          <a:bodyPr/>
+          <a:lstStyle/>
+          <a:p>
+            <a:pPr algn="ctr"/>
+            <a:r>
+              <a:rPr lang="hu-HU" dirty="0" err="1"/>
+              <a:t>BAckend</a:t>
+            </a:r>
+            <a:endParaRPr lang="hu-HU" dirty="0"/>
+          </a:p>
+        </p:txBody>
+      </p:sp>
+      <p:sp>
+        <p:nvSpPr>
+          <p:cNvPr id="4" name="Tartalom helye 3">
+            <a:extLst>
+              <a:ext uri="{FF2B5EF4-FFF2-40B4-BE49-F238E27FC236}">
+                <a16:creationId xmlns:a16="http://schemas.microsoft.com/office/drawing/2014/main" id="{9B6E21CF-8DD2-4C9D-94F2-3E42E0993C13}"/>
+              </a:ext>
+            </a:extLst>
+          </p:cNvPr>
+          <p:cNvSpPr>
+            <a:spLocks noGrp="1"/>
+          </p:cNvSpPr>
+          <p:nvPr>
+            <p:ph sz="half" idx="2"/>
+          </p:nvPr>
+        </p:nvSpPr>
+        <p:spPr>
+          <a:xfrm>
+            <a:off x="914400" y="2573868"/>
+            <a:ext cx="4937760" cy="3378200"/>
+          </a:xfrm>
+        </p:spPr>
+        <p:txBody>
+          <a:bodyPr/>
+          <a:lstStyle/>
+          <a:p>
+            <a:pPr lvl="1" algn="ctr">
+              <a:buFont typeface="Arial" panose="020B0604020202020204" pitchFamily="34" charset="0"/>
+              <a:buChar char="•"/>
+            </a:pPr>
+            <a:r>
+              <a:rPr lang="hu-HU" dirty="0"/>
+              <a:t>Postman</a:t>
+            </a:r>
+          </a:p>
+        </p:txBody>
+      </p:sp>
+      <p:sp>
+        <p:nvSpPr>
+          <p:cNvPr id="5" name="Szöveg helye 4">
+            <a:extLst>
+              <a:ext uri="{FF2B5EF4-FFF2-40B4-BE49-F238E27FC236}">
+                <a16:creationId xmlns:a16="http://schemas.microsoft.com/office/drawing/2014/main" id="{8CF772AA-AADB-421B-9B9F-F9CBC3774658}"/>
+              </a:ext>
+            </a:extLst>
+          </p:cNvPr>
+          <p:cNvSpPr>
+            <a:spLocks noGrp="1"/>
+          </p:cNvSpPr>
+          <p:nvPr>
+            <p:ph type="body" sz="quarter" idx="3"/>
+          </p:nvPr>
+        </p:nvSpPr>
+        <p:spPr/>
+        <p:txBody>
+          <a:bodyPr/>
+          <a:lstStyle/>
+          <a:p>
+            <a:pPr algn="ctr"/>
+            <a:r>
+              <a:rPr lang="hu-HU" dirty="0"/>
+              <a:t>frontend</a:t>
+            </a:r>
+          </a:p>
+        </p:txBody>
+      </p:sp>
+      <p:sp>
+        <p:nvSpPr>
+          <p:cNvPr id="6" name="Tartalom helye 5">
+            <a:extLst>
+              <a:ext uri="{FF2B5EF4-FFF2-40B4-BE49-F238E27FC236}">
+                <a16:creationId xmlns:a16="http://schemas.microsoft.com/office/drawing/2014/main" id="{9FA3B530-5977-4B61-B1B0-6F0B4C637821}"/>
+              </a:ext>
+            </a:extLst>
+          </p:cNvPr>
+          <p:cNvSpPr>
+            <a:spLocks noGrp="1"/>
+          </p:cNvSpPr>
+          <p:nvPr>
+            <p:ph sz="quarter" idx="4"/>
+          </p:nvPr>
+        </p:nvSpPr>
+        <p:spPr/>
+        <p:txBody>
+          <a:bodyPr/>
+          <a:lstStyle/>
+          <a:p>
+            <a:pPr lvl="1" algn="ctr">
+              <a:buFont typeface="Arial" panose="020B0604020202020204" pitchFamily="34" charset="0"/>
+              <a:buChar char="•"/>
+            </a:pPr>
+            <a:r>
+              <a:rPr lang="hu-HU" dirty="0" err="1"/>
+              <a:t>Selenium</a:t>
+            </a:r>
+            <a:r>
+              <a:rPr lang="hu-HU" dirty="0"/>
+              <a:t> </a:t>
+            </a:r>
+            <a:r>
+              <a:rPr lang="hu-HU" dirty="0" err="1"/>
+              <a:t>Library</a:t>
+            </a:r>
+            <a:r>
+              <a:rPr lang="hu-HU" dirty="0"/>
+              <a:t> – </a:t>
+            </a:r>
+            <a:r>
+              <a:rPr lang="hu-HU" dirty="0" err="1"/>
+              <a:t>Robotframework</a:t>
+            </a:r>
+            <a:endParaRPr lang="hu-HU" dirty="0"/>
+          </a:p>
+          <a:p>
+            <a:pPr marL="201168" lvl="1" indent="0">
+              <a:buNone/>
+            </a:pPr>
+            <a:endParaRPr lang="hu-HU" dirty="0"/>
+          </a:p>
+        </p:txBody>
+      </p:sp>
+      <p:grpSp>
+        <p:nvGrpSpPr>
+          <p:cNvPr id="12" name="Csoportba foglalás 11">
+            <a:extLst>
+              <a:ext uri="{FF2B5EF4-FFF2-40B4-BE49-F238E27FC236}">
+                <a16:creationId xmlns:a16="http://schemas.microsoft.com/office/drawing/2014/main" id="{257008D6-FD12-4F82-9FAE-0E4266FC30CF}"/>
+              </a:ext>
+            </a:extLst>
+          </p:cNvPr>
+          <p:cNvGrpSpPr/>
+          <p:nvPr/>
+        </p:nvGrpSpPr>
+        <p:grpSpPr>
+          <a:xfrm>
+            <a:off x="10565538" y="349786"/>
+            <a:ext cx="1418895" cy="1258023"/>
+            <a:chOff x="10565538" y="349786"/>
+            <a:chExt cx="1418895" cy="1258023"/>
+          </a:xfrm>
+        </p:grpSpPr>
+        <p:pic>
+          <p:nvPicPr>
+            <p:cNvPr id="13" name="Kép 12">
+              <a:extLst>
+                <a:ext uri="{FF2B5EF4-FFF2-40B4-BE49-F238E27FC236}">
+                  <a16:creationId xmlns:a16="http://schemas.microsoft.com/office/drawing/2014/main" id="{146B191F-A718-4014-B337-0005E2B62BA9}"/>
+                </a:ext>
+              </a:extLst>
+            </p:cNvPr>
+            <p:cNvPicPr>
+              <a:picLocks noChangeAspect="1"/>
+            </p:cNvPicPr>
+            <p:nvPr/>
+          </p:nvPicPr>
+          <p:blipFill rotWithShape="1">
+            <a:blip r:embed="rId2">
+              <a:alphaModFix amt="50000"/>
+              <a:extLst>
+                <a:ext uri="{28A0092B-C50C-407E-A947-70E740481C1C}">
+                  <a14:useLocalDpi xmlns:a14="http://schemas.microsoft.com/office/drawing/2010/main" val="0"/>
+                </a:ext>
+              </a:extLst>
+            </a:blip>
+            <a:srcRect t="58555" r="67375"/>
+            <a:stretch/>
+          </p:blipFill>
+          <p:spPr>
+            <a:xfrm>
+              <a:off x="10619475" y="1036308"/>
+              <a:ext cx="1364958" cy="571501"/>
+            </a:xfrm>
+            <a:prstGeom prst="rect">
+              <a:avLst/>
+            </a:prstGeom>
+          </p:spPr>
+        </p:pic>
+        <p:pic>
+          <p:nvPicPr>
+            <p:cNvPr id="14" name="Kép 13">
+              <a:extLst>
+                <a:ext uri="{FF2B5EF4-FFF2-40B4-BE49-F238E27FC236}">
+                  <a16:creationId xmlns:a16="http://schemas.microsoft.com/office/drawing/2014/main" id="{3C0678C3-DC3F-47F5-8610-DB4180EAD206}"/>
+                </a:ext>
+              </a:extLst>
+            </p:cNvPr>
+            <p:cNvPicPr>
+              <a:picLocks noChangeAspect="1"/>
+            </p:cNvPicPr>
+            <p:nvPr/>
+          </p:nvPicPr>
+          <p:blipFill rotWithShape="1">
+            <a:blip r:embed="rId2">
+              <a:alphaModFix amt="50000"/>
+              <a:extLst>
+                <a:ext uri="{28A0092B-C50C-407E-A947-70E740481C1C}">
+                  <a14:useLocalDpi xmlns:a14="http://schemas.microsoft.com/office/drawing/2010/main" val="0"/>
+                </a:ext>
+              </a:extLst>
+            </a:blip>
+            <a:srcRect l="1" r="61666" b="38896"/>
+            <a:stretch/>
+          </p:blipFill>
+          <p:spPr>
+            <a:xfrm>
+              <a:off x="10565538" y="349786"/>
+              <a:ext cx="1418895" cy="745451"/>
+            </a:xfrm>
+            <a:prstGeom prst="rect">
+              <a:avLst/>
+            </a:prstGeom>
+          </p:spPr>
+        </p:pic>
+      </p:grpSp>
+      <p:pic>
+        <p:nvPicPr>
+          <p:cNvPr id="8" name="Kép 7">
+            <a:extLst>
+              <a:ext uri="{FF2B5EF4-FFF2-40B4-BE49-F238E27FC236}">
+                <a16:creationId xmlns:a16="http://schemas.microsoft.com/office/drawing/2014/main" id="{65D09F99-D0F3-443A-AAEC-7BE7F46CE9B0}"/>
+              </a:ext>
+            </a:extLst>
+          </p:cNvPr>
+          <p:cNvPicPr>
+            <a:picLocks noChangeAspect="1"/>
+          </p:cNvPicPr>
+          <p:nvPr/>
+        </p:nvPicPr>
+        <p:blipFill rotWithShape="1">
+          <a:blip r:embed="rId3"/>
+          <a:srcRect t="-1" r="2568" b="49410"/>
+          <a:stretch/>
+        </p:blipFill>
+        <p:spPr>
+          <a:xfrm>
+            <a:off x="2227708" y="3310150"/>
+            <a:ext cx="2645282" cy="2448262"/>
+          </a:xfrm>
+          <a:prstGeom prst="rect">
+            <a:avLst/>
+          </a:prstGeom>
+          <a:ln w="76200" cap="sq">
+            <a:solidFill>
+              <a:srgbClr val="E48312"/>
+            </a:solidFill>
+            <a:miter lim="800000"/>
+          </a:ln>
+          <a:effectLst>
+            <a:outerShdw blurRad="57150" dist="50800" dir="2700000" algn="tl" rotWithShape="0">
+              <a:srgbClr val="000000">
+                <a:alpha val="40000"/>
+              </a:srgbClr>
+            </a:outerShdw>
+          </a:effectLst>
+        </p:spPr>
+      </p:pic>
+      <p:pic>
+        <p:nvPicPr>
+          <p:cNvPr id="10" name="Kép 9">
+            <a:extLst>
+              <a:ext uri="{FF2B5EF4-FFF2-40B4-BE49-F238E27FC236}">
+                <a16:creationId xmlns:a16="http://schemas.microsoft.com/office/drawing/2014/main" id="{C0EA3B83-8F57-4D5D-B3CB-8E7AE8FF75FF}"/>
+              </a:ext>
+            </a:extLst>
+          </p:cNvPr>
+          <p:cNvPicPr>
+            <a:picLocks noChangeAspect="1"/>
+          </p:cNvPicPr>
+          <p:nvPr/>
+        </p:nvPicPr>
+        <p:blipFill rotWithShape="1">
+          <a:blip r:embed="rId4"/>
+          <a:srcRect l="1468" t="7300" r="26371" b="-353"/>
+          <a:stretch/>
+        </p:blipFill>
+        <p:spPr>
+          <a:xfrm>
+            <a:off x="7562850" y="3552296"/>
+            <a:ext cx="2247900" cy="1143529"/>
+          </a:xfrm>
+          <a:prstGeom prst="rect">
+            <a:avLst/>
+          </a:prstGeom>
+          <a:ln w="76200" cap="sq">
+            <a:solidFill>
+              <a:srgbClr val="E48312"/>
+            </a:solidFill>
+            <a:miter lim="800000"/>
+          </a:ln>
+          <a:effectLst>
+            <a:outerShdw blurRad="57150" dist="50800" dir="2700000" algn="tl" rotWithShape="0">
+              <a:srgbClr val="000000">
+                <a:alpha val="40000"/>
+              </a:srgbClr>
+            </a:outerShdw>
+          </a:effectLst>
+        </p:spPr>
+      </p:pic>
+    </p:spTree>
+    <p:extLst>
+      <p:ext uri="{BB962C8B-B14F-4D97-AF65-F5344CB8AC3E}">
+        <p14:creationId xmlns:p14="http://schemas.microsoft.com/office/powerpoint/2010/main" val="1931664778"/>
+      </p:ext>
+    </p:extLst>
+  </p:cSld>
+  <p:clrMapOvr>
+    <a:masterClrMapping/>
+  </p:clrMapOvr>
+</p:sld>
+</file>
+
+<file path=ppt/slides/slide11.xml><?xml version="1.0" encoding="utf-8"?>
 <p:sld xmlns:a="http://schemas.openxmlformats.org/drawingml/2006/main" xmlns:r="http://schemas.openxmlformats.org/officeDocument/2006/relationships" xmlns:p="http://schemas.openxmlformats.org/presentationml/2006/main">
   <p:cSld>
     <p:bg>
@@ -7032,8 +5967,8 @@
         </p:nvCxnSpPr>
         <p:spPr>
           <a:xfrm>
-            <a:off x="3205163" y="2154342"/>
-            <a:ext cx="5781675" cy="0"/>
+            <a:off x="1209675" y="1737360"/>
+            <a:ext cx="9946005" cy="0"/>
           </a:xfrm>
           <a:prstGeom prst="line">
             <a:avLst/>
@@ -7078,20 +6013,20 @@
         </p:nvPicPr>
         <p:blipFill rotWithShape="1">
           <a:blip r:embed="rId2">
-            <a:alphaModFix/>
+            <a:alphaModFix amt="50000"/>
             <a:extLst>
               <a:ext uri="{28A0092B-C50C-407E-A947-70E740481C1C}">
                 <a14:useLocalDpi xmlns:a14="http://schemas.microsoft.com/office/drawing/2010/main" val="0"/>
               </a:ext>
             </a:extLst>
           </a:blip>
-          <a:srcRect l="-1" t="58555" r="1153"/>
+          <a:srcRect t="58555" r="67375"/>
           <a:stretch/>
         </p:blipFill>
         <p:spPr>
           <a:xfrm>
-            <a:off x="3864953" y="1462194"/>
-            <a:ext cx="4462094" cy="616623"/>
+            <a:off x="10619475" y="1036308"/>
+            <a:ext cx="1364958" cy="571501"/>
           </a:xfrm>
           <a:prstGeom prst="rect">
             <a:avLst/>
@@ -7114,20 +6049,20 @@
         </p:nvPicPr>
         <p:blipFill rotWithShape="1">
           <a:blip r:embed="rId2">
-            <a:alphaModFix/>
+            <a:alphaModFix amt="50000"/>
             <a:extLst>
               <a:ext uri="{28A0092B-C50C-407E-A947-70E740481C1C}">
                 <a14:useLocalDpi xmlns:a14="http://schemas.microsoft.com/office/drawing/2010/main" val="0"/>
               </a:ext>
             </a:extLst>
           </a:blip>
-          <a:srcRect l="-1" r="-295" b="38896"/>
+          <a:srcRect l="1" r="61666" b="38896"/>
           <a:stretch/>
         </p:blipFill>
         <p:spPr>
           <a:xfrm>
-            <a:off x="3817995" y="581028"/>
-            <a:ext cx="4556011" cy="914838"/>
+            <a:off x="10565538" y="349786"/>
+            <a:ext cx="1418895" cy="745451"/>
           </a:xfrm>
           <a:prstGeom prst="rect">
             <a:avLst/>
@@ -7150,7 +6085,7 @@
         </p:nvSpPr>
         <p:spPr>
           <a:xfrm>
-            <a:off x="1066800" y="2703622"/>
+            <a:off x="1097280" y="286603"/>
             <a:ext cx="10058400" cy="1450757"/>
           </a:xfrm>
           <a:prstGeom prst="rect">
@@ -7158,7 +6093,7 @@
           </a:prstGeom>
         </p:spPr>
         <p:txBody>
-          <a:bodyPr anchor="ctr"/>
+          <a:bodyPr anchor="b"/>
           <a:lstStyle>
             <a:lvl1pPr algn="l" defTabSz="914400" rtl="0" eaLnBrk="1" latinLnBrk="0" hangingPunct="1">
               <a:lnSpc>
@@ -7182,384 +6117,21 @@
             </a:lvl1pPr>
           </a:lstStyle>
           <a:p>
-            <a:pPr algn="ctr"/>
-            <a:r>
-              <a:rPr lang="hu-HU" sz="6000" b="1" dirty="0" err="1">
+            <a:r>
+              <a:rPr lang="hu-HU" b="1" dirty="0">
                 <a:latin typeface="Bahnschrift SemiBold" panose="020B0502040204020203" pitchFamily="34" charset="0"/>
               </a:rPr>
-              <a:t>Demo</a:t>
-            </a:r>
-            <a:endParaRPr lang="hu-HU" sz="6000" b="1" dirty="0">
-              <a:latin typeface="Bahnschrift SemiBold" panose="020B0502040204020203" pitchFamily="34" charset="0"/>
-            </a:endParaRPr>
+              <a:t>Fejlesztési lehetőségek</a:t>
+            </a:r>
           </a:p>
         </p:txBody>
       </p:sp>
-      <p:pic>
-        <p:nvPicPr>
-          <p:cNvPr id="12" name="Kép 11">
+      <p:sp>
+        <p:nvSpPr>
+          <p:cNvPr id="6" name="Tartalom helye 2">
             <a:extLst>
               <a:ext uri="{FF2B5EF4-FFF2-40B4-BE49-F238E27FC236}">
-                <a16:creationId xmlns:a16="http://schemas.microsoft.com/office/drawing/2014/main" id="{0D5DF80E-C3F6-4A3A-98C9-825EEE99BBF4}"/>
-              </a:ext>
-            </a:extLst>
-          </p:cNvPr>
-          <p:cNvPicPr>
-            <a:picLocks noChangeAspect="1"/>
-          </p:cNvPicPr>
-          <p:nvPr/>
-        </p:nvPicPr>
-        <p:blipFill rotWithShape="1">
-          <a:blip r:embed="rId3">
-            <a:extLst>
-              <a:ext uri="{28A0092B-C50C-407E-A947-70E740481C1C}">
-                <a14:useLocalDpi xmlns:a14="http://schemas.microsoft.com/office/drawing/2010/main" val="0"/>
-              </a:ext>
-            </a:extLst>
-          </a:blip>
-          <a:srcRect l="16625" r="14640"/>
-          <a:stretch/>
-        </p:blipFill>
-        <p:spPr>
-          <a:xfrm rot="6074309">
-            <a:off x="253294" y="393819"/>
-            <a:ext cx="1804052" cy="1476375"/>
-          </a:xfrm>
-          <a:prstGeom prst="rect">
-            <a:avLst/>
-          </a:prstGeom>
-        </p:spPr>
-      </p:pic>
-      <p:pic>
-        <p:nvPicPr>
-          <p:cNvPr id="13" name="Kép 12">
-            <a:extLst>
-              <a:ext uri="{FF2B5EF4-FFF2-40B4-BE49-F238E27FC236}">
-                <a16:creationId xmlns:a16="http://schemas.microsoft.com/office/drawing/2014/main" id="{7AF0C74E-3043-40A3-8603-B30A83BB9DDF}"/>
-              </a:ext>
-            </a:extLst>
-          </p:cNvPr>
-          <p:cNvPicPr>
-            <a:picLocks noChangeAspect="1"/>
-          </p:cNvPicPr>
-          <p:nvPr/>
-        </p:nvPicPr>
-        <p:blipFill rotWithShape="1">
-          <a:blip r:embed="rId4">
-            <a:extLst>
-              <a:ext uri="{28A0092B-C50C-407E-A947-70E740481C1C}">
-                <a14:useLocalDpi xmlns:a14="http://schemas.microsoft.com/office/drawing/2010/main" val="0"/>
-              </a:ext>
-            </a:extLst>
-          </a:blip>
-          <a:srcRect l="31214" t="-711" r="26907" b="711"/>
-          <a:stretch/>
-        </p:blipFill>
-        <p:spPr>
-          <a:xfrm rot="4156304" flipH="1">
-            <a:off x="10842996" y="4624346"/>
-            <a:ext cx="1208569" cy="1623298"/>
-          </a:xfrm>
-          <a:prstGeom prst="rect">
-            <a:avLst/>
-          </a:prstGeom>
-        </p:spPr>
-      </p:pic>
-    </p:spTree>
-    <p:extLst>
-      <p:ext uri="{BB962C8B-B14F-4D97-AF65-F5344CB8AC3E}">
-        <p14:creationId xmlns:p14="http://schemas.microsoft.com/office/powerpoint/2010/main" val="1876273255"/>
-      </p:ext>
-    </p:extLst>
-  </p:cSld>
-  <p:clrMapOvr>
-    <a:masterClrMapping/>
-  </p:clrMapOvr>
-  <mc:AlternateContent xmlns:mc="http://schemas.openxmlformats.org/markup-compatibility/2006" xmlns:p159="http://schemas.microsoft.com/office/powerpoint/2015/09/main">
-    <mc:Choice Requires="p159">
-      <p:transition xmlns:p14="http://schemas.microsoft.com/office/powerpoint/2010/main" spd="slow" p14:dur="2000">
-        <p159:morph option="byObject"/>
-      </p:transition>
-    </mc:Choice>
-    <mc:Fallback xmlns="">
-      <p:transition spd="slow">
-        <p:fade/>
-      </p:transition>
-    </mc:Fallback>
-  </mc:AlternateContent>
-  <p:timing>
-    <p:tnLst>
-      <p:par>
-        <p:cTn id="1" dur="indefinite" restart="never" nodeType="tmRoot">
-          <p:childTnLst>
-            <p:seq concurrent="1" nextAc="seek">
-              <p:cTn id="2" dur="indefinite" nodeType="mainSeq">
-                <p:childTnLst>
-                  <p:par>
-                    <p:cTn id="3" fill="hold">
-                      <p:stCondLst>
-                        <p:cond delay="indefinite"/>
-                        <p:cond evt="onBegin" delay="0">
-                          <p:tn val="2"/>
-                        </p:cond>
-                      </p:stCondLst>
-                      <p:childTnLst>
-                        <p:par>
-                          <p:cTn id="4" fill="hold">
-                            <p:stCondLst>
-                              <p:cond delay="0"/>
-                            </p:stCondLst>
-                            <p:childTnLst>
-                              <p:par>
-                                <p:cTn id="5" presetID="10" presetClass="entr" presetSubtype="0" fill="hold" nodeType="withEffect">
-                                  <p:stCondLst>
-                                    <p:cond delay="0"/>
-                                  </p:stCondLst>
-                                  <p:childTnLst>
-                                    <p:set>
-                                      <p:cBhvr>
-                                        <p:cTn id="6" dur="1" fill="hold">
-                                          <p:stCondLst>
-                                            <p:cond delay="0"/>
-                                          </p:stCondLst>
-                                        </p:cTn>
-                                        <p:tgtEl>
-                                          <p:spTgt spid="12"/>
-                                        </p:tgtEl>
-                                        <p:attrNameLst>
-                                          <p:attrName>style.visibility</p:attrName>
-                                        </p:attrNameLst>
-                                      </p:cBhvr>
-                                      <p:to>
-                                        <p:strVal val="visible"/>
-                                      </p:to>
-                                    </p:set>
-                                    <p:animEffect transition="in" filter="fade">
-                                      <p:cBhvr>
-                                        <p:cTn id="7" dur="500"/>
-                                        <p:tgtEl>
-                                          <p:spTgt spid="12"/>
-                                        </p:tgtEl>
-                                      </p:cBhvr>
-                                    </p:animEffect>
-                                  </p:childTnLst>
-                                </p:cTn>
-                              </p:par>
-                              <p:par>
-                                <p:cTn id="8" presetID="10" presetClass="entr" presetSubtype="0" fill="hold" nodeType="withEffect">
-                                  <p:stCondLst>
-                                    <p:cond delay="0"/>
-                                  </p:stCondLst>
-                                  <p:childTnLst>
-                                    <p:set>
-                                      <p:cBhvr>
-                                        <p:cTn id="9" dur="1" fill="hold">
-                                          <p:stCondLst>
-                                            <p:cond delay="0"/>
-                                          </p:stCondLst>
-                                        </p:cTn>
-                                        <p:tgtEl>
-                                          <p:spTgt spid="13"/>
-                                        </p:tgtEl>
-                                        <p:attrNameLst>
-                                          <p:attrName>style.visibility</p:attrName>
-                                        </p:attrNameLst>
-                                      </p:cBhvr>
-                                      <p:to>
-                                        <p:strVal val="visible"/>
-                                      </p:to>
-                                    </p:set>
-                                    <p:animEffect transition="in" filter="fade">
-                                      <p:cBhvr>
-                                        <p:cTn id="10" dur="500"/>
-                                        <p:tgtEl>
-                                          <p:spTgt spid="13"/>
-                                        </p:tgtEl>
-                                      </p:cBhvr>
-                                    </p:animEffect>
-                                  </p:childTnLst>
-                                </p:cTn>
-                              </p:par>
-                            </p:childTnLst>
-                          </p:cTn>
-                        </p:par>
-                      </p:childTnLst>
-                    </p:cTn>
-                  </p:par>
-                </p:childTnLst>
-              </p:cTn>
-              <p:prevCondLst>
-                <p:cond evt="onPrev" delay="0">
-                  <p:tgtEl>
-                    <p:sldTgt/>
-                  </p:tgtEl>
-                </p:cond>
-              </p:prevCondLst>
-              <p:nextCondLst>
-                <p:cond evt="onNext" delay="0">
-                  <p:tgtEl>
-                    <p:sldTgt/>
-                  </p:tgtEl>
-                </p:cond>
-              </p:nextCondLst>
-            </p:seq>
-          </p:childTnLst>
-        </p:cTn>
-      </p:par>
-    </p:tnLst>
-  </p:timing>
-</p:sld>
-</file>
-
-<file path=ppt/slides/slide18.xml><?xml version="1.0" encoding="utf-8"?>
-<p:sld xmlns:a="http://schemas.openxmlformats.org/drawingml/2006/main" xmlns:r="http://schemas.openxmlformats.org/officeDocument/2006/relationships" xmlns:p="http://schemas.openxmlformats.org/presentationml/2006/main">
-  <p:cSld>
-    <p:bg>
-      <p:bgPr>
-        <a:solidFill>
-          <a:srgbClr val="FDF7E9"/>
-        </a:solidFill>
-        <a:effectLst/>
-      </p:bgPr>
-    </p:bg>
-    <p:spTree>
-      <p:nvGrpSpPr>
-        <p:cNvPr id="1" name=""/>
-        <p:cNvGrpSpPr/>
-        <p:nvPr/>
-      </p:nvGrpSpPr>
-      <p:grpSpPr>
-        <a:xfrm>
-          <a:off x="0" y="0"/>
-          <a:ext cx="0" cy="0"/>
-          <a:chOff x="0" y="0"/>
-          <a:chExt cx="0" cy="0"/>
-        </a:xfrm>
-      </p:grpSpPr>
-      <p:cxnSp>
-        <p:nvCxnSpPr>
-          <p:cNvPr id="2" name="Egyenes összekötő 1">
-            <a:extLst>
-              <a:ext uri="{FF2B5EF4-FFF2-40B4-BE49-F238E27FC236}">
-                <a16:creationId xmlns:a16="http://schemas.microsoft.com/office/drawing/2014/main" id="{20EF3F3C-374B-461F-BAF4-6C213DE7C8BB}"/>
-              </a:ext>
-            </a:extLst>
-          </p:cNvPr>
-          <p:cNvCxnSpPr>
-            <a:cxnSpLocks/>
-          </p:cNvCxnSpPr>
-          <p:nvPr/>
-        </p:nvCxnSpPr>
-        <p:spPr>
-          <a:xfrm>
-            <a:off x="3205163" y="2154342"/>
-            <a:ext cx="5781675" cy="0"/>
-          </a:xfrm>
-          <a:prstGeom prst="line">
-            <a:avLst/>
-          </a:prstGeom>
-          <a:ln>
-            <a:solidFill>
-              <a:schemeClr val="tx1">
-                <a:lumMod val="50000"/>
-                <a:lumOff val="50000"/>
-              </a:schemeClr>
-            </a:solidFill>
-          </a:ln>
-        </p:spPr>
-        <p:style>
-          <a:lnRef idx="1">
-            <a:schemeClr val="accent1"/>
-          </a:lnRef>
-          <a:fillRef idx="0">
-            <a:schemeClr val="accent1"/>
-          </a:fillRef>
-          <a:effectRef idx="0">
-            <a:schemeClr val="accent1"/>
-          </a:effectRef>
-          <a:fontRef idx="minor">
-            <a:schemeClr val="tx1"/>
-          </a:fontRef>
-        </p:style>
-      </p:cxnSp>
-      <p:pic>
-        <p:nvPicPr>
-          <p:cNvPr id="3" name="Kép 2">
-            <a:extLst>
-              <a:ext uri="{FF2B5EF4-FFF2-40B4-BE49-F238E27FC236}">
-                <a16:creationId xmlns:a16="http://schemas.microsoft.com/office/drawing/2014/main" id="{FE91A941-BC8A-4E2A-B780-F3F3D6A9B3E3}"/>
-              </a:ext>
-            </a:extLst>
-          </p:cNvPr>
-          <p:cNvPicPr>
-            <a:picLocks noChangeAspect="1"/>
-          </p:cNvPicPr>
-          <p:nvPr/>
-        </p:nvPicPr>
-        <p:blipFill rotWithShape="1">
-          <a:blip r:embed="rId2">
-            <a:alphaModFix/>
-            <a:extLst>
-              <a:ext uri="{28A0092B-C50C-407E-A947-70E740481C1C}">
-                <a14:useLocalDpi xmlns:a14="http://schemas.microsoft.com/office/drawing/2010/main" val="0"/>
-              </a:ext>
-            </a:extLst>
-          </a:blip>
-          <a:srcRect l="-1" t="58555" r="1153"/>
-          <a:stretch/>
-        </p:blipFill>
-        <p:spPr>
-          <a:xfrm>
-            <a:off x="3864953" y="1462194"/>
-            <a:ext cx="4462094" cy="616623"/>
-          </a:xfrm>
-          <a:prstGeom prst="rect">
-            <a:avLst/>
-          </a:prstGeom>
-        </p:spPr>
-      </p:pic>
-      <p:pic>
-        <p:nvPicPr>
-          <p:cNvPr id="4" name="Kép 3">
-            <a:extLst>
-              <a:ext uri="{FF2B5EF4-FFF2-40B4-BE49-F238E27FC236}">
-                <a16:creationId xmlns:a16="http://schemas.microsoft.com/office/drawing/2014/main" id="{78D3DB18-E771-4DF0-84FA-206E8FA41883}"/>
-              </a:ext>
-            </a:extLst>
-          </p:cNvPr>
-          <p:cNvPicPr>
-            <a:picLocks noChangeAspect="1"/>
-          </p:cNvPicPr>
-          <p:nvPr/>
-        </p:nvPicPr>
-        <p:blipFill rotWithShape="1">
-          <a:blip r:embed="rId2">
-            <a:alphaModFix/>
-            <a:extLst>
-              <a:ext uri="{28A0092B-C50C-407E-A947-70E740481C1C}">
-                <a14:useLocalDpi xmlns:a14="http://schemas.microsoft.com/office/drawing/2010/main" val="0"/>
-              </a:ext>
-            </a:extLst>
-          </a:blip>
-          <a:srcRect l="-1" r="-295" b="38896"/>
-          <a:stretch/>
-        </p:blipFill>
-        <p:spPr>
-          <a:xfrm>
-            <a:off x="3817995" y="581028"/>
-            <a:ext cx="4556011" cy="914838"/>
-          </a:xfrm>
-          <a:prstGeom prst="rect">
-            <a:avLst/>
-          </a:prstGeom>
-        </p:spPr>
-      </p:pic>
-      <p:sp>
-        <p:nvSpPr>
-          <p:cNvPr id="5" name="Cím 1">
-            <a:extLst>
-              <a:ext uri="{FF2B5EF4-FFF2-40B4-BE49-F238E27FC236}">
-                <a16:creationId xmlns:a16="http://schemas.microsoft.com/office/drawing/2014/main" id="{175A5A3F-6F8F-4002-ADBD-CD8C93ECEEE1}"/>
+                <a16:creationId xmlns:a16="http://schemas.microsoft.com/office/drawing/2014/main" id="{654E07C9-ACD1-4AF5-9ECE-29158423F871}"/>
               </a:ext>
             </a:extLst>
           </p:cNvPr>
@@ -7570,784 +6142,8 @@
         </p:nvSpPr>
         <p:spPr>
           <a:xfrm>
-            <a:off x="1066800" y="2703622"/>
-            <a:ext cx="10058400" cy="1450757"/>
-          </a:xfrm>
-          <a:prstGeom prst="rect">
-            <a:avLst/>
-          </a:prstGeom>
-        </p:spPr>
-        <p:txBody>
-          <a:bodyPr anchor="ctr"/>
-          <a:lstStyle>
-            <a:lvl1pPr algn="l" defTabSz="914400" rtl="0" eaLnBrk="1" latinLnBrk="0" hangingPunct="1">
-              <a:lnSpc>
-                <a:spcPct val="85000"/>
-              </a:lnSpc>
-              <a:spcBef>
-                <a:spcPct val="0"/>
-              </a:spcBef>
-              <a:buNone/>
-              <a:defRPr sz="4800" kern="1200" spc="-50" baseline="0">
-                <a:solidFill>
-                  <a:schemeClr val="tx1">
-                    <a:lumMod val="75000"/>
-                    <a:lumOff val="25000"/>
-                  </a:schemeClr>
-                </a:solidFill>
-                <a:latin typeface="+mj-lt"/>
-                <a:ea typeface="+mj-ea"/>
-                <a:cs typeface="+mj-cs"/>
-              </a:defRPr>
-            </a:lvl1pPr>
-          </a:lstStyle>
-          <a:p>
-            <a:pPr algn="ctr"/>
-            <a:r>
-              <a:rPr lang="hu-HU" sz="6000" b="1" dirty="0">
-                <a:latin typeface="Bahnschrift SemiBold" panose="020B0502040204020203" pitchFamily="34" charset="0"/>
-              </a:rPr>
-              <a:t>Kérdések</a:t>
-            </a:r>
-          </a:p>
-        </p:txBody>
-      </p:sp>
-      <p:pic>
-        <p:nvPicPr>
-          <p:cNvPr id="12" name="Kép 11">
-            <a:extLst>
-              <a:ext uri="{FF2B5EF4-FFF2-40B4-BE49-F238E27FC236}">
-                <a16:creationId xmlns:a16="http://schemas.microsoft.com/office/drawing/2014/main" id="{0D5DF80E-C3F6-4A3A-98C9-825EEE99BBF4}"/>
-              </a:ext>
-            </a:extLst>
-          </p:cNvPr>
-          <p:cNvPicPr>
-            <a:picLocks noChangeAspect="1"/>
-          </p:cNvPicPr>
-          <p:nvPr/>
-        </p:nvPicPr>
-        <p:blipFill rotWithShape="1">
-          <a:blip r:embed="rId3">
-            <a:extLst>
-              <a:ext uri="{28A0092B-C50C-407E-A947-70E740481C1C}">
-                <a14:useLocalDpi xmlns:a14="http://schemas.microsoft.com/office/drawing/2010/main" val="0"/>
-              </a:ext>
-            </a:extLst>
-          </a:blip>
-          <a:srcRect l="16625" r="14640"/>
-          <a:stretch/>
-        </p:blipFill>
-        <p:spPr>
-          <a:xfrm rot="6074309">
-            <a:off x="253294" y="393819"/>
-            <a:ext cx="1804052" cy="1476375"/>
-          </a:xfrm>
-          <a:prstGeom prst="rect">
-            <a:avLst/>
-          </a:prstGeom>
-        </p:spPr>
-      </p:pic>
-      <p:pic>
-        <p:nvPicPr>
-          <p:cNvPr id="13" name="Kép 12">
-            <a:extLst>
-              <a:ext uri="{FF2B5EF4-FFF2-40B4-BE49-F238E27FC236}">
-                <a16:creationId xmlns:a16="http://schemas.microsoft.com/office/drawing/2014/main" id="{7AF0C74E-3043-40A3-8603-B30A83BB9DDF}"/>
-              </a:ext>
-            </a:extLst>
-          </p:cNvPr>
-          <p:cNvPicPr>
-            <a:picLocks noChangeAspect="1"/>
-          </p:cNvPicPr>
-          <p:nvPr/>
-        </p:nvPicPr>
-        <p:blipFill rotWithShape="1">
-          <a:blip r:embed="rId4">
-            <a:extLst>
-              <a:ext uri="{28A0092B-C50C-407E-A947-70E740481C1C}">
-                <a14:useLocalDpi xmlns:a14="http://schemas.microsoft.com/office/drawing/2010/main" val="0"/>
-              </a:ext>
-            </a:extLst>
-          </a:blip>
-          <a:srcRect l="31214" t="-711" r="26907" b="711"/>
-          <a:stretch/>
-        </p:blipFill>
-        <p:spPr>
-          <a:xfrm rot="4156304" flipH="1">
-            <a:off x="10842996" y="4624346"/>
-            <a:ext cx="1208569" cy="1623298"/>
-          </a:xfrm>
-          <a:prstGeom prst="rect">
-            <a:avLst/>
-          </a:prstGeom>
-        </p:spPr>
-      </p:pic>
-    </p:spTree>
-    <p:extLst>
-      <p:ext uri="{BB962C8B-B14F-4D97-AF65-F5344CB8AC3E}">
-        <p14:creationId xmlns:p14="http://schemas.microsoft.com/office/powerpoint/2010/main" val="181564950"/>
-      </p:ext>
-    </p:extLst>
-  </p:cSld>
-  <p:clrMapOvr>
-    <a:masterClrMapping/>
-  </p:clrMapOvr>
-  <mc:AlternateContent xmlns:mc="http://schemas.openxmlformats.org/markup-compatibility/2006" xmlns:p159="http://schemas.microsoft.com/office/powerpoint/2015/09/main">
-    <mc:Choice Requires="p159">
-      <p:transition xmlns:p14="http://schemas.microsoft.com/office/powerpoint/2010/main" spd="slow" p14:dur="2000">
-        <p159:morph option="byObject"/>
-      </p:transition>
-    </mc:Choice>
-    <mc:Fallback xmlns="">
-      <p:transition spd="slow">
-        <p:fade/>
-      </p:transition>
-    </mc:Fallback>
-  </mc:AlternateContent>
-  <p:timing>
-    <p:tnLst>
-      <p:par>
-        <p:cTn id="1" dur="indefinite" restart="never" nodeType="tmRoot">
-          <p:childTnLst>
-            <p:seq concurrent="1" nextAc="seek">
-              <p:cTn id="2" dur="indefinite" nodeType="mainSeq">
-                <p:childTnLst>
-                  <p:par>
-                    <p:cTn id="3" fill="hold">
-                      <p:stCondLst>
-                        <p:cond delay="indefinite"/>
-                        <p:cond evt="onBegin" delay="0">
-                          <p:tn val="2"/>
-                        </p:cond>
-                      </p:stCondLst>
-                      <p:childTnLst>
-                        <p:par>
-                          <p:cTn id="4" fill="hold">
-                            <p:stCondLst>
-                              <p:cond delay="0"/>
-                            </p:stCondLst>
-                            <p:childTnLst>
-                              <p:par>
-                                <p:cTn id="5" presetID="10" presetClass="entr" presetSubtype="0" fill="hold" nodeType="withEffect">
-                                  <p:stCondLst>
-                                    <p:cond delay="0"/>
-                                  </p:stCondLst>
-                                  <p:childTnLst>
-                                    <p:set>
-                                      <p:cBhvr>
-                                        <p:cTn id="6" dur="1" fill="hold">
-                                          <p:stCondLst>
-                                            <p:cond delay="0"/>
-                                          </p:stCondLst>
-                                        </p:cTn>
-                                        <p:tgtEl>
-                                          <p:spTgt spid="12"/>
-                                        </p:tgtEl>
-                                        <p:attrNameLst>
-                                          <p:attrName>style.visibility</p:attrName>
-                                        </p:attrNameLst>
-                                      </p:cBhvr>
-                                      <p:to>
-                                        <p:strVal val="visible"/>
-                                      </p:to>
-                                    </p:set>
-                                    <p:animEffect transition="in" filter="fade">
-                                      <p:cBhvr>
-                                        <p:cTn id="7" dur="500"/>
-                                        <p:tgtEl>
-                                          <p:spTgt spid="12"/>
-                                        </p:tgtEl>
-                                      </p:cBhvr>
-                                    </p:animEffect>
-                                  </p:childTnLst>
-                                </p:cTn>
-                              </p:par>
-                              <p:par>
-                                <p:cTn id="8" presetID="10" presetClass="entr" presetSubtype="0" fill="hold" nodeType="withEffect">
-                                  <p:stCondLst>
-                                    <p:cond delay="0"/>
-                                  </p:stCondLst>
-                                  <p:childTnLst>
-                                    <p:set>
-                                      <p:cBhvr>
-                                        <p:cTn id="9" dur="1" fill="hold">
-                                          <p:stCondLst>
-                                            <p:cond delay="0"/>
-                                          </p:stCondLst>
-                                        </p:cTn>
-                                        <p:tgtEl>
-                                          <p:spTgt spid="13"/>
-                                        </p:tgtEl>
-                                        <p:attrNameLst>
-                                          <p:attrName>style.visibility</p:attrName>
-                                        </p:attrNameLst>
-                                      </p:cBhvr>
-                                      <p:to>
-                                        <p:strVal val="visible"/>
-                                      </p:to>
-                                    </p:set>
-                                    <p:animEffect transition="in" filter="fade">
-                                      <p:cBhvr>
-                                        <p:cTn id="10" dur="500"/>
-                                        <p:tgtEl>
-                                          <p:spTgt spid="13"/>
-                                        </p:tgtEl>
-                                      </p:cBhvr>
-                                    </p:animEffect>
-                                  </p:childTnLst>
-                                </p:cTn>
-                              </p:par>
-                            </p:childTnLst>
-                          </p:cTn>
-                        </p:par>
-                      </p:childTnLst>
-                    </p:cTn>
-                  </p:par>
-                </p:childTnLst>
-              </p:cTn>
-              <p:prevCondLst>
-                <p:cond evt="onPrev" delay="0">
-                  <p:tgtEl>
-                    <p:sldTgt/>
-                  </p:tgtEl>
-                </p:cond>
-              </p:prevCondLst>
-              <p:nextCondLst>
-                <p:cond evt="onNext" delay="0">
-                  <p:tgtEl>
-                    <p:sldTgt/>
-                  </p:tgtEl>
-                </p:cond>
-              </p:nextCondLst>
-            </p:seq>
-          </p:childTnLst>
-        </p:cTn>
-      </p:par>
-    </p:tnLst>
-  </p:timing>
-</p:sld>
-</file>
-
-<file path=ppt/slides/slide19.xml><?xml version="1.0" encoding="utf-8"?>
-<p:sld xmlns:a="http://schemas.openxmlformats.org/drawingml/2006/main" xmlns:r="http://schemas.openxmlformats.org/officeDocument/2006/relationships" xmlns:p="http://schemas.openxmlformats.org/presentationml/2006/main">
-  <p:cSld>
-    <p:bg>
-      <p:bgPr>
-        <a:solidFill>
-          <a:srgbClr val="FDF7E9"/>
-        </a:solidFill>
-        <a:effectLst/>
-      </p:bgPr>
-    </p:bg>
-    <p:spTree>
-      <p:nvGrpSpPr>
-        <p:cNvPr id="1" name=""/>
-        <p:cNvGrpSpPr/>
-        <p:nvPr/>
-      </p:nvGrpSpPr>
-      <p:grpSpPr>
-        <a:xfrm>
-          <a:off x="0" y="0"/>
-          <a:ext cx="0" cy="0"/>
-          <a:chOff x="0" y="0"/>
-          <a:chExt cx="0" cy="0"/>
-        </a:xfrm>
-      </p:grpSpPr>
-      <p:cxnSp>
-        <p:nvCxnSpPr>
-          <p:cNvPr id="2" name="Egyenes összekötő 1">
-            <a:extLst>
-              <a:ext uri="{FF2B5EF4-FFF2-40B4-BE49-F238E27FC236}">
-                <a16:creationId xmlns:a16="http://schemas.microsoft.com/office/drawing/2014/main" id="{20EF3F3C-374B-461F-BAF4-6C213DE7C8BB}"/>
-              </a:ext>
-            </a:extLst>
-          </p:cNvPr>
-          <p:cNvCxnSpPr>
-            <a:cxnSpLocks/>
-          </p:cNvCxnSpPr>
-          <p:nvPr/>
-        </p:nvCxnSpPr>
-        <p:spPr>
-          <a:xfrm>
-            <a:off x="3205163" y="2154342"/>
-            <a:ext cx="5781675" cy="0"/>
-          </a:xfrm>
-          <a:prstGeom prst="line">
-            <a:avLst/>
-          </a:prstGeom>
-          <a:ln>
-            <a:solidFill>
-              <a:schemeClr val="tx1">
-                <a:lumMod val="50000"/>
-                <a:lumOff val="50000"/>
-              </a:schemeClr>
-            </a:solidFill>
-          </a:ln>
-        </p:spPr>
-        <p:style>
-          <a:lnRef idx="1">
-            <a:schemeClr val="accent1"/>
-          </a:lnRef>
-          <a:fillRef idx="0">
-            <a:schemeClr val="accent1"/>
-          </a:fillRef>
-          <a:effectRef idx="0">
-            <a:schemeClr val="accent1"/>
-          </a:effectRef>
-          <a:fontRef idx="minor">
-            <a:schemeClr val="tx1"/>
-          </a:fontRef>
-        </p:style>
-      </p:cxnSp>
-      <p:pic>
-        <p:nvPicPr>
-          <p:cNvPr id="3" name="Kép 2">
-            <a:extLst>
-              <a:ext uri="{FF2B5EF4-FFF2-40B4-BE49-F238E27FC236}">
-                <a16:creationId xmlns:a16="http://schemas.microsoft.com/office/drawing/2014/main" id="{FE91A941-BC8A-4E2A-B780-F3F3D6A9B3E3}"/>
-              </a:ext>
-            </a:extLst>
-          </p:cNvPr>
-          <p:cNvPicPr>
-            <a:picLocks noChangeAspect="1"/>
-          </p:cNvPicPr>
-          <p:nvPr/>
-        </p:nvPicPr>
-        <p:blipFill rotWithShape="1">
-          <a:blip r:embed="rId2">
-            <a:alphaModFix/>
-            <a:extLst>
-              <a:ext uri="{28A0092B-C50C-407E-A947-70E740481C1C}">
-                <a14:useLocalDpi xmlns:a14="http://schemas.microsoft.com/office/drawing/2010/main" val="0"/>
-              </a:ext>
-            </a:extLst>
-          </a:blip>
-          <a:srcRect l="-1" t="58555" r="1153"/>
-          <a:stretch/>
-        </p:blipFill>
-        <p:spPr>
-          <a:xfrm>
-            <a:off x="3864953" y="1462194"/>
-            <a:ext cx="4462094" cy="616623"/>
-          </a:xfrm>
-          <a:prstGeom prst="rect">
-            <a:avLst/>
-          </a:prstGeom>
-        </p:spPr>
-      </p:pic>
-      <p:pic>
-        <p:nvPicPr>
-          <p:cNvPr id="4" name="Kép 3">
-            <a:extLst>
-              <a:ext uri="{FF2B5EF4-FFF2-40B4-BE49-F238E27FC236}">
-                <a16:creationId xmlns:a16="http://schemas.microsoft.com/office/drawing/2014/main" id="{78D3DB18-E771-4DF0-84FA-206E8FA41883}"/>
-              </a:ext>
-            </a:extLst>
-          </p:cNvPr>
-          <p:cNvPicPr>
-            <a:picLocks noChangeAspect="1"/>
-          </p:cNvPicPr>
-          <p:nvPr/>
-        </p:nvPicPr>
-        <p:blipFill rotWithShape="1">
-          <a:blip r:embed="rId2">
-            <a:alphaModFix/>
-            <a:extLst>
-              <a:ext uri="{28A0092B-C50C-407E-A947-70E740481C1C}">
-                <a14:useLocalDpi xmlns:a14="http://schemas.microsoft.com/office/drawing/2010/main" val="0"/>
-              </a:ext>
-            </a:extLst>
-          </a:blip>
-          <a:srcRect l="-1" r="-295" b="38896"/>
-          <a:stretch/>
-        </p:blipFill>
-        <p:spPr>
-          <a:xfrm>
-            <a:off x="3817995" y="581028"/>
-            <a:ext cx="4556011" cy="914838"/>
-          </a:xfrm>
-          <a:prstGeom prst="rect">
-            <a:avLst/>
-          </a:prstGeom>
-        </p:spPr>
-      </p:pic>
-      <p:sp>
-        <p:nvSpPr>
-          <p:cNvPr id="5" name="Cím 1">
-            <a:extLst>
-              <a:ext uri="{FF2B5EF4-FFF2-40B4-BE49-F238E27FC236}">
-                <a16:creationId xmlns:a16="http://schemas.microsoft.com/office/drawing/2014/main" id="{175A5A3F-6F8F-4002-ADBD-CD8C93ECEEE1}"/>
-              </a:ext>
-            </a:extLst>
-          </p:cNvPr>
-          <p:cNvSpPr txBox="1">
-            <a:spLocks/>
-          </p:cNvSpPr>
-          <p:nvPr/>
-        </p:nvSpPr>
-        <p:spPr>
-          <a:xfrm>
-            <a:off x="1066800" y="2703622"/>
-            <a:ext cx="10058400" cy="1450757"/>
-          </a:xfrm>
-          <a:prstGeom prst="rect">
-            <a:avLst/>
-          </a:prstGeom>
-        </p:spPr>
-        <p:txBody>
-          <a:bodyPr anchor="ctr"/>
-          <a:lstStyle>
-            <a:lvl1pPr algn="l" defTabSz="914400" rtl="0" eaLnBrk="1" latinLnBrk="0" hangingPunct="1">
-              <a:lnSpc>
-                <a:spcPct val="85000"/>
-              </a:lnSpc>
-              <a:spcBef>
-                <a:spcPct val="0"/>
-              </a:spcBef>
-              <a:buNone/>
-              <a:defRPr sz="4800" kern="1200" spc="-50" baseline="0">
-                <a:solidFill>
-                  <a:schemeClr val="tx1">
-                    <a:lumMod val="75000"/>
-                    <a:lumOff val="25000"/>
-                  </a:schemeClr>
-                </a:solidFill>
-                <a:latin typeface="+mj-lt"/>
-                <a:ea typeface="+mj-ea"/>
-                <a:cs typeface="+mj-cs"/>
-              </a:defRPr>
-            </a:lvl1pPr>
-          </a:lstStyle>
-          <a:p>
-            <a:pPr algn="ctr"/>
-            <a:r>
-              <a:rPr lang="hu-HU" sz="6000" b="1" dirty="0">
-                <a:latin typeface="Bahnschrift SemiBold" panose="020B0502040204020203" pitchFamily="34" charset="0"/>
-              </a:rPr>
-              <a:t>Köszönjük a figyelmet</a:t>
-            </a:r>
-          </a:p>
-        </p:txBody>
-      </p:sp>
-      <p:pic>
-        <p:nvPicPr>
-          <p:cNvPr id="12" name="Kép 11">
-            <a:extLst>
-              <a:ext uri="{FF2B5EF4-FFF2-40B4-BE49-F238E27FC236}">
-                <a16:creationId xmlns:a16="http://schemas.microsoft.com/office/drawing/2014/main" id="{0D5DF80E-C3F6-4A3A-98C9-825EEE99BBF4}"/>
-              </a:ext>
-            </a:extLst>
-          </p:cNvPr>
-          <p:cNvPicPr>
-            <a:picLocks noChangeAspect="1"/>
-          </p:cNvPicPr>
-          <p:nvPr/>
-        </p:nvPicPr>
-        <p:blipFill rotWithShape="1">
-          <a:blip r:embed="rId3">
-            <a:extLst>
-              <a:ext uri="{28A0092B-C50C-407E-A947-70E740481C1C}">
-                <a14:useLocalDpi xmlns:a14="http://schemas.microsoft.com/office/drawing/2010/main" val="0"/>
-              </a:ext>
-            </a:extLst>
-          </a:blip>
-          <a:srcRect l="16625" r="14640"/>
-          <a:stretch/>
-        </p:blipFill>
-        <p:spPr>
-          <a:xfrm rot="6074309">
-            <a:off x="253294" y="393819"/>
-            <a:ext cx="1804052" cy="1476375"/>
-          </a:xfrm>
-          <a:prstGeom prst="rect">
-            <a:avLst/>
-          </a:prstGeom>
-        </p:spPr>
-      </p:pic>
-      <p:pic>
-        <p:nvPicPr>
-          <p:cNvPr id="13" name="Kép 12">
-            <a:extLst>
-              <a:ext uri="{FF2B5EF4-FFF2-40B4-BE49-F238E27FC236}">
-                <a16:creationId xmlns:a16="http://schemas.microsoft.com/office/drawing/2014/main" id="{7AF0C74E-3043-40A3-8603-B30A83BB9DDF}"/>
-              </a:ext>
-            </a:extLst>
-          </p:cNvPr>
-          <p:cNvPicPr>
-            <a:picLocks noChangeAspect="1"/>
-          </p:cNvPicPr>
-          <p:nvPr/>
-        </p:nvPicPr>
-        <p:blipFill rotWithShape="1">
-          <a:blip r:embed="rId4">
-            <a:extLst>
-              <a:ext uri="{28A0092B-C50C-407E-A947-70E740481C1C}">
-                <a14:useLocalDpi xmlns:a14="http://schemas.microsoft.com/office/drawing/2010/main" val="0"/>
-              </a:ext>
-            </a:extLst>
-          </a:blip>
-          <a:srcRect l="31214" t="-711" r="26907" b="711"/>
-          <a:stretch/>
-        </p:blipFill>
-        <p:spPr>
-          <a:xfrm rot="4156304" flipH="1">
-            <a:off x="10842996" y="4624346"/>
-            <a:ext cx="1208569" cy="1623298"/>
-          </a:xfrm>
-          <a:prstGeom prst="rect">
-            <a:avLst/>
-          </a:prstGeom>
-        </p:spPr>
-      </p:pic>
-    </p:spTree>
-    <p:extLst>
-      <p:ext uri="{BB962C8B-B14F-4D97-AF65-F5344CB8AC3E}">
-        <p14:creationId xmlns:p14="http://schemas.microsoft.com/office/powerpoint/2010/main" val="3755244303"/>
-      </p:ext>
-    </p:extLst>
-  </p:cSld>
-  <p:clrMapOvr>
-    <a:masterClrMapping/>
-  </p:clrMapOvr>
-  <mc:AlternateContent xmlns:mc="http://schemas.openxmlformats.org/markup-compatibility/2006" xmlns:p159="http://schemas.microsoft.com/office/powerpoint/2015/09/main">
-    <mc:Choice Requires="p159">
-      <p:transition xmlns:p14="http://schemas.microsoft.com/office/powerpoint/2010/main" spd="slow" p14:dur="2000">
-        <p159:morph option="byObject"/>
-      </p:transition>
-    </mc:Choice>
-    <mc:Fallback xmlns="">
-      <p:transition spd="slow">
-        <p:fade/>
-      </p:transition>
-    </mc:Fallback>
-  </mc:AlternateContent>
-  <p:timing>
-    <p:tnLst>
-      <p:par>
-        <p:cTn id="1" dur="indefinite" restart="never" nodeType="tmRoot">
-          <p:childTnLst>
-            <p:seq concurrent="1" nextAc="seek">
-              <p:cTn id="2" dur="indefinite" nodeType="mainSeq">
-                <p:childTnLst>
-                  <p:par>
-                    <p:cTn id="3" fill="hold">
-                      <p:stCondLst>
-                        <p:cond delay="indefinite"/>
-                        <p:cond evt="onBegin" delay="0">
-                          <p:tn val="2"/>
-                        </p:cond>
-                      </p:stCondLst>
-                      <p:childTnLst>
-                        <p:par>
-                          <p:cTn id="4" fill="hold">
-                            <p:stCondLst>
-                              <p:cond delay="0"/>
-                            </p:stCondLst>
-                            <p:childTnLst>
-                              <p:par>
-                                <p:cTn id="5" presetID="10" presetClass="entr" presetSubtype="0" fill="hold" nodeType="withEffect">
-                                  <p:stCondLst>
-                                    <p:cond delay="0"/>
-                                  </p:stCondLst>
-                                  <p:childTnLst>
-                                    <p:set>
-                                      <p:cBhvr>
-                                        <p:cTn id="6" dur="1" fill="hold">
-                                          <p:stCondLst>
-                                            <p:cond delay="0"/>
-                                          </p:stCondLst>
-                                        </p:cTn>
-                                        <p:tgtEl>
-                                          <p:spTgt spid="12"/>
-                                        </p:tgtEl>
-                                        <p:attrNameLst>
-                                          <p:attrName>style.visibility</p:attrName>
-                                        </p:attrNameLst>
-                                      </p:cBhvr>
-                                      <p:to>
-                                        <p:strVal val="visible"/>
-                                      </p:to>
-                                    </p:set>
-                                    <p:animEffect transition="in" filter="fade">
-                                      <p:cBhvr>
-                                        <p:cTn id="7" dur="500"/>
-                                        <p:tgtEl>
-                                          <p:spTgt spid="12"/>
-                                        </p:tgtEl>
-                                      </p:cBhvr>
-                                    </p:animEffect>
-                                  </p:childTnLst>
-                                </p:cTn>
-                              </p:par>
-                              <p:par>
-                                <p:cTn id="8" presetID="10" presetClass="entr" presetSubtype="0" fill="hold" nodeType="withEffect">
-                                  <p:stCondLst>
-                                    <p:cond delay="0"/>
-                                  </p:stCondLst>
-                                  <p:childTnLst>
-                                    <p:set>
-                                      <p:cBhvr>
-                                        <p:cTn id="9" dur="1" fill="hold">
-                                          <p:stCondLst>
-                                            <p:cond delay="0"/>
-                                          </p:stCondLst>
-                                        </p:cTn>
-                                        <p:tgtEl>
-                                          <p:spTgt spid="13"/>
-                                        </p:tgtEl>
-                                        <p:attrNameLst>
-                                          <p:attrName>style.visibility</p:attrName>
-                                        </p:attrNameLst>
-                                      </p:cBhvr>
-                                      <p:to>
-                                        <p:strVal val="visible"/>
-                                      </p:to>
-                                    </p:set>
-                                    <p:animEffect transition="in" filter="fade">
-                                      <p:cBhvr>
-                                        <p:cTn id="10" dur="500"/>
-                                        <p:tgtEl>
-                                          <p:spTgt spid="13"/>
-                                        </p:tgtEl>
-                                      </p:cBhvr>
-                                    </p:animEffect>
-                                  </p:childTnLst>
-                                </p:cTn>
-                              </p:par>
-                            </p:childTnLst>
-                          </p:cTn>
-                        </p:par>
-                      </p:childTnLst>
-                    </p:cTn>
-                  </p:par>
-                </p:childTnLst>
-              </p:cTn>
-              <p:prevCondLst>
-                <p:cond evt="onPrev" delay="0">
-                  <p:tgtEl>
-                    <p:sldTgt/>
-                  </p:tgtEl>
-                </p:cond>
-              </p:prevCondLst>
-              <p:nextCondLst>
-                <p:cond evt="onNext" delay="0">
-                  <p:tgtEl>
-                    <p:sldTgt/>
-                  </p:tgtEl>
-                </p:cond>
-              </p:nextCondLst>
-            </p:seq>
-          </p:childTnLst>
-        </p:cTn>
-      </p:par>
-    </p:tnLst>
-  </p:timing>
-</p:sld>
-</file>
-
-<file path=ppt/slides/slide2.xml><?xml version="1.0" encoding="utf-8"?>
-<p:sld xmlns:a="http://schemas.openxmlformats.org/drawingml/2006/main" xmlns:r="http://schemas.openxmlformats.org/officeDocument/2006/relationships" xmlns:p="http://schemas.openxmlformats.org/presentationml/2006/main">
-  <p:cSld>
-    <p:bg>
-      <p:bgPr>
-        <a:solidFill>
-          <a:srgbClr val="FDF7E9"/>
-        </a:solidFill>
-        <a:effectLst/>
-      </p:bgPr>
-    </p:bg>
-    <p:spTree>
-      <p:nvGrpSpPr>
-        <p:cNvPr id="1" name=""/>
-        <p:cNvGrpSpPr/>
-        <p:nvPr/>
-      </p:nvGrpSpPr>
-      <p:grpSpPr>
-        <a:xfrm>
-          <a:off x="0" y="0"/>
-          <a:ext cx="0" cy="0"/>
-          <a:chOff x="0" y="0"/>
-          <a:chExt cx="0" cy="0"/>
-        </a:xfrm>
-      </p:grpSpPr>
-      <p:sp>
-        <p:nvSpPr>
-          <p:cNvPr id="2" name="Cím 1">
-            <a:extLst>
-              <a:ext uri="{FF2B5EF4-FFF2-40B4-BE49-F238E27FC236}">
-                <a16:creationId xmlns:a16="http://schemas.microsoft.com/office/drawing/2014/main" id="{C18830B2-00D6-4BD2-BE11-19215C420251}"/>
-              </a:ext>
-            </a:extLst>
-          </p:cNvPr>
-          <p:cNvSpPr txBox="1">
-            <a:spLocks/>
-          </p:cNvSpPr>
-          <p:nvPr/>
-        </p:nvSpPr>
-        <p:spPr>
-          <a:xfrm>
-            <a:off x="1320753" y="2904573"/>
-            <a:ext cx="9760046" cy="2006995"/>
-          </a:xfrm>
-          <a:prstGeom prst="rect">
-            <a:avLst/>
-          </a:prstGeom>
-        </p:spPr>
-        <p:txBody>
-          <a:bodyPr>
-            <a:normAutofit/>
-          </a:bodyPr>
-          <a:lstStyle>
-            <a:lvl1pPr algn="l" defTabSz="914400" rtl="0" eaLnBrk="1" latinLnBrk="0" hangingPunct="1">
-              <a:lnSpc>
-                <a:spcPct val="85000"/>
-              </a:lnSpc>
-              <a:spcBef>
-                <a:spcPct val="0"/>
-              </a:spcBef>
-              <a:buNone/>
-              <a:defRPr sz="4800" kern="1200" spc="-50" baseline="0">
-                <a:solidFill>
-                  <a:schemeClr val="tx1">
-                    <a:lumMod val="75000"/>
-                    <a:lumOff val="25000"/>
-                  </a:schemeClr>
-                </a:solidFill>
-                <a:latin typeface="+mj-lt"/>
-                <a:ea typeface="+mj-ea"/>
-                <a:cs typeface="+mj-cs"/>
-              </a:defRPr>
-            </a:lvl1pPr>
-          </a:lstStyle>
-          <a:p>
-            <a:pPr algn="ctr"/>
-            <a:r>
-              <a:rPr lang="hu-HU" sz="5400" b="1" dirty="0">
-                <a:latin typeface="Bahnschrift SemiBold" panose="020B0502040204020203" pitchFamily="34" charset="0"/>
-              </a:rPr>
-              <a:t>Iskolai étkezéskezelő rendszer</a:t>
-            </a:r>
-          </a:p>
-        </p:txBody>
-      </p:sp>
-      <p:sp>
-        <p:nvSpPr>
-          <p:cNvPr id="3" name="Alcím 2">
-            <a:extLst>
-              <a:ext uri="{FF2B5EF4-FFF2-40B4-BE49-F238E27FC236}">
-                <a16:creationId xmlns:a16="http://schemas.microsoft.com/office/drawing/2014/main" id="{A2286F2D-71DE-4954-8C64-8E9991C98150}"/>
-              </a:ext>
-            </a:extLst>
-          </p:cNvPr>
-          <p:cNvSpPr txBox="1">
-            <a:spLocks/>
-          </p:cNvSpPr>
-          <p:nvPr/>
-        </p:nvSpPr>
-        <p:spPr>
-          <a:xfrm>
-            <a:off x="3598026" y="3785841"/>
-            <a:ext cx="4995949" cy="571500"/>
+            <a:off x="1097280" y="1845734"/>
+            <a:ext cx="10058400" cy="4023360"/>
           </a:xfrm>
           <a:prstGeom prst="rect">
             <a:avLst/>
@@ -8602,361 +6398,160 @@
             </a:lvl9pPr>
           </a:lstStyle>
           <a:p>
-            <a:pPr algn="ctr"/>
-            <a:r>
-              <a:rPr lang="hu-HU" i="1" cap="all" spc="100" dirty="0">
-                <a:solidFill>
-                  <a:srgbClr val="BD582C"/>
-                </a:solidFill>
-                <a:uFill>
-                  <a:solidFill>
-                    <a:srgbClr val="BD582C"/>
-                  </a:solidFill>
-                </a:uFill>
-                <a:latin typeface="+mj-lt"/>
+            <a:pPr lvl="1">
+              <a:lnSpc>
+                <a:spcPct val="150000"/>
+              </a:lnSpc>
+              <a:buFont typeface="Arial" panose="020B0604020202020204" pitchFamily="34" charset="0"/>
+              <a:buChar char="•"/>
+            </a:pPr>
+            <a:r>
+              <a:rPr lang="hu-HU" sz="2000" dirty="0">
+                <a:latin typeface="Bahnschrift Light" panose="020B0502040204020203" pitchFamily="34" charset="0"/>
               </a:rPr>
-              <a:t>Vizsgaremek bemutatása</a:t>
-            </a:r>
+              <a:t>Mobilalkalmazás</a:t>
+            </a:r>
+          </a:p>
+          <a:p>
+            <a:pPr lvl="1">
+              <a:lnSpc>
+                <a:spcPct val="150000"/>
+              </a:lnSpc>
+              <a:buFont typeface="Arial" panose="020B0604020202020204" pitchFamily="34" charset="0"/>
+              <a:buChar char="•"/>
+            </a:pPr>
+            <a:r>
+              <a:rPr lang="hu-HU" sz="2000" dirty="0">
+                <a:latin typeface="Bahnschrift Light" panose="020B0502040204020203" pitchFamily="34" charset="0"/>
+              </a:rPr>
+              <a:t>Értesítés küldés</a:t>
+            </a:r>
+          </a:p>
+          <a:p>
+            <a:pPr lvl="1">
+              <a:lnSpc>
+                <a:spcPct val="150000"/>
+              </a:lnSpc>
+              <a:buFont typeface="Arial" panose="020B0604020202020204" pitchFamily="34" charset="0"/>
+              <a:buChar char="•"/>
+            </a:pPr>
+            <a:r>
+              <a:rPr lang="hu-HU" sz="2000" dirty="0">
+                <a:latin typeface="Bahnschrift Light" panose="020B0502040204020203" pitchFamily="34" charset="0"/>
+              </a:rPr>
+              <a:t>Több iskolára, több szolgáltatóra bontás</a:t>
+            </a:r>
+          </a:p>
+          <a:p>
+            <a:pPr lvl="1">
+              <a:lnSpc>
+                <a:spcPct val="150000"/>
+              </a:lnSpc>
+              <a:buFont typeface="Arial" panose="020B0604020202020204" pitchFamily="34" charset="0"/>
+              <a:buChar char="•"/>
+            </a:pPr>
+            <a:r>
+              <a:rPr lang="hu-HU" sz="2000" dirty="0">
+                <a:latin typeface="Bahnschrift Light" panose="020B0502040204020203" pitchFamily="34" charset="0"/>
+              </a:rPr>
+              <a:t>Ételek értékelése</a:t>
+            </a:r>
+          </a:p>
+          <a:p>
+            <a:pPr lvl="1">
+              <a:lnSpc>
+                <a:spcPct val="150000"/>
+              </a:lnSpc>
+              <a:buFont typeface="Arial" panose="020B0604020202020204" pitchFamily="34" charset="0"/>
+              <a:buChar char="•"/>
+            </a:pPr>
+            <a:r>
+              <a:rPr lang="hu-HU" sz="2000" dirty="0">
+                <a:latin typeface="Bahnschrift Light" panose="020B0502040204020203" pitchFamily="34" charset="0"/>
+              </a:rPr>
+              <a:t>Étkeztetési rend osztályokra, csoportokra bontva</a:t>
+            </a:r>
+          </a:p>
+          <a:p>
+            <a:pPr lvl="1">
+              <a:lnSpc>
+                <a:spcPct val="150000"/>
+              </a:lnSpc>
+              <a:buFont typeface="Arial" panose="020B0604020202020204" pitchFamily="34" charset="0"/>
+              <a:buChar char="•"/>
+            </a:pPr>
+            <a:r>
+              <a:rPr lang="hu-HU" sz="2000" dirty="0">
+                <a:latin typeface="Bahnschrift Light" panose="020B0502040204020203" pitchFamily="34" charset="0"/>
+              </a:rPr>
+              <a:t>Online fizetés (</a:t>
+            </a:r>
+            <a:r>
+              <a:rPr lang="hu-HU" sz="2000" dirty="0" err="1">
+                <a:latin typeface="Bahnschrift Light" panose="020B0502040204020203" pitchFamily="34" charset="0"/>
+              </a:rPr>
+              <a:t>SimplePay</a:t>
+            </a:r>
+            <a:r>
+              <a:rPr lang="hu-HU" sz="2000" dirty="0">
+                <a:latin typeface="Bahnschrift Light" panose="020B0502040204020203" pitchFamily="34" charset="0"/>
+              </a:rPr>
+              <a:t>)</a:t>
+            </a:r>
+          </a:p>
+          <a:p>
+            <a:pPr marL="201168" lvl="1" indent="0">
+              <a:buFont typeface="Calibri" pitchFamily="34" charset="0"/>
+              <a:buNone/>
+            </a:pPr>
+            <a:endParaRPr lang="hu-HU" dirty="0"/>
           </a:p>
         </p:txBody>
       </p:sp>
-      <p:pic>
-        <p:nvPicPr>
-          <p:cNvPr id="4" name="Kép 3">
+    </p:spTree>
+    <p:extLst>
+      <p:ext uri="{BB962C8B-B14F-4D97-AF65-F5344CB8AC3E}">
+        <p14:creationId xmlns:p14="http://schemas.microsoft.com/office/powerpoint/2010/main" val="1380079028"/>
+      </p:ext>
+    </p:extLst>
+  </p:cSld>
+  <p:clrMapOvr>
+    <a:masterClrMapping/>
+  </p:clrMapOvr>
+</p:sld>
+</file>
+
+<file path=ppt/slides/slide12.xml><?xml version="1.0" encoding="utf-8"?>
+<p:sld xmlns:a="http://schemas.openxmlformats.org/drawingml/2006/main" xmlns:r="http://schemas.openxmlformats.org/officeDocument/2006/relationships" xmlns:p="http://schemas.openxmlformats.org/presentationml/2006/main">
+  <p:cSld>
+    <p:bg>
+      <p:bgPr>
+        <a:solidFill>
+          <a:srgbClr val="FDF7E9"/>
+        </a:solidFill>
+        <a:effectLst/>
+      </p:bgPr>
+    </p:bg>
+    <p:spTree>
+      <p:nvGrpSpPr>
+        <p:cNvPr id="1" name=""/>
+        <p:cNvGrpSpPr/>
+        <p:nvPr/>
+      </p:nvGrpSpPr>
+      <p:grpSpPr>
+        <a:xfrm>
+          <a:off x="0" y="0"/>
+          <a:ext cx="0" cy="0"/>
+          <a:chOff x="0" y="0"/>
+          <a:chExt cx="0" cy="0"/>
+        </a:xfrm>
+      </p:grpSpPr>
+      <p:cxnSp>
+        <p:nvCxnSpPr>
+          <p:cNvPr id="2" name="Egyenes összekötő 1">
             <a:extLst>
               <a:ext uri="{FF2B5EF4-FFF2-40B4-BE49-F238E27FC236}">
-                <a16:creationId xmlns:a16="http://schemas.microsoft.com/office/drawing/2014/main" id="{7912835F-A62C-4B0D-B733-74106EBFDA26}"/>
-              </a:ext>
-            </a:extLst>
-          </p:cNvPr>
-          <p:cNvPicPr>
-            <a:picLocks noChangeAspect="1"/>
-          </p:cNvPicPr>
-          <p:nvPr/>
-        </p:nvPicPr>
-        <p:blipFill rotWithShape="1">
-          <a:blip r:embed="rId2">
-            <a:extLst>
-              <a:ext uri="{28A0092B-C50C-407E-A947-70E740481C1C}">
-                <a14:useLocalDpi xmlns:a14="http://schemas.microsoft.com/office/drawing/2010/main" val="0"/>
-              </a:ext>
-            </a:extLst>
-          </a:blip>
-          <a:srcRect t="58555"/>
-          <a:stretch/>
-        </p:blipFill>
-        <p:spPr>
-          <a:xfrm>
-            <a:off x="3750655" y="1673209"/>
-            <a:ext cx="4714591" cy="644014"/>
-          </a:xfrm>
-          <a:prstGeom prst="rect">
-            <a:avLst/>
-          </a:prstGeom>
-        </p:spPr>
-      </p:pic>
-      <p:sp>
-        <p:nvSpPr>
-          <p:cNvPr id="5" name="Alcím 2">
-            <a:extLst>
-              <a:ext uri="{FF2B5EF4-FFF2-40B4-BE49-F238E27FC236}">
-                <a16:creationId xmlns:a16="http://schemas.microsoft.com/office/drawing/2014/main" id="{3E0FCC81-0923-43B1-9ACC-080EBD94427F}"/>
-              </a:ext>
-            </a:extLst>
-          </p:cNvPr>
-          <p:cNvSpPr txBox="1">
-            <a:spLocks/>
-          </p:cNvSpPr>
-          <p:nvPr/>
-        </p:nvSpPr>
-        <p:spPr>
-          <a:xfrm>
-            <a:off x="127233" y="5659169"/>
-            <a:ext cx="5968766" cy="1050389"/>
-          </a:xfrm>
-          <a:prstGeom prst="rect">
-            <a:avLst/>
-          </a:prstGeom>
-        </p:spPr>
-        <p:txBody>
-          <a:bodyPr vert="horz" lIns="91440" tIns="45720" rIns="91440" bIns="45720" rtlCol="0">
-            <a:normAutofit/>
-          </a:bodyPr>
-          <a:lstStyle>
-            <a:lvl1pPr marL="0" indent="0" algn="l" defTabSz="914400" rtl="0" eaLnBrk="1" latinLnBrk="0" hangingPunct="1">
-              <a:lnSpc>
-                <a:spcPct val="90000"/>
-              </a:lnSpc>
-              <a:spcBef>
-                <a:spcPts val="1200"/>
-              </a:spcBef>
-              <a:spcAft>
-                <a:spcPts val="200"/>
-              </a:spcAft>
-              <a:buClr>
-                <a:schemeClr val="accent1"/>
-              </a:buClr>
-              <a:buSzPct val="100000"/>
-              <a:buFont typeface="Calibri" panose="020F0502020204030204" pitchFamily="34" charset="0"/>
-              <a:buNone/>
-              <a:defRPr sz="2400" kern="1200" cap="all" spc="200" baseline="0">
-                <a:solidFill>
-                  <a:schemeClr val="tx2"/>
-                </a:solidFill>
-                <a:latin typeface="+mj-lt"/>
-                <a:ea typeface="+mn-ea"/>
-                <a:cs typeface="+mn-cs"/>
-              </a:defRPr>
-            </a:lvl1pPr>
-            <a:lvl2pPr marL="457200" indent="0" algn="ctr" defTabSz="914400" rtl="0" eaLnBrk="1" latinLnBrk="0" hangingPunct="1">
-              <a:lnSpc>
-                <a:spcPct val="90000"/>
-              </a:lnSpc>
-              <a:spcBef>
-                <a:spcPts val="200"/>
-              </a:spcBef>
-              <a:spcAft>
-                <a:spcPts val="400"/>
-              </a:spcAft>
-              <a:buClr>
-                <a:schemeClr val="accent1"/>
-              </a:buClr>
-              <a:buFont typeface="Calibri" pitchFamily="34" charset="0"/>
-              <a:buNone/>
-              <a:defRPr sz="2400" kern="1200">
-                <a:solidFill>
-                  <a:schemeClr val="tx1">
-                    <a:lumMod val="75000"/>
-                    <a:lumOff val="25000"/>
-                  </a:schemeClr>
-                </a:solidFill>
-                <a:latin typeface="+mn-lt"/>
-                <a:ea typeface="+mn-ea"/>
-                <a:cs typeface="+mn-cs"/>
-              </a:defRPr>
-            </a:lvl2pPr>
-            <a:lvl3pPr marL="914400" indent="0" algn="ctr" defTabSz="914400" rtl="0" eaLnBrk="1" latinLnBrk="0" hangingPunct="1">
-              <a:lnSpc>
-                <a:spcPct val="90000"/>
-              </a:lnSpc>
-              <a:spcBef>
-                <a:spcPts val="200"/>
-              </a:spcBef>
-              <a:spcAft>
-                <a:spcPts val="400"/>
-              </a:spcAft>
-              <a:buClr>
-                <a:schemeClr val="accent1"/>
-              </a:buClr>
-              <a:buFont typeface="Calibri" pitchFamily="34" charset="0"/>
-              <a:buNone/>
-              <a:defRPr sz="2400" kern="1200">
-                <a:solidFill>
-                  <a:schemeClr val="tx1">
-                    <a:lumMod val="75000"/>
-                    <a:lumOff val="25000"/>
-                  </a:schemeClr>
-                </a:solidFill>
-                <a:latin typeface="+mn-lt"/>
-                <a:ea typeface="+mn-ea"/>
-                <a:cs typeface="+mn-cs"/>
-              </a:defRPr>
-            </a:lvl3pPr>
-            <a:lvl4pPr marL="1371600" indent="0" algn="ctr" defTabSz="914400" rtl="0" eaLnBrk="1" latinLnBrk="0" hangingPunct="1">
-              <a:lnSpc>
-                <a:spcPct val="90000"/>
-              </a:lnSpc>
-              <a:spcBef>
-                <a:spcPts val="200"/>
-              </a:spcBef>
-              <a:spcAft>
-                <a:spcPts val="400"/>
-              </a:spcAft>
-              <a:buClr>
-                <a:schemeClr val="accent1"/>
-              </a:buClr>
-              <a:buFont typeface="Calibri" pitchFamily="34" charset="0"/>
-              <a:buNone/>
-              <a:defRPr sz="2000" kern="1200">
-                <a:solidFill>
-                  <a:schemeClr val="tx1">
-                    <a:lumMod val="75000"/>
-                    <a:lumOff val="25000"/>
-                  </a:schemeClr>
-                </a:solidFill>
-                <a:latin typeface="+mn-lt"/>
-                <a:ea typeface="+mn-ea"/>
-                <a:cs typeface="+mn-cs"/>
-              </a:defRPr>
-            </a:lvl4pPr>
-            <a:lvl5pPr marL="1828800" indent="0" algn="ctr" defTabSz="914400" rtl="0" eaLnBrk="1" latinLnBrk="0" hangingPunct="1">
-              <a:lnSpc>
-                <a:spcPct val="90000"/>
-              </a:lnSpc>
-              <a:spcBef>
-                <a:spcPts val="200"/>
-              </a:spcBef>
-              <a:spcAft>
-                <a:spcPts val="400"/>
-              </a:spcAft>
-              <a:buClr>
-                <a:schemeClr val="accent1"/>
-              </a:buClr>
-              <a:buFont typeface="Calibri" pitchFamily="34" charset="0"/>
-              <a:buNone/>
-              <a:defRPr sz="2000" kern="1200">
-                <a:solidFill>
-                  <a:schemeClr val="tx1">
-                    <a:lumMod val="75000"/>
-                    <a:lumOff val="25000"/>
-                  </a:schemeClr>
-                </a:solidFill>
-                <a:latin typeface="+mn-lt"/>
-                <a:ea typeface="+mn-ea"/>
-                <a:cs typeface="+mn-cs"/>
-              </a:defRPr>
-            </a:lvl5pPr>
-            <a:lvl6pPr marL="2286000" indent="0" algn="ctr" defTabSz="914400" rtl="0" eaLnBrk="1" latinLnBrk="0" hangingPunct="1">
-              <a:lnSpc>
-                <a:spcPct val="90000"/>
-              </a:lnSpc>
-              <a:spcBef>
-                <a:spcPts val="200"/>
-              </a:spcBef>
-              <a:spcAft>
-                <a:spcPts val="400"/>
-              </a:spcAft>
-              <a:buClr>
-                <a:schemeClr val="accent1"/>
-              </a:buClr>
-              <a:buFont typeface="Calibri" pitchFamily="34" charset="0"/>
-              <a:buNone/>
-              <a:defRPr sz="2000" kern="1200">
-                <a:solidFill>
-                  <a:schemeClr val="tx1">
-                    <a:lumMod val="75000"/>
-                    <a:lumOff val="25000"/>
-                  </a:schemeClr>
-                </a:solidFill>
-                <a:latin typeface="+mn-lt"/>
-                <a:ea typeface="+mn-ea"/>
-                <a:cs typeface="+mn-cs"/>
-              </a:defRPr>
-            </a:lvl6pPr>
-            <a:lvl7pPr marL="2743200" indent="0" algn="ctr" defTabSz="914400" rtl="0" eaLnBrk="1" latinLnBrk="0" hangingPunct="1">
-              <a:lnSpc>
-                <a:spcPct val="90000"/>
-              </a:lnSpc>
-              <a:spcBef>
-                <a:spcPts val="200"/>
-              </a:spcBef>
-              <a:spcAft>
-                <a:spcPts val="400"/>
-              </a:spcAft>
-              <a:buClr>
-                <a:schemeClr val="accent1"/>
-              </a:buClr>
-              <a:buFont typeface="Calibri" pitchFamily="34" charset="0"/>
-              <a:buNone/>
-              <a:defRPr sz="2000" kern="1200">
-                <a:solidFill>
-                  <a:schemeClr val="tx1">
-                    <a:lumMod val="75000"/>
-                    <a:lumOff val="25000"/>
-                  </a:schemeClr>
-                </a:solidFill>
-                <a:latin typeface="+mn-lt"/>
-                <a:ea typeface="+mn-ea"/>
-                <a:cs typeface="+mn-cs"/>
-              </a:defRPr>
-            </a:lvl7pPr>
-            <a:lvl8pPr marL="3200400" indent="0" algn="ctr" defTabSz="914400" rtl="0" eaLnBrk="1" latinLnBrk="0" hangingPunct="1">
-              <a:lnSpc>
-                <a:spcPct val="90000"/>
-              </a:lnSpc>
-              <a:spcBef>
-                <a:spcPts val="200"/>
-              </a:spcBef>
-              <a:spcAft>
-                <a:spcPts val="400"/>
-              </a:spcAft>
-              <a:buClr>
-                <a:schemeClr val="accent1"/>
-              </a:buClr>
-              <a:buFont typeface="Calibri" pitchFamily="34" charset="0"/>
-              <a:buNone/>
-              <a:defRPr sz="2000" kern="1200">
-                <a:solidFill>
-                  <a:schemeClr val="tx1">
-                    <a:lumMod val="75000"/>
-                    <a:lumOff val="25000"/>
-                  </a:schemeClr>
-                </a:solidFill>
-                <a:latin typeface="+mn-lt"/>
-                <a:ea typeface="+mn-ea"/>
-                <a:cs typeface="+mn-cs"/>
-              </a:defRPr>
-            </a:lvl8pPr>
-            <a:lvl9pPr marL="3657600" indent="0" algn="ctr" defTabSz="914400" rtl="0" eaLnBrk="1" latinLnBrk="0" hangingPunct="1">
-              <a:lnSpc>
-                <a:spcPct val="90000"/>
-              </a:lnSpc>
-              <a:spcBef>
-                <a:spcPts val="200"/>
-              </a:spcBef>
-              <a:spcAft>
-                <a:spcPts val="400"/>
-              </a:spcAft>
-              <a:buClr>
-                <a:schemeClr val="accent1"/>
-              </a:buClr>
-              <a:buFont typeface="Calibri" pitchFamily="34" charset="0"/>
-              <a:buNone/>
-              <a:defRPr sz="2000" kern="1200">
-                <a:solidFill>
-                  <a:schemeClr val="tx1">
-                    <a:lumMod val="75000"/>
-                    <a:lumOff val="25000"/>
-                  </a:schemeClr>
-                </a:solidFill>
-                <a:latin typeface="+mn-lt"/>
-                <a:ea typeface="+mn-ea"/>
-                <a:cs typeface="+mn-cs"/>
-              </a:defRPr>
-            </a:lvl9pPr>
-          </a:lstStyle>
-          <a:p>
-            <a:pPr>
-              <a:lnSpc>
-                <a:spcPct val="100000"/>
-              </a:lnSpc>
-            </a:pPr>
-            <a:r>
-              <a:rPr lang="hu-HU" sz="1800" cap="none" spc="0" dirty="0">
-                <a:latin typeface="Bahnschrift Light" panose="020B0502040204020203" pitchFamily="34" charset="0"/>
-              </a:rPr>
-              <a:t>Készítették: Atkári Ariella</a:t>
-            </a:r>
-            <a:br>
-              <a:rPr lang="hu-HU" sz="1800" cap="none" spc="0" dirty="0">
-                <a:latin typeface="Bahnschrift Light" panose="020B0502040204020203" pitchFamily="34" charset="0"/>
-              </a:rPr>
-            </a:br>
-            <a:r>
-              <a:rPr lang="hu-HU" sz="1800" cap="none" spc="0" dirty="0">
-                <a:latin typeface="Bahnschrift Light" panose="020B0502040204020203" pitchFamily="34" charset="0"/>
-              </a:rPr>
-              <a:t>	      Farkas Dominik</a:t>
-            </a:r>
-          </a:p>
-        </p:txBody>
-      </p:sp>
-      <p:cxnSp>
-        <p:nvCxnSpPr>
-          <p:cNvPr id="9" name="Egyenes összekötő 8">
-            <a:extLst>
-              <a:ext uri="{FF2B5EF4-FFF2-40B4-BE49-F238E27FC236}">
-                <a16:creationId xmlns:a16="http://schemas.microsoft.com/office/drawing/2014/main" id="{670AB60B-B385-4E46-A012-AD0038CF5F38}"/>
+                <a16:creationId xmlns:a16="http://schemas.microsoft.com/office/drawing/2014/main" id="{20EF3F3C-374B-461F-BAF4-6C213DE7C8BB}"/>
               </a:ext>
             </a:extLst>
           </p:cNvPr>
@@ -8967,8 +6562,8 @@
         </p:nvCxnSpPr>
         <p:spPr>
           <a:xfrm>
-            <a:off x="2131264" y="2305176"/>
-            <a:ext cx="7953375" cy="0"/>
+            <a:off x="3205163" y="2154342"/>
+            <a:ext cx="5781675" cy="0"/>
           </a:xfrm>
           <a:prstGeom prst="line">
             <a:avLst/>
@@ -8999,10 +6594,10 @@
       </p:cxnSp>
       <p:pic>
         <p:nvPicPr>
-          <p:cNvPr id="10" name="Kép 9">
+          <p:cNvPr id="3" name="Kép 2">
             <a:extLst>
               <a:ext uri="{FF2B5EF4-FFF2-40B4-BE49-F238E27FC236}">
-                <a16:creationId xmlns:a16="http://schemas.microsoft.com/office/drawing/2014/main" id="{CB9406C6-CF11-47E5-AEFA-0BA584F8F8D2}"/>
+                <a16:creationId xmlns:a16="http://schemas.microsoft.com/office/drawing/2014/main" id="{FE91A941-BC8A-4E2A-B780-F3F3D6A9B3E3}"/>
               </a:ext>
             </a:extLst>
           </p:cNvPr>
@@ -9013,31 +6608,68 @@
         </p:nvPicPr>
         <p:blipFill rotWithShape="1">
           <a:blip r:embed="rId2">
+            <a:alphaModFix/>
             <a:extLst>
               <a:ext uri="{28A0092B-C50C-407E-A947-70E740481C1C}">
                 <a14:useLocalDpi xmlns:a14="http://schemas.microsoft.com/office/drawing/2010/main" val="0"/>
               </a:ext>
             </a:extLst>
           </a:blip>
-          <a:srcRect l="1" r="-2984" b="38896"/>
+          <a:srcRect l="-1" t="58555" r="1153"/>
           <a:stretch/>
         </p:blipFill>
         <p:spPr>
           <a:xfrm>
-            <a:off x="3738706" y="711670"/>
-            <a:ext cx="4855269" cy="949493"/>
+            <a:off x="3864953" y="1462194"/>
+            <a:ext cx="4462094" cy="616623"/>
           </a:xfrm>
           <a:prstGeom prst="rect">
             <a:avLst/>
           </a:prstGeom>
         </p:spPr>
       </p:pic>
-      <p:sp>
-        <p:nvSpPr>
-          <p:cNvPr id="11" name="Alcím 2">
+      <p:pic>
+        <p:nvPicPr>
+          <p:cNvPr id="4" name="Kép 3">
             <a:extLst>
               <a:ext uri="{FF2B5EF4-FFF2-40B4-BE49-F238E27FC236}">
-                <a16:creationId xmlns:a16="http://schemas.microsoft.com/office/drawing/2014/main" id="{7D26B0E8-7A60-4B80-8AF7-628A519872D6}"/>
+                <a16:creationId xmlns:a16="http://schemas.microsoft.com/office/drawing/2014/main" id="{78D3DB18-E771-4DF0-84FA-206E8FA41883}"/>
+              </a:ext>
+            </a:extLst>
+          </p:cNvPr>
+          <p:cNvPicPr>
+            <a:picLocks noChangeAspect="1"/>
+          </p:cNvPicPr>
+          <p:nvPr/>
+        </p:nvPicPr>
+        <p:blipFill rotWithShape="1">
+          <a:blip r:embed="rId2">
+            <a:alphaModFix/>
+            <a:extLst>
+              <a:ext uri="{28A0092B-C50C-407E-A947-70E740481C1C}">
+                <a14:useLocalDpi xmlns:a14="http://schemas.microsoft.com/office/drawing/2010/main" val="0"/>
+              </a:ext>
+            </a:extLst>
+          </a:blip>
+          <a:srcRect l="-1" r="-295" b="38896"/>
+          <a:stretch/>
+        </p:blipFill>
+        <p:spPr>
+          <a:xfrm>
+            <a:off x="3817995" y="581028"/>
+            <a:ext cx="4556011" cy="914838"/>
+          </a:xfrm>
+          <a:prstGeom prst="rect">
+            <a:avLst/>
+          </a:prstGeom>
+        </p:spPr>
+      </p:pic>
+      <p:sp>
+        <p:nvSpPr>
+          <p:cNvPr id="5" name="Cím 1">
+            <a:extLst>
+              <a:ext uri="{FF2B5EF4-FFF2-40B4-BE49-F238E27FC236}">
+                <a16:creationId xmlns:a16="http://schemas.microsoft.com/office/drawing/2014/main" id="{175A5A3F-6F8F-4002-ADBD-CD8C93ECEEE1}"/>
               </a:ext>
             </a:extLst>
           </p:cNvPr>
@@ -9048,279 +6680,542 @@
         </p:nvSpPr>
         <p:spPr>
           <a:xfrm>
-            <a:off x="10563224" y="5883809"/>
-            <a:ext cx="1628776" cy="402688"/>
+            <a:off x="1066800" y="2703622"/>
+            <a:ext cx="10058400" cy="1450757"/>
           </a:xfrm>
           <a:prstGeom prst="rect">
             <a:avLst/>
           </a:prstGeom>
         </p:spPr>
         <p:txBody>
-          <a:bodyPr vert="horz" lIns="91440" tIns="45720" rIns="91440" bIns="45720" rtlCol="0">
-            <a:normAutofit/>
-          </a:bodyPr>
+          <a:bodyPr anchor="ctr"/>
           <a:lstStyle>
-            <a:lvl1pPr marL="0" indent="0" algn="l" defTabSz="914400" rtl="0" eaLnBrk="1" latinLnBrk="0" hangingPunct="1">
+            <a:lvl1pPr algn="l" defTabSz="914400" rtl="0" eaLnBrk="1" latinLnBrk="0" hangingPunct="1">
               <a:lnSpc>
-                <a:spcPct val="90000"/>
+                <a:spcPct val="85000"/>
               </a:lnSpc>
               <a:spcBef>
-                <a:spcPts val="1200"/>
+                <a:spcPct val="0"/>
               </a:spcBef>
-              <a:spcAft>
-                <a:spcPts val="200"/>
-              </a:spcAft>
-              <a:buClr>
-                <a:schemeClr val="accent1"/>
-              </a:buClr>
-              <a:buSzPct val="100000"/>
-              <a:buFont typeface="Calibri" panose="020F0502020204030204" pitchFamily="34" charset="0"/>
               <a:buNone/>
-              <a:defRPr sz="2400" kern="1200" cap="all" spc="200" baseline="0">
-                <a:solidFill>
-                  <a:schemeClr val="tx2"/>
-                </a:solidFill>
-                <a:latin typeface="+mj-lt"/>
-                <a:ea typeface="+mn-ea"/>
-                <a:cs typeface="+mn-cs"/>
-              </a:defRPr>
-            </a:lvl1pPr>
-            <a:lvl2pPr marL="457200" indent="0" algn="ctr" defTabSz="914400" rtl="0" eaLnBrk="1" latinLnBrk="0" hangingPunct="1">
-              <a:lnSpc>
-                <a:spcPct val="90000"/>
-              </a:lnSpc>
-              <a:spcBef>
-                <a:spcPts val="200"/>
-              </a:spcBef>
-              <a:spcAft>
-                <a:spcPts val="400"/>
-              </a:spcAft>
-              <a:buClr>
-                <a:schemeClr val="accent1"/>
-              </a:buClr>
-              <a:buFont typeface="Calibri" pitchFamily="34" charset="0"/>
-              <a:buNone/>
-              <a:defRPr sz="2400" kern="1200">
+              <a:defRPr sz="4800" kern="1200" spc="-50" baseline="0">
                 <a:solidFill>
                   <a:schemeClr val="tx1">
                     <a:lumMod val="75000"/>
                     <a:lumOff val="25000"/>
                   </a:schemeClr>
                 </a:solidFill>
-                <a:latin typeface="+mn-lt"/>
-                <a:ea typeface="+mn-ea"/>
-                <a:cs typeface="+mn-cs"/>
+                <a:latin typeface="+mj-lt"/>
+                <a:ea typeface="+mj-ea"/>
+                <a:cs typeface="+mj-cs"/>
               </a:defRPr>
-            </a:lvl2pPr>
-            <a:lvl3pPr marL="914400" indent="0" algn="ctr" defTabSz="914400" rtl="0" eaLnBrk="1" latinLnBrk="0" hangingPunct="1">
+            </a:lvl1pPr>
+          </a:lstStyle>
+          <a:p>
+            <a:pPr algn="ctr"/>
+            <a:r>
+              <a:rPr lang="hu-HU" sz="6000" b="1" dirty="0" err="1">
+                <a:latin typeface="Bahnschrift SemiBold" panose="020B0502040204020203" pitchFamily="34" charset="0"/>
+              </a:rPr>
+              <a:t>Demo</a:t>
+            </a:r>
+            <a:endParaRPr lang="hu-HU" sz="6000" b="1" dirty="0">
+              <a:latin typeface="Bahnschrift SemiBold" panose="020B0502040204020203" pitchFamily="34" charset="0"/>
+            </a:endParaRPr>
+          </a:p>
+        </p:txBody>
+      </p:sp>
+      <p:pic>
+        <p:nvPicPr>
+          <p:cNvPr id="12" name="Kép 11">
+            <a:extLst>
+              <a:ext uri="{FF2B5EF4-FFF2-40B4-BE49-F238E27FC236}">
+                <a16:creationId xmlns:a16="http://schemas.microsoft.com/office/drawing/2014/main" id="{0D5DF80E-C3F6-4A3A-98C9-825EEE99BBF4}"/>
+              </a:ext>
+            </a:extLst>
+          </p:cNvPr>
+          <p:cNvPicPr>
+            <a:picLocks noChangeAspect="1"/>
+          </p:cNvPicPr>
+          <p:nvPr/>
+        </p:nvPicPr>
+        <p:blipFill rotWithShape="1">
+          <a:blip r:embed="rId3">
+            <a:extLst>
+              <a:ext uri="{28A0092B-C50C-407E-A947-70E740481C1C}">
+                <a14:useLocalDpi xmlns:a14="http://schemas.microsoft.com/office/drawing/2010/main" val="0"/>
+              </a:ext>
+            </a:extLst>
+          </a:blip>
+          <a:srcRect l="16625" r="14640"/>
+          <a:stretch/>
+        </p:blipFill>
+        <p:spPr>
+          <a:xfrm rot="6074309">
+            <a:off x="253294" y="393819"/>
+            <a:ext cx="1804052" cy="1476375"/>
+          </a:xfrm>
+          <a:prstGeom prst="rect">
+            <a:avLst/>
+          </a:prstGeom>
+        </p:spPr>
+      </p:pic>
+      <p:pic>
+        <p:nvPicPr>
+          <p:cNvPr id="13" name="Kép 12">
+            <a:extLst>
+              <a:ext uri="{FF2B5EF4-FFF2-40B4-BE49-F238E27FC236}">
+                <a16:creationId xmlns:a16="http://schemas.microsoft.com/office/drawing/2014/main" id="{7AF0C74E-3043-40A3-8603-B30A83BB9DDF}"/>
+              </a:ext>
+            </a:extLst>
+          </p:cNvPr>
+          <p:cNvPicPr>
+            <a:picLocks noChangeAspect="1"/>
+          </p:cNvPicPr>
+          <p:nvPr/>
+        </p:nvPicPr>
+        <p:blipFill rotWithShape="1">
+          <a:blip r:embed="rId4">
+            <a:extLst>
+              <a:ext uri="{28A0092B-C50C-407E-A947-70E740481C1C}">
+                <a14:useLocalDpi xmlns:a14="http://schemas.microsoft.com/office/drawing/2010/main" val="0"/>
+              </a:ext>
+            </a:extLst>
+          </a:blip>
+          <a:srcRect l="31214" t="-711" r="26907" b="711"/>
+          <a:stretch/>
+        </p:blipFill>
+        <p:spPr>
+          <a:xfrm rot="4156304" flipH="1">
+            <a:off x="10842996" y="4624346"/>
+            <a:ext cx="1208569" cy="1623298"/>
+          </a:xfrm>
+          <a:prstGeom prst="rect">
+            <a:avLst/>
+          </a:prstGeom>
+        </p:spPr>
+      </p:pic>
+    </p:spTree>
+    <p:extLst>
+      <p:ext uri="{BB962C8B-B14F-4D97-AF65-F5344CB8AC3E}">
+        <p14:creationId xmlns:p14="http://schemas.microsoft.com/office/powerpoint/2010/main" val="1876273255"/>
+      </p:ext>
+    </p:extLst>
+  </p:cSld>
+  <p:clrMapOvr>
+    <a:masterClrMapping/>
+  </p:clrMapOvr>
+  <mc:AlternateContent xmlns:mc="http://schemas.openxmlformats.org/markup-compatibility/2006" xmlns:p159="http://schemas.microsoft.com/office/powerpoint/2015/09/main">
+    <mc:Choice Requires="p159">
+      <p:transition xmlns:p14="http://schemas.microsoft.com/office/powerpoint/2010/main" spd="slow" p14:dur="2000">
+        <p159:morph option="byObject"/>
+      </p:transition>
+    </mc:Choice>
+    <mc:Fallback xmlns="">
+      <p:transition spd="slow">
+        <p:fade/>
+      </p:transition>
+    </mc:Fallback>
+  </mc:AlternateContent>
+  <p:timing>
+    <p:tnLst>
+      <p:par>
+        <p:cTn id="1" dur="indefinite" restart="never" nodeType="tmRoot">
+          <p:childTnLst>
+            <p:seq concurrent="1" nextAc="seek">
+              <p:cTn id="2" dur="indefinite" nodeType="mainSeq">
+                <p:childTnLst>
+                  <p:par>
+                    <p:cTn id="3" fill="hold">
+                      <p:stCondLst>
+                        <p:cond delay="indefinite"/>
+                        <p:cond evt="onBegin" delay="0">
+                          <p:tn val="2"/>
+                        </p:cond>
+                      </p:stCondLst>
+                      <p:childTnLst>
+                        <p:par>
+                          <p:cTn id="4" fill="hold">
+                            <p:stCondLst>
+                              <p:cond delay="0"/>
+                            </p:stCondLst>
+                            <p:childTnLst>
+                              <p:par>
+                                <p:cTn id="5" presetID="10" presetClass="entr" presetSubtype="0" fill="hold" nodeType="withEffect">
+                                  <p:stCondLst>
+                                    <p:cond delay="0"/>
+                                  </p:stCondLst>
+                                  <p:childTnLst>
+                                    <p:set>
+                                      <p:cBhvr>
+                                        <p:cTn id="6" dur="1" fill="hold">
+                                          <p:stCondLst>
+                                            <p:cond delay="0"/>
+                                          </p:stCondLst>
+                                        </p:cTn>
+                                        <p:tgtEl>
+                                          <p:spTgt spid="12"/>
+                                        </p:tgtEl>
+                                        <p:attrNameLst>
+                                          <p:attrName>style.visibility</p:attrName>
+                                        </p:attrNameLst>
+                                      </p:cBhvr>
+                                      <p:to>
+                                        <p:strVal val="visible"/>
+                                      </p:to>
+                                    </p:set>
+                                    <p:animEffect transition="in" filter="fade">
+                                      <p:cBhvr>
+                                        <p:cTn id="7" dur="500"/>
+                                        <p:tgtEl>
+                                          <p:spTgt spid="12"/>
+                                        </p:tgtEl>
+                                      </p:cBhvr>
+                                    </p:animEffect>
+                                  </p:childTnLst>
+                                </p:cTn>
+                              </p:par>
+                              <p:par>
+                                <p:cTn id="8" presetID="10" presetClass="entr" presetSubtype="0" fill="hold" nodeType="withEffect">
+                                  <p:stCondLst>
+                                    <p:cond delay="0"/>
+                                  </p:stCondLst>
+                                  <p:childTnLst>
+                                    <p:set>
+                                      <p:cBhvr>
+                                        <p:cTn id="9" dur="1" fill="hold">
+                                          <p:stCondLst>
+                                            <p:cond delay="0"/>
+                                          </p:stCondLst>
+                                        </p:cTn>
+                                        <p:tgtEl>
+                                          <p:spTgt spid="13"/>
+                                        </p:tgtEl>
+                                        <p:attrNameLst>
+                                          <p:attrName>style.visibility</p:attrName>
+                                        </p:attrNameLst>
+                                      </p:cBhvr>
+                                      <p:to>
+                                        <p:strVal val="visible"/>
+                                      </p:to>
+                                    </p:set>
+                                    <p:animEffect transition="in" filter="fade">
+                                      <p:cBhvr>
+                                        <p:cTn id="10" dur="500"/>
+                                        <p:tgtEl>
+                                          <p:spTgt spid="13"/>
+                                        </p:tgtEl>
+                                      </p:cBhvr>
+                                    </p:animEffect>
+                                  </p:childTnLst>
+                                </p:cTn>
+                              </p:par>
+                            </p:childTnLst>
+                          </p:cTn>
+                        </p:par>
+                      </p:childTnLst>
+                    </p:cTn>
+                  </p:par>
+                </p:childTnLst>
+              </p:cTn>
+              <p:prevCondLst>
+                <p:cond evt="onPrev" delay="0">
+                  <p:tgtEl>
+                    <p:sldTgt/>
+                  </p:tgtEl>
+                </p:cond>
+              </p:prevCondLst>
+              <p:nextCondLst>
+                <p:cond evt="onNext" delay="0">
+                  <p:tgtEl>
+                    <p:sldTgt/>
+                  </p:tgtEl>
+                </p:cond>
+              </p:nextCondLst>
+            </p:seq>
+          </p:childTnLst>
+        </p:cTn>
+      </p:par>
+    </p:tnLst>
+  </p:timing>
+</p:sld>
+</file>
+
+<file path=ppt/slides/slide13.xml><?xml version="1.0" encoding="utf-8"?>
+<p:sld xmlns:a="http://schemas.openxmlformats.org/drawingml/2006/main" xmlns:r="http://schemas.openxmlformats.org/officeDocument/2006/relationships" xmlns:p="http://schemas.openxmlformats.org/presentationml/2006/main">
+  <p:cSld>
+    <p:bg>
+      <p:bgPr>
+        <a:solidFill>
+          <a:srgbClr val="FDF7E9"/>
+        </a:solidFill>
+        <a:effectLst/>
+      </p:bgPr>
+    </p:bg>
+    <p:spTree>
+      <p:nvGrpSpPr>
+        <p:cNvPr id="1" name=""/>
+        <p:cNvGrpSpPr/>
+        <p:nvPr/>
+      </p:nvGrpSpPr>
+      <p:grpSpPr>
+        <a:xfrm>
+          <a:off x="0" y="0"/>
+          <a:ext cx="0" cy="0"/>
+          <a:chOff x="0" y="0"/>
+          <a:chExt cx="0" cy="0"/>
+        </a:xfrm>
+      </p:grpSpPr>
+      <p:cxnSp>
+        <p:nvCxnSpPr>
+          <p:cNvPr id="2" name="Egyenes összekötő 1">
+            <a:extLst>
+              <a:ext uri="{FF2B5EF4-FFF2-40B4-BE49-F238E27FC236}">
+                <a16:creationId xmlns:a16="http://schemas.microsoft.com/office/drawing/2014/main" id="{20EF3F3C-374B-461F-BAF4-6C213DE7C8BB}"/>
+              </a:ext>
+            </a:extLst>
+          </p:cNvPr>
+          <p:cNvCxnSpPr>
+            <a:cxnSpLocks/>
+          </p:cNvCxnSpPr>
+          <p:nvPr/>
+        </p:nvCxnSpPr>
+        <p:spPr>
+          <a:xfrm>
+            <a:off x="3205163" y="2154342"/>
+            <a:ext cx="5781675" cy="0"/>
+          </a:xfrm>
+          <a:prstGeom prst="line">
+            <a:avLst/>
+          </a:prstGeom>
+          <a:ln>
+            <a:solidFill>
+              <a:schemeClr val="tx1">
+                <a:lumMod val="50000"/>
+                <a:lumOff val="50000"/>
+              </a:schemeClr>
+            </a:solidFill>
+          </a:ln>
+        </p:spPr>
+        <p:style>
+          <a:lnRef idx="1">
+            <a:schemeClr val="accent1"/>
+          </a:lnRef>
+          <a:fillRef idx="0">
+            <a:schemeClr val="accent1"/>
+          </a:fillRef>
+          <a:effectRef idx="0">
+            <a:schemeClr val="accent1"/>
+          </a:effectRef>
+          <a:fontRef idx="minor">
+            <a:schemeClr val="tx1"/>
+          </a:fontRef>
+        </p:style>
+      </p:cxnSp>
+      <p:pic>
+        <p:nvPicPr>
+          <p:cNvPr id="3" name="Kép 2">
+            <a:extLst>
+              <a:ext uri="{FF2B5EF4-FFF2-40B4-BE49-F238E27FC236}">
+                <a16:creationId xmlns:a16="http://schemas.microsoft.com/office/drawing/2014/main" id="{FE91A941-BC8A-4E2A-B780-F3F3D6A9B3E3}"/>
+              </a:ext>
+            </a:extLst>
+          </p:cNvPr>
+          <p:cNvPicPr>
+            <a:picLocks noChangeAspect="1"/>
+          </p:cNvPicPr>
+          <p:nvPr/>
+        </p:nvPicPr>
+        <p:blipFill rotWithShape="1">
+          <a:blip r:embed="rId2">
+            <a:alphaModFix/>
+            <a:extLst>
+              <a:ext uri="{28A0092B-C50C-407E-A947-70E740481C1C}">
+                <a14:useLocalDpi xmlns:a14="http://schemas.microsoft.com/office/drawing/2010/main" val="0"/>
+              </a:ext>
+            </a:extLst>
+          </a:blip>
+          <a:srcRect l="-1" t="58555" r="1153"/>
+          <a:stretch/>
+        </p:blipFill>
+        <p:spPr>
+          <a:xfrm>
+            <a:off x="3864953" y="1462194"/>
+            <a:ext cx="4462094" cy="616623"/>
+          </a:xfrm>
+          <a:prstGeom prst="rect">
+            <a:avLst/>
+          </a:prstGeom>
+        </p:spPr>
+      </p:pic>
+      <p:pic>
+        <p:nvPicPr>
+          <p:cNvPr id="4" name="Kép 3">
+            <a:extLst>
+              <a:ext uri="{FF2B5EF4-FFF2-40B4-BE49-F238E27FC236}">
+                <a16:creationId xmlns:a16="http://schemas.microsoft.com/office/drawing/2014/main" id="{78D3DB18-E771-4DF0-84FA-206E8FA41883}"/>
+              </a:ext>
+            </a:extLst>
+          </p:cNvPr>
+          <p:cNvPicPr>
+            <a:picLocks noChangeAspect="1"/>
+          </p:cNvPicPr>
+          <p:nvPr/>
+        </p:nvPicPr>
+        <p:blipFill rotWithShape="1">
+          <a:blip r:embed="rId2">
+            <a:alphaModFix/>
+            <a:extLst>
+              <a:ext uri="{28A0092B-C50C-407E-A947-70E740481C1C}">
+                <a14:useLocalDpi xmlns:a14="http://schemas.microsoft.com/office/drawing/2010/main" val="0"/>
+              </a:ext>
+            </a:extLst>
+          </a:blip>
+          <a:srcRect l="-1" r="-295" b="38896"/>
+          <a:stretch/>
+        </p:blipFill>
+        <p:spPr>
+          <a:xfrm>
+            <a:off x="3817995" y="581028"/>
+            <a:ext cx="4556011" cy="914838"/>
+          </a:xfrm>
+          <a:prstGeom prst="rect">
+            <a:avLst/>
+          </a:prstGeom>
+        </p:spPr>
+      </p:pic>
+      <p:sp>
+        <p:nvSpPr>
+          <p:cNvPr id="5" name="Cím 1">
+            <a:extLst>
+              <a:ext uri="{FF2B5EF4-FFF2-40B4-BE49-F238E27FC236}">
+                <a16:creationId xmlns:a16="http://schemas.microsoft.com/office/drawing/2014/main" id="{175A5A3F-6F8F-4002-ADBD-CD8C93ECEEE1}"/>
+              </a:ext>
+            </a:extLst>
+          </p:cNvPr>
+          <p:cNvSpPr txBox="1">
+            <a:spLocks/>
+          </p:cNvSpPr>
+          <p:nvPr/>
+        </p:nvSpPr>
+        <p:spPr>
+          <a:xfrm>
+            <a:off x="1066800" y="2703622"/>
+            <a:ext cx="10058400" cy="1450757"/>
+          </a:xfrm>
+          <a:prstGeom prst="rect">
+            <a:avLst/>
+          </a:prstGeom>
+        </p:spPr>
+        <p:txBody>
+          <a:bodyPr anchor="ctr"/>
+          <a:lstStyle>
+            <a:lvl1pPr algn="l" defTabSz="914400" rtl="0" eaLnBrk="1" latinLnBrk="0" hangingPunct="1">
               <a:lnSpc>
-                <a:spcPct val="90000"/>
+                <a:spcPct val="85000"/>
               </a:lnSpc>
               <a:spcBef>
-                <a:spcPts val="200"/>
+                <a:spcPct val="0"/>
               </a:spcBef>
-              <a:spcAft>
-                <a:spcPts val="400"/>
-              </a:spcAft>
-              <a:buClr>
-                <a:schemeClr val="accent1"/>
-              </a:buClr>
-              <a:buFont typeface="Calibri" pitchFamily="34" charset="0"/>
               <a:buNone/>
-              <a:defRPr sz="2400" kern="1200">
+              <a:defRPr sz="4800" kern="1200" spc="-50" baseline="0">
                 <a:solidFill>
                   <a:schemeClr val="tx1">
                     <a:lumMod val="75000"/>
                     <a:lumOff val="25000"/>
                   </a:schemeClr>
                 </a:solidFill>
-                <a:latin typeface="+mn-lt"/>
-                <a:ea typeface="+mn-ea"/>
-                <a:cs typeface="+mn-cs"/>
+                <a:latin typeface="+mj-lt"/>
+                <a:ea typeface="+mj-ea"/>
+                <a:cs typeface="+mj-cs"/>
               </a:defRPr>
-            </a:lvl3pPr>
-            <a:lvl4pPr marL="1371600" indent="0" algn="ctr" defTabSz="914400" rtl="0" eaLnBrk="1" latinLnBrk="0" hangingPunct="1">
-              <a:lnSpc>
-                <a:spcPct val="90000"/>
-              </a:lnSpc>
-              <a:spcBef>
-                <a:spcPts val="200"/>
-              </a:spcBef>
-              <a:spcAft>
-                <a:spcPts val="400"/>
-              </a:spcAft>
-              <a:buClr>
-                <a:schemeClr val="accent1"/>
-              </a:buClr>
-              <a:buFont typeface="Calibri" pitchFamily="34" charset="0"/>
-              <a:buNone/>
-              <a:defRPr sz="2000" kern="1200">
-                <a:solidFill>
-                  <a:schemeClr val="tx1">
-                    <a:lumMod val="75000"/>
-                    <a:lumOff val="25000"/>
-                  </a:schemeClr>
-                </a:solidFill>
-                <a:latin typeface="+mn-lt"/>
-                <a:ea typeface="+mn-ea"/>
-                <a:cs typeface="+mn-cs"/>
-              </a:defRPr>
-            </a:lvl4pPr>
-            <a:lvl5pPr marL="1828800" indent="0" algn="ctr" defTabSz="914400" rtl="0" eaLnBrk="1" latinLnBrk="0" hangingPunct="1">
-              <a:lnSpc>
-                <a:spcPct val="90000"/>
-              </a:lnSpc>
-              <a:spcBef>
-                <a:spcPts val="200"/>
-              </a:spcBef>
-              <a:spcAft>
-                <a:spcPts val="400"/>
-              </a:spcAft>
-              <a:buClr>
-                <a:schemeClr val="accent1"/>
-              </a:buClr>
-              <a:buFont typeface="Calibri" pitchFamily="34" charset="0"/>
-              <a:buNone/>
-              <a:defRPr sz="2000" kern="1200">
-                <a:solidFill>
-                  <a:schemeClr val="tx1">
-                    <a:lumMod val="75000"/>
-                    <a:lumOff val="25000"/>
-                  </a:schemeClr>
-                </a:solidFill>
-                <a:latin typeface="+mn-lt"/>
-                <a:ea typeface="+mn-ea"/>
-                <a:cs typeface="+mn-cs"/>
-              </a:defRPr>
-            </a:lvl5pPr>
-            <a:lvl6pPr marL="2286000" indent="0" algn="ctr" defTabSz="914400" rtl="0" eaLnBrk="1" latinLnBrk="0" hangingPunct="1">
-              <a:lnSpc>
-                <a:spcPct val="90000"/>
-              </a:lnSpc>
-              <a:spcBef>
-                <a:spcPts val="200"/>
-              </a:spcBef>
-              <a:spcAft>
-                <a:spcPts val="400"/>
-              </a:spcAft>
-              <a:buClr>
-                <a:schemeClr val="accent1"/>
-              </a:buClr>
-              <a:buFont typeface="Calibri" pitchFamily="34" charset="0"/>
-              <a:buNone/>
-              <a:defRPr sz="2000" kern="1200">
-                <a:solidFill>
-                  <a:schemeClr val="tx1">
-                    <a:lumMod val="75000"/>
-                    <a:lumOff val="25000"/>
-                  </a:schemeClr>
-                </a:solidFill>
-                <a:latin typeface="+mn-lt"/>
-                <a:ea typeface="+mn-ea"/>
-                <a:cs typeface="+mn-cs"/>
-              </a:defRPr>
-            </a:lvl6pPr>
-            <a:lvl7pPr marL="2743200" indent="0" algn="ctr" defTabSz="914400" rtl="0" eaLnBrk="1" latinLnBrk="0" hangingPunct="1">
-              <a:lnSpc>
-                <a:spcPct val="90000"/>
-              </a:lnSpc>
-              <a:spcBef>
-                <a:spcPts val="200"/>
-              </a:spcBef>
-              <a:spcAft>
-                <a:spcPts val="400"/>
-              </a:spcAft>
-              <a:buClr>
-                <a:schemeClr val="accent1"/>
-              </a:buClr>
-              <a:buFont typeface="Calibri" pitchFamily="34" charset="0"/>
-              <a:buNone/>
-              <a:defRPr sz="2000" kern="1200">
-                <a:solidFill>
-                  <a:schemeClr val="tx1">
-                    <a:lumMod val="75000"/>
-                    <a:lumOff val="25000"/>
-                  </a:schemeClr>
-                </a:solidFill>
-                <a:latin typeface="+mn-lt"/>
-                <a:ea typeface="+mn-ea"/>
-                <a:cs typeface="+mn-cs"/>
-              </a:defRPr>
-            </a:lvl7pPr>
-            <a:lvl8pPr marL="3200400" indent="0" algn="ctr" defTabSz="914400" rtl="0" eaLnBrk="1" latinLnBrk="0" hangingPunct="1">
-              <a:lnSpc>
-                <a:spcPct val="90000"/>
-              </a:lnSpc>
-              <a:spcBef>
-                <a:spcPts val="200"/>
-              </a:spcBef>
-              <a:spcAft>
-                <a:spcPts val="400"/>
-              </a:spcAft>
-              <a:buClr>
-                <a:schemeClr val="accent1"/>
-              </a:buClr>
-              <a:buFont typeface="Calibri" pitchFamily="34" charset="0"/>
-              <a:buNone/>
-              <a:defRPr sz="2000" kern="1200">
-                <a:solidFill>
-                  <a:schemeClr val="tx1">
-                    <a:lumMod val="75000"/>
-                    <a:lumOff val="25000"/>
-                  </a:schemeClr>
-                </a:solidFill>
-                <a:latin typeface="+mn-lt"/>
-                <a:ea typeface="+mn-ea"/>
-                <a:cs typeface="+mn-cs"/>
-              </a:defRPr>
-            </a:lvl8pPr>
-            <a:lvl9pPr marL="3657600" indent="0" algn="ctr" defTabSz="914400" rtl="0" eaLnBrk="1" latinLnBrk="0" hangingPunct="1">
-              <a:lnSpc>
-                <a:spcPct val="90000"/>
-              </a:lnSpc>
-              <a:spcBef>
-                <a:spcPts val="200"/>
-              </a:spcBef>
-              <a:spcAft>
-                <a:spcPts val="400"/>
-              </a:spcAft>
-              <a:buClr>
-                <a:schemeClr val="accent1"/>
-              </a:buClr>
-              <a:buFont typeface="Calibri" pitchFamily="34" charset="0"/>
-              <a:buNone/>
-              <a:defRPr sz="2000" kern="1200">
-                <a:solidFill>
-                  <a:schemeClr val="tx1">
-                    <a:lumMod val="75000"/>
-                    <a:lumOff val="25000"/>
-                  </a:schemeClr>
-                </a:solidFill>
-                <a:latin typeface="+mn-lt"/>
-                <a:ea typeface="+mn-ea"/>
-                <a:cs typeface="+mn-cs"/>
-              </a:defRPr>
-            </a:lvl9pPr>
+            </a:lvl1pPr>
           </a:lstStyle>
           <a:p>
-            <a:pPr>
-              <a:lnSpc>
-                <a:spcPct val="100000"/>
-              </a:lnSpc>
-            </a:pPr>
-            <a:r>
-              <a:rPr lang="hu-HU" sz="1800" cap="none" spc="0" dirty="0">
-                <a:latin typeface="Bahnschrift Light" panose="020B0502040204020203" pitchFamily="34" charset="0"/>
+            <a:pPr algn="ctr"/>
+            <a:r>
+              <a:rPr lang="hu-HU" sz="6000" b="1" dirty="0">
+                <a:latin typeface="Bahnschrift SemiBold" panose="020B0502040204020203" pitchFamily="34" charset="0"/>
               </a:rPr>
-              <a:t>2026. 03. 03</a:t>
+              <a:t>Kérdések</a:t>
             </a:r>
           </a:p>
         </p:txBody>
       </p:sp>
+      <p:pic>
+        <p:nvPicPr>
+          <p:cNvPr id="12" name="Kép 11">
+            <a:extLst>
+              <a:ext uri="{FF2B5EF4-FFF2-40B4-BE49-F238E27FC236}">
+                <a16:creationId xmlns:a16="http://schemas.microsoft.com/office/drawing/2014/main" id="{0D5DF80E-C3F6-4A3A-98C9-825EEE99BBF4}"/>
+              </a:ext>
+            </a:extLst>
+          </p:cNvPr>
+          <p:cNvPicPr>
+            <a:picLocks noChangeAspect="1"/>
+          </p:cNvPicPr>
+          <p:nvPr/>
+        </p:nvPicPr>
+        <p:blipFill rotWithShape="1">
+          <a:blip r:embed="rId3">
+            <a:extLst>
+              <a:ext uri="{28A0092B-C50C-407E-A947-70E740481C1C}">
+                <a14:useLocalDpi xmlns:a14="http://schemas.microsoft.com/office/drawing/2010/main" val="0"/>
+              </a:ext>
+            </a:extLst>
+          </a:blip>
+          <a:srcRect l="16625" r="14640"/>
+          <a:stretch/>
+        </p:blipFill>
+        <p:spPr>
+          <a:xfrm rot="6074309">
+            <a:off x="253294" y="393819"/>
+            <a:ext cx="1804052" cy="1476375"/>
+          </a:xfrm>
+          <a:prstGeom prst="rect">
+            <a:avLst/>
+          </a:prstGeom>
+        </p:spPr>
+      </p:pic>
+      <p:pic>
+        <p:nvPicPr>
+          <p:cNvPr id="13" name="Kép 12">
+            <a:extLst>
+              <a:ext uri="{FF2B5EF4-FFF2-40B4-BE49-F238E27FC236}">
+                <a16:creationId xmlns:a16="http://schemas.microsoft.com/office/drawing/2014/main" id="{7AF0C74E-3043-40A3-8603-B30A83BB9DDF}"/>
+              </a:ext>
+            </a:extLst>
+          </p:cNvPr>
+          <p:cNvPicPr>
+            <a:picLocks noChangeAspect="1"/>
+          </p:cNvPicPr>
+          <p:nvPr/>
+        </p:nvPicPr>
+        <p:blipFill rotWithShape="1">
+          <a:blip r:embed="rId4">
+            <a:extLst>
+              <a:ext uri="{28A0092B-C50C-407E-A947-70E740481C1C}">
+                <a14:useLocalDpi xmlns:a14="http://schemas.microsoft.com/office/drawing/2010/main" val="0"/>
+              </a:ext>
+            </a:extLst>
+          </a:blip>
+          <a:srcRect l="31214" t="-711" r="26907" b="711"/>
+          <a:stretch/>
+        </p:blipFill>
+        <p:spPr>
+          <a:xfrm rot="4156304" flipH="1">
+            <a:off x="10842996" y="4624346"/>
+            <a:ext cx="1208569" cy="1623298"/>
+          </a:xfrm>
+          <a:prstGeom prst="rect">
+            <a:avLst/>
+          </a:prstGeom>
+        </p:spPr>
+      </p:pic>
     </p:spTree>
     <p:extLst>
       <p:ext uri="{BB962C8B-B14F-4D97-AF65-F5344CB8AC3E}">
-        <p14:creationId xmlns:p14="http://schemas.microsoft.com/office/powerpoint/2010/main" val="3133121184"/>
+        <p14:creationId xmlns:p14="http://schemas.microsoft.com/office/powerpoint/2010/main" val="181564950"/>
       </p:ext>
     </p:extLst>
   </p:cSld>
@@ -9330,7 +7225,291 @@
 </p:sld>
 </file>
 
-<file path=ppt/slides/slide3.xml><?xml version="1.0" encoding="utf-8"?>
+<file path=ppt/slides/slide14.xml><?xml version="1.0" encoding="utf-8"?>
+<p:sld xmlns:a="http://schemas.openxmlformats.org/drawingml/2006/main" xmlns:r="http://schemas.openxmlformats.org/officeDocument/2006/relationships" xmlns:p="http://schemas.openxmlformats.org/presentationml/2006/main">
+  <p:cSld>
+    <p:bg>
+      <p:bgPr>
+        <a:solidFill>
+          <a:srgbClr val="FDF7E9"/>
+        </a:solidFill>
+        <a:effectLst/>
+      </p:bgPr>
+    </p:bg>
+    <p:spTree>
+      <p:nvGrpSpPr>
+        <p:cNvPr id="1" name=""/>
+        <p:cNvGrpSpPr/>
+        <p:nvPr/>
+      </p:nvGrpSpPr>
+      <p:grpSpPr>
+        <a:xfrm>
+          <a:off x="0" y="0"/>
+          <a:ext cx="0" cy="0"/>
+          <a:chOff x="0" y="0"/>
+          <a:chExt cx="0" cy="0"/>
+        </a:xfrm>
+      </p:grpSpPr>
+      <p:cxnSp>
+        <p:nvCxnSpPr>
+          <p:cNvPr id="2" name="Egyenes összekötő 1">
+            <a:extLst>
+              <a:ext uri="{FF2B5EF4-FFF2-40B4-BE49-F238E27FC236}">
+                <a16:creationId xmlns:a16="http://schemas.microsoft.com/office/drawing/2014/main" id="{20EF3F3C-374B-461F-BAF4-6C213DE7C8BB}"/>
+              </a:ext>
+            </a:extLst>
+          </p:cNvPr>
+          <p:cNvCxnSpPr>
+            <a:cxnSpLocks/>
+          </p:cNvCxnSpPr>
+          <p:nvPr/>
+        </p:nvCxnSpPr>
+        <p:spPr>
+          <a:xfrm>
+            <a:off x="3205163" y="2154342"/>
+            <a:ext cx="5781675" cy="0"/>
+          </a:xfrm>
+          <a:prstGeom prst="line">
+            <a:avLst/>
+          </a:prstGeom>
+          <a:ln>
+            <a:solidFill>
+              <a:schemeClr val="tx1">
+                <a:lumMod val="50000"/>
+                <a:lumOff val="50000"/>
+              </a:schemeClr>
+            </a:solidFill>
+          </a:ln>
+        </p:spPr>
+        <p:style>
+          <a:lnRef idx="1">
+            <a:schemeClr val="accent1"/>
+          </a:lnRef>
+          <a:fillRef idx="0">
+            <a:schemeClr val="accent1"/>
+          </a:fillRef>
+          <a:effectRef idx="0">
+            <a:schemeClr val="accent1"/>
+          </a:effectRef>
+          <a:fontRef idx="minor">
+            <a:schemeClr val="tx1"/>
+          </a:fontRef>
+        </p:style>
+      </p:cxnSp>
+      <p:pic>
+        <p:nvPicPr>
+          <p:cNvPr id="3" name="Kép 2">
+            <a:extLst>
+              <a:ext uri="{FF2B5EF4-FFF2-40B4-BE49-F238E27FC236}">
+                <a16:creationId xmlns:a16="http://schemas.microsoft.com/office/drawing/2014/main" id="{FE91A941-BC8A-4E2A-B780-F3F3D6A9B3E3}"/>
+              </a:ext>
+            </a:extLst>
+          </p:cNvPr>
+          <p:cNvPicPr>
+            <a:picLocks noChangeAspect="1"/>
+          </p:cNvPicPr>
+          <p:nvPr/>
+        </p:nvPicPr>
+        <p:blipFill rotWithShape="1">
+          <a:blip r:embed="rId2">
+            <a:alphaModFix/>
+            <a:extLst>
+              <a:ext uri="{28A0092B-C50C-407E-A947-70E740481C1C}">
+                <a14:useLocalDpi xmlns:a14="http://schemas.microsoft.com/office/drawing/2010/main" val="0"/>
+              </a:ext>
+            </a:extLst>
+          </a:blip>
+          <a:srcRect l="-1" t="58555" r="1153"/>
+          <a:stretch/>
+        </p:blipFill>
+        <p:spPr>
+          <a:xfrm>
+            <a:off x="3864953" y="1462194"/>
+            <a:ext cx="4462094" cy="616623"/>
+          </a:xfrm>
+          <a:prstGeom prst="rect">
+            <a:avLst/>
+          </a:prstGeom>
+        </p:spPr>
+      </p:pic>
+      <p:pic>
+        <p:nvPicPr>
+          <p:cNvPr id="4" name="Kép 3">
+            <a:extLst>
+              <a:ext uri="{FF2B5EF4-FFF2-40B4-BE49-F238E27FC236}">
+                <a16:creationId xmlns:a16="http://schemas.microsoft.com/office/drawing/2014/main" id="{78D3DB18-E771-4DF0-84FA-206E8FA41883}"/>
+              </a:ext>
+            </a:extLst>
+          </p:cNvPr>
+          <p:cNvPicPr>
+            <a:picLocks noChangeAspect="1"/>
+          </p:cNvPicPr>
+          <p:nvPr/>
+        </p:nvPicPr>
+        <p:blipFill rotWithShape="1">
+          <a:blip r:embed="rId2">
+            <a:alphaModFix/>
+            <a:extLst>
+              <a:ext uri="{28A0092B-C50C-407E-A947-70E740481C1C}">
+                <a14:useLocalDpi xmlns:a14="http://schemas.microsoft.com/office/drawing/2010/main" val="0"/>
+              </a:ext>
+            </a:extLst>
+          </a:blip>
+          <a:srcRect l="-1" r="-295" b="38896"/>
+          <a:stretch/>
+        </p:blipFill>
+        <p:spPr>
+          <a:xfrm>
+            <a:off x="3817995" y="581028"/>
+            <a:ext cx="4556011" cy="914838"/>
+          </a:xfrm>
+          <a:prstGeom prst="rect">
+            <a:avLst/>
+          </a:prstGeom>
+        </p:spPr>
+      </p:pic>
+      <p:sp>
+        <p:nvSpPr>
+          <p:cNvPr id="5" name="Cím 1">
+            <a:extLst>
+              <a:ext uri="{FF2B5EF4-FFF2-40B4-BE49-F238E27FC236}">
+                <a16:creationId xmlns:a16="http://schemas.microsoft.com/office/drawing/2014/main" id="{175A5A3F-6F8F-4002-ADBD-CD8C93ECEEE1}"/>
+              </a:ext>
+            </a:extLst>
+          </p:cNvPr>
+          <p:cNvSpPr txBox="1">
+            <a:spLocks/>
+          </p:cNvSpPr>
+          <p:nvPr/>
+        </p:nvSpPr>
+        <p:spPr>
+          <a:xfrm>
+            <a:off x="1066800" y="2703622"/>
+            <a:ext cx="10058400" cy="1450757"/>
+          </a:xfrm>
+          <a:prstGeom prst="rect">
+            <a:avLst/>
+          </a:prstGeom>
+        </p:spPr>
+        <p:txBody>
+          <a:bodyPr anchor="ctr"/>
+          <a:lstStyle>
+            <a:lvl1pPr algn="l" defTabSz="914400" rtl="0" eaLnBrk="1" latinLnBrk="0" hangingPunct="1">
+              <a:lnSpc>
+                <a:spcPct val="85000"/>
+              </a:lnSpc>
+              <a:spcBef>
+                <a:spcPct val="0"/>
+              </a:spcBef>
+              <a:buNone/>
+              <a:defRPr sz="4800" kern="1200" spc="-50" baseline="0">
+                <a:solidFill>
+                  <a:schemeClr val="tx1">
+                    <a:lumMod val="75000"/>
+                    <a:lumOff val="25000"/>
+                  </a:schemeClr>
+                </a:solidFill>
+                <a:latin typeface="+mj-lt"/>
+                <a:ea typeface="+mj-ea"/>
+                <a:cs typeface="+mj-cs"/>
+              </a:defRPr>
+            </a:lvl1pPr>
+          </a:lstStyle>
+          <a:p>
+            <a:pPr algn="ctr"/>
+            <a:r>
+              <a:rPr lang="hu-HU" sz="6000" b="1" dirty="0">
+                <a:latin typeface="Bahnschrift SemiBold" panose="020B0502040204020203" pitchFamily="34" charset="0"/>
+              </a:rPr>
+              <a:t>Köszönjük a figyelmet!</a:t>
+            </a:r>
+          </a:p>
+        </p:txBody>
+      </p:sp>
+      <p:pic>
+        <p:nvPicPr>
+          <p:cNvPr id="12" name="Kép 11">
+            <a:extLst>
+              <a:ext uri="{FF2B5EF4-FFF2-40B4-BE49-F238E27FC236}">
+                <a16:creationId xmlns:a16="http://schemas.microsoft.com/office/drawing/2014/main" id="{0D5DF80E-C3F6-4A3A-98C9-825EEE99BBF4}"/>
+              </a:ext>
+            </a:extLst>
+          </p:cNvPr>
+          <p:cNvPicPr>
+            <a:picLocks noChangeAspect="1"/>
+          </p:cNvPicPr>
+          <p:nvPr/>
+        </p:nvPicPr>
+        <p:blipFill rotWithShape="1">
+          <a:blip r:embed="rId3">
+            <a:extLst>
+              <a:ext uri="{28A0092B-C50C-407E-A947-70E740481C1C}">
+                <a14:useLocalDpi xmlns:a14="http://schemas.microsoft.com/office/drawing/2010/main" val="0"/>
+              </a:ext>
+            </a:extLst>
+          </a:blip>
+          <a:srcRect l="16625" r="14640"/>
+          <a:stretch/>
+        </p:blipFill>
+        <p:spPr>
+          <a:xfrm rot="6074309">
+            <a:off x="253294" y="393819"/>
+            <a:ext cx="1804052" cy="1476375"/>
+          </a:xfrm>
+          <a:prstGeom prst="rect">
+            <a:avLst/>
+          </a:prstGeom>
+        </p:spPr>
+      </p:pic>
+      <p:pic>
+        <p:nvPicPr>
+          <p:cNvPr id="13" name="Kép 12">
+            <a:extLst>
+              <a:ext uri="{FF2B5EF4-FFF2-40B4-BE49-F238E27FC236}">
+                <a16:creationId xmlns:a16="http://schemas.microsoft.com/office/drawing/2014/main" id="{7AF0C74E-3043-40A3-8603-B30A83BB9DDF}"/>
+              </a:ext>
+            </a:extLst>
+          </p:cNvPr>
+          <p:cNvPicPr>
+            <a:picLocks noChangeAspect="1"/>
+          </p:cNvPicPr>
+          <p:nvPr/>
+        </p:nvPicPr>
+        <p:blipFill rotWithShape="1">
+          <a:blip r:embed="rId4">
+            <a:extLst>
+              <a:ext uri="{28A0092B-C50C-407E-A947-70E740481C1C}">
+                <a14:useLocalDpi xmlns:a14="http://schemas.microsoft.com/office/drawing/2010/main" val="0"/>
+              </a:ext>
+            </a:extLst>
+          </a:blip>
+          <a:srcRect l="31214" t="-711" r="26907" b="711"/>
+          <a:stretch/>
+        </p:blipFill>
+        <p:spPr>
+          <a:xfrm rot="4156304" flipH="1">
+            <a:off x="10842996" y="4624346"/>
+            <a:ext cx="1208569" cy="1623298"/>
+          </a:xfrm>
+          <a:prstGeom prst="rect">
+            <a:avLst/>
+          </a:prstGeom>
+        </p:spPr>
+      </p:pic>
+    </p:spTree>
+    <p:extLst>
+      <p:ext uri="{BB962C8B-B14F-4D97-AF65-F5344CB8AC3E}">
+        <p14:creationId xmlns:p14="http://schemas.microsoft.com/office/powerpoint/2010/main" val="3755244303"/>
+      </p:ext>
+    </p:extLst>
+  </p:cSld>
+  <p:clrMapOvr>
+    <a:masterClrMapping/>
+  </p:clrMapOvr>
+</p:sld>
+</file>
+
+<file path=ppt/slides/slide2.xml><?xml version="1.0" encoding="utf-8"?>
 <p:sld xmlns:a="http://schemas.openxmlformats.org/drawingml/2006/main" xmlns:r="http://schemas.openxmlformats.org/officeDocument/2006/relationships" xmlns:p="http://schemas.openxmlformats.org/presentationml/2006/main">
   <p:cSld>
     <p:bg>
@@ -9532,239 +7711,12 @@
           </a:prstGeom>
         </p:spPr>
       </p:pic>
-    </p:spTree>
-    <p:extLst>
-      <p:ext uri="{BB962C8B-B14F-4D97-AF65-F5344CB8AC3E}">
-        <p14:creationId xmlns:p14="http://schemas.microsoft.com/office/powerpoint/2010/main" val="1681993095"/>
-      </p:ext>
-    </p:extLst>
-  </p:cSld>
-  <p:clrMapOvr>
-    <a:masterClrMapping/>
-  </p:clrMapOvr>
-  <mc:AlternateContent xmlns:mc="http://schemas.openxmlformats.org/markup-compatibility/2006" xmlns:p159="http://schemas.microsoft.com/office/powerpoint/2015/09/main">
-    <mc:Choice Requires="p159">
-      <p:transition xmlns:p14="http://schemas.microsoft.com/office/powerpoint/2010/main" spd="slow" p14:dur="2000">
-        <p159:morph option="byObject"/>
-      </p:transition>
-    </mc:Choice>
-    <mc:Fallback xmlns="">
-      <p:transition spd="slow">
-        <p:fade/>
-      </p:transition>
-    </mc:Fallback>
-  </mc:AlternateContent>
-</p:sld>
-</file>
-
-<file path=ppt/slides/slide4.xml><?xml version="1.0" encoding="utf-8"?>
-<p:sld xmlns:a="http://schemas.openxmlformats.org/drawingml/2006/main" xmlns:r="http://schemas.openxmlformats.org/officeDocument/2006/relationships" xmlns:p="http://schemas.openxmlformats.org/presentationml/2006/main">
-  <p:cSld>
-    <p:bg>
-      <p:bgPr>
-        <a:solidFill>
-          <a:srgbClr val="FDF7E9"/>
-        </a:solidFill>
-        <a:effectLst/>
-      </p:bgPr>
-    </p:bg>
-    <p:spTree>
-      <p:nvGrpSpPr>
-        <p:cNvPr id="1" name=""/>
-        <p:cNvGrpSpPr/>
-        <p:nvPr/>
-      </p:nvGrpSpPr>
-      <p:grpSpPr>
-        <a:xfrm>
-          <a:off x="0" y="0"/>
-          <a:ext cx="0" cy="0"/>
-          <a:chOff x="0" y="0"/>
-          <a:chExt cx="0" cy="0"/>
-        </a:xfrm>
-      </p:grpSpPr>
-      <p:sp>
-        <p:nvSpPr>
-          <p:cNvPr id="2" name="Cím 1">
-            <a:extLst>
-              <a:ext uri="{FF2B5EF4-FFF2-40B4-BE49-F238E27FC236}">
-                <a16:creationId xmlns:a16="http://schemas.microsoft.com/office/drawing/2014/main" id="{C18830B2-00D6-4BD2-BE11-19215C420251}"/>
-              </a:ext>
-            </a:extLst>
-          </p:cNvPr>
-          <p:cNvSpPr txBox="1">
-            <a:spLocks/>
-          </p:cNvSpPr>
-          <p:nvPr/>
-        </p:nvSpPr>
-        <p:spPr>
-          <a:xfrm>
-            <a:off x="1098000" y="288000"/>
-            <a:ext cx="9760046" cy="2006995"/>
-          </a:xfrm>
-          <a:prstGeom prst="rect">
-            <a:avLst/>
-          </a:prstGeom>
-        </p:spPr>
-        <p:txBody>
-          <a:bodyPr anchor="ctr" anchorCtr="0">
-            <a:normAutofit/>
-          </a:bodyPr>
-          <a:lstStyle>
-            <a:lvl1pPr algn="l" defTabSz="914400" rtl="0" eaLnBrk="1" latinLnBrk="0" hangingPunct="1">
-              <a:lnSpc>
-                <a:spcPct val="85000"/>
-              </a:lnSpc>
-              <a:spcBef>
-                <a:spcPct val="0"/>
-              </a:spcBef>
-              <a:buNone/>
-              <a:defRPr sz="4800" kern="1200" spc="-50" baseline="0">
-                <a:solidFill>
-                  <a:schemeClr val="tx1">
-                    <a:lumMod val="75000"/>
-                    <a:lumOff val="25000"/>
-                  </a:schemeClr>
-                </a:solidFill>
-                <a:latin typeface="+mj-lt"/>
-                <a:ea typeface="+mj-ea"/>
-                <a:cs typeface="+mj-cs"/>
-              </a:defRPr>
-            </a:lvl1pPr>
-          </a:lstStyle>
-          <a:p>
-            <a:r>
-              <a:rPr lang="hu-HU" b="1" dirty="0">
-                <a:latin typeface="Bahnschrift SemiBold" panose="020B0502040204020203" pitchFamily="34" charset="0"/>
-              </a:rPr>
-              <a:t>A projekt bemutatása</a:t>
-            </a:r>
-          </a:p>
-        </p:txBody>
-      </p:sp>
-      <p:pic>
-        <p:nvPicPr>
-          <p:cNvPr id="4" name="Kép 3">
-            <a:extLst>
-              <a:ext uri="{FF2B5EF4-FFF2-40B4-BE49-F238E27FC236}">
-                <a16:creationId xmlns:a16="http://schemas.microsoft.com/office/drawing/2014/main" id="{7912835F-A62C-4B0D-B733-74106EBFDA26}"/>
-              </a:ext>
-            </a:extLst>
-          </p:cNvPr>
-          <p:cNvPicPr>
-            <a:picLocks noChangeAspect="1"/>
-          </p:cNvPicPr>
-          <p:nvPr/>
-        </p:nvPicPr>
-        <p:blipFill rotWithShape="1">
-          <a:blip r:embed="rId2">
-            <a:alphaModFix amt="50000"/>
-            <a:extLst>
-              <a:ext uri="{28A0092B-C50C-407E-A947-70E740481C1C}">
-                <a14:useLocalDpi xmlns:a14="http://schemas.microsoft.com/office/drawing/2010/main" val="0"/>
-              </a:ext>
-            </a:extLst>
-          </a:blip>
-          <a:srcRect t="58555" r="67375"/>
-          <a:stretch/>
-        </p:blipFill>
-        <p:spPr>
-          <a:xfrm>
-            <a:off x="10619475" y="1036308"/>
-            <a:ext cx="1364958" cy="571501"/>
-          </a:xfrm>
-          <a:prstGeom prst="rect">
-            <a:avLst/>
-          </a:prstGeom>
-        </p:spPr>
-      </p:pic>
-      <p:cxnSp>
-        <p:nvCxnSpPr>
-          <p:cNvPr id="9" name="Egyenes összekötő 8">
-            <a:extLst>
-              <a:ext uri="{FF2B5EF4-FFF2-40B4-BE49-F238E27FC236}">
-                <a16:creationId xmlns:a16="http://schemas.microsoft.com/office/drawing/2014/main" id="{670AB60B-B385-4E46-A012-AD0038CF5F38}"/>
-              </a:ext>
-            </a:extLst>
-          </p:cNvPr>
-          <p:cNvCxnSpPr>
-            <a:cxnSpLocks/>
-          </p:cNvCxnSpPr>
-          <p:nvPr/>
-        </p:nvCxnSpPr>
-        <p:spPr>
-          <a:xfrm>
-            <a:off x="1209600" y="1738800"/>
-            <a:ext cx="9946080" cy="0"/>
-          </a:xfrm>
-          <a:prstGeom prst="line">
-            <a:avLst/>
-          </a:prstGeom>
-          <a:ln>
-            <a:solidFill>
-              <a:schemeClr val="tx1">
-                <a:lumMod val="50000"/>
-                <a:lumOff val="50000"/>
-              </a:schemeClr>
-            </a:solidFill>
-          </a:ln>
-        </p:spPr>
-        <p:style>
-          <a:lnRef idx="1">
-            <a:schemeClr val="accent1"/>
-          </a:lnRef>
-          <a:fillRef idx="0">
-            <a:schemeClr val="accent1"/>
-          </a:fillRef>
-          <a:effectRef idx="0">
-            <a:schemeClr val="accent1"/>
-          </a:effectRef>
-          <a:fontRef idx="minor">
-            <a:schemeClr val="tx1"/>
-          </a:fontRef>
-        </p:style>
-      </p:cxnSp>
-      <p:pic>
-        <p:nvPicPr>
-          <p:cNvPr id="10" name="Kép 9">
-            <a:extLst>
-              <a:ext uri="{FF2B5EF4-FFF2-40B4-BE49-F238E27FC236}">
-                <a16:creationId xmlns:a16="http://schemas.microsoft.com/office/drawing/2014/main" id="{CB9406C6-CF11-47E5-AEFA-0BA584F8F8D2}"/>
-              </a:ext>
-            </a:extLst>
-          </p:cNvPr>
-          <p:cNvPicPr>
-            <a:picLocks noChangeAspect="1"/>
-          </p:cNvPicPr>
-          <p:nvPr/>
-        </p:nvPicPr>
-        <p:blipFill rotWithShape="1">
-          <a:blip r:embed="rId2">
-            <a:alphaModFix amt="50000"/>
-            <a:extLst>
-              <a:ext uri="{28A0092B-C50C-407E-A947-70E740481C1C}">
-                <a14:useLocalDpi xmlns:a14="http://schemas.microsoft.com/office/drawing/2010/main" val="0"/>
-              </a:ext>
-            </a:extLst>
-          </a:blip>
-          <a:srcRect l="1" r="61666" b="38896"/>
-          <a:stretch/>
-        </p:blipFill>
-        <p:spPr>
-          <a:xfrm>
-            <a:off x="10565538" y="349786"/>
-            <a:ext cx="1418895" cy="745451"/>
-          </a:xfrm>
-          <a:prstGeom prst="rect">
-            <a:avLst/>
-          </a:prstGeom>
-        </p:spPr>
-      </p:pic>
       <p:sp>
         <p:nvSpPr>
           <p:cNvPr id="6" name="Tartalom helye 2">
             <a:extLst>
               <a:ext uri="{FF2B5EF4-FFF2-40B4-BE49-F238E27FC236}">
-                <a16:creationId xmlns:a16="http://schemas.microsoft.com/office/drawing/2014/main" id="{B238462E-F8EB-407F-B0B6-3AE443BB552F}"/>
+                <a16:creationId xmlns:a16="http://schemas.microsoft.com/office/drawing/2014/main" id="{FF047810-2018-4C33-B261-D1F6226BE9D7}"/>
               </a:ext>
             </a:extLst>
           </p:cNvPr>
@@ -10154,7 +8106,7 @@
           <p:cNvPr id="7" name="Kép 6">
             <a:extLst>
               <a:ext uri="{FF2B5EF4-FFF2-40B4-BE49-F238E27FC236}">
-                <a16:creationId xmlns:a16="http://schemas.microsoft.com/office/drawing/2014/main" id="{349A29CF-1647-4A99-9A6A-32ED360ABA5C}"/>
+                <a16:creationId xmlns:a16="http://schemas.microsoft.com/office/drawing/2014/main" id="{3070409B-88A6-42DC-B01A-8F8F5314A566}"/>
               </a:ext>
             </a:extLst>
           </p:cNvPr>
@@ -10182,7 +8134,7 @@
     </p:spTree>
     <p:extLst>
       <p:ext uri="{BB962C8B-B14F-4D97-AF65-F5344CB8AC3E}">
-        <p14:creationId xmlns:p14="http://schemas.microsoft.com/office/powerpoint/2010/main" val="2368998396"/>
+        <p14:creationId xmlns:p14="http://schemas.microsoft.com/office/powerpoint/2010/main" val="1681993095"/>
       </p:ext>
     </p:extLst>
   </p:cSld>
@@ -10204,7 +8156,7 @@
 </p:sld>
 </file>
 
-<file path=ppt/slides/slide5.xml><?xml version="1.0" encoding="utf-8"?>
+<file path=ppt/slides/slide3.xml><?xml version="1.0" encoding="utf-8"?>
 <p:sld xmlns:a="http://schemas.openxmlformats.org/drawingml/2006/main" xmlns:r="http://schemas.openxmlformats.org/officeDocument/2006/relationships" xmlns:p="http://schemas.openxmlformats.org/presentationml/2006/main">
   <p:cSld>
     <p:bg>
@@ -10477,7 +8429,7 @@
 </p:sld>
 </file>
 
-<file path=ppt/slides/slide6.xml><?xml version="1.0" encoding="utf-8"?>
+<file path=ppt/slides/slide4.xml><?xml version="1.0" encoding="utf-8"?>
 <p:sld xmlns:a="http://schemas.openxmlformats.org/drawingml/2006/main" xmlns:r="http://schemas.openxmlformats.org/officeDocument/2006/relationships" xmlns:p="http://schemas.openxmlformats.org/presentationml/2006/main">
   <p:cSld>
     <p:bg>
@@ -10551,7 +8503,7 @@
             </a:r>
           </a:p>
           <a:p>
-            <a:pPr lvl="1">
+            <a:pPr lvl="2">
               <a:buFont typeface="Arial" panose="020B0604020202020204" pitchFamily="34" charset="0"/>
               <a:buChar char="•"/>
             </a:pPr>
@@ -10583,7 +8535,7 @@
             </a:r>
           </a:p>
           <a:p>
-            <a:pPr lvl="1">
+            <a:pPr lvl="2">
               <a:buFont typeface="Arial" panose="020B0604020202020204" pitchFamily="34" charset="0"/>
               <a:buChar char="•"/>
             </a:pPr>
@@ -10614,7 +8566,7 @@
             </a:r>
           </a:p>
           <a:p>
-            <a:pPr lvl="1">
+            <a:pPr lvl="2">
               <a:buFont typeface="Arial" panose="020B0604020202020204" pitchFamily="34" charset="0"/>
               <a:buChar char="•"/>
             </a:pPr>
@@ -10766,7 +8718,7 @@
 </p:sld>
 </file>
 
-<file path=ppt/slides/slide7.xml><?xml version="1.0" encoding="utf-8"?>
+<file path=ppt/slides/slide5.xml><?xml version="1.0" encoding="utf-8"?>
 <p:sld xmlns:a="http://schemas.openxmlformats.org/drawingml/2006/main" xmlns:r="http://schemas.openxmlformats.org/officeDocument/2006/relationships" xmlns:p="http://schemas.openxmlformats.org/presentationml/2006/main">
   <p:cSld>
     <p:bg>
@@ -10872,22 +8824,68 @@
           <a:lstStyle/>
           <a:p>
             <a:pPr>
+              <a:lnSpc>
+                <a:spcPct val="150000"/>
+              </a:lnSpc>
               <a:buFont typeface="Wingdings" panose="05000000000000000000" pitchFamily="2" charset="2"/>
               <a:buChar char="v"/>
             </a:pPr>
             <a:r>
               <a:rPr lang="hu-HU" dirty="0"/>
-              <a:t> Backend</a:t>
+              <a:t> Adatbázis tervezés</a:t>
             </a:r>
           </a:p>
           <a:p>
             <a:pPr>
+              <a:lnSpc>
+                <a:spcPct val="150000"/>
+              </a:lnSpc>
               <a:buFont typeface="Wingdings" panose="05000000000000000000" pitchFamily="2" charset="2"/>
               <a:buChar char="v"/>
             </a:pPr>
             <a:r>
               <a:rPr lang="hu-HU" dirty="0"/>
-              <a:t> Frontend</a:t>
+              <a:t> Regisztráció, bejelentkezés</a:t>
+            </a:r>
+            <a:endParaRPr lang="hu-HU" sz="1600" dirty="0"/>
+          </a:p>
+          <a:p>
+            <a:pPr>
+              <a:lnSpc>
+                <a:spcPct val="150000"/>
+              </a:lnSpc>
+              <a:buFont typeface="Wingdings" panose="05000000000000000000" pitchFamily="2" charset="2"/>
+              <a:buChar char="v"/>
+            </a:pPr>
+            <a:r>
+              <a:rPr lang="hu-HU" dirty="0"/>
+              <a:t> Felehasználók kezelése</a:t>
+            </a:r>
+          </a:p>
+          <a:p>
+            <a:pPr>
+              <a:lnSpc>
+                <a:spcPct val="150000"/>
+              </a:lnSpc>
+              <a:buFont typeface="Wingdings" panose="05000000000000000000" pitchFamily="2" charset="2"/>
+              <a:buChar char="v"/>
+            </a:pPr>
+            <a:r>
+              <a:rPr lang="hu-HU" dirty="0"/>
+              <a:t> Ételek és hozzávalók kezelése</a:t>
+            </a:r>
+          </a:p>
+          <a:p>
+            <a:pPr>
+              <a:lnSpc>
+                <a:spcPct val="150000"/>
+              </a:lnSpc>
+              <a:buFont typeface="Wingdings" panose="05000000000000000000" pitchFamily="2" charset="2"/>
+              <a:buChar char="v"/>
+            </a:pPr>
+            <a:r>
+              <a:rPr lang="hu-HU" dirty="0"/>
+              <a:t> Rendelések</a:t>
             </a:r>
           </a:p>
         </p:txBody>
@@ -10943,22 +8941,67 @@
           <a:lstStyle/>
           <a:p>
             <a:pPr>
+              <a:lnSpc>
+                <a:spcPct val="150000"/>
+              </a:lnSpc>
               <a:buFont typeface="Wingdings" panose="05000000000000000000" pitchFamily="2" charset="2"/>
               <a:buChar char="v"/>
             </a:pPr>
             <a:r>
               <a:rPr lang="hu-HU" dirty="0"/>
-              <a:t> Backend</a:t>
+              <a:t> Felhasználói felület tervezés</a:t>
             </a:r>
           </a:p>
           <a:p>
             <a:pPr>
+              <a:lnSpc>
+                <a:spcPct val="150000"/>
+              </a:lnSpc>
               <a:buFont typeface="Wingdings" panose="05000000000000000000" pitchFamily="2" charset="2"/>
               <a:buChar char="v"/>
             </a:pPr>
             <a:r>
               <a:rPr lang="hu-HU" dirty="0"/>
-              <a:t> Frontend</a:t>
+              <a:t> Hardver</a:t>
+            </a:r>
+          </a:p>
+          <a:p>
+            <a:pPr>
+              <a:lnSpc>
+                <a:spcPct val="150000"/>
+              </a:lnSpc>
+              <a:buFont typeface="Wingdings" panose="05000000000000000000" pitchFamily="2" charset="2"/>
+              <a:buChar char="v"/>
+            </a:pPr>
+            <a:r>
+              <a:rPr lang="hu-HU" dirty="0"/>
+              <a:t> Étlap kezelés</a:t>
+            </a:r>
+          </a:p>
+          <a:p>
+            <a:pPr>
+              <a:lnSpc>
+                <a:spcPct val="150000"/>
+              </a:lnSpc>
+              <a:buFont typeface="Wingdings" panose="05000000000000000000" pitchFamily="2" charset="2"/>
+              <a:buChar char="v"/>
+            </a:pPr>
+            <a:r>
+              <a:rPr lang="hu-HU" dirty="0"/>
+              <a:t> Menü készítő</a:t>
+            </a:r>
+          </a:p>
+          <a:p>
+            <a:pPr>
+              <a:lnSpc>
+                <a:spcPct val="150000"/>
+              </a:lnSpc>
+              <a:buFont typeface="Wingdings" panose="05000000000000000000" pitchFamily="2" charset="2"/>
+              <a:buChar char="v"/>
+            </a:pPr>
+            <a:r>
+              <a:rPr lang="hu-HU" dirty="0"/>
+              <a:t> Számla generálás</a:t>
             </a:r>
           </a:p>
           <a:p>
@@ -11118,7 +9161,7 @@
 </p:sld>
 </file>
 
-<file path=ppt/slides/slide8.xml><?xml version="1.0" encoding="utf-8"?>
+<file path=ppt/slides/slide6.xml><?xml version="1.0" encoding="utf-8"?>
 <p:sld xmlns:a="http://schemas.openxmlformats.org/drawingml/2006/main" xmlns:r="http://schemas.openxmlformats.org/officeDocument/2006/relationships" xmlns:p="http://schemas.openxmlformats.org/presentationml/2006/main">
   <p:cSld>
     <p:bg>
@@ -11145,282 +9188,6 @@
       </p:grpSpPr>
       <p:sp>
         <p:nvSpPr>
-          <p:cNvPr id="3" name="Tartalom helye 2">
-            <a:extLst>
-              <a:ext uri="{FF2B5EF4-FFF2-40B4-BE49-F238E27FC236}">
-                <a16:creationId xmlns:a16="http://schemas.microsoft.com/office/drawing/2014/main" id="{32758DB2-9D10-47A2-925C-F8A858558A07}"/>
-              </a:ext>
-            </a:extLst>
-          </p:cNvPr>
-          <p:cNvSpPr>
-            <a:spLocks noGrp="1"/>
-          </p:cNvSpPr>
-          <p:nvPr>
-            <p:ph idx="1"/>
-          </p:nvPr>
-        </p:nvSpPr>
-        <p:spPr/>
-        <p:txBody>
-          <a:bodyPr>
-            <a:normAutofit/>
-          </a:bodyPr>
-          <a:lstStyle/>
-          <a:p>
-            <a:pPr lvl="1">
-              <a:lnSpc>
-                <a:spcPct val="150000"/>
-              </a:lnSpc>
-              <a:buFont typeface="Arial" panose="020B0604020202020204" pitchFamily="34" charset="0"/>
-              <a:buChar char="•"/>
-            </a:pPr>
-            <a:r>
-              <a:rPr lang="hu-HU" dirty="0" err="1"/>
-              <a:t>Laravel</a:t>
-            </a:r>
-            <a:r>
-              <a:rPr lang="hu-HU" dirty="0"/>
-              <a:t> 12</a:t>
-            </a:r>
-          </a:p>
-          <a:p>
-            <a:pPr lvl="1">
-              <a:lnSpc>
-                <a:spcPct val="150000"/>
-              </a:lnSpc>
-              <a:buFont typeface="Arial" panose="020B0604020202020204" pitchFamily="34" charset="0"/>
-              <a:buChar char="•"/>
-            </a:pPr>
-            <a:r>
-              <a:rPr lang="hu-HU" dirty="0"/>
-              <a:t>Migrációk</a:t>
-            </a:r>
-          </a:p>
-          <a:p>
-            <a:pPr lvl="1">
-              <a:lnSpc>
-                <a:spcPct val="150000"/>
-              </a:lnSpc>
-              <a:buFont typeface="Arial" panose="020B0604020202020204" pitchFamily="34" charset="0"/>
-              <a:buChar char="•"/>
-            </a:pPr>
-            <a:r>
-              <a:rPr lang="hu-HU" dirty="0"/>
-              <a:t>Modellek</a:t>
-            </a:r>
-          </a:p>
-          <a:p>
-            <a:pPr lvl="1">
-              <a:lnSpc>
-                <a:spcPct val="150000"/>
-              </a:lnSpc>
-              <a:buFont typeface="Arial" panose="020B0604020202020204" pitchFamily="34" charset="0"/>
-              <a:buChar char="•"/>
-            </a:pPr>
-            <a:r>
-              <a:rPr lang="hu-HU" dirty="0"/>
-              <a:t>Kontrollerek</a:t>
-            </a:r>
-          </a:p>
-          <a:p>
-            <a:pPr lvl="1">
-              <a:lnSpc>
-                <a:spcPct val="150000"/>
-              </a:lnSpc>
-              <a:buFont typeface="Arial" panose="020B0604020202020204" pitchFamily="34" charset="0"/>
-              <a:buChar char="•"/>
-            </a:pPr>
-            <a:r>
-              <a:rPr lang="hu-HU" dirty="0" err="1"/>
-              <a:t>Kepek</a:t>
-            </a:r>
-            <a:r>
-              <a:rPr lang="hu-HU" dirty="0"/>
-              <a:t> (</a:t>
-            </a:r>
-            <a:r>
-              <a:rPr lang="hu-HU" dirty="0" err="1"/>
-              <a:t>model</a:t>
-            </a:r>
-            <a:r>
-              <a:rPr lang="hu-HU" dirty="0"/>
-              <a:t>, </a:t>
-            </a:r>
-            <a:r>
-              <a:rPr lang="hu-HU" dirty="0" err="1"/>
-              <a:t>controllel</a:t>
-            </a:r>
-            <a:endParaRPr lang="hu-HU" dirty="0"/>
-          </a:p>
-        </p:txBody>
-      </p:sp>
-      <p:sp>
-        <p:nvSpPr>
-          <p:cNvPr id="4" name="Cím 1">
-            <a:extLst>
-              <a:ext uri="{FF2B5EF4-FFF2-40B4-BE49-F238E27FC236}">
-                <a16:creationId xmlns:a16="http://schemas.microsoft.com/office/drawing/2014/main" id="{1BABF97B-7E63-454C-9CDB-F386138F1BAA}"/>
-              </a:ext>
-            </a:extLst>
-          </p:cNvPr>
-          <p:cNvSpPr>
-            <a:spLocks noGrp="1"/>
-          </p:cNvSpPr>
-          <p:nvPr>
-            <p:ph type="title"/>
-          </p:nvPr>
-        </p:nvSpPr>
-        <p:spPr>
-          <a:xfrm>
-            <a:off x="1097280" y="286603"/>
-            <a:ext cx="10058400" cy="1450757"/>
-          </a:xfrm>
-        </p:spPr>
-        <p:txBody>
-          <a:bodyPr/>
-          <a:lstStyle/>
-          <a:p>
-            <a:r>
-              <a:rPr lang="hu-HU" b="1" dirty="0">
-                <a:latin typeface="Bahnschrift SemiBold" panose="020B0502040204020203" pitchFamily="34" charset="0"/>
-              </a:rPr>
-              <a:t>Backend</a:t>
-            </a:r>
-          </a:p>
-        </p:txBody>
-      </p:sp>
-      <p:grpSp>
-        <p:nvGrpSpPr>
-          <p:cNvPr id="10" name="Csoportba foglalás 9">
-            <a:extLst>
-              <a:ext uri="{FF2B5EF4-FFF2-40B4-BE49-F238E27FC236}">
-                <a16:creationId xmlns:a16="http://schemas.microsoft.com/office/drawing/2014/main" id="{776B3672-EA20-4C64-B11B-9A18CAC805C9}"/>
-              </a:ext>
-            </a:extLst>
-          </p:cNvPr>
-          <p:cNvGrpSpPr/>
-          <p:nvPr/>
-        </p:nvGrpSpPr>
-        <p:grpSpPr>
-          <a:xfrm>
-            <a:off x="10565538" y="349786"/>
-            <a:ext cx="1418895" cy="1258023"/>
-            <a:chOff x="10565538" y="349786"/>
-            <a:chExt cx="1418895" cy="1258023"/>
-          </a:xfrm>
-        </p:grpSpPr>
-        <p:pic>
-          <p:nvPicPr>
-            <p:cNvPr id="11" name="Kép 10">
-              <a:extLst>
-                <a:ext uri="{FF2B5EF4-FFF2-40B4-BE49-F238E27FC236}">
-                  <a16:creationId xmlns:a16="http://schemas.microsoft.com/office/drawing/2014/main" id="{6299F4D8-F0A2-45AE-9DD3-315E8BDF2A56}"/>
-                </a:ext>
-              </a:extLst>
-            </p:cNvPr>
-            <p:cNvPicPr>
-              <a:picLocks noChangeAspect="1"/>
-            </p:cNvPicPr>
-            <p:nvPr/>
-          </p:nvPicPr>
-          <p:blipFill rotWithShape="1">
-            <a:blip r:embed="rId2">
-              <a:alphaModFix amt="50000"/>
-              <a:extLst>
-                <a:ext uri="{28A0092B-C50C-407E-A947-70E740481C1C}">
-                  <a14:useLocalDpi xmlns:a14="http://schemas.microsoft.com/office/drawing/2010/main" val="0"/>
-                </a:ext>
-              </a:extLst>
-            </a:blip>
-            <a:srcRect t="58555" r="67375"/>
-            <a:stretch/>
-          </p:blipFill>
-          <p:spPr>
-            <a:xfrm>
-              <a:off x="10619475" y="1036308"/>
-              <a:ext cx="1364958" cy="571501"/>
-            </a:xfrm>
-            <a:prstGeom prst="rect">
-              <a:avLst/>
-            </a:prstGeom>
-          </p:spPr>
-        </p:pic>
-        <p:pic>
-          <p:nvPicPr>
-            <p:cNvPr id="12" name="Kép 11">
-              <a:extLst>
-                <a:ext uri="{FF2B5EF4-FFF2-40B4-BE49-F238E27FC236}">
-                  <a16:creationId xmlns:a16="http://schemas.microsoft.com/office/drawing/2014/main" id="{4E2168DE-8E21-4CEB-B2EC-917B24001931}"/>
-                </a:ext>
-              </a:extLst>
-            </p:cNvPr>
-            <p:cNvPicPr>
-              <a:picLocks noChangeAspect="1"/>
-            </p:cNvPicPr>
-            <p:nvPr/>
-          </p:nvPicPr>
-          <p:blipFill rotWithShape="1">
-            <a:blip r:embed="rId2">
-              <a:alphaModFix amt="50000"/>
-              <a:extLst>
-                <a:ext uri="{28A0092B-C50C-407E-A947-70E740481C1C}">
-                  <a14:useLocalDpi xmlns:a14="http://schemas.microsoft.com/office/drawing/2010/main" val="0"/>
-                </a:ext>
-              </a:extLst>
-            </a:blip>
-            <a:srcRect l="1" r="61666" b="38896"/>
-            <a:stretch/>
-          </p:blipFill>
-          <p:spPr>
-            <a:xfrm>
-              <a:off x="10565538" y="349786"/>
-              <a:ext cx="1418895" cy="745451"/>
-            </a:xfrm>
-            <a:prstGeom prst="rect">
-              <a:avLst/>
-            </a:prstGeom>
-          </p:spPr>
-        </p:pic>
-      </p:grpSp>
-    </p:spTree>
-    <p:extLst>
-      <p:ext uri="{BB962C8B-B14F-4D97-AF65-F5344CB8AC3E}">
-        <p14:creationId xmlns:p14="http://schemas.microsoft.com/office/powerpoint/2010/main" val="1446896841"/>
-      </p:ext>
-    </p:extLst>
-  </p:cSld>
-  <p:clrMapOvr>
-    <a:masterClrMapping/>
-  </p:clrMapOvr>
-</p:sld>
-</file>
-
-<file path=ppt/slides/slide9.xml><?xml version="1.0" encoding="utf-8"?>
-<p:sld xmlns:a="http://schemas.openxmlformats.org/drawingml/2006/main" xmlns:r="http://schemas.openxmlformats.org/officeDocument/2006/relationships" xmlns:p="http://schemas.openxmlformats.org/presentationml/2006/main">
-  <p:cSld>
-    <p:bg>
-      <p:bgPr>
-        <a:solidFill>
-          <a:srgbClr val="FDF7E9"/>
-        </a:solidFill>
-        <a:effectLst/>
-      </p:bgPr>
-    </p:bg>
-    <p:spTree>
-      <p:nvGrpSpPr>
-        <p:cNvPr id="1" name=""/>
-        <p:cNvGrpSpPr/>
-        <p:nvPr/>
-      </p:nvGrpSpPr>
-      <p:grpSpPr>
-        <a:xfrm>
-          <a:off x="0" y="0"/>
-          <a:ext cx="0" cy="0"/>
-          <a:chOff x="0" y="0"/>
-          <a:chExt cx="0" cy="0"/>
-        </a:xfrm>
-      </p:grpSpPr>
-      <p:sp>
-        <p:nvSpPr>
           <p:cNvPr id="2" name="Cím 1">
             <a:extLst>
               <a:ext uri="{FF2B5EF4-FFF2-40B4-BE49-F238E27FC236}">
@@ -11490,11 +9257,11 @@
               <a:buChar char="•"/>
             </a:pPr>
             <a:r>
-              <a:rPr lang="hu-HU" sz="1800" dirty="0" err="1"/>
+              <a:rPr lang="hu-HU" sz="2000" dirty="0" err="1"/>
               <a:t>Laravel</a:t>
             </a:r>
             <a:r>
-              <a:rPr lang="hu-HU" sz="1800" dirty="0"/>
+              <a:rPr lang="hu-HU" sz="2000" dirty="0"/>
               <a:t> 12</a:t>
             </a:r>
           </a:p>
@@ -11507,7 +9274,7 @@
               <a:buChar char="•"/>
             </a:pPr>
             <a:r>
-              <a:rPr lang="hu-HU" sz="1800" dirty="0"/>
+              <a:rPr lang="hu-HU" sz="2000" dirty="0"/>
               <a:t>Migrációk</a:t>
             </a:r>
           </a:p>
@@ -11520,7 +9287,7 @@
               <a:buChar char="•"/>
             </a:pPr>
             <a:r>
-              <a:rPr lang="hu-HU" sz="1800" dirty="0"/>
+              <a:rPr lang="hu-HU" sz="2000" dirty="0"/>
               <a:t>Modellek</a:t>
             </a:r>
           </a:p>
@@ -11533,7 +9300,7 @@
               <a:buChar char="•"/>
             </a:pPr>
             <a:r>
-              <a:rPr lang="hu-HU" sz="1800" dirty="0"/>
+              <a:rPr lang="hu-HU" sz="2000" dirty="0"/>
               <a:t>Kontrollerek</a:t>
             </a:r>
           </a:p>
@@ -11652,276 +9419,167 @@
           </p:spPr>
         </p:pic>
       </p:grpSp>
-      <p:sp>
-        <p:nvSpPr>
-          <p:cNvPr id="7" name="Szöveg helye 3">
+      <p:pic>
+        <p:nvPicPr>
+          <p:cNvPr id="5" name="Kép 4">
             <a:extLst>
               <a:ext uri="{FF2B5EF4-FFF2-40B4-BE49-F238E27FC236}">
-                <a16:creationId xmlns:a16="http://schemas.microsoft.com/office/drawing/2014/main" id="{61BBB51D-A651-4F71-AC1C-5BFA779D5C9B}"/>
+                <a16:creationId xmlns:a16="http://schemas.microsoft.com/office/drawing/2014/main" id="{D033E091-C059-4214-9245-466589239731}"/>
               </a:ext>
             </a:extLst>
           </p:cNvPr>
-          <p:cNvSpPr txBox="1">
-            <a:spLocks/>
-          </p:cNvSpPr>
+          <p:cNvPicPr>
+            <a:picLocks noChangeAspect="1"/>
+          </p:cNvPicPr>
           <p:nvPr/>
-        </p:nvSpPr>
+        </p:nvPicPr>
+        <p:blipFill rotWithShape="1">
+          <a:blip r:embed="rId3">
+            <a:extLst>
+              <a:ext uri="{28A0092B-C50C-407E-A947-70E740481C1C}">
+                <a14:useLocalDpi xmlns:a14="http://schemas.microsoft.com/office/drawing/2010/main" val="0"/>
+              </a:ext>
+            </a:extLst>
+          </a:blip>
+          <a:srcRect l="5105" t="811" r="5434" b="-1"/>
+          <a:stretch/>
+        </p:blipFill>
         <p:spPr>
           <a:xfrm>
-            <a:off x="4185719" y="2669471"/>
-            <a:ext cx="3562350" cy="3684270"/>
+            <a:off x="5129212" y="1095237"/>
+            <a:ext cx="2590800" cy="3807991"/>
           </a:xfrm>
           <a:prstGeom prst="rect">
             <a:avLst/>
           </a:prstGeom>
+          <a:ln w="76200" cap="sq">
+            <a:solidFill>
+              <a:srgbClr val="E48312"/>
+            </a:solidFill>
+            <a:miter lim="800000"/>
+          </a:ln>
+          <a:effectLst>
+            <a:outerShdw blurRad="57150" dist="50800" dir="2700000" algn="tl" rotWithShape="0">
+              <a:srgbClr val="000000">
+                <a:alpha val="40000"/>
+              </a:srgbClr>
+            </a:outerShdw>
+          </a:effectLst>
+        </p:spPr>
+      </p:pic>
+      <p:pic>
+        <p:nvPicPr>
+          <p:cNvPr id="8" name="Kép 7">
+            <a:extLst>
+              <a:ext uri="{FF2B5EF4-FFF2-40B4-BE49-F238E27FC236}">
+                <a16:creationId xmlns:a16="http://schemas.microsoft.com/office/drawing/2014/main" id="{B37DBD32-194B-4032-B284-F858E2573DE0}"/>
+              </a:ext>
+            </a:extLst>
+          </p:cNvPr>
+          <p:cNvPicPr>
+            <a:picLocks noChangeAspect="1"/>
+          </p:cNvPicPr>
+          <p:nvPr/>
+        </p:nvPicPr>
+        <p:blipFill rotWithShape="1">
+          <a:blip r:embed="rId4">
+            <a:extLst>
+              <a:ext uri="{28A0092B-C50C-407E-A947-70E740481C1C}">
+                <a14:useLocalDpi xmlns:a14="http://schemas.microsoft.com/office/drawing/2010/main" val="0"/>
+              </a:ext>
+            </a:extLst>
+          </a:blip>
+          <a:srcRect l="4699" r="11023"/>
+          <a:stretch/>
+        </p:blipFill>
+        <p:spPr>
+          <a:xfrm>
+            <a:off x="8617510" y="2051684"/>
+            <a:ext cx="2657475" cy="3620005"/>
+          </a:xfrm>
+          <a:prstGeom prst="rect">
+            <a:avLst/>
+          </a:prstGeom>
+          <a:ln w="76200" cap="sq">
+            <a:solidFill>
+              <a:srgbClr val="E48312"/>
+            </a:solidFill>
+            <a:miter lim="800000"/>
+          </a:ln>
+          <a:effectLst>
+            <a:outerShdw blurRad="57150" dist="50800" dir="2700000" algn="tl" rotWithShape="0">
+              <a:srgbClr val="000000">
+                <a:alpha val="40000"/>
+              </a:srgbClr>
+            </a:outerShdw>
+          </a:effectLst>
+        </p:spPr>
+      </p:pic>
+    </p:spTree>
+    <p:extLst>
+      <p:ext uri="{BB962C8B-B14F-4D97-AF65-F5344CB8AC3E}">
+        <p14:creationId xmlns:p14="http://schemas.microsoft.com/office/powerpoint/2010/main" val="1709693890"/>
+      </p:ext>
+    </p:extLst>
+  </p:cSld>
+  <p:clrMapOvr>
+    <a:masterClrMapping/>
+  </p:clrMapOvr>
+</p:sld>
+</file>
+
+<file path=ppt/slides/slide7.xml><?xml version="1.0" encoding="utf-8"?>
+<p:sld xmlns:a="http://schemas.openxmlformats.org/drawingml/2006/main" xmlns:r="http://schemas.openxmlformats.org/officeDocument/2006/relationships" xmlns:p="http://schemas.openxmlformats.org/presentationml/2006/main">
+  <p:cSld>
+    <p:bg>
+      <p:bgPr>
+        <a:solidFill>
+          <a:srgbClr val="FDF7E9"/>
+        </a:solidFill>
+        <a:effectLst/>
+      </p:bgPr>
+    </p:bg>
+    <p:spTree>
+      <p:nvGrpSpPr>
+        <p:cNvPr id="1" name=""/>
+        <p:cNvGrpSpPr/>
+        <p:nvPr/>
+      </p:nvGrpSpPr>
+      <p:grpSpPr>
+        <a:xfrm>
+          <a:off x="0" y="0"/>
+          <a:ext cx="0" cy="0"/>
+          <a:chOff x="0" y="0"/>
+          <a:chExt cx="0" cy="0"/>
+        </a:xfrm>
+      </p:grpSpPr>
+      <p:sp>
+        <p:nvSpPr>
+          <p:cNvPr id="5" name="Szöveg helye 3">
+            <a:extLst>
+              <a:ext uri="{FF2B5EF4-FFF2-40B4-BE49-F238E27FC236}">
+                <a16:creationId xmlns:a16="http://schemas.microsoft.com/office/drawing/2014/main" id="{5A03AB81-7D99-4C1A-BBE2-727445750850}"/>
+              </a:ext>
+            </a:extLst>
+          </p:cNvPr>
+          <p:cNvSpPr>
+            <a:spLocks noGrp="1"/>
+          </p:cNvSpPr>
+          <p:nvPr>
+            <p:ph type="body" sz="half" idx="2"/>
+          </p:nvPr>
+        </p:nvSpPr>
+        <p:spPr>
+          <a:xfrm>
+            <a:off x="457200" y="3259455"/>
+            <a:ext cx="3562350" cy="3684270"/>
+          </a:xfrm>
         </p:spPr>
         <p:txBody>
-          <a:bodyPr vert="horz" lIns="91440" tIns="45720" rIns="91440" bIns="45720" rtlCol="0">
+          <a:bodyPr>
             <a:normAutofit/>
           </a:bodyPr>
-          <a:lstStyle>
-            <a:lvl1pPr marL="0" indent="0" algn="l" defTabSz="914400" rtl="0" eaLnBrk="1" latinLnBrk="0" hangingPunct="1">
-              <a:lnSpc>
-                <a:spcPct val="90000"/>
-              </a:lnSpc>
-              <a:spcBef>
-                <a:spcPts val="1200"/>
-              </a:spcBef>
-              <a:spcAft>
-                <a:spcPts val="200"/>
-              </a:spcAft>
-              <a:buClr>
-                <a:schemeClr val="accent1"/>
-              </a:buClr>
-              <a:buSzPct val="100000"/>
-              <a:buFont typeface="Calibri" panose="020F0502020204030204" pitchFamily="34" charset="0"/>
-              <a:buNone/>
-              <a:defRPr sz="1500" kern="1200">
-                <a:solidFill>
-                  <a:srgbClr val="FFFFFF"/>
-                </a:solidFill>
-                <a:latin typeface="+mn-lt"/>
-                <a:ea typeface="+mn-ea"/>
-                <a:cs typeface="+mn-cs"/>
-              </a:defRPr>
-            </a:lvl1pPr>
-            <a:lvl2pPr marL="457200" indent="0" algn="l" defTabSz="914400" rtl="0" eaLnBrk="1" latinLnBrk="0" hangingPunct="1">
-              <a:lnSpc>
-                <a:spcPct val="90000"/>
-              </a:lnSpc>
-              <a:spcBef>
-                <a:spcPts val="200"/>
-              </a:spcBef>
-              <a:spcAft>
-                <a:spcPts val="400"/>
-              </a:spcAft>
-              <a:buClr>
-                <a:schemeClr val="accent1"/>
-              </a:buClr>
-              <a:buFont typeface="Calibri" pitchFamily="34" charset="0"/>
-              <a:buNone/>
-              <a:defRPr sz="1200" kern="1200">
-                <a:solidFill>
-                  <a:schemeClr val="tx1">
-                    <a:lumMod val="75000"/>
-                    <a:lumOff val="25000"/>
-                  </a:schemeClr>
-                </a:solidFill>
-                <a:latin typeface="+mn-lt"/>
-                <a:ea typeface="+mn-ea"/>
-                <a:cs typeface="+mn-cs"/>
-              </a:defRPr>
-            </a:lvl2pPr>
-            <a:lvl3pPr marL="914400" indent="0" algn="l" defTabSz="914400" rtl="0" eaLnBrk="1" latinLnBrk="0" hangingPunct="1">
-              <a:lnSpc>
-                <a:spcPct val="90000"/>
-              </a:lnSpc>
-              <a:spcBef>
-                <a:spcPts val="200"/>
-              </a:spcBef>
-              <a:spcAft>
-                <a:spcPts val="400"/>
-              </a:spcAft>
-              <a:buClr>
-                <a:schemeClr val="accent1"/>
-              </a:buClr>
-              <a:buFont typeface="Calibri" pitchFamily="34" charset="0"/>
-              <a:buNone/>
-              <a:defRPr sz="1000" kern="1200">
-                <a:solidFill>
-                  <a:schemeClr val="tx1">
-                    <a:lumMod val="75000"/>
-                    <a:lumOff val="25000"/>
-                  </a:schemeClr>
-                </a:solidFill>
-                <a:latin typeface="+mn-lt"/>
-                <a:ea typeface="+mn-ea"/>
-                <a:cs typeface="+mn-cs"/>
-              </a:defRPr>
-            </a:lvl3pPr>
-            <a:lvl4pPr marL="1371600" indent="0" algn="l" defTabSz="914400" rtl="0" eaLnBrk="1" latinLnBrk="0" hangingPunct="1">
-              <a:lnSpc>
-                <a:spcPct val="90000"/>
-              </a:lnSpc>
-              <a:spcBef>
-                <a:spcPts val="200"/>
-              </a:spcBef>
-              <a:spcAft>
-                <a:spcPts val="400"/>
-              </a:spcAft>
-              <a:buClr>
-                <a:schemeClr val="accent1"/>
-              </a:buClr>
-              <a:buFont typeface="Calibri" pitchFamily="34" charset="0"/>
-              <a:buNone/>
-              <a:defRPr sz="900" kern="1200">
-                <a:solidFill>
-                  <a:schemeClr val="tx1">
-                    <a:lumMod val="75000"/>
-                    <a:lumOff val="25000"/>
-                  </a:schemeClr>
-                </a:solidFill>
-                <a:latin typeface="+mn-lt"/>
-                <a:ea typeface="+mn-ea"/>
-                <a:cs typeface="+mn-cs"/>
-              </a:defRPr>
-            </a:lvl4pPr>
-            <a:lvl5pPr marL="1828800" indent="0" algn="l" defTabSz="914400" rtl="0" eaLnBrk="1" latinLnBrk="0" hangingPunct="1">
-              <a:lnSpc>
-                <a:spcPct val="90000"/>
-              </a:lnSpc>
-              <a:spcBef>
-                <a:spcPts val="200"/>
-              </a:spcBef>
-              <a:spcAft>
-                <a:spcPts val="400"/>
-              </a:spcAft>
-              <a:buClr>
-                <a:schemeClr val="accent1"/>
-              </a:buClr>
-              <a:buFont typeface="Calibri" pitchFamily="34" charset="0"/>
-              <a:buNone/>
-              <a:defRPr sz="900" kern="1200">
-                <a:solidFill>
-                  <a:schemeClr val="tx1">
-                    <a:lumMod val="75000"/>
-                    <a:lumOff val="25000"/>
-                  </a:schemeClr>
-                </a:solidFill>
-                <a:latin typeface="+mn-lt"/>
-                <a:ea typeface="+mn-ea"/>
-                <a:cs typeface="+mn-cs"/>
-              </a:defRPr>
-            </a:lvl5pPr>
-            <a:lvl6pPr marL="2286000" indent="0" algn="l" defTabSz="914400" rtl="0" eaLnBrk="1" latinLnBrk="0" hangingPunct="1">
-              <a:lnSpc>
-                <a:spcPct val="90000"/>
-              </a:lnSpc>
-              <a:spcBef>
-                <a:spcPts val="200"/>
-              </a:spcBef>
-              <a:spcAft>
-                <a:spcPts val="400"/>
-              </a:spcAft>
-              <a:buClr>
-                <a:schemeClr val="accent1"/>
-              </a:buClr>
-              <a:buFont typeface="Calibri" pitchFamily="34" charset="0"/>
-              <a:buNone/>
-              <a:defRPr sz="900" kern="1200">
-                <a:solidFill>
-                  <a:schemeClr val="tx1">
-                    <a:lumMod val="75000"/>
-                    <a:lumOff val="25000"/>
-                  </a:schemeClr>
-                </a:solidFill>
-                <a:latin typeface="+mn-lt"/>
-                <a:ea typeface="+mn-ea"/>
-                <a:cs typeface="+mn-cs"/>
-              </a:defRPr>
-            </a:lvl6pPr>
-            <a:lvl7pPr marL="2743200" indent="0" algn="l" defTabSz="914400" rtl="0" eaLnBrk="1" latinLnBrk="0" hangingPunct="1">
-              <a:lnSpc>
-                <a:spcPct val="90000"/>
-              </a:lnSpc>
-              <a:spcBef>
-                <a:spcPts val="200"/>
-              </a:spcBef>
-              <a:spcAft>
-                <a:spcPts val="400"/>
-              </a:spcAft>
-              <a:buClr>
-                <a:schemeClr val="accent1"/>
-              </a:buClr>
-              <a:buFont typeface="Calibri" pitchFamily="34" charset="0"/>
-              <a:buNone/>
-              <a:defRPr sz="900" kern="1200">
-                <a:solidFill>
-                  <a:schemeClr val="tx1">
-                    <a:lumMod val="75000"/>
-                    <a:lumOff val="25000"/>
-                  </a:schemeClr>
-                </a:solidFill>
-                <a:latin typeface="+mn-lt"/>
-                <a:ea typeface="+mn-ea"/>
-                <a:cs typeface="+mn-cs"/>
-              </a:defRPr>
-            </a:lvl7pPr>
-            <a:lvl8pPr marL="3200400" indent="0" algn="l" defTabSz="914400" rtl="0" eaLnBrk="1" latinLnBrk="0" hangingPunct="1">
-              <a:lnSpc>
-                <a:spcPct val="90000"/>
-              </a:lnSpc>
-              <a:spcBef>
-                <a:spcPts val="200"/>
-              </a:spcBef>
-              <a:spcAft>
-                <a:spcPts val="400"/>
-              </a:spcAft>
-              <a:buClr>
-                <a:schemeClr val="accent1"/>
-              </a:buClr>
-              <a:buFont typeface="Calibri" pitchFamily="34" charset="0"/>
-              <a:buNone/>
-              <a:defRPr sz="900" kern="1200">
-                <a:solidFill>
-                  <a:schemeClr val="tx1">
-                    <a:lumMod val="75000"/>
-                    <a:lumOff val="25000"/>
-                  </a:schemeClr>
-                </a:solidFill>
-                <a:latin typeface="+mn-lt"/>
-                <a:ea typeface="+mn-ea"/>
-                <a:cs typeface="+mn-cs"/>
-              </a:defRPr>
-            </a:lvl8pPr>
-            <a:lvl9pPr marL="3657600" indent="0" algn="l" defTabSz="914400" rtl="0" eaLnBrk="1" latinLnBrk="0" hangingPunct="1">
-              <a:lnSpc>
-                <a:spcPct val="90000"/>
-              </a:lnSpc>
-              <a:spcBef>
-                <a:spcPts val="200"/>
-              </a:spcBef>
-              <a:spcAft>
-                <a:spcPts val="400"/>
-              </a:spcAft>
-              <a:buClr>
-                <a:schemeClr val="accent1"/>
-              </a:buClr>
-              <a:buFont typeface="Calibri" pitchFamily="34" charset="0"/>
-              <a:buNone/>
-              <a:defRPr sz="900" kern="1200">
-                <a:solidFill>
-                  <a:schemeClr val="tx1">
-                    <a:lumMod val="75000"/>
-                    <a:lumOff val="25000"/>
-                  </a:schemeClr>
-                </a:solidFill>
-                <a:latin typeface="+mn-lt"/>
-                <a:ea typeface="+mn-ea"/>
-                <a:cs typeface="+mn-cs"/>
-              </a:defRPr>
-            </a:lvl9pPr>
-          </a:lstStyle>
+          <a:lstStyle/>
           <a:p>
             <a:pPr marL="285750" indent="-285750">
               <a:buClr>
@@ -11931,9 +9589,37 @@
               <a:buChar char="•"/>
             </a:pPr>
             <a:r>
-              <a:rPr lang="hu-HU" sz="1800"/>
-              <a:t>User</a:t>
-            </a:r>
+              <a:rPr lang="hu-HU" sz="2000" dirty="0"/>
+              <a:t>Vue.js 3</a:t>
+            </a:r>
+          </a:p>
+          <a:p>
+            <a:pPr marL="285750" indent="-285750">
+              <a:buClr>
+                <a:schemeClr val="bg1"/>
+              </a:buClr>
+              <a:buFont typeface="Arial" panose="020B0604020202020204" pitchFamily="34" charset="0"/>
+              <a:buChar char="•"/>
+            </a:pPr>
+            <a:r>
+              <a:rPr lang="hu-HU" sz="2000" dirty="0" err="1"/>
+              <a:t>Axios</a:t>
+            </a:r>
+            <a:endParaRPr lang="hu-HU" sz="2000" dirty="0"/>
+          </a:p>
+          <a:p>
+            <a:pPr marL="285750" indent="-285750">
+              <a:buClr>
+                <a:schemeClr val="bg1"/>
+              </a:buClr>
+              <a:buFont typeface="Arial" panose="020B0604020202020204" pitchFamily="34" charset="0"/>
+              <a:buChar char="•"/>
+            </a:pPr>
+            <a:r>
+              <a:rPr lang="hu-HU" sz="2000" dirty="0" err="1"/>
+              <a:t>Bootstrap</a:t>
+            </a:r>
+            <a:endParaRPr lang="hu-HU" sz="2000" dirty="0"/>
           </a:p>
           <a:p>
             <a:pPr marL="285750" indent="-285750">
@@ -11945,12 +9631,756 @@
             </a:pPr>
             <a:endParaRPr lang="hu-HU" sz="1800" dirty="0"/>
           </a:p>
+          <a:p>
+            <a:pPr marL="285750" indent="-285750">
+              <a:buClr>
+                <a:schemeClr val="bg1"/>
+              </a:buClr>
+              <a:buFont typeface="Arial" panose="020B0604020202020204" pitchFamily="34" charset="0"/>
+              <a:buChar char="•"/>
+            </a:pPr>
+            <a:endParaRPr lang="hu-HU" sz="1800" dirty="0"/>
+          </a:p>
+          <a:p>
+            <a:pPr marL="285750" indent="-285750">
+              <a:buClr>
+                <a:schemeClr val="bg1"/>
+              </a:buClr>
+              <a:buFont typeface="Arial" panose="020B0604020202020204" pitchFamily="34" charset="0"/>
+              <a:buChar char="•"/>
+            </a:pPr>
+            <a:endParaRPr lang="hu-HU" sz="1800" dirty="0"/>
+          </a:p>
         </p:txBody>
       </p:sp>
+      <p:sp>
+        <p:nvSpPr>
+          <p:cNvPr id="6" name="Cím 1">
+            <a:extLst>
+              <a:ext uri="{FF2B5EF4-FFF2-40B4-BE49-F238E27FC236}">
+                <a16:creationId xmlns:a16="http://schemas.microsoft.com/office/drawing/2014/main" id="{56BAE57D-1584-4B02-A4E9-FF150F42817A}"/>
+              </a:ext>
+            </a:extLst>
+          </p:cNvPr>
+          <p:cNvSpPr>
+            <a:spLocks noGrp="1"/>
+          </p:cNvSpPr>
+          <p:nvPr>
+            <p:ph type="title"/>
+          </p:nvPr>
+        </p:nvSpPr>
+        <p:spPr>
+          <a:xfrm>
+            <a:off x="457200" y="622934"/>
+            <a:ext cx="3200400" cy="2286000"/>
+          </a:xfrm>
+        </p:spPr>
+        <p:txBody>
+          <a:bodyPr/>
+          <a:lstStyle/>
+          <a:p>
+            <a:r>
+              <a:rPr lang="hu-HU" dirty="0">
+                <a:latin typeface="Bahnschrift SemiBold" panose="020B0502040204020203" pitchFamily="34" charset="0"/>
+              </a:rPr>
+              <a:t>Frontend</a:t>
+            </a:r>
+          </a:p>
+        </p:txBody>
+      </p:sp>
+      <p:pic>
+        <p:nvPicPr>
+          <p:cNvPr id="3" name="Kép 2">
+            <a:extLst>
+              <a:ext uri="{FF2B5EF4-FFF2-40B4-BE49-F238E27FC236}">
+                <a16:creationId xmlns:a16="http://schemas.microsoft.com/office/drawing/2014/main" id="{3D03ACE2-F537-4DD5-8C31-221864AAC315}"/>
+              </a:ext>
+            </a:extLst>
+          </p:cNvPr>
+          <p:cNvPicPr>
+            <a:picLocks noChangeAspect="1"/>
+          </p:cNvPicPr>
+          <p:nvPr/>
+        </p:nvPicPr>
+        <p:blipFill rotWithShape="1">
+          <a:blip r:embed="rId3"/>
+          <a:srcRect l="5377" t="5911" r="45001" b="3142"/>
+          <a:stretch/>
+        </p:blipFill>
+        <p:spPr>
+          <a:xfrm>
+            <a:off x="5138832" y="1081087"/>
+            <a:ext cx="2552700" cy="4695825"/>
+          </a:xfrm>
+          <a:prstGeom prst="rect">
+            <a:avLst/>
+          </a:prstGeom>
+          <a:ln w="76200" cap="sq">
+            <a:solidFill>
+              <a:srgbClr val="E48312"/>
+            </a:solidFill>
+            <a:miter lim="800000"/>
+          </a:ln>
+          <a:effectLst>
+            <a:outerShdw blurRad="57150" dist="50800" dir="2700000" algn="tl" rotWithShape="0">
+              <a:srgbClr val="000000">
+                <a:alpha val="40000"/>
+              </a:srgbClr>
+            </a:outerShdw>
+          </a:effectLst>
+        </p:spPr>
+      </p:pic>
+      <p:pic>
+        <p:nvPicPr>
+          <p:cNvPr id="7" name="Kép 6">
+            <a:extLst>
+              <a:ext uri="{FF2B5EF4-FFF2-40B4-BE49-F238E27FC236}">
+                <a16:creationId xmlns:a16="http://schemas.microsoft.com/office/drawing/2014/main" id="{A710C213-02AB-4860-89DB-F1799A2881B1}"/>
+              </a:ext>
+            </a:extLst>
+          </p:cNvPr>
+          <p:cNvPicPr>
+            <a:picLocks noChangeAspect="1"/>
+          </p:cNvPicPr>
+          <p:nvPr/>
+        </p:nvPicPr>
+        <p:blipFill rotWithShape="1">
+          <a:blip r:embed="rId4"/>
+          <a:srcRect l="5647"/>
+          <a:stretch/>
+        </p:blipFill>
+        <p:spPr>
+          <a:xfrm>
+            <a:off x="8448864" y="2530640"/>
+            <a:ext cx="2552700" cy="2181529"/>
+          </a:xfrm>
+          <a:prstGeom prst="rect">
+            <a:avLst/>
+          </a:prstGeom>
+          <a:ln w="76200" cap="sq">
+            <a:solidFill>
+              <a:srgbClr val="E48312"/>
+            </a:solidFill>
+            <a:miter lim="800000"/>
+          </a:ln>
+          <a:effectLst>
+            <a:outerShdw blurRad="57150" dist="50800" dir="2700000" algn="tl" rotWithShape="0">
+              <a:srgbClr val="000000">
+                <a:alpha val="40000"/>
+              </a:srgbClr>
+            </a:outerShdw>
+          </a:effectLst>
+        </p:spPr>
+      </p:pic>
+      <p:grpSp>
+        <p:nvGrpSpPr>
+          <p:cNvPr id="8" name="Csoportba foglalás 7">
+            <a:extLst>
+              <a:ext uri="{FF2B5EF4-FFF2-40B4-BE49-F238E27FC236}">
+                <a16:creationId xmlns:a16="http://schemas.microsoft.com/office/drawing/2014/main" id="{BD8D9C24-6A98-4359-8A9D-3FEAE8066B38}"/>
+              </a:ext>
+            </a:extLst>
+          </p:cNvPr>
+          <p:cNvGrpSpPr/>
+          <p:nvPr/>
+        </p:nvGrpSpPr>
+        <p:grpSpPr>
+          <a:xfrm>
+            <a:off x="10565538" y="349786"/>
+            <a:ext cx="1418895" cy="1258023"/>
+            <a:chOff x="10565538" y="349786"/>
+            <a:chExt cx="1418895" cy="1258023"/>
+          </a:xfrm>
+        </p:grpSpPr>
+        <p:pic>
+          <p:nvPicPr>
+            <p:cNvPr id="9" name="Kép 8">
+              <a:extLst>
+                <a:ext uri="{FF2B5EF4-FFF2-40B4-BE49-F238E27FC236}">
+                  <a16:creationId xmlns:a16="http://schemas.microsoft.com/office/drawing/2014/main" id="{38EFA0F7-79F5-4841-B0B4-BA913AF4FF00}"/>
+                </a:ext>
+              </a:extLst>
+            </p:cNvPr>
+            <p:cNvPicPr>
+              <a:picLocks noChangeAspect="1"/>
+            </p:cNvPicPr>
+            <p:nvPr/>
+          </p:nvPicPr>
+          <p:blipFill rotWithShape="1">
+            <a:blip r:embed="rId5">
+              <a:alphaModFix amt="50000"/>
+              <a:extLst>
+                <a:ext uri="{28A0092B-C50C-407E-A947-70E740481C1C}">
+                  <a14:useLocalDpi xmlns:a14="http://schemas.microsoft.com/office/drawing/2010/main" val="0"/>
+                </a:ext>
+              </a:extLst>
+            </a:blip>
+            <a:srcRect t="58555" r="67375"/>
+            <a:stretch/>
+          </p:blipFill>
+          <p:spPr>
+            <a:xfrm>
+              <a:off x="10619475" y="1036308"/>
+              <a:ext cx="1364958" cy="571501"/>
+            </a:xfrm>
+            <a:prstGeom prst="rect">
+              <a:avLst/>
+            </a:prstGeom>
+          </p:spPr>
+        </p:pic>
+        <p:pic>
+          <p:nvPicPr>
+            <p:cNvPr id="10" name="Kép 9">
+              <a:extLst>
+                <a:ext uri="{FF2B5EF4-FFF2-40B4-BE49-F238E27FC236}">
+                  <a16:creationId xmlns:a16="http://schemas.microsoft.com/office/drawing/2014/main" id="{BDF66BF5-56DB-473D-A8D7-100866CBF00E}"/>
+                </a:ext>
+              </a:extLst>
+            </p:cNvPr>
+            <p:cNvPicPr>
+              <a:picLocks noChangeAspect="1"/>
+            </p:cNvPicPr>
+            <p:nvPr/>
+          </p:nvPicPr>
+          <p:blipFill rotWithShape="1">
+            <a:blip r:embed="rId5">
+              <a:alphaModFix amt="50000"/>
+              <a:extLst>
+                <a:ext uri="{28A0092B-C50C-407E-A947-70E740481C1C}">
+                  <a14:useLocalDpi xmlns:a14="http://schemas.microsoft.com/office/drawing/2010/main" val="0"/>
+                </a:ext>
+              </a:extLst>
+            </a:blip>
+            <a:srcRect l="1" r="61666" b="38896"/>
+            <a:stretch/>
+          </p:blipFill>
+          <p:spPr>
+            <a:xfrm>
+              <a:off x="10565538" y="349786"/>
+              <a:ext cx="1418895" cy="745451"/>
+            </a:xfrm>
+            <a:prstGeom prst="rect">
+              <a:avLst/>
+            </a:prstGeom>
+          </p:spPr>
+        </p:pic>
+      </p:grpSp>
     </p:spTree>
     <p:extLst>
       <p:ext uri="{BB962C8B-B14F-4D97-AF65-F5344CB8AC3E}">
-        <p14:creationId xmlns:p14="http://schemas.microsoft.com/office/powerpoint/2010/main" val="1709693890"/>
+        <p14:creationId xmlns:p14="http://schemas.microsoft.com/office/powerpoint/2010/main" val="2480736290"/>
+      </p:ext>
+    </p:extLst>
+  </p:cSld>
+  <p:clrMapOvr>
+    <a:masterClrMapping/>
+  </p:clrMapOvr>
+</p:sld>
+</file>
+
+<file path=ppt/slides/slide8.xml><?xml version="1.0" encoding="utf-8"?>
+<p:sld xmlns:a="http://schemas.openxmlformats.org/drawingml/2006/main" xmlns:r="http://schemas.openxmlformats.org/officeDocument/2006/relationships" xmlns:p="http://schemas.openxmlformats.org/presentationml/2006/main">
+  <p:cSld>
+    <p:bg>
+      <p:bgPr>
+        <a:solidFill>
+          <a:srgbClr val="FDF7E9"/>
+        </a:solidFill>
+        <a:effectLst/>
+      </p:bgPr>
+    </p:bg>
+    <p:spTree>
+      <p:nvGrpSpPr>
+        <p:cNvPr id="1" name=""/>
+        <p:cNvGrpSpPr/>
+        <p:nvPr/>
+      </p:nvGrpSpPr>
+      <p:grpSpPr>
+        <a:xfrm>
+          <a:off x="0" y="0"/>
+          <a:ext cx="0" cy="0"/>
+          <a:chOff x="0" y="0"/>
+          <a:chExt cx="0" cy="0"/>
+        </a:xfrm>
+      </p:grpSpPr>
+      <p:sp>
+        <p:nvSpPr>
+          <p:cNvPr id="3" name="Tartalom helye 2">
+            <a:extLst>
+              <a:ext uri="{FF2B5EF4-FFF2-40B4-BE49-F238E27FC236}">
+                <a16:creationId xmlns:a16="http://schemas.microsoft.com/office/drawing/2014/main" id="{32758DB2-9D10-47A2-925C-F8A858558A07}"/>
+              </a:ext>
+            </a:extLst>
+          </p:cNvPr>
+          <p:cNvSpPr>
+            <a:spLocks noGrp="1"/>
+          </p:cNvSpPr>
+          <p:nvPr>
+            <p:ph idx="1"/>
+          </p:nvPr>
+        </p:nvSpPr>
+        <p:spPr>
+          <a:xfrm>
+            <a:off x="1243554" y="1911310"/>
+            <a:ext cx="10058400" cy="4023360"/>
+          </a:xfrm>
+        </p:spPr>
+        <p:txBody>
+          <a:bodyPr/>
+          <a:lstStyle/>
+          <a:p>
+            <a:pPr>
+              <a:buFont typeface="Arial" panose="020B0604020202020204" pitchFamily="34" charset="0"/>
+              <a:buChar char="•"/>
+            </a:pPr>
+            <a:r>
+              <a:rPr lang="hu-HU" dirty="0"/>
+              <a:t> 18 tábla</a:t>
+            </a:r>
+          </a:p>
+          <a:p>
+            <a:pPr>
+              <a:buFont typeface="Arial" panose="020B0604020202020204" pitchFamily="34" charset="0"/>
+              <a:buChar char="•"/>
+            </a:pPr>
+            <a:r>
+              <a:rPr lang="hu-HU" dirty="0"/>
+              <a:t> Mintaadatok</a:t>
+            </a:r>
+          </a:p>
+          <a:p>
+            <a:endParaRPr lang="hu-HU" dirty="0"/>
+          </a:p>
+        </p:txBody>
+      </p:sp>
+      <p:sp>
+        <p:nvSpPr>
+          <p:cNvPr id="4" name="Cím 1">
+            <a:extLst>
+              <a:ext uri="{FF2B5EF4-FFF2-40B4-BE49-F238E27FC236}">
+                <a16:creationId xmlns:a16="http://schemas.microsoft.com/office/drawing/2014/main" id="{1BABF97B-7E63-454C-9CDB-F386138F1BAA}"/>
+              </a:ext>
+            </a:extLst>
+          </p:cNvPr>
+          <p:cNvSpPr>
+            <a:spLocks noGrp="1"/>
+          </p:cNvSpPr>
+          <p:nvPr>
+            <p:ph type="title"/>
+          </p:nvPr>
+        </p:nvSpPr>
+        <p:spPr>
+          <a:xfrm>
+            <a:off x="1097280" y="286603"/>
+            <a:ext cx="10058400" cy="1450757"/>
+          </a:xfrm>
+        </p:spPr>
+        <p:txBody>
+          <a:bodyPr/>
+          <a:lstStyle/>
+          <a:p>
+            <a:r>
+              <a:rPr lang="hu-HU" b="1" dirty="0">
+                <a:latin typeface="Bahnschrift SemiBold" panose="020B0502040204020203" pitchFamily="34" charset="0"/>
+              </a:rPr>
+              <a:t>Adatbázis</a:t>
+            </a:r>
+          </a:p>
+        </p:txBody>
+      </p:sp>
+      <p:grpSp>
+        <p:nvGrpSpPr>
+          <p:cNvPr id="7" name="Csoportba foglalás 6">
+            <a:extLst>
+              <a:ext uri="{FF2B5EF4-FFF2-40B4-BE49-F238E27FC236}">
+                <a16:creationId xmlns:a16="http://schemas.microsoft.com/office/drawing/2014/main" id="{E802B2B8-8A4C-4A1C-A3DA-1085A7D5C7F6}"/>
+              </a:ext>
+            </a:extLst>
+          </p:cNvPr>
+          <p:cNvGrpSpPr/>
+          <p:nvPr/>
+        </p:nvGrpSpPr>
+        <p:grpSpPr>
+          <a:xfrm>
+            <a:off x="10565538" y="349786"/>
+            <a:ext cx="1418895" cy="1258023"/>
+            <a:chOff x="10565538" y="349786"/>
+            <a:chExt cx="1418895" cy="1258023"/>
+          </a:xfrm>
+        </p:grpSpPr>
+        <p:pic>
+          <p:nvPicPr>
+            <p:cNvPr id="8" name="Kép 7">
+              <a:extLst>
+                <a:ext uri="{FF2B5EF4-FFF2-40B4-BE49-F238E27FC236}">
+                  <a16:creationId xmlns:a16="http://schemas.microsoft.com/office/drawing/2014/main" id="{2F280203-E1A7-4586-A915-B522FFD90496}"/>
+                </a:ext>
+              </a:extLst>
+            </p:cNvPr>
+            <p:cNvPicPr>
+              <a:picLocks noChangeAspect="1"/>
+            </p:cNvPicPr>
+            <p:nvPr/>
+          </p:nvPicPr>
+          <p:blipFill rotWithShape="1">
+            <a:blip r:embed="rId2">
+              <a:alphaModFix amt="50000"/>
+              <a:extLst>
+                <a:ext uri="{28A0092B-C50C-407E-A947-70E740481C1C}">
+                  <a14:useLocalDpi xmlns:a14="http://schemas.microsoft.com/office/drawing/2010/main" val="0"/>
+                </a:ext>
+              </a:extLst>
+            </a:blip>
+            <a:srcRect t="58555" r="67375"/>
+            <a:stretch/>
+          </p:blipFill>
+          <p:spPr>
+            <a:xfrm>
+              <a:off x="10619475" y="1036308"/>
+              <a:ext cx="1364958" cy="571501"/>
+            </a:xfrm>
+            <a:prstGeom prst="rect">
+              <a:avLst/>
+            </a:prstGeom>
+          </p:spPr>
+        </p:pic>
+        <p:pic>
+          <p:nvPicPr>
+            <p:cNvPr id="9" name="Kép 8">
+              <a:extLst>
+                <a:ext uri="{FF2B5EF4-FFF2-40B4-BE49-F238E27FC236}">
+                  <a16:creationId xmlns:a16="http://schemas.microsoft.com/office/drawing/2014/main" id="{90937401-8474-4C4C-8353-0BC085D4C997}"/>
+                </a:ext>
+              </a:extLst>
+            </p:cNvPr>
+            <p:cNvPicPr>
+              <a:picLocks noChangeAspect="1"/>
+            </p:cNvPicPr>
+            <p:nvPr/>
+          </p:nvPicPr>
+          <p:blipFill rotWithShape="1">
+            <a:blip r:embed="rId2">
+              <a:alphaModFix amt="50000"/>
+              <a:extLst>
+                <a:ext uri="{28A0092B-C50C-407E-A947-70E740481C1C}">
+                  <a14:useLocalDpi xmlns:a14="http://schemas.microsoft.com/office/drawing/2010/main" val="0"/>
+                </a:ext>
+              </a:extLst>
+            </a:blip>
+            <a:srcRect l="1" r="61666" b="38896"/>
+            <a:stretch/>
+          </p:blipFill>
+          <p:spPr>
+            <a:xfrm>
+              <a:off x="10565538" y="349786"/>
+              <a:ext cx="1418895" cy="745451"/>
+            </a:xfrm>
+            <a:prstGeom prst="rect">
+              <a:avLst/>
+            </a:prstGeom>
+          </p:spPr>
+        </p:pic>
+      </p:grpSp>
+      <p:pic>
+        <p:nvPicPr>
+          <p:cNvPr id="5" name="Kép 4">
+            <a:extLst>
+              <a:ext uri="{FF2B5EF4-FFF2-40B4-BE49-F238E27FC236}">
+                <a16:creationId xmlns:a16="http://schemas.microsoft.com/office/drawing/2014/main" id="{12F1D82F-A13E-4282-A8D3-3080BA7F58C4}"/>
+              </a:ext>
+            </a:extLst>
+          </p:cNvPr>
+          <p:cNvPicPr>
+            <a:picLocks noChangeAspect="1"/>
+          </p:cNvPicPr>
+          <p:nvPr/>
+        </p:nvPicPr>
+        <p:blipFill rotWithShape="1">
+          <a:blip r:embed="rId3"/>
+          <a:srcRect l="7840" t="-648" r="28565" b="-478"/>
+          <a:stretch/>
+        </p:blipFill>
+        <p:spPr>
+          <a:xfrm>
+            <a:off x="1600330" y="2929002"/>
+            <a:ext cx="2435383" cy="3005668"/>
+          </a:xfrm>
+          <a:prstGeom prst="rect">
+            <a:avLst/>
+          </a:prstGeom>
+          <a:ln w="76200" cap="sq">
+            <a:solidFill>
+              <a:srgbClr val="E48312"/>
+            </a:solidFill>
+            <a:miter lim="800000"/>
+          </a:ln>
+          <a:effectLst>
+            <a:outerShdw blurRad="57150" dist="50800" dir="2700000" algn="tl" rotWithShape="0">
+              <a:srgbClr val="000000">
+                <a:alpha val="40000"/>
+              </a:srgbClr>
+            </a:outerShdw>
+          </a:effectLst>
+        </p:spPr>
+      </p:pic>
+      <p:pic>
+        <p:nvPicPr>
+          <p:cNvPr id="16" name="Kép 15">
+            <a:extLst>
+              <a:ext uri="{FF2B5EF4-FFF2-40B4-BE49-F238E27FC236}">
+                <a16:creationId xmlns:a16="http://schemas.microsoft.com/office/drawing/2014/main" id="{8C8BC51D-DF64-430A-A8BB-E07E485D991E}"/>
+              </a:ext>
+            </a:extLst>
+          </p:cNvPr>
+          <p:cNvPicPr>
+            <a:picLocks noChangeAspect="1"/>
+          </p:cNvPicPr>
+          <p:nvPr/>
+        </p:nvPicPr>
+        <p:blipFill rotWithShape="1">
+          <a:blip r:embed="rId4"/>
+          <a:srcRect l="4470" t="6179" r="12388" b="1762"/>
+          <a:stretch/>
+        </p:blipFill>
+        <p:spPr>
+          <a:xfrm>
+            <a:off x="5825643" y="1800543"/>
+            <a:ext cx="5833087" cy="4338393"/>
+          </a:xfrm>
+          <a:prstGeom prst="rect">
+            <a:avLst/>
+          </a:prstGeom>
+          <a:ln w="76200" cap="sq">
+            <a:solidFill>
+              <a:srgbClr val="E48312"/>
+            </a:solidFill>
+            <a:miter lim="800000"/>
+          </a:ln>
+          <a:effectLst>
+            <a:outerShdw blurRad="57150" dist="50800" dir="2700000" algn="tl" rotWithShape="0">
+              <a:srgbClr val="000000">
+                <a:alpha val="40000"/>
+              </a:srgbClr>
+            </a:outerShdw>
+          </a:effectLst>
+        </p:spPr>
+      </p:pic>
+    </p:spTree>
+    <p:extLst>
+      <p:ext uri="{BB962C8B-B14F-4D97-AF65-F5344CB8AC3E}">
+        <p14:creationId xmlns:p14="http://schemas.microsoft.com/office/powerpoint/2010/main" val="1438799303"/>
+      </p:ext>
+    </p:extLst>
+  </p:cSld>
+  <p:clrMapOvr>
+    <a:masterClrMapping/>
+  </p:clrMapOvr>
+</p:sld>
+</file>
+
+<file path=ppt/slides/slide9.xml><?xml version="1.0" encoding="utf-8"?>
+<p:sld xmlns:a="http://schemas.openxmlformats.org/drawingml/2006/main" xmlns:r="http://schemas.openxmlformats.org/officeDocument/2006/relationships" xmlns:p="http://schemas.openxmlformats.org/presentationml/2006/main">
+  <p:cSld>
+    <p:bg>
+      <p:bgPr>
+        <a:solidFill>
+          <a:srgbClr val="FDF7E9"/>
+        </a:solidFill>
+        <a:effectLst/>
+      </p:bgPr>
+    </p:bg>
+    <p:spTree>
+      <p:nvGrpSpPr>
+        <p:cNvPr id="1" name=""/>
+        <p:cNvGrpSpPr/>
+        <p:nvPr/>
+      </p:nvGrpSpPr>
+      <p:grpSpPr>
+        <a:xfrm>
+          <a:off x="0" y="0"/>
+          <a:ext cx="0" cy="0"/>
+          <a:chOff x="0" y="0"/>
+          <a:chExt cx="0" cy="0"/>
+        </a:xfrm>
+      </p:grpSpPr>
+      <p:sp>
+        <p:nvSpPr>
+          <p:cNvPr id="2" name="Cím 1">
+            <a:extLst>
+              <a:ext uri="{FF2B5EF4-FFF2-40B4-BE49-F238E27FC236}">
+                <a16:creationId xmlns:a16="http://schemas.microsoft.com/office/drawing/2014/main" id="{755F2576-93E3-4E11-AD5A-5982C144E204}"/>
+              </a:ext>
+            </a:extLst>
+          </p:cNvPr>
+          <p:cNvSpPr>
+            <a:spLocks noGrp="1"/>
+          </p:cNvSpPr>
+          <p:nvPr>
+            <p:ph type="title"/>
+          </p:nvPr>
+        </p:nvSpPr>
+        <p:spPr>
+          <a:xfrm>
+            <a:off x="457200" y="622934"/>
+            <a:ext cx="3200400" cy="2286000"/>
+          </a:xfrm>
+        </p:spPr>
+        <p:txBody>
+          <a:bodyPr/>
+          <a:lstStyle/>
+          <a:p>
+            <a:r>
+              <a:rPr lang="hu-HU" dirty="0" err="1">
+                <a:latin typeface="Bahnschrift SemiBold" panose="020B0502040204020203" pitchFamily="34" charset="0"/>
+              </a:rPr>
+              <a:t>Reszponzivitás</a:t>
+            </a:r>
+            <a:endParaRPr lang="hu-HU" dirty="0">
+              <a:latin typeface="Bahnschrift SemiBold" panose="020B0502040204020203" pitchFamily="34" charset="0"/>
+            </a:endParaRPr>
+          </a:p>
+        </p:txBody>
+      </p:sp>
+      <p:sp>
+        <p:nvSpPr>
+          <p:cNvPr id="4" name="Szöveg helye 3">
+            <a:extLst>
+              <a:ext uri="{FF2B5EF4-FFF2-40B4-BE49-F238E27FC236}">
+                <a16:creationId xmlns:a16="http://schemas.microsoft.com/office/drawing/2014/main" id="{E1483CC7-2FF0-4B57-872B-832994FD7836}"/>
+              </a:ext>
+            </a:extLst>
+          </p:cNvPr>
+          <p:cNvSpPr>
+            <a:spLocks noGrp="1"/>
+          </p:cNvSpPr>
+          <p:nvPr>
+            <p:ph type="body" sz="half" idx="2"/>
+          </p:nvPr>
+        </p:nvSpPr>
+        <p:spPr>
+          <a:xfrm>
+            <a:off x="704850" y="3259455"/>
+            <a:ext cx="3562350" cy="3684270"/>
+          </a:xfrm>
+        </p:spPr>
+        <p:txBody>
+          <a:bodyPr>
+            <a:normAutofit/>
+          </a:bodyPr>
+          <a:lstStyle/>
+          <a:p>
+            <a:pPr marL="285750" indent="-285750">
+              <a:buClr>
+                <a:schemeClr val="bg1"/>
+              </a:buClr>
+              <a:buFont typeface="Arial" panose="020B0604020202020204" pitchFamily="34" charset="0"/>
+              <a:buChar char="•"/>
+            </a:pPr>
+            <a:r>
+              <a:rPr lang="hu-HU" sz="1800" dirty="0" err="1"/>
+              <a:t>Bootstrap</a:t>
+            </a:r>
+            <a:endParaRPr lang="hu-HU" sz="1800" dirty="0"/>
+          </a:p>
+        </p:txBody>
+      </p:sp>
+      <p:grpSp>
+        <p:nvGrpSpPr>
+          <p:cNvPr id="6" name="Csoportba foglalás 5">
+            <a:extLst>
+              <a:ext uri="{FF2B5EF4-FFF2-40B4-BE49-F238E27FC236}">
+                <a16:creationId xmlns:a16="http://schemas.microsoft.com/office/drawing/2014/main" id="{3317F239-9F4A-4F2E-A3AC-DBDE360A6AFF}"/>
+              </a:ext>
+            </a:extLst>
+          </p:cNvPr>
+          <p:cNvGrpSpPr/>
+          <p:nvPr/>
+        </p:nvGrpSpPr>
+        <p:grpSpPr>
+          <a:xfrm>
+            <a:off x="10565538" y="349786"/>
+            <a:ext cx="1418895" cy="1258023"/>
+            <a:chOff x="10565538" y="349786"/>
+            <a:chExt cx="1418895" cy="1258023"/>
+          </a:xfrm>
+        </p:grpSpPr>
+        <p:pic>
+          <p:nvPicPr>
+            <p:cNvPr id="7" name="Kép 6">
+              <a:extLst>
+                <a:ext uri="{FF2B5EF4-FFF2-40B4-BE49-F238E27FC236}">
+                  <a16:creationId xmlns:a16="http://schemas.microsoft.com/office/drawing/2014/main" id="{C2CC19C8-CD10-42F5-9D72-C77B335B0586}"/>
+                </a:ext>
+              </a:extLst>
+            </p:cNvPr>
+            <p:cNvPicPr>
+              <a:picLocks noChangeAspect="1"/>
+            </p:cNvPicPr>
+            <p:nvPr/>
+          </p:nvPicPr>
+          <p:blipFill rotWithShape="1">
+            <a:blip r:embed="rId3">
+              <a:alphaModFix amt="50000"/>
+              <a:extLst>
+                <a:ext uri="{28A0092B-C50C-407E-A947-70E740481C1C}">
+                  <a14:useLocalDpi xmlns:a14="http://schemas.microsoft.com/office/drawing/2010/main" val="0"/>
+                </a:ext>
+              </a:extLst>
+            </a:blip>
+            <a:srcRect t="58555" r="67375"/>
+            <a:stretch/>
+          </p:blipFill>
+          <p:spPr>
+            <a:xfrm>
+              <a:off x="10619475" y="1036308"/>
+              <a:ext cx="1364958" cy="571501"/>
+            </a:xfrm>
+            <a:prstGeom prst="rect">
+              <a:avLst/>
+            </a:prstGeom>
+          </p:spPr>
+        </p:pic>
+        <p:pic>
+          <p:nvPicPr>
+            <p:cNvPr id="8" name="Kép 7">
+              <a:extLst>
+                <a:ext uri="{FF2B5EF4-FFF2-40B4-BE49-F238E27FC236}">
+                  <a16:creationId xmlns:a16="http://schemas.microsoft.com/office/drawing/2014/main" id="{5AF4A5EB-86E0-4324-B31A-9A09255FD8E0}"/>
+                </a:ext>
+              </a:extLst>
+            </p:cNvPr>
+            <p:cNvPicPr>
+              <a:picLocks noChangeAspect="1"/>
+            </p:cNvPicPr>
+            <p:nvPr/>
+          </p:nvPicPr>
+          <p:blipFill rotWithShape="1">
+            <a:blip r:embed="rId3">
+              <a:alphaModFix amt="50000"/>
+              <a:extLst>
+                <a:ext uri="{28A0092B-C50C-407E-A947-70E740481C1C}">
+                  <a14:useLocalDpi xmlns:a14="http://schemas.microsoft.com/office/drawing/2010/main" val="0"/>
+                </a:ext>
+              </a:extLst>
+            </a:blip>
+            <a:srcRect l="1" r="61666" b="38896"/>
+            <a:stretch/>
+          </p:blipFill>
+          <p:spPr>
+            <a:xfrm>
+              <a:off x="10565538" y="349786"/>
+              <a:ext cx="1418895" cy="745451"/>
+            </a:xfrm>
+            <a:prstGeom prst="rect">
+              <a:avLst/>
+            </a:prstGeom>
+          </p:spPr>
+        </p:pic>
+      </p:grpSp>
+    </p:spTree>
+    <p:extLst>
+      <p:ext uri="{BB962C8B-B14F-4D97-AF65-F5344CB8AC3E}">
+        <p14:creationId xmlns:p14="http://schemas.microsoft.com/office/powerpoint/2010/main" val="1470190695"/>
       </p:ext>
     </p:extLst>
   </p:cSld>

--- a/Dokumentációhoz/Prezentáció/eMenza_AtkariAriella_FarkasDominik.pptx
+++ b/Dokumentációhoz/Prezentáció/eMenza_AtkariAriella_FarkasDominik.pptx
@@ -9935,7 +9935,7 @@
             </a:pPr>
             <a:r>
               <a:rPr lang="hu-HU" dirty="0"/>
-              <a:t> 18 tábla</a:t>
+              <a:t> 16 tábla</a:t>
             </a:r>
           </a:p>
           <a:p>
@@ -10125,10 +10125,10 @@
       </p:pic>
       <p:pic>
         <p:nvPicPr>
-          <p:cNvPr id="16" name="Kép 15">
+          <p:cNvPr id="11" name="Kép 10">
             <a:extLst>
               <a:ext uri="{FF2B5EF4-FFF2-40B4-BE49-F238E27FC236}">
-                <a16:creationId xmlns:a16="http://schemas.microsoft.com/office/drawing/2014/main" id="{8C8BC51D-DF64-430A-A8BB-E07E485D991E}"/>
+                <a16:creationId xmlns:a16="http://schemas.microsoft.com/office/drawing/2014/main" id="{F645605F-0923-431D-B3D3-AE4E34E70E6B}"/>
               </a:ext>
             </a:extLst>
           </p:cNvPr>
@@ -10139,13 +10139,13 @@
         </p:nvPicPr>
         <p:blipFill rotWithShape="1">
           <a:blip r:embed="rId4"/>
-          <a:srcRect l="4470" t="6179" r="12388" b="1762"/>
+          <a:srcRect l="9591" t="2483" r="8800" b="5522"/>
           <a:stretch/>
         </p:blipFill>
         <p:spPr>
           <a:xfrm>
-            <a:off x="5825643" y="1800543"/>
-            <a:ext cx="5833087" cy="4338393"/>
+            <a:off x="5144611" y="1911310"/>
+            <a:ext cx="6023355" cy="4146617"/>
           </a:xfrm>
           <a:prstGeom prst="rect">
             <a:avLst/>

--- a/Dokumentációhoz/Prezentáció/eMenza_AtkariAriella_FarkasDominik.pptx
+++ b/Dokumentációhoz/Prezentáció/eMenza_AtkariAriella_FarkasDominik.pptx
@@ -5,23 +5,26 @@
     <p:sldMasterId id="2147483660" r:id="rId1"/>
   </p:sldMasterIdLst>
   <p:notesMasterIdLst>
-    <p:notesMasterId r:id="rId16"/>
+    <p:notesMasterId r:id="rId19"/>
   </p:notesMasterIdLst>
   <p:sldIdLst>
-    <p:sldId id="276" r:id="rId2"/>
-    <p:sldId id="279" r:id="rId3"/>
-    <p:sldId id="259" r:id="rId4"/>
-    <p:sldId id="260" r:id="rId5"/>
-    <p:sldId id="274" r:id="rId6"/>
-    <p:sldId id="285" r:id="rId7"/>
-    <p:sldId id="268" r:id="rId8"/>
-    <p:sldId id="266" r:id="rId9"/>
-    <p:sldId id="269" r:id="rId10"/>
-    <p:sldId id="272" r:id="rId11"/>
-    <p:sldId id="282" r:id="rId12"/>
-    <p:sldId id="283" r:id="rId13"/>
-    <p:sldId id="287" r:id="rId14"/>
-    <p:sldId id="284" r:id="rId15"/>
+    <p:sldId id="288" r:id="rId2"/>
+    <p:sldId id="289" r:id="rId3"/>
+    <p:sldId id="276" r:id="rId4"/>
+    <p:sldId id="279" r:id="rId5"/>
+    <p:sldId id="259" r:id="rId6"/>
+    <p:sldId id="260" r:id="rId7"/>
+    <p:sldId id="274" r:id="rId8"/>
+    <p:sldId id="285" r:id="rId9"/>
+    <p:sldId id="268" r:id="rId10"/>
+    <p:sldId id="266" r:id="rId11"/>
+    <p:sldId id="269" r:id="rId12"/>
+    <p:sldId id="272" r:id="rId13"/>
+    <p:sldId id="282" r:id="rId14"/>
+    <p:sldId id="283" r:id="rId15"/>
+    <p:sldId id="287" r:id="rId16"/>
+    <p:sldId id="284" r:id="rId17"/>
+    <p:sldId id="290" r:id="rId18"/>
   </p:sldIdLst>
   <p:sldSz cx="12192000" cy="6858000"/>
   <p:notesSz cx="6858000" cy="9144000"/>
@@ -522,15 +525,14 @@
           <a:lstStyle/>
           <a:p>
             <a:r>
-              <a:rPr lang="hu-HU" dirty="0" err="1"/>
-              <a:t>Githubon</a:t>
-            </a:r>
-            <a:endParaRPr lang="hu-HU" dirty="0"/>
-          </a:p>
-          <a:p>
-            <a:r>
               <a:rPr lang="hu-HU" dirty="0"/>
-              <a:t>Feladatok megosztása – vegyesen frontend, backend. Közös adatbázis tervezés</a:t>
+              <a:t>Bemutatkozás</a:t>
+            </a:r>
+          </a:p>
+          <a:p>
+            <a:r>
+              <a:rPr lang="hu-HU" dirty="0"/>
+              <a:t>Webalapú rendszer</a:t>
             </a:r>
           </a:p>
         </p:txBody>
@@ -552,7 +554,7 @@
           <a:p>
             <a:fld id="{5B73375F-E6FE-4F6E-96C6-6B6BE7EEDE08}" type="slidenum">
               <a:rPr lang="hu-HU" smtClean="0"/>
-              <a:t>5</a:t>
+              <a:t>1</a:t>
             </a:fld>
             <a:endParaRPr lang="hu-HU"/>
           </a:p>
@@ -561,7 +563,7 @@
     </p:spTree>
     <p:extLst>
       <p:ext uri="{BB962C8B-B14F-4D97-AF65-F5344CB8AC3E}">
-        <p14:creationId xmlns:p14="http://schemas.microsoft.com/office/powerpoint/2010/main" val="3931808296"/>
+        <p14:creationId xmlns:p14="http://schemas.microsoft.com/office/powerpoint/2010/main" val="3658878901"/>
       </p:ext>
     </p:extLst>
   </p:cSld>
@@ -615,7 +617,16 @@
           <a:bodyPr/>
           <a:lstStyle/>
           <a:p>
-            <a:endParaRPr lang="hu-HU" dirty="0"/>
+            <a:r>
+              <a:rPr lang="hu-HU" dirty="0"/>
+              <a:t>Bemutatkozás</a:t>
+            </a:r>
+          </a:p>
+          <a:p>
+            <a:r>
+              <a:rPr lang="hu-HU" dirty="0"/>
+              <a:t>Webalapú rendszer</a:t>
+            </a:r>
           </a:p>
         </p:txBody>
       </p:sp>
@@ -636,7 +647,7 @@
           <a:p>
             <a:fld id="{5B73375F-E6FE-4F6E-96C6-6B6BE7EEDE08}" type="slidenum">
               <a:rPr lang="hu-HU" smtClean="0"/>
-              <a:t>7</a:t>
+              <a:t>3</a:t>
             </a:fld>
             <a:endParaRPr lang="hu-HU"/>
           </a:p>
@@ -645,7 +656,7 @@
     </p:spTree>
     <p:extLst>
       <p:ext uri="{BB962C8B-B14F-4D97-AF65-F5344CB8AC3E}">
-        <p14:creationId xmlns:p14="http://schemas.microsoft.com/office/powerpoint/2010/main" val="549964169"/>
+        <p14:creationId xmlns:p14="http://schemas.microsoft.com/office/powerpoint/2010/main" val="700960896"/>
       </p:ext>
     </p:extLst>
   </p:cSld>
@@ -699,6 +710,361 @@
           <a:bodyPr/>
           <a:lstStyle/>
           <a:p>
+            <a:r>
+              <a:rPr lang="hu-HU" dirty="0"/>
+              <a:t>KONYHA KÉRÉSÉRE: A menüből cukormentes</a:t>
+            </a:r>
+          </a:p>
+        </p:txBody>
+      </p:sp>
+      <p:sp>
+        <p:nvSpPr>
+          <p:cNvPr id="4" name="Dia számának helye 3"/>
+          <p:cNvSpPr>
+            <a:spLocks noGrp="1"/>
+          </p:cNvSpPr>
+          <p:nvPr>
+            <p:ph type="sldNum" sz="quarter" idx="5"/>
+          </p:nvPr>
+        </p:nvSpPr>
+        <p:spPr/>
+        <p:txBody>
+          <a:bodyPr/>
+          <a:lstStyle/>
+          <a:p>
+            <a:fld id="{5B73375F-E6FE-4F6E-96C6-6B6BE7EEDE08}" type="slidenum">
+              <a:rPr lang="hu-HU" smtClean="0"/>
+              <a:t>5</a:t>
+            </a:fld>
+            <a:endParaRPr lang="hu-HU"/>
+          </a:p>
+        </p:txBody>
+      </p:sp>
+    </p:spTree>
+    <p:extLst>
+      <p:ext uri="{BB962C8B-B14F-4D97-AF65-F5344CB8AC3E}">
+        <p14:creationId xmlns:p14="http://schemas.microsoft.com/office/powerpoint/2010/main" val="895235627"/>
+      </p:ext>
+    </p:extLst>
+  </p:cSld>
+  <p:clrMapOvr>
+    <a:masterClrMapping/>
+  </p:clrMapOvr>
+</p:notes>
+</file>
+
+<file path=ppt/notesSlides/notesSlide4.xml><?xml version="1.0" encoding="utf-8"?>
+<p:notes xmlns:a="http://schemas.openxmlformats.org/drawingml/2006/main" xmlns:r="http://schemas.openxmlformats.org/officeDocument/2006/relationships" xmlns:p="http://schemas.openxmlformats.org/presentationml/2006/main">
+  <p:cSld>
+    <p:spTree>
+      <p:nvGrpSpPr>
+        <p:cNvPr id="1" name=""/>
+        <p:cNvGrpSpPr/>
+        <p:nvPr/>
+      </p:nvGrpSpPr>
+      <p:grpSpPr>
+        <a:xfrm>
+          <a:off x="0" y="0"/>
+          <a:ext cx="0" cy="0"/>
+          <a:chOff x="0" y="0"/>
+          <a:chExt cx="0" cy="0"/>
+        </a:xfrm>
+      </p:grpSpPr>
+      <p:sp>
+        <p:nvSpPr>
+          <p:cNvPr id="2" name="Diakép helye 1"/>
+          <p:cNvSpPr>
+            <a:spLocks noGrp="1" noRot="1" noChangeAspect="1"/>
+          </p:cNvSpPr>
+          <p:nvPr>
+            <p:ph type="sldImg"/>
+          </p:nvPr>
+        </p:nvSpPr>
+        <p:spPr/>
+      </p:sp>
+      <p:sp>
+        <p:nvSpPr>
+          <p:cNvPr id="3" name="Jegyzetek helye 2"/>
+          <p:cNvSpPr>
+            <a:spLocks noGrp="1"/>
+          </p:cNvSpPr>
+          <p:nvPr>
+            <p:ph type="body" idx="1"/>
+          </p:nvPr>
+        </p:nvSpPr>
+        <p:spPr/>
+        <p:txBody>
+          <a:bodyPr/>
+          <a:lstStyle/>
+          <a:p>
+            <a:r>
+              <a:rPr lang="hu-HU" dirty="0" err="1"/>
+              <a:t>Githubon</a:t>
+            </a:r>
+            <a:endParaRPr lang="hu-HU" dirty="0"/>
+          </a:p>
+          <a:p>
+            <a:r>
+              <a:rPr lang="hu-HU" dirty="0"/>
+              <a:t>Feladatok megosztása – vegyesen frontend, backend -&gt; feladatonként</a:t>
+            </a:r>
+          </a:p>
+          <a:p>
+            <a:endParaRPr lang="hu-HU" dirty="0"/>
+          </a:p>
+        </p:txBody>
+      </p:sp>
+      <p:sp>
+        <p:nvSpPr>
+          <p:cNvPr id="4" name="Dia számának helye 3"/>
+          <p:cNvSpPr>
+            <a:spLocks noGrp="1"/>
+          </p:cNvSpPr>
+          <p:nvPr>
+            <p:ph type="sldNum" sz="quarter" idx="5"/>
+          </p:nvPr>
+        </p:nvSpPr>
+        <p:spPr/>
+        <p:txBody>
+          <a:bodyPr/>
+          <a:lstStyle/>
+          <a:p>
+            <a:fld id="{5B73375F-E6FE-4F6E-96C6-6B6BE7EEDE08}" type="slidenum">
+              <a:rPr lang="hu-HU" smtClean="0"/>
+              <a:t>7</a:t>
+            </a:fld>
+            <a:endParaRPr lang="hu-HU"/>
+          </a:p>
+        </p:txBody>
+      </p:sp>
+    </p:spTree>
+    <p:extLst>
+      <p:ext uri="{BB962C8B-B14F-4D97-AF65-F5344CB8AC3E}">
+        <p14:creationId xmlns:p14="http://schemas.microsoft.com/office/powerpoint/2010/main" val="3931808296"/>
+      </p:ext>
+    </p:extLst>
+  </p:cSld>
+  <p:clrMapOvr>
+    <a:masterClrMapping/>
+  </p:clrMapOvr>
+</p:notes>
+</file>
+
+<file path=ppt/notesSlides/notesSlide5.xml><?xml version="1.0" encoding="utf-8"?>
+<p:notes xmlns:a="http://schemas.openxmlformats.org/drawingml/2006/main" xmlns:r="http://schemas.openxmlformats.org/officeDocument/2006/relationships" xmlns:p="http://schemas.openxmlformats.org/presentationml/2006/main">
+  <p:cSld>
+    <p:spTree>
+      <p:nvGrpSpPr>
+        <p:cNvPr id="1" name=""/>
+        <p:cNvGrpSpPr/>
+        <p:nvPr/>
+      </p:nvGrpSpPr>
+      <p:grpSpPr>
+        <a:xfrm>
+          <a:off x="0" y="0"/>
+          <a:ext cx="0" cy="0"/>
+          <a:chOff x="0" y="0"/>
+          <a:chExt cx="0" cy="0"/>
+        </a:xfrm>
+      </p:grpSpPr>
+      <p:sp>
+        <p:nvSpPr>
+          <p:cNvPr id="2" name="Diakép helye 1"/>
+          <p:cNvSpPr>
+            <a:spLocks noGrp="1" noRot="1" noChangeAspect="1"/>
+          </p:cNvSpPr>
+          <p:nvPr>
+            <p:ph type="sldImg"/>
+          </p:nvPr>
+        </p:nvSpPr>
+        <p:spPr/>
+      </p:sp>
+      <p:sp>
+        <p:nvSpPr>
+          <p:cNvPr id="3" name="Jegyzetek helye 2"/>
+          <p:cNvSpPr>
+            <a:spLocks noGrp="1"/>
+          </p:cNvSpPr>
+          <p:nvPr>
+            <p:ph type="body" idx="1"/>
+          </p:nvPr>
+        </p:nvSpPr>
+        <p:spPr/>
+        <p:txBody>
+          <a:bodyPr/>
+          <a:lstStyle/>
+          <a:p>
+            <a:endParaRPr lang="hu-HU" dirty="0"/>
+          </a:p>
+        </p:txBody>
+      </p:sp>
+      <p:sp>
+        <p:nvSpPr>
+          <p:cNvPr id="4" name="Dia számának helye 3"/>
+          <p:cNvSpPr>
+            <a:spLocks noGrp="1"/>
+          </p:cNvSpPr>
+          <p:nvPr>
+            <p:ph type="sldNum" sz="quarter" idx="5"/>
+          </p:nvPr>
+        </p:nvSpPr>
+        <p:spPr/>
+        <p:txBody>
+          <a:bodyPr/>
+          <a:lstStyle/>
+          <a:p>
+            <a:fld id="{5B73375F-E6FE-4F6E-96C6-6B6BE7EEDE08}" type="slidenum">
+              <a:rPr lang="hu-HU" smtClean="0"/>
+              <a:t>9</a:t>
+            </a:fld>
+            <a:endParaRPr lang="hu-HU"/>
+          </a:p>
+        </p:txBody>
+      </p:sp>
+    </p:spTree>
+    <p:extLst>
+      <p:ext uri="{BB962C8B-B14F-4D97-AF65-F5344CB8AC3E}">
+        <p14:creationId xmlns:p14="http://schemas.microsoft.com/office/powerpoint/2010/main" val="549964169"/>
+      </p:ext>
+    </p:extLst>
+  </p:cSld>
+  <p:clrMapOvr>
+    <a:masterClrMapping/>
+  </p:clrMapOvr>
+</p:notes>
+</file>
+
+<file path=ppt/notesSlides/notesSlide6.xml><?xml version="1.0" encoding="utf-8"?>
+<p:notes xmlns:a="http://schemas.openxmlformats.org/drawingml/2006/main" xmlns:r="http://schemas.openxmlformats.org/officeDocument/2006/relationships" xmlns:p="http://schemas.openxmlformats.org/presentationml/2006/main">
+  <p:cSld>
+    <p:spTree>
+      <p:nvGrpSpPr>
+        <p:cNvPr id="1" name=""/>
+        <p:cNvGrpSpPr/>
+        <p:nvPr/>
+      </p:nvGrpSpPr>
+      <p:grpSpPr>
+        <a:xfrm>
+          <a:off x="0" y="0"/>
+          <a:ext cx="0" cy="0"/>
+          <a:chOff x="0" y="0"/>
+          <a:chExt cx="0" cy="0"/>
+        </a:xfrm>
+      </p:grpSpPr>
+      <p:sp>
+        <p:nvSpPr>
+          <p:cNvPr id="2" name="Diakép helye 1"/>
+          <p:cNvSpPr>
+            <a:spLocks noGrp="1" noRot="1" noChangeAspect="1"/>
+          </p:cNvSpPr>
+          <p:nvPr>
+            <p:ph type="sldImg"/>
+          </p:nvPr>
+        </p:nvSpPr>
+        <p:spPr/>
+      </p:sp>
+      <p:sp>
+        <p:nvSpPr>
+          <p:cNvPr id="3" name="Jegyzetek helye 2"/>
+          <p:cNvSpPr>
+            <a:spLocks noGrp="1"/>
+          </p:cNvSpPr>
+          <p:nvPr>
+            <p:ph type="body" idx="1"/>
+          </p:nvPr>
+        </p:nvSpPr>
+        <p:spPr/>
+        <p:txBody>
+          <a:bodyPr/>
+          <a:lstStyle/>
+          <a:p>
+            <a:r>
+              <a:rPr lang="hu-HU" dirty="0"/>
+              <a:t>Elsődleges kulcsok, idegen kulcsok használata</a:t>
+            </a:r>
+          </a:p>
+        </p:txBody>
+      </p:sp>
+      <p:sp>
+        <p:nvSpPr>
+          <p:cNvPr id="4" name="Dia számának helye 3"/>
+          <p:cNvSpPr>
+            <a:spLocks noGrp="1"/>
+          </p:cNvSpPr>
+          <p:nvPr>
+            <p:ph type="sldNum" sz="quarter" idx="5"/>
+          </p:nvPr>
+        </p:nvSpPr>
+        <p:spPr/>
+        <p:txBody>
+          <a:bodyPr/>
+          <a:lstStyle/>
+          <a:p>
+            <a:fld id="{5B73375F-E6FE-4F6E-96C6-6B6BE7EEDE08}" type="slidenum">
+              <a:rPr lang="hu-HU" smtClean="0"/>
+              <a:t>10</a:t>
+            </a:fld>
+            <a:endParaRPr lang="hu-HU"/>
+          </a:p>
+        </p:txBody>
+      </p:sp>
+    </p:spTree>
+    <p:extLst>
+      <p:ext uri="{BB962C8B-B14F-4D97-AF65-F5344CB8AC3E}">
+        <p14:creationId xmlns:p14="http://schemas.microsoft.com/office/powerpoint/2010/main" val="3913546256"/>
+      </p:ext>
+    </p:extLst>
+  </p:cSld>
+  <p:clrMapOvr>
+    <a:masterClrMapping/>
+  </p:clrMapOvr>
+</p:notes>
+</file>
+
+<file path=ppt/notesSlides/notesSlide7.xml><?xml version="1.0" encoding="utf-8"?>
+<p:notes xmlns:a="http://schemas.openxmlformats.org/drawingml/2006/main" xmlns:r="http://schemas.openxmlformats.org/officeDocument/2006/relationships" xmlns:p="http://schemas.openxmlformats.org/presentationml/2006/main">
+  <p:cSld>
+    <p:spTree>
+      <p:nvGrpSpPr>
+        <p:cNvPr id="1" name=""/>
+        <p:cNvGrpSpPr/>
+        <p:nvPr/>
+      </p:nvGrpSpPr>
+      <p:grpSpPr>
+        <a:xfrm>
+          <a:off x="0" y="0"/>
+          <a:ext cx="0" cy="0"/>
+          <a:chOff x="0" y="0"/>
+          <a:chExt cx="0" cy="0"/>
+        </a:xfrm>
+      </p:grpSpPr>
+      <p:sp>
+        <p:nvSpPr>
+          <p:cNvPr id="2" name="Diakép helye 1"/>
+          <p:cNvSpPr>
+            <a:spLocks noGrp="1" noRot="1" noChangeAspect="1"/>
+          </p:cNvSpPr>
+          <p:nvPr>
+            <p:ph type="sldImg"/>
+          </p:nvPr>
+        </p:nvSpPr>
+        <p:spPr/>
+      </p:sp>
+      <p:sp>
+        <p:nvSpPr>
+          <p:cNvPr id="3" name="Jegyzetek helye 2"/>
+          <p:cNvSpPr>
+            <a:spLocks noGrp="1"/>
+          </p:cNvSpPr>
+          <p:nvPr>
+            <p:ph type="body" idx="1"/>
+          </p:nvPr>
+        </p:nvSpPr>
+        <p:spPr/>
+        <p:txBody>
+          <a:bodyPr/>
+          <a:lstStyle/>
+          <a:p>
             <a:pPr marL="285750" indent="-285750">
               <a:buClr>
                 <a:schemeClr val="bg1"/>
@@ -746,7 +1112,7 @@
           <a:p>
             <a:fld id="{5B73375F-E6FE-4F6E-96C6-6B6BE7EEDE08}" type="slidenum">
               <a:rPr lang="hu-HU" smtClean="0"/>
-              <a:t>9</a:t>
+              <a:t>11</a:t>
             </a:fld>
             <a:endParaRPr lang="hu-HU"/>
           </a:p>
@@ -756,6 +1122,177 @@
     <p:extLst>
       <p:ext uri="{BB962C8B-B14F-4D97-AF65-F5344CB8AC3E}">
         <p14:creationId xmlns:p14="http://schemas.microsoft.com/office/powerpoint/2010/main" val="334570292"/>
+      </p:ext>
+    </p:extLst>
+  </p:cSld>
+  <p:clrMapOvr>
+    <a:masterClrMapping/>
+  </p:clrMapOvr>
+</p:notes>
+</file>
+
+<file path=ppt/notesSlides/notesSlide8.xml><?xml version="1.0" encoding="utf-8"?>
+<p:notes xmlns:a="http://schemas.openxmlformats.org/drawingml/2006/main" xmlns:r="http://schemas.openxmlformats.org/officeDocument/2006/relationships" xmlns:p="http://schemas.openxmlformats.org/presentationml/2006/main">
+  <p:cSld>
+    <p:spTree>
+      <p:nvGrpSpPr>
+        <p:cNvPr id="1" name=""/>
+        <p:cNvGrpSpPr/>
+        <p:nvPr/>
+      </p:nvGrpSpPr>
+      <p:grpSpPr>
+        <a:xfrm>
+          <a:off x="0" y="0"/>
+          <a:ext cx="0" cy="0"/>
+          <a:chOff x="0" y="0"/>
+          <a:chExt cx="0" cy="0"/>
+        </a:xfrm>
+      </p:grpSpPr>
+      <p:sp>
+        <p:nvSpPr>
+          <p:cNvPr id="2" name="Diakép helye 1"/>
+          <p:cNvSpPr>
+            <a:spLocks noGrp="1" noRot="1" noChangeAspect="1"/>
+          </p:cNvSpPr>
+          <p:nvPr>
+            <p:ph type="sldImg"/>
+          </p:nvPr>
+        </p:nvSpPr>
+        <p:spPr/>
+      </p:sp>
+      <p:sp>
+        <p:nvSpPr>
+          <p:cNvPr id="3" name="Jegyzetek helye 2"/>
+          <p:cNvSpPr>
+            <a:spLocks noGrp="1"/>
+          </p:cNvSpPr>
+          <p:nvPr>
+            <p:ph type="body" idx="1"/>
+          </p:nvPr>
+        </p:nvSpPr>
+        <p:spPr/>
+        <p:txBody>
+          <a:bodyPr/>
+          <a:lstStyle/>
+          <a:p>
+            <a:r>
+              <a:rPr lang="hu-HU" dirty="0"/>
+              <a:t>Sikeres, sikertelen tesztesetek</a:t>
+            </a:r>
+          </a:p>
+        </p:txBody>
+      </p:sp>
+      <p:sp>
+        <p:nvSpPr>
+          <p:cNvPr id="4" name="Dia számának helye 3"/>
+          <p:cNvSpPr>
+            <a:spLocks noGrp="1"/>
+          </p:cNvSpPr>
+          <p:nvPr>
+            <p:ph type="sldNum" sz="quarter" idx="5"/>
+          </p:nvPr>
+        </p:nvSpPr>
+        <p:spPr/>
+        <p:txBody>
+          <a:bodyPr/>
+          <a:lstStyle/>
+          <a:p>
+            <a:fld id="{5B73375F-E6FE-4F6E-96C6-6B6BE7EEDE08}" type="slidenum">
+              <a:rPr lang="hu-HU" smtClean="0"/>
+              <a:t>12</a:t>
+            </a:fld>
+            <a:endParaRPr lang="hu-HU"/>
+          </a:p>
+        </p:txBody>
+      </p:sp>
+    </p:spTree>
+    <p:extLst>
+      <p:ext uri="{BB962C8B-B14F-4D97-AF65-F5344CB8AC3E}">
+        <p14:creationId xmlns:p14="http://schemas.microsoft.com/office/powerpoint/2010/main" val="2651667935"/>
+      </p:ext>
+    </p:extLst>
+  </p:cSld>
+  <p:clrMapOvr>
+    <a:masterClrMapping/>
+  </p:clrMapOvr>
+</p:notes>
+</file>
+
+<file path=ppt/notesSlides/notesSlide9.xml><?xml version="1.0" encoding="utf-8"?>
+<p:notes xmlns:a="http://schemas.openxmlformats.org/drawingml/2006/main" xmlns:r="http://schemas.openxmlformats.org/officeDocument/2006/relationships" xmlns:p="http://schemas.openxmlformats.org/presentationml/2006/main">
+  <p:cSld>
+    <p:spTree>
+      <p:nvGrpSpPr>
+        <p:cNvPr id="1" name=""/>
+        <p:cNvGrpSpPr/>
+        <p:nvPr/>
+      </p:nvGrpSpPr>
+      <p:grpSpPr>
+        <a:xfrm>
+          <a:off x="0" y="0"/>
+          <a:ext cx="0" cy="0"/>
+          <a:chOff x="0" y="0"/>
+          <a:chExt cx="0" cy="0"/>
+        </a:xfrm>
+      </p:grpSpPr>
+      <p:sp>
+        <p:nvSpPr>
+          <p:cNvPr id="2" name="Diakép helye 1"/>
+          <p:cNvSpPr>
+            <a:spLocks noGrp="1" noRot="1" noChangeAspect="1"/>
+          </p:cNvSpPr>
+          <p:nvPr>
+            <p:ph type="sldImg"/>
+          </p:nvPr>
+        </p:nvSpPr>
+        <p:spPr/>
+      </p:sp>
+      <p:sp>
+        <p:nvSpPr>
+          <p:cNvPr id="3" name="Jegyzetek helye 2"/>
+          <p:cNvSpPr>
+            <a:spLocks noGrp="1"/>
+          </p:cNvSpPr>
+          <p:nvPr>
+            <p:ph type="body" idx="1"/>
+          </p:nvPr>
+        </p:nvSpPr>
+        <p:spPr/>
+        <p:txBody>
+          <a:bodyPr/>
+          <a:lstStyle/>
+          <a:p>
+            <a:endParaRPr lang="hu-HU" dirty="0"/>
+          </a:p>
+        </p:txBody>
+      </p:sp>
+      <p:sp>
+        <p:nvSpPr>
+          <p:cNvPr id="4" name="Dia számának helye 3"/>
+          <p:cNvSpPr>
+            <a:spLocks noGrp="1"/>
+          </p:cNvSpPr>
+          <p:nvPr>
+            <p:ph type="sldNum" sz="quarter" idx="5"/>
+          </p:nvPr>
+        </p:nvSpPr>
+        <p:spPr/>
+        <p:txBody>
+          <a:bodyPr/>
+          <a:lstStyle/>
+          <a:p>
+            <a:fld id="{5B73375F-E6FE-4F6E-96C6-6B6BE7EEDE08}" type="slidenum">
+              <a:rPr lang="hu-HU" smtClean="0"/>
+              <a:t>15</a:t>
+            </a:fld>
+            <a:endParaRPr lang="hu-HU"/>
+          </a:p>
+        </p:txBody>
+      </p:sp>
+    </p:spTree>
+    <p:extLst>
+      <p:ext uri="{BB962C8B-B14F-4D97-AF65-F5344CB8AC3E}">
+        <p14:creationId xmlns:p14="http://schemas.microsoft.com/office/powerpoint/2010/main" val="3651380644"/>
       </p:ext>
     </p:extLst>
   </p:cSld>
@@ -4486,8 +5023,8 @@
         </p:nvSpPr>
         <p:spPr>
           <a:xfrm>
-            <a:off x="1320753" y="2904573"/>
-            <a:ext cx="9760046" cy="2006995"/>
+            <a:off x="1205696" y="620698"/>
+            <a:ext cx="9972814" cy="2006995"/>
           </a:xfrm>
           <a:prstGeom prst="rect">
             <a:avLst/>
@@ -4522,7 +5059,13 @@
           <a:p>
             <a:pPr algn="ctr"/>
             <a:r>
-              <a:rPr lang="hu-HU" sz="5400" b="1" dirty="0">
+              <a:rPr lang="hu-HU" sz="5000" b="1" dirty="0">
+                <a:solidFill>
+                  <a:schemeClr val="tx1">
+                    <a:lumMod val="65000"/>
+                    <a:lumOff val="35000"/>
+                  </a:schemeClr>
+                </a:solidFill>
                 <a:latin typeface="Bahnschrift SemiBold" panose="020B0502040204020203" pitchFamily="34" charset="0"/>
               </a:rPr>
               <a:t>Iskolai étkezéskezelő rendszer</a:t>
@@ -4546,7 +5089,7 @@
         </p:nvSpPr>
         <p:spPr>
           <a:xfrm>
-            <a:off x="3598026" y="3785841"/>
+            <a:off x="3497250" y="3815803"/>
             <a:ext cx="4995949" cy="571500"/>
           </a:xfrm>
           <a:prstGeom prst="rect">
@@ -4835,7 +5378,7 @@
           <p:nvPr/>
         </p:nvPicPr>
         <p:blipFill rotWithShape="1">
-          <a:blip r:embed="rId2">
+          <a:blip r:embed="rId3">
             <a:extLst>
               <a:ext uri="{28A0092B-C50C-407E-A947-70E740481C1C}">
                 <a14:useLocalDpi xmlns:a14="http://schemas.microsoft.com/office/drawing/2010/main" val="0"/>
@@ -4847,310 +5390,14 @@
         </p:blipFill>
         <p:spPr>
           <a:xfrm>
-            <a:off x="3750655" y="1673209"/>
-            <a:ext cx="4714591" cy="644014"/>
+            <a:off x="3970484" y="3088822"/>
+            <a:ext cx="4408446" cy="602195"/>
           </a:xfrm>
           <a:prstGeom prst="rect">
             <a:avLst/>
           </a:prstGeom>
         </p:spPr>
       </p:pic>
-      <p:sp>
-        <p:nvSpPr>
-          <p:cNvPr id="5" name="Alcím 2">
-            <a:extLst>
-              <a:ext uri="{FF2B5EF4-FFF2-40B4-BE49-F238E27FC236}">
-                <a16:creationId xmlns:a16="http://schemas.microsoft.com/office/drawing/2014/main" id="{3E0FCC81-0923-43B1-9ACC-080EBD94427F}"/>
-              </a:ext>
-            </a:extLst>
-          </p:cNvPr>
-          <p:cNvSpPr txBox="1">
-            <a:spLocks/>
-          </p:cNvSpPr>
-          <p:nvPr/>
-        </p:nvSpPr>
-        <p:spPr>
-          <a:xfrm>
-            <a:off x="127233" y="5659169"/>
-            <a:ext cx="5968766" cy="1050389"/>
-          </a:xfrm>
-          <a:prstGeom prst="rect">
-            <a:avLst/>
-          </a:prstGeom>
-        </p:spPr>
-        <p:txBody>
-          <a:bodyPr vert="horz" lIns="91440" tIns="45720" rIns="91440" bIns="45720" rtlCol="0">
-            <a:normAutofit/>
-          </a:bodyPr>
-          <a:lstStyle>
-            <a:lvl1pPr marL="0" indent="0" algn="l" defTabSz="914400" rtl="0" eaLnBrk="1" latinLnBrk="0" hangingPunct="1">
-              <a:lnSpc>
-                <a:spcPct val="90000"/>
-              </a:lnSpc>
-              <a:spcBef>
-                <a:spcPts val="1200"/>
-              </a:spcBef>
-              <a:spcAft>
-                <a:spcPts val="200"/>
-              </a:spcAft>
-              <a:buClr>
-                <a:schemeClr val="accent1"/>
-              </a:buClr>
-              <a:buSzPct val="100000"/>
-              <a:buFont typeface="Calibri" panose="020F0502020204030204" pitchFamily="34" charset="0"/>
-              <a:buNone/>
-              <a:defRPr sz="2400" kern="1200" cap="all" spc="200" baseline="0">
-                <a:solidFill>
-                  <a:schemeClr val="tx2"/>
-                </a:solidFill>
-                <a:latin typeface="+mj-lt"/>
-                <a:ea typeface="+mn-ea"/>
-                <a:cs typeface="+mn-cs"/>
-              </a:defRPr>
-            </a:lvl1pPr>
-            <a:lvl2pPr marL="457200" indent="0" algn="ctr" defTabSz="914400" rtl="0" eaLnBrk="1" latinLnBrk="0" hangingPunct="1">
-              <a:lnSpc>
-                <a:spcPct val="90000"/>
-              </a:lnSpc>
-              <a:spcBef>
-                <a:spcPts val="200"/>
-              </a:spcBef>
-              <a:spcAft>
-                <a:spcPts val="400"/>
-              </a:spcAft>
-              <a:buClr>
-                <a:schemeClr val="accent1"/>
-              </a:buClr>
-              <a:buFont typeface="Calibri" pitchFamily="34" charset="0"/>
-              <a:buNone/>
-              <a:defRPr sz="2400" kern="1200">
-                <a:solidFill>
-                  <a:schemeClr val="tx1">
-                    <a:lumMod val="75000"/>
-                    <a:lumOff val="25000"/>
-                  </a:schemeClr>
-                </a:solidFill>
-                <a:latin typeface="+mn-lt"/>
-                <a:ea typeface="+mn-ea"/>
-                <a:cs typeface="+mn-cs"/>
-              </a:defRPr>
-            </a:lvl2pPr>
-            <a:lvl3pPr marL="914400" indent="0" algn="ctr" defTabSz="914400" rtl="0" eaLnBrk="1" latinLnBrk="0" hangingPunct="1">
-              <a:lnSpc>
-                <a:spcPct val="90000"/>
-              </a:lnSpc>
-              <a:spcBef>
-                <a:spcPts val="200"/>
-              </a:spcBef>
-              <a:spcAft>
-                <a:spcPts val="400"/>
-              </a:spcAft>
-              <a:buClr>
-                <a:schemeClr val="accent1"/>
-              </a:buClr>
-              <a:buFont typeface="Calibri" pitchFamily="34" charset="0"/>
-              <a:buNone/>
-              <a:defRPr sz="2400" kern="1200">
-                <a:solidFill>
-                  <a:schemeClr val="tx1">
-                    <a:lumMod val="75000"/>
-                    <a:lumOff val="25000"/>
-                  </a:schemeClr>
-                </a:solidFill>
-                <a:latin typeface="+mn-lt"/>
-                <a:ea typeface="+mn-ea"/>
-                <a:cs typeface="+mn-cs"/>
-              </a:defRPr>
-            </a:lvl3pPr>
-            <a:lvl4pPr marL="1371600" indent="0" algn="ctr" defTabSz="914400" rtl="0" eaLnBrk="1" latinLnBrk="0" hangingPunct="1">
-              <a:lnSpc>
-                <a:spcPct val="90000"/>
-              </a:lnSpc>
-              <a:spcBef>
-                <a:spcPts val="200"/>
-              </a:spcBef>
-              <a:spcAft>
-                <a:spcPts val="400"/>
-              </a:spcAft>
-              <a:buClr>
-                <a:schemeClr val="accent1"/>
-              </a:buClr>
-              <a:buFont typeface="Calibri" pitchFamily="34" charset="0"/>
-              <a:buNone/>
-              <a:defRPr sz="2000" kern="1200">
-                <a:solidFill>
-                  <a:schemeClr val="tx1">
-                    <a:lumMod val="75000"/>
-                    <a:lumOff val="25000"/>
-                  </a:schemeClr>
-                </a:solidFill>
-                <a:latin typeface="+mn-lt"/>
-                <a:ea typeface="+mn-ea"/>
-                <a:cs typeface="+mn-cs"/>
-              </a:defRPr>
-            </a:lvl4pPr>
-            <a:lvl5pPr marL="1828800" indent="0" algn="ctr" defTabSz="914400" rtl="0" eaLnBrk="1" latinLnBrk="0" hangingPunct="1">
-              <a:lnSpc>
-                <a:spcPct val="90000"/>
-              </a:lnSpc>
-              <a:spcBef>
-                <a:spcPts val="200"/>
-              </a:spcBef>
-              <a:spcAft>
-                <a:spcPts val="400"/>
-              </a:spcAft>
-              <a:buClr>
-                <a:schemeClr val="accent1"/>
-              </a:buClr>
-              <a:buFont typeface="Calibri" pitchFamily="34" charset="0"/>
-              <a:buNone/>
-              <a:defRPr sz="2000" kern="1200">
-                <a:solidFill>
-                  <a:schemeClr val="tx1">
-                    <a:lumMod val="75000"/>
-                    <a:lumOff val="25000"/>
-                  </a:schemeClr>
-                </a:solidFill>
-                <a:latin typeface="+mn-lt"/>
-                <a:ea typeface="+mn-ea"/>
-                <a:cs typeface="+mn-cs"/>
-              </a:defRPr>
-            </a:lvl5pPr>
-            <a:lvl6pPr marL="2286000" indent="0" algn="ctr" defTabSz="914400" rtl="0" eaLnBrk="1" latinLnBrk="0" hangingPunct="1">
-              <a:lnSpc>
-                <a:spcPct val="90000"/>
-              </a:lnSpc>
-              <a:spcBef>
-                <a:spcPts val="200"/>
-              </a:spcBef>
-              <a:spcAft>
-                <a:spcPts val="400"/>
-              </a:spcAft>
-              <a:buClr>
-                <a:schemeClr val="accent1"/>
-              </a:buClr>
-              <a:buFont typeface="Calibri" pitchFamily="34" charset="0"/>
-              <a:buNone/>
-              <a:defRPr sz="2000" kern="1200">
-                <a:solidFill>
-                  <a:schemeClr val="tx1">
-                    <a:lumMod val="75000"/>
-                    <a:lumOff val="25000"/>
-                  </a:schemeClr>
-                </a:solidFill>
-                <a:latin typeface="+mn-lt"/>
-                <a:ea typeface="+mn-ea"/>
-                <a:cs typeface="+mn-cs"/>
-              </a:defRPr>
-            </a:lvl6pPr>
-            <a:lvl7pPr marL="2743200" indent="0" algn="ctr" defTabSz="914400" rtl="0" eaLnBrk="1" latinLnBrk="0" hangingPunct="1">
-              <a:lnSpc>
-                <a:spcPct val="90000"/>
-              </a:lnSpc>
-              <a:spcBef>
-                <a:spcPts val="200"/>
-              </a:spcBef>
-              <a:spcAft>
-                <a:spcPts val="400"/>
-              </a:spcAft>
-              <a:buClr>
-                <a:schemeClr val="accent1"/>
-              </a:buClr>
-              <a:buFont typeface="Calibri" pitchFamily="34" charset="0"/>
-              <a:buNone/>
-              <a:defRPr sz="2000" kern="1200">
-                <a:solidFill>
-                  <a:schemeClr val="tx1">
-                    <a:lumMod val="75000"/>
-                    <a:lumOff val="25000"/>
-                  </a:schemeClr>
-                </a:solidFill>
-                <a:latin typeface="+mn-lt"/>
-                <a:ea typeface="+mn-ea"/>
-                <a:cs typeface="+mn-cs"/>
-              </a:defRPr>
-            </a:lvl7pPr>
-            <a:lvl8pPr marL="3200400" indent="0" algn="ctr" defTabSz="914400" rtl="0" eaLnBrk="1" latinLnBrk="0" hangingPunct="1">
-              <a:lnSpc>
-                <a:spcPct val="90000"/>
-              </a:lnSpc>
-              <a:spcBef>
-                <a:spcPts val="200"/>
-              </a:spcBef>
-              <a:spcAft>
-                <a:spcPts val="400"/>
-              </a:spcAft>
-              <a:buClr>
-                <a:schemeClr val="accent1"/>
-              </a:buClr>
-              <a:buFont typeface="Calibri" pitchFamily="34" charset="0"/>
-              <a:buNone/>
-              <a:defRPr sz="2000" kern="1200">
-                <a:solidFill>
-                  <a:schemeClr val="tx1">
-                    <a:lumMod val="75000"/>
-                    <a:lumOff val="25000"/>
-                  </a:schemeClr>
-                </a:solidFill>
-                <a:latin typeface="+mn-lt"/>
-                <a:ea typeface="+mn-ea"/>
-                <a:cs typeface="+mn-cs"/>
-              </a:defRPr>
-            </a:lvl8pPr>
-            <a:lvl9pPr marL="3657600" indent="0" algn="ctr" defTabSz="914400" rtl="0" eaLnBrk="1" latinLnBrk="0" hangingPunct="1">
-              <a:lnSpc>
-                <a:spcPct val="90000"/>
-              </a:lnSpc>
-              <a:spcBef>
-                <a:spcPts val="200"/>
-              </a:spcBef>
-              <a:spcAft>
-                <a:spcPts val="400"/>
-              </a:spcAft>
-              <a:buClr>
-                <a:schemeClr val="accent1"/>
-              </a:buClr>
-              <a:buFont typeface="Calibri" pitchFamily="34" charset="0"/>
-              <a:buNone/>
-              <a:defRPr sz="2000" kern="1200">
-                <a:solidFill>
-                  <a:schemeClr val="tx1">
-                    <a:lumMod val="75000"/>
-                    <a:lumOff val="25000"/>
-                  </a:schemeClr>
-                </a:solidFill>
-                <a:latin typeface="+mn-lt"/>
-                <a:ea typeface="+mn-ea"/>
-                <a:cs typeface="+mn-cs"/>
-              </a:defRPr>
-            </a:lvl9pPr>
-          </a:lstStyle>
-          <a:p>
-            <a:pPr>
-              <a:lnSpc>
-                <a:spcPct val="100000"/>
-              </a:lnSpc>
-            </a:pPr>
-            <a:r>
-              <a:rPr lang="hu-HU" sz="1800" cap="none" spc="0" dirty="0">
-                <a:latin typeface="Bahnschrift Light" panose="020B0502040204020203" pitchFamily="34" charset="0"/>
-              </a:rPr>
-              <a:t>Készítették: Atkári Ariella</a:t>
-            </a:r>
-            <a:br>
-              <a:rPr lang="hu-HU" sz="1800" cap="none" spc="0" dirty="0">
-                <a:latin typeface="Bahnschrift Light" panose="020B0502040204020203" pitchFamily="34" charset="0"/>
-              </a:rPr>
-            </a:br>
-            <a:r>
-              <a:rPr lang="hu-HU" sz="1800" cap="none" spc="0" dirty="0">
-                <a:latin typeface="Bahnschrift Light" panose="020B0502040204020203" pitchFamily="34" charset="0"/>
-              </a:rPr>
-              <a:t>	      Farkas Dominik</a:t>
-            </a:r>
-          </a:p>
-        </p:txBody>
-      </p:sp>
       <p:cxnSp>
         <p:nvCxnSpPr>
           <p:cNvPr id="9" name="Egyenes összekötő 8">
@@ -5167,8 +5414,8 @@
         </p:nvCxnSpPr>
         <p:spPr>
           <a:xfrm>
-            <a:off x="2131264" y="2305176"/>
-            <a:ext cx="7953375" cy="0"/>
+            <a:off x="3377109" y="3691017"/>
+            <a:ext cx="5519241" cy="0"/>
           </a:xfrm>
           <a:prstGeom prst="line">
             <a:avLst/>
@@ -5212,7 +5459,7 @@
           <p:nvPr/>
         </p:nvPicPr>
         <p:blipFill rotWithShape="1">
-          <a:blip r:embed="rId2">
+          <a:blip r:embed="rId3">
             <a:extLst>
               <a:ext uri="{28A0092B-C50C-407E-A947-70E740481C1C}">
                 <a14:useLocalDpi xmlns:a14="http://schemas.microsoft.com/office/drawing/2010/main" val="0"/>
@@ -5224,8 +5471,8 @@
         </p:blipFill>
         <p:spPr>
           <a:xfrm>
-            <a:off x="3738706" y="711670"/>
-            <a:ext cx="4855269" cy="949493"/>
+            <a:off x="3958534" y="2127283"/>
+            <a:ext cx="4539989" cy="887837"/>
           </a:xfrm>
           <a:prstGeom prst="rect">
             <a:avLst/>
@@ -5248,7 +5495,7 @@
         </p:nvSpPr>
         <p:spPr>
           <a:xfrm>
-            <a:off x="10563224" y="5883809"/>
+            <a:off x="10805230" y="6455312"/>
             <a:ext cx="1628776" cy="402688"/>
           </a:xfrm>
           <a:prstGeom prst="rect">
@@ -5510,6 +5757,9 @@
             </a:pPr>
             <a:r>
               <a:rPr lang="hu-HU" sz="1800" cap="none" spc="0" dirty="0">
+                <a:solidFill>
+                  <a:schemeClr val="bg1"/>
+                </a:solidFill>
                 <a:latin typeface="Bahnschrift Light" panose="020B0502040204020203" pitchFamily="34" charset="0"/>
               </a:rPr>
               <a:t>2026. 03. 03</a:t>
@@ -5517,10 +5767,734 @@
           </a:p>
         </p:txBody>
       </p:sp>
+      <p:grpSp>
+        <p:nvGrpSpPr>
+          <p:cNvPr id="14" name="Csoportba foglalás 13">
+            <a:extLst>
+              <a:ext uri="{FF2B5EF4-FFF2-40B4-BE49-F238E27FC236}">
+                <a16:creationId xmlns:a16="http://schemas.microsoft.com/office/drawing/2014/main" id="{0E3A2CAD-CFD5-469A-A796-E42F81D13AC1}"/>
+              </a:ext>
+            </a:extLst>
+          </p:cNvPr>
+          <p:cNvGrpSpPr/>
+          <p:nvPr/>
+        </p:nvGrpSpPr>
+        <p:grpSpPr>
+          <a:xfrm>
+            <a:off x="9596464" y="2758398"/>
+            <a:ext cx="1927904" cy="3257809"/>
+            <a:chOff x="1194324" y="3161169"/>
+            <a:chExt cx="1927904" cy="3257809"/>
+          </a:xfrm>
+        </p:grpSpPr>
+        <p:sp>
+          <p:nvSpPr>
+            <p:cNvPr id="5" name="Alcím 2">
+              <a:extLst>
+                <a:ext uri="{FF2B5EF4-FFF2-40B4-BE49-F238E27FC236}">
+                  <a16:creationId xmlns:a16="http://schemas.microsoft.com/office/drawing/2014/main" id="{3E0FCC81-0923-43B1-9ACC-080EBD94427F}"/>
+                </a:ext>
+              </a:extLst>
+            </p:cNvPr>
+            <p:cNvSpPr txBox="1">
+              <a:spLocks/>
+            </p:cNvSpPr>
+            <p:nvPr/>
+          </p:nvSpPr>
+          <p:spPr>
+            <a:xfrm>
+              <a:off x="1194324" y="5869921"/>
+              <a:ext cx="1927904" cy="549057"/>
+            </a:xfrm>
+            <a:prstGeom prst="rect">
+              <a:avLst/>
+            </a:prstGeom>
+          </p:spPr>
+          <p:txBody>
+            <a:bodyPr vert="horz" lIns="91440" tIns="45720" rIns="91440" bIns="45720" rtlCol="0">
+              <a:normAutofit/>
+            </a:bodyPr>
+            <a:lstStyle>
+              <a:lvl1pPr marL="0" indent="0" algn="l" defTabSz="914400" rtl="0" eaLnBrk="1" latinLnBrk="0" hangingPunct="1">
+                <a:lnSpc>
+                  <a:spcPct val="90000"/>
+                </a:lnSpc>
+                <a:spcBef>
+                  <a:spcPts val="1200"/>
+                </a:spcBef>
+                <a:spcAft>
+                  <a:spcPts val="200"/>
+                </a:spcAft>
+                <a:buClr>
+                  <a:schemeClr val="accent1"/>
+                </a:buClr>
+                <a:buSzPct val="100000"/>
+                <a:buFont typeface="Calibri" panose="020F0502020204030204" pitchFamily="34" charset="0"/>
+                <a:buNone/>
+                <a:defRPr sz="2400" kern="1200" cap="all" spc="200" baseline="0">
+                  <a:solidFill>
+                    <a:schemeClr val="tx2"/>
+                  </a:solidFill>
+                  <a:latin typeface="+mj-lt"/>
+                  <a:ea typeface="+mn-ea"/>
+                  <a:cs typeface="+mn-cs"/>
+                </a:defRPr>
+              </a:lvl1pPr>
+              <a:lvl2pPr marL="457200" indent="0" algn="ctr" defTabSz="914400" rtl="0" eaLnBrk="1" latinLnBrk="0" hangingPunct="1">
+                <a:lnSpc>
+                  <a:spcPct val="90000"/>
+                </a:lnSpc>
+                <a:spcBef>
+                  <a:spcPts val="200"/>
+                </a:spcBef>
+                <a:spcAft>
+                  <a:spcPts val="400"/>
+                </a:spcAft>
+                <a:buClr>
+                  <a:schemeClr val="accent1"/>
+                </a:buClr>
+                <a:buFont typeface="Calibri" pitchFamily="34" charset="0"/>
+                <a:buNone/>
+                <a:defRPr sz="2400" kern="1200">
+                  <a:solidFill>
+                    <a:schemeClr val="tx1">
+                      <a:lumMod val="75000"/>
+                      <a:lumOff val="25000"/>
+                    </a:schemeClr>
+                  </a:solidFill>
+                  <a:latin typeface="+mn-lt"/>
+                  <a:ea typeface="+mn-ea"/>
+                  <a:cs typeface="+mn-cs"/>
+                </a:defRPr>
+              </a:lvl2pPr>
+              <a:lvl3pPr marL="914400" indent="0" algn="ctr" defTabSz="914400" rtl="0" eaLnBrk="1" latinLnBrk="0" hangingPunct="1">
+                <a:lnSpc>
+                  <a:spcPct val="90000"/>
+                </a:lnSpc>
+                <a:spcBef>
+                  <a:spcPts val="200"/>
+                </a:spcBef>
+                <a:spcAft>
+                  <a:spcPts val="400"/>
+                </a:spcAft>
+                <a:buClr>
+                  <a:schemeClr val="accent1"/>
+                </a:buClr>
+                <a:buFont typeface="Calibri" pitchFamily="34" charset="0"/>
+                <a:buNone/>
+                <a:defRPr sz="2400" kern="1200">
+                  <a:solidFill>
+                    <a:schemeClr val="tx1">
+                      <a:lumMod val="75000"/>
+                      <a:lumOff val="25000"/>
+                    </a:schemeClr>
+                  </a:solidFill>
+                  <a:latin typeface="+mn-lt"/>
+                  <a:ea typeface="+mn-ea"/>
+                  <a:cs typeface="+mn-cs"/>
+                </a:defRPr>
+              </a:lvl3pPr>
+              <a:lvl4pPr marL="1371600" indent="0" algn="ctr" defTabSz="914400" rtl="0" eaLnBrk="1" latinLnBrk="0" hangingPunct="1">
+                <a:lnSpc>
+                  <a:spcPct val="90000"/>
+                </a:lnSpc>
+                <a:spcBef>
+                  <a:spcPts val="200"/>
+                </a:spcBef>
+                <a:spcAft>
+                  <a:spcPts val="400"/>
+                </a:spcAft>
+                <a:buClr>
+                  <a:schemeClr val="accent1"/>
+                </a:buClr>
+                <a:buFont typeface="Calibri" pitchFamily="34" charset="0"/>
+                <a:buNone/>
+                <a:defRPr sz="2000" kern="1200">
+                  <a:solidFill>
+                    <a:schemeClr val="tx1">
+                      <a:lumMod val="75000"/>
+                      <a:lumOff val="25000"/>
+                    </a:schemeClr>
+                  </a:solidFill>
+                  <a:latin typeface="+mn-lt"/>
+                  <a:ea typeface="+mn-ea"/>
+                  <a:cs typeface="+mn-cs"/>
+                </a:defRPr>
+              </a:lvl4pPr>
+              <a:lvl5pPr marL="1828800" indent="0" algn="ctr" defTabSz="914400" rtl="0" eaLnBrk="1" latinLnBrk="0" hangingPunct="1">
+                <a:lnSpc>
+                  <a:spcPct val="90000"/>
+                </a:lnSpc>
+                <a:spcBef>
+                  <a:spcPts val="200"/>
+                </a:spcBef>
+                <a:spcAft>
+                  <a:spcPts val="400"/>
+                </a:spcAft>
+                <a:buClr>
+                  <a:schemeClr val="accent1"/>
+                </a:buClr>
+                <a:buFont typeface="Calibri" pitchFamily="34" charset="0"/>
+                <a:buNone/>
+                <a:defRPr sz="2000" kern="1200">
+                  <a:solidFill>
+                    <a:schemeClr val="tx1">
+                      <a:lumMod val="75000"/>
+                      <a:lumOff val="25000"/>
+                    </a:schemeClr>
+                  </a:solidFill>
+                  <a:latin typeface="+mn-lt"/>
+                  <a:ea typeface="+mn-ea"/>
+                  <a:cs typeface="+mn-cs"/>
+                </a:defRPr>
+              </a:lvl5pPr>
+              <a:lvl6pPr marL="2286000" indent="0" algn="ctr" defTabSz="914400" rtl="0" eaLnBrk="1" latinLnBrk="0" hangingPunct="1">
+                <a:lnSpc>
+                  <a:spcPct val="90000"/>
+                </a:lnSpc>
+                <a:spcBef>
+                  <a:spcPts val="200"/>
+                </a:spcBef>
+                <a:spcAft>
+                  <a:spcPts val="400"/>
+                </a:spcAft>
+                <a:buClr>
+                  <a:schemeClr val="accent1"/>
+                </a:buClr>
+                <a:buFont typeface="Calibri" pitchFamily="34" charset="0"/>
+                <a:buNone/>
+                <a:defRPr sz="2000" kern="1200">
+                  <a:solidFill>
+                    <a:schemeClr val="tx1">
+                      <a:lumMod val="75000"/>
+                      <a:lumOff val="25000"/>
+                    </a:schemeClr>
+                  </a:solidFill>
+                  <a:latin typeface="+mn-lt"/>
+                  <a:ea typeface="+mn-ea"/>
+                  <a:cs typeface="+mn-cs"/>
+                </a:defRPr>
+              </a:lvl6pPr>
+              <a:lvl7pPr marL="2743200" indent="0" algn="ctr" defTabSz="914400" rtl="0" eaLnBrk="1" latinLnBrk="0" hangingPunct="1">
+                <a:lnSpc>
+                  <a:spcPct val="90000"/>
+                </a:lnSpc>
+                <a:spcBef>
+                  <a:spcPts val="200"/>
+                </a:spcBef>
+                <a:spcAft>
+                  <a:spcPts val="400"/>
+                </a:spcAft>
+                <a:buClr>
+                  <a:schemeClr val="accent1"/>
+                </a:buClr>
+                <a:buFont typeface="Calibri" pitchFamily="34" charset="0"/>
+                <a:buNone/>
+                <a:defRPr sz="2000" kern="1200">
+                  <a:solidFill>
+                    <a:schemeClr val="tx1">
+                      <a:lumMod val="75000"/>
+                      <a:lumOff val="25000"/>
+                    </a:schemeClr>
+                  </a:solidFill>
+                  <a:latin typeface="+mn-lt"/>
+                  <a:ea typeface="+mn-ea"/>
+                  <a:cs typeface="+mn-cs"/>
+                </a:defRPr>
+              </a:lvl7pPr>
+              <a:lvl8pPr marL="3200400" indent="0" algn="ctr" defTabSz="914400" rtl="0" eaLnBrk="1" latinLnBrk="0" hangingPunct="1">
+                <a:lnSpc>
+                  <a:spcPct val="90000"/>
+                </a:lnSpc>
+                <a:spcBef>
+                  <a:spcPts val="200"/>
+                </a:spcBef>
+                <a:spcAft>
+                  <a:spcPts val="400"/>
+                </a:spcAft>
+                <a:buClr>
+                  <a:schemeClr val="accent1"/>
+                </a:buClr>
+                <a:buFont typeface="Calibri" pitchFamily="34" charset="0"/>
+                <a:buNone/>
+                <a:defRPr sz="2000" kern="1200">
+                  <a:solidFill>
+                    <a:schemeClr val="tx1">
+                      <a:lumMod val="75000"/>
+                      <a:lumOff val="25000"/>
+                    </a:schemeClr>
+                  </a:solidFill>
+                  <a:latin typeface="+mn-lt"/>
+                  <a:ea typeface="+mn-ea"/>
+                  <a:cs typeface="+mn-cs"/>
+                </a:defRPr>
+              </a:lvl8pPr>
+              <a:lvl9pPr marL="3657600" indent="0" algn="ctr" defTabSz="914400" rtl="0" eaLnBrk="1" latinLnBrk="0" hangingPunct="1">
+                <a:lnSpc>
+                  <a:spcPct val="90000"/>
+                </a:lnSpc>
+                <a:spcBef>
+                  <a:spcPts val="200"/>
+                </a:spcBef>
+                <a:spcAft>
+                  <a:spcPts val="400"/>
+                </a:spcAft>
+                <a:buClr>
+                  <a:schemeClr val="accent1"/>
+                </a:buClr>
+                <a:buFont typeface="Calibri" pitchFamily="34" charset="0"/>
+                <a:buNone/>
+                <a:defRPr sz="2000" kern="1200">
+                  <a:solidFill>
+                    <a:schemeClr val="tx1">
+                      <a:lumMod val="75000"/>
+                      <a:lumOff val="25000"/>
+                    </a:schemeClr>
+                  </a:solidFill>
+                  <a:latin typeface="+mn-lt"/>
+                  <a:ea typeface="+mn-ea"/>
+                  <a:cs typeface="+mn-cs"/>
+                </a:defRPr>
+              </a:lvl9pPr>
+            </a:lstStyle>
+            <a:p>
+              <a:pPr algn="ctr">
+                <a:lnSpc>
+                  <a:spcPct val="100000"/>
+                </a:lnSpc>
+              </a:pPr>
+              <a:r>
+                <a:rPr lang="hu-HU" sz="1800" cap="none" spc="0" dirty="0">
+                  <a:solidFill>
+                    <a:schemeClr val="tx1">
+                      <a:lumMod val="75000"/>
+                      <a:lumOff val="25000"/>
+                    </a:schemeClr>
+                  </a:solidFill>
+                  <a:latin typeface="Bahnschrift Light" panose="020B0502040204020203" pitchFamily="34" charset="0"/>
+                </a:rPr>
+                <a:t>Farkas Dominik</a:t>
+              </a:r>
+            </a:p>
+          </p:txBody>
+        </p:sp>
+        <p:pic>
+          <p:nvPicPr>
+            <p:cNvPr id="7" name="Kép 6">
+              <a:extLst>
+                <a:ext uri="{FF2B5EF4-FFF2-40B4-BE49-F238E27FC236}">
+                  <a16:creationId xmlns:a16="http://schemas.microsoft.com/office/drawing/2014/main" id="{FD86BC78-13C2-4565-B556-74296A073E43}"/>
+                </a:ext>
+              </a:extLst>
+            </p:cNvPr>
+            <p:cNvPicPr>
+              <a:picLocks noChangeAspect="1"/>
+            </p:cNvPicPr>
+            <p:nvPr/>
+          </p:nvPicPr>
+          <p:blipFill>
+            <a:blip r:embed="rId4">
+              <a:extLst>
+                <a:ext uri="{28A0092B-C50C-407E-A947-70E740481C1C}">
+                  <a14:useLocalDpi xmlns:a14="http://schemas.microsoft.com/office/drawing/2010/main" val="0"/>
+                </a:ext>
+              </a:extLst>
+            </a:blip>
+            <a:stretch>
+              <a:fillRect/>
+            </a:stretch>
+          </p:blipFill>
+          <p:spPr>
+            <a:xfrm>
+              <a:off x="1275395" y="3161169"/>
+              <a:ext cx="1765763" cy="2615573"/>
+            </a:xfrm>
+            <a:prstGeom prst="rect">
+              <a:avLst/>
+            </a:prstGeom>
+            <a:ln w="38100" cap="sq">
+              <a:solidFill>
+                <a:srgbClr val="E48312"/>
+              </a:solidFill>
+              <a:prstDash val="solid"/>
+              <a:miter lim="800000"/>
+            </a:ln>
+            <a:effectLst>
+              <a:outerShdw blurRad="50800" dist="38100" dir="2700000" algn="tl" rotWithShape="0">
+                <a:srgbClr val="000000">
+                  <a:alpha val="43000"/>
+                </a:srgbClr>
+              </a:outerShdw>
+            </a:effectLst>
+          </p:spPr>
+        </p:pic>
+      </p:grpSp>
+      <p:grpSp>
+        <p:nvGrpSpPr>
+          <p:cNvPr id="15" name="Csoportba foglalás 14">
+            <a:extLst>
+              <a:ext uri="{FF2B5EF4-FFF2-40B4-BE49-F238E27FC236}">
+                <a16:creationId xmlns:a16="http://schemas.microsoft.com/office/drawing/2014/main" id="{487E420D-FD3E-4FFE-9290-702177B8E36A}"/>
+              </a:ext>
+            </a:extLst>
+          </p:cNvPr>
+          <p:cNvGrpSpPr/>
+          <p:nvPr/>
+        </p:nvGrpSpPr>
+        <p:grpSpPr>
+          <a:xfrm>
+            <a:off x="660587" y="2758398"/>
+            <a:ext cx="1765763" cy="3257809"/>
+            <a:chOff x="2402332" y="2980638"/>
+            <a:chExt cx="1765763" cy="3257809"/>
+          </a:xfrm>
+        </p:grpSpPr>
+        <p:pic>
+          <p:nvPicPr>
+            <p:cNvPr id="12" name="Kép 11">
+              <a:extLst>
+                <a:ext uri="{FF2B5EF4-FFF2-40B4-BE49-F238E27FC236}">
+                  <a16:creationId xmlns:a16="http://schemas.microsoft.com/office/drawing/2014/main" id="{C2796FC6-7561-475F-A3A9-51D3C1BCC84A}"/>
+                </a:ext>
+              </a:extLst>
+            </p:cNvPr>
+            <p:cNvPicPr>
+              <a:picLocks noChangeAspect="1"/>
+            </p:cNvPicPr>
+            <p:nvPr/>
+          </p:nvPicPr>
+          <p:blipFill>
+            <a:blip r:embed="rId5">
+              <a:extLst>
+                <a:ext uri="{28A0092B-C50C-407E-A947-70E740481C1C}">
+                  <a14:useLocalDpi xmlns:a14="http://schemas.microsoft.com/office/drawing/2010/main" val="0"/>
+                </a:ext>
+              </a:extLst>
+            </a:blip>
+            <a:stretch>
+              <a:fillRect/>
+            </a:stretch>
+          </p:blipFill>
+          <p:spPr>
+            <a:xfrm>
+              <a:off x="2402332" y="2980638"/>
+              <a:ext cx="1765763" cy="2615573"/>
+            </a:xfrm>
+            <a:prstGeom prst="rect">
+              <a:avLst/>
+            </a:prstGeom>
+            <a:ln w="38100" cap="sq">
+              <a:solidFill>
+                <a:srgbClr val="E48312"/>
+              </a:solidFill>
+              <a:prstDash val="solid"/>
+              <a:miter lim="800000"/>
+            </a:ln>
+            <a:effectLst>
+              <a:outerShdw blurRad="50800" dist="38100" dir="2700000" algn="tl" rotWithShape="0">
+                <a:srgbClr val="000000">
+                  <a:alpha val="43000"/>
+                </a:srgbClr>
+              </a:outerShdw>
+            </a:effectLst>
+          </p:spPr>
+        </p:pic>
+        <p:sp>
+          <p:nvSpPr>
+            <p:cNvPr id="13" name="Alcím 2">
+              <a:extLst>
+                <a:ext uri="{FF2B5EF4-FFF2-40B4-BE49-F238E27FC236}">
+                  <a16:creationId xmlns:a16="http://schemas.microsoft.com/office/drawing/2014/main" id="{B5F845A1-2594-4A0E-95CC-A6F4492F82D2}"/>
+                </a:ext>
+              </a:extLst>
+            </p:cNvPr>
+            <p:cNvSpPr txBox="1">
+              <a:spLocks/>
+            </p:cNvSpPr>
+            <p:nvPr/>
+          </p:nvSpPr>
+          <p:spPr>
+            <a:xfrm>
+              <a:off x="2446713" y="5689391"/>
+              <a:ext cx="1677000" cy="549056"/>
+            </a:xfrm>
+            <a:prstGeom prst="rect">
+              <a:avLst/>
+            </a:prstGeom>
+          </p:spPr>
+          <p:txBody>
+            <a:bodyPr vert="horz" lIns="91440" tIns="45720" rIns="91440" bIns="45720" rtlCol="0">
+              <a:normAutofit/>
+            </a:bodyPr>
+            <a:lstStyle>
+              <a:lvl1pPr marL="0" indent="0" algn="l" defTabSz="914400" rtl="0" eaLnBrk="1" latinLnBrk="0" hangingPunct="1">
+                <a:lnSpc>
+                  <a:spcPct val="90000"/>
+                </a:lnSpc>
+                <a:spcBef>
+                  <a:spcPts val="1200"/>
+                </a:spcBef>
+                <a:spcAft>
+                  <a:spcPts val="200"/>
+                </a:spcAft>
+                <a:buClr>
+                  <a:schemeClr val="accent1"/>
+                </a:buClr>
+                <a:buSzPct val="100000"/>
+                <a:buFont typeface="Calibri" panose="020F0502020204030204" pitchFamily="34" charset="0"/>
+                <a:buNone/>
+                <a:defRPr sz="2400" kern="1200" cap="all" spc="200" baseline="0">
+                  <a:solidFill>
+                    <a:schemeClr val="tx2"/>
+                  </a:solidFill>
+                  <a:latin typeface="+mj-lt"/>
+                  <a:ea typeface="+mn-ea"/>
+                  <a:cs typeface="+mn-cs"/>
+                </a:defRPr>
+              </a:lvl1pPr>
+              <a:lvl2pPr marL="457200" indent="0" algn="ctr" defTabSz="914400" rtl="0" eaLnBrk="1" latinLnBrk="0" hangingPunct="1">
+                <a:lnSpc>
+                  <a:spcPct val="90000"/>
+                </a:lnSpc>
+                <a:spcBef>
+                  <a:spcPts val="200"/>
+                </a:spcBef>
+                <a:spcAft>
+                  <a:spcPts val="400"/>
+                </a:spcAft>
+                <a:buClr>
+                  <a:schemeClr val="accent1"/>
+                </a:buClr>
+                <a:buFont typeface="Calibri" pitchFamily="34" charset="0"/>
+                <a:buNone/>
+                <a:defRPr sz="2400" kern="1200">
+                  <a:solidFill>
+                    <a:schemeClr val="tx1">
+                      <a:lumMod val="75000"/>
+                      <a:lumOff val="25000"/>
+                    </a:schemeClr>
+                  </a:solidFill>
+                  <a:latin typeface="+mn-lt"/>
+                  <a:ea typeface="+mn-ea"/>
+                  <a:cs typeface="+mn-cs"/>
+                </a:defRPr>
+              </a:lvl2pPr>
+              <a:lvl3pPr marL="914400" indent="0" algn="ctr" defTabSz="914400" rtl="0" eaLnBrk="1" latinLnBrk="0" hangingPunct="1">
+                <a:lnSpc>
+                  <a:spcPct val="90000"/>
+                </a:lnSpc>
+                <a:spcBef>
+                  <a:spcPts val="200"/>
+                </a:spcBef>
+                <a:spcAft>
+                  <a:spcPts val="400"/>
+                </a:spcAft>
+                <a:buClr>
+                  <a:schemeClr val="accent1"/>
+                </a:buClr>
+                <a:buFont typeface="Calibri" pitchFamily="34" charset="0"/>
+                <a:buNone/>
+                <a:defRPr sz="2400" kern="1200">
+                  <a:solidFill>
+                    <a:schemeClr val="tx1">
+                      <a:lumMod val="75000"/>
+                      <a:lumOff val="25000"/>
+                    </a:schemeClr>
+                  </a:solidFill>
+                  <a:latin typeface="+mn-lt"/>
+                  <a:ea typeface="+mn-ea"/>
+                  <a:cs typeface="+mn-cs"/>
+                </a:defRPr>
+              </a:lvl3pPr>
+              <a:lvl4pPr marL="1371600" indent="0" algn="ctr" defTabSz="914400" rtl="0" eaLnBrk="1" latinLnBrk="0" hangingPunct="1">
+                <a:lnSpc>
+                  <a:spcPct val="90000"/>
+                </a:lnSpc>
+                <a:spcBef>
+                  <a:spcPts val="200"/>
+                </a:spcBef>
+                <a:spcAft>
+                  <a:spcPts val="400"/>
+                </a:spcAft>
+                <a:buClr>
+                  <a:schemeClr val="accent1"/>
+                </a:buClr>
+                <a:buFont typeface="Calibri" pitchFamily="34" charset="0"/>
+                <a:buNone/>
+                <a:defRPr sz="2000" kern="1200">
+                  <a:solidFill>
+                    <a:schemeClr val="tx1">
+                      <a:lumMod val="75000"/>
+                      <a:lumOff val="25000"/>
+                    </a:schemeClr>
+                  </a:solidFill>
+                  <a:latin typeface="+mn-lt"/>
+                  <a:ea typeface="+mn-ea"/>
+                  <a:cs typeface="+mn-cs"/>
+                </a:defRPr>
+              </a:lvl4pPr>
+              <a:lvl5pPr marL="1828800" indent="0" algn="ctr" defTabSz="914400" rtl="0" eaLnBrk="1" latinLnBrk="0" hangingPunct="1">
+                <a:lnSpc>
+                  <a:spcPct val="90000"/>
+                </a:lnSpc>
+                <a:spcBef>
+                  <a:spcPts val="200"/>
+                </a:spcBef>
+                <a:spcAft>
+                  <a:spcPts val="400"/>
+                </a:spcAft>
+                <a:buClr>
+                  <a:schemeClr val="accent1"/>
+                </a:buClr>
+                <a:buFont typeface="Calibri" pitchFamily="34" charset="0"/>
+                <a:buNone/>
+                <a:defRPr sz="2000" kern="1200">
+                  <a:solidFill>
+                    <a:schemeClr val="tx1">
+                      <a:lumMod val="75000"/>
+                      <a:lumOff val="25000"/>
+                    </a:schemeClr>
+                  </a:solidFill>
+                  <a:latin typeface="+mn-lt"/>
+                  <a:ea typeface="+mn-ea"/>
+                  <a:cs typeface="+mn-cs"/>
+                </a:defRPr>
+              </a:lvl5pPr>
+              <a:lvl6pPr marL="2286000" indent="0" algn="ctr" defTabSz="914400" rtl="0" eaLnBrk="1" latinLnBrk="0" hangingPunct="1">
+                <a:lnSpc>
+                  <a:spcPct val="90000"/>
+                </a:lnSpc>
+                <a:spcBef>
+                  <a:spcPts val="200"/>
+                </a:spcBef>
+                <a:spcAft>
+                  <a:spcPts val="400"/>
+                </a:spcAft>
+                <a:buClr>
+                  <a:schemeClr val="accent1"/>
+                </a:buClr>
+                <a:buFont typeface="Calibri" pitchFamily="34" charset="0"/>
+                <a:buNone/>
+                <a:defRPr sz="2000" kern="1200">
+                  <a:solidFill>
+                    <a:schemeClr val="tx1">
+                      <a:lumMod val="75000"/>
+                      <a:lumOff val="25000"/>
+                    </a:schemeClr>
+                  </a:solidFill>
+                  <a:latin typeface="+mn-lt"/>
+                  <a:ea typeface="+mn-ea"/>
+                  <a:cs typeface="+mn-cs"/>
+                </a:defRPr>
+              </a:lvl6pPr>
+              <a:lvl7pPr marL="2743200" indent="0" algn="ctr" defTabSz="914400" rtl="0" eaLnBrk="1" latinLnBrk="0" hangingPunct="1">
+                <a:lnSpc>
+                  <a:spcPct val="90000"/>
+                </a:lnSpc>
+                <a:spcBef>
+                  <a:spcPts val="200"/>
+                </a:spcBef>
+                <a:spcAft>
+                  <a:spcPts val="400"/>
+                </a:spcAft>
+                <a:buClr>
+                  <a:schemeClr val="accent1"/>
+                </a:buClr>
+                <a:buFont typeface="Calibri" pitchFamily="34" charset="0"/>
+                <a:buNone/>
+                <a:defRPr sz="2000" kern="1200">
+                  <a:solidFill>
+                    <a:schemeClr val="tx1">
+                      <a:lumMod val="75000"/>
+                      <a:lumOff val="25000"/>
+                    </a:schemeClr>
+                  </a:solidFill>
+                  <a:latin typeface="+mn-lt"/>
+                  <a:ea typeface="+mn-ea"/>
+                  <a:cs typeface="+mn-cs"/>
+                </a:defRPr>
+              </a:lvl7pPr>
+              <a:lvl8pPr marL="3200400" indent="0" algn="ctr" defTabSz="914400" rtl="0" eaLnBrk="1" latinLnBrk="0" hangingPunct="1">
+                <a:lnSpc>
+                  <a:spcPct val="90000"/>
+                </a:lnSpc>
+                <a:spcBef>
+                  <a:spcPts val="200"/>
+                </a:spcBef>
+                <a:spcAft>
+                  <a:spcPts val="400"/>
+                </a:spcAft>
+                <a:buClr>
+                  <a:schemeClr val="accent1"/>
+                </a:buClr>
+                <a:buFont typeface="Calibri" pitchFamily="34" charset="0"/>
+                <a:buNone/>
+                <a:defRPr sz="2000" kern="1200">
+                  <a:solidFill>
+                    <a:schemeClr val="tx1">
+                      <a:lumMod val="75000"/>
+                      <a:lumOff val="25000"/>
+                    </a:schemeClr>
+                  </a:solidFill>
+                  <a:latin typeface="+mn-lt"/>
+                  <a:ea typeface="+mn-ea"/>
+                  <a:cs typeface="+mn-cs"/>
+                </a:defRPr>
+              </a:lvl8pPr>
+              <a:lvl9pPr marL="3657600" indent="0" algn="ctr" defTabSz="914400" rtl="0" eaLnBrk="1" latinLnBrk="0" hangingPunct="1">
+                <a:lnSpc>
+                  <a:spcPct val="90000"/>
+                </a:lnSpc>
+                <a:spcBef>
+                  <a:spcPts val="200"/>
+                </a:spcBef>
+                <a:spcAft>
+                  <a:spcPts val="400"/>
+                </a:spcAft>
+                <a:buClr>
+                  <a:schemeClr val="accent1"/>
+                </a:buClr>
+                <a:buFont typeface="Calibri" pitchFamily="34" charset="0"/>
+                <a:buNone/>
+                <a:defRPr sz="2000" kern="1200">
+                  <a:solidFill>
+                    <a:schemeClr val="tx1">
+                      <a:lumMod val="75000"/>
+                      <a:lumOff val="25000"/>
+                    </a:schemeClr>
+                  </a:solidFill>
+                  <a:latin typeface="+mn-lt"/>
+                  <a:ea typeface="+mn-ea"/>
+                  <a:cs typeface="+mn-cs"/>
+                </a:defRPr>
+              </a:lvl9pPr>
+            </a:lstStyle>
+            <a:p>
+              <a:pPr algn="ctr">
+                <a:lnSpc>
+                  <a:spcPct val="100000"/>
+                </a:lnSpc>
+              </a:pPr>
+              <a:r>
+                <a:rPr lang="hu-HU" sz="1800" cap="none" spc="0" dirty="0">
+                  <a:solidFill>
+                    <a:schemeClr val="tx1">
+                      <a:lumMod val="75000"/>
+                      <a:lumOff val="25000"/>
+                    </a:schemeClr>
+                  </a:solidFill>
+                  <a:latin typeface="Bahnschrift Light" panose="020B0502040204020203" pitchFamily="34" charset="0"/>
+                </a:rPr>
+                <a:t>Atkári Ariella</a:t>
+              </a:r>
+            </a:p>
+          </p:txBody>
+        </p:sp>
+      </p:grpSp>
     </p:spTree>
     <p:extLst>
       <p:ext uri="{BB962C8B-B14F-4D97-AF65-F5344CB8AC3E}">
-        <p14:creationId xmlns:p14="http://schemas.microsoft.com/office/powerpoint/2010/main" val="3133121184"/>
+        <p14:creationId xmlns:p14="http://schemas.microsoft.com/office/powerpoint/2010/main" val="3710044605"/>
       </p:ext>
     </p:extLst>
   </p:cSld>
@@ -5531,6 +6505,524 @@
 </file>
 
 <file path=ppt/slides/slide10.xml><?xml version="1.0" encoding="utf-8"?>
+<p:sld xmlns:a="http://schemas.openxmlformats.org/drawingml/2006/main" xmlns:r="http://schemas.openxmlformats.org/officeDocument/2006/relationships" xmlns:p="http://schemas.openxmlformats.org/presentationml/2006/main">
+  <p:cSld>
+    <p:bg>
+      <p:bgPr>
+        <a:solidFill>
+          <a:srgbClr val="FDF7E9"/>
+        </a:solidFill>
+        <a:effectLst/>
+      </p:bgPr>
+    </p:bg>
+    <p:spTree>
+      <p:nvGrpSpPr>
+        <p:cNvPr id="1" name=""/>
+        <p:cNvGrpSpPr/>
+        <p:nvPr/>
+      </p:nvGrpSpPr>
+      <p:grpSpPr>
+        <a:xfrm>
+          <a:off x="0" y="0"/>
+          <a:ext cx="0" cy="0"/>
+          <a:chOff x="0" y="0"/>
+          <a:chExt cx="0" cy="0"/>
+        </a:xfrm>
+      </p:grpSpPr>
+      <p:sp>
+        <p:nvSpPr>
+          <p:cNvPr id="3" name="Tartalom helye 2">
+            <a:extLst>
+              <a:ext uri="{FF2B5EF4-FFF2-40B4-BE49-F238E27FC236}">
+                <a16:creationId xmlns:a16="http://schemas.microsoft.com/office/drawing/2014/main" id="{32758DB2-9D10-47A2-925C-F8A858558A07}"/>
+              </a:ext>
+            </a:extLst>
+          </p:cNvPr>
+          <p:cNvSpPr>
+            <a:spLocks noGrp="1"/>
+          </p:cNvSpPr>
+          <p:nvPr>
+            <p:ph idx="1"/>
+          </p:nvPr>
+        </p:nvSpPr>
+        <p:spPr>
+          <a:xfrm>
+            <a:off x="1243554" y="1911310"/>
+            <a:ext cx="10058400" cy="4023360"/>
+          </a:xfrm>
+        </p:spPr>
+        <p:txBody>
+          <a:bodyPr/>
+          <a:lstStyle/>
+          <a:p>
+            <a:pPr>
+              <a:buFont typeface="Arial" panose="020B0604020202020204" pitchFamily="34" charset="0"/>
+              <a:buChar char="•"/>
+            </a:pPr>
+            <a:r>
+              <a:rPr lang="hu-HU" dirty="0"/>
+              <a:t> 16 tábla</a:t>
+            </a:r>
+          </a:p>
+          <a:p>
+            <a:pPr>
+              <a:buFont typeface="Arial" panose="020B0604020202020204" pitchFamily="34" charset="0"/>
+              <a:buChar char="•"/>
+            </a:pPr>
+            <a:r>
+              <a:rPr lang="hu-HU" dirty="0"/>
+              <a:t> Mintaadatok</a:t>
+            </a:r>
+          </a:p>
+          <a:p>
+            <a:endParaRPr lang="hu-HU" dirty="0"/>
+          </a:p>
+        </p:txBody>
+      </p:sp>
+      <p:sp>
+        <p:nvSpPr>
+          <p:cNvPr id="4" name="Cím 1">
+            <a:extLst>
+              <a:ext uri="{FF2B5EF4-FFF2-40B4-BE49-F238E27FC236}">
+                <a16:creationId xmlns:a16="http://schemas.microsoft.com/office/drawing/2014/main" id="{1BABF97B-7E63-454C-9CDB-F386138F1BAA}"/>
+              </a:ext>
+            </a:extLst>
+          </p:cNvPr>
+          <p:cNvSpPr>
+            <a:spLocks noGrp="1"/>
+          </p:cNvSpPr>
+          <p:nvPr>
+            <p:ph type="title"/>
+          </p:nvPr>
+        </p:nvSpPr>
+        <p:spPr>
+          <a:xfrm>
+            <a:off x="1097280" y="286603"/>
+            <a:ext cx="10058400" cy="1450757"/>
+          </a:xfrm>
+        </p:spPr>
+        <p:txBody>
+          <a:bodyPr/>
+          <a:lstStyle/>
+          <a:p>
+            <a:r>
+              <a:rPr lang="hu-HU" b="1" dirty="0">
+                <a:latin typeface="Bahnschrift SemiBold" panose="020B0502040204020203" pitchFamily="34" charset="0"/>
+              </a:rPr>
+              <a:t>Adatbázis</a:t>
+            </a:r>
+          </a:p>
+        </p:txBody>
+      </p:sp>
+      <p:grpSp>
+        <p:nvGrpSpPr>
+          <p:cNvPr id="7" name="Csoportba foglalás 6">
+            <a:extLst>
+              <a:ext uri="{FF2B5EF4-FFF2-40B4-BE49-F238E27FC236}">
+                <a16:creationId xmlns:a16="http://schemas.microsoft.com/office/drawing/2014/main" id="{E802B2B8-8A4C-4A1C-A3DA-1085A7D5C7F6}"/>
+              </a:ext>
+            </a:extLst>
+          </p:cNvPr>
+          <p:cNvGrpSpPr/>
+          <p:nvPr/>
+        </p:nvGrpSpPr>
+        <p:grpSpPr>
+          <a:xfrm>
+            <a:off x="10565538" y="349786"/>
+            <a:ext cx="1418895" cy="1258023"/>
+            <a:chOff x="10565538" y="349786"/>
+            <a:chExt cx="1418895" cy="1258023"/>
+          </a:xfrm>
+        </p:grpSpPr>
+        <p:pic>
+          <p:nvPicPr>
+            <p:cNvPr id="8" name="Kép 7">
+              <a:extLst>
+                <a:ext uri="{FF2B5EF4-FFF2-40B4-BE49-F238E27FC236}">
+                  <a16:creationId xmlns:a16="http://schemas.microsoft.com/office/drawing/2014/main" id="{2F280203-E1A7-4586-A915-B522FFD90496}"/>
+                </a:ext>
+              </a:extLst>
+            </p:cNvPr>
+            <p:cNvPicPr>
+              <a:picLocks noChangeAspect="1"/>
+            </p:cNvPicPr>
+            <p:nvPr/>
+          </p:nvPicPr>
+          <p:blipFill rotWithShape="1">
+            <a:blip r:embed="rId3">
+              <a:alphaModFix amt="50000"/>
+              <a:extLst>
+                <a:ext uri="{28A0092B-C50C-407E-A947-70E740481C1C}">
+                  <a14:useLocalDpi xmlns:a14="http://schemas.microsoft.com/office/drawing/2010/main" val="0"/>
+                </a:ext>
+              </a:extLst>
+            </a:blip>
+            <a:srcRect t="58555" r="67375"/>
+            <a:stretch/>
+          </p:blipFill>
+          <p:spPr>
+            <a:xfrm>
+              <a:off x="10619475" y="1036308"/>
+              <a:ext cx="1364958" cy="571501"/>
+            </a:xfrm>
+            <a:prstGeom prst="rect">
+              <a:avLst/>
+            </a:prstGeom>
+          </p:spPr>
+        </p:pic>
+        <p:pic>
+          <p:nvPicPr>
+            <p:cNvPr id="9" name="Kép 8">
+              <a:extLst>
+                <a:ext uri="{FF2B5EF4-FFF2-40B4-BE49-F238E27FC236}">
+                  <a16:creationId xmlns:a16="http://schemas.microsoft.com/office/drawing/2014/main" id="{90937401-8474-4C4C-8353-0BC085D4C997}"/>
+                </a:ext>
+              </a:extLst>
+            </p:cNvPr>
+            <p:cNvPicPr>
+              <a:picLocks noChangeAspect="1"/>
+            </p:cNvPicPr>
+            <p:nvPr/>
+          </p:nvPicPr>
+          <p:blipFill rotWithShape="1">
+            <a:blip r:embed="rId3">
+              <a:alphaModFix amt="50000"/>
+              <a:extLst>
+                <a:ext uri="{28A0092B-C50C-407E-A947-70E740481C1C}">
+                  <a14:useLocalDpi xmlns:a14="http://schemas.microsoft.com/office/drawing/2010/main" val="0"/>
+                </a:ext>
+              </a:extLst>
+            </a:blip>
+            <a:srcRect l="1" r="61666" b="38896"/>
+            <a:stretch/>
+          </p:blipFill>
+          <p:spPr>
+            <a:xfrm>
+              <a:off x="10565538" y="349786"/>
+              <a:ext cx="1418895" cy="745451"/>
+            </a:xfrm>
+            <a:prstGeom prst="rect">
+              <a:avLst/>
+            </a:prstGeom>
+          </p:spPr>
+        </p:pic>
+      </p:grpSp>
+      <p:pic>
+        <p:nvPicPr>
+          <p:cNvPr id="5" name="Kép 4">
+            <a:extLst>
+              <a:ext uri="{FF2B5EF4-FFF2-40B4-BE49-F238E27FC236}">
+                <a16:creationId xmlns:a16="http://schemas.microsoft.com/office/drawing/2014/main" id="{12F1D82F-A13E-4282-A8D3-3080BA7F58C4}"/>
+              </a:ext>
+            </a:extLst>
+          </p:cNvPr>
+          <p:cNvPicPr>
+            <a:picLocks noChangeAspect="1"/>
+          </p:cNvPicPr>
+          <p:nvPr/>
+        </p:nvPicPr>
+        <p:blipFill rotWithShape="1">
+          <a:blip r:embed="rId4"/>
+          <a:srcRect l="7840" t="-648" r="28565" b="-478"/>
+          <a:stretch/>
+        </p:blipFill>
+        <p:spPr>
+          <a:xfrm>
+            <a:off x="1600330" y="2929002"/>
+            <a:ext cx="2435383" cy="3005668"/>
+          </a:xfrm>
+          <a:prstGeom prst="rect">
+            <a:avLst/>
+          </a:prstGeom>
+          <a:ln w="76200" cap="sq">
+            <a:solidFill>
+              <a:srgbClr val="E48312"/>
+            </a:solidFill>
+            <a:miter lim="800000"/>
+          </a:ln>
+          <a:effectLst>
+            <a:outerShdw blurRad="57150" dist="50800" dir="2700000" algn="tl" rotWithShape="0">
+              <a:srgbClr val="000000">
+                <a:alpha val="40000"/>
+              </a:srgbClr>
+            </a:outerShdw>
+          </a:effectLst>
+        </p:spPr>
+      </p:pic>
+      <p:pic>
+        <p:nvPicPr>
+          <p:cNvPr id="11" name="Kép 10">
+            <a:extLst>
+              <a:ext uri="{FF2B5EF4-FFF2-40B4-BE49-F238E27FC236}">
+                <a16:creationId xmlns:a16="http://schemas.microsoft.com/office/drawing/2014/main" id="{F645605F-0923-431D-B3D3-AE4E34E70E6B}"/>
+              </a:ext>
+            </a:extLst>
+          </p:cNvPr>
+          <p:cNvPicPr>
+            <a:picLocks noChangeAspect="1"/>
+          </p:cNvPicPr>
+          <p:nvPr/>
+        </p:nvPicPr>
+        <p:blipFill rotWithShape="1">
+          <a:blip r:embed="rId5"/>
+          <a:srcRect l="12382" t="5217" r="15002" b="8258"/>
+          <a:stretch/>
+        </p:blipFill>
+        <p:spPr>
+          <a:xfrm>
+            <a:off x="5350598" y="2034567"/>
+            <a:ext cx="5359652" cy="3900103"/>
+          </a:xfrm>
+          <a:prstGeom prst="rect">
+            <a:avLst/>
+          </a:prstGeom>
+          <a:ln w="76200" cap="sq">
+            <a:solidFill>
+              <a:srgbClr val="E48312"/>
+            </a:solidFill>
+            <a:miter lim="800000"/>
+          </a:ln>
+          <a:effectLst>
+            <a:outerShdw blurRad="57150" dist="50800" dir="2700000" algn="tl" rotWithShape="0">
+              <a:srgbClr val="000000">
+                <a:alpha val="40000"/>
+              </a:srgbClr>
+            </a:outerShdw>
+          </a:effectLst>
+        </p:spPr>
+      </p:pic>
+    </p:spTree>
+    <p:extLst>
+      <p:ext uri="{BB962C8B-B14F-4D97-AF65-F5344CB8AC3E}">
+        <p14:creationId xmlns:p14="http://schemas.microsoft.com/office/powerpoint/2010/main" val="1438799303"/>
+      </p:ext>
+    </p:extLst>
+  </p:cSld>
+  <p:clrMapOvr>
+    <a:masterClrMapping/>
+  </p:clrMapOvr>
+  <p:transition spd="slow">
+    <p:push dir="u"/>
+  </p:transition>
+</p:sld>
+</file>
+
+<file path=ppt/slides/slide11.xml><?xml version="1.0" encoding="utf-8"?>
+<p:sld xmlns:a="http://schemas.openxmlformats.org/drawingml/2006/main" xmlns:r="http://schemas.openxmlformats.org/officeDocument/2006/relationships" xmlns:p="http://schemas.openxmlformats.org/presentationml/2006/main">
+  <p:cSld>
+    <p:bg>
+      <p:bgPr>
+        <a:solidFill>
+          <a:srgbClr val="FDF7E9"/>
+        </a:solidFill>
+        <a:effectLst/>
+      </p:bgPr>
+    </p:bg>
+    <p:spTree>
+      <p:nvGrpSpPr>
+        <p:cNvPr id="1" name=""/>
+        <p:cNvGrpSpPr/>
+        <p:nvPr/>
+      </p:nvGrpSpPr>
+      <p:grpSpPr>
+        <a:xfrm>
+          <a:off x="0" y="0"/>
+          <a:ext cx="0" cy="0"/>
+          <a:chOff x="0" y="0"/>
+          <a:chExt cx="0" cy="0"/>
+        </a:xfrm>
+      </p:grpSpPr>
+      <p:sp>
+        <p:nvSpPr>
+          <p:cNvPr id="2" name="Cím 1">
+            <a:extLst>
+              <a:ext uri="{FF2B5EF4-FFF2-40B4-BE49-F238E27FC236}">
+                <a16:creationId xmlns:a16="http://schemas.microsoft.com/office/drawing/2014/main" id="{755F2576-93E3-4E11-AD5A-5982C144E204}"/>
+              </a:ext>
+            </a:extLst>
+          </p:cNvPr>
+          <p:cNvSpPr>
+            <a:spLocks noGrp="1"/>
+          </p:cNvSpPr>
+          <p:nvPr>
+            <p:ph type="title"/>
+          </p:nvPr>
+        </p:nvSpPr>
+        <p:spPr>
+          <a:xfrm>
+            <a:off x="457200" y="622934"/>
+            <a:ext cx="3200400" cy="2286000"/>
+          </a:xfrm>
+        </p:spPr>
+        <p:txBody>
+          <a:bodyPr/>
+          <a:lstStyle/>
+          <a:p>
+            <a:r>
+              <a:rPr lang="hu-HU" dirty="0" err="1">
+                <a:latin typeface="Bahnschrift SemiBold" panose="020B0502040204020203" pitchFamily="34" charset="0"/>
+              </a:rPr>
+              <a:t>Reszponzivitás</a:t>
+            </a:r>
+            <a:endParaRPr lang="hu-HU" dirty="0">
+              <a:latin typeface="Bahnschrift SemiBold" panose="020B0502040204020203" pitchFamily="34" charset="0"/>
+            </a:endParaRPr>
+          </a:p>
+        </p:txBody>
+      </p:sp>
+      <p:sp>
+        <p:nvSpPr>
+          <p:cNvPr id="4" name="Szöveg helye 3">
+            <a:extLst>
+              <a:ext uri="{FF2B5EF4-FFF2-40B4-BE49-F238E27FC236}">
+                <a16:creationId xmlns:a16="http://schemas.microsoft.com/office/drawing/2014/main" id="{E1483CC7-2FF0-4B57-872B-832994FD7836}"/>
+              </a:ext>
+            </a:extLst>
+          </p:cNvPr>
+          <p:cNvSpPr>
+            <a:spLocks noGrp="1"/>
+          </p:cNvSpPr>
+          <p:nvPr>
+            <p:ph type="body" sz="half" idx="2"/>
+          </p:nvPr>
+        </p:nvSpPr>
+        <p:spPr>
+          <a:xfrm>
+            <a:off x="704850" y="3259455"/>
+            <a:ext cx="3562350" cy="3684270"/>
+          </a:xfrm>
+        </p:spPr>
+        <p:txBody>
+          <a:bodyPr>
+            <a:normAutofit/>
+          </a:bodyPr>
+          <a:lstStyle/>
+          <a:p>
+            <a:pPr marL="285750" indent="-285750">
+              <a:buClr>
+                <a:schemeClr val="bg1"/>
+              </a:buClr>
+              <a:buFont typeface="Arial" panose="020B0604020202020204" pitchFamily="34" charset="0"/>
+              <a:buChar char="•"/>
+            </a:pPr>
+            <a:r>
+              <a:rPr lang="hu-HU" sz="1800" dirty="0" err="1"/>
+              <a:t>Bootstrap</a:t>
+            </a:r>
+            <a:endParaRPr lang="hu-HU" sz="1800" dirty="0"/>
+          </a:p>
+        </p:txBody>
+      </p:sp>
+      <p:grpSp>
+        <p:nvGrpSpPr>
+          <p:cNvPr id="6" name="Csoportba foglalás 5">
+            <a:extLst>
+              <a:ext uri="{FF2B5EF4-FFF2-40B4-BE49-F238E27FC236}">
+                <a16:creationId xmlns:a16="http://schemas.microsoft.com/office/drawing/2014/main" id="{3317F239-9F4A-4F2E-A3AC-DBDE360A6AFF}"/>
+              </a:ext>
+            </a:extLst>
+          </p:cNvPr>
+          <p:cNvGrpSpPr/>
+          <p:nvPr/>
+        </p:nvGrpSpPr>
+        <p:grpSpPr>
+          <a:xfrm>
+            <a:off x="10565538" y="349786"/>
+            <a:ext cx="1418895" cy="1258023"/>
+            <a:chOff x="10565538" y="349786"/>
+            <a:chExt cx="1418895" cy="1258023"/>
+          </a:xfrm>
+        </p:grpSpPr>
+        <p:pic>
+          <p:nvPicPr>
+            <p:cNvPr id="7" name="Kép 6">
+              <a:extLst>
+                <a:ext uri="{FF2B5EF4-FFF2-40B4-BE49-F238E27FC236}">
+                  <a16:creationId xmlns:a16="http://schemas.microsoft.com/office/drawing/2014/main" id="{C2CC19C8-CD10-42F5-9D72-C77B335B0586}"/>
+                </a:ext>
+              </a:extLst>
+            </p:cNvPr>
+            <p:cNvPicPr>
+              <a:picLocks noChangeAspect="1"/>
+            </p:cNvPicPr>
+            <p:nvPr/>
+          </p:nvPicPr>
+          <p:blipFill rotWithShape="1">
+            <a:blip r:embed="rId3">
+              <a:alphaModFix amt="50000"/>
+              <a:extLst>
+                <a:ext uri="{28A0092B-C50C-407E-A947-70E740481C1C}">
+                  <a14:useLocalDpi xmlns:a14="http://schemas.microsoft.com/office/drawing/2010/main" val="0"/>
+                </a:ext>
+              </a:extLst>
+            </a:blip>
+            <a:srcRect t="58555" r="67375"/>
+            <a:stretch/>
+          </p:blipFill>
+          <p:spPr>
+            <a:xfrm>
+              <a:off x="10619475" y="1036308"/>
+              <a:ext cx="1364958" cy="571501"/>
+            </a:xfrm>
+            <a:prstGeom prst="rect">
+              <a:avLst/>
+            </a:prstGeom>
+          </p:spPr>
+        </p:pic>
+        <p:pic>
+          <p:nvPicPr>
+            <p:cNvPr id="8" name="Kép 7">
+              <a:extLst>
+                <a:ext uri="{FF2B5EF4-FFF2-40B4-BE49-F238E27FC236}">
+                  <a16:creationId xmlns:a16="http://schemas.microsoft.com/office/drawing/2014/main" id="{5AF4A5EB-86E0-4324-B31A-9A09255FD8E0}"/>
+                </a:ext>
+              </a:extLst>
+            </p:cNvPr>
+            <p:cNvPicPr>
+              <a:picLocks noChangeAspect="1"/>
+            </p:cNvPicPr>
+            <p:nvPr/>
+          </p:nvPicPr>
+          <p:blipFill rotWithShape="1">
+            <a:blip r:embed="rId3">
+              <a:alphaModFix amt="50000"/>
+              <a:extLst>
+                <a:ext uri="{28A0092B-C50C-407E-A947-70E740481C1C}">
+                  <a14:useLocalDpi xmlns:a14="http://schemas.microsoft.com/office/drawing/2010/main" val="0"/>
+                </a:ext>
+              </a:extLst>
+            </a:blip>
+            <a:srcRect l="1" r="61666" b="38896"/>
+            <a:stretch/>
+          </p:blipFill>
+          <p:spPr>
+            <a:xfrm>
+              <a:off x="10565538" y="349786"/>
+              <a:ext cx="1418895" cy="745451"/>
+            </a:xfrm>
+            <a:prstGeom prst="rect">
+              <a:avLst/>
+            </a:prstGeom>
+          </p:spPr>
+        </p:pic>
+      </p:grpSp>
+    </p:spTree>
+    <p:extLst>
+      <p:ext uri="{BB962C8B-B14F-4D97-AF65-F5344CB8AC3E}">
+        <p14:creationId xmlns:p14="http://schemas.microsoft.com/office/powerpoint/2010/main" val="1470190695"/>
+      </p:ext>
+    </p:extLst>
+  </p:cSld>
+  <p:clrMapOvr>
+    <a:masterClrMapping/>
+  </p:clrMapOvr>
+  <p:transition spd="slow">
+    <p:cover/>
+  </p:transition>
+</p:sld>
+</file>
+
+<file path=ppt/slides/slide12.xml><?xml version="1.0" encoding="utf-8"?>
 <p:sld xmlns:a="http://schemas.openxmlformats.org/drawingml/2006/main" xmlns:r="http://schemas.openxmlformats.org/officeDocument/2006/relationships" xmlns:p="http://schemas.openxmlformats.org/presentationml/2006/main">
   <p:cSld>
     <p:bg>
@@ -5771,7 +7263,7 @@
             <p:nvPr/>
           </p:nvPicPr>
           <p:blipFill rotWithShape="1">
-            <a:blip r:embed="rId2">
+            <a:blip r:embed="rId3">
               <a:alphaModFix amt="50000"/>
               <a:extLst>
                 <a:ext uri="{28A0092B-C50C-407E-A947-70E740481C1C}">
@@ -5807,7 +7299,7 @@
             <p:nvPr/>
           </p:nvPicPr>
           <p:blipFill rotWithShape="1">
-            <a:blip r:embed="rId2">
+            <a:blip r:embed="rId3">
               <a:alphaModFix amt="50000"/>
               <a:extLst>
                 <a:ext uri="{28A0092B-C50C-407E-A947-70E740481C1C}">
@@ -5844,7 +7336,7 @@
           <p:nvPr/>
         </p:nvPicPr>
         <p:blipFill rotWithShape="1">
-          <a:blip r:embed="rId3"/>
+          <a:blip r:embed="rId4"/>
           <a:srcRect t="-1" r="2568" b="49410"/>
           <a:stretch/>
         </p:blipFill>
@@ -5886,7 +7378,7 @@
           <p:nvPr/>
         </p:nvPicPr>
         <p:blipFill rotWithShape="1">
-          <a:blip r:embed="rId4"/>
+          <a:blip r:embed="rId5"/>
           <a:srcRect l="1468" t="7300" r="26371" b="-353"/>
           <a:stretch/>
         </p:blipFill>
@@ -5923,10 +7415,13 @@
   <p:clrMapOvr>
     <a:masterClrMapping/>
   </p:clrMapOvr>
+  <p:transition spd="slow">
+    <p:push dir="u"/>
+  </p:transition>
 </p:sld>
 </file>
 
-<file path=ppt/slides/slide11.xml><?xml version="1.0" encoding="utf-8"?>
+<file path=ppt/slides/slide13.xml><?xml version="1.0" encoding="utf-8"?>
 <p:sld xmlns:a="http://schemas.openxmlformats.org/drawingml/2006/main" xmlns:r="http://schemas.openxmlformats.org/officeDocument/2006/relationships" xmlns:p="http://schemas.openxmlformats.org/presentationml/2006/main">
   <p:cSld>
     <p:bg>
@@ -6424,7 +7919,7 @@
               <a:rPr lang="hu-HU" sz="2000" dirty="0">
                 <a:latin typeface="Bahnschrift Light" panose="020B0502040204020203" pitchFamily="34" charset="0"/>
               </a:rPr>
-              <a:t>Értesítés küldés</a:t>
+              <a:t>Értesítés küldés?</a:t>
             </a:r>
           </a:p>
           <a:p>
@@ -6518,10 +8013,13 @@
   <p:clrMapOvr>
     <a:masterClrMapping/>
   </p:clrMapOvr>
+  <p:transition spd="slow">
+    <p:push dir="u"/>
+  </p:transition>
 </p:sld>
 </file>
 
-<file path=ppt/slides/slide12.xml><?xml version="1.0" encoding="utf-8"?>
+<file path=ppt/slides/slide14.xml><?xml version="1.0" encoding="utf-8"?>
 <p:sld xmlns:a="http://schemas.openxmlformats.org/drawingml/2006/main" xmlns:r="http://schemas.openxmlformats.org/officeDocument/2006/relationships" xmlns:p="http://schemas.openxmlformats.org/presentationml/2006/main">
   <p:cSld>
     <p:bg>
@@ -6941,7 +8439,291 @@
 </p:sld>
 </file>
 
-<file path=ppt/slides/slide13.xml><?xml version="1.0" encoding="utf-8"?>
+<file path=ppt/slides/slide15.xml><?xml version="1.0" encoding="utf-8"?>
+<p:sld xmlns:a="http://schemas.openxmlformats.org/drawingml/2006/main" xmlns:r="http://schemas.openxmlformats.org/officeDocument/2006/relationships" xmlns:p="http://schemas.openxmlformats.org/presentationml/2006/main">
+  <p:cSld>
+    <p:bg>
+      <p:bgPr>
+        <a:solidFill>
+          <a:srgbClr val="FDF7E9"/>
+        </a:solidFill>
+        <a:effectLst/>
+      </p:bgPr>
+    </p:bg>
+    <p:spTree>
+      <p:nvGrpSpPr>
+        <p:cNvPr id="1" name=""/>
+        <p:cNvGrpSpPr/>
+        <p:nvPr/>
+      </p:nvGrpSpPr>
+      <p:grpSpPr>
+        <a:xfrm>
+          <a:off x="0" y="0"/>
+          <a:ext cx="0" cy="0"/>
+          <a:chOff x="0" y="0"/>
+          <a:chExt cx="0" cy="0"/>
+        </a:xfrm>
+      </p:grpSpPr>
+      <p:cxnSp>
+        <p:nvCxnSpPr>
+          <p:cNvPr id="2" name="Egyenes összekötő 1">
+            <a:extLst>
+              <a:ext uri="{FF2B5EF4-FFF2-40B4-BE49-F238E27FC236}">
+                <a16:creationId xmlns:a16="http://schemas.microsoft.com/office/drawing/2014/main" id="{20EF3F3C-374B-461F-BAF4-6C213DE7C8BB}"/>
+              </a:ext>
+            </a:extLst>
+          </p:cNvPr>
+          <p:cNvCxnSpPr>
+            <a:cxnSpLocks/>
+          </p:cNvCxnSpPr>
+          <p:nvPr/>
+        </p:nvCxnSpPr>
+        <p:spPr>
+          <a:xfrm>
+            <a:off x="3205163" y="2154342"/>
+            <a:ext cx="5781675" cy="0"/>
+          </a:xfrm>
+          <a:prstGeom prst="line">
+            <a:avLst/>
+          </a:prstGeom>
+          <a:ln>
+            <a:solidFill>
+              <a:schemeClr val="tx1">
+                <a:lumMod val="50000"/>
+                <a:lumOff val="50000"/>
+              </a:schemeClr>
+            </a:solidFill>
+          </a:ln>
+        </p:spPr>
+        <p:style>
+          <a:lnRef idx="1">
+            <a:schemeClr val="accent1"/>
+          </a:lnRef>
+          <a:fillRef idx="0">
+            <a:schemeClr val="accent1"/>
+          </a:fillRef>
+          <a:effectRef idx="0">
+            <a:schemeClr val="accent1"/>
+          </a:effectRef>
+          <a:fontRef idx="minor">
+            <a:schemeClr val="tx1"/>
+          </a:fontRef>
+        </p:style>
+      </p:cxnSp>
+      <p:pic>
+        <p:nvPicPr>
+          <p:cNvPr id="3" name="Kép 2">
+            <a:extLst>
+              <a:ext uri="{FF2B5EF4-FFF2-40B4-BE49-F238E27FC236}">
+                <a16:creationId xmlns:a16="http://schemas.microsoft.com/office/drawing/2014/main" id="{FE91A941-BC8A-4E2A-B780-F3F3D6A9B3E3}"/>
+              </a:ext>
+            </a:extLst>
+          </p:cNvPr>
+          <p:cNvPicPr>
+            <a:picLocks noChangeAspect="1"/>
+          </p:cNvPicPr>
+          <p:nvPr/>
+        </p:nvPicPr>
+        <p:blipFill rotWithShape="1">
+          <a:blip r:embed="rId3">
+            <a:alphaModFix/>
+            <a:extLst>
+              <a:ext uri="{28A0092B-C50C-407E-A947-70E740481C1C}">
+                <a14:useLocalDpi xmlns:a14="http://schemas.microsoft.com/office/drawing/2010/main" val="0"/>
+              </a:ext>
+            </a:extLst>
+          </a:blip>
+          <a:srcRect l="-1" t="58555" r="1153"/>
+          <a:stretch/>
+        </p:blipFill>
+        <p:spPr>
+          <a:xfrm>
+            <a:off x="3864953" y="1462194"/>
+            <a:ext cx="4462094" cy="616623"/>
+          </a:xfrm>
+          <a:prstGeom prst="rect">
+            <a:avLst/>
+          </a:prstGeom>
+        </p:spPr>
+      </p:pic>
+      <p:pic>
+        <p:nvPicPr>
+          <p:cNvPr id="4" name="Kép 3">
+            <a:extLst>
+              <a:ext uri="{FF2B5EF4-FFF2-40B4-BE49-F238E27FC236}">
+                <a16:creationId xmlns:a16="http://schemas.microsoft.com/office/drawing/2014/main" id="{78D3DB18-E771-4DF0-84FA-206E8FA41883}"/>
+              </a:ext>
+            </a:extLst>
+          </p:cNvPr>
+          <p:cNvPicPr>
+            <a:picLocks noChangeAspect="1"/>
+          </p:cNvPicPr>
+          <p:nvPr/>
+        </p:nvPicPr>
+        <p:blipFill rotWithShape="1">
+          <a:blip r:embed="rId3">
+            <a:alphaModFix/>
+            <a:extLst>
+              <a:ext uri="{28A0092B-C50C-407E-A947-70E740481C1C}">
+                <a14:useLocalDpi xmlns:a14="http://schemas.microsoft.com/office/drawing/2010/main" val="0"/>
+              </a:ext>
+            </a:extLst>
+          </a:blip>
+          <a:srcRect l="-1" r="-295" b="38896"/>
+          <a:stretch/>
+        </p:blipFill>
+        <p:spPr>
+          <a:xfrm>
+            <a:off x="3817995" y="581028"/>
+            <a:ext cx="4556011" cy="914838"/>
+          </a:xfrm>
+          <a:prstGeom prst="rect">
+            <a:avLst/>
+          </a:prstGeom>
+        </p:spPr>
+      </p:pic>
+      <p:sp>
+        <p:nvSpPr>
+          <p:cNvPr id="5" name="Cím 1">
+            <a:extLst>
+              <a:ext uri="{FF2B5EF4-FFF2-40B4-BE49-F238E27FC236}">
+                <a16:creationId xmlns:a16="http://schemas.microsoft.com/office/drawing/2014/main" id="{175A5A3F-6F8F-4002-ADBD-CD8C93ECEEE1}"/>
+              </a:ext>
+            </a:extLst>
+          </p:cNvPr>
+          <p:cNvSpPr txBox="1">
+            <a:spLocks/>
+          </p:cNvSpPr>
+          <p:nvPr/>
+        </p:nvSpPr>
+        <p:spPr>
+          <a:xfrm>
+            <a:off x="1066800" y="2703622"/>
+            <a:ext cx="10058400" cy="1450757"/>
+          </a:xfrm>
+          <a:prstGeom prst="rect">
+            <a:avLst/>
+          </a:prstGeom>
+        </p:spPr>
+        <p:txBody>
+          <a:bodyPr anchor="ctr"/>
+          <a:lstStyle>
+            <a:lvl1pPr algn="l" defTabSz="914400" rtl="0" eaLnBrk="1" latinLnBrk="0" hangingPunct="1">
+              <a:lnSpc>
+                <a:spcPct val="85000"/>
+              </a:lnSpc>
+              <a:spcBef>
+                <a:spcPct val="0"/>
+              </a:spcBef>
+              <a:buNone/>
+              <a:defRPr sz="4800" kern="1200" spc="-50" baseline="0">
+                <a:solidFill>
+                  <a:schemeClr val="tx1">
+                    <a:lumMod val="75000"/>
+                    <a:lumOff val="25000"/>
+                  </a:schemeClr>
+                </a:solidFill>
+                <a:latin typeface="+mj-lt"/>
+                <a:ea typeface="+mj-ea"/>
+                <a:cs typeface="+mj-cs"/>
+              </a:defRPr>
+            </a:lvl1pPr>
+          </a:lstStyle>
+          <a:p>
+            <a:pPr algn="ctr"/>
+            <a:r>
+              <a:rPr lang="hu-HU" sz="6000" b="1" dirty="0">
+                <a:latin typeface="Bahnschrift SemiBold" panose="020B0502040204020203" pitchFamily="34" charset="0"/>
+              </a:rPr>
+              <a:t>Kérdések</a:t>
+            </a:r>
+          </a:p>
+        </p:txBody>
+      </p:sp>
+      <p:pic>
+        <p:nvPicPr>
+          <p:cNvPr id="12" name="Kép 11">
+            <a:extLst>
+              <a:ext uri="{FF2B5EF4-FFF2-40B4-BE49-F238E27FC236}">
+                <a16:creationId xmlns:a16="http://schemas.microsoft.com/office/drawing/2014/main" id="{0D5DF80E-C3F6-4A3A-98C9-825EEE99BBF4}"/>
+              </a:ext>
+            </a:extLst>
+          </p:cNvPr>
+          <p:cNvPicPr>
+            <a:picLocks noChangeAspect="1"/>
+          </p:cNvPicPr>
+          <p:nvPr/>
+        </p:nvPicPr>
+        <p:blipFill rotWithShape="1">
+          <a:blip r:embed="rId4">
+            <a:extLst>
+              <a:ext uri="{28A0092B-C50C-407E-A947-70E740481C1C}">
+                <a14:useLocalDpi xmlns:a14="http://schemas.microsoft.com/office/drawing/2010/main" val="0"/>
+              </a:ext>
+            </a:extLst>
+          </a:blip>
+          <a:srcRect l="16625" r="14640"/>
+          <a:stretch/>
+        </p:blipFill>
+        <p:spPr>
+          <a:xfrm rot="6074309">
+            <a:off x="253294" y="393819"/>
+            <a:ext cx="1804052" cy="1476375"/>
+          </a:xfrm>
+          <a:prstGeom prst="rect">
+            <a:avLst/>
+          </a:prstGeom>
+        </p:spPr>
+      </p:pic>
+      <p:pic>
+        <p:nvPicPr>
+          <p:cNvPr id="13" name="Kép 12">
+            <a:extLst>
+              <a:ext uri="{FF2B5EF4-FFF2-40B4-BE49-F238E27FC236}">
+                <a16:creationId xmlns:a16="http://schemas.microsoft.com/office/drawing/2014/main" id="{7AF0C74E-3043-40A3-8603-B30A83BB9DDF}"/>
+              </a:ext>
+            </a:extLst>
+          </p:cNvPr>
+          <p:cNvPicPr>
+            <a:picLocks noChangeAspect="1"/>
+          </p:cNvPicPr>
+          <p:nvPr/>
+        </p:nvPicPr>
+        <p:blipFill rotWithShape="1">
+          <a:blip r:embed="rId5">
+            <a:extLst>
+              <a:ext uri="{28A0092B-C50C-407E-A947-70E740481C1C}">
+                <a14:useLocalDpi xmlns:a14="http://schemas.microsoft.com/office/drawing/2010/main" val="0"/>
+              </a:ext>
+            </a:extLst>
+          </a:blip>
+          <a:srcRect l="31214" t="-711" r="26907" b="711"/>
+          <a:stretch/>
+        </p:blipFill>
+        <p:spPr>
+          <a:xfrm rot="4156304" flipH="1">
+            <a:off x="10842996" y="4624346"/>
+            <a:ext cx="1208569" cy="1623298"/>
+          </a:xfrm>
+          <a:prstGeom prst="rect">
+            <a:avLst/>
+          </a:prstGeom>
+        </p:spPr>
+      </p:pic>
+    </p:spTree>
+    <p:extLst>
+      <p:ext uri="{BB962C8B-B14F-4D97-AF65-F5344CB8AC3E}">
+        <p14:creationId xmlns:p14="http://schemas.microsoft.com/office/powerpoint/2010/main" val="181564950"/>
+      </p:ext>
+    </p:extLst>
+  </p:cSld>
+  <p:clrMapOvr>
+    <a:masterClrMapping/>
+  </p:clrMapOvr>
+</p:sld>
+</file>
+
+<file path=ppt/slides/slide16.xml><?xml version="1.0" encoding="utf-8"?>
 <p:sld xmlns:a="http://schemas.openxmlformats.org/drawingml/2006/main" xmlns:r="http://schemas.openxmlformats.org/officeDocument/2006/relationships" xmlns:p="http://schemas.openxmlformats.org/presentationml/2006/main">
   <p:cSld>
     <p:bg>
@@ -7137,290 +8919,6 @@
               <a:rPr lang="hu-HU" sz="6000" b="1" dirty="0">
                 <a:latin typeface="Bahnschrift SemiBold" panose="020B0502040204020203" pitchFamily="34" charset="0"/>
               </a:rPr>
-              <a:t>Kérdések</a:t>
-            </a:r>
-          </a:p>
-        </p:txBody>
-      </p:sp>
-      <p:pic>
-        <p:nvPicPr>
-          <p:cNvPr id="12" name="Kép 11">
-            <a:extLst>
-              <a:ext uri="{FF2B5EF4-FFF2-40B4-BE49-F238E27FC236}">
-                <a16:creationId xmlns:a16="http://schemas.microsoft.com/office/drawing/2014/main" id="{0D5DF80E-C3F6-4A3A-98C9-825EEE99BBF4}"/>
-              </a:ext>
-            </a:extLst>
-          </p:cNvPr>
-          <p:cNvPicPr>
-            <a:picLocks noChangeAspect="1"/>
-          </p:cNvPicPr>
-          <p:nvPr/>
-        </p:nvPicPr>
-        <p:blipFill rotWithShape="1">
-          <a:blip r:embed="rId3">
-            <a:extLst>
-              <a:ext uri="{28A0092B-C50C-407E-A947-70E740481C1C}">
-                <a14:useLocalDpi xmlns:a14="http://schemas.microsoft.com/office/drawing/2010/main" val="0"/>
-              </a:ext>
-            </a:extLst>
-          </a:blip>
-          <a:srcRect l="16625" r="14640"/>
-          <a:stretch/>
-        </p:blipFill>
-        <p:spPr>
-          <a:xfrm rot="6074309">
-            <a:off x="253294" y="393819"/>
-            <a:ext cx="1804052" cy="1476375"/>
-          </a:xfrm>
-          <a:prstGeom prst="rect">
-            <a:avLst/>
-          </a:prstGeom>
-        </p:spPr>
-      </p:pic>
-      <p:pic>
-        <p:nvPicPr>
-          <p:cNvPr id="13" name="Kép 12">
-            <a:extLst>
-              <a:ext uri="{FF2B5EF4-FFF2-40B4-BE49-F238E27FC236}">
-                <a16:creationId xmlns:a16="http://schemas.microsoft.com/office/drawing/2014/main" id="{7AF0C74E-3043-40A3-8603-B30A83BB9DDF}"/>
-              </a:ext>
-            </a:extLst>
-          </p:cNvPr>
-          <p:cNvPicPr>
-            <a:picLocks noChangeAspect="1"/>
-          </p:cNvPicPr>
-          <p:nvPr/>
-        </p:nvPicPr>
-        <p:blipFill rotWithShape="1">
-          <a:blip r:embed="rId4">
-            <a:extLst>
-              <a:ext uri="{28A0092B-C50C-407E-A947-70E740481C1C}">
-                <a14:useLocalDpi xmlns:a14="http://schemas.microsoft.com/office/drawing/2010/main" val="0"/>
-              </a:ext>
-            </a:extLst>
-          </a:blip>
-          <a:srcRect l="31214" t="-711" r="26907" b="711"/>
-          <a:stretch/>
-        </p:blipFill>
-        <p:spPr>
-          <a:xfrm rot="4156304" flipH="1">
-            <a:off x="10842996" y="4624346"/>
-            <a:ext cx="1208569" cy="1623298"/>
-          </a:xfrm>
-          <a:prstGeom prst="rect">
-            <a:avLst/>
-          </a:prstGeom>
-        </p:spPr>
-      </p:pic>
-    </p:spTree>
-    <p:extLst>
-      <p:ext uri="{BB962C8B-B14F-4D97-AF65-F5344CB8AC3E}">
-        <p14:creationId xmlns:p14="http://schemas.microsoft.com/office/powerpoint/2010/main" val="181564950"/>
-      </p:ext>
-    </p:extLst>
-  </p:cSld>
-  <p:clrMapOvr>
-    <a:masterClrMapping/>
-  </p:clrMapOvr>
-</p:sld>
-</file>
-
-<file path=ppt/slides/slide14.xml><?xml version="1.0" encoding="utf-8"?>
-<p:sld xmlns:a="http://schemas.openxmlformats.org/drawingml/2006/main" xmlns:r="http://schemas.openxmlformats.org/officeDocument/2006/relationships" xmlns:p="http://schemas.openxmlformats.org/presentationml/2006/main">
-  <p:cSld>
-    <p:bg>
-      <p:bgPr>
-        <a:solidFill>
-          <a:srgbClr val="FDF7E9"/>
-        </a:solidFill>
-        <a:effectLst/>
-      </p:bgPr>
-    </p:bg>
-    <p:spTree>
-      <p:nvGrpSpPr>
-        <p:cNvPr id="1" name=""/>
-        <p:cNvGrpSpPr/>
-        <p:nvPr/>
-      </p:nvGrpSpPr>
-      <p:grpSpPr>
-        <a:xfrm>
-          <a:off x="0" y="0"/>
-          <a:ext cx="0" cy="0"/>
-          <a:chOff x="0" y="0"/>
-          <a:chExt cx="0" cy="0"/>
-        </a:xfrm>
-      </p:grpSpPr>
-      <p:cxnSp>
-        <p:nvCxnSpPr>
-          <p:cNvPr id="2" name="Egyenes összekötő 1">
-            <a:extLst>
-              <a:ext uri="{FF2B5EF4-FFF2-40B4-BE49-F238E27FC236}">
-                <a16:creationId xmlns:a16="http://schemas.microsoft.com/office/drawing/2014/main" id="{20EF3F3C-374B-461F-BAF4-6C213DE7C8BB}"/>
-              </a:ext>
-            </a:extLst>
-          </p:cNvPr>
-          <p:cNvCxnSpPr>
-            <a:cxnSpLocks/>
-          </p:cNvCxnSpPr>
-          <p:nvPr/>
-        </p:nvCxnSpPr>
-        <p:spPr>
-          <a:xfrm>
-            <a:off x="3205163" y="2154342"/>
-            <a:ext cx="5781675" cy="0"/>
-          </a:xfrm>
-          <a:prstGeom prst="line">
-            <a:avLst/>
-          </a:prstGeom>
-          <a:ln>
-            <a:solidFill>
-              <a:schemeClr val="tx1">
-                <a:lumMod val="50000"/>
-                <a:lumOff val="50000"/>
-              </a:schemeClr>
-            </a:solidFill>
-          </a:ln>
-        </p:spPr>
-        <p:style>
-          <a:lnRef idx="1">
-            <a:schemeClr val="accent1"/>
-          </a:lnRef>
-          <a:fillRef idx="0">
-            <a:schemeClr val="accent1"/>
-          </a:fillRef>
-          <a:effectRef idx="0">
-            <a:schemeClr val="accent1"/>
-          </a:effectRef>
-          <a:fontRef idx="minor">
-            <a:schemeClr val="tx1"/>
-          </a:fontRef>
-        </p:style>
-      </p:cxnSp>
-      <p:pic>
-        <p:nvPicPr>
-          <p:cNvPr id="3" name="Kép 2">
-            <a:extLst>
-              <a:ext uri="{FF2B5EF4-FFF2-40B4-BE49-F238E27FC236}">
-                <a16:creationId xmlns:a16="http://schemas.microsoft.com/office/drawing/2014/main" id="{FE91A941-BC8A-4E2A-B780-F3F3D6A9B3E3}"/>
-              </a:ext>
-            </a:extLst>
-          </p:cNvPr>
-          <p:cNvPicPr>
-            <a:picLocks noChangeAspect="1"/>
-          </p:cNvPicPr>
-          <p:nvPr/>
-        </p:nvPicPr>
-        <p:blipFill rotWithShape="1">
-          <a:blip r:embed="rId2">
-            <a:alphaModFix/>
-            <a:extLst>
-              <a:ext uri="{28A0092B-C50C-407E-A947-70E740481C1C}">
-                <a14:useLocalDpi xmlns:a14="http://schemas.microsoft.com/office/drawing/2010/main" val="0"/>
-              </a:ext>
-            </a:extLst>
-          </a:blip>
-          <a:srcRect l="-1" t="58555" r="1153"/>
-          <a:stretch/>
-        </p:blipFill>
-        <p:spPr>
-          <a:xfrm>
-            <a:off x="3864953" y="1462194"/>
-            <a:ext cx="4462094" cy="616623"/>
-          </a:xfrm>
-          <a:prstGeom prst="rect">
-            <a:avLst/>
-          </a:prstGeom>
-        </p:spPr>
-      </p:pic>
-      <p:pic>
-        <p:nvPicPr>
-          <p:cNvPr id="4" name="Kép 3">
-            <a:extLst>
-              <a:ext uri="{FF2B5EF4-FFF2-40B4-BE49-F238E27FC236}">
-                <a16:creationId xmlns:a16="http://schemas.microsoft.com/office/drawing/2014/main" id="{78D3DB18-E771-4DF0-84FA-206E8FA41883}"/>
-              </a:ext>
-            </a:extLst>
-          </p:cNvPr>
-          <p:cNvPicPr>
-            <a:picLocks noChangeAspect="1"/>
-          </p:cNvPicPr>
-          <p:nvPr/>
-        </p:nvPicPr>
-        <p:blipFill rotWithShape="1">
-          <a:blip r:embed="rId2">
-            <a:alphaModFix/>
-            <a:extLst>
-              <a:ext uri="{28A0092B-C50C-407E-A947-70E740481C1C}">
-                <a14:useLocalDpi xmlns:a14="http://schemas.microsoft.com/office/drawing/2010/main" val="0"/>
-              </a:ext>
-            </a:extLst>
-          </a:blip>
-          <a:srcRect l="-1" r="-295" b="38896"/>
-          <a:stretch/>
-        </p:blipFill>
-        <p:spPr>
-          <a:xfrm>
-            <a:off x="3817995" y="581028"/>
-            <a:ext cx="4556011" cy="914838"/>
-          </a:xfrm>
-          <a:prstGeom prst="rect">
-            <a:avLst/>
-          </a:prstGeom>
-        </p:spPr>
-      </p:pic>
-      <p:sp>
-        <p:nvSpPr>
-          <p:cNvPr id="5" name="Cím 1">
-            <a:extLst>
-              <a:ext uri="{FF2B5EF4-FFF2-40B4-BE49-F238E27FC236}">
-                <a16:creationId xmlns:a16="http://schemas.microsoft.com/office/drawing/2014/main" id="{175A5A3F-6F8F-4002-ADBD-CD8C93ECEEE1}"/>
-              </a:ext>
-            </a:extLst>
-          </p:cNvPr>
-          <p:cNvSpPr txBox="1">
-            <a:spLocks/>
-          </p:cNvSpPr>
-          <p:nvPr/>
-        </p:nvSpPr>
-        <p:spPr>
-          <a:xfrm>
-            <a:off x="1066800" y="2703622"/>
-            <a:ext cx="10058400" cy="1450757"/>
-          </a:xfrm>
-          <a:prstGeom prst="rect">
-            <a:avLst/>
-          </a:prstGeom>
-        </p:spPr>
-        <p:txBody>
-          <a:bodyPr anchor="ctr"/>
-          <a:lstStyle>
-            <a:lvl1pPr algn="l" defTabSz="914400" rtl="0" eaLnBrk="1" latinLnBrk="0" hangingPunct="1">
-              <a:lnSpc>
-                <a:spcPct val="85000"/>
-              </a:lnSpc>
-              <a:spcBef>
-                <a:spcPct val="0"/>
-              </a:spcBef>
-              <a:buNone/>
-              <a:defRPr sz="4800" kern="1200" spc="-50" baseline="0">
-                <a:solidFill>
-                  <a:schemeClr val="tx1">
-                    <a:lumMod val="75000"/>
-                    <a:lumOff val="25000"/>
-                  </a:schemeClr>
-                </a:solidFill>
-                <a:latin typeface="+mj-lt"/>
-                <a:ea typeface="+mj-ea"/>
-                <a:cs typeface="+mj-cs"/>
-              </a:defRPr>
-            </a:lvl1pPr>
-          </a:lstStyle>
-          <a:p>
-            <a:pPr algn="ctr"/>
-            <a:r>
-              <a:rPr lang="hu-HU" sz="6000" b="1" dirty="0">
-                <a:latin typeface="Bahnschrift SemiBold" panose="020B0502040204020203" pitchFamily="34" charset="0"/>
-              </a:rPr>
               <a:t>Köszönjük a figyelmet!</a:t>
             </a:r>
           </a:p>
@@ -7506,6 +9004,581 @@
   <p:clrMapOvr>
     <a:masterClrMapping/>
   </p:clrMapOvr>
+</p:sld>
+</file>
+
+<file path=ppt/slides/slide17.xml><?xml version="1.0" encoding="utf-8"?>
+<p:sld xmlns:a="http://schemas.openxmlformats.org/drawingml/2006/main" xmlns:r="http://schemas.openxmlformats.org/officeDocument/2006/relationships" xmlns:p="http://schemas.openxmlformats.org/presentationml/2006/main">
+  <p:cSld>
+    <p:bg>
+      <p:bgPr>
+        <a:solidFill>
+          <a:srgbClr val="FDF7E9"/>
+        </a:solidFill>
+        <a:effectLst/>
+      </p:bgPr>
+    </p:bg>
+    <p:spTree>
+      <p:nvGrpSpPr>
+        <p:cNvPr id="1" name=""/>
+        <p:cNvGrpSpPr/>
+        <p:nvPr/>
+      </p:nvGrpSpPr>
+      <p:grpSpPr>
+        <a:xfrm>
+          <a:off x="0" y="0"/>
+          <a:ext cx="0" cy="0"/>
+          <a:chOff x="0" y="0"/>
+          <a:chExt cx="0" cy="0"/>
+        </a:xfrm>
+      </p:grpSpPr>
+      <p:cxnSp>
+        <p:nvCxnSpPr>
+          <p:cNvPr id="2" name="Egyenes összekötő 1">
+            <a:extLst>
+              <a:ext uri="{FF2B5EF4-FFF2-40B4-BE49-F238E27FC236}">
+                <a16:creationId xmlns:a16="http://schemas.microsoft.com/office/drawing/2014/main" id="{20EF3F3C-374B-461F-BAF4-6C213DE7C8BB}"/>
+              </a:ext>
+            </a:extLst>
+          </p:cNvPr>
+          <p:cNvCxnSpPr>
+            <a:cxnSpLocks/>
+          </p:cNvCxnSpPr>
+          <p:nvPr/>
+        </p:nvCxnSpPr>
+        <p:spPr>
+          <a:xfrm>
+            <a:off x="1066800" y="1737360"/>
+            <a:ext cx="9977438" cy="0"/>
+          </a:xfrm>
+          <a:prstGeom prst="line">
+            <a:avLst/>
+          </a:prstGeom>
+          <a:ln>
+            <a:solidFill>
+              <a:schemeClr val="tx1">
+                <a:lumMod val="50000"/>
+                <a:lumOff val="50000"/>
+              </a:schemeClr>
+            </a:solidFill>
+          </a:ln>
+        </p:spPr>
+        <p:style>
+          <a:lnRef idx="1">
+            <a:schemeClr val="accent1"/>
+          </a:lnRef>
+          <a:fillRef idx="0">
+            <a:schemeClr val="accent1"/>
+          </a:fillRef>
+          <a:effectRef idx="0">
+            <a:schemeClr val="accent1"/>
+          </a:effectRef>
+          <a:fontRef idx="minor">
+            <a:schemeClr val="tx1"/>
+          </a:fontRef>
+        </p:style>
+      </p:cxnSp>
+      <p:pic>
+        <p:nvPicPr>
+          <p:cNvPr id="3" name="Kép 2">
+            <a:extLst>
+              <a:ext uri="{FF2B5EF4-FFF2-40B4-BE49-F238E27FC236}">
+                <a16:creationId xmlns:a16="http://schemas.microsoft.com/office/drawing/2014/main" id="{FE91A941-BC8A-4E2A-B780-F3F3D6A9B3E3}"/>
+              </a:ext>
+            </a:extLst>
+          </p:cNvPr>
+          <p:cNvPicPr>
+            <a:picLocks noChangeAspect="1"/>
+          </p:cNvPicPr>
+          <p:nvPr/>
+        </p:nvPicPr>
+        <p:blipFill rotWithShape="1">
+          <a:blip r:embed="rId2">
+            <a:alphaModFix amt="32000"/>
+            <a:extLst>
+              <a:ext uri="{28A0092B-C50C-407E-A947-70E740481C1C}">
+                <a14:useLocalDpi xmlns:a14="http://schemas.microsoft.com/office/drawing/2010/main" val="0"/>
+              </a:ext>
+            </a:extLst>
+          </a:blip>
+          <a:srcRect l="-2" t="58555" r="67247"/>
+          <a:stretch/>
+        </p:blipFill>
+        <p:spPr>
+          <a:xfrm>
+            <a:off x="10446874" y="1011980"/>
+            <a:ext cx="1478572" cy="616623"/>
+          </a:xfrm>
+          <a:prstGeom prst="rect">
+            <a:avLst/>
+          </a:prstGeom>
+        </p:spPr>
+      </p:pic>
+      <p:pic>
+        <p:nvPicPr>
+          <p:cNvPr id="4" name="Kép 3">
+            <a:extLst>
+              <a:ext uri="{FF2B5EF4-FFF2-40B4-BE49-F238E27FC236}">
+                <a16:creationId xmlns:a16="http://schemas.microsoft.com/office/drawing/2014/main" id="{78D3DB18-E771-4DF0-84FA-206E8FA41883}"/>
+              </a:ext>
+            </a:extLst>
+          </p:cNvPr>
+          <p:cNvPicPr>
+            <a:picLocks noChangeAspect="1"/>
+          </p:cNvPicPr>
+          <p:nvPr/>
+        </p:nvPicPr>
+        <p:blipFill rotWithShape="1">
+          <a:blip r:embed="rId2">
+            <a:alphaModFix amt="40000"/>
+            <a:extLst>
+              <a:ext uri="{28A0092B-C50C-407E-A947-70E740481C1C}">
+                <a14:useLocalDpi xmlns:a14="http://schemas.microsoft.com/office/drawing/2010/main" val="0"/>
+              </a:ext>
+            </a:extLst>
+          </a:blip>
+          <a:srcRect r="62032" b="36381"/>
+          <a:stretch/>
+        </p:blipFill>
+        <p:spPr>
+          <a:xfrm>
+            <a:off x="10355433" y="253737"/>
+            <a:ext cx="1541291" cy="851162"/>
+          </a:xfrm>
+          <a:prstGeom prst="rect">
+            <a:avLst/>
+          </a:prstGeom>
+        </p:spPr>
+      </p:pic>
+      <p:sp>
+        <p:nvSpPr>
+          <p:cNvPr id="5" name="Cím 1">
+            <a:extLst>
+              <a:ext uri="{FF2B5EF4-FFF2-40B4-BE49-F238E27FC236}">
+                <a16:creationId xmlns:a16="http://schemas.microsoft.com/office/drawing/2014/main" id="{175A5A3F-6F8F-4002-ADBD-CD8C93ECEEE1}"/>
+              </a:ext>
+            </a:extLst>
+          </p:cNvPr>
+          <p:cNvSpPr txBox="1">
+            <a:spLocks/>
+          </p:cNvSpPr>
+          <p:nvPr/>
+        </p:nvSpPr>
+        <p:spPr>
+          <a:xfrm>
+            <a:off x="1097280" y="286602"/>
+            <a:ext cx="10058400" cy="1450757"/>
+          </a:xfrm>
+          <a:prstGeom prst="rect">
+            <a:avLst/>
+          </a:prstGeom>
+        </p:spPr>
+        <p:txBody>
+          <a:bodyPr anchor="b"/>
+          <a:lstStyle>
+            <a:lvl1pPr algn="l" defTabSz="914400" rtl="0" eaLnBrk="1" latinLnBrk="0" hangingPunct="1">
+              <a:lnSpc>
+                <a:spcPct val="85000"/>
+              </a:lnSpc>
+              <a:spcBef>
+                <a:spcPct val="0"/>
+              </a:spcBef>
+              <a:buNone/>
+              <a:defRPr sz="4800" kern="1200" spc="-50" baseline="0">
+                <a:solidFill>
+                  <a:schemeClr val="tx1">
+                    <a:lumMod val="75000"/>
+                    <a:lumOff val="25000"/>
+                  </a:schemeClr>
+                </a:solidFill>
+                <a:latin typeface="+mj-lt"/>
+                <a:ea typeface="+mj-ea"/>
+                <a:cs typeface="+mj-cs"/>
+              </a:defRPr>
+            </a:lvl1pPr>
+          </a:lstStyle>
+          <a:p>
+            <a:r>
+              <a:rPr lang="hu-HU" sz="4400" b="1" dirty="0">
+                <a:latin typeface="Bahnschrift SemiBold" panose="020B0502040204020203" pitchFamily="34" charset="0"/>
+              </a:rPr>
+              <a:t>Források</a:t>
+            </a:r>
+          </a:p>
+        </p:txBody>
+      </p:sp>
+      <p:sp>
+        <p:nvSpPr>
+          <p:cNvPr id="14" name="Cím 1">
+            <a:extLst>
+              <a:ext uri="{FF2B5EF4-FFF2-40B4-BE49-F238E27FC236}">
+                <a16:creationId xmlns:a16="http://schemas.microsoft.com/office/drawing/2014/main" id="{27767F96-4F23-4735-A23B-07F09E00E316}"/>
+              </a:ext>
+            </a:extLst>
+          </p:cNvPr>
+          <p:cNvSpPr txBox="1">
+            <a:spLocks/>
+          </p:cNvSpPr>
+          <p:nvPr/>
+        </p:nvSpPr>
+        <p:spPr>
+          <a:xfrm>
+            <a:off x="1097280" y="286603"/>
+            <a:ext cx="10058400" cy="1450757"/>
+          </a:xfrm>
+          <a:prstGeom prst="rect">
+            <a:avLst/>
+          </a:prstGeom>
+        </p:spPr>
+        <p:txBody>
+          <a:bodyPr anchor="b"/>
+          <a:lstStyle>
+            <a:lvl1pPr algn="l" defTabSz="914400" rtl="0" eaLnBrk="1" latinLnBrk="0" hangingPunct="1">
+              <a:lnSpc>
+                <a:spcPct val="85000"/>
+              </a:lnSpc>
+              <a:spcBef>
+                <a:spcPct val="0"/>
+              </a:spcBef>
+              <a:buNone/>
+              <a:defRPr sz="4800" kern="1200" spc="-50" baseline="0">
+                <a:solidFill>
+                  <a:schemeClr val="tx1">
+                    <a:lumMod val="75000"/>
+                    <a:lumOff val="25000"/>
+                  </a:schemeClr>
+                </a:solidFill>
+                <a:latin typeface="Bahnschrift SemiBold" panose="020B0502040204020203" pitchFamily="34" charset="0"/>
+                <a:ea typeface="+mj-ea"/>
+                <a:cs typeface="+mj-cs"/>
+              </a:defRPr>
+            </a:lvl1pPr>
+          </a:lstStyle>
+          <a:p>
+            <a:endParaRPr lang="hu-HU" dirty="0"/>
+          </a:p>
+        </p:txBody>
+      </p:sp>
+      <p:sp>
+        <p:nvSpPr>
+          <p:cNvPr id="15" name="Tartalom helye 2">
+            <a:extLst>
+              <a:ext uri="{FF2B5EF4-FFF2-40B4-BE49-F238E27FC236}">
+                <a16:creationId xmlns:a16="http://schemas.microsoft.com/office/drawing/2014/main" id="{D461F7F4-1A2F-43DA-861A-D185CFE10688}"/>
+              </a:ext>
+            </a:extLst>
+          </p:cNvPr>
+          <p:cNvSpPr txBox="1">
+            <a:spLocks/>
+          </p:cNvSpPr>
+          <p:nvPr/>
+        </p:nvSpPr>
+        <p:spPr>
+          <a:xfrm>
+            <a:off x="1097280" y="1845734"/>
+            <a:ext cx="10058400" cy="4023360"/>
+          </a:xfrm>
+          <a:prstGeom prst="rect">
+            <a:avLst/>
+          </a:prstGeom>
+        </p:spPr>
+        <p:txBody>
+          <a:bodyPr/>
+          <a:lstStyle>
+            <a:lvl1pPr marL="91440" indent="-91440" algn="l" defTabSz="914400" rtl="0" eaLnBrk="1" latinLnBrk="0" hangingPunct="1">
+              <a:lnSpc>
+                <a:spcPct val="90000"/>
+              </a:lnSpc>
+              <a:spcBef>
+                <a:spcPts val="1200"/>
+              </a:spcBef>
+              <a:spcAft>
+                <a:spcPts val="200"/>
+              </a:spcAft>
+              <a:buClr>
+                <a:schemeClr val="accent1"/>
+              </a:buClr>
+              <a:buSzPct val="100000"/>
+              <a:buFont typeface="Calibri" panose="020F0502020204030204" pitchFamily="34" charset="0"/>
+              <a:buChar char=" "/>
+              <a:defRPr sz="2000" kern="1200">
+                <a:solidFill>
+                  <a:schemeClr val="tx1">
+                    <a:lumMod val="75000"/>
+                    <a:lumOff val="25000"/>
+                  </a:schemeClr>
+                </a:solidFill>
+                <a:latin typeface="+mn-lt"/>
+                <a:ea typeface="+mn-ea"/>
+                <a:cs typeface="+mn-cs"/>
+              </a:defRPr>
+            </a:lvl1pPr>
+            <a:lvl2pPr marL="384048" indent="-182880" algn="l" defTabSz="914400" rtl="0" eaLnBrk="1" latinLnBrk="0" hangingPunct="1">
+              <a:lnSpc>
+                <a:spcPct val="90000"/>
+              </a:lnSpc>
+              <a:spcBef>
+                <a:spcPts val="200"/>
+              </a:spcBef>
+              <a:spcAft>
+                <a:spcPts val="400"/>
+              </a:spcAft>
+              <a:buClr>
+                <a:schemeClr val="accent1"/>
+              </a:buClr>
+              <a:buFont typeface="Calibri" pitchFamily="34" charset="0"/>
+              <a:buChar char="◦"/>
+              <a:defRPr sz="1800" kern="1200">
+                <a:solidFill>
+                  <a:schemeClr val="tx1">
+                    <a:lumMod val="75000"/>
+                    <a:lumOff val="25000"/>
+                  </a:schemeClr>
+                </a:solidFill>
+                <a:latin typeface="+mn-lt"/>
+                <a:ea typeface="+mn-ea"/>
+                <a:cs typeface="+mn-cs"/>
+              </a:defRPr>
+            </a:lvl2pPr>
+            <a:lvl3pPr marL="566928" indent="-182880" algn="l" defTabSz="914400" rtl="0" eaLnBrk="1" latinLnBrk="0" hangingPunct="1">
+              <a:lnSpc>
+                <a:spcPct val="90000"/>
+              </a:lnSpc>
+              <a:spcBef>
+                <a:spcPts val="200"/>
+              </a:spcBef>
+              <a:spcAft>
+                <a:spcPts val="400"/>
+              </a:spcAft>
+              <a:buClr>
+                <a:schemeClr val="accent1"/>
+              </a:buClr>
+              <a:buFont typeface="Calibri" pitchFamily="34" charset="0"/>
+              <a:buChar char="◦"/>
+              <a:defRPr sz="1400" kern="1200">
+                <a:solidFill>
+                  <a:schemeClr val="tx1">
+                    <a:lumMod val="75000"/>
+                    <a:lumOff val="25000"/>
+                  </a:schemeClr>
+                </a:solidFill>
+                <a:latin typeface="+mn-lt"/>
+                <a:ea typeface="+mn-ea"/>
+                <a:cs typeface="+mn-cs"/>
+              </a:defRPr>
+            </a:lvl3pPr>
+            <a:lvl4pPr marL="749808" indent="-182880" algn="l" defTabSz="914400" rtl="0" eaLnBrk="1" latinLnBrk="0" hangingPunct="1">
+              <a:lnSpc>
+                <a:spcPct val="90000"/>
+              </a:lnSpc>
+              <a:spcBef>
+                <a:spcPts val="200"/>
+              </a:spcBef>
+              <a:spcAft>
+                <a:spcPts val="400"/>
+              </a:spcAft>
+              <a:buClr>
+                <a:schemeClr val="accent1"/>
+              </a:buClr>
+              <a:buFont typeface="Calibri" pitchFamily="34" charset="0"/>
+              <a:buChar char="◦"/>
+              <a:defRPr sz="1400" kern="1200">
+                <a:solidFill>
+                  <a:schemeClr val="tx1">
+                    <a:lumMod val="75000"/>
+                    <a:lumOff val="25000"/>
+                  </a:schemeClr>
+                </a:solidFill>
+                <a:latin typeface="+mn-lt"/>
+                <a:ea typeface="+mn-ea"/>
+                <a:cs typeface="+mn-cs"/>
+              </a:defRPr>
+            </a:lvl4pPr>
+            <a:lvl5pPr marL="932688" indent="-182880" algn="l" defTabSz="914400" rtl="0" eaLnBrk="1" latinLnBrk="0" hangingPunct="1">
+              <a:lnSpc>
+                <a:spcPct val="90000"/>
+              </a:lnSpc>
+              <a:spcBef>
+                <a:spcPts val="200"/>
+              </a:spcBef>
+              <a:spcAft>
+                <a:spcPts val="400"/>
+              </a:spcAft>
+              <a:buClr>
+                <a:schemeClr val="accent1"/>
+              </a:buClr>
+              <a:buFont typeface="Calibri" pitchFamily="34" charset="0"/>
+              <a:buChar char="◦"/>
+              <a:defRPr sz="1400" kern="1200">
+                <a:solidFill>
+                  <a:schemeClr val="tx1">
+                    <a:lumMod val="75000"/>
+                    <a:lumOff val="25000"/>
+                  </a:schemeClr>
+                </a:solidFill>
+                <a:latin typeface="+mn-lt"/>
+                <a:ea typeface="+mn-ea"/>
+                <a:cs typeface="+mn-cs"/>
+              </a:defRPr>
+            </a:lvl5pPr>
+            <a:lvl6pPr marL="1100000" indent="-228600" algn="l" defTabSz="914400" rtl="0" eaLnBrk="1" latinLnBrk="0" hangingPunct="1">
+              <a:lnSpc>
+                <a:spcPct val="90000"/>
+              </a:lnSpc>
+              <a:spcBef>
+                <a:spcPts val="200"/>
+              </a:spcBef>
+              <a:spcAft>
+                <a:spcPts val="400"/>
+              </a:spcAft>
+              <a:buClr>
+                <a:schemeClr val="accent1"/>
+              </a:buClr>
+              <a:buFont typeface="Calibri" pitchFamily="34" charset="0"/>
+              <a:buChar char="◦"/>
+              <a:defRPr sz="1400" kern="1200">
+                <a:solidFill>
+                  <a:schemeClr val="tx1">
+                    <a:lumMod val="75000"/>
+                    <a:lumOff val="25000"/>
+                  </a:schemeClr>
+                </a:solidFill>
+                <a:latin typeface="+mn-lt"/>
+                <a:ea typeface="+mn-ea"/>
+                <a:cs typeface="+mn-cs"/>
+              </a:defRPr>
+            </a:lvl6pPr>
+            <a:lvl7pPr marL="1300000" indent="-228600" algn="l" defTabSz="914400" rtl="0" eaLnBrk="1" latinLnBrk="0" hangingPunct="1">
+              <a:lnSpc>
+                <a:spcPct val="90000"/>
+              </a:lnSpc>
+              <a:spcBef>
+                <a:spcPts val="200"/>
+              </a:spcBef>
+              <a:spcAft>
+                <a:spcPts val="400"/>
+              </a:spcAft>
+              <a:buClr>
+                <a:schemeClr val="accent1"/>
+              </a:buClr>
+              <a:buFont typeface="Calibri" pitchFamily="34" charset="0"/>
+              <a:buChar char="◦"/>
+              <a:defRPr sz="1400" kern="1200">
+                <a:solidFill>
+                  <a:schemeClr val="tx1">
+                    <a:lumMod val="75000"/>
+                    <a:lumOff val="25000"/>
+                  </a:schemeClr>
+                </a:solidFill>
+                <a:latin typeface="+mn-lt"/>
+                <a:ea typeface="+mn-ea"/>
+                <a:cs typeface="+mn-cs"/>
+              </a:defRPr>
+            </a:lvl7pPr>
+            <a:lvl8pPr marL="1500000" indent="-228600" algn="l" defTabSz="914400" rtl="0" eaLnBrk="1" latinLnBrk="0" hangingPunct="1">
+              <a:lnSpc>
+                <a:spcPct val="90000"/>
+              </a:lnSpc>
+              <a:spcBef>
+                <a:spcPts val="200"/>
+              </a:spcBef>
+              <a:spcAft>
+                <a:spcPts val="400"/>
+              </a:spcAft>
+              <a:buClr>
+                <a:schemeClr val="accent1"/>
+              </a:buClr>
+              <a:buFont typeface="Calibri" pitchFamily="34" charset="0"/>
+              <a:buChar char="◦"/>
+              <a:defRPr sz="1400" kern="1200">
+                <a:solidFill>
+                  <a:schemeClr val="tx1">
+                    <a:lumMod val="75000"/>
+                    <a:lumOff val="25000"/>
+                  </a:schemeClr>
+                </a:solidFill>
+                <a:latin typeface="+mn-lt"/>
+                <a:ea typeface="+mn-ea"/>
+                <a:cs typeface="+mn-cs"/>
+              </a:defRPr>
+            </a:lvl8pPr>
+            <a:lvl9pPr marL="1700000" indent="-228600" algn="l" defTabSz="914400" rtl="0" eaLnBrk="1" latinLnBrk="0" hangingPunct="1">
+              <a:lnSpc>
+                <a:spcPct val="90000"/>
+              </a:lnSpc>
+              <a:spcBef>
+                <a:spcPts val="200"/>
+              </a:spcBef>
+              <a:spcAft>
+                <a:spcPts val="400"/>
+              </a:spcAft>
+              <a:buClr>
+                <a:schemeClr val="accent1"/>
+              </a:buClr>
+              <a:buFont typeface="Calibri" pitchFamily="34" charset="0"/>
+              <a:buChar char="◦"/>
+              <a:defRPr sz="1400" kern="1200">
+                <a:solidFill>
+                  <a:schemeClr val="tx1">
+                    <a:lumMod val="75000"/>
+                    <a:lumOff val="25000"/>
+                  </a:schemeClr>
+                </a:solidFill>
+                <a:latin typeface="+mn-lt"/>
+                <a:ea typeface="+mn-ea"/>
+                <a:cs typeface="+mn-cs"/>
+              </a:defRPr>
+            </a:lvl9pPr>
+          </a:lstStyle>
+          <a:p>
+            <a:pPr lvl="1">
+              <a:lnSpc>
+                <a:spcPct val="150000"/>
+              </a:lnSpc>
+              <a:buFont typeface="Arial" panose="020B0604020202020204" pitchFamily="34" charset="0"/>
+              <a:buChar char="•"/>
+            </a:pPr>
+            <a:r>
+              <a:rPr lang="hu-HU" sz="2000" dirty="0" err="1">
+                <a:latin typeface="Bahnschrift Light" panose="020B0502040204020203" pitchFamily="34" charset="0"/>
+              </a:rPr>
+              <a:t>agrtg</a:t>
+            </a:r>
+            <a:endParaRPr lang="hu-HU" sz="2000" dirty="0">
+              <a:latin typeface="Bahnschrift Light" panose="020B0502040204020203" pitchFamily="34" charset="0"/>
+            </a:endParaRPr>
+          </a:p>
+          <a:p>
+            <a:pPr marL="201168" lvl="1" indent="0">
+              <a:buFont typeface="Calibri" pitchFamily="34" charset="0"/>
+              <a:buNone/>
+            </a:pPr>
+            <a:endParaRPr lang="hu-HU" dirty="0"/>
+          </a:p>
+        </p:txBody>
+      </p:sp>
+    </p:spTree>
+    <p:extLst>
+      <p:ext uri="{BB962C8B-B14F-4D97-AF65-F5344CB8AC3E}">
+        <p14:creationId xmlns:p14="http://schemas.microsoft.com/office/powerpoint/2010/main" val="2356006492"/>
+      </p:ext>
+    </p:extLst>
+  </p:cSld>
+  <p:clrMapOvr>
+    <a:masterClrMapping/>
+  </p:clrMapOvr>
+  <mc:AlternateContent xmlns:mc="http://schemas.openxmlformats.org/markup-compatibility/2006">
+    <mc:Choice xmlns:p159="http://schemas.microsoft.com/office/powerpoint/2015/09/main" Requires="p159">
+      <p:transition xmlns:p14="http://schemas.microsoft.com/office/powerpoint/2010/main" spd="slow" p14:dur="2000">
+        <p159:morph option="byObject"/>
+      </p:transition>
+    </mc:Choice>
+    <mc:Fallback>
+      <p:transition spd="slow">
+        <p:fade/>
+      </p:transition>
+    </mc:Fallback>
+  </mc:AlternateContent>
 </p:sld>
 </file>
 
@@ -8033,7 +10106,1739 @@
               <a:rPr lang="hu-HU" sz="2000" dirty="0">
                 <a:latin typeface="Bahnschrift Light" panose="020B0502040204020203" pitchFamily="34" charset="0"/>
               </a:rPr>
-              <a:t> Nincs ételopció választási lehetőség</a:t>
+              <a:t> Nincs menü választási lehetőség</a:t>
+            </a:r>
+          </a:p>
+          <a:p>
+            <a:endParaRPr lang="hu-HU" dirty="0">
+              <a:latin typeface="Bahnschrift Light" panose="020B0502040204020203" pitchFamily="34" charset="0"/>
+            </a:endParaRPr>
+          </a:p>
+          <a:p>
+            <a:pPr>
+              <a:lnSpc>
+                <a:spcPct val="150000"/>
+              </a:lnSpc>
+            </a:pPr>
+            <a:r>
+              <a:rPr lang="hu-HU" sz="2400" dirty="0">
+                <a:solidFill>
+                  <a:srgbClr val="BD582C"/>
+                </a:solidFill>
+                <a:latin typeface="Bahnschrift Light" panose="020B0502040204020203" pitchFamily="34" charset="0"/>
+              </a:rPr>
+              <a:t>Megoldás</a:t>
+            </a:r>
+          </a:p>
+          <a:p>
+            <a:pPr lvl="1">
+              <a:buFont typeface="Arial" panose="020B0604020202020204" pitchFamily="34" charset="0"/>
+              <a:buChar char="•"/>
+            </a:pPr>
+            <a:r>
+              <a:rPr lang="hu-HU" dirty="0">
+                <a:latin typeface="Bahnschrift Light" panose="020B0502040204020203" pitchFamily="34" charset="0"/>
+              </a:rPr>
+              <a:t> </a:t>
+            </a:r>
+            <a:r>
+              <a:rPr lang="hu-HU" sz="2000" dirty="0">
+                <a:latin typeface="Bahnschrift Light" panose="020B0502040204020203" pitchFamily="34" charset="0"/>
+              </a:rPr>
+              <a:t>Online felület a rendeléshez, lemondáshoz</a:t>
+            </a:r>
+          </a:p>
+          <a:p>
+            <a:pPr lvl="1">
+              <a:buFont typeface="Arial" panose="020B0604020202020204" pitchFamily="34" charset="0"/>
+              <a:buChar char="•"/>
+            </a:pPr>
+            <a:r>
+              <a:rPr lang="hu-HU" sz="2000" dirty="0">
+                <a:latin typeface="Bahnschrift Light" panose="020B0502040204020203" pitchFamily="34" charset="0"/>
+              </a:rPr>
+              <a:t> Előre kiválasztott opció</a:t>
+            </a:r>
+          </a:p>
+          <a:p>
+            <a:pPr lvl="1">
+              <a:buFont typeface="Arial" panose="020B0604020202020204" pitchFamily="34" charset="0"/>
+              <a:buChar char="•"/>
+            </a:pPr>
+            <a:r>
+              <a:rPr lang="hu-HU" sz="2000" dirty="0">
+                <a:latin typeface="Bahnschrift Light" panose="020B0502040204020203" pitchFamily="34" charset="0"/>
+              </a:rPr>
+              <a:t> Digitális számla</a:t>
+            </a:r>
+          </a:p>
+        </p:txBody>
+      </p:sp>
+      <p:pic>
+        <p:nvPicPr>
+          <p:cNvPr id="7" name="Kép 6">
+            <a:extLst>
+              <a:ext uri="{FF2B5EF4-FFF2-40B4-BE49-F238E27FC236}">
+                <a16:creationId xmlns:a16="http://schemas.microsoft.com/office/drawing/2014/main" id="{3070409B-88A6-42DC-B01A-8F8F5314A566}"/>
+              </a:ext>
+            </a:extLst>
+          </p:cNvPr>
+          <p:cNvPicPr>
+            <a:picLocks noChangeAspect="1"/>
+          </p:cNvPicPr>
+          <p:nvPr/>
+        </p:nvPicPr>
+        <p:blipFill>
+          <a:blip r:embed="rId3"/>
+          <a:stretch>
+            <a:fillRect/>
+          </a:stretch>
+        </p:blipFill>
+        <p:spPr>
+          <a:xfrm>
+            <a:off x="7568575" y="2498937"/>
+            <a:ext cx="3983647" cy="3169784"/>
+          </a:xfrm>
+          <a:prstGeom prst="rect">
+            <a:avLst/>
+          </a:prstGeom>
+        </p:spPr>
+      </p:pic>
+    </p:spTree>
+    <p:extLst>
+      <p:ext uri="{BB962C8B-B14F-4D97-AF65-F5344CB8AC3E}">
+        <p14:creationId xmlns:p14="http://schemas.microsoft.com/office/powerpoint/2010/main" val="2171343216"/>
+      </p:ext>
+    </p:extLst>
+  </p:cSld>
+  <p:clrMapOvr>
+    <a:masterClrMapping/>
+  </p:clrMapOvr>
+  <mc:AlternateContent xmlns:mc="http://schemas.openxmlformats.org/markup-compatibility/2006" xmlns:p159="http://schemas.microsoft.com/office/powerpoint/2015/09/main">
+    <mc:Choice Requires="p159">
+      <p:transition xmlns:p14="http://schemas.microsoft.com/office/powerpoint/2010/main" spd="slow" p14:dur="2000">
+        <p159:morph option="byObject"/>
+      </p:transition>
+    </mc:Choice>
+    <mc:Fallback xmlns="">
+      <p:transition spd="slow">
+        <p:fade/>
+      </p:transition>
+    </mc:Fallback>
+  </mc:AlternateContent>
+</p:sld>
+</file>
+
+<file path=ppt/slides/slide3.xml><?xml version="1.0" encoding="utf-8"?>
+<p:sld xmlns:a="http://schemas.openxmlformats.org/drawingml/2006/main" xmlns:r="http://schemas.openxmlformats.org/officeDocument/2006/relationships" xmlns:p="http://schemas.openxmlformats.org/presentationml/2006/main">
+  <p:cSld>
+    <p:bg>
+      <p:bgPr>
+        <a:solidFill>
+          <a:srgbClr val="FDF7E9"/>
+        </a:solidFill>
+        <a:effectLst/>
+      </p:bgPr>
+    </p:bg>
+    <p:spTree>
+      <p:nvGrpSpPr>
+        <p:cNvPr id="1" name=""/>
+        <p:cNvGrpSpPr/>
+        <p:nvPr/>
+      </p:nvGrpSpPr>
+      <p:grpSpPr>
+        <a:xfrm>
+          <a:off x="0" y="0"/>
+          <a:ext cx="0" cy="0"/>
+          <a:chOff x="0" y="0"/>
+          <a:chExt cx="0" cy="0"/>
+        </a:xfrm>
+      </p:grpSpPr>
+      <p:sp>
+        <p:nvSpPr>
+          <p:cNvPr id="2" name="Cím 1">
+            <a:extLst>
+              <a:ext uri="{FF2B5EF4-FFF2-40B4-BE49-F238E27FC236}">
+                <a16:creationId xmlns:a16="http://schemas.microsoft.com/office/drawing/2014/main" id="{C18830B2-00D6-4BD2-BE11-19215C420251}"/>
+              </a:ext>
+            </a:extLst>
+          </p:cNvPr>
+          <p:cNvSpPr txBox="1">
+            <a:spLocks/>
+          </p:cNvSpPr>
+          <p:nvPr/>
+        </p:nvSpPr>
+        <p:spPr>
+          <a:xfrm>
+            <a:off x="1320753" y="2904573"/>
+            <a:ext cx="9760046" cy="2006995"/>
+          </a:xfrm>
+          <a:prstGeom prst="rect">
+            <a:avLst/>
+          </a:prstGeom>
+        </p:spPr>
+        <p:txBody>
+          <a:bodyPr>
+            <a:normAutofit/>
+          </a:bodyPr>
+          <a:lstStyle>
+            <a:lvl1pPr algn="l" defTabSz="914400" rtl="0" eaLnBrk="1" latinLnBrk="0" hangingPunct="1">
+              <a:lnSpc>
+                <a:spcPct val="85000"/>
+              </a:lnSpc>
+              <a:spcBef>
+                <a:spcPct val="0"/>
+              </a:spcBef>
+              <a:buNone/>
+              <a:defRPr sz="4800" kern="1200" spc="-50" baseline="0">
+                <a:solidFill>
+                  <a:schemeClr val="tx1">
+                    <a:lumMod val="75000"/>
+                    <a:lumOff val="25000"/>
+                  </a:schemeClr>
+                </a:solidFill>
+                <a:latin typeface="+mj-lt"/>
+                <a:ea typeface="+mj-ea"/>
+                <a:cs typeface="+mj-cs"/>
+              </a:defRPr>
+            </a:lvl1pPr>
+          </a:lstStyle>
+          <a:p>
+            <a:pPr algn="ctr"/>
+            <a:r>
+              <a:rPr lang="hu-HU" sz="5400" b="1" dirty="0">
+                <a:latin typeface="Bahnschrift SemiBold" panose="020B0502040204020203" pitchFamily="34" charset="0"/>
+              </a:rPr>
+              <a:t>Iskolai étkezéskezelő rendszer</a:t>
+            </a:r>
+          </a:p>
+        </p:txBody>
+      </p:sp>
+      <p:sp>
+        <p:nvSpPr>
+          <p:cNvPr id="3" name="Alcím 2">
+            <a:extLst>
+              <a:ext uri="{FF2B5EF4-FFF2-40B4-BE49-F238E27FC236}">
+                <a16:creationId xmlns:a16="http://schemas.microsoft.com/office/drawing/2014/main" id="{A2286F2D-71DE-4954-8C64-8E9991C98150}"/>
+              </a:ext>
+            </a:extLst>
+          </p:cNvPr>
+          <p:cNvSpPr txBox="1">
+            <a:spLocks/>
+          </p:cNvSpPr>
+          <p:nvPr/>
+        </p:nvSpPr>
+        <p:spPr>
+          <a:xfrm>
+            <a:off x="3598026" y="3785841"/>
+            <a:ext cx="4995949" cy="571500"/>
+          </a:xfrm>
+          <a:prstGeom prst="rect">
+            <a:avLst/>
+          </a:prstGeom>
+        </p:spPr>
+        <p:txBody>
+          <a:bodyPr/>
+          <a:lstStyle>
+            <a:lvl1pPr marL="91440" indent="-91440" algn="l" defTabSz="914400" rtl="0" eaLnBrk="1" latinLnBrk="0" hangingPunct="1">
+              <a:lnSpc>
+                <a:spcPct val="90000"/>
+              </a:lnSpc>
+              <a:spcBef>
+                <a:spcPts val="1200"/>
+              </a:spcBef>
+              <a:spcAft>
+                <a:spcPts val="200"/>
+              </a:spcAft>
+              <a:buClr>
+                <a:schemeClr val="accent1"/>
+              </a:buClr>
+              <a:buSzPct val="100000"/>
+              <a:buFont typeface="Calibri" panose="020F0502020204030204" pitchFamily="34" charset="0"/>
+              <a:buChar char=" "/>
+              <a:defRPr sz="2000" kern="1200">
+                <a:solidFill>
+                  <a:schemeClr val="tx1">
+                    <a:lumMod val="75000"/>
+                    <a:lumOff val="25000"/>
+                  </a:schemeClr>
+                </a:solidFill>
+                <a:latin typeface="+mn-lt"/>
+                <a:ea typeface="+mn-ea"/>
+                <a:cs typeface="+mn-cs"/>
+              </a:defRPr>
+            </a:lvl1pPr>
+            <a:lvl2pPr marL="384048" indent="-182880" algn="l" defTabSz="914400" rtl="0" eaLnBrk="1" latinLnBrk="0" hangingPunct="1">
+              <a:lnSpc>
+                <a:spcPct val="90000"/>
+              </a:lnSpc>
+              <a:spcBef>
+                <a:spcPts val="200"/>
+              </a:spcBef>
+              <a:spcAft>
+                <a:spcPts val="400"/>
+              </a:spcAft>
+              <a:buClr>
+                <a:schemeClr val="accent1"/>
+              </a:buClr>
+              <a:buFont typeface="Calibri" pitchFamily="34" charset="0"/>
+              <a:buChar char="◦"/>
+              <a:defRPr sz="1800" kern="1200">
+                <a:solidFill>
+                  <a:schemeClr val="tx1">
+                    <a:lumMod val="75000"/>
+                    <a:lumOff val="25000"/>
+                  </a:schemeClr>
+                </a:solidFill>
+                <a:latin typeface="+mn-lt"/>
+                <a:ea typeface="+mn-ea"/>
+                <a:cs typeface="+mn-cs"/>
+              </a:defRPr>
+            </a:lvl2pPr>
+            <a:lvl3pPr marL="566928" indent="-182880" algn="l" defTabSz="914400" rtl="0" eaLnBrk="1" latinLnBrk="0" hangingPunct="1">
+              <a:lnSpc>
+                <a:spcPct val="90000"/>
+              </a:lnSpc>
+              <a:spcBef>
+                <a:spcPts val="200"/>
+              </a:spcBef>
+              <a:spcAft>
+                <a:spcPts val="400"/>
+              </a:spcAft>
+              <a:buClr>
+                <a:schemeClr val="accent1"/>
+              </a:buClr>
+              <a:buFont typeface="Calibri" pitchFamily="34" charset="0"/>
+              <a:buChar char="◦"/>
+              <a:defRPr sz="1400" kern="1200">
+                <a:solidFill>
+                  <a:schemeClr val="tx1">
+                    <a:lumMod val="75000"/>
+                    <a:lumOff val="25000"/>
+                  </a:schemeClr>
+                </a:solidFill>
+                <a:latin typeface="+mn-lt"/>
+                <a:ea typeface="+mn-ea"/>
+                <a:cs typeface="+mn-cs"/>
+              </a:defRPr>
+            </a:lvl3pPr>
+            <a:lvl4pPr marL="749808" indent="-182880" algn="l" defTabSz="914400" rtl="0" eaLnBrk="1" latinLnBrk="0" hangingPunct="1">
+              <a:lnSpc>
+                <a:spcPct val="90000"/>
+              </a:lnSpc>
+              <a:spcBef>
+                <a:spcPts val="200"/>
+              </a:spcBef>
+              <a:spcAft>
+                <a:spcPts val="400"/>
+              </a:spcAft>
+              <a:buClr>
+                <a:schemeClr val="accent1"/>
+              </a:buClr>
+              <a:buFont typeface="Calibri" pitchFamily="34" charset="0"/>
+              <a:buChar char="◦"/>
+              <a:defRPr sz="1400" kern="1200">
+                <a:solidFill>
+                  <a:schemeClr val="tx1">
+                    <a:lumMod val="75000"/>
+                    <a:lumOff val="25000"/>
+                  </a:schemeClr>
+                </a:solidFill>
+                <a:latin typeface="+mn-lt"/>
+                <a:ea typeface="+mn-ea"/>
+                <a:cs typeface="+mn-cs"/>
+              </a:defRPr>
+            </a:lvl4pPr>
+            <a:lvl5pPr marL="932688" indent="-182880" algn="l" defTabSz="914400" rtl="0" eaLnBrk="1" latinLnBrk="0" hangingPunct="1">
+              <a:lnSpc>
+                <a:spcPct val="90000"/>
+              </a:lnSpc>
+              <a:spcBef>
+                <a:spcPts val="200"/>
+              </a:spcBef>
+              <a:spcAft>
+                <a:spcPts val="400"/>
+              </a:spcAft>
+              <a:buClr>
+                <a:schemeClr val="accent1"/>
+              </a:buClr>
+              <a:buFont typeface="Calibri" pitchFamily="34" charset="0"/>
+              <a:buChar char="◦"/>
+              <a:defRPr sz="1400" kern="1200">
+                <a:solidFill>
+                  <a:schemeClr val="tx1">
+                    <a:lumMod val="75000"/>
+                    <a:lumOff val="25000"/>
+                  </a:schemeClr>
+                </a:solidFill>
+                <a:latin typeface="+mn-lt"/>
+                <a:ea typeface="+mn-ea"/>
+                <a:cs typeface="+mn-cs"/>
+              </a:defRPr>
+            </a:lvl5pPr>
+            <a:lvl6pPr marL="1100000" indent="-228600" algn="l" defTabSz="914400" rtl="0" eaLnBrk="1" latinLnBrk="0" hangingPunct="1">
+              <a:lnSpc>
+                <a:spcPct val="90000"/>
+              </a:lnSpc>
+              <a:spcBef>
+                <a:spcPts val="200"/>
+              </a:spcBef>
+              <a:spcAft>
+                <a:spcPts val="400"/>
+              </a:spcAft>
+              <a:buClr>
+                <a:schemeClr val="accent1"/>
+              </a:buClr>
+              <a:buFont typeface="Calibri" pitchFamily="34" charset="0"/>
+              <a:buChar char="◦"/>
+              <a:defRPr sz="1400" kern="1200">
+                <a:solidFill>
+                  <a:schemeClr val="tx1">
+                    <a:lumMod val="75000"/>
+                    <a:lumOff val="25000"/>
+                  </a:schemeClr>
+                </a:solidFill>
+                <a:latin typeface="+mn-lt"/>
+                <a:ea typeface="+mn-ea"/>
+                <a:cs typeface="+mn-cs"/>
+              </a:defRPr>
+            </a:lvl6pPr>
+            <a:lvl7pPr marL="1300000" indent="-228600" algn="l" defTabSz="914400" rtl="0" eaLnBrk="1" latinLnBrk="0" hangingPunct="1">
+              <a:lnSpc>
+                <a:spcPct val="90000"/>
+              </a:lnSpc>
+              <a:spcBef>
+                <a:spcPts val="200"/>
+              </a:spcBef>
+              <a:spcAft>
+                <a:spcPts val="400"/>
+              </a:spcAft>
+              <a:buClr>
+                <a:schemeClr val="accent1"/>
+              </a:buClr>
+              <a:buFont typeface="Calibri" pitchFamily="34" charset="0"/>
+              <a:buChar char="◦"/>
+              <a:defRPr sz="1400" kern="1200">
+                <a:solidFill>
+                  <a:schemeClr val="tx1">
+                    <a:lumMod val="75000"/>
+                    <a:lumOff val="25000"/>
+                  </a:schemeClr>
+                </a:solidFill>
+                <a:latin typeface="+mn-lt"/>
+                <a:ea typeface="+mn-ea"/>
+                <a:cs typeface="+mn-cs"/>
+              </a:defRPr>
+            </a:lvl7pPr>
+            <a:lvl8pPr marL="1500000" indent="-228600" algn="l" defTabSz="914400" rtl="0" eaLnBrk="1" latinLnBrk="0" hangingPunct="1">
+              <a:lnSpc>
+                <a:spcPct val="90000"/>
+              </a:lnSpc>
+              <a:spcBef>
+                <a:spcPts val="200"/>
+              </a:spcBef>
+              <a:spcAft>
+                <a:spcPts val="400"/>
+              </a:spcAft>
+              <a:buClr>
+                <a:schemeClr val="accent1"/>
+              </a:buClr>
+              <a:buFont typeface="Calibri" pitchFamily="34" charset="0"/>
+              <a:buChar char="◦"/>
+              <a:defRPr sz="1400" kern="1200">
+                <a:solidFill>
+                  <a:schemeClr val="tx1">
+                    <a:lumMod val="75000"/>
+                    <a:lumOff val="25000"/>
+                  </a:schemeClr>
+                </a:solidFill>
+                <a:latin typeface="+mn-lt"/>
+                <a:ea typeface="+mn-ea"/>
+                <a:cs typeface="+mn-cs"/>
+              </a:defRPr>
+            </a:lvl8pPr>
+            <a:lvl9pPr marL="1700000" indent="-228600" algn="l" defTabSz="914400" rtl="0" eaLnBrk="1" latinLnBrk="0" hangingPunct="1">
+              <a:lnSpc>
+                <a:spcPct val="90000"/>
+              </a:lnSpc>
+              <a:spcBef>
+                <a:spcPts val="200"/>
+              </a:spcBef>
+              <a:spcAft>
+                <a:spcPts val="400"/>
+              </a:spcAft>
+              <a:buClr>
+                <a:schemeClr val="accent1"/>
+              </a:buClr>
+              <a:buFont typeface="Calibri" pitchFamily="34" charset="0"/>
+              <a:buChar char="◦"/>
+              <a:defRPr sz="1400" kern="1200">
+                <a:solidFill>
+                  <a:schemeClr val="tx1">
+                    <a:lumMod val="75000"/>
+                    <a:lumOff val="25000"/>
+                  </a:schemeClr>
+                </a:solidFill>
+                <a:latin typeface="+mn-lt"/>
+                <a:ea typeface="+mn-ea"/>
+                <a:cs typeface="+mn-cs"/>
+              </a:defRPr>
+            </a:lvl9pPr>
+          </a:lstStyle>
+          <a:p>
+            <a:pPr algn="ctr"/>
+            <a:r>
+              <a:rPr lang="hu-HU" i="1" cap="all" spc="100" dirty="0">
+                <a:solidFill>
+                  <a:srgbClr val="BD582C"/>
+                </a:solidFill>
+                <a:uFill>
+                  <a:solidFill>
+                    <a:srgbClr val="BD582C"/>
+                  </a:solidFill>
+                </a:uFill>
+                <a:latin typeface="+mj-lt"/>
+              </a:rPr>
+              <a:t>Vizsgaremek bemutatása</a:t>
+            </a:r>
+          </a:p>
+        </p:txBody>
+      </p:sp>
+      <p:pic>
+        <p:nvPicPr>
+          <p:cNvPr id="4" name="Kép 3">
+            <a:extLst>
+              <a:ext uri="{FF2B5EF4-FFF2-40B4-BE49-F238E27FC236}">
+                <a16:creationId xmlns:a16="http://schemas.microsoft.com/office/drawing/2014/main" id="{7912835F-A62C-4B0D-B733-74106EBFDA26}"/>
+              </a:ext>
+            </a:extLst>
+          </p:cNvPr>
+          <p:cNvPicPr>
+            <a:picLocks noChangeAspect="1"/>
+          </p:cNvPicPr>
+          <p:nvPr/>
+        </p:nvPicPr>
+        <p:blipFill rotWithShape="1">
+          <a:blip r:embed="rId3">
+            <a:extLst>
+              <a:ext uri="{28A0092B-C50C-407E-A947-70E740481C1C}">
+                <a14:useLocalDpi xmlns:a14="http://schemas.microsoft.com/office/drawing/2010/main" val="0"/>
+              </a:ext>
+            </a:extLst>
+          </a:blip>
+          <a:srcRect t="58555"/>
+          <a:stretch/>
+        </p:blipFill>
+        <p:spPr>
+          <a:xfrm>
+            <a:off x="3750655" y="1673209"/>
+            <a:ext cx="4714591" cy="644014"/>
+          </a:xfrm>
+          <a:prstGeom prst="rect">
+            <a:avLst/>
+          </a:prstGeom>
+        </p:spPr>
+      </p:pic>
+      <p:sp>
+        <p:nvSpPr>
+          <p:cNvPr id="5" name="Alcím 2">
+            <a:extLst>
+              <a:ext uri="{FF2B5EF4-FFF2-40B4-BE49-F238E27FC236}">
+                <a16:creationId xmlns:a16="http://schemas.microsoft.com/office/drawing/2014/main" id="{3E0FCC81-0923-43B1-9ACC-080EBD94427F}"/>
+              </a:ext>
+            </a:extLst>
+          </p:cNvPr>
+          <p:cNvSpPr txBox="1">
+            <a:spLocks/>
+          </p:cNvSpPr>
+          <p:nvPr/>
+        </p:nvSpPr>
+        <p:spPr>
+          <a:xfrm>
+            <a:off x="127233" y="5659169"/>
+            <a:ext cx="5968766" cy="1050389"/>
+          </a:xfrm>
+          <a:prstGeom prst="rect">
+            <a:avLst/>
+          </a:prstGeom>
+        </p:spPr>
+        <p:txBody>
+          <a:bodyPr vert="horz" lIns="91440" tIns="45720" rIns="91440" bIns="45720" rtlCol="0">
+            <a:normAutofit/>
+          </a:bodyPr>
+          <a:lstStyle>
+            <a:lvl1pPr marL="0" indent="0" algn="l" defTabSz="914400" rtl="0" eaLnBrk="1" latinLnBrk="0" hangingPunct="1">
+              <a:lnSpc>
+                <a:spcPct val="90000"/>
+              </a:lnSpc>
+              <a:spcBef>
+                <a:spcPts val="1200"/>
+              </a:spcBef>
+              <a:spcAft>
+                <a:spcPts val="200"/>
+              </a:spcAft>
+              <a:buClr>
+                <a:schemeClr val="accent1"/>
+              </a:buClr>
+              <a:buSzPct val="100000"/>
+              <a:buFont typeface="Calibri" panose="020F0502020204030204" pitchFamily="34" charset="0"/>
+              <a:buNone/>
+              <a:defRPr sz="2400" kern="1200" cap="all" spc="200" baseline="0">
+                <a:solidFill>
+                  <a:schemeClr val="tx2"/>
+                </a:solidFill>
+                <a:latin typeface="+mj-lt"/>
+                <a:ea typeface="+mn-ea"/>
+                <a:cs typeface="+mn-cs"/>
+              </a:defRPr>
+            </a:lvl1pPr>
+            <a:lvl2pPr marL="457200" indent="0" algn="ctr" defTabSz="914400" rtl="0" eaLnBrk="1" latinLnBrk="0" hangingPunct="1">
+              <a:lnSpc>
+                <a:spcPct val="90000"/>
+              </a:lnSpc>
+              <a:spcBef>
+                <a:spcPts val="200"/>
+              </a:spcBef>
+              <a:spcAft>
+                <a:spcPts val="400"/>
+              </a:spcAft>
+              <a:buClr>
+                <a:schemeClr val="accent1"/>
+              </a:buClr>
+              <a:buFont typeface="Calibri" pitchFamily="34" charset="0"/>
+              <a:buNone/>
+              <a:defRPr sz="2400" kern="1200">
+                <a:solidFill>
+                  <a:schemeClr val="tx1">
+                    <a:lumMod val="75000"/>
+                    <a:lumOff val="25000"/>
+                  </a:schemeClr>
+                </a:solidFill>
+                <a:latin typeface="+mn-lt"/>
+                <a:ea typeface="+mn-ea"/>
+                <a:cs typeface="+mn-cs"/>
+              </a:defRPr>
+            </a:lvl2pPr>
+            <a:lvl3pPr marL="914400" indent="0" algn="ctr" defTabSz="914400" rtl="0" eaLnBrk="1" latinLnBrk="0" hangingPunct="1">
+              <a:lnSpc>
+                <a:spcPct val="90000"/>
+              </a:lnSpc>
+              <a:spcBef>
+                <a:spcPts val="200"/>
+              </a:spcBef>
+              <a:spcAft>
+                <a:spcPts val="400"/>
+              </a:spcAft>
+              <a:buClr>
+                <a:schemeClr val="accent1"/>
+              </a:buClr>
+              <a:buFont typeface="Calibri" pitchFamily="34" charset="0"/>
+              <a:buNone/>
+              <a:defRPr sz="2400" kern="1200">
+                <a:solidFill>
+                  <a:schemeClr val="tx1">
+                    <a:lumMod val="75000"/>
+                    <a:lumOff val="25000"/>
+                  </a:schemeClr>
+                </a:solidFill>
+                <a:latin typeface="+mn-lt"/>
+                <a:ea typeface="+mn-ea"/>
+                <a:cs typeface="+mn-cs"/>
+              </a:defRPr>
+            </a:lvl3pPr>
+            <a:lvl4pPr marL="1371600" indent="0" algn="ctr" defTabSz="914400" rtl="0" eaLnBrk="1" latinLnBrk="0" hangingPunct="1">
+              <a:lnSpc>
+                <a:spcPct val="90000"/>
+              </a:lnSpc>
+              <a:spcBef>
+                <a:spcPts val="200"/>
+              </a:spcBef>
+              <a:spcAft>
+                <a:spcPts val="400"/>
+              </a:spcAft>
+              <a:buClr>
+                <a:schemeClr val="accent1"/>
+              </a:buClr>
+              <a:buFont typeface="Calibri" pitchFamily="34" charset="0"/>
+              <a:buNone/>
+              <a:defRPr sz="2000" kern="1200">
+                <a:solidFill>
+                  <a:schemeClr val="tx1">
+                    <a:lumMod val="75000"/>
+                    <a:lumOff val="25000"/>
+                  </a:schemeClr>
+                </a:solidFill>
+                <a:latin typeface="+mn-lt"/>
+                <a:ea typeface="+mn-ea"/>
+                <a:cs typeface="+mn-cs"/>
+              </a:defRPr>
+            </a:lvl4pPr>
+            <a:lvl5pPr marL="1828800" indent="0" algn="ctr" defTabSz="914400" rtl="0" eaLnBrk="1" latinLnBrk="0" hangingPunct="1">
+              <a:lnSpc>
+                <a:spcPct val="90000"/>
+              </a:lnSpc>
+              <a:spcBef>
+                <a:spcPts val="200"/>
+              </a:spcBef>
+              <a:spcAft>
+                <a:spcPts val="400"/>
+              </a:spcAft>
+              <a:buClr>
+                <a:schemeClr val="accent1"/>
+              </a:buClr>
+              <a:buFont typeface="Calibri" pitchFamily="34" charset="0"/>
+              <a:buNone/>
+              <a:defRPr sz="2000" kern="1200">
+                <a:solidFill>
+                  <a:schemeClr val="tx1">
+                    <a:lumMod val="75000"/>
+                    <a:lumOff val="25000"/>
+                  </a:schemeClr>
+                </a:solidFill>
+                <a:latin typeface="+mn-lt"/>
+                <a:ea typeface="+mn-ea"/>
+                <a:cs typeface="+mn-cs"/>
+              </a:defRPr>
+            </a:lvl5pPr>
+            <a:lvl6pPr marL="2286000" indent="0" algn="ctr" defTabSz="914400" rtl="0" eaLnBrk="1" latinLnBrk="0" hangingPunct="1">
+              <a:lnSpc>
+                <a:spcPct val="90000"/>
+              </a:lnSpc>
+              <a:spcBef>
+                <a:spcPts val="200"/>
+              </a:spcBef>
+              <a:spcAft>
+                <a:spcPts val="400"/>
+              </a:spcAft>
+              <a:buClr>
+                <a:schemeClr val="accent1"/>
+              </a:buClr>
+              <a:buFont typeface="Calibri" pitchFamily="34" charset="0"/>
+              <a:buNone/>
+              <a:defRPr sz="2000" kern="1200">
+                <a:solidFill>
+                  <a:schemeClr val="tx1">
+                    <a:lumMod val="75000"/>
+                    <a:lumOff val="25000"/>
+                  </a:schemeClr>
+                </a:solidFill>
+                <a:latin typeface="+mn-lt"/>
+                <a:ea typeface="+mn-ea"/>
+                <a:cs typeface="+mn-cs"/>
+              </a:defRPr>
+            </a:lvl6pPr>
+            <a:lvl7pPr marL="2743200" indent="0" algn="ctr" defTabSz="914400" rtl="0" eaLnBrk="1" latinLnBrk="0" hangingPunct="1">
+              <a:lnSpc>
+                <a:spcPct val="90000"/>
+              </a:lnSpc>
+              <a:spcBef>
+                <a:spcPts val="200"/>
+              </a:spcBef>
+              <a:spcAft>
+                <a:spcPts val="400"/>
+              </a:spcAft>
+              <a:buClr>
+                <a:schemeClr val="accent1"/>
+              </a:buClr>
+              <a:buFont typeface="Calibri" pitchFamily="34" charset="0"/>
+              <a:buNone/>
+              <a:defRPr sz="2000" kern="1200">
+                <a:solidFill>
+                  <a:schemeClr val="tx1">
+                    <a:lumMod val="75000"/>
+                    <a:lumOff val="25000"/>
+                  </a:schemeClr>
+                </a:solidFill>
+                <a:latin typeface="+mn-lt"/>
+                <a:ea typeface="+mn-ea"/>
+                <a:cs typeface="+mn-cs"/>
+              </a:defRPr>
+            </a:lvl7pPr>
+            <a:lvl8pPr marL="3200400" indent="0" algn="ctr" defTabSz="914400" rtl="0" eaLnBrk="1" latinLnBrk="0" hangingPunct="1">
+              <a:lnSpc>
+                <a:spcPct val="90000"/>
+              </a:lnSpc>
+              <a:spcBef>
+                <a:spcPts val="200"/>
+              </a:spcBef>
+              <a:spcAft>
+                <a:spcPts val="400"/>
+              </a:spcAft>
+              <a:buClr>
+                <a:schemeClr val="accent1"/>
+              </a:buClr>
+              <a:buFont typeface="Calibri" pitchFamily="34" charset="0"/>
+              <a:buNone/>
+              <a:defRPr sz="2000" kern="1200">
+                <a:solidFill>
+                  <a:schemeClr val="tx1">
+                    <a:lumMod val="75000"/>
+                    <a:lumOff val="25000"/>
+                  </a:schemeClr>
+                </a:solidFill>
+                <a:latin typeface="+mn-lt"/>
+                <a:ea typeface="+mn-ea"/>
+                <a:cs typeface="+mn-cs"/>
+              </a:defRPr>
+            </a:lvl8pPr>
+            <a:lvl9pPr marL="3657600" indent="0" algn="ctr" defTabSz="914400" rtl="0" eaLnBrk="1" latinLnBrk="0" hangingPunct="1">
+              <a:lnSpc>
+                <a:spcPct val="90000"/>
+              </a:lnSpc>
+              <a:spcBef>
+                <a:spcPts val="200"/>
+              </a:spcBef>
+              <a:spcAft>
+                <a:spcPts val="400"/>
+              </a:spcAft>
+              <a:buClr>
+                <a:schemeClr val="accent1"/>
+              </a:buClr>
+              <a:buFont typeface="Calibri" pitchFamily="34" charset="0"/>
+              <a:buNone/>
+              <a:defRPr sz="2000" kern="1200">
+                <a:solidFill>
+                  <a:schemeClr val="tx1">
+                    <a:lumMod val="75000"/>
+                    <a:lumOff val="25000"/>
+                  </a:schemeClr>
+                </a:solidFill>
+                <a:latin typeface="+mn-lt"/>
+                <a:ea typeface="+mn-ea"/>
+                <a:cs typeface="+mn-cs"/>
+              </a:defRPr>
+            </a:lvl9pPr>
+          </a:lstStyle>
+          <a:p>
+            <a:pPr>
+              <a:lnSpc>
+                <a:spcPct val="100000"/>
+              </a:lnSpc>
+            </a:pPr>
+            <a:r>
+              <a:rPr lang="hu-HU" sz="1800" cap="none" spc="0" dirty="0">
+                <a:latin typeface="Bahnschrift Light" panose="020B0502040204020203" pitchFamily="34" charset="0"/>
+              </a:rPr>
+              <a:t>Készítették: Atkári Ariella</a:t>
+            </a:r>
+            <a:br>
+              <a:rPr lang="hu-HU" sz="1800" cap="none" spc="0" dirty="0">
+                <a:latin typeface="Bahnschrift Light" panose="020B0502040204020203" pitchFamily="34" charset="0"/>
+              </a:rPr>
+            </a:br>
+            <a:r>
+              <a:rPr lang="hu-HU" sz="1800" cap="none" spc="0" dirty="0">
+                <a:latin typeface="Bahnschrift Light" panose="020B0502040204020203" pitchFamily="34" charset="0"/>
+              </a:rPr>
+              <a:t>	      Farkas Dominik</a:t>
+            </a:r>
+          </a:p>
+        </p:txBody>
+      </p:sp>
+      <p:cxnSp>
+        <p:nvCxnSpPr>
+          <p:cNvPr id="9" name="Egyenes összekötő 8">
+            <a:extLst>
+              <a:ext uri="{FF2B5EF4-FFF2-40B4-BE49-F238E27FC236}">
+                <a16:creationId xmlns:a16="http://schemas.microsoft.com/office/drawing/2014/main" id="{670AB60B-B385-4E46-A012-AD0038CF5F38}"/>
+              </a:ext>
+            </a:extLst>
+          </p:cNvPr>
+          <p:cNvCxnSpPr>
+            <a:cxnSpLocks/>
+          </p:cNvCxnSpPr>
+          <p:nvPr/>
+        </p:nvCxnSpPr>
+        <p:spPr>
+          <a:xfrm>
+            <a:off x="2131264" y="2305176"/>
+            <a:ext cx="7953375" cy="0"/>
+          </a:xfrm>
+          <a:prstGeom prst="line">
+            <a:avLst/>
+          </a:prstGeom>
+          <a:ln>
+            <a:solidFill>
+              <a:schemeClr val="tx1">
+                <a:lumMod val="50000"/>
+                <a:lumOff val="50000"/>
+              </a:schemeClr>
+            </a:solidFill>
+          </a:ln>
+        </p:spPr>
+        <p:style>
+          <a:lnRef idx="1">
+            <a:schemeClr val="accent1"/>
+          </a:lnRef>
+          <a:fillRef idx="0">
+            <a:schemeClr val="accent1"/>
+          </a:fillRef>
+          <a:effectRef idx="0">
+            <a:schemeClr val="accent1"/>
+          </a:effectRef>
+          <a:fontRef idx="minor">
+            <a:schemeClr val="tx1"/>
+          </a:fontRef>
+        </p:style>
+      </p:cxnSp>
+      <p:pic>
+        <p:nvPicPr>
+          <p:cNvPr id="10" name="Kép 9">
+            <a:extLst>
+              <a:ext uri="{FF2B5EF4-FFF2-40B4-BE49-F238E27FC236}">
+                <a16:creationId xmlns:a16="http://schemas.microsoft.com/office/drawing/2014/main" id="{CB9406C6-CF11-47E5-AEFA-0BA584F8F8D2}"/>
+              </a:ext>
+            </a:extLst>
+          </p:cNvPr>
+          <p:cNvPicPr>
+            <a:picLocks noChangeAspect="1"/>
+          </p:cNvPicPr>
+          <p:nvPr/>
+        </p:nvPicPr>
+        <p:blipFill rotWithShape="1">
+          <a:blip r:embed="rId3">
+            <a:extLst>
+              <a:ext uri="{28A0092B-C50C-407E-A947-70E740481C1C}">
+                <a14:useLocalDpi xmlns:a14="http://schemas.microsoft.com/office/drawing/2010/main" val="0"/>
+              </a:ext>
+            </a:extLst>
+          </a:blip>
+          <a:srcRect l="1" r="-2984" b="38896"/>
+          <a:stretch/>
+        </p:blipFill>
+        <p:spPr>
+          <a:xfrm>
+            <a:off x="3738706" y="711670"/>
+            <a:ext cx="4855269" cy="949493"/>
+          </a:xfrm>
+          <a:prstGeom prst="rect">
+            <a:avLst/>
+          </a:prstGeom>
+        </p:spPr>
+      </p:pic>
+      <p:sp>
+        <p:nvSpPr>
+          <p:cNvPr id="11" name="Alcím 2">
+            <a:extLst>
+              <a:ext uri="{FF2B5EF4-FFF2-40B4-BE49-F238E27FC236}">
+                <a16:creationId xmlns:a16="http://schemas.microsoft.com/office/drawing/2014/main" id="{7D26B0E8-7A60-4B80-8AF7-628A519872D6}"/>
+              </a:ext>
+            </a:extLst>
+          </p:cNvPr>
+          <p:cNvSpPr txBox="1">
+            <a:spLocks/>
+          </p:cNvSpPr>
+          <p:nvPr/>
+        </p:nvSpPr>
+        <p:spPr>
+          <a:xfrm>
+            <a:off x="10563224" y="5883809"/>
+            <a:ext cx="1628776" cy="402688"/>
+          </a:xfrm>
+          <a:prstGeom prst="rect">
+            <a:avLst/>
+          </a:prstGeom>
+        </p:spPr>
+        <p:txBody>
+          <a:bodyPr vert="horz" lIns="91440" tIns="45720" rIns="91440" bIns="45720" rtlCol="0">
+            <a:normAutofit/>
+          </a:bodyPr>
+          <a:lstStyle>
+            <a:lvl1pPr marL="0" indent="0" algn="l" defTabSz="914400" rtl="0" eaLnBrk="1" latinLnBrk="0" hangingPunct="1">
+              <a:lnSpc>
+                <a:spcPct val="90000"/>
+              </a:lnSpc>
+              <a:spcBef>
+                <a:spcPts val="1200"/>
+              </a:spcBef>
+              <a:spcAft>
+                <a:spcPts val="200"/>
+              </a:spcAft>
+              <a:buClr>
+                <a:schemeClr val="accent1"/>
+              </a:buClr>
+              <a:buSzPct val="100000"/>
+              <a:buFont typeface="Calibri" panose="020F0502020204030204" pitchFamily="34" charset="0"/>
+              <a:buNone/>
+              <a:defRPr sz="2400" kern="1200" cap="all" spc="200" baseline="0">
+                <a:solidFill>
+                  <a:schemeClr val="tx2"/>
+                </a:solidFill>
+                <a:latin typeface="+mj-lt"/>
+                <a:ea typeface="+mn-ea"/>
+                <a:cs typeface="+mn-cs"/>
+              </a:defRPr>
+            </a:lvl1pPr>
+            <a:lvl2pPr marL="457200" indent="0" algn="ctr" defTabSz="914400" rtl="0" eaLnBrk="1" latinLnBrk="0" hangingPunct="1">
+              <a:lnSpc>
+                <a:spcPct val="90000"/>
+              </a:lnSpc>
+              <a:spcBef>
+                <a:spcPts val="200"/>
+              </a:spcBef>
+              <a:spcAft>
+                <a:spcPts val="400"/>
+              </a:spcAft>
+              <a:buClr>
+                <a:schemeClr val="accent1"/>
+              </a:buClr>
+              <a:buFont typeface="Calibri" pitchFamily="34" charset="0"/>
+              <a:buNone/>
+              <a:defRPr sz="2400" kern="1200">
+                <a:solidFill>
+                  <a:schemeClr val="tx1">
+                    <a:lumMod val="75000"/>
+                    <a:lumOff val="25000"/>
+                  </a:schemeClr>
+                </a:solidFill>
+                <a:latin typeface="+mn-lt"/>
+                <a:ea typeface="+mn-ea"/>
+                <a:cs typeface="+mn-cs"/>
+              </a:defRPr>
+            </a:lvl2pPr>
+            <a:lvl3pPr marL="914400" indent="0" algn="ctr" defTabSz="914400" rtl="0" eaLnBrk="1" latinLnBrk="0" hangingPunct="1">
+              <a:lnSpc>
+                <a:spcPct val="90000"/>
+              </a:lnSpc>
+              <a:spcBef>
+                <a:spcPts val="200"/>
+              </a:spcBef>
+              <a:spcAft>
+                <a:spcPts val="400"/>
+              </a:spcAft>
+              <a:buClr>
+                <a:schemeClr val="accent1"/>
+              </a:buClr>
+              <a:buFont typeface="Calibri" pitchFamily="34" charset="0"/>
+              <a:buNone/>
+              <a:defRPr sz="2400" kern="1200">
+                <a:solidFill>
+                  <a:schemeClr val="tx1">
+                    <a:lumMod val="75000"/>
+                    <a:lumOff val="25000"/>
+                  </a:schemeClr>
+                </a:solidFill>
+                <a:latin typeface="+mn-lt"/>
+                <a:ea typeface="+mn-ea"/>
+                <a:cs typeface="+mn-cs"/>
+              </a:defRPr>
+            </a:lvl3pPr>
+            <a:lvl4pPr marL="1371600" indent="0" algn="ctr" defTabSz="914400" rtl="0" eaLnBrk="1" latinLnBrk="0" hangingPunct="1">
+              <a:lnSpc>
+                <a:spcPct val="90000"/>
+              </a:lnSpc>
+              <a:spcBef>
+                <a:spcPts val="200"/>
+              </a:spcBef>
+              <a:spcAft>
+                <a:spcPts val="400"/>
+              </a:spcAft>
+              <a:buClr>
+                <a:schemeClr val="accent1"/>
+              </a:buClr>
+              <a:buFont typeface="Calibri" pitchFamily="34" charset="0"/>
+              <a:buNone/>
+              <a:defRPr sz="2000" kern="1200">
+                <a:solidFill>
+                  <a:schemeClr val="tx1">
+                    <a:lumMod val="75000"/>
+                    <a:lumOff val="25000"/>
+                  </a:schemeClr>
+                </a:solidFill>
+                <a:latin typeface="+mn-lt"/>
+                <a:ea typeface="+mn-ea"/>
+                <a:cs typeface="+mn-cs"/>
+              </a:defRPr>
+            </a:lvl4pPr>
+            <a:lvl5pPr marL="1828800" indent="0" algn="ctr" defTabSz="914400" rtl="0" eaLnBrk="1" latinLnBrk="0" hangingPunct="1">
+              <a:lnSpc>
+                <a:spcPct val="90000"/>
+              </a:lnSpc>
+              <a:spcBef>
+                <a:spcPts val="200"/>
+              </a:spcBef>
+              <a:spcAft>
+                <a:spcPts val="400"/>
+              </a:spcAft>
+              <a:buClr>
+                <a:schemeClr val="accent1"/>
+              </a:buClr>
+              <a:buFont typeface="Calibri" pitchFamily="34" charset="0"/>
+              <a:buNone/>
+              <a:defRPr sz="2000" kern="1200">
+                <a:solidFill>
+                  <a:schemeClr val="tx1">
+                    <a:lumMod val="75000"/>
+                    <a:lumOff val="25000"/>
+                  </a:schemeClr>
+                </a:solidFill>
+                <a:latin typeface="+mn-lt"/>
+                <a:ea typeface="+mn-ea"/>
+                <a:cs typeface="+mn-cs"/>
+              </a:defRPr>
+            </a:lvl5pPr>
+            <a:lvl6pPr marL="2286000" indent="0" algn="ctr" defTabSz="914400" rtl="0" eaLnBrk="1" latinLnBrk="0" hangingPunct="1">
+              <a:lnSpc>
+                <a:spcPct val="90000"/>
+              </a:lnSpc>
+              <a:spcBef>
+                <a:spcPts val="200"/>
+              </a:spcBef>
+              <a:spcAft>
+                <a:spcPts val="400"/>
+              </a:spcAft>
+              <a:buClr>
+                <a:schemeClr val="accent1"/>
+              </a:buClr>
+              <a:buFont typeface="Calibri" pitchFamily="34" charset="0"/>
+              <a:buNone/>
+              <a:defRPr sz="2000" kern="1200">
+                <a:solidFill>
+                  <a:schemeClr val="tx1">
+                    <a:lumMod val="75000"/>
+                    <a:lumOff val="25000"/>
+                  </a:schemeClr>
+                </a:solidFill>
+                <a:latin typeface="+mn-lt"/>
+                <a:ea typeface="+mn-ea"/>
+                <a:cs typeface="+mn-cs"/>
+              </a:defRPr>
+            </a:lvl6pPr>
+            <a:lvl7pPr marL="2743200" indent="0" algn="ctr" defTabSz="914400" rtl="0" eaLnBrk="1" latinLnBrk="0" hangingPunct="1">
+              <a:lnSpc>
+                <a:spcPct val="90000"/>
+              </a:lnSpc>
+              <a:spcBef>
+                <a:spcPts val="200"/>
+              </a:spcBef>
+              <a:spcAft>
+                <a:spcPts val="400"/>
+              </a:spcAft>
+              <a:buClr>
+                <a:schemeClr val="accent1"/>
+              </a:buClr>
+              <a:buFont typeface="Calibri" pitchFamily="34" charset="0"/>
+              <a:buNone/>
+              <a:defRPr sz="2000" kern="1200">
+                <a:solidFill>
+                  <a:schemeClr val="tx1">
+                    <a:lumMod val="75000"/>
+                    <a:lumOff val="25000"/>
+                  </a:schemeClr>
+                </a:solidFill>
+                <a:latin typeface="+mn-lt"/>
+                <a:ea typeface="+mn-ea"/>
+                <a:cs typeface="+mn-cs"/>
+              </a:defRPr>
+            </a:lvl7pPr>
+            <a:lvl8pPr marL="3200400" indent="0" algn="ctr" defTabSz="914400" rtl="0" eaLnBrk="1" latinLnBrk="0" hangingPunct="1">
+              <a:lnSpc>
+                <a:spcPct val="90000"/>
+              </a:lnSpc>
+              <a:spcBef>
+                <a:spcPts val="200"/>
+              </a:spcBef>
+              <a:spcAft>
+                <a:spcPts val="400"/>
+              </a:spcAft>
+              <a:buClr>
+                <a:schemeClr val="accent1"/>
+              </a:buClr>
+              <a:buFont typeface="Calibri" pitchFamily="34" charset="0"/>
+              <a:buNone/>
+              <a:defRPr sz="2000" kern="1200">
+                <a:solidFill>
+                  <a:schemeClr val="tx1">
+                    <a:lumMod val="75000"/>
+                    <a:lumOff val="25000"/>
+                  </a:schemeClr>
+                </a:solidFill>
+                <a:latin typeface="+mn-lt"/>
+                <a:ea typeface="+mn-ea"/>
+                <a:cs typeface="+mn-cs"/>
+              </a:defRPr>
+            </a:lvl8pPr>
+            <a:lvl9pPr marL="3657600" indent="0" algn="ctr" defTabSz="914400" rtl="0" eaLnBrk="1" latinLnBrk="0" hangingPunct="1">
+              <a:lnSpc>
+                <a:spcPct val="90000"/>
+              </a:lnSpc>
+              <a:spcBef>
+                <a:spcPts val="200"/>
+              </a:spcBef>
+              <a:spcAft>
+                <a:spcPts val="400"/>
+              </a:spcAft>
+              <a:buClr>
+                <a:schemeClr val="accent1"/>
+              </a:buClr>
+              <a:buFont typeface="Calibri" pitchFamily="34" charset="0"/>
+              <a:buNone/>
+              <a:defRPr sz="2000" kern="1200">
+                <a:solidFill>
+                  <a:schemeClr val="tx1">
+                    <a:lumMod val="75000"/>
+                    <a:lumOff val="25000"/>
+                  </a:schemeClr>
+                </a:solidFill>
+                <a:latin typeface="+mn-lt"/>
+                <a:ea typeface="+mn-ea"/>
+                <a:cs typeface="+mn-cs"/>
+              </a:defRPr>
+            </a:lvl9pPr>
+          </a:lstStyle>
+          <a:p>
+            <a:pPr>
+              <a:lnSpc>
+                <a:spcPct val="100000"/>
+              </a:lnSpc>
+            </a:pPr>
+            <a:r>
+              <a:rPr lang="hu-HU" sz="1800" cap="none" spc="0" dirty="0">
+                <a:latin typeface="Bahnschrift Light" panose="020B0502040204020203" pitchFamily="34" charset="0"/>
+              </a:rPr>
+              <a:t>2026. 03. 03</a:t>
+            </a:r>
+          </a:p>
+        </p:txBody>
+      </p:sp>
+    </p:spTree>
+    <p:extLst>
+      <p:ext uri="{BB962C8B-B14F-4D97-AF65-F5344CB8AC3E}">
+        <p14:creationId xmlns:p14="http://schemas.microsoft.com/office/powerpoint/2010/main" val="3133121184"/>
+      </p:ext>
+    </p:extLst>
+  </p:cSld>
+  <p:clrMapOvr>
+    <a:masterClrMapping/>
+  </p:clrMapOvr>
+</p:sld>
+</file>
+
+<file path=ppt/slides/slide4.xml><?xml version="1.0" encoding="utf-8"?>
+<p:sld xmlns:a="http://schemas.openxmlformats.org/drawingml/2006/main" xmlns:r="http://schemas.openxmlformats.org/officeDocument/2006/relationships" xmlns:p="http://schemas.openxmlformats.org/presentationml/2006/main">
+  <p:cSld>
+    <p:bg>
+      <p:bgPr>
+        <a:solidFill>
+          <a:srgbClr val="FDF7E9"/>
+        </a:solidFill>
+        <a:effectLst/>
+      </p:bgPr>
+    </p:bg>
+    <p:spTree>
+      <p:nvGrpSpPr>
+        <p:cNvPr id="1" name=""/>
+        <p:cNvGrpSpPr/>
+        <p:nvPr/>
+      </p:nvGrpSpPr>
+      <p:grpSpPr>
+        <a:xfrm>
+          <a:off x="0" y="0"/>
+          <a:ext cx="0" cy="0"/>
+          <a:chOff x="0" y="0"/>
+          <a:chExt cx="0" cy="0"/>
+        </a:xfrm>
+      </p:grpSpPr>
+      <p:sp>
+        <p:nvSpPr>
+          <p:cNvPr id="2" name="Cím 1">
+            <a:extLst>
+              <a:ext uri="{FF2B5EF4-FFF2-40B4-BE49-F238E27FC236}">
+                <a16:creationId xmlns:a16="http://schemas.microsoft.com/office/drawing/2014/main" id="{C18830B2-00D6-4BD2-BE11-19215C420251}"/>
+              </a:ext>
+            </a:extLst>
+          </p:cNvPr>
+          <p:cNvSpPr txBox="1">
+            <a:spLocks/>
+          </p:cNvSpPr>
+          <p:nvPr/>
+        </p:nvSpPr>
+        <p:spPr>
+          <a:xfrm>
+            <a:off x="1098000" y="288000"/>
+            <a:ext cx="9760046" cy="2006995"/>
+          </a:xfrm>
+          <a:prstGeom prst="rect">
+            <a:avLst/>
+          </a:prstGeom>
+        </p:spPr>
+        <p:txBody>
+          <a:bodyPr anchor="ctr">
+            <a:normAutofit/>
+          </a:bodyPr>
+          <a:lstStyle>
+            <a:lvl1pPr algn="l" defTabSz="914400" rtl="0" eaLnBrk="1" latinLnBrk="0" hangingPunct="1">
+              <a:lnSpc>
+                <a:spcPct val="85000"/>
+              </a:lnSpc>
+              <a:spcBef>
+                <a:spcPct val="0"/>
+              </a:spcBef>
+              <a:buNone/>
+              <a:defRPr sz="4800" kern="1200" spc="-50" baseline="0">
+                <a:solidFill>
+                  <a:schemeClr val="tx1">
+                    <a:lumMod val="75000"/>
+                    <a:lumOff val="25000"/>
+                  </a:schemeClr>
+                </a:solidFill>
+                <a:latin typeface="+mj-lt"/>
+                <a:ea typeface="+mj-ea"/>
+                <a:cs typeface="+mj-cs"/>
+              </a:defRPr>
+            </a:lvl1pPr>
+          </a:lstStyle>
+          <a:p>
+            <a:r>
+              <a:rPr lang="hu-HU" b="1" dirty="0">
+                <a:latin typeface="Bahnschrift SemiBold" panose="020B0502040204020203" pitchFamily="34" charset="0"/>
+              </a:rPr>
+              <a:t>A projekt bemutatása</a:t>
+            </a:r>
+          </a:p>
+        </p:txBody>
+      </p:sp>
+      <p:pic>
+        <p:nvPicPr>
+          <p:cNvPr id="4" name="Kép 3">
+            <a:extLst>
+              <a:ext uri="{FF2B5EF4-FFF2-40B4-BE49-F238E27FC236}">
+                <a16:creationId xmlns:a16="http://schemas.microsoft.com/office/drawing/2014/main" id="{7912835F-A62C-4B0D-B733-74106EBFDA26}"/>
+              </a:ext>
+            </a:extLst>
+          </p:cNvPr>
+          <p:cNvPicPr>
+            <a:picLocks noChangeAspect="1"/>
+          </p:cNvPicPr>
+          <p:nvPr/>
+        </p:nvPicPr>
+        <p:blipFill rotWithShape="1">
+          <a:blip r:embed="rId2">
+            <a:alphaModFix amt="50000"/>
+            <a:extLst>
+              <a:ext uri="{28A0092B-C50C-407E-A947-70E740481C1C}">
+                <a14:useLocalDpi xmlns:a14="http://schemas.microsoft.com/office/drawing/2010/main" val="0"/>
+              </a:ext>
+            </a:extLst>
+          </a:blip>
+          <a:srcRect t="58555" r="67375"/>
+          <a:stretch/>
+        </p:blipFill>
+        <p:spPr>
+          <a:xfrm>
+            <a:off x="10619475" y="1036308"/>
+            <a:ext cx="1364958" cy="571501"/>
+          </a:xfrm>
+          <a:prstGeom prst="rect">
+            <a:avLst/>
+          </a:prstGeom>
+        </p:spPr>
+      </p:pic>
+      <p:cxnSp>
+        <p:nvCxnSpPr>
+          <p:cNvPr id="9" name="Egyenes összekötő 8">
+            <a:extLst>
+              <a:ext uri="{FF2B5EF4-FFF2-40B4-BE49-F238E27FC236}">
+                <a16:creationId xmlns:a16="http://schemas.microsoft.com/office/drawing/2014/main" id="{670AB60B-B385-4E46-A012-AD0038CF5F38}"/>
+              </a:ext>
+            </a:extLst>
+          </p:cNvPr>
+          <p:cNvCxnSpPr>
+            <a:cxnSpLocks/>
+          </p:cNvCxnSpPr>
+          <p:nvPr/>
+        </p:nvCxnSpPr>
+        <p:spPr>
+          <a:xfrm>
+            <a:off x="1209600" y="1738800"/>
+            <a:ext cx="9982275" cy="0"/>
+          </a:xfrm>
+          <a:prstGeom prst="line">
+            <a:avLst/>
+          </a:prstGeom>
+          <a:ln>
+            <a:solidFill>
+              <a:schemeClr val="tx1">
+                <a:lumMod val="50000"/>
+                <a:lumOff val="50000"/>
+              </a:schemeClr>
+            </a:solidFill>
+          </a:ln>
+        </p:spPr>
+        <p:style>
+          <a:lnRef idx="1">
+            <a:schemeClr val="accent1"/>
+          </a:lnRef>
+          <a:fillRef idx="0">
+            <a:schemeClr val="accent1"/>
+          </a:fillRef>
+          <a:effectRef idx="0">
+            <a:schemeClr val="accent1"/>
+          </a:effectRef>
+          <a:fontRef idx="minor">
+            <a:schemeClr val="tx1"/>
+          </a:fontRef>
+        </p:style>
+      </p:cxnSp>
+      <p:pic>
+        <p:nvPicPr>
+          <p:cNvPr id="10" name="Kép 9">
+            <a:extLst>
+              <a:ext uri="{FF2B5EF4-FFF2-40B4-BE49-F238E27FC236}">
+                <a16:creationId xmlns:a16="http://schemas.microsoft.com/office/drawing/2014/main" id="{CB9406C6-CF11-47E5-AEFA-0BA584F8F8D2}"/>
+              </a:ext>
+            </a:extLst>
+          </p:cNvPr>
+          <p:cNvPicPr>
+            <a:picLocks noChangeAspect="1"/>
+          </p:cNvPicPr>
+          <p:nvPr/>
+        </p:nvPicPr>
+        <p:blipFill rotWithShape="1">
+          <a:blip r:embed="rId2">
+            <a:alphaModFix amt="50000"/>
+            <a:extLst>
+              <a:ext uri="{28A0092B-C50C-407E-A947-70E740481C1C}">
+                <a14:useLocalDpi xmlns:a14="http://schemas.microsoft.com/office/drawing/2010/main" val="0"/>
+              </a:ext>
+            </a:extLst>
+          </a:blip>
+          <a:srcRect l="1" r="61666" b="38896"/>
+          <a:stretch/>
+        </p:blipFill>
+        <p:spPr>
+          <a:xfrm>
+            <a:off x="10565538" y="349786"/>
+            <a:ext cx="1418895" cy="745451"/>
+          </a:xfrm>
+          <a:prstGeom prst="rect">
+            <a:avLst/>
+          </a:prstGeom>
+        </p:spPr>
+      </p:pic>
+      <p:sp>
+        <p:nvSpPr>
+          <p:cNvPr id="6" name="Tartalom helye 2">
+            <a:extLst>
+              <a:ext uri="{FF2B5EF4-FFF2-40B4-BE49-F238E27FC236}">
+                <a16:creationId xmlns:a16="http://schemas.microsoft.com/office/drawing/2014/main" id="{FF047810-2018-4C33-B261-D1F6226BE9D7}"/>
+              </a:ext>
+            </a:extLst>
+          </p:cNvPr>
+          <p:cNvSpPr txBox="1">
+            <a:spLocks/>
+          </p:cNvSpPr>
+          <p:nvPr/>
+        </p:nvSpPr>
+        <p:spPr>
+          <a:xfrm>
+            <a:off x="1097280" y="1874067"/>
+            <a:ext cx="10058400" cy="4330005"/>
+          </a:xfrm>
+          <a:prstGeom prst="rect">
+            <a:avLst/>
+          </a:prstGeom>
+        </p:spPr>
+        <p:txBody>
+          <a:bodyPr>
+            <a:normAutofit/>
+          </a:bodyPr>
+          <a:lstStyle>
+            <a:lvl1pPr marL="91440" indent="-91440" algn="l" defTabSz="914400" rtl="0" eaLnBrk="1" latinLnBrk="0" hangingPunct="1">
+              <a:lnSpc>
+                <a:spcPct val="90000"/>
+              </a:lnSpc>
+              <a:spcBef>
+                <a:spcPts val="1200"/>
+              </a:spcBef>
+              <a:spcAft>
+                <a:spcPts val="200"/>
+              </a:spcAft>
+              <a:buClr>
+                <a:schemeClr val="accent1"/>
+              </a:buClr>
+              <a:buSzPct val="100000"/>
+              <a:buFont typeface="Calibri" panose="020F0502020204030204" pitchFamily="34" charset="0"/>
+              <a:buChar char=" "/>
+              <a:defRPr sz="2000" kern="1200">
+                <a:solidFill>
+                  <a:schemeClr val="tx1">
+                    <a:lumMod val="75000"/>
+                    <a:lumOff val="25000"/>
+                  </a:schemeClr>
+                </a:solidFill>
+                <a:latin typeface="+mn-lt"/>
+                <a:ea typeface="+mn-ea"/>
+                <a:cs typeface="+mn-cs"/>
+              </a:defRPr>
+            </a:lvl1pPr>
+            <a:lvl2pPr marL="384048" indent="-182880" algn="l" defTabSz="914400" rtl="0" eaLnBrk="1" latinLnBrk="0" hangingPunct="1">
+              <a:lnSpc>
+                <a:spcPct val="90000"/>
+              </a:lnSpc>
+              <a:spcBef>
+                <a:spcPts val="200"/>
+              </a:spcBef>
+              <a:spcAft>
+                <a:spcPts val="400"/>
+              </a:spcAft>
+              <a:buClr>
+                <a:schemeClr val="accent1"/>
+              </a:buClr>
+              <a:buFont typeface="Calibri" pitchFamily="34" charset="0"/>
+              <a:buChar char="◦"/>
+              <a:defRPr sz="1800" kern="1200">
+                <a:solidFill>
+                  <a:schemeClr val="tx1">
+                    <a:lumMod val="75000"/>
+                    <a:lumOff val="25000"/>
+                  </a:schemeClr>
+                </a:solidFill>
+                <a:latin typeface="+mn-lt"/>
+                <a:ea typeface="+mn-ea"/>
+                <a:cs typeface="+mn-cs"/>
+              </a:defRPr>
+            </a:lvl2pPr>
+            <a:lvl3pPr marL="566928" indent="-182880" algn="l" defTabSz="914400" rtl="0" eaLnBrk="1" latinLnBrk="0" hangingPunct="1">
+              <a:lnSpc>
+                <a:spcPct val="90000"/>
+              </a:lnSpc>
+              <a:spcBef>
+                <a:spcPts val="200"/>
+              </a:spcBef>
+              <a:spcAft>
+                <a:spcPts val="400"/>
+              </a:spcAft>
+              <a:buClr>
+                <a:schemeClr val="accent1"/>
+              </a:buClr>
+              <a:buFont typeface="Calibri" pitchFamily="34" charset="0"/>
+              <a:buChar char="◦"/>
+              <a:defRPr sz="1400" kern="1200">
+                <a:solidFill>
+                  <a:schemeClr val="tx1">
+                    <a:lumMod val="75000"/>
+                    <a:lumOff val="25000"/>
+                  </a:schemeClr>
+                </a:solidFill>
+                <a:latin typeface="+mn-lt"/>
+                <a:ea typeface="+mn-ea"/>
+                <a:cs typeface="+mn-cs"/>
+              </a:defRPr>
+            </a:lvl3pPr>
+            <a:lvl4pPr marL="749808" indent="-182880" algn="l" defTabSz="914400" rtl="0" eaLnBrk="1" latinLnBrk="0" hangingPunct="1">
+              <a:lnSpc>
+                <a:spcPct val="90000"/>
+              </a:lnSpc>
+              <a:spcBef>
+                <a:spcPts val="200"/>
+              </a:spcBef>
+              <a:spcAft>
+                <a:spcPts val="400"/>
+              </a:spcAft>
+              <a:buClr>
+                <a:schemeClr val="accent1"/>
+              </a:buClr>
+              <a:buFont typeface="Calibri" pitchFamily="34" charset="0"/>
+              <a:buChar char="◦"/>
+              <a:defRPr sz="1400" kern="1200">
+                <a:solidFill>
+                  <a:schemeClr val="tx1">
+                    <a:lumMod val="75000"/>
+                    <a:lumOff val="25000"/>
+                  </a:schemeClr>
+                </a:solidFill>
+                <a:latin typeface="+mn-lt"/>
+                <a:ea typeface="+mn-ea"/>
+                <a:cs typeface="+mn-cs"/>
+              </a:defRPr>
+            </a:lvl4pPr>
+            <a:lvl5pPr marL="932688" indent="-182880" algn="l" defTabSz="914400" rtl="0" eaLnBrk="1" latinLnBrk="0" hangingPunct="1">
+              <a:lnSpc>
+                <a:spcPct val="90000"/>
+              </a:lnSpc>
+              <a:spcBef>
+                <a:spcPts val="200"/>
+              </a:spcBef>
+              <a:spcAft>
+                <a:spcPts val="400"/>
+              </a:spcAft>
+              <a:buClr>
+                <a:schemeClr val="accent1"/>
+              </a:buClr>
+              <a:buFont typeface="Calibri" pitchFamily="34" charset="0"/>
+              <a:buChar char="◦"/>
+              <a:defRPr sz="1400" kern="1200">
+                <a:solidFill>
+                  <a:schemeClr val="tx1">
+                    <a:lumMod val="75000"/>
+                    <a:lumOff val="25000"/>
+                  </a:schemeClr>
+                </a:solidFill>
+                <a:latin typeface="+mn-lt"/>
+                <a:ea typeface="+mn-ea"/>
+                <a:cs typeface="+mn-cs"/>
+              </a:defRPr>
+            </a:lvl5pPr>
+            <a:lvl6pPr marL="1100000" indent="-228600" algn="l" defTabSz="914400" rtl="0" eaLnBrk="1" latinLnBrk="0" hangingPunct="1">
+              <a:lnSpc>
+                <a:spcPct val="90000"/>
+              </a:lnSpc>
+              <a:spcBef>
+                <a:spcPts val="200"/>
+              </a:spcBef>
+              <a:spcAft>
+                <a:spcPts val="400"/>
+              </a:spcAft>
+              <a:buClr>
+                <a:schemeClr val="accent1"/>
+              </a:buClr>
+              <a:buFont typeface="Calibri" pitchFamily="34" charset="0"/>
+              <a:buChar char="◦"/>
+              <a:defRPr sz="1400" kern="1200">
+                <a:solidFill>
+                  <a:schemeClr val="tx1">
+                    <a:lumMod val="75000"/>
+                    <a:lumOff val="25000"/>
+                  </a:schemeClr>
+                </a:solidFill>
+                <a:latin typeface="+mn-lt"/>
+                <a:ea typeface="+mn-ea"/>
+                <a:cs typeface="+mn-cs"/>
+              </a:defRPr>
+            </a:lvl6pPr>
+            <a:lvl7pPr marL="1300000" indent="-228600" algn="l" defTabSz="914400" rtl="0" eaLnBrk="1" latinLnBrk="0" hangingPunct="1">
+              <a:lnSpc>
+                <a:spcPct val="90000"/>
+              </a:lnSpc>
+              <a:spcBef>
+                <a:spcPts val="200"/>
+              </a:spcBef>
+              <a:spcAft>
+                <a:spcPts val="400"/>
+              </a:spcAft>
+              <a:buClr>
+                <a:schemeClr val="accent1"/>
+              </a:buClr>
+              <a:buFont typeface="Calibri" pitchFamily="34" charset="0"/>
+              <a:buChar char="◦"/>
+              <a:defRPr sz="1400" kern="1200">
+                <a:solidFill>
+                  <a:schemeClr val="tx1">
+                    <a:lumMod val="75000"/>
+                    <a:lumOff val="25000"/>
+                  </a:schemeClr>
+                </a:solidFill>
+                <a:latin typeface="+mn-lt"/>
+                <a:ea typeface="+mn-ea"/>
+                <a:cs typeface="+mn-cs"/>
+              </a:defRPr>
+            </a:lvl7pPr>
+            <a:lvl8pPr marL="1500000" indent="-228600" algn="l" defTabSz="914400" rtl="0" eaLnBrk="1" latinLnBrk="0" hangingPunct="1">
+              <a:lnSpc>
+                <a:spcPct val="90000"/>
+              </a:lnSpc>
+              <a:spcBef>
+                <a:spcPts val="200"/>
+              </a:spcBef>
+              <a:spcAft>
+                <a:spcPts val="400"/>
+              </a:spcAft>
+              <a:buClr>
+                <a:schemeClr val="accent1"/>
+              </a:buClr>
+              <a:buFont typeface="Calibri" pitchFamily="34" charset="0"/>
+              <a:buChar char="◦"/>
+              <a:defRPr sz="1400" kern="1200">
+                <a:solidFill>
+                  <a:schemeClr val="tx1">
+                    <a:lumMod val="75000"/>
+                    <a:lumOff val="25000"/>
+                  </a:schemeClr>
+                </a:solidFill>
+                <a:latin typeface="+mn-lt"/>
+                <a:ea typeface="+mn-ea"/>
+                <a:cs typeface="+mn-cs"/>
+              </a:defRPr>
+            </a:lvl8pPr>
+            <a:lvl9pPr marL="1700000" indent="-228600" algn="l" defTabSz="914400" rtl="0" eaLnBrk="1" latinLnBrk="0" hangingPunct="1">
+              <a:lnSpc>
+                <a:spcPct val="90000"/>
+              </a:lnSpc>
+              <a:spcBef>
+                <a:spcPts val="200"/>
+              </a:spcBef>
+              <a:spcAft>
+                <a:spcPts val="400"/>
+              </a:spcAft>
+              <a:buClr>
+                <a:schemeClr val="accent1"/>
+              </a:buClr>
+              <a:buFont typeface="Calibri" pitchFamily="34" charset="0"/>
+              <a:buChar char="◦"/>
+              <a:defRPr sz="1400" kern="1200">
+                <a:solidFill>
+                  <a:schemeClr val="tx1">
+                    <a:lumMod val="75000"/>
+                    <a:lumOff val="25000"/>
+                  </a:schemeClr>
+                </a:solidFill>
+                <a:latin typeface="+mn-lt"/>
+                <a:ea typeface="+mn-ea"/>
+                <a:cs typeface="+mn-cs"/>
+              </a:defRPr>
+            </a:lvl9pPr>
+          </a:lstStyle>
+          <a:p>
+            <a:pPr>
+              <a:lnSpc>
+                <a:spcPct val="150000"/>
+              </a:lnSpc>
+            </a:pPr>
+            <a:r>
+              <a:rPr lang="hu-HU" sz="2400" dirty="0">
+                <a:solidFill>
+                  <a:srgbClr val="BD582C"/>
+                </a:solidFill>
+                <a:latin typeface="Bahnschrift Light" panose="020B0502040204020203" pitchFamily="34" charset="0"/>
+              </a:rPr>
+              <a:t>Probléma</a:t>
+            </a:r>
+          </a:p>
+          <a:p>
+            <a:pPr lvl="1">
+              <a:buFont typeface="Arial" panose="020B0604020202020204" pitchFamily="34" charset="0"/>
+              <a:buChar char="•"/>
+            </a:pPr>
+            <a:r>
+              <a:rPr lang="hu-HU" sz="2000" dirty="0">
+                <a:latin typeface="Bahnschrift Light" panose="020B0502040204020203" pitchFamily="34" charset="0"/>
+              </a:rPr>
+              <a:t> Papíron történő étkezés rendelés, számlázás</a:t>
+            </a:r>
+          </a:p>
+          <a:p>
+            <a:pPr lvl="1">
+              <a:buFont typeface="Arial" panose="020B0604020202020204" pitchFamily="34" charset="0"/>
+              <a:buChar char="•"/>
+            </a:pPr>
+            <a:r>
+              <a:rPr lang="hu-HU" sz="2000" dirty="0">
+                <a:latin typeface="Bahnschrift Light" panose="020B0502040204020203" pitchFamily="34" charset="0"/>
+              </a:rPr>
+              <a:t> Lemondási nehézségek</a:t>
+            </a:r>
+          </a:p>
+          <a:p>
+            <a:pPr lvl="1">
+              <a:buFont typeface="Arial" panose="020B0604020202020204" pitchFamily="34" charset="0"/>
+              <a:buChar char="•"/>
+            </a:pPr>
+            <a:r>
+              <a:rPr lang="hu-HU" sz="2000" dirty="0">
+                <a:latin typeface="Bahnschrift Light" panose="020B0502040204020203" pitchFamily="34" charset="0"/>
+              </a:rPr>
+              <a:t> Nincs menü választási lehetőség</a:t>
             </a:r>
           </a:p>
           <a:p>
@@ -8156,7 +11961,7 @@
 </p:sld>
 </file>
 
-<file path=ppt/slides/slide3.xml><?xml version="1.0" encoding="utf-8"?>
+<file path=ppt/slides/slide5.xml><?xml version="1.0" encoding="utf-8"?>
 <p:sld xmlns:a="http://schemas.openxmlformats.org/drawingml/2006/main" xmlns:r="http://schemas.openxmlformats.org/officeDocument/2006/relationships" xmlns:p="http://schemas.openxmlformats.org/presentationml/2006/main">
   <p:cSld>
     <p:bg>
@@ -8358,7 +12163,7 @@
             <p:nvPr/>
           </p:nvPicPr>
           <p:blipFill rotWithShape="1">
-            <a:blip r:embed="rId2">
+            <a:blip r:embed="rId3">
               <a:alphaModFix amt="50000"/>
               <a:extLst>
                 <a:ext uri="{28A0092B-C50C-407E-A947-70E740481C1C}">
@@ -8394,7 +12199,7 @@
             <p:nvPr/>
           </p:nvPicPr>
           <p:blipFill rotWithShape="1">
-            <a:blip r:embed="rId2">
+            <a:blip r:embed="rId3">
               <a:alphaModFix amt="50000"/>
               <a:extLst>
                 <a:ext uri="{28A0092B-C50C-407E-A947-70E740481C1C}">
@@ -8426,10 +12231,13 @@
   <p:clrMapOvr>
     <a:masterClrMapping/>
   </p:clrMapOvr>
+  <p:transition spd="slow">
+    <p:push dir="u"/>
+  </p:transition>
 </p:sld>
 </file>
 
-<file path=ppt/slides/slide4.xml><?xml version="1.0" encoding="utf-8"?>
+<file path=ppt/slides/slide6.xml><?xml version="1.0" encoding="utf-8"?>
 <p:sld xmlns:a="http://schemas.openxmlformats.org/drawingml/2006/main" xmlns:r="http://schemas.openxmlformats.org/officeDocument/2006/relationships" xmlns:p="http://schemas.openxmlformats.org/presentationml/2006/main">
   <p:cSld>
     <p:bg>
@@ -8715,10 +12523,13 @@
   <p:clrMapOvr>
     <a:masterClrMapping/>
   </p:clrMapOvr>
+  <p:transition spd="slow">
+    <p:push dir="u"/>
+  </p:transition>
 </p:sld>
 </file>
 
-<file path=ppt/slides/slide5.xml><?xml version="1.0" encoding="utf-8"?>
+<file path=ppt/slides/slide7.xml><?xml version="1.0" encoding="utf-8"?>
 <p:sld xmlns:a="http://schemas.openxmlformats.org/drawingml/2006/main" xmlns:r="http://schemas.openxmlformats.org/officeDocument/2006/relationships" xmlns:p="http://schemas.openxmlformats.org/presentationml/2006/main">
   <p:cSld>
     <p:bg>
@@ -9158,10 +12969,13 @@
   <p:clrMapOvr>
     <a:masterClrMapping/>
   </p:clrMapOvr>
+  <p:transition spd="slow">
+    <p:push dir="u"/>
+  </p:transition>
 </p:sld>
 </file>
 
-<file path=ppt/slides/slide6.xml><?xml version="1.0" encoding="utf-8"?>
+<file path=ppt/slides/slide8.xml><?xml version="1.0" encoding="utf-8"?>
 <p:sld xmlns:a="http://schemas.openxmlformats.org/drawingml/2006/main" xmlns:r="http://schemas.openxmlformats.org/officeDocument/2006/relationships" xmlns:p="http://schemas.openxmlformats.org/presentationml/2006/main">
   <p:cSld>
     <p:bg>
@@ -9525,10 +13339,13 @@
   <p:clrMapOvr>
     <a:masterClrMapping/>
   </p:clrMapOvr>
+  <p:transition spd="slow">
+    <p:cover/>
+  </p:transition>
 </p:sld>
 </file>
 
-<file path=ppt/slides/slide7.xml><?xml version="1.0" encoding="utf-8"?>
+<file path=ppt/slides/slide9.xml><?xml version="1.0" encoding="utf-8"?>
 <p:sld xmlns:a="http://schemas.openxmlformats.org/drawingml/2006/main" xmlns:r="http://schemas.openxmlformats.org/officeDocument/2006/relationships" xmlns:p="http://schemas.openxmlformats.org/presentationml/2006/main">
   <p:cSld>
     <p:bg>
@@ -9875,518 +13692,9 @@
   <p:clrMapOvr>
     <a:masterClrMapping/>
   </p:clrMapOvr>
-</p:sld>
-</file>
-
-<file path=ppt/slides/slide8.xml><?xml version="1.0" encoding="utf-8"?>
-<p:sld xmlns:a="http://schemas.openxmlformats.org/drawingml/2006/main" xmlns:r="http://schemas.openxmlformats.org/officeDocument/2006/relationships" xmlns:p="http://schemas.openxmlformats.org/presentationml/2006/main">
-  <p:cSld>
-    <p:bg>
-      <p:bgPr>
-        <a:solidFill>
-          <a:srgbClr val="FDF7E9"/>
-        </a:solidFill>
-        <a:effectLst/>
-      </p:bgPr>
-    </p:bg>
-    <p:spTree>
-      <p:nvGrpSpPr>
-        <p:cNvPr id="1" name=""/>
-        <p:cNvGrpSpPr/>
-        <p:nvPr/>
-      </p:nvGrpSpPr>
-      <p:grpSpPr>
-        <a:xfrm>
-          <a:off x="0" y="0"/>
-          <a:ext cx="0" cy="0"/>
-          <a:chOff x="0" y="0"/>
-          <a:chExt cx="0" cy="0"/>
-        </a:xfrm>
-      </p:grpSpPr>
-      <p:sp>
-        <p:nvSpPr>
-          <p:cNvPr id="3" name="Tartalom helye 2">
-            <a:extLst>
-              <a:ext uri="{FF2B5EF4-FFF2-40B4-BE49-F238E27FC236}">
-                <a16:creationId xmlns:a16="http://schemas.microsoft.com/office/drawing/2014/main" id="{32758DB2-9D10-47A2-925C-F8A858558A07}"/>
-              </a:ext>
-            </a:extLst>
-          </p:cNvPr>
-          <p:cNvSpPr>
-            <a:spLocks noGrp="1"/>
-          </p:cNvSpPr>
-          <p:nvPr>
-            <p:ph idx="1"/>
-          </p:nvPr>
-        </p:nvSpPr>
-        <p:spPr>
-          <a:xfrm>
-            <a:off x="1243554" y="1911310"/>
-            <a:ext cx="10058400" cy="4023360"/>
-          </a:xfrm>
-        </p:spPr>
-        <p:txBody>
-          <a:bodyPr/>
-          <a:lstStyle/>
-          <a:p>
-            <a:pPr>
-              <a:buFont typeface="Arial" panose="020B0604020202020204" pitchFamily="34" charset="0"/>
-              <a:buChar char="•"/>
-            </a:pPr>
-            <a:r>
-              <a:rPr lang="hu-HU" dirty="0"/>
-              <a:t> 16 tábla</a:t>
-            </a:r>
-          </a:p>
-          <a:p>
-            <a:pPr>
-              <a:buFont typeface="Arial" panose="020B0604020202020204" pitchFamily="34" charset="0"/>
-              <a:buChar char="•"/>
-            </a:pPr>
-            <a:r>
-              <a:rPr lang="hu-HU" dirty="0"/>
-              <a:t> Mintaadatok</a:t>
-            </a:r>
-          </a:p>
-          <a:p>
-            <a:endParaRPr lang="hu-HU" dirty="0"/>
-          </a:p>
-        </p:txBody>
-      </p:sp>
-      <p:sp>
-        <p:nvSpPr>
-          <p:cNvPr id="4" name="Cím 1">
-            <a:extLst>
-              <a:ext uri="{FF2B5EF4-FFF2-40B4-BE49-F238E27FC236}">
-                <a16:creationId xmlns:a16="http://schemas.microsoft.com/office/drawing/2014/main" id="{1BABF97B-7E63-454C-9CDB-F386138F1BAA}"/>
-              </a:ext>
-            </a:extLst>
-          </p:cNvPr>
-          <p:cNvSpPr>
-            <a:spLocks noGrp="1"/>
-          </p:cNvSpPr>
-          <p:nvPr>
-            <p:ph type="title"/>
-          </p:nvPr>
-        </p:nvSpPr>
-        <p:spPr>
-          <a:xfrm>
-            <a:off x="1097280" y="286603"/>
-            <a:ext cx="10058400" cy="1450757"/>
-          </a:xfrm>
-        </p:spPr>
-        <p:txBody>
-          <a:bodyPr/>
-          <a:lstStyle/>
-          <a:p>
-            <a:r>
-              <a:rPr lang="hu-HU" b="1" dirty="0">
-                <a:latin typeface="Bahnschrift SemiBold" panose="020B0502040204020203" pitchFamily="34" charset="0"/>
-              </a:rPr>
-              <a:t>Adatbázis</a:t>
-            </a:r>
-          </a:p>
-        </p:txBody>
-      </p:sp>
-      <p:grpSp>
-        <p:nvGrpSpPr>
-          <p:cNvPr id="7" name="Csoportba foglalás 6">
-            <a:extLst>
-              <a:ext uri="{FF2B5EF4-FFF2-40B4-BE49-F238E27FC236}">
-                <a16:creationId xmlns:a16="http://schemas.microsoft.com/office/drawing/2014/main" id="{E802B2B8-8A4C-4A1C-A3DA-1085A7D5C7F6}"/>
-              </a:ext>
-            </a:extLst>
-          </p:cNvPr>
-          <p:cNvGrpSpPr/>
-          <p:nvPr/>
-        </p:nvGrpSpPr>
-        <p:grpSpPr>
-          <a:xfrm>
-            <a:off x="10565538" y="349786"/>
-            <a:ext cx="1418895" cy="1258023"/>
-            <a:chOff x="10565538" y="349786"/>
-            <a:chExt cx="1418895" cy="1258023"/>
-          </a:xfrm>
-        </p:grpSpPr>
-        <p:pic>
-          <p:nvPicPr>
-            <p:cNvPr id="8" name="Kép 7">
-              <a:extLst>
-                <a:ext uri="{FF2B5EF4-FFF2-40B4-BE49-F238E27FC236}">
-                  <a16:creationId xmlns:a16="http://schemas.microsoft.com/office/drawing/2014/main" id="{2F280203-E1A7-4586-A915-B522FFD90496}"/>
-                </a:ext>
-              </a:extLst>
-            </p:cNvPr>
-            <p:cNvPicPr>
-              <a:picLocks noChangeAspect="1"/>
-            </p:cNvPicPr>
-            <p:nvPr/>
-          </p:nvPicPr>
-          <p:blipFill rotWithShape="1">
-            <a:blip r:embed="rId2">
-              <a:alphaModFix amt="50000"/>
-              <a:extLst>
-                <a:ext uri="{28A0092B-C50C-407E-A947-70E740481C1C}">
-                  <a14:useLocalDpi xmlns:a14="http://schemas.microsoft.com/office/drawing/2010/main" val="0"/>
-                </a:ext>
-              </a:extLst>
-            </a:blip>
-            <a:srcRect t="58555" r="67375"/>
-            <a:stretch/>
-          </p:blipFill>
-          <p:spPr>
-            <a:xfrm>
-              <a:off x="10619475" y="1036308"/>
-              <a:ext cx="1364958" cy="571501"/>
-            </a:xfrm>
-            <a:prstGeom prst="rect">
-              <a:avLst/>
-            </a:prstGeom>
-          </p:spPr>
-        </p:pic>
-        <p:pic>
-          <p:nvPicPr>
-            <p:cNvPr id="9" name="Kép 8">
-              <a:extLst>
-                <a:ext uri="{FF2B5EF4-FFF2-40B4-BE49-F238E27FC236}">
-                  <a16:creationId xmlns:a16="http://schemas.microsoft.com/office/drawing/2014/main" id="{90937401-8474-4C4C-8353-0BC085D4C997}"/>
-                </a:ext>
-              </a:extLst>
-            </p:cNvPr>
-            <p:cNvPicPr>
-              <a:picLocks noChangeAspect="1"/>
-            </p:cNvPicPr>
-            <p:nvPr/>
-          </p:nvPicPr>
-          <p:blipFill rotWithShape="1">
-            <a:blip r:embed="rId2">
-              <a:alphaModFix amt="50000"/>
-              <a:extLst>
-                <a:ext uri="{28A0092B-C50C-407E-A947-70E740481C1C}">
-                  <a14:useLocalDpi xmlns:a14="http://schemas.microsoft.com/office/drawing/2010/main" val="0"/>
-                </a:ext>
-              </a:extLst>
-            </a:blip>
-            <a:srcRect l="1" r="61666" b="38896"/>
-            <a:stretch/>
-          </p:blipFill>
-          <p:spPr>
-            <a:xfrm>
-              <a:off x="10565538" y="349786"/>
-              <a:ext cx="1418895" cy="745451"/>
-            </a:xfrm>
-            <a:prstGeom prst="rect">
-              <a:avLst/>
-            </a:prstGeom>
-          </p:spPr>
-        </p:pic>
-      </p:grpSp>
-      <p:pic>
-        <p:nvPicPr>
-          <p:cNvPr id="5" name="Kép 4">
-            <a:extLst>
-              <a:ext uri="{FF2B5EF4-FFF2-40B4-BE49-F238E27FC236}">
-                <a16:creationId xmlns:a16="http://schemas.microsoft.com/office/drawing/2014/main" id="{12F1D82F-A13E-4282-A8D3-3080BA7F58C4}"/>
-              </a:ext>
-            </a:extLst>
-          </p:cNvPr>
-          <p:cNvPicPr>
-            <a:picLocks noChangeAspect="1"/>
-          </p:cNvPicPr>
-          <p:nvPr/>
-        </p:nvPicPr>
-        <p:blipFill rotWithShape="1">
-          <a:blip r:embed="rId3"/>
-          <a:srcRect l="7840" t="-648" r="28565" b="-478"/>
-          <a:stretch/>
-        </p:blipFill>
-        <p:spPr>
-          <a:xfrm>
-            <a:off x="1600330" y="2929002"/>
-            <a:ext cx="2435383" cy="3005668"/>
-          </a:xfrm>
-          <a:prstGeom prst="rect">
-            <a:avLst/>
-          </a:prstGeom>
-          <a:ln w="76200" cap="sq">
-            <a:solidFill>
-              <a:srgbClr val="E48312"/>
-            </a:solidFill>
-            <a:miter lim="800000"/>
-          </a:ln>
-          <a:effectLst>
-            <a:outerShdw blurRad="57150" dist="50800" dir="2700000" algn="tl" rotWithShape="0">
-              <a:srgbClr val="000000">
-                <a:alpha val="40000"/>
-              </a:srgbClr>
-            </a:outerShdw>
-          </a:effectLst>
-        </p:spPr>
-      </p:pic>
-      <p:pic>
-        <p:nvPicPr>
-          <p:cNvPr id="11" name="Kép 10">
-            <a:extLst>
-              <a:ext uri="{FF2B5EF4-FFF2-40B4-BE49-F238E27FC236}">
-                <a16:creationId xmlns:a16="http://schemas.microsoft.com/office/drawing/2014/main" id="{F645605F-0923-431D-B3D3-AE4E34E70E6B}"/>
-              </a:ext>
-            </a:extLst>
-          </p:cNvPr>
-          <p:cNvPicPr>
-            <a:picLocks noChangeAspect="1"/>
-          </p:cNvPicPr>
-          <p:nvPr/>
-        </p:nvPicPr>
-        <p:blipFill rotWithShape="1">
-          <a:blip r:embed="rId4"/>
-          <a:srcRect l="9591" t="2483" r="8800" b="5522"/>
-          <a:stretch/>
-        </p:blipFill>
-        <p:spPr>
-          <a:xfrm>
-            <a:off x="5144611" y="1911310"/>
-            <a:ext cx="6023355" cy="4146617"/>
-          </a:xfrm>
-          <a:prstGeom prst="rect">
-            <a:avLst/>
-          </a:prstGeom>
-          <a:ln w="76200" cap="sq">
-            <a:solidFill>
-              <a:srgbClr val="E48312"/>
-            </a:solidFill>
-            <a:miter lim="800000"/>
-          </a:ln>
-          <a:effectLst>
-            <a:outerShdw blurRad="57150" dist="50800" dir="2700000" algn="tl" rotWithShape="0">
-              <a:srgbClr val="000000">
-                <a:alpha val="40000"/>
-              </a:srgbClr>
-            </a:outerShdw>
-          </a:effectLst>
-        </p:spPr>
-      </p:pic>
-    </p:spTree>
-    <p:extLst>
-      <p:ext uri="{BB962C8B-B14F-4D97-AF65-F5344CB8AC3E}">
-        <p14:creationId xmlns:p14="http://schemas.microsoft.com/office/powerpoint/2010/main" val="1438799303"/>
-      </p:ext>
-    </p:extLst>
-  </p:cSld>
-  <p:clrMapOvr>
-    <a:masterClrMapping/>
-  </p:clrMapOvr>
-</p:sld>
-</file>
-
-<file path=ppt/slides/slide9.xml><?xml version="1.0" encoding="utf-8"?>
-<p:sld xmlns:a="http://schemas.openxmlformats.org/drawingml/2006/main" xmlns:r="http://schemas.openxmlformats.org/officeDocument/2006/relationships" xmlns:p="http://schemas.openxmlformats.org/presentationml/2006/main">
-  <p:cSld>
-    <p:bg>
-      <p:bgPr>
-        <a:solidFill>
-          <a:srgbClr val="FDF7E9"/>
-        </a:solidFill>
-        <a:effectLst/>
-      </p:bgPr>
-    </p:bg>
-    <p:spTree>
-      <p:nvGrpSpPr>
-        <p:cNvPr id="1" name=""/>
-        <p:cNvGrpSpPr/>
-        <p:nvPr/>
-      </p:nvGrpSpPr>
-      <p:grpSpPr>
-        <a:xfrm>
-          <a:off x="0" y="0"/>
-          <a:ext cx="0" cy="0"/>
-          <a:chOff x="0" y="0"/>
-          <a:chExt cx="0" cy="0"/>
-        </a:xfrm>
-      </p:grpSpPr>
-      <p:sp>
-        <p:nvSpPr>
-          <p:cNvPr id="2" name="Cím 1">
-            <a:extLst>
-              <a:ext uri="{FF2B5EF4-FFF2-40B4-BE49-F238E27FC236}">
-                <a16:creationId xmlns:a16="http://schemas.microsoft.com/office/drawing/2014/main" id="{755F2576-93E3-4E11-AD5A-5982C144E204}"/>
-              </a:ext>
-            </a:extLst>
-          </p:cNvPr>
-          <p:cNvSpPr>
-            <a:spLocks noGrp="1"/>
-          </p:cNvSpPr>
-          <p:nvPr>
-            <p:ph type="title"/>
-          </p:nvPr>
-        </p:nvSpPr>
-        <p:spPr>
-          <a:xfrm>
-            <a:off x="457200" y="622934"/>
-            <a:ext cx="3200400" cy="2286000"/>
-          </a:xfrm>
-        </p:spPr>
-        <p:txBody>
-          <a:bodyPr/>
-          <a:lstStyle/>
-          <a:p>
-            <a:r>
-              <a:rPr lang="hu-HU" dirty="0" err="1">
-                <a:latin typeface="Bahnschrift SemiBold" panose="020B0502040204020203" pitchFamily="34" charset="0"/>
-              </a:rPr>
-              <a:t>Reszponzivitás</a:t>
-            </a:r>
-            <a:endParaRPr lang="hu-HU" dirty="0">
-              <a:latin typeface="Bahnschrift SemiBold" panose="020B0502040204020203" pitchFamily="34" charset="0"/>
-            </a:endParaRPr>
-          </a:p>
-        </p:txBody>
-      </p:sp>
-      <p:sp>
-        <p:nvSpPr>
-          <p:cNvPr id="4" name="Szöveg helye 3">
-            <a:extLst>
-              <a:ext uri="{FF2B5EF4-FFF2-40B4-BE49-F238E27FC236}">
-                <a16:creationId xmlns:a16="http://schemas.microsoft.com/office/drawing/2014/main" id="{E1483CC7-2FF0-4B57-872B-832994FD7836}"/>
-              </a:ext>
-            </a:extLst>
-          </p:cNvPr>
-          <p:cNvSpPr>
-            <a:spLocks noGrp="1"/>
-          </p:cNvSpPr>
-          <p:nvPr>
-            <p:ph type="body" sz="half" idx="2"/>
-          </p:nvPr>
-        </p:nvSpPr>
-        <p:spPr>
-          <a:xfrm>
-            <a:off x="704850" y="3259455"/>
-            <a:ext cx="3562350" cy="3684270"/>
-          </a:xfrm>
-        </p:spPr>
-        <p:txBody>
-          <a:bodyPr>
-            <a:normAutofit/>
-          </a:bodyPr>
-          <a:lstStyle/>
-          <a:p>
-            <a:pPr marL="285750" indent="-285750">
-              <a:buClr>
-                <a:schemeClr val="bg1"/>
-              </a:buClr>
-              <a:buFont typeface="Arial" panose="020B0604020202020204" pitchFamily="34" charset="0"/>
-              <a:buChar char="•"/>
-            </a:pPr>
-            <a:r>
-              <a:rPr lang="hu-HU" sz="1800" dirty="0" err="1"/>
-              <a:t>Bootstrap</a:t>
-            </a:r>
-            <a:endParaRPr lang="hu-HU" sz="1800" dirty="0"/>
-          </a:p>
-        </p:txBody>
-      </p:sp>
-      <p:grpSp>
-        <p:nvGrpSpPr>
-          <p:cNvPr id="6" name="Csoportba foglalás 5">
-            <a:extLst>
-              <a:ext uri="{FF2B5EF4-FFF2-40B4-BE49-F238E27FC236}">
-                <a16:creationId xmlns:a16="http://schemas.microsoft.com/office/drawing/2014/main" id="{3317F239-9F4A-4F2E-A3AC-DBDE360A6AFF}"/>
-              </a:ext>
-            </a:extLst>
-          </p:cNvPr>
-          <p:cNvGrpSpPr/>
-          <p:nvPr/>
-        </p:nvGrpSpPr>
-        <p:grpSpPr>
-          <a:xfrm>
-            <a:off x="10565538" y="349786"/>
-            <a:ext cx="1418895" cy="1258023"/>
-            <a:chOff x="10565538" y="349786"/>
-            <a:chExt cx="1418895" cy="1258023"/>
-          </a:xfrm>
-        </p:grpSpPr>
-        <p:pic>
-          <p:nvPicPr>
-            <p:cNvPr id="7" name="Kép 6">
-              <a:extLst>
-                <a:ext uri="{FF2B5EF4-FFF2-40B4-BE49-F238E27FC236}">
-                  <a16:creationId xmlns:a16="http://schemas.microsoft.com/office/drawing/2014/main" id="{C2CC19C8-CD10-42F5-9D72-C77B335B0586}"/>
-                </a:ext>
-              </a:extLst>
-            </p:cNvPr>
-            <p:cNvPicPr>
-              <a:picLocks noChangeAspect="1"/>
-            </p:cNvPicPr>
-            <p:nvPr/>
-          </p:nvPicPr>
-          <p:blipFill rotWithShape="1">
-            <a:blip r:embed="rId3">
-              <a:alphaModFix amt="50000"/>
-              <a:extLst>
-                <a:ext uri="{28A0092B-C50C-407E-A947-70E740481C1C}">
-                  <a14:useLocalDpi xmlns:a14="http://schemas.microsoft.com/office/drawing/2010/main" val="0"/>
-                </a:ext>
-              </a:extLst>
-            </a:blip>
-            <a:srcRect t="58555" r="67375"/>
-            <a:stretch/>
-          </p:blipFill>
-          <p:spPr>
-            <a:xfrm>
-              <a:off x="10619475" y="1036308"/>
-              <a:ext cx="1364958" cy="571501"/>
-            </a:xfrm>
-            <a:prstGeom prst="rect">
-              <a:avLst/>
-            </a:prstGeom>
-          </p:spPr>
-        </p:pic>
-        <p:pic>
-          <p:nvPicPr>
-            <p:cNvPr id="8" name="Kép 7">
-              <a:extLst>
-                <a:ext uri="{FF2B5EF4-FFF2-40B4-BE49-F238E27FC236}">
-                  <a16:creationId xmlns:a16="http://schemas.microsoft.com/office/drawing/2014/main" id="{5AF4A5EB-86E0-4324-B31A-9A09255FD8E0}"/>
-                </a:ext>
-              </a:extLst>
-            </p:cNvPr>
-            <p:cNvPicPr>
-              <a:picLocks noChangeAspect="1"/>
-            </p:cNvPicPr>
-            <p:nvPr/>
-          </p:nvPicPr>
-          <p:blipFill rotWithShape="1">
-            <a:blip r:embed="rId3">
-              <a:alphaModFix amt="50000"/>
-              <a:extLst>
-                <a:ext uri="{28A0092B-C50C-407E-A947-70E740481C1C}">
-                  <a14:useLocalDpi xmlns:a14="http://schemas.microsoft.com/office/drawing/2010/main" val="0"/>
-                </a:ext>
-              </a:extLst>
-            </a:blip>
-            <a:srcRect l="1" r="61666" b="38896"/>
-            <a:stretch/>
-          </p:blipFill>
-          <p:spPr>
-            <a:xfrm>
-              <a:off x="10565538" y="349786"/>
-              <a:ext cx="1418895" cy="745451"/>
-            </a:xfrm>
-            <a:prstGeom prst="rect">
-              <a:avLst/>
-            </a:prstGeom>
-          </p:spPr>
-        </p:pic>
-      </p:grpSp>
-    </p:spTree>
-    <p:extLst>
-      <p:ext uri="{BB962C8B-B14F-4D97-AF65-F5344CB8AC3E}">
-        <p14:creationId xmlns:p14="http://schemas.microsoft.com/office/powerpoint/2010/main" val="1470190695"/>
-      </p:ext>
-    </p:extLst>
-  </p:cSld>
-  <p:clrMapOvr>
-    <a:masterClrMapping/>
-  </p:clrMapOvr>
+  <p:transition spd="slow">
+    <p:cover/>
+  </p:transition>
 </p:sld>
 </file>
 

--- a/Dokumentációhoz/Prezentáció/eMenza_AtkariAriella_FarkasDominik.pptx
+++ b/Dokumentációhoz/Prezentáció/eMenza_AtkariAriella_FarkasDominik.pptx
@@ -213,7 +213,7 @@
           <a:p>
             <a:fld id="{CBDB98DA-128E-4364-BF98-E5A8E296E4F2}" type="datetimeFigureOut">
               <a:rPr lang="hu-HU" smtClean="0"/>
-              <a:t>2026. 03. 10.</a:t>
+              <a:t>2026. 03. 27.</a:t>
             </a:fld>
             <a:endParaRPr lang="hu-HU"/>
           </a:p>
@@ -573,6 +573,90 @@
 </p:notes>
 </file>
 
+<file path=ppt/notesSlides/notesSlide10.xml><?xml version="1.0" encoding="utf-8"?>
+<p:notes xmlns:a="http://schemas.openxmlformats.org/drawingml/2006/main" xmlns:r="http://schemas.openxmlformats.org/officeDocument/2006/relationships" xmlns:p="http://schemas.openxmlformats.org/presentationml/2006/main">
+  <p:cSld>
+    <p:spTree>
+      <p:nvGrpSpPr>
+        <p:cNvPr id="1" name=""/>
+        <p:cNvGrpSpPr/>
+        <p:nvPr/>
+      </p:nvGrpSpPr>
+      <p:grpSpPr>
+        <a:xfrm>
+          <a:off x="0" y="0"/>
+          <a:ext cx="0" cy="0"/>
+          <a:chOff x="0" y="0"/>
+          <a:chExt cx="0" cy="0"/>
+        </a:xfrm>
+      </p:grpSpPr>
+      <p:sp>
+        <p:nvSpPr>
+          <p:cNvPr id="2" name="Diakép helye 1"/>
+          <p:cNvSpPr>
+            <a:spLocks noGrp="1" noRot="1" noChangeAspect="1"/>
+          </p:cNvSpPr>
+          <p:nvPr>
+            <p:ph type="sldImg"/>
+          </p:nvPr>
+        </p:nvSpPr>
+        <p:spPr/>
+      </p:sp>
+      <p:sp>
+        <p:nvSpPr>
+          <p:cNvPr id="3" name="Jegyzetek helye 2"/>
+          <p:cNvSpPr>
+            <a:spLocks noGrp="1"/>
+          </p:cNvSpPr>
+          <p:nvPr>
+            <p:ph type="body" idx="1"/>
+          </p:nvPr>
+        </p:nvSpPr>
+        <p:spPr/>
+        <p:txBody>
+          <a:bodyPr/>
+          <a:lstStyle/>
+          <a:p>
+            <a:endParaRPr lang="hu-HU" dirty="0"/>
+          </a:p>
+        </p:txBody>
+      </p:sp>
+      <p:sp>
+        <p:nvSpPr>
+          <p:cNvPr id="4" name="Dia számának helye 3"/>
+          <p:cNvSpPr>
+            <a:spLocks noGrp="1"/>
+          </p:cNvSpPr>
+          <p:nvPr>
+            <p:ph type="sldNum" sz="quarter" idx="5"/>
+          </p:nvPr>
+        </p:nvSpPr>
+        <p:spPr/>
+        <p:txBody>
+          <a:bodyPr/>
+          <a:lstStyle/>
+          <a:p>
+            <a:fld id="{5B73375F-E6FE-4F6E-96C6-6B6BE7EEDE08}" type="slidenum">
+              <a:rPr lang="hu-HU" smtClean="0"/>
+              <a:t>15</a:t>
+            </a:fld>
+            <a:endParaRPr lang="hu-HU"/>
+          </a:p>
+        </p:txBody>
+      </p:sp>
+    </p:spTree>
+    <p:extLst>
+      <p:ext uri="{BB962C8B-B14F-4D97-AF65-F5344CB8AC3E}">
+        <p14:creationId xmlns:p14="http://schemas.microsoft.com/office/powerpoint/2010/main" val="3651380644"/>
+      </p:ext>
+    </p:extLst>
+  </p:cSld>
+  <p:clrMapOvr>
+    <a:masterClrMapping/>
+  </p:clrMapOvr>
+</p:notes>
+</file>
+
 <file path=ppt/notesSlides/notesSlide2.xml><?xml version="1.0" encoding="utf-8"?>
 <p:notes xmlns:a="http://schemas.openxmlformats.org/drawingml/2006/main" xmlns:r="http://schemas.openxmlformats.org/officeDocument/2006/relationships" xmlns:p="http://schemas.openxmlformats.org/presentationml/2006/main">
   <p:cSld>
@@ -1262,6 +1346,49 @@
           <a:bodyPr/>
           <a:lstStyle/>
           <a:p>
+            <a:r>
+              <a:rPr lang="hu-HU" dirty="0" err="1"/>
+              <a:t>Simple</a:t>
+            </a:r>
+            <a:r>
+              <a:rPr lang="hu-HU" dirty="0"/>
+              <a:t> </a:t>
+            </a:r>
+            <a:r>
+              <a:rPr lang="hu-HU" dirty="0" err="1"/>
+              <a:t>payyel</a:t>
+            </a:r>
+            <a:r>
+              <a:rPr lang="hu-HU" dirty="0"/>
+              <a:t> online fizetés</a:t>
+            </a:r>
+          </a:p>
+          <a:p>
+            <a:pPr marL="0" marR="0" lvl="0" indent="0" algn="l" defTabSz="914400" rtl="0" eaLnBrk="1" fontAlgn="auto" latinLnBrk="0" hangingPunct="1">
+              <a:lnSpc>
+                <a:spcPct val="100000"/>
+              </a:lnSpc>
+              <a:spcBef>
+                <a:spcPts val="0"/>
+              </a:spcBef>
+              <a:spcAft>
+                <a:spcPts val="0"/>
+              </a:spcAft>
+              <a:buClrTx/>
+              <a:buSzTx/>
+              <a:buFontTx/>
+              <a:buNone/>
+              <a:tabLst/>
+              <a:defRPr/>
+            </a:pPr>
+            <a:r>
+              <a:rPr lang="hu-HU" sz="1200" dirty="0">
+                <a:latin typeface="Bahnschrift Light" panose="020B0502040204020203" pitchFamily="34" charset="0"/>
+              </a:rPr>
+              <a:t>Értesítés küldés?</a:t>
+            </a:r>
+          </a:p>
+          <a:p>
             <a:endParaRPr lang="hu-HU" dirty="0"/>
           </a:p>
         </p:txBody>
@@ -1283,7 +1410,7 @@
           <a:p>
             <a:fld id="{5B73375F-E6FE-4F6E-96C6-6B6BE7EEDE08}" type="slidenum">
               <a:rPr lang="hu-HU" smtClean="0"/>
-              <a:t>15</a:t>
+              <a:t>13</a:t>
             </a:fld>
             <a:endParaRPr lang="hu-HU"/>
           </a:p>
@@ -1292,7 +1419,7 @@
     </p:spTree>
     <p:extLst>
       <p:ext uri="{BB962C8B-B14F-4D97-AF65-F5344CB8AC3E}">
-        <p14:creationId xmlns:p14="http://schemas.microsoft.com/office/powerpoint/2010/main" val="3651380644"/>
+        <p14:creationId xmlns:p14="http://schemas.microsoft.com/office/powerpoint/2010/main" val="3326162737"/>
       </p:ext>
     </p:extLst>
   </p:cSld>
@@ -1528,7 +1655,7 @@
           <a:p>
             <a:fld id="{B9C1AE7B-DA1F-453C-8148-553EEBF678EC}" type="datetimeFigureOut">
               <a:rPr lang="hu-HU" smtClean="0"/>
-              <a:t>2026. 03. 10.</a:t>
+              <a:t>2026. 03. 27.</a:t>
             </a:fld>
             <a:endParaRPr lang="hu-HU"/>
           </a:p>
@@ -1736,7 +1863,7 @@
           <a:p>
             <a:fld id="{B9C1AE7B-DA1F-453C-8148-553EEBF678EC}" type="datetimeFigureOut">
               <a:rPr lang="hu-HU" smtClean="0"/>
-              <a:t>2026. 03. 10.</a:t>
+              <a:t>2026. 03. 27.</a:t>
             </a:fld>
             <a:endParaRPr lang="hu-HU"/>
           </a:p>
@@ -1992,7 +2119,7 @@
           <a:p>
             <a:fld id="{B9C1AE7B-DA1F-453C-8148-553EEBF678EC}" type="datetimeFigureOut">
               <a:rPr lang="hu-HU" smtClean="0"/>
-              <a:t>2026. 03. 10.</a:t>
+              <a:t>2026. 03. 27.</a:t>
             </a:fld>
             <a:endParaRPr lang="hu-HU"/>
           </a:p>
@@ -2166,7 +2293,7 @@
           <a:p>
             <a:fld id="{B9C1AE7B-DA1F-453C-8148-553EEBF678EC}" type="datetimeFigureOut">
               <a:rPr lang="hu-HU" smtClean="0"/>
-              <a:t>2026. 03. 10.</a:t>
+              <a:t>2026. 03. 27.</a:t>
             </a:fld>
             <a:endParaRPr lang="hu-HU"/>
           </a:p>
@@ -2509,7 +2636,7 @@
           <a:p>
             <a:fld id="{B9C1AE7B-DA1F-453C-8148-553EEBF678EC}" type="datetimeFigureOut">
               <a:rPr lang="hu-HU" smtClean="0"/>
-              <a:t>2026. 03. 10.</a:t>
+              <a:t>2026. 03. 27.</a:t>
             </a:fld>
             <a:endParaRPr lang="hu-HU"/>
           </a:p>
@@ -2784,7 +2911,7 @@
           <a:p>
             <a:fld id="{B9C1AE7B-DA1F-453C-8148-553EEBF678EC}" type="datetimeFigureOut">
               <a:rPr lang="hu-HU" smtClean="0"/>
-              <a:t>2026. 03. 10.</a:t>
+              <a:t>2026. 03. 27.</a:t>
             </a:fld>
             <a:endParaRPr lang="hu-HU"/>
           </a:p>
@@ -3163,7 +3290,7 @@
           <a:p>
             <a:fld id="{B9C1AE7B-DA1F-453C-8148-553EEBF678EC}" type="datetimeFigureOut">
               <a:rPr lang="hu-HU" smtClean="0"/>
-              <a:t>2026. 03. 10.</a:t>
+              <a:t>2026. 03. 27.</a:t>
             </a:fld>
             <a:endParaRPr lang="hu-HU"/>
           </a:p>
@@ -3281,7 +3408,7 @@
           <a:p>
             <a:fld id="{B9C1AE7B-DA1F-453C-8148-553EEBF678EC}" type="datetimeFigureOut">
               <a:rPr lang="hu-HU" smtClean="0"/>
-              <a:t>2026. 03. 10.</a:t>
+              <a:t>2026. 03. 27.</a:t>
             </a:fld>
             <a:endParaRPr lang="hu-HU"/>
           </a:p>
@@ -3452,7 +3579,7 @@
           <a:p>
             <a:fld id="{B9C1AE7B-DA1F-453C-8148-553EEBF678EC}" type="datetimeFigureOut">
               <a:rPr lang="hu-HU" smtClean="0"/>
-              <a:t>2026. 03. 10.</a:t>
+              <a:t>2026. 03. 27.</a:t>
             </a:fld>
             <a:endParaRPr lang="hu-HU"/>
           </a:p>
@@ -3806,7 +3933,7 @@
           <a:p>
             <a:fld id="{B9C1AE7B-DA1F-453C-8148-553EEBF678EC}" type="datetimeFigureOut">
               <a:rPr lang="hu-HU" smtClean="0"/>
-              <a:t>2026. 03. 10.</a:t>
+              <a:t>2026. 03. 27.</a:t>
             </a:fld>
             <a:endParaRPr lang="hu-HU"/>
           </a:p>
@@ -4188,7 +4315,7 @@
           <a:p>
             <a:fld id="{B9C1AE7B-DA1F-453C-8148-553EEBF678EC}" type="datetimeFigureOut">
               <a:rPr lang="hu-HU" smtClean="0"/>
-              <a:t>2026. 03. 10.</a:t>
+              <a:t>2026. 03. 27.</a:t>
             </a:fld>
             <a:endParaRPr lang="hu-HU"/>
           </a:p>
@@ -4475,7 +4602,7 @@
           <a:p>
             <a:fld id="{B9C1AE7B-DA1F-453C-8148-553EEBF678EC}" type="datetimeFigureOut">
               <a:rPr lang="hu-HU" smtClean="0"/>
-              <a:t>2026. 03. 10.</a:t>
+              <a:t>2026. 03. 27.</a:t>
             </a:fld>
             <a:endParaRPr lang="hu-HU"/>
           </a:p>
@@ -5769,368 +5896,6 @@
       </p:sp>
       <p:grpSp>
         <p:nvGrpSpPr>
-          <p:cNvPr id="14" name="Csoportba foglalás 13">
-            <a:extLst>
-              <a:ext uri="{FF2B5EF4-FFF2-40B4-BE49-F238E27FC236}">
-                <a16:creationId xmlns:a16="http://schemas.microsoft.com/office/drawing/2014/main" id="{0E3A2CAD-CFD5-469A-A796-E42F81D13AC1}"/>
-              </a:ext>
-            </a:extLst>
-          </p:cNvPr>
-          <p:cNvGrpSpPr/>
-          <p:nvPr/>
-        </p:nvGrpSpPr>
-        <p:grpSpPr>
-          <a:xfrm>
-            <a:off x="9596464" y="2758398"/>
-            <a:ext cx="1927904" cy="3257809"/>
-            <a:chOff x="1194324" y="3161169"/>
-            <a:chExt cx="1927904" cy="3257809"/>
-          </a:xfrm>
-        </p:grpSpPr>
-        <p:sp>
-          <p:nvSpPr>
-            <p:cNvPr id="5" name="Alcím 2">
-              <a:extLst>
-                <a:ext uri="{FF2B5EF4-FFF2-40B4-BE49-F238E27FC236}">
-                  <a16:creationId xmlns:a16="http://schemas.microsoft.com/office/drawing/2014/main" id="{3E0FCC81-0923-43B1-9ACC-080EBD94427F}"/>
-                </a:ext>
-              </a:extLst>
-            </p:cNvPr>
-            <p:cNvSpPr txBox="1">
-              <a:spLocks/>
-            </p:cNvSpPr>
-            <p:nvPr/>
-          </p:nvSpPr>
-          <p:spPr>
-            <a:xfrm>
-              <a:off x="1194324" y="5869921"/>
-              <a:ext cx="1927904" cy="549057"/>
-            </a:xfrm>
-            <a:prstGeom prst="rect">
-              <a:avLst/>
-            </a:prstGeom>
-          </p:spPr>
-          <p:txBody>
-            <a:bodyPr vert="horz" lIns="91440" tIns="45720" rIns="91440" bIns="45720" rtlCol="0">
-              <a:normAutofit/>
-            </a:bodyPr>
-            <a:lstStyle>
-              <a:lvl1pPr marL="0" indent="0" algn="l" defTabSz="914400" rtl="0" eaLnBrk="1" latinLnBrk="0" hangingPunct="1">
-                <a:lnSpc>
-                  <a:spcPct val="90000"/>
-                </a:lnSpc>
-                <a:spcBef>
-                  <a:spcPts val="1200"/>
-                </a:spcBef>
-                <a:spcAft>
-                  <a:spcPts val="200"/>
-                </a:spcAft>
-                <a:buClr>
-                  <a:schemeClr val="accent1"/>
-                </a:buClr>
-                <a:buSzPct val="100000"/>
-                <a:buFont typeface="Calibri" panose="020F0502020204030204" pitchFamily="34" charset="0"/>
-                <a:buNone/>
-                <a:defRPr sz="2400" kern="1200" cap="all" spc="200" baseline="0">
-                  <a:solidFill>
-                    <a:schemeClr val="tx2"/>
-                  </a:solidFill>
-                  <a:latin typeface="+mj-lt"/>
-                  <a:ea typeface="+mn-ea"/>
-                  <a:cs typeface="+mn-cs"/>
-                </a:defRPr>
-              </a:lvl1pPr>
-              <a:lvl2pPr marL="457200" indent="0" algn="ctr" defTabSz="914400" rtl="0" eaLnBrk="1" latinLnBrk="0" hangingPunct="1">
-                <a:lnSpc>
-                  <a:spcPct val="90000"/>
-                </a:lnSpc>
-                <a:spcBef>
-                  <a:spcPts val="200"/>
-                </a:spcBef>
-                <a:spcAft>
-                  <a:spcPts val="400"/>
-                </a:spcAft>
-                <a:buClr>
-                  <a:schemeClr val="accent1"/>
-                </a:buClr>
-                <a:buFont typeface="Calibri" pitchFamily="34" charset="0"/>
-                <a:buNone/>
-                <a:defRPr sz="2400" kern="1200">
-                  <a:solidFill>
-                    <a:schemeClr val="tx1">
-                      <a:lumMod val="75000"/>
-                      <a:lumOff val="25000"/>
-                    </a:schemeClr>
-                  </a:solidFill>
-                  <a:latin typeface="+mn-lt"/>
-                  <a:ea typeface="+mn-ea"/>
-                  <a:cs typeface="+mn-cs"/>
-                </a:defRPr>
-              </a:lvl2pPr>
-              <a:lvl3pPr marL="914400" indent="0" algn="ctr" defTabSz="914400" rtl="0" eaLnBrk="1" latinLnBrk="0" hangingPunct="1">
-                <a:lnSpc>
-                  <a:spcPct val="90000"/>
-                </a:lnSpc>
-                <a:spcBef>
-                  <a:spcPts val="200"/>
-                </a:spcBef>
-                <a:spcAft>
-                  <a:spcPts val="400"/>
-                </a:spcAft>
-                <a:buClr>
-                  <a:schemeClr val="accent1"/>
-                </a:buClr>
-                <a:buFont typeface="Calibri" pitchFamily="34" charset="0"/>
-                <a:buNone/>
-                <a:defRPr sz="2400" kern="1200">
-                  <a:solidFill>
-                    <a:schemeClr val="tx1">
-                      <a:lumMod val="75000"/>
-                      <a:lumOff val="25000"/>
-                    </a:schemeClr>
-                  </a:solidFill>
-                  <a:latin typeface="+mn-lt"/>
-                  <a:ea typeface="+mn-ea"/>
-                  <a:cs typeface="+mn-cs"/>
-                </a:defRPr>
-              </a:lvl3pPr>
-              <a:lvl4pPr marL="1371600" indent="0" algn="ctr" defTabSz="914400" rtl="0" eaLnBrk="1" latinLnBrk="0" hangingPunct="1">
-                <a:lnSpc>
-                  <a:spcPct val="90000"/>
-                </a:lnSpc>
-                <a:spcBef>
-                  <a:spcPts val="200"/>
-                </a:spcBef>
-                <a:spcAft>
-                  <a:spcPts val="400"/>
-                </a:spcAft>
-                <a:buClr>
-                  <a:schemeClr val="accent1"/>
-                </a:buClr>
-                <a:buFont typeface="Calibri" pitchFamily="34" charset="0"/>
-                <a:buNone/>
-                <a:defRPr sz="2000" kern="1200">
-                  <a:solidFill>
-                    <a:schemeClr val="tx1">
-                      <a:lumMod val="75000"/>
-                      <a:lumOff val="25000"/>
-                    </a:schemeClr>
-                  </a:solidFill>
-                  <a:latin typeface="+mn-lt"/>
-                  <a:ea typeface="+mn-ea"/>
-                  <a:cs typeface="+mn-cs"/>
-                </a:defRPr>
-              </a:lvl4pPr>
-              <a:lvl5pPr marL="1828800" indent="0" algn="ctr" defTabSz="914400" rtl="0" eaLnBrk="1" latinLnBrk="0" hangingPunct="1">
-                <a:lnSpc>
-                  <a:spcPct val="90000"/>
-                </a:lnSpc>
-                <a:spcBef>
-                  <a:spcPts val="200"/>
-                </a:spcBef>
-                <a:spcAft>
-                  <a:spcPts val="400"/>
-                </a:spcAft>
-                <a:buClr>
-                  <a:schemeClr val="accent1"/>
-                </a:buClr>
-                <a:buFont typeface="Calibri" pitchFamily="34" charset="0"/>
-                <a:buNone/>
-                <a:defRPr sz="2000" kern="1200">
-                  <a:solidFill>
-                    <a:schemeClr val="tx1">
-                      <a:lumMod val="75000"/>
-                      <a:lumOff val="25000"/>
-                    </a:schemeClr>
-                  </a:solidFill>
-                  <a:latin typeface="+mn-lt"/>
-                  <a:ea typeface="+mn-ea"/>
-                  <a:cs typeface="+mn-cs"/>
-                </a:defRPr>
-              </a:lvl5pPr>
-              <a:lvl6pPr marL="2286000" indent="0" algn="ctr" defTabSz="914400" rtl="0" eaLnBrk="1" latinLnBrk="0" hangingPunct="1">
-                <a:lnSpc>
-                  <a:spcPct val="90000"/>
-                </a:lnSpc>
-                <a:spcBef>
-                  <a:spcPts val="200"/>
-                </a:spcBef>
-                <a:spcAft>
-                  <a:spcPts val="400"/>
-                </a:spcAft>
-                <a:buClr>
-                  <a:schemeClr val="accent1"/>
-                </a:buClr>
-                <a:buFont typeface="Calibri" pitchFamily="34" charset="0"/>
-                <a:buNone/>
-                <a:defRPr sz="2000" kern="1200">
-                  <a:solidFill>
-                    <a:schemeClr val="tx1">
-                      <a:lumMod val="75000"/>
-                      <a:lumOff val="25000"/>
-                    </a:schemeClr>
-                  </a:solidFill>
-                  <a:latin typeface="+mn-lt"/>
-                  <a:ea typeface="+mn-ea"/>
-                  <a:cs typeface="+mn-cs"/>
-                </a:defRPr>
-              </a:lvl6pPr>
-              <a:lvl7pPr marL="2743200" indent="0" algn="ctr" defTabSz="914400" rtl="0" eaLnBrk="1" latinLnBrk="0" hangingPunct="1">
-                <a:lnSpc>
-                  <a:spcPct val="90000"/>
-                </a:lnSpc>
-                <a:spcBef>
-                  <a:spcPts val="200"/>
-                </a:spcBef>
-                <a:spcAft>
-                  <a:spcPts val="400"/>
-                </a:spcAft>
-                <a:buClr>
-                  <a:schemeClr val="accent1"/>
-                </a:buClr>
-                <a:buFont typeface="Calibri" pitchFamily="34" charset="0"/>
-                <a:buNone/>
-                <a:defRPr sz="2000" kern="1200">
-                  <a:solidFill>
-                    <a:schemeClr val="tx1">
-                      <a:lumMod val="75000"/>
-                      <a:lumOff val="25000"/>
-                    </a:schemeClr>
-                  </a:solidFill>
-                  <a:latin typeface="+mn-lt"/>
-                  <a:ea typeface="+mn-ea"/>
-                  <a:cs typeface="+mn-cs"/>
-                </a:defRPr>
-              </a:lvl7pPr>
-              <a:lvl8pPr marL="3200400" indent="0" algn="ctr" defTabSz="914400" rtl="0" eaLnBrk="1" latinLnBrk="0" hangingPunct="1">
-                <a:lnSpc>
-                  <a:spcPct val="90000"/>
-                </a:lnSpc>
-                <a:spcBef>
-                  <a:spcPts val="200"/>
-                </a:spcBef>
-                <a:spcAft>
-                  <a:spcPts val="400"/>
-                </a:spcAft>
-                <a:buClr>
-                  <a:schemeClr val="accent1"/>
-                </a:buClr>
-                <a:buFont typeface="Calibri" pitchFamily="34" charset="0"/>
-                <a:buNone/>
-                <a:defRPr sz="2000" kern="1200">
-                  <a:solidFill>
-                    <a:schemeClr val="tx1">
-                      <a:lumMod val="75000"/>
-                      <a:lumOff val="25000"/>
-                    </a:schemeClr>
-                  </a:solidFill>
-                  <a:latin typeface="+mn-lt"/>
-                  <a:ea typeface="+mn-ea"/>
-                  <a:cs typeface="+mn-cs"/>
-                </a:defRPr>
-              </a:lvl8pPr>
-              <a:lvl9pPr marL="3657600" indent="0" algn="ctr" defTabSz="914400" rtl="0" eaLnBrk="1" latinLnBrk="0" hangingPunct="1">
-                <a:lnSpc>
-                  <a:spcPct val="90000"/>
-                </a:lnSpc>
-                <a:spcBef>
-                  <a:spcPts val="200"/>
-                </a:spcBef>
-                <a:spcAft>
-                  <a:spcPts val="400"/>
-                </a:spcAft>
-                <a:buClr>
-                  <a:schemeClr val="accent1"/>
-                </a:buClr>
-                <a:buFont typeface="Calibri" pitchFamily="34" charset="0"/>
-                <a:buNone/>
-                <a:defRPr sz="2000" kern="1200">
-                  <a:solidFill>
-                    <a:schemeClr val="tx1">
-                      <a:lumMod val="75000"/>
-                      <a:lumOff val="25000"/>
-                    </a:schemeClr>
-                  </a:solidFill>
-                  <a:latin typeface="+mn-lt"/>
-                  <a:ea typeface="+mn-ea"/>
-                  <a:cs typeface="+mn-cs"/>
-                </a:defRPr>
-              </a:lvl9pPr>
-            </a:lstStyle>
-            <a:p>
-              <a:pPr algn="ctr">
-                <a:lnSpc>
-                  <a:spcPct val="100000"/>
-                </a:lnSpc>
-              </a:pPr>
-              <a:r>
-                <a:rPr lang="hu-HU" sz="1800" cap="none" spc="0" dirty="0">
-                  <a:solidFill>
-                    <a:schemeClr val="tx1">
-                      <a:lumMod val="75000"/>
-                      <a:lumOff val="25000"/>
-                    </a:schemeClr>
-                  </a:solidFill>
-                  <a:latin typeface="Bahnschrift Light" panose="020B0502040204020203" pitchFamily="34" charset="0"/>
-                </a:rPr>
-                <a:t>Farkas Dominik</a:t>
-              </a:r>
-            </a:p>
-          </p:txBody>
-        </p:sp>
-        <p:pic>
-          <p:nvPicPr>
-            <p:cNvPr id="7" name="Kép 6">
-              <a:extLst>
-                <a:ext uri="{FF2B5EF4-FFF2-40B4-BE49-F238E27FC236}">
-                  <a16:creationId xmlns:a16="http://schemas.microsoft.com/office/drawing/2014/main" id="{FD86BC78-13C2-4565-B556-74296A073E43}"/>
-                </a:ext>
-              </a:extLst>
-            </p:cNvPr>
-            <p:cNvPicPr>
-              <a:picLocks noChangeAspect="1"/>
-            </p:cNvPicPr>
-            <p:nvPr/>
-          </p:nvPicPr>
-          <p:blipFill>
-            <a:blip r:embed="rId4">
-              <a:extLst>
-                <a:ext uri="{28A0092B-C50C-407E-A947-70E740481C1C}">
-                  <a14:useLocalDpi xmlns:a14="http://schemas.microsoft.com/office/drawing/2010/main" val="0"/>
-                </a:ext>
-              </a:extLst>
-            </a:blip>
-            <a:stretch>
-              <a:fillRect/>
-            </a:stretch>
-          </p:blipFill>
-          <p:spPr>
-            <a:xfrm>
-              <a:off x="1275395" y="3161169"/>
-              <a:ext cx="1765763" cy="2615573"/>
-            </a:xfrm>
-            <a:prstGeom prst="rect">
-              <a:avLst/>
-            </a:prstGeom>
-            <a:ln w="38100" cap="sq">
-              <a:solidFill>
-                <a:srgbClr val="E48312"/>
-              </a:solidFill>
-              <a:prstDash val="solid"/>
-              <a:miter lim="800000"/>
-            </a:ln>
-            <a:effectLst>
-              <a:outerShdw blurRad="50800" dist="38100" dir="2700000" algn="tl" rotWithShape="0">
-                <a:srgbClr val="000000">
-                  <a:alpha val="43000"/>
-                </a:srgbClr>
-              </a:outerShdw>
-            </a:effectLst>
-          </p:spPr>
-        </p:pic>
-      </p:grpSp>
-      <p:grpSp>
-        <p:nvGrpSpPr>
           <p:cNvPr id="15" name="Csoportba foglalás 14">
             <a:extLst>
               <a:ext uri="{FF2B5EF4-FFF2-40B4-BE49-F238E27FC236}">
@@ -6143,7 +5908,7 @@
         </p:nvGrpSpPr>
         <p:grpSpPr>
           <a:xfrm>
-            <a:off x="660587" y="2758398"/>
+            <a:off x="9596464" y="2758398"/>
             <a:ext cx="1765763" cy="3257809"/>
             <a:chOff x="2402332" y="2980638"/>
             <a:chExt cx="1765763" cy="3257809"/>
@@ -6164,7 +5929,7 @@
             <p:nvPr/>
           </p:nvPicPr>
           <p:blipFill>
-            <a:blip r:embed="rId5">
+            <a:blip r:embed="rId4">
               <a:extLst>
                 <a:ext uri="{28A0092B-C50C-407E-A947-70E740481C1C}">
                   <a14:useLocalDpi xmlns:a14="http://schemas.microsoft.com/office/drawing/2010/main" val="0"/>
@@ -6491,6 +6256,367 @@
           </p:txBody>
         </p:sp>
       </p:grpSp>
+      <p:grpSp>
+        <p:nvGrpSpPr>
+          <p:cNvPr id="16" name="Csoportba foglalás 15">
+            <a:extLst>
+              <a:ext uri="{FF2B5EF4-FFF2-40B4-BE49-F238E27FC236}">
+                <a16:creationId xmlns:a16="http://schemas.microsoft.com/office/drawing/2014/main" id="{B0DEBC2A-E922-4F8A-ACD9-577C5D4BF10D}"/>
+              </a:ext>
+            </a:extLst>
+          </p:cNvPr>
+          <p:cNvGrpSpPr/>
+          <p:nvPr/>
+        </p:nvGrpSpPr>
+        <p:grpSpPr>
+          <a:xfrm>
+            <a:off x="654211" y="2758397"/>
+            <a:ext cx="1927904" cy="3257810"/>
+            <a:chOff x="452879" y="2758397"/>
+            <a:chExt cx="1927904" cy="3257810"/>
+          </a:xfrm>
+        </p:grpSpPr>
+        <p:sp>
+          <p:nvSpPr>
+            <p:cNvPr id="5" name="Alcím 2">
+              <a:extLst>
+                <a:ext uri="{FF2B5EF4-FFF2-40B4-BE49-F238E27FC236}">
+                  <a16:creationId xmlns:a16="http://schemas.microsoft.com/office/drawing/2014/main" id="{3E0FCC81-0923-43B1-9ACC-080EBD94427F}"/>
+                </a:ext>
+              </a:extLst>
+            </p:cNvPr>
+            <p:cNvSpPr txBox="1">
+              <a:spLocks/>
+            </p:cNvSpPr>
+            <p:nvPr/>
+          </p:nvSpPr>
+          <p:spPr>
+            <a:xfrm>
+              <a:off x="452879" y="5467150"/>
+              <a:ext cx="1927904" cy="549057"/>
+            </a:xfrm>
+            <a:prstGeom prst="rect">
+              <a:avLst/>
+            </a:prstGeom>
+          </p:spPr>
+          <p:txBody>
+            <a:bodyPr vert="horz" lIns="91440" tIns="45720" rIns="91440" bIns="45720" rtlCol="0">
+              <a:normAutofit/>
+            </a:bodyPr>
+            <a:lstStyle>
+              <a:lvl1pPr marL="0" indent="0" algn="l" defTabSz="914400" rtl="0" eaLnBrk="1" latinLnBrk="0" hangingPunct="1">
+                <a:lnSpc>
+                  <a:spcPct val="90000"/>
+                </a:lnSpc>
+                <a:spcBef>
+                  <a:spcPts val="1200"/>
+                </a:spcBef>
+                <a:spcAft>
+                  <a:spcPts val="200"/>
+                </a:spcAft>
+                <a:buClr>
+                  <a:schemeClr val="accent1"/>
+                </a:buClr>
+                <a:buSzPct val="100000"/>
+                <a:buFont typeface="Calibri" panose="020F0502020204030204" pitchFamily="34" charset="0"/>
+                <a:buNone/>
+                <a:defRPr sz="2400" kern="1200" cap="all" spc="200" baseline="0">
+                  <a:solidFill>
+                    <a:schemeClr val="tx2"/>
+                  </a:solidFill>
+                  <a:latin typeface="+mj-lt"/>
+                  <a:ea typeface="+mn-ea"/>
+                  <a:cs typeface="+mn-cs"/>
+                </a:defRPr>
+              </a:lvl1pPr>
+              <a:lvl2pPr marL="457200" indent="0" algn="ctr" defTabSz="914400" rtl="0" eaLnBrk="1" latinLnBrk="0" hangingPunct="1">
+                <a:lnSpc>
+                  <a:spcPct val="90000"/>
+                </a:lnSpc>
+                <a:spcBef>
+                  <a:spcPts val="200"/>
+                </a:spcBef>
+                <a:spcAft>
+                  <a:spcPts val="400"/>
+                </a:spcAft>
+                <a:buClr>
+                  <a:schemeClr val="accent1"/>
+                </a:buClr>
+                <a:buFont typeface="Calibri" pitchFamily="34" charset="0"/>
+                <a:buNone/>
+                <a:defRPr sz="2400" kern="1200">
+                  <a:solidFill>
+                    <a:schemeClr val="tx1">
+                      <a:lumMod val="75000"/>
+                      <a:lumOff val="25000"/>
+                    </a:schemeClr>
+                  </a:solidFill>
+                  <a:latin typeface="+mn-lt"/>
+                  <a:ea typeface="+mn-ea"/>
+                  <a:cs typeface="+mn-cs"/>
+                </a:defRPr>
+              </a:lvl2pPr>
+              <a:lvl3pPr marL="914400" indent="0" algn="ctr" defTabSz="914400" rtl="0" eaLnBrk="1" latinLnBrk="0" hangingPunct="1">
+                <a:lnSpc>
+                  <a:spcPct val="90000"/>
+                </a:lnSpc>
+                <a:spcBef>
+                  <a:spcPts val="200"/>
+                </a:spcBef>
+                <a:spcAft>
+                  <a:spcPts val="400"/>
+                </a:spcAft>
+                <a:buClr>
+                  <a:schemeClr val="accent1"/>
+                </a:buClr>
+                <a:buFont typeface="Calibri" pitchFamily="34" charset="0"/>
+                <a:buNone/>
+                <a:defRPr sz="2400" kern="1200">
+                  <a:solidFill>
+                    <a:schemeClr val="tx1">
+                      <a:lumMod val="75000"/>
+                      <a:lumOff val="25000"/>
+                    </a:schemeClr>
+                  </a:solidFill>
+                  <a:latin typeface="+mn-lt"/>
+                  <a:ea typeface="+mn-ea"/>
+                  <a:cs typeface="+mn-cs"/>
+                </a:defRPr>
+              </a:lvl3pPr>
+              <a:lvl4pPr marL="1371600" indent="0" algn="ctr" defTabSz="914400" rtl="0" eaLnBrk="1" latinLnBrk="0" hangingPunct="1">
+                <a:lnSpc>
+                  <a:spcPct val="90000"/>
+                </a:lnSpc>
+                <a:spcBef>
+                  <a:spcPts val="200"/>
+                </a:spcBef>
+                <a:spcAft>
+                  <a:spcPts val="400"/>
+                </a:spcAft>
+                <a:buClr>
+                  <a:schemeClr val="accent1"/>
+                </a:buClr>
+                <a:buFont typeface="Calibri" pitchFamily="34" charset="0"/>
+                <a:buNone/>
+                <a:defRPr sz="2000" kern="1200">
+                  <a:solidFill>
+                    <a:schemeClr val="tx1">
+                      <a:lumMod val="75000"/>
+                      <a:lumOff val="25000"/>
+                    </a:schemeClr>
+                  </a:solidFill>
+                  <a:latin typeface="+mn-lt"/>
+                  <a:ea typeface="+mn-ea"/>
+                  <a:cs typeface="+mn-cs"/>
+                </a:defRPr>
+              </a:lvl4pPr>
+              <a:lvl5pPr marL="1828800" indent="0" algn="ctr" defTabSz="914400" rtl="0" eaLnBrk="1" latinLnBrk="0" hangingPunct="1">
+                <a:lnSpc>
+                  <a:spcPct val="90000"/>
+                </a:lnSpc>
+                <a:spcBef>
+                  <a:spcPts val="200"/>
+                </a:spcBef>
+                <a:spcAft>
+                  <a:spcPts val="400"/>
+                </a:spcAft>
+                <a:buClr>
+                  <a:schemeClr val="accent1"/>
+                </a:buClr>
+                <a:buFont typeface="Calibri" pitchFamily="34" charset="0"/>
+                <a:buNone/>
+                <a:defRPr sz="2000" kern="1200">
+                  <a:solidFill>
+                    <a:schemeClr val="tx1">
+                      <a:lumMod val="75000"/>
+                      <a:lumOff val="25000"/>
+                    </a:schemeClr>
+                  </a:solidFill>
+                  <a:latin typeface="+mn-lt"/>
+                  <a:ea typeface="+mn-ea"/>
+                  <a:cs typeface="+mn-cs"/>
+                </a:defRPr>
+              </a:lvl5pPr>
+              <a:lvl6pPr marL="2286000" indent="0" algn="ctr" defTabSz="914400" rtl="0" eaLnBrk="1" latinLnBrk="0" hangingPunct="1">
+                <a:lnSpc>
+                  <a:spcPct val="90000"/>
+                </a:lnSpc>
+                <a:spcBef>
+                  <a:spcPts val="200"/>
+                </a:spcBef>
+                <a:spcAft>
+                  <a:spcPts val="400"/>
+                </a:spcAft>
+                <a:buClr>
+                  <a:schemeClr val="accent1"/>
+                </a:buClr>
+                <a:buFont typeface="Calibri" pitchFamily="34" charset="0"/>
+                <a:buNone/>
+                <a:defRPr sz="2000" kern="1200">
+                  <a:solidFill>
+                    <a:schemeClr val="tx1">
+                      <a:lumMod val="75000"/>
+                      <a:lumOff val="25000"/>
+                    </a:schemeClr>
+                  </a:solidFill>
+                  <a:latin typeface="+mn-lt"/>
+                  <a:ea typeface="+mn-ea"/>
+                  <a:cs typeface="+mn-cs"/>
+                </a:defRPr>
+              </a:lvl6pPr>
+              <a:lvl7pPr marL="2743200" indent="0" algn="ctr" defTabSz="914400" rtl="0" eaLnBrk="1" latinLnBrk="0" hangingPunct="1">
+                <a:lnSpc>
+                  <a:spcPct val="90000"/>
+                </a:lnSpc>
+                <a:spcBef>
+                  <a:spcPts val="200"/>
+                </a:spcBef>
+                <a:spcAft>
+                  <a:spcPts val="400"/>
+                </a:spcAft>
+                <a:buClr>
+                  <a:schemeClr val="accent1"/>
+                </a:buClr>
+                <a:buFont typeface="Calibri" pitchFamily="34" charset="0"/>
+                <a:buNone/>
+                <a:defRPr sz="2000" kern="1200">
+                  <a:solidFill>
+                    <a:schemeClr val="tx1">
+                      <a:lumMod val="75000"/>
+                      <a:lumOff val="25000"/>
+                    </a:schemeClr>
+                  </a:solidFill>
+                  <a:latin typeface="+mn-lt"/>
+                  <a:ea typeface="+mn-ea"/>
+                  <a:cs typeface="+mn-cs"/>
+                </a:defRPr>
+              </a:lvl7pPr>
+              <a:lvl8pPr marL="3200400" indent="0" algn="ctr" defTabSz="914400" rtl="0" eaLnBrk="1" latinLnBrk="0" hangingPunct="1">
+                <a:lnSpc>
+                  <a:spcPct val="90000"/>
+                </a:lnSpc>
+                <a:spcBef>
+                  <a:spcPts val="200"/>
+                </a:spcBef>
+                <a:spcAft>
+                  <a:spcPts val="400"/>
+                </a:spcAft>
+                <a:buClr>
+                  <a:schemeClr val="accent1"/>
+                </a:buClr>
+                <a:buFont typeface="Calibri" pitchFamily="34" charset="0"/>
+                <a:buNone/>
+                <a:defRPr sz="2000" kern="1200">
+                  <a:solidFill>
+                    <a:schemeClr val="tx1">
+                      <a:lumMod val="75000"/>
+                      <a:lumOff val="25000"/>
+                    </a:schemeClr>
+                  </a:solidFill>
+                  <a:latin typeface="+mn-lt"/>
+                  <a:ea typeface="+mn-ea"/>
+                  <a:cs typeface="+mn-cs"/>
+                </a:defRPr>
+              </a:lvl8pPr>
+              <a:lvl9pPr marL="3657600" indent="0" algn="ctr" defTabSz="914400" rtl="0" eaLnBrk="1" latinLnBrk="0" hangingPunct="1">
+                <a:lnSpc>
+                  <a:spcPct val="90000"/>
+                </a:lnSpc>
+                <a:spcBef>
+                  <a:spcPts val="200"/>
+                </a:spcBef>
+                <a:spcAft>
+                  <a:spcPts val="400"/>
+                </a:spcAft>
+                <a:buClr>
+                  <a:schemeClr val="accent1"/>
+                </a:buClr>
+                <a:buFont typeface="Calibri" pitchFamily="34" charset="0"/>
+                <a:buNone/>
+                <a:defRPr sz="2000" kern="1200">
+                  <a:solidFill>
+                    <a:schemeClr val="tx1">
+                      <a:lumMod val="75000"/>
+                      <a:lumOff val="25000"/>
+                    </a:schemeClr>
+                  </a:solidFill>
+                  <a:latin typeface="+mn-lt"/>
+                  <a:ea typeface="+mn-ea"/>
+                  <a:cs typeface="+mn-cs"/>
+                </a:defRPr>
+              </a:lvl9pPr>
+            </a:lstStyle>
+            <a:p>
+              <a:pPr algn="ctr">
+                <a:lnSpc>
+                  <a:spcPct val="100000"/>
+                </a:lnSpc>
+              </a:pPr>
+              <a:r>
+                <a:rPr lang="hu-HU" sz="1800" cap="none" spc="0" dirty="0">
+                  <a:solidFill>
+                    <a:schemeClr val="tx1">
+                      <a:lumMod val="75000"/>
+                      <a:lumOff val="25000"/>
+                    </a:schemeClr>
+                  </a:solidFill>
+                  <a:latin typeface="Bahnschrift Light" panose="020B0502040204020203" pitchFamily="34" charset="0"/>
+                </a:rPr>
+                <a:t>Farkas Dominik</a:t>
+              </a:r>
+            </a:p>
+          </p:txBody>
+        </p:sp>
+        <p:pic>
+          <p:nvPicPr>
+            <p:cNvPr id="8" name="Kép 7">
+              <a:extLst>
+                <a:ext uri="{FF2B5EF4-FFF2-40B4-BE49-F238E27FC236}">
+                  <a16:creationId xmlns:a16="http://schemas.microsoft.com/office/drawing/2014/main" id="{880ED913-F103-4E93-AA63-76875300B264}"/>
+                </a:ext>
+              </a:extLst>
+            </p:cNvPr>
+            <p:cNvPicPr>
+              <a:picLocks noChangeAspect="1"/>
+            </p:cNvPicPr>
+            <p:nvPr/>
+          </p:nvPicPr>
+          <p:blipFill>
+            <a:blip r:embed="rId5">
+              <a:extLst>
+                <a:ext uri="{28A0092B-C50C-407E-A947-70E740481C1C}">
+                  <a14:useLocalDpi xmlns:a14="http://schemas.microsoft.com/office/drawing/2010/main" val="0"/>
+                </a:ext>
+              </a:extLst>
+            </a:blip>
+            <a:stretch>
+              <a:fillRect/>
+            </a:stretch>
+          </p:blipFill>
+          <p:spPr>
+            <a:xfrm>
+              <a:off x="533950" y="2758397"/>
+              <a:ext cx="1765763" cy="2615573"/>
+            </a:xfrm>
+            <a:prstGeom prst="rect">
+              <a:avLst/>
+            </a:prstGeom>
+            <a:ln w="38100" cap="sq">
+              <a:solidFill>
+                <a:srgbClr val="E48312"/>
+              </a:solidFill>
+              <a:miter lim="800000"/>
+            </a:ln>
+            <a:effectLst>
+              <a:outerShdw blurRad="57150" dist="50800" dir="2700000" algn="tl" rotWithShape="0">
+                <a:srgbClr val="000000">
+                  <a:alpha val="40000"/>
+                </a:srgbClr>
+              </a:outerShdw>
+            </a:effectLst>
+          </p:spPr>
+        </p:pic>
+      </p:grpSp>
     </p:spTree>
     <p:extLst>
       <p:ext uri="{BB962C8B-B14F-4D97-AF65-F5344CB8AC3E}">
@@ -6734,20 +6860,22 @@
           <a:prstGeom prst="rect">
             <a:avLst/>
           </a:prstGeom>
-          <a:ln w="76200" cap="sq">
-            <a:solidFill>
-              <a:srgbClr val="E48312"/>
-            </a:solidFill>
-            <a:miter lim="800000"/>
-          </a:ln>
-          <a:effectLst>
-            <a:outerShdw blurRad="57150" dist="50800" dir="2700000" algn="tl" rotWithShape="0">
-              <a:srgbClr val="000000">
-                <a:alpha val="40000"/>
-              </a:srgbClr>
-            </a:outerShdw>
-          </a:effectLst>
+          <a:ln/>
         </p:spPr>
+        <p:style>
+          <a:lnRef idx="2">
+            <a:schemeClr val="accent1"/>
+          </a:lnRef>
+          <a:fillRef idx="1">
+            <a:schemeClr val="lt1"/>
+          </a:fillRef>
+          <a:effectRef idx="0">
+            <a:schemeClr val="accent1"/>
+          </a:effectRef>
+          <a:fontRef idx="minor">
+            <a:schemeClr val="dk1"/>
+          </a:fontRef>
+        </p:style>
       </p:pic>
       <p:pic>
         <p:nvPicPr>
@@ -6776,20 +6904,22 @@
           <a:prstGeom prst="rect">
             <a:avLst/>
           </a:prstGeom>
-          <a:ln w="76200" cap="sq">
-            <a:solidFill>
-              <a:srgbClr val="E48312"/>
-            </a:solidFill>
-            <a:miter lim="800000"/>
-          </a:ln>
-          <a:effectLst>
-            <a:outerShdw blurRad="57150" dist="50800" dir="2700000" algn="tl" rotWithShape="0">
-              <a:srgbClr val="000000">
-                <a:alpha val="40000"/>
-              </a:srgbClr>
-            </a:outerShdw>
-          </a:effectLst>
+          <a:ln/>
         </p:spPr>
+        <p:style>
+          <a:lnRef idx="2">
+            <a:schemeClr val="accent1"/>
+          </a:lnRef>
+          <a:fillRef idx="1">
+            <a:schemeClr val="lt1"/>
+          </a:fillRef>
+          <a:effectRef idx="0">
+            <a:schemeClr val="accent1"/>
+          </a:effectRef>
+          <a:fontRef idx="minor">
+            <a:schemeClr val="dk1"/>
+          </a:fontRef>
+        </p:style>
       </p:pic>
     </p:spTree>
     <p:extLst>
@@ -7348,20 +7478,22 @@
           <a:prstGeom prst="rect">
             <a:avLst/>
           </a:prstGeom>
-          <a:ln w="76200" cap="sq">
-            <a:solidFill>
-              <a:srgbClr val="E48312"/>
-            </a:solidFill>
-            <a:miter lim="800000"/>
-          </a:ln>
-          <a:effectLst>
-            <a:outerShdw blurRad="57150" dist="50800" dir="2700000" algn="tl" rotWithShape="0">
-              <a:srgbClr val="000000">
-                <a:alpha val="40000"/>
-              </a:srgbClr>
-            </a:outerShdw>
-          </a:effectLst>
+          <a:ln/>
         </p:spPr>
+        <p:style>
+          <a:lnRef idx="2">
+            <a:schemeClr val="accent1"/>
+          </a:lnRef>
+          <a:fillRef idx="1">
+            <a:schemeClr val="lt1"/>
+          </a:fillRef>
+          <a:effectRef idx="0">
+            <a:schemeClr val="accent1"/>
+          </a:effectRef>
+          <a:fontRef idx="minor">
+            <a:schemeClr val="dk1"/>
+          </a:fontRef>
+        </p:style>
       </p:pic>
       <p:pic>
         <p:nvPicPr>
@@ -7390,20 +7522,22 @@
           <a:prstGeom prst="rect">
             <a:avLst/>
           </a:prstGeom>
-          <a:ln w="76200" cap="sq">
-            <a:solidFill>
-              <a:srgbClr val="E48312"/>
-            </a:solidFill>
-            <a:miter lim="800000"/>
-          </a:ln>
-          <a:effectLst>
-            <a:outerShdw blurRad="57150" dist="50800" dir="2700000" algn="tl" rotWithShape="0">
-              <a:srgbClr val="000000">
-                <a:alpha val="40000"/>
-              </a:srgbClr>
-            </a:outerShdw>
-          </a:effectLst>
+          <a:ln/>
         </p:spPr>
+        <p:style>
+          <a:lnRef idx="2">
+            <a:schemeClr val="accent1"/>
+          </a:lnRef>
+          <a:fillRef idx="1">
+            <a:schemeClr val="lt1"/>
+          </a:fillRef>
+          <a:effectRef idx="0">
+            <a:schemeClr val="accent1"/>
+          </a:effectRef>
+          <a:fontRef idx="minor">
+            <a:schemeClr val="dk1"/>
+          </a:fontRef>
+        </p:style>
       </p:pic>
     </p:spTree>
     <p:extLst>
@@ -7507,7 +7641,7 @@
           <p:nvPr/>
         </p:nvPicPr>
         <p:blipFill rotWithShape="1">
-          <a:blip r:embed="rId2">
+          <a:blip r:embed="rId3">
             <a:alphaModFix amt="50000"/>
             <a:extLst>
               <a:ext uri="{28A0092B-C50C-407E-A947-70E740481C1C}">
@@ -7543,7 +7677,7 @@
           <p:nvPr/>
         </p:nvPicPr>
         <p:blipFill rotWithShape="1">
-          <a:blip r:embed="rId2">
+          <a:blip r:embed="rId3">
             <a:alphaModFix amt="50000"/>
             <a:extLst>
               <a:ext uri="{28A0092B-C50C-407E-A947-70E740481C1C}">
@@ -7919,7 +8053,7 @@
               <a:rPr lang="hu-HU" sz="2000" dirty="0">
                 <a:latin typeface="Bahnschrift Light" panose="020B0502040204020203" pitchFamily="34" charset="0"/>
               </a:rPr>
-              <a:t>Értesítés küldés?</a:t>
+              <a:t>Több iskolára, több szolgáltatóra bontás</a:t>
             </a:r>
           </a:p>
           <a:p>
@@ -7934,7 +8068,7 @@
               <a:rPr lang="hu-HU" sz="2000" dirty="0">
                 <a:latin typeface="Bahnschrift Light" panose="020B0502040204020203" pitchFamily="34" charset="0"/>
               </a:rPr>
-              <a:t>Több iskolára, több szolgáltatóra bontás</a:t>
+              <a:t>Ételek értékelése</a:t>
             </a:r>
           </a:p>
           <a:p>
@@ -7949,7 +8083,7 @@
               <a:rPr lang="hu-HU" sz="2000" dirty="0">
                 <a:latin typeface="Bahnschrift Light" panose="020B0502040204020203" pitchFamily="34" charset="0"/>
               </a:rPr>
-              <a:t>Ételek értékelése</a:t>
+              <a:t>Étkeztetési rend osztályokra, csoportokra bontva</a:t>
             </a:r>
           </a:p>
           <a:p>
@@ -7964,41 +8098,8 @@
               <a:rPr lang="hu-HU" sz="2000" dirty="0">
                 <a:latin typeface="Bahnschrift Light" panose="020B0502040204020203" pitchFamily="34" charset="0"/>
               </a:rPr>
-              <a:t>Étkeztetési rend osztályokra, csoportokra bontva</a:t>
-            </a:r>
-          </a:p>
-          <a:p>
-            <a:pPr lvl="1">
-              <a:lnSpc>
-                <a:spcPct val="150000"/>
-              </a:lnSpc>
-              <a:buFont typeface="Arial" panose="020B0604020202020204" pitchFamily="34" charset="0"/>
-              <a:buChar char="•"/>
-            </a:pPr>
-            <a:r>
-              <a:rPr lang="hu-HU" sz="2000" dirty="0">
-                <a:latin typeface="Bahnschrift Light" panose="020B0502040204020203" pitchFamily="34" charset="0"/>
-              </a:rPr>
-              <a:t>Online fizetés (</a:t>
-            </a:r>
-            <a:r>
-              <a:rPr lang="hu-HU" sz="2000" dirty="0" err="1">
-                <a:latin typeface="Bahnschrift Light" panose="020B0502040204020203" pitchFamily="34" charset="0"/>
-              </a:rPr>
-              <a:t>SimplePay</a:t>
-            </a:r>
-            <a:r>
-              <a:rPr lang="hu-HU" sz="2000" dirty="0">
-                <a:latin typeface="Bahnschrift Light" panose="020B0502040204020203" pitchFamily="34" charset="0"/>
-              </a:rPr>
-              <a:t>)</a:t>
-            </a:r>
-          </a:p>
-          <a:p>
-            <a:pPr marL="201168" lvl="1" indent="0">
-              <a:buFont typeface="Calibri" pitchFamily="34" charset="0"/>
-              <a:buNone/>
-            </a:pPr>
+              <a:t>Online fizetés</a:t>
+            </a:r>
             <a:endParaRPr lang="hu-HU" dirty="0"/>
           </a:p>
         </p:txBody>
@@ -9567,13 +9668,13 @@
   <p:clrMapOvr>
     <a:masterClrMapping/>
   </p:clrMapOvr>
-  <mc:AlternateContent xmlns:mc="http://schemas.openxmlformats.org/markup-compatibility/2006">
-    <mc:Choice xmlns:p159="http://schemas.microsoft.com/office/powerpoint/2015/09/main" Requires="p159">
+  <mc:AlternateContent xmlns:mc="http://schemas.openxmlformats.org/markup-compatibility/2006" xmlns:p159="http://schemas.microsoft.com/office/powerpoint/2015/09/main">
+    <mc:Choice Requires="p159">
       <p:transition xmlns:p14="http://schemas.microsoft.com/office/powerpoint/2010/main" spd="slow" p14:dur="2000">
         <p159:morph option="byObject"/>
       </p:transition>
     </mc:Choice>
-    <mc:Fallback>
+    <mc:Fallback xmlns="">
       <p:transition spd="slow">
         <p:fade/>
       </p:transition>
@@ -11838,7 +11939,7 @@
               <a:rPr lang="hu-HU" sz="2000" dirty="0">
                 <a:latin typeface="Bahnschrift Light" panose="020B0502040204020203" pitchFamily="34" charset="0"/>
               </a:rPr>
-              <a:t> Nincs menü választási lehetőség</a:t>
+              <a:t> Nincs menü választási lehetőség előzetesen</a:t>
             </a:r>
           </a:p>
           <a:p>
@@ -11889,7 +11990,7 @@
               <a:rPr lang="hu-HU" sz="2000" dirty="0">
                 <a:latin typeface="Bahnschrift Light" panose="020B0502040204020203" pitchFamily="34" charset="0"/>
               </a:rPr>
-              <a:t> Előre kiválasztott opció</a:t>
+              <a:t> Előre kiválasztott menü</a:t>
             </a:r>
           </a:p>
           <a:p>
@@ -12513,6 +12614,342 @@
           </p:spPr>
         </p:pic>
       </p:grpSp>
+      <p:pic>
+        <p:nvPicPr>
+          <p:cNvPr id="1026" name="Picture 2" descr="Vue.js Development Services Company India | Hire Vue.js Developers">
+            <a:extLst>
+              <a:ext uri="{FF2B5EF4-FFF2-40B4-BE49-F238E27FC236}">
+                <a16:creationId xmlns:a16="http://schemas.microsoft.com/office/drawing/2014/main" id="{3E23C230-9766-429F-8A50-4660232F1795}"/>
+              </a:ext>
+            </a:extLst>
+          </p:cNvPr>
+          <p:cNvPicPr>
+            <a:picLocks noChangeAspect="1" noChangeArrowheads="1"/>
+          </p:cNvPicPr>
+          <p:nvPr/>
+        </p:nvPicPr>
+        <p:blipFill>
+          <a:blip r:embed="rId3">
+            <a:extLst>
+              <a:ext uri="{28A0092B-C50C-407E-A947-70E740481C1C}">
+                <a14:useLocalDpi xmlns:a14="http://schemas.microsoft.com/office/drawing/2010/main" val="0"/>
+              </a:ext>
+            </a:extLst>
+          </a:blip>
+          <a:srcRect/>
+          <a:stretch>
+            <a:fillRect/>
+          </a:stretch>
+        </p:blipFill>
+        <p:spPr bwMode="auto">
+          <a:xfrm>
+            <a:off x="9211100" y="2184425"/>
+            <a:ext cx="1652756" cy="1343192"/>
+          </a:xfrm>
+          <a:prstGeom prst="rect">
+            <a:avLst/>
+          </a:prstGeom>
+          <a:solidFill>
+            <a:srgbClr val="FFFFFF">
+              <a:shade val="85000"/>
+            </a:srgbClr>
+          </a:solidFill>
+          <a:ln w="88900" cap="sq">
+            <a:solidFill>
+              <a:srgbClr val="FFFFFF"/>
+            </a:solidFill>
+            <a:miter lim="800000"/>
+          </a:ln>
+          <a:effectLst>
+            <a:outerShdw blurRad="55000" dist="18000" dir="5400000" algn="tl" rotWithShape="0">
+              <a:srgbClr val="000000">
+                <a:alpha val="40000"/>
+              </a:srgbClr>
+            </a:outerShdw>
+          </a:effectLst>
+          <a:scene3d>
+            <a:camera prst="orthographicFront"/>
+            <a:lightRig rig="twoPt" dir="t">
+              <a:rot lat="0" lon="0" rev="7200000"/>
+            </a:lightRig>
+          </a:scene3d>
+          <a:sp3d>
+            <a:bevelT w="25400" h="19050"/>
+            <a:contourClr>
+              <a:srgbClr val="FFFFFF"/>
+            </a:contourClr>
+          </a:sp3d>
+          <a:extLst>
+            <a:ext uri="{909E8E84-426E-40DD-AFC4-6F175D3DCCD1}">
+              <a14:hiddenFill xmlns:a14="http://schemas.microsoft.com/office/drawing/2010/main">
+                <a:solidFill>
+                  <a:srgbClr val="FFFFFF"/>
+                </a:solidFill>
+              </a14:hiddenFill>
+            </a:ext>
+          </a:extLst>
+        </p:spPr>
+      </p:pic>
+      <p:sp>
+        <p:nvSpPr>
+          <p:cNvPr id="2" name="AutoShape 4" descr="Getting Started with Laravel: Your First Application - DEV Community">
+            <a:extLst>
+              <a:ext uri="{FF2B5EF4-FFF2-40B4-BE49-F238E27FC236}">
+                <a16:creationId xmlns:a16="http://schemas.microsoft.com/office/drawing/2014/main" id="{D45CB231-1DAE-4C06-AE96-88453F448162}"/>
+              </a:ext>
+            </a:extLst>
+          </p:cNvPr>
+          <p:cNvSpPr>
+            <a:spLocks noChangeAspect="1" noChangeArrowheads="1"/>
+          </p:cNvSpPr>
+          <p:nvPr/>
+        </p:nvSpPr>
+        <p:spPr bwMode="auto">
+          <a:xfrm>
+            <a:off x="5943600" y="3276600"/>
+            <a:ext cx="304800" cy="304800"/>
+          </a:xfrm>
+          <a:prstGeom prst="rect">
+            <a:avLst/>
+          </a:prstGeom>
+          <a:noFill/>
+          <a:extLst>
+            <a:ext uri="{909E8E84-426E-40DD-AFC4-6F175D3DCCD1}">
+              <a14:hiddenFill xmlns:a14="http://schemas.microsoft.com/office/drawing/2010/main">
+                <a:solidFill>
+                  <a:srgbClr val="FFFFFF"/>
+                </a:solidFill>
+              </a14:hiddenFill>
+            </a:ext>
+          </a:extLst>
+        </p:spPr>
+        <p:txBody>
+          <a:bodyPr vert="horz" wrap="square" lIns="91440" tIns="45720" rIns="91440" bIns="45720" numCol="1" anchor="t" anchorCtr="0" compatLnSpc="1">
+            <a:prstTxWarp prst="textNoShape">
+              <a:avLst/>
+            </a:prstTxWarp>
+          </a:bodyPr>
+          <a:lstStyle/>
+          <a:p>
+            <a:endParaRPr lang="hu-HU"/>
+          </a:p>
+        </p:txBody>
+      </p:sp>
+      <p:sp>
+        <p:nvSpPr>
+          <p:cNvPr id="5" name="AutoShape 6" descr="Getting Started with Laravel: Your First Application - DEV Community">
+            <a:extLst>
+              <a:ext uri="{FF2B5EF4-FFF2-40B4-BE49-F238E27FC236}">
+                <a16:creationId xmlns:a16="http://schemas.microsoft.com/office/drawing/2014/main" id="{07652F2B-91E0-4250-8E81-FE2815562D22}"/>
+              </a:ext>
+            </a:extLst>
+          </p:cNvPr>
+          <p:cNvSpPr>
+            <a:spLocks noChangeAspect="1" noChangeArrowheads="1"/>
+          </p:cNvSpPr>
+          <p:nvPr/>
+        </p:nvSpPr>
+        <p:spPr bwMode="auto">
+          <a:xfrm>
+            <a:off x="6096000" y="3429000"/>
+            <a:ext cx="304800" cy="304800"/>
+          </a:xfrm>
+          <a:prstGeom prst="rect">
+            <a:avLst/>
+          </a:prstGeom>
+          <a:noFill/>
+          <a:extLst>
+            <a:ext uri="{909E8E84-426E-40DD-AFC4-6F175D3DCCD1}">
+              <a14:hiddenFill xmlns:a14="http://schemas.microsoft.com/office/drawing/2010/main">
+                <a:solidFill>
+                  <a:srgbClr val="FFFFFF"/>
+                </a:solidFill>
+              </a14:hiddenFill>
+            </a:ext>
+          </a:extLst>
+        </p:spPr>
+        <p:txBody>
+          <a:bodyPr vert="horz" wrap="square" lIns="91440" tIns="45720" rIns="91440" bIns="45720" numCol="1" anchor="t" anchorCtr="0" compatLnSpc="1">
+            <a:prstTxWarp prst="textNoShape">
+              <a:avLst/>
+            </a:prstTxWarp>
+          </a:bodyPr>
+          <a:lstStyle/>
+          <a:p>
+            <a:endParaRPr lang="hu-HU"/>
+          </a:p>
+        </p:txBody>
+      </p:sp>
+      <p:sp>
+        <p:nvSpPr>
+          <p:cNvPr id="6" name="AutoShape 8" descr="Getting Started with Laravel: Your First Application - DEV Community">
+            <a:extLst>
+              <a:ext uri="{FF2B5EF4-FFF2-40B4-BE49-F238E27FC236}">
+                <a16:creationId xmlns:a16="http://schemas.microsoft.com/office/drawing/2014/main" id="{5268C84A-9061-472C-ABBB-3193244F57FE}"/>
+              </a:ext>
+            </a:extLst>
+          </p:cNvPr>
+          <p:cNvSpPr>
+            <a:spLocks noChangeAspect="1" noChangeArrowheads="1"/>
+          </p:cNvSpPr>
+          <p:nvPr/>
+        </p:nvSpPr>
+        <p:spPr bwMode="auto">
+          <a:xfrm>
+            <a:off x="6248400" y="3581400"/>
+            <a:ext cx="304800" cy="304800"/>
+          </a:xfrm>
+          <a:prstGeom prst="rect">
+            <a:avLst/>
+          </a:prstGeom>
+          <a:noFill/>
+          <a:extLst>
+            <a:ext uri="{909E8E84-426E-40DD-AFC4-6F175D3DCCD1}">
+              <a14:hiddenFill xmlns:a14="http://schemas.microsoft.com/office/drawing/2010/main">
+                <a:solidFill>
+                  <a:srgbClr val="FFFFFF"/>
+                </a:solidFill>
+              </a14:hiddenFill>
+            </a:ext>
+          </a:extLst>
+        </p:spPr>
+        <p:txBody>
+          <a:bodyPr vert="horz" wrap="square" lIns="91440" tIns="45720" rIns="91440" bIns="45720" numCol="1" anchor="t" anchorCtr="0" compatLnSpc="1">
+            <a:prstTxWarp prst="textNoShape">
+              <a:avLst/>
+            </a:prstTxWarp>
+          </a:bodyPr>
+          <a:lstStyle/>
+          <a:p>
+            <a:endParaRPr lang="hu-HU"/>
+          </a:p>
+        </p:txBody>
+      </p:sp>
+      <p:pic>
+        <p:nvPicPr>
+          <p:cNvPr id="7" name="Kép 6">
+            <a:extLst>
+              <a:ext uri="{FF2B5EF4-FFF2-40B4-BE49-F238E27FC236}">
+                <a16:creationId xmlns:a16="http://schemas.microsoft.com/office/drawing/2014/main" id="{EC1C3B26-5DD4-43D9-869C-B4C8E5FB16EB}"/>
+              </a:ext>
+            </a:extLst>
+          </p:cNvPr>
+          <p:cNvPicPr>
+            <a:picLocks noChangeAspect="1"/>
+          </p:cNvPicPr>
+          <p:nvPr/>
+        </p:nvPicPr>
+        <p:blipFill>
+          <a:blip r:embed="rId4"/>
+          <a:stretch>
+            <a:fillRect/>
+          </a:stretch>
+        </p:blipFill>
+        <p:spPr>
+          <a:xfrm>
+            <a:off x="5087452" y="2130643"/>
+            <a:ext cx="3454183" cy="1450757"/>
+          </a:xfrm>
+          <a:prstGeom prst="rect">
+            <a:avLst/>
+          </a:prstGeom>
+          <a:solidFill>
+            <a:srgbClr val="FFFFFF">
+              <a:shade val="85000"/>
+            </a:srgbClr>
+          </a:solidFill>
+          <a:ln w="88900" cap="sq">
+            <a:solidFill>
+              <a:srgbClr val="D83939"/>
+            </a:solidFill>
+            <a:miter lim="800000"/>
+          </a:ln>
+          <a:effectLst>
+            <a:outerShdw blurRad="55000" dist="18000" dir="5400000" algn="tl" rotWithShape="0">
+              <a:srgbClr val="000000">
+                <a:alpha val="40000"/>
+              </a:srgbClr>
+            </a:outerShdw>
+          </a:effectLst>
+          <a:scene3d>
+            <a:camera prst="orthographicFront"/>
+            <a:lightRig rig="twoPt" dir="t">
+              <a:rot lat="0" lon="0" rev="7200000"/>
+            </a:lightRig>
+          </a:scene3d>
+          <a:sp3d>
+            <a:bevelT w="25400" h="19050"/>
+            <a:contourClr>
+              <a:srgbClr val="FFFFFF"/>
+            </a:contourClr>
+          </a:sp3d>
+        </p:spPr>
+      </p:pic>
+      <p:pic>
+        <p:nvPicPr>
+          <p:cNvPr id="1034" name="Picture 10" descr="MySQL Database Consulting, Deployment &amp; Managed Support Services in US &amp;  India">
+            <a:extLst>
+              <a:ext uri="{FF2B5EF4-FFF2-40B4-BE49-F238E27FC236}">
+                <a16:creationId xmlns:a16="http://schemas.microsoft.com/office/drawing/2014/main" id="{2F767706-BF12-4514-A4B2-8A9D0C2C4562}"/>
+              </a:ext>
+            </a:extLst>
+          </p:cNvPr>
+          <p:cNvPicPr>
+            <a:picLocks noChangeAspect="1" noChangeArrowheads="1"/>
+          </p:cNvPicPr>
+          <p:nvPr/>
+        </p:nvPicPr>
+        <p:blipFill rotWithShape="1">
+          <a:blip r:embed="rId5">
+            <a:extLst>
+              <a:ext uri="{28A0092B-C50C-407E-A947-70E740481C1C}">
+                <a14:useLocalDpi xmlns:a14="http://schemas.microsoft.com/office/drawing/2010/main" val="0"/>
+              </a:ext>
+            </a:extLst>
+          </a:blip>
+          <a:srcRect t="22223" b="22638"/>
+          <a:stretch/>
+        </p:blipFill>
+        <p:spPr bwMode="auto">
+          <a:xfrm>
+            <a:off x="6719681" y="3977001"/>
+            <a:ext cx="3643907" cy="2009210"/>
+          </a:xfrm>
+          <a:prstGeom prst="rect">
+            <a:avLst/>
+          </a:prstGeom>
+          <a:solidFill>
+            <a:srgbClr val="FFFFFF">
+              <a:shade val="85000"/>
+            </a:srgbClr>
+          </a:solidFill>
+          <a:ln w="88900" cap="sq">
+            <a:solidFill>
+              <a:srgbClr val="EFEFEF"/>
+            </a:solidFill>
+            <a:miter lim="800000"/>
+          </a:ln>
+          <a:effectLst>
+            <a:outerShdw blurRad="55000" dist="18000" dir="5400000" algn="tl" rotWithShape="0">
+              <a:srgbClr val="000000">
+                <a:alpha val="40000"/>
+              </a:srgbClr>
+            </a:outerShdw>
+          </a:effectLst>
+          <a:scene3d>
+            <a:camera prst="orthographicFront"/>
+            <a:lightRig rig="twoPt" dir="t">
+              <a:rot lat="0" lon="0" rev="7200000"/>
+            </a:lightRig>
+          </a:scene3d>
+          <a:sp3d>
+            <a:bevelT w="25400" h="19050"/>
+            <a:contourClr>
+              <a:srgbClr val="FFFFFF"/>
+            </a:contourClr>
+          </a:sp3d>
+        </p:spPr>
+      </p:pic>
     </p:spTree>
     <p:extLst>
       <p:ext uri="{BB962C8B-B14F-4D97-AF65-F5344CB8AC3E}">
@@ -13266,20 +13703,22 @@
           <a:prstGeom prst="rect">
             <a:avLst/>
           </a:prstGeom>
-          <a:ln w="76200" cap="sq">
-            <a:solidFill>
-              <a:srgbClr val="E48312"/>
-            </a:solidFill>
-            <a:miter lim="800000"/>
-          </a:ln>
-          <a:effectLst>
-            <a:outerShdw blurRad="57150" dist="50800" dir="2700000" algn="tl" rotWithShape="0">
-              <a:srgbClr val="000000">
-                <a:alpha val="40000"/>
-              </a:srgbClr>
-            </a:outerShdw>
-          </a:effectLst>
+          <a:ln/>
         </p:spPr>
+        <p:style>
+          <a:lnRef idx="2">
+            <a:schemeClr val="accent1"/>
+          </a:lnRef>
+          <a:fillRef idx="1">
+            <a:schemeClr val="lt1"/>
+          </a:fillRef>
+          <a:effectRef idx="0">
+            <a:schemeClr val="accent1"/>
+          </a:effectRef>
+          <a:fontRef idx="minor">
+            <a:schemeClr val="dk1"/>
+          </a:fontRef>
+        </p:style>
       </p:pic>
       <p:pic>
         <p:nvPicPr>
@@ -13314,20 +13753,22 @@
           <a:prstGeom prst="rect">
             <a:avLst/>
           </a:prstGeom>
-          <a:ln w="76200" cap="sq">
-            <a:solidFill>
-              <a:srgbClr val="E48312"/>
-            </a:solidFill>
-            <a:miter lim="800000"/>
-          </a:ln>
-          <a:effectLst>
-            <a:outerShdw blurRad="57150" dist="50800" dir="2700000" algn="tl" rotWithShape="0">
-              <a:srgbClr val="000000">
-                <a:alpha val="40000"/>
-              </a:srgbClr>
-            </a:outerShdw>
-          </a:effectLst>
+          <a:ln/>
         </p:spPr>
+        <p:style>
+          <a:lnRef idx="2">
+            <a:schemeClr val="accent1"/>
+          </a:lnRef>
+          <a:fillRef idx="1">
+            <a:schemeClr val="lt1"/>
+          </a:fillRef>
+          <a:effectRef idx="0">
+            <a:schemeClr val="accent1"/>
+          </a:effectRef>
+          <a:fontRef idx="minor">
+            <a:schemeClr val="dk1"/>
+          </a:fontRef>
+        </p:style>
       </p:pic>
     </p:spTree>
     <p:extLst>
@@ -13521,73 +13962,33 @@
         </p:nvPicPr>
         <p:blipFill rotWithShape="1">
           <a:blip r:embed="rId3"/>
-          <a:srcRect l="5377" t="5911" r="45001" b="3142"/>
+          <a:srcRect l="5377" t="5910" r="45001" b="7755"/>
           <a:stretch/>
         </p:blipFill>
         <p:spPr>
           <a:xfrm>
-            <a:off x="5138832" y="1081087"/>
-            <a:ext cx="2552700" cy="4695825"/>
+            <a:off x="5138832" y="1081088"/>
+            <a:ext cx="2552700" cy="4457700"/>
           </a:xfrm>
           <a:prstGeom prst="rect">
             <a:avLst/>
           </a:prstGeom>
-          <a:ln w="76200" cap="sq">
-            <a:solidFill>
-              <a:srgbClr val="E48312"/>
-            </a:solidFill>
-            <a:miter lim="800000"/>
-          </a:ln>
-          <a:effectLst>
-            <a:outerShdw blurRad="57150" dist="50800" dir="2700000" algn="tl" rotWithShape="0">
-              <a:srgbClr val="000000">
-                <a:alpha val="40000"/>
-              </a:srgbClr>
-            </a:outerShdw>
-          </a:effectLst>
+          <a:ln/>
         </p:spPr>
-      </p:pic>
-      <p:pic>
-        <p:nvPicPr>
-          <p:cNvPr id="7" name="Kép 6">
-            <a:extLst>
-              <a:ext uri="{FF2B5EF4-FFF2-40B4-BE49-F238E27FC236}">
-                <a16:creationId xmlns:a16="http://schemas.microsoft.com/office/drawing/2014/main" id="{A710C213-02AB-4860-89DB-F1799A2881B1}"/>
-              </a:ext>
-            </a:extLst>
-          </p:cNvPr>
-          <p:cNvPicPr>
-            <a:picLocks noChangeAspect="1"/>
-          </p:cNvPicPr>
-          <p:nvPr/>
-        </p:nvPicPr>
-        <p:blipFill rotWithShape="1">
-          <a:blip r:embed="rId4"/>
-          <a:srcRect l="5647"/>
-          <a:stretch/>
-        </p:blipFill>
-        <p:spPr>
-          <a:xfrm>
-            <a:off x="8448864" y="2530640"/>
-            <a:ext cx="2552700" cy="2181529"/>
-          </a:xfrm>
-          <a:prstGeom prst="rect">
-            <a:avLst/>
-          </a:prstGeom>
-          <a:ln w="76200" cap="sq">
-            <a:solidFill>
-              <a:srgbClr val="E48312"/>
-            </a:solidFill>
-            <a:miter lim="800000"/>
-          </a:ln>
-          <a:effectLst>
-            <a:outerShdw blurRad="57150" dist="50800" dir="2700000" algn="tl" rotWithShape="0">
-              <a:srgbClr val="000000">
-                <a:alpha val="40000"/>
-              </a:srgbClr>
-            </a:outerShdw>
-          </a:effectLst>
-        </p:spPr>
+        <p:style>
+          <a:lnRef idx="2">
+            <a:schemeClr val="accent1"/>
+          </a:lnRef>
+          <a:fillRef idx="1">
+            <a:schemeClr val="lt1"/>
+          </a:fillRef>
+          <a:effectRef idx="0">
+            <a:schemeClr val="accent1"/>
+          </a:effectRef>
+          <a:fontRef idx="minor">
+            <a:schemeClr val="dk1"/>
+          </a:fontRef>
+        </p:style>
       </p:pic>
       <p:grpSp>
         <p:nvGrpSpPr>
@@ -13624,7 +14025,7 @@
             <p:nvPr/>
           </p:nvPicPr>
           <p:blipFill rotWithShape="1">
-            <a:blip r:embed="rId5">
+            <a:blip r:embed="rId4">
               <a:alphaModFix amt="50000"/>
               <a:extLst>
                 <a:ext uri="{28A0092B-C50C-407E-A947-70E740481C1C}">
@@ -13660,7 +14061,7 @@
             <p:nvPr/>
           </p:nvPicPr>
           <p:blipFill rotWithShape="1">
-            <a:blip r:embed="rId5">
+            <a:blip r:embed="rId4">
               <a:alphaModFix amt="50000"/>
               <a:extLst>
                 <a:ext uri="{28A0092B-C50C-407E-A947-70E740481C1C}">
@@ -13679,6 +14080,105 @@
             <a:prstGeom prst="rect">
               <a:avLst/>
             </a:prstGeom>
+          </p:spPr>
+        </p:pic>
+      </p:grpSp>
+      <p:grpSp>
+        <p:nvGrpSpPr>
+          <p:cNvPr id="4" name="Csoportba foglalás 3">
+            <a:extLst>
+              <a:ext uri="{FF2B5EF4-FFF2-40B4-BE49-F238E27FC236}">
+                <a16:creationId xmlns:a16="http://schemas.microsoft.com/office/drawing/2014/main" id="{E093BAF9-E1C7-48F2-A365-024A0F3785E2}"/>
+              </a:ext>
+            </a:extLst>
+          </p:cNvPr>
+          <p:cNvGrpSpPr/>
+          <p:nvPr/>
+        </p:nvGrpSpPr>
+        <p:grpSpPr>
+          <a:xfrm>
+            <a:off x="8448864" y="2530640"/>
+            <a:ext cx="2552700" cy="2181529"/>
+            <a:chOff x="8448864" y="2530640"/>
+            <a:chExt cx="2552700" cy="2181529"/>
+          </a:xfrm>
+        </p:grpSpPr>
+        <p:pic>
+          <p:nvPicPr>
+            <p:cNvPr id="7" name="Kép 6">
+              <a:extLst>
+                <a:ext uri="{FF2B5EF4-FFF2-40B4-BE49-F238E27FC236}">
+                  <a16:creationId xmlns:a16="http://schemas.microsoft.com/office/drawing/2014/main" id="{A710C213-02AB-4860-89DB-F1799A2881B1}"/>
+                </a:ext>
+              </a:extLst>
+            </p:cNvPr>
+            <p:cNvPicPr>
+              <a:picLocks noChangeAspect="1"/>
+            </p:cNvPicPr>
+            <p:nvPr/>
+          </p:nvPicPr>
+          <p:blipFill rotWithShape="1">
+            <a:blip r:embed="rId5"/>
+            <a:srcRect l="5647"/>
+            <a:stretch/>
+          </p:blipFill>
+          <p:spPr>
+            <a:xfrm>
+              <a:off x="8448864" y="2530640"/>
+              <a:ext cx="2552700" cy="2181529"/>
+            </a:xfrm>
+            <a:prstGeom prst="rect">
+              <a:avLst/>
+            </a:prstGeom>
+            <a:ln/>
+          </p:spPr>
+          <p:style>
+            <a:lnRef idx="2">
+              <a:schemeClr val="accent1"/>
+            </a:lnRef>
+            <a:fillRef idx="1">
+              <a:schemeClr val="lt1"/>
+            </a:fillRef>
+            <a:effectRef idx="0">
+              <a:schemeClr val="accent1"/>
+            </a:effectRef>
+            <a:fontRef idx="minor">
+              <a:schemeClr val="dk1"/>
+            </a:fontRef>
+          </p:style>
+        </p:pic>
+        <p:pic>
+          <p:nvPicPr>
+            <p:cNvPr id="11" name="Kép 10">
+              <a:extLst>
+                <a:ext uri="{FF2B5EF4-FFF2-40B4-BE49-F238E27FC236}">
+                  <a16:creationId xmlns:a16="http://schemas.microsoft.com/office/drawing/2014/main" id="{2F4ADEC0-D514-46E1-84AF-439B6AB366B1}"/>
+                </a:ext>
+              </a:extLst>
+            </p:cNvPr>
+            <p:cNvPicPr>
+              <a:picLocks noChangeAspect="1"/>
+            </p:cNvPicPr>
+            <p:nvPr/>
+          </p:nvPicPr>
+          <p:blipFill rotWithShape="1">
+            <a:blip r:embed="rId3"/>
+            <a:srcRect l="10281" t="91600" r="66759" b="4658"/>
+            <a:stretch/>
+          </p:blipFill>
+          <p:spPr>
+            <a:xfrm>
+              <a:off x="8810814" y="4471663"/>
+              <a:ext cx="1181100" cy="193206"/>
+            </a:xfrm>
+            <a:prstGeom prst="rect">
+              <a:avLst/>
+            </a:prstGeom>
+            <a:ln w="76200" cap="sq">
+              <a:noFill/>
+              <a:miter lim="800000"/>
+            </a:ln>
+            <a:effectLst/>
           </p:spPr>
         </p:pic>
       </p:grpSp>

--- a/Dokumentációhoz/Prezentáció/eMenza_AtkariAriella_FarkasDominik.pptx
+++ b/Dokumentációhoz/Prezentáció/eMenza_AtkariAriella_FarkasDominik.pptx
@@ -5,26 +5,23 @@
     <p:sldMasterId id="2147483660" r:id="rId1"/>
   </p:sldMasterIdLst>
   <p:notesMasterIdLst>
-    <p:notesMasterId r:id="rId19"/>
+    <p:notesMasterId r:id="rId16"/>
   </p:notesMasterIdLst>
   <p:sldIdLst>
     <p:sldId id="288" r:id="rId2"/>
     <p:sldId id="289" r:id="rId3"/>
-    <p:sldId id="276" r:id="rId4"/>
-    <p:sldId id="279" r:id="rId5"/>
-    <p:sldId id="259" r:id="rId6"/>
-    <p:sldId id="260" r:id="rId7"/>
-    <p:sldId id="274" r:id="rId8"/>
-    <p:sldId id="285" r:id="rId9"/>
-    <p:sldId id="268" r:id="rId10"/>
-    <p:sldId id="266" r:id="rId11"/>
-    <p:sldId id="269" r:id="rId12"/>
-    <p:sldId id="272" r:id="rId13"/>
-    <p:sldId id="282" r:id="rId14"/>
-    <p:sldId id="283" r:id="rId15"/>
-    <p:sldId id="287" r:id="rId16"/>
-    <p:sldId id="284" r:id="rId17"/>
-    <p:sldId id="290" r:id="rId18"/>
+    <p:sldId id="259" r:id="rId4"/>
+    <p:sldId id="260" r:id="rId5"/>
+    <p:sldId id="274" r:id="rId6"/>
+    <p:sldId id="285" r:id="rId7"/>
+    <p:sldId id="268" r:id="rId8"/>
+    <p:sldId id="266" r:id="rId9"/>
+    <p:sldId id="269" r:id="rId10"/>
+    <p:sldId id="272" r:id="rId11"/>
+    <p:sldId id="282" r:id="rId12"/>
+    <p:sldId id="283" r:id="rId13"/>
+    <p:sldId id="284" r:id="rId14"/>
+    <p:sldId id="290" r:id="rId15"/>
   </p:sldIdLst>
   <p:sldSz cx="12192000" cy="6858000"/>
   <p:notesSz cx="6858000" cy="9144000"/>
@@ -213,7 +210,7 @@
           <a:p>
             <a:fld id="{CBDB98DA-128E-4364-BF98-E5A8E296E4F2}" type="datetimeFigureOut">
               <a:rPr lang="hu-HU" smtClean="0"/>
-              <a:t>2026. 03. 27.</a:t>
+              <a:t>2026. 04. 14.</a:t>
             </a:fld>
             <a:endParaRPr lang="hu-HU"/>
           </a:p>
@@ -526,14 +523,43 @@
           <a:p>
             <a:r>
               <a:rPr lang="hu-HU" dirty="0"/>
+              <a:t>A</a:t>
+            </a:r>
+          </a:p>
+          <a:p>
+            <a:endParaRPr lang="hu-HU" dirty="0"/>
+          </a:p>
+          <a:p>
+            <a:r>
+              <a:rPr lang="hu-HU" dirty="0"/>
               <a:t>Bemutatkozás</a:t>
             </a:r>
+          </a:p>
+          <a:p>
+            <a:endParaRPr lang="hu-HU" dirty="0"/>
+          </a:p>
+          <a:p>
+            <a:r>
+              <a:rPr lang="hu-HU" dirty="0"/>
+              <a:t>Vizsgaremekünk az </a:t>
+            </a:r>
+            <a:r>
+              <a:rPr lang="hu-HU" dirty="0" err="1"/>
+              <a:t>eMenza</a:t>
+            </a:r>
+            <a:endParaRPr lang="hu-HU" dirty="0"/>
+          </a:p>
+          <a:p>
+            <a:endParaRPr lang="hu-HU" dirty="0"/>
           </a:p>
           <a:p>
             <a:r>
               <a:rPr lang="hu-HU" dirty="0"/>
               <a:t>Webalapú rendszer</a:t>
             </a:r>
+          </a:p>
+          <a:p>
+            <a:endParaRPr lang="hu-HU" dirty="0"/>
           </a:p>
         </p:txBody>
       </p:sp>
@@ -617,7 +643,31 @@
           <a:bodyPr/>
           <a:lstStyle/>
           <a:p>
+            <a:r>
+              <a:rPr lang="hu-HU" dirty="0"/>
+              <a:t>A</a:t>
+            </a:r>
+          </a:p>
+          <a:p>
             <a:endParaRPr lang="hu-HU" dirty="0"/>
+          </a:p>
+          <a:p>
+            <a:r>
+              <a:rPr lang="hu-HU" dirty="0"/>
+              <a:t>Sikeres, sikertelen tesztesetek</a:t>
+            </a:r>
+          </a:p>
+          <a:p>
+            <a:r>
+              <a:rPr lang="hu-HU" dirty="0"/>
+              <a:t>Normál beviteli adatokkal, extrém adatokkal</a:t>
+            </a:r>
+          </a:p>
+          <a:p>
+            <a:r>
+              <a:rPr lang="hu-HU" dirty="0"/>
+              <a:t>Karakter szám korlátozás</a:t>
+            </a:r>
           </a:p>
         </p:txBody>
       </p:sp>
@@ -638,7 +688,7 @@
           <a:p>
             <a:fld id="{5B73375F-E6FE-4F6E-96C6-6B6BE7EEDE08}" type="slidenum">
               <a:rPr lang="hu-HU" smtClean="0"/>
-              <a:t>15</a:t>
+              <a:t>10</a:t>
             </a:fld>
             <a:endParaRPr lang="hu-HU"/>
           </a:p>
@@ -647,7 +697,143 @@
     </p:spTree>
     <p:extLst>
       <p:ext uri="{BB962C8B-B14F-4D97-AF65-F5344CB8AC3E}">
-        <p14:creationId xmlns:p14="http://schemas.microsoft.com/office/powerpoint/2010/main" val="3651380644"/>
+        <p14:creationId xmlns:p14="http://schemas.microsoft.com/office/powerpoint/2010/main" val="2651667935"/>
+      </p:ext>
+    </p:extLst>
+  </p:cSld>
+  <p:clrMapOvr>
+    <a:masterClrMapping/>
+  </p:clrMapOvr>
+</p:notes>
+</file>
+
+<file path=ppt/notesSlides/notesSlide11.xml><?xml version="1.0" encoding="utf-8"?>
+<p:notes xmlns:a="http://schemas.openxmlformats.org/drawingml/2006/main" xmlns:r="http://schemas.openxmlformats.org/officeDocument/2006/relationships" xmlns:p="http://schemas.openxmlformats.org/presentationml/2006/main">
+  <p:cSld>
+    <p:spTree>
+      <p:nvGrpSpPr>
+        <p:cNvPr id="1" name=""/>
+        <p:cNvGrpSpPr/>
+        <p:nvPr/>
+      </p:nvGrpSpPr>
+      <p:grpSpPr>
+        <a:xfrm>
+          <a:off x="0" y="0"/>
+          <a:ext cx="0" cy="0"/>
+          <a:chOff x="0" y="0"/>
+          <a:chExt cx="0" cy="0"/>
+        </a:xfrm>
+      </p:grpSpPr>
+      <p:sp>
+        <p:nvSpPr>
+          <p:cNvPr id="2" name="Diakép helye 1"/>
+          <p:cNvSpPr>
+            <a:spLocks noGrp="1" noRot="1" noChangeAspect="1"/>
+          </p:cNvSpPr>
+          <p:nvPr>
+            <p:ph type="sldImg"/>
+          </p:nvPr>
+        </p:nvSpPr>
+        <p:spPr/>
+      </p:sp>
+      <p:sp>
+        <p:nvSpPr>
+          <p:cNvPr id="3" name="Jegyzetek helye 2"/>
+          <p:cNvSpPr>
+            <a:spLocks noGrp="1"/>
+          </p:cNvSpPr>
+          <p:nvPr>
+            <p:ph type="body" idx="1"/>
+          </p:nvPr>
+        </p:nvSpPr>
+        <p:spPr/>
+        <p:txBody>
+          <a:bodyPr/>
+          <a:lstStyle/>
+          <a:p>
+            <a:r>
+              <a:rPr lang="hu-HU" dirty="0"/>
+              <a:t>D</a:t>
+            </a:r>
+          </a:p>
+          <a:p>
+            <a:endParaRPr lang="hu-HU" dirty="0"/>
+          </a:p>
+          <a:p>
+            <a:r>
+              <a:rPr lang="hu-HU" dirty="0" err="1"/>
+              <a:t>Simple</a:t>
+            </a:r>
+            <a:r>
+              <a:rPr lang="hu-HU" dirty="0"/>
+              <a:t> </a:t>
+            </a:r>
+            <a:r>
+              <a:rPr lang="hu-HU" dirty="0" err="1"/>
+              <a:t>payyel</a:t>
+            </a:r>
+            <a:r>
+              <a:rPr lang="hu-HU" dirty="0"/>
+              <a:t> online fizetés</a:t>
+            </a:r>
+          </a:p>
+          <a:p>
+            <a:pPr marL="0" marR="0" lvl="0" indent="0" algn="l" defTabSz="914400" rtl="0" eaLnBrk="1" fontAlgn="auto" latinLnBrk="0" hangingPunct="1">
+              <a:lnSpc>
+                <a:spcPct val="100000"/>
+              </a:lnSpc>
+              <a:spcBef>
+                <a:spcPts val="0"/>
+              </a:spcBef>
+              <a:spcAft>
+                <a:spcPts val="0"/>
+              </a:spcAft>
+              <a:buClrTx/>
+              <a:buSzTx/>
+              <a:buFontTx/>
+              <a:buNone/>
+              <a:tabLst/>
+              <a:defRPr/>
+            </a:pPr>
+            <a:r>
+              <a:rPr lang="hu-HU" sz="1200" dirty="0">
+                <a:latin typeface="Bahnschrift Light" panose="020B0502040204020203" pitchFamily="34" charset="0"/>
+              </a:rPr>
+              <a:t>Értesítés küldés?</a:t>
+            </a:r>
+          </a:p>
+          <a:p>
+            <a:endParaRPr lang="hu-HU" dirty="0"/>
+          </a:p>
+        </p:txBody>
+      </p:sp>
+      <p:sp>
+        <p:nvSpPr>
+          <p:cNvPr id="4" name="Dia számának helye 3"/>
+          <p:cNvSpPr>
+            <a:spLocks noGrp="1"/>
+          </p:cNvSpPr>
+          <p:nvPr>
+            <p:ph type="sldNum" sz="quarter" idx="5"/>
+          </p:nvPr>
+        </p:nvSpPr>
+        <p:spPr/>
+        <p:txBody>
+          <a:bodyPr/>
+          <a:lstStyle/>
+          <a:p>
+            <a:fld id="{5B73375F-E6FE-4F6E-96C6-6B6BE7EEDE08}" type="slidenum">
+              <a:rPr lang="hu-HU" smtClean="0"/>
+              <a:t>11</a:t>
+            </a:fld>
+            <a:endParaRPr lang="hu-HU"/>
+          </a:p>
+        </p:txBody>
+      </p:sp>
+    </p:spTree>
+    <p:extLst>
+      <p:ext uri="{BB962C8B-B14F-4D97-AF65-F5344CB8AC3E}">
+        <p14:creationId xmlns:p14="http://schemas.microsoft.com/office/powerpoint/2010/main" val="3326162737"/>
       </p:ext>
     </p:extLst>
   </p:cSld>
@@ -703,13 +889,16 @@
           <a:p>
             <a:r>
               <a:rPr lang="hu-HU" dirty="0"/>
-              <a:t>Bemutatkozás</a:t>
-            </a:r>
+              <a:t>A</a:t>
+            </a:r>
+          </a:p>
+          <a:p>
+            <a:endParaRPr lang="hu-HU" dirty="0"/>
           </a:p>
           <a:p>
             <a:r>
               <a:rPr lang="hu-HU" dirty="0"/>
-              <a:t>Webalapú rendszer</a:t>
+              <a:t>Könnyen kezelhető, átlátható felület biztosítása</a:t>
             </a:r>
           </a:p>
         </p:txBody>
@@ -731,7 +920,7 @@
           <a:p>
             <a:fld id="{5B73375F-E6FE-4F6E-96C6-6B6BE7EEDE08}" type="slidenum">
               <a:rPr lang="hu-HU" smtClean="0"/>
-              <a:t>3</a:t>
+              <a:t>2</a:t>
             </a:fld>
             <a:endParaRPr lang="hu-HU"/>
           </a:p>
@@ -740,7 +929,7 @@
     </p:spTree>
     <p:extLst>
       <p:ext uri="{BB962C8B-B14F-4D97-AF65-F5344CB8AC3E}">
-        <p14:creationId xmlns:p14="http://schemas.microsoft.com/office/powerpoint/2010/main" val="700960896"/>
+        <p14:creationId xmlns:p14="http://schemas.microsoft.com/office/powerpoint/2010/main" val="1267837927"/>
       </p:ext>
     </p:extLst>
   </p:cSld>
@@ -796,7 +985,16 @@
           <a:p>
             <a:r>
               <a:rPr lang="hu-HU" dirty="0"/>
-              <a:t>KONYHA KÉRÉSÉRE: A menüből cukormentes</a:t>
+              <a:t>D</a:t>
+            </a:r>
+          </a:p>
+          <a:p>
+            <a:endParaRPr lang="hu-HU" dirty="0"/>
+          </a:p>
+          <a:p>
+            <a:r>
+              <a:rPr lang="hu-HU" dirty="0"/>
+              <a:t>Konyha kérésére:  az „A” menüből cukormentes mindig</a:t>
             </a:r>
           </a:p>
         </p:txBody>
@@ -818,7 +1016,7 @@
           <a:p>
             <a:fld id="{5B73375F-E6FE-4F6E-96C6-6B6BE7EEDE08}" type="slidenum">
               <a:rPr lang="hu-HU" smtClean="0"/>
-              <a:t>5</a:t>
+              <a:t>3</a:t>
             </a:fld>
             <a:endParaRPr lang="hu-HU"/>
           </a:p>
@@ -882,19 +1080,42 @@
           <a:lstStyle/>
           <a:p>
             <a:r>
+              <a:rPr lang="hu-HU" dirty="0"/>
+              <a:t>A</a:t>
+            </a:r>
+          </a:p>
+          <a:p>
+            <a:endParaRPr lang="hu-HU" dirty="0"/>
+          </a:p>
+          <a:p>
+            <a:r>
               <a:rPr lang="hu-HU" dirty="0" err="1"/>
-              <a:t>Githubon</a:t>
-            </a:r>
-            <a:endParaRPr lang="hu-HU" dirty="0"/>
-          </a:p>
-          <a:p>
+              <a:t>Laravel</a:t>
+            </a:r>
             <a:r>
               <a:rPr lang="hu-HU" dirty="0"/>
-              <a:t>Feladatok megosztása – vegyesen frontend, backend -&gt; feladatonként</a:t>
-            </a:r>
-          </a:p>
-          <a:p>
-            <a:endParaRPr lang="hu-HU" dirty="0"/>
+              <a:t> keretrendszer backend (v12?)</a:t>
+            </a:r>
+          </a:p>
+          <a:p>
+            <a:r>
+              <a:rPr lang="hu-HU" dirty="0"/>
+              <a:t>Vue.js v3 </a:t>
+            </a:r>
+            <a:r>
+              <a:rPr lang="hu-HU" dirty="0" err="1"/>
+              <a:t>keretrendzsert</a:t>
+            </a:r>
+            <a:r>
+              <a:rPr lang="hu-HU" dirty="0"/>
+              <a:t> választottuk</a:t>
+            </a:r>
+          </a:p>
+          <a:p>
+            <a:r>
+              <a:rPr lang="hu-HU" dirty="0"/>
+              <a:t>Miért ezek? -  órákon ezeket alkalmaztuk, ismereteink elmélyítése</a:t>
+            </a:r>
           </a:p>
         </p:txBody>
       </p:sp>
@@ -915,7 +1136,7 @@
           <a:p>
             <a:fld id="{5B73375F-E6FE-4F6E-96C6-6B6BE7EEDE08}" type="slidenum">
               <a:rPr lang="hu-HU" smtClean="0"/>
-              <a:t>7</a:t>
+              <a:t>4</a:t>
             </a:fld>
             <a:endParaRPr lang="hu-HU"/>
           </a:p>
@@ -924,7 +1145,7 @@
     </p:spTree>
     <p:extLst>
       <p:ext uri="{BB962C8B-B14F-4D97-AF65-F5344CB8AC3E}">
-        <p14:creationId xmlns:p14="http://schemas.microsoft.com/office/powerpoint/2010/main" val="3931808296"/>
+        <p14:creationId xmlns:p14="http://schemas.microsoft.com/office/powerpoint/2010/main" val="1874422554"/>
       </p:ext>
     </p:extLst>
   </p:cSld>
@@ -978,6 +1199,31 @@
           <a:bodyPr/>
           <a:lstStyle/>
           <a:p>
+            <a:r>
+              <a:rPr lang="hu-HU" dirty="0"/>
+              <a:t>D</a:t>
+            </a:r>
+          </a:p>
+          <a:p>
+            <a:endParaRPr lang="hu-HU" dirty="0"/>
+          </a:p>
+          <a:p>
+            <a:r>
+              <a:rPr lang="hu-HU" dirty="0" err="1"/>
+              <a:t>Githubon</a:t>
+            </a:r>
+            <a:r>
+              <a:rPr lang="hu-HU" dirty="0"/>
+              <a:t>, verziókövetés</a:t>
+            </a:r>
+          </a:p>
+          <a:p>
+            <a:r>
+              <a:rPr lang="hu-HU" dirty="0"/>
+              <a:t>Feladatok megosztása – vegyesen frontend, backend -&gt; feladatonként</a:t>
+            </a:r>
+          </a:p>
+          <a:p>
             <a:endParaRPr lang="hu-HU" dirty="0"/>
           </a:p>
         </p:txBody>
@@ -999,7 +1245,7 @@
           <a:p>
             <a:fld id="{5B73375F-E6FE-4F6E-96C6-6B6BE7EEDE08}" type="slidenum">
               <a:rPr lang="hu-HU" smtClean="0"/>
-              <a:t>9</a:t>
+              <a:t>5</a:t>
             </a:fld>
             <a:endParaRPr lang="hu-HU"/>
           </a:p>
@@ -1008,7 +1254,7 @@
     </p:spTree>
     <p:extLst>
       <p:ext uri="{BB962C8B-B14F-4D97-AF65-F5344CB8AC3E}">
-        <p14:creationId xmlns:p14="http://schemas.microsoft.com/office/powerpoint/2010/main" val="549964169"/>
+        <p14:creationId xmlns:p14="http://schemas.microsoft.com/office/powerpoint/2010/main" val="3931808296"/>
       </p:ext>
     </p:extLst>
   </p:cSld>
@@ -1064,7 +1310,20 @@
           <a:p>
             <a:r>
               <a:rPr lang="hu-HU" dirty="0"/>
-              <a:t>Elsődleges kulcsok, idegen kulcsok használata</a:t>
+              <a:t>A</a:t>
+            </a:r>
+          </a:p>
+          <a:p>
+            <a:endParaRPr lang="hu-HU" dirty="0"/>
+          </a:p>
+          <a:p>
+            <a:r>
+              <a:rPr lang="hu-HU" dirty="0" err="1"/>
+              <a:t>Laravel</a:t>
+            </a:r>
+            <a:r>
+              <a:rPr lang="hu-HU" dirty="0"/>
+              <a:t> beépített </a:t>
             </a:r>
           </a:p>
         </p:txBody>
@@ -1086,7 +1345,7 @@
           <a:p>
             <a:fld id="{5B73375F-E6FE-4F6E-96C6-6B6BE7EEDE08}" type="slidenum">
               <a:rPr lang="hu-HU" smtClean="0"/>
-              <a:t>10</a:t>
+              <a:t>6</a:t>
             </a:fld>
             <a:endParaRPr lang="hu-HU"/>
           </a:p>
@@ -1095,7 +1354,7 @@
     </p:spTree>
     <p:extLst>
       <p:ext uri="{BB962C8B-B14F-4D97-AF65-F5344CB8AC3E}">
-        <p14:creationId xmlns:p14="http://schemas.microsoft.com/office/powerpoint/2010/main" val="3913546256"/>
+        <p14:creationId xmlns:p14="http://schemas.microsoft.com/office/powerpoint/2010/main" val="1214633612"/>
       </p:ext>
     </p:extLst>
   </p:cSld>
@@ -1149,33 +1408,20 @@
           <a:bodyPr/>
           <a:lstStyle/>
           <a:p>
-            <a:pPr marL="285750" indent="-285750">
-              <a:buClr>
-                <a:schemeClr val="bg1"/>
-              </a:buClr>
-              <a:buFont typeface="Arial" panose="020B0604020202020204" pitchFamily="34" charset="0"/>
-              <a:buChar char="•"/>
-            </a:pPr>
-            <a:r>
-              <a:rPr lang="hu-HU" sz="1200" dirty="0"/>
-              <a:t>Dinamikus igazodás a kijelzőhöz</a:t>
-            </a:r>
-          </a:p>
-          <a:p>
-            <a:pPr marL="285750" indent="-285750">
-              <a:buClr>
-                <a:schemeClr val="bg1"/>
-              </a:buClr>
-              <a:buFont typeface="Arial" panose="020B0604020202020204" pitchFamily="34" charset="0"/>
-              <a:buChar char="•"/>
-            </a:pPr>
-            <a:r>
-              <a:rPr lang="hu-HU" sz="1200" dirty="0"/>
-              <a:t>Optimalizált telefon képernyőhöz</a:t>
-            </a:r>
-          </a:p>
-          <a:p>
-            <a:endParaRPr lang="hu-HU" dirty="0"/>
+            <a:r>
+              <a:rPr lang="hu-HU" dirty="0"/>
+              <a:t>D</a:t>
+            </a:r>
+          </a:p>
+          <a:p>
+            <a:r>
+              <a:rPr lang="hu-HU" dirty="0" err="1"/>
+              <a:t>Vue</a:t>
+            </a:r>
+            <a:r>
+              <a:rPr lang="hu-HU" dirty="0"/>
+              <a:t> v3</a:t>
+            </a:r>
           </a:p>
         </p:txBody>
       </p:sp>
@@ -1196,7 +1442,7 @@
           <a:p>
             <a:fld id="{5B73375F-E6FE-4F6E-96C6-6B6BE7EEDE08}" type="slidenum">
               <a:rPr lang="hu-HU" smtClean="0"/>
-              <a:t>11</a:t>
+              <a:t>7</a:t>
             </a:fld>
             <a:endParaRPr lang="hu-HU"/>
           </a:p>
@@ -1205,7 +1451,7 @@
     </p:spTree>
     <p:extLst>
       <p:ext uri="{BB962C8B-B14F-4D97-AF65-F5344CB8AC3E}">
-        <p14:creationId xmlns:p14="http://schemas.microsoft.com/office/powerpoint/2010/main" val="334570292"/>
+        <p14:creationId xmlns:p14="http://schemas.microsoft.com/office/powerpoint/2010/main" val="549964169"/>
       </p:ext>
     </p:extLst>
   </p:cSld>
@@ -1259,10 +1505,22 @@
           <a:bodyPr/>
           <a:lstStyle/>
           <a:p>
+            <a:endParaRPr lang="hu-HU" dirty="0"/>
+          </a:p>
+          <a:p>
             <a:r>
               <a:rPr lang="hu-HU" dirty="0"/>
-              <a:t>Sikeres, sikertelen tesztesetek</a:t>
-            </a:r>
+              <a:t>Elsődleges kulcsok, idegen kulcsok használata</a:t>
+            </a:r>
+          </a:p>
+          <a:p>
+            <a:r>
+              <a:rPr lang="hu-HU" dirty="0"/>
+              <a:t>Összekötő táblák</a:t>
+            </a:r>
+          </a:p>
+          <a:p>
+            <a:endParaRPr lang="hu-HU" dirty="0"/>
           </a:p>
         </p:txBody>
       </p:sp>
@@ -1283,7 +1541,7 @@
           <a:p>
             <a:fld id="{5B73375F-E6FE-4F6E-96C6-6B6BE7EEDE08}" type="slidenum">
               <a:rPr lang="hu-HU" smtClean="0"/>
-              <a:t>12</a:t>
+              <a:t>8</a:t>
             </a:fld>
             <a:endParaRPr lang="hu-HU"/>
           </a:p>
@@ -1292,7 +1550,7 @@
     </p:spTree>
     <p:extLst>
       <p:ext uri="{BB962C8B-B14F-4D97-AF65-F5344CB8AC3E}">
-        <p14:creationId xmlns:p14="http://schemas.microsoft.com/office/powerpoint/2010/main" val="2651667935"/>
+        <p14:creationId xmlns:p14="http://schemas.microsoft.com/office/powerpoint/2010/main" val="3913546256"/>
       </p:ext>
     </p:extLst>
   </p:cSld>
@@ -1346,47 +1604,96 @@
           <a:bodyPr/>
           <a:lstStyle/>
           <a:p>
-            <a:r>
-              <a:rPr lang="hu-HU" dirty="0" err="1"/>
-              <a:t>Simple</a:t>
-            </a:r>
-            <a:r>
-              <a:rPr lang="hu-HU" dirty="0"/>
-              <a:t> </a:t>
-            </a:r>
-            <a:r>
-              <a:rPr lang="hu-HU" dirty="0" err="1"/>
-              <a:t>payyel</a:t>
-            </a:r>
-            <a:r>
-              <a:rPr lang="hu-HU" dirty="0"/>
-              <a:t> online fizetés</a:t>
-            </a:r>
-          </a:p>
-          <a:p>
-            <a:pPr marL="0" marR="0" lvl="0" indent="0" algn="l" defTabSz="914400" rtl="0" eaLnBrk="1" fontAlgn="auto" latinLnBrk="0" hangingPunct="1">
-              <a:lnSpc>
-                <a:spcPct val="100000"/>
-              </a:lnSpc>
-              <a:spcBef>
-                <a:spcPts val="0"/>
-              </a:spcBef>
-              <a:spcAft>
-                <a:spcPts val="0"/>
-              </a:spcAft>
-              <a:buClrTx/>
-              <a:buSzTx/>
-              <a:buFontTx/>
+            <a:pPr marL="0" indent="0">
+              <a:buClr>
+                <a:schemeClr val="bg1"/>
+              </a:buClr>
+              <a:buFont typeface="Arial" panose="020B0604020202020204" pitchFamily="34" charset="0"/>
               <a:buNone/>
-              <a:tabLst/>
-              <a:defRPr/>
             </a:pPr>
             <a:r>
-              <a:rPr lang="hu-HU" sz="1200" dirty="0">
-                <a:latin typeface="Bahnschrift Light" panose="020B0502040204020203" pitchFamily="34" charset="0"/>
-              </a:rPr>
-              <a:t>Értesítés küldés?</a:t>
-            </a:r>
+              <a:rPr lang="hu-HU" sz="1200" dirty="0"/>
+              <a:t>D</a:t>
+            </a:r>
+          </a:p>
+          <a:p>
+            <a:pPr marL="0" indent="0">
+              <a:buClr>
+                <a:schemeClr val="bg1"/>
+              </a:buClr>
+              <a:buFont typeface="Arial" panose="020B0604020202020204" pitchFamily="34" charset="0"/>
+              <a:buNone/>
+            </a:pPr>
+            <a:endParaRPr lang="hu-HU" sz="1200" dirty="0"/>
+          </a:p>
+          <a:p>
+            <a:pPr marL="0" indent="0">
+              <a:buClr>
+                <a:schemeClr val="bg1"/>
+              </a:buClr>
+              <a:buFont typeface="Arial" panose="020B0604020202020204" pitchFamily="34" charset="0"/>
+              <a:buNone/>
+            </a:pPr>
+            <a:r>
+              <a:rPr lang="hu-HU" sz="1200" dirty="0"/>
+              <a:t>Dinamikus igazodás a kijelzőhöz</a:t>
+            </a:r>
+          </a:p>
+          <a:p>
+            <a:pPr marL="0" indent="0">
+              <a:buClr>
+                <a:schemeClr val="bg1"/>
+              </a:buClr>
+              <a:buFont typeface="Arial" panose="020B0604020202020204" pitchFamily="34" charset="0"/>
+              <a:buNone/>
+            </a:pPr>
+            <a:endParaRPr lang="hu-HU" sz="1200" dirty="0"/>
+          </a:p>
+          <a:p>
+            <a:pPr marL="0" indent="0">
+              <a:buClr>
+                <a:schemeClr val="bg1"/>
+              </a:buClr>
+              <a:buFont typeface="Arial" panose="020B0604020202020204" pitchFamily="34" charset="0"/>
+              <a:buNone/>
+            </a:pPr>
+            <a:r>
+              <a:rPr lang="hu-HU" sz="1200" dirty="0"/>
+              <a:t>Fókusz: Optimalizált telefon képernyőhöz</a:t>
+            </a:r>
+          </a:p>
+          <a:p>
+            <a:pPr marL="0" indent="0">
+              <a:buClr>
+                <a:schemeClr val="bg1"/>
+              </a:buClr>
+              <a:buFont typeface="Arial" panose="020B0604020202020204" pitchFamily="34" charset="0"/>
+              <a:buNone/>
+            </a:pPr>
+            <a:endParaRPr lang="hu-HU" sz="1200" dirty="0"/>
+          </a:p>
+          <a:p>
+            <a:pPr marL="0" indent="0">
+              <a:buClr>
+                <a:schemeClr val="bg1"/>
+              </a:buClr>
+              <a:buFont typeface="Arial" panose="020B0604020202020204" pitchFamily="34" charset="0"/>
+              <a:buNone/>
+            </a:pPr>
+            <a:r>
+              <a:rPr lang="hu-HU" sz="1200" dirty="0"/>
+              <a:t>Alsó navigációs menü telefonos nézetnél -&gt; tudjuk ki a célközönség: diákok</a:t>
+            </a:r>
+          </a:p>
+          <a:p>
+            <a:pPr marL="285750" indent="-285750">
+              <a:buClr>
+                <a:schemeClr val="bg1"/>
+              </a:buClr>
+              <a:buFont typeface="Arial" panose="020B0604020202020204" pitchFamily="34" charset="0"/>
+              <a:buChar char="•"/>
+            </a:pPr>
+            <a:endParaRPr lang="hu-HU" sz="1200" dirty="0"/>
           </a:p>
           <a:p>
             <a:endParaRPr lang="hu-HU" dirty="0"/>
@@ -1410,7 +1717,7 @@
           <a:p>
             <a:fld id="{5B73375F-E6FE-4F6E-96C6-6B6BE7EEDE08}" type="slidenum">
               <a:rPr lang="hu-HU" smtClean="0"/>
-              <a:t>13</a:t>
+              <a:t>9</a:t>
             </a:fld>
             <a:endParaRPr lang="hu-HU"/>
           </a:p>
@@ -1419,7 +1726,7 @@
     </p:spTree>
     <p:extLst>
       <p:ext uri="{BB962C8B-B14F-4D97-AF65-F5344CB8AC3E}">
-        <p14:creationId xmlns:p14="http://schemas.microsoft.com/office/powerpoint/2010/main" val="3326162737"/>
+        <p14:creationId xmlns:p14="http://schemas.microsoft.com/office/powerpoint/2010/main" val="334570292"/>
       </p:ext>
     </p:extLst>
   </p:cSld>
@@ -1655,7 +1962,7 @@
           <a:p>
             <a:fld id="{B9C1AE7B-DA1F-453C-8148-553EEBF678EC}" type="datetimeFigureOut">
               <a:rPr lang="hu-HU" smtClean="0"/>
-              <a:t>2026. 03. 27.</a:t>
+              <a:t>2026. 04. 14.</a:t>
             </a:fld>
             <a:endParaRPr lang="hu-HU"/>
           </a:p>
@@ -1863,7 +2170,7 @@
           <a:p>
             <a:fld id="{B9C1AE7B-DA1F-453C-8148-553EEBF678EC}" type="datetimeFigureOut">
               <a:rPr lang="hu-HU" smtClean="0"/>
-              <a:t>2026. 03. 27.</a:t>
+              <a:t>2026. 04. 14.</a:t>
             </a:fld>
             <a:endParaRPr lang="hu-HU"/>
           </a:p>
@@ -2119,7 +2426,7 @@
           <a:p>
             <a:fld id="{B9C1AE7B-DA1F-453C-8148-553EEBF678EC}" type="datetimeFigureOut">
               <a:rPr lang="hu-HU" smtClean="0"/>
-              <a:t>2026. 03. 27.</a:t>
+              <a:t>2026. 04. 14.</a:t>
             </a:fld>
             <a:endParaRPr lang="hu-HU"/>
           </a:p>
@@ -2293,7 +2600,7 @@
           <a:p>
             <a:fld id="{B9C1AE7B-DA1F-453C-8148-553EEBF678EC}" type="datetimeFigureOut">
               <a:rPr lang="hu-HU" smtClean="0"/>
-              <a:t>2026. 03. 27.</a:t>
+              <a:t>2026. 04. 14.</a:t>
             </a:fld>
             <a:endParaRPr lang="hu-HU"/>
           </a:p>
@@ -2636,7 +2943,7 @@
           <a:p>
             <a:fld id="{B9C1AE7B-DA1F-453C-8148-553EEBF678EC}" type="datetimeFigureOut">
               <a:rPr lang="hu-HU" smtClean="0"/>
-              <a:t>2026. 03. 27.</a:t>
+              <a:t>2026. 04. 14.</a:t>
             </a:fld>
             <a:endParaRPr lang="hu-HU"/>
           </a:p>
@@ -2911,7 +3218,7 @@
           <a:p>
             <a:fld id="{B9C1AE7B-DA1F-453C-8148-553EEBF678EC}" type="datetimeFigureOut">
               <a:rPr lang="hu-HU" smtClean="0"/>
-              <a:t>2026. 03. 27.</a:t>
+              <a:t>2026. 04. 14.</a:t>
             </a:fld>
             <a:endParaRPr lang="hu-HU"/>
           </a:p>
@@ -3290,7 +3597,7 @@
           <a:p>
             <a:fld id="{B9C1AE7B-DA1F-453C-8148-553EEBF678EC}" type="datetimeFigureOut">
               <a:rPr lang="hu-HU" smtClean="0"/>
-              <a:t>2026. 03. 27.</a:t>
+              <a:t>2026. 04. 14.</a:t>
             </a:fld>
             <a:endParaRPr lang="hu-HU"/>
           </a:p>
@@ -3408,7 +3715,7 @@
           <a:p>
             <a:fld id="{B9C1AE7B-DA1F-453C-8148-553EEBF678EC}" type="datetimeFigureOut">
               <a:rPr lang="hu-HU" smtClean="0"/>
-              <a:t>2026. 03. 27.</a:t>
+              <a:t>2026. 04. 14.</a:t>
             </a:fld>
             <a:endParaRPr lang="hu-HU"/>
           </a:p>
@@ -3579,7 +3886,7 @@
           <a:p>
             <a:fld id="{B9C1AE7B-DA1F-453C-8148-553EEBF678EC}" type="datetimeFigureOut">
               <a:rPr lang="hu-HU" smtClean="0"/>
-              <a:t>2026. 03. 27.</a:t>
+              <a:t>2026. 04. 14.</a:t>
             </a:fld>
             <a:endParaRPr lang="hu-HU"/>
           </a:p>
@@ -3933,7 +4240,7 @@
           <a:p>
             <a:fld id="{B9C1AE7B-DA1F-453C-8148-553EEBF678EC}" type="datetimeFigureOut">
               <a:rPr lang="hu-HU" smtClean="0"/>
-              <a:t>2026. 03. 27.</a:t>
+              <a:t>2026. 04. 14.</a:t>
             </a:fld>
             <a:endParaRPr lang="hu-HU"/>
           </a:p>
@@ -4315,7 +4622,7 @@
           <a:p>
             <a:fld id="{B9C1AE7B-DA1F-453C-8148-553EEBF678EC}" type="datetimeFigureOut">
               <a:rPr lang="hu-HU" smtClean="0"/>
-              <a:t>2026. 03. 27.</a:t>
+              <a:t>2026. 04. 14.</a:t>
             </a:fld>
             <a:endParaRPr lang="hu-HU"/>
           </a:p>
@@ -4602,7 +4909,7 @@
           <a:p>
             <a:fld id="{B9C1AE7B-DA1F-453C-8148-553EEBF678EC}" type="datetimeFigureOut">
               <a:rPr lang="hu-HU" smtClean="0"/>
-              <a:t>2026. 03. 27.</a:t>
+              <a:t>2026. 04. 14.</a:t>
             </a:fld>
             <a:endParaRPr lang="hu-HU"/>
           </a:p>
@@ -5889,7 +6196,7 @@
                 </a:solidFill>
                 <a:latin typeface="Bahnschrift Light" panose="020B0502040204020203" pitchFamily="34" charset="0"/>
               </a:rPr>
-              <a:t>2026. 03. 03</a:t>
+              <a:t>2026. 04. 14</a:t>
             </a:r>
           </a:p>
         </p:txBody>
@@ -6657,528 +6964,6 @@
       </p:grpSpPr>
       <p:sp>
         <p:nvSpPr>
-          <p:cNvPr id="3" name="Tartalom helye 2">
-            <a:extLst>
-              <a:ext uri="{FF2B5EF4-FFF2-40B4-BE49-F238E27FC236}">
-                <a16:creationId xmlns:a16="http://schemas.microsoft.com/office/drawing/2014/main" id="{32758DB2-9D10-47A2-925C-F8A858558A07}"/>
-              </a:ext>
-            </a:extLst>
-          </p:cNvPr>
-          <p:cNvSpPr>
-            <a:spLocks noGrp="1"/>
-          </p:cNvSpPr>
-          <p:nvPr>
-            <p:ph idx="1"/>
-          </p:nvPr>
-        </p:nvSpPr>
-        <p:spPr>
-          <a:xfrm>
-            <a:off x="1243554" y="1911310"/>
-            <a:ext cx="10058400" cy="4023360"/>
-          </a:xfrm>
-        </p:spPr>
-        <p:txBody>
-          <a:bodyPr/>
-          <a:lstStyle/>
-          <a:p>
-            <a:pPr>
-              <a:buFont typeface="Arial" panose="020B0604020202020204" pitchFamily="34" charset="0"/>
-              <a:buChar char="•"/>
-            </a:pPr>
-            <a:r>
-              <a:rPr lang="hu-HU" dirty="0"/>
-              <a:t> 16 tábla</a:t>
-            </a:r>
-          </a:p>
-          <a:p>
-            <a:pPr>
-              <a:buFont typeface="Arial" panose="020B0604020202020204" pitchFamily="34" charset="0"/>
-              <a:buChar char="•"/>
-            </a:pPr>
-            <a:r>
-              <a:rPr lang="hu-HU" dirty="0"/>
-              <a:t> Mintaadatok</a:t>
-            </a:r>
-          </a:p>
-          <a:p>
-            <a:endParaRPr lang="hu-HU" dirty="0"/>
-          </a:p>
-        </p:txBody>
-      </p:sp>
-      <p:sp>
-        <p:nvSpPr>
-          <p:cNvPr id="4" name="Cím 1">
-            <a:extLst>
-              <a:ext uri="{FF2B5EF4-FFF2-40B4-BE49-F238E27FC236}">
-                <a16:creationId xmlns:a16="http://schemas.microsoft.com/office/drawing/2014/main" id="{1BABF97B-7E63-454C-9CDB-F386138F1BAA}"/>
-              </a:ext>
-            </a:extLst>
-          </p:cNvPr>
-          <p:cNvSpPr>
-            <a:spLocks noGrp="1"/>
-          </p:cNvSpPr>
-          <p:nvPr>
-            <p:ph type="title"/>
-          </p:nvPr>
-        </p:nvSpPr>
-        <p:spPr>
-          <a:xfrm>
-            <a:off x="1097280" y="286603"/>
-            <a:ext cx="10058400" cy="1450757"/>
-          </a:xfrm>
-        </p:spPr>
-        <p:txBody>
-          <a:bodyPr/>
-          <a:lstStyle/>
-          <a:p>
-            <a:r>
-              <a:rPr lang="hu-HU" b="1" dirty="0">
-                <a:latin typeface="Bahnschrift SemiBold" panose="020B0502040204020203" pitchFamily="34" charset="0"/>
-              </a:rPr>
-              <a:t>Adatbázis</a:t>
-            </a:r>
-          </a:p>
-        </p:txBody>
-      </p:sp>
-      <p:grpSp>
-        <p:nvGrpSpPr>
-          <p:cNvPr id="7" name="Csoportba foglalás 6">
-            <a:extLst>
-              <a:ext uri="{FF2B5EF4-FFF2-40B4-BE49-F238E27FC236}">
-                <a16:creationId xmlns:a16="http://schemas.microsoft.com/office/drawing/2014/main" id="{E802B2B8-8A4C-4A1C-A3DA-1085A7D5C7F6}"/>
-              </a:ext>
-            </a:extLst>
-          </p:cNvPr>
-          <p:cNvGrpSpPr/>
-          <p:nvPr/>
-        </p:nvGrpSpPr>
-        <p:grpSpPr>
-          <a:xfrm>
-            <a:off x="10565538" y="349786"/>
-            <a:ext cx="1418895" cy="1258023"/>
-            <a:chOff x="10565538" y="349786"/>
-            <a:chExt cx="1418895" cy="1258023"/>
-          </a:xfrm>
-        </p:grpSpPr>
-        <p:pic>
-          <p:nvPicPr>
-            <p:cNvPr id="8" name="Kép 7">
-              <a:extLst>
-                <a:ext uri="{FF2B5EF4-FFF2-40B4-BE49-F238E27FC236}">
-                  <a16:creationId xmlns:a16="http://schemas.microsoft.com/office/drawing/2014/main" id="{2F280203-E1A7-4586-A915-B522FFD90496}"/>
-                </a:ext>
-              </a:extLst>
-            </p:cNvPr>
-            <p:cNvPicPr>
-              <a:picLocks noChangeAspect="1"/>
-            </p:cNvPicPr>
-            <p:nvPr/>
-          </p:nvPicPr>
-          <p:blipFill rotWithShape="1">
-            <a:blip r:embed="rId3">
-              <a:alphaModFix amt="50000"/>
-              <a:extLst>
-                <a:ext uri="{28A0092B-C50C-407E-A947-70E740481C1C}">
-                  <a14:useLocalDpi xmlns:a14="http://schemas.microsoft.com/office/drawing/2010/main" val="0"/>
-                </a:ext>
-              </a:extLst>
-            </a:blip>
-            <a:srcRect t="58555" r="67375"/>
-            <a:stretch/>
-          </p:blipFill>
-          <p:spPr>
-            <a:xfrm>
-              <a:off x="10619475" y="1036308"/>
-              <a:ext cx="1364958" cy="571501"/>
-            </a:xfrm>
-            <a:prstGeom prst="rect">
-              <a:avLst/>
-            </a:prstGeom>
-          </p:spPr>
-        </p:pic>
-        <p:pic>
-          <p:nvPicPr>
-            <p:cNvPr id="9" name="Kép 8">
-              <a:extLst>
-                <a:ext uri="{FF2B5EF4-FFF2-40B4-BE49-F238E27FC236}">
-                  <a16:creationId xmlns:a16="http://schemas.microsoft.com/office/drawing/2014/main" id="{90937401-8474-4C4C-8353-0BC085D4C997}"/>
-                </a:ext>
-              </a:extLst>
-            </p:cNvPr>
-            <p:cNvPicPr>
-              <a:picLocks noChangeAspect="1"/>
-            </p:cNvPicPr>
-            <p:nvPr/>
-          </p:nvPicPr>
-          <p:blipFill rotWithShape="1">
-            <a:blip r:embed="rId3">
-              <a:alphaModFix amt="50000"/>
-              <a:extLst>
-                <a:ext uri="{28A0092B-C50C-407E-A947-70E740481C1C}">
-                  <a14:useLocalDpi xmlns:a14="http://schemas.microsoft.com/office/drawing/2010/main" val="0"/>
-                </a:ext>
-              </a:extLst>
-            </a:blip>
-            <a:srcRect l="1" r="61666" b="38896"/>
-            <a:stretch/>
-          </p:blipFill>
-          <p:spPr>
-            <a:xfrm>
-              <a:off x="10565538" y="349786"/>
-              <a:ext cx="1418895" cy="745451"/>
-            </a:xfrm>
-            <a:prstGeom prst="rect">
-              <a:avLst/>
-            </a:prstGeom>
-          </p:spPr>
-        </p:pic>
-      </p:grpSp>
-      <p:pic>
-        <p:nvPicPr>
-          <p:cNvPr id="5" name="Kép 4">
-            <a:extLst>
-              <a:ext uri="{FF2B5EF4-FFF2-40B4-BE49-F238E27FC236}">
-                <a16:creationId xmlns:a16="http://schemas.microsoft.com/office/drawing/2014/main" id="{12F1D82F-A13E-4282-A8D3-3080BA7F58C4}"/>
-              </a:ext>
-            </a:extLst>
-          </p:cNvPr>
-          <p:cNvPicPr>
-            <a:picLocks noChangeAspect="1"/>
-          </p:cNvPicPr>
-          <p:nvPr/>
-        </p:nvPicPr>
-        <p:blipFill rotWithShape="1">
-          <a:blip r:embed="rId4"/>
-          <a:srcRect l="7840" t="-648" r="28565" b="-478"/>
-          <a:stretch/>
-        </p:blipFill>
-        <p:spPr>
-          <a:xfrm>
-            <a:off x="1600330" y="2929002"/>
-            <a:ext cx="2435383" cy="3005668"/>
-          </a:xfrm>
-          <a:prstGeom prst="rect">
-            <a:avLst/>
-          </a:prstGeom>
-          <a:ln/>
-        </p:spPr>
-        <p:style>
-          <a:lnRef idx="2">
-            <a:schemeClr val="accent1"/>
-          </a:lnRef>
-          <a:fillRef idx="1">
-            <a:schemeClr val="lt1"/>
-          </a:fillRef>
-          <a:effectRef idx="0">
-            <a:schemeClr val="accent1"/>
-          </a:effectRef>
-          <a:fontRef idx="minor">
-            <a:schemeClr val="dk1"/>
-          </a:fontRef>
-        </p:style>
-      </p:pic>
-      <p:pic>
-        <p:nvPicPr>
-          <p:cNvPr id="11" name="Kép 10">
-            <a:extLst>
-              <a:ext uri="{FF2B5EF4-FFF2-40B4-BE49-F238E27FC236}">
-                <a16:creationId xmlns:a16="http://schemas.microsoft.com/office/drawing/2014/main" id="{F645605F-0923-431D-B3D3-AE4E34E70E6B}"/>
-              </a:ext>
-            </a:extLst>
-          </p:cNvPr>
-          <p:cNvPicPr>
-            <a:picLocks noChangeAspect="1"/>
-          </p:cNvPicPr>
-          <p:nvPr/>
-        </p:nvPicPr>
-        <p:blipFill rotWithShape="1">
-          <a:blip r:embed="rId5"/>
-          <a:srcRect l="12382" t="5217" r="15002" b="8258"/>
-          <a:stretch/>
-        </p:blipFill>
-        <p:spPr>
-          <a:xfrm>
-            <a:off x="5350598" y="2034567"/>
-            <a:ext cx="5359652" cy="3900103"/>
-          </a:xfrm>
-          <a:prstGeom prst="rect">
-            <a:avLst/>
-          </a:prstGeom>
-          <a:ln/>
-        </p:spPr>
-        <p:style>
-          <a:lnRef idx="2">
-            <a:schemeClr val="accent1"/>
-          </a:lnRef>
-          <a:fillRef idx="1">
-            <a:schemeClr val="lt1"/>
-          </a:fillRef>
-          <a:effectRef idx="0">
-            <a:schemeClr val="accent1"/>
-          </a:effectRef>
-          <a:fontRef idx="minor">
-            <a:schemeClr val="dk1"/>
-          </a:fontRef>
-        </p:style>
-      </p:pic>
-    </p:spTree>
-    <p:extLst>
-      <p:ext uri="{BB962C8B-B14F-4D97-AF65-F5344CB8AC3E}">
-        <p14:creationId xmlns:p14="http://schemas.microsoft.com/office/powerpoint/2010/main" val="1438799303"/>
-      </p:ext>
-    </p:extLst>
-  </p:cSld>
-  <p:clrMapOvr>
-    <a:masterClrMapping/>
-  </p:clrMapOvr>
-  <p:transition spd="slow">
-    <p:push dir="u"/>
-  </p:transition>
-</p:sld>
-</file>
-
-<file path=ppt/slides/slide11.xml><?xml version="1.0" encoding="utf-8"?>
-<p:sld xmlns:a="http://schemas.openxmlformats.org/drawingml/2006/main" xmlns:r="http://schemas.openxmlformats.org/officeDocument/2006/relationships" xmlns:p="http://schemas.openxmlformats.org/presentationml/2006/main">
-  <p:cSld>
-    <p:bg>
-      <p:bgPr>
-        <a:solidFill>
-          <a:srgbClr val="FDF7E9"/>
-        </a:solidFill>
-        <a:effectLst/>
-      </p:bgPr>
-    </p:bg>
-    <p:spTree>
-      <p:nvGrpSpPr>
-        <p:cNvPr id="1" name=""/>
-        <p:cNvGrpSpPr/>
-        <p:nvPr/>
-      </p:nvGrpSpPr>
-      <p:grpSpPr>
-        <a:xfrm>
-          <a:off x="0" y="0"/>
-          <a:ext cx="0" cy="0"/>
-          <a:chOff x="0" y="0"/>
-          <a:chExt cx="0" cy="0"/>
-        </a:xfrm>
-      </p:grpSpPr>
-      <p:sp>
-        <p:nvSpPr>
-          <p:cNvPr id="2" name="Cím 1">
-            <a:extLst>
-              <a:ext uri="{FF2B5EF4-FFF2-40B4-BE49-F238E27FC236}">
-                <a16:creationId xmlns:a16="http://schemas.microsoft.com/office/drawing/2014/main" id="{755F2576-93E3-4E11-AD5A-5982C144E204}"/>
-              </a:ext>
-            </a:extLst>
-          </p:cNvPr>
-          <p:cNvSpPr>
-            <a:spLocks noGrp="1"/>
-          </p:cNvSpPr>
-          <p:nvPr>
-            <p:ph type="title"/>
-          </p:nvPr>
-        </p:nvSpPr>
-        <p:spPr>
-          <a:xfrm>
-            <a:off x="457200" y="622934"/>
-            <a:ext cx="3200400" cy="2286000"/>
-          </a:xfrm>
-        </p:spPr>
-        <p:txBody>
-          <a:bodyPr/>
-          <a:lstStyle/>
-          <a:p>
-            <a:r>
-              <a:rPr lang="hu-HU" dirty="0" err="1">
-                <a:latin typeface="Bahnschrift SemiBold" panose="020B0502040204020203" pitchFamily="34" charset="0"/>
-              </a:rPr>
-              <a:t>Reszponzivitás</a:t>
-            </a:r>
-            <a:endParaRPr lang="hu-HU" dirty="0">
-              <a:latin typeface="Bahnschrift SemiBold" panose="020B0502040204020203" pitchFamily="34" charset="0"/>
-            </a:endParaRPr>
-          </a:p>
-        </p:txBody>
-      </p:sp>
-      <p:sp>
-        <p:nvSpPr>
-          <p:cNvPr id="4" name="Szöveg helye 3">
-            <a:extLst>
-              <a:ext uri="{FF2B5EF4-FFF2-40B4-BE49-F238E27FC236}">
-                <a16:creationId xmlns:a16="http://schemas.microsoft.com/office/drawing/2014/main" id="{E1483CC7-2FF0-4B57-872B-832994FD7836}"/>
-              </a:ext>
-            </a:extLst>
-          </p:cNvPr>
-          <p:cNvSpPr>
-            <a:spLocks noGrp="1"/>
-          </p:cNvSpPr>
-          <p:nvPr>
-            <p:ph type="body" sz="half" idx="2"/>
-          </p:nvPr>
-        </p:nvSpPr>
-        <p:spPr>
-          <a:xfrm>
-            <a:off x="704850" y="3259455"/>
-            <a:ext cx="3562350" cy="3684270"/>
-          </a:xfrm>
-        </p:spPr>
-        <p:txBody>
-          <a:bodyPr>
-            <a:normAutofit/>
-          </a:bodyPr>
-          <a:lstStyle/>
-          <a:p>
-            <a:pPr marL="285750" indent="-285750">
-              <a:buClr>
-                <a:schemeClr val="bg1"/>
-              </a:buClr>
-              <a:buFont typeface="Arial" panose="020B0604020202020204" pitchFamily="34" charset="0"/>
-              <a:buChar char="•"/>
-            </a:pPr>
-            <a:r>
-              <a:rPr lang="hu-HU" sz="1800" dirty="0" err="1"/>
-              <a:t>Bootstrap</a:t>
-            </a:r>
-            <a:endParaRPr lang="hu-HU" sz="1800" dirty="0"/>
-          </a:p>
-        </p:txBody>
-      </p:sp>
-      <p:grpSp>
-        <p:nvGrpSpPr>
-          <p:cNvPr id="6" name="Csoportba foglalás 5">
-            <a:extLst>
-              <a:ext uri="{FF2B5EF4-FFF2-40B4-BE49-F238E27FC236}">
-                <a16:creationId xmlns:a16="http://schemas.microsoft.com/office/drawing/2014/main" id="{3317F239-9F4A-4F2E-A3AC-DBDE360A6AFF}"/>
-              </a:ext>
-            </a:extLst>
-          </p:cNvPr>
-          <p:cNvGrpSpPr/>
-          <p:nvPr/>
-        </p:nvGrpSpPr>
-        <p:grpSpPr>
-          <a:xfrm>
-            <a:off x="10565538" y="349786"/>
-            <a:ext cx="1418895" cy="1258023"/>
-            <a:chOff x="10565538" y="349786"/>
-            <a:chExt cx="1418895" cy="1258023"/>
-          </a:xfrm>
-        </p:grpSpPr>
-        <p:pic>
-          <p:nvPicPr>
-            <p:cNvPr id="7" name="Kép 6">
-              <a:extLst>
-                <a:ext uri="{FF2B5EF4-FFF2-40B4-BE49-F238E27FC236}">
-                  <a16:creationId xmlns:a16="http://schemas.microsoft.com/office/drawing/2014/main" id="{C2CC19C8-CD10-42F5-9D72-C77B335B0586}"/>
-                </a:ext>
-              </a:extLst>
-            </p:cNvPr>
-            <p:cNvPicPr>
-              <a:picLocks noChangeAspect="1"/>
-            </p:cNvPicPr>
-            <p:nvPr/>
-          </p:nvPicPr>
-          <p:blipFill rotWithShape="1">
-            <a:blip r:embed="rId3">
-              <a:alphaModFix amt="50000"/>
-              <a:extLst>
-                <a:ext uri="{28A0092B-C50C-407E-A947-70E740481C1C}">
-                  <a14:useLocalDpi xmlns:a14="http://schemas.microsoft.com/office/drawing/2010/main" val="0"/>
-                </a:ext>
-              </a:extLst>
-            </a:blip>
-            <a:srcRect t="58555" r="67375"/>
-            <a:stretch/>
-          </p:blipFill>
-          <p:spPr>
-            <a:xfrm>
-              <a:off x="10619475" y="1036308"/>
-              <a:ext cx="1364958" cy="571501"/>
-            </a:xfrm>
-            <a:prstGeom prst="rect">
-              <a:avLst/>
-            </a:prstGeom>
-          </p:spPr>
-        </p:pic>
-        <p:pic>
-          <p:nvPicPr>
-            <p:cNvPr id="8" name="Kép 7">
-              <a:extLst>
-                <a:ext uri="{FF2B5EF4-FFF2-40B4-BE49-F238E27FC236}">
-                  <a16:creationId xmlns:a16="http://schemas.microsoft.com/office/drawing/2014/main" id="{5AF4A5EB-86E0-4324-B31A-9A09255FD8E0}"/>
-                </a:ext>
-              </a:extLst>
-            </p:cNvPr>
-            <p:cNvPicPr>
-              <a:picLocks noChangeAspect="1"/>
-            </p:cNvPicPr>
-            <p:nvPr/>
-          </p:nvPicPr>
-          <p:blipFill rotWithShape="1">
-            <a:blip r:embed="rId3">
-              <a:alphaModFix amt="50000"/>
-              <a:extLst>
-                <a:ext uri="{28A0092B-C50C-407E-A947-70E740481C1C}">
-                  <a14:useLocalDpi xmlns:a14="http://schemas.microsoft.com/office/drawing/2010/main" val="0"/>
-                </a:ext>
-              </a:extLst>
-            </a:blip>
-            <a:srcRect l="1" r="61666" b="38896"/>
-            <a:stretch/>
-          </p:blipFill>
-          <p:spPr>
-            <a:xfrm>
-              <a:off x="10565538" y="349786"/>
-              <a:ext cx="1418895" cy="745451"/>
-            </a:xfrm>
-            <a:prstGeom prst="rect">
-              <a:avLst/>
-            </a:prstGeom>
-          </p:spPr>
-        </p:pic>
-      </p:grpSp>
-    </p:spTree>
-    <p:extLst>
-      <p:ext uri="{BB962C8B-B14F-4D97-AF65-F5344CB8AC3E}">
-        <p14:creationId xmlns:p14="http://schemas.microsoft.com/office/powerpoint/2010/main" val="1470190695"/>
-      </p:ext>
-    </p:extLst>
-  </p:cSld>
-  <p:clrMapOvr>
-    <a:masterClrMapping/>
-  </p:clrMapOvr>
-  <p:transition spd="slow">
-    <p:cover/>
-  </p:transition>
-</p:sld>
-</file>
-
-<file path=ppt/slides/slide12.xml><?xml version="1.0" encoding="utf-8"?>
-<p:sld xmlns:a="http://schemas.openxmlformats.org/drawingml/2006/main" xmlns:r="http://schemas.openxmlformats.org/officeDocument/2006/relationships" xmlns:p="http://schemas.openxmlformats.org/presentationml/2006/main">
-  <p:cSld>
-    <p:bg>
-      <p:bgPr>
-        <a:solidFill>
-          <a:srgbClr val="FDF7E9"/>
-        </a:solidFill>
-        <a:effectLst/>
-      </p:bgPr>
-    </p:bg>
-    <p:spTree>
-      <p:nvGrpSpPr>
-        <p:cNvPr id="1" name=""/>
-        <p:cNvGrpSpPr/>
-        <p:nvPr/>
-      </p:nvGrpSpPr>
-      <p:grpSpPr>
-        <a:xfrm>
-          <a:off x="0" y="0"/>
-          <a:ext cx="0" cy="0"/>
-          <a:chOff x="0" y="0"/>
-          <a:chExt cx="0" cy="0"/>
-        </a:xfrm>
-      </p:grpSpPr>
-      <p:sp>
-        <p:nvSpPr>
           <p:cNvPr id="2" name="Cím 1">
             <a:extLst>
               <a:ext uri="{FF2B5EF4-FFF2-40B4-BE49-F238E27FC236}">
@@ -7555,7 +7340,7 @@
 </p:sld>
 </file>
 
-<file path=ppt/slides/slide13.xml><?xml version="1.0" encoding="utf-8"?>
+<file path=ppt/slides/slide11.xml><?xml version="1.0" encoding="utf-8"?>
 <p:sld xmlns:a="http://schemas.openxmlformats.org/drawingml/2006/main" xmlns:r="http://schemas.openxmlformats.org/officeDocument/2006/relationships" xmlns:p="http://schemas.openxmlformats.org/presentationml/2006/main">
   <p:cSld>
     <p:bg>
@@ -8083,7 +7868,7 @@
               <a:rPr lang="hu-HU" sz="2000" dirty="0">
                 <a:latin typeface="Bahnschrift Light" panose="020B0502040204020203" pitchFamily="34" charset="0"/>
               </a:rPr>
-              <a:t>Étkeztetési rend osztályokra, csoportokra bontva</a:t>
+              <a:t>Étkezési rend osztályokra, csoportokra bontva</a:t>
             </a:r>
           </a:p>
           <a:p>
@@ -8120,7 +7905,7 @@
 </p:sld>
 </file>
 
-<file path=ppt/slides/slide14.xml><?xml version="1.0" encoding="utf-8"?>
+<file path=ppt/slides/slide12.xml><?xml version="1.0" encoding="utf-8"?>
 <p:sld xmlns:a="http://schemas.openxmlformats.org/drawingml/2006/main" xmlns:r="http://schemas.openxmlformats.org/officeDocument/2006/relationships" xmlns:p="http://schemas.openxmlformats.org/presentationml/2006/main">
   <p:cSld>
     <p:bg>
@@ -8313,14 +8098,11 @@
           <a:p>
             <a:pPr algn="ctr"/>
             <a:r>
-              <a:rPr lang="hu-HU" sz="6000" b="1" dirty="0" err="1">
+              <a:rPr lang="hu-HU" sz="6000" b="1" dirty="0">
                 <a:latin typeface="Bahnschrift SemiBold" panose="020B0502040204020203" pitchFamily="34" charset="0"/>
               </a:rPr>
-              <a:t>Demo</a:t>
-            </a:r>
-            <a:endParaRPr lang="hu-HU" sz="6000" b="1" dirty="0">
-              <a:latin typeface="Bahnschrift SemiBold" panose="020B0502040204020203" pitchFamily="34" charset="0"/>
-            </a:endParaRPr>
+              <a:t>Kérdések</a:t>
+            </a:r>
           </a:p>
         </p:txBody>
       </p:sp>
@@ -8540,291 +8322,7 @@
 </p:sld>
 </file>
 
-<file path=ppt/slides/slide15.xml><?xml version="1.0" encoding="utf-8"?>
-<p:sld xmlns:a="http://schemas.openxmlformats.org/drawingml/2006/main" xmlns:r="http://schemas.openxmlformats.org/officeDocument/2006/relationships" xmlns:p="http://schemas.openxmlformats.org/presentationml/2006/main">
-  <p:cSld>
-    <p:bg>
-      <p:bgPr>
-        <a:solidFill>
-          <a:srgbClr val="FDF7E9"/>
-        </a:solidFill>
-        <a:effectLst/>
-      </p:bgPr>
-    </p:bg>
-    <p:spTree>
-      <p:nvGrpSpPr>
-        <p:cNvPr id="1" name=""/>
-        <p:cNvGrpSpPr/>
-        <p:nvPr/>
-      </p:nvGrpSpPr>
-      <p:grpSpPr>
-        <a:xfrm>
-          <a:off x="0" y="0"/>
-          <a:ext cx="0" cy="0"/>
-          <a:chOff x="0" y="0"/>
-          <a:chExt cx="0" cy="0"/>
-        </a:xfrm>
-      </p:grpSpPr>
-      <p:cxnSp>
-        <p:nvCxnSpPr>
-          <p:cNvPr id="2" name="Egyenes összekötő 1">
-            <a:extLst>
-              <a:ext uri="{FF2B5EF4-FFF2-40B4-BE49-F238E27FC236}">
-                <a16:creationId xmlns:a16="http://schemas.microsoft.com/office/drawing/2014/main" id="{20EF3F3C-374B-461F-BAF4-6C213DE7C8BB}"/>
-              </a:ext>
-            </a:extLst>
-          </p:cNvPr>
-          <p:cNvCxnSpPr>
-            <a:cxnSpLocks/>
-          </p:cNvCxnSpPr>
-          <p:nvPr/>
-        </p:nvCxnSpPr>
-        <p:spPr>
-          <a:xfrm>
-            <a:off x="3205163" y="2154342"/>
-            <a:ext cx="5781675" cy="0"/>
-          </a:xfrm>
-          <a:prstGeom prst="line">
-            <a:avLst/>
-          </a:prstGeom>
-          <a:ln>
-            <a:solidFill>
-              <a:schemeClr val="tx1">
-                <a:lumMod val="50000"/>
-                <a:lumOff val="50000"/>
-              </a:schemeClr>
-            </a:solidFill>
-          </a:ln>
-        </p:spPr>
-        <p:style>
-          <a:lnRef idx="1">
-            <a:schemeClr val="accent1"/>
-          </a:lnRef>
-          <a:fillRef idx="0">
-            <a:schemeClr val="accent1"/>
-          </a:fillRef>
-          <a:effectRef idx="0">
-            <a:schemeClr val="accent1"/>
-          </a:effectRef>
-          <a:fontRef idx="minor">
-            <a:schemeClr val="tx1"/>
-          </a:fontRef>
-        </p:style>
-      </p:cxnSp>
-      <p:pic>
-        <p:nvPicPr>
-          <p:cNvPr id="3" name="Kép 2">
-            <a:extLst>
-              <a:ext uri="{FF2B5EF4-FFF2-40B4-BE49-F238E27FC236}">
-                <a16:creationId xmlns:a16="http://schemas.microsoft.com/office/drawing/2014/main" id="{FE91A941-BC8A-4E2A-B780-F3F3D6A9B3E3}"/>
-              </a:ext>
-            </a:extLst>
-          </p:cNvPr>
-          <p:cNvPicPr>
-            <a:picLocks noChangeAspect="1"/>
-          </p:cNvPicPr>
-          <p:nvPr/>
-        </p:nvPicPr>
-        <p:blipFill rotWithShape="1">
-          <a:blip r:embed="rId3">
-            <a:alphaModFix/>
-            <a:extLst>
-              <a:ext uri="{28A0092B-C50C-407E-A947-70E740481C1C}">
-                <a14:useLocalDpi xmlns:a14="http://schemas.microsoft.com/office/drawing/2010/main" val="0"/>
-              </a:ext>
-            </a:extLst>
-          </a:blip>
-          <a:srcRect l="-1" t="58555" r="1153"/>
-          <a:stretch/>
-        </p:blipFill>
-        <p:spPr>
-          <a:xfrm>
-            <a:off x="3864953" y="1462194"/>
-            <a:ext cx="4462094" cy="616623"/>
-          </a:xfrm>
-          <a:prstGeom prst="rect">
-            <a:avLst/>
-          </a:prstGeom>
-        </p:spPr>
-      </p:pic>
-      <p:pic>
-        <p:nvPicPr>
-          <p:cNvPr id="4" name="Kép 3">
-            <a:extLst>
-              <a:ext uri="{FF2B5EF4-FFF2-40B4-BE49-F238E27FC236}">
-                <a16:creationId xmlns:a16="http://schemas.microsoft.com/office/drawing/2014/main" id="{78D3DB18-E771-4DF0-84FA-206E8FA41883}"/>
-              </a:ext>
-            </a:extLst>
-          </p:cNvPr>
-          <p:cNvPicPr>
-            <a:picLocks noChangeAspect="1"/>
-          </p:cNvPicPr>
-          <p:nvPr/>
-        </p:nvPicPr>
-        <p:blipFill rotWithShape="1">
-          <a:blip r:embed="rId3">
-            <a:alphaModFix/>
-            <a:extLst>
-              <a:ext uri="{28A0092B-C50C-407E-A947-70E740481C1C}">
-                <a14:useLocalDpi xmlns:a14="http://schemas.microsoft.com/office/drawing/2010/main" val="0"/>
-              </a:ext>
-            </a:extLst>
-          </a:blip>
-          <a:srcRect l="-1" r="-295" b="38896"/>
-          <a:stretch/>
-        </p:blipFill>
-        <p:spPr>
-          <a:xfrm>
-            <a:off x="3817995" y="581028"/>
-            <a:ext cx="4556011" cy="914838"/>
-          </a:xfrm>
-          <a:prstGeom prst="rect">
-            <a:avLst/>
-          </a:prstGeom>
-        </p:spPr>
-      </p:pic>
-      <p:sp>
-        <p:nvSpPr>
-          <p:cNvPr id="5" name="Cím 1">
-            <a:extLst>
-              <a:ext uri="{FF2B5EF4-FFF2-40B4-BE49-F238E27FC236}">
-                <a16:creationId xmlns:a16="http://schemas.microsoft.com/office/drawing/2014/main" id="{175A5A3F-6F8F-4002-ADBD-CD8C93ECEEE1}"/>
-              </a:ext>
-            </a:extLst>
-          </p:cNvPr>
-          <p:cNvSpPr txBox="1">
-            <a:spLocks/>
-          </p:cNvSpPr>
-          <p:nvPr/>
-        </p:nvSpPr>
-        <p:spPr>
-          <a:xfrm>
-            <a:off x="1066800" y="2703622"/>
-            <a:ext cx="10058400" cy="1450757"/>
-          </a:xfrm>
-          <a:prstGeom prst="rect">
-            <a:avLst/>
-          </a:prstGeom>
-        </p:spPr>
-        <p:txBody>
-          <a:bodyPr anchor="ctr"/>
-          <a:lstStyle>
-            <a:lvl1pPr algn="l" defTabSz="914400" rtl="0" eaLnBrk="1" latinLnBrk="0" hangingPunct="1">
-              <a:lnSpc>
-                <a:spcPct val="85000"/>
-              </a:lnSpc>
-              <a:spcBef>
-                <a:spcPct val="0"/>
-              </a:spcBef>
-              <a:buNone/>
-              <a:defRPr sz="4800" kern="1200" spc="-50" baseline="0">
-                <a:solidFill>
-                  <a:schemeClr val="tx1">
-                    <a:lumMod val="75000"/>
-                    <a:lumOff val="25000"/>
-                  </a:schemeClr>
-                </a:solidFill>
-                <a:latin typeface="+mj-lt"/>
-                <a:ea typeface="+mj-ea"/>
-                <a:cs typeface="+mj-cs"/>
-              </a:defRPr>
-            </a:lvl1pPr>
-          </a:lstStyle>
-          <a:p>
-            <a:pPr algn="ctr"/>
-            <a:r>
-              <a:rPr lang="hu-HU" sz="6000" b="1" dirty="0">
-                <a:latin typeface="Bahnschrift SemiBold" panose="020B0502040204020203" pitchFamily="34" charset="0"/>
-              </a:rPr>
-              <a:t>Kérdések</a:t>
-            </a:r>
-          </a:p>
-        </p:txBody>
-      </p:sp>
-      <p:pic>
-        <p:nvPicPr>
-          <p:cNvPr id="12" name="Kép 11">
-            <a:extLst>
-              <a:ext uri="{FF2B5EF4-FFF2-40B4-BE49-F238E27FC236}">
-                <a16:creationId xmlns:a16="http://schemas.microsoft.com/office/drawing/2014/main" id="{0D5DF80E-C3F6-4A3A-98C9-825EEE99BBF4}"/>
-              </a:ext>
-            </a:extLst>
-          </p:cNvPr>
-          <p:cNvPicPr>
-            <a:picLocks noChangeAspect="1"/>
-          </p:cNvPicPr>
-          <p:nvPr/>
-        </p:nvPicPr>
-        <p:blipFill rotWithShape="1">
-          <a:blip r:embed="rId4">
-            <a:extLst>
-              <a:ext uri="{28A0092B-C50C-407E-A947-70E740481C1C}">
-                <a14:useLocalDpi xmlns:a14="http://schemas.microsoft.com/office/drawing/2010/main" val="0"/>
-              </a:ext>
-            </a:extLst>
-          </a:blip>
-          <a:srcRect l="16625" r="14640"/>
-          <a:stretch/>
-        </p:blipFill>
-        <p:spPr>
-          <a:xfrm rot="6074309">
-            <a:off x="253294" y="393819"/>
-            <a:ext cx="1804052" cy="1476375"/>
-          </a:xfrm>
-          <a:prstGeom prst="rect">
-            <a:avLst/>
-          </a:prstGeom>
-        </p:spPr>
-      </p:pic>
-      <p:pic>
-        <p:nvPicPr>
-          <p:cNvPr id="13" name="Kép 12">
-            <a:extLst>
-              <a:ext uri="{FF2B5EF4-FFF2-40B4-BE49-F238E27FC236}">
-                <a16:creationId xmlns:a16="http://schemas.microsoft.com/office/drawing/2014/main" id="{7AF0C74E-3043-40A3-8603-B30A83BB9DDF}"/>
-              </a:ext>
-            </a:extLst>
-          </p:cNvPr>
-          <p:cNvPicPr>
-            <a:picLocks noChangeAspect="1"/>
-          </p:cNvPicPr>
-          <p:nvPr/>
-        </p:nvPicPr>
-        <p:blipFill rotWithShape="1">
-          <a:blip r:embed="rId5">
-            <a:extLst>
-              <a:ext uri="{28A0092B-C50C-407E-A947-70E740481C1C}">
-                <a14:useLocalDpi xmlns:a14="http://schemas.microsoft.com/office/drawing/2010/main" val="0"/>
-              </a:ext>
-            </a:extLst>
-          </a:blip>
-          <a:srcRect l="31214" t="-711" r="26907" b="711"/>
-          <a:stretch/>
-        </p:blipFill>
-        <p:spPr>
-          <a:xfrm rot="4156304" flipH="1">
-            <a:off x="10842996" y="4624346"/>
-            <a:ext cx="1208569" cy="1623298"/>
-          </a:xfrm>
-          <a:prstGeom prst="rect">
-            <a:avLst/>
-          </a:prstGeom>
-        </p:spPr>
-      </p:pic>
-    </p:spTree>
-    <p:extLst>
-      <p:ext uri="{BB962C8B-B14F-4D97-AF65-F5344CB8AC3E}">
-        <p14:creationId xmlns:p14="http://schemas.microsoft.com/office/powerpoint/2010/main" val="181564950"/>
-      </p:ext>
-    </p:extLst>
-  </p:cSld>
-  <p:clrMapOvr>
-    <a:masterClrMapping/>
-  </p:clrMapOvr>
-</p:sld>
-</file>
-
-<file path=ppt/slides/slide16.xml><?xml version="1.0" encoding="utf-8"?>
+<file path=ppt/slides/slide13.xml><?xml version="1.0" encoding="utf-8"?>
 <p:sld xmlns:a="http://schemas.openxmlformats.org/drawingml/2006/main" xmlns:r="http://schemas.openxmlformats.org/officeDocument/2006/relationships" xmlns:p="http://schemas.openxmlformats.org/presentationml/2006/main">
   <p:cSld>
     <p:bg>
@@ -9108,7 +8606,7 @@
 </p:sld>
 </file>
 
-<file path=ppt/slides/slide17.xml><?xml version="1.0" encoding="utf-8"?>
+<file path=ppt/slides/slide14.xml><?xml version="1.0" encoding="utf-8"?>
 <p:sld xmlns:a="http://schemas.openxmlformats.org/drawingml/2006/main" xmlns:r="http://schemas.openxmlformats.org/officeDocument/2006/relationships" xmlns:p="http://schemas.openxmlformats.org/presentationml/2006/main">
   <p:cSld>
     <p:bg>
@@ -9640,19 +9138,109 @@
               <a:buChar char="•"/>
             </a:pPr>
             <a:r>
-              <a:rPr lang="hu-HU" sz="2000" dirty="0" err="1">
+              <a:rPr lang="hu-HU" sz="2000" dirty="0">
                 <a:latin typeface="Bahnschrift Light" panose="020B0502040204020203" pitchFamily="34" charset="0"/>
               </a:rPr>
-              <a:t>agrtg</a:t>
-            </a:r>
-            <a:endParaRPr lang="hu-HU" sz="2000" dirty="0">
+              <a:t>Képek</a:t>
+            </a:r>
+          </a:p>
+          <a:p>
+            <a:pPr lvl="2">
+              <a:lnSpc>
+                <a:spcPct val="150000"/>
+              </a:lnSpc>
+              <a:buFont typeface="Wingdings" panose="05000000000000000000" pitchFamily="2" charset="2"/>
+              <a:buChar char="Ø"/>
+            </a:pPr>
+            <a:r>
+              <a:rPr lang="hu-HU" sz="1600" dirty="0">
+                <a:solidFill>
+                  <a:schemeClr val="bg2">
+                    <a:lumMod val="75000"/>
+                  </a:schemeClr>
+                </a:solidFill>
+                <a:latin typeface="Bahnschrift Light" panose="020B0502040204020203" pitchFamily="34" charset="0"/>
+                <a:hlinkClick r:id="rId3">
+                  <a:extLst>
+                    <a:ext uri="{A12FA001-AC4F-418D-AE19-62706E023703}">
+                      <ahyp:hlinkClr xmlns:ahyp="http://schemas.microsoft.com/office/drawing/2018/hyperlinkcolor" val="tx"/>
+                    </a:ext>
+                  </a:extLst>
+                </a:hlinkClick>
+              </a:rPr>
+              <a:t> https://brandfetch.com/laravel.com</a:t>
+            </a:r>
+            <a:endParaRPr lang="hu-HU" sz="1600" dirty="0">
+              <a:solidFill>
+                <a:schemeClr val="bg2">
+                  <a:lumMod val="75000"/>
+                </a:schemeClr>
+              </a:solidFill>
               <a:latin typeface="Bahnschrift Light" panose="020B0502040204020203" pitchFamily="34" charset="0"/>
             </a:endParaRPr>
           </a:p>
           <a:p>
-            <a:pPr marL="201168" lvl="1" indent="0">
-              <a:buFont typeface="Calibri" pitchFamily="34" charset="0"/>
-              <a:buNone/>
+            <a:pPr lvl="2">
+              <a:lnSpc>
+                <a:spcPct val="150000"/>
+              </a:lnSpc>
+              <a:buFont typeface="Wingdings" panose="05000000000000000000" pitchFamily="2" charset="2"/>
+              <a:buChar char="Ø"/>
+            </a:pPr>
+            <a:r>
+              <a:rPr lang="hu-HU" sz="1600" dirty="0">
+                <a:solidFill>
+                  <a:schemeClr val="bg2">
+                    <a:lumMod val="75000"/>
+                  </a:schemeClr>
+                </a:solidFill>
+                <a:latin typeface="Bahnschrift Light" panose="020B0502040204020203" pitchFamily="34" charset="0"/>
+                <a:hlinkClick r:id="rId4">
+                  <a:extLst>
+                    <a:ext uri="{A12FA001-AC4F-418D-AE19-62706E023703}">
+                      <ahyp:hlinkClr xmlns:ahyp="http://schemas.microsoft.com/office/drawing/2018/hyperlinkcolor" val="tx"/>
+                    </a:ext>
+                  </a:extLst>
+                </a:hlinkClick>
+              </a:rPr>
+              <a:t>https://commons.wikimedia.org/wiki/File:Vue.js_Logo_2.svg</a:t>
+            </a:r>
+            <a:endParaRPr lang="hu-HU" sz="1600" dirty="0">
+              <a:solidFill>
+                <a:schemeClr val="bg2">
+                  <a:lumMod val="75000"/>
+                </a:schemeClr>
+              </a:solidFill>
+              <a:latin typeface="Bahnschrift Light" panose="020B0502040204020203" pitchFamily="34" charset="0"/>
+            </a:endParaRPr>
+          </a:p>
+          <a:p>
+            <a:pPr lvl="2">
+              <a:lnSpc>
+                <a:spcPct val="150000"/>
+              </a:lnSpc>
+              <a:buFont typeface="Wingdings" panose="05000000000000000000" pitchFamily="2" charset="2"/>
+              <a:buChar char="Ø"/>
+            </a:pPr>
+            <a:r>
+              <a:rPr lang="hu-HU" sz="1600" u="sng" dirty="0">
+                <a:solidFill>
+                  <a:schemeClr val="bg2">
+                    <a:lumMod val="75000"/>
+                  </a:schemeClr>
+                </a:solidFill>
+                <a:latin typeface="Bahnschrift Light" panose="020B0502040204020203" pitchFamily="34" charset="0"/>
+              </a:rPr>
+              <a:t>https://uxwing.com/mysql-icon/</a:t>
+            </a:r>
+          </a:p>
+          <a:p>
+            <a:pPr lvl="1">
+              <a:lnSpc>
+                <a:spcPct val="150000"/>
+              </a:lnSpc>
+              <a:buFont typeface="Arial" panose="020B0604020202020204" pitchFamily="34" charset="0"/>
+              <a:buChar char="•"/>
             </a:pPr>
             <a:endParaRPr lang="hu-HU" dirty="0"/>
           </a:p>
@@ -9782,7 +9370,7 @@
           <p:nvPr/>
         </p:nvPicPr>
         <p:blipFill rotWithShape="1">
-          <a:blip r:embed="rId2">
+          <a:blip r:embed="rId3">
             <a:alphaModFix amt="50000"/>
             <a:extLst>
               <a:ext uri="{28A0092B-C50C-407E-A947-70E740481C1C}">
@@ -9864,7 +9452,7 @@
           <p:nvPr/>
         </p:nvPicPr>
         <p:blipFill rotWithShape="1">
-          <a:blip r:embed="rId2">
+          <a:blip r:embed="rId3">
             <a:alphaModFix amt="50000"/>
             <a:extLst>
               <a:ext uri="{28A0092B-C50C-407E-A947-70E740481C1C}">
@@ -10290,7 +9878,7 @@
           <p:nvPr/>
         </p:nvPicPr>
         <p:blipFill>
-          <a:blip r:embed="rId3"/>
+          <a:blip r:embed="rId4"/>
           <a:stretch>
             <a:fillRect/>
           </a:stretch>
@@ -10357,1738 +9945,6 @@
       </p:grpSpPr>
       <p:sp>
         <p:nvSpPr>
-          <p:cNvPr id="2" name="Cím 1">
-            <a:extLst>
-              <a:ext uri="{FF2B5EF4-FFF2-40B4-BE49-F238E27FC236}">
-                <a16:creationId xmlns:a16="http://schemas.microsoft.com/office/drawing/2014/main" id="{C18830B2-00D6-4BD2-BE11-19215C420251}"/>
-              </a:ext>
-            </a:extLst>
-          </p:cNvPr>
-          <p:cNvSpPr txBox="1">
-            <a:spLocks/>
-          </p:cNvSpPr>
-          <p:nvPr/>
-        </p:nvSpPr>
-        <p:spPr>
-          <a:xfrm>
-            <a:off x="1320753" y="2904573"/>
-            <a:ext cx="9760046" cy="2006995"/>
-          </a:xfrm>
-          <a:prstGeom prst="rect">
-            <a:avLst/>
-          </a:prstGeom>
-        </p:spPr>
-        <p:txBody>
-          <a:bodyPr>
-            <a:normAutofit/>
-          </a:bodyPr>
-          <a:lstStyle>
-            <a:lvl1pPr algn="l" defTabSz="914400" rtl="0" eaLnBrk="1" latinLnBrk="0" hangingPunct="1">
-              <a:lnSpc>
-                <a:spcPct val="85000"/>
-              </a:lnSpc>
-              <a:spcBef>
-                <a:spcPct val="0"/>
-              </a:spcBef>
-              <a:buNone/>
-              <a:defRPr sz="4800" kern="1200" spc="-50" baseline="0">
-                <a:solidFill>
-                  <a:schemeClr val="tx1">
-                    <a:lumMod val="75000"/>
-                    <a:lumOff val="25000"/>
-                  </a:schemeClr>
-                </a:solidFill>
-                <a:latin typeface="+mj-lt"/>
-                <a:ea typeface="+mj-ea"/>
-                <a:cs typeface="+mj-cs"/>
-              </a:defRPr>
-            </a:lvl1pPr>
-          </a:lstStyle>
-          <a:p>
-            <a:pPr algn="ctr"/>
-            <a:r>
-              <a:rPr lang="hu-HU" sz="5400" b="1" dirty="0">
-                <a:latin typeface="Bahnschrift SemiBold" panose="020B0502040204020203" pitchFamily="34" charset="0"/>
-              </a:rPr>
-              <a:t>Iskolai étkezéskezelő rendszer</a:t>
-            </a:r>
-          </a:p>
-        </p:txBody>
-      </p:sp>
-      <p:sp>
-        <p:nvSpPr>
-          <p:cNvPr id="3" name="Alcím 2">
-            <a:extLst>
-              <a:ext uri="{FF2B5EF4-FFF2-40B4-BE49-F238E27FC236}">
-                <a16:creationId xmlns:a16="http://schemas.microsoft.com/office/drawing/2014/main" id="{A2286F2D-71DE-4954-8C64-8E9991C98150}"/>
-              </a:ext>
-            </a:extLst>
-          </p:cNvPr>
-          <p:cNvSpPr txBox="1">
-            <a:spLocks/>
-          </p:cNvSpPr>
-          <p:nvPr/>
-        </p:nvSpPr>
-        <p:spPr>
-          <a:xfrm>
-            <a:off x="3598026" y="3785841"/>
-            <a:ext cx="4995949" cy="571500"/>
-          </a:xfrm>
-          <a:prstGeom prst="rect">
-            <a:avLst/>
-          </a:prstGeom>
-        </p:spPr>
-        <p:txBody>
-          <a:bodyPr/>
-          <a:lstStyle>
-            <a:lvl1pPr marL="91440" indent="-91440" algn="l" defTabSz="914400" rtl="0" eaLnBrk="1" latinLnBrk="0" hangingPunct="1">
-              <a:lnSpc>
-                <a:spcPct val="90000"/>
-              </a:lnSpc>
-              <a:spcBef>
-                <a:spcPts val="1200"/>
-              </a:spcBef>
-              <a:spcAft>
-                <a:spcPts val="200"/>
-              </a:spcAft>
-              <a:buClr>
-                <a:schemeClr val="accent1"/>
-              </a:buClr>
-              <a:buSzPct val="100000"/>
-              <a:buFont typeface="Calibri" panose="020F0502020204030204" pitchFamily="34" charset="0"/>
-              <a:buChar char=" "/>
-              <a:defRPr sz="2000" kern="1200">
-                <a:solidFill>
-                  <a:schemeClr val="tx1">
-                    <a:lumMod val="75000"/>
-                    <a:lumOff val="25000"/>
-                  </a:schemeClr>
-                </a:solidFill>
-                <a:latin typeface="+mn-lt"/>
-                <a:ea typeface="+mn-ea"/>
-                <a:cs typeface="+mn-cs"/>
-              </a:defRPr>
-            </a:lvl1pPr>
-            <a:lvl2pPr marL="384048" indent="-182880" algn="l" defTabSz="914400" rtl="0" eaLnBrk="1" latinLnBrk="0" hangingPunct="1">
-              <a:lnSpc>
-                <a:spcPct val="90000"/>
-              </a:lnSpc>
-              <a:spcBef>
-                <a:spcPts val="200"/>
-              </a:spcBef>
-              <a:spcAft>
-                <a:spcPts val="400"/>
-              </a:spcAft>
-              <a:buClr>
-                <a:schemeClr val="accent1"/>
-              </a:buClr>
-              <a:buFont typeface="Calibri" pitchFamily="34" charset="0"/>
-              <a:buChar char="◦"/>
-              <a:defRPr sz="1800" kern="1200">
-                <a:solidFill>
-                  <a:schemeClr val="tx1">
-                    <a:lumMod val="75000"/>
-                    <a:lumOff val="25000"/>
-                  </a:schemeClr>
-                </a:solidFill>
-                <a:latin typeface="+mn-lt"/>
-                <a:ea typeface="+mn-ea"/>
-                <a:cs typeface="+mn-cs"/>
-              </a:defRPr>
-            </a:lvl2pPr>
-            <a:lvl3pPr marL="566928" indent="-182880" algn="l" defTabSz="914400" rtl="0" eaLnBrk="1" latinLnBrk="0" hangingPunct="1">
-              <a:lnSpc>
-                <a:spcPct val="90000"/>
-              </a:lnSpc>
-              <a:spcBef>
-                <a:spcPts val="200"/>
-              </a:spcBef>
-              <a:spcAft>
-                <a:spcPts val="400"/>
-              </a:spcAft>
-              <a:buClr>
-                <a:schemeClr val="accent1"/>
-              </a:buClr>
-              <a:buFont typeface="Calibri" pitchFamily="34" charset="0"/>
-              <a:buChar char="◦"/>
-              <a:defRPr sz="1400" kern="1200">
-                <a:solidFill>
-                  <a:schemeClr val="tx1">
-                    <a:lumMod val="75000"/>
-                    <a:lumOff val="25000"/>
-                  </a:schemeClr>
-                </a:solidFill>
-                <a:latin typeface="+mn-lt"/>
-                <a:ea typeface="+mn-ea"/>
-                <a:cs typeface="+mn-cs"/>
-              </a:defRPr>
-            </a:lvl3pPr>
-            <a:lvl4pPr marL="749808" indent="-182880" algn="l" defTabSz="914400" rtl="0" eaLnBrk="1" latinLnBrk="0" hangingPunct="1">
-              <a:lnSpc>
-                <a:spcPct val="90000"/>
-              </a:lnSpc>
-              <a:spcBef>
-                <a:spcPts val="200"/>
-              </a:spcBef>
-              <a:spcAft>
-                <a:spcPts val="400"/>
-              </a:spcAft>
-              <a:buClr>
-                <a:schemeClr val="accent1"/>
-              </a:buClr>
-              <a:buFont typeface="Calibri" pitchFamily="34" charset="0"/>
-              <a:buChar char="◦"/>
-              <a:defRPr sz="1400" kern="1200">
-                <a:solidFill>
-                  <a:schemeClr val="tx1">
-                    <a:lumMod val="75000"/>
-                    <a:lumOff val="25000"/>
-                  </a:schemeClr>
-                </a:solidFill>
-                <a:latin typeface="+mn-lt"/>
-                <a:ea typeface="+mn-ea"/>
-                <a:cs typeface="+mn-cs"/>
-              </a:defRPr>
-            </a:lvl4pPr>
-            <a:lvl5pPr marL="932688" indent="-182880" algn="l" defTabSz="914400" rtl="0" eaLnBrk="1" latinLnBrk="0" hangingPunct="1">
-              <a:lnSpc>
-                <a:spcPct val="90000"/>
-              </a:lnSpc>
-              <a:spcBef>
-                <a:spcPts val="200"/>
-              </a:spcBef>
-              <a:spcAft>
-                <a:spcPts val="400"/>
-              </a:spcAft>
-              <a:buClr>
-                <a:schemeClr val="accent1"/>
-              </a:buClr>
-              <a:buFont typeface="Calibri" pitchFamily="34" charset="0"/>
-              <a:buChar char="◦"/>
-              <a:defRPr sz="1400" kern="1200">
-                <a:solidFill>
-                  <a:schemeClr val="tx1">
-                    <a:lumMod val="75000"/>
-                    <a:lumOff val="25000"/>
-                  </a:schemeClr>
-                </a:solidFill>
-                <a:latin typeface="+mn-lt"/>
-                <a:ea typeface="+mn-ea"/>
-                <a:cs typeface="+mn-cs"/>
-              </a:defRPr>
-            </a:lvl5pPr>
-            <a:lvl6pPr marL="1100000" indent="-228600" algn="l" defTabSz="914400" rtl="0" eaLnBrk="1" latinLnBrk="0" hangingPunct="1">
-              <a:lnSpc>
-                <a:spcPct val="90000"/>
-              </a:lnSpc>
-              <a:spcBef>
-                <a:spcPts val="200"/>
-              </a:spcBef>
-              <a:spcAft>
-                <a:spcPts val="400"/>
-              </a:spcAft>
-              <a:buClr>
-                <a:schemeClr val="accent1"/>
-              </a:buClr>
-              <a:buFont typeface="Calibri" pitchFamily="34" charset="0"/>
-              <a:buChar char="◦"/>
-              <a:defRPr sz="1400" kern="1200">
-                <a:solidFill>
-                  <a:schemeClr val="tx1">
-                    <a:lumMod val="75000"/>
-                    <a:lumOff val="25000"/>
-                  </a:schemeClr>
-                </a:solidFill>
-                <a:latin typeface="+mn-lt"/>
-                <a:ea typeface="+mn-ea"/>
-                <a:cs typeface="+mn-cs"/>
-              </a:defRPr>
-            </a:lvl6pPr>
-            <a:lvl7pPr marL="1300000" indent="-228600" algn="l" defTabSz="914400" rtl="0" eaLnBrk="1" latinLnBrk="0" hangingPunct="1">
-              <a:lnSpc>
-                <a:spcPct val="90000"/>
-              </a:lnSpc>
-              <a:spcBef>
-                <a:spcPts val="200"/>
-              </a:spcBef>
-              <a:spcAft>
-                <a:spcPts val="400"/>
-              </a:spcAft>
-              <a:buClr>
-                <a:schemeClr val="accent1"/>
-              </a:buClr>
-              <a:buFont typeface="Calibri" pitchFamily="34" charset="0"/>
-              <a:buChar char="◦"/>
-              <a:defRPr sz="1400" kern="1200">
-                <a:solidFill>
-                  <a:schemeClr val="tx1">
-                    <a:lumMod val="75000"/>
-                    <a:lumOff val="25000"/>
-                  </a:schemeClr>
-                </a:solidFill>
-                <a:latin typeface="+mn-lt"/>
-                <a:ea typeface="+mn-ea"/>
-                <a:cs typeface="+mn-cs"/>
-              </a:defRPr>
-            </a:lvl7pPr>
-            <a:lvl8pPr marL="1500000" indent="-228600" algn="l" defTabSz="914400" rtl="0" eaLnBrk="1" latinLnBrk="0" hangingPunct="1">
-              <a:lnSpc>
-                <a:spcPct val="90000"/>
-              </a:lnSpc>
-              <a:spcBef>
-                <a:spcPts val="200"/>
-              </a:spcBef>
-              <a:spcAft>
-                <a:spcPts val="400"/>
-              </a:spcAft>
-              <a:buClr>
-                <a:schemeClr val="accent1"/>
-              </a:buClr>
-              <a:buFont typeface="Calibri" pitchFamily="34" charset="0"/>
-              <a:buChar char="◦"/>
-              <a:defRPr sz="1400" kern="1200">
-                <a:solidFill>
-                  <a:schemeClr val="tx1">
-                    <a:lumMod val="75000"/>
-                    <a:lumOff val="25000"/>
-                  </a:schemeClr>
-                </a:solidFill>
-                <a:latin typeface="+mn-lt"/>
-                <a:ea typeface="+mn-ea"/>
-                <a:cs typeface="+mn-cs"/>
-              </a:defRPr>
-            </a:lvl8pPr>
-            <a:lvl9pPr marL="1700000" indent="-228600" algn="l" defTabSz="914400" rtl="0" eaLnBrk="1" latinLnBrk="0" hangingPunct="1">
-              <a:lnSpc>
-                <a:spcPct val="90000"/>
-              </a:lnSpc>
-              <a:spcBef>
-                <a:spcPts val="200"/>
-              </a:spcBef>
-              <a:spcAft>
-                <a:spcPts val="400"/>
-              </a:spcAft>
-              <a:buClr>
-                <a:schemeClr val="accent1"/>
-              </a:buClr>
-              <a:buFont typeface="Calibri" pitchFamily="34" charset="0"/>
-              <a:buChar char="◦"/>
-              <a:defRPr sz="1400" kern="1200">
-                <a:solidFill>
-                  <a:schemeClr val="tx1">
-                    <a:lumMod val="75000"/>
-                    <a:lumOff val="25000"/>
-                  </a:schemeClr>
-                </a:solidFill>
-                <a:latin typeface="+mn-lt"/>
-                <a:ea typeface="+mn-ea"/>
-                <a:cs typeface="+mn-cs"/>
-              </a:defRPr>
-            </a:lvl9pPr>
-          </a:lstStyle>
-          <a:p>
-            <a:pPr algn="ctr"/>
-            <a:r>
-              <a:rPr lang="hu-HU" i="1" cap="all" spc="100" dirty="0">
-                <a:solidFill>
-                  <a:srgbClr val="BD582C"/>
-                </a:solidFill>
-                <a:uFill>
-                  <a:solidFill>
-                    <a:srgbClr val="BD582C"/>
-                  </a:solidFill>
-                </a:uFill>
-                <a:latin typeface="+mj-lt"/>
-              </a:rPr>
-              <a:t>Vizsgaremek bemutatása</a:t>
-            </a:r>
-          </a:p>
-        </p:txBody>
-      </p:sp>
-      <p:pic>
-        <p:nvPicPr>
-          <p:cNvPr id="4" name="Kép 3">
-            <a:extLst>
-              <a:ext uri="{FF2B5EF4-FFF2-40B4-BE49-F238E27FC236}">
-                <a16:creationId xmlns:a16="http://schemas.microsoft.com/office/drawing/2014/main" id="{7912835F-A62C-4B0D-B733-74106EBFDA26}"/>
-              </a:ext>
-            </a:extLst>
-          </p:cNvPr>
-          <p:cNvPicPr>
-            <a:picLocks noChangeAspect="1"/>
-          </p:cNvPicPr>
-          <p:nvPr/>
-        </p:nvPicPr>
-        <p:blipFill rotWithShape="1">
-          <a:blip r:embed="rId3">
-            <a:extLst>
-              <a:ext uri="{28A0092B-C50C-407E-A947-70E740481C1C}">
-                <a14:useLocalDpi xmlns:a14="http://schemas.microsoft.com/office/drawing/2010/main" val="0"/>
-              </a:ext>
-            </a:extLst>
-          </a:blip>
-          <a:srcRect t="58555"/>
-          <a:stretch/>
-        </p:blipFill>
-        <p:spPr>
-          <a:xfrm>
-            <a:off x="3750655" y="1673209"/>
-            <a:ext cx="4714591" cy="644014"/>
-          </a:xfrm>
-          <a:prstGeom prst="rect">
-            <a:avLst/>
-          </a:prstGeom>
-        </p:spPr>
-      </p:pic>
-      <p:sp>
-        <p:nvSpPr>
-          <p:cNvPr id="5" name="Alcím 2">
-            <a:extLst>
-              <a:ext uri="{FF2B5EF4-FFF2-40B4-BE49-F238E27FC236}">
-                <a16:creationId xmlns:a16="http://schemas.microsoft.com/office/drawing/2014/main" id="{3E0FCC81-0923-43B1-9ACC-080EBD94427F}"/>
-              </a:ext>
-            </a:extLst>
-          </p:cNvPr>
-          <p:cNvSpPr txBox="1">
-            <a:spLocks/>
-          </p:cNvSpPr>
-          <p:nvPr/>
-        </p:nvSpPr>
-        <p:spPr>
-          <a:xfrm>
-            <a:off x="127233" y="5659169"/>
-            <a:ext cx="5968766" cy="1050389"/>
-          </a:xfrm>
-          <a:prstGeom prst="rect">
-            <a:avLst/>
-          </a:prstGeom>
-        </p:spPr>
-        <p:txBody>
-          <a:bodyPr vert="horz" lIns="91440" tIns="45720" rIns="91440" bIns="45720" rtlCol="0">
-            <a:normAutofit/>
-          </a:bodyPr>
-          <a:lstStyle>
-            <a:lvl1pPr marL="0" indent="0" algn="l" defTabSz="914400" rtl="0" eaLnBrk="1" latinLnBrk="0" hangingPunct="1">
-              <a:lnSpc>
-                <a:spcPct val="90000"/>
-              </a:lnSpc>
-              <a:spcBef>
-                <a:spcPts val="1200"/>
-              </a:spcBef>
-              <a:spcAft>
-                <a:spcPts val="200"/>
-              </a:spcAft>
-              <a:buClr>
-                <a:schemeClr val="accent1"/>
-              </a:buClr>
-              <a:buSzPct val="100000"/>
-              <a:buFont typeface="Calibri" panose="020F0502020204030204" pitchFamily="34" charset="0"/>
-              <a:buNone/>
-              <a:defRPr sz="2400" kern="1200" cap="all" spc="200" baseline="0">
-                <a:solidFill>
-                  <a:schemeClr val="tx2"/>
-                </a:solidFill>
-                <a:latin typeface="+mj-lt"/>
-                <a:ea typeface="+mn-ea"/>
-                <a:cs typeface="+mn-cs"/>
-              </a:defRPr>
-            </a:lvl1pPr>
-            <a:lvl2pPr marL="457200" indent="0" algn="ctr" defTabSz="914400" rtl="0" eaLnBrk="1" latinLnBrk="0" hangingPunct="1">
-              <a:lnSpc>
-                <a:spcPct val="90000"/>
-              </a:lnSpc>
-              <a:spcBef>
-                <a:spcPts val="200"/>
-              </a:spcBef>
-              <a:spcAft>
-                <a:spcPts val="400"/>
-              </a:spcAft>
-              <a:buClr>
-                <a:schemeClr val="accent1"/>
-              </a:buClr>
-              <a:buFont typeface="Calibri" pitchFamily="34" charset="0"/>
-              <a:buNone/>
-              <a:defRPr sz="2400" kern="1200">
-                <a:solidFill>
-                  <a:schemeClr val="tx1">
-                    <a:lumMod val="75000"/>
-                    <a:lumOff val="25000"/>
-                  </a:schemeClr>
-                </a:solidFill>
-                <a:latin typeface="+mn-lt"/>
-                <a:ea typeface="+mn-ea"/>
-                <a:cs typeface="+mn-cs"/>
-              </a:defRPr>
-            </a:lvl2pPr>
-            <a:lvl3pPr marL="914400" indent="0" algn="ctr" defTabSz="914400" rtl="0" eaLnBrk="1" latinLnBrk="0" hangingPunct="1">
-              <a:lnSpc>
-                <a:spcPct val="90000"/>
-              </a:lnSpc>
-              <a:spcBef>
-                <a:spcPts val="200"/>
-              </a:spcBef>
-              <a:spcAft>
-                <a:spcPts val="400"/>
-              </a:spcAft>
-              <a:buClr>
-                <a:schemeClr val="accent1"/>
-              </a:buClr>
-              <a:buFont typeface="Calibri" pitchFamily="34" charset="0"/>
-              <a:buNone/>
-              <a:defRPr sz="2400" kern="1200">
-                <a:solidFill>
-                  <a:schemeClr val="tx1">
-                    <a:lumMod val="75000"/>
-                    <a:lumOff val="25000"/>
-                  </a:schemeClr>
-                </a:solidFill>
-                <a:latin typeface="+mn-lt"/>
-                <a:ea typeface="+mn-ea"/>
-                <a:cs typeface="+mn-cs"/>
-              </a:defRPr>
-            </a:lvl3pPr>
-            <a:lvl4pPr marL="1371600" indent="0" algn="ctr" defTabSz="914400" rtl="0" eaLnBrk="1" latinLnBrk="0" hangingPunct="1">
-              <a:lnSpc>
-                <a:spcPct val="90000"/>
-              </a:lnSpc>
-              <a:spcBef>
-                <a:spcPts val="200"/>
-              </a:spcBef>
-              <a:spcAft>
-                <a:spcPts val="400"/>
-              </a:spcAft>
-              <a:buClr>
-                <a:schemeClr val="accent1"/>
-              </a:buClr>
-              <a:buFont typeface="Calibri" pitchFamily="34" charset="0"/>
-              <a:buNone/>
-              <a:defRPr sz="2000" kern="1200">
-                <a:solidFill>
-                  <a:schemeClr val="tx1">
-                    <a:lumMod val="75000"/>
-                    <a:lumOff val="25000"/>
-                  </a:schemeClr>
-                </a:solidFill>
-                <a:latin typeface="+mn-lt"/>
-                <a:ea typeface="+mn-ea"/>
-                <a:cs typeface="+mn-cs"/>
-              </a:defRPr>
-            </a:lvl4pPr>
-            <a:lvl5pPr marL="1828800" indent="0" algn="ctr" defTabSz="914400" rtl="0" eaLnBrk="1" latinLnBrk="0" hangingPunct="1">
-              <a:lnSpc>
-                <a:spcPct val="90000"/>
-              </a:lnSpc>
-              <a:spcBef>
-                <a:spcPts val="200"/>
-              </a:spcBef>
-              <a:spcAft>
-                <a:spcPts val="400"/>
-              </a:spcAft>
-              <a:buClr>
-                <a:schemeClr val="accent1"/>
-              </a:buClr>
-              <a:buFont typeface="Calibri" pitchFamily="34" charset="0"/>
-              <a:buNone/>
-              <a:defRPr sz="2000" kern="1200">
-                <a:solidFill>
-                  <a:schemeClr val="tx1">
-                    <a:lumMod val="75000"/>
-                    <a:lumOff val="25000"/>
-                  </a:schemeClr>
-                </a:solidFill>
-                <a:latin typeface="+mn-lt"/>
-                <a:ea typeface="+mn-ea"/>
-                <a:cs typeface="+mn-cs"/>
-              </a:defRPr>
-            </a:lvl5pPr>
-            <a:lvl6pPr marL="2286000" indent="0" algn="ctr" defTabSz="914400" rtl="0" eaLnBrk="1" latinLnBrk="0" hangingPunct="1">
-              <a:lnSpc>
-                <a:spcPct val="90000"/>
-              </a:lnSpc>
-              <a:spcBef>
-                <a:spcPts val="200"/>
-              </a:spcBef>
-              <a:spcAft>
-                <a:spcPts val="400"/>
-              </a:spcAft>
-              <a:buClr>
-                <a:schemeClr val="accent1"/>
-              </a:buClr>
-              <a:buFont typeface="Calibri" pitchFamily="34" charset="0"/>
-              <a:buNone/>
-              <a:defRPr sz="2000" kern="1200">
-                <a:solidFill>
-                  <a:schemeClr val="tx1">
-                    <a:lumMod val="75000"/>
-                    <a:lumOff val="25000"/>
-                  </a:schemeClr>
-                </a:solidFill>
-                <a:latin typeface="+mn-lt"/>
-                <a:ea typeface="+mn-ea"/>
-                <a:cs typeface="+mn-cs"/>
-              </a:defRPr>
-            </a:lvl6pPr>
-            <a:lvl7pPr marL="2743200" indent="0" algn="ctr" defTabSz="914400" rtl="0" eaLnBrk="1" latinLnBrk="0" hangingPunct="1">
-              <a:lnSpc>
-                <a:spcPct val="90000"/>
-              </a:lnSpc>
-              <a:spcBef>
-                <a:spcPts val="200"/>
-              </a:spcBef>
-              <a:spcAft>
-                <a:spcPts val="400"/>
-              </a:spcAft>
-              <a:buClr>
-                <a:schemeClr val="accent1"/>
-              </a:buClr>
-              <a:buFont typeface="Calibri" pitchFamily="34" charset="0"/>
-              <a:buNone/>
-              <a:defRPr sz="2000" kern="1200">
-                <a:solidFill>
-                  <a:schemeClr val="tx1">
-                    <a:lumMod val="75000"/>
-                    <a:lumOff val="25000"/>
-                  </a:schemeClr>
-                </a:solidFill>
-                <a:latin typeface="+mn-lt"/>
-                <a:ea typeface="+mn-ea"/>
-                <a:cs typeface="+mn-cs"/>
-              </a:defRPr>
-            </a:lvl7pPr>
-            <a:lvl8pPr marL="3200400" indent="0" algn="ctr" defTabSz="914400" rtl="0" eaLnBrk="1" latinLnBrk="0" hangingPunct="1">
-              <a:lnSpc>
-                <a:spcPct val="90000"/>
-              </a:lnSpc>
-              <a:spcBef>
-                <a:spcPts val="200"/>
-              </a:spcBef>
-              <a:spcAft>
-                <a:spcPts val="400"/>
-              </a:spcAft>
-              <a:buClr>
-                <a:schemeClr val="accent1"/>
-              </a:buClr>
-              <a:buFont typeface="Calibri" pitchFamily="34" charset="0"/>
-              <a:buNone/>
-              <a:defRPr sz="2000" kern="1200">
-                <a:solidFill>
-                  <a:schemeClr val="tx1">
-                    <a:lumMod val="75000"/>
-                    <a:lumOff val="25000"/>
-                  </a:schemeClr>
-                </a:solidFill>
-                <a:latin typeface="+mn-lt"/>
-                <a:ea typeface="+mn-ea"/>
-                <a:cs typeface="+mn-cs"/>
-              </a:defRPr>
-            </a:lvl8pPr>
-            <a:lvl9pPr marL="3657600" indent="0" algn="ctr" defTabSz="914400" rtl="0" eaLnBrk="1" latinLnBrk="0" hangingPunct="1">
-              <a:lnSpc>
-                <a:spcPct val="90000"/>
-              </a:lnSpc>
-              <a:spcBef>
-                <a:spcPts val="200"/>
-              </a:spcBef>
-              <a:spcAft>
-                <a:spcPts val="400"/>
-              </a:spcAft>
-              <a:buClr>
-                <a:schemeClr val="accent1"/>
-              </a:buClr>
-              <a:buFont typeface="Calibri" pitchFamily="34" charset="0"/>
-              <a:buNone/>
-              <a:defRPr sz="2000" kern="1200">
-                <a:solidFill>
-                  <a:schemeClr val="tx1">
-                    <a:lumMod val="75000"/>
-                    <a:lumOff val="25000"/>
-                  </a:schemeClr>
-                </a:solidFill>
-                <a:latin typeface="+mn-lt"/>
-                <a:ea typeface="+mn-ea"/>
-                <a:cs typeface="+mn-cs"/>
-              </a:defRPr>
-            </a:lvl9pPr>
-          </a:lstStyle>
-          <a:p>
-            <a:pPr>
-              <a:lnSpc>
-                <a:spcPct val="100000"/>
-              </a:lnSpc>
-            </a:pPr>
-            <a:r>
-              <a:rPr lang="hu-HU" sz="1800" cap="none" spc="0" dirty="0">
-                <a:latin typeface="Bahnschrift Light" panose="020B0502040204020203" pitchFamily="34" charset="0"/>
-              </a:rPr>
-              <a:t>Készítették: Atkári Ariella</a:t>
-            </a:r>
-            <a:br>
-              <a:rPr lang="hu-HU" sz="1800" cap="none" spc="0" dirty="0">
-                <a:latin typeface="Bahnschrift Light" panose="020B0502040204020203" pitchFamily="34" charset="0"/>
-              </a:rPr>
-            </a:br>
-            <a:r>
-              <a:rPr lang="hu-HU" sz="1800" cap="none" spc="0" dirty="0">
-                <a:latin typeface="Bahnschrift Light" panose="020B0502040204020203" pitchFamily="34" charset="0"/>
-              </a:rPr>
-              <a:t>	      Farkas Dominik</a:t>
-            </a:r>
-          </a:p>
-        </p:txBody>
-      </p:sp>
-      <p:cxnSp>
-        <p:nvCxnSpPr>
-          <p:cNvPr id="9" name="Egyenes összekötő 8">
-            <a:extLst>
-              <a:ext uri="{FF2B5EF4-FFF2-40B4-BE49-F238E27FC236}">
-                <a16:creationId xmlns:a16="http://schemas.microsoft.com/office/drawing/2014/main" id="{670AB60B-B385-4E46-A012-AD0038CF5F38}"/>
-              </a:ext>
-            </a:extLst>
-          </p:cNvPr>
-          <p:cNvCxnSpPr>
-            <a:cxnSpLocks/>
-          </p:cNvCxnSpPr>
-          <p:nvPr/>
-        </p:nvCxnSpPr>
-        <p:spPr>
-          <a:xfrm>
-            <a:off x="2131264" y="2305176"/>
-            <a:ext cx="7953375" cy="0"/>
-          </a:xfrm>
-          <a:prstGeom prst="line">
-            <a:avLst/>
-          </a:prstGeom>
-          <a:ln>
-            <a:solidFill>
-              <a:schemeClr val="tx1">
-                <a:lumMod val="50000"/>
-                <a:lumOff val="50000"/>
-              </a:schemeClr>
-            </a:solidFill>
-          </a:ln>
-        </p:spPr>
-        <p:style>
-          <a:lnRef idx="1">
-            <a:schemeClr val="accent1"/>
-          </a:lnRef>
-          <a:fillRef idx="0">
-            <a:schemeClr val="accent1"/>
-          </a:fillRef>
-          <a:effectRef idx="0">
-            <a:schemeClr val="accent1"/>
-          </a:effectRef>
-          <a:fontRef idx="minor">
-            <a:schemeClr val="tx1"/>
-          </a:fontRef>
-        </p:style>
-      </p:cxnSp>
-      <p:pic>
-        <p:nvPicPr>
-          <p:cNvPr id="10" name="Kép 9">
-            <a:extLst>
-              <a:ext uri="{FF2B5EF4-FFF2-40B4-BE49-F238E27FC236}">
-                <a16:creationId xmlns:a16="http://schemas.microsoft.com/office/drawing/2014/main" id="{CB9406C6-CF11-47E5-AEFA-0BA584F8F8D2}"/>
-              </a:ext>
-            </a:extLst>
-          </p:cNvPr>
-          <p:cNvPicPr>
-            <a:picLocks noChangeAspect="1"/>
-          </p:cNvPicPr>
-          <p:nvPr/>
-        </p:nvPicPr>
-        <p:blipFill rotWithShape="1">
-          <a:blip r:embed="rId3">
-            <a:extLst>
-              <a:ext uri="{28A0092B-C50C-407E-A947-70E740481C1C}">
-                <a14:useLocalDpi xmlns:a14="http://schemas.microsoft.com/office/drawing/2010/main" val="0"/>
-              </a:ext>
-            </a:extLst>
-          </a:blip>
-          <a:srcRect l="1" r="-2984" b="38896"/>
-          <a:stretch/>
-        </p:blipFill>
-        <p:spPr>
-          <a:xfrm>
-            <a:off x="3738706" y="711670"/>
-            <a:ext cx="4855269" cy="949493"/>
-          </a:xfrm>
-          <a:prstGeom prst="rect">
-            <a:avLst/>
-          </a:prstGeom>
-        </p:spPr>
-      </p:pic>
-      <p:sp>
-        <p:nvSpPr>
-          <p:cNvPr id="11" name="Alcím 2">
-            <a:extLst>
-              <a:ext uri="{FF2B5EF4-FFF2-40B4-BE49-F238E27FC236}">
-                <a16:creationId xmlns:a16="http://schemas.microsoft.com/office/drawing/2014/main" id="{7D26B0E8-7A60-4B80-8AF7-628A519872D6}"/>
-              </a:ext>
-            </a:extLst>
-          </p:cNvPr>
-          <p:cNvSpPr txBox="1">
-            <a:spLocks/>
-          </p:cNvSpPr>
-          <p:nvPr/>
-        </p:nvSpPr>
-        <p:spPr>
-          <a:xfrm>
-            <a:off x="10563224" y="5883809"/>
-            <a:ext cx="1628776" cy="402688"/>
-          </a:xfrm>
-          <a:prstGeom prst="rect">
-            <a:avLst/>
-          </a:prstGeom>
-        </p:spPr>
-        <p:txBody>
-          <a:bodyPr vert="horz" lIns="91440" tIns="45720" rIns="91440" bIns="45720" rtlCol="0">
-            <a:normAutofit/>
-          </a:bodyPr>
-          <a:lstStyle>
-            <a:lvl1pPr marL="0" indent="0" algn="l" defTabSz="914400" rtl="0" eaLnBrk="1" latinLnBrk="0" hangingPunct="1">
-              <a:lnSpc>
-                <a:spcPct val="90000"/>
-              </a:lnSpc>
-              <a:spcBef>
-                <a:spcPts val="1200"/>
-              </a:spcBef>
-              <a:spcAft>
-                <a:spcPts val="200"/>
-              </a:spcAft>
-              <a:buClr>
-                <a:schemeClr val="accent1"/>
-              </a:buClr>
-              <a:buSzPct val="100000"/>
-              <a:buFont typeface="Calibri" panose="020F0502020204030204" pitchFamily="34" charset="0"/>
-              <a:buNone/>
-              <a:defRPr sz="2400" kern="1200" cap="all" spc="200" baseline="0">
-                <a:solidFill>
-                  <a:schemeClr val="tx2"/>
-                </a:solidFill>
-                <a:latin typeface="+mj-lt"/>
-                <a:ea typeface="+mn-ea"/>
-                <a:cs typeface="+mn-cs"/>
-              </a:defRPr>
-            </a:lvl1pPr>
-            <a:lvl2pPr marL="457200" indent="0" algn="ctr" defTabSz="914400" rtl="0" eaLnBrk="1" latinLnBrk="0" hangingPunct="1">
-              <a:lnSpc>
-                <a:spcPct val="90000"/>
-              </a:lnSpc>
-              <a:spcBef>
-                <a:spcPts val="200"/>
-              </a:spcBef>
-              <a:spcAft>
-                <a:spcPts val="400"/>
-              </a:spcAft>
-              <a:buClr>
-                <a:schemeClr val="accent1"/>
-              </a:buClr>
-              <a:buFont typeface="Calibri" pitchFamily="34" charset="0"/>
-              <a:buNone/>
-              <a:defRPr sz="2400" kern="1200">
-                <a:solidFill>
-                  <a:schemeClr val="tx1">
-                    <a:lumMod val="75000"/>
-                    <a:lumOff val="25000"/>
-                  </a:schemeClr>
-                </a:solidFill>
-                <a:latin typeface="+mn-lt"/>
-                <a:ea typeface="+mn-ea"/>
-                <a:cs typeface="+mn-cs"/>
-              </a:defRPr>
-            </a:lvl2pPr>
-            <a:lvl3pPr marL="914400" indent="0" algn="ctr" defTabSz="914400" rtl="0" eaLnBrk="1" latinLnBrk="0" hangingPunct="1">
-              <a:lnSpc>
-                <a:spcPct val="90000"/>
-              </a:lnSpc>
-              <a:spcBef>
-                <a:spcPts val="200"/>
-              </a:spcBef>
-              <a:spcAft>
-                <a:spcPts val="400"/>
-              </a:spcAft>
-              <a:buClr>
-                <a:schemeClr val="accent1"/>
-              </a:buClr>
-              <a:buFont typeface="Calibri" pitchFamily="34" charset="0"/>
-              <a:buNone/>
-              <a:defRPr sz="2400" kern="1200">
-                <a:solidFill>
-                  <a:schemeClr val="tx1">
-                    <a:lumMod val="75000"/>
-                    <a:lumOff val="25000"/>
-                  </a:schemeClr>
-                </a:solidFill>
-                <a:latin typeface="+mn-lt"/>
-                <a:ea typeface="+mn-ea"/>
-                <a:cs typeface="+mn-cs"/>
-              </a:defRPr>
-            </a:lvl3pPr>
-            <a:lvl4pPr marL="1371600" indent="0" algn="ctr" defTabSz="914400" rtl="0" eaLnBrk="1" latinLnBrk="0" hangingPunct="1">
-              <a:lnSpc>
-                <a:spcPct val="90000"/>
-              </a:lnSpc>
-              <a:spcBef>
-                <a:spcPts val="200"/>
-              </a:spcBef>
-              <a:spcAft>
-                <a:spcPts val="400"/>
-              </a:spcAft>
-              <a:buClr>
-                <a:schemeClr val="accent1"/>
-              </a:buClr>
-              <a:buFont typeface="Calibri" pitchFamily="34" charset="0"/>
-              <a:buNone/>
-              <a:defRPr sz="2000" kern="1200">
-                <a:solidFill>
-                  <a:schemeClr val="tx1">
-                    <a:lumMod val="75000"/>
-                    <a:lumOff val="25000"/>
-                  </a:schemeClr>
-                </a:solidFill>
-                <a:latin typeface="+mn-lt"/>
-                <a:ea typeface="+mn-ea"/>
-                <a:cs typeface="+mn-cs"/>
-              </a:defRPr>
-            </a:lvl4pPr>
-            <a:lvl5pPr marL="1828800" indent="0" algn="ctr" defTabSz="914400" rtl="0" eaLnBrk="1" latinLnBrk="0" hangingPunct="1">
-              <a:lnSpc>
-                <a:spcPct val="90000"/>
-              </a:lnSpc>
-              <a:spcBef>
-                <a:spcPts val="200"/>
-              </a:spcBef>
-              <a:spcAft>
-                <a:spcPts val="400"/>
-              </a:spcAft>
-              <a:buClr>
-                <a:schemeClr val="accent1"/>
-              </a:buClr>
-              <a:buFont typeface="Calibri" pitchFamily="34" charset="0"/>
-              <a:buNone/>
-              <a:defRPr sz="2000" kern="1200">
-                <a:solidFill>
-                  <a:schemeClr val="tx1">
-                    <a:lumMod val="75000"/>
-                    <a:lumOff val="25000"/>
-                  </a:schemeClr>
-                </a:solidFill>
-                <a:latin typeface="+mn-lt"/>
-                <a:ea typeface="+mn-ea"/>
-                <a:cs typeface="+mn-cs"/>
-              </a:defRPr>
-            </a:lvl5pPr>
-            <a:lvl6pPr marL="2286000" indent="0" algn="ctr" defTabSz="914400" rtl="0" eaLnBrk="1" latinLnBrk="0" hangingPunct="1">
-              <a:lnSpc>
-                <a:spcPct val="90000"/>
-              </a:lnSpc>
-              <a:spcBef>
-                <a:spcPts val="200"/>
-              </a:spcBef>
-              <a:spcAft>
-                <a:spcPts val="400"/>
-              </a:spcAft>
-              <a:buClr>
-                <a:schemeClr val="accent1"/>
-              </a:buClr>
-              <a:buFont typeface="Calibri" pitchFamily="34" charset="0"/>
-              <a:buNone/>
-              <a:defRPr sz="2000" kern="1200">
-                <a:solidFill>
-                  <a:schemeClr val="tx1">
-                    <a:lumMod val="75000"/>
-                    <a:lumOff val="25000"/>
-                  </a:schemeClr>
-                </a:solidFill>
-                <a:latin typeface="+mn-lt"/>
-                <a:ea typeface="+mn-ea"/>
-                <a:cs typeface="+mn-cs"/>
-              </a:defRPr>
-            </a:lvl6pPr>
-            <a:lvl7pPr marL="2743200" indent="0" algn="ctr" defTabSz="914400" rtl="0" eaLnBrk="1" latinLnBrk="0" hangingPunct="1">
-              <a:lnSpc>
-                <a:spcPct val="90000"/>
-              </a:lnSpc>
-              <a:spcBef>
-                <a:spcPts val="200"/>
-              </a:spcBef>
-              <a:spcAft>
-                <a:spcPts val="400"/>
-              </a:spcAft>
-              <a:buClr>
-                <a:schemeClr val="accent1"/>
-              </a:buClr>
-              <a:buFont typeface="Calibri" pitchFamily="34" charset="0"/>
-              <a:buNone/>
-              <a:defRPr sz="2000" kern="1200">
-                <a:solidFill>
-                  <a:schemeClr val="tx1">
-                    <a:lumMod val="75000"/>
-                    <a:lumOff val="25000"/>
-                  </a:schemeClr>
-                </a:solidFill>
-                <a:latin typeface="+mn-lt"/>
-                <a:ea typeface="+mn-ea"/>
-                <a:cs typeface="+mn-cs"/>
-              </a:defRPr>
-            </a:lvl7pPr>
-            <a:lvl8pPr marL="3200400" indent="0" algn="ctr" defTabSz="914400" rtl="0" eaLnBrk="1" latinLnBrk="0" hangingPunct="1">
-              <a:lnSpc>
-                <a:spcPct val="90000"/>
-              </a:lnSpc>
-              <a:spcBef>
-                <a:spcPts val="200"/>
-              </a:spcBef>
-              <a:spcAft>
-                <a:spcPts val="400"/>
-              </a:spcAft>
-              <a:buClr>
-                <a:schemeClr val="accent1"/>
-              </a:buClr>
-              <a:buFont typeface="Calibri" pitchFamily="34" charset="0"/>
-              <a:buNone/>
-              <a:defRPr sz="2000" kern="1200">
-                <a:solidFill>
-                  <a:schemeClr val="tx1">
-                    <a:lumMod val="75000"/>
-                    <a:lumOff val="25000"/>
-                  </a:schemeClr>
-                </a:solidFill>
-                <a:latin typeface="+mn-lt"/>
-                <a:ea typeface="+mn-ea"/>
-                <a:cs typeface="+mn-cs"/>
-              </a:defRPr>
-            </a:lvl8pPr>
-            <a:lvl9pPr marL="3657600" indent="0" algn="ctr" defTabSz="914400" rtl="0" eaLnBrk="1" latinLnBrk="0" hangingPunct="1">
-              <a:lnSpc>
-                <a:spcPct val="90000"/>
-              </a:lnSpc>
-              <a:spcBef>
-                <a:spcPts val="200"/>
-              </a:spcBef>
-              <a:spcAft>
-                <a:spcPts val="400"/>
-              </a:spcAft>
-              <a:buClr>
-                <a:schemeClr val="accent1"/>
-              </a:buClr>
-              <a:buFont typeface="Calibri" pitchFamily="34" charset="0"/>
-              <a:buNone/>
-              <a:defRPr sz="2000" kern="1200">
-                <a:solidFill>
-                  <a:schemeClr val="tx1">
-                    <a:lumMod val="75000"/>
-                    <a:lumOff val="25000"/>
-                  </a:schemeClr>
-                </a:solidFill>
-                <a:latin typeface="+mn-lt"/>
-                <a:ea typeface="+mn-ea"/>
-                <a:cs typeface="+mn-cs"/>
-              </a:defRPr>
-            </a:lvl9pPr>
-          </a:lstStyle>
-          <a:p>
-            <a:pPr>
-              <a:lnSpc>
-                <a:spcPct val="100000"/>
-              </a:lnSpc>
-            </a:pPr>
-            <a:r>
-              <a:rPr lang="hu-HU" sz="1800" cap="none" spc="0" dirty="0">
-                <a:latin typeface="Bahnschrift Light" panose="020B0502040204020203" pitchFamily="34" charset="0"/>
-              </a:rPr>
-              <a:t>2026. 03. 03</a:t>
-            </a:r>
-          </a:p>
-        </p:txBody>
-      </p:sp>
-    </p:spTree>
-    <p:extLst>
-      <p:ext uri="{BB962C8B-B14F-4D97-AF65-F5344CB8AC3E}">
-        <p14:creationId xmlns:p14="http://schemas.microsoft.com/office/powerpoint/2010/main" val="3133121184"/>
-      </p:ext>
-    </p:extLst>
-  </p:cSld>
-  <p:clrMapOvr>
-    <a:masterClrMapping/>
-  </p:clrMapOvr>
-</p:sld>
-</file>
-
-<file path=ppt/slides/slide4.xml><?xml version="1.0" encoding="utf-8"?>
-<p:sld xmlns:a="http://schemas.openxmlformats.org/drawingml/2006/main" xmlns:r="http://schemas.openxmlformats.org/officeDocument/2006/relationships" xmlns:p="http://schemas.openxmlformats.org/presentationml/2006/main">
-  <p:cSld>
-    <p:bg>
-      <p:bgPr>
-        <a:solidFill>
-          <a:srgbClr val="FDF7E9"/>
-        </a:solidFill>
-        <a:effectLst/>
-      </p:bgPr>
-    </p:bg>
-    <p:spTree>
-      <p:nvGrpSpPr>
-        <p:cNvPr id="1" name=""/>
-        <p:cNvGrpSpPr/>
-        <p:nvPr/>
-      </p:nvGrpSpPr>
-      <p:grpSpPr>
-        <a:xfrm>
-          <a:off x="0" y="0"/>
-          <a:ext cx="0" cy="0"/>
-          <a:chOff x="0" y="0"/>
-          <a:chExt cx="0" cy="0"/>
-        </a:xfrm>
-      </p:grpSpPr>
-      <p:sp>
-        <p:nvSpPr>
-          <p:cNvPr id="2" name="Cím 1">
-            <a:extLst>
-              <a:ext uri="{FF2B5EF4-FFF2-40B4-BE49-F238E27FC236}">
-                <a16:creationId xmlns:a16="http://schemas.microsoft.com/office/drawing/2014/main" id="{C18830B2-00D6-4BD2-BE11-19215C420251}"/>
-              </a:ext>
-            </a:extLst>
-          </p:cNvPr>
-          <p:cNvSpPr txBox="1">
-            <a:spLocks/>
-          </p:cNvSpPr>
-          <p:nvPr/>
-        </p:nvSpPr>
-        <p:spPr>
-          <a:xfrm>
-            <a:off x="1098000" y="288000"/>
-            <a:ext cx="9760046" cy="2006995"/>
-          </a:xfrm>
-          <a:prstGeom prst="rect">
-            <a:avLst/>
-          </a:prstGeom>
-        </p:spPr>
-        <p:txBody>
-          <a:bodyPr anchor="ctr">
-            <a:normAutofit/>
-          </a:bodyPr>
-          <a:lstStyle>
-            <a:lvl1pPr algn="l" defTabSz="914400" rtl="0" eaLnBrk="1" latinLnBrk="0" hangingPunct="1">
-              <a:lnSpc>
-                <a:spcPct val="85000"/>
-              </a:lnSpc>
-              <a:spcBef>
-                <a:spcPct val="0"/>
-              </a:spcBef>
-              <a:buNone/>
-              <a:defRPr sz="4800" kern="1200" spc="-50" baseline="0">
-                <a:solidFill>
-                  <a:schemeClr val="tx1">
-                    <a:lumMod val="75000"/>
-                    <a:lumOff val="25000"/>
-                  </a:schemeClr>
-                </a:solidFill>
-                <a:latin typeface="+mj-lt"/>
-                <a:ea typeface="+mj-ea"/>
-                <a:cs typeface="+mj-cs"/>
-              </a:defRPr>
-            </a:lvl1pPr>
-          </a:lstStyle>
-          <a:p>
-            <a:r>
-              <a:rPr lang="hu-HU" b="1" dirty="0">
-                <a:latin typeface="Bahnschrift SemiBold" panose="020B0502040204020203" pitchFamily="34" charset="0"/>
-              </a:rPr>
-              <a:t>A projekt bemutatása</a:t>
-            </a:r>
-          </a:p>
-        </p:txBody>
-      </p:sp>
-      <p:pic>
-        <p:nvPicPr>
-          <p:cNvPr id="4" name="Kép 3">
-            <a:extLst>
-              <a:ext uri="{FF2B5EF4-FFF2-40B4-BE49-F238E27FC236}">
-                <a16:creationId xmlns:a16="http://schemas.microsoft.com/office/drawing/2014/main" id="{7912835F-A62C-4B0D-B733-74106EBFDA26}"/>
-              </a:ext>
-            </a:extLst>
-          </p:cNvPr>
-          <p:cNvPicPr>
-            <a:picLocks noChangeAspect="1"/>
-          </p:cNvPicPr>
-          <p:nvPr/>
-        </p:nvPicPr>
-        <p:blipFill rotWithShape="1">
-          <a:blip r:embed="rId2">
-            <a:alphaModFix amt="50000"/>
-            <a:extLst>
-              <a:ext uri="{28A0092B-C50C-407E-A947-70E740481C1C}">
-                <a14:useLocalDpi xmlns:a14="http://schemas.microsoft.com/office/drawing/2010/main" val="0"/>
-              </a:ext>
-            </a:extLst>
-          </a:blip>
-          <a:srcRect t="58555" r="67375"/>
-          <a:stretch/>
-        </p:blipFill>
-        <p:spPr>
-          <a:xfrm>
-            <a:off x="10619475" y="1036308"/>
-            <a:ext cx="1364958" cy="571501"/>
-          </a:xfrm>
-          <a:prstGeom prst="rect">
-            <a:avLst/>
-          </a:prstGeom>
-        </p:spPr>
-      </p:pic>
-      <p:cxnSp>
-        <p:nvCxnSpPr>
-          <p:cNvPr id="9" name="Egyenes összekötő 8">
-            <a:extLst>
-              <a:ext uri="{FF2B5EF4-FFF2-40B4-BE49-F238E27FC236}">
-                <a16:creationId xmlns:a16="http://schemas.microsoft.com/office/drawing/2014/main" id="{670AB60B-B385-4E46-A012-AD0038CF5F38}"/>
-              </a:ext>
-            </a:extLst>
-          </p:cNvPr>
-          <p:cNvCxnSpPr>
-            <a:cxnSpLocks/>
-          </p:cNvCxnSpPr>
-          <p:nvPr/>
-        </p:nvCxnSpPr>
-        <p:spPr>
-          <a:xfrm>
-            <a:off x="1209600" y="1738800"/>
-            <a:ext cx="9982275" cy="0"/>
-          </a:xfrm>
-          <a:prstGeom prst="line">
-            <a:avLst/>
-          </a:prstGeom>
-          <a:ln>
-            <a:solidFill>
-              <a:schemeClr val="tx1">
-                <a:lumMod val="50000"/>
-                <a:lumOff val="50000"/>
-              </a:schemeClr>
-            </a:solidFill>
-          </a:ln>
-        </p:spPr>
-        <p:style>
-          <a:lnRef idx="1">
-            <a:schemeClr val="accent1"/>
-          </a:lnRef>
-          <a:fillRef idx="0">
-            <a:schemeClr val="accent1"/>
-          </a:fillRef>
-          <a:effectRef idx="0">
-            <a:schemeClr val="accent1"/>
-          </a:effectRef>
-          <a:fontRef idx="minor">
-            <a:schemeClr val="tx1"/>
-          </a:fontRef>
-        </p:style>
-      </p:cxnSp>
-      <p:pic>
-        <p:nvPicPr>
-          <p:cNvPr id="10" name="Kép 9">
-            <a:extLst>
-              <a:ext uri="{FF2B5EF4-FFF2-40B4-BE49-F238E27FC236}">
-                <a16:creationId xmlns:a16="http://schemas.microsoft.com/office/drawing/2014/main" id="{CB9406C6-CF11-47E5-AEFA-0BA584F8F8D2}"/>
-              </a:ext>
-            </a:extLst>
-          </p:cNvPr>
-          <p:cNvPicPr>
-            <a:picLocks noChangeAspect="1"/>
-          </p:cNvPicPr>
-          <p:nvPr/>
-        </p:nvPicPr>
-        <p:blipFill rotWithShape="1">
-          <a:blip r:embed="rId2">
-            <a:alphaModFix amt="50000"/>
-            <a:extLst>
-              <a:ext uri="{28A0092B-C50C-407E-A947-70E740481C1C}">
-                <a14:useLocalDpi xmlns:a14="http://schemas.microsoft.com/office/drawing/2010/main" val="0"/>
-              </a:ext>
-            </a:extLst>
-          </a:blip>
-          <a:srcRect l="1" r="61666" b="38896"/>
-          <a:stretch/>
-        </p:blipFill>
-        <p:spPr>
-          <a:xfrm>
-            <a:off x="10565538" y="349786"/>
-            <a:ext cx="1418895" cy="745451"/>
-          </a:xfrm>
-          <a:prstGeom prst="rect">
-            <a:avLst/>
-          </a:prstGeom>
-        </p:spPr>
-      </p:pic>
-      <p:sp>
-        <p:nvSpPr>
-          <p:cNvPr id="6" name="Tartalom helye 2">
-            <a:extLst>
-              <a:ext uri="{FF2B5EF4-FFF2-40B4-BE49-F238E27FC236}">
-                <a16:creationId xmlns:a16="http://schemas.microsoft.com/office/drawing/2014/main" id="{FF047810-2018-4C33-B261-D1F6226BE9D7}"/>
-              </a:ext>
-            </a:extLst>
-          </p:cNvPr>
-          <p:cNvSpPr txBox="1">
-            <a:spLocks/>
-          </p:cNvSpPr>
-          <p:nvPr/>
-        </p:nvSpPr>
-        <p:spPr>
-          <a:xfrm>
-            <a:off x="1097280" y="1874067"/>
-            <a:ext cx="10058400" cy="4330005"/>
-          </a:xfrm>
-          <a:prstGeom prst="rect">
-            <a:avLst/>
-          </a:prstGeom>
-        </p:spPr>
-        <p:txBody>
-          <a:bodyPr>
-            <a:normAutofit/>
-          </a:bodyPr>
-          <a:lstStyle>
-            <a:lvl1pPr marL="91440" indent="-91440" algn="l" defTabSz="914400" rtl="0" eaLnBrk="1" latinLnBrk="0" hangingPunct="1">
-              <a:lnSpc>
-                <a:spcPct val="90000"/>
-              </a:lnSpc>
-              <a:spcBef>
-                <a:spcPts val="1200"/>
-              </a:spcBef>
-              <a:spcAft>
-                <a:spcPts val="200"/>
-              </a:spcAft>
-              <a:buClr>
-                <a:schemeClr val="accent1"/>
-              </a:buClr>
-              <a:buSzPct val="100000"/>
-              <a:buFont typeface="Calibri" panose="020F0502020204030204" pitchFamily="34" charset="0"/>
-              <a:buChar char=" "/>
-              <a:defRPr sz="2000" kern="1200">
-                <a:solidFill>
-                  <a:schemeClr val="tx1">
-                    <a:lumMod val="75000"/>
-                    <a:lumOff val="25000"/>
-                  </a:schemeClr>
-                </a:solidFill>
-                <a:latin typeface="+mn-lt"/>
-                <a:ea typeface="+mn-ea"/>
-                <a:cs typeface="+mn-cs"/>
-              </a:defRPr>
-            </a:lvl1pPr>
-            <a:lvl2pPr marL="384048" indent="-182880" algn="l" defTabSz="914400" rtl="0" eaLnBrk="1" latinLnBrk="0" hangingPunct="1">
-              <a:lnSpc>
-                <a:spcPct val="90000"/>
-              </a:lnSpc>
-              <a:spcBef>
-                <a:spcPts val="200"/>
-              </a:spcBef>
-              <a:spcAft>
-                <a:spcPts val="400"/>
-              </a:spcAft>
-              <a:buClr>
-                <a:schemeClr val="accent1"/>
-              </a:buClr>
-              <a:buFont typeface="Calibri" pitchFamily="34" charset="0"/>
-              <a:buChar char="◦"/>
-              <a:defRPr sz="1800" kern="1200">
-                <a:solidFill>
-                  <a:schemeClr val="tx1">
-                    <a:lumMod val="75000"/>
-                    <a:lumOff val="25000"/>
-                  </a:schemeClr>
-                </a:solidFill>
-                <a:latin typeface="+mn-lt"/>
-                <a:ea typeface="+mn-ea"/>
-                <a:cs typeface="+mn-cs"/>
-              </a:defRPr>
-            </a:lvl2pPr>
-            <a:lvl3pPr marL="566928" indent="-182880" algn="l" defTabSz="914400" rtl="0" eaLnBrk="1" latinLnBrk="0" hangingPunct="1">
-              <a:lnSpc>
-                <a:spcPct val="90000"/>
-              </a:lnSpc>
-              <a:spcBef>
-                <a:spcPts val="200"/>
-              </a:spcBef>
-              <a:spcAft>
-                <a:spcPts val="400"/>
-              </a:spcAft>
-              <a:buClr>
-                <a:schemeClr val="accent1"/>
-              </a:buClr>
-              <a:buFont typeface="Calibri" pitchFamily="34" charset="0"/>
-              <a:buChar char="◦"/>
-              <a:defRPr sz="1400" kern="1200">
-                <a:solidFill>
-                  <a:schemeClr val="tx1">
-                    <a:lumMod val="75000"/>
-                    <a:lumOff val="25000"/>
-                  </a:schemeClr>
-                </a:solidFill>
-                <a:latin typeface="+mn-lt"/>
-                <a:ea typeface="+mn-ea"/>
-                <a:cs typeface="+mn-cs"/>
-              </a:defRPr>
-            </a:lvl3pPr>
-            <a:lvl4pPr marL="749808" indent="-182880" algn="l" defTabSz="914400" rtl="0" eaLnBrk="1" latinLnBrk="0" hangingPunct="1">
-              <a:lnSpc>
-                <a:spcPct val="90000"/>
-              </a:lnSpc>
-              <a:spcBef>
-                <a:spcPts val="200"/>
-              </a:spcBef>
-              <a:spcAft>
-                <a:spcPts val="400"/>
-              </a:spcAft>
-              <a:buClr>
-                <a:schemeClr val="accent1"/>
-              </a:buClr>
-              <a:buFont typeface="Calibri" pitchFamily="34" charset="0"/>
-              <a:buChar char="◦"/>
-              <a:defRPr sz="1400" kern="1200">
-                <a:solidFill>
-                  <a:schemeClr val="tx1">
-                    <a:lumMod val="75000"/>
-                    <a:lumOff val="25000"/>
-                  </a:schemeClr>
-                </a:solidFill>
-                <a:latin typeface="+mn-lt"/>
-                <a:ea typeface="+mn-ea"/>
-                <a:cs typeface="+mn-cs"/>
-              </a:defRPr>
-            </a:lvl4pPr>
-            <a:lvl5pPr marL="932688" indent="-182880" algn="l" defTabSz="914400" rtl="0" eaLnBrk="1" latinLnBrk="0" hangingPunct="1">
-              <a:lnSpc>
-                <a:spcPct val="90000"/>
-              </a:lnSpc>
-              <a:spcBef>
-                <a:spcPts val="200"/>
-              </a:spcBef>
-              <a:spcAft>
-                <a:spcPts val="400"/>
-              </a:spcAft>
-              <a:buClr>
-                <a:schemeClr val="accent1"/>
-              </a:buClr>
-              <a:buFont typeface="Calibri" pitchFamily="34" charset="0"/>
-              <a:buChar char="◦"/>
-              <a:defRPr sz="1400" kern="1200">
-                <a:solidFill>
-                  <a:schemeClr val="tx1">
-                    <a:lumMod val="75000"/>
-                    <a:lumOff val="25000"/>
-                  </a:schemeClr>
-                </a:solidFill>
-                <a:latin typeface="+mn-lt"/>
-                <a:ea typeface="+mn-ea"/>
-                <a:cs typeface="+mn-cs"/>
-              </a:defRPr>
-            </a:lvl5pPr>
-            <a:lvl6pPr marL="1100000" indent="-228600" algn="l" defTabSz="914400" rtl="0" eaLnBrk="1" latinLnBrk="0" hangingPunct="1">
-              <a:lnSpc>
-                <a:spcPct val="90000"/>
-              </a:lnSpc>
-              <a:spcBef>
-                <a:spcPts val="200"/>
-              </a:spcBef>
-              <a:spcAft>
-                <a:spcPts val="400"/>
-              </a:spcAft>
-              <a:buClr>
-                <a:schemeClr val="accent1"/>
-              </a:buClr>
-              <a:buFont typeface="Calibri" pitchFamily="34" charset="0"/>
-              <a:buChar char="◦"/>
-              <a:defRPr sz="1400" kern="1200">
-                <a:solidFill>
-                  <a:schemeClr val="tx1">
-                    <a:lumMod val="75000"/>
-                    <a:lumOff val="25000"/>
-                  </a:schemeClr>
-                </a:solidFill>
-                <a:latin typeface="+mn-lt"/>
-                <a:ea typeface="+mn-ea"/>
-                <a:cs typeface="+mn-cs"/>
-              </a:defRPr>
-            </a:lvl6pPr>
-            <a:lvl7pPr marL="1300000" indent="-228600" algn="l" defTabSz="914400" rtl="0" eaLnBrk="1" latinLnBrk="0" hangingPunct="1">
-              <a:lnSpc>
-                <a:spcPct val="90000"/>
-              </a:lnSpc>
-              <a:spcBef>
-                <a:spcPts val="200"/>
-              </a:spcBef>
-              <a:spcAft>
-                <a:spcPts val="400"/>
-              </a:spcAft>
-              <a:buClr>
-                <a:schemeClr val="accent1"/>
-              </a:buClr>
-              <a:buFont typeface="Calibri" pitchFamily="34" charset="0"/>
-              <a:buChar char="◦"/>
-              <a:defRPr sz="1400" kern="1200">
-                <a:solidFill>
-                  <a:schemeClr val="tx1">
-                    <a:lumMod val="75000"/>
-                    <a:lumOff val="25000"/>
-                  </a:schemeClr>
-                </a:solidFill>
-                <a:latin typeface="+mn-lt"/>
-                <a:ea typeface="+mn-ea"/>
-                <a:cs typeface="+mn-cs"/>
-              </a:defRPr>
-            </a:lvl7pPr>
-            <a:lvl8pPr marL="1500000" indent="-228600" algn="l" defTabSz="914400" rtl="0" eaLnBrk="1" latinLnBrk="0" hangingPunct="1">
-              <a:lnSpc>
-                <a:spcPct val="90000"/>
-              </a:lnSpc>
-              <a:spcBef>
-                <a:spcPts val="200"/>
-              </a:spcBef>
-              <a:spcAft>
-                <a:spcPts val="400"/>
-              </a:spcAft>
-              <a:buClr>
-                <a:schemeClr val="accent1"/>
-              </a:buClr>
-              <a:buFont typeface="Calibri" pitchFamily="34" charset="0"/>
-              <a:buChar char="◦"/>
-              <a:defRPr sz="1400" kern="1200">
-                <a:solidFill>
-                  <a:schemeClr val="tx1">
-                    <a:lumMod val="75000"/>
-                    <a:lumOff val="25000"/>
-                  </a:schemeClr>
-                </a:solidFill>
-                <a:latin typeface="+mn-lt"/>
-                <a:ea typeface="+mn-ea"/>
-                <a:cs typeface="+mn-cs"/>
-              </a:defRPr>
-            </a:lvl8pPr>
-            <a:lvl9pPr marL="1700000" indent="-228600" algn="l" defTabSz="914400" rtl="0" eaLnBrk="1" latinLnBrk="0" hangingPunct="1">
-              <a:lnSpc>
-                <a:spcPct val="90000"/>
-              </a:lnSpc>
-              <a:spcBef>
-                <a:spcPts val="200"/>
-              </a:spcBef>
-              <a:spcAft>
-                <a:spcPts val="400"/>
-              </a:spcAft>
-              <a:buClr>
-                <a:schemeClr val="accent1"/>
-              </a:buClr>
-              <a:buFont typeface="Calibri" pitchFamily="34" charset="0"/>
-              <a:buChar char="◦"/>
-              <a:defRPr sz="1400" kern="1200">
-                <a:solidFill>
-                  <a:schemeClr val="tx1">
-                    <a:lumMod val="75000"/>
-                    <a:lumOff val="25000"/>
-                  </a:schemeClr>
-                </a:solidFill>
-                <a:latin typeface="+mn-lt"/>
-                <a:ea typeface="+mn-ea"/>
-                <a:cs typeface="+mn-cs"/>
-              </a:defRPr>
-            </a:lvl9pPr>
-          </a:lstStyle>
-          <a:p>
-            <a:pPr>
-              <a:lnSpc>
-                <a:spcPct val="150000"/>
-              </a:lnSpc>
-            </a:pPr>
-            <a:r>
-              <a:rPr lang="hu-HU" sz="2400" dirty="0">
-                <a:solidFill>
-                  <a:srgbClr val="BD582C"/>
-                </a:solidFill>
-                <a:latin typeface="Bahnschrift Light" panose="020B0502040204020203" pitchFamily="34" charset="0"/>
-              </a:rPr>
-              <a:t>Probléma</a:t>
-            </a:r>
-          </a:p>
-          <a:p>
-            <a:pPr lvl="1">
-              <a:buFont typeface="Arial" panose="020B0604020202020204" pitchFamily="34" charset="0"/>
-              <a:buChar char="•"/>
-            </a:pPr>
-            <a:r>
-              <a:rPr lang="hu-HU" sz="2000" dirty="0">
-                <a:latin typeface="Bahnschrift Light" panose="020B0502040204020203" pitchFamily="34" charset="0"/>
-              </a:rPr>
-              <a:t> Papíron történő étkezés rendelés, számlázás</a:t>
-            </a:r>
-          </a:p>
-          <a:p>
-            <a:pPr lvl="1">
-              <a:buFont typeface="Arial" panose="020B0604020202020204" pitchFamily="34" charset="0"/>
-              <a:buChar char="•"/>
-            </a:pPr>
-            <a:r>
-              <a:rPr lang="hu-HU" sz="2000" dirty="0">
-                <a:latin typeface="Bahnschrift Light" panose="020B0502040204020203" pitchFamily="34" charset="0"/>
-              </a:rPr>
-              <a:t> Lemondási nehézségek</a:t>
-            </a:r>
-          </a:p>
-          <a:p>
-            <a:pPr lvl="1">
-              <a:buFont typeface="Arial" panose="020B0604020202020204" pitchFamily="34" charset="0"/>
-              <a:buChar char="•"/>
-            </a:pPr>
-            <a:r>
-              <a:rPr lang="hu-HU" sz="2000" dirty="0">
-                <a:latin typeface="Bahnschrift Light" panose="020B0502040204020203" pitchFamily="34" charset="0"/>
-              </a:rPr>
-              <a:t> Nincs menü választási lehetőség előzetesen</a:t>
-            </a:r>
-          </a:p>
-          <a:p>
-            <a:endParaRPr lang="hu-HU" dirty="0">
-              <a:latin typeface="Bahnschrift Light" panose="020B0502040204020203" pitchFamily="34" charset="0"/>
-            </a:endParaRPr>
-          </a:p>
-          <a:p>
-            <a:pPr>
-              <a:lnSpc>
-                <a:spcPct val="150000"/>
-              </a:lnSpc>
-            </a:pPr>
-            <a:r>
-              <a:rPr lang="hu-HU" sz="2400" dirty="0">
-                <a:solidFill>
-                  <a:srgbClr val="BD582C"/>
-                </a:solidFill>
-                <a:latin typeface="Bahnschrift Light" panose="020B0502040204020203" pitchFamily="34" charset="0"/>
-              </a:rPr>
-              <a:t>Megoldás</a:t>
-            </a:r>
-          </a:p>
-          <a:p>
-            <a:pPr lvl="1">
-              <a:buFont typeface="Arial" panose="020B0604020202020204" pitchFamily="34" charset="0"/>
-              <a:buChar char="•"/>
-            </a:pPr>
-            <a:r>
-              <a:rPr lang="hu-HU" dirty="0">
-                <a:latin typeface="Bahnschrift Light" panose="020B0502040204020203" pitchFamily="34" charset="0"/>
-              </a:rPr>
-              <a:t> </a:t>
-            </a:r>
-            <a:r>
-              <a:rPr lang="hu-HU" sz="2000" dirty="0">
-                <a:latin typeface="Bahnschrift Light" panose="020B0502040204020203" pitchFamily="34" charset="0"/>
-              </a:rPr>
-              <a:t>Online felület a rendeléshez, lemondáshoz</a:t>
-            </a:r>
-          </a:p>
-          <a:p>
-            <a:pPr lvl="1">
-              <a:buFont typeface="Arial" panose="020B0604020202020204" pitchFamily="34" charset="0"/>
-              <a:buChar char="•"/>
-            </a:pPr>
-            <a:r>
-              <a:rPr lang="hu-HU" sz="2000" dirty="0">
-                <a:latin typeface="Bahnschrift Light" panose="020B0502040204020203" pitchFamily="34" charset="0"/>
-              </a:rPr>
-              <a:t> Előre kiválasztott menü</a:t>
-            </a:r>
-          </a:p>
-          <a:p>
-            <a:pPr lvl="1">
-              <a:buFont typeface="Arial" panose="020B0604020202020204" pitchFamily="34" charset="0"/>
-              <a:buChar char="•"/>
-            </a:pPr>
-            <a:r>
-              <a:rPr lang="hu-HU" sz="2000" dirty="0">
-                <a:latin typeface="Bahnschrift Light" panose="020B0502040204020203" pitchFamily="34" charset="0"/>
-              </a:rPr>
-              <a:t> Digitális számla</a:t>
-            </a:r>
-          </a:p>
-        </p:txBody>
-      </p:sp>
-      <p:pic>
-        <p:nvPicPr>
-          <p:cNvPr id="7" name="Kép 6">
-            <a:extLst>
-              <a:ext uri="{FF2B5EF4-FFF2-40B4-BE49-F238E27FC236}">
-                <a16:creationId xmlns:a16="http://schemas.microsoft.com/office/drawing/2014/main" id="{3070409B-88A6-42DC-B01A-8F8F5314A566}"/>
-              </a:ext>
-            </a:extLst>
-          </p:cNvPr>
-          <p:cNvPicPr>
-            <a:picLocks noChangeAspect="1"/>
-          </p:cNvPicPr>
-          <p:nvPr/>
-        </p:nvPicPr>
-        <p:blipFill>
-          <a:blip r:embed="rId3"/>
-          <a:stretch>
-            <a:fillRect/>
-          </a:stretch>
-        </p:blipFill>
-        <p:spPr>
-          <a:xfrm>
-            <a:off x="7568575" y="2498937"/>
-            <a:ext cx="3983647" cy="3169784"/>
-          </a:xfrm>
-          <a:prstGeom prst="rect">
-            <a:avLst/>
-          </a:prstGeom>
-        </p:spPr>
-      </p:pic>
-    </p:spTree>
-    <p:extLst>
-      <p:ext uri="{BB962C8B-B14F-4D97-AF65-F5344CB8AC3E}">
-        <p14:creationId xmlns:p14="http://schemas.microsoft.com/office/powerpoint/2010/main" val="1681993095"/>
-      </p:ext>
-    </p:extLst>
-  </p:cSld>
-  <p:clrMapOvr>
-    <a:masterClrMapping/>
-  </p:clrMapOvr>
-  <mc:AlternateContent xmlns:mc="http://schemas.openxmlformats.org/markup-compatibility/2006" xmlns:p159="http://schemas.microsoft.com/office/powerpoint/2015/09/main">
-    <mc:Choice Requires="p159">
-      <p:transition xmlns:p14="http://schemas.microsoft.com/office/powerpoint/2010/main" spd="slow" p14:dur="2000">
-        <p159:morph option="byObject"/>
-      </p:transition>
-    </mc:Choice>
-    <mc:Fallback xmlns="">
-      <p:transition spd="slow">
-        <p:fade/>
-      </p:transition>
-    </mc:Fallback>
-  </mc:AlternateContent>
-</p:sld>
-</file>
-
-<file path=ppt/slides/slide5.xml><?xml version="1.0" encoding="utf-8"?>
-<p:sld xmlns:a="http://schemas.openxmlformats.org/drawingml/2006/main" xmlns:r="http://schemas.openxmlformats.org/officeDocument/2006/relationships" xmlns:p="http://schemas.openxmlformats.org/presentationml/2006/main">
-  <p:cSld>
-    <p:bg>
-      <p:bgPr>
-        <a:solidFill>
-          <a:srgbClr val="FDF7E9"/>
-        </a:solidFill>
-        <a:effectLst/>
-      </p:bgPr>
-    </p:bg>
-    <p:spTree>
-      <p:nvGrpSpPr>
-        <p:cNvPr id="1" name=""/>
-        <p:cNvGrpSpPr/>
-        <p:nvPr/>
-      </p:nvGrpSpPr>
-      <p:grpSpPr>
-        <a:xfrm>
-          <a:off x="0" y="0"/>
-          <a:ext cx="0" cy="0"/>
-          <a:chOff x="0" y="0"/>
-          <a:chExt cx="0" cy="0"/>
-        </a:xfrm>
-      </p:grpSpPr>
-      <p:sp>
-        <p:nvSpPr>
           <p:cNvPr id="3" name="Tartalom helye 2">
             <a:extLst>
               <a:ext uri="{FF2B5EF4-FFF2-40B4-BE49-F238E27FC236}">
@@ -12137,20 +9993,7 @@
             </a:pPr>
             <a:r>
               <a:rPr lang="hu-HU" sz="2200" dirty="0"/>
-              <a:t> Étlapkezelés (menü opciók)</a:t>
-            </a:r>
-          </a:p>
-          <a:p>
-            <a:pPr lvl="1">
-              <a:lnSpc>
-                <a:spcPct val="130000"/>
-              </a:lnSpc>
-              <a:buFont typeface="Arial" panose="020B0604020202020204" pitchFamily="34" charset="0"/>
-              <a:buChar char="•"/>
-            </a:pPr>
-            <a:r>
-              <a:rPr lang="hu-HU" sz="2200" dirty="0"/>
-              <a:t> Allergének, tápérték információk</a:t>
+              <a:t> Étlapkezelés (menük)</a:t>
             </a:r>
           </a:p>
           <a:p>
@@ -12338,7 +10181,7 @@
 </p:sld>
 </file>
 
-<file path=ppt/slides/slide6.xml><?xml version="1.0" encoding="utf-8"?>
+<file path=ppt/slides/slide4.xml><?xml version="1.0" encoding="utf-8"?>
 <p:sld xmlns:a="http://schemas.openxmlformats.org/drawingml/2006/main" xmlns:r="http://schemas.openxmlformats.org/officeDocument/2006/relationships" xmlns:p="http://schemas.openxmlformats.org/presentationml/2006/main">
   <p:cSld>
     <p:bg>
@@ -12556,7 +10399,7 @@
             <p:nvPr/>
           </p:nvPicPr>
           <p:blipFill rotWithShape="1">
-            <a:blip r:embed="rId2">
+            <a:blip r:embed="rId3">
               <a:alphaModFix amt="50000"/>
               <a:extLst>
                 <a:ext uri="{28A0092B-C50C-407E-A947-70E740481C1C}">
@@ -12592,7 +10435,7 @@
             <p:nvPr/>
           </p:nvPicPr>
           <p:blipFill rotWithShape="1">
-            <a:blip r:embed="rId2">
+            <a:blip r:embed="rId3">
               <a:alphaModFix amt="50000"/>
               <a:extLst>
                 <a:ext uri="{28A0092B-C50C-407E-A947-70E740481C1C}">
@@ -12629,7 +10472,7 @@
           <p:nvPr/>
         </p:nvPicPr>
         <p:blipFill>
-          <a:blip r:embed="rId3">
+          <a:blip r:embed="rId4">
             <a:extLst>
               <a:ext uri="{28A0092B-C50C-407E-A947-70E740481C1C}">
                 <a14:useLocalDpi xmlns:a14="http://schemas.microsoft.com/office/drawing/2010/main" val="0"/>
@@ -12679,15 +10522,6 @@
               <a:srgbClr val="FFFFFF"/>
             </a:contourClr>
           </a:sp3d>
-          <a:extLst>
-            <a:ext uri="{909E8E84-426E-40DD-AFC4-6F175D3DCCD1}">
-              <a14:hiddenFill xmlns:a14="http://schemas.microsoft.com/office/drawing/2010/main">
-                <a:solidFill>
-                  <a:srgbClr val="FFFFFF"/>
-                </a:solidFill>
-              </a14:hiddenFill>
-            </a:ext>
-          </a:extLst>
         </p:spPr>
       </p:pic>
       <p:sp>
@@ -12840,7 +10674,7 @@
           <p:nvPr/>
         </p:nvPicPr>
         <p:blipFill>
-          <a:blip r:embed="rId4"/>
+          <a:blip r:embed="rId5"/>
           <a:stretch>
             <a:fillRect/>
           </a:stretch>
@@ -12900,7 +10734,7 @@
           <p:nvPr/>
         </p:nvPicPr>
         <p:blipFill rotWithShape="1">
-          <a:blip r:embed="rId5">
+          <a:blip r:embed="rId6">
             <a:extLst>
               <a:ext uri="{28A0092B-C50C-407E-A947-70E740481C1C}">
                 <a14:useLocalDpi xmlns:a14="http://schemas.microsoft.com/office/drawing/2010/main" val="0"/>
@@ -12966,7 +10800,7 @@
 </p:sld>
 </file>
 
-<file path=ppt/slides/slide7.xml><?xml version="1.0" encoding="utf-8"?>
+<file path=ppt/slides/slide5.xml><?xml version="1.0" encoding="utf-8"?>
 <p:sld xmlns:a="http://schemas.openxmlformats.org/drawingml/2006/main" xmlns:r="http://schemas.openxmlformats.org/officeDocument/2006/relationships" xmlns:p="http://schemas.openxmlformats.org/presentationml/2006/main">
   <p:cSld>
     <p:bg>
@@ -13068,7 +10902,9 @@
         </p:nvSpPr>
         <p:spPr/>
         <p:txBody>
-          <a:bodyPr/>
+          <a:bodyPr>
+            <a:normAutofit fontScale="92500" lnSpcReduction="20000"/>
+          </a:bodyPr>
           <a:lstStyle/>
           <a:p>
             <a:pPr>
@@ -13107,7 +10943,7 @@
             </a:pPr>
             <a:r>
               <a:rPr lang="hu-HU" dirty="0"/>
-              <a:t> Felehasználók kezelése</a:t>
+              <a:t> Felhasználók kezelése</a:t>
             </a:r>
           </a:p>
           <a:p>
@@ -13134,6 +10970,19 @@
             <a:r>
               <a:rPr lang="hu-HU" dirty="0"/>
               <a:t> Rendelések</a:t>
+            </a:r>
+          </a:p>
+          <a:p>
+            <a:pPr>
+              <a:lnSpc>
+                <a:spcPct val="150000"/>
+              </a:lnSpc>
+              <a:buFont typeface="Wingdings" panose="05000000000000000000" pitchFamily="2" charset="2"/>
+              <a:buChar char="v"/>
+            </a:pPr>
+            <a:r>
+              <a:rPr lang="hu-HU" dirty="0"/>
+              <a:t> Backend tesztelés</a:t>
             </a:r>
           </a:p>
         </p:txBody>
@@ -13185,7 +11034,9 @@
         </p:nvSpPr>
         <p:spPr/>
         <p:txBody>
-          <a:bodyPr/>
+          <a:bodyPr>
+            <a:normAutofit fontScale="92500" lnSpcReduction="20000"/>
+          </a:bodyPr>
           <a:lstStyle/>
           <a:p>
             <a:pPr>
@@ -13250,6 +11101,19 @@
             <a:r>
               <a:rPr lang="hu-HU" dirty="0"/>
               <a:t> Számla generálás</a:t>
+            </a:r>
+          </a:p>
+          <a:p>
+            <a:pPr>
+              <a:lnSpc>
+                <a:spcPct val="150000"/>
+              </a:lnSpc>
+              <a:buFont typeface="Wingdings" panose="05000000000000000000" pitchFamily="2" charset="2"/>
+              <a:buChar char="v"/>
+            </a:pPr>
+            <a:r>
+              <a:rPr lang="hu-HU" dirty="0"/>
+              <a:t> Frontend tesztelés</a:t>
             </a:r>
           </a:p>
           <a:p>
@@ -13412,7 +11276,7 @@
 </p:sld>
 </file>
 
-<file path=ppt/slides/slide8.xml><?xml version="1.0" encoding="utf-8"?>
+<file path=ppt/slides/slide6.xml><?xml version="1.0" encoding="utf-8"?>
 <p:sld xmlns:a="http://schemas.openxmlformats.org/drawingml/2006/main" xmlns:r="http://schemas.openxmlformats.org/officeDocument/2006/relationships" xmlns:p="http://schemas.openxmlformats.org/presentationml/2006/main">
   <p:cSld>
     <p:bg>
@@ -13513,7 +11377,7 @@
             </a:r>
             <a:r>
               <a:rPr lang="hu-HU" sz="2000" dirty="0"/>
-              <a:t> 12</a:t>
+              <a:t> </a:t>
             </a:r>
           </a:p>
           <a:p>
@@ -13612,7 +11476,7 @@
             <p:nvPr/>
           </p:nvPicPr>
           <p:blipFill rotWithShape="1">
-            <a:blip r:embed="rId2">
+            <a:blip r:embed="rId3">
               <a:alphaModFix amt="50000"/>
               <a:extLst>
                 <a:ext uri="{28A0092B-C50C-407E-A947-70E740481C1C}">
@@ -13648,7 +11512,7 @@
             <p:nvPr/>
           </p:nvPicPr>
           <p:blipFill rotWithShape="1">
-            <a:blip r:embed="rId2">
+            <a:blip r:embed="rId3">
               <a:alphaModFix amt="50000"/>
               <a:extLst>
                 <a:ext uri="{28A0092B-C50C-407E-A947-70E740481C1C}">
@@ -13685,7 +11549,7 @@
           <p:nvPr/>
         </p:nvPicPr>
         <p:blipFill rotWithShape="1">
-          <a:blip r:embed="rId3">
+          <a:blip r:embed="rId4">
             <a:extLst>
               <a:ext uri="{28A0092B-C50C-407E-A947-70E740481C1C}">
                 <a14:useLocalDpi xmlns:a14="http://schemas.microsoft.com/office/drawing/2010/main" val="0"/>
@@ -13735,7 +11599,7 @@
           <p:nvPr/>
         </p:nvPicPr>
         <p:blipFill rotWithShape="1">
-          <a:blip r:embed="rId4">
+          <a:blip r:embed="rId5">
             <a:extLst>
               <a:ext uri="{28A0092B-C50C-407E-A947-70E740481C1C}">
                 <a14:useLocalDpi xmlns:a14="http://schemas.microsoft.com/office/drawing/2010/main" val="0"/>
@@ -13786,7 +11650,7 @@
 </p:sld>
 </file>
 
-<file path=ppt/slides/slide9.xml><?xml version="1.0" encoding="utf-8"?>
+<file path=ppt/slides/slide7.xml><?xml version="1.0" encoding="utf-8"?>
 <p:sld xmlns:a="http://schemas.openxmlformats.org/drawingml/2006/main" xmlns:r="http://schemas.openxmlformats.org/officeDocument/2006/relationships" xmlns:p="http://schemas.openxmlformats.org/presentationml/2006/main">
   <p:cSld>
     <p:bg>
@@ -13848,7 +11712,7 @@
             </a:pPr>
             <a:r>
               <a:rPr lang="hu-HU" sz="2000" dirty="0"/>
-              <a:t>Vue.js 3</a:t>
+              <a:t>Vue.js</a:t>
             </a:r>
           </a:p>
           <a:p>
@@ -14186,6 +12050,606 @@
     <p:extLst>
       <p:ext uri="{BB962C8B-B14F-4D97-AF65-F5344CB8AC3E}">
         <p14:creationId xmlns:p14="http://schemas.microsoft.com/office/powerpoint/2010/main" val="2480736290"/>
+      </p:ext>
+    </p:extLst>
+  </p:cSld>
+  <p:clrMapOvr>
+    <a:masterClrMapping/>
+  </p:clrMapOvr>
+  <p:transition spd="slow">
+    <p:cover/>
+  </p:transition>
+</p:sld>
+</file>
+
+<file path=ppt/slides/slide8.xml><?xml version="1.0" encoding="utf-8"?>
+<p:sld xmlns:a="http://schemas.openxmlformats.org/drawingml/2006/main" xmlns:r="http://schemas.openxmlformats.org/officeDocument/2006/relationships" xmlns:p="http://schemas.openxmlformats.org/presentationml/2006/main">
+  <p:cSld>
+    <p:bg>
+      <p:bgPr>
+        <a:solidFill>
+          <a:srgbClr val="FDF7E9"/>
+        </a:solidFill>
+        <a:effectLst/>
+      </p:bgPr>
+    </p:bg>
+    <p:spTree>
+      <p:nvGrpSpPr>
+        <p:cNvPr id="1" name=""/>
+        <p:cNvGrpSpPr/>
+        <p:nvPr/>
+      </p:nvGrpSpPr>
+      <p:grpSpPr>
+        <a:xfrm>
+          <a:off x="0" y="0"/>
+          <a:ext cx="0" cy="0"/>
+          <a:chOff x="0" y="0"/>
+          <a:chExt cx="0" cy="0"/>
+        </a:xfrm>
+      </p:grpSpPr>
+      <p:sp>
+        <p:nvSpPr>
+          <p:cNvPr id="3" name="Tartalom helye 2">
+            <a:extLst>
+              <a:ext uri="{FF2B5EF4-FFF2-40B4-BE49-F238E27FC236}">
+                <a16:creationId xmlns:a16="http://schemas.microsoft.com/office/drawing/2014/main" id="{32758DB2-9D10-47A2-925C-F8A858558A07}"/>
+              </a:ext>
+            </a:extLst>
+          </p:cNvPr>
+          <p:cNvSpPr>
+            <a:spLocks noGrp="1"/>
+          </p:cNvSpPr>
+          <p:nvPr>
+            <p:ph idx="1"/>
+          </p:nvPr>
+        </p:nvSpPr>
+        <p:spPr>
+          <a:xfrm>
+            <a:off x="1243554" y="1911310"/>
+            <a:ext cx="10058400" cy="4023360"/>
+          </a:xfrm>
+        </p:spPr>
+        <p:txBody>
+          <a:bodyPr/>
+          <a:lstStyle/>
+          <a:p>
+            <a:pPr>
+              <a:buFont typeface="Arial" panose="020B0604020202020204" pitchFamily="34" charset="0"/>
+              <a:buChar char="•"/>
+            </a:pPr>
+            <a:r>
+              <a:rPr lang="hu-HU" dirty="0"/>
+              <a:t> 17 tábla</a:t>
+            </a:r>
+          </a:p>
+          <a:p>
+            <a:pPr>
+              <a:buFont typeface="Arial" panose="020B0604020202020204" pitchFamily="34" charset="0"/>
+              <a:buChar char="•"/>
+            </a:pPr>
+            <a:r>
+              <a:rPr lang="hu-HU" dirty="0"/>
+              <a:t> Mintaadatok</a:t>
+            </a:r>
+          </a:p>
+        </p:txBody>
+      </p:sp>
+      <p:sp>
+        <p:nvSpPr>
+          <p:cNvPr id="4" name="Cím 1">
+            <a:extLst>
+              <a:ext uri="{FF2B5EF4-FFF2-40B4-BE49-F238E27FC236}">
+                <a16:creationId xmlns:a16="http://schemas.microsoft.com/office/drawing/2014/main" id="{1BABF97B-7E63-454C-9CDB-F386138F1BAA}"/>
+              </a:ext>
+            </a:extLst>
+          </p:cNvPr>
+          <p:cNvSpPr>
+            <a:spLocks noGrp="1"/>
+          </p:cNvSpPr>
+          <p:nvPr>
+            <p:ph type="title"/>
+          </p:nvPr>
+        </p:nvSpPr>
+        <p:spPr>
+          <a:xfrm>
+            <a:off x="1097280" y="286603"/>
+            <a:ext cx="10058400" cy="1450757"/>
+          </a:xfrm>
+        </p:spPr>
+        <p:txBody>
+          <a:bodyPr/>
+          <a:lstStyle/>
+          <a:p>
+            <a:r>
+              <a:rPr lang="hu-HU" b="1" dirty="0">
+                <a:latin typeface="Bahnschrift SemiBold" panose="020B0502040204020203" pitchFamily="34" charset="0"/>
+              </a:rPr>
+              <a:t>Adatbázis</a:t>
+            </a:r>
+          </a:p>
+        </p:txBody>
+      </p:sp>
+      <p:grpSp>
+        <p:nvGrpSpPr>
+          <p:cNvPr id="7" name="Csoportba foglalás 6">
+            <a:extLst>
+              <a:ext uri="{FF2B5EF4-FFF2-40B4-BE49-F238E27FC236}">
+                <a16:creationId xmlns:a16="http://schemas.microsoft.com/office/drawing/2014/main" id="{E802B2B8-8A4C-4A1C-A3DA-1085A7D5C7F6}"/>
+              </a:ext>
+            </a:extLst>
+          </p:cNvPr>
+          <p:cNvGrpSpPr/>
+          <p:nvPr/>
+        </p:nvGrpSpPr>
+        <p:grpSpPr>
+          <a:xfrm>
+            <a:off x="10565538" y="349786"/>
+            <a:ext cx="1418895" cy="1258023"/>
+            <a:chOff x="10565538" y="349786"/>
+            <a:chExt cx="1418895" cy="1258023"/>
+          </a:xfrm>
+        </p:grpSpPr>
+        <p:pic>
+          <p:nvPicPr>
+            <p:cNvPr id="8" name="Kép 7">
+              <a:extLst>
+                <a:ext uri="{FF2B5EF4-FFF2-40B4-BE49-F238E27FC236}">
+                  <a16:creationId xmlns:a16="http://schemas.microsoft.com/office/drawing/2014/main" id="{2F280203-E1A7-4586-A915-B522FFD90496}"/>
+                </a:ext>
+              </a:extLst>
+            </p:cNvPr>
+            <p:cNvPicPr>
+              <a:picLocks noChangeAspect="1"/>
+            </p:cNvPicPr>
+            <p:nvPr/>
+          </p:nvPicPr>
+          <p:blipFill rotWithShape="1">
+            <a:blip r:embed="rId3">
+              <a:alphaModFix amt="50000"/>
+              <a:extLst>
+                <a:ext uri="{28A0092B-C50C-407E-A947-70E740481C1C}">
+                  <a14:useLocalDpi xmlns:a14="http://schemas.microsoft.com/office/drawing/2010/main" val="0"/>
+                </a:ext>
+              </a:extLst>
+            </a:blip>
+            <a:srcRect t="58555" r="67375"/>
+            <a:stretch/>
+          </p:blipFill>
+          <p:spPr>
+            <a:xfrm>
+              <a:off x="10619475" y="1036308"/>
+              <a:ext cx="1364958" cy="571501"/>
+            </a:xfrm>
+            <a:prstGeom prst="rect">
+              <a:avLst/>
+            </a:prstGeom>
+          </p:spPr>
+        </p:pic>
+        <p:pic>
+          <p:nvPicPr>
+            <p:cNvPr id="9" name="Kép 8">
+              <a:extLst>
+                <a:ext uri="{FF2B5EF4-FFF2-40B4-BE49-F238E27FC236}">
+                  <a16:creationId xmlns:a16="http://schemas.microsoft.com/office/drawing/2014/main" id="{90937401-8474-4C4C-8353-0BC085D4C997}"/>
+                </a:ext>
+              </a:extLst>
+            </p:cNvPr>
+            <p:cNvPicPr>
+              <a:picLocks noChangeAspect="1"/>
+            </p:cNvPicPr>
+            <p:nvPr/>
+          </p:nvPicPr>
+          <p:blipFill rotWithShape="1">
+            <a:blip r:embed="rId3">
+              <a:alphaModFix amt="50000"/>
+              <a:extLst>
+                <a:ext uri="{28A0092B-C50C-407E-A947-70E740481C1C}">
+                  <a14:useLocalDpi xmlns:a14="http://schemas.microsoft.com/office/drawing/2010/main" val="0"/>
+                </a:ext>
+              </a:extLst>
+            </a:blip>
+            <a:srcRect l="1" r="61666" b="38896"/>
+            <a:stretch/>
+          </p:blipFill>
+          <p:spPr>
+            <a:xfrm>
+              <a:off x="10565538" y="349786"/>
+              <a:ext cx="1418895" cy="745451"/>
+            </a:xfrm>
+            <a:prstGeom prst="rect">
+              <a:avLst/>
+            </a:prstGeom>
+          </p:spPr>
+        </p:pic>
+      </p:grpSp>
+      <p:pic>
+        <p:nvPicPr>
+          <p:cNvPr id="11" name="Kép 10">
+            <a:extLst>
+              <a:ext uri="{FF2B5EF4-FFF2-40B4-BE49-F238E27FC236}">
+                <a16:creationId xmlns:a16="http://schemas.microsoft.com/office/drawing/2014/main" id="{F645605F-0923-431D-B3D3-AE4E34E70E6B}"/>
+              </a:ext>
+            </a:extLst>
+          </p:cNvPr>
+          <p:cNvPicPr>
+            <a:picLocks noChangeAspect="1"/>
+          </p:cNvPicPr>
+          <p:nvPr/>
+        </p:nvPicPr>
+        <p:blipFill rotWithShape="1">
+          <a:blip r:embed="rId4"/>
+          <a:srcRect l="12382" t="5217" r="15002" b="8258"/>
+          <a:stretch/>
+        </p:blipFill>
+        <p:spPr>
+          <a:xfrm>
+            <a:off x="5350598" y="2034567"/>
+            <a:ext cx="5359652" cy="3900103"/>
+          </a:xfrm>
+          <a:prstGeom prst="rect">
+            <a:avLst/>
+          </a:prstGeom>
+          <a:ln/>
+        </p:spPr>
+        <p:style>
+          <a:lnRef idx="2">
+            <a:schemeClr val="accent1"/>
+          </a:lnRef>
+          <a:fillRef idx="1">
+            <a:schemeClr val="lt1"/>
+          </a:fillRef>
+          <a:effectRef idx="0">
+            <a:schemeClr val="accent1"/>
+          </a:effectRef>
+          <a:fontRef idx="minor">
+            <a:schemeClr val="dk1"/>
+          </a:fontRef>
+        </p:style>
+      </p:pic>
+      <p:pic>
+        <p:nvPicPr>
+          <p:cNvPr id="6" name="Kép 5">
+            <a:extLst>
+              <a:ext uri="{FF2B5EF4-FFF2-40B4-BE49-F238E27FC236}">
+                <a16:creationId xmlns:a16="http://schemas.microsoft.com/office/drawing/2014/main" id="{E29DD070-F8A6-4106-980B-6E838D0BF28E}"/>
+              </a:ext>
+            </a:extLst>
+          </p:cNvPr>
+          <p:cNvPicPr>
+            <a:picLocks noChangeAspect="1"/>
+          </p:cNvPicPr>
+          <p:nvPr/>
+        </p:nvPicPr>
+        <p:blipFill>
+          <a:blip r:embed="rId5"/>
+          <a:stretch>
+            <a:fillRect/>
+          </a:stretch>
+        </p:blipFill>
+        <p:spPr>
+          <a:xfrm>
+            <a:off x="1913368" y="2847292"/>
+            <a:ext cx="2541385" cy="2974362"/>
+          </a:xfrm>
+          <a:prstGeom prst="rect">
+            <a:avLst/>
+          </a:prstGeom>
+        </p:spPr>
+      </p:pic>
+    </p:spTree>
+    <p:extLst>
+      <p:ext uri="{BB962C8B-B14F-4D97-AF65-F5344CB8AC3E}">
+        <p14:creationId xmlns:p14="http://schemas.microsoft.com/office/powerpoint/2010/main" val="1438799303"/>
+      </p:ext>
+    </p:extLst>
+  </p:cSld>
+  <p:clrMapOvr>
+    <a:masterClrMapping/>
+  </p:clrMapOvr>
+  <p:transition spd="slow">
+    <p:push dir="u"/>
+  </p:transition>
+</p:sld>
+</file>
+
+<file path=ppt/slides/slide9.xml><?xml version="1.0" encoding="utf-8"?>
+<p:sld xmlns:a="http://schemas.openxmlformats.org/drawingml/2006/main" xmlns:r="http://schemas.openxmlformats.org/officeDocument/2006/relationships" xmlns:p="http://schemas.openxmlformats.org/presentationml/2006/main">
+  <p:cSld>
+    <p:bg>
+      <p:bgPr>
+        <a:solidFill>
+          <a:srgbClr val="FDF7E9"/>
+        </a:solidFill>
+        <a:effectLst/>
+      </p:bgPr>
+    </p:bg>
+    <p:spTree>
+      <p:nvGrpSpPr>
+        <p:cNvPr id="1" name=""/>
+        <p:cNvGrpSpPr/>
+        <p:nvPr/>
+      </p:nvGrpSpPr>
+      <p:grpSpPr>
+        <a:xfrm>
+          <a:off x="0" y="0"/>
+          <a:ext cx="0" cy="0"/>
+          <a:chOff x="0" y="0"/>
+          <a:chExt cx="0" cy="0"/>
+        </a:xfrm>
+      </p:grpSpPr>
+      <p:sp>
+        <p:nvSpPr>
+          <p:cNvPr id="2" name="Cím 1">
+            <a:extLst>
+              <a:ext uri="{FF2B5EF4-FFF2-40B4-BE49-F238E27FC236}">
+                <a16:creationId xmlns:a16="http://schemas.microsoft.com/office/drawing/2014/main" id="{755F2576-93E3-4E11-AD5A-5982C144E204}"/>
+              </a:ext>
+            </a:extLst>
+          </p:cNvPr>
+          <p:cNvSpPr>
+            <a:spLocks noGrp="1"/>
+          </p:cNvSpPr>
+          <p:nvPr>
+            <p:ph type="title"/>
+          </p:nvPr>
+        </p:nvSpPr>
+        <p:spPr>
+          <a:xfrm>
+            <a:off x="457200" y="622934"/>
+            <a:ext cx="3200400" cy="2286000"/>
+          </a:xfrm>
+        </p:spPr>
+        <p:txBody>
+          <a:bodyPr/>
+          <a:lstStyle/>
+          <a:p>
+            <a:r>
+              <a:rPr lang="hu-HU" dirty="0" err="1">
+                <a:latin typeface="Bahnschrift SemiBold" panose="020B0502040204020203" pitchFamily="34" charset="0"/>
+              </a:rPr>
+              <a:t>Reszponzívitás</a:t>
+            </a:r>
+            <a:endParaRPr lang="hu-HU" dirty="0">
+              <a:latin typeface="Bahnschrift SemiBold" panose="020B0502040204020203" pitchFamily="34" charset="0"/>
+            </a:endParaRPr>
+          </a:p>
+        </p:txBody>
+      </p:sp>
+      <p:sp>
+        <p:nvSpPr>
+          <p:cNvPr id="4" name="Szöveg helye 3">
+            <a:extLst>
+              <a:ext uri="{FF2B5EF4-FFF2-40B4-BE49-F238E27FC236}">
+                <a16:creationId xmlns:a16="http://schemas.microsoft.com/office/drawing/2014/main" id="{E1483CC7-2FF0-4B57-872B-832994FD7836}"/>
+              </a:ext>
+            </a:extLst>
+          </p:cNvPr>
+          <p:cNvSpPr>
+            <a:spLocks noGrp="1"/>
+          </p:cNvSpPr>
+          <p:nvPr>
+            <p:ph type="body" sz="half" idx="2"/>
+          </p:nvPr>
+        </p:nvSpPr>
+        <p:spPr>
+          <a:xfrm>
+            <a:off x="704850" y="3259455"/>
+            <a:ext cx="3562350" cy="3684270"/>
+          </a:xfrm>
+        </p:spPr>
+        <p:txBody>
+          <a:bodyPr>
+            <a:normAutofit/>
+          </a:bodyPr>
+          <a:lstStyle/>
+          <a:p>
+            <a:pPr marL="285750" indent="-285750">
+              <a:buClr>
+                <a:schemeClr val="bg1"/>
+              </a:buClr>
+              <a:buFont typeface="Arial" panose="020B0604020202020204" pitchFamily="34" charset="0"/>
+              <a:buChar char="•"/>
+            </a:pPr>
+            <a:r>
+              <a:rPr lang="hu-HU" sz="1800" dirty="0"/>
+              <a:t>Mobil</a:t>
+            </a:r>
+          </a:p>
+          <a:p>
+            <a:pPr marL="285750" indent="-285750">
+              <a:buClr>
+                <a:schemeClr val="bg1"/>
+              </a:buClr>
+              <a:buFont typeface="Arial" panose="020B0604020202020204" pitchFamily="34" charset="0"/>
+              <a:buChar char="•"/>
+            </a:pPr>
+            <a:r>
+              <a:rPr lang="hu-HU" sz="1800" dirty="0"/>
+              <a:t>Tablet</a:t>
+            </a:r>
+          </a:p>
+          <a:p>
+            <a:pPr marL="285750" indent="-285750">
+              <a:buClr>
+                <a:schemeClr val="bg1"/>
+              </a:buClr>
+              <a:buFont typeface="Arial" panose="020B0604020202020204" pitchFamily="34" charset="0"/>
+              <a:buChar char="•"/>
+            </a:pPr>
+            <a:r>
+              <a:rPr lang="hu-HU" sz="1800" dirty="0"/>
+              <a:t>Laptop</a:t>
+            </a:r>
+          </a:p>
+        </p:txBody>
+      </p:sp>
+      <p:grpSp>
+        <p:nvGrpSpPr>
+          <p:cNvPr id="6" name="Csoportba foglalás 5">
+            <a:extLst>
+              <a:ext uri="{FF2B5EF4-FFF2-40B4-BE49-F238E27FC236}">
+                <a16:creationId xmlns:a16="http://schemas.microsoft.com/office/drawing/2014/main" id="{3317F239-9F4A-4F2E-A3AC-DBDE360A6AFF}"/>
+              </a:ext>
+            </a:extLst>
+          </p:cNvPr>
+          <p:cNvGrpSpPr/>
+          <p:nvPr/>
+        </p:nvGrpSpPr>
+        <p:grpSpPr>
+          <a:xfrm>
+            <a:off x="10565538" y="349786"/>
+            <a:ext cx="1418895" cy="1258023"/>
+            <a:chOff x="10565538" y="349786"/>
+            <a:chExt cx="1418895" cy="1258023"/>
+          </a:xfrm>
+        </p:grpSpPr>
+        <p:pic>
+          <p:nvPicPr>
+            <p:cNvPr id="7" name="Kép 6">
+              <a:extLst>
+                <a:ext uri="{FF2B5EF4-FFF2-40B4-BE49-F238E27FC236}">
+                  <a16:creationId xmlns:a16="http://schemas.microsoft.com/office/drawing/2014/main" id="{C2CC19C8-CD10-42F5-9D72-C77B335B0586}"/>
+                </a:ext>
+              </a:extLst>
+            </p:cNvPr>
+            <p:cNvPicPr>
+              <a:picLocks noChangeAspect="1"/>
+            </p:cNvPicPr>
+            <p:nvPr/>
+          </p:nvPicPr>
+          <p:blipFill rotWithShape="1">
+            <a:blip r:embed="rId3">
+              <a:alphaModFix amt="50000"/>
+              <a:extLst>
+                <a:ext uri="{28A0092B-C50C-407E-A947-70E740481C1C}">
+                  <a14:useLocalDpi xmlns:a14="http://schemas.microsoft.com/office/drawing/2010/main" val="0"/>
+                </a:ext>
+              </a:extLst>
+            </a:blip>
+            <a:srcRect t="58555" r="67375"/>
+            <a:stretch/>
+          </p:blipFill>
+          <p:spPr>
+            <a:xfrm>
+              <a:off x="10619475" y="1036308"/>
+              <a:ext cx="1364958" cy="571501"/>
+            </a:xfrm>
+            <a:prstGeom prst="rect">
+              <a:avLst/>
+            </a:prstGeom>
+          </p:spPr>
+        </p:pic>
+        <p:pic>
+          <p:nvPicPr>
+            <p:cNvPr id="8" name="Kép 7">
+              <a:extLst>
+                <a:ext uri="{FF2B5EF4-FFF2-40B4-BE49-F238E27FC236}">
+                  <a16:creationId xmlns:a16="http://schemas.microsoft.com/office/drawing/2014/main" id="{5AF4A5EB-86E0-4324-B31A-9A09255FD8E0}"/>
+                </a:ext>
+              </a:extLst>
+            </p:cNvPr>
+            <p:cNvPicPr>
+              <a:picLocks noChangeAspect="1"/>
+            </p:cNvPicPr>
+            <p:nvPr/>
+          </p:nvPicPr>
+          <p:blipFill rotWithShape="1">
+            <a:blip r:embed="rId3">
+              <a:alphaModFix amt="50000"/>
+              <a:extLst>
+                <a:ext uri="{28A0092B-C50C-407E-A947-70E740481C1C}">
+                  <a14:useLocalDpi xmlns:a14="http://schemas.microsoft.com/office/drawing/2010/main" val="0"/>
+                </a:ext>
+              </a:extLst>
+            </a:blip>
+            <a:srcRect l="1" r="61666" b="38896"/>
+            <a:stretch/>
+          </p:blipFill>
+          <p:spPr>
+            <a:xfrm>
+              <a:off x="10565538" y="349786"/>
+              <a:ext cx="1418895" cy="745451"/>
+            </a:xfrm>
+            <a:prstGeom prst="rect">
+              <a:avLst/>
+            </a:prstGeom>
+          </p:spPr>
+        </p:pic>
+      </p:grpSp>
+      <p:pic>
+        <p:nvPicPr>
+          <p:cNvPr id="20" name="Kép 19">
+            <a:extLst>
+              <a:ext uri="{FF2B5EF4-FFF2-40B4-BE49-F238E27FC236}">
+                <a16:creationId xmlns:a16="http://schemas.microsoft.com/office/drawing/2014/main" id="{E38BECC2-FD69-4C75-AD91-F495870F61E6}"/>
+              </a:ext>
+            </a:extLst>
+          </p:cNvPr>
+          <p:cNvPicPr>
+            <a:picLocks noChangeAspect="1"/>
+          </p:cNvPicPr>
+          <p:nvPr/>
+        </p:nvPicPr>
+        <p:blipFill rotWithShape="1">
+          <a:blip r:embed="rId4">
+            <a:extLst>
+              <a:ext uri="{28A0092B-C50C-407E-A947-70E740481C1C}">
+                <a14:useLocalDpi xmlns:a14="http://schemas.microsoft.com/office/drawing/2010/main" val="0"/>
+              </a:ext>
+            </a:extLst>
+          </a:blip>
+          <a:srcRect l="46403" t="-2222" r="4941" b="12667"/>
+          <a:stretch/>
+        </p:blipFill>
+        <p:spPr>
+          <a:xfrm>
+            <a:off x="4321137" y="349786"/>
+            <a:ext cx="2908888" cy="5741658"/>
+          </a:xfrm>
+          <a:prstGeom prst="rect">
+            <a:avLst/>
+          </a:prstGeom>
+        </p:spPr>
+      </p:pic>
+      <p:pic>
+        <p:nvPicPr>
+          <p:cNvPr id="22" name="Kép 21">
+            <a:extLst>
+              <a:ext uri="{FF2B5EF4-FFF2-40B4-BE49-F238E27FC236}">
+                <a16:creationId xmlns:a16="http://schemas.microsoft.com/office/drawing/2014/main" id="{E80C8FCB-11FC-40D3-98C9-DEB5FC662354}"/>
+              </a:ext>
+            </a:extLst>
+          </p:cNvPr>
+          <p:cNvPicPr>
+            <a:picLocks noChangeAspect="1"/>
+          </p:cNvPicPr>
+          <p:nvPr/>
+        </p:nvPicPr>
+        <p:blipFill rotWithShape="1">
+          <a:blip r:embed="rId5">
+            <a:extLst>
+              <a:ext uri="{28A0092B-C50C-407E-A947-70E740481C1C}">
+                <a14:useLocalDpi xmlns:a14="http://schemas.microsoft.com/office/drawing/2010/main" val="0"/>
+              </a:ext>
+            </a:extLst>
+          </a:blip>
+          <a:srcRect l="47996" t="1852" r="3347" b="14815"/>
+          <a:stretch/>
+        </p:blipFill>
+        <p:spPr>
+          <a:xfrm>
+            <a:off x="7710587" y="1121384"/>
+            <a:ext cx="2908888" cy="5386830"/>
+          </a:xfrm>
+          <a:prstGeom prst="rect">
+            <a:avLst/>
+          </a:prstGeom>
+        </p:spPr>
+      </p:pic>
+    </p:spTree>
+    <p:extLst>
+      <p:ext uri="{BB962C8B-B14F-4D97-AF65-F5344CB8AC3E}">
+        <p14:creationId xmlns:p14="http://schemas.microsoft.com/office/powerpoint/2010/main" val="1470190695"/>
       </p:ext>
     </p:extLst>
   </p:cSld>

--- a/Dokumentációhoz/Prezentáció/eMenza_AtkariAriella_FarkasDominik.pptx
+++ b/Dokumentációhoz/Prezentáció/eMenza_AtkariAriella_FarkasDominik.pptx
@@ -5,7 +5,7 @@
     <p:sldMasterId id="2147483660" r:id="rId1"/>
   </p:sldMasterIdLst>
   <p:notesMasterIdLst>
-    <p:notesMasterId r:id="rId16"/>
+    <p:notesMasterId r:id="rId15"/>
   </p:notesMasterIdLst>
   <p:sldIdLst>
     <p:sldId id="288" r:id="rId2"/>
@@ -20,8 +20,7 @@
     <p:sldId id="272" r:id="rId11"/>
     <p:sldId id="282" r:id="rId12"/>
     <p:sldId id="283" r:id="rId13"/>
-    <p:sldId id="284" r:id="rId14"/>
-    <p:sldId id="290" r:id="rId15"/>
+    <p:sldId id="290" r:id="rId14"/>
   </p:sldIdLst>
   <p:sldSz cx="12192000" cy="6858000"/>
   <p:notesSz cx="6858000" cy="9144000"/>
@@ -210,7 +209,7 @@
           <a:p>
             <a:fld id="{CBDB98DA-128E-4364-BF98-E5A8E296E4F2}" type="datetimeFigureOut">
               <a:rPr lang="hu-HU" smtClean="0"/>
-              <a:t>2026. 04. 14.</a:t>
+              <a:t>2026. 04. 15.</a:t>
             </a:fld>
             <a:endParaRPr lang="hu-HU"/>
           </a:p>
@@ -1318,12 +1317,28 @@
           </a:p>
           <a:p>
             <a:r>
+              <a:rPr lang="hu-HU" dirty="0"/>
+              <a:t>Adatbázis séma felépítése</a:t>
+            </a:r>
+          </a:p>
+          <a:p>
+            <a:r>
               <a:rPr lang="hu-HU" dirty="0" err="1"/>
               <a:t>Laravel</a:t>
             </a:r>
             <a:r>
               <a:rPr lang="hu-HU" dirty="0"/>
-              <a:t> beépített </a:t>
+              <a:t> beépített parancsok használata </a:t>
+            </a:r>
+          </a:p>
+          <a:p>
+            <a:r>
+              <a:rPr lang="hu-HU" dirty="0" err="1"/>
+              <a:t>Artisan</a:t>
+            </a:r>
+            <a:r>
+              <a:rPr lang="hu-HU" dirty="0"/>
+              <a:t> használata</a:t>
             </a:r>
           </a:p>
         </p:txBody>
@@ -1414,6 +1429,9 @@
             </a:r>
           </a:p>
           <a:p>
+            <a:endParaRPr lang="hu-HU" dirty="0"/>
+          </a:p>
+          <a:p>
             <a:r>
               <a:rPr lang="hu-HU" dirty="0" err="1"/>
               <a:t>Vue</a:t>
@@ -1422,6 +1440,31 @@
               <a:rPr lang="hu-HU" dirty="0"/>
               <a:t> v3</a:t>
             </a:r>
+          </a:p>
+          <a:p>
+            <a:r>
+              <a:rPr lang="hu-HU" dirty="0" err="1"/>
+              <a:t>Axios</a:t>
+            </a:r>
+            <a:r>
+              <a:rPr lang="hu-HU" dirty="0"/>
+              <a:t>: kapcsolat a backenddel</a:t>
+            </a:r>
+          </a:p>
+          <a:p>
+            <a:r>
+              <a:rPr lang="hu-HU" dirty="0" err="1"/>
+              <a:t>Bootstrap</a:t>
+            </a:r>
+            <a:r>
+              <a:rPr lang="hu-HU" dirty="0"/>
+              <a:t>: </a:t>
+            </a:r>
+            <a:r>
+              <a:rPr lang="hu-HU" dirty="0" err="1"/>
+              <a:t>reszponzivitás</a:t>
+            </a:r>
+            <a:endParaRPr lang="hu-HU" dirty="0"/>
           </a:p>
         </p:txBody>
       </p:sp>
@@ -1505,6 +1548,12 @@
           <a:bodyPr/>
           <a:lstStyle/>
           <a:p>
+            <a:r>
+              <a:rPr lang="hu-HU" dirty="0"/>
+              <a:t>A</a:t>
+            </a:r>
+          </a:p>
+          <a:p>
             <a:endParaRPr lang="hu-HU" dirty="0"/>
           </a:p>
           <a:p>
@@ -1520,7 +1569,14 @@
             </a:r>
           </a:p>
           <a:p>
-            <a:endParaRPr lang="hu-HU" dirty="0"/>
+            <a:r>
+              <a:rPr lang="hu-HU" dirty="0" err="1"/>
+              <a:t>Seeder</a:t>
+            </a:r>
+            <a:r>
+              <a:rPr lang="hu-HU" dirty="0"/>
+              <a:t> segítségével</a:t>
+            </a:r>
           </a:p>
         </p:txBody>
       </p:sp>
@@ -1962,7 +2018,7 @@
           <a:p>
             <a:fld id="{B9C1AE7B-DA1F-453C-8148-553EEBF678EC}" type="datetimeFigureOut">
               <a:rPr lang="hu-HU" smtClean="0"/>
-              <a:t>2026. 04. 14.</a:t>
+              <a:t>2026. 04. 15.</a:t>
             </a:fld>
             <a:endParaRPr lang="hu-HU"/>
           </a:p>
@@ -2170,7 +2226,7 @@
           <a:p>
             <a:fld id="{B9C1AE7B-DA1F-453C-8148-553EEBF678EC}" type="datetimeFigureOut">
               <a:rPr lang="hu-HU" smtClean="0"/>
-              <a:t>2026. 04. 14.</a:t>
+              <a:t>2026. 04. 15.</a:t>
             </a:fld>
             <a:endParaRPr lang="hu-HU"/>
           </a:p>
@@ -2426,7 +2482,7 @@
           <a:p>
             <a:fld id="{B9C1AE7B-DA1F-453C-8148-553EEBF678EC}" type="datetimeFigureOut">
               <a:rPr lang="hu-HU" smtClean="0"/>
-              <a:t>2026. 04. 14.</a:t>
+              <a:t>2026. 04. 15.</a:t>
             </a:fld>
             <a:endParaRPr lang="hu-HU"/>
           </a:p>
@@ -2600,7 +2656,7 @@
           <a:p>
             <a:fld id="{B9C1AE7B-DA1F-453C-8148-553EEBF678EC}" type="datetimeFigureOut">
               <a:rPr lang="hu-HU" smtClean="0"/>
-              <a:t>2026. 04. 14.</a:t>
+              <a:t>2026. 04. 15.</a:t>
             </a:fld>
             <a:endParaRPr lang="hu-HU"/>
           </a:p>
@@ -2943,7 +2999,7 @@
           <a:p>
             <a:fld id="{B9C1AE7B-DA1F-453C-8148-553EEBF678EC}" type="datetimeFigureOut">
               <a:rPr lang="hu-HU" smtClean="0"/>
-              <a:t>2026. 04. 14.</a:t>
+              <a:t>2026. 04. 15.</a:t>
             </a:fld>
             <a:endParaRPr lang="hu-HU"/>
           </a:p>
@@ -3218,7 +3274,7 @@
           <a:p>
             <a:fld id="{B9C1AE7B-DA1F-453C-8148-553EEBF678EC}" type="datetimeFigureOut">
               <a:rPr lang="hu-HU" smtClean="0"/>
-              <a:t>2026. 04. 14.</a:t>
+              <a:t>2026. 04. 15.</a:t>
             </a:fld>
             <a:endParaRPr lang="hu-HU"/>
           </a:p>
@@ -3597,7 +3653,7 @@
           <a:p>
             <a:fld id="{B9C1AE7B-DA1F-453C-8148-553EEBF678EC}" type="datetimeFigureOut">
               <a:rPr lang="hu-HU" smtClean="0"/>
-              <a:t>2026. 04. 14.</a:t>
+              <a:t>2026. 04. 15.</a:t>
             </a:fld>
             <a:endParaRPr lang="hu-HU"/>
           </a:p>
@@ -3715,7 +3771,7 @@
           <a:p>
             <a:fld id="{B9C1AE7B-DA1F-453C-8148-553EEBF678EC}" type="datetimeFigureOut">
               <a:rPr lang="hu-HU" smtClean="0"/>
-              <a:t>2026. 04. 14.</a:t>
+              <a:t>2026. 04. 15.</a:t>
             </a:fld>
             <a:endParaRPr lang="hu-HU"/>
           </a:p>
@@ -3886,7 +3942,7 @@
           <a:p>
             <a:fld id="{B9C1AE7B-DA1F-453C-8148-553EEBF678EC}" type="datetimeFigureOut">
               <a:rPr lang="hu-HU" smtClean="0"/>
-              <a:t>2026. 04. 14.</a:t>
+              <a:t>2026. 04. 15.</a:t>
             </a:fld>
             <a:endParaRPr lang="hu-HU"/>
           </a:p>
@@ -4240,7 +4296,7 @@
           <a:p>
             <a:fld id="{B9C1AE7B-DA1F-453C-8148-553EEBF678EC}" type="datetimeFigureOut">
               <a:rPr lang="hu-HU" smtClean="0"/>
-              <a:t>2026. 04. 14.</a:t>
+              <a:t>2026. 04. 15.</a:t>
             </a:fld>
             <a:endParaRPr lang="hu-HU"/>
           </a:p>
@@ -4622,7 +4678,7 @@
           <a:p>
             <a:fld id="{B9C1AE7B-DA1F-453C-8148-553EEBF678EC}" type="datetimeFigureOut">
               <a:rPr lang="hu-HU" smtClean="0"/>
-              <a:t>2026. 04. 14.</a:t>
+              <a:t>2026. 04. 15.</a:t>
             </a:fld>
             <a:endParaRPr lang="hu-HU"/>
           </a:p>
@@ -4909,7 +4965,7 @@
           <a:p>
             <a:fld id="{B9C1AE7B-DA1F-453C-8148-553EEBF678EC}" type="datetimeFigureOut">
               <a:rPr lang="hu-HU" smtClean="0"/>
-              <a:t>2026. 04. 14.</a:t>
+              <a:t>2026. 04. 15.</a:t>
             </a:fld>
             <a:endParaRPr lang="hu-HU"/>
           </a:p>
@@ -5913,294 +5969,6 @@
           </a:prstGeom>
         </p:spPr>
       </p:pic>
-      <p:sp>
-        <p:nvSpPr>
-          <p:cNvPr id="11" name="Alcím 2">
-            <a:extLst>
-              <a:ext uri="{FF2B5EF4-FFF2-40B4-BE49-F238E27FC236}">
-                <a16:creationId xmlns:a16="http://schemas.microsoft.com/office/drawing/2014/main" id="{7D26B0E8-7A60-4B80-8AF7-628A519872D6}"/>
-              </a:ext>
-            </a:extLst>
-          </p:cNvPr>
-          <p:cNvSpPr txBox="1">
-            <a:spLocks/>
-          </p:cNvSpPr>
-          <p:nvPr/>
-        </p:nvSpPr>
-        <p:spPr>
-          <a:xfrm>
-            <a:off x="10805230" y="6455312"/>
-            <a:ext cx="1628776" cy="402688"/>
-          </a:xfrm>
-          <a:prstGeom prst="rect">
-            <a:avLst/>
-          </a:prstGeom>
-        </p:spPr>
-        <p:txBody>
-          <a:bodyPr vert="horz" lIns="91440" tIns="45720" rIns="91440" bIns="45720" rtlCol="0">
-            <a:normAutofit/>
-          </a:bodyPr>
-          <a:lstStyle>
-            <a:lvl1pPr marL="0" indent="0" algn="l" defTabSz="914400" rtl="0" eaLnBrk="1" latinLnBrk="0" hangingPunct="1">
-              <a:lnSpc>
-                <a:spcPct val="90000"/>
-              </a:lnSpc>
-              <a:spcBef>
-                <a:spcPts val="1200"/>
-              </a:spcBef>
-              <a:spcAft>
-                <a:spcPts val="200"/>
-              </a:spcAft>
-              <a:buClr>
-                <a:schemeClr val="accent1"/>
-              </a:buClr>
-              <a:buSzPct val="100000"/>
-              <a:buFont typeface="Calibri" panose="020F0502020204030204" pitchFamily="34" charset="0"/>
-              <a:buNone/>
-              <a:defRPr sz="2400" kern="1200" cap="all" spc="200" baseline="0">
-                <a:solidFill>
-                  <a:schemeClr val="tx2"/>
-                </a:solidFill>
-                <a:latin typeface="+mj-lt"/>
-                <a:ea typeface="+mn-ea"/>
-                <a:cs typeface="+mn-cs"/>
-              </a:defRPr>
-            </a:lvl1pPr>
-            <a:lvl2pPr marL="457200" indent="0" algn="ctr" defTabSz="914400" rtl="0" eaLnBrk="1" latinLnBrk="0" hangingPunct="1">
-              <a:lnSpc>
-                <a:spcPct val="90000"/>
-              </a:lnSpc>
-              <a:spcBef>
-                <a:spcPts val="200"/>
-              </a:spcBef>
-              <a:spcAft>
-                <a:spcPts val="400"/>
-              </a:spcAft>
-              <a:buClr>
-                <a:schemeClr val="accent1"/>
-              </a:buClr>
-              <a:buFont typeface="Calibri" pitchFamily="34" charset="0"/>
-              <a:buNone/>
-              <a:defRPr sz="2400" kern="1200">
-                <a:solidFill>
-                  <a:schemeClr val="tx1">
-                    <a:lumMod val="75000"/>
-                    <a:lumOff val="25000"/>
-                  </a:schemeClr>
-                </a:solidFill>
-                <a:latin typeface="+mn-lt"/>
-                <a:ea typeface="+mn-ea"/>
-                <a:cs typeface="+mn-cs"/>
-              </a:defRPr>
-            </a:lvl2pPr>
-            <a:lvl3pPr marL="914400" indent="0" algn="ctr" defTabSz="914400" rtl="0" eaLnBrk="1" latinLnBrk="0" hangingPunct="1">
-              <a:lnSpc>
-                <a:spcPct val="90000"/>
-              </a:lnSpc>
-              <a:spcBef>
-                <a:spcPts val="200"/>
-              </a:spcBef>
-              <a:spcAft>
-                <a:spcPts val="400"/>
-              </a:spcAft>
-              <a:buClr>
-                <a:schemeClr val="accent1"/>
-              </a:buClr>
-              <a:buFont typeface="Calibri" pitchFamily="34" charset="0"/>
-              <a:buNone/>
-              <a:defRPr sz="2400" kern="1200">
-                <a:solidFill>
-                  <a:schemeClr val="tx1">
-                    <a:lumMod val="75000"/>
-                    <a:lumOff val="25000"/>
-                  </a:schemeClr>
-                </a:solidFill>
-                <a:latin typeface="+mn-lt"/>
-                <a:ea typeface="+mn-ea"/>
-                <a:cs typeface="+mn-cs"/>
-              </a:defRPr>
-            </a:lvl3pPr>
-            <a:lvl4pPr marL="1371600" indent="0" algn="ctr" defTabSz="914400" rtl="0" eaLnBrk="1" latinLnBrk="0" hangingPunct="1">
-              <a:lnSpc>
-                <a:spcPct val="90000"/>
-              </a:lnSpc>
-              <a:spcBef>
-                <a:spcPts val="200"/>
-              </a:spcBef>
-              <a:spcAft>
-                <a:spcPts val="400"/>
-              </a:spcAft>
-              <a:buClr>
-                <a:schemeClr val="accent1"/>
-              </a:buClr>
-              <a:buFont typeface="Calibri" pitchFamily="34" charset="0"/>
-              <a:buNone/>
-              <a:defRPr sz="2000" kern="1200">
-                <a:solidFill>
-                  <a:schemeClr val="tx1">
-                    <a:lumMod val="75000"/>
-                    <a:lumOff val="25000"/>
-                  </a:schemeClr>
-                </a:solidFill>
-                <a:latin typeface="+mn-lt"/>
-                <a:ea typeface="+mn-ea"/>
-                <a:cs typeface="+mn-cs"/>
-              </a:defRPr>
-            </a:lvl4pPr>
-            <a:lvl5pPr marL="1828800" indent="0" algn="ctr" defTabSz="914400" rtl="0" eaLnBrk="1" latinLnBrk="0" hangingPunct="1">
-              <a:lnSpc>
-                <a:spcPct val="90000"/>
-              </a:lnSpc>
-              <a:spcBef>
-                <a:spcPts val="200"/>
-              </a:spcBef>
-              <a:spcAft>
-                <a:spcPts val="400"/>
-              </a:spcAft>
-              <a:buClr>
-                <a:schemeClr val="accent1"/>
-              </a:buClr>
-              <a:buFont typeface="Calibri" pitchFamily="34" charset="0"/>
-              <a:buNone/>
-              <a:defRPr sz="2000" kern="1200">
-                <a:solidFill>
-                  <a:schemeClr val="tx1">
-                    <a:lumMod val="75000"/>
-                    <a:lumOff val="25000"/>
-                  </a:schemeClr>
-                </a:solidFill>
-                <a:latin typeface="+mn-lt"/>
-                <a:ea typeface="+mn-ea"/>
-                <a:cs typeface="+mn-cs"/>
-              </a:defRPr>
-            </a:lvl5pPr>
-            <a:lvl6pPr marL="2286000" indent="0" algn="ctr" defTabSz="914400" rtl="0" eaLnBrk="1" latinLnBrk="0" hangingPunct="1">
-              <a:lnSpc>
-                <a:spcPct val="90000"/>
-              </a:lnSpc>
-              <a:spcBef>
-                <a:spcPts val="200"/>
-              </a:spcBef>
-              <a:spcAft>
-                <a:spcPts val="400"/>
-              </a:spcAft>
-              <a:buClr>
-                <a:schemeClr val="accent1"/>
-              </a:buClr>
-              <a:buFont typeface="Calibri" pitchFamily="34" charset="0"/>
-              <a:buNone/>
-              <a:defRPr sz="2000" kern="1200">
-                <a:solidFill>
-                  <a:schemeClr val="tx1">
-                    <a:lumMod val="75000"/>
-                    <a:lumOff val="25000"/>
-                  </a:schemeClr>
-                </a:solidFill>
-                <a:latin typeface="+mn-lt"/>
-                <a:ea typeface="+mn-ea"/>
-                <a:cs typeface="+mn-cs"/>
-              </a:defRPr>
-            </a:lvl6pPr>
-            <a:lvl7pPr marL="2743200" indent="0" algn="ctr" defTabSz="914400" rtl="0" eaLnBrk="1" latinLnBrk="0" hangingPunct="1">
-              <a:lnSpc>
-                <a:spcPct val="90000"/>
-              </a:lnSpc>
-              <a:spcBef>
-                <a:spcPts val="200"/>
-              </a:spcBef>
-              <a:spcAft>
-                <a:spcPts val="400"/>
-              </a:spcAft>
-              <a:buClr>
-                <a:schemeClr val="accent1"/>
-              </a:buClr>
-              <a:buFont typeface="Calibri" pitchFamily="34" charset="0"/>
-              <a:buNone/>
-              <a:defRPr sz="2000" kern="1200">
-                <a:solidFill>
-                  <a:schemeClr val="tx1">
-                    <a:lumMod val="75000"/>
-                    <a:lumOff val="25000"/>
-                  </a:schemeClr>
-                </a:solidFill>
-                <a:latin typeface="+mn-lt"/>
-                <a:ea typeface="+mn-ea"/>
-                <a:cs typeface="+mn-cs"/>
-              </a:defRPr>
-            </a:lvl7pPr>
-            <a:lvl8pPr marL="3200400" indent="0" algn="ctr" defTabSz="914400" rtl="0" eaLnBrk="1" latinLnBrk="0" hangingPunct="1">
-              <a:lnSpc>
-                <a:spcPct val="90000"/>
-              </a:lnSpc>
-              <a:spcBef>
-                <a:spcPts val="200"/>
-              </a:spcBef>
-              <a:spcAft>
-                <a:spcPts val="400"/>
-              </a:spcAft>
-              <a:buClr>
-                <a:schemeClr val="accent1"/>
-              </a:buClr>
-              <a:buFont typeface="Calibri" pitchFamily="34" charset="0"/>
-              <a:buNone/>
-              <a:defRPr sz="2000" kern="1200">
-                <a:solidFill>
-                  <a:schemeClr val="tx1">
-                    <a:lumMod val="75000"/>
-                    <a:lumOff val="25000"/>
-                  </a:schemeClr>
-                </a:solidFill>
-                <a:latin typeface="+mn-lt"/>
-                <a:ea typeface="+mn-ea"/>
-                <a:cs typeface="+mn-cs"/>
-              </a:defRPr>
-            </a:lvl8pPr>
-            <a:lvl9pPr marL="3657600" indent="0" algn="ctr" defTabSz="914400" rtl="0" eaLnBrk="1" latinLnBrk="0" hangingPunct="1">
-              <a:lnSpc>
-                <a:spcPct val="90000"/>
-              </a:lnSpc>
-              <a:spcBef>
-                <a:spcPts val="200"/>
-              </a:spcBef>
-              <a:spcAft>
-                <a:spcPts val="400"/>
-              </a:spcAft>
-              <a:buClr>
-                <a:schemeClr val="accent1"/>
-              </a:buClr>
-              <a:buFont typeface="Calibri" pitchFamily="34" charset="0"/>
-              <a:buNone/>
-              <a:defRPr sz="2000" kern="1200">
-                <a:solidFill>
-                  <a:schemeClr val="tx1">
-                    <a:lumMod val="75000"/>
-                    <a:lumOff val="25000"/>
-                  </a:schemeClr>
-                </a:solidFill>
-                <a:latin typeface="+mn-lt"/>
-                <a:ea typeface="+mn-ea"/>
-                <a:cs typeface="+mn-cs"/>
-              </a:defRPr>
-            </a:lvl9pPr>
-          </a:lstStyle>
-          <a:p>
-            <a:pPr>
-              <a:lnSpc>
-                <a:spcPct val="100000"/>
-              </a:lnSpc>
-            </a:pPr>
-            <a:r>
-              <a:rPr lang="hu-HU" sz="1800" cap="none" spc="0" dirty="0">
-                <a:solidFill>
-                  <a:schemeClr val="bg1"/>
-                </a:solidFill>
-                <a:latin typeface="Bahnschrift Light" panose="020B0502040204020203" pitchFamily="34" charset="0"/>
-              </a:rPr>
-              <a:t>2026. 04. 14</a:t>
-            </a:r>
-          </a:p>
-        </p:txBody>
-      </p:sp>
       <p:grpSp>
         <p:nvGrpSpPr>
           <p:cNvPr id="15" name="Csoportba foglalás 14">
@@ -8101,7 +7869,7 @@
               <a:rPr lang="hu-HU" sz="6000" b="1" dirty="0">
                 <a:latin typeface="Bahnschrift SemiBold" panose="020B0502040204020203" pitchFamily="34" charset="0"/>
               </a:rPr>
-              <a:t>Kérdések</a:t>
+              <a:t>Köszönjük a figyelmet!</a:t>
             </a:r>
           </a:p>
         </p:txBody>
@@ -8323,290 +8091,6 @@
 </file>
 
 <file path=ppt/slides/slide13.xml><?xml version="1.0" encoding="utf-8"?>
-<p:sld xmlns:a="http://schemas.openxmlformats.org/drawingml/2006/main" xmlns:r="http://schemas.openxmlformats.org/officeDocument/2006/relationships" xmlns:p="http://schemas.openxmlformats.org/presentationml/2006/main">
-  <p:cSld>
-    <p:bg>
-      <p:bgPr>
-        <a:solidFill>
-          <a:srgbClr val="FDF7E9"/>
-        </a:solidFill>
-        <a:effectLst/>
-      </p:bgPr>
-    </p:bg>
-    <p:spTree>
-      <p:nvGrpSpPr>
-        <p:cNvPr id="1" name=""/>
-        <p:cNvGrpSpPr/>
-        <p:nvPr/>
-      </p:nvGrpSpPr>
-      <p:grpSpPr>
-        <a:xfrm>
-          <a:off x="0" y="0"/>
-          <a:ext cx="0" cy="0"/>
-          <a:chOff x="0" y="0"/>
-          <a:chExt cx="0" cy="0"/>
-        </a:xfrm>
-      </p:grpSpPr>
-      <p:cxnSp>
-        <p:nvCxnSpPr>
-          <p:cNvPr id="2" name="Egyenes összekötő 1">
-            <a:extLst>
-              <a:ext uri="{FF2B5EF4-FFF2-40B4-BE49-F238E27FC236}">
-                <a16:creationId xmlns:a16="http://schemas.microsoft.com/office/drawing/2014/main" id="{20EF3F3C-374B-461F-BAF4-6C213DE7C8BB}"/>
-              </a:ext>
-            </a:extLst>
-          </p:cNvPr>
-          <p:cNvCxnSpPr>
-            <a:cxnSpLocks/>
-          </p:cNvCxnSpPr>
-          <p:nvPr/>
-        </p:nvCxnSpPr>
-        <p:spPr>
-          <a:xfrm>
-            <a:off x="3205163" y="2154342"/>
-            <a:ext cx="5781675" cy="0"/>
-          </a:xfrm>
-          <a:prstGeom prst="line">
-            <a:avLst/>
-          </a:prstGeom>
-          <a:ln>
-            <a:solidFill>
-              <a:schemeClr val="tx1">
-                <a:lumMod val="50000"/>
-                <a:lumOff val="50000"/>
-              </a:schemeClr>
-            </a:solidFill>
-          </a:ln>
-        </p:spPr>
-        <p:style>
-          <a:lnRef idx="1">
-            <a:schemeClr val="accent1"/>
-          </a:lnRef>
-          <a:fillRef idx="0">
-            <a:schemeClr val="accent1"/>
-          </a:fillRef>
-          <a:effectRef idx="0">
-            <a:schemeClr val="accent1"/>
-          </a:effectRef>
-          <a:fontRef idx="minor">
-            <a:schemeClr val="tx1"/>
-          </a:fontRef>
-        </p:style>
-      </p:cxnSp>
-      <p:pic>
-        <p:nvPicPr>
-          <p:cNvPr id="3" name="Kép 2">
-            <a:extLst>
-              <a:ext uri="{FF2B5EF4-FFF2-40B4-BE49-F238E27FC236}">
-                <a16:creationId xmlns:a16="http://schemas.microsoft.com/office/drawing/2014/main" id="{FE91A941-BC8A-4E2A-B780-F3F3D6A9B3E3}"/>
-              </a:ext>
-            </a:extLst>
-          </p:cNvPr>
-          <p:cNvPicPr>
-            <a:picLocks noChangeAspect="1"/>
-          </p:cNvPicPr>
-          <p:nvPr/>
-        </p:nvPicPr>
-        <p:blipFill rotWithShape="1">
-          <a:blip r:embed="rId2">
-            <a:alphaModFix/>
-            <a:extLst>
-              <a:ext uri="{28A0092B-C50C-407E-A947-70E740481C1C}">
-                <a14:useLocalDpi xmlns:a14="http://schemas.microsoft.com/office/drawing/2010/main" val="0"/>
-              </a:ext>
-            </a:extLst>
-          </a:blip>
-          <a:srcRect l="-1" t="58555" r="1153"/>
-          <a:stretch/>
-        </p:blipFill>
-        <p:spPr>
-          <a:xfrm>
-            <a:off x="3864953" y="1462194"/>
-            <a:ext cx="4462094" cy="616623"/>
-          </a:xfrm>
-          <a:prstGeom prst="rect">
-            <a:avLst/>
-          </a:prstGeom>
-        </p:spPr>
-      </p:pic>
-      <p:pic>
-        <p:nvPicPr>
-          <p:cNvPr id="4" name="Kép 3">
-            <a:extLst>
-              <a:ext uri="{FF2B5EF4-FFF2-40B4-BE49-F238E27FC236}">
-                <a16:creationId xmlns:a16="http://schemas.microsoft.com/office/drawing/2014/main" id="{78D3DB18-E771-4DF0-84FA-206E8FA41883}"/>
-              </a:ext>
-            </a:extLst>
-          </p:cNvPr>
-          <p:cNvPicPr>
-            <a:picLocks noChangeAspect="1"/>
-          </p:cNvPicPr>
-          <p:nvPr/>
-        </p:nvPicPr>
-        <p:blipFill rotWithShape="1">
-          <a:blip r:embed="rId2">
-            <a:alphaModFix/>
-            <a:extLst>
-              <a:ext uri="{28A0092B-C50C-407E-A947-70E740481C1C}">
-                <a14:useLocalDpi xmlns:a14="http://schemas.microsoft.com/office/drawing/2010/main" val="0"/>
-              </a:ext>
-            </a:extLst>
-          </a:blip>
-          <a:srcRect l="-1" r="-295" b="38896"/>
-          <a:stretch/>
-        </p:blipFill>
-        <p:spPr>
-          <a:xfrm>
-            <a:off x="3817995" y="581028"/>
-            <a:ext cx="4556011" cy="914838"/>
-          </a:xfrm>
-          <a:prstGeom prst="rect">
-            <a:avLst/>
-          </a:prstGeom>
-        </p:spPr>
-      </p:pic>
-      <p:sp>
-        <p:nvSpPr>
-          <p:cNvPr id="5" name="Cím 1">
-            <a:extLst>
-              <a:ext uri="{FF2B5EF4-FFF2-40B4-BE49-F238E27FC236}">
-                <a16:creationId xmlns:a16="http://schemas.microsoft.com/office/drawing/2014/main" id="{175A5A3F-6F8F-4002-ADBD-CD8C93ECEEE1}"/>
-              </a:ext>
-            </a:extLst>
-          </p:cNvPr>
-          <p:cNvSpPr txBox="1">
-            <a:spLocks/>
-          </p:cNvSpPr>
-          <p:nvPr/>
-        </p:nvSpPr>
-        <p:spPr>
-          <a:xfrm>
-            <a:off x="1066800" y="2703622"/>
-            <a:ext cx="10058400" cy="1450757"/>
-          </a:xfrm>
-          <a:prstGeom prst="rect">
-            <a:avLst/>
-          </a:prstGeom>
-        </p:spPr>
-        <p:txBody>
-          <a:bodyPr anchor="ctr"/>
-          <a:lstStyle>
-            <a:lvl1pPr algn="l" defTabSz="914400" rtl="0" eaLnBrk="1" latinLnBrk="0" hangingPunct="1">
-              <a:lnSpc>
-                <a:spcPct val="85000"/>
-              </a:lnSpc>
-              <a:spcBef>
-                <a:spcPct val="0"/>
-              </a:spcBef>
-              <a:buNone/>
-              <a:defRPr sz="4800" kern="1200" spc="-50" baseline="0">
-                <a:solidFill>
-                  <a:schemeClr val="tx1">
-                    <a:lumMod val="75000"/>
-                    <a:lumOff val="25000"/>
-                  </a:schemeClr>
-                </a:solidFill>
-                <a:latin typeface="+mj-lt"/>
-                <a:ea typeface="+mj-ea"/>
-                <a:cs typeface="+mj-cs"/>
-              </a:defRPr>
-            </a:lvl1pPr>
-          </a:lstStyle>
-          <a:p>
-            <a:pPr algn="ctr"/>
-            <a:r>
-              <a:rPr lang="hu-HU" sz="6000" b="1" dirty="0">
-                <a:latin typeface="Bahnschrift SemiBold" panose="020B0502040204020203" pitchFamily="34" charset="0"/>
-              </a:rPr>
-              <a:t>Köszönjük a figyelmet!</a:t>
-            </a:r>
-          </a:p>
-        </p:txBody>
-      </p:sp>
-      <p:pic>
-        <p:nvPicPr>
-          <p:cNvPr id="12" name="Kép 11">
-            <a:extLst>
-              <a:ext uri="{FF2B5EF4-FFF2-40B4-BE49-F238E27FC236}">
-                <a16:creationId xmlns:a16="http://schemas.microsoft.com/office/drawing/2014/main" id="{0D5DF80E-C3F6-4A3A-98C9-825EEE99BBF4}"/>
-              </a:ext>
-            </a:extLst>
-          </p:cNvPr>
-          <p:cNvPicPr>
-            <a:picLocks noChangeAspect="1"/>
-          </p:cNvPicPr>
-          <p:nvPr/>
-        </p:nvPicPr>
-        <p:blipFill rotWithShape="1">
-          <a:blip r:embed="rId3">
-            <a:extLst>
-              <a:ext uri="{28A0092B-C50C-407E-A947-70E740481C1C}">
-                <a14:useLocalDpi xmlns:a14="http://schemas.microsoft.com/office/drawing/2010/main" val="0"/>
-              </a:ext>
-            </a:extLst>
-          </a:blip>
-          <a:srcRect l="16625" r="14640"/>
-          <a:stretch/>
-        </p:blipFill>
-        <p:spPr>
-          <a:xfrm rot="6074309">
-            <a:off x="253294" y="393819"/>
-            <a:ext cx="1804052" cy="1476375"/>
-          </a:xfrm>
-          <a:prstGeom prst="rect">
-            <a:avLst/>
-          </a:prstGeom>
-        </p:spPr>
-      </p:pic>
-      <p:pic>
-        <p:nvPicPr>
-          <p:cNvPr id="13" name="Kép 12">
-            <a:extLst>
-              <a:ext uri="{FF2B5EF4-FFF2-40B4-BE49-F238E27FC236}">
-                <a16:creationId xmlns:a16="http://schemas.microsoft.com/office/drawing/2014/main" id="{7AF0C74E-3043-40A3-8603-B30A83BB9DDF}"/>
-              </a:ext>
-            </a:extLst>
-          </p:cNvPr>
-          <p:cNvPicPr>
-            <a:picLocks noChangeAspect="1"/>
-          </p:cNvPicPr>
-          <p:nvPr/>
-        </p:nvPicPr>
-        <p:blipFill rotWithShape="1">
-          <a:blip r:embed="rId4">
-            <a:extLst>
-              <a:ext uri="{28A0092B-C50C-407E-A947-70E740481C1C}">
-                <a14:useLocalDpi xmlns:a14="http://schemas.microsoft.com/office/drawing/2010/main" val="0"/>
-              </a:ext>
-            </a:extLst>
-          </a:blip>
-          <a:srcRect l="31214" t="-711" r="26907" b="711"/>
-          <a:stretch/>
-        </p:blipFill>
-        <p:spPr>
-          <a:xfrm rot="4156304" flipH="1">
-            <a:off x="10842996" y="4624346"/>
-            <a:ext cx="1208569" cy="1623298"/>
-          </a:xfrm>
-          <a:prstGeom prst="rect">
-            <a:avLst/>
-          </a:prstGeom>
-        </p:spPr>
-      </p:pic>
-    </p:spTree>
-    <p:extLst>
-      <p:ext uri="{BB962C8B-B14F-4D97-AF65-F5344CB8AC3E}">
-        <p14:creationId xmlns:p14="http://schemas.microsoft.com/office/powerpoint/2010/main" val="3755244303"/>
-      </p:ext>
-    </p:extLst>
-  </p:cSld>
-  <p:clrMapOvr>
-    <a:masterClrMapping/>
-  </p:clrMapOvr>
-</p:sld>
-</file>
-
-<file path=ppt/slides/slide14.xml><?xml version="1.0" encoding="utf-8"?>
 <p:sld xmlns:a="http://schemas.openxmlformats.org/drawingml/2006/main" xmlns:r="http://schemas.openxmlformats.org/officeDocument/2006/relationships" xmlns:p="http://schemas.openxmlformats.org/presentationml/2006/main">
   <p:cSld>
     <p:bg>

--- a/Dokumentációhoz/Prezentáció/eMenza_AtkariAriella_FarkasDominik.pptx
+++ b/Dokumentációhoz/Prezentáció/eMenza_AtkariAriella_FarkasDominik.pptx
@@ -209,7 +209,7 @@
           <a:p>
             <a:fld id="{CBDB98DA-128E-4364-BF98-E5A8E296E4F2}" type="datetimeFigureOut">
               <a:rPr lang="hu-HU" smtClean="0"/>
-              <a:t>2026. 04. 15.</a:t>
+              <a:t>2026. 04. 26.</a:t>
             </a:fld>
             <a:endParaRPr lang="hu-HU"/>
           </a:p>
@@ -1113,8 +1113,30 @@
           <a:p>
             <a:r>
               <a:rPr lang="hu-HU" dirty="0"/>
-              <a:t>Miért ezek? -  órákon ezeket alkalmaztuk, ismereteink elmélyítése</a:t>
-            </a:r>
+              <a:t>Miért ezek? -  órákon ezeket alkalmaztuk, ismereteink </a:t>
+            </a:r>
+            <a:r>
+              <a:rPr lang="hu-HU" dirty="0" smtClean="0"/>
+              <a:t>elmélyítése</a:t>
+            </a:r>
+          </a:p>
+          <a:p>
+            <a:endParaRPr lang="hu-HU" dirty="0" smtClean="0"/>
+          </a:p>
+          <a:p>
+            <a:r>
+              <a:rPr lang="hu-HU" dirty="0" smtClean="0"/>
+              <a:t>Hardver: </a:t>
+            </a:r>
+            <a:r>
+              <a:rPr lang="hu-HU" dirty="0" err="1" smtClean="0"/>
+              <a:t>rfid</a:t>
+            </a:r>
+            <a:r>
+              <a:rPr lang="hu-HU" dirty="0" smtClean="0"/>
+              <a:t> olvasó és kártyák alkalmazása</a:t>
+            </a:r>
+            <a:endParaRPr lang="hu-HU" dirty="0"/>
           </a:p>
         </p:txBody>
       </p:sp>
@@ -2018,7 +2040,7 @@
           <a:p>
             <a:fld id="{B9C1AE7B-DA1F-453C-8148-553EEBF678EC}" type="datetimeFigureOut">
               <a:rPr lang="hu-HU" smtClean="0"/>
-              <a:t>2026. 04. 15.</a:t>
+              <a:t>2026. 04. 26.</a:t>
             </a:fld>
             <a:endParaRPr lang="hu-HU"/>
           </a:p>
@@ -2226,7 +2248,7 @@
           <a:p>
             <a:fld id="{B9C1AE7B-DA1F-453C-8148-553EEBF678EC}" type="datetimeFigureOut">
               <a:rPr lang="hu-HU" smtClean="0"/>
-              <a:t>2026. 04. 15.</a:t>
+              <a:t>2026. 04. 26.</a:t>
             </a:fld>
             <a:endParaRPr lang="hu-HU"/>
           </a:p>
@@ -2482,7 +2504,7 @@
           <a:p>
             <a:fld id="{B9C1AE7B-DA1F-453C-8148-553EEBF678EC}" type="datetimeFigureOut">
               <a:rPr lang="hu-HU" smtClean="0"/>
-              <a:t>2026. 04. 15.</a:t>
+              <a:t>2026. 04. 26.</a:t>
             </a:fld>
             <a:endParaRPr lang="hu-HU"/>
           </a:p>
@@ -2656,7 +2678,7 @@
           <a:p>
             <a:fld id="{B9C1AE7B-DA1F-453C-8148-553EEBF678EC}" type="datetimeFigureOut">
               <a:rPr lang="hu-HU" smtClean="0"/>
-              <a:t>2026. 04. 15.</a:t>
+              <a:t>2026. 04. 26.</a:t>
             </a:fld>
             <a:endParaRPr lang="hu-HU"/>
           </a:p>
@@ -2999,7 +3021,7 @@
           <a:p>
             <a:fld id="{B9C1AE7B-DA1F-453C-8148-553EEBF678EC}" type="datetimeFigureOut">
               <a:rPr lang="hu-HU" smtClean="0"/>
-              <a:t>2026. 04. 15.</a:t>
+              <a:t>2026. 04. 26.</a:t>
             </a:fld>
             <a:endParaRPr lang="hu-HU"/>
           </a:p>
@@ -3274,7 +3296,7 @@
           <a:p>
             <a:fld id="{B9C1AE7B-DA1F-453C-8148-553EEBF678EC}" type="datetimeFigureOut">
               <a:rPr lang="hu-HU" smtClean="0"/>
-              <a:t>2026. 04. 15.</a:t>
+              <a:t>2026. 04. 26.</a:t>
             </a:fld>
             <a:endParaRPr lang="hu-HU"/>
           </a:p>
@@ -3653,7 +3675,7 @@
           <a:p>
             <a:fld id="{B9C1AE7B-DA1F-453C-8148-553EEBF678EC}" type="datetimeFigureOut">
               <a:rPr lang="hu-HU" smtClean="0"/>
-              <a:t>2026. 04. 15.</a:t>
+              <a:t>2026. 04. 26.</a:t>
             </a:fld>
             <a:endParaRPr lang="hu-HU"/>
           </a:p>
@@ -3771,7 +3793,7 @@
           <a:p>
             <a:fld id="{B9C1AE7B-DA1F-453C-8148-553EEBF678EC}" type="datetimeFigureOut">
               <a:rPr lang="hu-HU" smtClean="0"/>
-              <a:t>2026. 04. 15.</a:t>
+              <a:t>2026. 04. 26.</a:t>
             </a:fld>
             <a:endParaRPr lang="hu-HU"/>
           </a:p>
@@ -3942,7 +3964,7 @@
           <a:p>
             <a:fld id="{B9C1AE7B-DA1F-453C-8148-553EEBF678EC}" type="datetimeFigureOut">
               <a:rPr lang="hu-HU" smtClean="0"/>
-              <a:t>2026. 04. 15.</a:t>
+              <a:t>2026. 04. 26.</a:t>
             </a:fld>
             <a:endParaRPr lang="hu-HU"/>
           </a:p>
@@ -4296,7 +4318,7 @@
           <a:p>
             <a:fld id="{B9C1AE7B-DA1F-453C-8148-553EEBF678EC}" type="datetimeFigureOut">
               <a:rPr lang="hu-HU" smtClean="0"/>
-              <a:t>2026. 04. 15.</a:t>
+              <a:t>2026. 04. 26.</a:t>
             </a:fld>
             <a:endParaRPr lang="hu-HU"/>
           </a:p>
@@ -4678,7 +4700,7 @@
           <a:p>
             <a:fld id="{B9C1AE7B-DA1F-453C-8148-553EEBF678EC}" type="datetimeFigureOut">
               <a:rPr lang="hu-HU" smtClean="0"/>
-              <a:t>2026. 04. 15.</a:t>
+              <a:t>2026. 04. 26.</a:t>
             </a:fld>
             <a:endParaRPr lang="hu-HU"/>
           </a:p>
@@ -4965,7 +4987,7 @@
           <a:p>
             <a:fld id="{B9C1AE7B-DA1F-453C-8148-553EEBF678EC}" type="datetimeFigureOut">
               <a:rPr lang="hu-HU" smtClean="0"/>
-              <a:t>2026. 04. 15.</a:t>
+              <a:t>2026. 04. 26.</a:t>
             </a:fld>
             <a:endParaRPr lang="hu-HU"/>
           </a:p>
@@ -6004,7 +6026,7 @@
             <p:nvPr/>
           </p:nvPicPr>
           <p:blipFill>
-            <a:blip r:embed="rId4">
+            <a:blip r:embed="rId4" cstate="hqprint">
               <a:extLst>
                 <a:ext uri="{28A0092B-C50C-407E-A947-70E740481C1C}">
                   <a14:useLocalDpi xmlns:a14="http://schemas.microsoft.com/office/drawing/2010/main" val="0"/>
@@ -6657,7 +6679,7 @@
             <p:nvPr/>
           </p:nvPicPr>
           <p:blipFill>
-            <a:blip r:embed="rId5">
+            <a:blip r:embed="rId5" cstate="hqprint">
               <a:extLst>
                 <a:ext uri="{28A0092B-C50C-407E-A947-70E740481C1C}">
                   <a14:useLocalDpi xmlns:a14="http://schemas.microsoft.com/office/drawing/2010/main" val="0"/>
@@ -7025,7 +7047,7 @@
         </p:blipFill>
         <p:spPr>
           <a:xfrm>
-            <a:off x="2227708" y="3310150"/>
+            <a:off x="2478366" y="3310150"/>
             <a:ext cx="2645282" cy="2448262"/>
           </a:xfrm>
           <a:prstGeom prst="rect">
@@ -7050,47 +7072,32 @@
       </p:pic>
       <p:pic>
         <p:nvPicPr>
-          <p:cNvPr id="10" name="Kép 9">
-            <a:extLst>
-              <a:ext uri="{FF2B5EF4-FFF2-40B4-BE49-F238E27FC236}">
-                <a16:creationId xmlns:a16="http://schemas.microsoft.com/office/drawing/2014/main" id="{C0EA3B83-8F57-4D5D-B3CB-8E7AE8FF75FF}"/>
-              </a:ext>
-            </a:extLst>
-          </p:cNvPr>
+          <p:cNvPr id="9" name="Kép 8"/>
           <p:cNvPicPr>
             <a:picLocks noChangeAspect="1"/>
           </p:cNvPicPr>
           <p:nvPr/>
         </p:nvPicPr>
-        <p:blipFill rotWithShape="1">
+        <p:blipFill>
           <a:blip r:embed="rId5"/>
-          <a:srcRect l="1468" t="7300" r="26371" b="-353"/>
-          <a:stretch/>
+          <a:stretch>
+            <a:fillRect/>
+          </a:stretch>
         </p:blipFill>
         <p:spPr>
           <a:xfrm>
-            <a:off x="7562850" y="3552296"/>
-            <a:ext cx="2247900" cy="1143529"/>
+            <a:off x="7406177" y="3353978"/>
+            <a:ext cx="2561245" cy="2404434"/>
           </a:xfrm>
           <a:prstGeom prst="rect">
             <a:avLst/>
           </a:prstGeom>
-          <a:ln/>
+          <a:ln w="15875">
+            <a:solidFill>
+              <a:schemeClr val="accent1"/>
+            </a:solidFill>
+          </a:ln>
         </p:spPr>
-        <p:style>
-          <a:lnRef idx="2">
-            <a:schemeClr val="accent1"/>
-          </a:lnRef>
-          <a:fillRef idx="1">
-            <a:schemeClr val="lt1"/>
-          </a:fillRef>
-          <a:effectRef idx="0">
-            <a:schemeClr val="accent1"/>
-          </a:effectRef>
-          <a:fontRef idx="minor">
-            <a:schemeClr val="dk1"/>
-          </a:fontRef>
-        </p:style>
       </p:pic>
     </p:spTree>
     <p:extLst>
@@ -7889,7 +7896,7 @@
           <p:nvPr/>
         </p:nvPicPr>
         <p:blipFill rotWithShape="1">
-          <a:blip r:embed="rId3">
+          <a:blip r:embed="rId3" cstate="hqprint">
             <a:extLst>
               <a:ext uri="{28A0092B-C50C-407E-A947-70E740481C1C}">
                 <a14:useLocalDpi xmlns:a14="http://schemas.microsoft.com/office/drawing/2010/main" val="0"/>
@@ -7924,7 +7931,7 @@
           <p:nvPr/>
         </p:nvPicPr>
         <p:blipFill rotWithShape="1">
-          <a:blip r:embed="rId4">
+          <a:blip r:embed="rId4" cstate="hqprint">
             <a:extLst>
               <a:ext uri="{28A0092B-C50C-407E-A947-70E740481C1C}">
                 <a14:useLocalDpi xmlns:a14="http://schemas.microsoft.com/office/drawing/2010/main" val="0"/>
@@ -7954,13 +7961,13 @@
   <p:clrMapOvr>
     <a:masterClrMapping/>
   </p:clrMapOvr>
-  <mc:AlternateContent xmlns:mc="http://schemas.openxmlformats.org/markup-compatibility/2006" xmlns:p159="http://schemas.microsoft.com/office/powerpoint/2015/09/main">
-    <mc:Choice Requires="p159">
+  <mc:AlternateContent xmlns:mc="http://schemas.openxmlformats.org/markup-compatibility/2006">
+    <mc:Choice xmlns:p159="http://schemas.microsoft.com/office/powerpoint/2015/09/main" xmlns="" Requires="p159">
       <p:transition xmlns:p14="http://schemas.microsoft.com/office/powerpoint/2010/main" spd="slow" p14:dur="2000">
         <p159:morph option="byObject"/>
       </p:transition>
     </mc:Choice>
-    <mc:Fallback xmlns="">
+    <mc:Fallback>
       <p:transition spd="slow">
         <p:fade/>
       </p:transition>
@@ -8647,7 +8654,7 @@
                 <a:hlinkClick r:id="rId3">
                   <a:extLst>
                     <a:ext uri="{A12FA001-AC4F-418D-AE19-62706E023703}">
-                      <ahyp:hlinkClr xmlns:ahyp="http://schemas.microsoft.com/office/drawing/2018/hyperlinkcolor" val="tx"/>
+                      <ahyp:hlinkClr xmlns:ahyp="http://schemas.microsoft.com/office/drawing/2018/hyperlinkcolor" xmlns="" val="tx"/>
                     </a:ext>
                   </a:extLst>
                 </a:hlinkClick>
@@ -8682,7 +8689,7 @@
                 <a:hlinkClick r:id="rId4">
                   <a:extLst>
                     <a:ext uri="{A12FA001-AC4F-418D-AE19-62706E023703}">
-                      <ahyp:hlinkClr xmlns:ahyp="http://schemas.microsoft.com/office/drawing/2018/hyperlinkcolor" val="tx"/>
+                      <ahyp:hlinkClr xmlns:ahyp="http://schemas.microsoft.com/office/drawing/2018/hyperlinkcolor" xmlns="" val="tx"/>
                     </a:ext>
                   </a:extLst>
                 </a:hlinkClick>
@@ -8740,13 +8747,13 @@
   <p:clrMapOvr>
     <a:masterClrMapping/>
   </p:clrMapOvr>
-  <mc:AlternateContent xmlns:mc="http://schemas.openxmlformats.org/markup-compatibility/2006" xmlns:p159="http://schemas.microsoft.com/office/powerpoint/2015/09/main">
-    <mc:Choice Requires="p159">
+  <mc:AlternateContent xmlns:mc="http://schemas.openxmlformats.org/markup-compatibility/2006">
+    <mc:Choice xmlns:p159="http://schemas.microsoft.com/office/powerpoint/2015/09/main" xmlns="" Requires="p159">
       <p:transition xmlns:p14="http://schemas.microsoft.com/office/powerpoint/2010/main" spd="slow" p14:dur="2000">
         <p159:morph option="byObject"/>
       </p:transition>
     </mc:Choice>
-    <mc:Fallback xmlns="">
+    <mc:Fallback>
       <p:transition spd="slow">
         <p:fade/>
       </p:transition>
@@ -9387,13 +9394,13 @@
   <p:clrMapOvr>
     <a:masterClrMapping/>
   </p:clrMapOvr>
-  <mc:AlternateContent xmlns:mc="http://schemas.openxmlformats.org/markup-compatibility/2006" xmlns:p159="http://schemas.microsoft.com/office/powerpoint/2015/09/main">
-    <mc:Choice Requires="p159">
+  <mc:AlternateContent xmlns:mc="http://schemas.openxmlformats.org/markup-compatibility/2006">
+    <mc:Choice xmlns:p159="http://schemas.microsoft.com/office/powerpoint/2015/09/main" xmlns="" Requires="p159">
       <p:transition xmlns:p14="http://schemas.microsoft.com/office/powerpoint/2010/main" spd="slow" p14:dur="2000">
         <p159:morph option="byObject"/>
       </p:transition>
     </mc:Choice>
-    <mc:Fallback xmlns="">
+    <mc:Fallback>
       <p:transition spd="slow">
         <p:fade/>
       </p:transition>
@@ -9808,8 +9815,65 @@
             </a:pPr>
             <a:r>
               <a:rPr lang="hu-HU" sz="2000" dirty="0"/>
-              <a:t>Relációs adatbázis</a:t>
-            </a:r>
+              <a:t>Relációs </a:t>
+            </a:r>
+            <a:r>
+              <a:rPr lang="hu-HU" sz="2000" dirty="0" smtClean="0"/>
+              <a:t>adatbázis</a:t>
+            </a:r>
+          </a:p>
+          <a:p>
+            <a:pPr>
+              <a:lnSpc>
+                <a:spcPct val="150000"/>
+              </a:lnSpc>
+              <a:buFont typeface="Wingdings" panose="05000000000000000000" pitchFamily="2" charset="2"/>
+              <a:buChar char="v"/>
+            </a:pPr>
+            <a:r>
+              <a:rPr lang="hu-HU" sz="2200" dirty="0">
+                <a:solidFill>
+                  <a:srgbClr val="BD582C"/>
+                </a:solidFill>
+              </a:rPr>
+              <a:t> </a:t>
+            </a:r>
+            <a:r>
+              <a:rPr lang="hu-HU" sz="2200" dirty="0" smtClean="0">
+                <a:solidFill>
+                  <a:srgbClr val="BD582C"/>
+                </a:solidFill>
+              </a:rPr>
+              <a:t>Hardver</a:t>
+            </a:r>
+            <a:endParaRPr lang="hu-HU" sz="2200" dirty="0">
+              <a:solidFill>
+                <a:srgbClr val="BD582C"/>
+              </a:solidFill>
+            </a:endParaRPr>
+          </a:p>
+          <a:p>
+            <a:pPr lvl="2">
+              <a:buFont typeface="Arial" panose="020B0604020202020204" pitchFamily="34" charset="0"/>
+              <a:buChar char="•"/>
+            </a:pPr>
+            <a:r>
+              <a:rPr lang="hu-HU" sz="2000" dirty="0" smtClean="0"/>
+              <a:t>RFID</a:t>
+            </a:r>
+            <a:endParaRPr lang="hu-HU" sz="2000" dirty="0"/>
+          </a:p>
+          <a:p>
+            <a:pPr marL="384048" lvl="2" indent="0">
+              <a:buNone/>
+            </a:pPr>
+            <a:endParaRPr lang="hu-HU" sz="2000" dirty="0"/>
+          </a:p>
+          <a:p>
+            <a:pPr marL="384048" lvl="2" indent="0">
+              <a:buNone/>
+            </a:pPr>
+            <a:endParaRPr lang="hu-HU" sz="2000" dirty="0" smtClean="0"/>
           </a:p>
         </p:txBody>
       </p:sp>
@@ -10218,7 +10282,7 @@
           <p:nvPr/>
         </p:nvPicPr>
         <p:blipFill rotWithShape="1">
-          <a:blip r:embed="rId6">
+          <a:blip r:embed="rId6" cstate="hqprint">
             <a:extLst>
               <a:ext uri="{28A0092B-C50C-407E-A947-70E740481C1C}">
                 <a14:useLocalDpi xmlns:a14="http://schemas.microsoft.com/office/drawing/2010/main" val="0"/>
@@ -11603,8 +11667,13 @@
             </a:pPr>
             <a:r>
               <a:rPr lang="hu-HU" dirty="0"/>
-              <a:t> 17 tábla</a:t>
-            </a:r>
+              <a:t> </a:t>
+            </a:r>
+            <a:r>
+              <a:rPr lang="hu-HU" dirty="0" smtClean="0"/>
+              <a:t>16 tábla</a:t>
+            </a:r>
+            <a:endParaRPr lang="hu-HU" dirty="0"/>
           </a:p>
           <a:p>
             <a:pPr>
